--- a/納品レポート/PRIMECHANGE戦略レポート/PRIMECHANGE_清掃戦略レポート.pptx
+++ b/納品レポート/PRIMECHANGE戦略レポート/PRIMECHANGE_清掃戦略レポート.pptx
@@ -24,10 +24,9 @@
     <p:sldId id="272" r:id="rId18"/>
     <p:sldId id="273" r:id="rId19"/>
     <p:sldId id="274" r:id="rId20"/>
-    <p:sldId id="275" r:id="rId21"/>
   </p:sldIdLst>
   <p:notesMasterIdLst>
-    <p:notesMasterId r:id="rId22"/>
+    <p:notesMasterId r:id="rId21"/>
   </p:notesMasterIdLst>
   <p:sldSz cx="9144000" cy="5143500"/>
   <p:notesSz cx="5143500" cy="9144000"/>
@@ -1531,94 +1530,6 @@
 </p:notes>
 </file>
 
-<file path=ppt/notesSlides/notesSlide20.xml><?xml version="1.0" encoding="utf-8"?>
-<p:notes xmlns:a="http://schemas.openxmlformats.org/drawingml/2006/main" xmlns:r="http://schemas.openxmlformats.org/officeDocument/2006/relationships" xmlns:p="http://schemas.openxmlformats.org/presentationml/2006/main">
-  <p:cSld>
-    <p:spTree>
-      <p:nvGrpSpPr>
-        <p:cNvPr id="1" name=""/>
-        <p:cNvGrpSpPr/>
-        <p:nvPr/>
-      </p:nvGrpSpPr>
-      <p:grpSpPr>
-        <a:xfrm>
-          <a:off x="0" y="0"/>
-          <a:ext cx="0" cy="0"/>
-          <a:chOff x="0" y="0"/>
-          <a:chExt cx="0" cy="0"/>
-        </a:xfrm>
-      </p:grpSpPr>
-      <p:sp>
-        <p:nvSpPr>
-          <p:cNvPr id="2" name="Slide Image Placeholder 1"/>
-          <p:cNvSpPr>
-            <a:spLocks noGrp="1" noRot="1" noChangeAspect="1"/>
-          </p:cNvSpPr>
-          <p:nvPr>
-            <p:ph type="sldImg"/>
-          </p:nvPr>
-        </p:nvSpPr>
-        <p:spPr/>
-      </p:sp>
-      <p:sp>
-        <p:nvSpPr>
-          <p:cNvPr id="3" name="Notes Placeholder 2"/>
-          <p:cNvSpPr>
-            <a:spLocks noGrp="1"/>
-          </p:cNvSpPr>
-          <p:nvPr>
-            <p:ph type="body" idx="1"/>
-          </p:nvPr>
-        </p:nvSpPr>
-        <p:spPr/>
-        <p:txBody>
-          <a:bodyPr/>
-          <a:lstStyle/>
-          <a:p>
-            <a:r>
-              <a:rPr lang="en-US" dirty="0"/>
-              <a:t/>
-            </a:r>
-            <a:endParaRPr lang="en-US" dirty="0"/>
-          </a:p>
-        </p:txBody>
-      </p:sp>
-      <p:sp>
-        <p:nvSpPr>
-          <p:cNvPr id="4" name="Slide Number Placeholder 3"/>
-          <p:cNvSpPr>
-            <a:spLocks noGrp="1"/>
-          </p:cNvSpPr>
-          <p:nvPr>
-            <p:ph type="sldNum" sz="quarter" idx="10"/>
-          </p:nvPr>
-        </p:nvSpPr>
-        <p:spPr/>
-        <p:txBody>
-          <a:bodyPr/>
-          <a:lstStyle/>
-          <a:p>
-            <a:fld id="{F7021451-1387-4CA6-816F-3879F97B5CBC}" type="slidenum">
-              <a:rPr lang="en-US"/>
-              <a:t>20</a:t>
-            </a:fld>
-            <a:endParaRPr lang="en-US"/>
-          </a:p>
-        </p:txBody>
-      </p:sp>
-    </p:spTree>
-    <p:extLst>
-      <p:ext uri="{BB962C8B-B14F-4D97-AF65-F5344CB8AC3E}">
-        <p14:creationId xmlns:p14="http://schemas.microsoft.com/office/powerpoint/2010/main" val="1024086991"/>
-      </p:ext>
-    </p:extLst>
-  </p:cSld>
-  <p:clrMapOvr>
-    <a:masterClrMapping/>
-  </p:clrMapOvr>
-</p:notes>
-</file>
-
 <file path=ppt/notesSlides/notesSlide3.xml><?xml version="1.0" encoding="utf-8"?>
 <p:notes xmlns:a="http://schemas.openxmlformats.org/drawingml/2006/main" xmlns:r="http://schemas.openxmlformats.org/officeDocument/2006/relationships" xmlns:p="http://schemas.openxmlformats.org/presentationml/2006/main">
   <p:cSld>
@@ -2788,7 +2699,7 @@
                 <a:ea typeface="Arial" pitchFamily="34" charset="-122"/>
                 <a:cs typeface="Arial" pitchFamily="34" charset="-120"/>
               </a:rPr>
-              <a:t>対象：19ホテル | レビュー：2108件</a:t>
+              <a:t>対象：19ホテル | レビュー：2157件</a:t>
             </a:r>
             <a:endParaRPr lang="en-US" sz="1100" dirty="0"/>
           </a:p>
@@ -4156,1212 +4067,6 @@
                 <a:ea typeface="Arial" pitchFamily="34" charset="-122"/>
                 <a:cs typeface="Arial" pitchFamily="34" charset="-120"/>
               </a:rPr>
-              <a:t>【URGENT】アパホテル蒲田駅東</a:t>
-            </a:r>
-            <a:endParaRPr lang="en-US" sz="2000" dirty="0"/>
-          </a:p>
-        </p:txBody>
-      </p:sp>
-      <p:sp>
-        <p:nvSpPr>
-          <p:cNvPr id="4" name="Text 2"/>
-          <p:cNvSpPr/>
-          <p:nvPr/>
-        </p:nvSpPr>
-        <p:spPr>
-          <a:xfrm>
-            <a:off x="457200" y="320040"/>
-            <a:ext cx="8229600" cy="201168"/>
-          </a:xfrm>
-          <a:prstGeom prst="rect">
-            <a:avLst/>
-          </a:prstGeom>
-          <a:noFill/>
-          <a:ln/>
-        </p:spPr>
-        <p:txBody>
-          <a:bodyPr wrap="square" lIns="0" tIns="0" rIns="0" bIns="0" rtlCol="0" anchor="ctr"/>
-          <a:lstStyle/>
-          <a:p>
-            <a:pPr indent="0" marL="0">
-              <a:buNone/>
-            </a:pPr>
-            <a:r>
-              <a:rPr lang="en-US" sz="1000" dirty="0">
-                <a:solidFill>
-                  <a:srgbClr val="5A9BE6"/>
-                </a:solidFill>
-                <a:latin typeface="Arial" pitchFamily="34" charset="0"/>
-                <a:ea typeface="Arial" pitchFamily="34" charset="-122"/>
-                <a:cs typeface="Arial" pitchFamily="34" charset="-120"/>
-              </a:rPr>
-              <a:t>優先度 #5 | 現状 7.44点 → 目標 8点</a:t>
-            </a:r>
-            <a:endParaRPr lang="en-US" sz="1000" dirty="0"/>
-          </a:p>
-        </p:txBody>
-      </p:sp>
-      <p:sp>
-        <p:nvSpPr>
-          <p:cNvPr id="5" name="Shape 3"/>
-          <p:cNvSpPr/>
-          <p:nvPr/>
-        </p:nvSpPr>
-        <p:spPr>
-          <a:xfrm>
-            <a:off x="274320" y="731520"/>
-            <a:ext cx="1828800" cy="731520"/>
-          </a:xfrm>
-          <a:prstGeom prst="rect">
-            <a:avLst/>
-          </a:prstGeom>
-          <a:solidFill>
-            <a:srgbClr val="FFEBEE"/>
-          </a:solidFill>
-          <a:ln/>
-          <a:effectLst>
-            <a:outerShdw sx="100000" sy="100000" kx="0" ky="0" algn="bl" rotWithShape="0" blurRad="50800" dist="25400" dir="8100000">
-              <a:srgbClr val="000000">
-                <a:alpha val="10000"/>
-              </a:srgbClr>
-            </a:outerShdw>
-          </a:effectLst>
-        </p:spPr>
-      </p:sp>
-      <p:sp>
-        <p:nvSpPr>
-          <p:cNvPr id="6" name="Shape 4"/>
-          <p:cNvSpPr/>
-          <p:nvPr/>
-        </p:nvSpPr>
-        <p:spPr>
-          <a:xfrm>
-            <a:off x="274320" y="731520"/>
-            <a:ext cx="1828800" cy="36576"/>
-          </a:xfrm>
-          <a:prstGeom prst="rect">
-            <a:avLst/>
-          </a:prstGeom>
-          <a:solidFill>
-            <a:srgbClr val="E74C3C"/>
-          </a:solidFill>
-          <a:ln/>
-        </p:spPr>
-      </p:sp>
-      <p:sp>
-        <p:nvSpPr>
-          <p:cNvPr id="7" name="Text 5"/>
-          <p:cNvSpPr/>
-          <p:nvPr/>
-        </p:nvSpPr>
-        <p:spPr>
-          <a:xfrm>
-            <a:off x="274320" y="841248"/>
-            <a:ext cx="1828800" cy="201168"/>
-          </a:xfrm>
-          <a:prstGeom prst="rect">
-            <a:avLst/>
-          </a:prstGeom>
-          <a:noFill/>
-          <a:ln/>
-        </p:spPr>
-        <p:txBody>
-          <a:bodyPr wrap="square" lIns="0" tIns="0" rIns="0" bIns="0" rtlCol="0" anchor="ctr"/>
-          <a:lstStyle/>
-          <a:p>
-            <a:pPr algn="ctr" indent="0" marL="0">
-              <a:buNone/>
-            </a:pPr>
-            <a:r>
-              <a:rPr lang="en-US" sz="900" dirty="0">
-                <a:solidFill>
-                  <a:srgbClr val="666666"/>
-                </a:solidFill>
-                <a:latin typeface="Arial" pitchFamily="34" charset="0"/>
-                <a:ea typeface="Arial" pitchFamily="34" charset="-122"/>
-                <a:cs typeface="Arial" pitchFamily="34" charset="-120"/>
-              </a:rPr>
-              <a:t>現状スコア</a:t>
-            </a:r>
-            <a:endParaRPr lang="en-US" sz="900" dirty="0"/>
-          </a:p>
-        </p:txBody>
-      </p:sp>
-      <p:sp>
-        <p:nvSpPr>
-          <p:cNvPr id="8" name="Text 6"/>
-          <p:cNvSpPr/>
-          <p:nvPr/>
-        </p:nvSpPr>
-        <p:spPr>
-          <a:xfrm>
-            <a:off x="274320" y="1024128"/>
-            <a:ext cx="1828800" cy="411480"/>
-          </a:xfrm>
-          <a:prstGeom prst="rect">
-            <a:avLst/>
-          </a:prstGeom>
-          <a:noFill/>
-          <a:ln/>
-        </p:spPr>
-        <p:txBody>
-          <a:bodyPr wrap="square" lIns="0" tIns="0" rIns="0" bIns="0" rtlCol="0" anchor="ctr"/>
-          <a:lstStyle/>
-          <a:p>
-            <a:pPr algn="ctr" indent="0" marL="0">
-              <a:buNone/>
-            </a:pPr>
-            <a:r>
-              <a:rPr lang="en-US" sz="2800" b="1" dirty="0">
-                <a:solidFill>
-                  <a:srgbClr val="E74C3C"/>
-                </a:solidFill>
-                <a:latin typeface="Arial" pitchFamily="34" charset="0"/>
-                <a:ea typeface="Arial" pitchFamily="34" charset="-122"/>
-                <a:cs typeface="Arial" pitchFamily="34" charset="-120"/>
-              </a:rPr>
-              <a:t>7.44</a:t>
-            </a:r>
-            <a:endParaRPr lang="en-US" sz="2800" dirty="0"/>
-          </a:p>
-        </p:txBody>
-      </p:sp>
-      <p:sp>
-        <p:nvSpPr>
-          <p:cNvPr id="9" name="Shape 7"/>
-          <p:cNvSpPr/>
-          <p:nvPr/>
-        </p:nvSpPr>
-        <p:spPr>
-          <a:xfrm>
-            <a:off x="2286000" y="731520"/>
-            <a:ext cx="1828800" cy="731520"/>
-          </a:xfrm>
-          <a:prstGeom prst="rect">
-            <a:avLst/>
-          </a:prstGeom>
-          <a:solidFill>
-            <a:srgbClr val="E8F5E9"/>
-          </a:solidFill>
-          <a:ln/>
-          <a:effectLst>
-            <a:outerShdw sx="100000" sy="100000" kx="0" ky="0" algn="bl" rotWithShape="0" blurRad="50800" dist="25400" dir="8100000">
-              <a:srgbClr val="000000">
-                <a:alpha val="10000"/>
-              </a:srgbClr>
-            </a:outerShdw>
-          </a:effectLst>
-        </p:spPr>
-      </p:sp>
-      <p:sp>
-        <p:nvSpPr>
-          <p:cNvPr id="10" name="Shape 8"/>
-          <p:cNvSpPr/>
-          <p:nvPr/>
-        </p:nvSpPr>
-        <p:spPr>
-          <a:xfrm>
-            <a:off x="2286000" y="731520"/>
-            <a:ext cx="1828800" cy="36576"/>
-          </a:xfrm>
-          <a:prstGeom prst="rect">
-            <a:avLst/>
-          </a:prstGeom>
-          <a:solidFill>
-            <a:srgbClr val="27AE60"/>
-          </a:solidFill>
-          <a:ln/>
-        </p:spPr>
-      </p:sp>
-      <p:sp>
-        <p:nvSpPr>
-          <p:cNvPr id="11" name="Text 9"/>
-          <p:cNvSpPr/>
-          <p:nvPr/>
-        </p:nvSpPr>
-        <p:spPr>
-          <a:xfrm>
-            <a:off x="2286000" y="841248"/>
-            <a:ext cx="1828800" cy="201168"/>
-          </a:xfrm>
-          <a:prstGeom prst="rect">
-            <a:avLst/>
-          </a:prstGeom>
-          <a:noFill/>
-          <a:ln/>
-        </p:spPr>
-        <p:txBody>
-          <a:bodyPr wrap="square" lIns="0" tIns="0" rIns="0" bIns="0" rtlCol="0" anchor="ctr"/>
-          <a:lstStyle/>
-          <a:p>
-            <a:pPr algn="ctr" indent="0" marL="0">
-              <a:buNone/>
-            </a:pPr>
-            <a:r>
-              <a:rPr lang="en-US" sz="900" dirty="0">
-                <a:solidFill>
-                  <a:srgbClr val="666666"/>
-                </a:solidFill>
-                <a:latin typeface="Arial" pitchFamily="34" charset="0"/>
-                <a:ea typeface="Arial" pitchFamily="34" charset="-122"/>
-                <a:cs typeface="Arial" pitchFamily="34" charset="-120"/>
-              </a:rPr>
-              <a:t>目標スコア</a:t>
-            </a:r>
-            <a:endParaRPr lang="en-US" sz="900" dirty="0"/>
-          </a:p>
-        </p:txBody>
-      </p:sp>
-      <p:sp>
-        <p:nvSpPr>
-          <p:cNvPr id="12" name="Text 10"/>
-          <p:cNvSpPr/>
-          <p:nvPr/>
-        </p:nvSpPr>
-        <p:spPr>
-          <a:xfrm>
-            <a:off x="2286000" y="1024128"/>
-            <a:ext cx="1828800" cy="411480"/>
-          </a:xfrm>
-          <a:prstGeom prst="rect">
-            <a:avLst/>
-          </a:prstGeom>
-          <a:noFill/>
-          <a:ln/>
-        </p:spPr>
-        <p:txBody>
-          <a:bodyPr wrap="square" lIns="0" tIns="0" rIns="0" bIns="0" rtlCol="0" anchor="ctr"/>
-          <a:lstStyle/>
-          <a:p>
-            <a:pPr algn="ctr" indent="0" marL="0">
-              <a:buNone/>
-            </a:pPr>
-            <a:r>
-              <a:rPr lang="en-US" sz="2800" b="1" dirty="0">
-                <a:solidFill>
-                  <a:srgbClr val="27AE60"/>
-                </a:solidFill>
-                <a:latin typeface="Arial" pitchFamily="34" charset="0"/>
-                <a:ea typeface="Arial" pitchFamily="34" charset="-122"/>
-                <a:cs typeface="Arial" pitchFamily="34" charset="-120"/>
-              </a:rPr>
-              <a:t>8</a:t>
-            </a:r>
-            <a:endParaRPr lang="en-US" sz="2800" dirty="0"/>
-          </a:p>
-        </p:txBody>
-      </p:sp>
-      <p:sp>
-        <p:nvSpPr>
-          <p:cNvPr id="13" name="Shape 11"/>
-          <p:cNvSpPr/>
-          <p:nvPr/>
-        </p:nvSpPr>
-        <p:spPr>
-          <a:xfrm>
-            <a:off x="4389120" y="731520"/>
-            <a:ext cx="4389120" cy="731520"/>
-          </a:xfrm>
-          <a:prstGeom prst="rect">
-            <a:avLst/>
-          </a:prstGeom>
-          <a:solidFill>
-            <a:srgbClr val="F5F7FA"/>
-          </a:solidFill>
-          <a:ln/>
-          <a:effectLst>
-            <a:outerShdw sx="100000" sy="100000" kx="0" ky="0" algn="bl" rotWithShape="0" blurRad="50800" dist="25400" dir="8100000">
-              <a:srgbClr val="000000">
-                <a:alpha val="10000"/>
-              </a:srgbClr>
-            </a:outerShdw>
-          </a:effectLst>
-        </p:spPr>
-      </p:sp>
-      <p:sp>
-        <p:nvSpPr>
-          <p:cNvPr id="14" name="Text 12"/>
-          <p:cNvSpPr/>
-          <p:nvPr/>
-        </p:nvSpPr>
-        <p:spPr>
-          <a:xfrm>
-            <a:off x="4480560" y="749808"/>
-            <a:ext cx="1828800" cy="182880"/>
-          </a:xfrm>
-          <a:prstGeom prst="rect">
-            <a:avLst/>
-          </a:prstGeom>
-          <a:noFill/>
-          <a:ln/>
-        </p:spPr>
-        <p:txBody>
-          <a:bodyPr wrap="square" lIns="0" tIns="0" rIns="0" bIns="0" rtlCol="0" anchor="ctr"/>
-          <a:lstStyle/>
-          <a:p>
-            <a:pPr indent="0" marL="0">
-              <a:buNone/>
-            </a:pPr>
-            <a:r>
-              <a:rPr lang="en-US" sz="900" b="1" dirty="0">
-                <a:solidFill>
-                  <a:srgbClr val="666666"/>
-                </a:solidFill>
-                <a:latin typeface="Arial" pitchFamily="34" charset="0"/>
-                <a:ea typeface="Arial" pitchFamily="34" charset="-122"/>
-                <a:cs typeface="Arial" pitchFamily="34" charset="-120"/>
-              </a:rPr>
-              <a:t>主要課題</a:t>
-            </a:r>
-            <a:endParaRPr lang="en-US" sz="900" dirty="0"/>
-          </a:p>
-        </p:txBody>
-      </p:sp>
-      <p:sp>
-        <p:nvSpPr>
-          <p:cNvPr id="15" name="Text 13"/>
-          <p:cNvSpPr/>
-          <p:nvPr/>
-        </p:nvSpPr>
-        <p:spPr>
-          <a:xfrm>
-            <a:off x="4480560" y="914400"/>
-            <a:ext cx="4206240" cy="502920"/>
-          </a:xfrm>
-          <a:prstGeom prst="rect">
-            <a:avLst/>
-          </a:prstGeom>
-          <a:noFill/>
-          <a:ln/>
-        </p:spPr>
-        <p:txBody>
-          <a:bodyPr wrap="square" lIns="0" tIns="0" rIns="0" bIns="0" rtlCol="0" anchor="ctr"/>
-          <a:lstStyle/>
-          <a:p>
-            <a:pPr indent="0" marL="0">
-              <a:buNone/>
-            </a:pPr>
-            <a:r>
-              <a:rPr lang="en-US" sz="800" dirty="0">
-                <a:solidFill>
-                  <a:srgbClr val="333333"/>
-                </a:solidFill>
-                <a:latin typeface="Arial" pitchFamily="34" charset="0"/>
-                <a:ea typeface="Arial" pitchFamily="34" charset="-122"/>
-                <a:cs typeface="Arial" pitchFamily="34" charset="-120"/>
-              </a:rPr>
-              <a:t>清掃品質全般: 2件</a:t>
-            </a:r>
-            <a:endParaRPr lang="en-US" sz="800" dirty="0"/>
-          </a:p>
-          <a:p>
-            <a:pPr indent="0" marL="0">
-              <a:buNone/>
-            </a:pPr>
-            <a:r>
-              <a:rPr lang="en-US" sz="800" dirty="0">
-                <a:solidFill>
-                  <a:srgbClr val="333333"/>
-                </a:solidFill>
-                <a:latin typeface="Arial" pitchFamily="34" charset="0"/>
-                <a:ea typeface="Arial" pitchFamily="34" charset="-122"/>
-                <a:cs typeface="Arial" pitchFamily="34" charset="-120"/>
-              </a:rPr>
-              <a:t>臭気・異臭: 1件</a:t>
-            </a:r>
-            <a:endParaRPr lang="en-US" sz="800" dirty="0"/>
-          </a:p>
-          <a:p>
-            <a:pPr indent="0" marL="0">
-              <a:buNone/>
-            </a:pPr>
-            <a:r>
-              <a:rPr lang="en-US" sz="800" dirty="0">
-                <a:solidFill>
-                  <a:srgbClr val="333333"/>
-                </a:solidFill>
-                <a:latin typeface="Arial" pitchFamily="34" charset="0"/>
-                <a:ea typeface="Arial" pitchFamily="34" charset="-122"/>
-                <a:cs typeface="Arial" pitchFamily="34" charset="-120"/>
-              </a:rPr>
-              <a:t>タバコ関連: 1件</a:t>
-            </a:r>
-            <a:endParaRPr lang="en-US" sz="800" dirty="0"/>
-          </a:p>
-          <a:p>
-            <a:pPr indent="0" marL="0">
-              <a:buNone/>
-            </a:pPr>
-            <a:r>
-              <a:rPr lang="en-US" sz="800" dirty="0">
-                <a:solidFill>
-                  <a:srgbClr val="333333"/>
-                </a:solidFill>
-                <a:latin typeface="Arial" pitchFamily="34" charset="0"/>
-                <a:ea typeface="Arial" pitchFamily="34" charset="-122"/>
-                <a:cs typeface="Arial" pitchFamily="34" charset="-120"/>
-              </a:rPr>
-              <a:t>排水・詰まり: 1件</a:t>
-            </a:r>
-            <a:endParaRPr lang="en-US" sz="800" dirty="0"/>
-          </a:p>
-        </p:txBody>
-      </p:sp>
-      <p:sp>
-        <p:nvSpPr>
-          <p:cNvPr id="16" name="Shape 14"/>
-          <p:cNvSpPr/>
-          <p:nvPr/>
-        </p:nvSpPr>
-        <p:spPr>
-          <a:xfrm>
-            <a:off x="274320" y="1691640"/>
-            <a:ext cx="2743200" cy="2697480"/>
-          </a:xfrm>
-          <a:prstGeom prst="rect">
-            <a:avLst/>
-          </a:prstGeom>
-          <a:solidFill>
-            <a:srgbClr val="FFEBEE"/>
-          </a:solidFill>
-          <a:ln/>
-          <a:effectLst>
-            <a:outerShdw sx="100000" sy="100000" kx="0" ky="0" algn="bl" rotWithShape="0" blurRad="50800" dist="25400" dir="8100000">
-              <a:srgbClr val="000000">
-                <a:alpha val="10000"/>
-              </a:srgbClr>
-            </a:outerShdw>
-          </a:effectLst>
-        </p:spPr>
-      </p:sp>
-      <p:sp>
-        <p:nvSpPr>
-          <p:cNvPr id="17" name="Shape 15"/>
-          <p:cNvSpPr/>
-          <p:nvPr/>
-        </p:nvSpPr>
-        <p:spPr>
-          <a:xfrm>
-            <a:off x="274320" y="1691640"/>
-            <a:ext cx="2743200" cy="36576"/>
-          </a:xfrm>
-          <a:prstGeom prst="rect">
-            <a:avLst/>
-          </a:prstGeom>
-          <a:solidFill>
-            <a:srgbClr val="E74C3C"/>
-          </a:solidFill>
-          <a:ln/>
-        </p:spPr>
-      </p:sp>
-      <p:sp>
-        <p:nvSpPr>
-          <p:cNvPr id="18" name="Text 16"/>
-          <p:cNvSpPr/>
-          <p:nvPr/>
-        </p:nvSpPr>
-        <p:spPr>
-          <a:xfrm>
-            <a:off x="365760" y="1764792"/>
-            <a:ext cx="2560320" cy="228600"/>
-          </a:xfrm>
-          <a:prstGeom prst="rect">
-            <a:avLst/>
-          </a:prstGeom>
-          <a:noFill/>
-          <a:ln/>
-        </p:spPr>
-        <p:txBody>
-          <a:bodyPr wrap="square" lIns="0" tIns="0" rIns="0" bIns="0" rtlCol="0" anchor="ctr"/>
-          <a:lstStyle/>
-          <a:p>
-            <a:pPr indent="0" marL="0">
-              <a:buNone/>
-            </a:pPr>
-            <a:r>
-              <a:rPr lang="en-US" sz="900" b="1" dirty="0">
-                <a:solidFill>
-                  <a:srgbClr val="E74C3C"/>
-                </a:solidFill>
-                <a:latin typeface="Arial" pitchFamily="34" charset="0"/>
-                <a:ea typeface="Arial" pitchFamily="34" charset="-122"/>
-                <a:cs typeface="Arial" pitchFamily="34" charset="-120"/>
-              </a:rPr>
-              <a:t>Phase 1: 即時対応（1-2週間）</a:t>
-            </a:r>
-            <a:endParaRPr lang="en-US" sz="900" dirty="0"/>
-          </a:p>
-        </p:txBody>
-      </p:sp>
-      <p:sp>
-        <p:nvSpPr>
-          <p:cNvPr id="19" name="Text 17"/>
-          <p:cNvSpPr/>
-          <p:nvPr/>
-        </p:nvSpPr>
-        <p:spPr>
-          <a:xfrm>
-            <a:off x="365760" y="2039112"/>
-            <a:ext cx="2560320" cy="2286000"/>
-          </a:xfrm>
-          <a:prstGeom prst="rect">
-            <a:avLst/>
-          </a:prstGeom>
-          <a:noFill/>
-          <a:ln/>
-        </p:spPr>
-        <p:txBody>
-          <a:bodyPr wrap="square" lIns="0" tIns="0" rIns="0" bIns="0" rtlCol="0" anchor="t"/>
-          <a:lstStyle/>
-          <a:p>
-            <a:pPr indent="0" marL="0">
-              <a:buNone/>
-            </a:pPr>
-            <a:r>
-              <a:rPr lang="en-US" sz="700" dirty="0">
-                <a:solidFill>
-                  <a:srgbClr val="333333"/>
-                </a:solidFill>
-                <a:latin typeface="Arial" pitchFamily="34" charset="0"/>
-                <a:ea typeface="Arial" pitchFamily="34" charset="-122"/>
-                <a:cs typeface="Arial" pitchFamily="34" charset="-120"/>
-              </a:rPr>
-              <a:t>- 清掃品質基準の明確化と全スタッフへの共有</a:t>
-            </a:r>
-            <a:endParaRPr lang="en-US" sz="700" dirty="0"/>
-          </a:p>
-          <a:p>
-            <a:pPr indent="0" marL="0">
-              <a:buNone/>
-            </a:pPr>
-            <a:r>
-              <a:rPr lang="en-US" sz="700" dirty="0">
-                <a:solidFill>
-                  <a:srgbClr val="333333"/>
-                </a:solidFill>
-                <a:latin typeface="Arial" pitchFamily="34" charset="0"/>
-                <a:ea typeface="Arial" pitchFamily="34" charset="-122"/>
-                <a:cs typeface="Arial" pitchFamily="34" charset="-120"/>
-              </a:rPr>
-              <a:t>- 重点箇所（水回り・ベッド周り）の清掃手順見直し</a:t>
-            </a:r>
-            <a:endParaRPr lang="en-US" sz="700" dirty="0"/>
-          </a:p>
-          <a:p>
-            <a:pPr indent="0" marL="0">
-              <a:buNone/>
-            </a:pPr>
-            <a:r>
-              <a:rPr lang="en-US" sz="700" dirty="0">
-                <a:solidFill>
-                  <a:srgbClr val="333333"/>
-                </a:solidFill>
-                <a:latin typeface="Arial" pitchFamily="34" charset="0"/>
-                <a:ea typeface="Arial" pitchFamily="34" charset="-122"/>
-                <a:cs typeface="Arial" pitchFamily="34" charset="-120"/>
-              </a:rPr>
-              <a:t>- 臭気発生源の特定と即時対処（排水トラップ、換気扇）</a:t>
-            </a:r>
-            <a:endParaRPr lang="en-US" sz="700" dirty="0"/>
-          </a:p>
-          <a:p>
-            <a:pPr indent="0" marL="0">
-              <a:buNone/>
-            </a:pPr>
-            <a:r>
-              <a:rPr lang="en-US" sz="700" dirty="0">
-                <a:solidFill>
-                  <a:srgbClr val="333333"/>
-                </a:solidFill>
-                <a:latin typeface="Arial" pitchFamily="34" charset="0"/>
-                <a:ea typeface="Arial" pitchFamily="34" charset="-122"/>
-                <a:cs typeface="Arial" pitchFamily="34" charset="-120"/>
-              </a:rPr>
-              <a:t>- 消臭・脱臭処理の実施</a:t>
-            </a:r>
-            <a:endParaRPr lang="en-US" sz="700" dirty="0"/>
-          </a:p>
-          <a:p>
-            <a:pPr indent="0" marL="0">
-              <a:buNone/>
-            </a:pPr>
-            <a:r>
-              <a:rPr lang="en-US" sz="700" dirty="0">
-                <a:solidFill>
-                  <a:srgbClr val="333333"/>
-                </a:solidFill>
-                <a:latin typeface="Arial" pitchFamily="34" charset="0"/>
-                <a:ea typeface="Arial" pitchFamily="34" charset="-122"/>
-                <a:cs typeface="Arial" pitchFamily="34" charset="-120"/>
-              </a:rPr>
-              <a:t>- 禁煙室の残留臭調査と脱臭処理</a:t>
-            </a:r>
-            <a:endParaRPr lang="en-US" sz="700" dirty="0"/>
-          </a:p>
-        </p:txBody>
-      </p:sp>
-      <p:sp>
-        <p:nvSpPr>
-          <p:cNvPr id="20" name="Shape 18"/>
-          <p:cNvSpPr/>
-          <p:nvPr/>
-        </p:nvSpPr>
-        <p:spPr>
-          <a:xfrm>
-            <a:off x="3154680" y="1691640"/>
-            <a:ext cx="2743200" cy="2697480"/>
-          </a:xfrm>
-          <a:prstGeom prst="rect">
-            <a:avLst/>
-          </a:prstGeom>
-          <a:solidFill>
-            <a:srgbClr val="FFF3E0"/>
-          </a:solidFill>
-          <a:ln/>
-          <a:effectLst>
-            <a:outerShdw sx="100000" sy="100000" kx="0" ky="0" algn="bl" rotWithShape="0" blurRad="50800" dist="25400" dir="8100000">
-              <a:srgbClr val="000000">
-                <a:alpha val="10000"/>
-              </a:srgbClr>
-            </a:outerShdw>
-          </a:effectLst>
-        </p:spPr>
-      </p:sp>
-      <p:sp>
-        <p:nvSpPr>
-          <p:cNvPr id="21" name="Shape 19"/>
-          <p:cNvSpPr/>
-          <p:nvPr/>
-        </p:nvSpPr>
-        <p:spPr>
-          <a:xfrm>
-            <a:off x="3154680" y="1691640"/>
-            <a:ext cx="2743200" cy="36576"/>
-          </a:xfrm>
-          <a:prstGeom prst="rect">
-            <a:avLst/>
-          </a:prstGeom>
-          <a:solidFill>
-            <a:srgbClr val="FF9800"/>
-          </a:solidFill>
-          <a:ln/>
-        </p:spPr>
-      </p:sp>
-      <p:sp>
-        <p:nvSpPr>
-          <p:cNvPr id="22" name="Text 20"/>
-          <p:cNvSpPr/>
-          <p:nvPr/>
-        </p:nvSpPr>
-        <p:spPr>
-          <a:xfrm>
-            <a:off x="3246120" y="1764792"/>
-            <a:ext cx="2560320" cy="228600"/>
-          </a:xfrm>
-          <a:prstGeom prst="rect">
-            <a:avLst/>
-          </a:prstGeom>
-          <a:noFill/>
-          <a:ln/>
-        </p:spPr>
-        <p:txBody>
-          <a:bodyPr wrap="square" lIns="0" tIns="0" rIns="0" bIns="0" rtlCol="0" anchor="ctr"/>
-          <a:lstStyle/>
-          <a:p>
-            <a:pPr indent="0" marL="0">
-              <a:buNone/>
-            </a:pPr>
-            <a:r>
-              <a:rPr lang="en-US" sz="900" b="1" dirty="0">
-                <a:solidFill>
-                  <a:srgbClr val="FF9800"/>
-                </a:solidFill>
-                <a:latin typeface="Arial" pitchFamily="34" charset="0"/>
-                <a:ea typeface="Arial" pitchFamily="34" charset="-122"/>
-                <a:cs typeface="Arial" pitchFamily="34" charset="-120"/>
-              </a:rPr>
-              <a:t>Phase 2: 短期施策（1-3ヶ月）</a:t>
-            </a:r>
-            <a:endParaRPr lang="en-US" sz="900" dirty="0"/>
-          </a:p>
-        </p:txBody>
-      </p:sp>
-      <p:sp>
-        <p:nvSpPr>
-          <p:cNvPr id="23" name="Text 21"/>
-          <p:cNvSpPr/>
-          <p:nvPr/>
-        </p:nvSpPr>
-        <p:spPr>
-          <a:xfrm>
-            <a:off x="3246120" y="2039112"/>
-            <a:ext cx="2560320" cy="2286000"/>
-          </a:xfrm>
-          <a:prstGeom prst="rect">
-            <a:avLst/>
-          </a:prstGeom>
-          <a:noFill/>
-          <a:ln/>
-        </p:spPr>
-        <p:txBody>
-          <a:bodyPr wrap="square" lIns="0" tIns="0" rIns="0" bIns="0" rtlCol="0" anchor="t"/>
-          <a:lstStyle/>
-          <a:p>
-            <a:pPr indent="0" marL="0">
-              <a:buNone/>
-            </a:pPr>
-            <a:r>
-              <a:rPr lang="en-US" sz="700" dirty="0">
-                <a:solidFill>
-                  <a:srgbClr val="333333"/>
-                </a:solidFill>
-                <a:latin typeface="Arial" pitchFamily="34" charset="0"/>
-                <a:ea typeface="Arial" pitchFamily="34" charset="-122"/>
-                <a:cs typeface="Arial" pitchFamily="34" charset="-120"/>
-              </a:rPr>
-              <a:t>- 品質管理チェックリストの導入と実施</a:t>
-            </a:r>
-            <a:endParaRPr lang="en-US" sz="700" dirty="0"/>
-          </a:p>
-          <a:p>
-            <a:pPr indent="0" marL="0">
-              <a:buNone/>
-            </a:pPr>
-            <a:r>
-              <a:rPr lang="en-US" sz="700" dirty="0">
-                <a:solidFill>
-                  <a:srgbClr val="333333"/>
-                </a:solidFill>
-                <a:latin typeface="Arial" pitchFamily="34" charset="0"/>
-                <a:ea typeface="Arial" pitchFamily="34" charset="-122"/>
-                <a:cs typeface="Arial" pitchFamily="34" charset="-120"/>
-              </a:rPr>
-              <a:t>- QCインスペクション体制の構築（ランダム抜き打ち検査）</a:t>
-            </a:r>
-            <a:endParaRPr lang="en-US" sz="700" dirty="0"/>
-          </a:p>
-          <a:p>
-            <a:pPr indent="0" marL="0">
-              <a:buNone/>
-            </a:pPr>
-            <a:r>
-              <a:rPr lang="en-US" sz="700" dirty="0">
-                <a:solidFill>
-                  <a:srgbClr val="333333"/>
-                </a:solidFill>
-                <a:latin typeface="Arial" pitchFamily="34" charset="0"/>
-                <a:ea typeface="Arial" pitchFamily="34" charset="-122"/>
-                <a:cs typeface="Arial" pitchFamily="34" charset="-120"/>
-              </a:rPr>
-              <a:t>- 定期的な換気・消臭ルーティンの標準化</a:t>
-            </a:r>
-            <a:endParaRPr lang="en-US" sz="700" dirty="0"/>
-          </a:p>
-          <a:p>
-            <a:pPr indent="0" marL="0">
-              <a:buNone/>
-            </a:pPr>
-            <a:r>
-              <a:rPr lang="en-US" sz="700" dirty="0">
-                <a:solidFill>
-                  <a:srgbClr val="333333"/>
-                </a:solidFill>
-                <a:latin typeface="Arial" pitchFamily="34" charset="0"/>
-                <a:ea typeface="Arial" pitchFamily="34" charset="-122"/>
-                <a:cs typeface="Arial" pitchFamily="34" charset="-120"/>
-              </a:rPr>
-              <a:t>- エアコン・排水系の臭気源の根本対策</a:t>
-            </a:r>
-            <a:endParaRPr lang="en-US" sz="700" dirty="0"/>
-          </a:p>
-          <a:p>
-            <a:pPr indent="0" marL="0">
-              <a:buNone/>
-            </a:pPr>
-            <a:r>
-              <a:rPr lang="en-US" sz="700" dirty="0">
-                <a:solidFill>
-                  <a:srgbClr val="333333"/>
-                </a:solidFill>
-                <a:latin typeface="Arial" pitchFamily="34" charset="0"/>
-                <a:ea typeface="Arial" pitchFamily="34" charset="-122"/>
-                <a:cs typeface="Arial" pitchFamily="34" charset="-120"/>
-              </a:rPr>
-              <a:t>- 廊下・共用部の定期脱臭処理スケジュール導入</a:t>
-            </a:r>
-            <a:endParaRPr lang="en-US" sz="700" dirty="0"/>
-          </a:p>
-        </p:txBody>
-      </p:sp>
-      <p:sp>
-        <p:nvSpPr>
-          <p:cNvPr id="24" name="Shape 22"/>
-          <p:cNvSpPr/>
-          <p:nvPr/>
-        </p:nvSpPr>
-        <p:spPr>
-          <a:xfrm>
-            <a:off x="6035040" y="1691640"/>
-            <a:ext cx="2743200" cy="2697480"/>
-          </a:xfrm>
-          <a:prstGeom prst="rect">
-            <a:avLst/>
-          </a:prstGeom>
-          <a:solidFill>
-            <a:srgbClr val="E3F2FD"/>
-          </a:solidFill>
-          <a:ln/>
-          <a:effectLst>
-            <a:outerShdw sx="100000" sy="100000" kx="0" ky="0" algn="bl" rotWithShape="0" blurRad="50800" dist="25400" dir="8100000">
-              <a:srgbClr val="000000">
-                <a:alpha val="10000"/>
-              </a:srgbClr>
-            </a:outerShdw>
-          </a:effectLst>
-        </p:spPr>
-      </p:sp>
-      <p:sp>
-        <p:nvSpPr>
-          <p:cNvPr id="25" name="Shape 23"/>
-          <p:cNvSpPr/>
-          <p:nvPr/>
-        </p:nvSpPr>
-        <p:spPr>
-          <a:xfrm>
-            <a:off x="6035040" y="1691640"/>
-            <a:ext cx="2743200" cy="36576"/>
-          </a:xfrm>
-          <a:prstGeom prst="rect">
-            <a:avLst/>
-          </a:prstGeom>
-          <a:solidFill>
-            <a:srgbClr val="2196F3"/>
-          </a:solidFill>
-          <a:ln/>
-        </p:spPr>
-      </p:sp>
-      <p:sp>
-        <p:nvSpPr>
-          <p:cNvPr id="26" name="Text 24"/>
-          <p:cNvSpPr/>
-          <p:nvPr/>
-        </p:nvSpPr>
-        <p:spPr>
-          <a:xfrm>
-            <a:off x="6126480" y="1764792"/>
-            <a:ext cx="2560320" cy="228600"/>
-          </a:xfrm>
-          <a:prstGeom prst="rect">
-            <a:avLst/>
-          </a:prstGeom>
-          <a:noFill/>
-          <a:ln/>
-        </p:spPr>
-        <p:txBody>
-          <a:bodyPr wrap="square" lIns="0" tIns="0" rIns="0" bIns="0" rtlCol="0" anchor="ctr"/>
-          <a:lstStyle/>
-          <a:p>
-            <a:pPr indent="0" marL="0">
-              <a:buNone/>
-            </a:pPr>
-            <a:r>
-              <a:rPr lang="en-US" sz="900" b="1" dirty="0">
-                <a:solidFill>
-                  <a:srgbClr val="2196F3"/>
-                </a:solidFill>
-                <a:latin typeface="Arial" pitchFamily="34" charset="0"/>
-                <a:ea typeface="Arial" pitchFamily="34" charset="-122"/>
-                <a:cs typeface="Arial" pitchFamily="34" charset="-120"/>
-              </a:rPr>
-              <a:t>Phase 3: 中期施策（3-6ヶ月）</a:t>
-            </a:r>
-            <a:endParaRPr lang="en-US" sz="900" dirty="0"/>
-          </a:p>
-        </p:txBody>
-      </p:sp>
-      <p:sp>
-        <p:nvSpPr>
-          <p:cNvPr id="27" name="Text 25"/>
-          <p:cNvSpPr/>
-          <p:nvPr/>
-        </p:nvSpPr>
-        <p:spPr>
-          <a:xfrm>
-            <a:off x="6126480" y="2039112"/>
-            <a:ext cx="2560320" cy="2286000"/>
-          </a:xfrm>
-          <a:prstGeom prst="rect">
-            <a:avLst/>
-          </a:prstGeom>
-          <a:noFill/>
-          <a:ln/>
-        </p:spPr>
-        <p:txBody>
-          <a:bodyPr wrap="square" lIns="0" tIns="0" rIns="0" bIns="0" rtlCol="0" anchor="t"/>
-          <a:lstStyle/>
-          <a:p>
-            <a:pPr indent="0" marL="0">
-              <a:buNone/>
-            </a:pPr>
-            <a:r>
-              <a:rPr lang="en-US" sz="700" dirty="0">
-                <a:solidFill>
-                  <a:srgbClr val="333333"/>
-                </a:solidFill>
-                <a:latin typeface="Arial" pitchFamily="34" charset="0"/>
-                <a:ea typeface="Arial" pitchFamily="34" charset="-122"/>
-                <a:cs typeface="Arial" pitchFamily="34" charset="-120"/>
-              </a:rPr>
-              <a:t>- 清掃スタッフの定期研修プログラム導入</a:t>
-            </a:r>
-            <a:endParaRPr lang="en-US" sz="700" dirty="0"/>
-          </a:p>
-          <a:p>
-            <a:pPr indent="0" marL="0">
-              <a:buNone/>
-            </a:pPr>
-            <a:r>
-              <a:rPr lang="en-US" sz="700" dirty="0">
-                <a:solidFill>
-                  <a:srgbClr val="333333"/>
-                </a:solidFill>
-                <a:latin typeface="Arial" pitchFamily="34" charset="0"/>
-                <a:ea typeface="Arial" pitchFamily="34" charset="-122"/>
-                <a:cs typeface="Arial" pitchFamily="34" charset="-120"/>
-              </a:rPr>
-              <a:t>- デジタル清掃記録システムの検討</a:t>
-            </a:r>
-            <a:endParaRPr lang="en-US" sz="700" dirty="0"/>
-          </a:p>
-          <a:p>
-            <a:pPr indent="0" marL="0">
-              <a:buNone/>
-            </a:pPr>
-            <a:r>
-              <a:rPr lang="en-US" sz="700" dirty="0">
-                <a:solidFill>
-                  <a:srgbClr val="333333"/>
-                </a:solidFill>
-                <a:latin typeface="Arial" pitchFamily="34" charset="0"/>
-                <a:ea typeface="Arial" pitchFamily="34" charset="-122"/>
-                <a:cs typeface="Arial" pitchFamily="34" charset="-120"/>
-              </a:rPr>
-              <a:t>- オゾン脱臭機の導入検討</a:t>
-            </a:r>
-            <a:endParaRPr lang="en-US" sz="700" dirty="0"/>
-          </a:p>
-          <a:p>
-            <a:pPr indent="0" marL="0">
-              <a:buNone/>
-            </a:pPr>
-            <a:r>
-              <a:rPr lang="en-US" sz="700" dirty="0">
-                <a:solidFill>
-                  <a:srgbClr val="333333"/>
-                </a:solidFill>
-                <a:latin typeface="Arial" pitchFamily="34" charset="0"/>
-                <a:ea typeface="Arial" pitchFamily="34" charset="-122"/>
-                <a:cs typeface="Arial" pitchFamily="34" charset="-120"/>
-              </a:rPr>
-              <a:t>- 空気品質モニタリングの導入</a:t>
-            </a:r>
-            <a:endParaRPr lang="en-US" sz="700" dirty="0"/>
-          </a:p>
-          <a:p>
-            <a:pPr indent="0" marL="0">
-              <a:buNone/>
-            </a:pPr>
-            <a:r>
-              <a:rPr lang="en-US" sz="700" dirty="0">
-                <a:solidFill>
-                  <a:srgbClr val="333333"/>
-                </a:solidFill>
-                <a:latin typeface="Arial" pitchFamily="34" charset="0"/>
-                <a:ea typeface="Arial" pitchFamily="34" charset="-122"/>
-                <a:cs typeface="Arial" pitchFamily="34" charset="-120"/>
-              </a:rPr>
-              <a:t>- フロア単位での完全禁煙化提案</a:t>
-            </a:r>
-            <a:endParaRPr lang="en-US" sz="700" dirty="0"/>
-          </a:p>
-        </p:txBody>
-      </p:sp>
-      <p:sp>
-        <p:nvSpPr>
-          <p:cNvPr id="28" name="Shape 26"/>
-          <p:cNvSpPr/>
-          <p:nvPr/>
-        </p:nvSpPr>
-        <p:spPr>
-          <a:xfrm>
-            <a:off x="0" y="4800600"/>
-            <a:ext cx="9144000" cy="342900"/>
-          </a:xfrm>
-          <a:prstGeom prst="rect">
-            <a:avLst/>
-          </a:prstGeom>
-          <a:solidFill>
-            <a:srgbClr val="1B3A5C"/>
-          </a:solidFill>
-          <a:ln/>
-        </p:spPr>
-      </p:sp>
-      <p:sp>
-        <p:nvSpPr>
-          <p:cNvPr id="29" name="Text 27"/>
-          <p:cNvSpPr/>
-          <p:nvPr/>
-        </p:nvSpPr>
-        <p:spPr>
-          <a:xfrm>
-            <a:off x="457200" y="4800600"/>
-            <a:ext cx="3657600" cy="342900"/>
-          </a:xfrm>
-          <a:prstGeom prst="rect">
-            <a:avLst/>
-          </a:prstGeom>
-          <a:noFill/>
-          <a:ln/>
-        </p:spPr>
-        <p:txBody>
-          <a:bodyPr wrap="square" rtlCol="0" anchor="ctr"/>
-          <a:lstStyle/>
-          <a:p>
-            <a:pPr indent="0" marL="0">
-              <a:buNone/>
-            </a:pPr>
-            <a:r>
-              <a:rPr lang="en-US" sz="800" dirty="0">
-                <a:solidFill>
-                  <a:srgbClr val="94A3B8"/>
-                </a:solidFill>
-                <a:latin typeface="Arial" pitchFamily="34" charset="0"/>
-                <a:ea typeface="Arial" pitchFamily="34" charset="-122"/>
-                <a:cs typeface="Arial" pitchFamily="34" charset="-120"/>
-              </a:rPr>
-              <a:t>Confidential | PRIMECHANGE</a:t>
-            </a:r>
-            <a:endParaRPr lang="en-US" sz="800" dirty="0"/>
-          </a:p>
-        </p:txBody>
-      </p:sp>
-      <p:sp>
-        <p:nvSpPr>
-          <p:cNvPr id="30" name="Text 28"/>
-          <p:cNvSpPr/>
-          <p:nvPr/>
-        </p:nvSpPr>
-        <p:spPr>
-          <a:xfrm>
-            <a:off x="8229600" y="4800600"/>
-            <a:ext cx="457200" cy="342900"/>
-          </a:xfrm>
-          <a:prstGeom prst="rect">
-            <a:avLst/>
-          </a:prstGeom>
-          <a:noFill/>
-          <a:ln/>
-        </p:spPr>
-        <p:txBody>
-          <a:bodyPr wrap="square" rtlCol="0" anchor="ctr"/>
-          <a:lstStyle/>
-          <a:p>
-            <a:pPr algn="r" indent="0" marL="0">
-              <a:buNone/>
-            </a:pPr>
-            <a:r>
-              <a:rPr lang="en-US" sz="800" dirty="0">
-                <a:solidFill>
-                  <a:srgbClr val="94A3B8"/>
-                </a:solidFill>
-                <a:latin typeface="Arial" pitchFamily="34" charset="0"/>
-                <a:ea typeface="Arial" pitchFamily="34" charset="-122"/>
-                <a:cs typeface="Arial" pitchFamily="34" charset="-120"/>
-              </a:rPr>
-              <a:t>11</a:t>
-            </a:r>
-            <a:endParaRPr lang="en-US" sz="800" dirty="0"/>
-          </a:p>
-        </p:txBody>
-      </p:sp>
-    </p:spTree>
-  </p:cSld>
-  <p:clrMapOvr>
-    <a:masterClrMapping/>
-  </p:clrMapOvr>
-</p:sld>
-</file>
-
-<file path=ppt/slides/slide12.xml><?xml version="1.0" encoding="utf-8"?>
-<p:sld xmlns:a="http://schemas.openxmlformats.org/drawingml/2006/main" xmlns:r="http://schemas.openxmlformats.org/officeDocument/2006/relationships" xmlns:p="http://schemas.openxmlformats.org/presentationml/2006/main">
-  <p:cSld name="Slide 12">
-    <p:spTree>
-      <p:nvGrpSpPr>
-        <p:cNvPr id="1" name=""/>
-        <p:cNvGrpSpPr/>
-        <p:nvPr/>
-      </p:nvGrpSpPr>
-      <p:grpSpPr>
-        <a:xfrm>
-          <a:off x="0" y="0"/>
-          <a:ext cx="0" cy="0"/>
-          <a:chOff x="0" y="0"/>
-          <a:chExt cx="0" cy="0"/>
-        </a:xfrm>
-      </p:grpSpPr>
-      <p:sp>
-        <p:nvSpPr>
-          <p:cNvPr id="2" name="Shape 0"/>
-          <p:cNvSpPr/>
-          <p:nvPr/>
-        </p:nvSpPr>
-        <p:spPr>
-          <a:xfrm>
-            <a:off x="0" y="0"/>
-            <a:ext cx="9144000" cy="548640"/>
-          </a:xfrm>
-          <a:prstGeom prst="rect">
-            <a:avLst/>
-          </a:prstGeom>
-          <a:solidFill>
-            <a:srgbClr val="1B3A5C"/>
-          </a:solidFill>
-          <a:ln/>
-        </p:spPr>
-      </p:sp>
-      <p:sp>
-        <p:nvSpPr>
-          <p:cNvPr id="3" name="Text 1"/>
-          <p:cNvSpPr/>
-          <p:nvPr/>
-        </p:nvSpPr>
-        <p:spPr>
-          <a:xfrm>
-            <a:off x="457200" y="45720"/>
-            <a:ext cx="8229600" cy="320040"/>
-          </a:xfrm>
-          <a:prstGeom prst="rect">
-            <a:avLst/>
-          </a:prstGeom>
-          <a:noFill/>
-          <a:ln/>
-        </p:spPr>
-        <p:txBody>
-          <a:bodyPr wrap="square" lIns="0" tIns="0" rIns="0" bIns="0" rtlCol="0" anchor="ctr"/>
-          <a:lstStyle/>
-          <a:p>
-            <a:pPr indent="0" marL="0">
-              <a:buNone/>
-            </a:pPr>
-            <a:r>
-              <a:rPr lang="en-US" sz="2000" b="1" dirty="0">
-                <a:solidFill>
-                  <a:srgbClr val="FFFFFF"/>
-                </a:solidFill>
-                <a:latin typeface="Arial" pitchFamily="34" charset="0"/>
-                <a:ea typeface="Arial" pitchFamily="34" charset="-122"/>
-                <a:cs typeface="Arial" pitchFamily="34" charset="-120"/>
-              </a:rPr>
               <a:t>HIGHホテル改善サマリー</a:t>
             </a:r>
             <a:endParaRPr lang="en-US" sz="2000" dirty="0"/>
@@ -5401,7 +4106,7 @@
                 <a:ea typeface="Arial" pitchFamily="34" charset="-122"/>
                 <a:cs typeface="Arial" pitchFamily="34" charset="-120"/>
               </a:rPr>
-              <a:t>対象：3ホテル</a:t>
+              <a:t>対象：4ホテル</a:t>
             </a:r>
             <a:endParaRPr lang="en-US" sz="1000" dirty="0"/>
           </a:p>
@@ -5487,7 +4192,7 @@
                 <a:ea typeface="Arial" pitchFamily="34" charset="-122"/>
                 <a:cs typeface="Arial" pitchFamily="34" charset="-120"/>
               </a:rPr>
-              <a:t>コンフォートイン六本木</a:t>
+              <a:t>コンフォートホテル横浜関内</a:t>
             </a:r>
             <a:endParaRPr lang="en-US" sz="1200" dirty="0"/>
           </a:p>
@@ -5526,7 +4231,7 @@
                 <a:ea typeface="Arial" pitchFamily="34" charset="-122"/>
                 <a:cs typeface="Arial" pitchFamily="34" charset="-120"/>
               </a:rPr>
-              <a:t>8.1点 → 9点</a:t>
+              <a:t>7.65点 → 8.5点</a:t>
             </a:r>
             <a:endParaRPr lang="en-US" sz="1100" dirty="0"/>
           </a:p>
@@ -5565,7 +4270,7 @@
                 <a:ea typeface="Arial" pitchFamily="34" charset="-122"/>
                 <a:cs typeface="Arial" pitchFamily="34" charset="-120"/>
               </a:rPr>
-              <a:t>主要課題：臭気・異臭(4件)、清掃品質全般(2件)、カビ・モールド(1件)</a:t>
+              <a:t>主要課題：シミ・汚れ跡(6件)、清掃品質全般(5件)、臭気・異臭(2件)</a:t>
             </a:r>
             <a:endParaRPr lang="en-US" sz="900" dirty="0"/>
           </a:p>
@@ -5604,24 +4309,7 @@
                 <a:ea typeface="Arial" pitchFamily="34" charset="-122"/>
                 <a:cs typeface="Arial" pitchFamily="34" charset="-120"/>
               </a:rPr>
-              <a:t>- 臭気発生源の特定と即時対処（排水トラップ、換気扇）</a:t>
-            </a:r>
-            <a:endParaRPr lang="en-US" sz="800" dirty="0"/>
-          </a:p>
-          <a:p>
-            <a:pPr indent="0" marL="0">
-              <a:buNone/>
-            </a:pPr>
-            <a:r>
-              <a:rPr lang="en-US" sz="800" dirty="0">
-                <a:solidFill>
-                  <a:srgbClr val="333333"/>
-                </a:solidFill>
-                <a:latin typeface="Arial" pitchFamily="34" charset="0"/>
-                <a:ea typeface="Arial" pitchFamily="34" charset="-122"/>
-                <a:cs typeface="Arial" pitchFamily="34" charset="-120"/>
-              </a:rPr>
-              <a:t>- 消臭・脱臭処理の実施</a:t>
+              <a:t>- シミ箇所の特定と専用クリーナーによる除去</a:t>
             </a:r>
             <a:endParaRPr lang="en-US" sz="800" dirty="0"/>
           </a:p>
@@ -5639,6 +4327,23 @@
                 <a:cs typeface="Arial" pitchFamily="34" charset="-120"/>
               </a:rPr>
               <a:t>- 清掃品質基準の明確化と全スタッフへの共有</a:t>
+            </a:r>
+            <a:endParaRPr lang="en-US" sz="800" dirty="0"/>
+          </a:p>
+          <a:p>
+            <a:pPr indent="0" marL="0">
+              <a:buNone/>
+            </a:pPr>
+            <a:r>
+              <a:rPr lang="en-US" sz="800" dirty="0">
+                <a:solidFill>
+                  <a:srgbClr val="333333"/>
+                </a:solidFill>
+                <a:latin typeface="Arial" pitchFamily="34" charset="0"/>
+                <a:ea typeface="Arial" pitchFamily="34" charset="-122"/>
+                <a:cs typeface="Arial" pitchFamily="34" charset="-120"/>
+              </a:rPr>
+              <a:t>- 重点箇所（水回り・ベッド周り）の清掃手順見直し</a:t>
             </a:r>
             <a:endParaRPr lang="en-US" sz="800" dirty="0"/>
           </a:p>
@@ -5724,7 +4429,7 @@
                 <a:ea typeface="Arial" pitchFamily="34" charset="-122"/>
                 <a:cs typeface="Arial" pitchFamily="34" charset="-120"/>
               </a:rPr>
-              <a:t>川崎日航ホテル</a:t>
+              <a:t>コンフォートイン六本木</a:t>
             </a:r>
             <a:endParaRPr lang="en-US" sz="1200" dirty="0"/>
           </a:p>
@@ -5763,7 +4468,7 @@
                 <a:ea typeface="Arial" pitchFamily="34" charset="-122"/>
                 <a:cs typeface="Arial" pitchFamily="34" charset="-120"/>
               </a:rPr>
-              <a:t>8.62点 → 8.9点</a:t>
+              <a:t>8.11点 → 9点</a:t>
             </a:r>
             <a:endParaRPr lang="en-US" sz="1100" dirty="0"/>
           </a:p>
@@ -5802,7 +4507,7 @@
                 <a:ea typeface="Arial" pitchFamily="34" charset="-122"/>
                 <a:cs typeface="Arial" pitchFamily="34" charset="-120"/>
               </a:rPr>
-              <a:t>主要課題：清掃品質全般(6件)、ゴミ残置(1件)、臭気・異臭(1件)</a:t>
+              <a:t>主要課題：臭気・異臭(4件)、カビ・モールド(2件)、清掃品質全般(2件)</a:t>
             </a:r>
             <a:endParaRPr lang="en-US" sz="900" dirty="0"/>
           </a:p>
@@ -5841,7 +4546,7 @@
                 <a:ea typeface="Arial" pitchFamily="34" charset="-122"/>
                 <a:cs typeface="Arial" pitchFamily="34" charset="-120"/>
               </a:rPr>
-              <a:t>- 清掃品質基準の明確化と全スタッフへの共有</a:t>
+              <a:t>- 臭気発生源の特定と即時対処（排水トラップ、換気扇）</a:t>
             </a:r>
             <a:endParaRPr lang="en-US" sz="800" dirty="0"/>
           </a:p>
@@ -5858,7 +4563,7 @@
                 <a:ea typeface="Arial" pitchFamily="34" charset="-122"/>
                 <a:cs typeface="Arial" pitchFamily="34" charset="-120"/>
               </a:rPr>
-              <a:t>- 重点箇所（水回り・ベッド周り）の清掃手順見直し</a:t>
+              <a:t>- 消臭・脱臭処理の実施</a:t>
             </a:r>
             <a:endParaRPr lang="en-US" sz="800" dirty="0"/>
           </a:p>
@@ -5875,7 +4580,7 @@
                 <a:ea typeface="Arial" pitchFamily="34" charset="-122"/>
                 <a:cs typeface="Arial" pitchFamily="34" charset="-120"/>
               </a:rPr>
-              <a:t>- 清掃後のゴミ残置チェック項目の追加</a:t>
+              <a:t>- エアコンフィルター・内部のカビ除去と消毒</a:t>
             </a:r>
             <a:endParaRPr lang="en-US" sz="800" dirty="0"/>
           </a:p>
@@ -5961,7 +4666,7 @@
                 <a:ea typeface="Arial" pitchFamily="34" charset="-122"/>
                 <a:cs typeface="Arial" pitchFamily="34" charset="-120"/>
               </a:rPr>
-              <a:t>ホテルコメント横浜関内</a:t>
+              <a:t>川崎日航ホテル</a:t>
             </a:r>
             <a:endParaRPr lang="en-US" sz="1200" dirty="0"/>
           </a:p>
@@ -6000,7 +4705,7 @@
                 <a:ea typeface="Arial" pitchFamily="34" charset="-122"/>
                 <a:cs typeface="Arial" pitchFamily="34" charset="-120"/>
               </a:rPr>
-              <a:t>8.81点 → 9.1点</a:t>
+              <a:t>8.65点 → 9点</a:t>
             </a:r>
             <a:endParaRPr lang="en-US" sz="1100" dirty="0"/>
           </a:p>
@@ -6039,7 +4744,7 @@
                 <a:ea typeface="Arial" pitchFamily="34" charset="-122"/>
                 <a:cs typeface="Arial" pitchFamily="34" charset="-120"/>
               </a:rPr>
-              <a:t>主要課題：清掃品質全般(4件)、臭気・異臭(2件)、タバコ関連(1件)</a:t>
+              <a:t>主要課題：清掃品質全般(6件)、ゴミ残置(1件)、臭気・異臭(1件)</a:t>
             </a:r>
             <a:endParaRPr lang="en-US" sz="900" dirty="0"/>
           </a:p>
@@ -6112,6 +4817,243 @@
                 <a:ea typeface="Arial" pitchFamily="34" charset="-122"/>
                 <a:cs typeface="Arial" pitchFamily="34" charset="-120"/>
               </a:rPr>
+              <a:t>- 清掃後のゴミ残置チェック項目の追加</a:t>
+            </a:r>
+            <a:endParaRPr lang="en-US" sz="800" dirty="0"/>
+          </a:p>
+        </p:txBody>
+      </p:sp>
+      <p:sp>
+        <p:nvSpPr>
+          <p:cNvPr id="23" name="Shape 21"/>
+          <p:cNvSpPr/>
+          <p:nvPr/>
+        </p:nvSpPr>
+        <p:spPr>
+          <a:xfrm>
+            <a:off x="274320" y="4709160"/>
+            <a:ext cx="8595360" cy="1188720"/>
+          </a:xfrm>
+          <a:prstGeom prst="rect">
+            <a:avLst/>
+          </a:prstGeom>
+          <a:solidFill>
+            <a:srgbClr val="FFF3E0"/>
+          </a:solidFill>
+          <a:ln/>
+          <a:effectLst>
+            <a:outerShdw sx="100000" sy="100000" kx="0" ky="0" algn="bl" rotWithShape="0" blurRad="50800" dist="25400" dir="8100000">
+              <a:srgbClr val="000000">
+                <a:alpha val="10000"/>
+              </a:srgbClr>
+            </a:outerShdw>
+          </a:effectLst>
+        </p:spPr>
+      </p:sp>
+      <p:sp>
+        <p:nvSpPr>
+          <p:cNvPr id="24" name="Shape 22"/>
+          <p:cNvSpPr/>
+          <p:nvPr/>
+        </p:nvSpPr>
+        <p:spPr>
+          <a:xfrm>
+            <a:off x="274320" y="4709160"/>
+            <a:ext cx="8595360" cy="36576"/>
+          </a:xfrm>
+          <a:prstGeom prst="rect">
+            <a:avLst/>
+          </a:prstGeom>
+          <a:solidFill>
+            <a:srgbClr val="FF9800"/>
+          </a:solidFill>
+          <a:ln/>
+        </p:spPr>
+      </p:sp>
+      <p:sp>
+        <p:nvSpPr>
+          <p:cNvPr id="25" name="Text 23"/>
+          <p:cNvSpPr/>
+          <p:nvPr/>
+        </p:nvSpPr>
+        <p:spPr>
+          <a:xfrm>
+            <a:off x="457200" y="4782312"/>
+            <a:ext cx="3657600" cy="228600"/>
+          </a:xfrm>
+          <a:prstGeom prst="rect">
+            <a:avLst/>
+          </a:prstGeom>
+          <a:noFill/>
+          <a:ln/>
+        </p:spPr>
+        <p:txBody>
+          <a:bodyPr wrap="square" lIns="0" tIns="0" rIns="0" bIns="0" rtlCol="0" anchor="ctr"/>
+          <a:lstStyle/>
+          <a:p>
+            <a:pPr indent="0" marL="0">
+              <a:buNone/>
+            </a:pPr>
+            <a:r>
+              <a:rPr lang="en-US" sz="1200" b="1" dirty="0">
+                <a:solidFill>
+                  <a:srgbClr val="1B3A5C"/>
+                </a:solidFill>
+                <a:latin typeface="Arial" pitchFamily="34" charset="0"/>
+                <a:ea typeface="Arial" pitchFamily="34" charset="-122"/>
+                <a:cs typeface="Arial" pitchFamily="34" charset="-120"/>
+              </a:rPr>
+              <a:t>ホテルコメント横浜関内</a:t>
+            </a:r>
+            <a:endParaRPr lang="en-US" sz="1200" dirty="0"/>
+          </a:p>
+        </p:txBody>
+      </p:sp>
+      <p:sp>
+        <p:nvSpPr>
+          <p:cNvPr id="26" name="Text 24"/>
+          <p:cNvSpPr/>
+          <p:nvPr/>
+        </p:nvSpPr>
+        <p:spPr>
+          <a:xfrm>
+            <a:off x="4572000" y="4782312"/>
+            <a:ext cx="2743200" cy="228600"/>
+          </a:xfrm>
+          <a:prstGeom prst="rect">
+            <a:avLst/>
+          </a:prstGeom>
+          <a:noFill/>
+          <a:ln/>
+        </p:spPr>
+        <p:txBody>
+          <a:bodyPr wrap="square" lIns="0" tIns="0" rIns="0" bIns="0" rtlCol="0" anchor="ctr"/>
+          <a:lstStyle/>
+          <a:p>
+            <a:pPr indent="0" marL="0">
+              <a:buNone/>
+            </a:pPr>
+            <a:r>
+              <a:rPr lang="en-US" sz="1100" b="1" dirty="0">
+                <a:solidFill>
+                  <a:srgbClr val="27AE60"/>
+                </a:solidFill>
+                <a:latin typeface="Arial" pitchFamily="34" charset="0"/>
+                <a:ea typeface="Arial" pitchFamily="34" charset="-122"/>
+                <a:cs typeface="Arial" pitchFamily="34" charset="-120"/>
+              </a:rPr>
+              <a:t>8.81点 → 9.1点</a:t>
+            </a:r>
+            <a:endParaRPr lang="en-US" sz="1100" dirty="0"/>
+          </a:p>
+        </p:txBody>
+      </p:sp>
+      <p:sp>
+        <p:nvSpPr>
+          <p:cNvPr id="27" name="Text 25"/>
+          <p:cNvSpPr/>
+          <p:nvPr/>
+        </p:nvSpPr>
+        <p:spPr>
+          <a:xfrm>
+            <a:off x="457200" y="5029200"/>
+            <a:ext cx="7315200" cy="182880"/>
+          </a:xfrm>
+          <a:prstGeom prst="rect">
+            <a:avLst/>
+          </a:prstGeom>
+          <a:noFill/>
+          <a:ln/>
+        </p:spPr>
+        <p:txBody>
+          <a:bodyPr wrap="square" lIns="0" tIns="0" rIns="0" bIns="0" rtlCol="0" anchor="ctr"/>
+          <a:lstStyle/>
+          <a:p>
+            <a:pPr indent="0" marL="0">
+              <a:buNone/>
+            </a:pPr>
+            <a:r>
+              <a:rPr lang="en-US" sz="900" dirty="0">
+                <a:solidFill>
+                  <a:srgbClr val="666666"/>
+                </a:solidFill>
+                <a:latin typeface="Arial" pitchFamily="34" charset="0"/>
+                <a:ea typeface="Arial" pitchFamily="34" charset="-122"/>
+                <a:cs typeface="Arial" pitchFamily="34" charset="-120"/>
+              </a:rPr>
+              <a:t>主要課題：清掃品質全般(4件)、臭気・異臭(2件)、タバコ関連(1件)</a:t>
+            </a:r>
+            <a:endParaRPr lang="en-US" sz="900" dirty="0"/>
+          </a:p>
+        </p:txBody>
+      </p:sp>
+      <p:sp>
+        <p:nvSpPr>
+          <p:cNvPr id="28" name="Text 26"/>
+          <p:cNvSpPr/>
+          <p:nvPr/>
+        </p:nvSpPr>
+        <p:spPr>
+          <a:xfrm>
+            <a:off x="457200" y="5257800"/>
+            <a:ext cx="7772400" cy="594360"/>
+          </a:xfrm>
+          <a:prstGeom prst="rect">
+            <a:avLst/>
+          </a:prstGeom>
+          <a:noFill/>
+          <a:ln/>
+        </p:spPr>
+        <p:txBody>
+          <a:bodyPr wrap="square" lIns="0" tIns="0" rIns="0" bIns="0" rtlCol="0" anchor="t"/>
+          <a:lstStyle/>
+          <a:p>
+            <a:pPr indent="0" marL="0">
+              <a:buNone/>
+            </a:pPr>
+            <a:r>
+              <a:rPr lang="en-US" sz="800" dirty="0">
+                <a:solidFill>
+                  <a:srgbClr val="333333"/>
+                </a:solidFill>
+                <a:latin typeface="Arial" pitchFamily="34" charset="0"/>
+                <a:ea typeface="Arial" pitchFamily="34" charset="-122"/>
+                <a:cs typeface="Arial" pitchFamily="34" charset="-120"/>
+              </a:rPr>
+              <a:t>- 清掃品質基準の明確化と全スタッフへの共有</a:t>
+            </a:r>
+            <a:endParaRPr lang="en-US" sz="800" dirty="0"/>
+          </a:p>
+          <a:p>
+            <a:pPr indent="0" marL="0">
+              <a:buNone/>
+            </a:pPr>
+            <a:r>
+              <a:rPr lang="en-US" sz="800" dirty="0">
+                <a:solidFill>
+                  <a:srgbClr val="333333"/>
+                </a:solidFill>
+                <a:latin typeface="Arial" pitchFamily="34" charset="0"/>
+                <a:ea typeface="Arial" pitchFamily="34" charset="-122"/>
+                <a:cs typeface="Arial" pitchFamily="34" charset="-120"/>
+              </a:rPr>
+              <a:t>- 重点箇所（水回り・ベッド周り）の清掃手順見直し</a:t>
+            </a:r>
+            <a:endParaRPr lang="en-US" sz="800" dirty="0"/>
+          </a:p>
+          <a:p>
+            <a:pPr indent="0" marL="0">
+              <a:buNone/>
+            </a:pPr>
+            <a:r>
+              <a:rPr lang="en-US" sz="800" dirty="0">
+                <a:solidFill>
+                  <a:srgbClr val="333333"/>
+                </a:solidFill>
+                <a:latin typeface="Arial" pitchFamily="34" charset="0"/>
+                <a:ea typeface="Arial" pitchFamily="34" charset="-122"/>
+                <a:cs typeface="Arial" pitchFamily="34" charset="-120"/>
+              </a:rPr>
               <a:t>- 臭気発生源の特定と即時対処（排水トラップ、換気扇）</a:t>
             </a:r>
             <a:endParaRPr lang="en-US" sz="800" dirty="0"/>
@@ -6120,7 +5062,7 @@
       </p:sp>
       <p:sp>
         <p:nvSpPr>
-          <p:cNvPr id="23" name="Shape 21"/>
+          <p:cNvPr id="29" name="Shape 27"/>
           <p:cNvSpPr/>
           <p:nvPr/>
         </p:nvSpPr>
@@ -6140,7 +5082,7 @@
       </p:sp>
       <p:sp>
         <p:nvSpPr>
-          <p:cNvPr id="24" name="Text 22"/>
+          <p:cNvPr id="30" name="Text 28"/>
           <p:cNvSpPr/>
           <p:nvPr/>
         </p:nvSpPr>
@@ -6179,7 +5121,7 @@
       </p:sp>
       <p:sp>
         <p:nvSpPr>
-          <p:cNvPr id="25" name="Text 23"/>
+          <p:cNvPr id="31" name="Text 29"/>
           <p:cNvSpPr/>
           <p:nvPr/>
         </p:nvSpPr>
@@ -6224,9 +5166,9 @@
 </p:sld>
 </file>
 
-<file path=ppt/slides/slide13.xml><?xml version="1.0" encoding="utf-8"?>
+<file path=ppt/slides/slide12.xml><?xml version="1.0" encoding="utf-8"?>
 <p:sld xmlns:a="http://schemas.openxmlformats.org/drawingml/2006/main" xmlns:r="http://schemas.openxmlformats.org/officeDocument/2006/relationships" xmlns:p="http://schemas.openxmlformats.org/presentationml/2006/main">
-  <p:cSld name="Slide 13">
+  <p:cSld name="Slide 12">
     <p:spTree>
       <p:nvGrpSpPr>
         <p:cNvPr id="1" name=""/>
@@ -6341,7 +5283,7 @@
       </p:sp>
       <p:graphicFrame>
         <p:nvGraphicFramePr>
-          <p:cNvPr id="14" name="Table 0"/>
+          <p:cNvPr id="13" name="Table 0"/>
           <p:cNvGraphicFramePr>
             <a:graphicFrameLocks noGrp="1"/>
           </p:cNvGraphicFramePr>
@@ -6628,7 +5570,7 @@
                             <a:srgbClr val="000000"/>
                           </a:solidFill>
                         </a:rPr>
-                        <a:t>コンフォートイン六本木</a:t>
+                        <a:t>コンフォートホテル横浜関内</a:t>
                       </a:r>
                       <a:endParaRPr lang="en-US" sz="700" dirty="0"/>
                     </a:p>
@@ -6689,7 +5631,7 @@
                             <a:srgbClr val="000000"/>
                           </a:solidFill>
                         </a:rPr>
-                        <a:t>臭気発生源の特定と即時対処（排水トラップ、換気扇）</a:t>
+                        <a:t>シミ箇所の特定と専用クリーナーによる除去</a:t>
                       </a:r>
                       <a:endParaRPr lang="en-US" sz="700" dirty="0"/>
                     </a:p>
@@ -6703,7 +5645,7 @@
                             <a:srgbClr val="000000"/>
                           </a:solidFill>
                         </a:rPr>
-                        <a:t>消臭・脱臭処理の実施</a:t>
+                        <a:t>清掃品質基準の明確化と全スタッフへの共有</a:t>
                       </a:r>
                       <a:endParaRPr lang="en-US" sz="700" dirty="0"/>
                     </a:p>
@@ -6764,7 +5706,7 @@
                             <a:srgbClr val="000000"/>
                           </a:solidFill>
                         </a:rPr>
-                        <a:t>定期的な換気・消臭ルーティンの標準化</a:t>
+                        <a:t>シミ発見時の即時報告・対処フロー構築</a:t>
                       </a:r>
                       <a:endParaRPr lang="en-US" sz="700" dirty="0"/>
                     </a:p>
@@ -6778,7 +5720,7 @@
                             <a:srgbClr val="000000"/>
                           </a:solidFill>
                         </a:rPr>
-                        <a:t>エアコン・排水系の臭気源の根本対策</a:t>
+                        <a:t>品質管理チェックリストの導入と実施</a:t>
                       </a:r>
                       <a:endParaRPr lang="en-US" sz="700" dirty="0"/>
                     </a:p>
@@ -6839,7 +5781,7 @@
                             <a:srgbClr val="000000"/>
                           </a:solidFill>
                         </a:rPr>
-                        <a:t>オゾン脱臭機の導入検討</a:t>
+                        <a:t>清掃スタッフの定期研修プログラム導入</a:t>
                       </a:r>
                       <a:endParaRPr lang="en-US" sz="700" dirty="0"/>
                     </a:p>
@@ -6853,7 +5795,7 @@
                             <a:srgbClr val="000000"/>
                           </a:solidFill>
                         </a:rPr>
-                        <a:t>空気品質モニタリングの導入</a:t>
+                        <a:t>デジタル清掃記録システムの検討</a:t>
                       </a:r>
                       <a:endParaRPr lang="en-US" sz="700" dirty="0"/>
                     </a:p>
@@ -6916,7 +5858,7 @@
                             <a:srgbClr val="000000"/>
                           </a:solidFill>
                         </a:rPr>
-                        <a:t>川崎日航ホテル</a:t>
+                        <a:t>コンフォートイン六本木</a:t>
                       </a:r>
                       <a:endParaRPr lang="en-US" sz="700" dirty="0"/>
                     </a:p>
@@ -6977,7 +5919,7 @@
                             <a:srgbClr val="000000"/>
                           </a:solidFill>
                         </a:rPr>
-                        <a:t>清掃品質基準の明確化と全スタッフへの共有</a:t>
+                        <a:t>臭気発生源の特定と即時対処（排水トラップ、換気扇）</a:t>
                       </a:r>
                       <a:endParaRPr lang="en-US" sz="700" dirty="0"/>
                     </a:p>
@@ -6991,7 +5933,7 @@
                             <a:srgbClr val="000000"/>
                           </a:solidFill>
                         </a:rPr>
-                        <a:t>重点箇所（水回り・ベッド周り）の清掃手順見直し</a:t>
+                        <a:t>消臭・脱臭処理の実施</a:t>
                       </a:r>
                       <a:endParaRPr lang="en-US" sz="700" dirty="0"/>
                     </a:p>
@@ -7052,7 +5994,7 @@
                             <a:srgbClr val="000000"/>
                           </a:solidFill>
                         </a:rPr>
-                        <a:t>品質管理チェックリストの導入と実施</a:t>
+                        <a:t>定期的な換気・消臭ルーティンの標準化</a:t>
                       </a:r>
                       <a:endParaRPr lang="en-US" sz="700" dirty="0"/>
                     </a:p>
@@ -7066,7 +6008,7 @@
                             <a:srgbClr val="000000"/>
                           </a:solidFill>
                         </a:rPr>
-                        <a:t>QCインスペクション体制の構築（ランダム抜き打ち検査）</a:t>
+                        <a:t>エアコン・排水系の臭気源の根本対策</a:t>
                       </a:r>
                       <a:endParaRPr lang="en-US" sz="700" dirty="0"/>
                     </a:p>
@@ -7127,7 +6069,7 @@
                             <a:srgbClr val="000000"/>
                           </a:solidFill>
                         </a:rPr>
-                        <a:t>清掃スタッフの定期研修プログラム導入</a:t>
+                        <a:t>オゾン脱臭機の導入検討</a:t>
                       </a:r>
                       <a:endParaRPr lang="en-US" sz="700" dirty="0"/>
                     </a:p>
@@ -7141,7 +6083,7 @@
                             <a:srgbClr val="000000"/>
                           </a:solidFill>
                         </a:rPr>
-                        <a:t>デジタル清掃記録システムの検討</a:t>
+                        <a:t>空気品質モニタリングの導入</a:t>
                       </a:r>
                       <a:endParaRPr lang="en-US" sz="700" dirty="0"/>
                     </a:p>
@@ -7204,7 +6146,7 @@
                             <a:srgbClr val="000000"/>
                           </a:solidFill>
                         </a:rPr>
-                        <a:t>ホテルコメント横浜関内</a:t>
+                        <a:t>川崎日航ホテル</a:t>
                       </a:r>
                       <a:endParaRPr lang="en-US" sz="700" dirty="0"/>
                     </a:p>
@@ -7473,6 +6415,294 @@
                     </a:lnB>
                     <a:solidFill>
                       <a:srgbClr val="FFFFFF"/>
+                    </a:solidFill>
+                  </a:tcPr>
+                </a:tc>
+              </a:tr>
+              <a:tr h="0">
+                <a:tc>
+                  <a:txBody>
+                    <a:bodyPr/>
+                    <a:lstStyle/>
+                    <a:p>
+                      <a:pPr indent="0" marL="0">
+                        <a:buNone/>
+                      </a:pPr>
+                      <a:r>
+                        <a:rPr lang="en-US" sz="700" b="1" dirty="0">
+                          <a:solidFill>
+                            <a:srgbClr val="000000"/>
+                          </a:solidFill>
+                        </a:rPr>
+                        <a:t>ホテルコメント横浜関内</a:t>
+                      </a:r>
+                      <a:endParaRPr lang="en-US" sz="700" dirty="0"/>
+                    </a:p>
+                  </a:txBody>
+                  <a:tcPr marL="91440" marR="91440" marT="45720" marB="45720">
+                    <a:lnL w="6350" cap="flat" cmpd="sng" algn="ctr">
+                      <a:solidFill>
+                        <a:srgbClr val="CCCCCC"/>
+                      </a:solidFill>
+                      <a:prstDash val="solid"/>
+                      <a:round/>
+                      <a:headEnd type="none" w="med" len="med"/>
+                      <a:tailEnd type="none" w="med" len="med"/>
+                    </a:lnL>
+                    <a:lnR w="6350" cap="flat" cmpd="sng" algn="ctr">
+                      <a:solidFill>
+                        <a:srgbClr val="CCCCCC"/>
+                      </a:solidFill>
+                      <a:prstDash val="solid"/>
+                      <a:round/>
+                      <a:headEnd type="none" w="med" len="med"/>
+                      <a:tailEnd type="none" w="med" len="med"/>
+                    </a:lnR>
+                    <a:lnT w="6350" cap="flat" cmpd="sng" algn="ctr">
+                      <a:solidFill>
+                        <a:srgbClr val="CCCCCC"/>
+                      </a:solidFill>
+                      <a:prstDash val="solid"/>
+                      <a:round/>
+                      <a:headEnd type="none" w="med" len="med"/>
+                      <a:tailEnd type="none" w="med" len="med"/>
+                    </a:lnT>
+                    <a:lnB w="6350" cap="flat" cmpd="sng" algn="ctr">
+                      <a:solidFill>
+                        <a:srgbClr val="CCCCCC"/>
+                      </a:solidFill>
+                      <a:prstDash val="solid"/>
+                      <a:round/>
+                      <a:headEnd type="none" w="med" len="med"/>
+                      <a:tailEnd type="none" w="med" len="med"/>
+                    </a:lnB>
+                    <a:solidFill>
+                      <a:srgbClr val="F5F7FA"/>
+                    </a:solidFill>
+                  </a:tcPr>
+                </a:tc>
+                <a:tc>
+                  <a:txBody>
+                    <a:bodyPr/>
+                    <a:lstStyle/>
+                    <a:p>
+                      <a:pPr indent="0" marL="0">
+                        <a:buNone/>
+                      </a:pPr>
+                      <a:r>
+                        <a:rPr lang="en-US" sz="700" dirty="0">
+                          <a:solidFill>
+                            <a:srgbClr val="000000"/>
+                          </a:solidFill>
+                        </a:rPr>
+                        <a:t>清掃品質基準の明確化と全スタッフへの共有</a:t>
+                      </a:r>
+                      <a:endParaRPr lang="en-US" sz="700" dirty="0"/>
+                    </a:p>
+                    <a:p>
+                      <a:pPr indent="0" marL="0">
+                        <a:buNone/>
+                      </a:pPr>
+                      <a:r>
+                        <a:rPr lang="en-US" sz="700" dirty="0">
+                          <a:solidFill>
+                            <a:srgbClr val="000000"/>
+                          </a:solidFill>
+                        </a:rPr>
+                        <a:t>重点箇所（水回り・ベッド周り）の清掃手順見直し</a:t>
+                      </a:r>
+                      <a:endParaRPr lang="en-US" sz="700" dirty="0"/>
+                    </a:p>
+                  </a:txBody>
+                  <a:tcPr marL="91440" marR="91440" marT="45720" marB="45720">
+                    <a:lnL w="6350" cap="flat" cmpd="sng" algn="ctr">
+                      <a:solidFill>
+                        <a:srgbClr val="CCCCCC"/>
+                      </a:solidFill>
+                      <a:prstDash val="solid"/>
+                      <a:round/>
+                      <a:headEnd type="none" w="med" len="med"/>
+                      <a:tailEnd type="none" w="med" len="med"/>
+                    </a:lnL>
+                    <a:lnR w="6350" cap="flat" cmpd="sng" algn="ctr">
+                      <a:solidFill>
+                        <a:srgbClr val="CCCCCC"/>
+                      </a:solidFill>
+                      <a:prstDash val="solid"/>
+                      <a:round/>
+                      <a:headEnd type="none" w="med" len="med"/>
+                      <a:tailEnd type="none" w="med" len="med"/>
+                    </a:lnR>
+                    <a:lnT w="6350" cap="flat" cmpd="sng" algn="ctr">
+                      <a:solidFill>
+                        <a:srgbClr val="CCCCCC"/>
+                      </a:solidFill>
+                      <a:prstDash val="solid"/>
+                      <a:round/>
+                      <a:headEnd type="none" w="med" len="med"/>
+                      <a:tailEnd type="none" w="med" len="med"/>
+                    </a:lnT>
+                    <a:lnB w="6350" cap="flat" cmpd="sng" algn="ctr">
+                      <a:solidFill>
+                        <a:srgbClr val="CCCCCC"/>
+                      </a:solidFill>
+                      <a:prstDash val="solid"/>
+                      <a:round/>
+                      <a:headEnd type="none" w="med" len="med"/>
+                      <a:tailEnd type="none" w="med" len="med"/>
+                    </a:lnB>
+                    <a:solidFill>
+                      <a:srgbClr val="F5F7FA"/>
+                    </a:solidFill>
+                  </a:tcPr>
+                </a:tc>
+                <a:tc>
+                  <a:txBody>
+                    <a:bodyPr/>
+                    <a:lstStyle/>
+                    <a:p>
+                      <a:pPr indent="0" marL="0">
+                        <a:buNone/>
+                      </a:pPr>
+                      <a:r>
+                        <a:rPr lang="en-US" sz="700" dirty="0">
+                          <a:solidFill>
+                            <a:srgbClr val="000000"/>
+                          </a:solidFill>
+                        </a:rPr>
+                        <a:t>品質管理チェックリストの導入と実施</a:t>
+                      </a:r>
+                      <a:endParaRPr lang="en-US" sz="700" dirty="0"/>
+                    </a:p>
+                    <a:p>
+                      <a:pPr indent="0" marL="0">
+                        <a:buNone/>
+                      </a:pPr>
+                      <a:r>
+                        <a:rPr lang="en-US" sz="700" dirty="0">
+                          <a:solidFill>
+                            <a:srgbClr val="000000"/>
+                          </a:solidFill>
+                        </a:rPr>
+                        <a:t>QCインスペクション体制の構築（ランダム抜き打ち検査）</a:t>
+                      </a:r>
+                      <a:endParaRPr lang="en-US" sz="700" dirty="0"/>
+                    </a:p>
+                  </a:txBody>
+                  <a:tcPr marL="91440" marR="91440" marT="45720" marB="45720">
+                    <a:lnL w="6350" cap="flat" cmpd="sng" algn="ctr">
+                      <a:solidFill>
+                        <a:srgbClr val="CCCCCC"/>
+                      </a:solidFill>
+                      <a:prstDash val="solid"/>
+                      <a:round/>
+                      <a:headEnd type="none" w="med" len="med"/>
+                      <a:tailEnd type="none" w="med" len="med"/>
+                    </a:lnL>
+                    <a:lnR w="6350" cap="flat" cmpd="sng" algn="ctr">
+                      <a:solidFill>
+                        <a:srgbClr val="CCCCCC"/>
+                      </a:solidFill>
+                      <a:prstDash val="solid"/>
+                      <a:round/>
+                      <a:headEnd type="none" w="med" len="med"/>
+                      <a:tailEnd type="none" w="med" len="med"/>
+                    </a:lnR>
+                    <a:lnT w="6350" cap="flat" cmpd="sng" algn="ctr">
+                      <a:solidFill>
+                        <a:srgbClr val="CCCCCC"/>
+                      </a:solidFill>
+                      <a:prstDash val="solid"/>
+                      <a:round/>
+                      <a:headEnd type="none" w="med" len="med"/>
+                      <a:tailEnd type="none" w="med" len="med"/>
+                    </a:lnT>
+                    <a:lnB w="6350" cap="flat" cmpd="sng" algn="ctr">
+                      <a:solidFill>
+                        <a:srgbClr val="CCCCCC"/>
+                      </a:solidFill>
+                      <a:prstDash val="solid"/>
+                      <a:round/>
+                      <a:headEnd type="none" w="med" len="med"/>
+                      <a:tailEnd type="none" w="med" len="med"/>
+                    </a:lnB>
+                    <a:solidFill>
+                      <a:srgbClr val="F5F7FA"/>
+                    </a:solidFill>
+                  </a:tcPr>
+                </a:tc>
+                <a:tc>
+                  <a:txBody>
+                    <a:bodyPr/>
+                    <a:lstStyle/>
+                    <a:p>
+                      <a:pPr indent="0" marL="0">
+                        <a:buNone/>
+                      </a:pPr>
+                      <a:r>
+                        <a:rPr lang="en-US" sz="700" dirty="0">
+                          <a:solidFill>
+                            <a:srgbClr val="000000"/>
+                          </a:solidFill>
+                        </a:rPr>
+                        <a:t>清掃スタッフの定期研修プログラム導入</a:t>
+                      </a:r>
+                      <a:endParaRPr lang="en-US" sz="700" dirty="0"/>
+                    </a:p>
+                    <a:p>
+                      <a:pPr indent="0" marL="0">
+                        <a:buNone/>
+                      </a:pPr>
+                      <a:r>
+                        <a:rPr lang="en-US" sz="700" dirty="0">
+                          <a:solidFill>
+                            <a:srgbClr val="000000"/>
+                          </a:solidFill>
+                        </a:rPr>
+                        <a:t>デジタル清掃記録システムの検討</a:t>
+                      </a:r>
+                      <a:endParaRPr lang="en-US" sz="700" dirty="0"/>
+                    </a:p>
+                  </a:txBody>
+                  <a:tcPr marL="91440" marR="91440" marT="45720" marB="45720">
+                    <a:lnL w="6350" cap="flat" cmpd="sng" algn="ctr">
+                      <a:solidFill>
+                        <a:srgbClr val="CCCCCC"/>
+                      </a:solidFill>
+                      <a:prstDash val="solid"/>
+                      <a:round/>
+                      <a:headEnd type="none" w="med" len="med"/>
+                      <a:tailEnd type="none" w="med" len="med"/>
+                    </a:lnL>
+                    <a:lnR w="6350" cap="flat" cmpd="sng" algn="ctr">
+                      <a:solidFill>
+                        <a:srgbClr val="CCCCCC"/>
+                      </a:solidFill>
+                      <a:prstDash val="solid"/>
+                      <a:round/>
+                      <a:headEnd type="none" w="med" len="med"/>
+                      <a:tailEnd type="none" w="med" len="med"/>
+                    </a:lnR>
+                    <a:lnT w="6350" cap="flat" cmpd="sng" algn="ctr">
+                      <a:solidFill>
+                        <a:srgbClr val="CCCCCC"/>
+                      </a:solidFill>
+                      <a:prstDash val="solid"/>
+                      <a:round/>
+                      <a:headEnd type="none" w="med" len="med"/>
+                      <a:tailEnd type="none" w="med" len="med"/>
+                    </a:lnT>
+                    <a:lnB w="6350" cap="flat" cmpd="sng" algn="ctr">
+                      <a:solidFill>
+                        <a:srgbClr val="CCCCCC"/>
+                      </a:solidFill>
+                      <a:prstDash val="solid"/>
+                      <a:round/>
+                      <a:headEnd type="none" w="med" len="med"/>
+                      <a:tailEnd type="none" w="med" len="med"/>
+                    </a:lnB>
+                    <a:solidFill>
+                      <a:srgbClr val="F5F7FA"/>
                     </a:solidFill>
                   </a:tcPr>
                 </a:tc>
@@ -7587,9 +6817,9 @@
 </p:sld>
 </file>
 
-<file path=ppt/slides/slide14.xml><?xml version="1.0" encoding="utf-8"?>
+<file path=ppt/slides/slide13.xml><?xml version="1.0" encoding="utf-8"?>
 <p:sld xmlns:a="http://schemas.openxmlformats.org/drawingml/2006/main" xmlns:r="http://schemas.openxmlformats.org/officeDocument/2006/relationships" xmlns:p="http://schemas.openxmlformats.org/presentationml/2006/main">
-  <p:cSld name="Slide 14">
+  <p:cSld name="Slide 13">
     <p:spTree>
       <p:nvGrpSpPr>
         <p:cNvPr id="1" name=""/>
@@ -8333,9 +7563,9 @@
 </p:sld>
 </file>
 
-<file path=ppt/slides/slide15.xml><?xml version="1.0" encoding="utf-8"?>
+<file path=ppt/slides/slide14.xml><?xml version="1.0" encoding="utf-8"?>
 <p:sld xmlns:a="http://schemas.openxmlformats.org/drawingml/2006/main" xmlns:r="http://schemas.openxmlformats.org/officeDocument/2006/relationships" xmlns:p="http://schemas.openxmlformats.org/presentationml/2006/main">
-  <p:cSld name="Slide 15">
+  <p:cSld name="Slide 14">
     <p:spTree>
       <p:nvGrpSpPr>
         <p:cNvPr id="1" name=""/>
@@ -9079,9 +8309,9 @@
 </p:sld>
 </file>
 
-<file path=ppt/slides/slide16.xml><?xml version="1.0" encoding="utf-8"?>
+<file path=ppt/slides/slide15.xml><?xml version="1.0" encoding="utf-8"?>
 <p:sld xmlns:a="http://schemas.openxmlformats.org/drawingml/2006/main" xmlns:r="http://schemas.openxmlformats.org/officeDocument/2006/relationships" xmlns:p="http://schemas.openxmlformats.org/presentationml/2006/main">
-  <p:cSld name="Slide 16">
+  <p:cSld name="Slide 15">
     <p:spTree>
       <p:nvGrpSpPr>
         <p:cNvPr id="1" name=""/>
@@ -9300,9 +8530,9 @@
 </p:sld>
 </file>
 
-<file path=ppt/slides/slide17.xml><?xml version="1.0" encoding="utf-8"?>
+<file path=ppt/slides/slide16.xml><?xml version="1.0" encoding="utf-8"?>
 <p:sld xmlns:a="http://schemas.openxmlformats.org/drawingml/2006/main" xmlns:r="http://schemas.openxmlformats.org/officeDocument/2006/relationships" xmlns:p="http://schemas.openxmlformats.org/presentationml/2006/main">
-  <p:cSld name="Slide 17">
+  <p:cSld name="Slide 16">
     <p:spTree>
       <p:nvGrpSpPr>
         <p:cNvPr id="1" name=""/>
@@ -9456,7 +8686,7 @@
       </p:sp>
       <p:graphicFrame>
         <p:nvGraphicFramePr>
-          <p:cNvPr id="18" name="Table 0"/>
+          <p:cNvPr id="17" name="Table 0"/>
           <p:cNvGraphicFramePr>
             <a:graphicFrameLocks noGrp="1"/>
           </p:cNvGraphicFramePr>
@@ -10296,7 +9526,7 @@
                             <a:srgbClr val="000000"/>
                           </a:solidFill>
                         </a:rPr>
-                        <a:t>78.0%</a:t>
+                        <a:t>78.2%</a:t>
                       </a:r>
                       <a:endParaRPr lang="en-US" sz="800" dirty="0"/>
                     </a:p>
@@ -10357,7 +9587,7 @@
                             <a:srgbClr val="27AE60"/>
                           </a:solidFill>
                         </a:rPr>
-                        <a:t>83.0%以上</a:t>
+                        <a:t>83.2%以上</a:t>
                       </a:r>
                       <a:endParaRPr lang="en-US" sz="800" dirty="0"/>
                     </a:p>
@@ -10757,7 +9987,7 @@
       </p:sp>
       <p:graphicFrame>
         <p:nvGraphicFramePr>
-          <p:cNvPr id="35" name="Table 1"/>
+          <p:cNvPr id="33" name="Table 1"/>
           <p:cNvGraphicFramePr>
             <a:graphicFrameLocks noGrp="1"/>
           </p:cNvGraphicFramePr>
@@ -11290,7 +10520,7 @@
                             <a:srgbClr val="000000"/>
                           </a:solidFill>
                         </a:rPr>
-                        <a:t>7.87</a:t>
+                        <a:t>7.89</a:t>
                       </a:r>
                       <a:endParaRPr lang="en-US" sz="700" dirty="0"/>
                     </a:p>
@@ -11412,7 +10642,7 @@
                             <a:srgbClr val="000000"/>
                           </a:solidFill>
                         </a:rPr>
-                        <a:t>12.5%</a:t>
+                        <a:t>12.2%</a:t>
                       </a:r>
                       <a:endParaRPr lang="en-US" sz="700" dirty="0"/>
                     </a:p>
@@ -11473,7 +10703,7 @@
                             <a:srgbClr val="27AE60"/>
                           </a:solidFill>
                         </a:rPr>
-                        <a:t>3.8%</a:t>
+                        <a:t>3.7%</a:t>
                       </a:r>
                       <a:endParaRPr lang="en-US" sz="700" dirty="0"/>
                     </a:p>
@@ -11658,7 +10888,7 @@
                             <a:srgbClr val="000000"/>
                           </a:solidFill>
                         </a:rPr>
-                        <a:t>7.02</a:t>
+                        <a:t>7.03</a:t>
                       </a:r>
                       <a:endParaRPr lang="en-US" sz="700" dirty="0"/>
                     </a:p>
@@ -11780,7 +11010,7 @@
                             <a:srgbClr val="000000"/>
                           </a:solidFill>
                         </a:rPr>
-                        <a:t>10.8%</a:t>
+                        <a:t>10.6%</a:t>
                       </a:r>
                       <a:endParaRPr lang="en-US" sz="700" dirty="0"/>
                     </a:p>
@@ -11904,7 +11134,7 @@
                             <a:srgbClr val="000000"/>
                           </a:solidFill>
                         </a:rPr>
-                        <a:t>コンフォートホテル横浜関内</a:t>
+                        <a:t>アパホテル蒲田駅東</a:t>
                       </a:r>
                       <a:endParaRPr lang="en-US" sz="700" dirty="0"/>
                     </a:p>
@@ -12026,7 +11256,7 @@
                             <a:srgbClr val="000000"/>
                           </a:solidFill>
                         </a:rPr>
-                        <a:t>7.70</a:t>
+                        <a:t>7.34</a:t>
                       </a:r>
                       <a:endParaRPr lang="en-US" sz="700" dirty="0"/>
                     </a:p>
@@ -12087,7 +11317,7 @@
                             <a:srgbClr val="27AE60"/>
                           </a:solidFill>
                         </a:rPr>
-                        <a:t>8.20</a:t>
+                        <a:t>7.80</a:t>
                       </a:r>
                       <a:endParaRPr lang="en-US" sz="700" dirty="0"/>
                     </a:p>
@@ -12148,7 +11378,7 @@
                             <a:srgbClr val="000000"/>
                           </a:solidFill>
                         </a:rPr>
-                        <a:t>10.1%</a:t>
+                        <a:t>10.6%</a:t>
                       </a:r>
                       <a:endParaRPr lang="en-US" sz="700" dirty="0"/>
                     </a:p>
@@ -12209,7 +11439,7 @@
                             <a:srgbClr val="27AE60"/>
                           </a:solidFill>
                         </a:rPr>
-                        <a:t>3.0%</a:t>
+                        <a:t>3.2%</a:t>
                       </a:r>
                       <a:endParaRPr lang="en-US" sz="700" dirty="0"/>
                     </a:p>
@@ -12640,7 +11870,7 @@
                             <a:srgbClr val="000000"/>
                           </a:solidFill>
                         </a:rPr>
-                        <a:t>アパホテル蒲田駅東</a:t>
+                        <a:t>コンフォートホテル横浜関内</a:t>
                       </a:r>
                       <a:endParaRPr lang="en-US" sz="700" dirty="0"/>
                     </a:p>
@@ -12698,10 +11928,10 @@
                       <a:r>
                         <a:rPr lang="en-US" sz="700" b="1" dirty="0">
                           <a:solidFill>
-                            <a:srgbClr val="E74C3C"/>
-                          </a:solidFill>
-                        </a:rPr>
-                        <a:t>URGENT</a:t>
+                            <a:srgbClr val="FF9800"/>
+                          </a:solidFill>
+                        </a:rPr>
+                        <a:t>HIGH</a:t>
                       </a:r>
                       <a:endParaRPr lang="en-US" sz="700" dirty="0"/>
                     </a:p>
@@ -12744,7 +11974,7 @@
                       <a:tailEnd type="none" w="med" len="med"/>
                     </a:lnB>
                     <a:solidFill>
-                      <a:srgbClr val="FFEBEE"/>
+                      <a:srgbClr val="FFF3E0"/>
                     </a:solidFill>
                   </a:tcPr>
                 </a:tc>
@@ -12762,7 +11992,7 @@
                             <a:srgbClr val="000000"/>
                           </a:solidFill>
                         </a:rPr>
-                        <a:t>7.44</a:t>
+                        <a:t>7.65</a:t>
                       </a:r>
                       <a:endParaRPr lang="en-US" sz="700" dirty="0"/>
                     </a:p>
@@ -12823,7 +12053,7 @@
                             <a:srgbClr val="27AE60"/>
                           </a:solidFill>
                         </a:rPr>
-                        <a:t>7.90</a:t>
+                        <a:t>8.20</a:t>
                       </a:r>
                       <a:endParaRPr lang="en-US" sz="700" dirty="0"/>
                     </a:p>
@@ -12884,7 +12114,7 @@
                             <a:srgbClr val="000000"/>
                           </a:solidFill>
                         </a:rPr>
-                        <a:t>8.9%</a:t>
+                        <a:t>9.4%</a:t>
                       </a:r>
                       <a:endParaRPr lang="en-US" sz="700" dirty="0"/>
                     </a:p>
@@ -12945,7 +12175,7 @@
                             <a:srgbClr val="27AE60"/>
                           </a:solidFill>
                         </a:rPr>
-                        <a:t>2.7%</a:t>
+                        <a:t>2.8%</a:t>
                       </a:r>
                       <a:endParaRPr lang="en-US" sz="700" dirty="0"/>
                     </a:p>
@@ -13130,7 +12360,7 @@
                             <a:srgbClr val="000000"/>
                           </a:solidFill>
                         </a:rPr>
-                        <a:t>8.10</a:t>
+                        <a:t>8.11</a:t>
                       </a:r>
                       <a:endParaRPr lang="en-US" sz="700" dirty="0"/>
                     </a:p>
@@ -13252,7 +12482,7 @@
                             <a:srgbClr val="000000"/>
                           </a:solidFill>
                         </a:rPr>
-                        <a:t>7.2%</a:t>
+                        <a:t>7.8%</a:t>
                       </a:r>
                       <a:endParaRPr lang="en-US" sz="700" dirty="0"/>
                     </a:p>
@@ -13313,7 +12543,7 @@
                             <a:srgbClr val="27AE60"/>
                           </a:solidFill>
                         </a:rPr>
-                        <a:t>2.2%</a:t>
+                        <a:t>2.3%</a:t>
                       </a:r>
                       <a:endParaRPr lang="en-US" sz="700" dirty="0"/>
                     </a:p>
@@ -13498,7 +12728,7 @@
                             <a:srgbClr val="000000"/>
                           </a:solidFill>
                         </a:rPr>
-                        <a:t>8.62</a:t>
+                        <a:t>8.65</a:t>
                       </a:r>
                       <a:endParaRPr lang="en-US" sz="700" dirty="0"/>
                     </a:p>
@@ -13559,7 +12789,7 @@
                             <a:srgbClr val="27AE60"/>
                           </a:solidFill>
                         </a:rPr>
-                        <a:t>9.10</a:t>
+                        <a:t>9.20</a:t>
                       </a:r>
                       <a:endParaRPr lang="en-US" sz="700" dirty="0"/>
                     </a:p>
@@ -13620,7 +12850,7 @@
                             <a:srgbClr val="000000"/>
                           </a:solidFill>
                         </a:rPr>
-                        <a:t>5.8%</a:t>
+                        <a:t>5.7%</a:t>
                       </a:r>
                       <a:endParaRPr lang="en-US" sz="700" dirty="0"/>
                     </a:p>
@@ -13988,7 +13218,7 @@
                             <a:srgbClr val="000000"/>
                           </a:solidFill>
                         </a:rPr>
-                        <a:t>5.8%</a:t>
+                        <a:t>5.7%</a:t>
                       </a:r>
                       <a:endParaRPr lang="en-US" sz="700" dirty="0"/>
                     </a:p>
@@ -14207,9 +13437,9 @@
 </p:sld>
 </file>
 
-<file path=ppt/slides/slide18.xml><?xml version="1.0" encoding="utf-8"?>
+<file path=ppt/slides/slide17.xml><?xml version="1.0" encoding="utf-8"?>
 <p:sld xmlns:a="http://schemas.openxmlformats.org/drawingml/2006/main" xmlns:r="http://schemas.openxmlformats.org/officeDocument/2006/relationships" xmlns:p="http://schemas.openxmlformats.org/presentationml/2006/main">
-  <p:cSld name="Slide 18">
+  <p:cSld name="Slide 17">
     <p:spTree>
       <p:nvGrpSpPr>
         <p:cNvPr id="1" name=""/>
@@ -14324,7 +13554,7 @@
       </p:sp>
       <p:graphicFrame>
         <p:nvGraphicFramePr>
-          <p:cNvPr id="19" name="Table 0"/>
+          <p:cNvPr id="18" name="Table 0"/>
           <p:cNvGraphicFramePr>
             <a:graphicFrameLocks noGrp="1"/>
           </p:cNvGraphicFramePr>
@@ -14796,7 +14026,7 @@
                             <a:srgbClr val="000000"/>
                           </a:solidFill>
                         </a:rPr>
-                        <a:t>5ホテル</a:t>
+                        <a:t>4ホテル</a:t>
                       </a:r>
                       <a:endParaRPr lang="en-US" sz="800" dirty="0"/>
                     </a:p>
@@ -16056,9 +15286,9 @@
 </p:sld>
 </file>
 
-<file path=ppt/slides/slide19.xml><?xml version="1.0" encoding="utf-8"?>
+<file path=ppt/slides/slide18.xml><?xml version="1.0" encoding="utf-8"?>
 <p:sld xmlns:a="http://schemas.openxmlformats.org/drawingml/2006/main" xmlns:r="http://schemas.openxmlformats.org/officeDocument/2006/relationships" xmlns:p="http://schemas.openxmlformats.org/presentationml/2006/main">
-  <p:cSld name="Slide 19">
+  <p:cSld name="Slide 18">
     <p:spTree>
       <p:nvGrpSpPr>
         <p:cNvPr id="1" name=""/>
@@ -17119,960 +16349,9 @@
 </p:sld>
 </file>
 
-<file path=ppt/slides/slide2.xml><?xml version="1.0" encoding="utf-8"?>
+<file path=ppt/slides/slide19.xml><?xml version="1.0" encoding="utf-8"?>
 <p:sld xmlns:a="http://schemas.openxmlformats.org/drawingml/2006/main" xmlns:r="http://schemas.openxmlformats.org/officeDocument/2006/relationships" xmlns:p="http://schemas.openxmlformats.org/presentationml/2006/main">
-  <p:cSld name="Slide 2">
-    <p:spTree>
-      <p:nvGrpSpPr>
-        <p:cNvPr id="1" name=""/>
-        <p:cNvGrpSpPr/>
-        <p:nvPr/>
-      </p:nvGrpSpPr>
-      <p:grpSpPr>
-        <a:xfrm>
-          <a:off x="0" y="0"/>
-          <a:ext cx="0" cy="0"/>
-          <a:chOff x="0" y="0"/>
-          <a:chExt cx="0" cy="0"/>
-        </a:xfrm>
-      </p:grpSpPr>
-      <p:sp>
-        <p:nvSpPr>
-          <p:cNvPr id="2" name="Shape 0"/>
-          <p:cNvSpPr/>
-          <p:nvPr/>
-        </p:nvSpPr>
-        <p:spPr>
-          <a:xfrm>
-            <a:off x="0" y="0"/>
-            <a:ext cx="9144000" cy="548640"/>
-          </a:xfrm>
-          <a:prstGeom prst="rect">
-            <a:avLst/>
-          </a:prstGeom>
-          <a:solidFill>
-            <a:srgbClr val="1B3A5C"/>
-          </a:solidFill>
-          <a:ln/>
-        </p:spPr>
-      </p:sp>
-      <p:sp>
-        <p:nvSpPr>
-          <p:cNvPr id="3" name="Text 1"/>
-          <p:cNvSpPr/>
-          <p:nvPr/>
-        </p:nvSpPr>
-        <p:spPr>
-          <a:xfrm>
-            <a:off x="457200" y="45720"/>
-            <a:ext cx="8229600" cy="320040"/>
-          </a:xfrm>
-          <a:prstGeom prst="rect">
-            <a:avLst/>
-          </a:prstGeom>
-          <a:noFill/>
-          <a:ln/>
-        </p:spPr>
-        <p:txBody>
-          <a:bodyPr wrap="square" lIns="0" tIns="0" rIns="0" bIns="0" rtlCol="0" anchor="ctr"/>
-          <a:lstStyle/>
-          <a:p>
-            <a:pPr indent="0" marL="0">
-              <a:buNone/>
-            </a:pPr>
-            <a:r>
-              <a:rPr lang="en-US" sz="2000" b="1" dirty="0">
-                <a:solidFill>
-                  <a:srgbClr val="FFFFFF"/>
-                </a:solidFill>
-                <a:latin typeface="Arial" pitchFamily="34" charset="0"/>
-                <a:ea typeface="Arial" pitchFamily="34" charset="-122"/>
-                <a:cs typeface="Arial" pitchFamily="34" charset="-120"/>
-              </a:rPr>
-              <a:t>エグゼクティブサマリー</a:t>
-            </a:r>
-            <a:endParaRPr lang="en-US" sz="2000" dirty="0"/>
-          </a:p>
-        </p:txBody>
-      </p:sp>
-      <p:sp>
-        <p:nvSpPr>
-          <p:cNvPr id="4" name="Text 2"/>
-          <p:cNvSpPr/>
-          <p:nvPr/>
-        </p:nvSpPr>
-        <p:spPr>
-          <a:xfrm>
-            <a:off x="457200" y="320040"/>
-            <a:ext cx="8229600" cy="201168"/>
-          </a:xfrm>
-          <a:prstGeom prst="rect">
-            <a:avLst/>
-          </a:prstGeom>
-          <a:noFill/>
-          <a:ln/>
-        </p:spPr>
-        <p:txBody>
-          <a:bodyPr wrap="square" lIns="0" tIns="0" rIns="0" bIns="0" rtlCol="0" anchor="ctr"/>
-          <a:lstStyle/>
-          <a:p>
-            <a:pPr indent="0" marL="0">
-              <a:buNone/>
-            </a:pPr>
-            <a:r>
-              <a:rPr lang="en-US" sz="1000" dirty="0">
-                <a:solidFill>
-                  <a:srgbClr val="5A9BE6"/>
-                </a:solidFill>
-                <a:latin typeface="Arial" pitchFamily="34" charset="0"/>
-                <a:ea typeface="Arial" pitchFamily="34" charset="-122"/>
-                <a:cs typeface="Arial" pitchFamily="34" charset="-120"/>
-              </a:rPr>
-              <a:t>Executive Summary</a:t>
-            </a:r>
-            <a:endParaRPr lang="en-US" sz="1000" dirty="0"/>
-          </a:p>
-        </p:txBody>
-      </p:sp>
-      <p:sp>
-        <p:nvSpPr>
-          <p:cNvPr id="5" name="Shape 3"/>
-          <p:cNvSpPr/>
-          <p:nvPr/>
-        </p:nvSpPr>
-        <p:spPr>
-          <a:xfrm>
-            <a:off x="274320" y="731520"/>
-            <a:ext cx="1920240" cy="822960"/>
-          </a:xfrm>
-          <a:prstGeom prst="rect">
-            <a:avLst/>
-          </a:prstGeom>
-          <a:solidFill>
-            <a:srgbClr val="E3F2FD"/>
-          </a:solidFill>
-          <a:ln/>
-          <a:effectLst>
-            <a:outerShdw sx="100000" sy="100000" kx="0" ky="0" algn="bl" rotWithShape="0" blurRad="50800" dist="25400" dir="8100000">
-              <a:srgbClr val="000000">
-                <a:alpha val="10000"/>
-              </a:srgbClr>
-            </a:outerShdw>
-          </a:effectLst>
-        </p:spPr>
-      </p:sp>
-      <p:sp>
-        <p:nvSpPr>
-          <p:cNvPr id="6" name="Shape 4"/>
-          <p:cNvSpPr/>
-          <p:nvPr/>
-        </p:nvSpPr>
-        <p:spPr>
-          <a:xfrm>
-            <a:off x="274320" y="731520"/>
-            <a:ext cx="1920240" cy="36576"/>
-          </a:xfrm>
-          <a:prstGeom prst="rect">
-            <a:avLst/>
-          </a:prstGeom>
-          <a:solidFill>
-            <a:srgbClr val="2E75B6"/>
-          </a:solidFill>
-          <a:ln/>
-        </p:spPr>
-      </p:sp>
-      <p:sp>
-        <p:nvSpPr>
-          <p:cNvPr id="7" name="Text 5"/>
-          <p:cNvSpPr/>
-          <p:nvPr/>
-        </p:nvSpPr>
-        <p:spPr>
-          <a:xfrm>
-            <a:off x="274320" y="841248"/>
-            <a:ext cx="1920240" cy="201168"/>
-          </a:xfrm>
-          <a:prstGeom prst="rect">
-            <a:avLst/>
-          </a:prstGeom>
-          <a:noFill/>
-          <a:ln/>
-        </p:spPr>
-        <p:txBody>
-          <a:bodyPr wrap="square" lIns="0" tIns="0" rIns="0" bIns="0" rtlCol="0" anchor="ctr"/>
-          <a:lstStyle/>
-          <a:p>
-            <a:pPr algn="ctr" indent="0" marL="0">
-              <a:buNone/>
-            </a:pPr>
-            <a:r>
-              <a:rPr lang="en-US" sz="900" dirty="0">
-                <a:solidFill>
-                  <a:srgbClr val="666666"/>
-                </a:solidFill>
-                <a:latin typeface="Arial" pitchFamily="34" charset="0"/>
-                <a:ea typeface="Arial" pitchFamily="34" charset="-122"/>
-                <a:cs typeface="Arial" pitchFamily="34" charset="-120"/>
-              </a:rPr>
-              <a:t>ポートフォリオ平均</a:t>
-            </a:r>
-            <a:endParaRPr lang="en-US" sz="900" dirty="0"/>
-          </a:p>
-        </p:txBody>
-      </p:sp>
-      <p:sp>
-        <p:nvSpPr>
-          <p:cNvPr id="8" name="Text 6"/>
-          <p:cNvSpPr/>
-          <p:nvPr/>
-        </p:nvSpPr>
-        <p:spPr>
-          <a:xfrm>
-            <a:off x="274320" y="1024128"/>
-            <a:ext cx="1920240" cy="411480"/>
-          </a:xfrm>
-          <a:prstGeom prst="rect">
-            <a:avLst/>
-          </a:prstGeom>
-          <a:noFill/>
-          <a:ln/>
-        </p:spPr>
-        <p:txBody>
-          <a:bodyPr wrap="square" lIns="0" tIns="0" rIns="0" bIns="0" rtlCol="0" anchor="ctr"/>
-          <a:lstStyle/>
-          <a:p>
-            <a:pPr algn="ctr" indent="0" marL="0">
-              <a:buNone/>
-            </a:pPr>
-            <a:r>
-              <a:rPr lang="en-US" sz="2800" b="1" dirty="0">
-                <a:solidFill>
-                  <a:srgbClr val="2E75B6"/>
-                </a:solidFill>
-                <a:latin typeface="Arial" pitchFamily="34" charset="0"/>
-                <a:ea typeface="Arial" pitchFamily="34" charset="-122"/>
-                <a:cs typeface="Arial" pitchFamily="34" charset="-120"/>
-              </a:rPr>
-              <a:t>8.38</a:t>
-            </a:r>
-            <a:endParaRPr lang="en-US" sz="2800" dirty="0"/>
-          </a:p>
-        </p:txBody>
-      </p:sp>
-      <p:sp>
-        <p:nvSpPr>
-          <p:cNvPr id="9" name="Shape 7"/>
-          <p:cNvSpPr/>
-          <p:nvPr/>
-        </p:nvSpPr>
-        <p:spPr>
-          <a:xfrm>
-            <a:off x="2423160" y="731520"/>
-            <a:ext cx="1920240" cy="822960"/>
-          </a:xfrm>
-          <a:prstGeom prst="rect">
-            <a:avLst/>
-          </a:prstGeom>
-          <a:solidFill>
-            <a:srgbClr val="E8F5E9"/>
-          </a:solidFill>
-          <a:ln/>
-          <a:effectLst>
-            <a:outerShdw sx="100000" sy="100000" kx="0" ky="0" algn="bl" rotWithShape="0" blurRad="50800" dist="25400" dir="8100000">
-              <a:srgbClr val="000000">
-                <a:alpha val="10000"/>
-              </a:srgbClr>
-            </a:outerShdw>
-          </a:effectLst>
-        </p:spPr>
-      </p:sp>
-      <p:sp>
-        <p:nvSpPr>
-          <p:cNvPr id="10" name="Shape 8"/>
-          <p:cNvSpPr/>
-          <p:nvPr/>
-        </p:nvSpPr>
-        <p:spPr>
-          <a:xfrm>
-            <a:off x="2423160" y="731520"/>
-            <a:ext cx="1920240" cy="36576"/>
-          </a:xfrm>
-          <a:prstGeom prst="rect">
-            <a:avLst/>
-          </a:prstGeom>
-          <a:solidFill>
-            <a:srgbClr val="27AE60"/>
-          </a:solidFill>
-          <a:ln/>
-        </p:spPr>
-      </p:sp>
-      <p:sp>
-        <p:nvSpPr>
-          <p:cNvPr id="11" name="Text 9"/>
-          <p:cNvSpPr/>
-          <p:nvPr/>
-        </p:nvSpPr>
-        <p:spPr>
-          <a:xfrm>
-            <a:off x="2423160" y="841248"/>
-            <a:ext cx="1920240" cy="201168"/>
-          </a:xfrm>
-          <a:prstGeom prst="rect">
-            <a:avLst/>
-          </a:prstGeom>
-          <a:noFill/>
-          <a:ln/>
-        </p:spPr>
-        <p:txBody>
-          <a:bodyPr wrap="square" lIns="0" tIns="0" rIns="0" bIns="0" rtlCol="0" anchor="ctr"/>
-          <a:lstStyle/>
-          <a:p>
-            <a:pPr algn="ctr" indent="0" marL="0">
-              <a:buNone/>
-            </a:pPr>
-            <a:r>
-              <a:rPr lang="en-US" sz="900" dirty="0">
-                <a:solidFill>
-                  <a:srgbClr val="666666"/>
-                </a:solidFill>
-                <a:latin typeface="Arial" pitchFamily="34" charset="0"/>
-                <a:ea typeface="Arial" pitchFamily="34" charset="-122"/>
-                <a:cs typeface="Arial" pitchFamily="34" charset="-120"/>
-              </a:rPr>
-              <a:t>高評価率</a:t>
-            </a:r>
-            <a:endParaRPr lang="en-US" sz="900" dirty="0"/>
-          </a:p>
-        </p:txBody>
-      </p:sp>
-      <p:sp>
-        <p:nvSpPr>
-          <p:cNvPr id="12" name="Text 10"/>
-          <p:cNvSpPr/>
-          <p:nvPr/>
-        </p:nvSpPr>
-        <p:spPr>
-          <a:xfrm>
-            <a:off x="2423160" y="1024128"/>
-            <a:ext cx="1920240" cy="411480"/>
-          </a:xfrm>
-          <a:prstGeom prst="rect">
-            <a:avLst/>
-          </a:prstGeom>
-          <a:noFill/>
-          <a:ln/>
-        </p:spPr>
-        <p:txBody>
-          <a:bodyPr wrap="square" lIns="0" tIns="0" rIns="0" bIns="0" rtlCol="0" anchor="ctr"/>
-          <a:lstStyle/>
-          <a:p>
-            <a:pPr algn="ctr" indent="0" marL="0">
-              <a:buNone/>
-            </a:pPr>
-            <a:r>
-              <a:rPr lang="en-US" sz="2800" b="1" dirty="0">
-                <a:solidFill>
-                  <a:srgbClr val="27AE60"/>
-                </a:solidFill>
-                <a:latin typeface="Arial" pitchFamily="34" charset="0"/>
-                <a:ea typeface="Arial" pitchFamily="34" charset="-122"/>
-                <a:cs typeface="Arial" pitchFamily="34" charset="-120"/>
-              </a:rPr>
-              <a:t>78%</a:t>
-            </a:r>
-            <a:endParaRPr lang="en-US" sz="2800" dirty="0"/>
-          </a:p>
-        </p:txBody>
-      </p:sp>
-      <p:sp>
-        <p:nvSpPr>
-          <p:cNvPr id="13" name="Shape 11"/>
-          <p:cNvSpPr/>
-          <p:nvPr/>
-        </p:nvSpPr>
-        <p:spPr>
-          <a:xfrm>
-            <a:off x="4572000" y="731520"/>
-            <a:ext cx="1920240" cy="822960"/>
-          </a:xfrm>
-          <a:prstGeom prst="rect">
-            <a:avLst/>
-          </a:prstGeom>
-          <a:solidFill>
-            <a:srgbClr val="FFEBEE"/>
-          </a:solidFill>
-          <a:ln/>
-          <a:effectLst>
-            <a:outerShdw sx="100000" sy="100000" kx="0" ky="0" algn="bl" rotWithShape="0" blurRad="50800" dist="25400" dir="8100000">
-              <a:srgbClr val="000000">
-                <a:alpha val="10000"/>
-              </a:srgbClr>
-            </a:outerShdw>
-          </a:effectLst>
-        </p:spPr>
-      </p:sp>
-      <p:sp>
-        <p:nvSpPr>
-          <p:cNvPr id="14" name="Shape 12"/>
-          <p:cNvSpPr/>
-          <p:nvPr/>
-        </p:nvSpPr>
-        <p:spPr>
-          <a:xfrm>
-            <a:off x="4572000" y="731520"/>
-            <a:ext cx="1920240" cy="36576"/>
-          </a:xfrm>
-          <a:prstGeom prst="rect">
-            <a:avLst/>
-          </a:prstGeom>
-          <a:solidFill>
-            <a:srgbClr val="E74C3C"/>
-          </a:solidFill>
-          <a:ln/>
-        </p:spPr>
-      </p:sp>
-      <p:sp>
-        <p:nvSpPr>
-          <p:cNvPr id="15" name="Text 13"/>
-          <p:cNvSpPr/>
-          <p:nvPr/>
-        </p:nvSpPr>
-        <p:spPr>
-          <a:xfrm>
-            <a:off x="4572000" y="841248"/>
-            <a:ext cx="1920240" cy="201168"/>
-          </a:xfrm>
-          <a:prstGeom prst="rect">
-            <a:avLst/>
-          </a:prstGeom>
-          <a:noFill/>
-          <a:ln/>
-        </p:spPr>
-        <p:txBody>
-          <a:bodyPr wrap="square" lIns="0" tIns="0" rIns="0" bIns="0" rtlCol="0" anchor="ctr"/>
-          <a:lstStyle/>
-          <a:p>
-            <a:pPr algn="ctr" indent="0" marL="0">
-              <a:buNone/>
-            </a:pPr>
-            <a:r>
-              <a:rPr lang="en-US" sz="900" dirty="0">
-                <a:solidFill>
-                  <a:srgbClr val="666666"/>
-                </a:solidFill>
-                <a:latin typeface="Arial" pitchFamily="34" charset="0"/>
-                <a:ea typeface="Arial" pitchFamily="34" charset="-122"/>
-                <a:cs typeface="Arial" pitchFamily="34" charset="-120"/>
-              </a:rPr>
-              <a:t>清掃クレーム率</a:t>
-            </a:r>
-            <a:endParaRPr lang="en-US" sz="900" dirty="0"/>
-          </a:p>
-        </p:txBody>
-      </p:sp>
-      <p:sp>
-        <p:nvSpPr>
-          <p:cNvPr id="16" name="Text 14"/>
-          <p:cNvSpPr/>
-          <p:nvPr/>
-        </p:nvSpPr>
-        <p:spPr>
-          <a:xfrm>
-            <a:off x="4572000" y="1024128"/>
-            <a:ext cx="1920240" cy="411480"/>
-          </a:xfrm>
-          <a:prstGeom prst="rect">
-            <a:avLst/>
-          </a:prstGeom>
-          <a:noFill/>
-          <a:ln/>
-        </p:spPr>
-        <p:txBody>
-          <a:bodyPr wrap="square" lIns="0" tIns="0" rIns="0" bIns="0" rtlCol="0" anchor="ctr"/>
-          <a:lstStyle/>
-          <a:p>
-            <a:pPr algn="ctr" indent="0" marL="0">
-              <a:buNone/>
-            </a:pPr>
-            <a:r>
-              <a:rPr lang="en-US" sz="2800" b="1" dirty="0">
-                <a:solidFill>
-                  <a:srgbClr val="E74C3C"/>
-                </a:solidFill>
-                <a:latin typeface="Arial" pitchFamily="34" charset="0"/>
-                <a:ea typeface="Arial" pitchFamily="34" charset="-122"/>
-                <a:cs typeface="Arial" pitchFamily="34" charset="-120"/>
-              </a:rPr>
-              <a:t>4.7%</a:t>
-            </a:r>
-            <a:endParaRPr lang="en-US" sz="2800" dirty="0"/>
-          </a:p>
-        </p:txBody>
-      </p:sp>
-      <p:sp>
-        <p:nvSpPr>
-          <p:cNvPr id="17" name="Shape 15"/>
-          <p:cNvSpPr/>
-          <p:nvPr/>
-        </p:nvSpPr>
-        <p:spPr>
-          <a:xfrm>
-            <a:off x="6720840" y="731520"/>
-            <a:ext cx="1920240" cy="822960"/>
-          </a:xfrm>
-          <a:prstGeom prst="rect">
-            <a:avLst/>
-          </a:prstGeom>
-          <a:solidFill>
-            <a:srgbClr val="F5F7FA"/>
-          </a:solidFill>
-          <a:ln/>
-          <a:effectLst>
-            <a:outerShdw sx="100000" sy="100000" kx="0" ky="0" algn="bl" rotWithShape="0" blurRad="50800" dist="25400" dir="8100000">
-              <a:srgbClr val="000000">
-                <a:alpha val="10000"/>
-              </a:srgbClr>
-            </a:outerShdw>
-          </a:effectLst>
-        </p:spPr>
-      </p:sp>
-      <p:sp>
-        <p:nvSpPr>
-          <p:cNvPr id="18" name="Shape 16"/>
-          <p:cNvSpPr/>
-          <p:nvPr/>
-        </p:nvSpPr>
-        <p:spPr>
-          <a:xfrm>
-            <a:off x="6720840" y="731520"/>
-            <a:ext cx="1920240" cy="36576"/>
-          </a:xfrm>
-          <a:prstGeom prst="rect">
-            <a:avLst/>
-          </a:prstGeom>
-          <a:solidFill>
-            <a:srgbClr val="1B3A5C"/>
-          </a:solidFill>
-          <a:ln/>
-        </p:spPr>
-      </p:sp>
-      <p:sp>
-        <p:nvSpPr>
-          <p:cNvPr id="19" name="Text 17"/>
-          <p:cNvSpPr/>
-          <p:nvPr/>
-        </p:nvSpPr>
-        <p:spPr>
-          <a:xfrm>
-            <a:off x="6720840" y="841248"/>
-            <a:ext cx="1920240" cy="201168"/>
-          </a:xfrm>
-          <a:prstGeom prst="rect">
-            <a:avLst/>
-          </a:prstGeom>
-          <a:noFill/>
-          <a:ln/>
-        </p:spPr>
-        <p:txBody>
-          <a:bodyPr wrap="square" lIns="0" tIns="0" rIns="0" bIns="0" rtlCol="0" anchor="ctr"/>
-          <a:lstStyle/>
-          <a:p>
-            <a:pPr algn="ctr" indent="0" marL="0">
-              <a:buNone/>
-            </a:pPr>
-            <a:r>
-              <a:rPr lang="en-US" sz="900" dirty="0">
-                <a:solidFill>
-                  <a:srgbClr val="666666"/>
-                </a:solidFill>
-                <a:latin typeface="Arial" pitchFamily="34" charset="0"/>
-                <a:ea typeface="Arial" pitchFamily="34" charset="-122"/>
-                <a:cs typeface="Arial" pitchFamily="34" charset="-120"/>
-              </a:rPr>
-              <a:t>レビュー総数</a:t>
-            </a:r>
-            <a:endParaRPr lang="en-US" sz="900" dirty="0"/>
-          </a:p>
-        </p:txBody>
-      </p:sp>
-      <p:sp>
-        <p:nvSpPr>
-          <p:cNvPr id="20" name="Text 18"/>
-          <p:cNvSpPr/>
-          <p:nvPr/>
-        </p:nvSpPr>
-        <p:spPr>
-          <a:xfrm>
-            <a:off x="6720840" y="1024128"/>
-            <a:ext cx="1920240" cy="411480"/>
-          </a:xfrm>
-          <a:prstGeom prst="rect">
-            <a:avLst/>
-          </a:prstGeom>
-          <a:noFill/>
-          <a:ln/>
-        </p:spPr>
-        <p:txBody>
-          <a:bodyPr wrap="square" lIns="0" tIns="0" rIns="0" bIns="0" rtlCol="0" anchor="ctr"/>
-          <a:lstStyle/>
-          <a:p>
-            <a:pPr algn="ctr" indent="0" marL="0">
-              <a:buNone/>
-            </a:pPr>
-            <a:r>
-              <a:rPr lang="en-US" sz="2800" b="1" dirty="0">
-                <a:solidFill>
-                  <a:srgbClr val="1B3A5C"/>
-                </a:solidFill>
-                <a:latin typeface="Arial" pitchFamily="34" charset="0"/>
-                <a:ea typeface="Arial" pitchFamily="34" charset="-122"/>
-                <a:cs typeface="Arial" pitchFamily="34" charset="-120"/>
-              </a:rPr>
-              <a:t>2108件</a:t>
-            </a:r>
-            <a:endParaRPr lang="en-US" sz="2800" dirty="0"/>
-          </a:p>
-        </p:txBody>
-      </p:sp>
-      <p:sp>
-        <p:nvSpPr>
-          <p:cNvPr id="21" name="Shape 19"/>
-          <p:cNvSpPr/>
-          <p:nvPr/>
-        </p:nvSpPr>
-        <p:spPr>
-          <a:xfrm>
-            <a:off x="274320" y="1828800"/>
-            <a:ext cx="8321040" cy="2560320"/>
-          </a:xfrm>
-          <a:prstGeom prst="rect">
-            <a:avLst/>
-          </a:prstGeom>
-          <a:solidFill>
-            <a:srgbClr val="F0F7FC"/>
-          </a:solidFill>
-          <a:ln w="19050">
-            <a:solidFill>
-              <a:srgbClr val="2E75B6"/>
-            </a:solidFill>
-            <a:prstDash val="solid"/>
-          </a:ln>
-          <a:effectLst>
-            <a:outerShdw sx="100000" sy="100000" kx="0" ky="0" algn="bl" rotWithShape="0" blurRad="50800" dist="25400" dir="8100000">
-              <a:srgbClr val="000000">
-                <a:alpha val="10000"/>
-              </a:srgbClr>
-            </a:outerShdw>
-          </a:effectLst>
-        </p:spPr>
-      </p:sp>
-      <p:sp>
-        <p:nvSpPr>
-          <p:cNvPr id="22" name="Text 20"/>
-          <p:cNvSpPr/>
-          <p:nvPr/>
-        </p:nvSpPr>
-        <p:spPr>
-          <a:xfrm>
-            <a:off x="457200" y="1920240"/>
-            <a:ext cx="2743200" cy="274320"/>
-          </a:xfrm>
-          <a:prstGeom prst="rect">
-            <a:avLst/>
-          </a:prstGeom>
-          <a:noFill/>
-          <a:ln/>
-        </p:spPr>
-        <p:txBody>
-          <a:bodyPr wrap="square" lIns="0" tIns="0" rIns="0" bIns="0" rtlCol="0" anchor="ctr"/>
-          <a:lstStyle/>
-          <a:p>
-            <a:pPr indent="0" marL="0">
-              <a:buNone/>
-            </a:pPr>
-            <a:r>
-              <a:rPr lang="en-US" sz="1400" b="1" dirty="0">
-                <a:solidFill>
-                  <a:srgbClr val="2E75B6"/>
-                </a:solidFill>
-                <a:latin typeface="Arial" pitchFamily="34" charset="0"/>
-                <a:ea typeface="Arial" pitchFamily="34" charset="-122"/>
-                <a:cs typeface="Arial" pitchFamily="34" charset="-120"/>
-              </a:rPr>
-              <a:t>KEY FINDINGS</a:t>
-            </a:r>
-            <a:endParaRPr lang="en-US" sz="1400" dirty="0"/>
-          </a:p>
-        </p:txBody>
-      </p:sp>
-      <p:sp>
-        <p:nvSpPr>
-          <p:cNvPr id="23" name="Text 21"/>
-          <p:cNvSpPr/>
-          <p:nvPr/>
-        </p:nvSpPr>
-        <p:spPr>
-          <a:xfrm>
-            <a:off x="457200" y="2286000"/>
-            <a:ext cx="8046720" cy="548640"/>
-          </a:xfrm>
-          <a:prstGeom prst="rect">
-            <a:avLst/>
-          </a:prstGeom>
-          <a:noFill/>
-          <a:ln/>
-        </p:spPr>
-        <p:txBody>
-          <a:bodyPr wrap="square" lIns="0" tIns="0" rIns="0" bIns="0" rtlCol="0" anchor="t"/>
-          <a:lstStyle/>
-          <a:p>
-            <a:pPr indent="0" marL="0">
-              <a:buNone/>
-            </a:pPr>
-            <a:r>
-              <a:rPr lang="en-US" sz="1000" b="1" dirty="0">
-                <a:solidFill>
-                  <a:srgbClr val="27AE60"/>
-                </a:solidFill>
-                <a:latin typeface="Arial" pitchFamily="34" charset="0"/>
-                <a:ea typeface="Arial" pitchFamily="34" charset="-122"/>
-                <a:cs typeface="Arial" pitchFamily="34" charset="-120"/>
-              </a:rPr>
-              <a:t>Strength: </a:t>
-            </a:r>
-            <a:pPr indent="0" marL="0">
-              <a:buNone/>
-            </a:pPr>
-            <a:r>
-              <a:rPr lang="en-US" sz="1000" dirty="0">
-                <a:solidFill>
-                  <a:srgbClr val="333333"/>
-                </a:solidFill>
-                <a:latin typeface="Arial" pitchFamily="34" charset="0"/>
-                <a:ea typeface="Arial" pitchFamily="34" charset="-122"/>
-                <a:cs typeface="Arial" pitchFamily="34" charset="-120"/>
-              </a:rPr>
-              <a:t>上位5ホテル平均8.7点超。コンフォートスイーツ東京ベイが9.19点で最高評価</a:t>
-            </a:r>
-            <a:endParaRPr lang="en-US" sz="1000" dirty="0"/>
-          </a:p>
-        </p:txBody>
-      </p:sp>
-      <p:sp>
-        <p:nvSpPr>
-          <p:cNvPr id="24" name="Text 22"/>
-          <p:cNvSpPr/>
-          <p:nvPr/>
-        </p:nvSpPr>
-        <p:spPr>
-          <a:xfrm>
-            <a:off x="457200" y="2926080"/>
-            <a:ext cx="8046720" cy="548640"/>
-          </a:xfrm>
-          <a:prstGeom prst="rect">
-            <a:avLst/>
-          </a:prstGeom>
-          <a:noFill/>
-          <a:ln/>
-        </p:spPr>
-        <p:txBody>
-          <a:bodyPr wrap="square" lIns="0" tIns="0" rIns="0" bIns="0" rtlCol="0" anchor="t"/>
-          <a:lstStyle/>
-          <a:p>
-            <a:pPr indent="0" marL="0">
-              <a:buNone/>
-            </a:pPr>
-            <a:r>
-              <a:rPr lang="en-US" sz="1000" b="1" dirty="0">
-                <a:solidFill>
-                  <a:srgbClr val="E74C3C"/>
-                </a:solidFill>
-                <a:latin typeface="Arial" pitchFamily="34" charset="0"/>
-                <a:ea typeface="Arial" pitchFamily="34" charset="-122"/>
-                <a:cs typeface="Arial" pitchFamily="34" charset="-120"/>
-              </a:rPr>
-              <a:t>Challenge: </a:t>
-            </a:r>
-            <a:pPr indent="0" marL="0">
-              <a:buNone/>
-            </a:pPr>
-            <a:r>
-              <a:rPr lang="en-US" sz="1000" dirty="0">
-                <a:solidFill>
-                  <a:srgbClr val="333333"/>
-                </a:solidFill>
-                <a:latin typeface="Arial" pitchFamily="34" charset="0"/>
-                <a:ea typeface="Arial" pitchFamily="34" charset="-122"/>
-                <a:cs typeface="Arial" pitchFamily="34" charset="-120"/>
-              </a:rPr>
-              <a:t>5ホテルがURGENT。清掃クレーム率4.7%（業界平均2-3%超過）</a:t>
-            </a:r>
-            <a:endParaRPr lang="en-US" sz="1000" dirty="0"/>
-          </a:p>
-        </p:txBody>
-      </p:sp>
-      <p:sp>
-        <p:nvSpPr>
-          <p:cNvPr id="25" name="Text 23"/>
-          <p:cNvSpPr/>
-          <p:nvPr/>
-        </p:nvSpPr>
-        <p:spPr>
-          <a:xfrm>
-            <a:off x="457200" y="3566160"/>
-            <a:ext cx="8046720" cy="548640"/>
-          </a:xfrm>
-          <a:prstGeom prst="rect">
-            <a:avLst/>
-          </a:prstGeom>
-          <a:noFill/>
-          <a:ln/>
-        </p:spPr>
-        <p:txBody>
-          <a:bodyPr wrap="square" lIns="0" tIns="0" rIns="0" bIns="0" rtlCol="0" anchor="t"/>
-          <a:lstStyle/>
-          <a:p>
-            <a:pPr indent="0" marL="0">
-              <a:buNone/>
-            </a:pPr>
-            <a:r>
-              <a:rPr lang="en-US" sz="1000" b="1" dirty="0">
-                <a:solidFill>
-                  <a:srgbClr val="FF9800"/>
-                </a:solidFill>
-                <a:latin typeface="Arial" pitchFamily="34" charset="0"/>
-                <a:ea typeface="Arial" pitchFamily="34" charset="-122"/>
-                <a:cs typeface="Arial" pitchFamily="34" charset="-120"/>
-              </a:rPr>
-              <a:t>Opportunity: </a:t>
-            </a:r>
-            <a:pPr indent="0" marL="0">
-              <a:buNone/>
-            </a:pPr>
-            <a:r>
-              <a:rPr lang="en-US" sz="1000" dirty="0">
-                <a:solidFill>
-                  <a:srgbClr val="333333"/>
-                </a:solidFill>
-                <a:latin typeface="Arial" pitchFamily="34" charset="0"/>
-                <a:ea typeface="Arial" pitchFamily="34" charset="-122"/>
-                <a:cs typeface="Arial" pitchFamily="34" charset="-120"/>
-              </a:rPr>
-              <a:t>清掃品質標準化によりURGENTホテル+0.5-1.0pt改善、RevPAR 5-10%向上見込み</a:t>
-            </a:r>
-            <a:endParaRPr lang="en-US" sz="1000" dirty="0"/>
-          </a:p>
-        </p:txBody>
-      </p:sp>
-      <p:sp>
-        <p:nvSpPr>
-          <p:cNvPr id="26" name="Shape 24"/>
-          <p:cNvSpPr/>
-          <p:nvPr/>
-        </p:nvSpPr>
-        <p:spPr>
-          <a:xfrm>
-            <a:off x="0" y="4800600"/>
-            <a:ext cx="9144000" cy="342900"/>
-          </a:xfrm>
-          <a:prstGeom prst="rect">
-            <a:avLst/>
-          </a:prstGeom>
-          <a:solidFill>
-            <a:srgbClr val="1B3A5C"/>
-          </a:solidFill>
-          <a:ln/>
-        </p:spPr>
-      </p:sp>
-      <p:sp>
-        <p:nvSpPr>
-          <p:cNvPr id="27" name="Text 25"/>
-          <p:cNvSpPr/>
-          <p:nvPr/>
-        </p:nvSpPr>
-        <p:spPr>
-          <a:xfrm>
-            <a:off x="457200" y="4800600"/>
-            <a:ext cx="3657600" cy="342900"/>
-          </a:xfrm>
-          <a:prstGeom prst="rect">
-            <a:avLst/>
-          </a:prstGeom>
-          <a:noFill/>
-          <a:ln/>
-        </p:spPr>
-        <p:txBody>
-          <a:bodyPr wrap="square" rtlCol="0" anchor="ctr"/>
-          <a:lstStyle/>
-          <a:p>
-            <a:pPr indent="0" marL="0">
-              <a:buNone/>
-            </a:pPr>
-            <a:r>
-              <a:rPr lang="en-US" sz="800" dirty="0">
-                <a:solidFill>
-                  <a:srgbClr val="94A3B8"/>
-                </a:solidFill>
-                <a:latin typeface="Arial" pitchFamily="34" charset="0"/>
-                <a:ea typeface="Arial" pitchFamily="34" charset="-122"/>
-                <a:cs typeface="Arial" pitchFamily="34" charset="-120"/>
-              </a:rPr>
-              <a:t>Confidential | PRIMECHANGE</a:t>
-            </a:r>
-            <a:endParaRPr lang="en-US" sz="800" dirty="0"/>
-          </a:p>
-        </p:txBody>
-      </p:sp>
-      <p:sp>
-        <p:nvSpPr>
-          <p:cNvPr id="28" name="Text 26"/>
-          <p:cNvSpPr/>
-          <p:nvPr/>
-        </p:nvSpPr>
-        <p:spPr>
-          <a:xfrm>
-            <a:off x="8229600" y="4800600"/>
-            <a:ext cx="457200" cy="342900"/>
-          </a:xfrm>
-          <a:prstGeom prst="rect">
-            <a:avLst/>
-          </a:prstGeom>
-          <a:noFill/>
-          <a:ln/>
-        </p:spPr>
-        <p:txBody>
-          <a:bodyPr wrap="square" rtlCol="0" anchor="ctr"/>
-          <a:lstStyle/>
-          <a:p>
-            <a:pPr algn="r" indent="0" marL="0">
-              <a:buNone/>
-            </a:pPr>
-            <a:r>
-              <a:rPr lang="en-US" sz="800" dirty="0">
-                <a:solidFill>
-                  <a:srgbClr val="94A3B8"/>
-                </a:solidFill>
-                <a:latin typeface="Arial" pitchFamily="34" charset="0"/>
-                <a:ea typeface="Arial" pitchFamily="34" charset="-122"/>
-                <a:cs typeface="Arial" pitchFamily="34" charset="-120"/>
-              </a:rPr>
-              <a:t>2</a:t>
-            </a:r>
-            <a:endParaRPr lang="en-US" sz="800" dirty="0"/>
-          </a:p>
-        </p:txBody>
-      </p:sp>
-    </p:spTree>
-  </p:cSld>
-  <p:clrMapOvr>
-    <a:masterClrMapping/>
-  </p:clrMapOvr>
-</p:sld>
-</file>
-
-<file path=ppt/slides/slide20.xml><?xml version="1.0" encoding="utf-8"?>
-<p:sld xmlns:a="http://schemas.openxmlformats.org/drawingml/2006/main" xmlns:r="http://schemas.openxmlformats.org/officeDocument/2006/relationships" xmlns:p="http://schemas.openxmlformats.org/presentationml/2006/main">
-  <p:cSld name="Slide 20">
+  <p:cSld name="Slide 19">
     <p:spTree>
       <p:nvGrpSpPr>
         <p:cNvPr id="1" name=""/>
@@ -18720,6 +16999,957 @@
 </p:sld>
 </file>
 
+<file path=ppt/slides/slide2.xml><?xml version="1.0" encoding="utf-8"?>
+<p:sld xmlns:a="http://schemas.openxmlformats.org/drawingml/2006/main" xmlns:r="http://schemas.openxmlformats.org/officeDocument/2006/relationships" xmlns:p="http://schemas.openxmlformats.org/presentationml/2006/main">
+  <p:cSld name="Slide 2">
+    <p:spTree>
+      <p:nvGrpSpPr>
+        <p:cNvPr id="1" name=""/>
+        <p:cNvGrpSpPr/>
+        <p:nvPr/>
+      </p:nvGrpSpPr>
+      <p:grpSpPr>
+        <a:xfrm>
+          <a:off x="0" y="0"/>
+          <a:ext cx="0" cy="0"/>
+          <a:chOff x="0" y="0"/>
+          <a:chExt cx="0" cy="0"/>
+        </a:xfrm>
+      </p:grpSpPr>
+      <p:sp>
+        <p:nvSpPr>
+          <p:cNvPr id="2" name="Shape 0"/>
+          <p:cNvSpPr/>
+          <p:nvPr/>
+        </p:nvSpPr>
+        <p:spPr>
+          <a:xfrm>
+            <a:off x="0" y="0"/>
+            <a:ext cx="9144000" cy="548640"/>
+          </a:xfrm>
+          <a:prstGeom prst="rect">
+            <a:avLst/>
+          </a:prstGeom>
+          <a:solidFill>
+            <a:srgbClr val="1B3A5C"/>
+          </a:solidFill>
+          <a:ln/>
+        </p:spPr>
+      </p:sp>
+      <p:sp>
+        <p:nvSpPr>
+          <p:cNvPr id="3" name="Text 1"/>
+          <p:cNvSpPr/>
+          <p:nvPr/>
+        </p:nvSpPr>
+        <p:spPr>
+          <a:xfrm>
+            <a:off x="457200" y="45720"/>
+            <a:ext cx="8229600" cy="320040"/>
+          </a:xfrm>
+          <a:prstGeom prst="rect">
+            <a:avLst/>
+          </a:prstGeom>
+          <a:noFill/>
+          <a:ln/>
+        </p:spPr>
+        <p:txBody>
+          <a:bodyPr wrap="square" lIns="0" tIns="0" rIns="0" bIns="0" rtlCol="0" anchor="ctr"/>
+          <a:lstStyle/>
+          <a:p>
+            <a:pPr indent="0" marL="0">
+              <a:buNone/>
+            </a:pPr>
+            <a:r>
+              <a:rPr lang="en-US" sz="2000" b="1" dirty="0">
+                <a:solidFill>
+                  <a:srgbClr val="FFFFFF"/>
+                </a:solidFill>
+                <a:latin typeface="Arial" pitchFamily="34" charset="0"/>
+                <a:ea typeface="Arial" pitchFamily="34" charset="-122"/>
+                <a:cs typeface="Arial" pitchFamily="34" charset="-120"/>
+              </a:rPr>
+              <a:t>エグゼクティブサマリー</a:t>
+            </a:r>
+            <a:endParaRPr lang="en-US" sz="2000" dirty="0"/>
+          </a:p>
+        </p:txBody>
+      </p:sp>
+      <p:sp>
+        <p:nvSpPr>
+          <p:cNvPr id="4" name="Text 2"/>
+          <p:cNvSpPr/>
+          <p:nvPr/>
+        </p:nvSpPr>
+        <p:spPr>
+          <a:xfrm>
+            <a:off x="457200" y="320040"/>
+            <a:ext cx="8229600" cy="201168"/>
+          </a:xfrm>
+          <a:prstGeom prst="rect">
+            <a:avLst/>
+          </a:prstGeom>
+          <a:noFill/>
+          <a:ln/>
+        </p:spPr>
+        <p:txBody>
+          <a:bodyPr wrap="square" lIns="0" tIns="0" rIns="0" bIns="0" rtlCol="0" anchor="ctr"/>
+          <a:lstStyle/>
+          <a:p>
+            <a:pPr indent="0" marL="0">
+              <a:buNone/>
+            </a:pPr>
+            <a:r>
+              <a:rPr lang="en-US" sz="1000" dirty="0">
+                <a:solidFill>
+                  <a:srgbClr val="5A9BE6"/>
+                </a:solidFill>
+                <a:latin typeface="Arial" pitchFamily="34" charset="0"/>
+                <a:ea typeface="Arial" pitchFamily="34" charset="-122"/>
+                <a:cs typeface="Arial" pitchFamily="34" charset="-120"/>
+              </a:rPr>
+              <a:t>Executive Summary</a:t>
+            </a:r>
+            <a:endParaRPr lang="en-US" sz="1000" dirty="0"/>
+          </a:p>
+        </p:txBody>
+      </p:sp>
+      <p:sp>
+        <p:nvSpPr>
+          <p:cNvPr id="5" name="Shape 3"/>
+          <p:cNvSpPr/>
+          <p:nvPr/>
+        </p:nvSpPr>
+        <p:spPr>
+          <a:xfrm>
+            <a:off x="274320" y="731520"/>
+            <a:ext cx="1920240" cy="822960"/>
+          </a:xfrm>
+          <a:prstGeom prst="rect">
+            <a:avLst/>
+          </a:prstGeom>
+          <a:solidFill>
+            <a:srgbClr val="E3F2FD"/>
+          </a:solidFill>
+          <a:ln/>
+          <a:effectLst>
+            <a:outerShdw sx="100000" sy="100000" kx="0" ky="0" algn="bl" rotWithShape="0" blurRad="50800" dist="25400" dir="8100000">
+              <a:srgbClr val="000000">
+                <a:alpha val="10000"/>
+              </a:srgbClr>
+            </a:outerShdw>
+          </a:effectLst>
+        </p:spPr>
+      </p:sp>
+      <p:sp>
+        <p:nvSpPr>
+          <p:cNvPr id="6" name="Shape 4"/>
+          <p:cNvSpPr/>
+          <p:nvPr/>
+        </p:nvSpPr>
+        <p:spPr>
+          <a:xfrm>
+            <a:off x="274320" y="731520"/>
+            <a:ext cx="1920240" cy="36576"/>
+          </a:xfrm>
+          <a:prstGeom prst="rect">
+            <a:avLst/>
+          </a:prstGeom>
+          <a:solidFill>
+            <a:srgbClr val="2E75B6"/>
+          </a:solidFill>
+          <a:ln/>
+        </p:spPr>
+      </p:sp>
+      <p:sp>
+        <p:nvSpPr>
+          <p:cNvPr id="7" name="Text 5"/>
+          <p:cNvSpPr/>
+          <p:nvPr/>
+        </p:nvSpPr>
+        <p:spPr>
+          <a:xfrm>
+            <a:off x="274320" y="841248"/>
+            <a:ext cx="1920240" cy="201168"/>
+          </a:xfrm>
+          <a:prstGeom prst="rect">
+            <a:avLst/>
+          </a:prstGeom>
+          <a:noFill/>
+          <a:ln/>
+        </p:spPr>
+        <p:txBody>
+          <a:bodyPr wrap="square" lIns="0" tIns="0" rIns="0" bIns="0" rtlCol="0" anchor="ctr"/>
+          <a:lstStyle/>
+          <a:p>
+            <a:pPr algn="ctr" indent="0" marL="0">
+              <a:buNone/>
+            </a:pPr>
+            <a:r>
+              <a:rPr lang="en-US" sz="900" dirty="0">
+                <a:solidFill>
+                  <a:srgbClr val="666666"/>
+                </a:solidFill>
+                <a:latin typeface="Arial" pitchFamily="34" charset="0"/>
+                <a:ea typeface="Arial" pitchFamily="34" charset="-122"/>
+                <a:cs typeface="Arial" pitchFamily="34" charset="-120"/>
+              </a:rPr>
+              <a:t>ポートフォリオ平均</a:t>
+            </a:r>
+            <a:endParaRPr lang="en-US" sz="900" dirty="0"/>
+          </a:p>
+        </p:txBody>
+      </p:sp>
+      <p:sp>
+        <p:nvSpPr>
+          <p:cNvPr id="8" name="Text 6"/>
+          <p:cNvSpPr/>
+          <p:nvPr/>
+        </p:nvSpPr>
+        <p:spPr>
+          <a:xfrm>
+            <a:off x="274320" y="1024128"/>
+            <a:ext cx="1920240" cy="411480"/>
+          </a:xfrm>
+          <a:prstGeom prst="rect">
+            <a:avLst/>
+          </a:prstGeom>
+          <a:noFill/>
+          <a:ln/>
+        </p:spPr>
+        <p:txBody>
+          <a:bodyPr wrap="square" lIns="0" tIns="0" rIns="0" bIns="0" rtlCol="0" anchor="ctr"/>
+          <a:lstStyle/>
+          <a:p>
+            <a:pPr algn="ctr" indent="0" marL="0">
+              <a:buNone/>
+            </a:pPr>
+            <a:r>
+              <a:rPr lang="en-US" sz="2800" b="1" dirty="0">
+                <a:solidFill>
+                  <a:srgbClr val="2E75B6"/>
+                </a:solidFill>
+                <a:latin typeface="Arial" pitchFamily="34" charset="0"/>
+                <a:ea typeface="Arial" pitchFamily="34" charset="-122"/>
+                <a:cs typeface="Arial" pitchFamily="34" charset="-120"/>
+              </a:rPr>
+              <a:t>8.38</a:t>
+            </a:r>
+            <a:endParaRPr lang="en-US" sz="2800" dirty="0"/>
+          </a:p>
+        </p:txBody>
+      </p:sp>
+      <p:sp>
+        <p:nvSpPr>
+          <p:cNvPr id="9" name="Shape 7"/>
+          <p:cNvSpPr/>
+          <p:nvPr/>
+        </p:nvSpPr>
+        <p:spPr>
+          <a:xfrm>
+            <a:off x="2423160" y="731520"/>
+            <a:ext cx="1920240" cy="822960"/>
+          </a:xfrm>
+          <a:prstGeom prst="rect">
+            <a:avLst/>
+          </a:prstGeom>
+          <a:solidFill>
+            <a:srgbClr val="E8F5E9"/>
+          </a:solidFill>
+          <a:ln/>
+          <a:effectLst>
+            <a:outerShdw sx="100000" sy="100000" kx="0" ky="0" algn="bl" rotWithShape="0" blurRad="50800" dist="25400" dir="8100000">
+              <a:srgbClr val="000000">
+                <a:alpha val="10000"/>
+              </a:srgbClr>
+            </a:outerShdw>
+          </a:effectLst>
+        </p:spPr>
+      </p:sp>
+      <p:sp>
+        <p:nvSpPr>
+          <p:cNvPr id="10" name="Shape 8"/>
+          <p:cNvSpPr/>
+          <p:nvPr/>
+        </p:nvSpPr>
+        <p:spPr>
+          <a:xfrm>
+            <a:off x="2423160" y="731520"/>
+            <a:ext cx="1920240" cy="36576"/>
+          </a:xfrm>
+          <a:prstGeom prst="rect">
+            <a:avLst/>
+          </a:prstGeom>
+          <a:solidFill>
+            <a:srgbClr val="27AE60"/>
+          </a:solidFill>
+          <a:ln/>
+        </p:spPr>
+      </p:sp>
+      <p:sp>
+        <p:nvSpPr>
+          <p:cNvPr id="11" name="Text 9"/>
+          <p:cNvSpPr/>
+          <p:nvPr/>
+        </p:nvSpPr>
+        <p:spPr>
+          <a:xfrm>
+            <a:off x="2423160" y="841248"/>
+            <a:ext cx="1920240" cy="201168"/>
+          </a:xfrm>
+          <a:prstGeom prst="rect">
+            <a:avLst/>
+          </a:prstGeom>
+          <a:noFill/>
+          <a:ln/>
+        </p:spPr>
+        <p:txBody>
+          <a:bodyPr wrap="square" lIns="0" tIns="0" rIns="0" bIns="0" rtlCol="0" anchor="ctr"/>
+          <a:lstStyle/>
+          <a:p>
+            <a:pPr algn="ctr" indent="0" marL="0">
+              <a:buNone/>
+            </a:pPr>
+            <a:r>
+              <a:rPr lang="en-US" sz="900" dirty="0">
+                <a:solidFill>
+                  <a:srgbClr val="666666"/>
+                </a:solidFill>
+                <a:latin typeface="Arial" pitchFamily="34" charset="0"/>
+                <a:ea typeface="Arial" pitchFamily="34" charset="-122"/>
+                <a:cs typeface="Arial" pitchFamily="34" charset="-120"/>
+              </a:rPr>
+              <a:t>高評価率</a:t>
+            </a:r>
+            <a:endParaRPr lang="en-US" sz="900" dirty="0"/>
+          </a:p>
+        </p:txBody>
+      </p:sp>
+      <p:sp>
+        <p:nvSpPr>
+          <p:cNvPr id="12" name="Text 10"/>
+          <p:cNvSpPr/>
+          <p:nvPr/>
+        </p:nvSpPr>
+        <p:spPr>
+          <a:xfrm>
+            <a:off x="2423160" y="1024128"/>
+            <a:ext cx="1920240" cy="411480"/>
+          </a:xfrm>
+          <a:prstGeom prst="rect">
+            <a:avLst/>
+          </a:prstGeom>
+          <a:noFill/>
+          <a:ln/>
+        </p:spPr>
+        <p:txBody>
+          <a:bodyPr wrap="square" lIns="0" tIns="0" rIns="0" bIns="0" rtlCol="0" anchor="ctr"/>
+          <a:lstStyle/>
+          <a:p>
+            <a:pPr algn="ctr" indent="0" marL="0">
+              <a:buNone/>
+            </a:pPr>
+            <a:r>
+              <a:rPr lang="en-US" sz="2800" b="1" dirty="0">
+                <a:solidFill>
+                  <a:srgbClr val="27AE60"/>
+                </a:solidFill>
+                <a:latin typeface="Arial" pitchFamily="34" charset="0"/>
+                <a:ea typeface="Arial" pitchFamily="34" charset="-122"/>
+                <a:cs typeface="Arial" pitchFamily="34" charset="-120"/>
+              </a:rPr>
+              <a:t>78.2%</a:t>
+            </a:r>
+            <a:endParaRPr lang="en-US" sz="2800" dirty="0"/>
+          </a:p>
+        </p:txBody>
+      </p:sp>
+      <p:sp>
+        <p:nvSpPr>
+          <p:cNvPr id="13" name="Shape 11"/>
+          <p:cNvSpPr/>
+          <p:nvPr/>
+        </p:nvSpPr>
+        <p:spPr>
+          <a:xfrm>
+            <a:off x="4572000" y="731520"/>
+            <a:ext cx="1920240" cy="822960"/>
+          </a:xfrm>
+          <a:prstGeom prst="rect">
+            <a:avLst/>
+          </a:prstGeom>
+          <a:solidFill>
+            <a:srgbClr val="FFEBEE"/>
+          </a:solidFill>
+          <a:ln/>
+          <a:effectLst>
+            <a:outerShdw sx="100000" sy="100000" kx="0" ky="0" algn="bl" rotWithShape="0" blurRad="50800" dist="25400" dir="8100000">
+              <a:srgbClr val="000000">
+                <a:alpha val="10000"/>
+              </a:srgbClr>
+            </a:outerShdw>
+          </a:effectLst>
+        </p:spPr>
+      </p:sp>
+      <p:sp>
+        <p:nvSpPr>
+          <p:cNvPr id="14" name="Shape 12"/>
+          <p:cNvSpPr/>
+          <p:nvPr/>
+        </p:nvSpPr>
+        <p:spPr>
+          <a:xfrm>
+            <a:off x="4572000" y="731520"/>
+            <a:ext cx="1920240" cy="36576"/>
+          </a:xfrm>
+          <a:prstGeom prst="rect">
+            <a:avLst/>
+          </a:prstGeom>
+          <a:solidFill>
+            <a:srgbClr val="E74C3C"/>
+          </a:solidFill>
+          <a:ln/>
+        </p:spPr>
+      </p:sp>
+      <p:sp>
+        <p:nvSpPr>
+          <p:cNvPr id="15" name="Text 13"/>
+          <p:cNvSpPr/>
+          <p:nvPr/>
+        </p:nvSpPr>
+        <p:spPr>
+          <a:xfrm>
+            <a:off x="4572000" y="841248"/>
+            <a:ext cx="1920240" cy="201168"/>
+          </a:xfrm>
+          <a:prstGeom prst="rect">
+            <a:avLst/>
+          </a:prstGeom>
+          <a:noFill/>
+          <a:ln/>
+        </p:spPr>
+        <p:txBody>
+          <a:bodyPr wrap="square" lIns="0" tIns="0" rIns="0" bIns="0" rtlCol="0" anchor="ctr"/>
+          <a:lstStyle/>
+          <a:p>
+            <a:pPr algn="ctr" indent="0" marL="0">
+              <a:buNone/>
+            </a:pPr>
+            <a:r>
+              <a:rPr lang="en-US" sz="900" dirty="0">
+                <a:solidFill>
+                  <a:srgbClr val="666666"/>
+                </a:solidFill>
+                <a:latin typeface="Arial" pitchFamily="34" charset="0"/>
+                <a:ea typeface="Arial" pitchFamily="34" charset="-122"/>
+                <a:cs typeface="Arial" pitchFamily="34" charset="-120"/>
+              </a:rPr>
+              <a:t>清掃クレーム率</a:t>
+            </a:r>
+            <a:endParaRPr lang="en-US" sz="900" dirty="0"/>
+          </a:p>
+        </p:txBody>
+      </p:sp>
+      <p:sp>
+        <p:nvSpPr>
+          <p:cNvPr id="16" name="Text 14"/>
+          <p:cNvSpPr/>
+          <p:nvPr/>
+        </p:nvSpPr>
+        <p:spPr>
+          <a:xfrm>
+            <a:off x="4572000" y="1024128"/>
+            <a:ext cx="1920240" cy="411480"/>
+          </a:xfrm>
+          <a:prstGeom prst="rect">
+            <a:avLst/>
+          </a:prstGeom>
+          <a:noFill/>
+          <a:ln/>
+        </p:spPr>
+        <p:txBody>
+          <a:bodyPr wrap="square" lIns="0" tIns="0" rIns="0" bIns="0" rtlCol="0" anchor="ctr"/>
+          <a:lstStyle/>
+          <a:p>
+            <a:pPr algn="ctr" indent="0" marL="0">
+              <a:buNone/>
+            </a:pPr>
+            <a:r>
+              <a:rPr lang="en-US" sz="2800" b="1" dirty="0">
+                <a:solidFill>
+                  <a:srgbClr val="E74C3C"/>
+                </a:solidFill>
+                <a:latin typeface="Arial" pitchFamily="34" charset="0"/>
+                <a:ea typeface="Arial" pitchFamily="34" charset="-122"/>
+                <a:cs typeface="Arial" pitchFamily="34" charset="-120"/>
+              </a:rPr>
+              <a:t>4.7%</a:t>
+            </a:r>
+            <a:endParaRPr lang="en-US" sz="2800" dirty="0"/>
+          </a:p>
+        </p:txBody>
+      </p:sp>
+      <p:sp>
+        <p:nvSpPr>
+          <p:cNvPr id="17" name="Shape 15"/>
+          <p:cNvSpPr/>
+          <p:nvPr/>
+        </p:nvSpPr>
+        <p:spPr>
+          <a:xfrm>
+            <a:off x="6720840" y="731520"/>
+            <a:ext cx="1920240" cy="822960"/>
+          </a:xfrm>
+          <a:prstGeom prst="rect">
+            <a:avLst/>
+          </a:prstGeom>
+          <a:solidFill>
+            <a:srgbClr val="F5F7FA"/>
+          </a:solidFill>
+          <a:ln/>
+          <a:effectLst>
+            <a:outerShdw sx="100000" sy="100000" kx="0" ky="0" algn="bl" rotWithShape="0" blurRad="50800" dist="25400" dir="8100000">
+              <a:srgbClr val="000000">
+                <a:alpha val="10000"/>
+              </a:srgbClr>
+            </a:outerShdw>
+          </a:effectLst>
+        </p:spPr>
+      </p:sp>
+      <p:sp>
+        <p:nvSpPr>
+          <p:cNvPr id="18" name="Shape 16"/>
+          <p:cNvSpPr/>
+          <p:nvPr/>
+        </p:nvSpPr>
+        <p:spPr>
+          <a:xfrm>
+            <a:off x="6720840" y="731520"/>
+            <a:ext cx="1920240" cy="36576"/>
+          </a:xfrm>
+          <a:prstGeom prst="rect">
+            <a:avLst/>
+          </a:prstGeom>
+          <a:solidFill>
+            <a:srgbClr val="1B3A5C"/>
+          </a:solidFill>
+          <a:ln/>
+        </p:spPr>
+      </p:sp>
+      <p:sp>
+        <p:nvSpPr>
+          <p:cNvPr id="19" name="Text 17"/>
+          <p:cNvSpPr/>
+          <p:nvPr/>
+        </p:nvSpPr>
+        <p:spPr>
+          <a:xfrm>
+            <a:off x="6720840" y="841248"/>
+            <a:ext cx="1920240" cy="201168"/>
+          </a:xfrm>
+          <a:prstGeom prst="rect">
+            <a:avLst/>
+          </a:prstGeom>
+          <a:noFill/>
+          <a:ln/>
+        </p:spPr>
+        <p:txBody>
+          <a:bodyPr wrap="square" lIns="0" tIns="0" rIns="0" bIns="0" rtlCol="0" anchor="ctr"/>
+          <a:lstStyle/>
+          <a:p>
+            <a:pPr algn="ctr" indent="0" marL="0">
+              <a:buNone/>
+            </a:pPr>
+            <a:r>
+              <a:rPr lang="en-US" sz="900" dirty="0">
+                <a:solidFill>
+                  <a:srgbClr val="666666"/>
+                </a:solidFill>
+                <a:latin typeface="Arial" pitchFamily="34" charset="0"/>
+                <a:ea typeface="Arial" pitchFamily="34" charset="-122"/>
+                <a:cs typeface="Arial" pitchFamily="34" charset="-120"/>
+              </a:rPr>
+              <a:t>レビュー総数</a:t>
+            </a:r>
+            <a:endParaRPr lang="en-US" sz="900" dirty="0"/>
+          </a:p>
+        </p:txBody>
+      </p:sp>
+      <p:sp>
+        <p:nvSpPr>
+          <p:cNvPr id="20" name="Text 18"/>
+          <p:cNvSpPr/>
+          <p:nvPr/>
+        </p:nvSpPr>
+        <p:spPr>
+          <a:xfrm>
+            <a:off x="6720840" y="1024128"/>
+            <a:ext cx="1920240" cy="411480"/>
+          </a:xfrm>
+          <a:prstGeom prst="rect">
+            <a:avLst/>
+          </a:prstGeom>
+          <a:noFill/>
+          <a:ln/>
+        </p:spPr>
+        <p:txBody>
+          <a:bodyPr wrap="square" lIns="0" tIns="0" rIns="0" bIns="0" rtlCol="0" anchor="ctr"/>
+          <a:lstStyle/>
+          <a:p>
+            <a:pPr algn="ctr" indent="0" marL="0">
+              <a:buNone/>
+            </a:pPr>
+            <a:r>
+              <a:rPr lang="en-US" sz="2800" b="1" dirty="0">
+                <a:solidFill>
+                  <a:srgbClr val="1B3A5C"/>
+                </a:solidFill>
+                <a:latin typeface="Arial" pitchFamily="34" charset="0"/>
+                <a:ea typeface="Arial" pitchFamily="34" charset="-122"/>
+                <a:cs typeface="Arial" pitchFamily="34" charset="-120"/>
+              </a:rPr>
+              <a:t>2157件</a:t>
+            </a:r>
+            <a:endParaRPr lang="en-US" sz="2800" dirty="0"/>
+          </a:p>
+        </p:txBody>
+      </p:sp>
+      <p:sp>
+        <p:nvSpPr>
+          <p:cNvPr id="21" name="Shape 19"/>
+          <p:cNvSpPr/>
+          <p:nvPr/>
+        </p:nvSpPr>
+        <p:spPr>
+          <a:xfrm>
+            <a:off x="274320" y="1828800"/>
+            <a:ext cx="8321040" cy="2560320"/>
+          </a:xfrm>
+          <a:prstGeom prst="rect">
+            <a:avLst/>
+          </a:prstGeom>
+          <a:solidFill>
+            <a:srgbClr val="F0F7FC"/>
+          </a:solidFill>
+          <a:ln w="19050">
+            <a:solidFill>
+              <a:srgbClr val="2E75B6"/>
+            </a:solidFill>
+            <a:prstDash val="solid"/>
+          </a:ln>
+          <a:effectLst>
+            <a:outerShdw sx="100000" sy="100000" kx="0" ky="0" algn="bl" rotWithShape="0" blurRad="50800" dist="25400" dir="8100000">
+              <a:srgbClr val="000000">
+                <a:alpha val="10000"/>
+              </a:srgbClr>
+            </a:outerShdw>
+          </a:effectLst>
+        </p:spPr>
+      </p:sp>
+      <p:sp>
+        <p:nvSpPr>
+          <p:cNvPr id="22" name="Text 20"/>
+          <p:cNvSpPr/>
+          <p:nvPr/>
+        </p:nvSpPr>
+        <p:spPr>
+          <a:xfrm>
+            <a:off x="457200" y="1920240"/>
+            <a:ext cx="2743200" cy="274320"/>
+          </a:xfrm>
+          <a:prstGeom prst="rect">
+            <a:avLst/>
+          </a:prstGeom>
+          <a:noFill/>
+          <a:ln/>
+        </p:spPr>
+        <p:txBody>
+          <a:bodyPr wrap="square" lIns="0" tIns="0" rIns="0" bIns="0" rtlCol="0" anchor="ctr"/>
+          <a:lstStyle/>
+          <a:p>
+            <a:pPr indent="0" marL="0">
+              <a:buNone/>
+            </a:pPr>
+            <a:r>
+              <a:rPr lang="en-US" sz="1400" b="1" dirty="0">
+                <a:solidFill>
+                  <a:srgbClr val="2E75B6"/>
+                </a:solidFill>
+                <a:latin typeface="Arial" pitchFamily="34" charset="0"/>
+                <a:ea typeface="Arial" pitchFamily="34" charset="-122"/>
+                <a:cs typeface="Arial" pitchFamily="34" charset="-120"/>
+              </a:rPr>
+              <a:t>KEY FINDINGS</a:t>
+            </a:r>
+            <a:endParaRPr lang="en-US" sz="1400" dirty="0"/>
+          </a:p>
+        </p:txBody>
+      </p:sp>
+      <p:sp>
+        <p:nvSpPr>
+          <p:cNvPr id="23" name="Text 21"/>
+          <p:cNvSpPr/>
+          <p:nvPr/>
+        </p:nvSpPr>
+        <p:spPr>
+          <a:xfrm>
+            <a:off x="457200" y="2286000"/>
+            <a:ext cx="8046720" cy="548640"/>
+          </a:xfrm>
+          <a:prstGeom prst="rect">
+            <a:avLst/>
+          </a:prstGeom>
+          <a:noFill/>
+          <a:ln/>
+        </p:spPr>
+        <p:txBody>
+          <a:bodyPr wrap="square" lIns="0" tIns="0" rIns="0" bIns="0" rtlCol="0" anchor="t"/>
+          <a:lstStyle/>
+          <a:p>
+            <a:pPr indent="0" marL="0">
+              <a:buNone/>
+            </a:pPr>
+            <a:r>
+              <a:rPr lang="en-US" sz="1000" b="1" dirty="0">
+                <a:solidFill>
+                  <a:srgbClr val="27AE60"/>
+                </a:solidFill>
+                <a:latin typeface="Arial" pitchFamily="34" charset="0"/>
+                <a:ea typeface="Arial" pitchFamily="34" charset="-122"/>
+                <a:cs typeface="Arial" pitchFamily="34" charset="-120"/>
+              </a:rPr>
+              <a:t>Strength: </a:t>
+            </a:r>
+            <a:pPr indent="0" marL="0">
+              <a:buNone/>
+            </a:pPr>
+            <a:r>
+              <a:rPr lang="en-US" sz="1000" dirty="0">
+                <a:solidFill>
+                  <a:srgbClr val="333333"/>
+                </a:solidFill>
+                <a:latin typeface="Arial" pitchFamily="34" charset="0"/>
+                <a:ea typeface="Arial" pitchFamily="34" charset="-122"/>
+                <a:cs typeface="Arial" pitchFamily="34" charset="-120"/>
+              </a:rPr>
+              <a:t>上位5ホテル平均8.7点超。コンフォートスイーツ東京ベイが9.18点で最高評価</a:t>
+            </a:r>
+            <a:endParaRPr lang="en-US" sz="1000" dirty="0"/>
+          </a:p>
+        </p:txBody>
+      </p:sp>
+      <p:sp>
+        <p:nvSpPr>
+          <p:cNvPr id="24" name="Text 22"/>
+          <p:cNvSpPr/>
+          <p:nvPr/>
+        </p:nvSpPr>
+        <p:spPr>
+          <a:xfrm>
+            <a:off x="457200" y="2926080"/>
+            <a:ext cx="8046720" cy="548640"/>
+          </a:xfrm>
+          <a:prstGeom prst="rect">
+            <a:avLst/>
+          </a:prstGeom>
+          <a:noFill/>
+          <a:ln/>
+        </p:spPr>
+        <p:txBody>
+          <a:bodyPr wrap="square" lIns="0" tIns="0" rIns="0" bIns="0" rtlCol="0" anchor="t"/>
+          <a:lstStyle/>
+          <a:p>
+            <a:pPr indent="0" marL="0">
+              <a:buNone/>
+            </a:pPr>
+            <a:r>
+              <a:rPr lang="en-US" sz="1000" b="1" dirty="0">
+                <a:solidFill>
+                  <a:srgbClr val="E74C3C"/>
+                </a:solidFill>
+                <a:latin typeface="Arial" pitchFamily="34" charset="0"/>
+                <a:ea typeface="Arial" pitchFamily="34" charset="-122"/>
+                <a:cs typeface="Arial" pitchFamily="34" charset="-120"/>
+              </a:rPr>
+              <a:t>Challenge: </a:t>
+            </a:r>
+            <a:pPr indent="0" marL="0">
+              <a:buNone/>
+            </a:pPr>
+            <a:r>
+              <a:rPr lang="en-US" sz="1000" dirty="0">
+                <a:solidFill>
+                  <a:srgbClr val="333333"/>
+                </a:solidFill>
+                <a:latin typeface="Arial" pitchFamily="34" charset="0"/>
+                <a:ea typeface="Arial" pitchFamily="34" charset="-122"/>
+                <a:cs typeface="Arial" pitchFamily="34" charset="-120"/>
+              </a:rPr>
+              <a:t>4ホテルがURGENT。清掃クレーム率4.7%（業界平均2-3%超過）</a:t>
+            </a:r>
+            <a:endParaRPr lang="en-US" sz="1000" dirty="0"/>
+          </a:p>
+        </p:txBody>
+      </p:sp>
+      <p:sp>
+        <p:nvSpPr>
+          <p:cNvPr id="25" name="Text 23"/>
+          <p:cNvSpPr/>
+          <p:nvPr/>
+        </p:nvSpPr>
+        <p:spPr>
+          <a:xfrm>
+            <a:off x="457200" y="3566160"/>
+            <a:ext cx="8046720" cy="548640"/>
+          </a:xfrm>
+          <a:prstGeom prst="rect">
+            <a:avLst/>
+          </a:prstGeom>
+          <a:noFill/>
+          <a:ln/>
+        </p:spPr>
+        <p:txBody>
+          <a:bodyPr wrap="square" lIns="0" tIns="0" rIns="0" bIns="0" rtlCol="0" anchor="t"/>
+          <a:lstStyle/>
+          <a:p>
+            <a:pPr indent="0" marL="0">
+              <a:buNone/>
+            </a:pPr>
+            <a:r>
+              <a:rPr lang="en-US" sz="1000" b="1" dirty="0">
+                <a:solidFill>
+                  <a:srgbClr val="FF9800"/>
+                </a:solidFill>
+                <a:latin typeface="Arial" pitchFamily="34" charset="0"/>
+                <a:ea typeface="Arial" pitchFamily="34" charset="-122"/>
+                <a:cs typeface="Arial" pitchFamily="34" charset="-120"/>
+              </a:rPr>
+              <a:t>Opportunity: </a:t>
+            </a:r>
+            <a:pPr indent="0" marL="0">
+              <a:buNone/>
+            </a:pPr>
+            <a:r>
+              <a:rPr lang="en-US" sz="1000" dirty="0">
+                <a:solidFill>
+                  <a:srgbClr val="333333"/>
+                </a:solidFill>
+                <a:latin typeface="Arial" pitchFamily="34" charset="0"/>
+                <a:ea typeface="Arial" pitchFamily="34" charset="-122"/>
+                <a:cs typeface="Arial" pitchFamily="34" charset="-120"/>
+              </a:rPr>
+              <a:t>清掃品質標準化によりURGENTホテル+0.5-1.0pt改善、RevPAR 5-10%向上見込み</a:t>
+            </a:r>
+            <a:endParaRPr lang="en-US" sz="1000" dirty="0"/>
+          </a:p>
+        </p:txBody>
+      </p:sp>
+      <p:sp>
+        <p:nvSpPr>
+          <p:cNvPr id="26" name="Shape 24"/>
+          <p:cNvSpPr/>
+          <p:nvPr/>
+        </p:nvSpPr>
+        <p:spPr>
+          <a:xfrm>
+            <a:off x="0" y="4800600"/>
+            <a:ext cx="9144000" cy="342900"/>
+          </a:xfrm>
+          <a:prstGeom prst="rect">
+            <a:avLst/>
+          </a:prstGeom>
+          <a:solidFill>
+            <a:srgbClr val="1B3A5C"/>
+          </a:solidFill>
+          <a:ln/>
+        </p:spPr>
+      </p:sp>
+      <p:sp>
+        <p:nvSpPr>
+          <p:cNvPr id="27" name="Text 25"/>
+          <p:cNvSpPr/>
+          <p:nvPr/>
+        </p:nvSpPr>
+        <p:spPr>
+          <a:xfrm>
+            <a:off x="457200" y="4800600"/>
+            <a:ext cx="3657600" cy="342900"/>
+          </a:xfrm>
+          <a:prstGeom prst="rect">
+            <a:avLst/>
+          </a:prstGeom>
+          <a:noFill/>
+          <a:ln/>
+        </p:spPr>
+        <p:txBody>
+          <a:bodyPr wrap="square" rtlCol="0" anchor="ctr"/>
+          <a:lstStyle/>
+          <a:p>
+            <a:pPr indent="0" marL="0">
+              <a:buNone/>
+            </a:pPr>
+            <a:r>
+              <a:rPr lang="en-US" sz="800" dirty="0">
+                <a:solidFill>
+                  <a:srgbClr val="94A3B8"/>
+                </a:solidFill>
+                <a:latin typeface="Arial" pitchFamily="34" charset="0"/>
+                <a:ea typeface="Arial" pitchFamily="34" charset="-122"/>
+                <a:cs typeface="Arial" pitchFamily="34" charset="-120"/>
+              </a:rPr>
+              <a:t>Confidential | PRIMECHANGE</a:t>
+            </a:r>
+            <a:endParaRPr lang="en-US" sz="800" dirty="0"/>
+          </a:p>
+        </p:txBody>
+      </p:sp>
+      <p:sp>
+        <p:nvSpPr>
+          <p:cNvPr id="28" name="Text 26"/>
+          <p:cNvSpPr/>
+          <p:nvPr/>
+        </p:nvSpPr>
+        <p:spPr>
+          <a:xfrm>
+            <a:off x="8229600" y="4800600"/>
+            <a:ext cx="457200" cy="342900"/>
+          </a:xfrm>
+          <a:prstGeom prst="rect">
+            <a:avLst/>
+          </a:prstGeom>
+          <a:noFill/>
+          <a:ln/>
+        </p:spPr>
+        <p:txBody>
+          <a:bodyPr wrap="square" rtlCol="0" anchor="ctr"/>
+          <a:lstStyle/>
+          <a:p>
+            <a:pPr algn="r" indent="0" marL="0">
+              <a:buNone/>
+            </a:pPr>
+            <a:r>
+              <a:rPr lang="en-US" sz="800" dirty="0">
+                <a:solidFill>
+                  <a:srgbClr val="94A3B8"/>
+                </a:solidFill>
+                <a:latin typeface="Arial" pitchFamily="34" charset="0"/>
+                <a:ea typeface="Arial" pitchFamily="34" charset="-122"/>
+                <a:cs typeface="Arial" pitchFamily="34" charset="-120"/>
+              </a:rPr>
+              <a:t>2</a:t>
+            </a:r>
+            <a:endParaRPr lang="en-US" sz="800" dirty="0"/>
+          </a:p>
+        </p:txBody>
+      </p:sp>
+    </p:spTree>
+  </p:cSld>
+  <p:clrMapOvr>
+    <a:masterClrMapping/>
+  </p:clrMapOvr>
+</p:sld>
+</file>
+
 <file path=ppt/slides/slide3.xml><?xml version="1.0" encoding="utf-8"?>
 <p:sld xmlns:a="http://schemas.openxmlformats.org/drawingml/2006/main" xmlns:r="http://schemas.openxmlformats.org/officeDocument/2006/relationships" xmlns:p="http://schemas.openxmlformats.org/presentationml/2006/main">
   <p:cSld name="Slide 3">
@@ -19370,7 +18600,7 @@
                             <a:srgbClr val="000000"/>
                           </a:solidFill>
                         </a:rPr>
-                        <a:t>9.19</a:t>
+                        <a:t>9.18</a:t>
                       </a:r>
                       <a:endParaRPr lang="en-US" sz="700" dirty="0"/>
                     </a:p>
@@ -19431,7 +18661,7 @@
                             <a:srgbClr val="000000"/>
                           </a:solidFill>
                         </a:rPr>
-                        <a:t>92.5%</a:t>
+                        <a:t>92.6%</a:t>
                       </a:r>
                       <a:endParaRPr lang="en-US" sz="700" dirty="0"/>
                     </a:p>
@@ -19738,7 +18968,7 @@
                             <a:srgbClr val="000000"/>
                           </a:solidFill>
                         </a:rPr>
-                        <a:t>9.03</a:t>
+                        <a:t>9.06</a:t>
                       </a:r>
                       <a:endParaRPr lang="en-US" sz="700" dirty="0"/>
                     </a:p>
@@ -19799,7 +19029,7 @@
                             <a:srgbClr val="000000"/>
                           </a:solidFill>
                         </a:rPr>
-                        <a:t>89.7%</a:t>
+                        <a:t>90.1%</a:t>
                       </a:r>
                       <a:endParaRPr lang="en-US" sz="700" dirty="0"/>
                     </a:p>
@@ -20106,7 +19336,7 @@
                             <a:srgbClr val="000000"/>
                           </a:solidFill>
                         </a:rPr>
-                        <a:t>9.00</a:t>
+                        <a:t>9.03</a:t>
                       </a:r>
                       <a:endParaRPr lang="en-US" sz="700" dirty="0"/>
                     </a:p>
@@ -20167,7 +19397,7 @@
                             <a:srgbClr val="000000"/>
                           </a:solidFill>
                         </a:rPr>
-                        <a:t>87.3%</a:t>
+                        <a:t>87.9%</a:t>
                       </a:r>
                       <a:endParaRPr lang="en-US" sz="700" dirty="0"/>
                     </a:p>
@@ -20474,7 +19704,7 @@
                             <a:srgbClr val="000000"/>
                           </a:solidFill>
                         </a:rPr>
-                        <a:t>8.93</a:t>
+                        <a:t>8.91</a:t>
                       </a:r>
                       <a:endParaRPr lang="en-US" sz="700" dirty="0"/>
                     </a:p>
@@ -20535,7 +19765,7 @@
                             <a:srgbClr val="000000"/>
                           </a:solidFill>
                         </a:rPr>
-                        <a:t>84.8%</a:t>
+                        <a:t>84.3%</a:t>
                       </a:r>
                       <a:endParaRPr lang="en-US" sz="700" dirty="0"/>
                     </a:p>
@@ -20842,7 +20072,7 @@
                             <a:srgbClr val="000000"/>
                           </a:solidFill>
                         </a:rPr>
-                        <a:t>8.88</a:t>
+                        <a:t>8.90</a:t>
                       </a:r>
                       <a:endParaRPr lang="en-US" sz="700" dirty="0"/>
                     </a:p>
@@ -20903,7 +20133,7 @@
                             <a:srgbClr val="000000"/>
                           </a:solidFill>
                         </a:rPr>
-                        <a:t>84.0%</a:t>
+                        <a:t>84.3%</a:t>
                       </a:r>
                       <a:endParaRPr lang="en-US" sz="700" dirty="0"/>
                     </a:p>
@@ -21149,7 +20379,7 @@
                             <a:srgbClr val="000000"/>
                           </a:solidFill>
                         </a:rPr>
-                        <a:t>ホテルケヤキゲート東京府中</a:t>
+                        <a:t>ホテルコメント横浜関内</a:t>
                       </a:r>
                       <a:endParaRPr lang="en-US" sz="700" dirty="0"/>
                     </a:p>
@@ -21271,7 +20501,7 @@
                             <a:srgbClr val="000000"/>
                           </a:solidFill>
                         </a:rPr>
-                        <a:t>86.7%</a:t>
+                        <a:t>82.9%</a:t>
                       </a:r>
                       <a:endParaRPr lang="en-US" sz="700" dirty="0"/>
                     </a:p>
@@ -21329,10 +20559,10 @@
                       <a:r>
                         <a:rPr lang="en-US" sz="700" b="1" dirty="0">
                           <a:solidFill>
-                            <a:srgbClr val="2196F3"/>
-                          </a:solidFill>
-                        </a:rPr>
-                        <a:t>STANDARD</a:t>
+                            <a:srgbClr val="FF9800"/>
+                          </a:solidFill>
+                        </a:rPr>
+                        <a:t>HIGH</a:t>
                       </a:r>
                       <a:endParaRPr lang="en-US" sz="700" dirty="0"/>
                     </a:p>
@@ -21375,7 +20605,7 @@
                       <a:tailEnd type="none" w="med" len="med"/>
                     </a:lnB>
                     <a:solidFill>
-                      <a:srgbClr val="E3F2FD"/>
+                      <a:srgbClr val="FFF3E0"/>
                     </a:solidFill>
                   </a:tcPr>
                 </a:tc>
@@ -21517,7 +20747,7 @@
                             <a:srgbClr val="000000"/>
                           </a:solidFill>
                         </a:rPr>
-                        <a:t>ホテルコメント横浜関内</a:t>
+                        <a:t>ホテルケヤキゲート東京府中</a:t>
                       </a:r>
                       <a:endParaRPr lang="en-US" sz="700" dirty="0"/>
                     </a:p>
@@ -21578,7 +20808,7 @@
                             <a:srgbClr val="000000"/>
                           </a:solidFill>
                         </a:rPr>
-                        <a:t>8.81</a:t>
+                        <a:t>8.77</a:t>
                       </a:r>
                       <a:endParaRPr lang="en-US" sz="700" dirty="0"/>
                     </a:p>
@@ -21639,7 +20869,7 @@
                             <a:srgbClr val="000000"/>
                           </a:solidFill>
                         </a:rPr>
-                        <a:t>82.5%</a:t>
+                        <a:t>85.7%</a:t>
                       </a:r>
                       <a:endParaRPr lang="en-US" sz="700" dirty="0"/>
                     </a:p>
@@ -21697,10 +20927,10 @@
                       <a:r>
                         <a:rPr lang="en-US" sz="700" b="1" dirty="0">
                           <a:solidFill>
-                            <a:srgbClr val="FF9800"/>
-                          </a:solidFill>
-                        </a:rPr>
-                        <a:t>HIGH</a:t>
+                            <a:srgbClr val="2196F3"/>
+                          </a:solidFill>
+                        </a:rPr>
+                        <a:t>STANDARD</a:t>
                       </a:r>
                       <a:endParaRPr lang="en-US" sz="700" dirty="0"/>
                     </a:p>
@@ -21743,7 +20973,7 @@
                       <a:tailEnd type="none" w="med" len="med"/>
                     </a:lnB>
                     <a:solidFill>
-                      <a:srgbClr val="FFF3E0"/>
+                      <a:srgbClr val="E3F2FD"/>
                     </a:solidFill>
                   </a:tcPr>
                 </a:tc>
@@ -21946,7 +21176,7 @@
                             <a:srgbClr val="000000"/>
                           </a:solidFill>
                         </a:rPr>
-                        <a:t>8.65</a:t>
+                        <a:t>8.66</a:t>
                       </a:r>
                       <a:endParaRPr lang="en-US" sz="700" dirty="0"/>
                     </a:p>
@@ -22007,7 +21237,7 @@
                             <a:srgbClr val="000000"/>
                           </a:solidFill>
                         </a:rPr>
-                        <a:t>85.3%</a:t>
+                        <a:t>85.7%</a:t>
                       </a:r>
                       <a:endParaRPr lang="en-US" sz="700" dirty="0"/>
                     </a:p>
@@ -22253,7 +21483,7 @@
                             <a:srgbClr val="000000"/>
                           </a:solidFill>
                         </a:rPr>
-                        <a:t>ハートンホテル東品川</a:t>
+                        <a:t>川崎日航ホテル</a:t>
                       </a:r>
                       <a:endParaRPr lang="en-US" sz="700" dirty="0"/>
                     </a:p>
@@ -22314,7 +21544,7 @@
                             <a:srgbClr val="000000"/>
                           </a:solidFill>
                         </a:rPr>
-                        <a:t>8.62</a:t>
+                        <a:t>8.65</a:t>
                       </a:r>
                       <a:endParaRPr lang="en-US" sz="700" dirty="0"/>
                     </a:p>
@@ -22375,7 +21605,7 @@
                             <a:srgbClr val="000000"/>
                           </a:solidFill>
                         </a:rPr>
-                        <a:t>83.9%</a:t>
+                        <a:t>80.5%</a:t>
                       </a:r>
                       <a:endParaRPr lang="en-US" sz="700" dirty="0"/>
                     </a:p>
@@ -22433,10 +21663,10 @@
                       <a:r>
                         <a:rPr lang="en-US" sz="700" b="1" dirty="0">
                           <a:solidFill>
-                            <a:srgbClr val="2196F3"/>
-                          </a:solidFill>
-                        </a:rPr>
-                        <a:t>STANDARD</a:t>
+                            <a:srgbClr val="FF9800"/>
+                          </a:solidFill>
+                        </a:rPr>
+                        <a:t>HIGH</a:t>
                       </a:r>
                       <a:endParaRPr lang="en-US" sz="700" dirty="0"/>
                     </a:p>
@@ -22479,7 +21709,7 @@
                       <a:tailEnd type="none" w="med" len="med"/>
                     </a:lnB>
                     <a:solidFill>
-                      <a:srgbClr val="E3F2FD"/>
+                      <a:srgbClr val="FFF3E0"/>
                     </a:solidFill>
                   </a:tcPr>
                 </a:tc>
@@ -22621,7 +21851,7 @@
                             <a:srgbClr val="000000"/>
                           </a:solidFill>
                         </a:rPr>
-                        <a:t>川崎日航ホテル</a:t>
+                        <a:t>ハートンホテル東品川</a:t>
                       </a:r>
                       <a:endParaRPr lang="en-US" sz="700" dirty="0"/>
                     </a:p>
@@ -22682,7 +21912,7 @@
                             <a:srgbClr val="000000"/>
                           </a:solidFill>
                         </a:rPr>
-                        <a:t>8.62</a:t>
+                        <a:t>8.63</a:t>
                       </a:r>
                       <a:endParaRPr lang="en-US" sz="700" dirty="0"/>
                     </a:p>
@@ -22743,7 +21973,7 @@
                             <a:srgbClr val="000000"/>
                           </a:solidFill>
                         </a:rPr>
-                        <a:t>80.0%</a:t>
+                        <a:t>83.5%</a:t>
                       </a:r>
                       <a:endParaRPr lang="en-US" sz="700" dirty="0"/>
                     </a:p>
@@ -22801,10 +22031,10 @@
                       <a:r>
                         <a:rPr lang="en-US" sz="700" b="1" dirty="0">
                           <a:solidFill>
-                            <a:srgbClr val="FF9800"/>
-                          </a:solidFill>
-                        </a:rPr>
-                        <a:t>HIGH</a:t>
+                            <a:srgbClr val="2196F3"/>
+                          </a:solidFill>
+                        </a:rPr>
+                        <a:t>STANDARD</a:t>
                       </a:r>
                       <a:endParaRPr lang="en-US" sz="700" dirty="0"/>
                     </a:p>
@@ -22847,7 +22077,7 @@
                       <a:tailEnd type="none" w="med" len="med"/>
                     </a:lnB>
                     <a:solidFill>
-                      <a:srgbClr val="FFF3E0"/>
+                      <a:srgbClr val="E3F2FD"/>
                     </a:solidFill>
                   </a:tcPr>
                 </a:tc>
@@ -23050,7 +22280,7 @@
                             <a:srgbClr val="000000"/>
                           </a:solidFill>
                         </a:rPr>
-                        <a:t>8.60</a:t>
+                        <a:t>8.59</a:t>
                       </a:r>
                       <a:endParaRPr lang="en-US" sz="700" dirty="0"/>
                     </a:p>
@@ -23111,7 +22341,7 @@
                             <a:srgbClr val="000000"/>
                           </a:solidFill>
                         </a:rPr>
-                        <a:t>80.7%</a:t>
+                        <a:t>81.0%</a:t>
                       </a:r>
                       <a:endParaRPr lang="en-US" sz="700" dirty="0"/>
                     </a:p>
@@ -23418,7 +22648,7 @@
                             <a:srgbClr val="000000"/>
                           </a:solidFill>
                         </a:rPr>
-                        <a:t>8.25</a:t>
+                        <a:t>8.27</a:t>
                       </a:r>
                       <a:endParaRPr lang="en-US" sz="700" dirty="0"/>
                     </a:p>
@@ -23479,7 +22709,7 @@
                             <a:srgbClr val="000000"/>
                           </a:solidFill>
                         </a:rPr>
-                        <a:t>75.6%</a:t>
+                        <a:t>75.7%</a:t>
                       </a:r>
                       <a:endParaRPr lang="en-US" sz="700" dirty="0"/>
                     </a:p>
@@ -24154,7 +23384,7 @@
                             <a:srgbClr val="000000"/>
                           </a:solidFill>
                         </a:rPr>
-                        <a:t>8.10</a:t>
+                        <a:t>8.11</a:t>
                       </a:r>
                       <a:endParaRPr lang="en-US" sz="700" dirty="0"/>
                     </a:p>
@@ -24522,7 +23752,7 @@
                             <a:srgbClr val="000000"/>
                           </a:solidFill>
                         </a:rPr>
-                        <a:t>7.87</a:t>
+                        <a:t>7.89</a:t>
                       </a:r>
                       <a:endParaRPr lang="en-US" sz="700" dirty="0"/>
                     </a:p>
@@ -24583,7 +23813,7 @@
                             <a:srgbClr val="000000"/>
                           </a:solidFill>
                         </a:rPr>
-                        <a:t>67.6%</a:t>
+                        <a:t>68.3%</a:t>
                       </a:r>
                       <a:endParaRPr lang="en-US" sz="700" dirty="0"/>
                     </a:p>
@@ -24890,7 +24120,7 @@
                             <a:srgbClr val="000000"/>
                           </a:solidFill>
                         </a:rPr>
-                        <a:t>7.70</a:t>
+                        <a:t>7.65</a:t>
                       </a:r>
                       <a:endParaRPr lang="en-US" sz="700" dirty="0"/>
                     </a:p>
@@ -25009,10 +24239,10 @@
                       <a:r>
                         <a:rPr lang="en-US" sz="700" b="1" dirty="0">
                           <a:solidFill>
-                            <a:srgbClr val="E74C3C"/>
-                          </a:solidFill>
-                        </a:rPr>
-                        <a:t>URGENT</a:t>
+                            <a:srgbClr val="FF9800"/>
+                          </a:solidFill>
+                        </a:rPr>
+                        <a:t>HIGH</a:t>
                       </a:r>
                       <a:endParaRPr lang="en-US" sz="700" dirty="0"/>
                     </a:p>
@@ -25055,7 +24285,7 @@
                       <a:tailEnd type="none" w="med" len="med"/>
                     </a:lnB>
                     <a:solidFill>
-                      <a:srgbClr val="FFEBEE"/>
+                      <a:srgbClr val="FFF3E0"/>
                     </a:solidFill>
                   </a:tcPr>
                 </a:tc>
@@ -25258,7 +24488,7 @@
                             <a:srgbClr val="000000"/>
                           </a:solidFill>
                         </a:rPr>
-                        <a:t>7.44</a:t>
+                        <a:t>7.34</a:t>
                       </a:r>
                       <a:endParaRPr lang="en-US" sz="700" dirty="0"/>
                     </a:p>
@@ -25319,7 +24549,7 @@
                             <a:srgbClr val="000000"/>
                           </a:solidFill>
                         </a:rPr>
-                        <a:t>64.4%</a:t>
+                        <a:t>61.7%</a:t>
                       </a:r>
                       <a:endParaRPr lang="en-US" sz="700" dirty="0"/>
                     </a:p>
@@ -25565,7 +24795,7 @@
                             <a:srgbClr val="000000"/>
                           </a:solidFill>
                         </a:rPr>
-                        <a:t>コートホテル新横浜</a:t>
+                        <a:t>チサンホテル浜松町</a:t>
                       </a:r>
                       <a:endParaRPr lang="en-US" sz="700" dirty="0"/>
                     </a:p>
@@ -25687,7 +24917,7 @@
                             <a:srgbClr val="000000"/>
                           </a:solidFill>
                         </a:rPr>
-                        <a:t>50.8%</a:t>
+                        <a:t>57.6%</a:t>
                       </a:r>
                       <a:endParaRPr lang="en-US" sz="700" dirty="0"/>
                     </a:p>
@@ -25933,7 +25163,7 @@
                             <a:srgbClr val="000000"/>
                           </a:solidFill>
                         </a:rPr>
-                        <a:t>チサンホテル浜松町</a:t>
+                        <a:t>コートホテル新横浜</a:t>
                       </a:r>
                       <a:endParaRPr lang="en-US" sz="700" dirty="0"/>
                     </a:p>
@@ -25994,7 +25224,7 @@
                             <a:srgbClr val="000000"/>
                           </a:solidFill>
                         </a:rPr>
-                        <a:t>7.02</a:t>
+                        <a:t>7.03</a:t>
                       </a:r>
                       <a:endParaRPr lang="en-US" sz="700" dirty="0"/>
                     </a:p>
@@ -26055,7 +25285,7 @@
                             <a:srgbClr val="000000"/>
                           </a:solidFill>
                         </a:rPr>
-                        <a:t>56.9%</a:t>
+                        <a:t>50.8%</a:t>
                       </a:r>
                       <a:endParaRPr lang="en-US" sz="700" dirty="0"/>
                     </a:p>
@@ -26569,7 +25799,7 @@
                 <a:ea typeface="Arial" pitchFamily="34" charset="-122"/>
                 <a:cs typeface="Arial" pitchFamily="34" charset="-120"/>
               </a:rPr>
-              <a:t>100件</a:t>
+              <a:t>101件</a:t>
             </a:r>
             <a:endParaRPr lang="en-US" sz="2800" dirty="0"/>
           </a:p>
@@ -27421,7 +26651,7 @@
                             <a:srgbClr val="000000"/>
                           </a:solidFill>
                         </a:rPr>
-                        <a:t>25</a:t>
+                        <a:t>24</a:t>
                       </a:r>
                       <a:endParaRPr lang="en-US" sz="800" dirty="0"/>
                     </a:p>
@@ -27852,7 +27082,7 @@
                             <a:srgbClr val="000000"/>
                           </a:solidFill>
                         </a:rPr>
-                        <a:t>タバコ関連</a:t>
+                        <a:t>カビ・モールド</a:t>
                       </a:r>
                       <a:endParaRPr lang="en-US" sz="800" dirty="0"/>
                     </a:p>
@@ -27974,7 +27204,7 @@
                             <a:srgbClr val="000000"/>
                           </a:solidFill>
                         </a:rPr>
-                        <a:t>8/19</a:t>
+                        <a:t>5/19</a:t>
                       </a:r>
                       <a:endParaRPr lang="en-US" sz="800" dirty="0"/>
                     </a:p>
@@ -28098,7 +27328,7 @@
                             <a:srgbClr val="000000"/>
                           </a:solidFill>
                         </a:rPr>
-                        <a:t>カビ・モールド</a:t>
+                        <a:t>タバコ関連</a:t>
                       </a:r>
                       <a:endParaRPr lang="en-US" sz="800" dirty="0"/>
                     </a:p>
@@ -28159,7 +27389,7 @@
                             <a:srgbClr val="000000"/>
                           </a:solidFill>
                         </a:rPr>
-                        <a:t>7</a:t>
+                        <a:t>8</a:t>
                       </a:r>
                       <a:endParaRPr lang="en-US" sz="800" dirty="0"/>
                     </a:p>
@@ -28220,7 +27450,7 @@
                             <a:srgbClr val="000000"/>
                           </a:solidFill>
                         </a:rPr>
-                        <a:t>5/19</a:t>
+                        <a:t>8/19</a:t>
                       </a:r>
                       <a:endParaRPr lang="en-US" sz="800" dirty="0"/>
                     </a:p>
@@ -29143,7 +28373,7 @@
                             <a:srgbClr val="000000"/>
                           </a:solidFill>
                         </a:rPr>
-                        <a:t>5</a:t>
+                        <a:t>6</a:t>
                       </a:r>
                       <a:endParaRPr lang="en-US" sz="800" dirty="0"/>
                     </a:p>
@@ -29262,10 +28492,10 @@
                       <a:r>
                         <a:rPr lang="en-US" sz="800" b="1" dirty="0">
                           <a:solidFill>
-                            <a:srgbClr val="666666"/>
-                          </a:solidFill>
-                        </a:rPr>
-                        <a:t>MEDIUM</a:t>
+                            <a:srgbClr val="FF9800"/>
+                          </a:solidFill>
+                        </a:rPr>
+                        <a:t>HIGH</a:t>
                       </a:r>
                       <a:endParaRPr lang="en-US" sz="800" dirty="0"/>
                     </a:p>
@@ -29635,7 +28865,7 @@
                             <a:srgbClr val="000000"/>
                           </a:solidFill>
                         </a:rPr>
-                        <a:t>2</a:t>
+                        <a:t>3</a:t>
                       </a:r>
                       <a:endParaRPr lang="en-US" sz="800" dirty="0"/>
                     </a:p>
@@ -29757,7 +28987,7 @@
                             <a:srgbClr val="666666"/>
                           </a:solidFill>
                         </a:rPr>
-                        <a:t>LOW</a:t>
+                        <a:t>MEDIUM</a:t>
                       </a:r>
                       <a:endParaRPr lang="en-US" sz="800" dirty="0"/>
                     </a:p>
@@ -30382,7 +29612,7 @@
                             <a:srgbClr val="FFFFFF"/>
                           </a:solidFill>
                         </a:rPr>
-                        <a:t>タバコ関連</a:t>
+                        <a:t>カビ・モー</a:t>
                       </a:r>
                       <a:endParaRPr lang="en-US" sz="600" dirty="0"/>
                     </a:p>
@@ -30443,7 +29673,7 @@
                             <a:srgbClr val="FFFFFF"/>
                           </a:solidFill>
                         </a:rPr>
-                        <a:t>カビ・モー</a:t>
+                        <a:t>タバコ関連</a:t>
                       </a:r>
                       <a:endParaRPr lang="en-US" sz="600" dirty="0"/>
                     </a:p>
@@ -30866,7 +30096,7 @@
                             <a:srgbClr val="333333"/>
                           </a:solidFill>
                         </a:rPr>
-                        <a:t>1</a:t>
+                        <a:t>2</a:t>
                       </a:r>
                       <a:endParaRPr lang="en-US" sz="700" dirty="0"/>
                     </a:p>
@@ -30927,7 +30157,7 @@
                             <a:srgbClr val="333333"/>
                           </a:solidFill>
                         </a:rPr>
-                        <a:t>2</a:t>
+                        <a:t>1</a:t>
                       </a:r>
                       <a:endParaRPr lang="en-US" sz="700" dirty="0"/>
                     </a:p>
@@ -31350,7 +30580,7 @@
                             <a:srgbClr val="333333"/>
                           </a:solidFill>
                         </a:rPr>
-                        <a:t>1</a:t>
+                        <a:t>-</a:t>
                       </a:r>
                       <a:endParaRPr lang="en-US" sz="700" dirty="0"/>
                     </a:p>
@@ -31393,7 +30623,7 @@
                       <a:tailEnd type="none" w="med" len="med"/>
                     </a:lnB>
                     <a:solidFill>
-                      <a:srgbClr val="FFF9C4"/>
+                      <a:srgbClr val="FFFFFF"/>
                     </a:solidFill>
                   </a:tcPr>
                 </a:tc>
@@ -31411,7 +30641,7 @@
                             <a:srgbClr val="333333"/>
                           </a:solidFill>
                         </a:rPr>
-                        <a:t>-</a:t>
+                        <a:t>1</a:t>
                       </a:r>
                       <a:endParaRPr lang="en-US" sz="700" dirty="0"/>
                     </a:p>
@@ -31454,7 +30684,7 @@
                       <a:tailEnd type="none" w="med" len="med"/>
                     </a:lnB>
                     <a:solidFill>
-                      <a:srgbClr val="FFFFFF"/>
+                      <a:srgbClr val="FFF9C4"/>
                     </a:solidFill>
                   </a:tcPr>
                 </a:tc>
@@ -31535,7 +30765,7 @@
                             <a:srgbClr val="000000"/>
                           </a:solidFill>
                         </a:rPr>
-                        <a:t>コンフォートホテル横浜関内</a:t>
+                        <a:t>アパホテル蒲田駅東</a:t>
                       </a:r>
                       <a:endParaRPr lang="en-US" sz="700" dirty="0"/>
                     </a:p>
@@ -31593,7 +30823,7 @@
                             <a:srgbClr val="000000"/>
                           </a:solidFill>
                         </a:rPr>
-                        <a:t>14</a:t>
+                        <a:t>5</a:t>
                       </a:r>
                       <a:endParaRPr lang="en-US" sz="700" dirty="0"/>
                     </a:p>
@@ -31651,7 +30881,491 @@
                             <a:srgbClr val="E74C3C"/>
                           </a:solidFill>
                         </a:rPr>
-                        <a:t>6</a:t>
+                        <a:t>3</a:t>
+                      </a:r>
+                      <a:endParaRPr lang="en-US" sz="700" dirty="0"/>
+                    </a:p>
+                  </a:txBody>
+                  <a:tcPr marL="91440" marR="91440" marT="45720" marB="45720">
+                    <a:lnL w="6350" cap="flat" cmpd="sng" algn="ctr">
+                      <a:solidFill>
+                        <a:srgbClr val="CCCCCC"/>
+                      </a:solidFill>
+                      <a:prstDash val="solid"/>
+                      <a:round/>
+                      <a:headEnd type="none" w="med" len="med"/>
+                      <a:tailEnd type="none" w="med" len="med"/>
+                    </a:lnL>
+                    <a:lnR w="6350" cap="flat" cmpd="sng" algn="ctr">
+                      <a:solidFill>
+                        <a:srgbClr val="CCCCCC"/>
+                      </a:solidFill>
+                      <a:prstDash val="solid"/>
+                      <a:round/>
+                      <a:headEnd type="none" w="med" len="med"/>
+                      <a:tailEnd type="none" w="med" len="med"/>
+                    </a:lnR>
+                    <a:lnT w="6350" cap="flat" cmpd="sng" algn="ctr">
+                      <a:solidFill>
+                        <a:srgbClr val="CCCCCC"/>
+                      </a:solidFill>
+                      <a:prstDash val="solid"/>
+                      <a:round/>
+                      <a:headEnd type="none" w="med" len="med"/>
+                      <a:tailEnd type="none" w="med" len="med"/>
+                    </a:lnT>
+                    <a:lnB w="6350" cap="flat" cmpd="sng" algn="ctr">
+                      <a:solidFill>
+                        <a:srgbClr val="CCCCCC"/>
+                      </a:solidFill>
+                      <a:prstDash val="solid"/>
+                      <a:round/>
+                      <a:headEnd type="none" w="med" len="med"/>
+                      <a:tailEnd type="none" w="med" len="med"/>
+                    </a:lnB>
+                    <a:solidFill>
+                      <a:srgbClr val="FFE0B2"/>
+                    </a:solidFill>
+                  </a:tcPr>
+                </a:tc>
+                <a:tc>
+                  <a:txBody>
+                    <a:bodyPr/>
+                    <a:lstStyle/>
+                    <a:p>
+                      <a:pPr algn="ctr" indent="0" marL="0">
+                        <a:buNone/>
+                      </a:pPr>
+                      <a:r>
+                        <a:rPr lang="en-US" sz="700" dirty="0">
+                          <a:solidFill>
+                            <a:srgbClr val="333333"/>
+                          </a:solidFill>
+                        </a:rPr>
+                        <a:t>1</a:t>
+                      </a:r>
+                      <a:endParaRPr lang="en-US" sz="700" dirty="0"/>
+                    </a:p>
+                  </a:txBody>
+                  <a:tcPr marL="91440" marR="91440" marT="45720" marB="45720">
+                    <a:lnL w="6350" cap="flat" cmpd="sng" algn="ctr">
+                      <a:solidFill>
+                        <a:srgbClr val="CCCCCC"/>
+                      </a:solidFill>
+                      <a:prstDash val="solid"/>
+                      <a:round/>
+                      <a:headEnd type="none" w="med" len="med"/>
+                      <a:tailEnd type="none" w="med" len="med"/>
+                    </a:lnL>
+                    <a:lnR w="6350" cap="flat" cmpd="sng" algn="ctr">
+                      <a:solidFill>
+                        <a:srgbClr val="CCCCCC"/>
+                      </a:solidFill>
+                      <a:prstDash val="solid"/>
+                      <a:round/>
+                      <a:headEnd type="none" w="med" len="med"/>
+                      <a:tailEnd type="none" w="med" len="med"/>
+                    </a:lnR>
+                    <a:lnT w="6350" cap="flat" cmpd="sng" algn="ctr">
+                      <a:solidFill>
+                        <a:srgbClr val="CCCCCC"/>
+                      </a:solidFill>
+                      <a:prstDash val="solid"/>
+                      <a:round/>
+                      <a:headEnd type="none" w="med" len="med"/>
+                      <a:tailEnd type="none" w="med" len="med"/>
+                    </a:lnT>
+                    <a:lnB w="6350" cap="flat" cmpd="sng" algn="ctr">
+                      <a:solidFill>
+                        <a:srgbClr val="CCCCCC"/>
+                      </a:solidFill>
+                      <a:prstDash val="solid"/>
+                      <a:round/>
+                      <a:headEnd type="none" w="med" len="med"/>
+                      <a:tailEnd type="none" w="med" len="med"/>
+                    </a:lnB>
+                    <a:solidFill>
+                      <a:srgbClr val="FFF9C4"/>
+                    </a:solidFill>
+                  </a:tcPr>
+                </a:tc>
+                <a:tc>
+                  <a:txBody>
+                    <a:bodyPr/>
+                    <a:lstStyle/>
+                    <a:p>
+                      <a:pPr algn="ctr" indent="0" marL="0">
+                        <a:buNone/>
+                      </a:pPr>
+                      <a:r>
+                        <a:rPr lang="en-US" sz="700" dirty="0">
+                          <a:solidFill>
+                            <a:srgbClr val="333333"/>
+                          </a:solidFill>
+                        </a:rPr>
+                        <a:t>1</a:t>
+                      </a:r>
+                      <a:endParaRPr lang="en-US" sz="700" dirty="0"/>
+                    </a:p>
+                  </a:txBody>
+                  <a:tcPr marL="91440" marR="91440" marT="45720" marB="45720">
+                    <a:lnL w="6350" cap="flat" cmpd="sng" algn="ctr">
+                      <a:solidFill>
+                        <a:srgbClr val="CCCCCC"/>
+                      </a:solidFill>
+                      <a:prstDash val="solid"/>
+                      <a:round/>
+                      <a:headEnd type="none" w="med" len="med"/>
+                      <a:tailEnd type="none" w="med" len="med"/>
+                    </a:lnL>
+                    <a:lnR w="6350" cap="flat" cmpd="sng" algn="ctr">
+                      <a:solidFill>
+                        <a:srgbClr val="CCCCCC"/>
+                      </a:solidFill>
+                      <a:prstDash val="solid"/>
+                      <a:round/>
+                      <a:headEnd type="none" w="med" len="med"/>
+                      <a:tailEnd type="none" w="med" len="med"/>
+                    </a:lnR>
+                    <a:lnT w="6350" cap="flat" cmpd="sng" algn="ctr">
+                      <a:solidFill>
+                        <a:srgbClr val="CCCCCC"/>
+                      </a:solidFill>
+                      <a:prstDash val="solid"/>
+                      <a:round/>
+                      <a:headEnd type="none" w="med" len="med"/>
+                      <a:tailEnd type="none" w="med" len="med"/>
+                    </a:lnT>
+                    <a:lnB w="6350" cap="flat" cmpd="sng" algn="ctr">
+                      <a:solidFill>
+                        <a:srgbClr val="CCCCCC"/>
+                      </a:solidFill>
+                      <a:prstDash val="solid"/>
+                      <a:round/>
+                      <a:headEnd type="none" w="med" len="med"/>
+                      <a:tailEnd type="none" w="med" len="med"/>
+                    </a:lnB>
+                    <a:solidFill>
+                      <a:srgbClr val="FFF9C4"/>
+                    </a:solidFill>
+                  </a:tcPr>
+                </a:tc>
+                <a:tc>
+                  <a:txBody>
+                    <a:bodyPr/>
+                    <a:lstStyle/>
+                    <a:p>
+                      <a:pPr algn="ctr" indent="0" marL="0">
+                        <a:buNone/>
+                      </a:pPr>
+                      <a:r>
+                        <a:rPr lang="en-US" sz="700" dirty="0">
+                          <a:solidFill>
+                            <a:srgbClr val="333333"/>
+                          </a:solidFill>
+                        </a:rPr>
+                        <a:t>-</a:t>
+                      </a:r>
+                      <a:endParaRPr lang="en-US" sz="700" dirty="0"/>
+                    </a:p>
+                  </a:txBody>
+                  <a:tcPr marL="91440" marR="91440" marT="45720" marB="45720">
+                    <a:lnL w="6350" cap="flat" cmpd="sng" algn="ctr">
+                      <a:solidFill>
+                        <a:srgbClr val="CCCCCC"/>
+                      </a:solidFill>
+                      <a:prstDash val="solid"/>
+                      <a:round/>
+                      <a:headEnd type="none" w="med" len="med"/>
+                      <a:tailEnd type="none" w="med" len="med"/>
+                    </a:lnL>
+                    <a:lnR w="6350" cap="flat" cmpd="sng" algn="ctr">
+                      <a:solidFill>
+                        <a:srgbClr val="CCCCCC"/>
+                      </a:solidFill>
+                      <a:prstDash val="solid"/>
+                      <a:round/>
+                      <a:headEnd type="none" w="med" len="med"/>
+                      <a:tailEnd type="none" w="med" len="med"/>
+                    </a:lnR>
+                    <a:lnT w="6350" cap="flat" cmpd="sng" algn="ctr">
+                      <a:solidFill>
+                        <a:srgbClr val="CCCCCC"/>
+                      </a:solidFill>
+                      <a:prstDash val="solid"/>
+                      <a:round/>
+                      <a:headEnd type="none" w="med" len="med"/>
+                      <a:tailEnd type="none" w="med" len="med"/>
+                    </a:lnT>
+                    <a:lnB w="6350" cap="flat" cmpd="sng" algn="ctr">
+                      <a:solidFill>
+                        <a:srgbClr val="CCCCCC"/>
+                      </a:solidFill>
+                      <a:prstDash val="solid"/>
+                      <a:round/>
+                      <a:headEnd type="none" w="med" len="med"/>
+                      <a:tailEnd type="none" w="med" len="med"/>
+                    </a:lnB>
+                    <a:solidFill>
+                      <a:srgbClr val="FFFFFF"/>
+                    </a:solidFill>
+                  </a:tcPr>
+                </a:tc>
+                <a:tc>
+                  <a:txBody>
+                    <a:bodyPr/>
+                    <a:lstStyle/>
+                    <a:p>
+                      <a:pPr algn="ctr" indent="0" marL="0">
+                        <a:buNone/>
+                      </a:pPr>
+                      <a:r>
+                        <a:rPr lang="en-US" sz="700" dirty="0">
+                          <a:solidFill>
+                            <a:srgbClr val="333333"/>
+                          </a:solidFill>
+                        </a:rPr>
+                        <a:t>1</a:t>
+                      </a:r>
+                      <a:endParaRPr lang="en-US" sz="700" dirty="0"/>
+                    </a:p>
+                  </a:txBody>
+                  <a:tcPr marL="91440" marR="91440" marT="45720" marB="45720">
+                    <a:lnL w="6350" cap="flat" cmpd="sng" algn="ctr">
+                      <a:solidFill>
+                        <a:srgbClr val="CCCCCC"/>
+                      </a:solidFill>
+                      <a:prstDash val="solid"/>
+                      <a:round/>
+                      <a:headEnd type="none" w="med" len="med"/>
+                      <a:tailEnd type="none" w="med" len="med"/>
+                    </a:lnL>
+                    <a:lnR w="6350" cap="flat" cmpd="sng" algn="ctr">
+                      <a:solidFill>
+                        <a:srgbClr val="CCCCCC"/>
+                      </a:solidFill>
+                      <a:prstDash val="solid"/>
+                      <a:round/>
+                      <a:headEnd type="none" w="med" len="med"/>
+                      <a:tailEnd type="none" w="med" len="med"/>
+                    </a:lnR>
+                    <a:lnT w="6350" cap="flat" cmpd="sng" algn="ctr">
+                      <a:solidFill>
+                        <a:srgbClr val="CCCCCC"/>
+                      </a:solidFill>
+                      <a:prstDash val="solid"/>
+                      <a:round/>
+                      <a:headEnd type="none" w="med" len="med"/>
+                      <a:tailEnd type="none" w="med" len="med"/>
+                    </a:lnT>
+                    <a:lnB w="6350" cap="flat" cmpd="sng" algn="ctr">
+                      <a:solidFill>
+                        <a:srgbClr val="CCCCCC"/>
+                      </a:solidFill>
+                      <a:prstDash val="solid"/>
+                      <a:round/>
+                      <a:headEnd type="none" w="med" len="med"/>
+                      <a:tailEnd type="none" w="med" len="med"/>
+                    </a:lnB>
+                    <a:solidFill>
+                      <a:srgbClr val="FFF9C4"/>
+                    </a:solidFill>
+                  </a:tcPr>
+                </a:tc>
+                <a:tc>
+                  <a:txBody>
+                    <a:bodyPr/>
+                    <a:lstStyle/>
+                    <a:p>
+                      <a:pPr algn="ctr" indent="0" marL="0">
+                        <a:buNone/>
+                      </a:pPr>
+                      <a:r>
+                        <a:rPr lang="en-US" sz="700" dirty="0">
+                          <a:solidFill>
+                            <a:srgbClr val="333333"/>
+                          </a:solidFill>
+                        </a:rPr>
+                        <a:t>-</a:t>
+                      </a:r>
+                      <a:endParaRPr lang="en-US" sz="700" dirty="0"/>
+                    </a:p>
+                  </a:txBody>
+                  <a:tcPr marL="91440" marR="91440" marT="45720" marB="45720">
+                    <a:lnL w="6350" cap="flat" cmpd="sng" algn="ctr">
+                      <a:solidFill>
+                        <a:srgbClr val="CCCCCC"/>
+                      </a:solidFill>
+                      <a:prstDash val="solid"/>
+                      <a:round/>
+                      <a:headEnd type="none" w="med" len="med"/>
+                      <a:tailEnd type="none" w="med" len="med"/>
+                    </a:lnL>
+                    <a:lnR w="6350" cap="flat" cmpd="sng" algn="ctr">
+                      <a:solidFill>
+                        <a:srgbClr val="CCCCCC"/>
+                      </a:solidFill>
+                      <a:prstDash val="solid"/>
+                      <a:round/>
+                      <a:headEnd type="none" w="med" len="med"/>
+                      <a:tailEnd type="none" w="med" len="med"/>
+                    </a:lnR>
+                    <a:lnT w="6350" cap="flat" cmpd="sng" algn="ctr">
+                      <a:solidFill>
+                        <a:srgbClr val="CCCCCC"/>
+                      </a:solidFill>
+                      <a:prstDash val="solid"/>
+                      <a:round/>
+                      <a:headEnd type="none" w="med" len="med"/>
+                      <a:tailEnd type="none" w="med" len="med"/>
+                    </a:lnT>
+                    <a:lnB w="6350" cap="flat" cmpd="sng" algn="ctr">
+                      <a:solidFill>
+                        <a:srgbClr val="CCCCCC"/>
+                      </a:solidFill>
+                      <a:prstDash val="solid"/>
+                      <a:round/>
+                      <a:headEnd type="none" w="med" len="med"/>
+                      <a:tailEnd type="none" w="med" len="med"/>
+                    </a:lnB>
+                    <a:solidFill>
+                      <a:srgbClr val="FFFFFF"/>
+                    </a:solidFill>
+                  </a:tcPr>
+                </a:tc>
+              </a:tr>
+              <a:tr h="0">
+                <a:tc>
+                  <a:txBody>
+                    <a:bodyPr/>
+                    <a:lstStyle/>
+                    <a:p>
+                      <a:pPr indent="0" marL="0">
+                        <a:buNone/>
+                      </a:pPr>
+                      <a:r>
+                        <a:rPr lang="en-US" sz="700" b="1" dirty="0">
+                          <a:solidFill>
+                            <a:srgbClr val="000000"/>
+                          </a:solidFill>
+                        </a:rPr>
+                        <a:t>コートホテル新横浜</a:t>
+                      </a:r>
+                      <a:endParaRPr lang="en-US" sz="700" dirty="0"/>
+                    </a:p>
+                  </a:txBody>
+                  <a:tcPr marL="91440" marR="91440" marT="45720" marB="45720">
+                    <a:lnL w="6350" cap="flat" cmpd="sng" algn="ctr">
+                      <a:solidFill>
+                        <a:srgbClr val="CCCCCC"/>
+                      </a:solidFill>
+                      <a:prstDash val="solid"/>
+                      <a:round/>
+                      <a:headEnd type="none" w="med" len="med"/>
+                      <a:tailEnd type="none" w="med" len="med"/>
+                    </a:lnL>
+                    <a:lnR w="6350" cap="flat" cmpd="sng" algn="ctr">
+                      <a:solidFill>
+                        <a:srgbClr val="CCCCCC"/>
+                      </a:solidFill>
+                      <a:prstDash val="solid"/>
+                      <a:round/>
+                      <a:headEnd type="none" w="med" len="med"/>
+                      <a:tailEnd type="none" w="med" len="med"/>
+                    </a:lnR>
+                    <a:lnT w="6350" cap="flat" cmpd="sng" algn="ctr">
+                      <a:solidFill>
+                        <a:srgbClr val="CCCCCC"/>
+                      </a:solidFill>
+                      <a:prstDash val="solid"/>
+                      <a:round/>
+                      <a:headEnd type="none" w="med" len="med"/>
+                      <a:tailEnd type="none" w="med" len="med"/>
+                    </a:lnT>
+                    <a:lnB w="6350" cap="flat" cmpd="sng" algn="ctr">
+                      <a:solidFill>
+                        <a:srgbClr val="CCCCCC"/>
+                      </a:solidFill>
+                      <a:prstDash val="solid"/>
+                      <a:round/>
+                      <a:headEnd type="none" w="med" len="med"/>
+                      <a:tailEnd type="none" w="med" len="med"/>
+                    </a:lnB>
+                  </a:tcPr>
+                </a:tc>
+                <a:tc>
+                  <a:txBody>
+                    <a:bodyPr/>
+                    <a:lstStyle/>
+                    <a:p>
+                      <a:pPr algn="ctr" indent="0" marL="0">
+                        <a:buNone/>
+                      </a:pPr>
+                      <a:r>
+                        <a:rPr lang="en-US" sz="700" b="1" dirty="0">
+                          <a:solidFill>
+                            <a:srgbClr val="000000"/>
+                          </a:solidFill>
+                        </a:rPr>
+                        <a:t>11</a:t>
+                      </a:r>
+                      <a:endParaRPr lang="en-US" sz="700" dirty="0"/>
+                    </a:p>
+                  </a:txBody>
+                  <a:tcPr marL="91440" marR="91440" marT="45720" marB="45720">
+                    <a:lnL w="6350" cap="flat" cmpd="sng" algn="ctr">
+                      <a:solidFill>
+                        <a:srgbClr val="CCCCCC"/>
+                      </a:solidFill>
+                      <a:prstDash val="solid"/>
+                      <a:round/>
+                      <a:headEnd type="none" w="med" len="med"/>
+                      <a:tailEnd type="none" w="med" len="med"/>
+                    </a:lnL>
+                    <a:lnR w="6350" cap="flat" cmpd="sng" algn="ctr">
+                      <a:solidFill>
+                        <a:srgbClr val="CCCCCC"/>
+                      </a:solidFill>
+                      <a:prstDash val="solid"/>
+                      <a:round/>
+                      <a:headEnd type="none" w="med" len="med"/>
+                      <a:tailEnd type="none" w="med" len="med"/>
+                    </a:lnR>
+                    <a:lnT w="6350" cap="flat" cmpd="sng" algn="ctr">
+                      <a:solidFill>
+                        <a:srgbClr val="CCCCCC"/>
+                      </a:solidFill>
+                      <a:prstDash val="solid"/>
+                      <a:round/>
+                      <a:headEnd type="none" w="med" len="med"/>
+                      <a:tailEnd type="none" w="med" len="med"/>
+                    </a:lnT>
+                    <a:lnB w="6350" cap="flat" cmpd="sng" algn="ctr">
+                      <a:solidFill>
+                        <a:srgbClr val="CCCCCC"/>
+                      </a:solidFill>
+                      <a:prstDash val="solid"/>
+                      <a:round/>
+                      <a:headEnd type="none" w="med" len="med"/>
+                      <a:tailEnd type="none" w="med" len="med"/>
+                    </a:lnB>
+                  </a:tcPr>
+                </a:tc>
+                <a:tc>
+                  <a:txBody>
+                    <a:bodyPr/>
+                    <a:lstStyle/>
+                    <a:p>
+                      <a:pPr algn="ctr" indent="0" marL="0">
+                        <a:buNone/>
+                      </a:pPr>
+                      <a:r>
+                        <a:rPr lang="en-US" sz="700" dirty="0">
+                          <a:solidFill>
+                            <a:srgbClr val="E74C3C"/>
+                          </a:solidFill>
+                        </a:rPr>
+                        <a:t>8</a:t>
                       </a:r>
                       <a:endParaRPr lang="en-US" sz="700" dirty="0"/>
                     </a:p>
@@ -31709,10 +31423,10 @@
                       <a:r>
                         <a:rPr lang="en-US" sz="700" dirty="0">
                           <a:solidFill>
-                            <a:srgbClr val="E74C3C"/>
-                          </a:solidFill>
-                        </a:rPr>
-                        <a:t>3</a:t>
+                            <a:srgbClr val="333333"/>
+                          </a:solidFill>
+                        </a:rPr>
+                        <a:t>2</a:t>
                       </a:r>
                       <a:endParaRPr lang="en-US" sz="700" dirty="0"/>
                     </a:p>
@@ -31755,7 +31469,7 @@
                       <a:tailEnd type="none" w="med" len="med"/>
                     </a:lnB>
                     <a:solidFill>
-                      <a:srgbClr val="FFE0B2"/>
+                      <a:srgbClr val="FFF9C4"/>
                     </a:solidFill>
                   </a:tcPr>
                 </a:tc>
@@ -31773,7 +31487,7 @@
                             <a:srgbClr val="333333"/>
                           </a:solidFill>
                         </a:rPr>
-                        <a:t>-</a:t>
+                        <a:t>1</a:t>
                       </a:r>
                       <a:endParaRPr lang="en-US" sz="700" dirty="0"/>
                     </a:p>
@@ -31816,7 +31530,7 @@
                       <a:tailEnd type="none" w="med" len="med"/>
                     </a:lnB>
                     <a:solidFill>
-                      <a:srgbClr val="FFFFFF"/>
+                      <a:srgbClr val="FFF9C4"/>
                     </a:solidFill>
                   </a:tcPr>
                 </a:tc>
@@ -31834,7 +31548,7 @@
                             <a:srgbClr val="333333"/>
                           </a:solidFill>
                         </a:rPr>
-                        <a:t>-</a:t>
+                        <a:t>1</a:t>
                       </a:r>
                       <a:endParaRPr lang="en-US" sz="700" dirty="0"/>
                     </a:p>
@@ -31877,7 +31591,7 @@
                       <a:tailEnd type="none" w="med" len="med"/>
                     </a:lnB>
                     <a:solidFill>
-                      <a:srgbClr val="FFFFFF"/>
+                      <a:srgbClr val="FFF9C4"/>
                     </a:solidFill>
                   </a:tcPr>
                 </a:tc>
@@ -31895,7 +31609,7 @@
                             <a:srgbClr val="333333"/>
                           </a:solidFill>
                         </a:rPr>
-                        <a:t>-</a:t>
+                        <a:t>1</a:t>
                       </a:r>
                       <a:endParaRPr lang="en-US" sz="700" dirty="0"/>
                     </a:p>
@@ -31938,7 +31652,7 @@
                       <a:tailEnd type="none" w="med" len="med"/>
                     </a:lnB>
                     <a:solidFill>
-                      <a:srgbClr val="FFFFFF"/>
+                      <a:srgbClr val="FFF9C4"/>
                     </a:solidFill>
                   </a:tcPr>
                 </a:tc>
@@ -32019,7 +31733,7 @@
                             <a:srgbClr val="000000"/>
                           </a:solidFill>
                         </a:rPr>
-                        <a:t>コートホテル新横浜</a:t>
+                        <a:t>コンフォートホテル横浜関内</a:t>
                       </a:r>
                       <a:endParaRPr lang="en-US" sz="700" dirty="0"/>
                     </a:p>
@@ -32077,7 +31791,7 @@
                             <a:srgbClr val="000000"/>
                           </a:solidFill>
                         </a:rPr>
-                        <a:t>11</a:t>
+                        <a:t>13</a:t>
                       </a:r>
                       <a:endParaRPr lang="en-US" sz="700" dirty="0"/>
                     </a:p>
@@ -32135,7 +31849,7 @@
                             <a:srgbClr val="E74C3C"/>
                           </a:solidFill>
                         </a:rPr>
-                        <a:t>8</a:t>
+                        <a:t>5</a:t>
                       </a:r>
                       <a:endParaRPr lang="en-US" sz="700" dirty="0"/>
                     </a:p>
@@ -32178,7 +31892,7 @@
                       <a:tailEnd type="none" w="med" len="med"/>
                     </a:lnB>
                     <a:solidFill>
-                      <a:srgbClr val="FFCDD2"/>
+                      <a:srgbClr val="FFE0B2"/>
                     </a:solidFill>
                   </a:tcPr>
                 </a:tc>
@@ -32257,7 +31971,7 @@
                             <a:srgbClr val="333333"/>
                           </a:solidFill>
                         </a:rPr>
-                        <a:t>1</a:t>
+                        <a:t>-</a:t>
                       </a:r>
                       <a:endParaRPr lang="en-US" sz="700" dirty="0"/>
                     </a:p>
@@ -32300,7 +32014,7 @@
                       <a:tailEnd type="none" w="med" len="med"/>
                     </a:lnB>
                     <a:solidFill>
-                      <a:srgbClr val="FFF9C4"/>
+                      <a:srgbClr val="FFFFFF"/>
                     </a:solidFill>
                   </a:tcPr>
                 </a:tc>
@@ -32318,7 +32032,7 @@
                             <a:srgbClr val="333333"/>
                           </a:solidFill>
                         </a:rPr>
-                        <a:t>1</a:t>
+                        <a:t>-</a:t>
                       </a:r>
                       <a:endParaRPr lang="en-US" sz="700" dirty="0"/>
                     </a:p>
@@ -32361,7 +32075,7 @@
                       <a:tailEnd type="none" w="med" len="med"/>
                     </a:lnB>
                     <a:solidFill>
-                      <a:srgbClr val="FFF9C4"/>
+                      <a:srgbClr val="FFFFFF"/>
                     </a:solidFill>
                   </a:tcPr>
                 </a:tc>
@@ -32379,7 +32093,7 @@
                             <a:srgbClr val="333333"/>
                           </a:solidFill>
                         </a:rPr>
-                        <a:t>1</a:t>
+                        <a:t>-</a:t>
                       </a:r>
                       <a:endParaRPr lang="en-US" sz="700" dirty="0"/>
                     </a:p>
@@ -32422,7 +32136,7 @@
                       <a:tailEnd type="none" w="med" len="med"/>
                     </a:lnB>
                     <a:solidFill>
-                      <a:srgbClr val="FFF9C4"/>
+                      <a:srgbClr val="FFFFFF"/>
                     </a:solidFill>
                   </a:tcPr>
                 </a:tc>
@@ -32503,7 +32217,7 @@
                             <a:srgbClr val="000000"/>
                           </a:solidFill>
                         </a:rPr>
-                        <a:t>アパホテル蒲田駅東</a:t>
+                        <a:t>コンフォートイン六本木</a:t>
                       </a:r>
                       <a:endParaRPr lang="en-US" sz="700" dirty="0"/>
                     </a:p>
@@ -32561,7 +32275,7 @@
                             <a:srgbClr val="000000"/>
                           </a:solidFill>
                         </a:rPr>
-                        <a:t>4</a:t>
+                        <a:t>8</a:t>
                       </a:r>
                       <a:endParaRPr lang="en-US" sz="700" dirty="0"/>
                     </a:p>
@@ -32677,10 +32391,132 @@
                       <a:r>
                         <a:rPr lang="en-US" sz="700" dirty="0">
                           <a:solidFill>
+                            <a:srgbClr val="E74C3C"/>
+                          </a:solidFill>
+                        </a:rPr>
+                        <a:t>4</a:t>
+                      </a:r>
+                      <a:endParaRPr lang="en-US" sz="700" dirty="0"/>
+                    </a:p>
+                  </a:txBody>
+                  <a:tcPr marL="91440" marR="91440" marT="45720" marB="45720">
+                    <a:lnL w="6350" cap="flat" cmpd="sng" algn="ctr">
+                      <a:solidFill>
+                        <a:srgbClr val="CCCCCC"/>
+                      </a:solidFill>
+                      <a:prstDash val="solid"/>
+                      <a:round/>
+                      <a:headEnd type="none" w="med" len="med"/>
+                      <a:tailEnd type="none" w="med" len="med"/>
+                    </a:lnL>
+                    <a:lnR w="6350" cap="flat" cmpd="sng" algn="ctr">
+                      <a:solidFill>
+                        <a:srgbClr val="CCCCCC"/>
+                      </a:solidFill>
+                      <a:prstDash val="solid"/>
+                      <a:round/>
+                      <a:headEnd type="none" w="med" len="med"/>
+                      <a:tailEnd type="none" w="med" len="med"/>
+                    </a:lnR>
+                    <a:lnT w="6350" cap="flat" cmpd="sng" algn="ctr">
+                      <a:solidFill>
+                        <a:srgbClr val="CCCCCC"/>
+                      </a:solidFill>
+                      <a:prstDash val="solid"/>
+                      <a:round/>
+                      <a:headEnd type="none" w="med" len="med"/>
+                      <a:tailEnd type="none" w="med" len="med"/>
+                    </a:lnT>
+                    <a:lnB w="6350" cap="flat" cmpd="sng" algn="ctr">
+                      <a:solidFill>
+                        <a:srgbClr val="CCCCCC"/>
+                      </a:solidFill>
+                      <a:prstDash val="solid"/>
+                      <a:round/>
+                      <a:headEnd type="none" w="med" len="med"/>
+                      <a:tailEnd type="none" w="med" len="med"/>
+                    </a:lnB>
+                    <a:solidFill>
+                      <a:srgbClr val="FFE0B2"/>
+                    </a:solidFill>
+                  </a:tcPr>
+                </a:tc>
+                <a:tc>
+                  <a:txBody>
+                    <a:bodyPr/>
+                    <a:lstStyle/>
+                    <a:p>
+                      <a:pPr algn="ctr" indent="0" marL="0">
+                        <a:buNone/>
+                      </a:pPr>
+                      <a:r>
+                        <a:rPr lang="en-US" sz="700" dirty="0">
+                          <a:solidFill>
                             <a:srgbClr val="333333"/>
                           </a:solidFill>
                         </a:rPr>
-                        <a:t>1</a:t>
+                        <a:t>-</a:t>
+                      </a:r>
+                      <a:endParaRPr lang="en-US" sz="700" dirty="0"/>
+                    </a:p>
+                  </a:txBody>
+                  <a:tcPr marL="91440" marR="91440" marT="45720" marB="45720">
+                    <a:lnL w="6350" cap="flat" cmpd="sng" algn="ctr">
+                      <a:solidFill>
+                        <a:srgbClr val="CCCCCC"/>
+                      </a:solidFill>
+                      <a:prstDash val="solid"/>
+                      <a:round/>
+                      <a:headEnd type="none" w="med" len="med"/>
+                      <a:tailEnd type="none" w="med" len="med"/>
+                    </a:lnL>
+                    <a:lnR w="6350" cap="flat" cmpd="sng" algn="ctr">
+                      <a:solidFill>
+                        <a:srgbClr val="CCCCCC"/>
+                      </a:solidFill>
+                      <a:prstDash val="solid"/>
+                      <a:round/>
+                      <a:headEnd type="none" w="med" len="med"/>
+                      <a:tailEnd type="none" w="med" len="med"/>
+                    </a:lnR>
+                    <a:lnT w="6350" cap="flat" cmpd="sng" algn="ctr">
+                      <a:solidFill>
+                        <a:srgbClr val="CCCCCC"/>
+                      </a:solidFill>
+                      <a:prstDash val="solid"/>
+                      <a:round/>
+                      <a:headEnd type="none" w="med" len="med"/>
+                      <a:tailEnd type="none" w="med" len="med"/>
+                    </a:lnT>
+                    <a:lnB w="6350" cap="flat" cmpd="sng" algn="ctr">
+                      <a:solidFill>
+                        <a:srgbClr val="CCCCCC"/>
+                      </a:solidFill>
+                      <a:prstDash val="solid"/>
+                      <a:round/>
+                      <a:headEnd type="none" w="med" len="med"/>
+                      <a:tailEnd type="none" w="med" len="med"/>
+                    </a:lnB>
+                    <a:solidFill>
+                      <a:srgbClr val="FFFFFF"/>
+                    </a:solidFill>
+                  </a:tcPr>
+                </a:tc>
+                <a:tc>
+                  <a:txBody>
+                    <a:bodyPr/>
+                    <a:lstStyle/>
+                    <a:p>
+                      <a:pPr algn="ctr" indent="0" marL="0">
+                        <a:buNone/>
+                      </a:pPr>
+                      <a:r>
+                        <a:rPr lang="en-US" sz="700" dirty="0">
+                          <a:solidFill>
+                            <a:srgbClr val="333333"/>
+                          </a:solidFill>
+                        </a:rPr>
+                        <a:t>2</a:t>
                       </a:r>
                       <a:endParaRPr lang="en-US" sz="700" dirty="0"/>
                     </a:p>
@@ -32785,128 +32621,6 @@
                     </a:lnB>
                     <a:solidFill>
                       <a:srgbClr val="FFF9C4"/>
-                    </a:solidFill>
-                  </a:tcPr>
-                </a:tc>
-                <a:tc>
-                  <a:txBody>
-                    <a:bodyPr/>
-                    <a:lstStyle/>
-                    <a:p>
-                      <a:pPr algn="ctr" indent="0" marL="0">
-                        <a:buNone/>
-                      </a:pPr>
-                      <a:r>
-                        <a:rPr lang="en-US" sz="700" dirty="0">
-                          <a:solidFill>
-                            <a:srgbClr val="333333"/>
-                          </a:solidFill>
-                        </a:rPr>
-                        <a:t>1</a:t>
-                      </a:r>
-                      <a:endParaRPr lang="en-US" sz="700" dirty="0"/>
-                    </a:p>
-                  </a:txBody>
-                  <a:tcPr marL="91440" marR="91440" marT="45720" marB="45720">
-                    <a:lnL w="6350" cap="flat" cmpd="sng" algn="ctr">
-                      <a:solidFill>
-                        <a:srgbClr val="CCCCCC"/>
-                      </a:solidFill>
-                      <a:prstDash val="solid"/>
-                      <a:round/>
-                      <a:headEnd type="none" w="med" len="med"/>
-                      <a:tailEnd type="none" w="med" len="med"/>
-                    </a:lnL>
-                    <a:lnR w="6350" cap="flat" cmpd="sng" algn="ctr">
-                      <a:solidFill>
-                        <a:srgbClr val="CCCCCC"/>
-                      </a:solidFill>
-                      <a:prstDash val="solid"/>
-                      <a:round/>
-                      <a:headEnd type="none" w="med" len="med"/>
-                      <a:tailEnd type="none" w="med" len="med"/>
-                    </a:lnR>
-                    <a:lnT w="6350" cap="flat" cmpd="sng" algn="ctr">
-                      <a:solidFill>
-                        <a:srgbClr val="CCCCCC"/>
-                      </a:solidFill>
-                      <a:prstDash val="solid"/>
-                      <a:round/>
-                      <a:headEnd type="none" w="med" len="med"/>
-                      <a:tailEnd type="none" w="med" len="med"/>
-                    </a:lnT>
-                    <a:lnB w="6350" cap="flat" cmpd="sng" algn="ctr">
-                      <a:solidFill>
-                        <a:srgbClr val="CCCCCC"/>
-                      </a:solidFill>
-                      <a:prstDash val="solid"/>
-                      <a:round/>
-                      <a:headEnd type="none" w="med" len="med"/>
-                      <a:tailEnd type="none" w="med" len="med"/>
-                    </a:lnB>
-                    <a:solidFill>
-                      <a:srgbClr val="FFF9C4"/>
-                    </a:solidFill>
-                  </a:tcPr>
-                </a:tc>
-                <a:tc>
-                  <a:txBody>
-                    <a:bodyPr/>
-                    <a:lstStyle/>
-                    <a:p>
-                      <a:pPr algn="ctr" indent="0" marL="0">
-                        <a:buNone/>
-                      </a:pPr>
-                      <a:r>
-                        <a:rPr lang="en-US" sz="700" dirty="0">
-                          <a:solidFill>
-                            <a:srgbClr val="333333"/>
-                          </a:solidFill>
-                        </a:rPr>
-                        <a:t>-</a:t>
-                      </a:r>
-                      <a:endParaRPr lang="en-US" sz="700" dirty="0"/>
-                    </a:p>
-                  </a:txBody>
-                  <a:tcPr marL="91440" marR="91440" marT="45720" marB="45720">
-                    <a:lnL w="6350" cap="flat" cmpd="sng" algn="ctr">
-                      <a:solidFill>
-                        <a:srgbClr val="CCCCCC"/>
-                      </a:solidFill>
-                      <a:prstDash val="solid"/>
-                      <a:round/>
-                      <a:headEnd type="none" w="med" len="med"/>
-                      <a:tailEnd type="none" w="med" len="med"/>
-                    </a:lnL>
-                    <a:lnR w="6350" cap="flat" cmpd="sng" algn="ctr">
-                      <a:solidFill>
-                        <a:srgbClr val="CCCCCC"/>
-                      </a:solidFill>
-                      <a:prstDash val="solid"/>
-                      <a:round/>
-                      <a:headEnd type="none" w="med" len="med"/>
-                      <a:tailEnd type="none" w="med" len="med"/>
-                    </a:lnR>
-                    <a:lnT w="6350" cap="flat" cmpd="sng" algn="ctr">
-                      <a:solidFill>
-                        <a:srgbClr val="CCCCCC"/>
-                      </a:solidFill>
-                      <a:prstDash val="solid"/>
-                      <a:round/>
-                      <a:headEnd type="none" w="med" len="med"/>
-                      <a:tailEnd type="none" w="med" len="med"/>
-                    </a:lnT>
-                    <a:lnB w="6350" cap="flat" cmpd="sng" algn="ctr">
-                      <a:solidFill>
-                        <a:srgbClr val="CCCCCC"/>
-                      </a:solidFill>
-                      <a:prstDash val="solid"/>
-                      <a:round/>
-                      <a:headEnd type="none" w="med" len="med"/>
-                      <a:tailEnd type="none" w="med" len="med"/>
-                    </a:lnB>
-                    <a:solidFill>
-                      <a:srgbClr val="FFFFFF"/>
                     </a:solidFill>
                   </a:tcPr>
                 </a:tc>
@@ -32987,7 +32701,7 @@
                             <a:srgbClr val="000000"/>
                           </a:solidFill>
                         </a:rPr>
-                        <a:t>コンフォートイン六本木</a:t>
+                        <a:t>川崎日航ホテル</a:t>
                       </a:r>
                       <a:endParaRPr lang="en-US" sz="700" dirty="0"/>
                     </a:p>
@@ -33100,10 +32814,71 @@
                       <a:r>
                         <a:rPr lang="en-US" sz="700" dirty="0">
                           <a:solidFill>
+                            <a:srgbClr val="E74C3C"/>
+                          </a:solidFill>
+                        </a:rPr>
+                        <a:t>6</a:t>
+                      </a:r>
+                      <a:endParaRPr lang="en-US" sz="700" dirty="0"/>
+                    </a:p>
+                  </a:txBody>
+                  <a:tcPr marL="91440" marR="91440" marT="45720" marB="45720">
+                    <a:lnL w="6350" cap="flat" cmpd="sng" algn="ctr">
+                      <a:solidFill>
+                        <a:srgbClr val="CCCCCC"/>
+                      </a:solidFill>
+                      <a:prstDash val="solid"/>
+                      <a:round/>
+                      <a:headEnd type="none" w="med" len="med"/>
+                      <a:tailEnd type="none" w="med" len="med"/>
+                    </a:lnL>
+                    <a:lnR w="6350" cap="flat" cmpd="sng" algn="ctr">
+                      <a:solidFill>
+                        <a:srgbClr val="CCCCCC"/>
+                      </a:solidFill>
+                      <a:prstDash val="solid"/>
+                      <a:round/>
+                      <a:headEnd type="none" w="med" len="med"/>
+                      <a:tailEnd type="none" w="med" len="med"/>
+                    </a:lnR>
+                    <a:lnT w="6350" cap="flat" cmpd="sng" algn="ctr">
+                      <a:solidFill>
+                        <a:srgbClr val="CCCCCC"/>
+                      </a:solidFill>
+                      <a:prstDash val="solid"/>
+                      <a:round/>
+                      <a:headEnd type="none" w="med" len="med"/>
+                      <a:tailEnd type="none" w="med" len="med"/>
+                    </a:lnT>
+                    <a:lnB w="6350" cap="flat" cmpd="sng" algn="ctr">
+                      <a:solidFill>
+                        <a:srgbClr val="CCCCCC"/>
+                      </a:solidFill>
+                      <a:prstDash val="solid"/>
+                      <a:round/>
+                      <a:headEnd type="none" w="med" len="med"/>
+                      <a:tailEnd type="none" w="med" len="med"/>
+                    </a:lnB>
+                    <a:solidFill>
+                      <a:srgbClr val="FFCDD2"/>
+                    </a:solidFill>
+                  </a:tcPr>
+                </a:tc>
+                <a:tc>
+                  <a:txBody>
+                    <a:bodyPr/>
+                    <a:lstStyle/>
+                    <a:p>
+                      <a:pPr algn="ctr" indent="0" marL="0">
+                        <a:buNone/>
+                      </a:pPr>
+                      <a:r>
+                        <a:rPr lang="en-US" sz="700" dirty="0">
+                          <a:solidFill>
                             <a:srgbClr val="333333"/>
                           </a:solidFill>
                         </a:rPr>
-                        <a:t>2</a:t>
+                        <a:t>1</a:t>
                       </a:r>
                       <a:endParaRPr lang="en-US" sz="700" dirty="0"/>
                     </a:p>
@@ -33161,67 +32936,6 @@
                       <a:r>
                         <a:rPr lang="en-US" sz="700" dirty="0">
                           <a:solidFill>
-                            <a:srgbClr val="E74C3C"/>
-                          </a:solidFill>
-                        </a:rPr>
-                        <a:t>4</a:t>
-                      </a:r>
-                      <a:endParaRPr lang="en-US" sz="700" dirty="0"/>
-                    </a:p>
-                  </a:txBody>
-                  <a:tcPr marL="91440" marR="91440" marT="45720" marB="45720">
-                    <a:lnL w="6350" cap="flat" cmpd="sng" algn="ctr">
-                      <a:solidFill>
-                        <a:srgbClr val="CCCCCC"/>
-                      </a:solidFill>
-                      <a:prstDash val="solid"/>
-                      <a:round/>
-                      <a:headEnd type="none" w="med" len="med"/>
-                      <a:tailEnd type="none" w="med" len="med"/>
-                    </a:lnL>
-                    <a:lnR w="6350" cap="flat" cmpd="sng" algn="ctr">
-                      <a:solidFill>
-                        <a:srgbClr val="CCCCCC"/>
-                      </a:solidFill>
-                      <a:prstDash val="solid"/>
-                      <a:round/>
-                      <a:headEnd type="none" w="med" len="med"/>
-                      <a:tailEnd type="none" w="med" len="med"/>
-                    </a:lnR>
-                    <a:lnT w="6350" cap="flat" cmpd="sng" algn="ctr">
-                      <a:solidFill>
-                        <a:srgbClr val="CCCCCC"/>
-                      </a:solidFill>
-                      <a:prstDash val="solid"/>
-                      <a:round/>
-                      <a:headEnd type="none" w="med" len="med"/>
-                      <a:tailEnd type="none" w="med" len="med"/>
-                    </a:lnT>
-                    <a:lnB w="6350" cap="flat" cmpd="sng" algn="ctr">
-                      <a:solidFill>
-                        <a:srgbClr val="CCCCCC"/>
-                      </a:solidFill>
-                      <a:prstDash val="solid"/>
-                      <a:round/>
-                      <a:headEnd type="none" w="med" len="med"/>
-                      <a:tailEnd type="none" w="med" len="med"/>
-                    </a:lnB>
-                    <a:solidFill>
-                      <a:srgbClr val="FFE0B2"/>
-                    </a:solidFill>
-                  </a:tcPr>
-                </a:tc>
-                <a:tc>
-                  <a:txBody>
-                    <a:bodyPr/>
-                    <a:lstStyle/>
-                    <a:p>
-                      <a:pPr algn="ctr" indent="0" marL="0">
-                        <a:buNone/>
-                      </a:pPr>
-                      <a:r>
-                        <a:rPr lang="en-US" sz="700" dirty="0">
-                          <a:solidFill>
                             <a:srgbClr val="333333"/>
                           </a:solidFill>
                         </a:rPr>
@@ -33286,7 +33000,7 @@
                             <a:srgbClr val="333333"/>
                           </a:solidFill>
                         </a:rPr>
-                        <a:t>1</a:t>
+                        <a:t>-</a:t>
                       </a:r>
                       <a:endParaRPr lang="en-US" sz="700" dirty="0"/>
                     </a:p>
@@ -33329,7 +33043,7 @@
                       <a:tailEnd type="none" w="med" len="med"/>
                     </a:lnB>
                     <a:solidFill>
-                      <a:srgbClr val="FFF9C4"/>
+                      <a:srgbClr val="FFFFFF"/>
                     </a:solidFill>
                   </a:tcPr>
                 </a:tc>
@@ -33347,7 +33061,7 @@
                             <a:srgbClr val="333333"/>
                           </a:solidFill>
                         </a:rPr>
-                        <a:t>1</a:t>
+                        <a:t>-</a:t>
                       </a:r>
                       <a:endParaRPr lang="en-US" sz="700" dirty="0"/>
                     </a:p>
@@ -33390,7 +33104,7 @@
                       <a:tailEnd type="none" w="med" len="med"/>
                     </a:lnB>
                     <a:solidFill>
-                      <a:srgbClr val="FFF9C4"/>
+                      <a:srgbClr val="FFFFFF"/>
                     </a:solidFill>
                   </a:tcPr>
                 </a:tc>
@@ -33471,7 +33185,7 @@
                             <a:srgbClr val="000000"/>
                           </a:solidFill>
                         </a:rPr>
-                        <a:t>川崎日航ホテル</a:t>
+                        <a:t>ホテルコメント横浜関内</a:t>
                       </a:r>
                       <a:endParaRPr lang="en-US" sz="700" dirty="0"/>
                     </a:p>
@@ -33529,7 +33243,7 @@
                             <a:srgbClr val="000000"/>
                           </a:solidFill>
                         </a:rPr>
-                        <a:t>7</a:t>
+                        <a:t>6</a:t>
                       </a:r>
                       <a:endParaRPr lang="en-US" sz="700" dirty="0"/>
                     </a:p>
@@ -33587,7 +33301,7 @@
                             <a:srgbClr val="E74C3C"/>
                           </a:solidFill>
                         </a:rPr>
-                        <a:t>6</a:t>
+                        <a:t>4</a:t>
                       </a:r>
                       <a:endParaRPr lang="en-US" sz="700" dirty="0"/>
                     </a:p>
@@ -33630,7 +33344,7 @@
                       <a:tailEnd type="none" w="med" len="med"/>
                     </a:lnB>
                     <a:solidFill>
-                      <a:srgbClr val="FFCDD2"/>
+                      <a:srgbClr val="FFE0B2"/>
                     </a:solidFill>
                   </a:tcPr>
                 </a:tc>
@@ -33648,7 +33362,7 @@
                             <a:srgbClr val="333333"/>
                           </a:solidFill>
                         </a:rPr>
-                        <a:t>1</a:t>
+                        <a:t>2</a:t>
                       </a:r>
                       <a:endParaRPr lang="en-US" sz="700" dirty="0"/>
                     </a:p>
@@ -33770,7 +33484,7 @@
                             <a:srgbClr val="333333"/>
                           </a:solidFill>
                         </a:rPr>
-                        <a:t>-</a:t>
+                        <a:t>1</a:t>
                       </a:r>
                       <a:endParaRPr lang="en-US" sz="700" dirty="0"/>
                     </a:p>
@@ -33813,7 +33527,7 @@
                       <a:tailEnd type="none" w="med" len="med"/>
                     </a:lnB>
                     <a:solidFill>
-                      <a:srgbClr val="FFFFFF"/>
+                      <a:srgbClr val="FFF9C4"/>
                     </a:solidFill>
                   </a:tcPr>
                 </a:tc>
@@ -33831,7 +33545,7 @@
                             <a:srgbClr val="333333"/>
                           </a:solidFill>
                         </a:rPr>
-                        <a:t>-</a:t>
+                        <a:t>1</a:t>
                       </a:r>
                       <a:endParaRPr lang="en-US" sz="700" dirty="0"/>
                     </a:p>
@@ -33874,7 +33588,7 @@
                       <a:tailEnd type="none" w="med" len="med"/>
                     </a:lnB>
                     <a:solidFill>
-                      <a:srgbClr val="FFFFFF"/>
+                      <a:srgbClr val="FFF9C4"/>
                     </a:solidFill>
                   </a:tcPr>
                 </a:tc>
@@ -33955,7 +33669,7 @@
                             <a:srgbClr val="000000"/>
                           </a:solidFill>
                         </a:rPr>
-                        <a:t>ホテルコメント横浜関内</a:t>
+                        <a:t>ハートンホテル東品川</a:t>
                       </a:r>
                       <a:endParaRPr lang="en-US" sz="700" dirty="0"/>
                     </a:p>
@@ -34254,6 +33968,67 @@
                             <a:srgbClr val="333333"/>
                           </a:solidFill>
                         </a:rPr>
+                        <a:t>-</a:t>
+                      </a:r>
+                      <a:endParaRPr lang="en-US" sz="700" dirty="0"/>
+                    </a:p>
+                  </a:txBody>
+                  <a:tcPr marL="91440" marR="91440" marT="45720" marB="45720">
+                    <a:lnL w="6350" cap="flat" cmpd="sng" algn="ctr">
+                      <a:solidFill>
+                        <a:srgbClr val="CCCCCC"/>
+                      </a:solidFill>
+                      <a:prstDash val="solid"/>
+                      <a:round/>
+                      <a:headEnd type="none" w="med" len="med"/>
+                      <a:tailEnd type="none" w="med" len="med"/>
+                    </a:lnL>
+                    <a:lnR w="6350" cap="flat" cmpd="sng" algn="ctr">
+                      <a:solidFill>
+                        <a:srgbClr val="CCCCCC"/>
+                      </a:solidFill>
+                      <a:prstDash val="solid"/>
+                      <a:round/>
+                      <a:headEnd type="none" w="med" len="med"/>
+                      <a:tailEnd type="none" w="med" len="med"/>
+                    </a:lnR>
+                    <a:lnT w="6350" cap="flat" cmpd="sng" algn="ctr">
+                      <a:solidFill>
+                        <a:srgbClr val="CCCCCC"/>
+                      </a:solidFill>
+                      <a:prstDash val="solid"/>
+                      <a:round/>
+                      <a:headEnd type="none" w="med" len="med"/>
+                      <a:tailEnd type="none" w="med" len="med"/>
+                    </a:lnT>
+                    <a:lnB w="6350" cap="flat" cmpd="sng" algn="ctr">
+                      <a:solidFill>
+                        <a:srgbClr val="CCCCCC"/>
+                      </a:solidFill>
+                      <a:prstDash val="solid"/>
+                      <a:round/>
+                      <a:headEnd type="none" w="med" len="med"/>
+                      <a:tailEnd type="none" w="med" len="med"/>
+                    </a:lnB>
+                    <a:solidFill>
+                      <a:srgbClr val="FFFFFF"/>
+                    </a:solidFill>
+                  </a:tcPr>
+                </a:tc>
+                <a:tc>
+                  <a:txBody>
+                    <a:bodyPr/>
+                    <a:lstStyle/>
+                    <a:p>
+                      <a:pPr algn="ctr" indent="0" marL="0">
+                        <a:buNone/>
+                      </a:pPr>
+                      <a:r>
+                        <a:rPr lang="en-US" sz="700" dirty="0">
+                          <a:solidFill>
+                            <a:srgbClr val="333333"/>
+                          </a:solidFill>
+                        </a:rPr>
                         <a:t>1</a:t>
                       </a:r>
                       <a:endParaRPr lang="en-US" sz="700" dirty="0"/>
@@ -34359,6 +34134,429 @@
                     </a:lnB>
                     <a:solidFill>
                       <a:srgbClr val="FFF9C4"/>
+                    </a:solidFill>
+                  </a:tcPr>
+                </a:tc>
+              </a:tr>
+              <a:tr h="0">
+                <a:tc>
+                  <a:txBody>
+                    <a:bodyPr/>
+                    <a:lstStyle/>
+                    <a:p>
+                      <a:pPr indent="0" marL="0">
+                        <a:buNone/>
+                      </a:pPr>
+                      <a:r>
+                        <a:rPr lang="en-US" sz="700" b="1" dirty="0">
+                          <a:solidFill>
+                            <a:srgbClr val="000000"/>
+                          </a:solidFill>
+                        </a:rPr>
+                        <a:t>ダイワロイネットホテル東京大崎</a:t>
+                      </a:r>
+                      <a:endParaRPr lang="en-US" sz="700" dirty="0"/>
+                    </a:p>
+                  </a:txBody>
+                  <a:tcPr marL="91440" marR="91440" marT="45720" marB="45720">
+                    <a:lnL w="6350" cap="flat" cmpd="sng" algn="ctr">
+                      <a:solidFill>
+                        <a:srgbClr val="CCCCCC"/>
+                      </a:solidFill>
+                      <a:prstDash val="solid"/>
+                      <a:round/>
+                      <a:headEnd type="none" w="med" len="med"/>
+                      <a:tailEnd type="none" w="med" len="med"/>
+                    </a:lnL>
+                    <a:lnR w="6350" cap="flat" cmpd="sng" algn="ctr">
+                      <a:solidFill>
+                        <a:srgbClr val="CCCCCC"/>
+                      </a:solidFill>
+                      <a:prstDash val="solid"/>
+                      <a:round/>
+                      <a:headEnd type="none" w="med" len="med"/>
+                      <a:tailEnd type="none" w="med" len="med"/>
+                    </a:lnR>
+                    <a:lnT w="6350" cap="flat" cmpd="sng" algn="ctr">
+                      <a:solidFill>
+                        <a:srgbClr val="CCCCCC"/>
+                      </a:solidFill>
+                      <a:prstDash val="solid"/>
+                      <a:round/>
+                      <a:headEnd type="none" w="med" len="med"/>
+                      <a:tailEnd type="none" w="med" len="med"/>
+                    </a:lnT>
+                    <a:lnB w="6350" cap="flat" cmpd="sng" algn="ctr">
+                      <a:solidFill>
+                        <a:srgbClr val="CCCCCC"/>
+                      </a:solidFill>
+                      <a:prstDash val="solid"/>
+                      <a:round/>
+                      <a:headEnd type="none" w="med" len="med"/>
+                      <a:tailEnd type="none" w="med" len="med"/>
+                    </a:lnB>
+                  </a:tcPr>
+                </a:tc>
+                <a:tc>
+                  <a:txBody>
+                    <a:bodyPr/>
+                    <a:lstStyle/>
+                    <a:p>
+                      <a:pPr algn="ctr" indent="0" marL="0">
+                        <a:buNone/>
+                      </a:pPr>
+                      <a:r>
+                        <a:rPr lang="en-US" sz="700" b="1" dirty="0">
+                          <a:solidFill>
+                            <a:srgbClr val="000000"/>
+                          </a:solidFill>
+                        </a:rPr>
+                        <a:t>2</a:t>
+                      </a:r>
+                      <a:endParaRPr lang="en-US" sz="700" dirty="0"/>
+                    </a:p>
+                  </a:txBody>
+                  <a:tcPr marL="91440" marR="91440" marT="45720" marB="45720">
+                    <a:lnL w="6350" cap="flat" cmpd="sng" algn="ctr">
+                      <a:solidFill>
+                        <a:srgbClr val="CCCCCC"/>
+                      </a:solidFill>
+                      <a:prstDash val="solid"/>
+                      <a:round/>
+                      <a:headEnd type="none" w="med" len="med"/>
+                      <a:tailEnd type="none" w="med" len="med"/>
+                    </a:lnL>
+                    <a:lnR w="6350" cap="flat" cmpd="sng" algn="ctr">
+                      <a:solidFill>
+                        <a:srgbClr val="CCCCCC"/>
+                      </a:solidFill>
+                      <a:prstDash val="solid"/>
+                      <a:round/>
+                      <a:headEnd type="none" w="med" len="med"/>
+                      <a:tailEnd type="none" w="med" len="med"/>
+                    </a:lnR>
+                    <a:lnT w="6350" cap="flat" cmpd="sng" algn="ctr">
+                      <a:solidFill>
+                        <a:srgbClr val="CCCCCC"/>
+                      </a:solidFill>
+                      <a:prstDash val="solid"/>
+                      <a:round/>
+                      <a:headEnd type="none" w="med" len="med"/>
+                      <a:tailEnd type="none" w="med" len="med"/>
+                    </a:lnT>
+                    <a:lnB w="6350" cap="flat" cmpd="sng" algn="ctr">
+                      <a:solidFill>
+                        <a:srgbClr val="CCCCCC"/>
+                      </a:solidFill>
+                      <a:prstDash val="solid"/>
+                      <a:round/>
+                      <a:headEnd type="none" w="med" len="med"/>
+                      <a:tailEnd type="none" w="med" len="med"/>
+                    </a:lnB>
+                  </a:tcPr>
+                </a:tc>
+                <a:tc>
+                  <a:txBody>
+                    <a:bodyPr/>
+                    <a:lstStyle/>
+                    <a:p>
+                      <a:pPr algn="ctr" indent="0" marL="0">
+                        <a:buNone/>
+                      </a:pPr>
+                      <a:r>
+                        <a:rPr lang="en-US" sz="700" dirty="0">
+                          <a:solidFill>
+                            <a:srgbClr val="333333"/>
+                          </a:solidFill>
+                        </a:rPr>
+                        <a:t>2</a:t>
+                      </a:r>
+                      <a:endParaRPr lang="en-US" sz="700" dirty="0"/>
+                    </a:p>
+                  </a:txBody>
+                  <a:tcPr marL="91440" marR="91440" marT="45720" marB="45720">
+                    <a:lnL w="6350" cap="flat" cmpd="sng" algn="ctr">
+                      <a:solidFill>
+                        <a:srgbClr val="CCCCCC"/>
+                      </a:solidFill>
+                      <a:prstDash val="solid"/>
+                      <a:round/>
+                      <a:headEnd type="none" w="med" len="med"/>
+                      <a:tailEnd type="none" w="med" len="med"/>
+                    </a:lnL>
+                    <a:lnR w="6350" cap="flat" cmpd="sng" algn="ctr">
+                      <a:solidFill>
+                        <a:srgbClr val="CCCCCC"/>
+                      </a:solidFill>
+                      <a:prstDash val="solid"/>
+                      <a:round/>
+                      <a:headEnd type="none" w="med" len="med"/>
+                      <a:tailEnd type="none" w="med" len="med"/>
+                    </a:lnR>
+                    <a:lnT w="6350" cap="flat" cmpd="sng" algn="ctr">
+                      <a:solidFill>
+                        <a:srgbClr val="CCCCCC"/>
+                      </a:solidFill>
+                      <a:prstDash val="solid"/>
+                      <a:round/>
+                      <a:headEnd type="none" w="med" len="med"/>
+                      <a:tailEnd type="none" w="med" len="med"/>
+                    </a:lnT>
+                    <a:lnB w="6350" cap="flat" cmpd="sng" algn="ctr">
+                      <a:solidFill>
+                        <a:srgbClr val="CCCCCC"/>
+                      </a:solidFill>
+                      <a:prstDash val="solid"/>
+                      <a:round/>
+                      <a:headEnd type="none" w="med" len="med"/>
+                      <a:tailEnd type="none" w="med" len="med"/>
+                    </a:lnB>
+                    <a:solidFill>
+                      <a:srgbClr val="FFF9C4"/>
+                    </a:solidFill>
+                  </a:tcPr>
+                </a:tc>
+                <a:tc>
+                  <a:txBody>
+                    <a:bodyPr/>
+                    <a:lstStyle/>
+                    <a:p>
+                      <a:pPr algn="ctr" indent="0" marL="0">
+                        <a:buNone/>
+                      </a:pPr>
+                      <a:r>
+                        <a:rPr lang="en-US" sz="700" dirty="0">
+                          <a:solidFill>
+                            <a:srgbClr val="333333"/>
+                          </a:solidFill>
+                        </a:rPr>
+                        <a:t>-</a:t>
+                      </a:r>
+                      <a:endParaRPr lang="en-US" sz="700" dirty="0"/>
+                    </a:p>
+                  </a:txBody>
+                  <a:tcPr marL="91440" marR="91440" marT="45720" marB="45720">
+                    <a:lnL w="6350" cap="flat" cmpd="sng" algn="ctr">
+                      <a:solidFill>
+                        <a:srgbClr val="CCCCCC"/>
+                      </a:solidFill>
+                      <a:prstDash val="solid"/>
+                      <a:round/>
+                      <a:headEnd type="none" w="med" len="med"/>
+                      <a:tailEnd type="none" w="med" len="med"/>
+                    </a:lnL>
+                    <a:lnR w="6350" cap="flat" cmpd="sng" algn="ctr">
+                      <a:solidFill>
+                        <a:srgbClr val="CCCCCC"/>
+                      </a:solidFill>
+                      <a:prstDash val="solid"/>
+                      <a:round/>
+                      <a:headEnd type="none" w="med" len="med"/>
+                      <a:tailEnd type="none" w="med" len="med"/>
+                    </a:lnR>
+                    <a:lnT w="6350" cap="flat" cmpd="sng" algn="ctr">
+                      <a:solidFill>
+                        <a:srgbClr val="CCCCCC"/>
+                      </a:solidFill>
+                      <a:prstDash val="solid"/>
+                      <a:round/>
+                      <a:headEnd type="none" w="med" len="med"/>
+                      <a:tailEnd type="none" w="med" len="med"/>
+                    </a:lnT>
+                    <a:lnB w="6350" cap="flat" cmpd="sng" algn="ctr">
+                      <a:solidFill>
+                        <a:srgbClr val="CCCCCC"/>
+                      </a:solidFill>
+                      <a:prstDash val="solid"/>
+                      <a:round/>
+                      <a:headEnd type="none" w="med" len="med"/>
+                      <a:tailEnd type="none" w="med" len="med"/>
+                    </a:lnB>
+                    <a:solidFill>
+                      <a:srgbClr val="FFFFFF"/>
+                    </a:solidFill>
+                  </a:tcPr>
+                </a:tc>
+                <a:tc>
+                  <a:txBody>
+                    <a:bodyPr/>
+                    <a:lstStyle/>
+                    <a:p>
+                      <a:pPr algn="ctr" indent="0" marL="0">
+                        <a:buNone/>
+                      </a:pPr>
+                      <a:r>
+                        <a:rPr lang="en-US" sz="700" dirty="0">
+                          <a:solidFill>
+                            <a:srgbClr val="333333"/>
+                          </a:solidFill>
+                        </a:rPr>
+                        <a:t>-</a:t>
+                      </a:r>
+                      <a:endParaRPr lang="en-US" sz="700" dirty="0"/>
+                    </a:p>
+                  </a:txBody>
+                  <a:tcPr marL="91440" marR="91440" marT="45720" marB="45720">
+                    <a:lnL w="6350" cap="flat" cmpd="sng" algn="ctr">
+                      <a:solidFill>
+                        <a:srgbClr val="CCCCCC"/>
+                      </a:solidFill>
+                      <a:prstDash val="solid"/>
+                      <a:round/>
+                      <a:headEnd type="none" w="med" len="med"/>
+                      <a:tailEnd type="none" w="med" len="med"/>
+                    </a:lnL>
+                    <a:lnR w="6350" cap="flat" cmpd="sng" algn="ctr">
+                      <a:solidFill>
+                        <a:srgbClr val="CCCCCC"/>
+                      </a:solidFill>
+                      <a:prstDash val="solid"/>
+                      <a:round/>
+                      <a:headEnd type="none" w="med" len="med"/>
+                      <a:tailEnd type="none" w="med" len="med"/>
+                    </a:lnR>
+                    <a:lnT w="6350" cap="flat" cmpd="sng" algn="ctr">
+                      <a:solidFill>
+                        <a:srgbClr val="CCCCCC"/>
+                      </a:solidFill>
+                      <a:prstDash val="solid"/>
+                      <a:round/>
+                      <a:headEnd type="none" w="med" len="med"/>
+                      <a:tailEnd type="none" w="med" len="med"/>
+                    </a:lnT>
+                    <a:lnB w="6350" cap="flat" cmpd="sng" algn="ctr">
+                      <a:solidFill>
+                        <a:srgbClr val="CCCCCC"/>
+                      </a:solidFill>
+                      <a:prstDash val="solid"/>
+                      <a:round/>
+                      <a:headEnd type="none" w="med" len="med"/>
+                      <a:tailEnd type="none" w="med" len="med"/>
+                    </a:lnB>
+                    <a:solidFill>
+                      <a:srgbClr val="FFFFFF"/>
+                    </a:solidFill>
+                  </a:tcPr>
+                </a:tc>
+                <a:tc>
+                  <a:txBody>
+                    <a:bodyPr/>
+                    <a:lstStyle/>
+                    <a:p>
+                      <a:pPr algn="ctr" indent="0" marL="0">
+                        <a:buNone/>
+                      </a:pPr>
+                      <a:r>
+                        <a:rPr lang="en-US" sz="700" dirty="0">
+                          <a:solidFill>
+                            <a:srgbClr val="333333"/>
+                          </a:solidFill>
+                        </a:rPr>
+                        <a:t>-</a:t>
+                      </a:r>
+                      <a:endParaRPr lang="en-US" sz="700" dirty="0"/>
+                    </a:p>
+                  </a:txBody>
+                  <a:tcPr marL="91440" marR="91440" marT="45720" marB="45720">
+                    <a:lnL w="6350" cap="flat" cmpd="sng" algn="ctr">
+                      <a:solidFill>
+                        <a:srgbClr val="CCCCCC"/>
+                      </a:solidFill>
+                      <a:prstDash val="solid"/>
+                      <a:round/>
+                      <a:headEnd type="none" w="med" len="med"/>
+                      <a:tailEnd type="none" w="med" len="med"/>
+                    </a:lnL>
+                    <a:lnR w="6350" cap="flat" cmpd="sng" algn="ctr">
+                      <a:solidFill>
+                        <a:srgbClr val="CCCCCC"/>
+                      </a:solidFill>
+                      <a:prstDash val="solid"/>
+                      <a:round/>
+                      <a:headEnd type="none" w="med" len="med"/>
+                      <a:tailEnd type="none" w="med" len="med"/>
+                    </a:lnR>
+                    <a:lnT w="6350" cap="flat" cmpd="sng" algn="ctr">
+                      <a:solidFill>
+                        <a:srgbClr val="CCCCCC"/>
+                      </a:solidFill>
+                      <a:prstDash val="solid"/>
+                      <a:round/>
+                      <a:headEnd type="none" w="med" len="med"/>
+                      <a:tailEnd type="none" w="med" len="med"/>
+                    </a:lnT>
+                    <a:lnB w="6350" cap="flat" cmpd="sng" algn="ctr">
+                      <a:solidFill>
+                        <a:srgbClr val="CCCCCC"/>
+                      </a:solidFill>
+                      <a:prstDash val="solid"/>
+                      <a:round/>
+                      <a:headEnd type="none" w="med" len="med"/>
+                      <a:tailEnd type="none" w="med" len="med"/>
+                    </a:lnB>
+                    <a:solidFill>
+                      <a:srgbClr val="FFFFFF"/>
+                    </a:solidFill>
+                  </a:tcPr>
+                </a:tc>
+                <a:tc>
+                  <a:txBody>
+                    <a:bodyPr/>
+                    <a:lstStyle/>
+                    <a:p>
+                      <a:pPr algn="ctr" indent="0" marL="0">
+                        <a:buNone/>
+                      </a:pPr>
+                      <a:r>
+                        <a:rPr lang="en-US" sz="700" dirty="0">
+                          <a:solidFill>
+                            <a:srgbClr val="333333"/>
+                          </a:solidFill>
+                        </a:rPr>
+                        <a:t>-</a:t>
+                      </a:r>
+                      <a:endParaRPr lang="en-US" sz="700" dirty="0"/>
+                    </a:p>
+                  </a:txBody>
+                  <a:tcPr marL="91440" marR="91440" marT="45720" marB="45720">
+                    <a:lnL w="6350" cap="flat" cmpd="sng" algn="ctr">
+                      <a:solidFill>
+                        <a:srgbClr val="CCCCCC"/>
+                      </a:solidFill>
+                      <a:prstDash val="solid"/>
+                      <a:round/>
+                      <a:headEnd type="none" w="med" len="med"/>
+                      <a:tailEnd type="none" w="med" len="med"/>
+                    </a:lnL>
+                    <a:lnR w="6350" cap="flat" cmpd="sng" algn="ctr">
+                      <a:solidFill>
+                        <a:srgbClr val="CCCCCC"/>
+                      </a:solidFill>
+                      <a:prstDash val="solid"/>
+                      <a:round/>
+                      <a:headEnd type="none" w="med" len="med"/>
+                      <a:tailEnd type="none" w="med" len="med"/>
+                    </a:lnR>
+                    <a:lnT w="6350" cap="flat" cmpd="sng" algn="ctr">
+                      <a:solidFill>
+                        <a:srgbClr val="CCCCCC"/>
+                      </a:solidFill>
+                      <a:prstDash val="solid"/>
+                      <a:round/>
+                      <a:headEnd type="none" w="med" len="med"/>
+                      <a:tailEnd type="none" w="med" len="med"/>
+                    </a:lnT>
+                    <a:lnB w="6350" cap="flat" cmpd="sng" algn="ctr">
+                      <a:solidFill>
+                        <a:srgbClr val="CCCCCC"/>
+                      </a:solidFill>
+                      <a:prstDash val="solid"/>
+                      <a:round/>
+                      <a:headEnd type="none" w="med" len="med"/>
+                      <a:tailEnd type="none" w="med" len="med"/>
+                    </a:lnB>
+                    <a:solidFill>
+                      <a:srgbClr val="FFFFFF"/>
                     </a:solidFill>
                   </a:tcPr>
                 </a:tc>
@@ -34439,7 +34637,7 @@
                             <a:srgbClr val="000000"/>
                           </a:solidFill>
                         </a:rPr>
-                        <a:t>ハートンホテル東品川</a:t>
+                        <a:t>ホテルケヤキゲート東京府中</a:t>
                       </a:r>
                       <a:endParaRPr lang="en-US" sz="700" dirty="0"/>
                     </a:p>
@@ -34497,7 +34695,7 @@
                             <a:srgbClr val="000000"/>
                           </a:solidFill>
                         </a:rPr>
-                        <a:t>6</a:t>
+                        <a:t>3</a:t>
                       </a:r>
                       <a:endParaRPr lang="en-US" sz="700" dirty="0"/>
                     </a:p>
@@ -34539,67 +34737,6 @@
                       <a:headEnd type="none" w="med" len="med"/>
                       <a:tailEnd type="none" w="med" len="med"/>
                     </a:lnB>
-                  </a:tcPr>
-                </a:tc>
-                <a:tc>
-                  <a:txBody>
-                    <a:bodyPr/>
-                    <a:lstStyle/>
-                    <a:p>
-                      <a:pPr algn="ctr" indent="0" marL="0">
-                        <a:buNone/>
-                      </a:pPr>
-                      <a:r>
-                        <a:rPr lang="en-US" sz="700" dirty="0">
-                          <a:solidFill>
-                            <a:srgbClr val="E74C3C"/>
-                          </a:solidFill>
-                        </a:rPr>
-                        <a:t>4</a:t>
-                      </a:r>
-                      <a:endParaRPr lang="en-US" sz="700" dirty="0"/>
-                    </a:p>
-                  </a:txBody>
-                  <a:tcPr marL="91440" marR="91440" marT="45720" marB="45720">
-                    <a:lnL w="6350" cap="flat" cmpd="sng" algn="ctr">
-                      <a:solidFill>
-                        <a:srgbClr val="CCCCCC"/>
-                      </a:solidFill>
-                      <a:prstDash val="solid"/>
-                      <a:round/>
-                      <a:headEnd type="none" w="med" len="med"/>
-                      <a:tailEnd type="none" w="med" len="med"/>
-                    </a:lnL>
-                    <a:lnR w="6350" cap="flat" cmpd="sng" algn="ctr">
-                      <a:solidFill>
-                        <a:srgbClr val="CCCCCC"/>
-                      </a:solidFill>
-                      <a:prstDash val="solid"/>
-                      <a:round/>
-                      <a:headEnd type="none" w="med" len="med"/>
-                      <a:tailEnd type="none" w="med" len="med"/>
-                    </a:lnR>
-                    <a:lnT w="6350" cap="flat" cmpd="sng" algn="ctr">
-                      <a:solidFill>
-                        <a:srgbClr val="CCCCCC"/>
-                      </a:solidFill>
-                      <a:prstDash val="solid"/>
-                      <a:round/>
-                      <a:headEnd type="none" w="med" len="med"/>
-                      <a:tailEnd type="none" w="med" len="med"/>
-                    </a:lnT>
-                    <a:lnB w="6350" cap="flat" cmpd="sng" algn="ctr">
-                      <a:solidFill>
-                        <a:srgbClr val="CCCCCC"/>
-                      </a:solidFill>
-                      <a:prstDash val="solid"/>
-                      <a:round/>
-                      <a:headEnd type="none" w="med" len="med"/>
-                      <a:tailEnd type="none" w="med" len="med"/>
-                    </a:lnB>
-                    <a:solidFill>
-                      <a:srgbClr val="FFE0B2"/>
-                    </a:solidFill>
                   </a:tcPr>
                 </a:tc>
                 <a:tc>
@@ -34738,7 +34875,7 @@
                             <a:srgbClr val="333333"/>
                           </a:solidFill>
                         </a:rPr>
-                        <a:t>1</a:t>
+                        <a:t>-</a:t>
                       </a:r>
                       <a:endParaRPr lang="en-US" sz="700" dirty="0"/>
                     </a:p>
@@ -34781,7 +34918,68 @@
                       <a:tailEnd type="none" w="med" len="med"/>
                     </a:lnB>
                     <a:solidFill>
-                      <a:srgbClr val="FFF9C4"/>
+                      <a:srgbClr val="FFFFFF"/>
+                    </a:solidFill>
+                  </a:tcPr>
+                </a:tc>
+                <a:tc>
+                  <a:txBody>
+                    <a:bodyPr/>
+                    <a:lstStyle/>
+                    <a:p>
+                      <a:pPr algn="ctr" indent="0" marL="0">
+                        <a:buNone/>
+                      </a:pPr>
+                      <a:r>
+                        <a:rPr lang="en-US" sz="700" dirty="0">
+                          <a:solidFill>
+                            <a:srgbClr val="333333"/>
+                          </a:solidFill>
+                        </a:rPr>
+                        <a:t>-</a:t>
+                      </a:r>
+                      <a:endParaRPr lang="en-US" sz="700" dirty="0"/>
+                    </a:p>
+                  </a:txBody>
+                  <a:tcPr marL="91440" marR="91440" marT="45720" marB="45720">
+                    <a:lnL w="6350" cap="flat" cmpd="sng" algn="ctr">
+                      <a:solidFill>
+                        <a:srgbClr val="CCCCCC"/>
+                      </a:solidFill>
+                      <a:prstDash val="solid"/>
+                      <a:round/>
+                      <a:headEnd type="none" w="med" len="med"/>
+                      <a:tailEnd type="none" w="med" len="med"/>
+                    </a:lnL>
+                    <a:lnR w="6350" cap="flat" cmpd="sng" algn="ctr">
+                      <a:solidFill>
+                        <a:srgbClr val="CCCCCC"/>
+                      </a:solidFill>
+                      <a:prstDash val="solid"/>
+                      <a:round/>
+                      <a:headEnd type="none" w="med" len="med"/>
+                      <a:tailEnd type="none" w="med" len="med"/>
+                    </a:lnR>
+                    <a:lnT w="6350" cap="flat" cmpd="sng" algn="ctr">
+                      <a:solidFill>
+                        <a:srgbClr val="CCCCCC"/>
+                      </a:solidFill>
+                      <a:prstDash val="solid"/>
+                      <a:round/>
+                      <a:headEnd type="none" w="med" len="med"/>
+                      <a:tailEnd type="none" w="med" len="med"/>
+                    </a:lnT>
+                    <a:lnB w="6350" cap="flat" cmpd="sng" algn="ctr">
+                      <a:solidFill>
+                        <a:srgbClr val="CCCCCC"/>
+                      </a:solidFill>
+                      <a:prstDash val="solid"/>
+                      <a:round/>
+                      <a:headEnd type="none" w="med" len="med"/>
+                      <a:tailEnd type="none" w="med" len="med"/>
+                    </a:lnB>
+                    <a:solidFill>
+                      <a:srgbClr val="FFFFFF"/>
                     </a:solidFill>
                   </a:tcPr>
                 </a:tc>
@@ -34923,7 +35121,7 @@
                             <a:srgbClr val="000000"/>
                           </a:solidFill>
                         </a:rPr>
-                        <a:t>ダイワロイネットホテル東京大崎</a:t>
+                        <a:t>アパホテル相模原橋本駅東</a:t>
                       </a:r>
                       <a:endParaRPr lang="en-US" sz="700" dirty="0"/>
                     </a:p>
@@ -35407,7 +35605,7 @@
                             <a:srgbClr val="000000"/>
                           </a:solidFill>
                         </a:rPr>
-                        <a:t>ホテルケヤキゲート東京府中</a:t>
+                        <a:t>コンフォートホテル成田</a:t>
                       </a:r>
                       <a:endParaRPr lang="en-US" sz="700" dirty="0"/>
                     </a:p>
@@ -35465,7 +35663,7 @@
                             <a:srgbClr val="000000"/>
                           </a:solidFill>
                         </a:rPr>
-                        <a:t>3</a:t>
+                        <a:t>4</a:t>
                       </a:r>
                       <a:endParaRPr lang="en-US" sz="700" dirty="0"/>
                     </a:p>
@@ -35507,6 +35705,67 @@
                       <a:headEnd type="none" w="med" len="med"/>
                       <a:tailEnd type="none" w="med" len="med"/>
                     </a:lnB>
+                  </a:tcPr>
+                </a:tc>
+                <a:tc>
+                  <a:txBody>
+                    <a:bodyPr/>
+                    <a:lstStyle/>
+                    <a:p>
+                      <a:pPr algn="ctr" indent="0" marL="0">
+                        <a:buNone/>
+                      </a:pPr>
+                      <a:r>
+                        <a:rPr lang="en-US" sz="700" dirty="0">
+                          <a:solidFill>
+                            <a:srgbClr val="E74C3C"/>
+                          </a:solidFill>
+                        </a:rPr>
+                        <a:t>3</a:t>
+                      </a:r>
+                      <a:endParaRPr lang="en-US" sz="700" dirty="0"/>
+                    </a:p>
+                  </a:txBody>
+                  <a:tcPr marL="91440" marR="91440" marT="45720" marB="45720">
+                    <a:lnL w="6350" cap="flat" cmpd="sng" algn="ctr">
+                      <a:solidFill>
+                        <a:srgbClr val="CCCCCC"/>
+                      </a:solidFill>
+                      <a:prstDash val="solid"/>
+                      <a:round/>
+                      <a:headEnd type="none" w="med" len="med"/>
+                      <a:tailEnd type="none" w="med" len="med"/>
+                    </a:lnL>
+                    <a:lnR w="6350" cap="flat" cmpd="sng" algn="ctr">
+                      <a:solidFill>
+                        <a:srgbClr val="CCCCCC"/>
+                      </a:solidFill>
+                      <a:prstDash val="solid"/>
+                      <a:round/>
+                      <a:headEnd type="none" w="med" len="med"/>
+                      <a:tailEnd type="none" w="med" len="med"/>
+                    </a:lnR>
+                    <a:lnT w="6350" cap="flat" cmpd="sng" algn="ctr">
+                      <a:solidFill>
+                        <a:srgbClr val="CCCCCC"/>
+                      </a:solidFill>
+                      <a:prstDash val="solid"/>
+                      <a:round/>
+                      <a:headEnd type="none" w="med" len="med"/>
+                      <a:tailEnd type="none" w="med" len="med"/>
+                    </a:lnT>
+                    <a:lnB w="6350" cap="flat" cmpd="sng" algn="ctr">
+                      <a:solidFill>
+                        <a:srgbClr val="CCCCCC"/>
+                      </a:solidFill>
+                      <a:prstDash val="solid"/>
+                      <a:round/>
+                      <a:headEnd type="none" w="med" len="med"/>
+                      <a:tailEnd type="none" w="med" len="med"/>
+                    </a:lnB>
+                    <a:solidFill>
+                      <a:srgbClr val="FFE0B2"/>
+                    </a:solidFill>
                   </a:tcPr>
                 </a:tc>
                 <a:tc>
@@ -35645,368 +35904,6 @@
                             <a:srgbClr val="333333"/>
                           </a:solidFill>
                         </a:rPr>
-                        <a:t>-</a:t>
-                      </a:r>
-                      <a:endParaRPr lang="en-US" sz="700" dirty="0"/>
-                    </a:p>
-                  </a:txBody>
-                  <a:tcPr marL="91440" marR="91440" marT="45720" marB="45720">
-                    <a:lnL w="6350" cap="flat" cmpd="sng" algn="ctr">
-                      <a:solidFill>
-                        <a:srgbClr val="CCCCCC"/>
-                      </a:solidFill>
-                      <a:prstDash val="solid"/>
-                      <a:round/>
-                      <a:headEnd type="none" w="med" len="med"/>
-                      <a:tailEnd type="none" w="med" len="med"/>
-                    </a:lnL>
-                    <a:lnR w="6350" cap="flat" cmpd="sng" algn="ctr">
-                      <a:solidFill>
-                        <a:srgbClr val="CCCCCC"/>
-                      </a:solidFill>
-                      <a:prstDash val="solid"/>
-                      <a:round/>
-                      <a:headEnd type="none" w="med" len="med"/>
-                      <a:tailEnd type="none" w="med" len="med"/>
-                    </a:lnR>
-                    <a:lnT w="6350" cap="flat" cmpd="sng" algn="ctr">
-                      <a:solidFill>
-                        <a:srgbClr val="CCCCCC"/>
-                      </a:solidFill>
-                      <a:prstDash val="solid"/>
-                      <a:round/>
-                      <a:headEnd type="none" w="med" len="med"/>
-                      <a:tailEnd type="none" w="med" len="med"/>
-                    </a:lnT>
-                    <a:lnB w="6350" cap="flat" cmpd="sng" algn="ctr">
-                      <a:solidFill>
-                        <a:srgbClr val="CCCCCC"/>
-                      </a:solidFill>
-                      <a:prstDash val="solid"/>
-                      <a:round/>
-                      <a:headEnd type="none" w="med" len="med"/>
-                      <a:tailEnd type="none" w="med" len="med"/>
-                    </a:lnB>
-                    <a:solidFill>
-                      <a:srgbClr val="FFFFFF"/>
-                    </a:solidFill>
-                  </a:tcPr>
-                </a:tc>
-                <a:tc>
-                  <a:txBody>
-                    <a:bodyPr/>
-                    <a:lstStyle/>
-                    <a:p>
-                      <a:pPr algn="ctr" indent="0" marL="0">
-                        <a:buNone/>
-                      </a:pPr>
-                      <a:r>
-                        <a:rPr lang="en-US" sz="700" dirty="0">
-                          <a:solidFill>
-                            <a:srgbClr val="333333"/>
-                          </a:solidFill>
-                        </a:rPr>
-                        <a:t>-</a:t>
-                      </a:r>
-                      <a:endParaRPr lang="en-US" sz="700" dirty="0"/>
-                    </a:p>
-                  </a:txBody>
-                  <a:tcPr marL="91440" marR="91440" marT="45720" marB="45720">
-                    <a:lnL w="6350" cap="flat" cmpd="sng" algn="ctr">
-                      <a:solidFill>
-                        <a:srgbClr val="CCCCCC"/>
-                      </a:solidFill>
-                      <a:prstDash val="solid"/>
-                      <a:round/>
-                      <a:headEnd type="none" w="med" len="med"/>
-                      <a:tailEnd type="none" w="med" len="med"/>
-                    </a:lnL>
-                    <a:lnR w="6350" cap="flat" cmpd="sng" algn="ctr">
-                      <a:solidFill>
-                        <a:srgbClr val="CCCCCC"/>
-                      </a:solidFill>
-                      <a:prstDash val="solid"/>
-                      <a:round/>
-                      <a:headEnd type="none" w="med" len="med"/>
-                      <a:tailEnd type="none" w="med" len="med"/>
-                    </a:lnR>
-                    <a:lnT w="6350" cap="flat" cmpd="sng" algn="ctr">
-                      <a:solidFill>
-                        <a:srgbClr val="CCCCCC"/>
-                      </a:solidFill>
-                      <a:prstDash val="solid"/>
-                      <a:round/>
-                      <a:headEnd type="none" w="med" len="med"/>
-                      <a:tailEnd type="none" w="med" len="med"/>
-                    </a:lnT>
-                    <a:lnB w="6350" cap="flat" cmpd="sng" algn="ctr">
-                      <a:solidFill>
-                        <a:srgbClr val="CCCCCC"/>
-                      </a:solidFill>
-                      <a:prstDash val="solid"/>
-                      <a:round/>
-                      <a:headEnd type="none" w="med" len="med"/>
-                      <a:tailEnd type="none" w="med" len="med"/>
-                    </a:lnB>
-                    <a:solidFill>
-                      <a:srgbClr val="FFFFFF"/>
-                    </a:solidFill>
-                  </a:tcPr>
-                </a:tc>
-                <a:tc>
-                  <a:txBody>
-                    <a:bodyPr/>
-                    <a:lstStyle/>
-                    <a:p>
-                      <a:pPr algn="ctr" indent="0" marL="0">
-                        <a:buNone/>
-                      </a:pPr>
-                      <a:r>
-                        <a:rPr lang="en-US" sz="700" dirty="0">
-                          <a:solidFill>
-                            <a:srgbClr val="333333"/>
-                          </a:solidFill>
-                        </a:rPr>
-                        <a:t>-</a:t>
-                      </a:r>
-                      <a:endParaRPr lang="en-US" sz="700" dirty="0"/>
-                    </a:p>
-                  </a:txBody>
-                  <a:tcPr marL="91440" marR="91440" marT="45720" marB="45720">
-                    <a:lnL w="6350" cap="flat" cmpd="sng" algn="ctr">
-                      <a:solidFill>
-                        <a:srgbClr val="CCCCCC"/>
-                      </a:solidFill>
-                      <a:prstDash val="solid"/>
-                      <a:round/>
-                      <a:headEnd type="none" w="med" len="med"/>
-                      <a:tailEnd type="none" w="med" len="med"/>
-                    </a:lnL>
-                    <a:lnR w="6350" cap="flat" cmpd="sng" algn="ctr">
-                      <a:solidFill>
-                        <a:srgbClr val="CCCCCC"/>
-                      </a:solidFill>
-                      <a:prstDash val="solid"/>
-                      <a:round/>
-                      <a:headEnd type="none" w="med" len="med"/>
-                      <a:tailEnd type="none" w="med" len="med"/>
-                    </a:lnR>
-                    <a:lnT w="6350" cap="flat" cmpd="sng" algn="ctr">
-                      <a:solidFill>
-                        <a:srgbClr val="CCCCCC"/>
-                      </a:solidFill>
-                      <a:prstDash val="solid"/>
-                      <a:round/>
-                      <a:headEnd type="none" w="med" len="med"/>
-                      <a:tailEnd type="none" w="med" len="med"/>
-                    </a:lnT>
-                    <a:lnB w="6350" cap="flat" cmpd="sng" algn="ctr">
-                      <a:solidFill>
-                        <a:srgbClr val="CCCCCC"/>
-                      </a:solidFill>
-                      <a:prstDash val="solid"/>
-                      <a:round/>
-                      <a:headEnd type="none" w="med" len="med"/>
-                      <a:tailEnd type="none" w="med" len="med"/>
-                    </a:lnB>
-                    <a:solidFill>
-                      <a:srgbClr val="FFFFFF"/>
-                    </a:solidFill>
-                  </a:tcPr>
-                </a:tc>
-                <a:tc>
-                  <a:txBody>
-                    <a:bodyPr/>
-                    <a:lstStyle/>
-                    <a:p>
-                      <a:pPr algn="ctr" indent="0" marL="0">
-                        <a:buNone/>
-                      </a:pPr>
-                      <a:r>
-                        <a:rPr lang="en-US" sz="700" dirty="0">
-                          <a:solidFill>
-                            <a:srgbClr val="333333"/>
-                          </a:solidFill>
-                        </a:rPr>
-                        <a:t>1</a:t>
-                      </a:r>
-                      <a:endParaRPr lang="en-US" sz="700" dirty="0"/>
-                    </a:p>
-                  </a:txBody>
-                  <a:tcPr marL="91440" marR="91440" marT="45720" marB="45720">
-                    <a:lnL w="6350" cap="flat" cmpd="sng" algn="ctr">
-                      <a:solidFill>
-                        <a:srgbClr val="CCCCCC"/>
-                      </a:solidFill>
-                      <a:prstDash val="solid"/>
-                      <a:round/>
-                      <a:headEnd type="none" w="med" len="med"/>
-                      <a:tailEnd type="none" w="med" len="med"/>
-                    </a:lnL>
-                    <a:lnR w="6350" cap="flat" cmpd="sng" algn="ctr">
-                      <a:solidFill>
-                        <a:srgbClr val="CCCCCC"/>
-                      </a:solidFill>
-                      <a:prstDash val="solid"/>
-                      <a:round/>
-                      <a:headEnd type="none" w="med" len="med"/>
-                      <a:tailEnd type="none" w="med" len="med"/>
-                    </a:lnR>
-                    <a:lnT w="6350" cap="flat" cmpd="sng" algn="ctr">
-                      <a:solidFill>
-                        <a:srgbClr val="CCCCCC"/>
-                      </a:solidFill>
-                      <a:prstDash val="solid"/>
-                      <a:round/>
-                      <a:headEnd type="none" w="med" len="med"/>
-                      <a:tailEnd type="none" w="med" len="med"/>
-                    </a:lnT>
-                    <a:lnB w="6350" cap="flat" cmpd="sng" algn="ctr">
-                      <a:solidFill>
-                        <a:srgbClr val="CCCCCC"/>
-                      </a:solidFill>
-                      <a:prstDash val="solid"/>
-                      <a:round/>
-                      <a:headEnd type="none" w="med" len="med"/>
-                      <a:tailEnd type="none" w="med" len="med"/>
-                    </a:lnB>
-                    <a:solidFill>
-                      <a:srgbClr val="FFF9C4"/>
-                    </a:solidFill>
-                  </a:tcPr>
-                </a:tc>
-              </a:tr>
-              <a:tr h="0">
-                <a:tc>
-                  <a:txBody>
-                    <a:bodyPr/>
-                    <a:lstStyle/>
-                    <a:p>
-                      <a:pPr indent="0" marL="0">
-                        <a:buNone/>
-                      </a:pPr>
-                      <a:r>
-                        <a:rPr lang="en-US" sz="700" b="1" dirty="0">
-                          <a:solidFill>
-                            <a:srgbClr val="000000"/>
-                          </a:solidFill>
-                        </a:rPr>
-                        <a:t>アパホテル相模原橋本駅東</a:t>
-                      </a:r>
-                      <a:endParaRPr lang="en-US" sz="700" dirty="0"/>
-                    </a:p>
-                  </a:txBody>
-                  <a:tcPr marL="91440" marR="91440" marT="45720" marB="45720">
-                    <a:lnL w="6350" cap="flat" cmpd="sng" algn="ctr">
-                      <a:solidFill>
-                        <a:srgbClr val="CCCCCC"/>
-                      </a:solidFill>
-                      <a:prstDash val="solid"/>
-                      <a:round/>
-                      <a:headEnd type="none" w="med" len="med"/>
-                      <a:tailEnd type="none" w="med" len="med"/>
-                    </a:lnL>
-                    <a:lnR w="6350" cap="flat" cmpd="sng" algn="ctr">
-                      <a:solidFill>
-                        <a:srgbClr val="CCCCCC"/>
-                      </a:solidFill>
-                      <a:prstDash val="solid"/>
-                      <a:round/>
-                      <a:headEnd type="none" w="med" len="med"/>
-                      <a:tailEnd type="none" w="med" len="med"/>
-                    </a:lnR>
-                    <a:lnT w="6350" cap="flat" cmpd="sng" algn="ctr">
-                      <a:solidFill>
-                        <a:srgbClr val="CCCCCC"/>
-                      </a:solidFill>
-                      <a:prstDash val="solid"/>
-                      <a:round/>
-                      <a:headEnd type="none" w="med" len="med"/>
-                      <a:tailEnd type="none" w="med" len="med"/>
-                    </a:lnT>
-                    <a:lnB w="6350" cap="flat" cmpd="sng" algn="ctr">
-                      <a:solidFill>
-                        <a:srgbClr val="CCCCCC"/>
-                      </a:solidFill>
-                      <a:prstDash val="solid"/>
-                      <a:round/>
-                      <a:headEnd type="none" w="med" len="med"/>
-                      <a:tailEnd type="none" w="med" len="med"/>
-                    </a:lnB>
-                  </a:tcPr>
-                </a:tc>
-                <a:tc>
-                  <a:txBody>
-                    <a:bodyPr/>
-                    <a:lstStyle/>
-                    <a:p>
-                      <a:pPr algn="ctr" indent="0" marL="0">
-                        <a:buNone/>
-                      </a:pPr>
-                      <a:r>
-                        <a:rPr lang="en-US" sz="700" b="1" dirty="0">
-                          <a:solidFill>
-                            <a:srgbClr val="000000"/>
-                          </a:solidFill>
-                        </a:rPr>
-                        <a:t>2</a:t>
-                      </a:r>
-                      <a:endParaRPr lang="en-US" sz="700" dirty="0"/>
-                    </a:p>
-                  </a:txBody>
-                  <a:tcPr marL="91440" marR="91440" marT="45720" marB="45720">
-                    <a:lnL w="6350" cap="flat" cmpd="sng" algn="ctr">
-                      <a:solidFill>
-                        <a:srgbClr val="CCCCCC"/>
-                      </a:solidFill>
-                      <a:prstDash val="solid"/>
-                      <a:round/>
-                      <a:headEnd type="none" w="med" len="med"/>
-                      <a:tailEnd type="none" w="med" len="med"/>
-                    </a:lnL>
-                    <a:lnR w="6350" cap="flat" cmpd="sng" algn="ctr">
-                      <a:solidFill>
-                        <a:srgbClr val="CCCCCC"/>
-                      </a:solidFill>
-                      <a:prstDash val="solid"/>
-                      <a:round/>
-                      <a:headEnd type="none" w="med" len="med"/>
-                      <a:tailEnd type="none" w="med" len="med"/>
-                    </a:lnR>
-                    <a:lnT w="6350" cap="flat" cmpd="sng" algn="ctr">
-                      <a:solidFill>
-                        <a:srgbClr val="CCCCCC"/>
-                      </a:solidFill>
-                      <a:prstDash val="solid"/>
-                      <a:round/>
-                      <a:headEnd type="none" w="med" len="med"/>
-                      <a:tailEnd type="none" w="med" len="med"/>
-                    </a:lnT>
-                    <a:lnB w="6350" cap="flat" cmpd="sng" algn="ctr">
-                      <a:solidFill>
-                        <a:srgbClr val="CCCCCC"/>
-                      </a:solidFill>
-                      <a:prstDash val="solid"/>
-                      <a:round/>
-                      <a:headEnd type="none" w="med" len="med"/>
-                      <a:tailEnd type="none" w="med" len="med"/>
-                    </a:lnB>
-                  </a:tcPr>
-                </a:tc>
-                <a:tc>
-                  <a:txBody>
-                    <a:bodyPr/>
-                    <a:lstStyle/>
-                    <a:p>
-                      <a:pPr algn="ctr" indent="0" marL="0">
-                        <a:buNone/>
-                      </a:pPr>
-                      <a:r>
-                        <a:rPr lang="en-US" sz="700" dirty="0">
-                          <a:solidFill>
-                            <a:srgbClr val="333333"/>
-                          </a:solidFill>
-                        </a:rPr>
                         <a:t>2</a:t>
                       </a:r>
                       <a:endParaRPr lang="en-US" sz="700" dirty="0"/>
@@ -36068,674 +35965,7 @@
                             <a:srgbClr val="333333"/>
                           </a:solidFill>
                         </a:rPr>
-                        <a:t>-</a:t>
-                      </a:r>
-                      <a:endParaRPr lang="en-US" sz="700" dirty="0"/>
-                    </a:p>
-                  </a:txBody>
-                  <a:tcPr marL="91440" marR="91440" marT="45720" marB="45720">
-                    <a:lnL w="6350" cap="flat" cmpd="sng" algn="ctr">
-                      <a:solidFill>
-                        <a:srgbClr val="CCCCCC"/>
-                      </a:solidFill>
-                      <a:prstDash val="solid"/>
-                      <a:round/>
-                      <a:headEnd type="none" w="med" len="med"/>
-                      <a:tailEnd type="none" w="med" len="med"/>
-                    </a:lnL>
-                    <a:lnR w="6350" cap="flat" cmpd="sng" algn="ctr">
-                      <a:solidFill>
-                        <a:srgbClr val="CCCCCC"/>
-                      </a:solidFill>
-                      <a:prstDash val="solid"/>
-                      <a:round/>
-                      <a:headEnd type="none" w="med" len="med"/>
-                      <a:tailEnd type="none" w="med" len="med"/>
-                    </a:lnR>
-                    <a:lnT w="6350" cap="flat" cmpd="sng" algn="ctr">
-                      <a:solidFill>
-                        <a:srgbClr val="CCCCCC"/>
-                      </a:solidFill>
-                      <a:prstDash val="solid"/>
-                      <a:round/>
-                      <a:headEnd type="none" w="med" len="med"/>
-                      <a:tailEnd type="none" w="med" len="med"/>
-                    </a:lnT>
-                    <a:lnB w="6350" cap="flat" cmpd="sng" algn="ctr">
-                      <a:solidFill>
-                        <a:srgbClr val="CCCCCC"/>
-                      </a:solidFill>
-                      <a:prstDash val="solid"/>
-                      <a:round/>
-                      <a:headEnd type="none" w="med" len="med"/>
-                      <a:tailEnd type="none" w="med" len="med"/>
-                    </a:lnB>
-                    <a:solidFill>
-                      <a:srgbClr val="FFFFFF"/>
-                    </a:solidFill>
-                  </a:tcPr>
-                </a:tc>
-                <a:tc>
-                  <a:txBody>
-                    <a:bodyPr/>
-                    <a:lstStyle/>
-                    <a:p>
-                      <a:pPr algn="ctr" indent="0" marL="0">
-                        <a:buNone/>
-                      </a:pPr>
-                      <a:r>
-                        <a:rPr lang="en-US" sz="700" dirty="0">
-                          <a:solidFill>
-                            <a:srgbClr val="333333"/>
-                          </a:solidFill>
-                        </a:rPr>
-                        <a:t>-</a:t>
-                      </a:r>
-                      <a:endParaRPr lang="en-US" sz="700" dirty="0"/>
-                    </a:p>
-                  </a:txBody>
-                  <a:tcPr marL="91440" marR="91440" marT="45720" marB="45720">
-                    <a:lnL w="6350" cap="flat" cmpd="sng" algn="ctr">
-                      <a:solidFill>
-                        <a:srgbClr val="CCCCCC"/>
-                      </a:solidFill>
-                      <a:prstDash val="solid"/>
-                      <a:round/>
-                      <a:headEnd type="none" w="med" len="med"/>
-                      <a:tailEnd type="none" w="med" len="med"/>
-                    </a:lnL>
-                    <a:lnR w="6350" cap="flat" cmpd="sng" algn="ctr">
-                      <a:solidFill>
-                        <a:srgbClr val="CCCCCC"/>
-                      </a:solidFill>
-                      <a:prstDash val="solid"/>
-                      <a:round/>
-                      <a:headEnd type="none" w="med" len="med"/>
-                      <a:tailEnd type="none" w="med" len="med"/>
-                    </a:lnR>
-                    <a:lnT w="6350" cap="flat" cmpd="sng" algn="ctr">
-                      <a:solidFill>
-                        <a:srgbClr val="CCCCCC"/>
-                      </a:solidFill>
-                      <a:prstDash val="solid"/>
-                      <a:round/>
-                      <a:headEnd type="none" w="med" len="med"/>
-                      <a:tailEnd type="none" w="med" len="med"/>
-                    </a:lnT>
-                    <a:lnB w="6350" cap="flat" cmpd="sng" algn="ctr">
-                      <a:solidFill>
-                        <a:srgbClr val="CCCCCC"/>
-                      </a:solidFill>
-                      <a:prstDash val="solid"/>
-                      <a:round/>
-                      <a:headEnd type="none" w="med" len="med"/>
-                      <a:tailEnd type="none" w="med" len="med"/>
-                    </a:lnB>
-                    <a:solidFill>
-                      <a:srgbClr val="FFFFFF"/>
-                    </a:solidFill>
-                  </a:tcPr>
-                </a:tc>
-                <a:tc>
-                  <a:txBody>
-                    <a:bodyPr/>
-                    <a:lstStyle/>
-                    <a:p>
-                      <a:pPr algn="ctr" indent="0" marL="0">
-                        <a:buNone/>
-                      </a:pPr>
-                      <a:r>
-                        <a:rPr lang="en-US" sz="700" dirty="0">
-                          <a:solidFill>
-                            <a:srgbClr val="333333"/>
-                          </a:solidFill>
-                        </a:rPr>
-                        <a:t>-</a:t>
-                      </a:r>
-                      <a:endParaRPr lang="en-US" sz="700" dirty="0"/>
-                    </a:p>
-                  </a:txBody>
-                  <a:tcPr marL="91440" marR="91440" marT="45720" marB="45720">
-                    <a:lnL w="6350" cap="flat" cmpd="sng" algn="ctr">
-                      <a:solidFill>
-                        <a:srgbClr val="CCCCCC"/>
-                      </a:solidFill>
-                      <a:prstDash val="solid"/>
-                      <a:round/>
-                      <a:headEnd type="none" w="med" len="med"/>
-                      <a:tailEnd type="none" w="med" len="med"/>
-                    </a:lnL>
-                    <a:lnR w="6350" cap="flat" cmpd="sng" algn="ctr">
-                      <a:solidFill>
-                        <a:srgbClr val="CCCCCC"/>
-                      </a:solidFill>
-                      <a:prstDash val="solid"/>
-                      <a:round/>
-                      <a:headEnd type="none" w="med" len="med"/>
-                      <a:tailEnd type="none" w="med" len="med"/>
-                    </a:lnR>
-                    <a:lnT w="6350" cap="flat" cmpd="sng" algn="ctr">
-                      <a:solidFill>
-                        <a:srgbClr val="CCCCCC"/>
-                      </a:solidFill>
-                      <a:prstDash val="solid"/>
-                      <a:round/>
-                      <a:headEnd type="none" w="med" len="med"/>
-                      <a:tailEnd type="none" w="med" len="med"/>
-                    </a:lnT>
-                    <a:lnB w="6350" cap="flat" cmpd="sng" algn="ctr">
-                      <a:solidFill>
-                        <a:srgbClr val="CCCCCC"/>
-                      </a:solidFill>
-                      <a:prstDash val="solid"/>
-                      <a:round/>
-                      <a:headEnd type="none" w="med" len="med"/>
-                      <a:tailEnd type="none" w="med" len="med"/>
-                    </a:lnB>
-                    <a:solidFill>
-                      <a:srgbClr val="FFFFFF"/>
-                    </a:solidFill>
-                  </a:tcPr>
-                </a:tc>
-                <a:tc>
-                  <a:txBody>
-                    <a:bodyPr/>
-                    <a:lstStyle/>
-                    <a:p>
-                      <a:pPr algn="ctr" indent="0" marL="0">
-                        <a:buNone/>
-                      </a:pPr>
-                      <a:r>
-                        <a:rPr lang="en-US" sz="700" dirty="0">
-                          <a:solidFill>
-                            <a:srgbClr val="333333"/>
-                          </a:solidFill>
-                        </a:rPr>
-                        <a:t>-</a:t>
-                      </a:r>
-                      <a:endParaRPr lang="en-US" sz="700" dirty="0"/>
-                    </a:p>
-                  </a:txBody>
-                  <a:tcPr marL="91440" marR="91440" marT="45720" marB="45720">
-                    <a:lnL w="6350" cap="flat" cmpd="sng" algn="ctr">
-                      <a:solidFill>
-                        <a:srgbClr val="CCCCCC"/>
-                      </a:solidFill>
-                      <a:prstDash val="solid"/>
-                      <a:round/>
-                      <a:headEnd type="none" w="med" len="med"/>
-                      <a:tailEnd type="none" w="med" len="med"/>
-                    </a:lnL>
-                    <a:lnR w="6350" cap="flat" cmpd="sng" algn="ctr">
-                      <a:solidFill>
-                        <a:srgbClr val="CCCCCC"/>
-                      </a:solidFill>
-                      <a:prstDash val="solid"/>
-                      <a:round/>
-                      <a:headEnd type="none" w="med" len="med"/>
-                      <a:tailEnd type="none" w="med" len="med"/>
-                    </a:lnR>
-                    <a:lnT w="6350" cap="flat" cmpd="sng" algn="ctr">
-                      <a:solidFill>
-                        <a:srgbClr val="CCCCCC"/>
-                      </a:solidFill>
-                      <a:prstDash val="solid"/>
-                      <a:round/>
-                      <a:headEnd type="none" w="med" len="med"/>
-                      <a:tailEnd type="none" w="med" len="med"/>
-                    </a:lnT>
-                    <a:lnB w="6350" cap="flat" cmpd="sng" algn="ctr">
-                      <a:solidFill>
-                        <a:srgbClr val="CCCCCC"/>
-                      </a:solidFill>
-                      <a:prstDash val="solid"/>
-                      <a:round/>
-                      <a:headEnd type="none" w="med" len="med"/>
-                      <a:tailEnd type="none" w="med" len="med"/>
-                    </a:lnB>
-                    <a:solidFill>
-                      <a:srgbClr val="FFFFFF"/>
-                    </a:solidFill>
-                  </a:tcPr>
-                </a:tc>
-                <a:tc>
-                  <a:txBody>
-                    <a:bodyPr/>
-                    <a:lstStyle/>
-                    <a:p>
-                      <a:pPr algn="ctr" indent="0" marL="0">
-                        <a:buNone/>
-                      </a:pPr>
-                      <a:r>
-                        <a:rPr lang="en-US" sz="700" dirty="0">
-                          <a:solidFill>
-                            <a:srgbClr val="333333"/>
-                          </a:solidFill>
-                        </a:rPr>
-                        <a:t>-</a:t>
-                      </a:r>
-                      <a:endParaRPr lang="en-US" sz="700" dirty="0"/>
-                    </a:p>
-                  </a:txBody>
-                  <a:tcPr marL="91440" marR="91440" marT="45720" marB="45720">
-                    <a:lnL w="6350" cap="flat" cmpd="sng" algn="ctr">
-                      <a:solidFill>
-                        <a:srgbClr val="CCCCCC"/>
-                      </a:solidFill>
-                      <a:prstDash val="solid"/>
-                      <a:round/>
-                      <a:headEnd type="none" w="med" len="med"/>
-                      <a:tailEnd type="none" w="med" len="med"/>
-                    </a:lnL>
-                    <a:lnR w="6350" cap="flat" cmpd="sng" algn="ctr">
-                      <a:solidFill>
-                        <a:srgbClr val="CCCCCC"/>
-                      </a:solidFill>
-                      <a:prstDash val="solid"/>
-                      <a:round/>
-                      <a:headEnd type="none" w="med" len="med"/>
-                      <a:tailEnd type="none" w="med" len="med"/>
-                    </a:lnR>
-                    <a:lnT w="6350" cap="flat" cmpd="sng" algn="ctr">
-                      <a:solidFill>
-                        <a:srgbClr val="CCCCCC"/>
-                      </a:solidFill>
-                      <a:prstDash val="solid"/>
-                      <a:round/>
-                      <a:headEnd type="none" w="med" len="med"/>
-                      <a:tailEnd type="none" w="med" len="med"/>
-                    </a:lnT>
-                    <a:lnB w="6350" cap="flat" cmpd="sng" algn="ctr">
-                      <a:solidFill>
-                        <a:srgbClr val="CCCCCC"/>
-                      </a:solidFill>
-                      <a:prstDash val="solid"/>
-                      <a:round/>
-                      <a:headEnd type="none" w="med" len="med"/>
-                      <a:tailEnd type="none" w="med" len="med"/>
-                    </a:lnB>
-                    <a:solidFill>
-                      <a:srgbClr val="FFFFFF"/>
-                    </a:solidFill>
-                  </a:tcPr>
-                </a:tc>
-              </a:tr>
-              <a:tr h="0">
-                <a:tc>
-                  <a:txBody>
-                    <a:bodyPr/>
-                    <a:lstStyle/>
-                    <a:p>
-                      <a:pPr indent="0" marL="0">
-                        <a:buNone/>
-                      </a:pPr>
-                      <a:r>
-                        <a:rPr lang="en-US" sz="700" b="1" dirty="0">
-                          <a:solidFill>
-                            <a:srgbClr val="000000"/>
-                          </a:solidFill>
-                        </a:rPr>
-                        <a:t>コンフォートホテル成田</a:t>
-                      </a:r>
-                      <a:endParaRPr lang="en-US" sz="700" dirty="0"/>
-                    </a:p>
-                  </a:txBody>
-                  <a:tcPr marL="91440" marR="91440" marT="45720" marB="45720">
-                    <a:lnL w="6350" cap="flat" cmpd="sng" algn="ctr">
-                      <a:solidFill>
-                        <a:srgbClr val="CCCCCC"/>
-                      </a:solidFill>
-                      <a:prstDash val="solid"/>
-                      <a:round/>
-                      <a:headEnd type="none" w="med" len="med"/>
-                      <a:tailEnd type="none" w="med" len="med"/>
-                    </a:lnL>
-                    <a:lnR w="6350" cap="flat" cmpd="sng" algn="ctr">
-                      <a:solidFill>
-                        <a:srgbClr val="CCCCCC"/>
-                      </a:solidFill>
-                      <a:prstDash val="solid"/>
-                      <a:round/>
-                      <a:headEnd type="none" w="med" len="med"/>
-                      <a:tailEnd type="none" w="med" len="med"/>
-                    </a:lnR>
-                    <a:lnT w="6350" cap="flat" cmpd="sng" algn="ctr">
-                      <a:solidFill>
-                        <a:srgbClr val="CCCCCC"/>
-                      </a:solidFill>
-                      <a:prstDash val="solid"/>
-                      <a:round/>
-                      <a:headEnd type="none" w="med" len="med"/>
-                      <a:tailEnd type="none" w="med" len="med"/>
-                    </a:lnT>
-                    <a:lnB w="6350" cap="flat" cmpd="sng" algn="ctr">
-                      <a:solidFill>
-                        <a:srgbClr val="CCCCCC"/>
-                      </a:solidFill>
-                      <a:prstDash val="solid"/>
-                      <a:round/>
-                      <a:headEnd type="none" w="med" len="med"/>
-                      <a:tailEnd type="none" w="med" len="med"/>
-                    </a:lnB>
-                  </a:tcPr>
-                </a:tc>
-                <a:tc>
-                  <a:txBody>
-                    <a:bodyPr/>
-                    <a:lstStyle/>
-                    <a:p>
-                      <a:pPr algn="ctr" indent="0" marL="0">
-                        <a:buNone/>
-                      </a:pPr>
-                      <a:r>
-                        <a:rPr lang="en-US" sz="700" b="1" dirty="0">
-                          <a:solidFill>
-                            <a:srgbClr val="000000"/>
-                          </a:solidFill>
-                        </a:rPr>
-                        <a:t>4</a:t>
-                      </a:r>
-                      <a:endParaRPr lang="en-US" sz="700" dirty="0"/>
-                    </a:p>
-                  </a:txBody>
-                  <a:tcPr marL="91440" marR="91440" marT="45720" marB="45720">
-                    <a:lnL w="6350" cap="flat" cmpd="sng" algn="ctr">
-                      <a:solidFill>
-                        <a:srgbClr val="CCCCCC"/>
-                      </a:solidFill>
-                      <a:prstDash val="solid"/>
-                      <a:round/>
-                      <a:headEnd type="none" w="med" len="med"/>
-                      <a:tailEnd type="none" w="med" len="med"/>
-                    </a:lnL>
-                    <a:lnR w="6350" cap="flat" cmpd="sng" algn="ctr">
-                      <a:solidFill>
-                        <a:srgbClr val="CCCCCC"/>
-                      </a:solidFill>
-                      <a:prstDash val="solid"/>
-                      <a:round/>
-                      <a:headEnd type="none" w="med" len="med"/>
-                      <a:tailEnd type="none" w="med" len="med"/>
-                    </a:lnR>
-                    <a:lnT w="6350" cap="flat" cmpd="sng" algn="ctr">
-                      <a:solidFill>
-                        <a:srgbClr val="CCCCCC"/>
-                      </a:solidFill>
-                      <a:prstDash val="solid"/>
-                      <a:round/>
-                      <a:headEnd type="none" w="med" len="med"/>
-                      <a:tailEnd type="none" w="med" len="med"/>
-                    </a:lnT>
-                    <a:lnB w="6350" cap="flat" cmpd="sng" algn="ctr">
-                      <a:solidFill>
-                        <a:srgbClr val="CCCCCC"/>
-                      </a:solidFill>
-                      <a:prstDash val="solid"/>
-                      <a:round/>
-                      <a:headEnd type="none" w="med" len="med"/>
-                      <a:tailEnd type="none" w="med" len="med"/>
-                    </a:lnB>
-                  </a:tcPr>
-                </a:tc>
-                <a:tc>
-                  <a:txBody>
-                    <a:bodyPr/>
-                    <a:lstStyle/>
-                    <a:p>
-                      <a:pPr algn="ctr" indent="0" marL="0">
-                        <a:buNone/>
-                      </a:pPr>
-                      <a:r>
-                        <a:rPr lang="en-US" sz="700" dirty="0">
-                          <a:solidFill>
-                            <a:srgbClr val="E74C3C"/>
-                          </a:solidFill>
-                        </a:rPr>
-                        <a:t>3</a:t>
-                      </a:r>
-                      <a:endParaRPr lang="en-US" sz="700" dirty="0"/>
-                    </a:p>
-                  </a:txBody>
-                  <a:tcPr marL="91440" marR="91440" marT="45720" marB="45720">
-                    <a:lnL w="6350" cap="flat" cmpd="sng" algn="ctr">
-                      <a:solidFill>
-                        <a:srgbClr val="CCCCCC"/>
-                      </a:solidFill>
-                      <a:prstDash val="solid"/>
-                      <a:round/>
-                      <a:headEnd type="none" w="med" len="med"/>
-                      <a:tailEnd type="none" w="med" len="med"/>
-                    </a:lnL>
-                    <a:lnR w="6350" cap="flat" cmpd="sng" algn="ctr">
-                      <a:solidFill>
-                        <a:srgbClr val="CCCCCC"/>
-                      </a:solidFill>
-                      <a:prstDash val="solid"/>
-                      <a:round/>
-                      <a:headEnd type="none" w="med" len="med"/>
-                      <a:tailEnd type="none" w="med" len="med"/>
-                    </a:lnR>
-                    <a:lnT w="6350" cap="flat" cmpd="sng" algn="ctr">
-                      <a:solidFill>
-                        <a:srgbClr val="CCCCCC"/>
-                      </a:solidFill>
-                      <a:prstDash val="solid"/>
-                      <a:round/>
-                      <a:headEnd type="none" w="med" len="med"/>
-                      <a:tailEnd type="none" w="med" len="med"/>
-                    </a:lnT>
-                    <a:lnB w="6350" cap="flat" cmpd="sng" algn="ctr">
-                      <a:solidFill>
-                        <a:srgbClr val="CCCCCC"/>
-                      </a:solidFill>
-                      <a:prstDash val="solid"/>
-                      <a:round/>
-                      <a:headEnd type="none" w="med" len="med"/>
-                      <a:tailEnd type="none" w="med" len="med"/>
-                    </a:lnB>
-                    <a:solidFill>
-                      <a:srgbClr val="FFE0B2"/>
-                    </a:solidFill>
-                  </a:tcPr>
-                </a:tc>
-                <a:tc>
-                  <a:txBody>
-                    <a:bodyPr/>
-                    <a:lstStyle/>
-                    <a:p>
-                      <a:pPr algn="ctr" indent="0" marL="0">
-                        <a:buNone/>
-                      </a:pPr>
-                      <a:r>
-                        <a:rPr lang="en-US" sz="700" dirty="0">
-                          <a:solidFill>
-                            <a:srgbClr val="333333"/>
-                          </a:solidFill>
-                        </a:rPr>
-                        <a:t>2</a:t>
-                      </a:r>
-                      <a:endParaRPr lang="en-US" sz="700" dirty="0"/>
-                    </a:p>
-                  </a:txBody>
-                  <a:tcPr marL="91440" marR="91440" marT="45720" marB="45720">
-                    <a:lnL w="6350" cap="flat" cmpd="sng" algn="ctr">
-                      <a:solidFill>
-                        <a:srgbClr val="CCCCCC"/>
-                      </a:solidFill>
-                      <a:prstDash val="solid"/>
-                      <a:round/>
-                      <a:headEnd type="none" w="med" len="med"/>
-                      <a:tailEnd type="none" w="med" len="med"/>
-                    </a:lnL>
-                    <a:lnR w="6350" cap="flat" cmpd="sng" algn="ctr">
-                      <a:solidFill>
-                        <a:srgbClr val="CCCCCC"/>
-                      </a:solidFill>
-                      <a:prstDash val="solid"/>
-                      <a:round/>
-                      <a:headEnd type="none" w="med" len="med"/>
-                      <a:tailEnd type="none" w="med" len="med"/>
-                    </a:lnR>
-                    <a:lnT w="6350" cap="flat" cmpd="sng" algn="ctr">
-                      <a:solidFill>
-                        <a:srgbClr val="CCCCCC"/>
-                      </a:solidFill>
-                      <a:prstDash val="solid"/>
-                      <a:round/>
-                      <a:headEnd type="none" w="med" len="med"/>
-                      <a:tailEnd type="none" w="med" len="med"/>
-                    </a:lnT>
-                    <a:lnB w="6350" cap="flat" cmpd="sng" algn="ctr">
-                      <a:solidFill>
-                        <a:srgbClr val="CCCCCC"/>
-                      </a:solidFill>
-                      <a:prstDash val="solid"/>
-                      <a:round/>
-                      <a:headEnd type="none" w="med" len="med"/>
-                      <a:tailEnd type="none" w="med" len="med"/>
-                    </a:lnB>
-                    <a:solidFill>
-                      <a:srgbClr val="FFF9C4"/>
-                    </a:solidFill>
-                  </a:tcPr>
-                </a:tc>
-                <a:tc>
-                  <a:txBody>
-                    <a:bodyPr/>
-                    <a:lstStyle/>
-                    <a:p>
-                      <a:pPr algn="ctr" indent="0" marL="0">
-                        <a:buNone/>
-                      </a:pPr>
-                      <a:r>
-                        <a:rPr lang="en-US" sz="700" dirty="0">
-                          <a:solidFill>
-                            <a:srgbClr val="333333"/>
-                          </a:solidFill>
-                        </a:rPr>
-                        <a:t>-</a:t>
-                      </a:r>
-                      <a:endParaRPr lang="en-US" sz="700" dirty="0"/>
-                    </a:p>
-                  </a:txBody>
-                  <a:tcPr marL="91440" marR="91440" marT="45720" marB="45720">
-                    <a:lnL w="6350" cap="flat" cmpd="sng" algn="ctr">
-                      <a:solidFill>
-                        <a:srgbClr val="CCCCCC"/>
-                      </a:solidFill>
-                      <a:prstDash val="solid"/>
-                      <a:round/>
-                      <a:headEnd type="none" w="med" len="med"/>
-                      <a:tailEnd type="none" w="med" len="med"/>
-                    </a:lnL>
-                    <a:lnR w="6350" cap="flat" cmpd="sng" algn="ctr">
-                      <a:solidFill>
-                        <a:srgbClr val="CCCCCC"/>
-                      </a:solidFill>
-                      <a:prstDash val="solid"/>
-                      <a:round/>
-                      <a:headEnd type="none" w="med" len="med"/>
-                      <a:tailEnd type="none" w="med" len="med"/>
-                    </a:lnR>
-                    <a:lnT w="6350" cap="flat" cmpd="sng" algn="ctr">
-                      <a:solidFill>
-                        <a:srgbClr val="CCCCCC"/>
-                      </a:solidFill>
-                      <a:prstDash val="solid"/>
-                      <a:round/>
-                      <a:headEnd type="none" w="med" len="med"/>
-                      <a:tailEnd type="none" w="med" len="med"/>
-                    </a:lnT>
-                    <a:lnB w="6350" cap="flat" cmpd="sng" algn="ctr">
-                      <a:solidFill>
-                        <a:srgbClr val="CCCCCC"/>
-                      </a:solidFill>
-                      <a:prstDash val="solid"/>
-                      <a:round/>
-                      <a:headEnd type="none" w="med" len="med"/>
-                      <a:tailEnd type="none" w="med" len="med"/>
-                    </a:lnB>
-                    <a:solidFill>
-                      <a:srgbClr val="FFFFFF"/>
-                    </a:solidFill>
-                  </a:tcPr>
-                </a:tc>
-                <a:tc>
-                  <a:txBody>
-                    <a:bodyPr/>
-                    <a:lstStyle/>
-                    <a:p>
-                      <a:pPr algn="ctr" indent="0" marL="0">
-                        <a:buNone/>
-                      </a:pPr>
-                      <a:r>
-                        <a:rPr lang="en-US" sz="700" dirty="0">
-                          <a:solidFill>
-                            <a:srgbClr val="333333"/>
-                          </a:solidFill>
-                        </a:rPr>
                         <a:t>1</a:t>
-                      </a:r>
-                      <a:endParaRPr lang="en-US" sz="700" dirty="0"/>
-                    </a:p>
-                  </a:txBody>
-                  <a:tcPr marL="91440" marR="91440" marT="45720" marB="45720">
-                    <a:lnL w="6350" cap="flat" cmpd="sng" algn="ctr">
-                      <a:solidFill>
-                        <a:srgbClr val="CCCCCC"/>
-                      </a:solidFill>
-                      <a:prstDash val="solid"/>
-                      <a:round/>
-                      <a:headEnd type="none" w="med" len="med"/>
-                      <a:tailEnd type="none" w="med" len="med"/>
-                    </a:lnL>
-                    <a:lnR w="6350" cap="flat" cmpd="sng" algn="ctr">
-                      <a:solidFill>
-                        <a:srgbClr val="CCCCCC"/>
-                      </a:solidFill>
-                      <a:prstDash val="solid"/>
-                      <a:round/>
-                      <a:headEnd type="none" w="med" len="med"/>
-                      <a:tailEnd type="none" w="med" len="med"/>
-                    </a:lnR>
-                    <a:lnT w="6350" cap="flat" cmpd="sng" algn="ctr">
-                      <a:solidFill>
-                        <a:srgbClr val="CCCCCC"/>
-                      </a:solidFill>
-                      <a:prstDash val="solid"/>
-                      <a:round/>
-                      <a:headEnd type="none" w="med" len="med"/>
-                      <a:tailEnd type="none" w="med" len="med"/>
-                    </a:lnT>
-                    <a:lnB w="6350" cap="flat" cmpd="sng" algn="ctr">
-                      <a:solidFill>
-                        <a:srgbClr val="CCCCCC"/>
-                      </a:solidFill>
-                      <a:prstDash val="solid"/>
-                      <a:round/>
-                      <a:headEnd type="none" w="med" len="med"/>
-                      <a:tailEnd type="none" w="med" len="med"/>
-                    </a:lnB>
-                    <a:solidFill>
-                      <a:srgbClr val="FFF9C4"/>
-                    </a:solidFill>
-                  </a:tcPr>
-                </a:tc>
-                <a:tc>
-                  <a:txBody>
-                    <a:bodyPr/>
-                    <a:lstStyle/>
-                    <a:p>
-                      <a:pPr algn="ctr" indent="0" marL="0">
-                        <a:buNone/>
-                      </a:pPr>
-                      <a:r>
-                        <a:rPr lang="en-US" sz="700" dirty="0">
-                          <a:solidFill>
-                            <a:srgbClr val="333333"/>
-                          </a:solidFill>
-                        </a:rPr>
-                        <a:t>2</a:t>
                       </a:r>
                       <a:endParaRPr lang="en-US" sz="700" dirty="0"/>
                     </a:p>
@@ -39176,7 +38406,7 @@
                 <a:ea typeface="Arial" pitchFamily="34" charset="-122"/>
                 <a:cs typeface="Arial" pitchFamily="34" charset="-120"/>
               </a:rPr>
-              <a:t>URGENT（緊急） (5)</a:t>
+              <a:t>URGENT（緊急） (4)</a:t>
             </a:r>
             <a:endParaRPr lang="en-US" sz="1100" dirty="0"/>
           </a:p>
@@ -39215,7 +38445,7 @@
                 <a:ea typeface="Arial" pitchFamily="34" charset="-122"/>
                 <a:cs typeface="Arial" pitchFamily="34" charset="-120"/>
               </a:rPr>
-              <a:t>コンフォートホテル博多（7.87点）</a:t>
+              <a:t>コンフォートホテル博多（7.89点）</a:t>
             </a:r>
             <a:endParaRPr lang="en-US" sz="800" dirty="0"/>
           </a:p>
@@ -39232,7 +38462,7 @@
                 <a:ea typeface="Arial" pitchFamily="34" charset="-122"/>
                 <a:cs typeface="Arial" pitchFamily="34" charset="-120"/>
               </a:rPr>
-              <a:t>チサンホテル浜松町（7.02点）</a:t>
+              <a:t>チサンホテル浜松町（7.03点）</a:t>
             </a:r>
             <a:endParaRPr lang="en-US" sz="800" dirty="0"/>
           </a:p>
@@ -39249,7 +38479,7 @@
                 <a:ea typeface="Arial" pitchFamily="34" charset="-122"/>
                 <a:cs typeface="Arial" pitchFamily="34" charset="-120"/>
               </a:rPr>
-              <a:t>コンフォートホテル横浜関内（7.7点）</a:t>
+              <a:t>アパホテル蒲田駅東（7.34点）</a:t>
             </a:r>
             <a:endParaRPr lang="en-US" sz="800" dirty="0"/>
           </a:p>
@@ -39267,23 +38497,6 @@
                 <a:cs typeface="Arial" pitchFamily="34" charset="-120"/>
               </a:rPr>
               <a:t>コートホテル新横浜（7.03点）</a:t>
-            </a:r>
-            <a:endParaRPr lang="en-US" sz="800" dirty="0"/>
-          </a:p>
-          <a:p>
-            <a:pPr indent="0" marL="0">
-              <a:buNone/>
-            </a:pPr>
-            <a:r>
-              <a:rPr lang="en-US" sz="800" dirty="0">
-                <a:solidFill>
-                  <a:srgbClr val="333333"/>
-                </a:solidFill>
-                <a:latin typeface="Arial" pitchFamily="34" charset="0"/>
-                <a:ea typeface="Arial" pitchFamily="34" charset="-122"/>
-                <a:cs typeface="Arial" pitchFamily="34" charset="-120"/>
-              </a:rPr>
-              <a:t>アパホテル蒲田駅東（7.44点）</a:t>
             </a:r>
             <a:endParaRPr lang="en-US" sz="800" dirty="0"/>
           </a:p>
@@ -39369,7 +38582,7 @@
                 <a:ea typeface="Arial" pitchFamily="34" charset="-122"/>
                 <a:cs typeface="Arial" pitchFamily="34" charset="-120"/>
               </a:rPr>
-              <a:t>HIGH（高） (3)</a:t>
+              <a:t>HIGH（高） (4)</a:t>
             </a:r>
             <a:endParaRPr lang="en-US" sz="1100" dirty="0"/>
           </a:p>
@@ -39408,7 +38621,7 @@
                 <a:ea typeface="Arial" pitchFamily="34" charset="-122"/>
                 <a:cs typeface="Arial" pitchFamily="34" charset="-120"/>
               </a:rPr>
-              <a:t>コンフォートイン六本木（8.1点）</a:t>
+              <a:t>コンフォートホテル横浜関内（7.65点）</a:t>
             </a:r>
             <a:endParaRPr lang="en-US" sz="800" dirty="0"/>
           </a:p>
@@ -39425,7 +38638,24 @@
                 <a:ea typeface="Arial" pitchFamily="34" charset="-122"/>
                 <a:cs typeface="Arial" pitchFamily="34" charset="-120"/>
               </a:rPr>
-              <a:t>川崎日航ホテル（8.62点）</a:t>
+              <a:t>コンフォートイン六本木（8.11点）</a:t>
+            </a:r>
+            <a:endParaRPr lang="en-US" sz="800" dirty="0"/>
+          </a:p>
+          <a:p>
+            <a:pPr indent="0" marL="0">
+              <a:buNone/>
+            </a:pPr>
+            <a:r>
+              <a:rPr lang="en-US" sz="800" dirty="0">
+                <a:solidFill>
+                  <a:srgbClr val="333333"/>
+                </a:solidFill>
+                <a:latin typeface="Arial" pitchFamily="34" charset="0"/>
+                <a:ea typeface="Arial" pitchFamily="34" charset="-122"/>
+                <a:cs typeface="Arial" pitchFamily="34" charset="-120"/>
+              </a:rPr>
+              <a:t>川崎日航ホテル（8.65点）</a:t>
             </a:r>
             <a:endParaRPr lang="en-US" sz="800" dirty="0"/>
           </a:p>
@@ -39567,7 +38797,7 @@
                 <a:ea typeface="Arial" pitchFamily="34" charset="-122"/>
                 <a:cs typeface="Arial" pitchFamily="34" charset="-120"/>
               </a:rPr>
-              <a:t>ハートンホテル東品川（8.62点）</a:t>
+              <a:t>ハートンホテル東品川（8.63点）</a:t>
             </a:r>
             <a:endParaRPr lang="en-US" sz="800" dirty="0"/>
           </a:p>
@@ -39584,7 +38814,7 @@
                 <a:ea typeface="Arial" pitchFamily="34" charset="-122"/>
                 <a:cs typeface="Arial" pitchFamily="34" charset="-120"/>
               </a:rPr>
-              <a:t>ダイワロイネットホテル東京大崎（8.88点）</a:t>
+              <a:t>ダイワロイネットホテル東京大崎（8.9点）</a:t>
             </a:r>
             <a:endParaRPr lang="en-US" sz="800" dirty="0"/>
           </a:p>
@@ -39601,7 +38831,7 @@
                 <a:ea typeface="Arial" pitchFamily="34" charset="-122"/>
                 <a:cs typeface="Arial" pitchFamily="34" charset="-120"/>
               </a:rPr>
-              <a:t>ホテルケヤキゲート東京府中（8.81点）</a:t>
+              <a:t>ホテルケヤキゲート東京府中（8.77点）</a:t>
             </a:r>
             <a:endParaRPr lang="en-US" sz="800" dirty="0"/>
           </a:p>
@@ -39635,7 +38865,7 @@
                 <a:ea typeface="Arial" pitchFamily="34" charset="-122"/>
                 <a:cs typeface="Arial" pitchFamily="34" charset="-120"/>
               </a:rPr>
-              <a:t>コンフォートホテル成田（8.6点）</a:t>
+              <a:t>コンフォートホテル成田（8.59点）</a:t>
             </a:r>
             <a:endParaRPr lang="en-US" sz="800" dirty="0"/>
           </a:p>
@@ -39652,7 +38882,7 @@
                 <a:ea typeface="Arial" pitchFamily="34" charset="-122"/>
                 <a:cs typeface="Arial" pitchFamily="34" charset="-120"/>
               </a:rPr>
-              <a:t>変なホテル東京羽田（8.25点）</a:t>
+              <a:t>変なホテル東京羽田（8.27点）</a:t>
             </a:r>
             <a:endParaRPr lang="en-US" sz="800" dirty="0"/>
           </a:p>
@@ -39669,7 +38899,7 @@
                 <a:ea typeface="Arial" pitchFamily="34" charset="-122"/>
                 <a:cs typeface="Arial" pitchFamily="34" charset="-120"/>
               </a:rPr>
-              <a:t>リッチモンドホテル東京目白（8.65点）</a:t>
+              <a:t>リッチモンドホテル東京目白（8.66点）</a:t>
             </a:r>
             <a:endParaRPr lang="en-US" sz="800" dirty="0"/>
           </a:p>
@@ -39686,7 +38916,7 @@
                 <a:ea typeface="Arial" pitchFamily="34" charset="-122"/>
                 <a:cs typeface="Arial" pitchFamily="34" charset="-120"/>
               </a:rPr>
-              <a:t>第一イン池袋（9.03点）</a:t>
+              <a:t>第一イン池袋（9.06点）</a:t>
             </a:r>
             <a:endParaRPr lang="en-US" sz="800" dirty="0"/>
           </a:p>
@@ -39703,7 +38933,7 @@
                 <a:ea typeface="Arial" pitchFamily="34" charset="-122"/>
                 <a:cs typeface="Arial" pitchFamily="34" charset="-120"/>
               </a:rPr>
-              <a:t>コンフォートホテルERA東京東神田（8.93点）</a:t>
+              <a:t>コンフォートホテルERA東京東神田（8.91点）</a:t>
             </a:r>
             <a:endParaRPr lang="en-US" sz="800" dirty="0"/>
           </a:p>
@@ -39828,7 +39058,7 @@
                 <a:ea typeface="Arial" pitchFamily="34" charset="-122"/>
                 <a:cs typeface="Arial" pitchFamily="34" charset="-120"/>
               </a:rPr>
-              <a:t>京成リッチモンドホテル東京錦糸町（9点）</a:t>
+              <a:t>京成リッチモンドホテル東京錦糸町（9.03点）</a:t>
             </a:r>
             <a:endParaRPr lang="en-US" sz="800" dirty="0"/>
           </a:p>
@@ -39845,7 +39075,7 @@
                 <a:ea typeface="Arial" pitchFamily="34" charset="-122"/>
                 <a:cs typeface="Arial" pitchFamily="34" charset="-120"/>
               </a:rPr>
-              <a:t>コンフォートスイーツ東京ベイ（9.19点）</a:t>
+              <a:t>コンフォートスイーツ東京ベイ（9.18点）</a:t>
             </a:r>
             <a:endParaRPr lang="en-US" sz="800" dirty="0"/>
           </a:p>
@@ -40066,7 +39296,7 @@
                 <a:ea typeface="Arial" pitchFamily="34" charset="-122"/>
                 <a:cs typeface="Arial" pitchFamily="34" charset="-120"/>
               </a:rPr>
-              <a:t>優先度 #1 | 現状 7.87点 → 目標 8.5点</a:t>
+              <a:t>優先度 #1 | 現状 7.89点 → 目標 8.5点</a:t>
             </a:r>
             <a:endParaRPr lang="en-US" sz="1000" dirty="0"/>
           </a:p>
@@ -40191,7 +39421,7 @@
                 <a:ea typeface="Arial" pitchFamily="34" charset="-122"/>
                 <a:cs typeface="Arial" pitchFamily="34" charset="-120"/>
               </a:rPr>
-              <a:t>7.87</a:t>
+              <a:t>7.89</a:t>
             </a:r>
             <a:endParaRPr lang="en-US" sz="2800" dirty="0"/>
           </a:p>
@@ -41272,7 +40502,7 @@
                 <a:ea typeface="Arial" pitchFamily="34" charset="-122"/>
                 <a:cs typeface="Arial" pitchFamily="34" charset="-120"/>
               </a:rPr>
-              <a:t>優先度 #2 | 現状 7.02点 → 目標 8点</a:t>
+              <a:t>優先度 #2 | 現状 7.03点 → 目標 8点</a:t>
             </a:r>
             <a:endParaRPr lang="en-US" sz="1000" dirty="0"/>
           </a:p>
@@ -41397,7 +40627,7 @@
                 <a:ea typeface="Arial" pitchFamily="34" charset="-122"/>
                 <a:cs typeface="Arial" pitchFamily="34" charset="-120"/>
               </a:rPr>
-              <a:t>7.02</a:t>
+              <a:t>7.03</a:t>
             </a:r>
             <a:endParaRPr lang="en-US" sz="2800" dirty="0"/>
           </a:p>
@@ -42439,7 +41669,7 @@
                 <a:ea typeface="Arial" pitchFamily="34" charset="-122"/>
                 <a:cs typeface="Arial" pitchFamily="34" charset="-120"/>
               </a:rPr>
-              <a:t>【URGENT】コンフォートホテル横浜関内</a:t>
+              <a:t>【URGENT】アパホテル蒲田駅東</a:t>
             </a:r>
             <a:endParaRPr lang="en-US" sz="2000" dirty="0"/>
           </a:p>
@@ -42478,7 +41708,7 @@
                 <a:ea typeface="Arial" pitchFamily="34" charset="-122"/>
                 <a:cs typeface="Arial" pitchFamily="34" charset="-120"/>
               </a:rPr>
-              <a:t>優先度 #3 | 現状 7.7点 → 目標 8.5点</a:t>
+              <a:t>優先度 #3 | 現状 7.34点 → 目標 8点</a:t>
             </a:r>
             <a:endParaRPr lang="en-US" sz="1000" dirty="0"/>
           </a:p>
@@ -42603,7 +41833,7 @@
                 <a:ea typeface="Arial" pitchFamily="34" charset="-122"/>
                 <a:cs typeface="Arial" pitchFamily="34" charset="-120"/>
               </a:rPr>
-              <a:t>7.7</a:t>
+              <a:t>7.34</a:t>
             </a:r>
             <a:endParaRPr lang="en-US" sz="2800" dirty="0"/>
           </a:p>
@@ -42728,7 +41958,7 @@
                 <a:ea typeface="Arial" pitchFamily="34" charset="-122"/>
                 <a:cs typeface="Arial" pitchFamily="34" charset="-120"/>
               </a:rPr>
-              <a:t>8.5</a:t>
+              <a:t>8</a:t>
             </a:r>
             <a:endParaRPr lang="en-US" sz="2800" dirty="0"/>
           </a:p>
@@ -42833,7 +42063,7 @@
                 <a:ea typeface="Arial" pitchFamily="34" charset="-122"/>
                 <a:cs typeface="Arial" pitchFamily="34" charset="-120"/>
               </a:rPr>
-              <a:t>清掃品質全般: 6件</a:t>
+              <a:t>清掃品質全般: 3件</a:t>
             </a:r>
             <a:endParaRPr lang="en-US" sz="800" dirty="0"/>
           </a:p>
@@ -42850,7 +42080,7 @@
                 <a:ea typeface="Arial" pitchFamily="34" charset="-122"/>
                 <a:cs typeface="Arial" pitchFamily="34" charset="-120"/>
               </a:rPr>
-              <a:t>シミ・汚れ跡: 5件</a:t>
+              <a:t>臭気・異臭: 1件</a:t>
             </a:r>
             <a:endParaRPr lang="en-US" sz="800" dirty="0"/>
           </a:p>
@@ -42867,7 +42097,7 @@
                 <a:ea typeface="Arial" pitchFamily="34" charset="-122"/>
                 <a:cs typeface="Arial" pitchFamily="34" charset="-120"/>
               </a:rPr>
-              <a:t>臭気・異臭: 3件</a:t>
+              <a:t>タバコ関連: 1件</a:t>
             </a:r>
             <a:endParaRPr lang="en-US" sz="800" dirty="0"/>
           </a:p>
@@ -42884,7 +42114,7 @@
                 <a:ea typeface="Arial" pitchFamily="34" charset="-122"/>
                 <a:cs typeface="Arial" pitchFamily="34" charset="-120"/>
               </a:rPr>
-              <a:t>毛髪・髪の毛: 1件</a:t>
+              <a:t>排水・詰まり: 1件</a:t>
             </a:r>
             <a:endParaRPr lang="en-US" sz="800" dirty="0"/>
           </a:p>
@@ -43043,23 +42273,6 @@
                 <a:ea typeface="Arial" pitchFamily="34" charset="-122"/>
                 <a:cs typeface="Arial" pitchFamily="34" charset="-120"/>
               </a:rPr>
-              <a:t>- シミ箇所の特定と専用クリーナーによる除去</a:t>
-            </a:r>
-            <a:endParaRPr lang="en-US" sz="700" dirty="0"/>
-          </a:p>
-          <a:p>
-            <a:pPr indent="0" marL="0">
-              <a:buNone/>
-            </a:pPr>
-            <a:r>
-              <a:rPr lang="en-US" sz="700" dirty="0">
-                <a:solidFill>
-                  <a:srgbClr val="333333"/>
-                </a:solidFill>
-                <a:latin typeface="Arial" pitchFamily="34" charset="0"/>
-                <a:ea typeface="Arial" pitchFamily="34" charset="-122"/>
-                <a:cs typeface="Arial" pitchFamily="34" charset="-120"/>
-              </a:rPr>
               <a:t>- 臭気発生源の特定と即時対処（排水トラップ、換気扇）</a:t>
             </a:r>
             <a:endParaRPr lang="en-US" sz="700" dirty="0"/>
@@ -43078,6 +42291,23 @@
                 <a:cs typeface="Arial" pitchFamily="34" charset="-120"/>
               </a:rPr>
               <a:t>- 消臭・脱臭処理の実施</a:t>
+            </a:r>
+            <a:endParaRPr lang="en-US" sz="700" dirty="0"/>
+          </a:p>
+          <a:p>
+            <a:pPr indent="0" marL="0">
+              <a:buNone/>
+            </a:pPr>
+            <a:r>
+              <a:rPr lang="en-US" sz="700" dirty="0">
+                <a:solidFill>
+                  <a:srgbClr val="333333"/>
+                </a:solidFill>
+                <a:latin typeface="Arial" pitchFamily="34" charset="0"/>
+                <a:ea typeface="Arial" pitchFamily="34" charset="-122"/>
+                <a:cs typeface="Arial" pitchFamily="34" charset="-120"/>
+              </a:rPr>
+              <a:t>- 禁煙室の残留臭調査と脱臭処理</a:t>
             </a:r>
             <a:endParaRPr lang="en-US" sz="700" dirty="0"/>
           </a:p>
@@ -43236,23 +42466,6 @@
                 <a:ea typeface="Arial" pitchFamily="34" charset="-122"/>
                 <a:cs typeface="Arial" pitchFamily="34" charset="-120"/>
               </a:rPr>
-              <a:t>- シミ発見時の即時報告・対処フロー構築</a:t>
-            </a:r>
-            <a:endParaRPr lang="en-US" sz="700" dirty="0"/>
-          </a:p>
-          <a:p>
-            <a:pPr indent="0" marL="0">
-              <a:buNone/>
-            </a:pPr>
-            <a:r>
-              <a:rPr lang="en-US" sz="700" dirty="0">
-                <a:solidFill>
-                  <a:srgbClr val="333333"/>
-                </a:solidFill>
-                <a:latin typeface="Arial" pitchFamily="34" charset="0"/>
-                <a:ea typeface="Arial" pitchFamily="34" charset="-122"/>
-                <a:cs typeface="Arial" pitchFamily="34" charset="-120"/>
-              </a:rPr>
               <a:t>- 定期的な換気・消臭ルーティンの標準化</a:t>
             </a:r>
             <a:endParaRPr lang="en-US" sz="700" dirty="0"/>
@@ -43271,6 +42484,23 @@
                 <a:cs typeface="Arial" pitchFamily="34" charset="-120"/>
               </a:rPr>
               <a:t>- エアコン・排水系の臭気源の根本対策</a:t>
+            </a:r>
+            <a:endParaRPr lang="en-US" sz="700" dirty="0"/>
+          </a:p>
+          <a:p>
+            <a:pPr indent="0" marL="0">
+              <a:buNone/>
+            </a:pPr>
+            <a:r>
+              <a:rPr lang="en-US" sz="700" dirty="0">
+                <a:solidFill>
+                  <a:srgbClr val="333333"/>
+                </a:solidFill>
+                <a:latin typeface="Arial" pitchFamily="34" charset="0"/>
+                <a:ea typeface="Arial" pitchFamily="34" charset="-122"/>
+                <a:cs typeface="Arial" pitchFamily="34" charset="-120"/>
+              </a:rPr>
+              <a:t>- 廊下・共用部の定期脱臭処理スケジュール導入</a:t>
             </a:r>
             <a:endParaRPr lang="en-US" sz="700" dirty="0"/>
           </a:p>
@@ -43447,6 +42677,23 @@
                 <a:cs typeface="Arial" pitchFamily="34" charset="-120"/>
               </a:rPr>
               <a:t>- 空気品質モニタリングの導入</a:t>
+            </a:r>
+            <a:endParaRPr lang="en-US" sz="700" dirty="0"/>
+          </a:p>
+          <a:p>
+            <a:pPr indent="0" marL="0">
+              <a:buNone/>
+            </a:pPr>
+            <a:r>
+              <a:rPr lang="en-US" sz="700" dirty="0">
+                <a:solidFill>
+                  <a:srgbClr val="333333"/>
+                </a:solidFill>
+                <a:latin typeface="Arial" pitchFamily="34" charset="0"/>
+                <a:ea typeface="Arial" pitchFamily="34" charset="-122"/>
+                <a:cs typeface="Arial" pitchFamily="34" charset="-120"/>
+              </a:rPr>
+              <a:t>- フロア単位での完全禁煙化提案</a:t>
             </a:r>
             <a:endParaRPr lang="en-US" sz="700" dirty="0"/>
           </a:p>

--- a/納品レポート/PRIMECHANGE戦略レポート/PRIMECHANGE_清掃戦略レポート.pptx
+++ b/納品レポート/PRIMECHANGE戦略レポート/PRIMECHANGE_清掃戦略レポート.pptx
@@ -2699,7 +2699,7 @@
                 <a:ea typeface="Arial" pitchFamily="34" charset="-122"/>
                 <a:cs typeface="Arial" pitchFamily="34" charset="-120"/>
               </a:rPr>
-              <a:t>対象：19ホテル | レビュー：2157件</a:t>
+              <a:t>対象：19ホテル | レビュー：2194件</a:t>
             </a:r>
             <a:endParaRPr lang="en-US" sz="1100" dirty="0"/>
           </a:p>
@@ -4106,7 +4106,7 @@
                 <a:ea typeface="Arial" pitchFamily="34" charset="-122"/>
                 <a:cs typeface="Arial" pitchFamily="34" charset="-120"/>
               </a:rPr>
-              <a:t>対象：4ホテル</a:t>
+              <a:t>対象：3ホテル</a:t>
             </a:r>
             <a:endParaRPr lang="en-US" sz="1000" dirty="0"/>
           </a:p>
@@ -4231,7 +4231,7 @@
                 <a:ea typeface="Arial" pitchFamily="34" charset="-122"/>
                 <a:cs typeface="Arial" pitchFamily="34" charset="-120"/>
               </a:rPr>
-              <a:t>7.65点 → 8.5点</a:t>
+              <a:t>7.57点 → 8.5点</a:t>
             </a:r>
             <a:endParaRPr lang="en-US" sz="1100" dirty="0"/>
           </a:p>
@@ -4468,7 +4468,7 @@
                 <a:ea typeface="Arial" pitchFamily="34" charset="-122"/>
                 <a:cs typeface="Arial" pitchFamily="34" charset="-120"/>
               </a:rPr>
-              <a:t>8.11点 → 9点</a:t>
+              <a:t>8.16点 → 9点</a:t>
             </a:r>
             <a:endParaRPr lang="en-US" sz="1100" dirty="0"/>
           </a:p>
@@ -4666,7 +4666,7 @@
                 <a:ea typeface="Arial" pitchFamily="34" charset="-122"/>
                 <a:cs typeface="Arial" pitchFamily="34" charset="-120"/>
               </a:rPr>
-              <a:t>川崎日航ホテル</a:t>
+              <a:t>ホテルコメント横浜関内</a:t>
             </a:r>
             <a:endParaRPr lang="en-US" sz="1200" dirty="0"/>
           </a:p>
@@ -4705,7 +4705,7 @@
                 <a:ea typeface="Arial" pitchFamily="34" charset="-122"/>
                 <a:cs typeface="Arial" pitchFamily="34" charset="-120"/>
               </a:rPr>
-              <a:t>8.65点 → 9点</a:t>
+              <a:t>8.83点 → 9.1点</a:t>
             </a:r>
             <a:endParaRPr lang="en-US" sz="1100" dirty="0"/>
           </a:p>
@@ -4744,7 +4744,7 @@
                 <a:ea typeface="Arial" pitchFamily="34" charset="-122"/>
                 <a:cs typeface="Arial" pitchFamily="34" charset="-120"/>
               </a:rPr>
-              <a:t>主要課題：清掃品質全般(6件)、ゴミ残置(1件)、臭気・異臭(1件)</a:t>
+              <a:t>主要課題：清掃品質全般(4件)、臭気・異臭(2件)、タバコ関連(1件)</a:t>
             </a:r>
             <a:endParaRPr lang="en-US" sz="900" dirty="0"/>
           </a:p>
@@ -4817,7 +4817,7 @@
                 <a:ea typeface="Arial" pitchFamily="34" charset="-122"/>
                 <a:cs typeface="Arial" pitchFamily="34" charset="-120"/>
               </a:rPr>
-              <a:t>- 清掃後のゴミ残置チェック項目の追加</a:t>
+              <a:t>- 臭気発生源の特定と即時対処（排水トラップ、換気扇）</a:t>
             </a:r>
             <a:endParaRPr lang="en-US" sz="800" dirty="0"/>
           </a:p>
@@ -4826,243 +4826,6 @@
       <p:sp>
         <p:nvSpPr>
           <p:cNvPr id="23" name="Shape 21"/>
-          <p:cNvSpPr/>
-          <p:nvPr/>
-        </p:nvSpPr>
-        <p:spPr>
-          <a:xfrm>
-            <a:off x="274320" y="4709160"/>
-            <a:ext cx="8595360" cy="1188720"/>
-          </a:xfrm>
-          <a:prstGeom prst="rect">
-            <a:avLst/>
-          </a:prstGeom>
-          <a:solidFill>
-            <a:srgbClr val="FFF3E0"/>
-          </a:solidFill>
-          <a:ln/>
-          <a:effectLst>
-            <a:outerShdw sx="100000" sy="100000" kx="0" ky="0" algn="bl" rotWithShape="0" blurRad="50800" dist="25400" dir="8100000">
-              <a:srgbClr val="000000">
-                <a:alpha val="10000"/>
-              </a:srgbClr>
-            </a:outerShdw>
-          </a:effectLst>
-        </p:spPr>
-      </p:sp>
-      <p:sp>
-        <p:nvSpPr>
-          <p:cNvPr id="24" name="Shape 22"/>
-          <p:cNvSpPr/>
-          <p:nvPr/>
-        </p:nvSpPr>
-        <p:spPr>
-          <a:xfrm>
-            <a:off x="274320" y="4709160"/>
-            <a:ext cx="8595360" cy="36576"/>
-          </a:xfrm>
-          <a:prstGeom prst="rect">
-            <a:avLst/>
-          </a:prstGeom>
-          <a:solidFill>
-            <a:srgbClr val="FF9800"/>
-          </a:solidFill>
-          <a:ln/>
-        </p:spPr>
-      </p:sp>
-      <p:sp>
-        <p:nvSpPr>
-          <p:cNvPr id="25" name="Text 23"/>
-          <p:cNvSpPr/>
-          <p:nvPr/>
-        </p:nvSpPr>
-        <p:spPr>
-          <a:xfrm>
-            <a:off x="457200" y="4782312"/>
-            <a:ext cx="3657600" cy="228600"/>
-          </a:xfrm>
-          <a:prstGeom prst="rect">
-            <a:avLst/>
-          </a:prstGeom>
-          <a:noFill/>
-          <a:ln/>
-        </p:spPr>
-        <p:txBody>
-          <a:bodyPr wrap="square" lIns="0" tIns="0" rIns="0" bIns="0" rtlCol="0" anchor="ctr"/>
-          <a:lstStyle/>
-          <a:p>
-            <a:pPr indent="0" marL="0">
-              <a:buNone/>
-            </a:pPr>
-            <a:r>
-              <a:rPr lang="en-US" sz="1200" b="1" dirty="0">
-                <a:solidFill>
-                  <a:srgbClr val="1B3A5C"/>
-                </a:solidFill>
-                <a:latin typeface="Arial" pitchFamily="34" charset="0"/>
-                <a:ea typeface="Arial" pitchFamily="34" charset="-122"/>
-                <a:cs typeface="Arial" pitchFamily="34" charset="-120"/>
-              </a:rPr>
-              <a:t>ホテルコメント横浜関内</a:t>
-            </a:r>
-            <a:endParaRPr lang="en-US" sz="1200" dirty="0"/>
-          </a:p>
-        </p:txBody>
-      </p:sp>
-      <p:sp>
-        <p:nvSpPr>
-          <p:cNvPr id="26" name="Text 24"/>
-          <p:cNvSpPr/>
-          <p:nvPr/>
-        </p:nvSpPr>
-        <p:spPr>
-          <a:xfrm>
-            <a:off x="4572000" y="4782312"/>
-            <a:ext cx="2743200" cy="228600"/>
-          </a:xfrm>
-          <a:prstGeom prst="rect">
-            <a:avLst/>
-          </a:prstGeom>
-          <a:noFill/>
-          <a:ln/>
-        </p:spPr>
-        <p:txBody>
-          <a:bodyPr wrap="square" lIns="0" tIns="0" rIns="0" bIns="0" rtlCol="0" anchor="ctr"/>
-          <a:lstStyle/>
-          <a:p>
-            <a:pPr indent="0" marL="0">
-              <a:buNone/>
-            </a:pPr>
-            <a:r>
-              <a:rPr lang="en-US" sz="1100" b="1" dirty="0">
-                <a:solidFill>
-                  <a:srgbClr val="27AE60"/>
-                </a:solidFill>
-                <a:latin typeface="Arial" pitchFamily="34" charset="0"/>
-                <a:ea typeface="Arial" pitchFamily="34" charset="-122"/>
-                <a:cs typeface="Arial" pitchFamily="34" charset="-120"/>
-              </a:rPr>
-              <a:t>8.81点 → 9.1点</a:t>
-            </a:r>
-            <a:endParaRPr lang="en-US" sz="1100" dirty="0"/>
-          </a:p>
-        </p:txBody>
-      </p:sp>
-      <p:sp>
-        <p:nvSpPr>
-          <p:cNvPr id="27" name="Text 25"/>
-          <p:cNvSpPr/>
-          <p:nvPr/>
-        </p:nvSpPr>
-        <p:spPr>
-          <a:xfrm>
-            <a:off x="457200" y="5029200"/>
-            <a:ext cx="7315200" cy="182880"/>
-          </a:xfrm>
-          <a:prstGeom prst="rect">
-            <a:avLst/>
-          </a:prstGeom>
-          <a:noFill/>
-          <a:ln/>
-        </p:spPr>
-        <p:txBody>
-          <a:bodyPr wrap="square" lIns="0" tIns="0" rIns="0" bIns="0" rtlCol="0" anchor="ctr"/>
-          <a:lstStyle/>
-          <a:p>
-            <a:pPr indent="0" marL="0">
-              <a:buNone/>
-            </a:pPr>
-            <a:r>
-              <a:rPr lang="en-US" sz="900" dirty="0">
-                <a:solidFill>
-                  <a:srgbClr val="666666"/>
-                </a:solidFill>
-                <a:latin typeface="Arial" pitchFamily="34" charset="0"/>
-                <a:ea typeface="Arial" pitchFamily="34" charset="-122"/>
-                <a:cs typeface="Arial" pitchFamily="34" charset="-120"/>
-              </a:rPr>
-              <a:t>主要課題：清掃品質全般(4件)、臭気・異臭(2件)、タバコ関連(1件)</a:t>
-            </a:r>
-            <a:endParaRPr lang="en-US" sz="900" dirty="0"/>
-          </a:p>
-        </p:txBody>
-      </p:sp>
-      <p:sp>
-        <p:nvSpPr>
-          <p:cNvPr id="28" name="Text 26"/>
-          <p:cNvSpPr/>
-          <p:nvPr/>
-        </p:nvSpPr>
-        <p:spPr>
-          <a:xfrm>
-            <a:off x="457200" y="5257800"/>
-            <a:ext cx="7772400" cy="594360"/>
-          </a:xfrm>
-          <a:prstGeom prst="rect">
-            <a:avLst/>
-          </a:prstGeom>
-          <a:noFill/>
-          <a:ln/>
-        </p:spPr>
-        <p:txBody>
-          <a:bodyPr wrap="square" lIns="0" tIns="0" rIns="0" bIns="0" rtlCol="0" anchor="t"/>
-          <a:lstStyle/>
-          <a:p>
-            <a:pPr indent="0" marL="0">
-              <a:buNone/>
-            </a:pPr>
-            <a:r>
-              <a:rPr lang="en-US" sz="800" dirty="0">
-                <a:solidFill>
-                  <a:srgbClr val="333333"/>
-                </a:solidFill>
-                <a:latin typeface="Arial" pitchFamily="34" charset="0"/>
-                <a:ea typeface="Arial" pitchFamily="34" charset="-122"/>
-                <a:cs typeface="Arial" pitchFamily="34" charset="-120"/>
-              </a:rPr>
-              <a:t>- 清掃品質基準の明確化と全スタッフへの共有</a:t>
-            </a:r>
-            <a:endParaRPr lang="en-US" sz="800" dirty="0"/>
-          </a:p>
-          <a:p>
-            <a:pPr indent="0" marL="0">
-              <a:buNone/>
-            </a:pPr>
-            <a:r>
-              <a:rPr lang="en-US" sz="800" dirty="0">
-                <a:solidFill>
-                  <a:srgbClr val="333333"/>
-                </a:solidFill>
-                <a:latin typeface="Arial" pitchFamily="34" charset="0"/>
-                <a:ea typeface="Arial" pitchFamily="34" charset="-122"/>
-                <a:cs typeface="Arial" pitchFamily="34" charset="-120"/>
-              </a:rPr>
-              <a:t>- 重点箇所（水回り・ベッド周り）の清掃手順見直し</a:t>
-            </a:r>
-            <a:endParaRPr lang="en-US" sz="800" dirty="0"/>
-          </a:p>
-          <a:p>
-            <a:pPr indent="0" marL="0">
-              <a:buNone/>
-            </a:pPr>
-            <a:r>
-              <a:rPr lang="en-US" sz="800" dirty="0">
-                <a:solidFill>
-                  <a:srgbClr val="333333"/>
-                </a:solidFill>
-                <a:latin typeface="Arial" pitchFamily="34" charset="0"/>
-                <a:ea typeface="Arial" pitchFamily="34" charset="-122"/>
-                <a:cs typeface="Arial" pitchFamily="34" charset="-120"/>
-              </a:rPr>
-              <a:t>- 臭気発生源の特定と即時対処（排水トラップ、換気扇）</a:t>
-            </a:r>
-            <a:endParaRPr lang="en-US" sz="800" dirty="0"/>
-          </a:p>
-        </p:txBody>
-      </p:sp>
-      <p:sp>
-        <p:nvSpPr>
-          <p:cNvPr id="29" name="Shape 27"/>
           <p:cNvSpPr/>
           <p:nvPr/>
         </p:nvSpPr>
@@ -5082,7 +4845,7 @@
       </p:sp>
       <p:sp>
         <p:nvSpPr>
-          <p:cNvPr id="30" name="Text 28"/>
+          <p:cNvPr id="24" name="Text 22"/>
           <p:cNvSpPr/>
           <p:nvPr/>
         </p:nvSpPr>
@@ -5121,7 +4884,7 @@
       </p:sp>
       <p:sp>
         <p:nvSpPr>
-          <p:cNvPr id="31" name="Text 29"/>
+          <p:cNvPr id="25" name="Text 23"/>
           <p:cNvSpPr/>
           <p:nvPr/>
         </p:nvSpPr>
@@ -6146,7 +5909,7 @@
                             <a:srgbClr val="000000"/>
                           </a:solidFill>
                         </a:rPr>
-                        <a:t>川崎日航ホテル</a:t>
+                        <a:t>ホテルコメント横浜関内</a:t>
                       </a:r>
                       <a:endParaRPr lang="en-US" sz="700" dirty="0"/>
                     </a:p>
@@ -6415,294 +6178,6 @@
                     </a:lnB>
                     <a:solidFill>
                       <a:srgbClr val="FFFFFF"/>
-                    </a:solidFill>
-                  </a:tcPr>
-                </a:tc>
-              </a:tr>
-              <a:tr h="0">
-                <a:tc>
-                  <a:txBody>
-                    <a:bodyPr/>
-                    <a:lstStyle/>
-                    <a:p>
-                      <a:pPr indent="0" marL="0">
-                        <a:buNone/>
-                      </a:pPr>
-                      <a:r>
-                        <a:rPr lang="en-US" sz="700" b="1" dirty="0">
-                          <a:solidFill>
-                            <a:srgbClr val="000000"/>
-                          </a:solidFill>
-                        </a:rPr>
-                        <a:t>ホテルコメント横浜関内</a:t>
-                      </a:r>
-                      <a:endParaRPr lang="en-US" sz="700" dirty="0"/>
-                    </a:p>
-                  </a:txBody>
-                  <a:tcPr marL="91440" marR="91440" marT="45720" marB="45720">
-                    <a:lnL w="6350" cap="flat" cmpd="sng" algn="ctr">
-                      <a:solidFill>
-                        <a:srgbClr val="CCCCCC"/>
-                      </a:solidFill>
-                      <a:prstDash val="solid"/>
-                      <a:round/>
-                      <a:headEnd type="none" w="med" len="med"/>
-                      <a:tailEnd type="none" w="med" len="med"/>
-                    </a:lnL>
-                    <a:lnR w="6350" cap="flat" cmpd="sng" algn="ctr">
-                      <a:solidFill>
-                        <a:srgbClr val="CCCCCC"/>
-                      </a:solidFill>
-                      <a:prstDash val="solid"/>
-                      <a:round/>
-                      <a:headEnd type="none" w="med" len="med"/>
-                      <a:tailEnd type="none" w="med" len="med"/>
-                    </a:lnR>
-                    <a:lnT w="6350" cap="flat" cmpd="sng" algn="ctr">
-                      <a:solidFill>
-                        <a:srgbClr val="CCCCCC"/>
-                      </a:solidFill>
-                      <a:prstDash val="solid"/>
-                      <a:round/>
-                      <a:headEnd type="none" w="med" len="med"/>
-                      <a:tailEnd type="none" w="med" len="med"/>
-                    </a:lnT>
-                    <a:lnB w="6350" cap="flat" cmpd="sng" algn="ctr">
-                      <a:solidFill>
-                        <a:srgbClr val="CCCCCC"/>
-                      </a:solidFill>
-                      <a:prstDash val="solid"/>
-                      <a:round/>
-                      <a:headEnd type="none" w="med" len="med"/>
-                      <a:tailEnd type="none" w="med" len="med"/>
-                    </a:lnB>
-                    <a:solidFill>
-                      <a:srgbClr val="F5F7FA"/>
-                    </a:solidFill>
-                  </a:tcPr>
-                </a:tc>
-                <a:tc>
-                  <a:txBody>
-                    <a:bodyPr/>
-                    <a:lstStyle/>
-                    <a:p>
-                      <a:pPr indent="0" marL="0">
-                        <a:buNone/>
-                      </a:pPr>
-                      <a:r>
-                        <a:rPr lang="en-US" sz="700" dirty="0">
-                          <a:solidFill>
-                            <a:srgbClr val="000000"/>
-                          </a:solidFill>
-                        </a:rPr>
-                        <a:t>清掃品質基準の明確化と全スタッフへの共有</a:t>
-                      </a:r>
-                      <a:endParaRPr lang="en-US" sz="700" dirty="0"/>
-                    </a:p>
-                    <a:p>
-                      <a:pPr indent="0" marL="0">
-                        <a:buNone/>
-                      </a:pPr>
-                      <a:r>
-                        <a:rPr lang="en-US" sz="700" dirty="0">
-                          <a:solidFill>
-                            <a:srgbClr val="000000"/>
-                          </a:solidFill>
-                        </a:rPr>
-                        <a:t>重点箇所（水回り・ベッド周り）の清掃手順見直し</a:t>
-                      </a:r>
-                      <a:endParaRPr lang="en-US" sz="700" dirty="0"/>
-                    </a:p>
-                  </a:txBody>
-                  <a:tcPr marL="91440" marR="91440" marT="45720" marB="45720">
-                    <a:lnL w="6350" cap="flat" cmpd="sng" algn="ctr">
-                      <a:solidFill>
-                        <a:srgbClr val="CCCCCC"/>
-                      </a:solidFill>
-                      <a:prstDash val="solid"/>
-                      <a:round/>
-                      <a:headEnd type="none" w="med" len="med"/>
-                      <a:tailEnd type="none" w="med" len="med"/>
-                    </a:lnL>
-                    <a:lnR w="6350" cap="flat" cmpd="sng" algn="ctr">
-                      <a:solidFill>
-                        <a:srgbClr val="CCCCCC"/>
-                      </a:solidFill>
-                      <a:prstDash val="solid"/>
-                      <a:round/>
-                      <a:headEnd type="none" w="med" len="med"/>
-                      <a:tailEnd type="none" w="med" len="med"/>
-                    </a:lnR>
-                    <a:lnT w="6350" cap="flat" cmpd="sng" algn="ctr">
-                      <a:solidFill>
-                        <a:srgbClr val="CCCCCC"/>
-                      </a:solidFill>
-                      <a:prstDash val="solid"/>
-                      <a:round/>
-                      <a:headEnd type="none" w="med" len="med"/>
-                      <a:tailEnd type="none" w="med" len="med"/>
-                    </a:lnT>
-                    <a:lnB w="6350" cap="flat" cmpd="sng" algn="ctr">
-                      <a:solidFill>
-                        <a:srgbClr val="CCCCCC"/>
-                      </a:solidFill>
-                      <a:prstDash val="solid"/>
-                      <a:round/>
-                      <a:headEnd type="none" w="med" len="med"/>
-                      <a:tailEnd type="none" w="med" len="med"/>
-                    </a:lnB>
-                    <a:solidFill>
-                      <a:srgbClr val="F5F7FA"/>
-                    </a:solidFill>
-                  </a:tcPr>
-                </a:tc>
-                <a:tc>
-                  <a:txBody>
-                    <a:bodyPr/>
-                    <a:lstStyle/>
-                    <a:p>
-                      <a:pPr indent="0" marL="0">
-                        <a:buNone/>
-                      </a:pPr>
-                      <a:r>
-                        <a:rPr lang="en-US" sz="700" dirty="0">
-                          <a:solidFill>
-                            <a:srgbClr val="000000"/>
-                          </a:solidFill>
-                        </a:rPr>
-                        <a:t>品質管理チェックリストの導入と実施</a:t>
-                      </a:r>
-                      <a:endParaRPr lang="en-US" sz="700" dirty="0"/>
-                    </a:p>
-                    <a:p>
-                      <a:pPr indent="0" marL="0">
-                        <a:buNone/>
-                      </a:pPr>
-                      <a:r>
-                        <a:rPr lang="en-US" sz="700" dirty="0">
-                          <a:solidFill>
-                            <a:srgbClr val="000000"/>
-                          </a:solidFill>
-                        </a:rPr>
-                        <a:t>QCインスペクション体制の構築（ランダム抜き打ち検査）</a:t>
-                      </a:r>
-                      <a:endParaRPr lang="en-US" sz="700" dirty="0"/>
-                    </a:p>
-                  </a:txBody>
-                  <a:tcPr marL="91440" marR="91440" marT="45720" marB="45720">
-                    <a:lnL w="6350" cap="flat" cmpd="sng" algn="ctr">
-                      <a:solidFill>
-                        <a:srgbClr val="CCCCCC"/>
-                      </a:solidFill>
-                      <a:prstDash val="solid"/>
-                      <a:round/>
-                      <a:headEnd type="none" w="med" len="med"/>
-                      <a:tailEnd type="none" w="med" len="med"/>
-                    </a:lnL>
-                    <a:lnR w="6350" cap="flat" cmpd="sng" algn="ctr">
-                      <a:solidFill>
-                        <a:srgbClr val="CCCCCC"/>
-                      </a:solidFill>
-                      <a:prstDash val="solid"/>
-                      <a:round/>
-                      <a:headEnd type="none" w="med" len="med"/>
-                      <a:tailEnd type="none" w="med" len="med"/>
-                    </a:lnR>
-                    <a:lnT w="6350" cap="flat" cmpd="sng" algn="ctr">
-                      <a:solidFill>
-                        <a:srgbClr val="CCCCCC"/>
-                      </a:solidFill>
-                      <a:prstDash val="solid"/>
-                      <a:round/>
-                      <a:headEnd type="none" w="med" len="med"/>
-                      <a:tailEnd type="none" w="med" len="med"/>
-                    </a:lnT>
-                    <a:lnB w="6350" cap="flat" cmpd="sng" algn="ctr">
-                      <a:solidFill>
-                        <a:srgbClr val="CCCCCC"/>
-                      </a:solidFill>
-                      <a:prstDash val="solid"/>
-                      <a:round/>
-                      <a:headEnd type="none" w="med" len="med"/>
-                      <a:tailEnd type="none" w="med" len="med"/>
-                    </a:lnB>
-                    <a:solidFill>
-                      <a:srgbClr val="F5F7FA"/>
-                    </a:solidFill>
-                  </a:tcPr>
-                </a:tc>
-                <a:tc>
-                  <a:txBody>
-                    <a:bodyPr/>
-                    <a:lstStyle/>
-                    <a:p>
-                      <a:pPr indent="0" marL="0">
-                        <a:buNone/>
-                      </a:pPr>
-                      <a:r>
-                        <a:rPr lang="en-US" sz="700" dirty="0">
-                          <a:solidFill>
-                            <a:srgbClr val="000000"/>
-                          </a:solidFill>
-                        </a:rPr>
-                        <a:t>清掃スタッフの定期研修プログラム導入</a:t>
-                      </a:r>
-                      <a:endParaRPr lang="en-US" sz="700" dirty="0"/>
-                    </a:p>
-                    <a:p>
-                      <a:pPr indent="0" marL="0">
-                        <a:buNone/>
-                      </a:pPr>
-                      <a:r>
-                        <a:rPr lang="en-US" sz="700" dirty="0">
-                          <a:solidFill>
-                            <a:srgbClr val="000000"/>
-                          </a:solidFill>
-                        </a:rPr>
-                        <a:t>デジタル清掃記録システムの検討</a:t>
-                      </a:r>
-                      <a:endParaRPr lang="en-US" sz="700" dirty="0"/>
-                    </a:p>
-                  </a:txBody>
-                  <a:tcPr marL="91440" marR="91440" marT="45720" marB="45720">
-                    <a:lnL w="6350" cap="flat" cmpd="sng" algn="ctr">
-                      <a:solidFill>
-                        <a:srgbClr val="CCCCCC"/>
-                      </a:solidFill>
-                      <a:prstDash val="solid"/>
-                      <a:round/>
-                      <a:headEnd type="none" w="med" len="med"/>
-                      <a:tailEnd type="none" w="med" len="med"/>
-                    </a:lnL>
-                    <a:lnR w="6350" cap="flat" cmpd="sng" algn="ctr">
-                      <a:solidFill>
-                        <a:srgbClr val="CCCCCC"/>
-                      </a:solidFill>
-                      <a:prstDash val="solid"/>
-                      <a:round/>
-                      <a:headEnd type="none" w="med" len="med"/>
-                      <a:tailEnd type="none" w="med" len="med"/>
-                    </a:lnR>
-                    <a:lnT w="6350" cap="flat" cmpd="sng" algn="ctr">
-                      <a:solidFill>
-                        <a:srgbClr val="CCCCCC"/>
-                      </a:solidFill>
-                      <a:prstDash val="solid"/>
-                      <a:round/>
-                      <a:headEnd type="none" w="med" len="med"/>
-                      <a:tailEnd type="none" w="med" len="med"/>
-                    </a:lnT>
-                    <a:lnB w="6350" cap="flat" cmpd="sng" algn="ctr">
-                      <a:solidFill>
-                        <a:srgbClr val="CCCCCC"/>
-                      </a:solidFill>
-                      <a:prstDash val="solid"/>
-                      <a:round/>
-                      <a:headEnd type="none" w="med" len="med"/>
-                      <a:tailEnd type="none" w="med" len="med"/>
-                    </a:lnB>
-                    <a:solidFill>
-                      <a:srgbClr val="F5F7FA"/>
                     </a:solidFill>
                   </a:tcPr>
                 </a:tc>
@@ -9280,7 +8755,7 @@
                             <a:srgbClr val="000000"/>
                           </a:solidFill>
                         </a:rPr>
-                        <a:t>4.7%</a:t>
+                        <a:t>4.6%</a:t>
                       </a:r>
                       <a:endParaRPr lang="en-US" sz="800" dirty="0"/>
                     </a:p>
@@ -9341,7 +8816,7 @@
                             <a:srgbClr val="27AE60"/>
                           </a:solidFill>
                         </a:rPr>
-                        <a:t>1.9%以下</a:t>
+                        <a:t>1.8%以下</a:t>
                       </a:r>
                       <a:endParaRPr lang="en-US" sz="800" dirty="0"/>
                     </a:p>
@@ -9526,7 +9001,7 @@
                             <a:srgbClr val="000000"/>
                           </a:solidFill>
                         </a:rPr>
-                        <a:t>78.2%</a:t>
+                        <a:t>78.4%</a:t>
                       </a:r>
                       <a:endParaRPr lang="en-US" sz="800" dirty="0"/>
                     </a:p>
@@ -9587,7 +9062,7 @@
                             <a:srgbClr val="27AE60"/>
                           </a:solidFill>
                         </a:rPr>
-                        <a:t>83.2%以上</a:t>
+                        <a:t>83.4%以上</a:t>
                       </a:r>
                       <a:endParaRPr lang="en-US" sz="800" dirty="0"/>
                     </a:p>
@@ -10520,7 +9995,7 @@
                             <a:srgbClr val="000000"/>
                           </a:solidFill>
                         </a:rPr>
-                        <a:t>7.89</a:t>
+                        <a:t>7.86</a:t>
                       </a:r>
                       <a:endParaRPr lang="en-US" sz="700" dirty="0"/>
                     </a:p>
@@ -10642,7 +10117,7 @@
                             <a:srgbClr val="000000"/>
                           </a:solidFill>
                         </a:rPr>
-                        <a:t>12.2%</a:t>
+                        <a:t>12.9%</a:t>
                       </a:r>
                       <a:endParaRPr lang="en-US" sz="700" dirty="0"/>
                     </a:p>
@@ -10703,7 +10178,7 @@
                             <a:srgbClr val="27AE60"/>
                           </a:solidFill>
                         </a:rPr>
-                        <a:t>3.7%</a:t>
+                        <a:t>3.9%</a:t>
                       </a:r>
                       <a:endParaRPr lang="en-US" sz="700" dirty="0"/>
                     </a:p>
@@ -10888,7 +10363,7 @@
                             <a:srgbClr val="000000"/>
                           </a:solidFill>
                         </a:rPr>
-                        <a:t>7.03</a:t>
+                        <a:t>7.07</a:t>
                       </a:r>
                       <a:endParaRPr lang="en-US" sz="700" dirty="0"/>
                     </a:p>
@@ -10949,7 +10424,7 @@
                             <a:srgbClr val="27AE60"/>
                           </a:solidFill>
                         </a:rPr>
-                        <a:t>7.50</a:t>
+                        <a:t>7.60</a:t>
                       </a:r>
                       <a:endParaRPr lang="en-US" sz="700" dirty="0"/>
                     </a:p>
@@ -11010,7 +10485,7 @@
                             <a:srgbClr val="000000"/>
                           </a:solidFill>
                         </a:rPr>
-                        <a:t>10.6%</a:t>
+                        <a:t>10.4%</a:t>
                       </a:r>
                       <a:endParaRPr lang="en-US" sz="700" dirty="0"/>
                     </a:p>
@@ -11071,7 +10546,7 @@
                             <a:srgbClr val="27AE60"/>
                           </a:solidFill>
                         </a:rPr>
-                        <a:t>3.2%</a:t>
+                        <a:t>3.1%</a:t>
                       </a:r>
                       <a:endParaRPr lang="en-US" sz="700" dirty="0"/>
                     </a:p>
@@ -11256,7 +10731,7 @@
                             <a:srgbClr val="000000"/>
                           </a:solidFill>
                         </a:rPr>
-                        <a:t>7.34</a:t>
+                        <a:t>7.35</a:t>
                       </a:r>
                       <a:endParaRPr lang="en-US" sz="700" dirty="0"/>
                     </a:p>
@@ -11378,7 +10853,7 @@
                             <a:srgbClr val="000000"/>
                           </a:solidFill>
                         </a:rPr>
-                        <a:t>10.6%</a:t>
+                        <a:t>10.4%</a:t>
                       </a:r>
                       <a:endParaRPr lang="en-US" sz="700" dirty="0"/>
                     </a:p>
@@ -11439,7 +10914,7 @@
                             <a:srgbClr val="27AE60"/>
                           </a:solidFill>
                         </a:rPr>
-                        <a:t>3.2%</a:t>
+                        <a:t>3.1%</a:t>
                       </a:r>
                       <a:endParaRPr lang="en-US" sz="700" dirty="0"/>
                     </a:p>
@@ -11992,7 +11467,7 @@
                             <a:srgbClr val="000000"/>
                           </a:solidFill>
                         </a:rPr>
-                        <a:t>7.65</a:t>
+                        <a:t>7.57</a:t>
                       </a:r>
                       <a:endParaRPr lang="en-US" sz="700" dirty="0"/>
                     </a:p>
@@ -12053,7 +11528,7 @@
                             <a:srgbClr val="27AE60"/>
                           </a:solidFill>
                         </a:rPr>
-                        <a:t>8.20</a:t>
+                        <a:t>8.10</a:t>
                       </a:r>
                       <a:endParaRPr lang="en-US" sz="700" dirty="0"/>
                     </a:p>
@@ -12360,7 +11835,7 @@
                             <a:srgbClr val="000000"/>
                           </a:solidFill>
                         </a:rPr>
-                        <a:t>8.11</a:t>
+                        <a:t>8.16</a:t>
                       </a:r>
                       <a:endParaRPr lang="en-US" sz="700" dirty="0"/>
                     </a:p>
@@ -12421,7 +11896,7 @@
                             <a:srgbClr val="27AE60"/>
                           </a:solidFill>
                         </a:rPr>
-                        <a:t>8.60</a:t>
+                        <a:t>8.70</a:t>
                       </a:r>
                       <a:endParaRPr lang="en-US" sz="700" dirty="0"/>
                     </a:p>
@@ -12482,7 +11957,7 @@
                             <a:srgbClr val="000000"/>
                           </a:solidFill>
                         </a:rPr>
-                        <a:t>7.8%</a:t>
+                        <a:t>7.5%</a:t>
                       </a:r>
                       <a:endParaRPr lang="en-US" sz="700" dirty="0"/>
                     </a:p>
@@ -12543,7 +12018,7 @@
                             <a:srgbClr val="27AE60"/>
                           </a:solidFill>
                         </a:rPr>
-                        <a:t>2.3%</a:t>
+                        <a:t>2.2%</a:t>
                       </a:r>
                       <a:endParaRPr lang="en-US" sz="700" dirty="0"/>
                     </a:p>
@@ -12606,7 +12081,7 @@
                             <a:srgbClr val="000000"/>
                           </a:solidFill>
                         </a:rPr>
-                        <a:t>川崎日航ホテル</a:t>
+                        <a:t>ホテルコメント横浜関内</a:t>
                       </a:r>
                       <a:endParaRPr lang="en-US" sz="700" dirty="0"/>
                     </a:p>
@@ -12728,7 +12203,7 @@
                             <a:srgbClr val="000000"/>
                           </a:solidFill>
                         </a:rPr>
-                        <a:t>8.65</a:t>
+                        <a:t>8.83</a:t>
                       </a:r>
                       <a:endParaRPr lang="en-US" sz="700" dirty="0"/>
                     </a:p>
@@ -12789,7 +12264,7 @@
                             <a:srgbClr val="27AE60"/>
                           </a:solidFill>
                         </a:rPr>
-                        <a:t>9.20</a:t>
+                        <a:t>9.30</a:t>
                       </a:r>
                       <a:endParaRPr lang="en-US" sz="700" dirty="0"/>
                     </a:p>
@@ -12850,7 +12325,7 @@
                             <a:srgbClr val="000000"/>
                           </a:solidFill>
                         </a:rPr>
-                        <a:t>5.7%</a:t>
+                        <a:t>5.6%</a:t>
                       </a:r>
                       <a:endParaRPr lang="en-US" sz="700" dirty="0"/>
                     </a:p>
@@ -12955,374 +12430,6 @@
                     </a:lnB>
                     <a:solidFill>
                       <a:srgbClr val="FFFFFF"/>
-                    </a:solidFill>
-                  </a:tcPr>
-                </a:tc>
-              </a:tr>
-              <a:tr h="0">
-                <a:tc>
-                  <a:txBody>
-                    <a:bodyPr/>
-                    <a:lstStyle/>
-                    <a:p>
-                      <a:pPr indent="0" marL="0">
-                        <a:buNone/>
-                      </a:pPr>
-                      <a:r>
-                        <a:rPr lang="en-US" sz="700" b="1" dirty="0">
-                          <a:solidFill>
-                            <a:srgbClr val="000000"/>
-                          </a:solidFill>
-                        </a:rPr>
-                        <a:t>ホテルコメント横浜関内</a:t>
-                      </a:r>
-                      <a:endParaRPr lang="en-US" sz="700" dirty="0"/>
-                    </a:p>
-                  </a:txBody>
-                  <a:tcPr marL="91440" marR="91440" marT="45720" marB="45720">
-                    <a:lnL w="6350" cap="flat" cmpd="sng" algn="ctr">
-                      <a:solidFill>
-                        <a:srgbClr val="CCCCCC"/>
-                      </a:solidFill>
-                      <a:prstDash val="solid"/>
-                      <a:round/>
-                      <a:headEnd type="none" w="med" len="med"/>
-                      <a:tailEnd type="none" w="med" len="med"/>
-                    </a:lnL>
-                    <a:lnR w="6350" cap="flat" cmpd="sng" algn="ctr">
-                      <a:solidFill>
-                        <a:srgbClr val="CCCCCC"/>
-                      </a:solidFill>
-                      <a:prstDash val="solid"/>
-                      <a:round/>
-                      <a:headEnd type="none" w="med" len="med"/>
-                      <a:tailEnd type="none" w="med" len="med"/>
-                    </a:lnR>
-                    <a:lnT w="6350" cap="flat" cmpd="sng" algn="ctr">
-                      <a:solidFill>
-                        <a:srgbClr val="CCCCCC"/>
-                      </a:solidFill>
-                      <a:prstDash val="solid"/>
-                      <a:round/>
-                      <a:headEnd type="none" w="med" len="med"/>
-                      <a:tailEnd type="none" w="med" len="med"/>
-                    </a:lnT>
-                    <a:lnB w="6350" cap="flat" cmpd="sng" algn="ctr">
-                      <a:solidFill>
-                        <a:srgbClr val="CCCCCC"/>
-                      </a:solidFill>
-                      <a:prstDash val="solid"/>
-                      <a:round/>
-                      <a:headEnd type="none" w="med" len="med"/>
-                      <a:tailEnd type="none" w="med" len="med"/>
-                    </a:lnB>
-                    <a:solidFill>
-                      <a:srgbClr val="F5F7FA"/>
-                    </a:solidFill>
-                  </a:tcPr>
-                </a:tc>
-                <a:tc>
-                  <a:txBody>
-                    <a:bodyPr/>
-                    <a:lstStyle/>
-                    <a:p>
-                      <a:pPr algn="ctr" indent="0" marL="0">
-                        <a:buNone/>
-                      </a:pPr>
-                      <a:r>
-                        <a:rPr lang="en-US" sz="700" b="1" dirty="0">
-                          <a:solidFill>
-                            <a:srgbClr val="FF9800"/>
-                          </a:solidFill>
-                        </a:rPr>
-                        <a:t>HIGH</a:t>
-                      </a:r>
-                      <a:endParaRPr lang="en-US" sz="700" dirty="0"/>
-                    </a:p>
-                  </a:txBody>
-                  <a:tcPr marL="91440" marR="91440" marT="45720" marB="45720">
-                    <a:lnL w="6350" cap="flat" cmpd="sng" algn="ctr">
-                      <a:solidFill>
-                        <a:srgbClr val="CCCCCC"/>
-                      </a:solidFill>
-                      <a:prstDash val="solid"/>
-                      <a:round/>
-                      <a:headEnd type="none" w="med" len="med"/>
-                      <a:tailEnd type="none" w="med" len="med"/>
-                    </a:lnL>
-                    <a:lnR w="6350" cap="flat" cmpd="sng" algn="ctr">
-                      <a:solidFill>
-                        <a:srgbClr val="CCCCCC"/>
-                      </a:solidFill>
-                      <a:prstDash val="solid"/>
-                      <a:round/>
-                      <a:headEnd type="none" w="med" len="med"/>
-                      <a:tailEnd type="none" w="med" len="med"/>
-                    </a:lnR>
-                    <a:lnT w="6350" cap="flat" cmpd="sng" algn="ctr">
-                      <a:solidFill>
-                        <a:srgbClr val="CCCCCC"/>
-                      </a:solidFill>
-                      <a:prstDash val="solid"/>
-                      <a:round/>
-                      <a:headEnd type="none" w="med" len="med"/>
-                      <a:tailEnd type="none" w="med" len="med"/>
-                    </a:lnT>
-                    <a:lnB w="6350" cap="flat" cmpd="sng" algn="ctr">
-                      <a:solidFill>
-                        <a:srgbClr val="CCCCCC"/>
-                      </a:solidFill>
-                      <a:prstDash val="solid"/>
-                      <a:round/>
-                      <a:headEnd type="none" w="med" len="med"/>
-                      <a:tailEnd type="none" w="med" len="med"/>
-                    </a:lnB>
-                    <a:solidFill>
-                      <a:srgbClr val="FFF3E0"/>
-                    </a:solidFill>
-                  </a:tcPr>
-                </a:tc>
-                <a:tc>
-                  <a:txBody>
-                    <a:bodyPr/>
-                    <a:lstStyle/>
-                    <a:p>
-                      <a:pPr algn="ctr" indent="0" marL="0">
-                        <a:buNone/>
-                      </a:pPr>
-                      <a:r>
-                        <a:rPr lang="en-US" sz="700" dirty="0">
-                          <a:solidFill>
-                            <a:srgbClr val="000000"/>
-                          </a:solidFill>
-                        </a:rPr>
-                        <a:t>8.81</a:t>
-                      </a:r>
-                      <a:endParaRPr lang="en-US" sz="700" dirty="0"/>
-                    </a:p>
-                  </a:txBody>
-                  <a:tcPr marL="91440" marR="91440" marT="45720" marB="45720">
-                    <a:lnL w="6350" cap="flat" cmpd="sng" algn="ctr">
-                      <a:solidFill>
-                        <a:srgbClr val="CCCCCC"/>
-                      </a:solidFill>
-                      <a:prstDash val="solid"/>
-                      <a:round/>
-                      <a:headEnd type="none" w="med" len="med"/>
-                      <a:tailEnd type="none" w="med" len="med"/>
-                    </a:lnL>
-                    <a:lnR w="6350" cap="flat" cmpd="sng" algn="ctr">
-                      <a:solidFill>
-                        <a:srgbClr val="CCCCCC"/>
-                      </a:solidFill>
-                      <a:prstDash val="solid"/>
-                      <a:round/>
-                      <a:headEnd type="none" w="med" len="med"/>
-                      <a:tailEnd type="none" w="med" len="med"/>
-                    </a:lnR>
-                    <a:lnT w="6350" cap="flat" cmpd="sng" algn="ctr">
-                      <a:solidFill>
-                        <a:srgbClr val="CCCCCC"/>
-                      </a:solidFill>
-                      <a:prstDash val="solid"/>
-                      <a:round/>
-                      <a:headEnd type="none" w="med" len="med"/>
-                      <a:tailEnd type="none" w="med" len="med"/>
-                    </a:lnT>
-                    <a:lnB w="6350" cap="flat" cmpd="sng" algn="ctr">
-                      <a:solidFill>
-                        <a:srgbClr val="CCCCCC"/>
-                      </a:solidFill>
-                      <a:prstDash val="solid"/>
-                      <a:round/>
-                      <a:headEnd type="none" w="med" len="med"/>
-                      <a:tailEnd type="none" w="med" len="med"/>
-                    </a:lnB>
-                    <a:solidFill>
-                      <a:srgbClr val="F5F7FA"/>
-                    </a:solidFill>
-                  </a:tcPr>
-                </a:tc>
-                <a:tc>
-                  <a:txBody>
-                    <a:bodyPr/>
-                    <a:lstStyle/>
-                    <a:p>
-                      <a:pPr algn="ctr" indent="0" marL="0">
-                        <a:buNone/>
-                      </a:pPr>
-                      <a:r>
-                        <a:rPr lang="en-US" sz="700" b="1" dirty="0">
-                          <a:solidFill>
-                            <a:srgbClr val="27AE60"/>
-                          </a:solidFill>
-                        </a:rPr>
-                        <a:t>9.30</a:t>
-                      </a:r>
-                      <a:endParaRPr lang="en-US" sz="700" dirty="0"/>
-                    </a:p>
-                  </a:txBody>
-                  <a:tcPr marL="91440" marR="91440" marT="45720" marB="45720">
-                    <a:lnL w="6350" cap="flat" cmpd="sng" algn="ctr">
-                      <a:solidFill>
-                        <a:srgbClr val="CCCCCC"/>
-                      </a:solidFill>
-                      <a:prstDash val="solid"/>
-                      <a:round/>
-                      <a:headEnd type="none" w="med" len="med"/>
-                      <a:tailEnd type="none" w="med" len="med"/>
-                    </a:lnL>
-                    <a:lnR w="6350" cap="flat" cmpd="sng" algn="ctr">
-                      <a:solidFill>
-                        <a:srgbClr val="CCCCCC"/>
-                      </a:solidFill>
-                      <a:prstDash val="solid"/>
-                      <a:round/>
-                      <a:headEnd type="none" w="med" len="med"/>
-                      <a:tailEnd type="none" w="med" len="med"/>
-                    </a:lnR>
-                    <a:lnT w="6350" cap="flat" cmpd="sng" algn="ctr">
-                      <a:solidFill>
-                        <a:srgbClr val="CCCCCC"/>
-                      </a:solidFill>
-                      <a:prstDash val="solid"/>
-                      <a:round/>
-                      <a:headEnd type="none" w="med" len="med"/>
-                      <a:tailEnd type="none" w="med" len="med"/>
-                    </a:lnT>
-                    <a:lnB w="6350" cap="flat" cmpd="sng" algn="ctr">
-                      <a:solidFill>
-                        <a:srgbClr val="CCCCCC"/>
-                      </a:solidFill>
-                      <a:prstDash val="solid"/>
-                      <a:round/>
-                      <a:headEnd type="none" w="med" len="med"/>
-                      <a:tailEnd type="none" w="med" len="med"/>
-                    </a:lnB>
-                    <a:solidFill>
-                      <a:srgbClr val="F5F7FA"/>
-                    </a:solidFill>
-                  </a:tcPr>
-                </a:tc>
-                <a:tc>
-                  <a:txBody>
-                    <a:bodyPr/>
-                    <a:lstStyle/>
-                    <a:p>
-                      <a:pPr algn="ctr" indent="0" marL="0">
-                        <a:buNone/>
-                      </a:pPr>
-                      <a:r>
-                        <a:rPr lang="en-US" sz="700" dirty="0">
-                          <a:solidFill>
-                            <a:srgbClr val="000000"/>
-                          </a:solidFill>
-                        </a:rPr>
-                        <a:t>5.7%</a:t>
-                      </a:r>
-                      <a:endParaRPr lang="en-US" sz="700" dirty="0"/>
-                    </a:p>
-                  </a:txBody>
-                  <a:tcPr marL="91440" marR="91440" marT="45720" marB="45720">
-                    <a:lnL w="6350" cap="flat" cmpd="sng" algn="ctr">
-                      <a:solidFill>
-                        <a:srgbClr val="CCCCCC"/>
-                      </a:solidFill>
-                      <a:prstDash val="solid"/>
-                      <a:round/>
-                      <a:headEnd type="none" w="med" len="med"/>
-                      <a:tailEnd type="none" w="med" len="med"/>
-                    </a:lnL>
-                    <a:lnR w="6350" cap="flat" cmpd="sng" algn="ctr">
-                      <a:solidFill>
-                        <a:srgbClr val="CCCCCC"/>
-                      </a:solidFill>
-                      <a:prstDash val="solid"/>
-                      <a:round/>
-                      <a:headEnd type="none" w="med" len="med"/>
-                      <a:tailEnd type="none" w="med" len="med"/>
-                    </a:lnR>
-                    <a:lnT w="6350" cap="flat" cmpd="sng" algn="ctr">
-                      <a:solidFill>
-                        <a:srgbClr val="CCCCCC"/>
-                      </a:solidFill>
-                      <a:prstDash val="solid"/>
-                      <a:round/>
-                      <a:headEnd type="none" w="med" len="med"/>
-                      <a:tailEnd type="none" w="med" len="med"/>
-                    </a:lnT>
-                    <a:lnB w="6350" cap="flat" cmpd="sng" algn="ctr">
-                      <a:solidFill>
-                        <a:srgbClr val="CCCCCC"/>
-                      </a:solidFill>
-                      <a:prstDash val="solid"/>
-                      <a:round/>
-                      <a:headEnd type="none" w="med" len="med"/>
-                      <a:tailEnd type="none" w="med" len="med"/>
-                    </a:lnB>
-                    <a:solidFill>
-                      <a:srgbClr val="F5F7FA"/>
-                    </a:solidFill>
-                  </a:tcPr>
-                </a:tc>
-                <a:tc>
-                  <a:txBody>
-                    <a:bodyPr/>
-                    <a:lstStyle/>
-                    <a:p>
-                      <a:pPr algn="ctr" indent="0" marL="0">
-                        <a:buNone/>
-                      </a:pPr>
-                      <a:r>
-                        <a:rPr lang="en-US" sz="700" b="1" dirty="0">
-                          <a:solidFill>
-                            <a:srgbClr val="27AE60"/>
-                          </a:solidFill>
-                        </a:rPr>
-                        <a:t>1.7%</a:t>
-                      </a:r>
-                      <a:endParaRPr lang="en-US" sz="700" dirty="0"/>
-                    </a:p>
-                  </a:txBody>
-                  <a:tcPr marL="91440" marR="91440" marT="45720" marB="45720">
-                    <a:lnL w="6350" cap="flat" cmpd="sng" algn="ctr">
-                      <a:solidFill>
-                        <a:srgbClr val="CCCCCC"/>
-                      </a:solidFill>
-                      <a:prstDash val="solid"/>
-                      <a:round/>
-                      <a:headEnd type="none" w="med" len="med"/>
-                      <a:tailEnd type="none" w="med" len="med"/>
-                    </a:lnL>
-                    <a:lnR w="6350" cap="flat" cmpd="sng" algn="ctr">
-                      <a:solidFill>
-                        <a:srgbClr val="CCCCCC"/>
-                      </a:solidFill>
-                      <a:prstDash val="solid"/>
-                      <a:round/>
-                      <a:headEnd type="none" w="med" len="med"/>
-                      <a:tailEnd type="none" w="med" len="med"/>
-                    </a:lnR>
-                    <a:lnT w="6350" cap="flat" cmpd="sng" algn="ctr">
-                      <a:solidFill>
-                        <a:srgbClr val="CCCCCC"/>
-                      </a:solidFill>
-                      <a:prstDash val="solid"/>
-                      <a:round/>
-                      <a:headEnd type="none" w="med" len="med"/>
-                      <a:tailEnd type="none" w="med" len="med"/>
-                    </a:lnT>
-                    <a:lnB w="6350" cap="flat" cmpd="sng" algn="ctr">
-                      <a:solidFill>
-                        <a:srgbClr val="CCCCCC"/>
-                      </a:solidFill>
-                      <a:prstDash val="solid"/>
-                      <a:round/>
-                      <a:headEnd type="none" w="med" len="med"/>
-                      <a:tailEnd type="none" w="med" len="med"/>
-                    </a:lnB>
-                    <a:solidFill>
-                      <a:srgbClr val="F5F7FA"/>
                     </a:solidFill>
                   </a:tcPr>
                 </a:tc>
@@ -14394,7 +13501,7 @@
                             <a:srgbClr val="000000"/>
                           </a:solidFill>
                         </a:rPr>
-                        <a:t>8ホテル</a:t>
+                        <a:t>7ホテル</a:t>
                       </a:r>
                       <a:endParaRPr lang="en-US" sz="800" dirty="0"/>
                     </a:p>
@@ -17358,7 +16465,7 @@
                 <a:ea typeface="Arial" pitchFamily="34" charset="-122"/>
                 <a:cs typeface="Arial" pitchFamily="34" charset="-120"/>
               </a:rPr>
-              <a:t>78.2%</a:t>
+              <a:t>78.4%</a:t>
             </a:r>
             <a:endParaRPr lang="en-US" sz="2800" dirty="0"/>
           </a:p>
@@ -17483,7 +16590,7 @@
                 <a:ea typeface="Arial" pitchFamily="34" charset="-122"/>
                 <a:cs typeface="Arial" pitchFamily="34" charset="-120"/>
               </a:rPr>
-              <a:t>4.7%</a:t>
+              <a:t>4.6%</a:t>
             </a:r>
             <a:endParaRPr lang="en-US" sz="2800" dirty="0"/>
           </a:p>
@@ -17608,7 +16715,7 @@
                 <a:ea typeface="Arial" pitchFamily="34" charset="-122"/>
                 <a:cs typeface="Arial" pitchFamily="34" charset="-120"/>
               </a:rPr>
-              <a:t>2157件</a:t>
+              <a:t>2194件</a:t>
             </a:r>
             <a:endParaRPr lang="en-US" sz="2800" dirty="0"/>
           </a:p>
@@ -17732,7 +16839,7 @@
                 <a:ea typeface="Arial" pitchFamily="34" charset="-122"/>
                 <a:cs typeface="Arial" pitchFamily="34" charset="-120"/>
               </a:rPr>
-              <a:t>上位5ホテル平均8.7点超。コンフォートスイーツ東京ベイが9.18点で最高評価</a:t>
+              <a:t>上位5ホテル平均8.7点超。コンフォートスイーツ東京ベイが9.17点で最高評価</a:t>
             </a:r>
             <a:endParaRPr lang="en-US" sz="1000" dirty="0"/>
           </a:p>
@@ -17785,7 +16892,7 @@
                 <a:ea typeface="Arial" pitchFamily="34" charset="-122"/>
                 <a:cs typeface="Arial" pitchFamily="34" charset="-120"/>
               </a:rPr>
-              <a:t>4ホテルがURGENT。清掃クレーム率4.7%（業界平均2-3%超過）</a:t>
+              <a:t>4ホテルがURGENT。清掃クレーム率4.6%（業界平均2-3%超過）</a:t>
             </a:r>
             <a:endParaRPr lang="en-US" sz="1000" dirty="0"/>
           </a:p>
@@ -18600,7 +17707,7 @@
                             <a:srgbClr val="000000"/>
                           </a:solidFill>
                         </a:rPr>
-                        <a:t>9.18</a:t>
+                        <a:t>9.17</a:t>
                       </a:r>
                       <a:endParaRPr lang="en-US" sz="700" dirty="0"/>
                     </a:p>
@@ -18661,7 +17768,7 @@
                             <a:srgbClr val="000000"/>
                           </a:solidFill>
                         </a:rPr>
-                        <a:t>92.6%</a:t>
+                        <a:t>92.8%</a:t>
                       </a:r>
                       <a:endParaRPr lang="en-US" sz="700" dirty="0"/>
                     </a:p>
@@ -18968,7 +18075,7 @@
                             <a:srgbClr val="000000"/>
                           </a:solidFill>
                         </a:rPr>
-                        <a:t>9.06</a:t>
+                        <a:t>9.08</a:t>
                       </a:r>
                       <a:endParaRPr lang="en-US" sz="700" dirty="0"/>
                     </a:p>
@@ -19029,7 +18136,7 @@
                             <a:srgbClr val="000000"/>
                           </a:solidFill>
                         </a:rPr>
-                        <a:t>90.1%</a:t>
+                        <a:t>90.7%</a:t>
                       </a:r>
                       <a:endParaRPr lang="en-US" sz="700" dirty="0"/>
                     </a:p>
@@ -19397,7 +18504,7 @@
                             <a:srgbClr val="000000"/>
                           </a:solidFill>
                         </a:rPr>
-                        <a:t>87.9%</a:t>
+                        <a:t>88.0%</a:t>
                       </a:r>
                       <a:endParaRPr lang="en-US" sz="700" dirty="0"/>
                     </a:p>
@@ -19704,7 +18811,7 @@
                             <a:srgbClr val="000000"/>
                           </a:solidFill>
                         </a:rPr>
-                        <a:t>8.91</a:t>
+                        <a:t>8.94</a:t>
                       </a:r>
                       <a:endParaRPr lang="en-US" sz="700" dirty="0"/>
                     </a:p>
@@ -19765,7 +18872,7 @@
                             <a:srgbClr val="000000"/>
                           </a:solidFill>
                         </a:rPr>
-                        <a:t>84.3%</a:t>
+                        <a:t>85.5%</a:t>
                       </a:r>
                       <a:endParaRPr lang="en-US" sz="700" dirty="0"/>
                     </a:p>
@@ -20072,7 +19179,7 @@
                             <a:srgbClr val="000000"/>
                           </a:solidFill>
                         </a:rPr>
-                        <a:t>8.90</a:t>
+                        <a:t>8.91</a:t>
                       </a:r>
                       <a:endParaRPr lang="en-US" sz="700" dirty="0"/>
                     </a:p>
@@ -20133,7 +19240,7 @@
                             <a:srgbClr val="000000"/>
                           </a:solidFill>
                         </a:rPr>
-                        <a:t>84.3%</a:t>
+                        <a:t>84.9%</a:t>
                       </a:r>
                       <a:endParaRPr lang="en-US" sz="700" dirty="0"/>
                     </a:p>
@@ -20440,7 +19547,7 @@
                             <a:srgbClr val="000000"/>
                           </a:solidFill>
                         </a:rPr>
-                        <a:t>8.81</a:t>
+                        <a:t>8.83</a:t>
                       </a:r>
                       <a:endParaRPr lang="en-US" sz="700" dirty="0"/>
                     </a:p>
@@ -20501,7 +19608,7 @@
                             <a:srgbClr val="000000"/>
                           </a:solidFill>
                         </a:rPr>
-                        <a:t>82.9%</a:t>
+                        <a:t>83.3%</a:t>
                       </a:r>
                       <a:endParaRPr lang="en-US" sz="700" dirty="0"/>
                     </a:p>
@@ -21115,7 +20222,7 @@
                             <a:srgbClr val="000000"/>
                           </a:solidFill>
                         </a:rPr>
-                        <a:t>リッチモンドホテル東京目白</a:t>
+                        <a:t>川崎日航ホテル</a:t>
                       </a:r>
                       <a:endParaRPr lang="en-US" sz="700" dirty="0"/>
                     </a:p>
@@ -21176,7 +20283,7 @@
                             <a:srgbClr val="000000"/>
                           </a:solidFill>
                         </a:rPr>
-                        <a:t>8.66</a:t>
+                        <a:t>8.67</a:t>
                       </a:r>
                       <a:endParaRPr lang="en-US" sz="700" dirty="0"/>
                     </a:p>
@@ -21237,7 +20344,7 @@
                             <a:srgbClr val="000000"/>
                           </a:solidFill>
                         </a:rPr>
-                        <a:t>85.7%</a:t>
+                        <a:t>81.3%</a:t>
                       </a:r>
                       <a:endParaRPr lang="en-US" sz="700" dirty="0"/>
                     </a:p>
@@ -21483,7 +20590,7 @@
                             <a:srgbClr val="000000"/>
                           </a:solidFill>
                         </a:rPr>
-                        <a:t>川崎日航ホテル</a:t>
+                        <a:t>ハートンホテル東品川</a:t>
                       </a:r>
                       <a:endParaRPr lang="en-US" sz="700" dirty="0"/>
                     </a:p>
@@ -21544,7 +20651,7 @@
                             <a:srgbClr val="000000"/>
                           </a:solidFill>
                         </a:rPr>
-                        <a:t>8.65</a:t>
+                        <a:t>8.66</a:t>
                       </a:r>
                       <a:endParaRPr lang="en-US" sz="700" dirty="0"/>
                     </a:p>
@@ -21605,7 +20712,7 @@
                             <a:srgbClr val="000000"/>
                           </a:solidFill>
                         </a:rPr>
-                        <a:t>80.5%</a:t>
+                        <a:t>84.9%</a:t>
                       </a:r>
                       <a:endParaRPr lang="en-US" sz="700" dirty="0"/>
                     </a:p>
@@ -21663,10 +20770,10 @@
                       <a:r>
                         <a:rPr lang="en-US" sz="700" b="1" dirty="0">
                           <a:solidFill>
-                            <a:srgbClr val="FF9800"/>
-                          </a:solidFill>
-                        </a:rPr>
-                        <a:t>HIGH</a:t>
+                            <a:srgbClr val="2196F3"/>
+                          </a:solidFill>
+                        </a:rPr>
+                        <a:t>STANDARD</a:t>
                       </a:r>
                       <a:endParaRPr lang="en-US" sz="700" dirty="0"/>
                     </a:p>
@@ -21709,7 +20816,7 @@
                       <a:tailEnd type="none" w="med" len="med"/>
                     </a:lnB>
                     <a:solidFill>
-                      <a:srgbClr val="FFF3E0"/>
+                      <a:srgbClr val="E3F2FD"/>
                     </a:solidFill>
                   </a:tcPr>
                 </a:tc>
@@ -21851,7 +20958,7 @@
                             <a:srgbClr val="000000"/>
                           </a:solidFill>
                         </a:rPr>
-                        <a:t>ハートンホテル東品川</a:t>
+                        <a:t>リッチモンドホテル東京目白</a:t>
                       </a:r>
                       <a:endParaRPr lang="en-US" sz="700" dirty="0"/>
                     </a:p>
@@ -21912,7 +21019,7 @@
                             <a:srgbClr val="000000"/>
                           </a:solidFill>
                         </a:rPr>
-                        <a:t>8.63</a:t>
+                        <a:t>8.66</a:t>
                       </a:r>
                       <a:endParaRPr lang="en-US" sz="700" dirty="0"/>
                     </a:p>
@@ -21973,7 +21080,7 @@
                             <a:srgbClr val="000000"/>
                           </a:solidFill>
                         </a:rPr>
-                        <a:t>83.5%</a:t>
+                        <a:t>86.1%</a:t>
                       </a:r>
                       <a:endParaRPr lang="en-US" sz="700" dirty="0"/>
                     </a:p>
@@ -22280,7 +21387,7 @@
                             <a:srgbClr val="000000"/>
                           </a:solidFill>
                         </a:rPr>
-                        <a:t>8.59</a:t>
+                        <a:t>8.54</a:t>
                       </a:r>
                       <a:endParaRPr lang="en-US" sz="700" dirty="0"/>
                     </a:p>
@@ -22341,7 +21448,7 @@
                             <a:srgbClr val="000000"/>
                           </a:solidFill>
                         </a:rPr>
-                        <a:t>81.0%</a:t>
+                        <a:t>79.7%</a:t>
                       </a:r>
                       <a:endParaRPr lang="en-US" sz="700" dirty="0"/>
                     </a:p>
@@ -22709,7 +21816,7 @@
                             <a:srgbClr val="000000"/>
                           </a:solidFill>
                         </a:rPr>
-                        <a:t>75.7%</a:t>
+                        <a:t>75.8%</a:t>
                       </a:r>
                       <a:endParaRPr lang="en-US" sz="700" dirty="0"/>
                     </a:p>
@@ -22955,7 +22062,7 @@
                             <a:srgbClr val="000000"/>
                           </a:solidFill>
                         </a:rPr>
-                        <a:t>アパホテル相模原橋本駅東</a:t>
+                        <a:t>コンフォートイン六本木</a:t>
                       </a:r>
                       <a:endParaRPr lang="en-US" sz="700" dirty="0"/>
                     </a:p>
@@ -23016,7 +22123,7 @@
                             <a:srgbClr val="000000"/>
                           </a:solidFill>
                         </a:rPr>
-                        <a:t>8.12</a:t>
+                        <a:t>8.16</a:t>
                       </a:r>
                       <a:endParaRPr lang="en-US" sz="700" dirty="0"/>
                     </a:p>
@@ -23077,7 +22184,7 @@
                             <a:srgbClr val="000000"/>
                           </a:solidFill>
                         </a:rPr>
-                        <a:t>69.6%</a:t>
+                        <a:t>79.2%</a:t>
                       </a:r>
                       <a:endParaRPr lang="en-US" sz="700" dirty="0"/>
                     </a:p>
@@ -23135,10 +22242,10 @@
                       <a:r>
                         <a:rPr lang="en-US" sz="700" b="1" dirty="0">
                           <a:solidFill>
-                            <a:srgbClr val="2196F3"/>
-                          </a:solidFill>
-                        </a:rPr>
-                        <a:t>STANDARD</a:t>
+                            <a:srgbClr val="FF9800"/>
+                          </a:solidFill>
+                        </a:rPr>
+                        <a:t>HIGH</a:t>
                       </a:r>
                       <a:endParaRPr lang="en-US" sz="700" dirty="0"/>
                     </a:p>
@@ -23181,7 +22288,7 @@
                       <a:tailEnd type="none" w="med" len="med"/>
                     </a:lnB>
                     <a:solidFill>
-                      <a:srgbClr val="E3F2FD"/>
+                      <a:srgbClr val="FFF3E0"/>
                     </a:solidFill>
                   </a:tcPr>
                 </a:tc>
@@ -23323,7 +22430,7 @@
                             <a:srgbClr val="000000"/>
                           </a:solidFill>
                         </a:rPr>
-                        <a:t>コンフォートイン六本木</a:t>
+                        <a:t>アパホテル相模原橋本駅東</a:t>
                       </a:r>
                       <a:endParaRPr lang="en-US" sz="700" dirty="0"/>
                     </a:p>
@@ -23384,7 +22491,7 @@
                             <a:srgbClr val="000000"/>
                           </a:solidFill>
                         </a:rPr>
-                        <a:t>8.11</a:t>
+                        <a:t>8.12</a:t>
                       </a:r>
                       <a:endParaRPr lang="en-US" sz="700" dirty="0"/>
                     </a:p>
@@ -23445,7 +22552,7 @@
                             <a:srgbClr val="000000"/>
                           </a:solidFill>
                         </a:rPr>
-                        <a:t>78.4%</a:t>
+                        <a:t>69.0%</a:t>
                       </a:r>
                       <a:endParaRPr lang="en-US" sz="700" dirty="0"/>
                     </a:p>
@@ -23503,10 +22610,10 @@
                       <a:r>
                         <a:rPr lang="en-US" sz="700" b="1" dirty="0">
                           <a:solidFill>
-                            <a:srgbClr val="FF9800"/>
-                          </a:solidFill>
-                        </a:rPr>
-                        <a:t>HIGH</a:t>
+                            <a:srgbClr val="2196F3"/>
+                          </a:solidFill>
+                        </a:rPr>
+                        <a:t>STANDARD</a:t>
                       </a:r>
                       <a:endParaRPr lang="en-US" sz="700" dirty="0"/>
                     </a:p>
@@ -23549,7 +22656,7 @@
                       <a:tailEnd type="none" w="med" len="med"/>
                     </a:lnB>
                     <a:solidFill>
-                      <a:srgbClr val="FFF3E0"/>
+                      <a:srgbClr val="E3F2FD"/>
                     </a:solidFill>
                   </a:tcPr>
                 </a:tc>
@@ -23752,7 +22859,7 @@
                             <a:srgbClr val="000000"/>
                           </a:solidFill>
                         </a:rPr>
-                        <a:t>7.89</a:t>
+                        <a:t>7.86</a:t>
                       </a:r>
                       <a:endParaRPr lang="en-US" sz="700" dirty="0"/>
                     </a:p>
@@ -23813,7 +22920,7 @@
                             <a:srgbClr val="000000"/>
                           </a:solidFill>
                         </a:rPr>
-                        <a:t>68.3%</a:t>
+                        <a:t>67.9%</a:t>
                       </a:r>
                       <a:endParaRPr lang="en-US" sz="700" dirty="0"/>
                     </a:p>
@@ -24120,7 +23227,7 @@
                             <a:srgbClr val="000000"/>
                           </a:solidFill>
                         </a:rPr>
-                        <a:t>7.65</a:t>
+                        <a:t>7.57</a:t>
                       </a:r>
                       <a:endParaRPr lang="en-US" sz="700" dirty="0"/>
                     </a:p>
@@ -24181,7 +23288,7 @@
                             <a:srgbClr val="000000"/>
                           </a:solidFill>
                         </a:rPr>
-                        <a:t>72.5%</a:t>
+                        <a:t>71.0%</a:t>
                       </a:r>
                       <a:endParaRPr lang="en-US" sz="700" dirty="0"/>
                     </a:p>
@@ -24488,7 +23595,7 @@
                             <a:srgbClr val="000000"/>
                           </a:solidFill>
                         </a:rPr>
-                        <a:t>7.34</a:t>
+                        <a:t>7.35</a:t>
                       </a:r>
                       <a:endParaRPr lang="en-US" sz="700" dirty="0"/>
                     </a:p>
@@ -24549,7 +23656,7 @@
                             <a:srgbClr val="000000"/>
                           </a:solidFill>
                         </a:rPr>
-                        <a:t>61.7%</a:t>
+                        <a:t>62.5%</a:t>
                       </a:r>
                       <a:endParaRPr lang="en-US" sz="700" dirty="0"/>
                     </a:p>
@@ -24856,7 +23963,7 @@
                             <a:srgbClr val="000000"/>
                           </a:solidFill>
                         </a:rPr>
-                        <a:t>7.03</a:t>
+                        <a:t>7.07</a:t>
                       </a:r>
                       <a:endParaRPr lang="en-US" sz="700" dirty="0"/>
                     </a:p>
@@ -24917,7 +24024,7 @@
                             <a:srgbClr val="000000"/>
                           </a:solidFill>
                         </a:rPr>
-                        <a:t>57.6%</a:t>
+                        <a:t>58.2%</a:t>
                       </a:r>
                       <a:endParaRPr lang="en-US" sz="700" dirty="0"/>
                     </a:p>
@@ -25924,7 +25031,7 @@
                 <a:ea typeface="Arial" pitchFamily="34" charset="-122"/>
                 <a:cs typeface="Arial" pitchFamily="34" charset="-120"/>
               </a:rPr>
-              <a:t>4.7%</a:t>
+              <a:t>4.6%</a:t>
             </a:r>
             <a:endParaRPr lang="en-US" sz="2800" dirty="0"/>
           </a:p>
@@ -26405,7 +25512,7 @@
                             <a:srgbClr val="000000"/>
                           </a:solidFill>
                         </a:rPr>
-                        <a:t>67</a:t>
+                        <a:t>66</a:t>
                       </a:r>
                       <a:endParaRPr lang="en-US" sz="800" dirty="0"/>
                     </a:p>
@@ -26651,7 +25758,7 @@
                             <a:srgbClr val="000000"/>
                           </a:solidFill>
                         </a:rPr>
-                        <a:t>24</a:t>
+                        <a:t>25</a:t>
                       </a:r>
                       <a:endParaRPr lang="en-US" sz="800" dirty="0"/>
                     </a:p>
@@ -28066,7 +27173,7 @@
                             <a:srgbClr val="000000"/>
                           </a:solidFill>
                         </a:rPr>
-                        <a:t>ゴミ残置</a:t>
+                        <a:t>シミ・汚れ跡</a:t>
                       </a:r>
                       <a:endParaRPr lang="en-US" sz="800" dirty="0"/>
                     </a:p>
@@ -28188,7 +27295,7 @@
                             <a:srgbClr val="000000"/>
                           </a:solidFill>
                         </a:rPr>
-                        <a:t>4/19</a:t>
+                        <a:t>2/19</a:t>
                       </a:r>
                       <a:endParaRPr lang="en-US" sz="800" dirty="0"/>
                     </a:p>
@@ -28312,7 +27419,7 @@
                             <a:srgbClr val="000000"/>
                           </a:solidFill>
                         </a:rPr>
-                        <a:t>シミ・汚れ跡</a:t>
+                        <a:t>ゴミ残置</a:t>
                       </a:r>
                       <a:endParaRPr lang="en-US" sz="800" dirty="0"/>
                     </a:p>
@@ -28434,7 +27541,7 @@
                             <a:srgbClr val="000000"/>
                           </a:solidFill>
                         </a:rPr>
-                        <a:t>1/19</a:t>
+                        <a:t>3/19</a:t>
                       </a:r>
                       <a:endParaRPr lang="en-US" sz="800" dirty="0"/>
                     </a:p>
@@ -28865,7 +27972,7 @@
                             <a:srgbClr val="000000"/>
                           </a:solidFill>
                         </a:rPr>
-                        <a:t>3</a:t>
+                        <a:t>2</a:t>
                       </a:r>
                       <a:endParaRPr lang="en-US" sz="800" dirty="0"/>
                     </a:p>
@@ -28987,7 +28094,7 @@
                             <a:srgbClr val="666666"/>
                           </a:solidFill>
                         </a:rPr>
-                        <a:t>MEDIUM</a:t>
+                        <a:t>LOW</a:t>
                       </a:r>
                       <a:endParaRPr lang="en-US" sz="800" dirty="0"/>
                     </a:p>
@@ -29855,7 +28962,7 @@
                             <a:srgbClr val="000000"/>
                           </a:solidFill>
                         </a:rPr>
-                        <a:t>17</a:t>
+                        <a:t>18</a:t>
                       </a:r>
                       <a:endParaRPr lang="en-US" sz="700" dirty="0"/>
                     </a:p>
@@ -29974,7 +29081,7 @@
                             <a:srgbClr val="E74C3C"/>
                           </a:solidFill>
                         </a:rPr>
-                        <a:t>6</a:t>
+                        <a:t>7</a:t>
                       </a:r>
                       <a:endParaRPr lang="en-US" sz="700" dirty="0"/>
                     </a:p>
@@ -32701,7 +31808,7 @@
                             <a:srgbClr val="000000"/>
                           </a:solidFill>
                         </a:rPr>
-                        <a:t>川崎日航ホテル</a:t>
+                        <a:t>ホテルコメント横浜関内</a:t>
                       </a:r>
                       <a:endParaRPr lang="en-US" sz="700" dirty="0"/>
                     </a:p>
@@ -32759,7 +31866,7 @@
                             <a:srgbClr val="000000"/>
                           </a:solidFill>
                         </a:rPr>
-                        <a:t>7</a:t>
+                        <a:t>6</a:t>
                       </a:r>
                       <a:endParaRPr lang="en-US" sz="700" dirty="0"/>
                     </a:p>
@@ -32817,7 +31924,7 @@
                             <a:srgbClr val="E74C3C"/>
                           </a:solidFill>
                         </a:rPr>
-                        <a:t>6</a:t>
+                        <a:t>4</a:t>
                       </a:r>
                       <a:endParaRPr lang="en-US" sz="700" dirty="0"/>
                     </a:p>
@@ -32860,7 +31967,7 @@
                       <a:tailEnd type="none" w="med" len="med"/>
                     </a:lnB>
                     <a:solidFill>
-                      <a:srgbClr val="FFCDD2"/>
+                      <a:srgbClr val="FFE0B2"/>
                     </a:solidFill>
                   </a:tcPr>
                 </a:tc>
@@ -32878,7 +31985,7 @@
                             <a:srgbClr val="333333"/>
                           </a:solidFill>
                         </a:rPr>
-                        <a:t>1</a:t>
+                        <a:t>2</a:t>
                       </a:r>
                       <a:endParaRPr lang="en-US" sz="700" dirty="0"/>
                     </a:p>
@@ -33000,7 +32107,7 @@
                             <a:srgbClr val="333333"/>
                           </a:solidFill>
                         </a:rPr>
-                        <a:t>-</a:t>
+                        <a:t>1</a:t>
                       </a:r>
                       <a:endParaRPr lang="en-US" sz="700" dirty="0"/>
                     </a:p>
@@ -33043,7 +32150,7 @@
                       <a:tailEnd type="none" w="med" len="med"/>
                     </a:lnB>
                     <a:solidFill>
-                      <a:srgbClr val="FFFFFF"/>
+                      <a:srgbClr val="FFF9C4"/>
                     </a:solidFill>
                   </a:tcPr>
                 </a:tc>
@@ -33061,7 +32168,7 @@
                             <a:srgbClr val="333333"/>
                           </a:solidFill>
                         </a:rPr>
-                        <a:t>-</a:t>
+                        <a:t>1</a:t>
                       </a:r>
                       <a:endParaRPr lang="en-US" sz="700" dirty="0"/>
                     </a:p>
@@ -33104,7 +32211,7 @@
                       <a:tailEnd type="none" w="med" len="med"/>
                     </a:lnB>
                     <a:solidFill>
-                      <a:srgbClr val="FFFFFF"/>
+                      <a:srgbClr val="FFF9C4"/>
                     </a:solidFill>
                   </a:tcPr>
                 </a:tc>
@@ -33185,7 +32292,7 @@
                             <a:srgbClr val="000000"/>
                           </a:solidFill>
                         </a:rPr>
-                        <a:t>ホテルコメント横浜関内</a:t>
+                        <a:t>川崎日航ホテル</a:t>
                       </a:r>
                       <a:endParaRPr lang="en-US" sz="700" dirty="0"/>
                     </a:p>
@@ -33301,7 +32408,7 @@
                             <a:srgbClr val="E74C3C"/>
                           </a:solidFill>
                         </a:rPr>
-                        <a:t>4</a:t>
+                        <a:t>5</a:t>
                       </a:r>
                       <a:endParaRPr lang="en-US" sz="700" dirty="0"/>
                     </a:p>
@@ -33362,7 +32469,7 @@
                             <a:srgbClr val="333333"/>
                           </a:solidFill>
                         </a:rPr>
-                        <a:t>2</a:t>
+                        <a:t>1</a:t>
                       </a:r>
                       <a:endParaRPr lang="en-US" sz="700" dirty="0"/>
                     </a:p>
@@ -33484,7 +32591,7 @@
                             <a:srgbClr val="333333"/>
                           </a:solidFill>
                         </a:rPr>
-                        <a:t>1</a:t>
+                        <a:t>-</a:t>
                       </a:r>
                       <a:endParaRPr lang="en-US" sz="700" dirty="0"/>
                     </a:p>
@@ -33527,7 +32634,7 @@
                       <a:tailEnd type="none" w="med" len="med"/>
                     </a:lnB>
                     <a:solidFill>
-                      <a:srgbClr val="FFF9C4"/>
+                      <a:srgbClr val="FFFFFF"/>
                     </a:solidFill>
                   </a:tcPr>
                 </a:tc>
@@ -33545,7 +32652,7 @@
                             <a:srgbClr val="333333"/>
                           </a:solidFill>
                         </a:rPr>
-                        <a:t>1</a:t>
+                        <a:t>-</a:t>
                       </a:r>
                       <a:endParaRPr lang="en-US" sz="700" dirty="0"/>
                     </a:p>
@@ -33588,7 +32695,7 @@
                       <a:tailEnd type="none" w="med" len="med"/>
                     </a:lnB>
                     <a:solidFill>
-                      <a:srgbClr val="FFF9C4"/>
+                      <a:srgbClr val="FFFFFF"/>
                     </a:solidFill>
                   </a:tcPr>
                 </a:tc>
@@ -33669,7 +32776,7 @@
                             <a:srgbClr val="000000"/>
                           </a:solidFill>
                         </a:rPr>
-                        <a:t>ハートンホテル東品川</a:t>
+                        <a:t>コンフォートホテル成田</a:t>
                       </a:r>
                       <a:endParaRPr lang="en-US" sz="700" dirty="0"/>
                     </a:p>
@@ -33727,7 +32834,7 @@
                             <a:srgbClr val="000000"/>
                           </a:solidFill>
                         </a:rPr>
-                        <a:t>6</a:t>
+                        <a:t>5</a:t>
                       </a:r>
                       <a:endParaRPr lang="en-US" sz="700" dirty="0"/>
                     </a:p>
@@ -33968,7 +33075,7 @@
                             <a:srgbClr val="333333"/>
                           </a:solidFill>
                         </a:rPr>
-                        <a:t>-</a:t>
+                        <a:t>2</a:t>
                       </a:r>
                       <a:endParaRPr lang="en-US" sz="700" dirty="0"/>
                     </a:p>
@@ -34011,7 +33118,7 @@
                       <a:tailEnd type="none" w="med" len="med"/>
                     </a:lnB>
                     <a:solidFill>
-                      <a:srgbClr val="FFFFFF"/>
+                      <a:srgbClr val="FFF9C4"/>
                     </a:solidFill>
                   </a:tcPr>
                 </a:tc>
@@ -34637,7 +33744,7 @@
                             <a:srgbClr val="000000"/>
                           </a:solidFill>
                         </a:rPr>
-                        <a:t>ホテルケヤキゲート東京府中</a:t>
+                        <a:t>ハートンホテル東品川</a:t>
                       </a:r>
                       <a:endParaRPr lang="en-US" sz="700" dirty="0"/>
                     </a:p>
@@ -34695,7 +33802,7 @@
                             <a:srgbClr val="000000"/>
                           </a:solidFill>
                         </a:rPr>
-                        <a:t>3</a:t>
+                        <a:t>5</a:t>
                       </a:r>
                       <a:endParaRPr lang="en-US" sz="700" dirty="0"/>
                     </a:p>
@@ -34737,6 +33844,67 @@
                       <a:headEnd type="none" w="med" len="med"/>
                       <a:tailEnd type="none" w="med" len="med"/>
                     </a:lnB>
+                  </a:tcPr>
+                </a:tc>
+                <a:tc>
+                  <a:txBody>
+                    <a:bodyPr/>
+                    <a:lstStyle/>
+                    <a:p>
+                      <a:pPr algn="ctr" indent="0" marL="0">
+                        <a:buNone/>
+                      </a:pPr>
+                      <a:r>
+                        <a:rPr lang="en-US" sz="700" dirty="0">
+                          <a:solidFill>
+                            <a:srgbClr val="E74C3C"/>
+                          </a:solidFill>
+                        </a:rPr>
+                        <a:t>3</a:t>
+                      </a:r>
+                      <a:endParaRPr lang="en-US" sz="700" dirty="0"/>
+                    </a:p>
+                  </a:txBody>
+                  <a:tcPr marL="91440" marR="91440" marT="45720" marB="45720">
+                    <a:lnL w="6350" cap="flat" cmpd="sng" algn="ctr">
+                      <a:solidFill>
+                        <a:srgbClr val="CCCCCC"/>
+                      </a:solidFill>
+                      <a:prstDash val="solid"/>
+                      <a:round/>
+                      <a:headEnd type="none" w="med" len="med"/>
+                      <a:tailEnd type="none" w="med" len="med"/>
+                    </a:lnL>
+                    <a:lnR w="6350" cap="flat" cmpd="sng" algn="ctr">
+                      <a:solidFill>
+                        <a:srgbClr val="CCCCCC"/>
+                      </a:solidFill>
+                      <a:prstDash val="solid"/>
+                      <a:round/>
+                      <a:headEnd type="none" w="med" len="med"/>
+                      <a:tailEnd type="none" w="med" len="med"/>
+                    </a:lnR>
+                    <a:lnT w="6350" cap="flat" cmpd="sng" algn="ctr">
+                      <a:solidFill>
+                        <a:srgbClr val="CCCCCC"/>
+                      </a:solidFill>
+                      <a:prstDash val="solid"/>
+                      <a:round/>
+                      <a:headEnd type="none" w="med" len="med"/>
+                      <a:tailEnd type="none" w="med" len="med"/>
+                    </a:lnT>
+                    <a:lnB w="6350" cap="flat" cmpd="sng" algn="ctr">
+                      <a:solidFill>
+                        <a:srgbClr val="CCCCCC"/>
+                      </a:solidFill>
+                      <a:prstDash val="solid"/>
+                      <a:round/>
+                      <a:headEnd type="none" w="med" len="med"/>
+                      <a:tailEnd type="none" w="med" len="med"/>
+                    </a:lnB>
+                    <a:solidFill>
+                      <a:srgbClr val="FFE0B2"/>
+                    </a:solidFill>
                   </a:tcPr>
                 </a:tc>
                 <a:tc>
@@ -34936,7 +34104,7 @@
                             <a:srgbClr val="333333"/>
                           </a:solidFill>
                         </a:rPr>
-                        <a:t>-</a:t>
+                        <a:t>1</a:t>
                       </a:r>
                       <a:endParaRPr lang="en-US" sz="700" dirty="0"/>
                     </a:p>
@@ -34979,68 +34147,7 @@
                       <a:tailEnd type="none" w="med" len="med"/>
                     </a:lnB>
                     <a:solidFill>
-                      <a:srgbClr val="FFFFFF"/>
-                    </a:solidFill>
-                  </a:tcPr>
-                </a:tc>
-                <a:tc>
-                  <a:txBody>
-                    <a:bodyPr/>
-                    <a:lstStyle/>
-                    <a:p>
-                      <a:pPr algn="ctr" indent="0" marL="0">
-                        <a:buNone/>
-                      </a:pPr>
-                      <a:r>
-                        <a:rPr lang="en-US" sz="700" dirty="0">
-                          <a:solidFill>
-                            <a:srgbClr val="333333"/>
-                          </a:solidFill>
-                        </a:rPr>
-                        <a:t>-</a:t>
-                      </a:r>
-                      <a:endParaRPr lang="en-US" sz="700" dirty="0"/>
-                    </a:p>
-                  </a:txBody>
-                  <a:tcPr marL="91440" marR="91440" marT="45720" marB="45720">
-                    <a:lnL w="6350" cap="flat" cmpd="sng" algn="ctr">
-                      <a:solidFill>
-                        <a:srgbClr val="CCCCCC"/>
-                      </a:solidFill>
-                      <a:prstDash val="solid"/>
-                      <a:round/>
-                      <a:headEnd type="none" w="med" len="med"/>
-                      <a:tailEnd type="none" w="med" len="med"/>
-                    </a:lnL>
-                    <a:lnR w="6350" cap="flat" cmpd="sng" algn="ctr">
-                      <a:solidFill>
-                        <a:srgbClr val="CCCCCC"/>
-                      </a:solidFill>
-                      <a:prstDash val="solid"/>
-                      <a:round/>
-                      <a:headEnd type="none" w="med" len="med"/>
-                      <a:tailEnd type="none" w="med" len="med"/>
-                    </a:lnR>
-                    <a:lnT w="6350" cap="flat" cmpd="sng" algn="ctr">
-                      <a:solidFill>
-                        <a:srgbClr val="CCCCCC"/>
-                      </a:solidFill>
-                      <a:prstDash val="solid"/>
-                      <a:round/>
-                      <a:headEnd type="none" w="med" len="med"/>
-                      <a:tailEnd type="none" w="med" len="med"/>
-                    </a:lnT>
-                    <a:lnB w="6350" cap="flat" cmpd="sng" algn="ctr">
-                      <a:solidFill>
-                        <a:srgbClr val="CCCCCC"/>
-                      </a:solidFill>
-                      <a:prstDash val="solid"/>
-                      <a:round/>
-                      <a:headEnd type="none" w="med" len="med"/>
-                      <a:tailEnd type="none" w="med" len="med"/>
-                    </a:lnB>
-                    <a:solidFill>
-                      <a:srgbClr val="FFFFFF"/>
+                      <a:srgbClr val="FFF9C4"/>
                     </a:solidFill>
                   </a:tcPr>
                 </a:tc>
@@ -35121,7 +34228,7 @@
                             <a:srgbClr val="000000"/>
                           </a:solidFill>
                         </a:rPr>
-                        <a:t>アパホテル相模原橋本駅東</a:t>
+                        <a:t>ホテルケヤキゲート東京府中</a:t>
                       </a:r>
                       <a:endParaRPr lang="en-US" sz="700" dirty="0"/>
                     </a:p>
@@ -35179,7 +34286,7 @@
                             <a:srgbClr val="000000"/>
                           </a:solidFill>
                         </a:rPr>
-                        <a:t>2</a:t>
+                        <a:t>3</a:t>
                       </a:r>
                       <a:endParaRPr lang="en-US" sz="700" dirty="0"/>
                     </a:p>
@@ -35542,7 +34649,7 @@
                             <a:srgbClr val="333333"/>
                           </a:solidFill>
                         </a:rPr>
-                        <a:t>-</a:t>
+                        <a:t>1</a:t>
                       </a:r>
                       <a:endParaRPr lang="en-US" sz="700" dirty="0"/>
                     </a:p>
@@ -35585,7 +34692,7 @@
                       <a:tailEnd type="none" w="med" len="med"/>
                     </a:lnB>
                     <a:solidFill>
-                      <a:srgbClr val="FFFFFF"/>
+                      <a:srgbClr val="FFF9C4"/>
                     </a:solidFill>
                   </a:tcPr>
                 </a:tc>
@@ -35605,7 +34712,7 @@
                             <a:srgbClr val="000000"/>
                           </a:solidFill>
                         </a:rPr>
-                        <a:t>コンフォートホテル成田</a:t>
+                        <a:t>アパホテル相模原橋本駅東</a:t>
                       </a:r>
                       <a:endParaRPr lang="en-US" sz="700" dirty="0"/>
                     </a:p>
@@ -35663,7 +34770,7 @@
                             <a:srgbClr val="000000"/>
                           </a:solidFill>
                         </a:rPr>
-                        <a:t>4</a:t>
+                        <a:t>2</a:t>
                       </a:r>
                       <a:endParaRPr lang="en-US" sz="700" dirty="0"/>
                     </a:p>
@@ -35705,67 +34812,6 @@
                       <a:headEnd type="none" w="med" len="med"/>
                       <a:tailEnd type="none" w="med" len="med"/>
                     </a:lnB>
-                  </a:tcPr>
-                </a:tc>
-                <a:tc>
-                  <a:txBody>
-                    <a:bodyPr/>
-                    <a:lstStyle/>
-                    <a:p>
-                      <a:pPr algn="ctr" indent="0" marL="0">
-                        <a:buNone/>
-                      </a:pPr>
-                      <a:r>
-                        <a:rPr lang="en-US" sz="700" dirty="0">
-                          <a:solidFill>
-                            <a:srgbClr val="E74C3C"/>
-                          </a:solidFill>
-                        </a:rPr>
-                        <a:t>3</a:t>
-                      </a:r>
-                      <a:endParaRPr lang="en-US" sz="700" dirty="0"/>
-                    </a:p>
-                  </a:txBody>
-                  <a:tcPr marL="91440" marR="91440" marT="45720" marB="45720">
-                    <a:lnL w="6350" cap="flat" cmpd="sng" algn="ctr">
-                      <a:solidFill>
-                        <a:srgbClr val="CCCCCC"/>
-                      </a:solidFill>
-                      <a:prstDash val="solid"/>
-                      <a:round/>
-                      <a:headEnd type="none" w="med" len="med"/>
-                      <a:tailEnd type="none" w="med" len="med"/>
-                    </a:lnL>
-                    <a:lnR w="6350" cap="flat" cmpd="sng" algn="ctr">
-                      <a:solidFill>
-                        <a:srgbClr val="CCCCCC"/>
-                      </a:solidFill>
-                      <a:prstDash val="solid"/>
-                      <a:round/>
-                      <a:headEnd type="none" w="med" len="med"/>
-                      <a:tailEnd type="none" w="med" len="med"/>
-                    </a:lnR>
-                    <a:lnT w="6350" cap="flat" cmpd="sng" algn="ctr">
-                      <a:solidFill>
-                        <a:srgbClr val="CCCCCC"/>
-                      </a:solidFill>
-                      <a:prstDash val="solid"/>
-                      <a:round/>
-                      <a:headEnd type="none" w="med" len="med"/>
-                      <a:tailEnd type="none" w="med" len="med"/>
-                    </a:lnT>
-                    <a:lnB w="6350" cap="flat" cmpd="sng" algn="ctr">
-                      <a:solidFill>
-                        <a:srgbClr val="CCCCCC"/>
-                      </a:solidFill>
-                      <a:prstDash val="solid"/>
-                      <a:round/>
-                      <a:headEnd type="none" w="med" len="med"/>
-                      <a:tailEnd type="none" w="med" len="med"/>
-                    </a:lnB>
-                    <a:solidFill>
-                      <a:srgbClr val="FFE0B2"/>
-                    </a:solidFill>
                   </a:tcPr>
                 </a:tc>
                 <a:tc>
@@ -35904,7 +34950,7 @@
                             <a:srgbClr val="333333"/>
                           </a:solidFill>
                         </a:rPr>
-                        <a:t>2</a:t>
+                        <a:t>-</a:t>
                       </a:r>
                       <a:endParaRPr lang="en-US" sz="700" dirty="0"/>
                     </a:p>
@@ -35947,7 +34993,7 @@
                       <a:tailEnd type="none" w="med" len="med"/>
                     </a:lnB>
                     <a:solidFill>
-                      <a:srgbClr val="FFF9C4"/>
+                      <a:srgbClr val="FFFFFF"/>
                     </a:solidFill>
                   </a:tcPr>
                 </a:tc>
@@ -35965,7 +35011,7 @@
                             <a:srgbClr val="333333"/>
                           </a:solidFill>
                         </a:rPr>
-                        <a:t>1</a:t>
+                        <a:t>-</a:t>
                       </a:r>
                       <a:endParaRPr lang="en-US" sz="700" dirty="0"/>
                     </a:p>
@@ -36008,7 +35054,7 @@
                       <a:tailEnd type="none" w="med" len="med"/>
                     </a:lnB>
                     <a:solidFill>
-                      <a:srgbClr val="FFF9C4"/>
+                      <a:srgbClr val="FFFFFF"/>
                     </a:solidFill>
                   </a:tcPr>
                 </a:tc>
@@ -36026,7 +35072,7 @@
                             <a:srgbClr val="333333"/>
                           </a:solidFill>
                         </a:rPr>
-                        <a:t>1</a:t>
+                        <a:t>-</a:t>
                       </a:r>
                       <a:endParaRPr lang="en-US" sz="700" dirty="0"/>
                     </a:p>
@@ -36069,7 +35115,68 @@
                       <a:tailEnd type="none" w="med" len="med"/>
                     </a:lnB>
                     <a:solidFill>
-                      <a:srgbClr val="FFF9C4"/>
+                      <a:srgbClr val="FFFFFF"/>
+                    </a:solidFill>
+                  </a:tcPr>
+                </a:tc>
+                <a:tc>
+                  <a:txBody>
+                    <a:bodyPr/>
+                    <a:lstStyle/>
+                    <a:p>
+                      <a:pPr algn="ctr" indent="0" marL="0">
+                        <a:buNone/>
+                      </a:pPr>
+                      <a:r>
+                        <a:rPr lang="en-US" sz="700" dirty="0">
+                          <a:solidFill>
+                            <a:srgbClr val="333333"/>
+                          </a:solidFill>
+                        </a:rPr>
+                        <a:t>-</a:t>
+                      </a:r>
+                      <a:endParaRPr lang="en-US" sz="700" dirty="0"/>
+                    </a:p>
+                  </a:txBody>
+                  <a:tcPr marL="91440" marR="91440" marT="45720" marB="45720">
+                    <a:lnL w="6350" cap="flat" cmpd="sng" algn="ctr">
+                      <a:solidFill>
+                        <a:srgbClr val="CCCCCC"/>
+                      </a:solidFill>
+                      <a:prstDash val="solid"/>
+                      <a:round/>
+                      <a:headEnd type="none" w="med" len="med"/>
+                      <a:tailEnd type="none" w="med" len="med"/>
+                    </a:lnL>
+                    <a:lnR w="6350" cap="flat" cmpd="sng" algn="ctr">
+                      <a:solidFill>
+                        <a:srgbClr val="CCCCCC"/>
+                      </a:solidFill>
+                      <a:prstDash val="solid"/>
+                      <a:round/>
+                      <a:headEnd type="none" w="med" len="med"/>
+                      <a:tailEnd type="none" w="med" len="med"/>
+                    </a:lnR>
+                    <a:lnT w="6350" cap="flat" cmpd="sng" algn="ctr">
+                      <a:solidFill>
+                        <a:srgbClr val="CCCCCC"/>
+                      </a:solidFill>
+                      <a:prstDash val="solid"/>
+                      <a:round/>
+                      <a:headEnd type="none" w="med" len="med"/>
+                      <a:tailEnd type="none" w="med" len="med"/>
+                    </a:lnT>
+                    <a:lnB w="6350" cap="flat" cmpd="sng" algn="ctr">
+                      <a:solidFill>
+                        <a:srgbClr val="CCCCCC"/>
+                      </a:solidFill>
+                      <a:prstDash val="solid"/>
+                      <a:round/>
+                      <a:headEnd type="none" w="med" len="med"/>
+                      <a:tailEnd type="none" w="med" len="med"/>
+                    </a:lnB>
+                    <a:solidFill>
+                      <a:srgbClr val="FFFFFF"/>
                     </a:solidFill>
                   </a:tcPr>
                 </a:tc>
@@ -38445,7 +37552,7 @@
                 <a:ea typeface="Arial" pitchFamily="34" charset="-122"/>
                 <a:cs typeface="Arial" pitchFamily="34" charset="-120"/>
               </a:rPr>
-              <a:t>コンフォートホテル博多（7.89点）</a:t>
+              <a:t>コンフォートホテル博多（7.86点）</a:t>
             </a:r>
             <a:endParaRPr lang="en-US" sz="800" dirty="0"/>
           </a:p>
@@ -38462,7 +37569,7 @@
                 <a:ea typeface="Arial" pitchFamily="34" charset="-122"/>
                 <a:cs typeface="Arial" pitchFamily="34" charset="-120"/>
               </a:rPr>
-              <a:t>チサンホテル浜松町（7.03点）</a:t>
+              <a:t>チサンホテル浜松町（7.07点）</a:t>
             </a:r>
             <a:endParaRPr lang="en-US" sz="800" dirty="0"/>
           </a:p>
@@ -38479,7 +37586,7 @@
                 <a:ea typeface="Arial" pitchFamily="34" charset="-122"/>
                 <a:cs typeface="Arial" pitchFamily="34" charset="-120"/>
               </a:rPr>
-              <a:t>アパホテル蒲田駅東（7.34点）</a:t>
+              <a:t>アパホテル蒲田駅東（7.35点）</a:t>
             </a:r>
             <a:endParaRPr lang="en-US" sz="800" dirty="0"/>
           </a:p>
@@ -38582,7 +37689,7 @@
                 <a:ea typeface="Arial" pitchFamily="34" charset="-122"/>
                 <a:cs typeface="Arial" pitchFamily="34" charset="-120"/>
               </a:rPr>
-              <a:t>HIGH（高） (4)</a:t>
+              <a:t>HIGH（高） (3)</a:t>
             </a:r>
             <a:endParaRPr lang="en-US" sz="1100" dirty="0"/>
           </a:p>
@@ -38621,7 +37728,7 @@
                 <a:ea typeface="Arial" pitchFamily="34" charset="-122"/>
                 <a:cs typeface="Arial" pitchFamily="34" charset="-120"/>
               </a:rPr>
-              <a:t>コンフォートホテル横浜関内（7.65点）</a:t>
+              <a:t>コンフォートホテル横浜関内（7.57点）</a:t>
             </a:r>
             <a:endParaRPr lang="en-US" sz="800" dirty="0"/>
           </a:p>
@@ -38638,7 +37745,7 @@
                 <a:ea typeface="Arial" pitchFamily="34" charset="-122"/>
                 <a:cs typeface="Arial" pitchFamily="34" charset="-120"/>
               </a:rPr>
-              <a:t>コンフォートイン六本木（8.11点）</a:t>
+              <a:t>コンフォートイン六本木（8.16点）</a:t>
             </a:r>
             <a:endParaRPr lang="en-US" sz="800" dirty="0"/>
           </a:p>
@@ -38655,24 +37762,7 @@
                 <a:ea typeface="Arial" pitchFamily="34" charset="-122"/>
                 <a:cs typeface="Arial" pitchFamily="34" charset="-120"/>
               </a:rPr>
-              <a:t>川崎日航ホテル（8.65点）</a:t>
-            </a:r>
-            <a:endParaRPr lang="en-US" sz="800" dirty="0"/>
-          </a:p>
-          <a:p>
-            <a:pPr indent="0" marL="0">
-              <a:buNone/>
-            </a:pPr>
-            <a:r>
-              <a:rPr lang="en-US" sz="800" dirty="0">
-                <a:solidFill>
-                  <a:srgbClr val="333333"/>
-                </a:solidFill>
-                <a:latin typeface="Arial" pitchFamily="34" charset="0"/>
-                <a:ea typeface="Arial" pitchFamily="34" charset="-122"/>
-                <a:cs typeface="Arial" pitchFamily="34" charset="-120"/>
-              </a:rPr>
-              <a:t>ホテルコメント横浜関内（8.81点）</a:t>
+              <a:t>ホテルコメント横浜関内（8.83点）</a:t>
             </a:r>
             <a:endParaRPr lang="en-US" sz="800" dirty="0"/>
           </a:p>
@@ -38758,7 +37848,7 @@
                 <a:ea typeface="Arial" pitchFamily="34" charset="-122"/>
                 <a:cs typeface="Arial" pitchFamily="34" charset="-120"/>
               </a:rPr>
-              <a:t>STANDARD（標準） (9)</a:t>
+              <a:t>STANDARD（標準） (10)</a:t>
             </a:r>
             <a:endParaRPr lang="en-US" sz="1100" dirty="0"/>
           </a:p>
@@ -38797,7 +37887,7 @@
                 <a:ea typeface="Arial" pitchFamily="34" charset="-122"/>
                 <a:cs typeface="Arial" pitchFamily="34" charset="-120"/>
               </a:rPr>
-              <a:t>ハートンホテル東品川（8.63点）</a:t>
+              <a:t>川崎日航ホテル（8.67点）</a:t>
             </a:r>
             <a:endParaRPr lang="en-US" sz="800" dirty="0"/>
           </a:p>
@@ -38814,7 +37904,41 @@
                 <a:ea typeface="Arial" pitchFamily="34" charset="-122"/>
                 <a:cs typeface="Arial" pitchFamily="34" charset="-120"/>
               </a:rPr>
-              <a:t>ダイワロイネットホテル東京大崎（8.9点）</a:t>
+              <a:t>コンフォートホテル成田（8.54点）</a:t>
+            </a:r>
+            <a:endParaRPr lang="en-US" sz="800" dirty="0"/>
+          </a:p>
+          <a:p>
+            <a:pPr indent="0" marL="0">
+              <a:buNone/>
+            </a:pPr>
+            <a:r>
+              <a:rPr lang="en-US" sz="800" dirty="0">
+                <a:solidFill>
+                  <a:srgbClr val="333333"/>
+                </a:solidFill>
+                <a:latin typeface="Arial" pitchFamily="34" charset="0"/>
+                <a:ea typeface="Arial" pitchFamily="34" charset="-122"/>
+                <a:cs typeface="Arial" pitchFamily="34" charset="-120"/>
+              </a:rPr>
+              <a:t>ダイワロイネットホテル東京大崎（8.91点）</a:t>
+            </a:r>
+            <a:endParaRPr lang="en-US" sz="800" dirty="0"/>
+          </a:p>
+          <a:p>
+            <a:pPr indent="0" marL="0">
+              <a:buNone/>
+            </a:pPr>
+            <a:r>
+              <a:rPr lang="en-US" sz="800" dirty="0">
+                <a:solidFill>
+                  <a:srgbClr val="333333"/>
+                </a:solidFill>
+                <a:latin typeface="Arial" pitchFamily="34" charset="0"/>
+                <a:ea typeface="Arial" pitchFamily="34" charset="-122"/>
+                <a:cs typeface="Arial" pitchFamily="34" charset="-120"/>
+              </a:rPr>
+              <a:t>ハートンホテル東品川（8.66点）</a:t>
             </a:r>
             <a:endParaRPr lang="en-US" sz="800" dirty="0"/>
           </a:p>
@@ -38865,23 +37989,6 @@
                 <a:ea typeface="Arial" pitchFamily="34" charset="-122"/>
                 <a:cs typeface="Arial" pitchFamily="34" charset="-120"/>
               </a:rPr>
-              <a:t>コンフォートホテル成田（8.59点）</a:t>
-            </a:r>
-            <a:endParaRPr lang="en-US" sz="800" dirty="0"/>
-          </a:p>
-          <a:p>
-            <a:pPr indent="0" marL="0">
-              <a:buNone/>
-            </a:pPr>
-            <a:r>
-              <a:rPr lang="en-US" sz="800" dirty="0">
-                <a:solidFill>
-                  <a:srgbClr val="333333"/>
-                </a:solidFill>
-                <a:latin typeface="Arial" pitchFamily="34" charset="0"/>
-                <a:ea typeface="Arial" pitchFamily="34" charset="-122"/>
-                <a:cs typeface="Arial" pitchFamily="34" charset="-120"/>
-              </a:rPr>
               <a:t>変なホテル東京羽田（8.27点）</a:t>
             </a:r>
             <a:endParaRPr lang="en-US" sz="800" dirty="0"/>
@@ -38916,7 +38023,7 @@
                 <a:ea typeface="Arial" pitchFamily="34" charset="-122"/>
                 <a:cs typeface="Arial" pitchFamily="34" charset="-120"/>
               </a:rPr>
-              <a:t>第一イン池袋（9.06点）</a:t>
+              <a:t>第一イン池袋（9.08点）</a:t>
             </a:r>
             <a:endParaRPr lang="en-US" sz="800" dirty="0"/>
           </a:p>
@@ -38933,7 +38040,7 @@
                 <a:ea typeface="Arial" pitchFamily="34" charset="-122"/>
                 <a:cs typeface="Arial" pitchFamily="34" charset="-120"/>
               </a:rPr>
-              <a:t>コンフォートホテルERA東京東神田（8.91点）</a:t>
+              <a:t>コンフォートホテルERA東京東神田（8.94点）</a:t>
             </a:r>
             <a:endParaRPr lang="en-US" sz="800" dirty="0"/>
           </a:p>
@@ -39075,7 +38182,7 @@
                 <a:ea typeface="Arial" pitchFamily="34" charset="-122"/>
                 <a:cs typeface="Arial" pitchFamily="34" charset="-120"/>
               </a:rPr>
-              <a:t>コンフォートスイーツ東京ベイ（9.18点）</a:t>
+              <a:t>コンフォートスイーツ東京ベイ（9.17点）</a:t>
             </a:r>
             <a:endParaRPr lang="en-US" sz="800" dirty="0"/>
           </a:p>
@@ -39296,7 +38403,7 @@
                 <a:ea typeface="Arial" pitchFamily="34" charset="-122"/>
                 <a:cs typeface="Arial" pitchFamily="34" charset="-120"/>
               </a:rPr>
-              <a:t>優先度 #1 | 現状 7.89点 → 目標 8.5点</a:t>
+              <a:t>優先度 #1 | 現状 7.86点 → 目標 8.5点</a:t>
             </a:r>
             <a:endParaRPr lang="en-US" sz="1000" dirty="0"/>
           </a:p>
@@ -39421,7 +38528,7 @@
                 <a:ea typeface="Arial" pitchFamily="34" charset="-122"/>
                 <a:cs typeface="Arial" pitchFamily="34" charset="-120"/>
               </a:rPr>
-              <a:t>7.89</a:t>
+              <a:t>7.86</a:t>
             </a:r>
             <a:endParaRPr lang="en-US" sz="2800" dirty="0"/>
           </a:p>
@@ -39668,7 +38775,7 @@
                 <a:ea typeface="Arial" pitchFamily="34" charset="-122"/>
                 <a:cs typeface="Arial" pitchFamily="34" charset="-120"/>
               </a:rPr>
-              <a:t>臭気・異臭: 6件</a:t>
+              <a:t>臭気・異臭: 7件</a:t>
             </a:r>
             <a:endParaRPr lang="en-US" sz="800" dirty="0"/>
           </a:p>
@@ -40502,7 +39609,7 @@
                 <a:ea typeface="Arial" pitchFamily="34" charset="-122"/>
                 <a:cs typeface="Arial" pitchFamily="34" charset="-120"/>
               </a:rPr>
-              <a:t>優先度 #2 | 現状 7.03点 → 目標 8点</a:t>
+              <a:t>優先度 #2 | 現状 7.07点 → 目標 8点</a:t>
             </a:r>
             <a:endParaRPr lang="en-US" sz="1000" dirty="0"/>
           </a:p>
@@ -40627,7 +39734,7 @@
                 <a:ea typeface="Arial" pitchFamily="34" charset="-122"/>
                 <a:cs typeface="Arial" pitchFamily="34" charset="-120"/>
               </a:rPr>
-              <a:t>7.03</a:t>
+              <a:t>7.07</a:t>
             </a:r>
             <a:endParaRPr lang="en-US" sz="2800" dirty="0"/>
           </a:p>
@@ -41708,7 +40815,7 @@
                 <a:ea typeface="Arial" pitchFamily="34" charset="-122"/>
                 <a:cs typeface="Arial" pitchFamily="34" charset="-120"/>
               </a:rPr>
-              <a:t>優先度 #3 | 現状 7.34点 → 目標 8点</a:t>
+              <a:t>優先度 #3 | 現状 7.35点 → 目標 8点</a:t>
             </a:r>
             <a:endParaRPr lang="en-US" sz="1000" dirty="0"/>
           </a:p>
@@ -41833,7 +40940,7 @@
                 <a:ea typeface="Arial" pitchFamily="34" charset="-122"/>
                 <a:cs typeface="Arial" pitchFamily="34" charset="-120"/>
               </a:rPr>
-              <a:t>7.34</a:t>
+              <a:t>7.35</a:t>
             </a:r>
             <a:endParaRPr lang="en-US" sz="2800" dirty="0"/>
           </a:p>

--- a/納品レポート/PRIMECHANGE戦略レポート/PRIMECHANGE_清掃戦略レポート.pptx
+++ b/納品レポート/PRIMECHANGE戦略レポート/PRIMECHANGE_清掃戦略レポート.pptx
@@ -24,9 +24,10 @@
     <p:sldId id="272" r:id="rId18"/>
     <p:sldId id="273" r:id="rId19"/>
     <p:sldId id="274" r:id="rId20"/>
+    <p:sldId id="275" r:id="rId21"/>
   </p:sldIdLst>
   <p:notesMasterIdLst>
-    <p:notesMasterId r:id="rId21"/>
+    <p:notesMasterId r:id="rId22"/>
   </p:notesMasterIdLst>
   <p:sldSz cx="9144000" cy="5143500"/>
   <p:notesSz cx="5143500" cy="9144000"/>
@@ -1530,6 +1531,94 @@
 </p:notes>
 </file>
 
+<file path=ppt/notesSlides/notesSlide20.xml><?xml version="1.0" encoding="utf-8"?>
+<p:notes xmlns:a="http://schemas.openxmlformats.org/drawingml/2006/main" xmlns:r="http://schemas.openxmlformats.org/officeDocument/2006/relationships" xmlns:p="http://schemas.openxmlformats.org/presentationml/2006/main">
+  <p:cSld>
+    <p:spTree>
+      <p:nvGrpSpPr>
+        <p:cNvPr id="1" name=""/>
+        <p:cNvGrpSpPr/>
+        <p:nvPr/>
+      </p:nvGrpSpPr>
+      <p:grpSpPr>
+        <a:xfrm>
+          <a:off x="0" y="0"/>
+          <a:ext cx="0" cy="0"/>
+          <a:chOff x="0" y="0"/>
+          <a:chExt cx="0" cy="0"/>
+        </a:xfrm>
+      </p:grpSpPr>
+      <p:sp>
+        <p:nvSpPr>
+          <p:cNvPr id="2" name="Slide Image Placeholder 1"/>
+          <p:cNvSpPr>
+            <a:spLocks noGrp="1" noRot="1" noChangeAspect="1"/>
+          </p:cNvSpPr>
+          <p:nvPr>
+            <p:ph type="sldImg"/>
+          </p:nvPr>
+        </p:nvSpPr>
+        <p:spPr/>
+      </p:sp>
+      <p:sp>
+        <p:nvSpPr>
+          <p:cNvPr id="3" name="Notes Placeholder 2"/>
+          <p:cNvSpPr>
+            <a:spLocks noGrp="1"/>
+          </p:cNvSpPr>
+          <p:nvPr>
+            <p:ph type="body" idx="1"/>
+          </p:nvPr>
+        </p:nvSpPr>
+        <p:spPr/>
+        <p:txBody>
+          <a:bodyPr/>
+          <a:lstStyle/>
+          <a:p>
+            <a:r>
+              <a:rPr lang="en-US" dirty="0"/>
+              <a:t/>
+            </a:r>
+            <a:endParaRPr lang="en-US" dirty="0"/>
+          </a:p>
+        </p:txBody>
+      </p:sp>
+      <p:sp>
+        <p:nvSpPr>
+          <p:cNvPr id="4" name="Slide Number Placeholder 3"/>
+          <p:cNvSpPr>
+            <a:spLocks noGrp="1"/>
+          </p:cNvSpPr>
+          <p:nvPr>
+            <p:ph type="sldNum" sz="quarter" idx="10"/>
+          </p:nvPr>
+        </p:nvSpPr>
+        <p:spPr/>
+        <p:txBody>
+          <a:bodyPr/>
+          <a:lstStyle/>
+          <a:p>
+            <a:fld id="{F7021451-1387-4CA6-816F-3879F97B5CBC}" type="slidenum">
+              <a:rPr lang="en-US"/>
+              <a:t>20</a:t>
+            </a:fld>
+            <a:endParaRPr lang="en-US"/>
+          </a:p>
+        </p:txBody>
+      </p:sp>
+    </p:spTree>
+    <p:extLst>
+      <p:ext uri="{BB962C8B-B14F-4D97-AF65-F5344CB8AC3E}">
+        <p14:creationId xmlns:p14="http://schemas.microsoft.com/office/powerpoint/2010/main" val="1024086991"/>
+      </p:ext>
+    </p:extLst>
+  </p:cSld>
+  <p:clrMapOvr>
+    <a:masterClrMapping/>
+  </p:clrMapOvr>
+</p:notes>
+</file>
+
 <file path=ppt/notesSlides/notesSlide3.xml><?xml version="1.0" encoding="utf-8"?>
 <p:notes xmlns:a="http://schemas.openxmlformats.org/drawingml/2006/main" xmlns:r="http://schemas.openxmlformats.org/officeDocument/2006/relationships" xmlns:p="http://schemas.openxmlformats.org/presentationml/2006/main">
   <p:cSld>
@@ -2699,7 +2788,7 @@
                 <a:ea typeface="Arial" pitchFamily="34" charset="-122"/>
                 <a:cs typeface="Arial" pitchFamily="34" charset="-120"/>
               </a:rPr>
-              <a:t>対象：19ホテル | レビュー：2221件</a:t>
+              <a:t>対象：19ホテル | レビュー：2260件</a:t>
             </a:r>
             <a:endParaRPr lang="en-US" sz="1100" dirty="0"/>
           </a:p>
@@ -4067,6 +4156,1195 @@
                 <a:ea typeface="Arial" pitchFamily="34" charset="-122"/>
                 <a:cs typeface="Arial" pitchFamily="34" charset="-120"/>
               </a:rPr>
+              <a:t>【URGENT】コンフォートホテル横浜関内</a:t>
+            </a:r>
+            <a:endParaRPr lang="en-US" sz="2000" dirty="0"/>
+          </a:p>
+        </p:txBody>
+      </p:sp>
+      <p:sp>
+        <p:nvSpPr>
+          <p:cNvPr id="4" name="Text 2"/>
+          <p:cNvSpPr/>
+          <p:nvPr/>
+        </p:nvSpPr>
+        <p:spPr>
+          <a:xfrm>
+            <a:off x="457200" y="320040"/>
+            <a:ext cx="8229600" cy="201168"/>
+          </a:xfrm>
+          <a:prstGeom prst="rect">
+            <a:avLst/>
+          </a:prstGeom>
+          <a:noFill/>
+          <a:ln/>
+        </p:spPr>
+        <p:txBody>
+          <a:bodyPr wrap="square" lIns="0" tIns="0" rIns="0" bIns="0" rtlCol="0" anchor="ctr"/>
+          <a:lstStyle/>
+          <a:p>
+            <a:pPr indent="0" marL="0">
+              <a:buNone/>
+            </a:pPr>
+            <a:r>
+              <a:rPr lang="en-US" sz="1000" dirty="0">
+                <a:solidFill>
+                  <a:srgbClr val="5A9BE6"/>
+                </a:solidFill>
+                <a:latin typeface="Arial" pitchFamily="34" charset="0"/>
+                <a:ea typeface="Arial" pitchFamily="34" charset="-122"/>
+                <a:cs typeface="Arial" pitchFamily="34" charset="-120"/>
+              </a:rPr>
+              <a:t>優先度 #5 | 現状 7.46点 → 目標 8点</a:t>
+            </a:r>
+            <a:endParaRPr lang="en-US" sz="1000" dirty="0"/>
+          </a:p>
+        </p:txBody>
+      </p:sp>
+      <p:sp>
+        <p:nvSpPr>
+          <p:cNvPr id="5" name="Shape 3"/>
+          <p:cNvSpPr/>
+          <p:nvPr/>
+        </p:nvSpPr>
+        <p:spPr>
+          <a:xfrm>
+            <a:off x="274320" y="731520"/>
+            <a:ext cx="1828800" cy="731520"/>
+          </a:xfrm>
+          <a:prstGeom prst="rect">
+            <a:avLst/>
+          </a:prstGeom>
+          <a:solidFill>
+            <a:srgbClr val="FFEBEE"/>
+          </a:solidFill>
+          <a:ln/>
+          <a:effectLst>
+            <a:outerShdw sx="100000" sy="100000" kx="0" ky="0" algn="bl" rotWithShape="0" blurRad="50800" dist="25400" dir="8100000">
+              <a:srgbClr val="000000">
+                <a:alpha val="10000"/>
+              </a:srgbClr>
+            </a:outerShdw>
+          </a:effectLst>
+        </p:spPr>
+      </p:sp>
+      <p:sp>
+        <p:nvSpPr>
+          <p:cNvPr id="6" name="Shape 4"/>
+          <p:cNvSpPr/>
+          <p:nvPr/>
+        </p:nvSpPr>
+        <p:spPr>
+          <a:xfrm>
+            <a:off x="274320" y="731520"/>
+            <a:ext cx="1828800" cy="36576"/>
+          </a:xfrm>
+          <a:prstGeom prst="rect">
+            <a:avLst/>
+          </a:prstGeom>
+          <a:solidFill>
+            <a:srgbClr val="E74C3C"/>
+          </a:solidFill>
+          <a:ln/>
+        </p:spPr>
+      </p:sp>
+      <p:sp>
+        <p:nvSpPr>
+          <p:cNvPr id="7" name="Text 5"/>
+          <p:cNvSpPr/>
+          <p:nvPr/>
+        </p:nvSpPr>
+        <p:spPr>
+          <a:xfrm>
+            <a:off x="274320" y="841248"/>
+            <a:ext cx="1828800" cy="201168"/>
+          </a:xfrm>
+          <a:prstGeom prst="rect">
+            <a:avLst/>
+          </a:prstGeom>
+          <a:noFill/>
+          <a:ln/>
+        </p:spPr>
+        <p:txBody>
+          <a:bodyPr wrap="square" lIns="0" tIns="0" rIns="0" bIns="0" rtlCol="0" anchor="ctr"/>
+          <a:lstStyle/>
+          <a:p>
+            <a:pPr algn="ctr" indent="0" marL="0">
+              <a:buNone/>
+            </a:pPr>
+            <a:r>
+              <a:rPr lang="en-US" sz="900" dirty="0">
+                <a:solidFill>
+                  <a:srgbClr val="666666"/>
+                </a:solidFill>
+                <a:latin typeface="Arial" pitchFamily="34" charset="0"/>
+                <a:ea typeface="Arial" pitchFamily="34" charset="-122"/>
+                <a:cs typeface="Arial" pitchFamily="34" charset="-120"/>
+              </a:rPr>
+              <a:t>現状スコア</a:t>
+            </a:r>
+            <a:endParaRPr lang="en-US" sz="900" dirty="0"/>
+          </a:p>
+        </p:txBody>
+      </p:sp>
+      <p:sp>
+        <p:nvSpPr>
+          <p:cNvPr id="8" name="Text 6"/>
+          <p:cNvSpPr/>
+          <p:nvPr/>
+        </p:nvSpPr>
+        <p:spPr>
+          <a:xfrm>
+            <a:off x="274320" y="1024128"/>
+            <a:ext cx="1828800" cy="411480"/>
+          </a:xfrm>
+          <a:prstGeom prst="rect">
+            <a:avLst/>
+          </a:prstGeom>
+          <a:noFill/>
+          <a:ln/>
+        </p:spPr>
+        <p:txBody>
+          <a:bodyPr wrap="square" lIns="0" tIns="0" rIns="0" bIns="0" rtlCol="0" anchor="ctr"/>
+          <a:lstStyle/>
+          <a:p>
+            <a:pPr algn="ctr" indent="0" marL="0">
+              <a:buNone/>
+            </a:pPr>
+            <a:r>
+              <a:rPr lang="en-US" sz="2800" b="1" dirty="0">
+                <a:solidFill>
+                  <a:srgbClr val="E74C3C"/>
+                </a:solidFill>
+                <a:latin typeface="Arial" pitchFamily="34" charset="0"/>
+                <a:ea typeface="Arial" pitchFamily="34" charset="-122"/>
+                <a:cs typeface="Arial" pitchFamily="34" charset="-120"/>
+              </a:rPr>
+              <a:t>7.46</a:t>
+            </a:r>
+            <a:endParaRPr lang="en-US" sz="2800" dirty="0"/>
+          </a:p>
+        </p:txBody>
+      </p:sp>
+      <p:sp>
+        <p:nvSpPr>
+          <p:cNvPr id="9" name="Shape 7"/>
+          <p:cNvSpPr/>
+          <p:nvPr/>
+        </p:nvSpPr>
+        <p:spPr>
+          <a:xfrm>
+            <a:off x="2286000" y="731520"/>
+            <a:ext cx="1828800" cy="731520"/>
+          </a:xfrm>
+          <a:prstGeom prst="rect">
+            <a:avLst/>
+          </a:prstGeom>
+          <a:solidFill>
+            <a:srgbClr val="E8F5E9"/>
+          </a:solidFill>
+          <a:ln/>
+          <a:effectLst>
+            <a:outerShdw sx="100000" sy="100000" kx="0" ky="0" algn="bl" rotWithShape="0" blurRad="50800" dist="25400" dir="8100000">
+              <a:srgbClr val="000000">
+                <a:alpha val="10000"/>
+              </a:srgbClr>
+            </a:outerShdw>
+          </a:effectLst>
+        </p:spPr>
+      </p:sp>
+      <p:sp>
+        <p:nvSpPr>
+          <p:cNvPr id="10" name="Shape 8"/>
+          <p:cNvSpPr/>
+          <p:nvPr/>
+        </p:nvSpPr>
+        <p:spPr>
+          <a:xfrm>
+            <a:off x="2286000" y="731520"/>
+            <a:ext cx="1828800" cy="36576"/>
+          </a:xfrm>
+          <a:prstGeom prst="rect">
+            <a:avLst/>
+          </a:prstGeom>
+          <a:solidFill>
+            <a:srgbClr val="27AE60"/>
+          </a:solidFill>
+          <a:ln/>
+        </p:spPr>
+      </p:sp>
+      <p:sp>
+        <p:nvSpPr>
+          <p:cNvPr id="11" name="Text 9"/>
+          <p:cNvSpPr/>
+          <p:nvPr/>
+        </p:nvSpPr>
+        <p:spPr>
+          <a:xfrm>
+            <a:off x="2286000" y="841248"/>
+            <a:ext cx="1828800" cy="201168"/>
+          </a:xfrm>
+          <a:prstGeom prst="rect">
+            <a:avLst/>
+          </a:prstGeom>
+          <a:noFill/>
+          <a:ln/>
+        </p:spPr>
+        <p:txBody>
+          <a:bodyPr wrap="square" lIns="0" tIns="0" rIns="0" bIns="0" rtlCol="0" anchor="ctr"/>
+          <a:lstStyle/>
+          <a:p>
+            <a:pPr algn="ctr" indent="0" marL="0">
+              <a:buNone/>
+            </a:pPr>
+            <a:r>
+              <a:rPr lang="en-US" sz="900" dirty="0">
+                <a:solidFill>
+                  <a:srgbClr val="666666"/>
+                </a:solidFill>
+                <a:latin typeface="Arial" pitchFamily="34" charset="0"/>
+                <a:ea typeface="Arial" pitchFamily="34" charset="-122"/>
+                <a:cs typeface="Arial" pitchFamily="34" charset="-120"/>
+              </a:rPr>
+              <a:t>目標スコア</a:t>
+            </a:r>
+            <a:endParaRPr lang="en-US" sz="900" dirty="0"/>
+          </a:p>
+        </p:txBody>
+      </p:sp>
+      <p:sp>
+        <p:nvSpPr>
+          <p:cNvPr id="12" name="Text 10"/>
+          <p:cNvSpPr/>
+          <p:nvPr/>
+        </p:nvSpPr>
+        <p:spPr>
+          <a:xfrm>
+            <a:off x="2286000" y="1024128"/>
+            <a:ext cx="1828800" cy="411480"/>
+          </a:xfrm>
+          <a:prstGeom prst="rect">
+            <a:avLst/>
+          </a:prstGeom>
+          <a:noFill/>
+          <a:ln/>
+        </p:spPr>
+        <p:txBody>
+          <a:bodyPr wrap="square" lIns="0" tIns="0" rIns="0" bIns="0" rtlCol="0" anchor="ctr"/>
+          <a:lstStyle/>
+          <a:p>
+            <a:pPr algn="ctr" indent="0" marL="0">
+              <a:buNone/>
+            </a:pPr>
+            <a:r>
+              <a:rPr lang="en-US" sz="2800" b="1" dirty="0">
+                <a:solidFill>
+                  <a:srgbClr val="27AE60"/>
+                </a:solidFill>
+                <a:latin typeface="Arial" pitchFamily="34" charset="0"/>
+                <a:ea typeface="Arial" pitchFamily="34" charset="-122"/>
+                <a:cs typeface="Arial" pitchFamily="34" charset="-120"/>
+              </a:rPr>
+              <a:t>8</a:t>
+            </a:r>
+            <a:endParaRPr lang="en-US" sz="2800" dirty="0"/>
+          </a:p>
+        </p:txBody>
+      </p:sp>
+      <p:sp>
+        <p:nvSpPr>
+          <p:cNvPr id="13" name="Shape 11"/>
+          <p:cNvSpPr/>
+          <p:nvPr/>
+        </p:nvSpPr>
+        <p:spPr>
+          <a:xfrm>
+            <a:off x="4389120" y="731520"/>
+            <a:ext cx="4389120" cy="731520"/>
+          </a:xfrm>
+          <a:prstGeom prst="rect">
+            <a:avLst/>
+          </a:prstGeom>
+          <a:solidFill>
+            <a:srgbClr val="F5F7FA"/>
+          </a:solidFill>
+          <a:ln/>
+          <a:effectLst>
+            <a:outerShdw sx="100000" sy="100000" kx="0" ky="0" algn="bl" rotWithShape="0" blurRad="50800" dist="25400" dir="8100000">
+              <a:srgbClr val="000000">
+                <a:alpha val="10000"/>
+              </a:srgbClr>
+            </a:outerShdw>
+          </a:effectLst>
+        </p:spPr>
+      </p:sp>
+      <p:sp>
+        <p:nvSpPr>
+          <p:cNvPr id="14" name="Text 12"/>
+          <p:cNvSpPr/>
+          <p:nvPr/>
+        </p:nvSpPr>
+        <p:spPr>
+          <a:xfrm>
+            <a:off x="4480560" y="749808"/>
+            <a:ext cx="1828800" cy="182880"/>
+          </a:xfrm>
+          <a:prstGeom prst="rect">
+            <a:avLst/>
+          </a:prstGeom>
+          <a:noFill/>
+          <a:ln/>
+        </p:spPr>
+        <p:txBody>
+          <a:bodyPr wrap="square" lIns="0" tIns="0" rIns="0" bIns="0" rtlCol="0" anchor="ctr"/>
+          <a:lstStyle/>
+          <a:p>
+            <a:pPr indent="0" marL="0">
+              <a:buNone/>
+            </a:pPr>
+            <a:r>
+              <a:rPr lang="en-US" sz="900" b="1" dirty="0">
+                <a:solidFill>
+                  <a:srgbClr val="666666"/>
+                </a:solidFill>
+                <a:latin typeface="Arial" pitchFamily="34" charset="0"/>
+                <a:ea typeface="Arial" pitchFamily="34" charset="-122"/>
+                <a:cs typeface="Arial" pitchFamily="34" charset="-120"/>
+              </a:rPr>
+              <a:t>主要課題</a:t>
+            </a:r>
+            <a:endParaRPr lang="en-US" sz="900" dirty="0"/>
+          </a:p>
+        </p:txBody>
+      </p:sp>
+      <p:sp>
+        <p:nvSpPr>
+          <p:cNvPr id="15" name="Text 13"/>
+          <p:cNvSpPr/>
+          <p:nvPr/>
+        </p:nvSpPr>
+        <p:spPr>
+          <a:xfrm>
+            <a:off x="4480560" y="914400"/>
+            <a:ext cx="4206240" cy="502920"/>
+          </a:xfrm>
+          <a:prstGeom prst="rect">
+            <a:avLst/>
+          </a:prstGeom>
+          <a:noFill/>
+          <a:ln/>
+        </p:spPr>
+        <p:txBody>
+          <a:bodyPr wrap="square" lIns="0" tIns="0" rIns="0" bIns="0" rtlCol="0" anchor="ctr"/>
+          <a:lstStyle/>
+          <a:p>
+            <a:pPr indent="0" marL="0">
+              <a:buNone/>
+            </a:pPr>
+            <a:r>
+              <a:rPr lang="en-US" sz="800" dirty="0">
+                <a:solidFill>
+                  <a:srgbClr val="333333"/>
+                </a:solidFill>
+                <a:latin typeface="Arial" pitchFamily="34" charset="0"/>
+                <a:ea typeface="Arial" pitchFamily="34" charset="-122"/>
+                <a:cs typeface="Arial" pitchFamily="34" charset="-120"/>
+              </a:rPr>
+              <a:t>シミ・汚れ跡: 6件</a:t>
+            </a:r>
+            <a:endParaRPr lang="en-US" sz="800" dirty="0"/>
+          </a:p>
+          <a:p>
+            <a:pPr indent="0" marL="0">
+              <a:buNone/>
+            </a:pPr>
+            <a:r>
+              <a:rPr lang="en-US" sz="800" dirty="0">
+                <a:solidFill>
+                  <a:srgbClr val="333333"/>
+                </a:solidFill>
+                <a:latin typeface="Arial" pitchFamily="34" charset="0"/>
+                <a:ea typeface="Arial" pitchFamily="34" charset="-122"/>
+                <a:cs typeface="Arial" pitchFamily="34" charset="-120"/>
+              </a:rPr>
+              <a:t>清掃品質全般: 5件</a:t>
+            </a:r>
+            <a:endParaRPr lang="en-US" sz="800" dirty="0"/>
+          </a:p>
+          <a:p>
+            <a:pPr indent="0" marL="0">
+              <a:buNone/>
+            </a:pPr>
+            <a:r>
+              <a:rPr lang="en-US" sz="800" dirty="0">
+                <a:solidFill>
+                  <a:srgbClr val="333333"/>
+                </a:solidFill>
+                <a:latin typeface="Arial" pitchFamily="34" charset="0"/>
+                <a:ea typeface="Arial" pitchFamily="34" charset="-122"/>
+                <a:cs typeface="Arial" pitchFamily="34" charset="-120"/>
+              </a:rPr>
+              <a:t>臭気・異臭: 1件</a:t>
+            </a:r>
+            <a:endParaRPr lang="en-US" sz="800" dirty="0"/>
+          </a:p>
+          <a:p>
+            <a:pPr indent="0" marL="0">
+              <a:buNone/>
+            </a:pPr>
+            <a:r>
+              <a:rPr lang="en-US" sz="800" dirty="0">
+                <a:solidFill>
+                  <a:srgbClr val="333333"/>
+                </a:solidFill>
+                <a:latin typeface="Arial" pitchFamily="34" charset="0"/>
+                <a:ea typeface="Arial" pitchFamily="34" charset="-122"/>
+                <a:cs typeface="Arial" pitchFamily="34" charset="-120"/>
+              </a:rPr>
+              <a:t>毛髪・髪の毛: 1件</a:t>
+            </a:r>
+            <a:endParaRPr lang="en-US" sz="800" dirty="0"/>
+          </a:p>
+        </p:txBody>
+      </p:sp>
+      <p:sp>
+        <p:nvSpPr>
+          <p:cNvPr id="16" name="Shape 14"/>
+          <p:cNvSpPr/>
+          <p:nvPr/>
+        </p:nvSpPr>
+        <p:spPr>
+          <a:xfrm>
+            <a:off x="274320" y="1691640"/>
+            <a:ext cx="2743200" cy="2697480"/>
+          </a:xfrm>
+          <a:prstGeom prst="rect">
+            <a:avLst/>
+          </a:prstGeom>
+          <a:solidFill>
+            <a:srgbClr val="FFEBEE"/>
+          </a:solidFill>
+          <a:ln/>
+          <a:effectLst>
+            <a:outerShdw sx="100000" sy="100000" kx="0" ky="0" algn="bl" rotWithShape="0" blurRad="50800" dist="25400" dir="8100000">
+              <a:srgbClr val="000000">
+                <a:alpha val="10000"/>
+              </a:srgbClr>
+            </a:outerShdw>
+          </a:effectLst>
+        </p:spPr>
+      </p:sp>
+      <p:sp>
+        <p:nvSpPr>
+          <p:cNvPr id="17" name="Shape 15"/>
+          <p:cNvSpPr/>
+          <p:nvPr/>
+        </p:nvSpPr>
+        <p:spPr>
+          <a:xfrm>
+            <a:off x="274320" y="1691640"/>
+            <a:ext cx="2743200" cy="36576"/>
+          </a:xfrm>
+          <a:prstGeom prst="rect">
+            <a:avLst/>
+          </a:prstGeom>
+          <a:solidFill>
+            <a:srgbClr val="E74C3C"/>
+          </a:solidFill>
+          <a:ln/>
+        </p:spPr>
+      </p:sp>
+      <p:sp>
+        <p:nvSpPr>
+          <p:cNvPr id="18" name="Text 16"/>
+          <p:cNvSpPr/>
+          <p:nvPr/>
+        </p:nvSpPr>
+        <p:spPr>
+          <a:xfrm>
+            <a:off x="365760" y="1764792"/>
+            <a:ext cx="2560320" cy="228600"/>
+          </a:xfrm>
+          <a:prstGeom prst="rect">
+            <a:avLst/>
+          </a:prstGeom>
+          <a:noFill/>
+          <a:ln/>
+        </p:spPr>
+        <p:txBody>
+          <a:bodyPr wrap="square" lIns="0" tIns="0" rIns="0" bIns="0" rtlCol="0" anchor="ctr"/>
+          <a:lstStyle/>
+          <a:p>
+            <a:pPr indent="0" marL="0">
+              <a:buNone/>
+            </a:pPr>
+            <a:r>
+              <a:rPr lang="en-US" sz="900" b="1" dirty="0">
+                <a:solidFill>
+                  <a:srgbClr val="E74C3C"/>
+                </a:solidFill>
+                <a:latin typeface="Arial" pitchFamily="34" charset="0"/>
+                <a:ea typeface="Arial" pitchFamily="34" charset="-122"/>
+                <a:cs typeface="Arial" pitchFamily="34" charset="-120"/>
+              </a:rPr>
+              <a:t>Phase 1: 即時対応（1-2週間）</a:t>
+            </a:r>
+            <a:endParaRPr lang="en-US" sz="900" dirty="0"/>
+          </a:p>
+        </p:txBody>
+      </p:sp>
+      <p:sp>
+        <p:nvSpPr>
+          <p:cNvPr id="19" name="Text 17"/>
+          <p:cNvSpPr/>
+          <p:nvPr/>
+        </p:nvSpPr>
+        <p:spPr>
+          <a:xfrm>
+            <a:off x="365760" y="2039112"/>
+            <a:ext cx="2560320" cy="2286000"/>
+          </a:xfrm>
+          <a:prstGeom prst="rect">
+            <a:avLst/>
+          </a:prstGeom>
+          <a:noFill/>
+          <a:ln/>
+        </p:spPr>
+        <p:txBody>
+          <a:bodyPr wrap="square" lIns="0" tIns="0" rIns="0" bIns="0" rtlCol="0" anchor="t"/>
+          <a:lstStyle/>
+          <a:p>
+            <a:pPr indent="0" marL="0">
+              <a:buNone/>
+            </a:pPr>
+            <a:r>
+              <a:rPr lang="en-US" sz="700" dirty="0">
+                <a:solidFill>
+                  <a:srgbClr val="333333"/>
+                </a:solidFill>
+                <a:latin typeface="Arial" pitchFamily="34" charset="0"/>
+                <a:ea typeface="Arial" pitchFamily="34" charset="-122"/>
+                <a:cs typeface="Arial" pitchFamily="34" charset="-120"/>
+              </a:rPr>
+              <a:t>- シミ箇所の特定と専用クリーナーによる除去</a:t>
+            </a:r>
+            <a:endParaRPr lang="en-US" sz="700" dirty="0"/>
+          </a:p>
+          <a:p>
+            <a:pPr indent="0" marL="0">
+              <a:buNone/>
+            </a:pPr>
+            <a:r>
+              <a:rPr lang="en-US" sz="700" dirty="0">
+                <a:solidFill>
+                  <a:srgbClr val="333333"/>
+                </a:solidFill>
+                <a:latin typeface="Arial" pitchFamily="34" charset="0"/>
+                <a:ea typeface="Arial" pitchFamily="34" charset="-122"/>
+                <a:cs typeface="Arial" pitchFamily="34" charset="-120"/>
+              </a:rPr>
+              <a:t>- 清掃品質基準の明確化と全スタッフへの共有</a:t>
+            </a:r>
+            <a:endParaRPr lang="en-US" sz="700" dirty="0"/>
+          </a:p>
+          <a:p>
+            <a:pPr indent="0" marL="0">
+              <a:buNone/>
+            </a:pPr>
+            <a:r>
+              <a:rPr lang="en-US" sz="700" dirty="0">
+                <a:solidFill>
+                  <a:srgbClr val="333333"/>
+                </a:solidFill>
+                <a:latin typeface="Arial" pitchFamily="34" charset="0"/>
+                <a:ea typeface="Arial" pitchFamily="34" charset="-122"/>
+                <a:cs typeface="Arial" pitchFamily="34" charset="-120"/>
+              </a:rPr>
+              <a:t>- 重点箇所（水回り・ベッド周り）の清掃手順見直し</a:t>
+            </a:r>
+            <a:endParaRPr lang="en-US" sz="700" dirty="0"/>
+          </a:p>
+          <a:p>
+            <a:pPr indent="0" marL="0">
+              <a:buNone/>
+            </a:pPr>
+            <a:r>
+              <a:rPr lang="en-US" sz="700" dirty="0">
+                <a:solidFill>
+                  <a:srgbClr val="333333"/>
+                </a:solidFill>
+                <a:latin typeface="Arial" pitchFamily="34" charset="0"/>
+                <a:ea typeface="Arial" pitchFamily="34" charset="-122"/>
+                <a:cs typeface="Arial" pitchFamily="34" charset="-120"/>
+              </a:rPr>
+              <a:t>- 臭気発生源の特定と即時対処（排水トラップ、換気扇）</a:t>
+            </a:r>
+            <a:endParaRPr lang="en-US" sz="700" dirty="0"/>
+          </a:p>
+          <a:p>
+            <a:pPr indent="0" marL="0">
+              <a:buNone/>
+            </a:pPr>
+            <a:r>
+              <a:rPr lang="en-US" sz="700" dirty="0">
+                <a:solidFill>
+                  <a:srgbClr val="333333"/>
+                </a:solidFill>
+                <a:latin typeface="Arial" pitchFamily="34" charset="0"/>
+                <a:ea typeface="Arial" pitchFamily="34" charset="-122"/>
+                <a:cs typeface="Arial" pitchFamily="34" charset="-120"/>
+              </a:rPr>
+              <a:t>- 消臭・脱臭処理の実施</a:t>
+            </a:r>
+            <a:endParaRPr lang="en-US" sz="700" dirty="0"/>
+          </a:p>
+        </p:txBody>
+      </p:sp>
+      <p:sp>
+        <p:nvSpPr>
+          <p:cNvPr id="20" name="Shape 18"/>
+          <p:cNvSpPr/>
+          <p:nvPr/>
+        </p:nvSpPr>
+        <p:spPr>
+          <a:xfrm>
+            <a:off x="3154680" y="1691640"/>
+            <a:ext cx="2743200" cy="2697480"/>
+          </a:xfrm>
+          <a:prstGeom prst="rect">
+            <a:avLst/>
+          </a:prstGeom>
+          <a:solidFill>
+            <a:srgbClr val="FFF3E0"/>
+          </a:solidFill>
+          <a:ln/>
+          <a:effectLst>
+            <a:outerShdw sx="100000" sy="100000" kx="0" ky="0" algn="bl" rotWithShape="0" blurRad="50800" dist="25400" dir="8100000">
+              <a:srgbClr val="000000">
+                <a:alpha val="10000"/>
+              </a:srgbClr>
+            </a:outerShdw>
+          </a:effectLst>
+        </p:spPr>
+      </p:sp>
+      <p:sp>
+        <p:nvSpPr>
+          <p:cNvPr id="21" name="Shape 19"/>
+          <p:cNvSpPr/>
+          <p:nvPr/>
+        </p:nvSpPr>
+        <p:spPr>
+          <a:xfrm>
+            <a:off x="3154680" y="1691640"/>
+            <a:ext cx="2743200" cy="36576"/>
+          </a:xfrm>
+          <a:prstGeom prst="rect">
+            <a:avLst/>
+          </a:prstGeom>
+          <a:solidFill>
+            <a:srgbClr val="FF9800"/>
+          </a:solidFill>
+          <a:ln/>
+        </p:spPr>
+      </p:sp>
+      <p:sp>
+        <p:nvSpPr>
+          <p:cNvPr id="22" name="Text 20"/>
+          <p:cNvSpPr/>
+          <p:nvPr/>
+        </p:nvSpPr>
+        <p:spPr>
+          <a:xfrm>
+            <a:off x="3246120" y="1764792"/>
+            <a:ext cx="2560320" cy="228600"/>
+          </a:xfrm>
+          <a:prstGeom prst="rect">
+            <a:avLst/>
+          </a:prstGeom>
+          <a:noFill/>
+          <a:ln/>
+        </p:spPr>
+        <p:txBody>
+          <a:bodyPr wrap="square" lIns="0" tIns="0" rIns="0" bIns="0" rtlCol="0" anchor="ctr"/>
+          <a:lstStyle/>
+          <a:p>
+            <a:pPr indent="0" marL="0">
+              <a:buNone/>
+            </a:pPr>
+            <a:r>
+              <a:rPr lang="en-US" sz="900" b="1" dirty="0">
+                <a:solidFill>
+                  <a:srgbClr val="FF9800"/>
+                </a:solidFill>
+                <a:latin typeface="Arial" pitchFamily="34" charset="0"/>
+                <a:ea typeface="Arial" pitchFamily="34" charset="-122"/>
+                <a:cs typeface="Arial" pitchFamily="34" charset="-120"/>
+              </a:rPr>
+              <a:t>Phase 2: 短期施策（1-3ヶ月）</a:t>
+            </a:r>
+            <a:endParaRPr lang="en-US" sz="900" dirty="0"/>
+          </a:p>
+        </p:txBody>
+      </p:sp>
+      <p:sp>
+        <p:nvSpPr>
+          <p:cNvPr id="23" name="Text 21"/>
+          <p:cNvSpPr/>
+          <p:nvPr/>
+        </p:nvSpPr>
+        <p:spPr>
+          <a:xfrm>
+            <a:off x="3246120" y="2039112"/>
+            <a:ext cx="2560320" cy="2286000"/>
+          </a:xfrm>
+          <a:prstGeom prst="rect">
+            <a:avLst/>
+          </a:prstGeom>
+          <a:noFill/>
+          <a:ln/>
+        </p:spPr>
+        <p:txBody>
+          <a:bodyPr wrap="square" lIns="0" tIns="0" rIns="0" bIns="0" rtlCol="0" anchor="t"/>
+          <a:lstStyle/>
+          <a:p>
+            <a:pPr indent="0" marL="0">
+              <a:buNone/>
+            </a:pPr>
+            <a:r>
+              <a:rPr lang="en-US" sz="700" dirty="0">
+                <a:solidFill>
+                  <a:srgbClr val="333333"/>
+                </a:solidFill>
+                <a:latin typeface="Arial" pitchFamily="34" charset="0"/>
+                <a:ea typeface="Arial" pitchFamily="34" charset="-122"/>
+                <a:cs typeface="Arial" pitchFamily="34" charset="-120"/>
+              </a:rPr>
+              <a:t>- シミ発見時の即時報告・対処フロー構築</a:t>
+            </a:r>
+            <a:endParaRPr lang="en-US" sz="700" dirty="0"/>
+          </a:p>
+          <a:p>
+            <a:pPr indent="0" marL="0">
+              <a:buNone/>
+            </a:pPr>
+            <a:r>
+              <a:rPr lang="en-US" sz="700" dirty="0">
+                <a:solidFill>
+                  <a:srgbClr val="333333"/>
+                </a:solidFill>
+                <a:latin typeface="Arial" pitchFamily="34" charset="0"/>
+                <a:ea typeface="Arial" pitchFamily="34" charset="-122"/>
+                <a:cs typeface="Arial" pitchFamily="34" charset="-120"/>
+              </a:rPr>
+              <a:t>- 品質管理チェックリストの導入と実施</a:t>
+            </a:r>
+            <a:endParaRPr lang="en-US" sz="700" dirty="0"/>
+          </a:p>
+          <a:p>
+            <a:pPr indent="0" marL="0">
+              <a:buNone/>
+            </a:pPr>
+            <a:r>
+              <a:rPr lang="en-US" sz="700" dirty="0">
+                <a:solidFill>
+                  <a:srgbClr val="333333"/>
+                </a:solidFill>
+                <a:latin typeface="Arial" pitchFamily="34" charset="0"/>
+                <a:ea typeface="Arial" pitchFamily="34" charset="-122"/>
+                <a:cs typeface="Arial" pitchFamily="34" charset="-120"/>
+              </a:rPr>
+              <a:t>- QCインスペクション体制の構築（ランダム抜き打ち検査）</a:t>
+            </a:r>
+            <a:endParaRPr lang="en-US" sz="700" dirty="0"/>
+          </a:p>
+          <a:p>
+            <a:pPr indent="0" marL="0">
+              <a:buNone/>
+            </a:pPr>
+            <a:r>
+              <a:rPr lang="en-US" sz="700" dirty="0">
+                <a:solidFill>
+                  <a:srgbClr val="333333"/>
+                </a:solidFill>
+                <a:latin typeface="Arial" pitchFamily="34" charset="0"/>
+                <a:ea typeface="Arial" pitchFamily="34" charset="-122"/>
+                <a:cs typeface="Arial" pitchFamily="34" charset="-120"/>
+              </a:rPr>
+              <a:t>- 定期的な換気・消臭ルーティンの標準化</a:t>
+            </a:r>
+            <a:endParaRPr lang="en-US" sz="700" dirty="0"/>
+          </a:p>
+          <a:p>
+            <a:pPr indent="0" marL="0">
+              <a:buNone/>
+            </a:pPr>
+            <a:r>
+              <a:rPr lang="en-US" sz="700" dirty="0">
+                <a:solidFill>
+                  <a:srgbClr val="333333"/>
+                </a:solidFill>
+                <a:latin typeface="Arial" pitchFamily="34" charset="0"/>
+                <a:ea typeface="Arial" pitchFamily="34" charset="-122"/>
+                <a:cs typeface="Arial" pitchFamily="34" charset="-120"/>
+              </a:rPr>
+              <a:t>- エアコン・排水系の臭気源の根本対策</a:t>
+            </a:r>
+            <a:endParaRPr lang="en-US" sz="700" dirty="0"/>
+          </a:p>
+        </p:txBody>
+      </p:sp>
+      <p:sp>
+        <p:nvSpPr>
+          <p:cNvPr id="24" name="Shape 22"/>
+          <p:cNvSpPr/>
+          <p:nvPr/>
+        </p:nvSpPr>
+        <p:spPr>
+          <a:xfrm>
+            <a:off x="6035040" y="1691640"/>
+            <a:ext cx="2743200" cy="2697480"/>
+          </a:xfrm>
+          <a:prstGeom prst="rect">
+            <a:avLst/>
+          </a:prstGeom>
+          <a:solidFill>
+            <a:srgbClr val="E3F2FD"/>
+          </a:solidFill>
+          <a:ln/>
+          <a:effectLst>
+            <a:outerShdw sx="100000" sy="100000" kx="0" ky="0" algn="bl" rotWithShape="0" blurRad="50800" dist="25400" dir="8100000">
+              <a:srgbClr val="000000">
+                <a:alpha val="10000"/>
+              </a:srgbClr>
+            </a:outerShdw>
+          </a:effectLst>
+        </p:spPr>
+      </p:sp>
+      <p:sp>
+        <p:nvSpPr>
+          <p:cNvPr id="25" name="Shape 23"/>
+          <p:cNvSpPr/>
+          <p:nvPr/>
+        </p:nvSpPr>
+        <p:spPr>
+          <a:xfrm>
+            <a:off x="6035040" y="1691640"/>
+            <a:ext cx="2743200" cy="36576"/>
+          </a:xfrm>
+          <a:prstGeom prst="rect">
+            <a:avLst/>
+          </a:prstGeom>
+          <a:solidFill>
+            <a:srgbClr val="2196F3"/>
+          </a:solidFill>
+          <a:ln/>
+        </p:spPr>
+      </p:sp>
+      <p:sp>
+        <p:nvSpPr>
+          <p:cNvPr id="26" name="Text 24"/>
+          <p:cNvSpPr/>
+          <p:nvPr/>
+        </p:nvSpPr>
+        <p:spPr>
+          <a:xfrm>
+            <a:off x="6126480" y="1764792"/>
+            <a:ext cx="2560320" cy="228600"/>
+          </a:xfrm>
+          <a:prstGeom prst="rect">
+            <a:avLst/>
+          </a:prstGeom>
+          <a:noFill/>
+          <a:ln/>
+        </p:spPr>
+        <p:txBody>
+          <a:bodyPr wrap="square" lIns="0" tIns="0" rIns="0" bIns="0" rtlCol="0" anchor="ctr"/>
+          <a:lstStyle/>
+          <a:p>
+            <a:pPr indent="0" marL="0">
+              <a:buNone/>
+            </a:pPr>
+            <a:r>
+              <a:rPr lang="en-US" sz="900" b="1" dirty="0">
+                <a:solidFill>
+                  <a:srgbClr val="2196F3"/>
+                </a:solidFill>
+                <a:latin typeface="Arial" pitchFamily="34" charset="0"/>
+                <a:ea typeface="Arial" pitchFamily="34" charset="-122"/>
+                <a:cs typeface="Arial" pitchFamily="34" charset="-120"/>
+              </a:rPr>
+              <a:t>Phase 3: 中期施策（3-6ヶ月）</a:t>
+            </a:r>
+            <a:endParaRPr lang="en-US" sz="900" dirty="0"/>
+          </a:p>
+        </p:txBody>
+      </p:sp>
+      <p:sp>
+        <p:nvSpPr>
+          <p:cNvPr id="27" name="Text 25"/>
+          <p:cNvSpPr/>
+          <p:nvPr/>
+        </p:nvSpPr>
+        <p:spPr>
+          <a:xfrm>
+            <a:off x="6126480" y="2039112"/>
+            <a:ext cx="2560320" cy="2286000"/>
+          </a:xfrm>
+          <a:prstGeom prst="rect">
+            <a:avLst/>
+          </a:prstGeom>
+          <a:noFill/>
+          <a:ln/>
+        </p:spPr>
+        <p:txBody>
+          <a:bodyPr wrap="square" lIns="0" tIns="0" rIns="0" bIns="0" rtlCol="0" anchor="t"/>
+          <a:lstStyle/>
+          <a:p>
+            <a:pPr indent="0" marL="0">
+              <a:buNone/>
+            </a:pPr>
+            <a:r>
+              <a:rPr lang="en-US" sz="700" dirty="0">
+                <a:solidFill>
+                  <a:srgbClr val="333333"/>
+                </a:solidFill>
+                <a:latin typeface="Arial" pitchFamily="34" charset="0"/>
+                <a:ea typeface="Arial" pitchFamily="34" charset="-122"/>
+                <a:cs typeface="Arial" pitchFamily="34" charset="-120"/>
+              </a:rPr>
+              <a:t>- 清掃スタッフの定期研修プログラム導入</a:t>
+            </a:r>
+            <a:endParaRPr lang="en-US" sz="700" dirty="0"/>
+          </a:p>
+          <a:p>
+            <a:pPr indent="0" marL="0">
+              <a:buNone/>
+            </a:pPr>
+            <a:r>
+              <a:rPr lang="en-US" sz="700" dirty="0">
+                <a:solidFill>
+                  <a:srgbClr val="333333"/>
+                </a:solidFill>
+                <a:latin typeface="Arial" pitchFamily="34" charset="0"/>
+                <a:ea typeface="Arial" pitchFamily="34" charset="-122"/>
+                <a:cs typeface="Arial" pitchFamily="34" charset="-120"/>
+              </a:rPr>
+              <a:t>- デジタル清掃記録システムの検討</a:t>
+            </a:r>
+            <a:endParaRPr lang="en-US" sz="700" dirty="0"/>
+          </a:p>
+          <a:p>
+            <a:pPr indent="0" marL="0">
+              <a:buNone/>
+            </a:pPr>
+            <a:r>
+              <a:rPr lang="en-US" sz="700" dirty="0">
+                <a:solidFill>
+                  <a:srgbClr val="333333"/>
+                </a:solidFill>
+                <a:latin typeface="Arial" pitchFamily="34" charset="0"/>
+                <a:ea typeface="Arial" pitchFamily="34" charset="-122"/>
+                <a:cs typeface="Arial" pitchFamily="34" charset="-120"/>
+              </a:rPr>
+              <a:t>- オゾン脱臭機の導入検討</a:t>
+            </a:r>
+            <a:endParaRPr lang="en-US" sz="700" dirty="0"/>
+          </a:p>
+          <a:p>
+            <a:pPr indent="0" marL="0">
+              <a:buNone/>
+            </a:pPr>
+            <a:r>
+              <a:rPr lang="en-US" sz="700" dirty="0">
+                <a:solidFill>
+                  <a:srgbClr val="333333"/>
+                </a:solidFill>
+                <a:latin typeface="Arial" pitchFamily="34" charset="0"/>
+                <a:ea typeface="Arial" pitchFamily="34" charset="-122"/>
+                <a:cs typeface="Arial" pitchFamily="34" charset="-120"/>
+              </a:rPr>
+              <a:t>- 空気品質モニタリングの導入</a:t>
+            </a:r>
+            <a:endParaRPr lang="en-US" sz="700" dirty="0"/>
+          </a:p>
+        </p:txBody>
+      </p:sp>
+      <p:sp>
+        <p:nvSpPr>
+          <p:cNvPr id="28" name="Shape 26"/>
+          <p:cNvSpPr/>
+          <p:nvPr/>
+        </p:nvSpPr>
+        <p:spPr>
+          <a:xfrm>
+            <a:off x="0" y="4800600"/>
+            <a:ext cx="9144000" cy="342900"/>
+          </a:xfrm>
+          <a:prstGeom prst="rect">
+            <a:avLst/>
+          </a:prstGeom>
+          <a:solidFill>
+            <a:srgbClr val="1B3A5C"/>
+          </a:solidFill>
+          <a:ln/>
+        </p:spPr>
+      </p:sp>
+      <p:sp>
+        <p:nvSpPr>
+          <p:cNvPr id="29" name="Text 27"/>
+          <p:cNvSpPr/>
+          <p:nvPr/>
+        </p:nvSpPr>
+        <p:spPr>
+          <a:xfrm>
+            <a:off x="457200" y="4800600"/>
+            <a:ext cx="3657600" cy="342900"/>
+          </a:xfrm>
+          <a:prstGeom prst="rect">
+            <a:avLst/>
+          </a:prstGeom>
+          <a:noFill/>
+          <a:ln/>
+        </p:spPr>
+        <p:txBody>
+          <a:bodyPr wrap="square" rtlCol="0" anchor="ctr"/>
+          <a:lstStyle/>
+          <a:p>
+            <a:pPr indent="0" marL="0">
+              <a:buNone/>
+            </a:pPr>
+            <a:r>
+              <a:rPr lang="en-US" sz="800" dirty="0">
+                <a:solidFill>
+                  <a:srgbClr val="94A3B8"/>
+                </a:solidFill>
+                <a:latin typeface="Arial" pitchFamily="34" charset="0"/>
+                <a:ea typeface="Arial" pitchFamily="34" charset="-122"/>
+                <a:cs typeface="Arial" pitchFamily="34" charset="-120"/>
+              </a:rPr>
+              <a:t>Confidential | PRIMECHANGE</a:t>
+            </a:r>
+            <a:endParaRPr lang="en-US" sz="800" dirty="0"/>
+          </a:p>
+        </p:txBody>
+      </p:sp>
+      <p:sp>
+        <p:nvSpPr>
+          <p:cNvPr id="30" name="Text 28"/>
+          <p:cNvSpPr/>
+          <p:nvPr/>
+        </p:nvSpPr>
+        <p:spPr>
+          <a:xfrm>
+            <a:off x="8229600" y="4800600"/>
+            <a:ext cx="457200" cy="342900"/>
+          </a:xfrm>
+          <a:prstGeom prst="rect">
+            <a:avLst/>
+          </a:prstGeom>
+          <a:noFill/>
+          <a:ln/>
+        </p:spPr>
+        <p:txBody>
+          <a:bodyPr wrap="square" rtlCol="0" anchor="ctr"/>
+          <a:lstStyle/>
+          <a:p>
+            <a:pPr algn="r" indent="0" marL="0">
+              <a:buNone/>
+            </a:pPr>
+            <a:r>
+              <a:rPr lang="en-US" sz="800" dirty="0">
+                <a:solidFill>
+                  <a:srgbClr val="94A3B8"/>
+                </a:solidFill>
+                <a:latin typeface="Arial" pitchFamily="34" charset="0"/>
+                <a:ea typeface="Arial" pitchFamily="34" charset="-122"/>
+                <a:cs typeface="Arial" pitchFamily="34" charset="-120"/>
+              </a:rPr>
+              <a:t>11</a:t>
+            </a:r>
+            <a:endParaRPr lang="en-US" sz="800" dirty="0"/>
+          </a:p>
+        </p:txBody>
+      </p:sp>
+    </p:spTree>
+  </p:cSld>
+  <p:clrMapOvr>
+    <a:masterClrMapping/>
+  </p:clrMapOvr>
+</p:sld>
+</file>
+
+<file path=ppt/slides/slide12.xml><?xml version="1.0" encoding="utf-8"?>
+<p:sld xmlns:a="http://schemas.openxmlformats.org/drawingml/2006/main" xmlns:r="http://schemas.openxmlformats.org/officeDocument/2006/relationships" xmlns:p="http://schemas.openxmlformats.org/presentationml/2006/main">
+  <p:cSld name="Slide 12">
+    <p:spTree>
+      <p:nvGrpSpPr>
+        <p:cNvPr id="1" name=""/>
+        <p:cNvGrpSpPr/>
+        <p:nvPr/>
+      </p:nvGrpSpPr>
+      <p:grpSpPr>
+        <a:xfrm>
+          <a:off x="0" y="0"/>
+          <a:ext cx="0" cy="0"/>
+          <a:chOff x="0" y="0"/>
+          <a:chExt cx="0" cy="0"/>
+        </a:xfrm>
+      </p:grpSpPr>
+      <p:sp>
+        <p:nvSpPr>
+          <p:cNvPr id="2" name="Shape 0"/>
+          <p:cNvSpPr/>
+          <p:nvPr/>
+        </p:nvSpPr>
+        <p:spPr>
+          <a:xfrm>
+            <a:off x="0" y="0"/>
+            <a:ext cx="9144000" cy="548640"/>
+          </a:xfrm>
+          <a:prstGeom prst="rect">
+            <a:avLst/>
+          </a:prstGeom>
+          <a:solidFill>
+            <a:srgbClr val="1B3A5C"/>
+          </a:solidFill>
+          <a:ln/>
+        </p:spPr>
+      </p:sp>
+      <p:sp>
+        <p:nvSpPr>
+          <p:cNvPr id="3" name="Text 1"/>
+          <p:cNvSpPr/>
+          <p:nvPr/>
+        </p:nvSpPr>
+        <p:spPr>
+          <a:xfrm>
+            <a:off x="457200" y="45720"/>
+            <a:ext cx="8229600" cy="320040"/>
+          </a:xfrm>
+          <a:prstGeom prst="rect">
+            <a:avLst/>
+          </a:prstGeom>
+          <a:noFill/>
+          <a:ln/>
+        </p:spPr>
+        <p:txBody>
+          <a:bodyPr wrap="square" lIns="0" tIns="0" rIns="0" bIns="0" rtlCol="0" anchor="ctr"/>
+          <a:lstStyle/>
+          <a:p>
+            <a:pPr indent="0" marL="0">
+              <a:buNone/>
+            </a:pPr>
+            <a:r>
+              <a:rPr lang="en-US" sz="2000" b="1" dirty="0">
+                <a:solidFill>
+                  <a:srgbClr val="FFFFFF"/>
+                </a:solidFill>
+                <a:latin typeface="Arial" pitchFamily="34" charset="0"/>
+                <a:ea typeface="Arial" pitchFamily="34" charset="-122"/>
+                <a:cs typeface="Arial" pitchFamily="34" charset="-120"/>
+              </a:rPr>
               <a:t>HIGHホテル改善サマリー</a:t>
             </a:r>
             <a:endParaRPr lang="en-US" sz="2000" dirty="0"/>
@@ -4106,7 +5384,7 @@
                 <a:ea typeface="Arial" pitchFamily="34" charset="-122"/>
                 <a:cs typeface="Arial" pitchFamily="34" charset="-120"/>
               </a:rPr>
-              <a:t>対象：3ホテル</a:t>
+              <a:t>対象：2ホテル</a:t>
             </a:r>
             <a:endParaRPr lang="en-US" sz="1000" dirty="0"/>
           </a:p>
@@ -4192,7 +5470,7 @@
                 <a:ea typeface="Arial" pitchFamily="34" charset="-122"/>
                 <a:cs typeface="Arial" pitchFamily="34" charset="-120"/>
               </a:rPr>
-              <a:t>コンフォートホテル横浜関内</a:t>
+              <a:t>コンフォートイン六本木</a:t>
             </a:r>
             <a:endParaRPr lang="en-US" sz="1200" dirty="0"/>
           </a:p>
@@ -4231,7 +5509,7 @@
                 <a:ea typeface="Arial" pitchFamily="34" charset="-122"/>
                 <a:cs typeface="Arial" pitchFamily="34" charset="-120"/>
               </a:rPr>
-              <a:t>7.53点 → 8.5点</a:t>
+              <a:t>8.15点 → 9点</a:t>
             </a:r>
             <a:endParaRPr lang="en-US" sz="1100" dirty="0"/>
           </a:p>
@@ -4270,7 +5548,7 @@
                 <a:ea typeface="Arial" pitchFamily="34" charset="-122"/>
                 <a:cs typeface="Arial" pitchFamily="34" charset="-120"/>
               </a:rPr>
-              <a:t>主要課題：シミ・汚れ跡(6件)、清掃品質全般(5件)、臭気・異臭(2件)</a:t>
+              <a:t>主要課題：臭気・異臭(4件)、カビ・モールド(2件)、清掃品質全般(2件)</a:t>
             </a:r>
             <a:endParaRPr lang="en-US" sz="900" dirty="0"/>
           </a:p>
@@ -4309,7 +5587,7 @@
                 <a:ea typeface="Arial" pitchFamily="34" charset="-122"/>
                 <a:cs typeface="Arial" pitchFamily="34" charset="-120"/>
               </a:rPr>
-              <a:t>- シミ箇所の特定と専用クリーナーによる除去</a:t>
+              <a:t>- 臭気発生源の特定と即時対処（排水トラップ、換気扇）</a:t>
             </a:r>
             <a:endParaRPr lang="en-US" sz="800" dirty="0"/>
           </a:p>
@@ -4326,7 +5604,7 @@
                 <a:ea typeface="Arial" pitchFamily="34" charset="-122"/>
                 <a:cs typeface="Arial" pitchFamily="34" charset="-120"/>
               </a:rPr>
-              <a:t>- 清掃品質基準の明確化と全スタッフへの共有</a:t>
+              <a:t>- 消臭・脱臭処理の実施</a:t>
             </a:r>
             <a:endParaRPr lang="en-US" sz="800" dirty="0"/>
           </a:p>
@@ -4343,7 +5621,7 @@
                 <a:ea typeface="Arial" pitchFamily="34" charset="-122"/>
                 <a:cs typeface="Arial" pitchFamily="34" charset="-120"/>
               </a:rPr>
-              <a:t>- 重点箇所（水回り・ベッド周り）の清掃手順見直し</a:t>
+              <a:t>- エアコンフィルター・内部のカビ除去と消毒</a:t>
             </a:r>
             <a:endParaRPr lang="en-US" sz="800" dirty="0"/>
           </a:p>
@@ -4429,7 +5707,7 @@
                 <a:ea typeface="Arial" pitchFamily="34" charset="-122"/>
                 <a:cs typeface="Arial" pitchFamily="34" charset="-120"/>
               </a:rPr>
-              <a:t>コンフォートイン六本木</a:t>
+              <a:t>ホテルコメント横浜関内</a:t>
             </a:r>
             <a:endParaRPr lang="en-US" sz="1200" dirty="0"/>
           </a:p>
@@ -4468,7 +5746,7 @@
                 <a:ea typeface="Arial" pitchFamily="34" charset="-122"/>
                 <a:cs typeface="Arial" pitchFamily="34" charset="-120"/>
               </a:rPr>
-              <a:t>8.16点 → 9点</a:t>
+              <a:t>8.87点 → 9.2点</a:t>
             </a:r>
             <a:endParaRPr lang="en-US" sz="1100" dirty="0"/>
           </a:p>
@@ -4507,7 +5785,7 @@
                 <a:ea typeface="Arial" pitchFamily="34" charset="-122"/>
                 <a:cs typeface="Arial" pitchFamily="34" charset="-120"/>
               </a:rPr>
-              <a:t>主要課題：臭気・異臭(4件)、カビ・モールド(2件)、清掃品質全般(2件)</a:t>
+              <a:t>主要課題：清掃品質全般(4件)、臭気・異臭(2件)、タバコ関連(1件)</a:t>
             </a:r>
             <a:endParaRPr lang="en-US" sz="900" dirty="0"/>
           </a:p>
@@ -4522,243 +5800,6 @@
         <p:spPr>
           <a:xfrm>
             <a:off x="457200" y="2606040"/>
-            <a:ext cx="7772400" cy="594360"/>
-          </a:xfrm>
-          <a:prstGeom prst="rect">
-            <a:avLst/>
-          </a:prstGeom>
-          <a:noFill/>
-          <a:ln/>
-        </p:spPr>
-        <p:txBody>
-          <a:bodyPr wrap="square" lIns="0" tIns="0" rIns="0" bIns="0" rtlCol="0" anchor="t"/>
-          <a:lstStyle/>
-          <a:p>
-            <a:pPr indent="0" marL="0">
-              <a:buNone/>
-            </a:pPr>
-            <a:r>
-              <a:rPr lang="en-US" sz="800" dirty="0">
-                <a:solidFill>
-                  <a:srgbClr val="333333"/>
-                </a:solidFill>
-                <a:latin typeface="Arial" pitchFamily="34" charset="0"/>
-                <a:ea typeface="Arial" pitchFamily="34" charset="-122"/>
-                <a:cs typeface="Arial" pitchFamily="34" charset="-120"/>
-              </a:rPr>
-              <a:t>- 臭気発生源の特定と即時対処（排水トラップ、換気扇）</a:t>
-            </a:r>
-            <a:endParaRPr lang="en-US" sz="800" dirty="0"/>
-          </a:p>
-          <a:p>
-            <a:pPr indent="0" marL="0">
-              <a:buNone/>
-            </a:pPr>
-            <a:r>
-              <a:rPr lang="en-US" sz="800" dirty="0">
-                <a:solidFill>
-                  <a:srgbClr val="333333"/>
-                </a:solidFill>
-                <a:latin typeface="Arial" pitchFamily="34" charset="0"/>
-                <a:ea typeface="Arial" pitchFamily="34" charset="-122"/>
-                <a:cs typeface="Arial" pitchFamily="34" charset="-120"/>
-              </a:rPr>
-              <a:t>- 消臭・脱臭処理の実施</a:t>
-            </a:r>
-            <a:endParaRPr lang="en-US" sz="800" dirty="0"/>
-          </a:p>
-          <a:p>
-            <a:pPr indent="0" marL="0">
-              <a:buNone/>
-            </a:pPr>
-            <a:r>
-              <a:rPr lang="en-US" sz="800" dirty="0">
-                <a:solidFill>
-                  <a:srgbClr val="333333"/>
-                </a:solidFill>
-                <a:latin typeface="Arial" pitchFamily="34" charset="0"/>
-                <a:ea typeface="Arial" pitchFamily="34" charset="-122"/>
-                <a:cs typeface="Arial" pitchFamily="34" charset="-120"/>
-              </a:rPr>
-              <a:t>- エアコンフィルター・内部のカビ除去と消毒</a:t>
-            </a:r>
-            <a:endParaRPr lang="en-US" sz="800" dirty="0"/>
-          </a:p>
-        </p:txBody>
-      </p:sp>
-      <p:sp>
-        <p:nvSpPr>
-          <p:cNvPr id="17" name="Shape 15"/>
-          <p:cNvSpPr/>
-          <p:nvPr/>
-        </p:nvSpPr>
-        <p:spPr>
-          <a:xfrm>
-            <a:off x="274320" y="3383280"/>
-            <a:ext cx="8595360" cy="1188720"/>
-          </a:xfrm>
-          <a:prstGeom prst="rect">
-            <a:avLst/>
-          </a:prstGeom>
-          <a:solidFill>
-            <a:srgbClr val="FFF3E0"/>
-          </a:solidFill>
-          <a:ln/>
-          <a:effectLst>
-            <a:outerShdw sx="100000" sy="100000" kx="0" ky="0" algn="bl" rotWithShape="0" blurRad="50800" dist="25400" dir="8100000">
-              <a:srgbClr val="000000">
-                <a:alpha val="10000"/>
-              </a:srgbClr>
-            </a:outerShdw>
-          </a:effectLst>
-        </p:spPr>
-      </p:sp>
-      <p:sp>
-        <p:nvSpPr>
-          <p:cNvPr id="18" name="Shape 16"/>
-          <p:cNvSpPr/>
-          <p:nvPr/>
-        </p:nvSpPr>
-        <p:spPr>
-          <a:xfrm>
-            <a:off x="274320" y="3383280"/>
-            <a:ext cx="8595360" cy="36576"/>
-          </a:xfrm>
-          <a:prstGeom prst="rect">
-            <a:avLst/>
-          </a:prstGeom>
-          <a:solidFill>
-            <a:srgbClr val="FF9800"/>
-          </a:solidFill>
-          <a:ln/>
-        </p:spPr>
-      </p:sp>
-      <p:sp>
-        <p:nvSpPr>
-          <p:cNvPr id="19" name="Text 17"/>
-          <p:cNvSpPr/>
-          <p:nvPr/>
-        </p:nvSpPr>
-        <p:spPr>
-          <a:xfrm>
-            <a:off x="457200" y="3456432"/>
-            <a:ext cx="3657600" cy="228600"/>
-          </a:xfrm>
-          <a:prstGeom prst="rect">
-            <a:avLst/>
-          </a:prstGeom>
-          <a:noFill/>
-          <a:ln/>
-        </p:spPr>
-        <p:txBody>
-          <a:bodyPr wrap="square" lIns="0" tIns="0" rIns="0" bIns="0" rtlCol="0" anchor="ctr"/>
-          <a:lstStyle/>
-          <a:p>
-            <a:pPr indent="0" marL="0">
-              <a:buNone/>
-            </a:pPr>
-            <a:r>
-              <a:rPr lang="en-US" sz="1200" b="1" dirty="0">
-                <a:solidFill>
-                  <a:srgbClr val="1B3A5C"/>
-                </a:solidFill>
-                <a:latin typeface="Arial" pitchFamily="34" charset="0"/>
-                <a:ea typeface="Arial" pitchFamily="34" charset="-122"/>
-                <a:cs typeface="Arial" pitchFamily="34" charset="-120"/>
-              </a:rPr>
-              <a:t>ホテルコメント横浜関内</a:t>
-            </a:r>
-            <a:endParaRPr lang="en-US" sz="1200" dirty="0"/>
-          </a:p>
-        </p:txBody>
-      </p:sp>
-      <p:sp>
-        <p:nvSpPr>
-          <p:cNvPr id="20" name="Text 18"/>
-          <p:cNvSpPr/>
-          <p:nvPr/>
-        </p:nvSpPr>
-        <p:spPr>
-          <a:xfrm>
-            <a:off x="4572000" y="3456432"/>
-            <a:ext cx="2743200" cy="228600"/>
-          </a:xfrm>
-          <a:prstGeom prst="rect">
-            <a:avLst/>
-          </a:prstGeom>
-          <a:noFill/>
-          <a:ln/>
-        </p:spPr>
-        <p:txBody>
-          <a:bodyPr wrap="square" lIns="0" tIns="0" rIns="0" bIns="0" rtlCol="0" anchor="ctr"/>
-          <a:lstStyle/>
-          <a:p>
-            <a:pPr indent="0" marL="0">
-              <a:buNone/>
-            </a:pPr>
-            <a:r>
-              <a:rPr lang="en-US" sz="1100" b="1" dirty="0">
-                <a:solidFill>
-                  <a:srgbClr val="27AE60"/>
-                </a:solidFill>
-                <a:latin typeface="Arial" pitchFamily="34" charset="0"/>
-                <a:ea typeface="Arial" pitchFamily="34" charset="-122"/>
-                <a:cs typeface="Arial" pitchFamily="34" charset="-120"/>
-              </a:rPr>
-              <a:t>8.86点 → 9.2点</a:t>
-            </a:r>
-            <a:endParaRPr lang="en-US" sz="1100" dirty="0"/>
-          </a:p>
-        </p:txBody>
-      </p:sp>
-      <p:sp>
-        <p:nvSpPr>
-          <p:cNvPr id="21" name="Text 19"/>
-          <p:cNvSpPr/>
-          <p:nvPr/>
-        </p:nvSpPr>
-        <p:spPr>
-          <a:xfrm>
-            <a:off x="457200" y="3703320"/>
-            <a:ext cx="7315200" cy="182880"/>
-          </a:xfrm>
-          <a:prstGeom prst="rect">
-            <a:avLst/>
-          </a:prstGeom>
-          <a:noFill/>
-          <a:ln/>
-        </p:spPr>
-        <p:txBody>
-          <a:bodyPr wrap="square" lIns="0" tIns="0" rIns="0" bIns="0" rtlCol="0" anchor="ctr"/>
-          <a:lstStyle/>
-          <a:p>
-            <a:pPr indent="0" marL="0">
-              <a:buNone/>
-            </a:pPr>
-            <a:r>
-              <a:rPr lang="en-US" sz="900" dirty="0">
-                <a:solidFill>
-                  <a:srgbClr val="666666"/>
-                </a:solidFill>
-                <a:latin typeface="Arial" pitchFamily="34" charset="0"/>
-                <a:ea typeface="Arial" pitchFamily="34" charset="-122"/>
-                <a:cs typeface="Arial" pitchFamily="34" charset="-120"/>
-              </a:rPr>
-              <a:t>主要課題：清掃品質全般(4件)、臭気・異臭(2件)、タバコ関連(1件)</a:t>
-            </a:r>
-            <a:endParaRPr lang="en-US" sz="900" dirty="0"/>
-          </a:p>
-        </p:txBody>
-      </p:sp>
-      <p:sp>
-        <p:nvSpPr>
-          <p:cNvPr id="22" name="Text 20"/>
-          <p:cNvSpPr/>
-          <p:nvPr/>
-        </p:nvSpPr>
-        <p:spPr>
-          <a:xfrm>
-            <a:off x="457200" y="3931920"/>
             <a:ext cx="7772400" cy="594360"/>
           </a:xfrm>
           <a:prstGeom prst="rect">
@@ -4825,7 +5866,7 @@
       </p:sp>
       <p:sp>
         <p:nvSpPr>
-          <p:cNvPr id="23" name="Shape 21"/>
+          <p:cNvPr id="17" name="Shape 15"/>
           <p:cNvSpPr/>
           <p:nvPr/>
         </p:nvSpPr>
@@ -4845,7 +5886,7 @@
       </p:sp>
       <p:sp>
         <p:nvSpPr>
-          <p:cNvPr id="24" name="Text 22"/>
+          <p:cNvPr id="18" name="Text 16"/>
           <p:cNvSpPr/>
           <p:nvPr/>
         </p:nvSpPr>
@@ -4884,7 +5925,7 @@
       </p:sp>
       <p:sp>
         <p:nvSpPr>
-          <p:cNvPr id="25" name="Text 23"/>
+          <p:cNvPr id="19" name="Text 17"/>
           <p:cNvSpPr/>
           <p:nvPr/>
         </p:nvSpPr>
@@ -4929,9 +5970,9 @@
 </p:sld>
 </file>
 
-<file path=ppt/slides/slide12.xml><?xml version="1.0" encoding="utf-8"?>
+<file path=ppt/slides/slide13.xml><?xml version="1.0" encoding="utf-8"?>
 <p:sld xmlns:a="http://schemas.openxmlformats.org/drawingml/2006/main" xmlns:r="http://schemas.openxmlformats.org/officeDocument/2006/relationships" xmlns:p="http://schemas.openxmlformats.org/presentationml/2006/main">
-  <p:cSld name="Slide 12">
+  <p:cSld name="Slide 13">
     <p:spTree>
       <p:nvGrpSpPr>
         <p:cNvPr id="1" name=""/>
@@ -5046,7 +6087,7 @@
       </p:sp>
       <p:graphicFrame>
         <p:nvGraphicFramePr>
-          <p:cNvPr id="13" name="Table 0"/>
+          <p:cNvPr id="14" name="Table 0"/>
           <p:cNvGraphicFramePr>
             <a:graphicFrameLocks noGrp="1"/>
           </p:cNvGraphicFramePr>
@@ -5333,7 +6374,7 @@
                             <a:srgbClr val="000000"/>
                           </a:solidFill>
                         </a:rPr>
-                        <a:t>コンフォートホテル横浜関内</a:t>
+                        <a:t>コンフォートイン六本木</a:t>
                       </a:r>
                       <a:endParaRPr lang="en-US" sz="700" dirty="0"/>
                     </a:p>
@@ -5394,7 +6435,7 @@
                             <a:srgbClr val="000000"/>
                           </a:solidFill>
                         </a:rPr>
-                        <a:t>シミ箇所の特定と専用クリーナーによる除去</a:t>
+                        <a:t>臭気発生源の特定と即時対処（排水トラップ、換気扇）</a:t>
                       </a:r>
                       <a:endParaRPr lang="en-US" sz="700" dirty="0"/>
                     </a:p>
@@ -5408,7 +6449,7 @@
                             <a:srgbClr val="000000"/>
                           </a:solidFill>
                         </a:rPr>
-                        <a:t>清掃品質基準の明確化と全スタッフへの共有</a:t>
+                        <a:t>消臭・脱臭処理の実施</a:t>
                       </a:r>
                       <a:endParaRPr lang="en-US" sz="700" dirty="0"/>
                     </a:p>
@@ -5469,10 +6510,284 @@
                             <a:srgbClr val="000000"/>
                           </a:solidFill>
                         </a:rPr>
-                        <a:t>シミ発見時の即時報告・対処フロー構築</a:t>
+                        <a:t>定期的な換気・消臭ルーティンの標準化</a:t>
                       </a:r>
                       <a:endParaRPr lang="en-US" sz="700" dirty="0"/>
                     </a:p>
+                    <a:p>
+                      <a:pPr indent="0" marL="0">
+                        <a:buNone/>
+                      </a:pPr>
+                      <a:r>
+                        <a:rPr lang="en-US" sz="700" dirty="0">
+                          <a:solidFill>
+                            <a:srgbClr val="000000"/>
+                          </a:solidFill>
+                        </a:rPr>
+                        <a:t>エアコン・排水系の臭気源の根本対策</a:t>
+                      </a:r>
+                      <a:endParaRPr lang="en-US" sz="700" dirty="0"/>
+                    </a:p>
+                  </a:txBody>
+                  <a:tcPr marL="91440" marR="91440" marT="45720" marB="45720">
+                    <a:lnL w="6350" cap="flat" cmpd="sng" algn="ctr">
+                      <a:solidFill>
+                        <a:srgbClr val="CCCCCC"/>
+                      </a:solidFill>
+                      <a:prstDash val="solid"/>
+                      <a:round/>
+                      <a:headEnd type="none" w="med" len="med"/>
+                      <a:tailEnd type="none" w="med" len="med"/>
+                    </a:lnL>
+                    <a:lnR w="6350" cap="flat" cmpd="sng" algn="ctr">
+                      <a:solidFill>
+                        <a:srgbClr val="CCCCCC"/>
+                      </a:solidFill>
+                      <a:prstDash val="solid"/>
+                      <a:round/>
+                      <a:headEnd type="none" w="med" len="med"/>
+                      <a:tailEnd type="none" w="med" len="med"/>
+                    </a:lnR>
+                    <a:lnT w="6350" cap="flat" cmpd="sng" algn="ctr">
+                      <a:solidFill>
+                        <a:srgbClr val="CCCCCC"/>
+                      </a:solidFill>
+                      <a:prstDash val="solid"/>
+                      <a:round/>
+                      <a:headEnd type="none" w="med" len="med"/>
+                      <a:tailEnd type="none" w="med" len="med"/>
+                    </a:lnT>
+                    <a:lnB w="6350" cap="flat" cmpd="sng" algn="ctr">
+                      <a:solidFill>
+                        <a:srgbClr val="CCCCCC"/>
+                      </a:solidFill>
+                      <a:prstDash val="solid"/>
+                      <a:round/>
+                      <a:headEnd type="none" w="med" len="med"/>
+                      <a:tailEnd type="none" w="med" len="med"/>
+                    </a:lnB>
+                    <a:solidFill>
+                      <a:srgbClr val="FFFFFF"/>
+                    </a:solidFill>
+                  </a:tcPr>
+                </a:tc>
+                <a:tc>
+                  <a:txBody>
+                    <a:bodyPr/>
+                    <a:lstStyle/>
+                    <a:p>
+                      <a:pPr indent="0" marL="0">
+                        <a:buNone/>
+                      </a:pPr>
+                      <a:r>
+                        <a:rPr lang="en-US" sz="700" dirty="0">
+                          <a:solidFill>
+                            <a:srgbClr val="000000"/>
+                          </a:solidFill>
+                        </a:rPr>
+                        <a:t>オゾン脱臭機の導入検討</a:t>
+                      </a:r>
+                      <a:endParaRPr lang="en-US" sz="700" dirty="0"/>
+                    </a:p>
+                    <a:p>
+                      <a:pPr indent="0" marL="0">
+                        <a:buNone/>
+                      </a:pPr>
+                      <a:r>
+                        <a:rPr lang="en-US" sz="700" dirty="0">
+                          <a:solidFill>
+                            <a:srgbClr val="000000"/>
+                          </a:solidFill>
+                        </a:rPr>
+                        <a:t>空気品質モニタリングの導入</a:t>
+                      </a:r>
+                      <a:endParaRPr lang="en-US" sz="700" dirty="0"/>
+                    </a:p>
+                  </a:txBody>
+                  <a:tcPr marL="91440" marR="91440" marT="45720" marB="45720">
+                    <a:lnL w="6350" cap="flat" cmpd="sng" algn="ctr">
+                      <a:solidFill>
+                        <a:srgbClr val="CCCCCC"/>
+                      </a:solidFill>
+                      <a:prstDash val="solid"/>
+                      <a:round/>
+                      <a:headEnd type="none" w="med" len="med"/>
+                      <a:tailEnd type="none" w="med" len="med"/>
+                    </a:lnL>
+                    <a:lnR w="6350" cap="flat" cmpd="sng" algn="ctr">
+                      <a:solidFill>
+                        <a:srgbClr val="CCCCCC"/>
+                      </a:solidFill>
+                      <a:prstDash val="solid"/>
+                      <a:round/>
+                      <a:headEnd type="none" w="med" len="med"/>
+                      <a:tailEnd type="none" w="med" len="med"/>
+                    </a:lnR>
+                    <a:lnT w="6350" cap="flat" cmpd="sng" algn="ctr">
+                      <a:solidFill>
+                        <a:srgbClr val="CCCCCC"/>
+                      </a:solidFill>
+                      <a:prstDash val="solid"/>
+                      <a:round/>
+                      <a:headEnd type="none" w="med" len="med"/>
+                      <a:tailEnd type="none" w="med" len="med"/>
+                    </a:lnT>
+                    <a:lnB w="6350" cap="flat" cmpd="sng" algn="ctr">
+                      <a:solidFill>
+                        <a:srgbClr val="CCCCCC"/>
+                      </a:solidFill>
+                      <a:prstDash val="solid"/>
+                      <a:round/>
+                      <a:headEnd type="none" w="med" len="med"/>
+                      <a:tailEnd type="none" w="med" len="med"/>
+                    </a:lnB>
+                    <a:solidFill>
+                      <a:srgbClr val="FFFFFF"/>
+                    </a:solidFill>
+                  </a:tcPr>
+                </a:tc>
+              </a:tr>
+              <a:tr h="0">
+                <a:tc>
+                  <a:txBody>
+                    <a:bodyPr/>
+                    <a:lstStyle/>
+                    <a:p>
+                      <a:pPr indent="0" marL="0">
+                        <a:buNone/>
+                      </a:pPr>
+                      <a:r>
+                        <a:rPr lang="en-US" sz="700" b="1" dirty="0">
+                          <a:solidFill>
+                            <a:srgbClr val="000000"/>
+                          </a:solidFill>
+                        </a:rPr>
+                        <a:t>ホテルコメント横浜関内</a:t>
+                      </a:r>
+                      <a:endParaRPr lang="en-US" sz="700" dirty="0"/>
+                    </a:p>
+                  </a:txBody>
+                  <a:tcPr marL="91440" marR="91440" marT="45720" marB="45720">
+                    <a:lnL w="6350" cap="flat" cmpd="sng" algn="ctr">
+                      <a:solidFill>
+                        <a:srgbClr val="CCCCCC"/>
+                      </a:solidFill>
+                      <a:prstDash val="solid"/>
+                      <a:round/>
+                      <a:headEnd type="none" w="med" len="med"/>
+                      <a:tailEnd type="none" w="med" len="med"/>
+                    </a:lnL>
+                    <a:lnR w="6350" cap="flat" cmpd="sng" algn="ctr">
+                      <a:solidFill>
+                        <a:srgbClr val="CCCCCC"/>
+                      </a:solidFill>
+                      <a:prstDash val="solid"/>
+                      <a:round/>
+                      <a:headEnd type="none" w="med" len="med"/>
+                      <a:tailEnd type="none" w="med" len="med"/>
+                    </a:lnR>
+                    <a:lnT w="6350" cap="flat" cmpd="sng" algn="ctr">
+                      <a:solidFill>
+                        <a:srgbClr val="CCCCCC"/>
+                      </a:solidFill>
+                      <a:prstDash val="solid"/>
+                      <a:round/>
+                      <a:headEnd type="none" w="med" len="med"/>
+                      <a:tailEnd type="none" w="med" len="med"/>
+                    </a:lnT>
+                    <a:lnB w="6350" cap="flat" cmpd="sng" algn="ctr">
+                      <a:solidFill>
+                        <a:srgbClr val="CCCCCC"/>
+                      </a:solidFill>
+                      <a:prstDash val="solid"/>
+                      <a:round/>
+                      <a:headEnd type="none" w="med" len="med"/>
+                      <a:tailEnd type="none" w="med" len="med"/>
+                    </a:lnB>
+                    <a:solidFill>
+                      <a:srgbClr val="F5F7FA"/>
+                    </a:solidFill>
+                  </a:tcPr>
+                </a:tc>
+                <a:tc>
+                  <a:txBody>
+                    <a:bodyPr/>
+                    <a:lstStyle/>
+                    <a:p>
+                      <a:pPr indent="0" marL="0">
+                        <a:buNone/>
+                      </a:pPr>
+                      <a:r>
+                        <a:rPr lang="en-US" sz="700" dirty="0">
+                          <a:solidFill>
+                            <a:srgbClr val="000000"/>
+                          </a:solidFill>
+                        </a:rPr>
+                        <a:t>清掃品質基準の明確化と全スタッフへの共有</a:t>
+                      </a:r>
+                      <a:endParaRPr lang="en-US" sz="700" dirty="0"/>
+                    </a:p>
+                    <a:p>
+                      <a:pPr indent="0" marL="0">
+                        <a:buNone/>
+                      </a:pPr>
+                      <a:r>
+                        <a:rPr lang="en-US" sz="700" dirty="0">
+                          <a:solidFill>
+                            <a:srgbClr val="000000"/>
+                          </a:solidFill>
+                        </a:rPr>
+                        <a:t>重点箇所（水回り・ベッド周り）の清掃手順見直し</a:t>
+                      </a:r>
+                      <a:endParaRPr lang="en-US" sz="700" dirty="0"/>
+                    </a:p>
+                  </a:txBody>
+                  <a:tcPr marL="91440" marR="91440" marT="45720" marB="45720">
+                    <a:lnL w="6350" cap="flat" cmpd="sng" algn="ctr">
+                      <a:solidFill>
+                        <a:srgbClr val="CCCCCC"/>
+                      </a:solidFill>
+                      <a:prstDash val="solid"/>
+                      <a:round/>
+                      <a:headEnd type="none" w="med" len="med"/>
+                      <a:tailEnd type="none" w="med" len="med"/>
+                    </a:lnL>
+                    <a:lnR w="6350" cap="flat" cmpd="sng" algn="ctr">
+                      <a:solidFill>
+                        <a:srgbClr val="CCCCCC"/>
+                      </a:solidFill>
+                      <a:prstDash val="solid"/>
+                      <a:round/>
+                      <a:headEnd type="none" w="med" len="med"/>
+                      <a:tailEnd type="none" w="med" len="med"/>
+                    </a:lnR>
+                    <a:lnT w="6350" cap="flat" cmpd="sng" algn="ctr">
+                      <a:solidFill>
+                        <a:srgbClr val="CCCCCC"/>
+                      </a:solidFill>
+                      <a:prstDash val="solid"/>
+                      <a:round/>
+                      <a:headEnd type="none" w="med" len="med"/>
+                      <a:tailEnd type="none" w="med" len="med"/>
+                    </a:lnT>
+                    <a:lnB w="6350" cap="flat" cmpd="sng" algn="ctr">
+                      <a:solidFill>
+                        <a:srgbClr val="CCCCCC"/>
+                      </a:solidFill>
+                      <a:prstDash val="solid"/>
+                      <a:round/>
+                      <a:headEnd type="none" w="med" len="med"/>
+                      <a:tailEnd type="none" w="med" len="med"/>
+                    </a:lnB>
+                    <a:solidFill>
+                      <a:srgbClr val="F5F7FA"/>
+                    </a:solidFill>
+                  </a:tcPr>
+                </a:tc>
+                <a:tc>
+                  <a:txBody>
+                    <a:bodyPr/>
+                    <a:lstStyle/>
                     <a:p>
                       <a:pPr indent="0" marL="0">
                         <a:buNone/>
@@ -5487,6 +6802,20 @@
                       </a:r>
                       <a:endParaRPr lang="en-US" sz="700" dirty="0"/>
                     </a:p>
+                    <a:p>
+                      <a:pPr indent="0" marL="0">
+                        <a:buNone/>
+                      </a:pPr>
+                      <a:r>
+                        <a:rPr lang="en-US" sz="700" dirty="0">
+                          <a:solidFill>
+                            <a:srgbClr val="000000"/>
+                          </a:solidFill>
+                        </a:rPr>
+                        <a:t>QCインスペクション体制の構築（ランダム抜き打ち検査）</a:t>
+                      </a:r>
+                      <a:endParaRPr lang="en-US" sz="700" dirty="0"/>
+                    </a:p>
                   </a:txBody>
                   <a:tcPr marL="91440" marR="91440" marT="45720" marB="45720">
                     <a:lnL w="6350" cap="flat" cmpd="sng" algn="ctr">
@@ -5526,7 +6855,7 @@
                       <a:tailEnd type="none" w="med" len="med"/>
                     </a:lnB>
                     <a:solidFill>
-                      <a:srgbClr val="FFFFFF"/>
+                      <a:srgbClr val="F5F7FA"/>
                     </a:solidFill>
                   </a:tcPr>
                 </a:tc>
@@ -5601,583 +6930,7 @@
                       <a:tailEnd type="none" w="med" len="med"/>
                     </a:lnB>
                     <a:solidFill>
-                      <a:srgbClr val="FFFFFF"/>
-                    </a:solidFill>
-                  </a:tcPr>
-                </a:tc>
-              </a:tr>
-              <a:tr h="0">
-                <a:tc>
-                  <a:txBody>
-                    <a:bodyPr/>
-                    <a:lstStyle/>
-                    <a:p>
-                      <a:pPr indent="0" marL="0">
-                        <a:buNone/>
-                      </a:pPr>
-                      <a:r>
-                        <a:rPr lang="en-US" sz="700" b="1" dirty="0">
-                          <a:solidFill>
-                            <a:srgbClr val="000000"/>
-                          </a:solidFill>
-                        </a:rPr>
-                        <a:t>コンフォートイン六本木</a:t>
-                      </a:r>
-                      <a:endParaRPr lang="en-US" sz="700" dirty="0"/>
-                    </a:p>
-                  </a:txBody>
-                  <a:tcPr marL="91440" marR="91440" marT="45720" marB="45720">
-                    <a:lnL w="6350" cap="flat" cmpd="sng" algn="ctr">
-                      <a:solidFill>
-                        <a:srgbClr val="CCCCCC"/>
-                      </a:solidFill>
-                      <a:prstDash val="solid"/>
-                      <a:round/>
-                      <a:headEnd type="none" w="med" len="med"/>
-                      <a:tailEnd type="none" w="med" len="med"/>
-                    </a:lnL>
-                    <a:lnR w="6350" cap="flat" cmpd="sng" algn="ctr">
-                      <a:solidFill>
-                        <a:srgbClr val="CCCCCC"/>
-                      </a:solidFill>
-                      <a:prstDash val="solid"/>
-                      <a:round/>
-                      <a:headEnd type="none" w="med" len="med"/>
-                      <a:tailEnd type="none" w="med" len="med"/>
-                    </a:lnR>
-                    <a:lnT w="6350" cap="flat" cmpd="sng" algn="ctr">
-                      <a:solidFill>
-                        <a:srgbClr val="CCCCCC"/>
-                      </a:solidFill>
-                      <a:prstDash val="solid"/>
-                      <a:round/>
-                      <a:headEnd type="none" w="med" len="med"/>
-                      <a:tailEnd type="none" w="med" len="med"/>
-                    </a:lnT>
-                    <a:lnB w="6350" cap="flat" cmpd="sng" algn="ctr">
-                      <a:solidFill>
-                        <a:srgbClr val="CCCCCC"/>
-                      </a:solidFill>
-                      <a:prstDash val="solid"/>
-                      <a:round/>
-                      <a:headEnd type="none" w="med" len="med"/>
-                      <a:tailEnd type="none" w="med" len="med"/>
-                    </a:lnB>
-                    <a:solidFill>
                       <a:srgbClr val="F5F7FA"/>
-                    </a:solidFill>
-                  </a:tcPr>
-                </a:tc>
-                <a:tc>
-                  <a:txBody>
-                    <a:bodyPr/>
-                    <a:lstStyle/>
-                    <a:p>
-                      <a:pPr indent="0" marL="0">
-                        <a:buNone/>
-                      </a:pPr>
-                      <a:r>
-                        <a:rPr lang="en-US" sz="700" dirty="0">
-                          <a:solidFill>
-                            <a:srgbClr val="000000"/>
-                          </a:solidFill>
-                        </a:rPr>
-                        <a:t>臭気発生源の特定と即時対処（排水トラップ、換気扇）</a:t>
-                      </a:r>
-                      <a:endParaRPr lang="en-US" sz="700" dirty="0"/>
-                    </a:p>
-                    <a:p>
-                      <a:pPr indent="0" marL="0">
-                        <a:buNone/>
-                      </a:pPr>
-                      <a:r>
-                        <a:rPr lang="en-US" sz="700" dirty="0">
-                          <a:solidFill>
-                            <a:srgbClr val="000000"/>
-                          </a:solidFill>
-                        </a:rPr>
-                        <a:t>消臭・脱臭処理の実施</a:t>
-                      </a:r>
-                      <a:endParaRPr lang="en-US" sz="700" dirty="0"/>
-                    </a:p>
-                  </a:txBody>
-                  <a:tcPr marL="91440" marR="91440" marT="45720" marB="45720">
-                    <a:lnL w="6350" cap="flat" cmpd="sng" algn="ctr">
-                      <a:solidFill>
-                        <a:srgbClr val="CCCCCC"/>
-                      </a:solidFill>
-                      <a:prstDash val="solid"/>
-                      <a:round/>
-                      <a:headEnd type="none" w="med" len="med"/>
-                      <a:tailEnd type="none" w="med" len="med"/>
-                    </a:lnL>
-                    <a:lnR w="6350" cap="flat" cmpd="sng" algn="ctr">
-                      <a:solidFill>
-                        <a:srgbClr val="CCCCCC"/>
-                      </a:solidFill>
-                      <a:prstDash val="solid"/>
-                      <a:round/>
-                      <a:headEnd type="none" w="med" len="med"/>
-                      <a:tailEnd type="none" w="med" len="med"/>
-                    </a:lnR>
-                    <a:lnT w="6350" cap="flat" cmpd="sng" algn="ctr">
-                      <a:solidFill>
-                        <a:srgbClr val="CCCCCC"/>
-                      </a:solidFill>
-                      <a:prstDash val="solid"/>
-                      <a:round/>
-                      <a:headEnd type="none" w="med" len="med"/>
-                      <a:tailEnd type="none" w="med" len="med"/>
-                    </a:lnT>
-                    <a:lnB w="6350" cap="flat" cmpd="sng" algn="ctr">
-                      <a:solidFill>
-                        <a:srgbClr val="CCCCCC"/>
-                      </a:solidFill>
-                      <a:prstDash val="solid"/>
-                      <a:round/>
-                      <a:headEnd type="none" w="med" len="med"/>
-                      <a:tailEnd type="none" w="med" len="med"/>
-                    </a:lnB>
-                    <a:solidFill>
-                      <a:srgbClr val="F5F7FA"/>
-                    </a:solidFill>
-                  </a:tcPr>
-                </a:tc>
-                <a:tc>
-                  <a:txBody>
-                    <a:bodyPr/>
-                    <a:lstStyle/>
-                    <a:p>
-                      <a:pPr indent="0" marL="0">
-                        <a:buNone/>
-                      </a:pPr>
-                      <a:r>
-                        <a:rPr lang="en-US" sz="700" dirty="0">
-                          <a:solidFill>
-                            <a:srgbClr val="000000"/>
-                          </a:solidFill>
-                        </a:rPr>
-                        <a:t>定期的な換気・消臭ルーティンの標準化</a:t>
-                      </a:r>
-                      <a:endParaRPr lang="en-US" sz="700" dirty="0"/>
-                    </a:p>
-                    <a:p>
-                      <a:pPr indent="0" marL="0">
-                        <a:buNone/>
-                      </a:pPr>
-                      <a:r>
-                        <a:rPr lang="en-US" sz="700" dirty="0">
-                          <a:solidFill>
-                            <a:srgbClr val="000000"/>
-                          </a:solidFill>
-                        </a:rPr>
-                        <a:t>エアコン・排水系の臭気源の根本対策</a:t>
-                      </a:r>
-                      <a:endParaRPr lang="en-US" sz="700" dirty="0"/>
-                    </a:p>
-                  </a:txBody>
-                  <a:tcPr marL="91440" marR="91440" marT="45720" marB="45720">
-                    <a:lnL w="6350" cap="flat" cmpd="sng" algn="ctr">
-                      <a:solidFill>
-                        <a:srgbClr val="CCCCCC"/>
-                      </a:solidFill>
-                      <a:prstDash val="solid"/>
-                      <a:round/>
-                      <a:headEnd type="none" w="med" len="med"/>
-                      <a:tailEnd type="none" w="med" len="med"/>
-                    </a:lnL>
-                    <a:lnR w="6350" cap="flat" cmpd="sng" algn="ctr">
-                      <a:solidFill>
-                        <a:srgbClr val="CCCCCC"/>
-                      </a:solidFill>
-                      <a:prstDash val="solid"/>
-                      <a:round/>
-                      <a:headEnd type="none" w="med" len="med"/>
-                      <a:tailEnd type="none" w="med" len="med"/>
-                    </a:lnR>
-                    <a:lnT w="6350" cap="flat" cmpd="sng" algn="ctr">
-                      <a:solidFill>
-                        <a:srgbClr val="CCCCCC"/>
-                      </a:solidFill>
-                      <a:prstDash val="solid"/>
-                      <a:round/>
-                      <a:headEnd type="none" w="med" len="med"/>
-                      <a:tailEnd type="none" w="med" len="med"/>
-                    </a:lnT>
-                    <a:lnB w="6350" cap="flat" cmpd="sng" algn="ctr">
-                      <a:solidFill>
-                        <a:srgbClr val="CCCCCC"/>
-                      </a:solidFill>
-                      <a:prstDash val="solid"/>
-                      <a:round/>
-                      <a:headEnd type="none" w="med" len="med"/>
-                      <a:tailEnd type="none" w="med" len="med"/>
-                    </a:lnB>
-                    <a:solidFill>
-                      <a:srgbClr val="F5F7FA"/>
-                    </a:solidFill>
-                  </a:tcPr>
-                </a:tc>
-                <a:tc>
-                  <a:txBody>
-                    <a:bodyPr/>
-                    <a:lstStyle/>
-                    <a:p>
-                      <a:pPr indent="0" marL="0">
-                        <a:buNone/>
-                      </a:pPr>
-                      <a:r>
-                        <a:rPr lang="en-US" sz="700" dirty="0">
-                          <a:solidFill>
-                            <a:srgbClr val="000000"/>
-                          </a:solidFill>
-                        </a:rPr>
-                        <a:t>オゾン脱臭機の導入検討</a:t>
-                      </a:r>
-                      <a:endParaRPr lang="en-US" sz="700" dirty="0"/>
-                    </a:p>
-                    <a:p>
-                      <a:pPr indent="0" marL="0">
-                        <a:buNone/>
-                      </a:pPr>
-                      <a:r>
-                        <a:rPr lang="en-US" sz="700" dirty="0">
-                          <a:solidFill>
-                            <a:srgbClr val="000000"/>
-                          </a:solidFill>
-                        </a:rPr>
-                        <a:t>空気品質モニタリングの導入</a:t>
-                      </a:r>
-                      <a:endParaRPr lang="en-US" sz="700" dirty="0"/>
-                    </a:p>
-                  </a:txBody>
-                  <a:tcPr marL="91440" marR="91440" marT="45720" marB="45720">
-                    <a:lnL w="6350" cap="flat" cmpd="sng" algn="ctr">
-                      <a:solidFill>
-                        <a:srgbClr val="CCCCCC"/>
-                      </a:solidFill>
-                      <a:prstDash val="solid"/>
-                      <a:round/>
-                      <a:headEnd type="none" w="med" len="med"/>
-                      <a:tailEnd type="none" w="med" len="med"/>
-                    </a:lnL>
-                    <a:lnR w="6350" cap="flat" cmpd="sng" algn="ctr">
-                      <a:solidFill>
-                        <a:srgbClr val="CCCCCC"/>
-                      </a:solidFill>
-                      <a:prstDash val="solid"/>
-                      <a:round/>
-                      <a:headEnd type="none" w="med" len="med"/>
-                      <a:tailEnd type="none" w="med" len="med"/>
-                    </a:lnR>
-                    <a:lnT w="6350" cap="flat" cmpd="sng" algn="ctr">
-                      <a:solidFill>
-                        <a:srgbClr val="CCCCCC"/>
-                      </a:solidFill>
-                      <a:prstDash val="solid"/>
-                      <a:round/>
-                      <a:headEnd type="none" w="med" len="med"/>
-                      <a:tailEnd type="none" w="med" len="med"/>
-                    </a:lnT>
-                    <a:lnB w="6350" cap="flat" cmpd="sng" algn="ctr">
-                      <a:solidFill>
-                        <a:srgbClr val="CCCCCC"/>
-                      </a:solidFill>
-                      <a:prstDash val="solid"/>
-                      <a:round/>
-                      <a:headEnd type="none" w="med" len="med"/>
-                      <a:tailEnd type="none" w="med" len="med"/>
-                    </a:lnB>
-                    <a:solidFill>
-                      <a:srgbClr val="F5F7FA"/>
-                    </a:solidFill>
-                  </a:tcPr>
-                </a:tc>
-              </a:tr>
-              <a:tr h="0">
-                <a:tc>
-                  <a:txBody>
-                    <a:bodyPr/>
-                    <a:lstStyle/>
-                    <a:p>
-                      <a:pPr indent="0" marL="0">
-                        <a:buNone/>
-                      </a:pPr>
-                      <a:r>
-                        <a:rPr lang="en-US" sz="700" b="1" dirty="0">
-                          <a:solidFill>
-                            <a:srgbClr val="000000"/>
-                          </a:solidFill>
-                        </a:rPr>
-                        <a:t>ホテルコメント横浜関内</a:t>
-                      </a:r>
-                      <a:endParaRPr lang="en-US" sz="700" dirty="0"/>
-                    </a:p>
-                  </a:txBody>
-                  <a:tcPr marL="91440" marR="91440" marT="45720" marB="45720">
-                    <a:lnL w="6350" cap="flat" cmpd="sng" algn="ctr">
-                      <a:solidFill>
-                        <a:srgbClr val="CCCCCC"/>
-                      </a:solidFill>
-                      <a:prstDash val="solid"/>
-                      <a:round/>
-                      <a:headEnd type="none" w="med" len="med"/>
-                      <a:tailEnd type="none" w="med" len="med"/>
-                    </a:lnL>
-                    <a:lnR w="6350" cap="flat" cmpd="sng" algn="ctr">
-                      <a:solidFill>
-                        <a:srgbClr val="CCCCCC"/>
-                      </a:solidFill>
-                      <a:prstDash val="solid"/>
-                      <a:round/>
-                      <a:headEnd type="none" w="med" len="med"/>
-                      <a:tailEnd type="none" w="med" len="med"/>
-                    </a:lnR>
-                    <a:lnT w="6350" cap="flat" cmpd="sng" algn="ctr">
-                      <a:solidFill>
-                        <a:srgbClr val="CCCCCC"/>
-                      </a:solidFill>
-                      <a:prstDash val="solid"/>
-                      <a:round/>
-                      <a:headEnd type="none" w="med" len="med"/>
-                      <a:tailEnd type="none" w="med" len="med"/>
-                    </a:lnT>
-                    <a:lnB w="6350" cap="flat" cmpd="sng" algn="ctr">
-                      <a:solidFill>
-                        <a:srgbClr val="CCCCCC"/>
-                      </a:solidFill>
-                      <a:prstDash val="solid"/>
-                      <a:round/>
-                      <a:headEnd type="none" w="med" len="med"/>
-                      <a:tailEnd type="none" w="med" len="med"/>
-                    </a:lnB>
-                    <a:solidFill>
-                      <a:srgbClr val="FFFFFF"/>
-                    </a:solidFill>
-                  </a:tcPr>
-                </a:tc>
-                <a:tc>
-                  <a:txBody>
-                    <a:bodyPr/>
-                    <a:lstStyle/>
-                    <a:p>
-                      <a:pPr indent="0" marL="0">
-                        <a:buNone/>
-                      </a:pPr>
-                      <a:r>
-                        <a:rPr lang="en-US" sz="700" dirty="0">
-                          <a:solidFill>
-                            <a:srgbClr val="000000"/>
-                          </a:solidFill>
-                        </a:rPr>
-                        <a:t>清掃品質基準の明確化と全スタッフへの共有</a:t>
-                      </a:r>
-                      <a:endParaRPr lang="en-US" sz="700" dirty="0"/>
-                    </a:p>
-                    <a:p>
-                      <a:pPr indent="0" marL="0">
-                        <a:buNone/>
-                      </a:pPr>
-                      <a:r>
-                        <a:rPr lang="en-US" sz="700" dirty="0">
-                          <a:solidFill>
-                            <a:srgbClr val="000000"/>
-                          </a:solidFill>
-                        </a:rPr>
-                        <a:t>重点箇所（水回り・ベッド周り）の清掃手順見直し</a:t>
-                      </a:r>
-                      <a:endParaRPr lang="en-US" sz="700" dirty="0"/>
-                    </a:p>
-                  </a:txBody>
-                  <a:tcPr marL="91440" marR="91440" marT="45720" marB="45720">
-                    <a:lnL w="6350" cap="flat" cmpd="sng" algn="ctr">
-                      <a:solidFill>
-                        <a:srgbClr val="CCCCCC"/>
-                      </a:solidFill>
-                      <a:prstDash val="solid"/>
-                      <a:round/>
-                      <a:headEnd type="none" w="med" len="med"/>
-                      <a:tailEnd type="none" w="med" len="med"/>
-                    </a:lnL>
-                    <a:lnR w="6350" cap="flat" cmpd="sng" algn="ctr">
-                      <a:solidFill>
-                        <a:srgbClr val="CCCCCC"/>
-                      </a:solidFill>
-                      <a:prstDash val="solid"/>
-                      <a:round/>
-                      <a:headEnd type="none" w="med" len="med"/>
-                      <a:tailEnd type="none" w="med" len="med"/>
-                    </a:lnR>
-                    <a:lnT w="6350" cap="flat" cmpd="sng" algn="ctr">
-                      <a:solidFill>
-                        <a:srgbClr val="CCCCCC"/>
-                      </a:solidFill>
-                      <a:prstDash val="solid"/>
-                      <a:round/>
-                      <a:headEnd type="none" w="med" len="med"/>
-                      <a:tailEnd type="none" w="med" len="med"/>
-                    </a:lnT>
-                    <a:lnB w="6350" cap="flat" cmpd="sng" algn="ctr">
-                      <a:solidFill>
-                        <a:srgbClr val="CCCCCC"/>
-                      </a:solidFill>
-                      <a:prstDash val="solid"/>
-                      <a:round/>
-                      <a:headEnd type="none" w="med" len="med"/>
-                      <a:tailEnd type="none" w="med" len="med"/>
-                    </a:lnB>
-                    <a:solidFill>
-                      <a:srgbClr val="FFFFFF"/>
-                    </a:solidFill>
-                  </a:tcPr>
-                </a:tc>
-                <a:tc>
-                  <a:txBody>
-                    <a:bodyPr/>
-                    <a:lstStyle/>
-                    <a:p>
-                      <a:pPr indent="0" marL="0">
-                        <a:buNone/>
-                      </a:pPr>
-                      <a:r>
-                        <a:rPr lang="en-US" sz="700" dirty="0">
-                          <a:solidFill>
-                            <a:srgbClr val="000000"/>
-                          </a:solidFill>
-                        </a:rPr>
-                        <a:t>品質管理チェックリストの導入と実施</a:t>
-                      </a:r>
-                      <a:endParaRPr lang="en-US" sz="700" dirty="0"/>
-                    </a:p>
-                    <a:p>
-                      <a:pPr indent="0" marL="0">
-                        <a:buNone/>
-                      </a:pPr>
-                      <a:r>
-                        <a:rPr lang="en-US" sz="700" dirty="0">
-                          <a:solidFill>
-                            <a:srgbClr val="000000"/>
-                          </a:solidFill>
-                        </a:rPr>
-                        <a:t>QCインスペクション体制の構築（ランダム抜き打ち検査）</a:t>
-                      </a:r>
-                      <a:endParaRPr lang="en-US" sz="700" dirty="0"/>
-                    </a:p>
-                  </a:txBody>
-                  <a:tcPr marL="91440" marR="91440" marT="45720" marB="45720">
-                    <a:lnL w="6350" cap="flat" cmpd="sng" algn="ctr">
-                      <a:solidFill>
-                        <a:srgbClr val="CCCCCC"/>
-                      </a:solidFill>
-                      <a:prstDash val="solid"/>
-                      <a:round/>
-                      <a:headEnd type="none" w="med" len="med"/>
-                      <a:tailEnd type="none" w="med" len="med"/>
-                    </a:lnL>
-                    <a:lnR w="6350" cap="flat" cmpd="sng" algn="ctr">
-                      <a:solidFill>
-                        <a:srgbClr val="CCCCCC"/>
-                      </a:solidFill>
-                      <a:prstDash val="solid"/>
-                      <a:round/>
-                      <a:headEnd type="none" w="med" len="med"/>
-                      <a:tailEnd type="none" w="med" len="med"/>
-                    </a:lnR>
-                    <a:lnT w="6350" cap="flat" cmpd="sng" algn="ctr">
-                      <a:solidFill>
-                        <a:srgbClr val="CCCCCC"/>
-                      </a:solidFill>
-                      <a:prstDash val="solid"/>
-                      <a:round/>
-                      <a:headEnd type="none" w="med" len="med"/>
-                      <a:tailEnd type="none" w="med" len="med"/>
-                    </a:lnT>
-                    <a:lnB w="6350" cap="flat" cmpd="sng" algn="ctr">
-                      <a:solidFill>
-                        <a:srgbClr val="CCCCCC"/>
-                      </a:solidFill>
-                      <a:prstDash val="solid"/>
-                      <a:round/>
-                      <a:headEnd type="none" w="med" len="med"/>
-                      <a:tailEnd type="none" w="med" len="med"/>
-                    </a:lnB>
-                    <a:solidFill>
-                      <a:srgbClr val="FFFFFF"/>
-                    </a:solidFill>
-                  </a:tcPr>
-                </a:tc>
-                <a:tc>
-                  <a:txBody>
-                    <a:bodyPr/>
-                    <a:lstStyle/>
-                    <a:p>
-                      <a:pPr indent="0" marL="0">
-                        <a:buNone/>
-                      </a:pPr>
-                      <a:r>
-                        <a:rPr lang="en-US" sz="700" dirty="0">
-                          <a:solidFill>
-                            <a:srgbClr val="000000"/>
-                          </a:solidFill>
-                        </a:rPr>
-                        <a:t>清掃スタッフの定期研修プログラム導入</a:t>
-                      </a:r>
-                      <a:endParaRPr lang="en-US" sz="700" dirty="0"/>
-                    </a:p>
-                    <a:p>
-                      <a:pPr indent="0" marL="0">
-                        <a:buNone/>
-                      </a:pPr>
-                      <a:r>
-                        <a:rPr lang="en-US" sz="700" dirty="0">
-                          <a:solidFill>
-                            <a:srgbClr val="000000"/>
-                          </a:solidFill>
-                        </a:rPr>
-                        <a:t>デジタル清掃記録システムの検討</a:t>
-                      </a:r>
-                      <a:endParaRPr lang="en-US" sz="700" dirty="0"/>
-                    </a:p>
-                  </a:txBody>
-                  <a:tcPr marL="91440" marR="91440" marT="45720" marB="45720">
-                    <a:lnL w="6350" cap="flat" cmpd="sng" algn="ctr">
-                      <a:solidFill>
-                        <a:srgbClr val="CCCCCC"/>
-                      </a:solidFill>
-                      <a:prstDash val="solid"/>
-                      <a:round/>
-                      <a:headEnd type="none" w="med" len="med"/>
-                      <a:tailEnd type="none" w="med" len="med"/>
-                    </a:lnL>
-                    <a:lnR w="6350" cap="flat" cmpd="sng" algn="ctr">
-                      <a:solidFill>
-                        <a:srgbClr val="CCCCCC"/>
-                      </a:solidFill>
-                      <a:prstDash val="solid"/>
-                      <a:round/>
-                      <a:headEnd type="none" w="med" len="med"/>
-                      <a:tailEnd type="none" w="med" len="med"/>
-                    </a:lnR>
-                    <a:lnT w="6350" cap="flat" cmpd="sng" algn="ctr">
-                      <a:solidFill>
-                        <a:srgbClr val="CCCCCC"/>
-                      </a:solidFill>
-                      <a:prstDash val="solid"/>
-                      <a:round/>
-                      <a:headEnd type="none" w="med" len="med"/>
-                      <a:tailEnd type="none" w="med" len="med"/>
-                    </a:lnT>
-                    <a:lnB w="6350" cap="flat" cmpd="sng" algn="ctr">
-                      <a:solidFill>
-                        <a:srgbClr val="CCCCCC"/>
-                      </a:solidFill>
-                      <a:prstDash val="solid"/>
-                      <a:round/>
-                      <a:headEnd type="none" w="med" len="med"/>
-                      <a:tailEnd type="none" w="med" len="med"/>
-                    </a:lnB>
-                    <a:solidFill>
-                      <a:srgbClr val="FFFFFF"/>
                     </a:solidFill>
                   </a:tcPr>
                 </a:tc>
@@ -6292,9 +7045,9 @@
 </p:sld>
 </file>
 
-<file path=ppt/slides/slide13.xml><?xml version="1.0" encoding="utf-8"?>
+<file path=ppt/slides/slide14.xml><?xml version="1.0" encoding="utf-8"?>
 <p:sld xmlns:a="http://schemas.openxmlformats.org/drawingml/2006/main" xmlns:r="http://schemas.openxmlformats.org/officeDocument/2006/relationships" xmlns:p="http://schemas.openxmlformats.org/presentationml/2006/main">
-  <p:cSld name="Slide 13">
+  <p:cSld name="Slide 14">
     <p:spTree>
       <p:nvGrpSpPr>
         <p:cNvPr id="1" name=""/>
@@ -7038,9 +7791,9 @@
 </p:sld>
 </file>
 
-<file path=ppt/slides/slide14.xml><?xml version="1.0" encoding="utf-8"?>
+<file path=ppt/slides/slide15.xml><?xml version="1.0" encoding="utf-8"?>
 <p:sld xmlns:a="http://schemas.openxmlformats.org/drawingml/2006/main" xmlns:r="http://schemas.openxmlformats.org/officeDocument/2006/relationships" xmlns:p="http://schemas.openxmlformats.org/presentationml/2006/main">
-  <p:cSld name="Slide 14">
+  <p:cSld name="Slide 15">
     <p:spTree>
       <p:nvGrpSpPr>
         <p:cNvPr id="1" name=""/>
@@ -7784,9 +8537,9 @@
 </p:sld>
 </file>
 
-<file path=ppt/slides/slide15.xml><?xml version="1.0" encoding="utf-8"?>
+<file path=ppt/slides/slide16.xml><?xml version="1.0" encoding="utf-8"?>
 <p:sld xmlns:a="http://schemas.openxmlformats.org/drawingml/2006/main" xmlns:r="http://schemas.openxmlformats.org/officeDocument/2006/relationships" xmlns:p="http://schemas.openxmlformats.org/presentationml/2006/main">
-  <p:cSld name="Slide 15">
+  <p:cSld name="Slide 16">
     <p:spTree>
       <p:nvGrpSpPr>
         <p:cNvPr id="1" name=""/>
@@ -8005,9 +8758,9 @@
 </p:sld>
 </file>
 
-<file path=ppt/slides/slide16.xml><?xml version="1.0" encoding="utf-8"?>
+<file path=ppt/slides/slide17.xml><?xml version="1.0" encoding="utf-8"?>
 <p:sld xmlns:a="http://schemas.openxmlformats.org/drawingml/2006/main" xmlns:r="http://schemas.openxmlformats.org/officeDocument/2006/relationships" xmlns:p="http://schemas.openxmlformats.org/presentationml/2006/main">
-  <p:cSld name="Slide 16">
+  <p:cSld name="Slide 17">
     <p:spTree>
       <p:nvGrpSpPr>
         <p:cNvPr id="1" name=""/>
@@ -8161,7 +8914,7 @@
       </p:sp>
       <p:graphicFrame>
         <p:nvGraphicFramePr>
-          <p:cNvPr id="17" name="Table 0"/>
+          <p:cNvPr id="18" name="Table 0"/>
           <p:cNvGraphicFramePr>
             <a:graphicFrameLocks noGrp="1"/>
           </p:cNvGraphicFramePr>
@@ -9462,7 +10215,7 @@
       </p:sp>
       <p:graphicFrame>
         <p:nvGraphicFramePr>
-          <p:cNvPr id="33" name="Table 1"/>
+          <p:cNvPr id="35" name="Table 1"/>
           <p:cNvGraphicFramePr>
             <a:graphicFrameLocks noGrp="1"/>
           </p:cNvGraphicFramePr>
@@ -9995,7 +10748,7 @@
                             <a:srgbClr val="000000"/>
                           </a:solidFill>
                         </a:rPr>
-                        <a:t>7.80</a:t>
+                        <a:t>7.79</a:t>
                       </a:r>
                       <a:endParaRPr lang="en-US" sz="700" dirty="0"/>
                     </a:p>
@@ -10117,7 +10870,7 @@
                             <a:srgbClr val="000000"/>
                           </a:solidFill>
                         </a:rPr>
-                        <a:t>12.1%</a:t>
+                        <a:t>12.9%</a:t>
                       </a:r>
                       <a:endParaRPr lang="en-US" sz="700" dirty="0"/>
                     </a:p>
@@ -10178,7 +10931,7 @@
                             <a:srgbClr val="27AE60"/>
                           </a:solidFill>
                         </a:rPr>
-                        <a:t>3.6%</a:t>
+                        <a:t>3.9%</a:t>
                       </a:r>
                       <a:endParaRPr lang="en-US" sz="700" dirty="0"/>
                     </a:p>
@@ -10363,7 +11116,7 @@
                             <a:srgbClr val="000000"/>
                           </a:solidFill>
                         </a:rPr>
-                        <a:t>7.07</a:t>
+                        <a:t>7.11</a:t>
                       </a:r>
                       <a:endParaRPr lang="en-US" sz="700" dirty="0"/>
                     </a:p>
@@ -10485,7 +11238,7 @@
                             <a:srgbClr val="000000"/>
                           </a:solidFill>
                         </a:rPr>
-                        <a:t>10.4%</a:t>
+                        <a:t>10.0%</a:t>
                       </a:r>
                       <a:endParaRPr lang="en-US" sz="700" dirty="0"/>
                     </a:p>
@@ -10546,7 +11299,7 @@
                             <a:srgbClr val="27AE60"/>
                           </a:solidFill>
                         </a:rPr>
-                        <a:t>3.1%</a:t>
+                        <a:t>3.0%</a:t>
                       </a:r>
                       <a:endParaRPr lang="en-US" sz="700" dirty="0"/>
                     </a:p>
@@ -10731,7 +11484,7 @@
                             <a:srgbClr val="000000"/>
                           </a:solidFill>
                         </a:rPr>
-                        <a:t>7.39</a:t>
+                        <a:t>7.45</a:t>
                       </a:r>
                       <a:endParaRPr lang="en-US" sz="700" dirty="0"/>
                     </a:p>
@@ -10792,7 +11545,7 @@
                             <a:srgbClr val="27AE60"/>
                           </a:solidFill>
                         </a:rPr>
-                        <a:t>7.90</a:t>
+                        <a:t>8.00</a:t>
                       </a:r>
                       <a:endParaRPr lang="en-US" sz="700" dirty="0"/>
                     </a:p>
@@ -10853,7 +11606,7 @@
                             <a:srgbClr val="000000"/>
                           </a:solidFill>
                         </a:rPr>
-                        <a:t>10.2%</a:t>
+                        <a:t>9.8%</a:t>
                       </a:r>
                       <a:endParaRPr lang="en-US" sz="700" dirty="0"/>
                     </a:p>
@@ -10914,7 +11667,7 @@
                             <a:srgbClr val="27AE60"/>
                           </a:solidFill>
                         </a:rPr>
-                        <a:t>3.1%</a:t>
+                        <a:t>2.9%</a:t>
                       </a:r>
                       <a:endParaRPr lang="en-US" sz="700" dirty="0"/>
                     </a:p>
@@ -11403,10 +12156,10 @@
                       <a:r>
                         <a:rPr lang="en-US" sz="700" b="1" dirty="0">
                           <a:solidFill>
-                            <a:srgbClr val="FF9800"/>
+                            <a:srgbClr val="E74C3C"/>
                           </a:solidFill>
                         </a:rPr>
-                        <a:t>HIGH</a:t>
+                        <a:t>URGENT</a:t>
                       </a:r>
                       <a:endParaRPr lang="en-US" sz="700" dirty="0"/>
                     </a:p>
@@ -11449,7 +12202,7 @@
                       <a:tailEnd type="none" w="med" len="med"/>
                     </a:lnB>
                     <a:solidFill>
-                      <a:srgbClr val="FFF3E0"/>
+                      <a:srgbClr val="FFEBEE"/>
                     </a:solidFill>
                   </a:tcPr>
                 </a:tc>
@@ -11467,7 +12220,7 @@
                             <a:srgbClr val="000000"/>
                           </a:solidFill>
                         </a:rPr>
-                        <a:t>7.53</a:t>
+                        <a:t>7.46</a:t>
                       </a:r>
                       <a:endParaRPr lang="en-US" sz="700" dirty="0"/>
                     </a:p>
@@ -11589,7 +12342,7 @@
                             <a:srgbClr val="000000"/>
                           </a:solidFill>
                         </a:rPr>
-                        <a:t>9.4%</a:t>
+                        <a:t>8.5%</a:t>
                       </a:r>
                       <a:endParaRPr lang="en-US" sz="700" dirty="0"/>
                     </a:p>
@@ -11650,7 +12403,7 @@
                             <a:srgbClr val="27AE60"/>
                           </a:solidFill>
                         </a:rPr>
-                        <a:t>2.8%</a:t>
+                        <a:t>2.5%</a:t>
                       </a:r>
                       <a:endParaRPr lang="en-US" sz="700" dirty="0"/>
                     </a:p>
@@ -11835,7 +12588,7 @@
                             <a:srgbClr val="000000"/>
                           </a:solidFill>
                         </a:rPr>
-                        <a:t>8.16</a:t>
+                        <a:t>8.15</a:t>
                       </a:r>
                       <a:endParaRPr lang="en-US" sz="700" dirty="0"/>
                     </a:p>
@@ -11957,7 +12710,7 @@
                             <a:srgbClr val="000000"/>
                           </a:solidFill>
                         </a:rPr>
-                        <a:t>7.5%</a:t>
+                        <a:t>7.4%</a:t>
                       </a:r>
                       <a:endParaRPr lang="en-US" sz="700" dirty="0"/>
                     </a:p>
@@ -12203,7 +12956,7 @@
                             <a:srgbClr val="000000"/>
                           </a:solidFill>
                         </a:rPr>
-                        <a:t>8.86</a:t>
+                        <a:t>8.87</a:t>
                       </a:r>
                       <a:endParaRPr lang="en-US" sz="700" dirty="0"/>
                     </a:p>
@@ -12325,7 +13078,7 @@
                             <a:srgbClr val="000000"/>
                           </a:solidFill>
                         </a:rPr>
-                        <a:t>5.4%</a:t>
+                        <a:t>5.3%</a:t>
                       </a:r>
                       <a:endParaRPr lang="en-US" sz="700" dirty="0"/>
                     </a:p>
@@ -12544,9 +13297,9 @@
 </p:sld>
 </file>
 
-<file path=ppt/slides/slide17.xml><?xml version="1.0" encoding="utf-8"?>
+<file path=ppt/slides/slide18.xml><?xml version="1.0" encoding="utf-8"?>
 <p:sld xmlns:a="http://schemas.openxmlformats.org/drawingml/2006/main" xmlns:r="http://schemas.openxmlformats.org/officeDocument/2006/relationships" xmlns:p="http://schemas.openxmlformats.org/presentationml/2006/main">
-  <p:cSld name="Slide 17">
+  <p:cSld name="Slide 18">
     <p:spTree>
       <p:nvGrpSpPr>
         <p:cNvPr id="1" name=""/>
@@ -12661,7 +13414,7 @@
       </p:sp>
       <p:graphicFrame>
         <p:nvGraphicFramePr>
-          <p:cNvPr id="18" name="Table 0"/>
+          <p:cNvPr id="19" name="Table 0"/>
           <p:cNvGraphicFramePr>
             <a:graphicFrameLocks noGrp="1"/>
           </p:cNvGraphicFramePr>
@@ -13133,7 +13886,7 @@
                             <a:srgbClr val="000000"/>
                           </a:solidFill>
                         </a:rPr>
-                        <a:t>4ホテル</a:t>
+                        <a:t>5ホテル</a:t>
                       </a:r>
                       <a:endParaRPr lang="en-US" sz="800" dirty="0"/>
                     </a:p>
@@ -14393,9 +15146,9 @@
 </p:sld>
 </file>
 
-<file path=ppt/slides/slide18.xml><?xml version="1.0" encoding="utf-8"?>
+<file path=ppt/slides/slide19.xml><?xml version="1.0" encoding="utf-8"?>
 <p:sld xmlns:a="http://schemas.openxmlformats.org/drawingml/2006/main" xmlns:r="http://schemas.openxmlformats.org/officeDocument/2006/relationships" xmlns:p="http://schemas.openxmlformats.org/presentationml/2006/main">
-  <p:cSld name="Slide 18">
+  <p:cSld name="Slide 19">
     <p:spTree>
       <p:nvGrpSpPr>
         <p:cNvPr id="1" name=""/>
@@ -15456,9 +16209,960 @@
 </p:sld>
 </file>
 
-<file path=ppt/slides/slide19.xml><?xml version="1.0" encoding="utf-8"?>
+<file path=ppt/slides/slide2.xml><?xml version="1.0" encoding="utf-8"?>
 <p:sld xmlns:a="http://schemas.openxmlformats.org/drawingml/2006/main" xmlns:r="http://schemas.openxmlformats.org/officeDocument/2006/relationships" xmlns:p="http://schemas.openxmlformats.org/presentationml/2006/main">
-  <p:cSld name="Slide 19">
+  <p:cSld name="Slide 2">
+    <p:spTree>
+      <p:nvGrpSpPr>
+        <p:cNvPr id="1" name=""/>
+        <p:cNvGrpSpPr/>
+        <p:nvPr/>
+      </p:nvGrpSpPr>
+      <p:grpSpPr>
+        <a:xfrm>
+          <a:off x="0" y="0"/>
+          <a:ext cx="0" cy="0"/>
+          <a:chOff x="0" y="0"/>
+          <a:chExt cx="0" cy="0"/>
+        </a:xfrm>
+      </p:grpSpPr>
+      <p:sp>
+        <p:nvSpPr>
+          <p:cNvPr id="2" name="Shape 0"/>
+          <p:cNvSpPr/>
+          <p:nvPr/>
+        </p:nvSpPr>
+        <p:spPr>
+          <a:xfrm>
+            <a:off x="0" y="0"/>
+            <a:ext cx="9144000" cy="548640"/>
+          </a:xfrm>
+          <a:prstGeom prst="rect">
+            <a:avLst/>
+          </a:prstGeom>
+          <a:solidFill>
+            <a:srgbClr val="1B3A5C"/>
+          </a:solidFill>
+          <a:ln/>
+        </p:spPr>
+      </p:sp>
+      <p:sp>
+        <p:nvSpPr>
+          <p:cNvPr id="3" name="Text 1"/>
+          <p:cNvSpPr/>
+          <p:nvPr/>
+        </p:nvSpPr>
+        <p:spPr>
+          <a:xfrm>
+            <a:off x="457200" y="45720"/>
+            <a:ext cx="8229600" cy="320040"/>
+          </a:xfrm>
+          <a:prstGeom prst="rect">
+            <a:avLst/>
+          </a:prstGeom>
+          <a:noFill/>
+          <a:ln/>
+        </p:spPr>
+        <p:txBody>
+          <a:bodyPr wrap="square" lIns="0" tIns="0" rIns="0" bIns="0" rtlCol="0" anchor="ctr"/>
+          <a:lstStyle/>
+          <a:p>
+            <a:pPr indent="0" marL="0">
+              <a:buNone/>
+            </a:pPr>
+            <a:r>
+              <a:rPr lang="en-US" sz="2000" b="1" dirty="0">
+                <a:solidFill>
+                  <a:srgbClr val="FFFFFF"/>
+                </a:solidFill>
+                <a:latin typeface="Arial" pitchFamily="34" charset="0"/>
+                <a:ea typeface="Arial" pitchFamily="34" charset="-122"/>
+                <a:cs typeface="Arial" pitchFamily="34" charset="-120"/>
+              </a:rPr>
+              <a:t>エグゼクティブサマリー</a:t>
+            </a:r>
+            <a:endParaRPr lang="en-US" sz="2000" dirty="0"/>
+          </a:p>
+        </p:txBody>
+      </p:sp>
+      <p:sp>
+        <p:nvSpPr>
+          <p:cNvPr id="4" name="Text 2"/>
+          <p:cNvSpPr/>
+          <p:nvPr/>
+        </p:nvSpPr>
+        <p:spPr>
+          <a:xfrm>
+            <a:off x="457200" y="320040"/>
+            <a:ext cx="8229600" cy="201168"/>
+          </a:xfrm>
+          <a:prstGeom prst="rect">
+            <a:avLst/>
+          </a:prstGeom>
+          <a:noFill/>
+          <a:ln/>
+        </p:spPr>
+        <p:txBody>
+          <a:bodyPr wrap="square" lIns="0" tIns="0" rIns="0" bIns="0" rtlCol="0" anchor="ctr"/>
+          <a:lstStyle/>
+          <a:p>
+            <a:pPr indent="0" marL="0">
+              <a:buNone/>
+            </a:pPr>
+            <a:r>
+              <a:rPr lang="en-US" sz="1000" dirty="0">
+                <a:solidFill>
+                  <a:srgbClr val="5A9BE6"/>
+                </a:solidFill>
+                <a:latin typeface="Arial" pitchFamily="34" charset="0"/>
+                <a:ea typeface="Arial" pitchFamily="34" charset="-122"/>
+                <a:cs typeface="Arial" pitchFamily="34" charset="-120"/>
+              </a:rPr>
+              <a:t>Executive Summary</a:t>
+            </a:r>
+            <a:endParaRPr lang="en-US" sz="1000" dirty="0"/>
+          </a:p>
+        </p:txBody>
+      </p:sp>
+      <p:sp>
+        <p:nvSpPr>
+          <p:cNvPr id="5" name="Shape 3"/>
+          <p:cNvSpPr/>
+          <p:nvPr/>
+        </p:nvSpPr>
+        <p:spPr>
+          <a:xfrm>
+            <a:off x="274320" y="731520"/>
+            <a:ext cx="1920240" cy="822960"/>
+          </a:xfrm>
+          <a:prstGeom prst="rect">
+            <a:avLst/>
+          </a:prstGeom>
+          <a:solidFill>
+            <a:srgbClr val="E3F2FD"/>
+          </a:solidFill>
+          <a:ln/>
+          <a:effectLst>
+            <a:outerShdw sx="100000" sy="100000" kx="0" ky="0" algn="bl" rotWithShape="0" blurRad="50800" dist="25400" dir="8100000">
+              <a:srgbClr val="000000">
+                <a:alpha val="10000"/>
+              </a:srgbClr>
+            </a:outerShdw>
+          </a:effectLst>
+        </p:spPr>
+      </p:sp>
+      <p:sp>
+        <p:nvSpPr>
+          <p:cNvPr id="6" name="Shape 4"/>
+          <p:cNvSpPr/>
+          <p:nvPr/>
+        </p:nvSpPr>
+        <p:spPr>
+          <a:xfrm>
+            <a:off x="274320" y="731520"/>
+            <a:ext cx="1920240" cy="36576"/>
+          </a:xfrm>
+          <a:prstGeom prst="rect">
+            <a:avLst/>
+          </a:prstGeom>
+          <a:solidFill>
+            <a:srgbClr val="2E75B6"/>
+          </a:solidFill>
+          <a:ln/>
+        </p:spPr>
+      </p:sp>
+      <p:sp>
+        <p:nvSpPr>
+          <p:cNvPr id="7" name="Text 5"/>
+          <p:cNvSpPr/>
+          <p:nvPr/>
+        </p:nvSpPr>
+        <p:spPr>
+          <a:xfrm>
+            <a:off x="274320" y="841248"/>
+            <a:ext cx="1920240" cy="201168"/>
+          </a:xfrm>
+          <a:prstGeom prst="rect">
+            <a:avLst/>
+          </a:prstGeom>
+          <a:noFill/>
+          <a:ln/>
+        </p:spPr>
+        <p:txBody>
+          <a:bodyPr wrap="square" lIns="0" tIns="0" rIns="0" bIns="0" rtlCol="0" anchor="ctr"/>
+          <a:lstStyle/>
+          <a:p>
+            <a:pPr algn="ctr" indent="0" marL="0">
+              <a:buNone/>
+            </a:pPr>
+            <a:r>
+              <a:rPr lang="en-US" sz="900" dirty="0">
+                <a:solidFill>
+                  <a:srgbClr val="666666"/>
+                </a:solidFill>
+                <a:latin typeface="Arial" pitchFamily="34" charset="0"/>
+                <a:ea typeface="Arial" pitchFamily="34" charset="-122"/>
+                <a:cs typeface="Arial" pitchFamily="34" charset="-120"/>
+              </a:rPr>
+              <a:t>ポートフォリオ平均</a:t>
+            </a:r>
+            <a:endParaRPr lang="en-US" sz="900" dirty="0"/>
+          </a:p>
+        </p:txBody>
+      </p:sp>
+      <p:sp>
+        <p:nvSpPr>
+          <p:cNvPr id="8" name="Text 6"/>
+          <p:cNvSpPr/>
+          <p:nvPr/>
+        </p:nvSpPr>
+        <p:spPr>
+          <a:xfrm>
+            <a:off x="274320" y="1024128"/>
+            <a:ext cx="1920240" cy="411480"/>
+          </a:xfrm>
+          <a:prstGeom prst="rect">
+            <a:avLst/>
+          </a:prstGeom>
+          <a:noFill/>
+          <a:ln/>
+        </p:spPr>
+        <p:txBody>
+          <a:bodyPr wrap="square" lIns="0" tIns="0" rIns="0" bIns="0" rtlCol="0" anchor="ctr"/>
+          <a:lstStyle/>
+          <a:p>
+            <a:pPr algn="ctr" indent="0" marL="0">
+              <a:buNone/>
+            </a:pPr>
+            <a:r>
+              <a:rPr lang="en-US" sz="2800" b="1" dirty="0">
+                <a:solidFill>
+                  <a:srgbClr val="2E75B6"/>
+                </a:solidFill>
+                <a:latin typeface="Arial" pitchFamily="34" charset="0"/>
+                <a:ea typeface="Arial" pitchFamily="34" charset="-122"/>
+                <a:cs typeface="Arial" pitchFamily="34" charset="-120"/>
+              </a:rPr>
+              <a:t>8.39</a:t>
+            </a:r>
+            <a:endParaRPr lang="en-US" sz="2800" dirty="0"/>
+          </a:p>
+        </p:txBody>
+      </p:sp>
+      <p:sp>
+        <p:nvSpPr>
+          <p:cNvPr id="9" name="Shape 7"/>
+          <p:cNvSpPr/>
+          <p:nvPr/>
+        </p:nvSpPr>
+        <p:spPr>
+          <a:xfrm>
+            <a:off x="2423160" y="731520"/>
+            <a:ext cx="1920240" cy="822960"/>
+          </a:xfrm>
+          <a:prstGeom prst="rect">
+            <a:avLst/>
+          </a:prstGeom>
+          <a:solidFill>
+            <a:srgbClr val="E8F5E9"/>
+          </a:solidFill>
+          <a:ln/>
+          <a:effectLst>
+            <a:outerShdw sx="100000" sy="100000" kx="0" ky="0" algn="bl" rotWithShape="0" blurRad="50800" dist="25400" dir="8100000">
+              <a:srgbClr val="000000">
+                <a:alpha val="10000"/>
+              </a:srgbClr>
+            </a:outerShdw>
+          </a:effectLst>
+        </p:spPr>
+      </p:sp>
+      <p:sp>
+        <p:nvSpPr>
+          <p:cNvPr id="10" name="Shape 8"/>
+          <p:cNvSpPr/>
+          <p:nvPr/>
+        </p:nvSpPr>
+        <p:spPr>
+          <a:xfrm>
+            <a:off x="2423160" y="731520"/>
+            <a:ext cx="1920240" cy="36576"/>
+          </a:xfrm>
+          <a:prstGeom prst="rect">
+            <a:avLst/>
+          </a:prstGeom>
+          <a:solidFill>
+            <a:srgbClr val="27AE60"/>
+          </a:solidFill>
+          <a:ln/>
+        </p:spPr>
+      </p:sp>
+      <p:sp>
+        <p:nvSpPr>
+          <p:cNvPr id="11" name="Text 9"/>
+          <p:cNvSpPr/>
+          <p:nvPr/>
+        </p:nvSpPr>
+        <p:spPr>
+          <a:xfrm>
+            <a:off x="2423160" y="841248"/>
+            <a:ext cx="1920240" cy="201168"/>
+          </a:xfrm>
+          <a:prstGeom prst="rect">
+            <a:avLst/>
+          </a:prstGeom>
+          <a:noFill/>
+          <a:ln/>
+        </p:spPr>
+        <p:txBody>
+          <a:bodyPr wrap="square" lIns="0" tIns="0" rIns="0" bIns="0" rtlCol="0" anchor="ctr"/>
+          <a:lstStyle/>
+          <a:p>
+            <a:pPr algn="ctr" indent="0" marL="0">
+              <a:buNone/>
+            </a:pPr>
+            <a:r>
+              <a:rPr lang="en-US" sz="900" dirty="0">
+                <a:solidFill>
+                  <a:srgbClr val="666666"/>
+                </a:solidFill>
+                <a:latin typeface="Arial" pitchFamily="34" charset="0"/>
+                <a:ea typeface="Arial" pitchFamily="34" charset="-122"/>
+                <a:cs typeface="Arial" pitchFamily="34" charset="-120"/>
+              </a:rPr>
+              <a:t>高評価率</a:t>
+            </a:r>
+            <a:endParaRPr lang="en-US" sz="900" dirty="0"/>
+          </a:p>
+        </p:txBody>
+      </p:sp>
+      <p:sp>
+        <p:nvSpPr>
+          <p:cNvPr id="12" name="Text 10"/>
+          <p:cNvSpPr/>
+          <p:nvPr/>
+        </p:nvSpPr>
+        <p:spPr>
+          <a:xfrm>
+            <a:off x="2423160" y="1024128"/>
+            <a:ext cx="1920240" cy="411480"/>
+          </a:xfrm>
+          <a:prstGeom prst="rect">
+            <a:avLst/>
+          </a:prstGeom>
+          <a:noFill/>
+          <a:ln/>
+        </p:spPr>
+        <p:txBody>
+          <a:bodyPr wrap="square" lIns="0" tIns="0" rIns="0" bIns="0" rtlCol="0" anchor="ctr"/>
+          <a:lstStyle/>
+          <a:p>
+            <a:pPr algn="ctr" indent="0" marL="0">
+              <a:buNone/>
+            </a:pPr>
+            <a:r>
+              <a:rPr lang="en-US" sz="2800" b="1" dirty="0">
+                <a:solidFill>
+                  <a:srgbClr val="27AE60"/>
+                </a:solidFill>
+                <a:latin typeface="Arial" pitchFamily="34" charset="0"/>
+                <a:ea typeface="Arial" pitchFamily="34" charset="-122"/>
+                <a:cs typeface="Arial" pitchFamily="34" charset="-120"/>
+              </a:rPr>
+              <a:t>78.5%</a:t>
+            </a:r>
+            <a:endParaRPr lang="en-US" sz="2800" dirty="0"/>
+          </a:p>
+        </p:txBody>
+      </p:sp>
+      <p:sp>
+        <p:nvSpPr>
+          <p:cNvPr id="13" name="Shape 11"/>
+          <p:cNvSpPr/>
+          <p:nvPr/>
+        </p:nvSpPr>
+        <p:spPr>
+          <a:xfrm>
+            <a:off x="4572000" y="731520"/>
+            <a:ext cx="1920240" cy="822960"/>
+          </a:xfrm>
+          <a:prstGeom prst="rect">
+            <a:avLst/>
+          </a:prstGeom>
+          <a:solidFill>
+            <a:srgbClr val="FFEBEE"/>
+          </a:solidFill>
+          <a:ln/>
+          <a:effectLst>
+            <a:outerShdw sx="100000" sy="100000" kx="0" ky="0" algn="bl" rotWithShape="0" blurRad="50800" dist="25400" dir="8100000">
+              <a:srgbClr val="000000">
+                <a:alpha val="10000"/>
+              </a:srgbClr>
+            </a:outerShdw>
+          </a:effectLst>
+        </p:spPr>
+      </p:sp>
+      <p:sp>
+        <p:nvSpPr>
+          <p:cNvPr id="14" name="Shape 12"/>
+          <p:cNvSpPr/>
+          <p:nvPr/>
+        </p:nvSpPr>
+        <p:spPr>
+          <a:xfrm>
+            <a:off x="4572000" y="731520"/>
+            <a:ext cx="1920240" cy="36576"/>
+          </a:xfrm>
+          <a:prstGeom prst="rect">
+            <a:avLst/>
+          </a:prstGeom>
+          <a:solidFill>
+            <a:srgbClr val="E74C3C"/>
+          </a:solidFill>
+          <a:ln/>
+        </p:spPr>
+      </p:sp>
+      <p:sp>
+        <p:nvSpPr>
+          <p:cNvPr id="15" name="Text 13"/>
+          <p:cNvSpPr/>
+          <p:nvPr/>
+        </p:nvSpPr>
+        <p:spPr>
+          <a:xfrm>
+            <a:off x="4572000" y="841248"/>
+            <a:ext cx="1920240" cy="201168"/>
+          </a:xfrm>
+          <a:prstGeom prst="rect">
+            <a:avLst/>
+          </a:prstGeom>
+          <a:noFill/>
+          <a:ln/>
+        </p:spPr>
+        <p:txBody>
+          <a:bodyPr wrap="square" lIns="0" tIns="0" rIns="0" bIns="0" rtlCol="0" anchor="ctr"/>
+          <a:lstStyle/>
+          <a:p>
+            <a:pPr algn="ctr" indent="0" marL="0">
+              <a:buNone/>
+            </a:pPr>
+            <a:r>
+              <a:rPr lang="en-US" sz="900" dirty="0">
+                <a:solidFill>
+                  <a:srgbClr val="666666"/>
+                </a:solidFill>
+                <a:latin typeface="Arial" pitchFamily="34" charset="0"/>
+                <a:ea typeface="Arial" pitchFamily="34" charset="-122"/>
+                <a:cs typeface="Arial" pitchFamily="34" charset="-120"/>
+              </a:rPr>
+              <a:t>清掃クレーム率</a:t>
+            </a:r>
+            <a:endParaRPr lang="en-US" sz="900" dirty="0"/>
+          </a:p>
+        </p:txBody>
+      </p:sp>
+      <p:sp>
+        <p:nvSpPr>
+          <p:cNvPr id="16" name="Text 14"/>
+          <p:cNvSpPr/>
+          <p:nvPr/>
+        </p:nvSpPr>
+        <p:spPr>
+          <a:xfrm>
+            <a:off x="4572000" y="1024128"/>
+            <a:ext cx="1920240" cy="411480"/>
+          </a:xfrm>
+          <a:prstGeom prst="rect">
+            <a:avLst/>
+          </a:prstGeom>
+          <a:noFill/>
+          <a:ln/>
+        </p:spPr>
+        <p:txBody>
+          <a:bodyPr wrap="square" lIns="0" tIns="0" rIns="0" bIns="0" rtlCol="0" anchor="ctr"/>
+          <a:lstStyle/>
+          <a:p>
+            <a:pPr algn="ctr" indent="0" marL="0">
+              <a:buNone/>
+            </a:pPr>
+            <a:r>
+              <a:rPr lang="en-US" sz="2800" b="1" dirty="0">
+                <a:solidFill>
+                  <a:srgbClr val="E74C3C"/>
+                </a:solidFill>
+                <a:latin typeface="Arial" pitchFamily="34" charset="0"/>
+                <a:ea typeface="Arial" pitchFamily="34" charset="-122"/>
+                <a:cs typeface="Arial" pitchFamily="34" charset="-120"/>
+              </a:rPr>
+              <a:t>4.5%</a:t>
+            </a:r>
+            <a:endParaRPr lang="en-US" sz="2800" dirty="0"/>
+          </a:p>
+        </p:txBody>
+      </p:sp>
+      <p:sp>
+        <p:nvSpPr>
+          <p:cNvPr id="17" name="Shape 15"/>
+          <p:cNvSpPr/>
+          <p:nvPr/>
+        </p:nvSpPr>
+        <p:spPr>
+          <a:xfrm>
+            <a:off x="6720840" y="731520"/>
+            <a:ext cx="1920240" cy="822960"/>
+          </a:xfrm>
+          <a:prstGeom prst="rect">
+            <a:avLst/>
+          </a:prstGeom>
+          <a:solidFill>
+            <a:srgbClr val="F5F7FA"/>
+          </a:solidFill>
+          <a:ln/>
+          <a:effectLst>
+            <a:outerShdw sx="100000" sy="100000" kx="0" ky="0" algn="bl" rotWithShape="0" blurRad="50800" dist="25400" dir="8100000">
+              <a:srgbClr val="000000">
+                <a:alpha val="10000"/>
+              </a:srgbClr>
+            </a:outerShdw>
+          </a:effectLst>
+        </p:spPr>
+      </p:sp>
+      <p:sp>
+        <p:nvSpPr>
+          <p:cNvPr id="18" name="Shape 16"/>
+          <p:cNvSpPr/>
+          <p:nvPr/>
+        </p:nvSpPr>
+        <p:spPr>
+          <a:xfrm>
+            <a:off x="6720840" y="731520"/>
+            <a:ext cx="1920240" cy="36576"/>
+          </a:xfrm>
+          <a:prstGeom prst="rect">
+            <a:avLst/>
+          </a:prstGeom>
+          <a:solidFill>
+            <a:srgbClr val="1B3A5C"/>
+          </a:solidFill>
+          <a:ln/>
+        </p:spPr>
+      </p:sp>
+      <p:sp>
+        <p:nvSpPr>
+          <p:cNvPr id="19" name="Text 17"/>
+          <p:cNvSpPr/>
+          <p:nvPr/>
+        </p:nvSpPr>
+        <p:spPr>
+          <a:xfrm>
+            <a:off x="6720840" y="841248"/>
+            <a:ext cx="1920240" cy="201168"/>
+          </a:xfrm>
+          <a:prstGeom prst="rect">
+            <a:avLst/>
+          </a:prstGeom>
+          <a:noFill/>
+          <a:ln/>
+        </p:spPr>
+        <p:txBody>
+          <a:bodyPr wrap="square" lIns="0" tIns="0" rIns="0" bIns="0" rtlCol="0" anchor="ctr"/>
+          <a:lstStyle/>
+          <a:p>
+            <a:pPr algn="ctr" indent="0" marL="0">
+              <a:buNone/>
+            </a:pPr>
+            <a:r>
+              <a:rPr lang="en-US" sz="900" dirty="0">
+                <a:solidFill>
+                  <a:srgbClr val="666666"/>
+                </a:solidFill>
+                <a:latin typeface="Arial" pitchFamily="34" charset="0"/>
+                <a:ea typeface="Arial" pitchFamily="34" charset="-122"/>
+                <a:cs typeface="Arial" pitchFamily="34" charset="-120"/>
+              </a:rPr>
+              <a:t>レビュー総数</a:t>
+            </a:r>
+            <a:endParaRPr lang="en-US" sz="900" dirty="0"/>
+          </a:p>
+        </p:txBody>
+      </p:sp>
+      <p:sp>
+        <p:nvSpPr>
+          <p:cNvPr id="20" name="Text 18"/>
+          <p:cNvSpPr/>
+          <p:nvPr/>
+        </p:nvSpPr>
+        <p:spPr>
+          <a:xfrm>
+            <a:off x="6720840" y="1024128"/>
+            <a:ext cx="1920240" cy="411480"/>
+          </a:xfrm>
+          <a:prstGeom prst="rect">
+            <a:avLst/>
+          </a:prstGeom>
+          <a:noFill/>
+          <a:ln/>
+        </p:spPr>
+        <p:txBody>
+          <a:bodyPr wrap="square" lIns="0" tIns="0" rIns="0" bIns="0" rtlCol="0" anchor="ctr"/>
+          <a:lstStyle/>
+          <a:p>
+            <a:pPr algn="ctr" indent="0" marL="0">
+              <a:buNone/>
+            </a:pPr>
+            <a:r>
+              <a:rPr lang="en-US" sz="2800" b="1" dirty="0">
+                <a:solidFill>
+                  <a:srgbClr val="1B3A5C"/>
+                </a:solidFill>
+                <a:latin typeface="Arial" pitchFamily="34" charset="0"/>
+                <a:ea typeface="Arial" pitchFamily="34" charset="-122"/>
+                <a:cs typeface="Arial" pitchFamily="34" charset="-120"/>
+              </a:rPr>
+              <a:t>2260件</a:t>
+            </a:r>
+            <a:endParaRPr lang="en-US" sz="2800" dirty="0"/>
+          </a:p>
+        </p:txBody>
+      </p:sp>
+      <p:sp>
+        <p:nvSpPr>
+          <p:cNvPr id="21" name="Shape 19"/>
+          <p:cNvSpPr/>
+          <p:nvPr/>
+        </p:nvSpPr>
+        <p:spPr>
+          <a:xfrm>
+            <a:off x="274320" y="1828800"/>
+            <a:ext cx="8321040" cy="2560320"/>
+          </a:xfrm>
+          <a:prstGeom prst="rect">
+            <a:avLst/>
+          </a:prstGeom>
+          <a:solidFill>
+            <a:srgbClr val="F0F7FC"/>
+          </a:solidFill>
+          <a:ln w="19050">
+            <a:solidFill>
+              <a:srgbClr val="2E75B6"/>
+            </a:solidFill>
+            <a:prstDash val="solid"/>
+          </a:ln>
+          <a:effectLst>
+            <a:outerShdw sx="100000" sy="100000" kx="0" ky="0" algn="bl" rotWithShape="0" blurRad="50800" dist="25400" dir="8100000">
+              <a:srgbClr val="000000">
+                <a:alpha val="10000"/>
+              </a:srgbClr>
+            </a:outerShdw>
+          </a:effectLst>
+        </p:spPr>
+      </p:sp>
+      <p:sp>
+        <p:nvSpPr>
+          <p:cNvPr id="22" name="Text 20"/>
+          <p:cNvSpPr/>
+          <p:nvPr/>
+        </p:nvSpPr>
+        <p:spPr>
+          <a:xfrm>
+            <a:off x="457200" y="1920240"/>
+            <a:ext cx="2743200" cy="274320"/>
+          </a:xfrm>
+          <a:prstGeom prst="rect">
+            <a:avLst/>
+          </a:prstGeom>
+          <a:noFill/>
+          <a:ln/>
+        </p:spPr>
+        <p:txBody>
+          <a:bodyPr wrap="square" lIns="0" tIns="0" rIns="0" bIns="0" rtlCol="0" anchor="ctr"/>
+          <a:lstStyle/>
+          <a:p>
+            <a:pPr indent="0" marL="0">
+              <a:buNone/>
+            </a:pPr>
+            <a:r>
+              <a:rPr lang="en-US" sz="1400" b="1" dirty="0">
+                <a:solidFill>
+                  <a:srgbClr val="2E75B6"/>
+                </a:solidFill>
+                <a:latin typeface="Arial" pitchFamily="34" charset="0"/>
+                <a:ea typeface="Arial" pitchFamily="34" charset="-122"/>
+                <a:cs typeface="Arial" pitchFamily="34" charset="-120"/>
+              </a:rPr>
+              <a:t>KEY FINDINGS</a:t>
+            </a:r>
+            <a:endParaRPr lang="en-US" sz="1400" dirty="0"/>
+          </a:p>
+        </p:txBody>
+      </p:sp>
+      <p:sp>
+        <p:nvSpPr>
+          <p:cNvPr id="23" name="Text 21"/>
+          <p:cNvSpPr/>
+          <p:nvPr/>
+        </p:nvSpPr>
+        <p:spPr>
+          <a:xfrm>
+            <a:off x="457200" y="2286000"/>
+            <a:ext cx="8046720" cy="548640"/>
+          </a:xfrm>
+          <a:prstGeom prst="rect">
+            <a:avLst/>
+          </a:prstGeom>
+          <a:noFill/>
+          <a:ln/>
+        </p:spPr>
+        <p:txBody>
+          <a:bodyPr wrap="square" lIns="0" tIns="0" rIns="0" bIns="0" rtlCol="0" anchor="t"/>
+          <a:lstStyle/>
+          <a:p>
+            <a:pPr indent="0" marL="0">
+              <a:buNone/>
+            </a:pPr>
+            <a:r>
+              <a:rPr lang="en-US" sz="1000" b="1" dirty="0">
+                <a:solidFill>
+                  <a:srgbClr val="27AE60"/>
+                </a:solidFill>
+                <a:latin typeface="Arial" pitchFamily="34" charset="0"/>
+                <a:ea typeface="Arial" pitchFamily="34" charset="-122"/>
+                <a:cs typeface="Arial" pitchFamily="34" charset="-120"/>
+              </a:rPr>
+              <a:t>Strength: </a:t>
+            </a:r>
+            <a:pPr indent="0" marL="0">
+              <a:buNone/>
+            </a:pPr>
+            <a:r>
+              <a:rPr lang="en-US" sz="1000" dirty="0">
+                <a:solidFill>
+                  <a:srgbClr val="333333"/>
+                </a:solidFill>
+                <a:latin typeface="Arial" pitchFamily="34" charset="0"/>
+                <a:ea typeface="Arial" pitchFamily="34" charset="-122"/>
+                <a:cs typeface="Arial" pitchFamily="34" charset="-120"/>
+              </a:rPr>
+              <a:t>上位5ホテル平均8.7点超。コンフォートスイーツ東京ベイが9.21点で最高評価</a:t>
+            </a:r>
+            <a:endParaRPr lang="en-US" sz="1000" dirty="0"/>
+          </a:p>
+        </p:txBody>
+      </p:sp>
+      <p:sp>
+        <p:nvSpPr>
+          <p:cNvPr id="24" name="Text 22"/>
+          <p:cNvSpPr/>
+          <p:nvPr/>
+        </p:nvSpPr>
+        <p:spPr>
+          <a:xfrm>
+            <a:off x="457200" y="2926080"/>
+            <a:ext cx="8046720" cy="548640"/>
+          </a:xfrm>
+          <a:prstGeom prst="rect">
+            <a:avLst/>
+          </a:prstGeom>
+          <a:noFill/>
+          <a:ln/>
+        </p:spPr>
+        <p:txBody>
+          <a:bodyPr wrap="square" lIns="0" tIns="0" rIns="0" bIns="0" rtlCol="0" anchor="t"/>
+          <a:lstStyle/>
+          <a:p>
+            <a:pPr indent="0" marL="0">
+              <a:buNone/>
+            </a:pPr>
+            <a:r>
+              <a:rPr lang="en-US" sz="1000" b="1" dirty="0">
+                <a:solidFill>
+                  <a:srgbClr val="E74C3C"/>
+                </a:solidFill>
+                <a:latin typeface="Arial" pitchFamily="34" charset="0"/>
+                <a:ea typeface="Arial" pitchFamily="34" charset="-122"/>
+                <a:cs typeface="Arial" pitchFamily="34" charset="-120"/>
+              </a:rPr>
+              <a:t>Challenge: </a:t>
+            </a:r>
+            <a:pPr indent="0" marL="0">
+              <a:buNone/>
+            </a:pPr>
+            <a:r>
+              <a:rPr lang="en-US" sz="1000" dirty="0">
+                <a:solidFill>
+                  <a:srgbClr val="333333"/>
+                </a:solidFill>
+                <a:latin typeface="Arial" pitchFamily="34" charset="0"/>
+                <a:ea typeface="Arial" pitchFamily="34" charset="-122"/>
+                <a:cs typeface="Arial" pitchFamily="34" charset="-120"/>
+              </a:rPr>
+              <a:t>5ホテルがURGENT。清掃クレーム率4.5%（業界平均2-3%超過）</a:t>
+            </a:r>
+            <a:endParaRPr lang="en-US" sz="1000" dirty="0"/>
+          </a:p>
+        </p:txBody>
+      </p:sp>
+      <p:sp>
+        <p:nvSpPr>
+          <p:cNvPr id="25" name="Text 23"/>
+          <p:cNvSpPr/>
+          <p:nvPr/>
+        </p:nvSpPr>
+        <p:spPr>
+          <a:xfrm>
+            <a:off x="457200" y="3566160"/>
+            <a:ext cx="8046720" cy="548640"/>
+          </a:xfrm>
+          <a:prstGeom prst="rect">
+            <a:avLst/>
+          </a:prstGeom>
+          <a:noFill/>
+          <a:ln/>
+        </p:spPr>
+        <p:txBody>
+          <a:bodyPr wrap="square" lIns="0" tIns="0" rIns="0" bIns="0" rtlCol="0" anchor="t"/>
+          <a:lstStyle/>
+          <a:p>
+            <a:pPr indent="0" marL="0">
+              <a:buNone/>
+            </a:pPr>
+            <a:r>
+              <a:rPr lang="en-US" sz="1000" b="1" dirty="0">
+                <a:solidFill>
+                  <a:srgbClr val="FF9800"/>
+                </a:solidFill>
+                <a:latin typeface="Arial" pitchFamily="34" charset="0"/>
+                <a:ea typeface="Arial" pitchFamily="34" charset="-122"/>
+                <a:cs typeface="Arial" pitchFamily="34" charset="-120"/>
+              </a:rPr>
+              <a:t>Opportunity: </a:t>
+            </a:r>
+            <a:pPr indent="0" marL="0">
+              <a:buNone/>
+            </a:pPr>
+            <a:r>
+              <a:rPr lang="en-US" sz="1000" dirty="0">
+                <a:solidFill>
+                  <a:srgbClr val="333333"/>
+                </a:solidFill>
+                <a:latin typeface="Arial" pitchFamily="34" charset="0"/>
+                <a:ea typeface="Arial" pitchFamily="34" charset="-122"/>
+                <a:cs typeface="Arial" pitchFamily="34" charset="-120"/>
+              </a:rPr>
+              <a:t>清掃品質標準化によりURGENTホテル+0.5-1.0pt改善、RevPAR 5-10%向上見込み</a:t>
+            </a:r>
+            <a:endParaRPr lang="en-US" sz="1000" dirty="0"/>
+          </a:p>
+        </p:txBody>
+      </p:sp>
+      <p:sp>
+        <p:nvSpPr>
+          <p:cNvPr id="26" name="Shape 24"/>
+          <p:cNvSpPr/>
+          <p:nvPr/>
+        </p:nvSpPr>
+        <p:spPr>
+          <a:xfrm>
+            <a:off x="0" y="4800600"/>
+            <a:ext cx="9144000" cy="342900"/>
+          </a:xfrm>
+          <a:prstGeom prst="rect">
+            <a:avLst/>
+          </a:prstGeom>
+          <a:solidFill>
+            <a:srgbClr val="1B3A5C"/>
+          </a:solidFill>
+          <a:ln/>
+        </p:spPr>
+      </p:sp>
+      <p:sp>
+        <p:nvSpPr>
+          <p:cNvPr id="27" name="Text 25"/>
+          <p:cNvSpPr/>
+          <p:nvPr/>
+        </p:nvSpPr>
+        <p:spPr>
+          <a:xfrm>
+            <a:off x="457200" y="4800600"/>
+            <a:ext cx="3657600" cy="342900"/>
+          </a:xfrm>
+          <a:prstGeom prst="rect">
+            <a:avLst/>
+          </a:prstGeom>
+          <a:noFill/>
+          <a:ln/>
+        </p:spPr>
+        <p:txBody>
+          <a:bodyPr wrap="square" rtlCol="0" anchor="ctr"/>
+          <a:lstStyle/>
+          <a:p>
+            <a:pPr indent="0" marL="0">
+              <a:buNone/>
+            </a:pPr>
+            <a:r>
+              <a:rPr lang="en-US" sz="800" dirty="0">
+                <a:solidFill>
+                  <a:srgbClr val="94A3B8"/>
+                </a:solidFill>
+                <a:latin typeface="Arial" pitchFamily="34" charset="0"/>
+                <a:ea typeface="Arial" pitchFamily="34" charset="-122"/>
+                <a:cs typeface="Arial" pitchFamily="34" charset="-120"/>
+              </a:rPr>
+              <a:t>Confidential | PRIMECHANGE</a:t>
+            </a:r>
+            <a:endParaRPr lang="en-US" sz="800" dirty="0"/>
+          </a:p>
+        </p:txBody>
+      </p:sp>
+      <p:sp>
+        <p:nvSpPr>
+          <p:cNvPr id="28" name="Text 26"/>
+          <p:cNvSpPr/>
+          <p:nvPr/>
+        </p:nvSpPr>
+        <p:spPr>
+          <a:xfrm>
+            <a:off x="8229600" y="4800600"/>
+            <a:ext cx="457200" cy="342900"/>
+          </a:xfrm>
+          <a:prstGeom prst="rect">
+            <a:avLst/>
+          </a:prstGeom>
+          <a:noFill/>
+          <a:ln/>
+        </p:spPr>
+        <p:txBody>
+          <a:bodyPr wrap="square" rtlCol="0" anchor="ctr"/>
+          <a:lstStyle/>
+          <a:p>
+            <a:pPr algn="r" indent="0" marL="0">
+              <a:buNone/>
+            </a:pPr>
+            <a:r>
+              <a:rPr lang="en-US" sz="800" dirty="0">
+                <a:solidFill>
+                  <a:srgbClr val="94A3B8"/>
+                </a:solidFill>
+                <a:latin typeface="Arial" pitchFamily="34" charset="0"/>
+                <a:ea typeface="Arial" pitchFamily="34" charset="-122"/>
+                <a:cs typeface="Arial" pitchFamily="34" charset="-120"/>
+              </a:rPr>
+              <a:t>2</a:t>
+            </a:r>
+            <a:endParaRPr lang="en-US" sz="800" dirty="0"/>
+          </a:p>
+        </p:txBody>
+      </p:sp>
+    </p:spTree>
+  </p:cSld>
+  <p:clrMapOvr>
+    <a:masterClrMapping/>
+  </p:clrMapOvr>
+</p:sld>
+</file>
+
+<file path=ppt/slides/slide20.xml><?xml version="1.0" encoding="utf-8"?>
+<p:sld xmlns:a="http://schemas.openxmlformats.org/drawingml/2006/main" xmlns:r="http://schemas.openxmlformats.org/officeDocument/2006/relationships" xmlns:p="http://schemas.openxmlformats.org/presentationml/2006/main">
+  <p:cSld name="Slide 20">
     <p:spTree>
       <p:nvGrpSpPr>
         <p:cNvPr id="1" name=""/>
@@ -16106,957 +17810,6 @@
 </p:sld>
 </file>
 
-<file path=ppt/slides/slide2.xml><?xml version="1.0" encoding="utf-8"?>
-<p:sld xmlns:a="http://schemas.openxmlformats.org/drawingml/2006/main" xmlns:r="http://schemas.openxmlformats.org/officeDocument/2006/relationships" xmlns:p="http://schemas.openxmlformats.org/presentationml/2006/main">
-  <p:cSld name="Slide 2">
-    <p:spTree>
-      <p:nvGrpSpPr>
-        <p:cNvPr id="1" name=""/>
-        <p:cNvGrpSpPr/>
-        <p:nvPr/>
-      </p:nvGrpSpPr>
-      <p:grpSpPr>
-        <a:xfrm>
-          <a:off x="0" y="0"/>
-          <a:ext cx="0" cy="0"/>
-          <a:chOff x="0" y="0"/>
-          <a:chExt cx="0" cy="0"/>
-        </a:xfrm>
-      </p:grpSpPr>
-      <p:sp>
-        <p:nvSpPr>
-          <p:cNvPr id="2" name="Shape 0"/>
-          <p:cNvSpPr/>
-          <p:nvPr/>
-        </p:nvSpPr>
-        <p:spPr>
-          <a:xfrm>
-            <a:off x="0" y="0"/>
-            <a:ext cx="9144000" cy="548640"/>
-          </a:xfrm>
-          <a:prstGeom prst="rect">
-            <a:avLst/>
-          </a:prstGeom>
-          <a:solidFill>
-            <a:srgbClr val="1B3A5C"/>
-          </a:solidFill>
-          <a:ln/>
-        </p:spPr>
-      </p:sp>
-      <p:sp>
-        <p:nvSpPr>
-          <p:cNvPr id="3" name="Text 1"/>
-          <p:cNvSpPr/>
-          <p:nvPr/>
-        </p:nvSpPr>
-        <p:spPr>
-          <a:xfrm>
-            <a:off x="457200" y="45720"/>
-            <a:ext cx="8229600" cy="320040"/>
-          </a:xfrm>
-          <a:prstGeom prst="rect">
-            <a:avLst/>
-          </a:prstGeom>
-          <a:noFill/>
-          <a:ln/>
-        </p:spPr>
-        <p:txBody>
-          <a:bodyPr wrap="square" lIns="0" tIns="0" rIns="0" bIns="0" rtlCol="0" anchor="ctr"/>
-          <a:lstStyle/>
-          <a:p>
-            <a:pPr indent="0" marL="0">
-              <a:buNone/>
-            </a:pPr>
-            <a:r>
-              <a:rPr lang="en-US" sz="2000" b="1" dirty="0">
-                <a:solidFill>
-                  <a:srgbClr val="FFFFFF"/>
-                </a:solidFill>
-                <a:latin typeface="Arial" pitchFamily="34" charset="0"/>
-                <a:ea typeface="Arial" pitchFamily="34" charset="-122"/>
-                <a:cs typeface="Arial" pitchFamily="34" charset="-120"/>
-              </a:rPr>
-              <a:t>エグゼクティブサマリー</a:t>
-            </a:r>
-            <a:endParaRPr lang="en-US" sz="2000" dirty="0"/>
-          </a:p>
-        </p:txBody>
-      </p:sp>
-      <p:sp>
-        <p:nvSpPr>
-          <p:cNvPr id="4" name="Text 2"/>
-          <p:cNvSpPr/>
-          <p:nvPr/>
-        </p:nvSpPr>
-        <p:spPr>
-          <a:xfrm>
-            <a:off x="457200" y="320040"/>
-            <a:ext cx="8229600" cy="201168"/>
-          </a:xfrm>
-          <a:prstGeom prst="rect">
-            <a:avLst/>
-          </a:prstGeom>
-          <a:noFill/>
-          <a:ln/>
-        </p:spPr>
-        <p:txBody>
-          <a:bodyPr wrap="square" lIns="0" tIns="0" rIns="0" bIns="0" rtlCol="0" anchor="ctr"/>
-          <a:lstStyle/>
-          <a:p>
-            <a:pPr indent="0" marL="0">
-              <a:buNone/>
-            </a:pPr>
-            <a:r>
-              <a:rPr lang="en-US" sz="1000" dirty="0">
-                <a:solidFill>
-                  <a:srgbClr val="5A9BE6"/>
-                </a:solidFill>
-                <a:latin typeface="Arial" pitchFamily="34" charset="0"/>
-                <a:ea typeface="Arial" pitchFamily="34" charset="-122"/>
-                <a:cs typeface="Arial" pitchFamily="34" charset="-120"/>
-              </a:rPr>
-              <a:t>Executive Summary</a:t>
-            </a:r>
-            <a:endParaRPr lang="en-US" sz="1000" dirty="0"/>
-          </a:p>
-        </p:txBody>
-      </p:sp>
-      <p:sp>
-        <p:nvSpPr>
-          <p:cNvPr id="5" name="Shape 3"/>
-          <p:cNvSpPr/>
-          <p:nvPr/>
-        </p:nvSpPr>
-        <p:spPr>
-          <a:xfrm>
-            <a:off x="274320" y="731520"/>
-            <a:ext cx="1920240" cy="822960"/>
-          </a:xfrm>
-          <a:prstGeom prst="rect">
-            <a:avLst/>
-          </a:prstGeom>
-          <a:solidFill>
-            <a:srgbClr val="E3F2FD"/>
-          </a:solidFill>
-          <a:ln/>
-          <a:effectLst>
-            <a:outerShdw sx="100000" sy="100000" kx="0" ky="0" algn="bl" rotWithShape="0" blurRad="50800" dist="25400" dir="8100000">
-              <a:srgbClr val="000000">
-                <a:alpha val="10000"/>
-              </a:srgbClr>
-            </a:outerShdw>
-          </a:effectLst>
-        </p:spPr>
-      </p:sp>
-      <p:sp>
-        <p:nvSpPr>
-          <p:cNvPr id="6" name="Shape 4"/>
-          <p:cNvSpPr/>
-          <p:nvPr/>
-        </p:nvSpPr>
-        <p:spPr>
-          <a:xfrm>
-            <a:off x="274320" y="731520"/>
-            <a:ext cx="1920240" cy="36576"/>
-          </a:xfrm>
-          <a:prstGeom prst="rect">
-            <a:avLst/>
-          </a:prstGeom>
-          <a:solidFill>
-            <a:srgbClr val="2E75B6"/>
-          </a:solidFill>
-          <a:ln/>
-        </p:spPr>
-      </p:sp>
-      <p:sp>
-        <p:nvSpPr>
-          <p:cNvPr id="7" name="Text 5"/>
-          <p:cNvSpPr/>
-          <p:nvPr/>
-        </p:nvSpPr>
-        <p:spPr>
-          <a:xfrm>
-            <a:off x="274320" y="841248"/>
-            <a:ext cx="1920240" cy="201168"/>
-          </a:xfrm>
-          <a:prstGeom prst="rect">
-            <a:avLst/>
-          </a:prstGeom>
-          <a:noFill/>
-          <a:ln/>
-        </p:spPr>
-        <p:txBody>
-          <a:bodyPr wrap="square" lIns="0" tIns="0" rIns="0" bIns="0" rtlCol="0" anchor="ctr"/>
-          <a:lstStyle/>
-          <a:p>
-            <a:pPr algn="ctr" indent="0" marL="0">
-              <a:buNone/>
-            </a:pPr>
-            <a:r>
-              <a:rPr lang="en-US" sz="900" dirty="0">
-                <a:solidFill>
-                  <a:srgbClr val="666666"/>
-                </a:solidFill>
-                <a:latin typeface="Arial" pitchFamily="34" charset="0"/>
-                <a:ea typeface="Arial" pitchFamily="34" charset="-122"/>
-                <a:cs typeface="Arial" pitchFamily="34" charset="-120"/>
-              </a:rPr>
-              <a:t>ポートフォリオ平均</a:t>
-            </a:r>
-            <a:endParaRPr lang="en-US" sz="900" dirty="0"/>
-          </a:p>
-        </p:txBody>
-      </p:sp>
-      <p:sp>
-        <p:nvSpPr>
-          <p:cNvPr id="8" name="Text 6"/>
-          <p:cNvSpPr/>
-          <p:nvPr/>
-        </p:nvSpPr>
-        <p:spPr>
-          <a:xfrm>
-            <a:off x="274320" y="1024128"/>
-            <a:ext cx="1920240" cy="411480"/>
-          </a:xfrm>
-          <a:prstGeom prst="rect">
-            <a:avLst/>
-          </a:prstGeom>
-          <a:noFill/>
-          <a:ln/>
-        </p:spPr>
-        <p:txBody>
-          <a:bodyPr wrap="square" lIns="0" tIns="0" rIns="0" bIns="0" rtlCol="0" anchor="ctr"/>
-          <a:lstStyle/>
-          <a:p>
-            <a:pPr algn="ctr" indent="0" marL="0">
-              <a:buNone/>
-            </a:pPr>
-            <a:r>
-              <a:rPr lang="en-US" sz="2800" b="1" dirty="0">
-                <a:solidFill>
-                  <a:srgbClr val="2E75B6"/>
-                </a:solidFill>
-                <a:latin typeface="Arial" pitchFamily="34" charset="0"/>
-                <a:ea typeface="Arial" pitchFamily="34" charset="-122"/>
-                <a:cs typeface="Arial" pitchFamily="34" charset="-120"/>
-              </a:rPr>
-              <a:t>8.39</a:t>
-            </a:r>
-            <a:endParaRPr lang="en-US" sz="2800" dirty="0"/>
-          </a:p>
-        </p:txBody>
-      </p:sp>
-      <p:sp>
-        <p:nvSpPr>
-          <p:cNvPr id="9" name="Shape 7"/>
-          <p:cNvSpPr/>
-          <p:nvPr/>
-        </p:nvSpPr>
-        <p:spPr>
-          <a:xfrm>
-            <a:off x="2423160" y="731520"/>
-            <a:ext cx="1920240" cy="822960"/>
-          </a:xfrm>
-          <a:prstGeom prst="rect">
-            <a:avLst/>
-          </a:prstGeom>
-          <a:solidFill>
-            <a:srgbClr val="E8F5E9"/>
-          </a:solidFill>
-          <a:ln/>
-          <a:effectLst>
-            <a:outerShdw sx="100000" sy="100000" kx="0" ky="0" algn="bl" rotWithShape="0" blurRad="50800" dist="25400" dir="8100000">
-              <a:srgbClr val="000000">
-                <a:alpha val="10000"/>
-              </a:srgbClr>
-            </a:outerShdw>
-          </a:effectLst>
-        </p:spPr>
-      </p:sp>
-      <p:sp>
-        <p:nvSpPr>
-          <p:cNvPr id="10" name="Shape 8"/>
-          <p:cNvSpPr/>
-          <p:nvPr/>
-        </p:nvSpPr>
-        <p:spPr>
-          <a:xfrm>
-            <a:off x="2423160" y="731520"/>
-            <a:ext cx="1920240" cy="36576"/>
-          </a:xfrm>
-          <a:prstGeom prst="rect">
-            <a:avLst/>
-          </a:prstGeom>
-          <a:solidFill>
-            <a:srgbClr val="27AE60"/>
-          </a:solidFill>
-          <a:ln/>
-        </p:spPr>
-      </p:sp>
-      <p:sp>
-        <p:nvSpPr>
-          <p:cNvPr id="11" name="Text 9"/>
-          <p:cNvSpPr/>
-          <p:nvPr/>
-        </p:nvSpPr>
-        <p:spPr>
-          <a:xfrm>
-            <a:off x="2423160" y="841248"/>
-            <a:ext cx="1920240" cy="201168"/>
-          </a:xfrm>
-          <a:prstGeom prst="rect">
-            <a:avLst/>
-          </a:prstGeom>
-          <a:noFill/>
-          <a:ln/>
-        </p:spPr>
-        <p:txBody>
-          <a:bodyPr wrap="square" lIns="0" tIns="0" rIns="0" bIns="0" rtlCol="0" anchor="ctr"/>
-          <a:lstStyle/>
-          <a:p>
-            <a:pPr algn="ctr" indent="0" marL="0">
-              <a:buNone/>
-            </a:pPr>
-            <a:r>
-              <a:rPr lang="en-US" sz="900" dirty="0">
-                <a:solidFill>
-                  <a:srgbClr val="666666"/>
-                </a:solidFill>
-                <a:latin typeface="Arial" pitchFamily="34" charset="0"/>
-                <a:ea typeface="Arial" pitchFamily="34" charset="-122"/>
-                <a:cs typeface="Arial" pitchFamily="34" charset="-120"/>
-              </a:rPr>
-              <a:t>高評価率</a:t>
-            </a:r>
-            <a:endParaRPr lang="en-US" sz="900" dirty="0"/>
-          </a:p>
-        </p:txBody>
-      </p:sp>
-      <p:sp>
-        <p:nvSpPr>
-          <p:cNvPr id="12" name="Text 10"/>
-          <p:cNvSpPr/>
-          <p:nvPr/>
-        </p:nvSpPr>
-        <p:spPr>
-          <a:xfrm>
-            <a:off x="2423160" y="1024128"/>
-            <a:ext cx="1920240" cy="411480"/>
-          </a:xfrm>
-          <a:prstGeom prst="rect">
-            <a:avLst/>
-          </a:prstGeom>
-          <a:noFill/>
-          <a:ln/>
-        </p:spPr>
-        <p:txBody>
-          <a:bodyPr wrap="square" lIns="0" tIns="0" rIns="0" bIns="0" rtlCol="0" anchor="ctr"/>
-          <a:lstStyle/>
-          <a:p>
-            <a:pPr algn="ctr" indent="0" marL="0">
-              <a:buNone/>
-            </a:pPr>
-            <a:r>
-              <a:rPr lang="en-US" sz="2800" b="1" dirty="0">
-                <a:solidFill>
-                  <a:srgbClr val="27AE60"/>
-                </a:solidFill>
-                <a:latin typeface="Arial" pitchFamily="34" charset="0"/>
-                <a:ea typeface="Arial" pitchFamily="34" charset="-122"/>
-                <a:cs typeface="Arial" pitchFamily="34" charset="-120"/>
-              </a:rPr>
-              <a:t>78.5%</a:t>
-            </a:r>
-            <a:endParaRPr lang="en-US" sz="2800" dirty="0"/>
-          </a:p>
-        </p:txBody>
-      </p:sp>
-      <p:sp>
-        <p:nvSpPr>
-          <p:cNvPr id="13" name="Shape 11"/>
-          <p:cNvSpPr/>
-          <p:nvPr/>
-        </p:nvSpPr>
-        <p:spPr>
-          <a:xfrm>
-            <a:off x="4572000" y="731520"/>
-            <a:ext cx="1920240" cy="822960"/>
-          </a:xfrm>
-          <a:prstGeom prst="rect">
-            <a:avLst/>
-          </a:prstGeom>
-          <a:solidFill>
-            <a:srgbClr val="FFEBEE"/>
-          </a:solidFill>
-          <a:ln/>
-          <a:effectLst>
-            <a:outerShdw sx="100000" sy="100000" kx="0" ky="0" algn="bl" rotWithShape="0" blurRad="50800" dist="25400" dir="8100000">
-              <a:srgbClr val="000000">
-                <a:alpha val="10000"/>
-              </a:srgbClr>
-            </a:outerShdw>
-          </a:effectLst>
-        </p:spPr>
-      </p:sp>
-      <p:sp>
-        <p:nvSpPr>
-          <p:cNvPr id="14" name="Shape 12"/>
-          <p:cNvSpPr/>
-          <p:nvPr/>
-        </p:nvSpPr>
-        <p:spPr>
-          <a:xfrm>
-            <a:off x="4572000" y="731520"/>
-            <a:ext cx="1920240" cy="36576"/>
-          </a:xfrm>
-          <a:prstGeom prst="rect">
-            <a:avLst/>
-          </a:prstGeom>
-          <a:solidFill>
-            <a:srgbClr val="E74C3C"/>
-          </a:solidFill>
-          <a:ln/>
-        </p:spPr>
-      </p:sp>
-      <p:sp>
-        <p:nvSpPr>
-          <p:cNvPr id="15" name="Text 13"/>
-          <p:cNvSpPr/>
-          <p:nvPr/>
-        </p:nvSpPr>
-        <p:spPr>
-          <a:xfrm>
-            <a:off x="4572000" y="841248"/>
-            <a:ext cx="1920240" cy="201168"/>
-          </a:xfrm>
-          <a:prstGeom prst="rect">
-            <a:avLst/>
-          </a:prstGeom>
-          <a:noFill/>
-          <a:ln/>
-        </p:spPr>
-        <p:txBody>
-          <a:bodyPr wrap="square" lIns="0" tIns="0" rIns="0" bIns="0" rtlCol="0" anchor="ctr"/>
-          <a:lstStyle/>
-          <a:p>
-            <a:pPr algn="ctr" indent="0" marL="0">
-              <a:buNone/>
-            </a:pPr>
-            <a:r>
-              <a:rPr lang="en-US" sz="900" dirty="0">
-                <a:solidFill>
-                  <a:srgbClr val="666666"/>
-                </a:solidFill>
-                <a:latin typeface="Arial" pitchFamily="34" charset="0"/>
-                <a:ea typeface="Arial" pitchFamily="34" charset="-122"/>
-                <a:cs typeface="Arial" pitchFamily="34" charset="-120"/>
-              </a:rPr>
-              <a:t>清掃クレーム率</a:t>
-            </a:r>
-            <a:endParaRPr lang="en-US" sz="900" dirty="0"/>
-          </a:p>
-        </p:txBody>
-      </p:sp>
-      <p:sp>
-        <p:nvSpPr>
-          <p:cNvPr id="16" name="Text 14"/>
-          <p:cNvSpPr/>
-          <p:nvPr/>
-        </p:nvSpPr>
-        <p:spPr>
-          <a:xfrm>
-            <a:off x="4572000" y="1024128"/>
-            <a:ext cx="1920240" cy="411480"/>
-          </a:xfrm>
-          <a:prstGeom prst="rect">
-            <a:avLst/>
-          </a:prstGeom>
-          <a:noFill/>
-          <a:ln/>
-        </p:spPr>
-        <p:txBody>
-          <a:bodyPr wrap="square" lIns="0" tIns="0" rIns="0" bIns="0" rtlCol="0" anchor="ctr"/>
-          <a:lstStyle/>
-          <a:p>
-            <a:pPr algn="ctr" indent="0" marL="0">
-              <a:buNone/>
-            </a:pPr>
-            <a:r>
-              <a:rPr lang="en-US" sz="2800" b="1" dirty="0">
-                <a:solidFill>
-                  <a:srgbClr val="E74C3C"/>
-                </a:solidFill>
-                <a:latin typeface="Arial" pitchFamily="34" charset="0"/>
-                <a:ea typeface="Arial" pitchFamily="34" charset="-122"/>
-                <a:cs typeface="Arial" pitchFamily="34" charset="-120"/>
-              </a:rPr>
-              <a:t>4.5%</a:t>
-            </a:r>
-            <a:endParaRPr lang="en-US" sz="2800" dirty="0"/>
-          </a:p>
-        </p:txBody>
-      </p:sp>
-      <p:sp>
-        <p:nvSpPr>
-          <p:cNvPr id="17" name="Shape 15"/>
-          <p:cNvSpPr/>
-          <p:nvPr/>
-        </p:nvSpPr>
-        <p:spPr>
-          <a:xfrm>
-            <a:off x="6720840" y="731520"/>
-            <a:ext cx="1920240" cy="822960"/>
-          </a:xfrm>
-          <a:prstGeom prst="rect">
-            <a:avLst/>
-          </a:prstGeom>
-          <a:solidFill>
-            <a:srgbClr val="F5F7FA"/>
-          </a:solidFill>
-          <a:ln/>
-          <a:effectLst>
-            <a:outerShdw sx="100000" sy="100000" kx="0" ky="0" algn="bl" rotWithShape="0" blurRad="50800" dist="25400" dir="8100000">
-              <a:srgbClr val="000000">
-                <a:alpha val="10000"/>
-              </a:srgbClr>
-            </a:outerShdw>
-          </a:effectLst>
-        </p:spPr>
-      </p:sp>
-      <p:sp>
-        <p:nvSpPr>
-          <p:cNvPr id="18" name="Shape 16"/>
-          <p:cNvSpPr/>
-          <p:nvPr/>
-        </p:nvSpPr>
-        <p:spPr>
-          <a:xfrm>
-            <a:off x="6720840" y="731520"/>
-            <a:ext cx="1920240" cy="36576"/>
-          </a:xfrm>
-          <a:prstGeom prst="rect">
-            <a:avLst/>
-          </a:prstGeom>
-          <a:solidFill>
-            <a:srgbClr val="1B3A5C"/>
-          </a:solidFill>
-          <a:ln/>
-        </p:spPr>
-      </p:sp>
-      <p:sp>
-        <p:nvSpPr>
-          <p:cNvPr id="19" name="Text 17"/>
-          <p:cNvSpPr/>
-          <p:nvPr/>
-        </p:nvSpPr>
-        <p:spPr>
-          <a:xfrm>
-            <a:off x="6720840" y="841248"/>
-            <a:ext cx="1920240" cy="201168"/>
-          </a:xfrm>
-          <a:prstGeom prst="rect">
-            <a:avLst/>
-          </a:prstGeom>
-          <a:noFill/>
-          <a:ln/>
-        </p:spPr>
-        <p:txBody>
-          <a:bodyPr wrap="square" lIns="0" tIns="0" rIns="0" bIns="0" rtlCol="0" anchor="ctr"/>
-          <a:lstStyle/>
-          <a:p>
-            <a:pPr algn="ctr" indent="0" marL="0">
-              <a:buNone/>
-            </a:pPr>
-            <a:r>
-              <a:rPr lang="en-US" sz="900" dirty="0">
-                <a:solidFill>
-                  <a:srgbClr val="666666"/>
-                </a:solidFill>
-                <a:latin typeface="Arial" pitchFamily="34" charset="0"/>
-                <a:ea typeface="Arial" pitchFamily="34" charset="-122"/>
-                <a:cs typeface="Arial" pitchFamily="34" charset="-120"/>
-              </a:rPr>
-              <a:t>レビュー総数</a:t>
-            </a:r>
-            <a:endParaRPr lang="en-US" sz="900" dirty="0"/>
-          </a:p>
-        </p:txBody>
-      </p:sp>
-      <p:sp>
-        <p:nvSpPr>
-          <p:cNvPr id="20" name="Text 18"/>
-          <p:cNvSpPr/>
-          <p:nvPr/>
-        </p:nvSpPr>
-        <p:spPr>
-          <a:xfrm>
-            <a:off x="6720840" y="1024128"/>
-            <a:ext cx="1920240" cy="411480"/>
-          </a:xfrm>
-          <a:prstGeom prst="rect">
-            <a:avLst/>
-          </a:prstGeom>
-          <a:noFill/>
-          <a:ln/>
-        </p:spPr>
-        <p:txBody>
-          <a:bodyPr wrap="square" lIns="0" tIns="0" rIns="0" bIns="0" rtlCol="0" anchor="ctr"/>
-          <a:lstStyle/>
-          <a:p>
-            <a:pPr algn="ctr" indent="0" marL="0">
-              <a:buNone/>
-            </a:pPr>
-            <a:r>
-              <a:rPr lang="en-US" sz="2800" b="1" dirty="0">
-                <a:solidFill>
-                  <a:srgbClr val="1B3A5C"/>
-                </a:solidFill>
-                <a:latin typeface="Arial" pitchFamily="34" charset="0"/>
-                <a:ea typeface="Arial" pitchFamily="34" charset="-122"/>
-                <a:cs typeface="Arial" pitchFamily="34" charset="-120"/>
-              </a:rPr>
-              <a:t>2221件</a:t>
-            </a:r>
-            <a:endParaRPr lang="en-US" sz="2800" dirty="0"/>
-          </a:p>
-        </p:txBody>
-      </p:sp>
-      <p:sp>
-        <p:nvSpPr>
-          <p:cNvPr id="21" name="Shape 19"/>
-          <p:cNvSpPr/>
-          <p:nvPr/>
-        </p:nvSpPr>
-        <p:spPr>
-          <a:xfrm>
-            <a:off x="274320" y="1828800"/>
-            <a:ext cx="8321040" cy="2560320"/>
-          </a:xfrm>
-          <a:prstGeom prst="rect">
-            <a:avLst/>
-          </a:prstGeom>
-          <a:solidFill>
-            <a:srgbClr val="F0F7FC"/>
-          </a:solidFill>
-          <a:ln w="19050">
-            <a:solidFill>
-              <a:srgbClr val="2E75B6"/>
-            </a:solidFill>
-            <a:prstDash val="solid"/>
-          </a:ln>
-          <a:effectLst>
-            <a:outerShdw sx="100000" sy="100000" kx="0" ky="0" algn="bl" rotWithShape="0" blurRad="50800" dist="25400" dir="8100000">
-              <a:srgbClr val="000000">
-                <a:alpha val="10000"/>
-              </a:srgbClr>
-            </a:outerShdw>
-          </a:effectLst>
-        </p:spPr>
-      </p:sp>
-      <p:sp>
-        <p:nvSpPr>
-          <p:cNvPr id="22" name="Text 20"/>
-          <p:cNvSpPr/>
-          <p:nvPr/>
-        </p:nvSpPr>
-        <p:spPr>
-          <a:xfrm>
-            <a:off x="457200" y="1920240"/>
-            <a:ext cx="2743200" cy="274320"/>
-          </a:xfrm>
-          <a:prstGeom prst="rect">
-            <a:avLst/>
-          </a:prstGeom>
-          <a:noFill/>
-          <a:ln/>
-        </p:spPr>
-        <p:txBody>
-          <a:bodyPr wrap="square" lIns="0" tIns="0" rIns="0" bIns="0" rtlCol="0" anchor="ctr"/>
-          <a:lstStyle/>
-          <a:p>
-            <a:pPr indent="0" marL="0">
-              <a:buNone/>
-            </a:pPr>
-            <a:r>
-              <a:rPr lang="en-US" sz="1400" b="1" dirty="0">
-                <a:solidFill>
-                  <a:srgbClr val="2E75B6"/>
-                </a:solidFill>
-                <a:latin typeface="Arial" pitchFamily="34" charset="0"/>
-                <a:ea typeface="Arial" pitchFamily="34" charset="-122"/>
-                <a:cs typeface="Arial" pitchFamily="34" charset="-120"/>
-              </a:rPr>
-              <a:t>KEY FINDINGS</a:t>
-            </a:r>
-            <a:endParaRPr lang="en-US" sz="1400" dirty="0"/>
-          </a:p>
-        </p:txBody>
-      </p:sp>
-      <p:sp>
-        <p:nvSpPr>
-          <p:cNvPr id="23" name="Text 21"/>
-          <p:cNvSpPr/>
-          <p:nvPr/>
-        </p:nvSpPr>
-        <p:spPr>
-          <a:xfrm>
-            <a:off x="457200" y="2286000"/>
-            <a:ext cx="8046720" cy="548640"/>
-          </a:xfrm>
-          <a:prstGeom prst="rect">
-            <a:avLst/>
-          </a:prstGeom>
-          <a:noFill/>
-          <a:ln/>
-        </p:spPr>
-        <p:txBody>
-          <a:bodyPr wrap="square" lIns="0" tIns="0" rIns="0" bIns="0" rtlCol="0" anchor="t"/>
-          <a:lstStyle/>
-          <a:p>
-            <a:pPr indent="0" marL="0">
-              <a:buNone/>
-            </a:pPr>
-            <a:r>
-              <a:rPr lang="en-US" sz="1000" b="1" dirty="0">
-                <a:solidFill>
-                  <a:srgbClr val="27AE60"/>
-                </a:solidFill>
-                <a:latin typeface="Arial" pitchFamily="34" charset="0"/>
-                <a:ea typeface="Arial" pitchFamily="34" charset="-122"/>
-                <a:cs typeface="Arial" pitchFamily="34" charset="-120"/>
-              </a:rPr>
-              <a:t>Strength: </a:t>
-            </a:r>
-            <a:pPr indent="0" marL="0">
-              <a:buNone/>
-            </a:pPr>
-            <a:r>
-              <a:rPr lang="en-US" sz="1000" dirty="0">
-                <a:solidFill>
-                  <a:srgbClr val="333333"/>
-                </a:solidFill>
-                <a:latin typeface="Arial" pitchFamily="34" charset="0"/>
-                <a:ea typeface="Arial" pitchFamily="34" charset="-122"/>
-                <a:cs typeface="Arial" pitchFamily="34" charset="-120"/>
-              </a:rPr>
-              <a:t>上位5ホテル平均8.7点超。コンフォートスイーツ東京ベイが9.17点で最高評価</a:t>
-            </a:r>
-            <a:endParaRPr lang="en-US" sz="1000" dirty="0"/>
-          </a:p>
-        </p:txBody>
-      </p:sp>
-      <p:sp>
-        <p:nvSpPr>
-          <p:cNvPr id="24" name="Text 22"/>
-          <p:cNvSpPr/>
-          <p:nvPr/>
-        </p:nvSpPr>
-        <p:spPr>
-          <a:xfrm>
-            <a:off x="457200" y="2926080"/>
-            <a:ext cx="8046720" cy="548640"/>
-          </a:xfrm>
-          <a:prstGeom prst="rect">
-            <a:avLst/>
-          </a:prstGeom>
-          <a:noFill/>
-          <a:ln/>
-        </p:spPr>
-        <p:txBody>
-          <a:bodyPr wrap="square" lIns="0" tIns="0" rIns="0" bIns="0" rtlCol="0" anchor="t"/>
-          <a:lstStyle/>
-          <a:p>
-            <a:pPr indent="0" marL="0">
-              <a:buNone/>
-            </a:pPr>
-            <a:r>
-              <a:rPr lang="en-US" sz="1000" b="1" dirty="0">
-                <a:solidFill>
-                  <a:srgbClr val="E74C3C"/>
-                </a:solidFill>
-                <a:latin typeface="Arial" pitchFamily="34" charset="0"/>
-                <a:ea typeface="Arial" pitchFamily="34" charset="-122"/>
-                <a:cs typeface="Arial" pitchFamily="34" charset="-120"/>
-              </a:rPr>
-              <a:t>Challenge: </a:t>
-            </a:r>
-            <a:pPr indent="0" marL="0">
-              <a:buNone/>
-            </a:pPr>
-            <a:r>
-              <a:rPr lang="en-US" sz="1000" dirty="0">
-                <a:solidFill>
-                  <a:srgbClr val="333333"/>
-                </a:solidFill>
-                <a:latin typeface="Arial" pitchFamily="34" charset="0"/>
-                <a:ea typeface="Arial" pitchFamily="34" charset="-122"/>
-                <a:cs typeface="Arial" pitchFamily="34" charset="-120"/>
-              </a:rPr>
-              <a:t>4ホテルがURGENT。清掃クレーム率4.5%（業界平均2-3%超過）</a:t>
-            </a:r>
-            <a:endParaRPr lang="en-US" sz="1000" dirty="0"/>
-          </a:p>
-        </p:txBody>
-      </p:sp>
-      <p:sp>
-        <p:nvSpPr>
-          <p:cNvPr id="25" name="Text 23"/>
-          <p:cNvSpPr/>
-          <p:nvPr/>
-        </p:nvSpPr>
-        <p:spPr>
-          <a:xfrm>
-            <a:off x="457200" y="3566160"/>
-            <a:ext cx="8046720" cy="548640"/>
-          </a:xfrm>
-          <a:prstGeom prst="rect">
-            <a:avLst/>
-          </a:prstGeom>
-          <a:noFill/>
-          <a:ln/>
-        </p:spPr>
-        <p:txBody>
-          <a:bodyPr wrap="square" lIns="0" tIns="0" rIns="0" bIns="0" rtlCol="0" anchor="t"/>
-          <a:lstStyle/>
-          <a:p>
-            <a:pPr indent="0" marL="0">
-              <a:buNone/>
-            </a:pPr>
-            <a:r>
-              <a:rPr lang="en-US" sz="1000" b="1" dirty="0">
-                <a:solidFill>
-                  <a:srgbClr val="FF9800"/>
-                </a:solidFill>
-                <a:latin typeface="Arial" pitchFamily="34" charset="0"/>
-                <a:ea typeface="Arial" pitchFamily="34" charset="-122"/>
-                <a:cs typeface="Arial" pitchFamily="34" charset="-120"/>
-              </a:rPr>
-              <a:t>Opportunity: </a:t>
-            </a:r>
-            <a:pPr indent="0" marL="0">
-              <a:buNone/>
-            </a:pPr>
-            <a:r>
-              <a:rPr lang="en-US" sz="1000" dirty="0">
-                <a:solidFill>
-                  <a:srgbClr val="333333"/>
-                </a:solidFill>
-                <a:latin typeface="Arial" pitchFamily="34" charset="0"/>
-                <a:ea typeface="Arial" pitchFamily="34" charset="-122"/>
-                <a:cs typeface="Arial" pitchFamily="34" charset="-120"/>
-              </a:rPr>
-              <a:t>清掃品質標準化によりURGENTホテル+0.5-1.0pt改善、RevPAR 5-10%向上見込み</a:t>
-            </a:r>
-            <a:endParaRPr lang="en-US" sz="1000" dirty="0"/>
-          </a:p>
-        </p:txBody>
-      </p:sp>
-      <p:sp>
-        <p:nvSpPr>
-          <p:cNvPr id="26" name="Shape 24"/>
-          <p:cNvSpPr/>
-          <p:nvPr/>
-        </p:nvSpPr>
-        <p:spPr>
-          <a:xfrm>
-            <a:off x="0" y="4800600"/>
-            <a:ext cx="9144000" cy="342900"/>
-          </a:xfrm>
-          <a:prstGeom prst="rect">
-            <a:avLst/>
-          </a:prstGeom>
-          <a:solidFill>
-            <a:srgbClr val="1B3A5C"/>
-          </a:solidFill>
-          <a:ln/>
-        </p:spPr>
-      </p:sp>
-      <p:sp>
-        <p:nvSpPr>
-          <p:cNvPr id="27" name="Text 25"/>
-          <p:cNvSpPr/>
-          <p:nvPr/>
-        </p:nvSpPr>
-        <p:spPr>
-          <a:xfrm>
-            <a:off x="457200" y="4800600"/>
-            <a:ext cx="3657600" cy="342900"/>
-          </a:xfrm>
-          <a:prstGeom prst="rect">
-            <a:avLst/>
-          </a:prstGeom>
-          <a:noFill/>
-          <a:ln/>
-        </p:spPr>
-        <p:txBody>
-          <a:bodyPr wrap="square" rtlCol="0" anchor="ctr"/>
-          <a:lstStyle/>
-          <a:p>
-            <a:pPr indent="0" marL="0">
-              <a:buNone/>
-            </a:pPr>
-            <a:r>
-              <a:rPr lang="en-US" sz="800" dirty="0">
-                <a:solidFill>
-                  <a:srgbClr val="94A3B8"/>
-                </a:solidFill>
-                <a:latin typeface="Arial" pitchFamily="34" charset="0"/>
-                <a:ea typeface="Arial" pitchFamily="34" charset="-122"/>
-                <a:cs typeface="Arial" pitchFamily="34" charset="-120"/>
-              </a:rPr>
-              <a:t>Confidential | PRIMECHANGE</a:t>
-            </a:r>
-            <a:endParaRPr lang="en-US" sz="800" dirty="0"/>
-          </a:p>
-        </p:txBody>
-      </p:sp>
-      <p:sp>
-        <p:nvSpPr>
-          <p:cNvPr id="28" name="Text 26"/>
-          <p:cNvSpPr/>
-          <p:nvPr/>
-        </p:nvSpPr>
-        <p:spPr>
-          <a:xfrm>
-            <a:off x="8229600" y="4800600"/>
-            <a:ext cx="457200" cy="342900"/>
-          </a:xfrm>
-          <a:prstGeom prst="rect">
-            <a:avLst/>
-          </a:prstGeom>
-          <a:noFill/>
-          <a:ln/>
-        </p:spPr>
-        <p:txBody>
-          <a:bodyPr wrap="square" rtlCol="0" anchor="ctr"/>
-          <a:lstStyle/>
-          <a:p>
-            <a:pPr algn="r" indent="0" marL="0">
-              <a:buNone/>
-            </a:pPr>
-            <a:r>
-              <a:rPr lang="en-US" sz="800" dirty="0">
-                <a:solidFill>
-                  <a:srgbClr val="94A3B8"/>
-                </a:solidFill>
-                <a:latin typeface="Arial" pitchFamily="34" charset="0"/>
-                <a:ea typeface="Arial" pitchFamily="34" charset="-122"/>
-                <a:cs typeface="Arial" pitchFamily="34" charset="-120"/>
-              </a:rPr>
-              <a:t>2</a:t>
-            </a:r>
-            <a:endParaRPr lang="en-US" sz="800" dirty="0"/>
-          </a:p>
-        </p:txBody>
-      </p:sp>
-    </p:spTree>
-  </p:cSld>
-  <p:clrMapOvr>
-    <a:masterClrMapping/>
-  </p:clrMapOvr>
-</p:sld>
-</file>
-
 <file path=ppt/slides/slide3.xml><?xml version="1.0" encoding="utf-8"?>
 <p:sld xmlns:a="http://schemas.openxmlformats.org/drawingml/2006/main" xmlns:r="http://schemas.openxmlformats.org/officeDocument/2006/relationships" xmlns:p="http://schemas.openxmlformats.org/presentationml/2006/main">
   <p:cSld name="Slide 3">
@@ -17707,7 +18460,7 @@
                             <a:srgbClr val="000000"/>
                           </a:solidFill>
                         </a:rPr>
-                        <a:t>9.17</a:t>
+                        <a:t>9.21</a:t>
                       </a:r>
                       <a:endParaRPr lang="en-US" sz="700" dirty="0"/>
                     </a:p>
@@ -17768,7 +18521,7 @@
                             <a:srgbClr val="000000"/>
                           </a:solidFill>
                         </a:rPr>
-                        <a:t>92.8%</a:t>
+                        <a:t>94.3%</a:t>
                       </a:r>
                       <a:endParaRPr lang="en-US" sz="700" dirty="0"/>
                     </a:p>
@@ -18075,7 +18828,7 @@
                             <a:srgbClr val="000000"/>
                           </a:solidFill>
                         </a:rPr>
-                        <a:t>9.06</a:t>
+                        <a:t>9.08</a:t>
                       </a:r>
                       <a:endParaRPr lang="en-US" sz="700" dirty="0"/>
                     </a:p>
@@ -18136,7 +18889,7 @@
                             <a:srgbClr val="000000"/>
                           </a:solidFill>
                         </a:rPr>
-                        <a:t>90.2%</a:t>
+                        <a:t>90.4%</a:t>
                       </a:r>
                       <a:endParaRPr lang="en-US" sz="700" dirty="0"/>
                     </a:p>
@@ -18443,7 +19196,7 @@
                             <a:srgbClr val="000000"/>
                           </a:solidFill>
                         </a:rPr>
-                        <a:t>9.03</a:t>
+                        <a:t>9.05</a:t>
                       </a:r>
                       <a:endParaRPr lang="en-US" sz="700" dirty="0"/>
                     </a:p>
@@ -18504,7 +19257,7 @@
                             <a:srgbClr val="000000"/>
                           </a:solidFill>
                         </a:rPr>
-                        <a:t>88.1%</a:t>
+                        <a:t>88.5%</a:t>
                       </a:r>
                       <a:endParaRPr lang="en-US" sz="700" dirty="0"/>
                     </a:p>
@@ -18811,7 +19564,7 @@
                             <a:srgbClr val="000000"/>
                           </a:solidFill>
                         </a:rPr>
-                        <a:t>8.96</a:t>
+                        <a:t>8.94</a:t>
                       </a:r>
                       <a:endParaRPr lang="en-US" sz="700" dirty="0"/>
                     </a:p>
@@ -18872,7 +19625,7 @@
                             <a:srgbClr val="000000"/>
                           </a:solidFill>
                         </a:rPr>
-                        <a:t>85.5%</a:t>
+                        <a:t>85.7%</a:t>
                       </a:r>
                       <a:endParaRPr lang="en-US" sz="700" dirty="0"/>
                     </a:p>
@@ -19179,7 +19932,7 @@
                             <a:srgbClr val="000000"/>
                           </a:solidFill>
                         </a:rPr>
-                        <a:t>8.91</a:t>
+                        <a:t>8.87</a:t>
                       </a:r>
                       <a:endParaRPr lang="en-US" sz="700" dirty="0"/>
                     </a:p>
@@ -19240,7 +19993,7 @@
                             <a:srgbClr val="000000"/>
                           </a:solidFill>
                         </a:rPr>
-                        <a:t>84.9%</a:t>
+                        <a:t>83.3%</a:t>
                       </a:r>
                       <a:endParaRPr lang="en-US" sz="700" dirty="0"/>
                     </a:p>
@@ -19547,7 +20300,7 @@
                             <a:srgbClr val="000000"/>
                           </a:solidFill>
                         </a:rPr>
-                        <a:t>8.86</a:t>
+                        <a:t>8.87</a:t>
                       </a:r>
                       <a:endParaRPr lang="en-US" sz="700" dirty="0"/>
                     </a:p>
@@ -19608,7 +20361,7 @@
                             <a:srgbClr val="000000"/>
                           </a:solidFill>
                         </a:rPr>
-                        <a:t>83.9%</a:t>
+                        <a:t>84.2%</a:t>
                       </a:r>
                       <a:endParaRPr lang="en-US" sz="700" dirty="0"/>
                     </a:p>
@@ -19915,7 +20668,7 @@
                             <a:srgbClr val="000000"/>
                           </a:solidFill>
                         </a:rPr>
-                        <a:t>8.79</a:t>
+                        <a:t>8.78</a:t>
                       </a:r>
                       <a:endParaRPr lang="en-US" sz="700" dirty="0"/>
                     </a:p>
@@ -19976,7 +20729,7 @@
                             <a:srgbClr val="000000"/>
                           </a:solidFill>
                         </a:rPr>
-                        <a:t>86.2%</a:t>
+                        <a:t>86.4%</a:t>
                       </a:r>
                       <a:endParaRPr lang="en-US" sz="700" dirty="0"/>
                     </a:p>
@@ -20222,7 +20975,7 @@
                             <a:srgbClr val="000000"/>
                           </a:solidFill>
                         </a:rPr>
-                        <a:t>ハートンホテル東品川</a:t>
+                        <a:t>川崎日航ホテル</a:t>
                       </a:r>
                       <a:endParaRPr lang="en-US" sz="700" dirty="0"/>
                     </a:p>
@@ -20283,7 +21036,7 @@
                             <a:srgbClr val="000000"/>
                           </a:solidFill>
                         </a:rPr>
-                        <a:t>8.68</a:t>
+                        <a:t>8.73</a:t>
                       </a:r>
                       <a:endParaRPr lang="en-US" sz="700" dirty="0"/>
                     </a:p>
@@ -20344,7 +21097,7 @@
                             <a:srgbClr val="000000"/>
                           </a:solidFill>
                         </a:rPr>
-                        <a:t>85.6%</a:t>
+                        <a:t>81.2%</a:t>
                       </a:r>
                       <a:endParaRPr lang="en-US" sz="700" dirty="0"/>
                     </a:p>
@@ -20590,7 +21343,7 @@
                             <a:srgbClr val="000000"/>
                           </a:solidFill>
                         </a:rPr>
-                        <a:t>川崎日航ホテル</a:t>
+                        <a:t>リッチモンドホテル東京目白</a:t>
                       </a:r>
                       <a:endParaRPr lang="en-US" sz="700" dirty="0"/>
                     </a:p>
@@ -20651,7 +21404,7 @@
                             <a:srgbClr val="000000"/>
                           </a:solidFill>
                         </a:rPr>
-                        <a:t>8.67</a:t>
+                        <a:t>8.69</a:t>
                       </a:r>
                       <a:endParaRPr lang="en-US" sz="700" dirty="0"/>
                     </a:p>
@@ -20712,7 +21465,7 @@
                             <a:srgbClr val="000000"/>
                           </a:solidFill>
                         </a:rPr>
-                        <a:t>81.3%</a:t>
+                        <a:t>85.8%</a:t>
                       </a:r>
                       <a:endParaRPr lang="en-US" sz="700" dirty="0"/>
                     </a:p>
@@ -20958,7 +21711,7 @@
                             <a:srgbClr val="000000"/>
                           </a:solidFill>
                         </a:rPr>
-                        <a:t>リッチモンドホテル東京目白</a:t>
+                        <a:t>ハートンホテル東品川</a:t>
                       </a:r>
                       <a:endParaRPr lang="en-US" sz="700" dirty="0"/>
                     </a:p>
@@ -21019,7 +21772,7 @@
                             <a:srgbClr val="000000"/>
                           </a:solidFill>
                         </a:rPr>
-                        <a:t>8.66</a:t>
+                        <a:t>8.65</a:t>
                       </a:r>
                       <a:endParaRPr lang="en-US" sz="700" dirty="0"/>
                     </a:p>
@@ -21387,7 +22140,7 @@
                             <a:srgbClr val="000000"/>
                           </a:solidFill>
                         </a:rPr>
-                        <a:t>8.53</a:t>
+                        <a:t>8.55</a:t>
                       </a:r>
                       <a:endParaRPr lang="en-US" sz="700" dirty="0"/>
                     </a:p>
@@ -21448,7 +22201,7 @@
                             <a:srgbClr val="000000"/>
                           </a:solidFill>
                         </a:rPr>
-                        <a:t>80.0%</a:t>
+                        <a:t>80.3%</a:t>
                       </a:r>
                       <a:endParaRPr lang="en-US" sz="700" dirty="0"/>
                     </a:p>
@@ -21755,7 +22508,7 @@
                             <a:srgbClr val="000000"/>
                           </a:solidFill>
                         </a:rPr>
-                        <a:t>8.28</a:t>
+                        <a:t>8.27</a:t>
                       </a:r>
                       <a:endParaRPr lang="en-US" sz="700" dirty="0"/>
                     </a:p>
@@ -21816,7 +22569,7 @@
                             <a:srgbClr val="000000"/>
                           </a:solidFill>
                         </a:rPr>
-                        <a:t>76.4%</a:t>
+                        <a:t>75.8%</a:t>
                       </a:r>
                       <a:endParaRPr lang="en-US" sz="700" dirty="0"/>
                     </a:p>
@@ -22123,7 +22876,7 @@
                             <a:srgbClr val="000000"/>
                           </a:solidFill>
                         </a:rPr>
-                        <a:t>8.16</a:t>
+                        <a:t>8.15</a:t>
                       </a:r>
                       <a:endParaRPr lang="en-US" sz="700" dirty="0"/>
                     </a:p>
@@ -22184,7 +22937,7 @@
                             <a:srgbClr val="000000"/>
                           </a:solidFill>
                         </a:rPr>
-                        <a:t>79.2%</a:t>
+                        <a:t>78.7%</a:t>
                       </a:r>
                       <a:endParaRPr lang="en-US" sz="700" dirty="0"/>
                     </a:p>
@@ -22491,7 +23244,7 @@
                             <a:srgbClr val="000000"/>
                           </a:solidFill>
                         </a:rPr>
-                        <a:t>8.12</a:t>
+                        <a:t>8.10</a:t>
                       </a:r>
                       <a:endParaRPr lang="en-US" sz="700" dirty="0"/>
                     </a:p>
@@ -22552,7 +23305,7 @@
                             <a:srgbClr val="000000"/>
                           </a:solidFill>
                         </a:rPr>
-                        <a:t>69.5%</a:t>
+                        <a:t>68.3%</a:t>
                       </a:r>
                       <a:endParaRPr lang="en-US" sz="700" dirty="0"/>
                     </a:p>
@@ -22859,7 +23612,7 @@
                             <a:srgbClr val="000000"/>
                           </a:solidFill>
                         </a:rPr>
-                        <a:t>7.80</a:t>
+                        <a:t>7.79</a:t>
                       </a:r>
                       <a:endParaRPr lang="en-US" sz="700" dirty="0"/>
                     </a:p>
@@ -22920,7 +23673,7 @@
                             <a:srgbClr val="000000"/>
                           </a:solidFill>
                         </a:rPr>
-                        <a:t>67.1%</a:t>
+                        <a:t>66.4%</a:t>
                       </a:r>
                       <a:endParaRPr lang="en-US" sz="700" dirty="0"/>
                     </a:p>
@@ -23227,7 +23980,7 @@
                             <a:srgbClr val="000000"/>
                           </a:solidFill>
                         </a:rPr>
-                        <a:t>7.53</a:t>
+                        <a:t>7.46</a:t>
                       </a:r>
                       <a:endParaRPr lang="en-US" sz="700" dirty="0"/>
                     </a:p>
@@ -23288,7 +24041,7 @@
                             <a:srgbClr val="000000"/>
                           </a:solidFill>
                         </a:rPr>
-                        <a:t>70.3%</a:t>
+                        <a:t>69.5%</a:t>
                       </a:r>
                       <a:endParaRPr lang="en-US" sz="700" dirty="0"/>
                     </a:p>
@@ -23346,10 +24099,10 @@
                       <a:r>
                         <a:rPr lang="en-US" sz="700" b="1" dirty="0">
                           <a:solidFill>
-                            <a:srgbClr val="FF9800"/>
+                            <a:srgbClr val="E74C3C"/>
                           </a:solidFill>
                         </a:rPr>
-                        <a:t>HIGH</a:t>
+                        <a:t>URGENT</a:t>
                       </a:r>
                       <a:endParaRPr lang="en-US" sz="700" dirty="0"/>
                     </a:p>
@@ -23392,7 +24145,7 @@
                       <a:tailEnd type="none" w="med" len="med"/>
                     </a:lnB>
                     <a:solidFill>
-                      <a:srgbClr val="FFF3E0"/>
+                      <a:srgbClr val="FFEBEE"/>
                     </a:solidFill>
                   </a:tcPr>
                 </a:tc>
@@ -23595,7 +24348,7 @@
                             <a:srgbClr val="000000"/>
                           </a:solidFill>
                         </a:rPr>
-                        <a:t>7.39</a:t>
+                        <a:t>7.45</a:t>
                       </a:r>
                       <a:endParaRPr lang="en-US" sz="700" dirty="0"/>
                     </a:p>
@@ -23656,7 +24409,7 @@
                             <a:srgbClr val="000000"/>
                           </a:solidFill>
                         </a:rPr>
-                        <a:t>63.3%</a:t>
+                        <a:t>64.7%</a:t>
                       </a:r>
                       <a:endParaRPr lang="en-US" sz="700" dirty="0"/>
                     </a:p>
@@ -23963,7 +24716,7 @@
                             <a:srgbClr val="000000"/>
                           </a:solidFill>
                         </a:rPr>
-                        <a:t>7.07</a:t>
+                        <a:t>7.11</a:t>
                       </a:r>
                       <a:endParaRPr lang="en-US" sz="700" dirty="0"/>
                     </a:p>
@@ -24024,7 +24777,7 @@
                             <a:srgbClr val="000000"/>
                           </a:solidFill>
                         </a:rPr>
-                        <a:t>58.2%</a:t>
+                        <a:t>58.6%</a:t>
                       </a:r>
                       <a:endParaRPr lang="en-US" sz="700" dirty="0"/>
                     </a:p>
@@ -25758,7 +26511,7 @@
                             <a:srgbClr val="000000"/>
                           </a:solidFill>
                         </a:rPr>
-                        <a:t>25</a:t>
+                        <a:t>24</a:t>
                       </a:r>
                       <a:endParaRPr lang="en-US" sz="800" dirty="0"/>
                     </a:p>
@@ -26189,7 +26942,499 @@
                             <a:srgbClr val="000000"/>
                           </a:solidFill>
                         </a:rPr>
+                        <a:t>シミ・汚れ跡</a:t>
+                      </a:r>
+                      <a:endParaRPr lang="en-US" sz="800" dirty="0"/>
+                    </a:p>
+                  </a:txBody>
+                  <a:tcPr marL="91440" marR="91440" marT="45720" marB="45720">
+                    <a:lnL w="6350" cap="flat" cmpd="sng" algn="ctr">
+                      <a:solidFill>
+                        <a:srgbClr val="CCCCCC"/>
+                      </a:solidFill>
+                      <a:prstDash val="solid"/>
+                      <a:round/>
+                      <a:headEnd type="none" w="med" len="med"/>
+                      <a:tailEnd type="none" w="med" len="med"/>
+                    </a:lnL>
+                    <a:lnR w="6350" cap="flat" cmpd="sng" algn="ctr">
+                      <a:solidFill>
+                        <a:srgbClr val="CCCCCC"/>
+                      </a:solidFill>
+                      <a:prstDash val="solid"/>
+                      <a:round/>
+                      <a:headEnd type="none" w="med" len="med"/>
+                      <a:tailEnd type="none" w="med" len="med"/>
+                    </a:lnR>
+                    <a:lnT w="6350" cap="flat" cmpd="sng" algn="ctr">
+                      <a:solidFill>
+                        <a:srgbClr val="CCCCCC"/>
+                      </a:solidFill>
+                      <a:prstDash val="solid"/>
+                      <a:round/>
+                      <a:headEnd type="none" w="med" len="med"/>
+                      <a:tailEnd type="none" w="med" len="med"/>
+                    </a:lnT>
+                    <a:lnB w="6350" cap="flat" cmpd="sng" algn="ctr">
+                      <a:solidFill>
+                        <a:srgbClr val="CCCCCC"/>
+                      </a:solidFill>
+                      <a:prstDash val="solid"/>
+                      <a:round/>
+                      <a:headEnd type="none" w="med" len="med"/>
+                      <a:tailEnd type="none" w="med" len="med"/>
+                    </a:lnB>
+                    <a:solidFill>
+                      <a:srgbClr val="F5F7FA"/>
+                    </a:solidFill>
+                  </a:tcPr>
+                </a:tc>
+                <a:tc>
+                  <a:txBody>
+                    <a:bodyPr/>
+                    <a:lstStyle/>
+                    <a:p>
+                      <a:pPr algn="ctr" indent="0" marL="0">
+                        <a:buNone/>
+                      </a:pPr>
+                      <a:r>
+                        <a:rPr lang="en-US" sz="800" b="1" dirty="0">
+                          <a:solidFill>
+                            <a:srgbClr val="000000"/>
+                          </a:solidFill>
+                        </a:rPr>
+                        <a:t>9</a:t>
+                      </a:r>
+                      <a:endParaRPr lang="en-US" sz="800" dirty="0"/>
+                    </a:p>
+                  </a:txBody>
+                  <a:tcPr marL="91440" marR="91440" marT="45720" marB="45720">
+                    <a:lnL w="6350" cap="flat" cmpd="sng" algn="ctr">
+                      <a:solidFill>
+                        <a:srgbClr val="CCCCCC"/>
+                      </a:solidFill>
+                      <a:prstDash val="solid"/>
+                      <a:round/>
+                      <a:headEnd type="none" w="med" len="med"/>
+                      <a:tailEnd type="none" w="med" len="med"/>
+                    </a:lnL>
+                    <a:lnR w="6350" cap="flat" cmpd="sng" algn="ctr">
+                      <a:solidFill>
+                        <a:srgbClr val="CCCCCC"/>
+                      </a:solidFill>
+                      <a:prstDash val="solid"/>
+                      <a:round/>
+                      <a:headEnd type="none" w="med" len="med"/>
+                      <a:tailEnd type="none" w="med" len="med"/>
+                    </a:lnR>
+                    <a:lnT w="6350" cap="flat" cmpd="sng" algn="ctr">
+                      <a:solidFill>
+                        <a:srgbClr val="CCCCCC"/>
+                      </a:solidFill>
+                      <a:prstDash val="solid"/>
+                      <a:round/>
+                      <a:headEnd type="none" w="med" len="med"/>
+                      <a:tailEnd type="none" w="med" len="med"/>
+                    </a:lnT>
+                    <a:lnB w="6350" cap="flat" cmpd="sng" algn="ctr">
+                      <a:solidFill>
+                        <a:srgbClr val="CCCCCC"/>
+                      </a:solidFill>
+                      <a:prstDash val="solid"/>
+                      <a:round/>
+                      <a:headEnd type="none" w="med" len="med"/>
+                      <a:tailEnd type="none" w="med" len="med"/>
+                    </a:lnB>
+                    <a:solidFill>
+                      <a:srgbClr val="F5F7FA"/>
+                    </a:solidFill>
+                  </a:tcPr>
+                </a:tc>
+                <a:tc>
+                  <a:txBody>
+                    <a:bodyPr/>
+                    <a:lstStyle/>
+                    <a:p>
+                      <a:pPr algn="ctr" indent="0" marL="0">
+                        <a:buNone/>
+                      </a:pPr>
+                      <a:r>
+                        <a:rPr lang="en-US" sz="800" dirty="0">
+                          <a:solidFill>
+                            <a:srgbClr val="000000"/>
+                          </a:solidFill>
+                        </a:rPr>
+                        <a:t>4/19</a:t>
+                      </a:r>
+                      <a:endParaRPr lang="en-US" sz="800" dirty="0"/>
+                    </a:p>
+                  </a:txBody>
+                  <a:tcPr marL="91440" marR="91440" marT="45720" marB="45720">
+                    <a:lnL w="6350" cap="flat" cmpd="sng" algn="ctr">
+                      <a:solidFill>
+                        <a:srgbClr val="CCCCCC"/>
+                      </a:solidFill>
+                      <a:prstDash val="solid"/>
+                      <a:round/>
+                      <a:headEnd type="none" w="med" len="med"/>
+                      <a:tailEnd type="none" w="med" len="med"/>
+                    </a:lnL>
+                    <a:lnR w="6350" cap="flat" cmpd="sng" algn="ctr">
+                      <a:solidFill>
+                        <a:srgbClr val="CCCCCC"/>
+                      </a:solidFill>
+                      <a:prstDash val="solid"/>
+                      <a:round/>
+                      <a:headEnd type="none" w="med" len="med"/>
+                      <a:tailEnd type="none" w="med" len="med"/>
+                    </a:lnR>
+                    <a:lnT w="6350" cap="flat" cmpd="sng" algn="ctr">
+                      <a:solidFill>
+                        <a:srgbClr val="CCCCCC"/>
+                      </a:solidFill>
+                      <a:prstDash val="solid"/>
+                      <a:round/>
+                      <a:headEnd type="none" w="med" len="med"/>
+                      <a:tailEnd type="none" w="med" len="med"/>
+                    </a:lnT>
+                    <a:lnB w="6350" cap="flat" cmpd="sng" algn="ctr">
+                      <a:solidFill>
+                        <a:srgbClr val="CCCCCC"/>
+                      </a:solidFill>
+                      <a:prstDash val="solid"/>
+                      <a:round/>
+                      <a:headEnd type="none" w="med" len="med"/>
+                      <a:tailEnd type="none" w="med" len="med"/>
+                    </a:lnB>
+                    <a:solidFill>
+                      <a:srgbClr val="F5F7FA"/>
+                    </a:solidFill>
+                  </a:tcPr>
+                </a:tc>
+                <a:tc>
+                  <a:txBody>
+                    <a:bodyPr/>
+                    <a:lstStyle/>
+                    <a:p>
+                      <a:pPr algn="ctr" indent="0" marL="0">
+                        <a:buNone/>
+                      </a:pPr>
+                      <a:r>
+                        <a:rPr lang="en-US" sz="800" b="1" dirty="0">
+                          <a:solidFill>
+                            <a:srgbClr val="FF9800"/>
+                          </a:solidFill>
+                        </a:rPr>
+                        <a:t>HIGH</a:t>
+                      </a:r>
+                      <a:endParaRPr lang="en-US" sz="800" dirty="0"/>
+                    </a:p>
+                  </a:txBody>
+                  <a:tcPr marL="91440" marR="91440" marT="45720" marB="45720">
+                    <a:lnL w="6350" cap="flat" cmpd="sng" algn="ctr">
+                      <a:solidFill>
+                        <a:srgbClr val="CCCCCC"/>
+                      </a:solidFill>
+                      <a:prstDash val="solid"/>
+                      <a:round/>
+                      <a:headEnd type="none" w="med" len="med"/>
+                      <a:tailEnd type="none" w="med" len="med"/>
+                    </a:lnL>
+                    <a:lnR w="6350" cap="flat" cmpd="sng" algn="ctr">
+                      <a:solidFill>
+                        <a:srgbClr val="CCCCCC"/>
+                      </a:solidFill>
+                      <a:prstDash val="solid"/>
+                      <a:round/>
+                      <a:headEnd type="none" w="med" len="med"/>
+                      <a:tailEnd type="none" w="med" len="med"/>
+                    </a:lnR>
+                    <a:lnT w="6350" cap="flat" cmpd="sng" algn="ctr">
+                      <a:solidFill>
+                        <a:srgbClr val="CCCCCC"/>
+                      </a:solidFill>
+                      <a:prstDash val="solid"/>
+                      <a:round/>
+                      <a:headEnd type="none" w="med" len="med"/>
+                      <a:tailEnd type="none" w="med" len="med"/>
+                    </a:lnT>
+                    <a:lnB w="6350" cap="flat" cmpd="sng" algn="ctr">
+                      <a:solidFill>
+                        <a:srgbClr val="CCCCCC"/>
+                      </a:solidFill>
+                      <a:prstDash val="solid"/>
+                      <a:round/>
+                      <a:headEnd type="none" w="med" len="med"/>
+                      <a:tailEnd type="none" w="med" len="med"/>
+                    </a:lnB>
+                    <a:solidFill>
+                      <a:srgbClr val="F5F7FA"/>
+                    </a:solidFill>
+                  </a:tcPr>
+                </a:tc>
+              </a:tr>
+              <a:tr h="0">
+                <a:tc>
+                  <a:txBody>
+                    <a:bodyPr/>
+                    <a:lstStyle/>
+                    <a:p>
+                      <a:pPr indent="0" marL="0">
+                        <a:buNone/>
+                      </a:pPr>
+                      <a:r>
+                        <a:rPr lang="en-US" sz="800" b="1" dirty="0">
+                          <a:solidFill>
+                            <a:srgbClr val="000000"/>
+                          </a:solidFill>
+                        </a:rPr>
                         <a:t>カビ・モールド</a:t>
+                      </a:r>
+                      <a:endParaRPr lang="en-US" sz="800" dirty="0"/>
+                    </a:p>
+                  </a:txBody>
+                  <a:tcPr marL="91440" marR="91440" marT="45720" marB="45720">
+                    <a:lnL w="6350" cap="flat" cmpd="sng" algn="ctr">
+                      <a:solidFill>
+                        <a:srgbClr val="CCCCCC"/>
+                      </a:solidFill>
+                      <a:prstDash val="solid"/>
+                      <a:round/>
+                      <a:headEnd type="none" w="med" len="med"/>
+                      <a:tailEnd type="none" w="med" len="med"/>
+                    </a:lnL>
+                    <a:lnR w="6350" cap="flat" cmpd="sng" algn="ctr">
+                      <a:solidFill>
+                        <a:srgbClr val="CCCCCC"/>
+                      </a:solidFill>
+                      <a:prstDash val="solid"/>
+                      <a:round/>
+                      <a:headEnd type="none" w="med" len="med"/>
+                      <a:tailEnd type="none" w="med" len="med"/>
+                    </a:lnR>
+                    <a:lnT w="6350" cap="flat" cmpd="sng" algn="ctr">
+                      <a:solidFill>
+                        <a:srgbClr val="CCCCCC"/>
+                      </a:solidFill>
+                      <a:prstDash val="solid"/>
+                      <a:round/>
+                      <a:headEnd type="none" w="med" len="med"/>
+                      <a:tailEnd type="none" w="med" len="med"/>
+                    </a:lnT>
+                    <a:lnB w="6350" cap="flat" cmpd="sng" algn="ctr">
+                      <a:solidFill>
+                        <a:srgbClr val="CCCCCC"/>
+                      </a:solidFill>
+                      <a:prstDash val="solid"/>
+                      <a:round/>
+                      <a:headEnd type="none" w="med" len="med"/>
+                      <a:tailEnd type="none" w="med" len="med"/>
+                    </a:lnB>
+                    <a:solidFill>
+                      <a:srgbClr val="FFFFFF"/>
+                    </a:solidFill>
+                  </a:tcPr>
+                </a:tc>
+                <a:tc>
+                  <a:txBody>
+                    <a:bodyPr/>
+                    <a:lstStyle/>
+                    <a:p>
+                      <a:pPr algn="ctr" indent="0" marL="0">
+                        <a:buNone/>
+                      </a:pPr>
+                      <a:r>
+                        <a:rPr lang="en-US" sz="800" b="1" dirty="0">
+                          <a:solidFill>
+                            <a:srgbClr val="000000"/>
+                          </a:solidFill>
+                        </a:rPr>
+                        <a:t>8</a:t>
+                      </a:r>
+                      <a:endParaRPr lang="en-US" sz="800" dirty="0"/>
+                    </a:p>
+                  </a:txBody>
+                  <a:tcPr marL="91440" marR="91440" marT="45720" marB="45720">
+                    <a:lnL w="6350" cap="flat" cmpd="sng" algn="ctr">
+                      <a:solidFill>
+                        <a:srgbClr val="CCCCCC"/>
+                      </a:solidFill>
+                      <a:prstDash val="solid"/>
+                      <a:round/>
+                      <a:headEnd type="none" w="med" len="med"/>
+                      <a:tailEnd type="none" w="med" len="med"/>
+                    </a:lnL>
+                    <a:lnR w="6350" cap="flat" cmpd="sng" algn="ctr">
+                      <a:solidFill>
+                        <a:srgbClr val="CCCCCC"/>
+                      </a:solidFill>
+                      <a:prstDash val="solid"/>
+                      <a:round/>
+                      <a:headEnd type="none" w="med" len="med"/>
+                      <a:tailEnd type="none" w="med" len="med"/>
+                    </a:lnR>
+                    <a:lnT w="6350" cap="flat" cmpd="sng" algn="ctr">
+                      <a:solidFill>
+                        <a:srgbClr val="CCCCCC"/>
+                      </a:solidFill>
+                      <a:prstDash val="solid"/>
+                      <a:round/>
+                      <a:headEnd type="none" w="med" len="med"/>
+                      <a:tailEnd type="none" w="med" len="med"/>
+                    </a:lnT>
+                    <a:lnB w="6350" cap="flat" cmpd="sng" algn="ctr">
+                      <a:solidFill>
+                        <a:srgbClr val="CCCCCC"/>
+                      </a:solidFill>
+                      <a:prstDash val="solid"/>
+                      <a:round/>
+                      <a:headEnd type="none" w="med" len="med"/>
+                      <a:tailEnd type="none" w="med" len="med"/>
+                    </a:lnB>
+                    <a:solidFill>
+                      <a:srgbClr val="FFFFFF"/>
+                    </a:solidFill>
+                  </a:tcPr>
+                </a:tc>
+                <a:tc>
+                  <a:txBody>
+                    <a:bodyPr/>
+                    <a:lstStyle/>
+                    <a:p>
+                      <a:pPr algn="ctr" indent="0" marL="0">
+                        <a:buNone/>
+                      </a:pPr>
+                      <a:r>
+                        <a:rPr lang="en-US" sz="800" dirty="0">
+                          <a:solidFill>
+                            <a:srgbClr val="000000"/>
+                          </a:solidFill>
+                        </a:rPr>
+                        <a:t>5/19</a:t>
+                      </a:r>
+                      <a:endParaRPr lang="en-US" sz="800" dirty="0"/>
+                    </a:p>
+                  </a:txBody>
+                  <a:tcPr marL="91440" marR="91440" marT="45720" marB="45720">
+                    <a:lnL w="6350" cap="flat" cmpd="sng" algn="ctr">
+                      <a:solidFill>
+                        <a:srgbClr val="CCCCCC"/>
+                      </a:solidFill>
+                      <a:prstDash val="solid"/>
+                      <a:round/>
+                      <a:headEnd type="none" w="med" len="med"/>
+                      <a:tailEnd type="none" w="med" len="med"/>
+                    </a:lnL>
+                    <a:lnR w="6350" cap="flat" cmpd="sng" algn="ctr">
+                      <a:solidFill>
+                        <a:srgbClr val="CCCCCC"/>
+                      </a:solidFill>
+                      <a:prstDash val="solid"/>
+                      <a:round/>
+                      <a:headEnd type="none" w="med" len="med"/>
+                      <a:tailEnd type="none" w="med" len="med"/>
+                    </a:lnR>
+                    <a:lnT w="6350" cap="flat" cmpd="sng" algn="ctr">
+                      <a:solidFill>
+                        <a:srgbClr val="CCCCCC"/>
+                      </a:solidFill>
+                      <a:prstDash val="solid"/>
+                      <a:round/>
+                      <a:headEnd type="none" w="med" len="med"/>
+                      <a:tailEnd type="none" w="med" len="med"/>
+                    </a:lnT>
+                    <a:lnB w="6350" cap="flat" cmpd="sng" algn="ctr">
+                      <a:solidFill>
+                        <a:srgbClr val="CCCCCC"/>
+                      </a:solidFill>
+                      <a:prstDash val="solid"/>
+                      <a:round/>
+                      <a:headEnd type="none" w="med" len="med"/>
+                      <a:tailEnd type="none" w="med" len="med"/>
+                    </a:lnB>
+                    <a:solidFill>
+                      <a:srgbClr val="FFFFFF"/>
+                    </a:solidFill>
+                  </a:tcPr>
+                </a:tc>
+                <a:tc>
+                  <a:txBody>
+                    <a:bodyPr/>
+                    <a:lstStyle/>
+                    <a:p>
+                      <a:pPr algn="ctr" indent="0" marL="0">
+                        <a:buNone/>
+                      </a:pPr>
+                      <a:r>
+                        <a:rPr lang="en-US" sz="800" b="1" dirty="0">
+                          <a:solidFill>
+                            <a:srgbClr val="FF9800"/>
+                          </a:solidFill>
+                        </a:rPr>
+                        <a:t>HIGH</a:t>
+                      </a:r>
+                      <a:endParaRPr lang="en-US" sz="800" dirty="0"/>
+                    </a:p>
+                  </a:txBody>
+                  <a:tcPr marL="91440" marR="91440" marT="45720" marB="45720">
+                    <a:lnL w="6350" cap="flat" cmpd="sng" algn="ctr">
+                      <a:solidFill>
+                        <a:srgbClr val="CCCCCC"/>
+                      </a:solidFill>
+                      <a:prstDash val="solid"/>
+                      <a:round/>
+                      <a:headEnd type="none" w="med" len="med"/>
+                      <a:tailEnd type="none" w="med" len="med"/>
+                    </a:lnL>
+                    <a:lnR w="6350" cap="flat" cmpd="sng" algn="ctr">
+                      <a:solidFill>
+                        <a:srgbClr val="CCCCCC"/>
+                      </a:solidFill>
+                      <a:prstDash val="solid"/>
+                      <a:round/>
+                      <a:headEnd type="none" w="med" len="med"/>
+                      <a:tailEnd type="none" w="med" len="med"/>
+                    </a:lnR>
+                    <a:lnT w="6350" cap="flat" cmpd="sng" algn="ctr">
+                      <a:solidFill>
+                        <a:srgbClr val="CCCCCC"/>
+                      </a:solidFill>
+                      <a:prstDash val="solid"/>
+                      <a:round/>
+                      <a:headEnd type="none" w="med" len="med"/>
+                      <a:tailEnd type="none" w="med" len="med"/>
+                    </a:lnT>
+                    <a:lnB w="6350" cap="flat" cmpd="sng" algn="ctr">
+                      <a:solidFill>
+                        <a:srgbClr val="CCCCCC"/>
+                      </a:solidFill>
+                      <a:prstDash val="solid"/>
+                      <a:round/>
+                      <a:headEnd type="none" w="med" len="med"/>
+                      <a:tailEnd type="none" w="med" len="med"/>
+                    </a:lnB>
+                    <a:solidFill>
+                      <a:srgbClr val="FFFFFF"/>
+                    </a:solidFill>
+                  </a:tcPr>
+                </a:tc>
+              </a:tr>
+              <a:tr h="0">
+                <a:tc>
+                  <a:txBody>
+                    <a:bodyPr/>
+                    <a:lstStyle/>
+                    <a:p>
+                      <a:pPr indent="0" marL="0">
+                        <a:buNone/>
+                      </a:pPr>
+                      <a:r>
+                        <a:rPr lang="en-US" sz="800" b="1" dirty="0">
+                          <a:solidFill>
+                            <a:srgbClr val="000000"/>
+                          </a:solidFill>
+                        </a:rPr>
+                        <a:t>毛髪・髪の毛</a:t>
                       </a:r>
                       <a:endParaRPr lang="en-US" sz="800" dirty="0"/>
                     </a:p>
@@ -26311,499 +27556,7 @@
                             <a:srgbClr val="000000"/>
                           </a:solidFill>
                         </a:rPr>
-                        <a:t>5/19</a:t>
-                      </a:r>
-                      <a:endParaRPr lang="en-US" sz="800" dirty="0"/>
-                    </a:p>
-                  </a:txBody>
-                  <a:tcPr marL="91440" marR="91440" marT="45720" marB="45720">
-                    <a:lnL w="6350" cap="flat" cmpd="sng" algn="ctr">
-                      <a:solidFill>
-                        <a:srgbClr val="CCCCCC"/>
-                      </a:solidFill>
-                      <a:prstDash val="solid"/>
-                      <a:round/>
-                      <a:headEnd type="none" w="med" len="med"/>
-                      <a:tailEnd type="none" w="med" len="med"/>
-                    </a:lnL>
-                    <a:lnR w="6350" cap="flat" cmpd="sng" algn="ctr">
-                      <a:solidFill>
-                        <a:srgbClr val="CCCCCC"/>
-                      </a:solidFill>
-                      <a:prstDash val="solid"/>
-                      <a:round/>
-                      <a:headEnd type="none" w="med" len="med"/>
-                      <a:tailEnd type="none" w="med" len="med"/>
-                    </a:lnR>
-                    <a:lnT w="6350" cap="flat" cmpd="sng" algn="ctr">
-                      <a:solidFill>
-                        <a:srgbClr val="CCCCCC"/>
-                      </a:solidFill>
-                      <a:prstDash val="solid"/>
-                      <a:round/>
-                      <a:headEnd type="none" w="med" len="med"/>
-                      <a:tailEnd type="none" w="med" len="med"/>
-                    </a:lnT>
-                    <a:lnB w="6350" cap="flat" cmpd="sng" algn="ctr">
-                      <a:solidFill>
-                        <a:srgbClr val="CCCCCC"/>
-                      </a:solidFill>
-                      <a:prstDash val="solid"/>
-                      <a:round/>
-                      <a:headEnd type="none" w="med" len="med"/>
-                      <a:tailEnd type="none" w="med" len="med"/>
-                    </a:lnB>
-                    <a:solidFill>
-                      <a:srgbClr val="F5F7FA"/>
-                    </a:solidFill>
-                  </a:tcPr>
-                </a:tc>
-                <a:tc>
-                  <a:txBody>
-                    <a:bodyPr/>
-                    <a:lstStyle/>
-                    <a:p>
-                      <a:pPr algn="ctr" indent="0" marL="0">
-                        <a:buNone/>
-                      </a:pPr>
-                      <a:r>
-                        <a:rPr lang="en-US" sz="800" b="1" dirty="0">
-                          <a:solidFill>
-                            <a:srgbClr val="FF9800"/>
-                          </a:solidFill>
-                        </a:rPr>
-                        <a:t>HIGH</a:t>
-                      </a:r>
-                      <a:endParaRPr lang="en-US" sz="800" dirty="0"/>
-                    </a:p>
-                  </a:txBody>
-                  <a:tcPr marL="91440" marR="91440" marT="45720" marB="45720">
-                    <a:lnL w="6350" cap="flat" cmpd="sng" algn="ctr">
-                      <a:solidFill>
-                        <a:srgbClr val="CCCCCC"/>
-                      </a:solidFill>
-                      <a:prstDash val="solid"/>
-                      <a:round/>
-                      <a:headEnd type="none" w="med" len="med"/>
-                      <a:tailEnd type="none" w="med" len="med"/>
-                    </a:lnL>
-                    <a:lnR w="6350" cap="flat" cmpd="sng" algn="ctr">
-                      <a:solidFill>
-                        <a:srgbClr val="CCCCCC"/>
-                      </a:solidFill>
-                      <a:prstDash val="solid"/>
-                      <a:round/>
-                      <a:headEnd type="none" w="med" len="med"/>
-                      <a:tailEnd type="none" w="med" len="med"/>
-                    </a:lnR>
-                    <a:lnT w="6350" cap="flat" cmpd="sng" algn="ctr">
-                      <a:solidFill>
-                        <a:srgbClr val="CCCCCC"/>
-                      </a:solidFill>
-                      <a:prstDash val="solid"/>
-                      <a:round/>
-                      <a:headEnd type="none" w="med" len="med"/>
-                      <a:tailEnd type="none" w="med" len="med"/>
-                    </a:lnT>
-                    <a:lnB w="6350" cap="flat" cmpd="sng" algn="ctr">
-                      <a:solidFill>
-                        <a:srgbClr val="CCCCCC"/>
-                      </a:solidFill>
-                      <a:prstDash val="solid"/>
-                      <a:round/>
-                      <a:headEnd type="none" w="med" len="med"/>
-                      <a:tailEnd type="none" w="med" len="med"/>
-                    </a:lnB>
-                    <a:solidFill>
-                      <a:srgbClr val="F5F7FA"/>
-                    </a:solidFill>
-                  </a:tcPr>
-                </a:tc>
-              </a:tr>
-              <a:tr h="0">
-                <a:tc>
-                  <a:txBody>
-                    <a:bodyPr/>
-                    <a:lstStyle/>
-                    <a:p>
-                      <a:pPr indent="0" marL="0">
-                        <a:buNone/>
-                      </a:pPr>
-                      <a:r>
-                        <a:rPr lang="en-US" sz="800" b="1" dirty="0">
-                          <a:solidFill>
-                            <a:srgbClr val="000000"/>
-                          </a:solidFill>
-                        </a:rPr>
-                        <a:t>毛髪・髪の毛</a:t>
-                      </a:r>
-                      <a:endParaRPr lang="en-US" sz="800" dirty="0"/>
-                    </a:p>
-                  </a:txBody>
-                  <a:tcPr marL="91440" marR="91440" marT="45720" marB="45720">
-                    <a:lnL w="6350" cap="flat" cmpd="sng" algn="ctr">
-                      <a:solidFill>
-                        <a:srgbClr val="CCCCCC"/>
-                      </a:solidFill>
-                      <a:prstDash val="solid"/>
-                      <a:round/>
-                      <a:headEnd type="none" w="med" len="med"/>
-                      <a:tailEnd type="none" w="med" len="med"/>
-                    </a:lnL>
-                    <a:lnR w="6350" cap="flat" cmpd="sng" algn="ctr">
-                      <a:solidFill>
-                        <a:srgbClr val="CCCCCC"/>
-                      </a:solidFill>
-                      <a:prstDash val="solid"/>
-                      <a:round/>
-                      <a:headEnd type="none" w="med" len="med"/>
-                      <a:tailEnd type="none" w="med" len="med"/>
-                    </a:lnR>
-                    <a:lnT w="6350" cap="flat" cmpd="sng" algn="ctr">
-                      <a:solidFill>
-                        <a:srgbClr val="CCCCCC"/>
-                      </a:solidFill>
-                      <a:prstDash val="solid"/>
-                      <a:round/>
-                      <a:headEnd type="none" w="med" len="med"/>
-                      <a:tailEnd type="none" w="med" len="med"/>
-                    </a:lnT>
-                    <a:lnB w="6350" cap="flat" cmpd="sng" algn="ctr">
-                      <a:solidFill>
-                        <a:srgbClr val="CCCCCC"/>
-                      </a:solidFill>
-                      <a:prstDash val="solid"/>
-                      <a:round/>
-                      <a:headEnd type="none" w="med" len="med"/>
-                      <a:tailEnd type="none" w="med" len="med"/>
-                    </a:lnB>
-                    <a:solidFill>
-                      <a:srgbClr val="FFFFFF"/>
-                    </a:solidFill>
-                  </a:tcPr>
-                </a:tc>
-                <a:tc>
-                  <a:txBody>
-                    <a:bodyPr/>
-                    <a:lstStyle/>
-                    <a:p>
-                      <a:pPr algn="ctr" indent="0" marL="0">
-                        <a:buNone/>
-                      </a:pPr>
-                      <a:r>
-                        <a:rPr lang="en-US" sz="800" b="1" dirty="0">
-                          <a:solidFill>
-                            <a:srgbClr val="000000"/>
-                          </a:solidFill>
-                        </a:rPr>
-                        <a:t>8</a:t>
-                      </a:r>
-                      <a:endParaRPr lang="en-US" sz="800" dirty="0"/>
-                    </a:p>
-                  </a:txBody>
-                  <a:tcPr marL="91440" marR="91440" marT="45720" marB="45720">
-                    <a:lnL w="6350" cap="flat" cmpd="sng" algn="ctr">
-                      <a:solidFill>
-                        <a:srgbClr val="CCCCCC"/>
-                      </a:solidFill>
-                      <a:prstDash val="solid"/>
-                      <a:round/>
-                      <a:headEnd type="none" w="med" len="med"/>
-                      <a:tailEnd type="none" w="med" len="med"/>
-                    </a:lnL>
-                    <a:lnR w="6350" cap="flat" cmpd="sng" algn="ctr">
-                      <a:solidFill>
-                        <a:srgbClr val="CCCCCC"/>
-                      </a:solidFill>
-                      <a:prstDash val="solid"/>
-                      <a:round/>
-                      <a:headEnd type="none" w="med" len="med"/>
-                      <a:tailEnd type="none" w="med" len="med"/>
-                    </a:lnR>
-                    <a:lnT w="6350" cap="flat" cmpd="sng" algn="ctr">
-                      <a:solidFill>
-                        <a:srgbClr val="CCCCCC"/>
-                      </a:solidFill>
-                      <a:prstDash val="solid"/>
-                      <a:round/>
-                      <a:headEnd type="none" w="med" len="med"/>
-                      <a:tailEnd type="none" w="med" len="med"/>
-                    </a:lnT>
-                    <a:lnB w="6350" cap="flat" cmpd="sng" algn="ctr">
-                      <a:solidFill>
-                        <a:srgbClr val="CCCCCC"/>
-                      </a:solidFill>
-                      <a:prstDash val="solid"/>
-                      <a:round/>
-                      <a:headEnd type="none" w="med" len="med"/>
-                      <a:tailEnd type="none" w="med" len="med"/>
-                    </a:lnB>
-                    <a:solidFill>
-                      <a:srgbClr val="FFFFFF"/>
-                    </a:solidFill>
-                  </a:tcPr>
-                </a:tc>
-                <a:tc>
-                  <a:txBody>
-                    <a:bodyPr/>
-                    <a:lstStyle/>
-                    <a:p>
-                      <a:pPr algn="ctr" indent="0" marL="0">
-                        <a:buNone/>
-                      </a:pPr>
-                      <a:r>
-                        <a:rPr lang="en-US" sz="800" dirty="0">
-                          <a:solidFill>
-                            <a:srgbClr val="000000"/>
-                          </a:solidFill>
-                        </a:rPr>
                         <a:t>8/19</a:t>
-                      </a:r>
-                      <a:endParaRPr lang="en-US" sz="800" dirty="0"/>
-                    </a:p>
-                  </a:txBody>
-                  <a:tcPr marL="91440" marR="91440" marT="45720" marB="45720">
-                    <a:lnL w="6350" cap="flat" cmpd="sng" algn="ctr">
-                      <a:solidFill>
-                        <a:srgbClr val="CCCCCC"/>
-                      </a:solidFill>
-                      <a:prstDash val="solid"/>
-                      <a:round/>
-                      <a:headEnd type="none" w="med" len="med"/>
-                      <a:tailEnd type="none" w="med" len="med"/>
-                    </a:lnL>
-                    <a:lnR w="6350" cap="flat" cmpd="sng" algn="ctr">
-                      <a:solidFill>
-                        <a:srgbClr val="CCCCCC"/>
-                      </a:solidFill>
-                      <a:prstDash val="solid"/>
-                      <a:round/>
-                      <a:headEnd type="none" w="med" len="med"/>
-                      <a:tailEnd type="none" w="med" len="med"/>
-                    </a:lnR>
-                    <a:lnT w="6350" cap="flat" cmpd="sng" algn="ctr">
-                      <a:solidFill>
-                        <a:srgbClr val="CCCCCC"/>
-                      </a:solidFill>
-                      <a:prstDash val="solid"/>
-                      <a:round/>
-                      <a:headEnd type="none" w="med" len="med"/>
-                      <a:tailEnd type="none" w="med" len="med"/>
-                    </a:lnT>
-                    <a:lnB w="6350" cap="flat" cmpd="sng" algn="ctr">
-                      <a:solidFill>
-                        <a:srgbClr val="CCCCCC"/>
-                      </a:solidFill>
-                      <a:prstDash val="solid"/>
-                      <a:round/>
-                      <a:headEnd type="none" w="med" len="med"/>
-                      <a:tailEnd type="none" w="med" len="med"/>
-                    </a:lnB>
-                    <a:solidFill>
-                      <a:srgbClr val="FFFFFF"/>
-                    </a:solidFill>
-                  </a:tcPr>
-                </a:tc>
-                <a:tc>
-                  <a:txBody>
-                    <a:bodyPr/>
-                    <a:lstStyle/>
-                    <a:p>
-                      <a:pPr algn="ctr" indent="0" marL="0">
-                        <a:buNone/>
-                      </a:pPr>
-                      <a:r>
-                        <a:rPr lang="en-US" sz="800" b="1" dirty="0">
-                          <a:solidFill>
-                            <a:srgbClr val="FF9800"/>
-                          </a:solidFill>
-                        </a:rPr>
-                        <a:t>HIGH</a:t>
-                      </a:r>
-                      <a:endParaRPr lang="en-US" sz="800" dirty="0"/>
-                    </a:p>
-                  </a:txBody>
-                  <a:tcPr marL="91440" marR="91440" marT="45720" marB="45720">
-                    <a:lnL w="6350" cap="flat" cmpd="sng" algn="ctr">
-                      <a:solidFill>
-                        <a:srgbClr val="CCCCCC"/>
-                      </a:solidFill>
-                      <a:prstDash val="solid"/>
-                      <a:round/>
-                      <a:headEnd type="none" w="med" len="med"/>
-                      <a:tailEnd type="none" w="med" len="med"/>
-                    </a:lnL>
-                    <a:lnR w="6350" cap="flat" cmpd="sng" algn="ctr">
-                      <a:solidFill>
-                        <a:srgbClr val="CCCCCC"/>
-                      </a:solidFill>
-                      <a:prstDash val="solid"/>
-                      <a:round/>
-                      <a:headEnd type="none" w="med" len="med"/>
-                      <a:tailEnd type="none" w="med" len="med"/>
-                    </a:lnR>
-                    <a:lnT w="6350" cap="flat" cmpd="sng" algn="ctr">
-                      <a:solidFill>
-                        <a:srgbClr val="CCCCCC"/>
-                      </a:solidFill>
-                      <a:prstDash val="solid"/>
-                      <a:round/>
-                      <a:headEnd type="none" w="med" len="med"/>
-                      <a:tailEnd type="none" w="med" len="med"/>
-                    </a:lnT>
-                    <a:lnB w="6350" cap="flat" cmpd="sng" algn="ctr">
-                      <a:solidFill>
-                        <a:srgbClr val="CCCCCC"/>
-                      </a:solidFill>
-                      <a:prstDash val="solid"/>
-                      <a:round/>
-                      <a:headEnd type="none" w="med" len="med"/>
-                      <a:tailEnd type="none" w="med" len="med"/>
-                    </a:lnB>
-                    <a:solidFill>
-                      <a:srgbClr val="FFFFFF"/>
-                    </a:solidFill>
-                  </a:tcPr>
-                </a:tc>
-              </a:tr>
-              <a:tr h="0">
-                <a:tc>
-                  <a:txBody>
-                    <a:bodyPr/>
-                    <a:lstStyle/>
-                    <a:p>
-                      <a:pPr indent="0" marL="0">
-                        <a:buNone/>
-                      </a:pPr>
-                      <a:r>
-                        <a:rPr lang="en-US" sz="800" b="1" dirty="0">
-                          <a:solidFill>
-                            <a:srgbClr val="000000"/>
-                          </a:solidFill>
-                        </a:rPr>
-                        <a:t>シミ・汚れ跡</a:t>
-                      </a:r>
-                      <a:endParaRPr lang="en-US" sz="800" dirty="0"/>
-                    </a:p>
-                  </a:txBody>
-                  <a:tcPr marL="91440" marR="91440" marT="45720" marB="45720">
-                    <a:lnL w="6350" cap="flat" cmpd="sng" algn="ctr">
-                      <a:solidFill>
-                        <a:srgbClr val="CCCCCC"/>
-                      </a:solidFill>
-                      <a:prstDash val="solid"/>
-                      <a:round/>
-                      <a:headEnd type="none" w="med" len="med"/>
-                      <a:tailEnd type="none" w="med" len="med"/>
-                    </a:lnL>
-                    <a:lnR w="6350" cap="flat" cmpd="sng" algn="ctr">
-                      <a:solidFill>
-                        <a:srgbClr val="CCCCCC"/>
-                      </a:solidFill>
-                      <a:prstDash val="solid"/>
-                      <a:round/>
-                      <a:headEnd type="none" w="med" len="med"/>
-                      <a:tailEnd type="none" w="med" len="med"/>
-                    </a:lnR>
-                    <a:lnT w="6350" cap="flat" cmpd="sng" algn="ctr">
-                      <a:solidFill>
-                        <a:srgbClr val="CCCCCC"/>
-                      </a:solidFill>
-                      <a:prstDash val="solid"/>
-                      <a:round/>
-                      <a:headEnd type="none" w="med" len="med"/>
-                      <a:tailEnd type="none" w="med" len="med"/>
-                    </a:lnT>
-                    <a:lnB w="6350" cap="flat" cmpd="sng" algn="ctr">
-                      <a:solidFill>
-                        <a:srgbClr val="CCCCCC"/>
-                      </a:solidFill>
-                      <a:prstDash val="solid"/>
-                      <a:round/>
-                      <a:headEnd type="none" w="med" len="med"/>
-                      <a:tailEnd type="none" w="med" len="med"/>
-                    </a:lnB>
-                    <a:solidFill>
-                      <a:srgbClr val="F5F7FA"/>
-                    </a:solidFill>
-                  </a:tcPr>
-                </a:tc>
-                <a:tc>
-                  <a:txBody>
-                    <a:bodyPr/>
-                    <a:lstStyle/>
-                    <a:p>
-                      <a:pPr algn="ctr" indent="0" marL="0">
-                        <a:buNone/>
-                      </a:pPr>
-                      <a:r>
-                        <a:rPr lang="en-US" sz="800" b="1" dirty="0">
-                          <a:solidFill>
-                            <a:srgbClr val="000000"/>
-                          </a:solidFill>
-                        </a:rPr>
-                        <a:t>8</a:t>
-                      </a:r>
-                      <a:endParaRPr lang="en-US" sz="800" dirty="0"/>
-                    </a:p>
-                  </a:txBody>
-                  <a:tcPr marL="91440" marR="91440" marT="45720" marB="45720">
-                    <a:lnL w="6350" cap="flat" cmpd="sng" algn="ctr">
-                      <a:solidFill>
-                        <a:srgbClr val="CCCCCC"/>
-                      </a:solidFill>
-                      <a:prstDash val="solid"/>
-                      <a:round/>
-                      <a:headEnd type="none" w="med" len="med"/>
-                      <a:tailEnd type="none" w="med" len="med"/>
-                    </a:lnL>
-                    <a:lnR w="6350" cap="flat" cmpd="sng" algn="ctr">
-                      <a:solidFill>
-                        <a:srgbClr val="CCCCCC"/>
-                      </a:solidFill>
-                      <a:prstDash val="solid"/>
-                      <a:round/>
-                      <a:headEnd type="none" w="med" len="med"/>
-                      <a:tailEnd type="none" w="med" len="med"/>
-                    </a:lnR>
-                    <a:lnT w="6350" cap="flat" cmpd="sng" algn="ctr">
-                      <a:solidFill>
-                        <a:srgbClr val="CCCCCC"/>
-                      </a:solidFill>
-                      <a:prstDash val="solid"/>
-                      <a:round/>
-                      <a:headEnd type="none" w="med" len="med"/>
-                      <a:tailEnd type="none" w="med" len="med"/>
-                    </a:lnT>
-                    <a:lnB w="6350" cap="flat" cmpd="sng" algn="ctr">
-                      <a:solidFill>
-                        <a:srgbClr val="CCCCCC"/>
-                      </a:solidFill>
-                      <a:prstDash val="solid"/>
-                      <a:round/>
-                      <a:headEnd type="none" w="med" len="med"/>
-                      <a:tailEnd type="none" w="med" len="med"/>
-                    </a:lnB>
-                    <a:solidFill>
-                      <a:srgbClr val="F5F7FA"/>
-                    </a:solidFill>
-                  </a:tcPr>
-                </a:tc>
-                <a:tc>
-                  <a:txBody>
-                    <a:bodyPr/>
-                    <a:lstStyle/>
-                    <a:p>
-                      <a:pPr algn="ctr" indent="0" marL="0">
-                        <a:buNone/>
-                      </a:pPr>
-                      <a:r>
-                        <a:rPr lang="en-US" sz="800" dirty="0">
-                          <a:solidFill>
-                            <a:srgbClr val="000000"/>
-                          </a:solidFill>
-                        </a:rPr>
-                        <a:t>3/19</a:t>
                       </a:r>
                       <a:endParaRPr lang="en-US" sz="800" dirty="0"/>
                     </a:p>
@@ -27665,7 +28418,7 @@
                             <a:srgbClr val="000000"/>
                           </a:solidFill>
                         </a:rPr>
-                        <a:t>害虫</a:t>
+                        <a:t>ほこり・塵</a:t>
                       </a:r>
                       <a:endParaRPr lang="en-US" sz="800" dirty="0"/>
                     </a:p>
@@ -27911,7 +28664,7 @@
                             <a:srgbClr val="000000"/>
                           </a:solidFill>
                         </a:rPr>
-                        <a:t>ほこり・塵</a:t>
+                        <a:t>害虫</a:t>
                       </a:r>
                       <a:endParaRPr lang="en-US" sz="800" dirty="0"/>
                     </a:p>
@@ -27972,7 +28725,7 @@
                             <a:srgbClr val="000000"/>
                           </a:solidFill>
                         </a:rPr>
-                        <a:t>3</a:t>
+                        <a:t>4</a:t>
                       </a:r>
                       <a:endParaRPr lang="en-US" sz="800" dirty="0"/>
                     </a:p>
@@ -28719,6 +29472,67 @@
                             <a:srgbClr val="FFFFFF"/>
                           </a:solidFill>
                         </a:rPr>
+                        <a:t>シミ・汚れ</a:t>
+                      </a:r>
+                      <a:endParaRPr lang="en-US" sz="600" dirty="0"/>
+                    </a:p>
+                  </a:txBody>
+                  <a:tcPr marL="91440" marR="91440" marT="45720" marB="45720">
+                    <a:lnL w="6350" cap="flat" cmpd="sng" algn="ctr">
+                      <a:solidFill>
+                        <a:srgbClr val="CCCCCC"/>
+                      </a:solidFill>
+                      <a:prstDash val="solid"/>
+                      <a:round/>
+                      <a:headEnd type="none" w="med" len="med"/>
+                      <a:tailEnd type="none" w="med" len="med"/>
+                    </a:lnL>
+                    <a:lnR w="6350" cap="flat" cmpd="sng" algn="ctr">
+                      <a:solidFill>
+                        <a:srgbClr val="CCCCCC"/>
+                      </a:solidFill>
+                      <a:prstDash val="solid"/>
+                      <a:round/>
+                      <a:headEnd type="none" w="med" len="med"/>
+                      <a:tailEnd type="none" w="med" len="med"/>
+                    </a:lnR>
+                    <a:lnT w="6350" cap="flat" cmpd="sng" algn="ctr">
+                      <a:solidFill>
+                        <a:srgbClr val="CCCCCC"/>
+                      </a:solidFill>
+                      <a:prstDash val="solid"/>
+                      <a:round/>
+                      <a:headEnd type="none" w="med" len="med"/>
+                      <a:tailEnd type="none" w="med" len="med"/>
+                    </a:lnT>
+                    <a:lnB w="6350" cap="flat" cmpd="sng" algn="ctr">
+                      <a:solidFill>
+                        <a:srgbClr val="CCCCCC"/>
+                      </a:solidFill>
+                      <a:prstDash val="solid"/>
+                      <a:round/>
+                      <a:headEnd type="none" w="med" len="med"/>
+                      <a:tailEnd type="none" w="med" len="med"/>
+                    </a:lnB>
+                    <a:solidFill>
+                      <a:srgbClr val="1B3A5C"/>
+                    </a:solidFill>
+                  </a:tcPr>
+                </a:tc>
+                <a:tc>
+                  <a:txBody>
+                    <a:bodyPr/>
+                    <a:lstStyle/>
+                    <a:p>
+                      <a:pPr algn="ctr" indent="0" marL="0">
+                        <a:buNone/>
+                      </a:pPr>
+                      <a:r>
+                        <a:rPr lang="en-US" sz="600" b="1" dirty="0">
+                          <a:solidFill>
+                            <a:srgbClr val="FFFFFF"/>
+                          </a:solidFill>
+                        </a:rPr>
                         <a:t>カビ・モー</a:t>
                       </a:r>
                       <a:endParaRPr lang="en-US" sz="600" dirty="0"/>
@@ -28781,67 +29595,6 @@
                           </a:solidFill>
                         </a:rPr>
                         <a:t>毛髪・髪の</a:t>
-                      </a:r>
-                      <a:endParaRPr lang="en-US" sz="600" dirty="0"/>
-                    </a:p>
-                  </a:txBody>
-                  <a:tcPr marL="91440" marR="91440" marT="45720" marB="45720">
-                    <a:lnL w="6350" cap="flat" cmpd="sng" algn="ctr">
-                      <a:solidFill>
-                        <a:srgbClr val="CCCCCC"/>
-                      </a:solidFill>
-                      <a:prstDash val="solid"/>
-                      <a:round/>
-                      <a:headEnd type="none" w="med" len="med"/>
-                      <a:tailEnd type="none" w="med" len="med"/>
-                    </a:lnL>
-                    <a:lnR w="6350" cap="flat" cmpd="sng" algn="ctr">
-                      <a:solidFill>
-                        <a:srgbClr val="CCCCCC"/>
-                      </a:solidFill>
-                      <a:prstDash val="solid"/>
-                      <a:round/>
-                      <a:headEnd type="none" w="med" len="med"/>
-                      <a:tailEnd type="none" w="med" len="med"/>
-                    </a:lnR>
-                    <a:lnT w="6350" cap="flat" cmpd="sng" algn="ctr">
-                      <a:solidFill>
-                        <a:srgbClr val="CCCCCC"/>
-                      </a:solidFill>
-                      <a:prstDash val="solid"/>
-                      <a:round/>
-                      <a:headEnd type="none" w="med" len="med"/>
-                      <a:tailEnd type="none" w="med" len="med"/>
-                    </a:lnT>
-                    <a:lnB w="6350" cap="flat" cmpd="sng" algn="ctr">
-                      <a:solidFill>
-                        <a:srgbClr val="CCCCCC"/>
-                      </a:solidFill>
-                      <a:prstDash val="solid"/>
-                      <a:round/>
-                      <a:headEnd type="none" w="med" len="med"/>
-                      <a:tailEnd type="none" w="med" len="med"/>
-                    </a:lnB>
-                    <a:solidFill>
-                      <a:srgbClr val="1B3A5C"/>
-                    </a:solidFill>
-                  </a:tcPr>
-                </a:tc>
-                <a:tc>
-                  <a:txBody>
-                    <a:bodyPr/>
-                    <a:lstStyle/>
-                    <a:p>
-                      <a:pPr algn="ctr" indent="0" marL="0">
-                        <a:buNone/>
-                      </a:pPr>
-                      <a:r>
-                        <a:rPr lang="en-US" sz="600" b="1" dirty="0">
-                          <a:solidFill>
-                            <a:srgbClr val="FFFFFF"/>
-                          </a:solidFill>
-                        </a:rPr>
-                        <a:t>シミ・汚れ</a:t>
                       </a:r>
                       <a:endParaRPr lang="en-US" sz="600" dirty="0"/>
                     </a:p>
@@ -28962,7 +29715,7 @@
                             <a:srgbClr val="000000"/>
                           </a:solidFill>
                         </a:rPr>
-                        <a:t>17</a:t>
+                        <a:t>18</a:t>
                       </a:r>
                       <a:endParaRPr lang="en-US" sz="700" dirty="0"/>
                     </a:p>
@@ -29203,6 +29956,67 @@
                             <a:srgbClr val="333333"/>
                           </a:solidFill>
                         </a:rPr>
+                        <a:t>1</a:t>
+                      </a:r>
+                      <a:endParaRPr lang="en-US" sz="700" dirty="0"/>
+                    </a:p>
+                  </a:txBody>
+                  <a:tcPr marL="91440" marR="91440" marT="45720" marB="45720">
+                    <a:lnL w="6350" cap="flat" cmpd="sng" algn="ctr">
+                      <a:solidFill>
+                        <a:srgbClr val="CCCCCC"/>
+                      </a:solidFill>
+                      <a:prstDash val="solid"/>
+                      <a:round/>
+                      <a:headEnd type="none" w="med" len="med"/>
+                      <a:tailEnd type="none" w="med" len="med"/>
+                    </a:lnL>
+                    <a:lnR w="6350" cap="flat" cmpd="sng" algn="ctr">
+                      <a:solidFill>
+                        <a:srgbClr val="CCCCCC"/>
+                      </a:solidFill>
+                      <a:prstDash val="solid"/>
+                      <a:round/>
+                      <a:headEnd type="none" w="med" len="med"/>
+                      <a:tailEnd type="none" w="med" len="med"/>
+                    </a:lnR>
+                    <a:lnT w="6350" cap="flat" cmpd="sng" algn="ctr">
+                      <a:solidFill>
+                        <a:srgbClr val="CCCCCC"/>
+                      </a:solidFill>
+                      <a:prstDash val="solid"/>
+                      <a:round/>
+                      <a:headEnd type="none" w="med" len="med"/>
+                      <a:tailEnd type="none" w="med" len="med"/>
+                    </a:lnT>
+                    <a:lnB w="6350" cap="flat" cmpd="sng" algn="ctr">
+                      <a:solidFill>
+                        <a:srgbClr val="CCCCCC"/>
+                      </a:solidFill>
+                      <a:prstDash val="solid"/>
+                      <a:round/>
+                      <a:headEnd type="none" w="med" len="med"/>
+                      <a:tailEnd type="none" w="med" len="med"/>
+                    </a:lnB>
+                    <a:solidFill>
+                      <a:srgbClr val="FFF9C4"/>
+                    </a:solidFill>
+                  </a:tcPr>
+                </a:tc>
+                <a:tc>
+                  <a:txBody>
+                    <a:bodyPr/>
+                    <a:lstStyle/>
+                    <a:p>
+                      <a:pPr algn="ctr" indent="0" marL="0">
+                        <a:buNone/>
+                      </a:pPr>
+                      <a:r>
+                        <a:rPr lang="en-US" sz="700" dirty="0">
+                          <a:solidFill>
+                            <a:srgbClr val="333333"/>
+                          </a:solidFill>
+                        </a:rPr>
                         <a:t>2</a:t>
                       </a:r>
                       <a:endParaRPr lang="en-US" sz="700" dirty="0"/>
@@ -29311,67 +30125,6 @@
                     </a:solidFill>
                   </a:tcPr>
                 </a:tc>
-                <a:tc>
-                  <a:txBody>
-                    <a:bodyPr/>
-                    <a:lstStyle/>
-                    <a:p>
-                      <a:pPr algn="ctr" indent="0" marL="0">
-                        <a:buNone/>
-                      </a:pPr>
-                      <a:r>
-                        <a:rPr lang="en-US" sz="700" dirty="0">
-                          <a:solidFill>
-                            <a:srgbClr val="333333"/>
-                          </a:solidFill>
-                        </a:rPr>
-                        <a:t>-</a:t>
-                      </a:r>
-                      <a:endParaRPr lang="en-US" sz="700" dirty="0"/>
-                    </a:p>
-                  </a:txBody>
-                  <a:tcPr marL="91440" marR="91440" marT="45720" marB="45720">
-                    <a:lnL w="6350" cap="flat" cmpd="sng" algn="ctr">
-                      <a:solidFill>
-                        <a:srgbClr val="CCCCCC"/>
-                      </a:solidFill>
-                      <a:prstDash val="solid"/>
-                      <a:round/>
-                      <a:headEnd type="none" w="med" len="med"/>
-                      <a:tailEnd type="none" w="med" len="med"/>
-                    </a:lnL>
-                    <a:lnR w="6350" cap="flat" cmpd="sng" algn="ctr">
-                      <a:solidFill>
-                        <a:srgbClr val="CCCCCC"/>
-                      </a:solidFill>
-                      <a:prstDash val="solid"/>
-                      <a:round/>
-                      <a:headEnd type="none" w="med" len="med"/>
-                      <a:tailEnd type="none" w="med" len="med"/>
-                    </a:lnR>
-                    <a:lnT w="6350" cap="flat" cmpd="sng" algn="ctr">
-                      <a:solidFill>
-                        <a:srgbClr val="CCCCCC"/>
-                      </a:solidFill>
-                      <a:prstDash val="solid"/>
-                      <a:round/>
-                      <a:headEnd type="none" w="med" len="med"/>
-                      <a:tailEnd type="none" w="med" len="med"/>
-                    </a:lnT>
-                    <a:lnB w="6350" cap="flat" cmpd="sng" algn="ctr">
-                      <a:solidFill>
-                        <a:srgbClr val="CCCCCC"/>
-                      </a:solidFill>
-                      <a:prstDash val="solid"/>
-                      <a:round/>
-                      <a:headEnd type="none" w="med" len="med"/>
-                      <a:tailEnd type="none" w="med" len="med"/>
-                    </a:lnB>
-                    <a:solidFill>
-                      <a:srgbClr val="FFFFFF"/>
-                    </a:solidFill>
-                  </a:tcPr>
-                </a:tc>
               </a:tr>
               <a:tr h="0">
                 <a:tc>
@@ -29748,7 +30501,7 @@
                             <a:srgbClr val="333333"/>
                           </a:solidFill>
                         </a:rPr>
-                        <a:t>1</a:t>
+                        <a:t>-</a:t>
                       </a:r>
                       <a:endParaRPr lang="en-US" sz="700" dirty="0"/>
                     </a:p>
@@ -29791,7 +30544,7 @@
                       <a:tailEnd type="none" w="med" len="med"/>
                     </a:lnB>
                     <a:solidFill>
-                      <a:srgbClr val="FFF9C4"/>
+                      <a:srgbClr val="FFFFFF"/>
                     </a:solidFill>
                   </a:tcPr>
                 </a:tc>
@@ -29809,7 +30562,7 @@
                             <a:srgbClr val="333333"/>
                           </a:solidFill>
                         </a:rPr>
-                        <a:t>-</a:t>
+                        <a:t>1</a:t>
                       </a:r>
                       <a:endParaRPr lang="en-US" sz="700" dirty="0"/>
                     </a:p>
@@ -29852,7 +30605,7 @@
                       <a:tailEnd type="none" w="med" len="med"/>
                     </a:lnB>
                     <a:solidFill>
-                      <a:srgbClr val="FFFFFF"/>
+                      <a:srgbClr val="FFF9C4"/>
                     </a:solidFill>
                   </a:tcPr>
                 </a:tc>
@@ -30655,6 +31408,67 @@
                             <a:srgbClr val="333333"/>
                           </a:solidFill>
                         </a:rPr>
+                        <a:t>-</a:t>
+                      </a:r>
+                      <a:endParaRPr lang="en-US" sz="700" dirty="0"/>
+                    </a:p>
+                  </a:txBody>
+                  <a:tcPr marL="91440" marR="91440" marT="45720" marB="45720">
+                    <a:lnL w="6350" cap="flat" cmpd="sng" algn="ctr">
+                      <a:solidFill>
+                        <a:srgbClr val="CCCCCC"/>
+                      </a:solidFill>
+                      <a:prstDash val="solid"/>
+                      <a:round/>
+                      <a:headEnd type="none" w="med" len="med"/>
+                      <a:tailEnd type="none" w="med" len="med"/>
+                    </a:lnL>
+                    <a:lnR w="6350" cap="flat" cmpd="sng" algn="ctr">
+                      <a:solidFill>
+                        <a:srgbClr val="CCCCCC"/>
+                      </a:solidFill>
+                      <a:prstDash val="solid"/>
+                      <a:round/>
+                      <a:headEnd type="none" w="med" len="med"/>
+                      <a:tailEnd type="none" w="med" len="med"/>
+                    </a:lnR>
+                    <a:lnT w="6350" cap="flat" cmpd="sng" algn="ctr">
+                      <a:solidFill>
+                        <a:srgbClr val="CCCCCC"/>
+                      </a:solidFill>
+                      <a:prstDash val="solid"/>
+                      <a:round/>
+                      <a:headEnd type="none" w="med" len="med"/>
+                      <a:tailEnd type="none" w="med" len="med"/>
+                    </a:lnT>
+                    <a:lnB w="6350" cap="flat" cmpd="sng" algn="ctr">
+                      <a:solidFill>
+                        <a:srgbClr val="CCCCCC"/>
+                      </a:solidFill>
+                      <a:prstDash val="solid"/>
+                      <a:round/>
+                      <a:headEnd type="none" w="med" len="med"/>
+                      <a:tailEnd type="none" w="med" len="med"/>
+                    </a:lnB>
+                    <a:solidFill>
+                      <a:srgbClr val="FFFFFF"/>
+                    </a:solidFill>
+                  </a:tcPr>
+                </a:tc>
+                <a:tc>
+                  <a:txBody>
+                    <a:bodyPr/>
+                    <a:lstStyle/>
+                    <a:p>
+                      <a:pPr algn="ctr" indent="0" marL="0">
+                        <a:buNone/>
+                      </a:pPr>
+                      <a:r>
+                        <a:rPr lang="en-US" sz="700" dirty="0">
+                          <a:solidFill>
+                            <a:srgbClr val="333333"/>
+                          </a:solidFill>
+                        </a:rPr>
                         <a:t>1</a:t>
                       </a:r>
                       <a:endParaRPr lang="en-US" sz="700" dirty="0"/>
@@ -30763,67 +31577,6 @@
                     </a:solidFill>
                   </a:tcPr>
                 </a:tc>
-                <a:tc>
-                  <a:txBody>
-                    <a:bodyPr/>
-                    <a:lstStyle/>
-                    <a:p>
-                      <a:pPr algn="ctr" indent="0" marL="0">
-                        <a:buNone/>
-                      </a:pPr>
-                      <a:r>
-                        <a:rPr lang="en-US" sz="700" dirty="0">
-                          <a:solidFill>
-                            <a:srgbClr val="333333"/>
-                          </a:solidFill>
-                        </a:rPr>
-                        <a:t>-</a:t>
-                      </a:r>
-                      <a:endParaRPr lang="en-US" sz="700" dirty="0"/>
-                    </a:p>
-                  </a:txBody>
-                  <a:tcPr marL="91440" marR="91440" marT="45720" marB="45720">
-                    <a:lnL w="6350" cap="flat" cmpd="sng" algn="ctr">
-                      <a:solidFill>
-                        <a:srgbClr val="CCCCCC"/>
-                      </a:solidFill>
-                      <a:prstDash val="solid"/>
-                      <a:round/>
-                      <a:headEnd type="none" w="med" len="med"/>
-                      <a:tailEnd type="none" w="med" len="med"/>
-                    </a:lnL>
-                    <a:lnR w="6350" cap="flat" cmpd="sng" algn="ctr">
-                      <a:solidFill>
-                        <a:srgbClr val="CCCCCC"/>
-                      </a:solidFill>
-                      <a:prstDash val="solid"/>
-                      <a:round/>
-                      <a:headEnd type="none" w="med" len="med"/>
-                      <a:tailEnd type="none" w="med" len="med"/>
-                    </a:lnR>
-                    <a:lnT w="6350" cap="flat" cmpd="sng" algn="ctr">
-                      <a:solidFill>
-                        <a:srgbClr val="CCCCCC"/>
-                      </a:solidFill>
-                      <a:prstDash val="solid"/>
-                      <a:round/>
-                      <a:headEnd type="none" w="med" len="med"/>
-                      <a:tailEnd type="none" w="med" len="med"/>
-                    </a:lnT>
-                    <a:lnB w="6350" cap="flat" cmpd="sng" algn="ctr">
-                      <a:solidFill>
-                        <a:srgbClr val="CCCCCC"/>
-                      </a:solidFill>
-                      <a:prstDash val="solid"/>
-                      <a:round/>
-                      <a:headEnd type="none" w="med" len="med"/>
-                      <a:tailEnd type="none" w="med" len="med"/>
-                    </a:lnB>
-                    <a:solidFill>
-                      <a:srgbClr val="FFFFFF"/>
-                    </a:solidFill>
-                  </a:tcPr>
-                </a:tc>
               </a:tr>
               <a:tr h="0">
                 <a:tc>
@@ -30898,7 +31651,7 @@
                             <a:srgbClr val="000000"/>
                           </a:solidFill>
                         </a:rPr>
-                        <a:t>13</a:t>
+                        <a:t>12</a:t>
                       </a:r>
                       <a:endParaRPr lang="en-US" sz="700" dirty="0"/>
                     </a:p>
@@ -31017,7 +31770,7 @@
                             <a:srgbClr val="333333"/>
                           </a:solidFill>
                         </a:rPr>
-                        <a:t>2</a:t>
+                        <a:t>1</a:t>
                       </a:r>
                       <a:endParaRPr lang="en-US" sz="700" dirty="0"/>
                     </a:p>
@@ -31136,6 +31889,67 @@
                       <a:r>
                         <a:rPr lang="en-US" sz="700" dirty="0">
                           <a:solidFill>
+                            <a:srgbClr val="E74C3C"/>
+                          </a:solidFill>
+                        </a:rPr>
+                        <a:t>6</a:t>
+                      </a:r>
+                      <a:endParaRPr lang="en-US" sz="700" dirty="0"/>
+                    </a:p>
+                  </a:txBody>
+                  <a:tcPr marL="91440" marR="91440" marT="45720" marB="45720">
+                    <a:lnL w="6350" cap="flat" cmpd="sng" algn="ctr">
+                      <a:solidFill>
+                        <a:srgbClr val="CCCCCC"/>
+                      </a:solidFill>
+                      <a:prstDash val="solid"/>
+                      <a:round/>
+                      <a:headEnd type="none" w="med" len="med"/>
+                      <a:tailEnd type="none" w="med" len="med"/>
+                    </a:lnL>
+                    <a:lnR w="6350" cap="flat" cmpd="sng" algn="ctr">
+                      <a:solidFill>
+                        <a:srgbClr val="CCCCCC"/>
+                      </a:solidFill>
+                      <a:prstDash val="solid"/>
+                      <a:round/>
+                      <a:headEnd type="none" w="med" len="med"/>
+                      <a:tailEnd type="none" w="med" len="med"/>
+                    </a:lnR>
+                    <a:lnT w="6350" cap="flat" cmpd="sng" algn="ctr">
+                      <a:solidFill>
+                        <a:srgbClr val="CCCCCC"/>
+                      </a:solidFill>
+                      <a:prstDash val="solid"/>
+                      <a:round/>
+                      <a:headEnd type="none" w="med" len="med"/>
+                      <a:tailEnd type="none" w="med" len="med"/>
+                    </a:lnT>
+                    <a:lnB w="6350" cap="flat" cmpd="sng" algn="ctr">
+                      <a:solidFill>
+                        <a:srgbClr val="CCCCCC"/>
+                      </a:solidFill>
+                      <a:prstDash val="solid"/>
+                      <a:round/>
+                      <a:headEnd type="none" w="med" len="med"/>
+                      <a:tailEnd type="none" w="med" len="med"/>
+                    </a:lnB>
+                    <a:solidFill>
+                      <a:srgbClr val="FFCDD2"/>
+                    </a:solidFill>
+                  </a:tcPr>
+                </a:tc>
+                <a:tc>
+                  <a:txBody>
+                    <a:bodyPr/>
+                    <a:lstStyle/>
+                    <a:p>
+                      <a:pPr algn="ctr" indent="0" marL="0">
+                        <a:buNone/>
+                      </a:pPr>
+                      <a:r>
+                        <a:rPr lang="en-US" sz="700" dirty="0">
+                          <a:solidFill>
                             <a:srgbClr val="333333"/>
                           </a:solidFill>
                         </a:rPr>
@@ -31247,67 +32061,6 @@
                     </a:solidFill>
                   </a:tcPr>
                 </a:tc>
-                <a:tc>
-                  <a:txBody>
-                    <a:bodyPr/>
-                    <a:lstStyle/>
-                    <a:p>
-                      <a:pPr algn="ctr" indent="0" marL="0">
-                        <a:buNone/>
-                      </a:pPr>
-                      <a:r>
-                        <a:rPr lang="en-US" sz="700" dirty="0">
-                          <a:solidFill>
-                            <a:srgbClr val="E74C3C"/>
-                          </a:solidFill>
-                        </a:rPr>
-                        <a:t>6</a:t>
-                      </a:r>
-                      <a:endParaRPr lang="en-US" sz="700" dirty="0"/>
-                    </a:p>
-                  </a:txBody>
-                  <a:tcPr marL="91440" marR="91440" marT="45720" marB="45720">
-                    <a:lnL w="6350" cap="flat" cmpd="sng" algn="ctr">
-                      <a:solidFill>
-                        <a:srgbClr val="CCCCCC"/>
-                      </a:solidFill>
-                      <a:prstDash val="solid"/>
-                      <a:round/>
-                      <a:headEnd type="none" w="med" len="med"/>
-                      <a:tailEnd type="none" w="med" len="med"/>
-                    </a:lnL>
-                    <a:lnR w="6350" cap="flat" cmpd="sng" algn="ctr">
-                      <a:solidFill>
-                        <a:srgbClr val="CCCCCC"/>
-                      </a:solidFill>
-                      <a:prstDash val="solid"/>
-                      <a:round/>
-                      <a:headEnd type="none" w="med" len="med"/>
-                      <a:tailEnd type="none" w="med" len="med"/>
-                    </a:lnR>
-                    <a:lnT w="6350" cap="flat" cmpd="sng" algn="ctr">
-                      <a:solidFill>
-                        <a:srgbClr val="CCCCCC"/>
-                      </a:solidFill>
-                      <a:prstDash val="solid"/>
-                      <a:round/>
-                      <a:headEnd type="none" w="med" len="med"/>
-                      <a:tailEnd type="none" w="med" len="med"/>
-                    </a:lnT>
-                    <a:lnB w="6350" cap="flat" cmpd="sng" algn="ctr">
-                      <a:solidFill>
-                        <a:srgbClr val="CCCCCC"/>
-                      </a:solidFill>
-                      <a:prstDash val="solid"/>
-                      <a:round/>
-                      <a:headEnd type="none" w="med" len="med"/>
-                      <a:tailEnd type="none" w="med" len="med"/>
-                    </a:lnB>
-                    <a:solidFill>
-                      <a:srgbClr val="FFCDD2"/>
-                    </a:solidFill>
-                  </a:tcPr>
-                </a:tc>
               </a:tr>
               <a:tr h="0">
                 <a:tc>
@@ -31623,7 +32376,7 @@
                             <a:srgbClr val="333333"/>
                           </a:solidFill>
                         </a:rPr>
-                        <a:t>2</a:t>
+                        <a:t>-</a:t>
                       </a:r>
                       <a:endParaRPr lang="en-US" sz="700" dirty="0"/>
                     </a:p>
@@ -31666,7 +32419,7 @@
                       <a:tailEnd type="none" w="med" len="med"/>
                     </a:lnB>
                     <a:solidFill>
-                      <a:srgbClr val="FFF9C4"/>
+                      <a:srgbClr val="FFFFFF"/>
                     </a:solidFill>
                   </a:tcPr>
                 </a:tc>
@@ -31684,7 +32437,7 @@
                             <a:srgbClr val="333333"/>
                           </a:solidFill>
                         </a:rPr>
-                        <a:t>-</a:t>
+                        <a:t>2</a:t>
                       </a:r>
                       <a:endParaRPr lang="en-US" sz="700" dirty="0"/>
                     </a:p>
@@ -31727,7 +32480,7 @@
                       <a:tailEnd type="none" w="med" len="med"/>
                     </a:lnB>
                     <a:solidFill>
-                      <a:srgbClr val="FFFFFF"/>
+                      <a:srgbClr val="FFF9C4"/>
                     </a:solidFill>
                   </a:tcPr>
                 </a:tc>
@@ -32107,7 +32860,7 @@
                             <a:srgbClr val="333333"/>
                           </a:solidFill>
                         </a:rPr>
-                        <a:t>1</a:t>
+                        <a:t>-</a:t>
                       </a:r>
                       <a:endParaRPr lang="en-US" sz="700" dirty="0"/>
                     </a:p>
@@ -32150,7 +32903,7 @@
                       <a:tailEnd type="none" w="med" len="med"/>
                     </a:lnB>
                     <a:solidFill>
-                      <a:srgbClr val="FFF9C4"/>
+                      <a:srgbClr val="FFFFFF"/>
                     </a:solidFill>
                   </a:tcPr>
                 </a:tc>
@@ -32168,7 +32921,7 @@
                             <a:srgbClr val="333333"/>
                           </a:solidFill>
                         </a:rPr>
-                        <a:t>-</a:t>
+                        <a:t>1</a:t>
                       </a:r>
                       <a:endParaRPr lang="en-US" sz="700" dirty="0"/>
                     </a:p>
@@ -32211,7 +32964,7 @@
                       <a:tailEnd type="none" w="med" len="med"/>
                     </a:lnB>
                     <a:solidFill>
-                      <a:srgbClr val="FFFFFF"/>
+                      <a:srgbClr val="FFF9C4"/>
                     </a:solidFill>
                   </a:tcPr>
                 </a:tc>
@@ -33075,6 +33828,67 @@
                             <a:srgbClr val="333333"/>
                           </a:solidFill>
                         </a:rPr>
+                        <a:t>-</a:t>
+                      </a:r>
+                      <a:endParaRPr lang="en-US" sz="700" dirty="0"/>
+                    </a:p>
+                  </a:txBody>
+                  <a:tcPr marL="91440" marR="91440" marT="45720" marB="45720">
+                    <a:lnL w="6350" cap="flat" cmpd="sng" algn="ctr">
+                      <a:solidFill>
+                        <a:srgbClr val="CCCCCC"/>
+                      </a:solidFill>
+                      <a:prstDash val="solid"/>
+                      <a:round/>
+                      <a:headEnd type="none" w="med" len="med"/>
+                      <a:tailEnd type="none" w="med" len="med"/>
+                    </a:lnL>
+                    <a:lnR w="6350" cap="flat" cmpd="sng" algn="ctr">
+                      <a:solidFill>
+                        <a:srgbClr val="CCCCCC"/>
+                      </a:solidFill>
+                      <a:prstDash val="solid"/>
+                      <a:round/>
+                      <a:headEnd type="none" w="med" len="med"/>
+                      <a:tailEnd type="none" w="med" len="med"/>
+                    </a:lnR>
+                    <a:lnT w="6350" cap="flat" cmpd="sng" algn="ctr">
+                      <a:solidFill>
+                        <a:srgbClr val="CCCCCC"/>
+                      </a:solidFill>
+                      <a:prstDash val="solid"/>
+                      <a:round/>
+                      <a:headEnd type="none" w="med" len="med"/>
+                      <a:tailEnd type="none" w="med" len="med"/>
+                    </a:lnT>
+                    <a:lnB w="6350" cap="flat" cmpd="sng" algn="ctr">
+                      <a:solidFill>
+                        <a:srgbClr val="CCCCCC"/>
+                      </a:solidFill>
+                      <a:prstDash val="solid"/>
+                      <a:round/>
+                      <a:headEnd type="none" w="med" len="med"/>
+                      <a:tailEnd type="none" w="med" len="med"/>
+                    </a:lnB>
+                    <a:solidFill>
+                      <a:srgbClr val="FFFFFF"/>
+                    </a:solidFill>
+                  </a:tcPr>
+                </a:tc>
+                <a:tc>
+                  <a:txBody>
+                    <a:bodyPr/>
+                    <a:lstStyle/>
+                    <a:p>
+                      <a:pPr algn="ctr" indent="0" marL="0">
+                        <a:buNone/>
+                      </a:pPr>
+                      <a:r>
+                        <a:rPr lang="en-US" sz="700" dirty="0">
+                          <a:solidFill>
+                            <a:srgbClr val="333333"/>
+                          </a:solidFill>
+                        </a:rPr>
                         <a:t>2</a:t>
                       </a:r>
                       <a:endParaRPr lang="en-US" sz="700" dirty="0"/>
@@ -33183,67 +33997,6 @@
                     </a:solidFill>
                   </a:tcPr>
                 </a:tc>
-                <a:tc>
-                  <a:txBody>
-                    <a:bodyPr/>
-                    <a:lstStyle/>
-                    <a:p>
-                      <a:pPr algn="ctr" indent="0" marL="0">
-                        <a:buNone/>
-                      </a:pPr>
-                      <a:r>
-                        <a:rPr lang="en-US" sz="700" dirty="0">
-                          <a:solidFill>
-                            <a:srgbClr val="333333"/>
-                          </a:solidFill>
-                        </a:rPr>
-                        <a:t>-</a:t>
-                      </a:r>
-                      <a:endParaRPr lang="en-US" sz="700" dirty="0"/>
-                    </a:p>
-                  </a:txBody>
-                  <a:tcPr marL="91440" marR="91440" marT="45720" marB="45720">
-                    <a:lnL w="6350" cap="flat" cmpd="sng" algn="ctr">
-                      <a:solidFill>
-                        <a:srgbClr val="CCCCCC"/>
-                      </a:solidFill>
-                      <a:prstDash val="solid"/>
-                      <a:round/>
-                      <a:headEnd type="none" w="med" len="med"/>
-                      <a:tailEnd type="none" w="med" len="med"/>
-                    </a:lnL>
-                    <a:lnR w="6350" cap="flat" cmpd="sng" algn="ctr">
-                      <a:solidFill>
-                        <a:srgbClr val="CCCCCC"/>
-                      </a:solidFill>
-                      <a:prstDash val="solid"/>
-                      <a:round/>
-                      <a:headEnd type="none" w="med" len="med"/>
-                      <a:tailEnd type="none" w="med" len="med"/>
-                    </a:lnR>
-                    <a:lnT w="6350" cap="flat" cmpd="sng" algn="ctr">
-                      <a:solidFill>
-                        <a:srgbClr val="CCCCCC"/>
-                      </a:solidFill>
-                      <a:prstDash val="solid"/>
-                      <a:round/>
-                      <a:headEnd type="none" w="med" len="med"/>
-                      <a:tailEnd type="none" w="med" len="med"/>
-                    </a:lnT>
-                    <a:lnB w="6350" cap="flat" cmpd="sng" algn="ctr">
-                      <a:solidFill>
-                        <a:srgbClr val="CCCCCC"/>
-                      </a:solidFill>
-                      <a:prstDash val="solid"/>
-                      <a:round/>
-                      <a:headEnd type="none" w="med" len="med"/>
-                      <a:tailEnd type="none" w="med" len="med"/>
-                    </a:lnB>
-                    <a:solidFill>
-                      <a:srgbClr val="FFFFFF"/>
-                    </a:solidFill>
-                  </a:tcPr>
-                </a:tc>
               </a:tr>
               <a:tr h="0">
                 <a:tc>
@@ -33559,6 +34312,67 @@
                             <a:srgbClr val="333333"/>
                           </a:solidFill>
                         </a:rPr>
+                        <a:t>1</a:t>
+                      </a:r>
+                      <a:endParaRPr lang="en-US" sz="700" dirty="0"/>
+                    </a:p>
+                  </a:txBody>
+                  <a:tcPr marL="91440" marR="91440" marT="45720" marB="45720">
+                    <a:lnL w="6350" cap="flat" cmpd="sng" algn="ctr">
+                      <a:solidFill>
+                        <a:srgbClr val="CCCCCC"/>
+                      </a:solidFill>
+                      <a:prstDash val="solid"/>
+                      <a:round/>
+                      <a:headEnd type="none" w="med" len="med"/>
+                      <a:tailEnd type="none" w="med" len="med"/>
+                    </a:lnL>
+                    <a:lnR w="6350" cap="flat" cmpd="sng" algn="ctr">
+                      <a:solidFill>
+                        <a:srgbClr val="CCCCCC"/>
+                      </a:solidFill>
+                      <a:prstDash val="solid"/>
+                      <a:round/>
+                      <a:headEnd type="none" w="med" len="med"/>
+                      <a:tailEnd type="none" w="med" len="med"/>
+                    </a:lnR>
+                    <a:lnT w="6350" cap="flat" cmpd="sng" algn="ctr">
+                      <a:solidFill>
+                        <a:srgbClr val="CCCCCC"/>
+                      </a:solidFill>
+                      <a:prstDash val="solid"/>
+                      <a:round/>
+                      <a:headEnd type="none" w="med" len="med"/>
+                      <a:tailEnd type="none" w="med" len="med"/>
+                    </a:lnT>
+                    <a:lnB w="6350" cap="flat" cmpd="sng" algn="ctr">
+                      <a:solidFill>
+                        <a:srgbClr val="CCCCCC"/>
+                      </a:solidFill>
+                      <a:prstDash val="solid"/>
+                      <a:round/>
+                      <a:headEnd type="none" w="med" len="med"/>
+                      <a:tailEnd type="none" w="med" len="med"/>
+                    </a:lnB>
+                    <a:solidFill>
+                      <a:srgbClr val="FFF9C4"/>
+                    </a:solidFill>
+                  </a:tcPr>
+                </a:tc>
+                <a:tc>
+                  <a:txBody>
+                    <a:bodyPr/>
+                    <a:lstStyle/>
+                    <a:p>
+                      <a:pPr algn="ctr" indent="0" marL="0">
+                        <a:buNone/>
+                      </a:pPr>
+                      <a:r>
+                        <a:rPr lang="en-US" sz="700" dirty="0">
+                          <a:solidFill>
+                            <a:srgbClr val="333333"/>
+                          </a:solidFill>
+                        </a:rPr>
                         <a:t>-</a:t>
                       </a:r>
                       <a:endParaRPr lang="en-US" sz="700" dirty="0"/>
@@ -33667,67 +34481,6 @@
                     </a:solidFill>
                   </a:tcPr>
                 </a:tc>
-                <a:tc>
-                  <a:txBody>
-                    <a:bodyPr/>
-                    <a:lstStyle/>
-                    <a:p>
-                      <a:pPr algn="ctr" indent="0" marL="0">
-                        <a:buNone/>
-                      </a:pPr>
-                      <a:r>
-                        <a:rPr lang="en-US" sz="700" dirty="0">
-                          <a:solidFill>
-                            <a:srgbClr val="333333"/>
-                          </a:solidFill>
-                        </a:rPr>
-                        <a:t>1</a:t>
-                      </a:r>
-                      <a:endParaRPr lang="en-US" sz="700" dirty="0"/>
-                    </a:p>
-                  </a:txBody>
-                  <a:tcPr marL="91440" marR="91440" marT="45720" marB="45720">
-                    <a:lnL w="6350" cap="flat" cmpd="sng" algn="ctr">
-                      <a:solidFill>
-                        <a:srgbClr val="CCCCCC"/>
-                      </a:solidFill>
-                      <a:prstDash val="solid"/>
-                      <a:round/>
-                      <a:headEnd type="none" w="med" len="med"/>
-                      <a:tailEnd type="none" w="med" len="med"/>
-                    </a:lnL>
-                    <a:lnR w="6350" cap="flat" cmpd="sng" algn="ctr">
-                      <a:solidFill>
-                        <a:srgbClr val="CCCCCC"/>
-                      </a:solidFill>
-                      <a:prstDash val="solid"/>
-                      <a:round/>
-                      <a:headEnd type="none" w="med" len="med"/>
-                      <a:tailEnd type="none" w="med" len="med"/>
-                    </a:lnR>
-                    <a:lnT w="6350" cap="flat" cmpd="sng" algn="ctr">
-                      <a:solidFill>
-                        <a:srgbClr val="CCCCCC"/>
-                      </a:solidFill>
-                      <a:prstDash val="solid"/>
-                      <a:round/>
-                      <a:headEnd type="none" w="med" len="med"/>
-                      <a:tailEnd type="none" w="med" len="med"/>
-                    </a:lnT>
-                    <a:lnB w="6350" cap="flat" cmpd="sng" algn="ctr">
-                      <a:solidFill>
-                        <a:srgbClr val="CCCCCC"/>
-                      </a:solidFill>
-                      <a:prstDash val="solid"/>
-                      <a:round/>
-                      <a:headEnd type="none" w="med" len="med"/>
-                      <a:tailEnd type="none" w="med" len="med"/>
-                    </a:lnB>
-                    <a:solidFill>
-                      <a:srgbClr val="FFF9C4"/>
-                    </a:solidFill>
-                  </a:tcPr>
-                </a:tc>
               </a:tr>
               <a:tr h="0">
                 <a:tc>
@@ -34104,7 +34857,247 @@
                             <a:srgbClr val="333333"/>
                           </a:solidFill>
                         </a:rPr>
+                        <a:t>-</a:t>
+                      </a:r>
+                      <a:endParaRPr lang="en-US" sz="700" dirty="0"/>
+                    </a:p>
+                  </a:txBody>
+                  <a:tcPr marL="91440" marR="91440" marT="45720" marB="45720">
+                    <a:lnL w="6350" cap="flat" cmpd="sng" algn="ctr">
+                      <a:solidFill>
+                        <a:srgbClr val="CCCCCC"/>
+                      </a:solidFill>
+                      <a:prstDash val="solid"/>
+                      <a:round/>
+                      <a:headEnd type="none" w="med" len="med"/>
+                      <a:tailEnd type="none" w="med" len="med"/>
+                    </a:lnL>
+                    <a:lnR w="6350" cap="flat" cmpd="sng" algn="ctr">
+                      <a:solidFill>
+                        <a:srgbClr val="CCCCCC"/>
+                      </a:solidFill>
+                      <a:prstDash val="solid"/>
+                      <a:round/>
+                      <a:headEnd type="none" w="med" len="med"/>
+                      <a:tailEnd type="none" w="med" len="med"/>
+                    </a:lnR>
+                    <a:lnT w="6350" cap="flat" cmpd="sng" algn="ctr">
+                      <a:solidFill>
+                        <a:srgbClr val="CCCCCC"/>
+                      </a:solidFill>
+                      <a:prstDash val="solid"/>
+                      <a:round/>
+                      <a:headEnd type="none" w="med" len="med"/>
+                      <a:tailEnd type="none" w="med" len="med"/>
+                    </a:lnT>
+                    <a:lnB w="6350" cap="flat" cmpd="sng" algn="ctr">
+                      <a:solidFill>
+                        <a:srgbClr val="CCCCCC"/>
+                      </a:solidFill>
+                      <a:prstDash val="solid"/>
+                      <a:round/>
+                      <a:headEnd type="none" w="med" len="med"/>
+                      <a:tailEnd type="none" w="med" len="med"/>
+                    </a:lnB>
+                    <a:solidFill>
+                      <a:srgbClr val="FFFFFF"/>
+                    </a:solidFill>
+                  </a:tcPr>
+                </a:tc>
+                <a:tc>
+                  <a:txBody>
+                    <a:bodyPr/>
+                    <a:lstStyle/>
+                    <a:p>
+                      <a:pPr algn="ctr" indent="0" marL="0">
+                        <a:buNone/>
+                      </a:pPr>
+                      <a:r>
+                        <a:rPr lang="en-US" sz="700" dirty="0">
+                          <a:solidFill>
+                            <a:srgbClr val="333333"/>
+                          </a:solidFill>
+                        </a:rPr>
                         <a:t>1</a:t>
+                      </a:r>
+                      <a:endParaRPr lang="en-US" sz="700" dirty="0"/>
+                    </a:p>
+                  </a:txBody>
+                  <a:tcPr marL="91440" marR="91440" marT="45720" marB="45720">
+                    <a:lnL w="6350" cap="flat" cmpd="sng" algn="ctr">
+                      <a:solidFill>
+                        <a:srgbClr val="CCCCCC"/>
+                      </a:solidFill>
+                      <a:prstDash val="solid"/>
+                      <a:round/>
+                      <a:headEnd type="none" w="med" len="med"/>
+                      <a:tailEnd type="none" w="med" len="med"/>
+                    </a:lnL>
+                    <a:lnR w="6350" cap="flat" cmpd="sng" algn="ctr">
+                      <a:solidFill>
+                        <a:srgbClr val="CCCCCC"/>
+                      </a:solidFill>
+                      <a:prstDash val="solid"/>
+                      <a:round/>
+                      <a:headEnd type="none" w="med" len="med"/>
+                      <a:tailEnd type="none" w="med" len="med"/>
+                    </a:lnR>
+                    <a:lnT w="6350" cap="flat" cmpd="sng" algn="ctr">
+                      <a:solidFill>
+                        <a:srgbClr val="CCCCCC"/>
+                      </a:solidFill>
+                      <a:prstDash val="solid"/>
+                      <a:round/>
+                      <a:headEnd type="none" w="med" len="med"/>
+                      <a:tailEnd type="none" w="med" len="med"/>
+                    </a:lnT>
+                    <a:lnB w="6350" cap="flat" cmpd="sng" algn="ctr">
+                      <a:solidFill>
+                        <a:srgbClr val="CCCCCC"/>
+                      </a:solidFill>
+                      <a:prstDash val="solid"/>
+                      <a:round/>
+                      <a:headEnd type="none" w="med" len="med"/>
+                      <a:tailEnd type="none" w="med" len="med"/>
+                    </a:lnB>
+                    <a:solidFill>
+                      <a:srgbClr val="FFF9C4"/>
+                    </a:solidFill>
+                  </a:tcPr>
+                </a:tc>
+              </a:tr>
+              <a:tr h="0">
+                <a:tc>
+                  <a:txBody>
+                    <a:bodyPr/>
+                    <a:lstStyle/>
+                    <a:p>
+                      <a:pPr indent="0" marL="0">
+                        <a:buNone/>
+                      </a:pPr>
+                      <a:r>
+                        <a:rPr lang="en-US" sz="700" b="1" dirty="0">
+                          <a:solidFill>
+                            <a:srgbClr val="000000"/>
+                          </a:solidFill>
+                        </a:rPr>
+                        <a:t>ホテルケヤキゲート東京府中</a:t>
+                      </a:r>
+                      <a:endParaRPr lang="en-US" sz="700" dirty="0"/>
+                    </a:p>
+                  </a:txBody>
+                  <a:tcPr marL="91440" marR="91440" marT="45720" marB="45720">
+                    <a:lnL w="6350" cap="flat" cmpd="sng" algn="ctr">
+                      <a:solidFill>
+                        <a:srgbClr val="CCCCCC"/>
+                      </a:solidFill>
+                      <a:prstDash val="solid"/>
+                      <a:round/>
+                      <a:headEnd type="none" w="med" len="med"/>
+                      <a:tailEnd type="none" w="med" len="med"/>
+                    </a:lnL>
+                    <a:lnR w="6350" cap="flat" cmpd="sng" algn="ctr">
+                      <a:solidFill>
+                        <a:srgbClr val="CCCCCC"/>
+                      </a:solidFill>
+                      <a:prstDash val="solid"/>
+                      <a:round/>
+                      <a:headEnd type="none" w="med" len="med"/>
+                      <a:tailEnd type="none" w="med" len="med"/>
+                    </a:lnR>
+                    <a:lnT w="6350" cap="flat" cmpd="sng" algn="ctr">
+                      <a:solidFill>
+                        <a:srgbClr val="CCCCCC"/>
+                      </a:solidFill>
+                      <a:prstDash val="solid"/>
+                      <a:round/>
+                      <a:headEnd type="none" w="med" len="med"/>
+                      <a:tailEnd type="none" w="med" len="med"/>
+                    </a:lnT>
+                    <a:lnB w="6350" cap="flat" cmpd="sng" algn="ctr">
+                      <a:solidFill>
+                        <a:srgbClr val="CCCCCC"/>
+                      </a:solidFill>
+                      <a:prstDash val="solid"/>
+                      <a:round/>
+                      <a:headEnd type="none" w="med" len="med"/>
+                      <a:tailEnd type="none" w="med" len="med"/>
+                    </a:lnB>
+                  </a:tcPr>
+                </a:tc>
+                <a:tc>
+                  <a:txBody>
+                    <a:bodyPr/>
+                    <a:lstStyle/>
+                    <a:p>
+                      <a:pPr algn="ctr" indent="0" marL="0">
+                        <a:buNone/>
+                      </a:pPr>
+                      <a:r>
+                        <a:rPr lang="en-US" sz="700" b="1" dirty="0">
+                          <a:solidFill>
+                            <a:srgbClr val="000000"/>
+                          </a:solidFill>
+                        </a:rPr>
+                        <a:t>3</a:t>
+                      </a:r>
+                      <a:endParaRPr lang="en-US" sz="700" dirty="0"/>
+                    </a:p>
+                  </a:txBody>
+                  <a:tcPr marL="91440" marR="91440" marT="45720" marB="45720">
+                    <a:lnL w="6350" cap="flat" cmpd="sng" algn="ctr">
+                      <a:solidFill>
+                        <a:srgbClr val="CCCCCC"/>
+                      </a:solidFill>
+                      <a:prstDash val="solid"/>
+                      <a:round/>
+                      <a:headEnd type="none" w="med" len="med"/>
+                      <a:tailEnd type="none" w="med" len="med"/>
+                    </a:lnL>
+                    <a:lnR w="6350" cap="flat" cmpd="sng" algn="ctr">
+                      <a:solidFill>
+                        <a:srgbClr val="CCCCCC"/>
+                      </a:solidFill>
+                      <a:prstDash val="solid"/>
+                      <a:round/>
+                      <a:headEnd type="none" w="med" len="med"/>
+                      <a:tailEnd type="none" w="med" len="med"/>
+                    </a:lnR>
+                    <a:lnT w="6350" cap="flat" cmpd="sng" algn="ctr">
+                      <a:solidFill>
+                        <a:srgbClr val="CCCCCC"/>
+                      </a:solidFill>
+                      <a:prstDash val="solid"/>
+                      <a:round/>
+                      <a:headEnd type="none" w="med" len="med"/>
+                      <a:tailEnd type="none" w="med" len="med"/>
+                    </a:lnT>
+                    <a:lnB w="6350" cap="flat" cmpd="sng" algn="ctr">
+                      <a:solidFill>
+                        <a:srgbClr val="CCCCCC"/>
+                      </a:solidFill>
+                      <a:prstDash val="solid"/>
+                      <a:round/>
+                      <a:headEnd type="none" w="med" len="med"/>
+                      <a:tailEnd type="none" w="med" len="med"/>
+                    </a:lnB>
+                  </a:tcPr>
+                </a:tc>
+                <a:tc>
+                  <a:txBody>
+                    <a:bodyPr/>
+                    <a:lstStyle/>
+                    <a:p>
+                      <a:pPr algn="ctr" indent="0" marL="0">
+                        <a:buNone/>
+                      </a:pPr>
+                      <a:r>
+                        <a:rPr lang="en-US" sz="700" dirty="0">
+                          <a:solidFill>
+                            <a:srgbClr val="333333"/>
+                          </a:solidFill>
+                        </a:rPr>
+                        <a:t>2</a:t>
                       </a:r>
                       <a:endParaRPr lang="en-US" sz="700" dirty="0"/>
                     </a:p>
@@ -34212,185 +35205,6 @@
                     </a:solidFill>
                   </a:tcPr>
                 </a:tc>
-              </a:tr>
-              <a:tr h="0">
-                <a:tc>
-                  <a:txBody>
-                    <a:bodyPr/>
-                    <a:lstStyle/>
-                    <a:p>
-                      <a:pPr indent="0" marL="0">
-                        <a:buNone/>
-                      </a:pPr>
-                      <a:r>
-                        <a:rPr lang="en-US" sz="700" b="1" dirty="0">
-                          <a:solidFill>
-                            <a:srgbClr val="000000"/>
-                          </a:solidFill>
-                        </a:rPr>
-                        <a:t>ホテルケヤキゲート東京府中</a:t>
-                      </a:r>
-                      <a:endParaRPr lang="en-US" sz="700" dirty="0"/>
-                    </a:p>
-                  </a:txBody>
-                  <a:tcPr marL="91440" marR="91440" marT="45720" marB="45720">
-                    <a:lnL w="6350" cap="flat" cmpd="sng" algn="ctr">
-                      <a:solidFill>
-                        <a:srgbClr val="CCCCCC"/>
-                      </a:solidFill>
-                      <a:prstDash val="solid"/>
-                      <a:round/>
-                      <a:headEnd type="none" w="med" len="med"/>
-                      <a:tailEnd type="none" w="med" len="med"/>
-                    </a:lnL>
-                    <a:lnR w="6350" cap="flat" cmpd="sng" algn="ctr">
-                      <a:solidFill>
-                        <a:srgbClr val="CCCCCC"/>
-                      </a:solidFill>
-                      <a:prstDash val="solid"/>
-                      <a:round/>
-                      <a:headEnd type="none" w="med" len="med"/>
-                      <a:tailEnd type="none" w="med" len="med"/>
-                    </a:lnR>
-                    <a:lnT w="6350" cap="flat" cmpd="sng" algn="ctr">
-                      <a:solidFill>
-                        <a:srgbClr val="CCCCCC"/>
-                      </a:solidFill>
-                      <a:prstDash val="solid"/>
-                      <a:round/>
-                      <a:headEnd type="none" w="med" len="med"/>
-                      <a:tailEnd type="none" w="med" len="med"/>
-                    </a:lnT>
-                    <a:lnB w="6350" cap="flat" cmpd="sng" algn="ctr">
-                      <a:solidFill>
-                        <a:srgbClr val="CCCCCC"/>
-                      </a:solidFill>
-                      <a:prstDash val="solid"/>
-                      <a:round/>
-                      <a:headEnd type="none" w="med" len="med"/>
-                      <a:tailEnd type="none" w="med" len="med"/>
-                    </a:lnB>
-                  </a:tcPr>
-                </a:tc>
-                <a:tc>
-                  <a:txBody>
-                    <a:bodyPr/>
-                    <a:lstStyle/>
-                    <a:p>
-                      <a:pPr algn="ctr" indent="0" marL="0">
-                        <a:buNone/>
-                      </a:pPr>
-                      <a:r>
-                        <a:rPr lang="en-US" sz="700" b="1" dirty="0">
-                          <a:solidFill>
-                            <a:srgbClr val="000000"/>
-                          </a:solidFill>
-                        </a:rPr>
-                        <a:t>3</a:t>
-                      </a:r>
-                      <a:endParaRPr lang="en-US" sz="700" dirty="0"/>
-                    </a:p>
-                  </a:txBody>
-                  <a:tcPr marL="91440" marR="91440" marT="45720" marB="45720">
-                    <a:lnL w="6350" cap="flat" cmpd="sng" algn="ctr">
-                      <a:solidFill>
-                        <a:srgbClr val="CCCCCC"/>
-                      </a:solidFill>
-                      <a:prstDash val="solid"/>
-                      <a:round/>
-                      <a:headEnd type="none" w="med" len="med"/>
-                      <a:tailEnd type="none" w="med" len="med"/>
-                    </a:lnL>
-                    <a:lnR w="6350" cap="flat" cmpd="sng" algn="ctr">
-                      <a:solidFill>
-                        <a:srgbClr val="CCCCCC"/>
-                      </a:solidFill>
-                      <a:prstDash val="solid"/>
-                      <a:round/>
-                      <a:headEnd type="none" w="med" len="med"/>
-                      <a:tailEnd type="none" w="med" len="med"/>
-                    </a:lnR>
-                    <a:lnT w="6350" cap="flat" cmpd="sng" algn="ctr">
-                      <a:solidFill>
-                        <a:srgbClr val="CCCCCC"/>
-                      </a:solidFill>
-                      <a:prstDash val="solid"/>
-                      <a:round/>
-                      <a:headEnd type="none" w="med" len="med"/>
-                      <a:tailEnd type="none" w="med" len="med"/>
-                    </a:lnT>
-                    <a:lnB w="6350" cap="flat" cmpd="sng" algn="ctr">
-                      <a:solidFill>
-                        <a:srgbClr val="CCCCCC"/>
-                      </a:solidFill>
-                      <a:prstDash val="solid"/>
-                      <a:round/>
-                      <a:headEnd type="none" w="med" len="med"/>
-                      <a:tailEnd type="none" w="med" len="med"/>
-                    </a:lnB>
-                  </a:tcPr>
-                </a:tc>
-                <a:tc>
-                  <a:txBody>
-                    <a:bodyPr/>
-                    <a:lstStyle/>
-                    <a:p>
-                      <a:pPr algn="ctr" indent="0" marL="0">
-                        <a:buNone/>
-                      </a:pPr>
-                      <a:r>
-                        <a:rPr lang="en-US" sz="700" dirty="0">
-                          <a:solidFill>
-                            <a:srgbClr val="333333"/>
-                          </a:solidFill>
-                        </a:rPr>
-                        <a:t>2</a:t>
-                      </a:r>
-                      <a:endParaRPr lang="en-US" sz="700" dirty="0"/>
-                    </a:p>
-                  </a:txBody>
-                  <a:tcPr marL="91440" marR="91440" marT="45720" marB="45720">
-                    <a:lnL w="6350" cap="flat" cmpd="sng" algn="ctr">
-                      <a:solidFill>
-                        <a:srgbClr val="CCCCCC"/>
-                      </a:solidFill>
-                      <a:prstDash val="solid"/>
-                      <a:round/>
-                      <a:headEnd type="none" w="med" len="med"/>
-                      <a:tailEnd type="none" w="med" len="med"/>
-                    </a:lnL>
-                    <a:lnR w="6350" cap="flat" cmpd="sng" algn="ctr">
-                      <a:solidFill>
-                        <a:srgbClr val="CCCCCC"/>
-                      </a:solidFill>
-                      <a:prstDash val="solid"/>
-                      <a:round/>
-                      <a:headEnd type="none" w="med" len="med"/>
-                      <a:tailEnd type="none" w="med" len="med"/>
-                    </a:lnR>
-                    <a:lnT w="6350" cap="flat" cmpd="sng" algn="ctr">
-                      <a:solidFill>
-                        <a:srgbClr val="CCCCCC"/>
-                      </a:solidFill>
-                      <a:prstDash val="solid"/>
-                      <a:round/>
-                      <a:headEnd type="none" w="med" len="med"/>
-                      <a:tailEnd type="none" w="med" len="med"/>
-                    </a:lnT>
-                    <a:lnB w="6350" cap="flat" cmpd="sng" algn="ctr">
-                      <a:solidFill>
-                        <a:srgbClr val="CCCCCC"/>
-                      </a:solidFill>
-                      <a:prstDash val="solid"/>
-                      <a:round/>
-                      <a:headEnd type="none" w="med" len="med"/>
-                      <a:tailEnd type="none" w="med" len="med"/>
-                    </a:lnB>
-                    <a:solidFill>
-                      <a:srgbClr val="FFF9C4"/>
-                    </a:solidFill>
-                  </a:tcPr>
-                </a:tc>
                 <a:tc>
                   <a:txBody>
                     <a:bodyPr/>
@@ -34632,67 +35446,6 @@
                     </a:lnB>
                     <a:solidFill>
                       <a:srgbClr val="FFF9C4"/>
-                    </a:solidFill>
-                  </a:tcPr>
-                </a:tc>
-                <a:tc>
-                  <a:txBody>
-                    <a:bodyPr/>
-                    <a:lstStyle/>
-                    <a:p>
-                      <a:pPr algn="ctr" indent="0" marL="0">
-                        <a:buNone/>
-                      </a:pPr>
-                      <a:r>
-                        <a:rPr lang="en-US" sz="700" dirty="0">
-                          <a:solidFill>
-                            <a:srgbClr val="333333"/>
-                          </a:solidFill>
-                        </a:rPr>
-                        <a:t>-</a:t>
-                      </a:r>
-                      <a:endParaRPr lang="en-US" sz="700" dirty="0"/>
-                    </a:p>
-                  </a:txBody>
-                  <a:tcPr marL="91440" marR="91440" marT="45720" marB="45720">
-                    <a:lnL w="6350" cap="flat" cmpd="sng" algn="ctr">
-                      <a:solidFill>
-                        <a:srgbClr val="CCCCCC"/>
-                      </a:solidFill>
-                      <a:prstDash val="solid"/>
-                      <a:round/>
-                      <a:headEnd type="none" w="med" len="med"/>
-                      <a:tailEnd type="none" w="med" len="med"/>
-                    </a:lnL>
-                    <a:lnR w="6350" cap="flat" cmpd="sng" algn="ctr">
-                      <a:solidFill>
-                        <a:srgbClr val="CCCCCC"/>
-                      </a:solidFill>
-                      <a:prstDash val="solid"/>
-                      <a:round/>
-                      <a:headEnd type="none" w="med" len="med"/>
-                      <a:tailEnd type="none" w="med" len="med"/>
-                    </a:lnR>
-                    <a:lnT w="6350" cap="flat" cmpd="sng" algn="ctr">
-                      <a:solidFill>
-                        <a:srgbClr val="CCCCCC"/>
-                      </a:solidFill>
-                      <a:prstDash val="solid"/>
-                      <a:round/>
-                      <a:headEnd type="none" w="med" len="med"/>
-                      <a:tailEnd type="none" w="med" len="med"/>
-                    </a:lnT>
-                    <a:lnB w="6350" cap="flat" cmpd="sng" algn="ctr">
-                      <a:solidFill>
-                        <a:srgbClr val="CCCCCC"/>
-                      </a:solidFill>
-                      <a:prstDash val="solid"/>
-                      <a:round/>
-                      <a:headEnd type="none" w="med" len="med"/>
-                      <a:tailEnd type="none" w="med" len="med"/>
-                    </a:lnB>
-                    <a:solidFill>
-                      <a:srgbClr val="FFFFFF"/>
                     </a:solidFill>
                   </a:tcPr>
                 </a:tc>
@@ -35495,7 +36248,7 @@
                             <a:srgbClr val="333333"/>
                           </a:solidFill>
                         </a:rPr>
-                        <a:t>-</a:t>
+                        <a:t>1</a:t>
                       </a:r>
                       <a:endParaRPr lang="en-US" sz="700" dirty="0"/>
                     </a:p>
@@ -35538,7 +36291,7 @@
                       <a:tailEnd type="none" w="med" len="med"/>
                     </a:lnB>
                     <a:solidFill>
-                      <a:srgbClr val="FFFFFF"/>
+                      <a:srgbClr val="FFF9C4"/>
                     </a:solidFill>
                   </a:tcPr>
                 </a:tc>
@@ -35556,7 +36309,7 @@
                             <a:srgbClr val="333333"/>
                           </a:solidFill>
                         </a:rPr>
-                        <a:t>1</a:t>
+                        <a:t>-</a:t>
                       </a:r>
                       <a:endParaRPr lang="en-US" sz="700" dirty="0"/>
                     </a:p>
@@ -35599,7 +36352,7 @@
                       <a:tailEnd type="none" w="med" len="med"/>
                     </a:lnB>
                     <a:solidFill>
-                      <a:srgbClr val="FFF9C4"/>
+                      <a:srgbClr val="FFFFFF"/>
                     </a:solidFill>
                   </a:tcPr>
                 </a:tc>
@@ -37513,7 +38266,7 @@
                 <a:ea typeface="Arial" pitchFamily="34" charset="-122"/>
                 <a:cs typeface="Arial" pitchFamily="34" charset="-120"/>
               </a:rPr>
-              <a:t>URGENT（緊急） (4)</a:t>
+              <a:t>URGENT（緊急） (5)</a:t>
             </a:r>
             <a:endParaRPr lang="en-US" sz="1100" dirty="0"/>
           </a:p>
@@ -37552,7 +38305,7 @@
                 <a:ea typeface="Arial" pitchFamily="34" charset="-122"/>
                 <a:cs typeface="Arial" pitchFamily="34" charset="-120"/>
               </a:rPr>
-              <a:t>コンフォートホテル博多（7.8点）</a:t>
+              <a:t>コンフォートホテル博多（7.79点）</a:t>
             </a:r>
             <a:endParaRPr lang="en-US" sz="800" dirty="0"/>
           </a:p>
@@ -37569,7 +38322,7 @@
                 <a:ea typeface="Arial" pitchFamily="34" charset="-122"/>
                 <a:cs typeface="Arial" pitchFamily="34" charset="-120"/>
               </a:rPr>
-              <a:t>チサンホテル浜松町（7.07点）</a:t>
+              <a:t>チサンホテル浜松町（7.11点）</a:t>
             </a:r>
             <a:endParaRPr lang="en-US" sz="800" dirty="0"/>
           </a:p>
@@ -37586,7 +38339,7 @@
                 <a:ea typeface="Arial" pitchFamily="34" charset="-122"/>
                 <a:cs typeface="Arial" pitchFamily="34" charset="-120"/>
               </a:rPr>
-              <a:t>アパホテル蒲田駅東（7.39点）</a:t>
+              <a:t>アパホテル蒲田駅東（7.45点）</a:t>
             </a:r>
             <a:endParaRPr lang="en-US" sz="800" dirty="0"/>
           </a:p>
@@ -37604,6 +38357,23 @@
                 <a:cs typeface="Arial" pitchFamily="34" charset="-120"/>
               </a:rPr>
               <a:t>コートホテル新横浜（7.03点）</a:t>
+            </a:r>
+            <a:endParaRPr lang="en-US" sz="800" dirty="0"/>
+          </a:p>
+          <a:p>
+            <a:pPr indent="0" marL="0">
+              <a:buNone/>
+            </a:pPr>
+            <a:r>
+              <a:rPr lang="en-US" sz="800" dirty="0">
+                <a:solidFill>
+                  <a:srgbClr val="333333"/>
+                </a:solidFill>
+                <a:latin typeface="Arial" pitchFamily="34" charset="0"/>
+                <a:ea typeface="Arial" pitchFamily="34" charset="-122"/>
+                <a:cs typeface="Arial" pitchFamily="34" charset="-120"/>
+              </a:rPr>
+              <a:t>コンフォートホテル横浜関内（7.46点）</a:t>
             </a:r>
             <a:endParaRPr lang="en-US" sz="800" dirty="0"/>
           </a:p>
@@ -37689,7 +38459,7 @@
                 <a:ea typeface="Arial" pitchFamily="34" charset="-122"/>
                 <a:cs typeface="Arial" pitchFamily="34" charset="-120"/>
               </a:rPr>
-              <a:t>HIGH（高） (3)</a:t>
+              <a:t>HIGH（高） (2)</a:t>
             </a:r>
             <a:endParaRPr lang="en-US" sz="1100" dirty="0"/>
           </a:p>
@@ -37728,7 +38498,7 @@
                 <a:ea typeface="Arial" pitchFamily="34" charset="-122"/>
                 <a:cs typeface="Arial" pitchFamily="34" charset="-120"/>
               </a:rPr>
-              <a:t>コンフォートホテル横浜関内（7.53点）</a:t>
+              <a:t>コンフォートイン六本木（8.15点）</a:t>
             </a:r>
             <a:endParaRPr lang="en-US" sz="800" dirty="0"/>
           </a:p>
@@ -37745,24 +38515,7 @@
                 <a:ea typeface="Arial" pitchFamily="34" charset="-122"/>
                 <a:cs typeface="Arial" pitchFamily="34" charset="-120"/>
               </a:rPr>
-              <a:t>コンフォートイン六本木（8.16点）</a:t>
-            </a:r>
-            <a:endParaRPr lang="en-US" sz="800" dirty="0"/>
-          </a:p>
-          <a:p>
-            <a:pPr indent="0" marL="0">
-              <a:buNone/>
-            </a:pPr>
-            <a:r>
-              <a:rPr lang="en-US" sz="800" dirty="0">
-                <a:solidFill>
-                  <a:srgbClr val="333333"/>
-                </a:solidFill>
-                <a:latin typeface="Arial" pitchFamily="34" charset="0"/>
-                <a:ea typeface="Arial" pitchFamily="34" charset="-122"/>
-                <a:cs typeface="Arial" pitchFamily="34" charset="-120"/>
-              </a:rPr>
-              <a:t>ホテルコメント横浜関内（8.86点）</a:t>
+              <a:t>ホテルコメント横浜関内（8.87点）</a:t>
             </a:r>
             <a:endParaRPr lang="en-US" sz="800" dirty="0"/>
           </a:p>
@@ -37887,7 +38640,7 @@
                 <a:ea typeface="Arial" pitchFamily="34" charset="-122"/>
                 <a:cs typeface="Arial" pitchFamily="34" charset="-120"/>
               </a:rPr>
-              <a:t>川崎日航ホテル（8.67点）</a:t>
+              <a:t>川崎日航ホテル（8.73点）</a:t>
             </a:r>
             <a:endParaRPr lang="en-US" sz="800" dirty="0"/>
           </a:p>
@@ -37904,7 +38657,7 @@
                 <a:ea typeface="Arial" pitchFamily="34" charset="-122"/>
                 <a:cs typeface="Arial" pitchFamily="34" charset="-120"/>
               </a:rPr>
-              <a:t>コンフォートホテル成田（8.53点）</a:t>
+              <a:t>コンフォートホテル成田（8.55点）</a:t>
             </a:r>
             <a:endParaRPr lang="en-US" sz="800" dirty="0"/>
           </a:p>
@@ -37921,7 +38674,7 @@
                 <a:ea typeface="Arial" pitchFamily="34" charset="-122"/>
                 <a:cs typeface="Arial" pitchFamily="34" charset="-120"/>
               </a:rPr>
-              <a:t>ダイワロイネットホテル東京大崎（8.91点）</a:t>
+              <a:t>ダイワロイネットホテル東京大崎（8.87点）</a:t>
             </a:r>
             <a:endParaRPr lang="en-US" sz="800" dirty="0"/>
           </a:p>
@@ -37938,7 +38691,7 @@
                 <a:ea typeface="Arial" pitchFamily="34" charset="-122"/>
                 <a:cs typeface="Arial" pitchFamily="34" charset="-120"/>
               </a:rPr>
-              <a:t>ハートンホテル東品川（8.68点）</a:t>
+              <a:t>ハートンホテル東品川（8.65点）</a:t>
             </a:r>
             <a:endParaRPr lang="en-US" sz="800" dirty="0"/>
           </a:p>
@@ -37955,7 +38708,7 @@
                 <a:ea typeface="Arial" pitchFamily="34" charset="-122"/>
                 <a:cs typeface="Arial" pitchFamily="34" charset="-120"/>
               </a:rPr>
-              <a:t>ホテルケヤキゲート東京府中（8.79点）</a:t>
+              <a:t>ホテルケヤキゲート東京府中（8.78点）</a:t>
             </a:r>
             <a:endParaRPr lang="en-US" sz="800" dirty="0"/>
           </a:p>
@@ -37972,7 +38725,7 @@
                 <a:ea typeface="Arial" pitchFamily="34" charset="-122"/>
                 <a:cs typeface="Arial" pitchFamily="34" charset="-120"/>
               </a:rPr>
-              <a:t>アパホテル相模原橋本駅東（8.12点）</a:t>
+              <a:t>アパホテル相模原橋本駅東（8.1点）</a:t>
             </a:r>
             <a:endParaRPr lang="en-US" sz="800" dirty="0"/>
           </a:p>
@@ -37989,7 +38742,7 @@
                 <a:ea typeface="Arial" pitchFamily="34" charset="-122"/>
                 <a:cs typeface="Arial" pitchFamily="34" charset="-120"/>
               </a:rPr>
-              <a:t>リッチモンドホテル東京目白（8.66点）</a:t>
+              <a:t>リッチモンドホテル東京目白（8.69点）</a:t>
             </a:r>
             <a:endParaRPr lang="en-US" sz="800" dirty="0"/>
           </a:p>
@@ -38006,7 +38759,7 @@
                 <a:ea typeface="Arial" pitchFamily="34" charset="-122"/>
                 <a:cs typeface="Arial" pitchFamily="34" charset="-120"/>
               </a:rPr>
-              <a:t>変なホテル東京羽田（8.28点）</a:t>
+              <a:t>変なホテル東京羽田（8.27点）</a:t>
             </a:r>
             <a:endParaRPr lang="en-US" sz="800" dirty="0"/>
           </a:p>
@@ -38023,7 +38776,7 @@
                 <a:ea typeface="Arial" pitchFamily="34" charset="-122"/>
                 <a:cs typeface="Arial" pitchFamily="34" charset="-120"/>
               </a:rPr>
-              <a:t>第一イン池袋（9.06点）</a:t>
+              <a:t>第一イン池袋（9.08点）</a:t>
             </a:r>
             <a:endParaRPr lang="en-US" sz="800" dirty="0"/>
           </a:p>
@@ -38040,7 +38793,7 @@
                 <a:ea typeface="Arial" pitchFamily="34" charset="-122"/>
                 <a:cs typeface="Arial" pitchFamily="34" charset="-120"/>
               </a:rPr>
-              <a:t>コンフォートホテルERA東京東神田（8.96点）</a:t>
+              <a:t>コンフォートホテルERA東京東神田（8.94点）</a:t>
             </a:r>
             <a:endParaRPr lang="en-US" sz="800" dirty="0"/>
           </a:p>
@@ -38165,7 +38918,7 @@
                 <a:ea typeface="Arial" pitchFamily="34" charset="-122"/>
                 <a:cs typeface="Arial" pitchFamily="34" charset="-120"/>
               </a:rPr>
-              <a:t>京成リッチモンドホテル東京錦糸町（9.03点）</a:t>
+              <a:t>京成リッチモンドホテル東京錦糸町（9.05点）</a:t>
             </a:r>
             <a:endParaRPr lang="en-US" sz="800" dirty="0"/>
           </a:p>
@@ -38182,7 +38935,7 @@
                 <a:ea typeface="Arial" pitchFamily="34" charset="-122"/>
                 <a:cs typeface="Arial" pitchFamily="34" charset="-120"/>
               </a:rPr>
-              <a:t>コンフォートスイーツ東京ベイ（9.17点）</a:t>
+              <a:t>コンフォートスイーツ東京ベイ（9.21点）</a:t>
             </a:r>
             <a:endParaRPr lang="en-US" sz="800" dirty="0"/>
           </a:p>
@@ -38403,7 +39156,7 @@
                 <a:ea typeface="Arial" pitchFamily="34" charset="-122"/>
                 <a:cs typeface="Arial" pitchFamily="34" charset="-120"/>
               </a:rPr>
-              <a:t>優先度 #1 | 現状 7.8点 → 目標 8.5点</a:t>
+              <a:t>優先度 #1 | 現状 7.79点 → 目標 8.5点</a:t>
             </a:r>
             <a:endParaRPr lang="en-US" sz="1000" dirty="0"/>
           </a:p>
@@ -38528,7 +39281,7 @@
                 <a:ea typeface="Arial" pitchFamily="34" charset="-122"/>
                 <a:cs typeface="Arial" pitchFamily="34" charset="-120"/>
               </a:rPr>
-              <a:t>7.8</a:t>
+              <a:t>7.79</a:t>
             </a:r>
             <a:endParaRPr lang="en-US" sz="2800" dirty="0"/>
           </a:p>
@@ -39609,7 +40362,7 @@
                 <a:ea typeface="Arial" pitchFamily="34" charset="-122"/>
                 <a:cs typeface="Arial" pitchFamily="34" charset="-120"/>
               </a:rPr>
-              <a:t>優先度 #2 | 現状 7.07点 → 目標 8点</a:t>
+              <a:t>優先度 #2 | 現状 7.11点 → 目標 8点</a:t>
             </a:r>
             <a:endParaRPr lang="en-US" sz="1000" dirty="0"/>
           </a:p>
@@ -39734,7 +40487,7 @@
                 <a:ea typeface="Arial" pitchFamily="34" charset="-122"/>
                 <a:cs typeface="Arial" pitchFamily="34" charset="-120"/>
               </a:rPr>
-              <a:t>7.07</a:t>
+              <a:t>7.11</a:t>
             </a:r>
             <a:endParaRPr lang="en-US" sz="2800" dirty="0"/>
           </a:p>
@@ -40815,7 +41568,7 @@
                 <a:ea typeface="Arial" pitchFamily="34" charset="-122"/>
                 <a:cs typeface="Arial" pitchFamily="34" charset="-120"/>
               </a:rPr>
-              <a:t>優先度 #3 | 現状 7.39点 → 目標 8点</a:t>
+              <a:t>優先度 #3 | 現状 7.45点 → 目標 8点</a:t>
             </a:r>
             <a:endParaRPr lang="en-US" sz="1000" dirty="0"/>
           </a:p>
@@ -40940,7 +41693,7 @@
                 <a:ea typeface="Arial" pitchFamily="34" charset="-122"/>
                 <a:cs typeface="Arial" pitchFamily="34" charset="-120"/>
               </a:rPr>
-              <a:t>7.39</a:t>
+              <a:t>7.45</a:t>
             </a:r>
             <a:endParaRPr lang="en-US" sz="2800" dirty="0"/>
           </a:p>

--- a/納品レポート/PRIMECHANGE戦略レポート/PRIMECHANGE_清掃戦略レポート.pptx
+++ b/納品レポート/PRIMECHANGE戦略レポート/PRIMECHANGE_清掃戦略レポート.pptx
@@ -2749,7 +2749,7 @@
                 <a:ea typeface="Arial" pitchFamily="34" charset="-122"/>
                 <a:cs typeface="Arial" pitchFamily="34" charset="-120"/>
               </a:rPr>
-              <a:t>2026年3月11日</a:t>
+              <a:t>2026年3月23日</a:t>
             </a:r>
             <a:endParaRPr lang="en-US" sz="1200" dirty="0"/>
           </a:p>
@@ -2788,7 +2788,7 @@
                 <a:ea typeface="Arial" pitchFamily="34" charset="-122"/>
                 <a:cs typeface="Arial" pitchFamily="34" charset="-120"/>
               </a:rPr>
-              <a:t>対象：19ホテル | レビュー：2260件</a:t>
+              <a:t>対象：19ホテル | レビュー：2323件</a:t>
             </a:r>
             <a:endParaRPr lang="en-US" sz="1100" dirty="0"/>
           </a:p>
@@ -2950,6 +2950,1178 @@
                 <a:ea typeface="Arial" pitchFamily="34" charset="-122"/>
                 <a:cs typeface="Arial" pitchFamily="34" charset="-120"/>
               </a:rPr>
+              <a:t>【URGENT】コンフォートホテル横浜関内</a:t>
+            </a:r>
+            <a:endParaRPr lang="en-US" sz="2000" dirty="0"/>
+          </a:p>
+        </p:txBody>
+      </p:sp>
+      <p:sp>
+        <p:nvSpPr>
+          <p:cNvPr id="4" name="Text 2"/>
+          <p:cNvSpPr/>
+          <p:nvPr/>
+        </p:nvSpPr>
+        <p:spPr>
+          <a:xfrm>
+            <a:off x="457200" y="320040"/>
+            <a:ext cx="8229600" cy="201168"/>
+          </a:xfrm>
+          <a:prstGeom prst="rect">
+            <a:avLst/>
+          </a:prstGeom>
+          <a:noFill/>
+          <a:ln/>
+        </p:spPr>
+        <p:txBody>
+          <a:bodyPr wrap="square" lIns="0" tIns="0" rIns="0" bIns="0" rtlCol="0" anchor="ctr"/>
+          <a:lstStyle/>
+          <a:p>
+            <a:pPr indent="0" marL="0">
+              <a:buNone/>
+            </a:pPr>
+            <a:r>
+              <a:rPr lang="en-US" sz="1000" dirty="0">
+                <a:solidFill>
+                  <a:srgbClr val="5A9BE6"/>
+                </a:solidFill>
+                <a:latin typeface="Arial" pitchFamily="34" charset="0"/>
+                <a:ea typeface="Arial" pitchFamily="34" charset="-122"/>
+                <a:cs typeface="Arial" pitchFamily="34" charset="-120"/>
+              </a:rPr>
+              <a:t>優先度 #4 | 現状 7.41点 → 目標 8点</a:t>
+            </a:r>
+            <a:endParaRPr lang="en-US" sz="1000" dirty="0"/>
+          </a:p>
+        </p:txBody>
+      </p:sp>
+      <p:sp>
+        <p:nvSpPr>
+          <p:cNvPr id="5" name="Shape 3"/>
+          <p:cNvSpPr/>
+          <p:nvPr/>
+        </p:nvSpPr>
+        <p:spPr>
+          <a:xfrm>
+            <a:off x="274320" y="731520"/>
+            <a:ext cx="1828800" cy="731520"/>
+          </a:xfrm>
+          <a:prstGeom prst="rect">
+            <a:avLst/>
+          </a:prstGeom>
+          <a:solidFill>
+            <a:srgbClr val="FFEBEE"/>
+          </a:solidFill>
+          <a:ln/>
+          <a:effectLst>
+            <a:outerShdw sx="100000" sy="100000" kx="0" ky="0" algn="bl" rotWithShape="0" blurRad="50800" dist="25400" dir="8100000">
+              <a:srgbClr val="000000">
+                <a:alpha val="10000"/>
+              </a:srgbClr>
+            </a:outerShdw>
+          </a:effectLst>
+        </p:spPr>
+      </p:sp>
+      <p:sp>
+        <p:nvSpPr>
+          <p:cNvPr id="6" name="Shape 4"/>
+          <p:cNvSpPr/>
+          <p:nvPr/>
+        </p:nvSpPr>
+        <p:spPr>
+          <a:xfrm>
+            <a:off x="274320" y="731520"/>
+            <a:ext cx="1828800" cy="36576"/>
+          </a:xfrm>
+          <a:prstGeom prst="rect">
+            <a:avLst/>
+          </a:prstGeom>
+          <a:solidFill>
+            <a:srgbClr val="E74C3C"/>
+          </a:solidFill>
+          <a:ln/>
+        </p:spPr>
+      </p:sp>
+      <p:sp>
+        <p:nvSpPr>
+          <p:cNvPr id="7" name="Text 5"/>
+          <p:cNvSpPr/>
+          <p:nvPr/>
+        </p:nvSpPr>
+        <p:spPr>
+          <a:xfrm>
+            <a:off x="274320" y="841248"/>
+            <a:ext cx="1828800" cy="201168"/>
+          </a:xfrm>
+          <a:prstGeom prst="rect">
+            <a:avLst/>
+          </a:prstGeom>
+          <a:noFill/>
+          <a:ln/>
+        </p:spPr>
+        <p:txBody>
+          <a:bodyPr wrap="square" lIns="0" tIns="0" rIns="0" bIns="0" rtlCol="0" anchor="ctr"/>
+          <a:lstStyle/>
+          <a:p>
+            <a:pPr algn="ctr" indent="0" marL="0">
+              <a:buNone/>
+            </a:pPr>
+            <a:r>
+              <a:rPr lang="en-US" sz="900" dirty="0">
+                <a:solidFill>
+                  <a:srgbClr val="666666"/>
+                </a:solidFill>
+                <a:latin typeface="Arial" pitchFamily="34" charset="0"/>
+                <a:ea typeface="Arial" pitchFamily="34" charset="-122"/>
+                <a:cs typeface="Arial" pitchFamily="34" charset="-120"/>
+              </a:rPr>
+              <a:t>現状スコア</a:t>
+            </a:r>
+            <a:endParaRPr lang="en-US" sz="900" dirty="0"/>
+          </a:p>
+        </p:txBody>
+      </p:sp>
+      <p:sp>
+        <p:nvSpPr>
+          <p:cNvPr id="8" name="Text 6"/>
+          <p:cNvSpPr/>
+          <p:nvPr/>
+        </p:nvSpPr>
+        <p:spPr>
+          <a:xfrm>
+            <a:off x="274320" y="1024128"/>
+            <a:ext cx="1828800" cy="411480"/>
+          </a:xfrm>
+          <a:prstGeom prst="rect">
+            <a:avLst/>
+          </a:prstGeom>
+          <a:noFill/>
+          <a:ln/>
+        </p:spPr>
+        <p:txBody>
+          <a:bodyPr wrap="square" lIns="0" tIns="0" rIns="0" bIns="0" rtlCol="0" anchor="ctr"/>
+          <a:lstStyle/>
+          <a:p>
+            <a:pPr algn="ctr" indent="0" marL="0">
+              <a:buNone/>
+            </a:pPr>
+            <a:r>
+              <a:rPr lang="en-US" sz="2800" b="1" dirty="0">
+                <a:solidFill>
+                  <a:srgbClr val="E74C3C"/>
+                </a:solidFill>
+                <a:latin typeface="Arial" pitchFamily="34" charset="0"/>
+                <a:ea typeface="Arial" pitchFamily="34" charset="-122"/>
+                <a:cs typeface="Arial" pitchFamily="34" charset="-120"/>
+              </a:rPr>
+              <a:t>7.41</a:t>
+            </a:r>
+            <a:endParaRPr lang="en-US" sz="2800" dirty="0"/>
+          </a:p>
+        </p:txBody>
+      </p:sp>
+      <p:sp>
+        <p:nvSpPr>
+          <p:cNvPr id="9" name="Shape 7"/>
+          <p:cNvSpPr/>
+          <p:nvPr/>
+        </p:nvSpPr>
+        <p:spPr>
+          <a:xfrm>
+            <a:off x="2286000" y="731520"/>
+            <a:ext cx="1828800" cy="731520"/>
+          </a:xfrm>
+          <a:prstGeom prst="rect">
+            <a:avLst/>
+          </a:prstGeom>
+          <a:solidFill>
+            <a:srgbClr val="E8F5E9"/>
+          </a:solidFill>
+          <a:ln/>
+          <a:effectLst>
+            <a:outerShdw sx="100000" sy="100000" kx="0" ky="0" algn="bl" rotWithShape="0" blurRad="50800" dist="25400" dir="8100000">
+              <a:srgbClr val="000000">
+                <a:alpha val="10000"/>
+              </a:srgbClr>
+            </a:outerShdw>
+          </a:effectLst>
+        </p:spPr>
+      </p:sp>
+      <p:sp>
+        <p:nvSpPr>
+          <p:cNvPr id="10" name="Shape 8"/>
+          <p:cNvSpPr/>
+          <p:nvPr/>
+        </p:nvSpPr>
+        <p:spPr>
+          <a:xfrm>
+            <a:off x="2286000" y="731520"/>
+            <a:ext cx="1828800" cy="36576"/>
+          </a:xfrm>
+          <a:prstGeom prst="rect">
+            <a:avLst/>
+          </a:prstGeom>
+          <a:solidFill>
+            <a:srgbClr val="27AE60"/>
+          </a:solidFill>
+          <a:ln/>
+        </p:spPr>
+      </p:sp>
+      <p:sp>
+        <p:nvSpPr>
+          <p:cNvPr id="11" name="Text 9"/>
+          <p:cNvSpPr/>
+          <p:nvPr/>
+        </p:nvSpPr>
+        <p:spPr>
+          <a:xfrm>
+            <a:off x="2286000" y="841248"/>
+            <a:ext cx="1828800" cy="201168"/>
+          </a:xfrm>
+          <a:prstGeom prst="rect">
+            <a:avLst/>
+          </a:prstGeom>
+          <a:noFill/>
+          <a:ln/>
+        </p:spPr>
+        <p:txBody>
+          <a:bodyPr wrap="square" lIns="0" tIns="0" rIns="0" bIns="0" rtlCol="0" anchor="ctr"/>
+          <a:lstStyle/>
+          <a:p>
+            <a:pPr algn="ctr" indent="0" marL="0">
+              <a:buNone/>
+            </a:pPr>
+            <a:r>
+              <a:rPr lang="en-US" sz="900" dirty="0">
+                <a:solidFill>
+                  <a:srgbClr val="666666"/>
+                </a:solidFill>
+                <a:latin typeface="Arial" pitchFamily="34" charset="0"/>
+                <a:ea typeface="Arial" pitchFamily="34" charset="-122"/>
+                <a:cs typeface="Arial" pitchFamily="34" charset="-120"/>
+              </a:rPr>
+              <a:t>目標スコア</a:t>
+            </a:r>
+            <a:endParaRPr lang="en-US" sz="900" dirty="0"/>
+          </a:p>
+        </p:txBody>
+      </p:sp>
+      <p:sp>
+        <p:nvSpPr>
+          <p:cNvPr id="12" name="Text 10"/>
+          <p:cNvSpPr/>
+          <p:nvPr/>
+        </p:nvSpPr>
+        <p:spPr>
+          <a:xfrm>
+            <a:off x="2286000" y="1024128"/>
+            <a:ext cx="1828800" cy="411480"/>
+          </a:xfrm>
+          <a:prstGeom prst="rect">
+            <a:avLst/>
+          </a:prstGeom>
+          <a:noFill/>
+          <a:ln/>
+        </p:spPr>
+        <p:txBody>
+          <a:bodyPr wrap="square" lIns="0" tIns="0" rIns="0" bIns="0" rtlCol="0" anchor="ctr"/>
+          <a:lstStyle/>
+          <a:p>
+            <a:pPr algn="ctr" indent="0" marL="0">
+              <a:buNone/>
+            </a:pPr>
+            <a:r>
+              <a:rPr lang="en-US" sz="2800" b="1" dirty="0">
+                <a:solidFill>
+                  <a:srgbClr val="27AE60"/>
+                </a:solidFill>
+                <a:latin typeface="Arial" pitchFamily="34" charset="0"/>
+                <a:ea typeface="Arial" pitchFamily="34" charset="-122"/>
+                <a:cs typeface="Arial" pitchFamily="34" charset="-120"/>
+              </a:rPr>
+              <a:t>8</a:t>
+            </a:r>
+            <a:endParaRPr lang="en-US" sz="2800" dirty="0"/>
+          </a:p>
+        </p:txBody>
+      </p:sp>
+      <p:sp>
+        <p:nvSpPr>
+          <p:cNvPr id="13" name="Shape 11"/>
+          <p:cNvSpPr/>
+          <p:nvPr/>
+        </p:nvSpPr>
+        <p:spPr>
+          <a:xfrm>
+            <a:off x="4389120" y="731520"/>
+            <a:ext cx="4389120" cy="731520"/>
+          </a:xfrm>
+          <a:prstGeom prst="rect">
+            <a:avLst/>
+          </a:prstGeom>
+          <a:solidFill>
+            <a:srgbClr val="F5F7FA"/>
+          </a:solidFill>
+          <a:ln/>
+          <a:effectLst>
+            <a:outerShdw sx="100000" sy="100000" kx="0" ky="0" algn="bl" rotWithShape="0" blurRad="50800" dist="25400" dir="8100000">
+              <a:srgbClr val="000000">
+                <a:alpha val="10000"/>
+              </a:srgbClr>
+            </a:outerShdw>
+          </a:effectLst>
+        </p:spPr>
+      </p:sp>
+      <p:sp>
+        <p:nvSpPr>
+          <p:cNvPr id="14" name="Text 12"/>
+          <p:cNvSpPr/>
+          <p:nvPr/>
+        </p:nvSpPr>
+        <p:spPr>
+          <a:xfrm>
+            <a:off x="4480560" y="749808"/>
+            <a:ext cx="1828800" cy="182880"/>
+          </a:xfrm>
+          <a:prstGeom prst="rect">
+            <a:avLst/>
+          </a:prstGeom>
+          <a:noFill/>
+          <a:ln/>
+        </p:spPr>
+        <p:txBody>
+          <a:bodyPr wrap="square" lIns="0" tIns="0" rIns="0" bIns="0" rtlCol="0" anchor="ctr"/>
+          <a:lstStyle/>
+          <a:p>
+            <a:pPr indent="0" marL="0">
+              <a:buNone/>
+            </a:pPr>
+            <a:r>
+              <a:rPr lang="en-US" sz="900" b="1" dirty="0">
+                <a:solidFill>
+                  <a:srgbClr val="666666"/>
+                </a:solidFill>
+                <a:latin typeface="Arial" pitchFamily="34" charset="0"/>
+                <a:ea typeface="Arial" pitchFamily="34" charset="-122"/>
+                <a:cs typeface="Arial" pitchFamily="34" charset="-120"/>
+              </a:rPr>
+              <a:t>主要課題</a:t>
+            </a:r>
+            <a:endParaRPr lang="en-US" sz="900" dirty="0"/>
+          </a:p>
+        </p:txBody>
+      </p:sp>
+      <p:sp>
+        <p:nvSpPr>
+          <p:cNvPr id="15" name="Text 13"/>
+          <p:cNvSpPr/>
+          <p:nvPr/>
+        </p:nvSpPr>
+        <p:spPr>
+          <a:xfrm>
+            <a:off x="4480560" y="914400"/>
+            <a:ext cx="4206240" cy="502920"/>
+          </a:xfrm>
+          <a:prstGeom prst="rect">
+            <a:avLst/>
+          </a:prstGeom>
+          <a:noFill/>
+          <a:ln/>
+        </p:spPr>
+        <p:txBody>
+          <a:bodyPr wrap="square" lIns="0" tIns="0" rIns="0" bIns="0" rtlCol="0" anchor="ctr"/>
+          <a:lstStyle/>
+          <a:p>
+            <a:pPr indent="0" marL="0">
+              <a:buNone/>
+            </a:pPr>
+            <a:r>
+              <a:rPr lang="en-US" sz="800" dirty="0">
+                <a:solidFill>
+                  <a:srgbClr val="333333"/>
+                </a:solidFill>
+                <a:latin typeface="Arial" pitchFamily="34" charset="0"/>
+                <a:ea typeface="Arial" pitchFamily="34" charset="-122"/>
+                <a:cs typeface="Arial" pitchFamily="34" charset="-120"/>
+              </a:rPr>
+              <a:t>シミ・汚れ跡: 7件</a:t>
+            </a:r>
+            <a:endParaRPr lang="en-US" sz="800" dirty="0"/>
+          </a:p>
+          <a:p>
+            <a:pPr indent="0" marL="0">
+              <a:buNone/>
+            </a:pPr>
+            <a:r>
+              <a:rPr lang="en-US" sz="800" dirty="0">
+                <a:solidFill>
+                  <a:srgbClr val="333333"/>
+                </a:solidFill>
+                <a:latin typeface="Arial" pitchFamily="34" charset="0"/>
+                <a:ea typeface="Arial" pitchFamily="34" charset="-122"/>
+                <a:cs typeface="Arial" pitchFamily="34" charset="-120"/>
+              </a:rPr>
+              <a:t>清掃品質全般: 6件</a:t>
+            </a:r>
+            <a:endParaRPr lang="en-US" sz="800" dirty="0"/>
+          </a:p>
+          <a:p>
+            <a:pPr indent="0" marL="0">
+              <a:buNone/>
+            </a:pPr>
+            <a:r>
+              <a:rPr lang="en-US" sz="800" dirty="0">
+                <a:solidFill>
+                  <a:srgbClr val="333333"/>
+                </a:solidFill>
+                <a:latin typeface="Arial" pitchFamily="34" charset="0"/>
+                <a:ea typeface="Arial" pitchFamily="34" charset="-122"/>
+                <a:cs typeface="Arial" pitchFamily="34" charset="-120"/>
+              </a:rPr>
+              <a:t>タバコ関連: 1件</a:t>
+            </a:r>
+            <a:endParaRPr lang="en-US" sz="800" dirty="0"/>
+          </a:p>
+          <a:p>
+            <a:pPr indent="0" marL="0">
+              <a:buNone/>
+            </a:pPr>
+            <a:r>
+              <a:rPr lang="en-US" sz="800" dirty="0">
+                <a:solidFill>
+                  <a:srgbClr val="333333"/>
+                </a:solidFill>
+                <a:latin typeface="Arial" pitchFamily="34" charset="0"/>
+                <a:ea typeface="Arial" pitchFamily="34" charset="-122"/>
+                <a:cs typeface="Arial" pitchFamily="34" charset="-120"/>
+              </a:rPr>
+              <a:t>毛髪・髪の毛: 1件</a:t>
+            </a:r>
+            <a:endParaRPr lang="en-US" sz="800" dirty="0"/>
+          </a:p>
+        </p:txBody>
+      </p:sp>
+      <p:sp>
+        <p:nvSpPr>
+          <p:cNvPr id="16" name="Shape 14"/>
+          <p:cNvSpPr/>
+          <p:nvPr/>
+        </p:nvSpPr>
+        <p:spPr>
+          <a:xfrm>
+            <a:off x="274320" y="1691640"/>
+            <a:ext cx="2743200" cy="2697480"/>
+          </a:xfrm>
+          <a:prstGeom prst="rect">
+            <a:avLst/>
+          </a:prstGeom>
+          <a:solidFill>
+            <a:srgbClr val="FFEBEE"/>
+          </a:solidFill>
+          <a:ln/>
+          <a:effectLst>
+            <a:outerShdw sx="100000" sy="100000" kx="0" ky="0" algn="bl" rotWithShape="0" blurRad="50800" dist="25400" dir="8100000">
+              <a:srgbClr val="000000">
+                <a:alpha val="10000"/>
+              </a:srgbClr>
+            </a:outerShdw>
+          </a:effectLst>
+        </p:spPr>
+      </p:sp>
+      <p:sp>
+        <p:nvSpPr>
+          <p:cNvPr id="17" name="Shape 15"/>
+          <p:cNvSpPr/>
+          <p:nvPr/>
+        </p:nvSpPr>
+        <p:spPr>
+          <a:xfrm>
+            <a:off x="274320" y="1691640"/>
+            <a:ext cx="2743200" cy="36576"/>
+          </a:xfrm>
+          <a:prstGeom prst="rect">
+            <a:avLst/>
+          </a:prstGeom>
+          <a:solidFill>
+            <a:srgbClr val="E74C3C"/>
+          </a:solidFill>
+          <a:ln/>
+        </p:spPr>
+      </p:sp>
+      <p:sp>
+        <p:nvSpPr>
+          <p:cNvPr id="18" name="Text 16"/>
+          <p:cNvSpPr/>
+          <p:nvPr/>
+        </p:nvSpPr>
+        <p:spPr>
+          <a:xfrm>
+            <a:off x="365760" y="1764792"/>
+            <a:ext cx="2560320" cy="228600"/>
+          </a:xfrm>
+          <a:prstGeom prst="rect">
+            <a:avLst/>
+          </a:prstGeom>
+          <a:noFill/>
+          <a:ln/>
+        </p:spPr>
+        <p:txBody>
+          <a:bodyPr wrap="square" lIns="0" tIns="0" rIns="0" bIns="0" rtlCol="0" anchor="ctr"/>
+          <a:lstStyle/>
+          <a:p>
+            <a:pPr indent="0" marL="0">
+              <a:buNone/>
+            </a:pPr>
+            <a:r>
+              <a:rPr lang="en-US" sz="900" b="1" dirty="0">
+                <a:solidFill>
+                  <a:srgbClr val="E74C3C"/>
+                </a:solidFill>
+                <a:latin typeface="Arial" pitchFamily="34" charset="0"/>
+                <a:ea typeface="Arial" pitchFamily="34" charset="-122"/>
+                <a:cs typeface="Arial" pitchFamily="34" charset="-120"/>
+              </a:rPr>
+              <a:t>Phase 1: 即時対応（1-2週間）</a:t>
+            </a:r>
+            <a:endParaRPr lang="en-US" sz="900" dirty="0"/>
+          </a:p>
+        </p:txBody>
+      </p:sp>
+      <p:sp>
+        <p:nvSpPr>
+          <p:cNvPr id="19" name="Text 17"/>
+          <p:cNvSpPr/>
+          <p:nvPr/>
+        </p:nvSpPr>
+        <p:spPr>
+          <a:xfrm>
+            <a:off x="365760" y="2039112"/>
+            <a:ext cx="2560320" cy="2286000"/>
+          </a:xfrm>
+          <a:prstGeom prst="rect">
+            <a:avLst/>
+          </a:prstGeom>
+          <a:noFill/>
+          <a:ln/>
+        </p:spPr>
+        <p:txBody>
+          <a:bodyPr wrap="square" lIns="0" tIns="0" rIns="0" bIns="0" rtlCol="0" anchor="t"/>
+          <a:lstStyle/>
+          <a:p>
+            <a:pPr indent="0" marL="0">
+              <a:buNone/>
+            </a:pPr>
+            <a:r>
+              <a:rPr lang="en-US" sz="700" dirty="0">
+                <a:solidFill>
+                  <a:srgbClr val="333333"/>
+                </a:solidFill>
+                <a:latin typeface="Arial" pitchFamily="34" charset="0"/>
+                <a:ea typeface="Arial" pitchFamily="34" charset="-122"/>
+                <a:cs typeface="Arial" pitchFamily="34" charset="-120"/>
+              </a:rPr>
+              <a:t>- シミ箇所の特定と専用クリーナーによる除去</a:t>
+            </a:r>
+            <a:endParaRPr lang="en-US" sz="700" dirty="0"/>
+          </a:p>
+          <a:p>
+            <a:pPr indent="0" marL="0">
+              <a:buNone/>
+            </a:pPr>
+            <a:r>
+              <a:rPr lang="en-US" sz="700" dirty="0">
+                <a:solidFill>
+                  <a:srgbClr val="333333"/>
+                </a:solidFill>
+                <a:latin typeface="Arial" pitchFamily="34" charset="0"/>
+                <a:ea typeface="Arial" pitchFamily="34" charset="-122"/>
+                <a:cs typeface="Arial" pitchFamily="34" charset="-120"/>
+              </a:rPr>
+              <a:t>- 清掃品質基準の明確化と全スタッフへの共有</a:t>
+            </a:r>
+            <a:endParaRPr lang="en-US" sz="700" dirty="0"/>
+          </a:p>
+          <a:p>
+            <a:pPr indent="0" marL="0">
+              <a:buNone/>
+            </a:pPr>
+            <a:r>
+              <a:rPr lang="en-US" sz="700" dirty="0">
+                <a:solidFill>
+                  <a:srgbClr val="333333"/>
+                </a:solidFill>
+                <a:latin typeface="Arial" pitchFamily="34" charset="0"/>
+                <a:ea typeface="Arial" pitchFamily="34" charset="-122"/>
+                <a:cs typeface="Arial" pitchFamily="34" charset="-120"/>
+              </a:rPr>
+              <a:t>- 重点箇所（水回り・ベッド周り）の清掃手順見直し</a:t>
+            </a:r>
+            <a:endParaRPr lang="en-US" sz="700" dirty="0"/>
+          </a:p>
+          <a:p>
+            <a:pPr indent="0" marL="0">
+              <a:buNone/>
+            </a:pPr>
+            <a:r>
+              <a:rPr lang="en-US" sz="700" dirty="0">
+                <a:solidFill>
+                  <a:srgbClr val="333333"/>
+                </a:solidFill>
+                <a:latin typeface="Arial" pitchFamily="34" charset="0"/>
+                <a:ea typeface="Arial" pitchFamily="34" charset="-122"/>
+                <a:cs typeface="Arial" pitchFamily="34" charset="-120"/>
+              </a:rPr>
+              <a:t>- 禁煙室の残留臭調査と脱臭処理</a:t>
+            </a:r>
+            <a:endParaRPr lang="en-US" sz="700" dirty="0"/>
+          </a:p>
+          <a:p>
+            <a:pPr indent="0" marL="0">
+              <a:buNone/>
+            </a:pPr>
+            <a:r>
+              <a:rPr lang="en-US" sz="700" dirty="0">
+                <a:solidFill>
+                  <a:srgbClr val="333333"/>
+                </a:solidFill>
+                <a:latin typeface="Arial" pitchFamily="34" charset="0"/>
+                <a:ea typeface="Arial" pitchFamily="34" charset="-122"/>
+                <a:cs typeface="Arial" pitchFamily="34" charset="-120"/>
+              </a:rPr>
+              <a:t>- 喫煙室との動線分離確認</a:t>
+            </a:r>
+            <a:endParaRPr lang="en-US" sz="700" dirty="0"/>
+          </a:p>
+        </p:txBody>
+      </p:sp>
+      <p:sp>
+        <p:nvSpPr>
+          <p:cNvPr id="20" name="Shape 18"/>
+          <p:cNvSpPr/>
+          <p:nvPr/>
+        </p:nvSpPr>
+        <p:spPr>
+          <a:xfrm>
+            <a:off x="3154680" y="1691640"/>
+            <a:ext cx="2743200" cy="2697480"/>
+          </a:xfrm>
+          <a:prstGeom prst="rect">
+            <a:avLst/>
+          </a:prstGeom>
+          <a:solidFill>
+            <a:srgbClr val="FFF3E0"/>
+          </a:solidFill>
+          <a:ln/>
+          <a:effectLst>
+            <a:outerShdw sx="100000" sy="100000" kx="0" ky="0" algn="bl" rotWithShape="0" blurRad="50800" dist="25400" dir="8100000">
+              <a:srgbClr val="000000">
+                <a:alpha val="10000"/>
+              </a:srgbClr>
+            </a:outerShdw>
+          </a:effectLst>
+        </p:spPr>
+      </p:sp>
+      <p:sp>
+        <p:nvSpPr>
+          <p:cNvPr id="21" name="Shape 19"/>
+          <p:cNvSpPr/>
+          <p:nvPr/>
+        </p:nvSpPr>
+        <p:spPr>
+          <a:xfrm>
+            <a:off x="3154680" y="1691640"/>
+            <a:ext cx="2743200" cy="36576"/>
+          </a:xfrm>
+          <a:prstGeom prst="rect">
+            <a:avLst/>
+          </a:prstGeom>
+          <a:solidFill>
+            <a:srgbClr val="FF9800"/>
+          </a:solidFill>
+          <a:ln/>
+        </p:spPr>
+      </p:sp>
+      <p:sp>
+        <p:nvSpPr>
+          <p:cNvPr id="22" name="Text 20"/>
+          <p:cNvSpPr/>
+          <p:nvPr/>
+        </p:nvSpPr>
+        <p:spPr>
+          <a:xfrm>
+            <a:off x="3246120" y="1764792"/>
+            <a:ext cx="2560320" cy="228600"/>
+          </a:xfrm>
+          <a:prstGeom prst="rect">
+            <a:avLst/>
+          </a:prstGeom>
+          <a:noFill/>
+          <a:ln/>
+        </p:spPr>
+        <p:txBody>
+          <a:bodyPr wrap="square" lIns="0" tIns="0" rIns="0" bIns="0" rtlCol="0" anchor="ctr"/>
+          <a:lstStyle/>
+          <a:p>
+            <a:pPr indent="0" marL="0">
+              <a:buNone/>
+            </a:pPr>
+            <a:r>
+              <a:rPr lang="en-US" sz="900" b="1" dirty="0">
+                <a:solidFill>
+                  <a:srgbClr val="FF9800"/>
+                </a:solidFill>
+                <a:latin typeface="Arial" pitchFamily="34" charset="0"/>
+                <a:ea typeface="Arial" pitchFamily="34" charset="-122"/>
+                <a:cs typeface="Arial" pitchFamily="34" charset="-120"/>
+              </a:rPr>
+              <a:t>Phase 2: 短期施策（1-3ヶ月）</a:t>
+            </a:r>
+            <a:endParaRPr lang="en-US" sz="900" dirty="0"/>
+          </a:p>
+        </p:txBody>
+      </p:sp>
+      <p:sp>
+        <p:nvSpPr>
+          <p:cNvPr id="23" name="Text 21"/>
+          <p:cNvSpPr/>
+          <p:nvPr/>
+        </p:nvSpPr>
+        <p:spPr>
+          <a:xfrm>
+            <a:off x="3246120" y="2039112"/>
+            <a:ext cx="2560320" cy="2286000"/>
+          </a:xfrm>
+          <a:prstGeom prst="rect">
+            <a:avLst/>
+          </a:prstGeom>
+          <a:noFill/>
+          <a:ln/>
+        </p:spPr>
+        <p:txBody>
+          <a:bodyPr wrap="square" lIns="0" tIns="0" rIns="0" bIns="0" rtlCol="0" anchor="t"/>
+          <a:lstStyle/>
+          <a:p>
+            <a:pPr indent="0" marL="0">
+              <a:buNone/>
+            </a:pPr>
+            <a:r>
+              <a:rPr lang="en-US" sz="700" dirty="0">
+                <a:solidFill>
+                  <a:srgbClr val="333333"/>
+                </a:solidFill>
+                <a:latin typeface="Arial" pitchFamily="34" charset="0"/>
+                <a:ea typeface="Arial" pitchFamily="34" charset="-122"/>
+                <a:cs typeface="Arial" pitchFamily="34" charset="-120"/>
+              </a:rPr>
+              <a:t>- シミ発見時の即時報告・対処フロー構築</a:t>
+            </a:r>
+            <a:endParaRPr lang="en-US" sz="700" dirty="0"/>
+          </a:p>
+          <a:p>
+            <a:pPr indent="0" marL="0">
+              <a:buNone/>
+            </a:pPr>
+            <a:r>
+              <a:rPr lang="en-US" sz="700" dirty="0">
+                <a:solidFill>
+                  <a:srgbClr val="333333"/>
+                </a:solidFill>
+                <a:latin typeface="Arial" pitchFamily="34" charset="0"/>
+                <a:ea typeface="Arial" pitchFamily="34" charset="-122"/>
+                <a:cs typeface="Arial" pitchFamily="34" charset="-120"/>
+              </a:rPr>
+              <a:t>- 品質管理チェックリストの導入と実施</a:t>
+            </a:r>
+            <a:endParaRPr lang="en-US" sz="700" dirty="0"/>
+          </a:p>
+          <a:p>
+            <a:pPr indent="0" marL="0">
+              <a:buNone/>
+            </a:pPr>
+            <a:r>
+              <a:rPr lang="en-US" sz="700" dirty="0">
+                <a:solidFill>
+                  <a:srgbClr val="333333"/>
+                </a:solidFill>
+                <a:latin typeface="Arial" pitchFamily="34" charset="0"/>
+                <a:ea typeface="Arial" pitchFamily="34" charset="-122"/>
+                <a:cs typeface="Arial" pitchFamily="34" charset="-120"/>
+              </a:rPr>
+              <a:t>- QCインスペクション体制の構築（ランダム抜き打ち検査）</a:t>
+            </a:r>
+            <a:endParaRPr lang="en-US" sz="700" dirty="0"/>
+          </a:p>
+          <a:p>
+            <a:pPr indent="0" marL="0">
+              <a:buNone/>
+            </a:pPr>
+            <a:r>
+              <a:rPr lang="en-US" sz="700" dirty="0">
+                <a:solidFill>
+                  <a:srgbClr val="333333"/>
+                </a:solidFill>
+                <a:latin typeface="Arial" pitchFamily="34" charset="0"/>
+                <a:ea typeface="Arial" pitchFamily="34" charset="-122"/>
+                <a:cs typeface="Arial" pitchFamily="34" charset="-120"/>
+              </a:rPr>
+              <a:t>- 廊下・共用部の定期脱臭処理スケジュール導入</a:t>
+            </a:r>
+            <a:endParaRPr lang="en-US" sz="700" dirty="0"/>
+          </a:p>
+          <a:p>
+            <a:pPr indent="0" marL="0">
+              <a:buNone/>
+            </a:pPr>
+            <a:r>
+              <a:rPr lang="en-US" sz="700" dirty="0">
+                <a:solidFill>
+                  <a:srgbClr val="333333"/>
+                </a:solidFill>
+                <a:latin typeface="Arial" pitchFamily="34" charset="0"/>
+                <a:ea typeface="Arial" pitchFamily="34" charset="-122"/>
+                <a:cs typeface="Arial" pitchFamily="34" charset="-120"/>
+              </a:rPr>
+              <a:t>- 清掃チェックリストに毛髪確認項目を明記</a:t>
+            </a:r>
+            <a:endParaRPr lang="en-US" sz="700" dirty="0"/>
+          </a:p>
+        </p:txBody>
+      </p:sp>
+      <p:sp>
+        <p:nvSpPr>
+          <p:cNvPr id="24" name="Shape 22"/>
+          <p:cNvSpPr/>
+          <p:nvPr/>
+        </p:nvSpPr>
+        <p:spPr>
+          <a:xfrm>
+            <a:off x="6035040" y="1691640"/>
+            <a:ext cx="2743200" cy="2697480"/>
+          </a:xfrm>
+          <a:prstGeom prst="rect">
+            <a:avLst/>
+          </a:prstGeom>
+          <a:solidFill>
+            <a:srgbClr val="E3F2FD"/>
+          </a:solidFill>
+          <a:ln/>
+          <a:effectLst>
+            <a:outerShdw sx="100000" sy="100000" kx="0" ky="0" algn="bl" rotWithShape="0" blurRad="50800" dist="25400" dir="8100000">
+              <a:srgbClr val="000000">
+                <a:alpha val="10000"/>
+              </a:srgbClr>
+            </a:outerShdw>
+          </a:effectLst>
+        </p:spPr>
+      </p:sp>
+      <p:sp>
+        <p:nvSpPr>
+          <p:cNvPr id="25" name="Shape 23"/>
+          <p:cNvSpPr/>
+          <p:nvPr/>
+        </p:nvSpPr>
+        <p:spPr>
+          <a:xfrm>
+            <a:off x="6035040" y="1691640"/>
+            <a:ext cx="2743200" cy="36576"/>
+          </a:xfrm>
+          <a:prstGeom prst="rect">
+            <a:avLst/>
+          </a:prstGeom>
+          <a:solidFill>
+            <a:srgbClr val="2196F3"/>
+          </a:solidFill>
+          <a:ln/>
+        </p:spPr>
+      </p:sp>
+      <p:sp>
+        <p:nvSpPr>
+          <p:cNvPr id="26" name="Text 24"/>
+          <p:cNvSpPr/>
+          <p:nvPr/>
+        </p:nvSpPr>
+        <p:spPr>
+          <a:xfrm>
+            <a:off x="6126480" y="1764792"/>
+            <a:ext cx="2560320" cy="228600"/>
+          </a:xfrm>
+          <a:prstGeom prst="rect">
+            <a:avLst/>
+          </a:prstGeom>
+          <a:noFill/>
+          <a:ln/>
+        </p:spPr>
+        <p:txBody>
+          <a:bodyPr wrap="square" lIns="0" tIns="0" rIns="0" bIns="0" rtlCol="0" anchor="ctr"/>
+          <a:lstStyle/>
+          <a:p>
+            <a:pPr indent="0" marL="0">
+              <a:buNone/>
+            </a:pPr>
+            <a:r>
+              <a:rPr lang="en-US" sz="900" b="1" dirty="0">
+                <a:solidFill>
+                  <a:srgbClr val="2196F3"/>
+                </a:solidFill>
+                <a:latin typeface="Arial" pitchFamily="34" charset="0"/>
+                <a:ea typeface="Arial" pitchFamily="34" charset="-122"/>
+                <a:cs typeface="Arial" pitchFamily="34" charset="-120"/>
+              </a:rPr>
+              <a:t>Phase 3: 中期施策（3-6ヶ月）</a:t>
+            </a:r>
+            <a:endParaRPr lang="en-US" sz="900" dirty="0"/>
+          </a:p>
+        </p:txBody>
+      </p:sp>
+      <p:sp>
+        <p:nvSpPr>
+          <p:cNvPr id="27" name="Text 25"/>
+          <p:cNvSpPr/>
+          <p:nvPr/>
+        </p:nvSpPr>
+        <p:spPr>
+          <a:xfrm>
+            <a:off x="6126480" y="2039112"/>
+            <a:ext cx="2560320" cy="2286000"/>
+          </a:xfrm>
+          <a:prstGeom prst="rect">
+            <a:avLst/>
+          </a:prstGeom>
+          <a:noFill/>
+          <a:ln/>
+        </p:spPr>
+        <p:txBody>
+          <a:bodyPr wrap="square" lIns="0" tIns="0" rIns="0" bIns="0" rtlCol="0" anchor="t"/>
+          <a:lstStyle/>
+          <a:p>
+            <a:pPr indent="0" marL="0">
+              <a:buNone/>
+            </a:pPr>
+            <a:r>
+              <a:rPr lang="en-US" sz="700" dirty="0">
+                <a:solidFill>
+                  <a:srgbClr val="333333"/>
+                </a:solidFill>
+                <a:latin typeface="Arial" pitchFamily="34" charset="0"/>
+                <a:ea typeface="Arial" pitchFamily="34" charset="-122"/>
+                <a:cs typeface="Arial" pitchFamily="34" charset="-120"/>
+              </a:rPr>
+              <a:t>- 清掃スタッフの定期研修プログラム導入</a:t>
+            </a:r>
+            <a:endParaRPr lang="en-US" sz="700" dirty="0"/>
+          </a:p>
+          <a:p>
+            <a:pPr indent="0" marL="0">
+              <a:buNone/>
+            </a:pPr>
+            <a:r>
+              <a:rPr lang="en-US" sz="700" dirty="0">
+                <a:solidFill>
+                  <a:srgbClr val="333333"/>
+                </a:solidFill>
+                <a:latin typeface="Arial" pitchFamily="34" charset="0"/>
+                <a:ea typeface="Arial" pitchFamily="34" charset="-122"/>
+                <a:cs typeface="Arial" pitchFamily="34" charset="-120"/>
+              </a:rPr>
+              <a:t>- デジタル清掃記録システムの検討</a:t>
+            </a:r>
+            <a:endParaRPr lang="en-US" sz="700" dirty="0"/>
+          </a:p>
+          <a:p>
+            <a:pPr indent="0" marL="0">
+              <a:buNone/>
+            </a:pPr>
+            <a:r>
+              <a:rPr lang="en-US" sz="700" dirty="0">
+                <a:solidFill>
+                  <a:srgbClr val="333333"/>
+                </a:solidFill>
+                <a:latin typeface="Arial" pitchFamily="34" charset="0"/>
+                <a:ea typeface="Arial" pitchFamily="34" charset="-122"/>
+                <a:cs typeface="Arial" pitchFamily="34" charset="-120"/>
+              </a:rPr>
+              <a:t>- フロア単位での完全禁煙化提案</a:t>
+            </a:r>
+            <a:endParaRPr lang="en-US" sz="700" dirty="0"/>
+          </a:p>
+        </p:txBody>
+      </p:sp>
+      <p:sp>
+        <p:nvSpPr>
+          <p:cNvPr id="28" name="Shape 26"/>
+          <p:cNvSpPr/>
+          <p:nvPr/>
+        </p:nvSpPr>
+        <p:spPr>
+          <a:xfrm>
+            <a:off x="0" y="4800600"/>
+            <a:ext cx="9144000" cy="342900"/>
+          </a:xfrm>
+          <a:prstGeom prst="rect">
+            <a:avLst/>
+          </a:prstGeom>
+          <a:solidFill>
+            <a:srgbClr val="1B3A5C"/>
+          </a:solidFill>
+          <a:ln/>
+        </p:spPr>
+      </p:sp>
+      <p:sp>
+        <p:nvSpPr>
+          <p:cNvPr id="29" name="Text 27"/>
+          <p:cNvSpPr/>
+          <p:nvPr/>
+        </p:nvSpPr>
+        <p:spPr>
+          <a:xfrm>
+            <a:off x="457200" y="4800600"/>
+            <a:ext cx="3657600" cy="342900"/>
+          </a:xfrm>
+          <a:prstGeom prst="rect">
+            <a:avLst/>
+          </a:prstGeom>
+          <a:noFill/>
+          <a:ln/>
+        </p:spPr>
+        <p:txBody>
+          <a:bodyPr wrap="square" rtlCol="0" anchor="ctr"/>
+          <a:lstStyle/>
+          <a:p>
+            <a:pPr indent="0" marL="0">
+              <a:buNone/>
+            </a:pPr>
+            <a:r>
+              <a:rPr lang="en-US" sz="800" dirty="0">
+                <a:solidFill>
+                  <a:srgbClr val="94A3B8"/>
+                </a:solidFill>
+                <a:latin typeface="Arial" pitchFamily="34" charset="0"/>
+                <a:ea typeface="Arial" pitchFamily="34" charset="-122"/>
+                <a:cs typeface="Arial" pitchFamily="34" charset="-120"/>
+              </a:rPr>
+              <a:t>Confidential | PRIMECHANGE</a:t>
+            </a:r>
+            <a:endParaRPr lang="en-US" sz="800" dirty="0"/>
+          </a:p>
+        </p:txBody>
+      </p:sp>
+      <p:sp>
+        <p:nvSpPr>
+          <p:cNvPr id="30" name="Text 28"/>
+          <p:cNvSpPr/>
+          <p:nvPr/>
+        </p:nvSpPr>
+        <p:spPr>
+          <a:xfrm>
+            <a:off x="8229600" y="4800600"/>
+            <a:ext cx="457200" cy="342900"/>
+          </a:xfrm>
+          <a:prstGeom prst="rect">
+            <a:avLst/>
+          </a:prstGeom>
+          <a:noFill/>
+          <a:ln/>
+        </p:spPr>
+        <p:txBody>
+          <a:bodyPr wrap="square" rtlCol="0" anchor="ctr"/>
+          <a:lstStyle/>
+          <a:p>
+            <a:pPr algn="r" indent="0" marL="0">
+              <a:buNone/>
+            </a:pPr>
+            <a:r>
+              <a:rPr lang="en-US" sz="800" dirty="0">
+                <a:solidFill>
+                  <a:srgbClr val="94A3B8"/>
+                </a:solidFill>
+                <a:latin typeface="Arial" pitchFamily="34" charset="0"/>
+                <a:ea typeface="Arial" pitchFamily="34" charset="-122"/>
+                <a:cs typeface="Arial" pitchFamily="34" charset="-120"/>
+              </a:rPr>
+              <a:t>10</a:t>
+            </a:r>
+            <a:endParaRPr lang="en-US" sz="800" dirty="0"/>
+          </a:p>
+        </p:txBody>
+      </p:sp>
+    </p:spTree>
+  </p:cSld>
+  <p:clrMapOvr>
+    <a:masterClrMapping/>
+  </p:clrMapOvr>
+</p:sld>
+</file>
+
+<file path=ppt/slides/slide11.xml><?xml version="1.0" encoding="utf-8"?>
+<p:sld xmlns:a="http://schemas.openxmlformats.org/drawingml/2006/main" xmlns:r="http://schemas.openxmlformats.org/officeDocument/2006/relationships" xmlns:p="http://schemas.openxmlformats.org/presentationml/2006/main">
+  <p:cSld name="Slide 11">
+    <p:spTree>
+      <p:nvGrpSpPr>
+        <p:cNvPr id="1" name=""/>
+        <p:cNvGrpSpPr/>
+        <p:nvPr/>
+      </p:nvGrpSpPr>
+      <p:grpSpPr>
+        <a:xfrm>
+          <a:off x="0" y="0"/>
+          <a:ext cx="0" cy="0"/>
+          <a:chOff x="0" y="0"/>
+          <a:chExt cx="0" cy="0"/>
+        </a:xfrm>
+      </p:grpSpPr>
+      <p:sp>
+        <p:nvSpPr>
+          <p:cNvPr id="2" name="Shape 0"/>
+          <p:cNvSpPr/>
+          <p:nvPr/>
+        </p:nvSpPr>
+        <p:spPr>
+          <a:xfrm>
+            <a:off x="0" y="0"/>
+            <a:ext cx="9144000" cy="548640"/>
+          </a:xfrm>
+          <a:prstGeom prst="rect">
+            <a:avLst/>
+          </a:prstGeom>
+          <a:solidFill>
+            <a:srgbClr val="1B3A5C"/>
+          </a:solidFill>
+          <a:ln/>
+        </p:spPr>
+      </p:sp>
+      <p:sp>
+        <p:nvSpPr>
+          <p:cNvPr id="3" name="Text 1"/>
+          <p:cNvSpPr/>
+          <p:nvPr/>
+        </p:nvSpPr>
+        <p:spPr>
+          <a:xfrm>
+            <a:off x="457200" y="45720"/>
+            <a:ext cx="8229600" cy="320040"/>
+          </a:xfrm>
+          <a:prstGeom prst="rect">
+            <a:avLst/>
+          </a:prstGeom>
+          <a:noFill/>
+          <a:ln/>
+        </p:spPr>
+        <p:txBody>
+          <a:bodyPr wrap="square" lIns="0" tIns="0" rIns="0" bIns="0" rtlCol="0" anchor="ctr"/>
+          <a:lstStyle/>
+          <a:p>
+            <a:pPr indent="0" marL="0">
+              <a:buNone/>
+            </a:pPr>
+            <a:r>
+              <a:rPr lang="en-US" sz="2000" b="1" dirty="0">
+                <a:solidFill>
+                  <a:srgbClr val="FFFFFF"/>
+                </a:solidFill>
+                <a:latin typeface="Arial" pitchFamily="34" charset="0"/>
+                <a:ea typeface="Arial" pitchFamily="34" charset="-122"/>
+                <a:cs typeface="Arial" pitchFamily="34" charset="-120"/>
+              </a:rPr>
               <a:t>【URGENT】コートホテル新横浜</a:t>
             </a:r>
             <a:endParaRPr lang="en-US" sz="2000" dirty="0"/>
@@ -2989,7 +4161,7 @@
                 <a:ea typeface="Arial" pitchFamily="34" charset="-122"/>
                 <a:cs typeface="Arial" pitchFamily="34" charset="-120"/>
               </a:rPr>
-              <a:t>優先度 #4 | 現状 7.03点 → 目標 8点</a:t>
+              <a:t>優先度 #5 | 現状 7.03点 → 目標 8点</a:t>
             </a:r>
             <a:endParaRPr lang="en-US" sz="1000" dirty="0"/>
           </a:p>
@@ -4072,1195 +5244,6 @@
                 <a:ea typeface="Arial" pitchFamily="34" charset="-122"/>
                 <a:cs typeface="Arial" pitchFamily="34" charset="-120"/>
               </a:rPr>
-              <a:t>10</a:t>
-            </a:r>
-            <a:endParaRPr lang="en-US" sz="800" dirty="0"/>
-          </a:p>
-        </p:txBody>
-      </p:sp>
-    </p:spTree>
-  </p:cSld>
-  <p:clrMapOvr>
-    <a:masterClrMapping/>
-  </p:clrMapOvr>
-</p:sld>
-</file>
-
-<file path=ppt/slides/slide11.xml><?xml version="1.0" encoding="utf-8"?>
-<p:sld xmlns:a="http://schemas.openxmlformats.org/drawingml/2006/main" xmlns:r="http://schemas.openxmlformats.org/officeDocument/2006/relationships" xmlns:p="http://schemas.openxmlformats.org/presentationml/2006/main">
-  <p:cSld name="Slide 11">
-    <p:spTree>
-      <p:nvGrpSpPr>
-        <p:cNvPr id="1" name=""/>
-        <p:cNvGrpSpPr/>
-        <p:nvPr/>
-      </p:nvGrpSpPr>
-      <p:grpSpPr>
-        <a:xfrm>
-          <a:off x="0" y="0"/>
-          <a:ext cx="0" cy="0"/>
-          <a:chOff x="0" y="0"/>
-          <a:chExt cx="0" cy="0"/>
-        </a:xfrm>
-      </p:grpSpPr>
-      <p:sp>
-        <p:nvSpPr>
-          <p:cNvPr id="2" name="Shape 0"/>
-          <p:cNvSpPr/>
-          <p:nvPr/>
-        </p:nvSpPr>
-        <p:spPr>
-          <a:xfrm>
-            <a:off x="0" y="0"/>
-            <a:ext cx="9144000" cy="548640"/>
-          </a:xfrm>
-          <a:prstGeom prst="rect">
-            <a:avLst/>
-          </a:prstGeom>
-          <a:solidFill>
-            <a:srgbClr val="1B3A5C"/>
-          </a:solidFill>
-          <a:ln/>
-        </p:spPr>
-      </p:sp>
-      <p:sp>
-        <p:nvSpPr>
-          <p:cNvPr id="3" name="Text 1"/>
-          <p:cNvSpPr/>
-          <p:nvPr/>
-        </p:nvSpPr>
-        <p:spPr>
-          <a:xfrm>
-            <a:off x="457200" y="45720"/>
-            <a:ext cx="8229600" cy="320040"/>
-          </a:xfrm>
-          <a:prstGeom prst="rect">
-            <a:avLst/>
-          </a:prstGeom>
-          <a:noFill/>
-          <a:ln/>
-        </p:spPr>
-        <p:txBody>
-          <a:bodyPr wrap="square" lIns="0" tIns="0" rIns="0" bIns="0" rtlCol="0" anchor="ctr"/>
-          <a:lstStyle/>
-          <a:p>
-            <a:pPr indent="0" marL="0">
-              <a:buNone/>
-            </a:pPr>
-            <a:r>
-              <a:rPr lang="en-US" sz="2000" b="1" dirty="0">
-                <a:solidFill>
-                  <a:srgbClr val="FFFFFF"/>
-                </a:solidFill>
-                <a:latin typeface="Arial" pitchFamily="34" charset="0"/>
-                <a:ea typeface="Arial" pitchFamily="34" charset="-122"/>
-                <a:cs typeface="Arial" pitchFamily="34" charset="-120"/>
-              </a:rPr>
-              <a:t>【URGENT】コンフォートホテル横浜関内</a:t>
-            </a:r>
-            <a:endParaRPr lang="en-US" sz="2000" dirty="0"/>
-          </a:p>
-        </p:txBody>
-      </p:sp>
-      <p:sp>
-        <p:nvSpPr>
-          <p:cNvPr id="4" name="Text 2"/>
-          <p:cNvSpPr/>
-          <p:nvPr/>
-        </p:nvSpPr>
-        <p:spPr>
-          <a:xfrm>
-            <a:off x="457200" y="320040"/>
-            <a:ext cx="8229600" cy="201168"/>
-          </a:xfrm>
-          <a:prstGeom prst="rect">
-            <a:avLst/>
-          </a:prstGeom>
-          <a:noFill/>
-          <a:ln/>
-        </p:spPr>
-        <p:txBody>
-          <a:bodyPr wrap="square" lIns="0" tIns="0" rIns="0" bIns="0" rtlCol="0" anchor="ctr"/>
-          <a:lstStyle/>
-          <a:p>
-            <a:pPr indent="0" marL="0">
-              <a:buNone/>
-            </a:pPr>
-            <a:r>
-              <a:rPr lang="en-US" sz="1000" dirty="0">
-                <a:solidFill>
-                  <a:srgbClr val="5A9BE6"/>
-                </a:solidFill>
-                <a:latin typeface="Arial" pitchFamily="34" charset="0"/>
-                <a:ea typeface="Arial" pitchFamily="34" charset="-122"/>
-                <a:cs typeface="Arial" pitchFamily="34" charset="-120"/>
-              </a:rPr>
-              <a:t>優先度 #5 | 現状 7.46点 → 目標 8点</a:t>
-            </a:r>
-            <a:endParaRPr lang="en-US" sz="1000" dirty="0"/>
-          </a:p>
-        </p:txBody>
-      </p:sp>
-      <p:sp>
-        <p:nvSpPr>
-          <p:cNvPr id="5" name="Shape 3"/>
-          <p:cNvSpPr/>
-          <p:nvPr/>
-        </p:nvSpPr>
-        <p:spPr>
-          <a:xfrm>
-            <a:off x="274320" y="731520"/>
-            <a:ext cx="1828800" cy="731520"/>
-          </a:xfrm>
-          <a:prstGeom prst="rect">
-            <a:avLst/>
-          </a:prstGeom>
-          <a:solidFill>
-            <a:srgbClr val="FFEBEE"/>
-          </a:solidFill>
-          <a:ln/>
-          <a:effectLst>
-            <a:outerShdw sx="100000" sy="100000" kx="0" ky="0" algn="bl" rotWithShape="0" blurRad="50800" dist="25400" dir="8100000">
-              <a:srgbClr val="000000">
-                <a:alpha val="10000"/>
-              </a:srgbClr>
-            </a:outerShdw>
-          </a:effectLst>
-        </p:spPr>
-      </p:sp>
-      <p:sp>
-        <p:nvSpPr>
-          <p:cNvPr id="6" name="Shape 4"/>
-          <p:cNvSpPr/>
-          <p:nvPr/>
-        </p:nvSpPr>
-        <p:spPr>
-          <a:xfrm>
-            <a:off x="274320" y="731520"/>
-            <a:ext cx="1828800" cy="36576"/>
-          </a:xfrm>
-          <a:prstGeom prst="rect">
-            <a:avLst/>
-          </a:prstGeom>
-          <a:solidFill>
-            <a:srgbClr val="E74C3C"/>
-          </a:solidFill>
-          <a:ln/>
-        </p:spPr>
-      </p:sp>
-      <p:sp>
-        <p:nvSpPr>
-          <p:cNvPr id="7" name="Text 5"/>
-          <p:cNvSpPr/>
-          <p:nvPr/>
-        </p:nvSpPr>
-        <p:spPr>
-          <a:xfrm>
-            <a:off x="274320" y="841248"/>
-            <a:ext cx="1828800" cy="201168"/>
-          </a:xfrm>
-          <a:prstGeom prst="rect">
-            <a:avLst/>
-          </a:prstGeom>
-          <a:noFill/>
-          <a:ln/>
-        </p:spPr>
-        <p:txBody>
-          <a:bodyPr wrap="square" lIns="0" tIns="0" rIns="0" bIns="0" rtlCol="0" anchor="ctr"/>
-          <a:lstStyle/>
-          <a:p>
-            <a:pPr algn="ctr" indent="0" marL="0">
-              <a:buNone/>
-            </a:pPr>
-            <a:r>
-              <a:rPr lang="en-US" sz="900" dirty="0">
-                <a:solidFill>
-                  <a:srgbClr val="666666"/>
-                </a:solidFill>
-                <a:latin typeface="Arial" pitchFamily="34" charset="0"/>
-                <a:ea typeface="Arial" pitchFamily="34" charset="-122"/>
-                <a:cs typeface="Arial" pitchFamily="34" charset="-120"/>
-              </a:rPr>
-              <a:t>現状スコア</a:t>
-            </a:r>
-            <a:endParaRPr lang="en-US" sz="900" dirty="0"/>
-          </a:p>
-        </p:txBody>
-      </p:sp>
-      <p:sp>
-        <p:nvSpPr>
-          <p:cNvPr id="8" name="Text 6"/>
-          <p:cNvSpPr/>
-          <p:nvPr/>
-        </p:nvSpPr>
-        <p:spPr>
-          <a:xfrm>
-            <a:off x="274320" y="1024128"/>
-            <a:ext cx="1828800" cy="411480"/>
-          </a:xfrm>
-          <a:prstGeom prst="rect">
-            <a:avLst/>
-          </a:prstGeom>
-          <a:noFill/>
-          <a:ln/>
-        </p:spPr>
-        <p:txBody>
-          <a:bodyPr wrap="square" lIns="0" tIns="0" rIns="0" bIns="0" rtlCol="0" anchor="ctr"/>
-          <a:lstStyle/>
-          <a:p>
-            <a:pPr algn="ctr" indent="0" marL="0">
-              <a:buNone/>
-            </a:pPr>
-            <a:r>
-              <a:rPr lang="en-US" sz="2800" b="1" dirty="0">
-                <a:solidFill>
-                  <a:srgbClr val="E74C3C"/>
-                </a:solidFill>
-                <a:latin typeface="Arial" pitchFamily="34" charset="0"/>
-                <a:ea typeface="Arial" pitchFamily="34" charset="-122"/>
-                <a:cs typeface="Arial" pitchFamily="34" charset="-120"/>
-              </a:rPr>
-              <a:t>7.46</a:t>
-            </a:r>
-            <a:endParaRPr lang="en-US" sz="2800" dirty="0"/>
-          </a:p>
-        </p:txBody>
-      </p:sp>
-      <p:sp>
-        <p:nvSpPr>
-          <p:cNvPr id="9" name="Shape 7"/>
-          <p:cNvSpPr/>
-          <p:nvPr/>
-        </p:nvSpPr>
-        <p:spPr>
-          <a:xfrm>
-            <a:off x="2286000" y="731520"/>
-            <a:ext cx="1828800" cy="731520"/>
-          </a:xfrm>
-          <a:prstGeom prst="rect">
-            <a:avLst/>
-          </a:prstGeom>
-          <a:solidFill>
-            <a:srgbClr val="E8F5E9"/>
-          </a:solidFill>
-          <a:ln/>
-          <a:effectLst>
-            <a:outerShdw sx="100000" sy="100000" kx="0" ky="0" algn="bl" rotWithShape="0" blurRad="50800" dist="25400" dir="8100000">
-              <a:srgbClr val="000000">
-                <a:alpha val="10000"/>
-              </a:srgbClr>
-            </a:outerShdw>
-          </a:effectLst>
-        </p:spPr>
-      </p:sp>
-      <p:sp>
-        <p:nvSpPr>
-          <p:cNvPr id="10" name="Shape 8"/>
-          <p:cNvSpPr/>
-          <p:nvPr/>
-        </p:nvSpPr>
-        <p:spPr>
-          <a:xfrm>
-            <a:off x="2286000" y="731520"/>
-            <a:ext cx="1828800" cy="36576"/>
-          </a:xfrm>
-          <a:prstGeom prst="rect">
-            <a:avLst/>
-          </a:prstGeom>
-          <a:solidFill>
-            <a:srgbClr val="27AE60"/>
-          </a:solidFill>
-          <a:ln/>
-        </p:spPr>
-      </p:sp>
-      <p:sp>
-        <p:nvSpPr>
-          <p:cNvPr id="11" name="Text 9"/>
-          <p:cNvSpPr/>
-          <p:nvPr/>
-        </p:nvSpPr>
-        <p:spPr>
-          <a:xfrm>
-            <a:off x="2286000" y="841248"/>
-            <a:ext cx="1828800" cy="201168"/>
-          </a:xfrm>
-          <a:prstGeom prst="rect">
-            <a:avLst/>
-          </a:prstGeom>
-          <a:noFill/>
-          <a:ln/>
-        </p:spPr>
-        <p:txBody>
-          <a:bodyPr wrap="square" lIns="0" tIns="0" rIns="0" bIns="0" rtlCol="0" anchor="ctr"/>
-          <a:lstStyle/>
-          <a:p>
-            <a:pPr algn="ctr" indent="0" marL="0">
-              <a:buNone/>
-            </a:pPr>
-            <a:r>
-              <a:rPr lang="en-US" sz="900" dirty="0">
-                <a:solidFill>
-                  <a:srgbClr val="666666"/>
-                </a:solidFill>
-                <a:latin typeface="Arial" pitchFamily="34" charset="0"/>
-                <a:ea typeface="Arial" pitchFamily="34" charset="-122"/>
-                <a:cs typeface="Arial" pitchFamily="34" charset="-120"/>
-              </a:rPr>
-              <a:t>目標スコア</a:t>
-            </a:r>
-            <a:endParaRPr lang="en-US" sz="900" dirty="0"/>
-          </a:p>
-        </p:txBody>
-      </p:sp>
-      <p:sp>
-        <p:nvSpPr>
-          <p:cNvPr id="12" name="Text 10"/>
-          <p:cNvSpPr/>
-          <p:nvPr/>
-        </p:nvSpPr>
-        <p:spPr>
-          <a:xfrm>
-            <a:off x="2286000" y="1024128"/>
-            <a:ext cx="1828800" cy="411480"/>
-          </a:xfrm>
-          <a:prstGeom prst="rect">
-            <a:avLst/>
-          </a:prstGeom>
-          <a:noFill/>
-          <a:ln/>
-        </p:spPr>
-        <p:txBody>
-          <a:bodyPr wrap="square" lIns="0" tIns="0" rIns="0" bIns="0" rtlCol="0" anchor="ctr"/>
-          <a:lstStyle/>
-          <a:p>
-            <a:pPr algn="ctr" indent="0" marL="0">
-              <a:buNone/>
-            </a:pPr>
-            <a:r>
-              <a:rPr lang="en-US" sz="2800" b="1" dirty="0">
-                <a:solidFill>
-                  <a:srgbClr val="27AE60"/>
-                </a:solidFill>
-                <a:latin typeface="Arial" pitchFamily="34" charset="0"/>
-                <a:ea typeface="Arial" pitchFamily="34" charset="-122"/>
-                <a:cs typeface="Arial" pitchFamily="34" charset="-120"/>
-              </a:rPr>
-              <a:t>8</a:t>
-            </a:r>
-            <a:endParaRPr lang="en-US" sz="2800" dirty="0"/>
-          </a:p>
-        </p:txBody>
-      </p:sp>
-      <p:sp>
-        <p:nvSpPr>
-          <p:cNvPr id="13" name="Shape 11"/>
-          <p:cNvSpPr/>
-          <p:nvPr/>
-        </p:nvSpPr>
-        <p:spPr>
-          <a:xfrm>
-            <a:off x="4389120" y="731520"/>
-            <a:ext cx="4389120" cy="731520"/>
-          </a:xfrm>
-          <a:prstGeom prst="rect">
-            <a:avLst/>
-          </a:prstGeom>
-          <a:solidFill>
-            <a:srgbClr val="F5F7FA"/>
-          </a:solidFill>
-          <a:ln/>
-          <a:effectLst>
-            <a:outerShdw sx="100000" sy="100000" kx="0" ky="0" algn="bl" rotWithShape="0" blurRad="50800" dist="25400" dir="8100000">
-              <a:srgbClr val="000000">
-                <a:alpha val="10000"/>
-              </a:srgbClr>
-            </a:outerShdw>
-          </a:effectLst>
-        </p:spPr>
-      </p:sp>
-      <p:sp>
-        <p:nvSpPr>
-          <p:cNvPr id="14" name="Text 12"/>
-          <p:cNvSpPr/>
-          <p:nvPr/>
-        </p:nvSpPr>
-        <p:spPr>
-          <a:xfrm>
-            <a:off x="4480560" y="749808"/>
-            <a:ext cx="1828800" cy="182880"/>
-          </a:xfrm>
-          <a:prstGeom prst="rect">
-            <a:avLst/>
-          </a:prstGeom>
-          <a:noFill/>
-          <a:ln/>
-        </p:spPr>
-        <p:txBody>
-          <a:bodyPr wrap="square" lIns="0" tIns="0" rIns="0" bIns="0" rtlCol="0" anchor="ctr"/>
-          <a:lstStyle/>
-          <a:p>
-            <a:pPr indent="0" marL="0">
-              <a:buNone/>
-            </a:pPr>
-            <a:r>
-              <a:rPr lang="en-US" sz="900" b="1" dirty="0">
-                <a:solidFill>
-                  <a:srgbClr val="666666"/>
-                </a:solidFill>
-                <a:latin typeface="Arial" pitchFamily="34" charset="0"/>
-                <a:ea typeface="Arial" pitchFamily="34" charset="-122"/>
-                <a:cs typeface="Arial" pitchFamily="34" charset="-120"/>
-              </a:rPr>
-              <a:t>主要課題</a:t>
-            </a:r>
-            <a:endParaRPr lang="en-US" sz="900" dirty="0"/>
-          </a:p>
-        </p:txBody>
-      </p:sp>
-      <p:sp>
-        <p:nvSpPr>
-          <p:cNvPr id="15" name="Text 13"/>
-          <p:cNvSpPr/>
-          <p:nvPr/>
-        </p:nvSpPr>
-        <p:spPr>
-          <a:xfrm>
-            <a:off x="4480560" y="914400"/>
-            <a:ext cx="4206240" cy="502920"/>
-          </a:xfrm>
-          <a:prstGeom prst="rect">
-            <a:avLst/>
-          </a:prstGeom>
-          <a:noFill/>
-          <a:ln/>
-        </p:spPr>
-        <p:txBody>
-          <a:bodyPr wrap="square" lIns="0" tIns="0" rIns="0" bIns="0" rtlCol="0" anchor="ctr"/>
-          <a:lstStyle/>
-          <a:p>
-            <a:pPr indent="0" marL="0">
-              <a:buNone/>
-            </a:pPr>
-            <a:r>
-              <a:rPr lang="en-US" sz="800" dirty="0">
-                <a:solidFill>
-                  <a:srgbClr val="333333"/>
-                </a:solidFill>
-                <a:latin typeface="Arial" pitchFamily="34" charset="0"/>
-                <a:ea typeface="Arial" pitchFamily="34" charset="-122"/>
-                <a:cs typeface="Arial" pitchFamily="34" charset="-120"/>
-              </a:rPr>
-              <a:t>シミ・汚れ跡: 6件</a:t>
-            </a:r>
-            <a:endParaRPr lang="en-US" sz="800" dirty="0"/>
-          </a:p>
-          <a:p>
-            <a:pPr indent="0" marL="0">
-              <a:buNone/>
-            </a:pPr>
-            <a:r>
-              <a:rPr lang="en-US" sz="800" dirty="0">
-                <a:solidFill>
-                  <a:srgbClr val="333333"/>
-                </a:solidFill>
-                <a:latin typeface="Arial" pitchFamily="34" charset="0"/>
-                <a:ea typeface="Arial" pitchFamily="34" charset="-122"/>
-                <a:cs typeface="Arial" pitchFamily="34" charset="-120"/>
-              </a:rPr>
-              <a:t>清掃品質全般: 5件</a:t>
-            </a:r>
-            <a:endParaRPr lang="en-US" sz="800" dirty="0"/>
-          </a:p>
-          <a:p>
-            <a:pPr indent="0" marL="0">
-              <a:buNone/>
-            </a:pPr>
-            <a:r>
-              <a:rPr lang="en-US" sz="800" dirty="0">
-                <a:solidFill>
-                  <a:srgbClr val="333333"/>
-                </a:solidFill>
-                <a:latin typeface="Arial" pitchFamily="34" charset="0"/>
-                <a:ea typeface="Arial" pitchFamily="34" charset="-122"/>
-                <a:cs typeface="Arial" pitchFamily="34" charset="-120"/>
-              </a:rPr>
-              <a:t>臭気・異臭: 1件</a:t>
-            </a:r>
-            <a:endParaRPr lang="en-US" sz="800" dirty="0"/>
-          </a:p>
-          <a:p>
-            <a:pPr indent="0" marL="0">
-              <a:buNone/>
-            </a:pPr>
-            <a:r>
-              <a:rPr lang="en-US" sz="800" dirty="0">
-                <a:solidFill>
-                  <a:srgbClr val="333333"/>
-                </a:solidFill>
-                <a:latin typeface="Arial" pitchFamily="34" charset="0"/>
-                <a:ea typeface="Arial" pitchFamily="34" charset="-122"/>
-                <a:cs typeface="Arial" pitchFamily="34" charset="-120"/>
-              </a:rPr>
-              <a:t>毛髪・髪の毛: 1件</a:t>
-            </a:r>
-            <a:endParaRPr lang="en-US" sz="800" dirty="0"/>
-          </a:p>
-        </p:txBody>
-      </p:sp>
-      <p:sp>
-        <p:nvSpPr>
-          <p:cNvPr id="16" name="Shape 14"/>
-          <p:cNvSpPr/>
-          <p:nvPr/>
-        </p:nvSpPr>
-        <p:spPr>
-          <a:xfrm>
-            <a:off x="274320" y="1691640"/>
-            <a:ext cx="2743200" cy="2697480"/>
-          </a:xfrm>
-          <a:prstGeom prst="rect">
-            <a:avLst/>
-          </a:prstGeom>
-          <a:solidFill>
-            <a:srgbClr val="FFEBEE"/>
-          </a:solidFill>
-          <a:ln/>
-          <a:effectLst>
-            <a:outerShdw sx="100000" sy="100000" kx="0" ky="0" algn="bl" rotWithShape="0" blurRad="50800" dist="25400" dir="8100000">
-              <a:srgbClr val="000000">
-                <a:alpha val="10000"/>
-              </a:srgbClr>
-            </a:outerShdw>
-          </a:effectLst>
-        </p:spPr>
-      </p:sp>
-      <p:sp>
-        <p:nvSpPr>
-          <p:cNvPr id="17" name="Shape 15"/>
-          <p:cNvSpPr/>
-          <p:nvPr/>
-        </p:nvSpPr>
-        <p:spPr>
-          <a:xfrm>
-            <a:off x="274320" y="1691640"/>
-            <a:ext cx="2743200" cy="36576"/>
-          </a:xfrm>
-          <a:prstGeom prst="rect">
-            <a:avLst/>
-          </a:prstGeom>
-          <a:solidFill>
-            <a:srgbClr val="E74C3C"/>
-          </a:solidFill>
-          <a:ln/>
-        </p:spPr>
-      </p:sp>
-      <p:sp>
-        <p:nvSpPr>
-          <p:cNvPr id="18" name="Text 16"/>
-          <p:cNvSpPr/>
-          <p:nvPr/>
-        </p:nvSpPr>
-        <p:spPr>
-          <a:xfrm>
-            <a:off x="365760" y="1764792"/>
-            <a:ext cx="2560320" cy="228600"/>
-          </a:xfrm>
-          <a:prstGeom prst="rect">
-            <a:avLst/>
-          </a:prstGeom>
-          <a:noFill/>
-          <a:ln/>
-        </p:spPr>
-        <p:txBody>
-          <a:bodyPr wrap="square" lIns="0" tIns="0" rIns="0" bIns="0" rtlCol="0" anchor="ctr"/>
-          <a:lstStyle/>
-          <a:p>
-            <a:pPr indent="0" marL="0">
-              <a:buNone/>
-            </a:pPr>
-            <a:r>
-              <a:rPr lang="en-US" sz="900" b="1" dirty="0">
-                <a:solidFill>
-                  <a:srgbClr val="E74C3C"/>
-                </a:solidFill>
-                <a:latin typeface="Arial" pitchFamily="34" charset="0"/>
-                <a:ea typeface="Arial" pitchFamily="34" charset="-122"/>
-                <a:cs typeface="Arial" pitchFamily="34" charset="-120"/>
-              </a:rPr>
-              <a:t>Phase 1: 即時対応（1-2週間）</a:t>
-            </a:r>
-            <a:endParaRPr lang="en-US" sz="900" dirty="0"/>
-          </a:p>
-        </p:txBody>
-      </p:sp>
-      <p:sp>
-        <p:nvSpPr>
-          <p:cNvPr id="19" name="Text 17"/>
-          <p:cNvSpPr/>
-          <p:nvPr/>
-        </p:nvSpPr>
-        <p:spPr>
-          <a:xfrm>
-            <a:off x="365760" y="2039112"/>
-            <a:ext cx="2560320" cy="2286000"/>
-          </a:xfrm>
-          <a:prstGeom prst="rect">
-            <a:avLst/>
-          </a:prstGeom>
-          <a:noFill/>
-          <a:ln/>
-        </p:spPr>
-        <p:txBody>
-          <a:bodyPr wrap="square" lIns="0" tIns="0" rIns="0" bIns="0" rtlCol="0" anchor="t"/>
-          <a:lstStyle/>
-          <a:p>
-            <a:pPr indent="0" marL="0">
-              <a:buNone/>
-            </a:pPr>
-            <a:r>
-              <a:rPr lang="en-US" sz="700" dirty="0">
-                <a:solidFill>
-                  <a:srgbClr val="333333"/>
-                </a:solidFill>
-                <a:latin typeface="Arial" pitchFamily="34" charset="0"/>
-                <a:ea typeface="Arial" pitchFamily="34" charset="-122"/>
-                <a:cs typeface="Arial" pitchFamily="34" charset="-120"/>
-              </a:rPr>
-              <a:t>- シミ箇所の特定と専用クリーナーによる除去</a:t>
-            </a:r>
-            <a:endParaRPr lang="en-US" sz="700" dirty="0"/>
-          </a:p>
-          <a:p>
-            <a:pPr indent="0" marL="0">
-              <a:buNone/>
-            </a:pPr>
-            <a:r>
-              <a:rPr lang="en-US" sz="700" dirty="0">
-                <a:solidFill>
-                  <a:srgbClr val="333333"/>
-                </a:solidFill>
-                <a:latin typeface="Arial" pitchFamily="34" charset="0"/>
-                <a:ea typeface="Arial" pitchFamily="34" charset="-122"/>
-                <a:cs typeface="Arial" pitchFamily="34" charset="-120"/>
-              </a:rPr>
-              <a:t>- 清掃品質基準の明確化と全スタッフへの共有</a:t>
-            </a:r>
-            <a:endParaRPr lang="en-US" sz="700" dirty="0"/>
-          </a:p>
-          <a:p>
-            <a:pPr indent="0" marL="0">
-              <a:buNone/>
-            </a:pPr>
-            <a:r>
-              <a:rPr lang="en-US" sz="700" dirty="0">
-                <a:solidFill>
-                  <a:srgbClr val="333333"/>
-                </a:solidFill>
-                <a:latin typeface="Arial" pitchFamily="34" charset="0"/>
-                <a:ea typeface="Arial" pitchFamily="34" charset="-122"/>
-                <a:cs typeface="Arial" pitchFamily="34" charset="-120"/>
-              </a:rPr>
-              <a:t>- 重点箇所（水回り・ベッド周り）の清掃手順見直し</a:t>
-            </a:r>
-            <a:endParaRPr lang="en-US" sz="700" dirty="0"/>
-          </a:p>
-          <a:p>
-            <a:pPr indent="0" marL="0">
-              <a:buNone/>
-            </a:pPr>
-            <a:r>
-              <a:rPr lang="en-US" sz="700" dirty="0">
-                <a:solidFill>
-                  <a:srgbClr val="333333"/>
-                </a:solidFill>
-                <a:latin typeface="Arial" pitchFamily="34" charset="0"/>
-                <a:ea typeface="Arial" pitchFamily="34" charset="-122"/>
-                <a:cs typeface="Arial" pitchFamily="34" charset="-120"/>
-              </a:rPr>
-              <a:t>- 臭気発生源の特定と即時対処（排水トラップ、換気扇）</a:t>
-            </a:r>
-            <a:endParaRPr lang="en-US" sz="700" dirty="0"/>
-          </a:p>
-          <a:p>
-            <a:pPr indent="0" marL="0">
-              <a:buNone/>
-            </a:pPr>
-            <a:r>
-              <a:rPr lang="en-US" sz="700" dirty="0">
-                <a:solidFill>
-                  <a:srgbClr val="333333"/>
-                </a:solidFill>
-                <a:latin typeface="Arial" pitchFamily="34" charset="0"/>
-                <a:ea typeface="Arial" pitchFamily="34" charset="-122"/>
-                <a:cs typeface="Arial" pitchFamily="34" charset="-120"/>
-              </a:rPr>
-              <a:t>- 消臭・脱臭処理の実施</a:t>
-            </a:r>
-            <a:endParaRPr lang="en-US" sz="700" dirty="0"/>
-          </a:p>
-        </p:txBody>
-      </p:sp>
-      <p:sp>
-        <p:nvSpPr>
-          <p:cNvPr id="20" name="Shape 18"/>
-          <p:cNvSpPr/>
-          <p:nvPr/>
-        </p:nvSpPr>
-        <p:spPr>
-          <a:xfrm>
-            <a:off x="3154680" y="1691640"/>
-            <a:ext cx="2743200" cy="2697480"/>
-          </a:xfrm>
-          <a:prstGeom prst="rect">
-            <a:avLst/>
-          </a:prstGeom>
-          <a:solidFill>
-            <a:srgbClr val="FFF3E0"/>
-          </a:solidFill>
-          <a:ln/>
-          <a:effectLst>
-            <a:outerShdw sx="100000" sy="100000" kx="0" ky="0" algn="bl" rotWithShape="0" blurRad="50800" dist="25400" dir="8100000">
-              <a:srgbClr val="000000">
-                <a:alpha val="10000"/>
-              </a:srgbClr>
-            </a:outerShdw>
-          </a:effectLst>
-        </p:spPr>
-      </p:sp>
-      <p:sp>
-        <p:nvSpPr>
-          <p:cNvPr id="21" name="Shape 19"/>
-          <p:cNvSpPr/>
-          <p:nvPr/>
-        </p:nvSpPr>
-        <p:spPr>
-          <a:xfrm>
-            <a:off x="3154680" y="1691640"/>
-            <a:ext cx="2743200" cy="36576"/>
-          </a:xfrm>
-          <a:prstGeom prst="rect">
-            <a:avLst/>
-          </a:prstGeom>
-          <a:solidFill>
-            <a:srgbClr val="FF9800"/>
-          </a:solidFill>
-          <a:ln/>
-        </p:spPr>
-      </p:sp>
-      <p:sp>
-        <p:nvSpPr>
-          <p:cNvPr id="22" name="Text 20"/>
-          <p:cNvSpPr/>
-          <p:nvPr/>
-        </p:nvSpPr>
-        <p:spPr>
-          <a:xfrm>
-            <a:off x="3246120" y="1764792"/>
-            <a:ext cx="2560320" cy="228600"/>
-          </a:xfrm>
-          <a:prstGeom prst="rect">
-            <a:avLst/>
-          </a:prstGeom>
-          <a:noFill/>
-          <a:ln/>
-        </p:spPr>
-        <p:txBody>
-          <a:bodyPr wrap="square" lIns="0" tIns="0" rIns="0" bIns="0" rtlCol="0" anchor="ctr"/>
-          <a:lstStyle/>
-          <a:p>
-            <a:pPr indent="0" marL="0">
-              <a:buNone/>
-            </a:pPr>
-            <a:r>
-              <a:rPr lang="en-US" sz="900" b="1" dirty="0">
-                <a:solidFill>
-                  <a:srgbClr val="FF9800"/>
-                </a:solidFill>
-                <a:latin typeface="Arial" pitchFamily="34" charset="0"/>
-                <a:ea typeface="Arial" pitchFamily="34" charset="-122"/>
-                <a:cs typeface="Arial" pitchFamily="34" charset="-120"/>
-              </a:rPr>
-              <a:t>Phase 2: 短期施策（1-3ヶ月）</a:t>
-            </a:r>
-            <a:endParaRPr lang="en-US" sz="900" dirty="0"/>
-          </a:p>
-        </p:txBody>
-      </p:sp>
-      <p:sp>
-        <p:nvSpPr>
-          <p:cNvPr id="23" name="Text 21"/>
-          <p:cNvSpPr/>
-          <p:nvPr/>
-        </p:nvSpPr>
-        <p:spPr>
-          <a:xfrm>
-            <a:off x="3246120" y="2039112"/>
-            <a:ext cx="2560320" cy="2286000"/>
-          </a:xfrm>
-          <a:prstGeom prst="rect">
-            <a:avLst/>
-          </a:prstGeom>
-          <a:noFill/>
-          <a:ln/>
-        </p:spPr>
-        <p:txBody>
-          <a:bodyPr wrap="square" lIns="0" tIns="0" rIns="0" bIns="0" rtlCol="0" anchor="t"/>
-          <a:lstStyle/>
-          <a:p>
-            <a:pPr indent="0" marL="0">
-              <a:buNone/>
-            </a:pPr>
-            <a:r>
-              <a:rPr lang="en-US" sz="700" dirty="0">
-                <a:solidFill>
-                  <a:srgbClr val="333333"/>
-                </a:solidFill>
-                <a:latin typeface="Arial" pitchFamily="34" charset="0"/>
-                <a:ea typeface="Arial" pitchFamily="34" charset="-122"/>
-                <a:cs typeface="Arial" pitchFamily="34" charset="-120"/>
-              </a:rPr>
-              <a:t>- シミ発見時の即時報告・対処フロー構築</a:t>
-            </a:r>
-            <a:endParaRPr lang="en-US" sz="700" dirty="0"/>
-          </a:p>
-          <a:p>
-            <a:pPr indent="0" marL="0">
-              <a:buNone/>
-            </a:pPr>
-            <a:r>
-              <a:rPr lang="en-US" sz="700" dirty="0">
-                <a:solidFill>
-                  <a:srgbClr val="333333"/>
-                </a:solidFill>
-                <a:latin typeface="Arial" pitchFamily="34" charset="0"/>
-                <a:ea typeface="Arial" pitchFamily="34" charset="-122"/>
-                <a:cs typeface="Arial" pitchFamily="34" charset="-120"/>
-              </a:rPr>
-              <a:t>- 品質管理チェックリストの導入と実施</a:t>
-            </a:r>
-            <a:endParaRPr lang="en-US" sz="700" dirty="0"/>
-          </a:p>
-          <a:p>
-            <a:pPr indent="0" marL="0">
-              <a:buNone/>
-            </a:pPr>
-            <a:r>
-              <a:rPr lang="en-US" sz="700" dirty="0">
-                <a:solidFill>
-                  <a:srgbClr val="333333"/>
-                </a:solidFill>
-                <a:latin typeface="Arial" pitchFamily="34" charset="0"/>
-                <a:ea typeface="Arial" pitchFamily="34" charset="-122"/>
-                <a:cs typeface="Arial" pitchFamily="34" charset="-120"/>
-              </a:rPr>
-              <a:t>- QCインスペクション体制の構築（ランダム抜き打ち検査）</a:t>
-            </a:r>
-            <a:endParaRPr lang="en-US" sz="700" dirty="0"/>
-          </a:p>
-          <a:p>
-            <a:pPr indent="0" marL="0">
-              <a:buNone/>
-            </a:pPr>
-            <a:r>
-              <a:rPr lang="en-US" sz="700" dirty="0">
-                <a:solidFill>
-                  <a:srgbClr val="333333"/>
-                </a:solidFill>
-                <a:latin typeface="Arial" pitchFamily="34" charset="0"/>
-                <a:ea typeface="Arial" pitchFamily="34" charset="-122"/>
-                <a:cs typeface="Arial" pitchFamily="34" charset="-120"/>
-              </a:rPr>
-              <a:t>- 定期的な換気・消臭ルーティンの標準化</a:t>
-            </a:r>
-            <a:endParaRPr lang="en-US" sz="700" dirty="0"/>
-          </a:p>
-          <a:p>
-            <a:pPr indent="0" marL="0">
-              <a:buNone/>
-            </a:pPr>
-            <a:r>
-              <a:rPr lang="en-US" sz="700" dirty="0">
-                <a:solidFill>
-                  <a:srgbClr val="333333"/>
-                </a:solidFill>
-                <a:latin typeface="Arial" pitchFamily="34" charset="0"/>
-                <a:ea typeface="Arial" pitchFamily="34" charset="-122"/>
-                <a:cs typeface="Arial" pitchFamily="34" charset="-120"/>
-              </a:rPr>
-              <a:t>- エアコン・排水系の臭気源の根本対策</a:t>
-            </a:r>
-            <a:endParaRPr lang="en-US" sz="700" dirty="0"/>
-          </a:p>
-        </p:txBody>
-      </p:sp>
-      <p:sp>
-        <p:nvSpPr>
-          <p:cNvPr id="24" name="Shape 22"/>
-          <p:cNvSpPr/>
-          <p:nvPr/>
-        </p:nvSpPr>
-        <p:spPr>
-          <a:xfrm>
-            <a:off x="6035040" y="1691640"/>
-            <a:ext cx="2743200" cy="2697480"/>
-          </a:xfrm>
-          <a:prstGeom prst="rect">
-            <a:avLst/>
-          </a:prstGeom>
-          <a:solidFill>
-            <a:srgbClr val="E3F2FD"/>
-          </a:solidFill>
-          <a:ln/>
-          <a:effectLst>
-            <a:outerShdw sx="100000" sy="100000" kx="0" ky="0" algn="bl" rotWithShape="0" blurRad="50800" dist="25400" dir="8100000">
-              <a:srgbClr val="000000">
-                <a:alpha val="10000"/>
-              </a:srgbClr>
-            </a:outerShdw>
-          </a:effectLst>
-        </p:spPr>
-      </p:sp>
-      <p:sp>
-        <p:nvSpPr>
-          <p:cNvPr id="25" name="Shape 23"/>
-          <p:cNvSpPr/>
-          <p:nvPr/>
-        </p:nvSpPr>
-        <p:spPr>
-          <a:xfrm>
-            <a:off x="6035040" y="1691640"/>
-            <a:ext cx="2743200" cy="36576"/>
-          </a:xfrm>
-          <a:prstGeom prst="rect">
-            <a:avLst/>
-          </a:prstGeom>
-          <a:solidFill>
-            <a:srgbClr val="2196F3"/>
-          </a:solidFill>
-          <a:ln/>
-        </p:spPr>
-      </p:sp>
-      <p:sp>
-        <p:nvSpPr>
-          <p:cNvPr id="26" name="Text 24"/>
-          <p:cNvSpPr/>
-          <p:nvPr/>
-        </p:nvSpPr>
-        <p:spPr>
-          <a:xfrm>
-            <a:off x="6126480" y="1764792"/>
-            <a:ext cx="2560320" cy="228600"/>
-          </a:xfrm>
-          <a:prstGeom prst="rect">
-            <a:avLst/>
-          </a:prstGeom>
-          <a:noFill/>
-          <a:ln/>
-        </p:spPr>
-        <p:txBody>
-          <a:bodyPr wrap="square" lIns="0" tIns="0" rIns="0" bIns="0" rtlCol="0" anchor="ctr"/>
-          <a:lstStyle/>
-          <a:p>
-            <a:pPr indent="0" marL="0">
-              <a:buNone/>
-            </a:pPr>
-            <a:r>
-              <a:rPr lang="en-US" sz="900" b="1" dirty="0">
-                <a:solidFill>
-                  <a:srgbClr val="2196F3"/>
-                </a:solidFill>
-                <a:latin typeface="Arial" pitchFamily="34" charset="0"/>
-                <a:ea typeface="Arial" pitchFamily="34" charset="-122"/>
-                <a:cs typeface="Arial" pitchFamily="34" charset="-120"/>
-              </a:rPr>
-              <a:t>Phase 3: 中期施策（3-6ヶ月）</a:t>
-            </a:r>
-            <a:endParaRPr lang="en-US" sz="900" dirty="0"/>
-          </a:p>
-        </p:txBody>
-      </p:sp>
-      <p:sp>
-        <p:nvSpPr>
-          <p:cNvPr id="27" name="Text 25"/>
-          <p:cNvSpPr/>
-          <p:nvPr/>
-        </p:nvSpPr>
-        <p:spPr>
-          <a:xfrm>
-            <a:off x="6126480" y="2039112"/>
-            <a:ext cx="2560320" cy="2286000"/>
-          </a:xfrm>
-          <a:prstGeom prst="rect">
-            <a:avLst/>
-          </a:prstGeom>
-          <a:noFill/>
-          <a:ln/>
-        </p:spPr>
-        <p:txBody>
-          <a:bodyPr wrap="square" lIns="0" tIns="0" rIns="0" bIns="0" rtlCol="0" anchor="t"/>
-          <a:lstStyle/>
-          <a:p>
-            <a:pPr indent="0" marL="0">
-              <a:buNone/>
-            </a:pPr>
-            <a:r>
-              <a:rPr lang="en-US" sz="700" dirty="0">
-                <a:solidFill>
-                  <a:srgbClr val="333333"/>
-                </a:solidFill>
-                <a:latin typeface="Arial" pitchFamily="34" charset="0"/>
-                <a:ea typeface="Arial" pitchFamily="34" charset="-122"/>
-                <a:cs typeface="Arial" pitchFamily="34" charset="-120"/>
-              </a:rPr>
-              <a:t>- 清掃スタッフの定期研修プログラム導入</a:t>
-            </a:r>
-            <a:endParaRPr lang="en-US" sz="700" dirty="0"/>
-          </a:p>
-          <a:p>
-            <a:pPr indent="0" marL="0">
-              <a:buNone/>
-            </a:pPr>
-            <a:r>
-              <a:rPr lang="en-US" sz="700" dirty="0">
-                <a:solidFill>
-                  <a:srgbClr val="333333"/>
-                </a:solidFill>
-                <a:latin typeface="Arial" pitchFamily="34" charset="0"/>
-                <a:ea typeface="Arial" pitchFamily="34" charset="-122"/>
-                <a:cs typeface="Arial" pitchFamily="34" charset="-120"/>
-              </a:rPr>
-              <a:t>- デジタル清掃記録システムの検討</a:t>
-            </a:r>
-            <a:endParaRPr lang="en-US" sz="700" dirty="0"/>
-          </a:p>
-          <a:p>
-            <a:pPr indent="0" marL="0">
-              <a:buNone/>
-            </a:pPr>
-            <a:r>
-              <a:rPr lang="en-US" sz="700" dirty="0">
-                <a:solidFill>
-                  <a:srgbClr val="333333"/>
-                </a:solidFill>
-                <a:latin typeface="Arial" pitchFamily="34" charset="0"/>
-                <a:ea typeface="Arial" pitchFamily="34" charset="-122"/>
-                <a:cs typeface="Arial" pitchFamily="34" charset="-120"/>
-              </a:rPr>
-              <a:t>- オゾン脱臭機の導入検討</a:t>
-            </a:r>
-            <a:endParaRPr lang="en-US" sz="700" dirty="0"/>
-          </a:p>
-          <a:p>
-            <a:pPr indent="0" marL="0">
-              <a:buNone/>
-            </a:pPr>
-            <a:r>
-              <a:rPr lang="en-US" sz="700" dirty="0">
-                <a:solidFill>
-                  <a:srgbClr val="333333"/>
-                </a:solidFill>
-                <a:latin typeface="Arial" pitchFamily="34" charset="0"/>
-                <a:ea typeface="Arial" pitchFamily="34" charset="-122"/>
-                <a:cs typeface="Arial" pitchFamily="34" charset="-120"/>
-              </a:rPr>
-              <a:t>- 空気品質モニタリングの導入</a:t>
-            </a:r>
-            <a:endParaRPr lang="en-US" sz="700" dirty="0"/>
-          </a:p>
-        </p:txBody>
-      </p:sp>
-      <p:sp>
-        <p:nvSpPr>
-          <p:cNvPr id="28" name="Shape 26"/>
-          <p:cNvSpPr/>
-          <p:nvPr/>
-        </p:nvSpPr>
-        <p:spPr>
-          <a:xfrm>
-            <a:off x="0" y="4800600"/>
-            <a:ext cx="9144000" cy="342900"/>
-          </a:xfrm>
-          <a:prstGeom prst="rect">
-            <a:avLst/>
-          </a:prstGeom>
-          <a:solidFill>
-            <a:srgbClr val="1B3A5C"/>
-          </a:solidFill>
-          <a:ln/>
-        </p:spPr>
-      </p:sp>
-      <p:sp>
-        <p:nvSpPr>
-          <p:cNvPr id="29" name="Text 27"/>
-          <p:cNvSpPr/>
-          <p:nvPr/>
-        </p:nvSpPr>
-        <p:spPr>
-          <a:xfrm>
-            <a:off x="457200" y="4800600"/>
-            <a:ext cx="3657600" cy="342900"/>
-          </a:xfrm>
-          <a:prstGeom prst="rect">
-            <a:avLst/>
-          </a:prstGeom>
-          <a:noFill/>
-          <a:ln/>
-        </p:spPr>
-        <p:txBody>
-          <a:bodyPr wrap="square" rtlCol="0" anchor="ctr"/>
-          <a:lstStyle/>
-          <a:p>
-            <a:pPr indent="0" marL="0">
-              <a:buNone/>
-            </a:pPr>
-            <a:r>
-              <a:rPr lang="en-US" sz="800" dirty="0">
-                <a:solidFill>
-                  <a:srgbClr val="94A3B8"/>
-                </a:solidFill>
-                <a:latin typeface="Arial" pitchFamily="34" charset="0"/>
-                <a:ea typeface="Arial" pitchFamily="34" charset="-122"/>
-                <a:cs typeface="Arial" pitchFamily="34" charset="-120"/>
-              </a:rPr>
-              <a:t>Confidential | PRIMECHANGE</a:t>
-            </a:r>
-            <a:endParaRPr lang="en-US" sz="800" dirty="0"/>
-          </a:p>
-        </p:txBody>
-      </p:sp>
-      <p:sp>
-        <p:nvSpPr>
-          <p:cNvPr id="30" name="Text 28"/>
-          <p:cNvSpPr/>
-          <p:nvPr/>
-        </p:nvSpPr>
-        <p:spPr>
-          <a:xfrm>
-            <a:off x="8229600" y="4800600"/>
-            <a:ext cx="457200" cy="342900"/>
-          </a:xfrm>
-          <a:prstGeom prst="rect">
-            <a:avLst/>
-          </a:prstGeom>
-          <a:noFill/>
-          <a:ln/>
-        </p:spPr>
-        <p:txBody>
-          <a:bodyPr wrap="square" rtlCol="0" anchor="ctr"/>
-          <a:lstStyle/>
-          <a:p>
-            <a:pPr algn="r" indent="0" marL="0">
-              <a:buNone/>
-            </a:pPr>
-            <a:r>
-              <a:rPr lang="en-US" sz="800" dirty="0">
-                <a:solidFill>
-                  <a:srgbClr val="94A3B8"/>
-                </a:solidFill>
-                <a:latin typeface="Arial" pitchFamily="34" charset="0"/>
-                <a:ea typeface="Arial" pitchFamily="34" charset="-122"/>
-                <a:cs typeface="Arial" pitchFamily="34" charset="-120"/>
-              </a:rPr>
               <a:t>11</a:t>
             </a:r>
             <a:endParaRPr lang="en-US" sz="800" dirty="0"/>
@@ -5384,7 +5367,7 @@
                 <a:ea typeface="Arial" pitchFamily="34" charset="-122"/>
                 <a:cs typeface="Arial" pitchFamily="34" charset="-120"/>
               </a:rPr>
-              <a:t>対象：2ホテル</a:t>
+              <a:t>対象：3ホテル</a:t>
             </a:r>
             <a:endParaRPr lang="en-US" sz="1000" dirty="0"/>
           </a:p>
@@ -5509,7 +5492,7 @@
                 <a:ea typeface="Arial" pitchFamily="34" charset="-122"/>
                 <a:cs typeface="Arial" pitchFamily="34" charset="-120"/>
               </a:rPr>
-              <a:t>8.15点 → 9点</a:t>
+              <a:t>8.16点 → 9点</a:t>
             </a:r>
             <a:endParaRPr lang="en-US" sz="1100" dirty="0"/>
           </a:p>
@@ -5707,7 +5690,7 @@
                 <a:ea typeface="Arial" pitchFamily="34" charset="-122"/>
                 <a:cs typeface="Arial" pitchFamily="34" charset="-120"/>
               </a:rPr>
-              <a:t>ホテルコメント横浜関内</a:t>
+              <a:t>ダイワロイネットホテル東京大崎</a:t>
             </a:r>
             <a:endParaRPr lang="en-US" sz="1200" dirty="0"/>
           </a:p>
@@ -5746,7 +5729,7 @@
                 <a:ea typeface="Arial" pitchFamily="34" charset="-122"/>
                 <a:cs typeface="Arial" pitchFamily="34" charset="-120"/>
               </a:rPr>
-              <a:t>8.87点 → 9.2点</a:t>
+              <a:t>8.84点 → 9.1点</a:t>
             </a:r>
             <a:endParaRPr lang="en-US" sz="1100" dirty="0"/>
           </a:p>
@@ -5785,7 +5768,7 @@
                 <a:ea typeface="Arial" pitchFamily="34" charset="-122"/>
                 <a:cs typeface="Arial" pitchFamily="34" charset="-120"/>
               </a:rPr>
-              <a:t>主要課題：清掃品質全般(4件)、臭気・異臭(2件)、タバコ関連(1件)</a:t>
+              <a:t>主要課題：清掃品質全般(3件)、シミ・汚れ跡(2件)、害虫(2件)</a:t>
             </a:r>
             <a:endParaRPr lang="en-US" sz="900" dirty="0"/>
           </a:p>
@@ -5858,6 +5841,243 @@
                 <a:ea typeface="Arial" pitchFamily="34" charset="-122"/>
                 <a:cs typeface="Arial" pitchFamily="34" charset="-120"/>
               </a:rPr>
+              <a:t>- シミ箇所の特定と専用クリーナーによる除去</a:t>
+            </a:r>
+            <a:endParaRPr lang="en-US" sz="800" dirty="0"/>
+          </a:p>
+        </p:txBody>
+      </p:sp>
+      <p:sp>
+        <p:nvSpPr>
+          <p:cNvPr id="17" name="Shape 15"/>
+          <p:cNvSpPr/>
+          <p:nvPr/>
+        </p:nvSpPr>
+        <p:spPr>
+          <a:xfrm>
+            <a:off x="274320" y="3383280"/>
+            <a:ext cx="8595360" cy="1188720"/>
+          </a:xfrm>
+          <a:prstGeom prst="rect">
+            <a:avLst/>
+          </a:prstGeom>
+          <a:solidFill>
+            <a:srgbClr val="FFF3E0"/>
+          </a:solidFill>
+          <a:ln/>
+          <a:effectLst>
+            <a:outerShdw sx="100000" sy="100000" kx="0" ky="0" algn="bl" rotWithShape="0" blurRad="50800" dist="25400" dir="8100000">
+              <a:srgbClr val="000000">
+                <a:alpha val="10000"/>
+              </a:srgbClr>
+            </a:outerShdw>
+          </a:effectLst>
+        </p:spPr>
+      </p:sp>
+      <p:sp>
+        <p:nvSpPr>
+          <p:cNvPr id="18" name="Shape 16"/>
+          <p:cNvSpPr/>
+          <p:nvPr/>
+        </p:nvSpPr>
+        <p:spPr>
+          <a:xfrm>
+            <a:off x="274320" y="3383280"/>
+            <a:ext cx="8595360" cy="36576"/>
+          </a:xfrm>
+          <a:prstGeom prst="rect">
+            <a:avLst/>
+          </a:prstGeom>
+          <a:solidFill>
+            <a:srgbClr val="FF9800"/>
+          </a:solidFill>
+          <a:ln/>
+        </p:spPr>
+      </p:sp>
+      <p:sp>
+        <p:nvSpPr>
+          <p:cNvPr id="19" name="Text 17"/>
+          <p:cNvSpPr/>
+          <p:nvPr/>
+        </p:nvSpPr>
+        <p:spPr>
+          <a:xfrm>
+            <a:off x="457200" y="3456432"/>
+            <a:ext cx="3657600" cy="228600"/>
+          </a:xfrm>
+          <a:prstGeom prst="rect">
+            <a:avLst/>
+          </a:prstGeom>
+          <a:noFill/>
+          <a:ln/>
+        </p:spPr>
+        <p:txBody>
+          <a:bodyPr wrap="square" lIns="0" tIns="0" rIns="0" bIns="0" rtlCol="0" anchor="ctr"/>
+          <a:lstStyle/>
+          <a:p>
+            <a:pPr indent="0" marL="0">
+              <a:buNone/>
+            </a:pPr>
+            <a:r>
+              <a:rPr lang="en-US" sz="1200" b="1" dirty="0">
+                <a:solidFill>
+                  <a:srgbClr val="1B3A5C"/>
+                </a:solidFill>
+                <a:latin typeface="Arial" pitchFamily="34" charset="0"/>
+                <a:ea typeface="Arial" pitchFamily="34" charset="-122"/>
+                <a:cs typeface="Arial" pitchFamily="34" charset="-120"/>
+              </a:rPr>
+              <a:t>ホテルコメント横浜関内</a:t>
+            </a:r>
+            <a:endParaRPr lang="en-US" sz="1200" dirty="0"/>
+          </a:p>
+        </p:txBody>
+      </p:sp>
+      <p:sp>
+        <p:nvSpPr>
+          <p:cNvPr id="20" name="Text 18"/>
+          <p:cNvSpPr/>
+          <p:nvPr/>
+        </p:nvSpPr>
+        <p:spPr>
+          <a:xfrm>
+            <a:off x="4572000" y="3456432"/>
+            <a:ext cx="2743200" cy="228600"/>
+          </a:xfrm>
+          <a:prstGeom prst="rect">
+            <a:avLst/>
+          </a:prstGeom>
+          <a:noFill/>
+          <a:ln/>
+        </p:spPr>
+        <p:txBody>
+          <a:bodyPr wrap="square" lIns="0" tIns="0" rIns="0" bIns="0" rtlCol="0" anchor="ctr"/>
+          <a:lstStyle/>
+          <a:p>
+            <a:pPr indent="0" marL="0">
+              <a:buNone/>
+            </a:pPr>
+            <a:r>
+              <a:rPr lang="en-US" sz="1100" b="1" dirty="0">
+                <a:solidFill>
+                  <a:srgbClr val="27AE60"/>
+                </a:solidFill>
+                <a:latin typeface="Arial" pitchFamily="34" charset="0"/>
+                <a:ea typeface="Arial" pitchFamily="34" charset="-122"/>
+                <a:cs typeface="Arial" pitchFamily="34" charset="-120"/>
+              </a:rPr>
+              <a:t>8.88点 → 9.2点</a:t>
+            </a:r>
+            <a:endParaRPr lang="en-US" sz="1100" dirty="0"/>
+          </a:p>
+        </p:txBody>
+      </p:sp>
+      <p:sp>
+        <p:nvSpPr>
+          <p:cNvPr id="21" name="Text 19"/>
+          <p:cNvSpPr/>
+          <p:nvPr/>
+        </p:nvSpPr>
+        <p:spPr>
+          <a:xfrm>
+            <a:off x="457200" y="3703320"/>
+            <a:ext cx="7315200" cy="182880"/>
+          </a:xfrm>
+          <a:prstGeom prst="rect">
+            <a:avLst/>
+          </a:prstGeom>
+          <a:noFill/>
+          <a:ln/>
+        </p:spPr>
+        <p:txBody>
+          <a:bodyPr wrap="square" lIns="0" tIns="0" rIns="0" bIns="0" rtlCol="0" anchor="ctr"/>
+          <a:lstStyle/>
+          <a:p>
+            <a:pPr indent="0" marL="0">
+              <a:buNone/>
+            </a:pPr>
+            <a:r>
+              <a:rPr lang="en-US" sz="900" dirty="0">
+                <a:solidFill>
+                  <a:srgbClr val="666666"/>
+                </a:solidFill>
+                <a:latin typeface="Arial" pitchFamily="34" charset="0"/>
+                <a:ea typeface="Arial" pitchFamily="34" charset="-122"/>
+                <a:cs typeface="Arial" pitchFamily="34" charset="-120"/>
+              </a:rPr>
+              <a:t>主要課題：清掃品質全般(4件)、臭気・異臭(2件)、タバコ関連(1件)</a:t>
+            </a:r>
+            <a:endParaRPr lang="en-US" sz="900" dirty="0"/>
+          </a:p>
+        </p:txBody>
+      </p:sp>
+      <p:sp>
+        <p:nvSpPr>
+          <p:cNvPr id="22" name="Text 20"/>
+          <p:cNvSpPr/>
+          <p:nvPr/>
+        </p:nvSpPr>
+        <p:spPr>
+          <a:xfrm>
+            <a:off x="457200" y="3931920"/>
+            <a:ext cx="7772400" cy="594360"/>
+          </a:xfrm>
+          <a:prstGeom prst="rect">
+            <a:avLst/>
+          </a:prstGeom>
+          <a:noFill/>
+          <a:ln/>
+        </p:spPr>
+        <p:txBody>
+          <a:bodyPr wrap="square" lIns="0" tIns="0" rIns="0" bIns="0" rtlCol="0" anchor="t"/>
+          <a:lstStyle/>
+          <a:p>
+            <a:pPr indent="0" marL="0">
+              <a:buNone/>
+            </a:pPr>
+            <a:r>
+              <a:rPr lang="en-US" sz="800" dirty="0">
+                <a:solidFill>
+                  <a:srgbClr val="333333"/>
+                </a:solidFill>
+                <a:latin typeface="Arial" pitchFamily="34" charset="0"/>
+                <a:ea typeface="Arial" pitchFamily="34" charset="-122"/>
+                <a:cs typeface="Arial" pitchFamily="34" charset="-120"/>
+              </a:rPr>
+              <a:t>- 清掃品質基準の明確化と全スタッフへの共有</a:t>
+            </a:r>
+            <a:endParaRPr lang="en-US" sz="800" dirty="0"/>
+          </a:p>
+          <a:p>
+            <a:pPr indent="0" marL="0">
+              <a:buNone/>
+            </a:pPr>
+            <a:r>
+              <a:rPr lang="en-US" sz="800" dirty="0">
+                <a:solidFill>
+                  <a:srgbClr val="333333"/>
+                </a:solidFill>
+                <a:latin typeface="Arial" pitchFamily="34" charset="0"/>
+                <a:ea typeface="Arial" pitchFamily="34" charset="-122"/>
+                <a:cs typeface="Arial" pitchFamily="34" charset="-120"/>
+              </a:rPr>
+              <a:t>- 重点箇所（水回り・ベッド周り）の清掃手順見直し</a:t>
+            </a:r>
+            <a:endParaRPr lang="en-US" sz="800" dirty="0"/>
+          </a:p>
+          <a:p>
+            <a:pPr indent="0" marL="0">
+              <a:buNone/>
+            </a:pPr>
+            <a:r>
+              <a:rPr lang="en-US" sz="800" dirty="0">
+                <a:solidFill>
+                  <a:srgbClr val="333333"/>
+                </a:solidFill>
+                <a:latin typeface="Arial" pitchFamily="34" charset="0"/>
+                <a:ea typeface="Arial" pitchFamily="34" charset="-122"/>
+                <a:cs typeface="Arial" pitchFamily="34" charset="-120"/>
+              </a:rPr>
               <a:t>- 臭気発生源の特定と即時対処（排水トラップ、換気扇）</a:t>
             </a:r>
             <a:endParaRPr lang="en-US" sz="800" dirty="0"/>
@@ -5866,7 +6086,7 @@
       </p:sp>
       <p:sp>
         <p:nvSpPr>
-          <p:cNvPr id="17" name="Shape 15"/>
+          <p:cNvPr id="23" name="Shape 21"/>
           <p:cNvSpPr/>
           <p:nvPr/>
         </p:nvSpPr>
@@ -5886,7 +6106,7 @@
       </p:sp>
       <p:sp>
         <p:nvSpPr>
-          <p:cNvPr id="18" name="Text 16"/>
+          <p:cNvPr id="24" name="Text 22"/>
           <p:cNvSpPr/>
           <p:nvPr/>
         </p:nvSpPr>
@@ -5925,7 +6145,7 @@
       </p:sp>
       <p:sp>
         <p:nvSpPr>
-          <p:cNvPr id="19" name="Text 17"/>
+          <p:cNvPr id="25" name="Text 23"/>
           <p:cNvSpPr/>
           <p:nvPr/>
         </p:nvSpPr>
@@ -6662,7 +6882,7 @@
                             <a:srgbClr val="000000"/>
                           </a:solidFill>
                         </a:rPr>
-                        <a:t>ホテルコメント横浜関内</a:t>
+                        <a:t>ダイワロイネットホテル東京大崎</a:t>
                       </a:r>
                       <a:endParaRPr lang="en-US" sz="700" dirty="0"/>
                     </a:p>
@@ -6931,6 +7151,294 @@
                     </a:lnB>
                     <a:solidFill>
                       <a:srgbClr val="F5F7FA"/>
+                    </a:solidFill>
+                  </a:tcPr>
+                </a:tc>
+              </a:tr>
+              <a:tr h="0">
+                <a:tc>
+                  <a:txBody>
+                    <a:bodyPr/>
+                    <a:lstStyle/>
+                    <a:p>
+                      <a:pPr indent="0" marL="0">
+                        <a:buNone/>
+                      </a:pPr>
+                      <a:r>
+                        <a:rPr lang="en-US" sz="700" b="1" dirty="0">
+                          <a:solidFill>
+                            <a:srgbClr val="000000"/>
+                          </a:solidFill>
+                        </a:rPr>
+                        <a:t>ホテルコメント横浜関内</a:t>
+                      </a:r>
+                      <a:endParaRPr lang="en-US" sz="700" dirty="0"/>
+                    </a:p>
+                  </a:txBody>
+                  <a:tcPr marL="91440" marR="91440" marT="45720" marB="45720">
+                    <a:lnL w="6350" cap="flat" cmpd="sng" algn="ctr">
+                      <a:solidFill>
+                        <a:srgbClr val="CCCCCC"/>
+                      </a:solidFill>
+                      <a:prstDash val="solid"/>
+                      <a:round/>
+                      <a:headEnd type="none" w="med" len="med"/>
+                      <a:tailEnd type="none" w="med" len="med"/>
+                    </a:lnL>
+                    <a:lnR w="6350" cap="flat" cmpd="sng" algn="ctr">
+                      <a:solidFill>
+                        <a:srgbClr val="CCCCCC"/>
+                      </a:solidFill>
+                      <a:prstDash val="solid"/>
+                      <a:round/>
+                      <a:headEnd type="none" w="med" len="med"/>
+                      <a:tailEnd type="none" w="med" len="med"/>
+                    </a:lnR>
+                    <a:lnT w="6350" cap="flat" cmpd="sng" algn="ctr">
+                      <a:solidFill>
+                        <a:srgbClr val="CCCCCC"/>
+                      </a:solidFill>
+                      <a:prstDash val="solid"/>
+                      <a:round/>
+                      <a:headEnd type="none" w="med" len="med"/>
+                      <a:tailEnd type="none" w="med" len="med"/>
+                    </a:lnT>
+                    <a:lnB w="6350" cap="flat" cmpd="sng" algn="ctr">
+                      <a:solidFill>
+                        <a:srgbClr val="CCCCCC"/>
+                      </a:solidFill>
+                      <a:prstDash val="solid"/>
+                      <a:round/>
+                      <a:headEnd type="none" w="med" len="med"/>
+                      <a:tailEnd type="none" w="med" len="med"/>
+                    </a:lnB>
+                    <a:solidFill>
+                      <a:srgbClr val="FFFFFF"/>
+                    </a:solidFill>
+                  </a:tcPr>
+                </a:tc>
+                <a:tc>
+                  <a:txBody>
+                    <a:bodyPr/>
+                    <a:lstStyle/>
+                    <a:p>
+                      <a:pPr indent="0" marL="0">
+                        <a:buNone/>
+                      </a:pPr>
+                      <a:r>
+                        <a:rPr lang="en-US" sz="700" dirty="0">
+                          <a:solidFill>
+                            <a:srgbClr val="000000"/>
+                          </a:solidFill>
+                        </a:rPr>
+                        <a:t>清掃品質基準の明確化と全スタッフへの共有</a:t>
+                      </a:r>
+                      <a:endParaRPr lang="en-US" sz="700" dirty="0"/>
+                    </a:p>
+                    <a:p>
+                      <a:pPr indent="0" marL="0">
+                        <a:buNone/>
+                      </a:pPr>
+                      <a:r>
+                        <a:rPr lang="en-US" sz="700" dirty="0">
+                          <a:solidFill>
+                            <a:srgbClr val="000000"/>
+                          </a:solidFill>
+                        </a:rPr>
+                        <a:t>重点箇所（水回り・ベッド周り）の清掃手順見直し</a:t>
+                      </a:r>
+                      <a:endParaRPr lang="en-US" sz="700" dirty="0"/>
+                    </a:p>
+                  </a:txBody>
+                  <a:tcPr marL="91440" marR="91440" marT="45720" marB="45720">
+                    <a:lnL w="6350" cap="flat" cmpd="sng" algn="ctr">
+                      <a:solidFill>
+                        <a:srgbClr val="CCCCCC"/>
+                      </a:solidFill>
+                      <a:prstDash val="solid"/>
+                      <a:round/>
+                      <a:headEnd type="none" w="med" len="med"/>
+                      <a:tailEnd type="none" w="med" len="med"/>
+                    </a:lnL>
+                    <a:lnR w="6350" cap="flat" cmpd="sng" algn="ctr">
+                      <a:solidFill>
+                        <a:srgbClr val="CCCCCC"/>
+                      </a:solidFill>
+                      <a:prstDash val="solid"/>
+                      <a:round/>
+                      <a:headEnd type="none" w="med" len="med"/>
+                      <a:tailEnd type="none" w="med" len="med"/>
+                    </a:lnR>
+                    <a:lnT w="6350" cap="flat" cmpd="sng" algn="ctr">
+                      <a:solidFill>
+                        <a:srgbClr val="CCCCCC"/>
+                      </a:solidFill>
+                      <a:prstDash val="solid"/>
+                      <a:round/>
+                      <a:headEnd type="none" w="med" len="med"/>
+                      <a:tailEnd type="none" w="med" len="med"/>
+                    </a:lnT>
+                    <a:lnB w="6350" cap="flat" cmpd="sng" algn="ctr">
+                      <a:solidFill>
+                        <a:srgbClr val="CCCCCC"/>
+                      </a:solidFill>
+                      <a:prstDash val="solid"/>
+                      <a:round/>
+                      <a:headEnd type="none" w="med" len="med"/>
+                      <a:tailEnd type="none" w="med" len="med"/>
+                    </a:lnB>
+                    <a:solidFill>
+                      <a:srgbClr val="FFFFFF"/>
+                    </a:solidFill>
+                  </a:tcPr>
+                </a:tc>
+                <a:tc>
+                  <a:txBody>
+                    <a:bodyPr/>
+                    <a:lstStyle/>
+                    <a:p>
+                      <a:pPr indent="0" marL="0">
+                        <a:buNone/>
+                      </a:pPr>
+                      <a:r>
+                        <a:rPr lang="en-US" sz="700" dirty="0">
+                          <a:solidFill>
+                            <a:srgbClr val="000000"/>
+                          </a:solidFill>
+                        </a:rPr>
+                        <a:t>品質管理チェックリストの導入と実施</a:t>
+                      </a:r>
+                      <a:endParaRPr lang="en-US" sz="700" dirty="0"/>
+                    </a:p>
+                    <a:p>
+                      <a:pPr indent="0" marL="0">
+                        <a:buNone/>
+                      </a:pPr>
+                      <a:r>
+                        <a:rPr lang="en-US" sz="700" dirty="0">
+                          <a:solidFill>
+                            <a:srgbClr val="000000"/>
+                          </a:solidFill>
+                        </a:rPr>
+                        <a:t>QCインスペクション体制の構築（ランダム抜き打ち検査）</a:t>
+                      </a:r>
+                      <a:endParaRPr lang="en-US" sz="700" dirty="0"/>
+                    </a:p>
+                  </a:txBody>
+                  <a:tcPr marL="91440" marR="91440" marT="45720" marB="45720">
+                    <a:lnL w="6350" cap="flat" cmpd="sng" algn="ctr">
+                      <a:solidFill>
+                        <a:srgbClr val="CCCCCC"/>
+                      </a:solidFill>
+                      <a:prstDash val="solid"/>
+                      <a:round/>
+                      <a:headEnd type="none" w="med" len="med"/>
+                      <a:tailEnd type="none" w="med" len="med"/>
+                    </a:lnL>
+                    <a:lnR w="6350" cap="flat" cmpd="sng" algn="ctr">
+                      <a:solidFill>
+                        <a:srgbClr val="CCCCCC"/>
+                      </a:solidFill>
+                      <a:prstDash val="solid"/>
+                      <a:round/>
+                      <a:headEnd type="none" w="med" len="med"/>
+                      <a:tailEnd type="none" w="med" len="med"/>
+                    </a:lnR>
+                    <a:lnT w="6350" cap="flat" cmpd="sng" algn="ctr">
+                      <a:solidFill>
+                        <a:srgbClr val="CCCCCC"/>
+                      </a:solidFill>
+                      <a:prstDash val="solid"/>
+                      <a:round/>
+                      <a:headEnd type="none" w="med" len="med"/>
+                      <a:tailEnd type="none" w="med" len="med"/>
+                    </a:lnT>
+                    <a:lnB w="6350" cap="flat" cmpd="sng" algn="ctr">
+                      <a:solidFill>
+                        <a:srgbClr val="CCCCCC"/>
+                      </a:solidFill>
+                      <a:prstDash val="solid"/>
+                      <a:round/>
+                      <a:headEnd type="none" w="med" len="med"/>
+                      <a:tailEnd type="none" w="med" len="med"/>
+                    </a:lnB>
+                    <a:solidFill>
+                      <a:srgbClr val="FFFFFF"/>
+                    </a:solidFill>
+                  </a:tcPr>
+                </a:tc>
+                <a:tc>
+                  <a:txBody>
+                    <a:bodyPr/>
+                    <a:lstStyle/>
+                    <a:p>
+                      <a:pPr indent="0" marL="0">
+                        <a:buNone/>
+                      </a:pPr>
+                      <a:r>
+                        <a:rPr lang="en-US" sz="700" dirty="0">
+                          <a:solidFill>
+                            <a:srgbClr val="000000"/>
+                          </a:solidFill>
+                        </a:rPr>
+                        <a:t>清掃スタッフの定期研修プログラム導入</a:t>
+                      </a:r>
+                      <a:endParaRPr lang="en-US" sz="700" dirty="0"/>
+                    </a:p>
+                    <a:p>
+                      <a:pPr indent="0" marL="0">
+                        <a:buNone/>
+                      </a:pPr>
+                      <a:r>
+                        <a:rPr lang="en-US" sz="700" dirty="0">
+                          <a:solidFill>
+                            <a:srgbClr val="000000"/>
+                          </a:solidFill>
+                        </a:rPr>
+                        <a:t>デジタル清掃記録システムの検討</a:t>
+                      </a:r>
+                      <a:endParaRPr lang="en-US" sz="700" dirty="0"/>
+                    </a:p>
+                  </a:txBody>
+                  <a:tcPr marL="91440" marR="91440" marT="45720" marB="45720">
+                    <a:lnL w="6350" cap="flat" cmpd="sng" algn="ctr">
+                      <a:solidFill>
+                        <a:srgbClr val="CCCCCC"/>
+                      </a:solidFill>
+                      <a:prstDash val="solid"/>
+                      <a:round/>
+                      <a:headEnd type="none" w="med" len="med"/>
+                      <a:tailEnd type="none" w="med" len="med"/>
+                    </a:lnL>
+                    <a:lnR w="6350" cap="flat" cmpd="sng" algn="ctr">
+                      <a:solidFill>
+                        <a:srgbClr val="CCCCCC"/>
+                      </a:solidFill>
+                      <a:prstDash val="solid"/>
+                      <a:round/>
+                      <a:headEnd type="none" w="med" len="med"/>
+                      <a:tailEnd type="none" w="med" len="med"/>
+                    </a:lnR>
+                    <a:lnT w="6350" cap="flat" cmpd="sng" algn="ctr">
+                      <a:solidFill>
+                        <a:srgbClr val="CCCCCC"/>
+                      </a:solidFill>
+                      <a:prstDash val="solid"/>
+                      <a:round/>
+                      <a:headEnd type="none" w="med" len="med"/>
+                      <a:tailEnd type="none" w="med" len="med"/>
+                    </a:lnT>
+                    <a:lnB w="6350" cap="flat" cmpd="sng" algn="ctr">
+                      <a:solidFill>
+                        <a:srgbClr val="CCCCCC"/>
+                      </a:solidFill>
+                      <a:prstDash val="solid"/>
+                      <a:round/>
+                      <a:headEnd type="none" w="med" len="med"/>
+                      <a:tailEnd type="none" w="med" len="med"/>
+                    </a:lnB>
+                    <a:solidFill>
+                      <a:srgbClr val="FFFFFF"/>
                     </a:solidFill>
                   </a:tcPr>
                 </a:tc>
@@ -9508,7 +10016,7 @@
                             <a:srgbClr val="000000"/>
                           </a:solidFill>
                         </a:rPr>
-                        <a:t>4.5%</a:t>
+                        <a:t>4.4%</a:t>
                       </a:r>
                       <a:endParaRPr lang="en-US" sz="800" dirty="0"/>
                     </a:p>
@@ -10000,7 +10508,7 @@
                             <a:srgbClr val="000000"/>
                           </a:solidFill>
                         </a:rPr>
-                        <a:t>5.0%</a:t>
+                        <a:t>5.1%</a:t>
                       </a:r>
                       <a:endParaRPr lang="en-US" sz="800" dirty="0"/>
                     </a:p>
@@ -10748,7 +11256,7 @@
                             <a:srgbClr val="000000"/>
                           </a:solidFill>
                         </a:rPr>
-                        <a:t>7.79</a:t>
+                        <a:t>7.72</a:t>
                       </a:r>
                       <a:endParaRPr lang="en-US" sz="700" dirty="0"/>
                     </a:p>
@@ -10809,7 +11317,7 @@
                             <a:srgbClr val="27AE60"/>
                           </a:solidFill>
                         </a:rPr>
-                        <a:t>8.30</a:t>
+                        <a:t>8.20</a:t>
                       </a:r>
                       <a:endParaRPr lang="en-US" sz="700" dirty="0"/>
                     </a:p>
@@ -11116,7 +11624,7 @@
                             <a:srgbClr val="000000"/>
                           </a:solidFill>
                         </a:rPr>
-                        <a:t>7.11</a:t>
+                        <a:t>7.08</a:t>
                       </a:r>
                       <a:endParaRPr lang="en-US" sz="700" dirty="0"/>
                     </a:p>
@@ -11238,7 +11746,7 @@
                             <a:srgbClr val="000000"/>
                           </a:solidFill>
                         </a:rPr>
-                        <a:t>10.0%</a:t>
+                        <a:t>9.3%</a:t>
                       </a:r>
                       <a:endParaRPr lang="en-US" sz="700" dirty="0"/>
                     </a:p>
@@ -11299,7 +11807,7 @@
                             <a:srgbClr val="27AE60"/>
                           </a:solidFill>
                         </a:rPr>
-                        <a:t>3.0%</a:t>
+                        <a:t>2.8%</a:t>
                       </a:r>
                       <a:endParaRPr lang="en-US" sz="700" dirty="0"/>
                     </a:p>
@@ -11484,7 +11992,7 @@
                             <a:srgbClr val="000000"/>
                           </a:solidFill>
                         </a:rPr>
-                        <a:t>7.45</a:t>
+                        <a:t>7.43</a:t>
                       </a:r>
                       <a:endParaRPr lang="en-US" sz="700" dirty="0"/>
                     </a:p>
@@ -11545,7 +12053,7 @@
                             <a:srgbClr val="27AE60"/>
                           </a:solidFill>
                         </a:rPr>
-                        <a:t>8.00</a:t>
+                        <a:t>7.90</a:t>
                       </a:r>
                       <a:endParaRPr lang="en-US" sz="700" dirty="0"/>
                     </a:p>
@@ -11606,7 +12114,7 @@
                             <a:srgbClr val="000000"/>
                           </a:solidFill>
                         </a:rPr>
-                        <a:t>9.8%</a:t>
+                        <a:t>9.3%</a:t>
                       </a:r>
                       <a:endParaRPr lang="en-US" sz="700" dirty="0"/>
                     </a:p>
@@ -11667,7 +12175,7 @@
                             <a:srgbClr val="27AE60"/>
                           </a:solidFill>
                         </a:rPr>
-                        <a:t>2.9%</a:t>
+                        <a:t>2.8%</a:t>
                       </a:r>
                       <a:endParaRPr lang="en-US" sz="700" dirty="0"/>
                     </a:p>
@@ -11730,7 +12238,7 @@
                             <a:srgbClr val="000000"/>
                           </a:solidFill>
                         </a:rPr>
-                        <a:t>コートホテル新横浜</a:t>
+                        <a:t>コンフォートホテル横浜関内</a:t>
                       </a:r>
                       <a:endParaRPr lang="en-US" sz="700" dirty="0"/>
                     </a:p>
@@ -11852,7 +12360,7 @@
                             <a:srgbClr val="000000"/>
                           </a:solidFill>
                         </a:rPr>
-                        <a:t>7.03</a:t>
+                        <a:t>7.41</a:t>
                       </a:r>
                       <a:endParaRPr lang="en-US" sz="700" dirty="0"/>
                     </a:p>
@@ -11913,7 +12421,7 @@
                             <a:srgbClr val="27AE60"/>
                           </a:solidFill>
                         </a:rPr>
-                        <a:t>7.50</a:t>
+                        <a:t>7.90</a:t>
                       </a:r>
                       <a:endParaRPr lang="en-US" sz="700" dirty="0"/>
                     </a:p>
@@ -12098,7 +12606,7 @@
                             <a:srgbClr val="000000"/>
                           </a:solidFill>
                         </a:rPr>
-                        <a:t>コンフォートホテル横浜関内</a:t>
+                        <a:t>コートホテル新横浜</a:t>
                       </a:r>
                       <a:endParaRPr lang="en-US" sz="700" dirty="0"/>
                     </a:p>
@@ -12220,7 +12728,7 @@
                             <a:srgbClr val="000000"/>
                           </a:solidFill>
                         </a:rPr>
-                        <a:t>7.46</a:t>
+                        <a:t>7.03</a:t>
                       </a:r>
                       <a:endParaRPr lang="en-US" sz="700" dirty="0"/>
                     </a:p>
@@ -12281,7 +12789,7 @@
                             <a:srgbClr val="27AE60"/>
                           </a:solidFill>
                         </a:rPr>
-                        <a:t>8.00</a:t>
+                        <a:t>7.50</a:t>
                       </a:r>
                       <a:endParaRPr lang="en-US" sz="700" dirty="0"/>
                     </a:p>
@@ -12342,7 +12850,7 @@
                             <a:srgbClr val="000000"/>
                           </a:solidFill>
                         </a:rPr>
-                        <a:t>8.5%</a:t>
+                        <a:t>9.2%</a:t>
                       </a:r>
                       <a:endParaRPr lang="en-US" sz="700" dirty="0"/>
                     </a:p>
@@ -12403,7 +12911,7 @@
                             <a:srgbClr val="27AE60"/>
                           </a:solidFill>
                         </a:rPr>
-                        <a:t>2.5%</a:t>
+                        <a:t>2.8%</a:t>
                       </a:r>
                       <a:endParaRPr lang="en-US" sz="700" dirty="0"/>
                     </a:p>
@@ -12588,7 +13096,7 @@
                             <a:srgbClr val="000000"/>
                           </a:solidFill>
                         </a:rPr>
-                        <a:t>8.15</a:t>
+                        <a:t>8.16</a:t>
                       </a:r>
                       <a:endParaRPr lang="en-US" sz="700" dirty="0"/>
                     </a:p>
@@ -12710,7 +13218,7 @@
                             <a:srgbClr val="000000"/>
                           </a:solidFill>
                         </a:rPr>
-                        <a:t>7.4%</a:t>
+                        <a:t>7.0%</a:t>
                       </a:r>
                       <a:endParaRPr lang="en-US" sz="700" dirty="0"/>
                     </a:p>
@@ -12771,7 +13279,7 @@
                             <a:srgbClr val="27AE60"/>
                           </a:solidFill>
                         </a:rPr>
-                        <a:t>2.2%</a:t>
+                        <a:t>2.1%</a:t>
                       </a:r>
                       <a:endParaRPr lang="en-US" sz="700" dirty="0"/>
                     </a:p>
@@ -12834,7 +13342,7 @@
                             <a:srgbClr val="000000"/>
                           </a:solidFill>
                         </a:rPr>
-                        <a:t>ホテルコメント横浜関内</a:t>
+                        <a:t>ダイワロイネットホテル東京大崎</a:t>
                       </a:r>
                       <a:endParaRPr lang="en-US" sz="700" dirty="0"/>
                     </a:p>
@@ -12956,7 +13464,7 @@
                             <a:srgbClr val="000000"/>
                           </a:solidFill>
                         </a:rPr>
-                        <a:t>8.87</a:t>
+                        <a:t>8.84</a:t>
                       </a:r>
                       <a:endParaRPr lang="en-US" sz="700" dirty="0"/>
                     </a:p>
@@ -13017,7 +13525,7 @@
                             <a:srgbClr val="27AE60"/>
                           </a:solidFill>
                         </a:rPr>
-                        <a:t>9.40</a:t>
+                        <a:t>9.30</a:t>
                       </a:r>
                       <a:endParaRPr lang="en-US" sz="700" dirty="0"/>
                     </a:p>
@@ -13078,7 +13586,7 @@
                             <a:srgbClr val="000000"/>
                           </a:solidFill>
                         </a:rPr>
-                        <a:t>5.3%</a:t>
+                        <a:t>5.4%</a:t>
                       </a:r>
                       <a:endParaRPr lang="en-US" sz="700" dirty="0"/>
                     </a:p>
@@ -13183,6 +13691,374 @@
                     </a:lnB>
                     <a:solidFill>
                       <a:srgbClr val="FFFFFF"/>
+                    </a:solidFill>
+                  </a:tcPr>
+                </a:tc>
+              </a:tr>
+              <a:tr h="0">
+                <a:tc>
+                  <a:txBody>
+                    <a:bodyPr/>
+                    <a:lstStyle/>
+                    <a:p>
+                      <a:pPr indent="0" marL="0">
+                        <a:buNone/>
+                      </a:pPr>
+                      <a:r>
+                        <a:rPr lang="en-US" sz="700" b="1" dirty="0">
+                          <a:solidFill>
+                            <a:srgbClr val="000000"/>
+                          </a:solidFill>
+                        </a:rPr>
+                        <a:t>ホテルコメント横浜関内</a:t>
+                      </a:r>
+                      <a:endParaRPr lang="en-US" sz="700" dirty="0"/>
+                    </a:p>
+                  </a:txBody>
+                  <a:tcPr marL="91440" marR="91440" marT="45720" marB="45720">
+                    <a:lnL w="6350" cap="flat" cmpd="sng" algn="ctr">
+                      <a:solidFill>
+                        <a:srgbClr val="CCCCCC"/>
+                      </a:solidFill>
+                      <a:prstDash val="solid"/>
+                      <a:round/>
+                      <a:headEnd type="none" w="med" len="med"/>
+                      <a:tailEnd type="none" w="med" len="med"/>
+                    </a:lnL>
+                    <a:lnR w="6350" cap="flat" cmpd="sng" algn="ctr">
+                      <a:solidFill>
+                        <a:srgbClr val="CCCCCC"/>
+                      </a:solidFill>
+                      <a:prstDash val="solid"/>
+                      <a:round/>
+                      <a:headEnd type="none" w="med" len="med"/>
+                      <a:tailEnd type="none" w="med" len="med"/>
+                    </a:lnR>
+                    <a:lnT w="6350" cap="flat" cmpd="sng" algn="ctr">
+                      <a:solidFill>
+                        <a:srgbClr val="CCCCCC"/>
+                      </a:solidFill>
+                      <a:prstDash val="solid"/>
+                      <a:round/>
+                      <a:headEnd type="none" w="med" len="med"/>
+                      <a:tailEnd type="none" w="med" len="med"/>
+                    </a:lnT>
+                    <a:lnB w="6350" cap="flat" cmpd="sng" algn="ctr">
+                      <a:solidFill>
+                        <a:srgbClr val="CCCCCC"/>
+                      </a:solidFill>
+                      <a:prstDash val="solid"/>
+                      <a:round/>
+                      <a:headEnd type="none" w="med" len="med"/>
+                      <a:tailEnd type="none" w="med" len="med"/>
+                    </a:lnB>
+                    <a:solidFill>
+                      <a:srgbClr val="F5F7FA"/>
+                    </a:solidFill>
+                  </a:tcPr>
+                </a:tc>
+                <a:tc>
+                  <a:txBody>
+                    <a:bodyPr/>
+                    <a:lstStyle/>
+                    <a:p>
+                      <a:pPr algn="ctr" indent="0" marL="0">
+                        <a:buNone/>
+                      </a:pPr>
+                      <a:r>
+                        <a:rPr lang="en-US" sz="700" b="1" dirty="0">
+                          <a:solidFill>
+                            <a:srgbClr val="FF9800"/>
+                          </a:solidFill>
+                        </a:rPr>
+                        <a:t>HIGH</a:t>
+                      </a:r>
+                      <a:endParaRPr lang="en-US" sz="700" dirty="0"/>
+                    </a:p>
+                  </a:txBody>
+                  <a:tcPr marL="91440" marR="91440" marT="45720" marB="45720">
+                    <a:lnL w="6350" cap="flat" cmpd="sng" algn="ctr">
+                      <a:solidFill>
+                        <a:srgbClr val="CCCCCC"/>
+                      </a:solidFill>
+                      <a:prstDash val="solid"/>
+                      <a:round/>
+                      <a:headEnd type="none" w="med" len="med"/>
+                      <a:tailEnd type="none" w="med" len="med"/>
+                    </a:lnL>
+                    <a:lnR w="6350" cap="flat" cmpd="sng" algn="ctr">
+                      <a:solidFill>
+                        <a:srgbClr val="CCCCCC"/>
+                      </a:solidFill>
+                      <a:prstDash val="solid"/>
+                      <a:round/>
+                      <a:headEnd type="none" w="med" len="med"/>
+                      <a:tailEnd type="none" w="med" len="med"/>
+                    </a:lnR>
+                    <a:lnT w="6350" cap="flat" cmpd="sng" algn="ctr">
+                      <a:solidFill>
+                        <a:srgbClr val="CCCCCC"/>
+                      </a:solidFill>
+                      <a:prstDash val="solid"/>
+                      <a:round/>
+                      <a:headEnd type="none" w="med" len="med"/>
+                      <a:tailEnd type="none" w="med" len="med"/>
+                    </a:lnT>
+                    <a:lnB w="6350" cap="flat" cmpd="sng" algn="ctr">
+                      <a:solidFill>
+                        <a:srgbClr val="CCCCCC"/>
+                      </a:solidFill>
+                      <a:prstDash val="solid"/>
+                      <a:round/>
+                      <a:headEnd type="none" w="med" len="med"/>
+                      <a:tailEnd type="none" w="med" len="med"/>
+                    </a:lnB>
+                    <a:solidFill>
+                      <a:srgbClr val="FFF3E0"/>
+                    </a:solidFill>
+                  </a:tcPr>
+                </a:tc>
+                <a:tc>
+                  <a:txBody>
+                    <a:bodyPr/>
+                    <a:lstStyle/>
+                    <a:p>
+                      <a:pPr algn="ctr" indent="0" marL="0">
+                        <a:buNone/>
+                      </a:pPr>
+                      <a:r>
+                        <a:rPr lang="en-US" sz="700" dirty="0">
+                          <a:solidFill>
+                            <a:srgbClr val="000000"/>
+                          </a:solidFill>
+                        </a:rPr>
+                        <a:t>8.88</a:t>
+                      </a:r>
+                      <a:endParaRPr lang="en-US" sz="700" dirty="0"/>
+                    </a:p>
+                  </a:txBody>
+                  <a:tcPr marL="91440" marR="91440" marT="45720" marB="45720">
+                    <a:lnL w="6350" cap="flat" cmpd="sng" algn="ctr">
+                      <a:solidFill>
+                        <a:srgbClr val="CCCCCC"/>
+                      </a:solidFill>
+                      <a:prstDash val="solid"/>
+                      <a:round/>
+                      <a:headEnd type="none" w="med" len="med"/>
+                      <a:tailEnd type="none" w="med" len="med"/>
+                    </a:lnL>
+                    <a:lnR w="6350" cap="flat" cmpd="sng" algn="ctr">
+                      <a:solidFill>
+                        <a:srgbClr val="CCCCCC"/>
+                      </a:solidFill>
+                      <a:prstDash val="solid"/>
+                      <a:round/>
+                      <a:headEnd type="none" w="med" len="med"/>
+                      <a:tailEnd type="none" w="med" len="med"/>
+                    </a:lnR>
+                    <a:lnT w="6350" cap="flat" cmpd="sng" algn="ctr">
+                      <a:solidFill>
+                        <a:srgbClr val="CCCCCC"/>
+                      </a:solidFill>
+                      <a:prstDash val="solid"/>
+                      <a:round/>
+                      <a:headEnd type="none" w="med" len="med"/>
+                      <a:tailEnd type="none" w="med" len="med"/>
+                    </a:lnT>
+                    <a:lnB w="6350" cap="flat" cmpd="sng" algn="ctr">
+                      <a:solidFill>
+                        <a:srgbClr val="CCCCCC"/>
+                      </a:solidFill>
+                      <a:prstDash val="solid"/>
+                      <a:round/>
+                      <a:headEnd type="none" w="med" len="med"/>
+                      <a:tailEnd type="none" w="med" len="med"/>
+                    </a:lnB>
+                    <a:solidFill>
+                      <a:srgbClr val="F5F7FA"/>
+                    </a:solidFill>
+                  </a:tcPr>
+                </a:tc>
+                <a:tc>
+                  <a:txBody>
+                    <a:bodyPr/>
+                    <a:lstStyle/>
+                    <a:p>
+                      <a:pPr algn="ctr" indent="0" marL="0">
+                        <a:buNone/>
+                      </a:pPr>
+                      <a:r>
+                        <a:rPr lang="en-US" sz="700" b="1" dirty="0">
+                          <a:solidFill>
+                            <a:srgbClr val="27AE60"/>
+                          </a:solidFill>
+                        </a:rPr>
+                        <a:t>9.40</a:t>
+                      </a:r>
+                      <a:endParaRPr lang="en-US" sz="700" dirty="0"/>
+                    </a:p>
+                  </a:txBody>
+                  <a:tcPr marL="91440" marR="91440" marT="45720" marB="45720">
+                    <a:lnL w="6350" cap="flat" cmpd="sng" algn="ctr">
+                      <a:solidFill>
+                        <a:srgbClr val="CCCCCC"/>
+                      </a:solidFill>
+                      <a:prstDash val="solid"/>
+                      <a:round/>
+                      <a:headEnd type="none" w="med" len="med"/>
+                      <a:tailEnd type="none" w="med" len="med"/>
+                    </a:lnL>
+                    <a:lnR w="6350" cap="flat" cmpd="sng" algn="ctr">
+                      <a:solidFill>
+                        <a:srgbClr val="CCCCCC"/>
+                      </a:solidFill>
+                      <a:prstDash val="solid"/>
+                      <a:round/>
+                      <a:headEnd type="none" w="med" len="med"/>
+                      <a:tailEnd type="none" w="med" len="med"/>
+                    </a:lnR>
+                    <a:lnT w="6350" cap="flat" cmpd="sng" algn="ctr">
+                      <a:solidFill>
+                        <a:srgbClr val="CCCCCC"/>
+                      </a:solidFill>
+                      <a:prstDash val="solid"/>
+                      <a:round/>
+                      <a:headEnd type="none" w="med" len="med"/>
+                      <a:tailEnd type="none" w="med" len="med"/>
+                    </a:lnT>
+                    <a:lnB w="6350" cap="flat" cmpd="sng" algn="ctr">
+                      <a:solidFill>
+                        <a:srgbClr val="CCCCCC"/>
+                      </a:solidFill>
+                      <a:prstDash val="solid"/>
+                      <a:round/>
+                      <a:headEnd type="none" w="med" len="med"/>
+                      <a:tailEnd type="none" w="med" len="med"/>
+                    </a:lnB>
+                    <a:solidFill>
+                      <a:srgbClr val="F5F7FA"/>
+                    </a:solidFill>
+                  </a:tcPr>
+                </a:tc>
+                <a:tc>
+                  <a:txBody>
+                    <a:bodyPr/>
+                    <a:lstStyle/>
+                    <a:p>
+                      <a:pPr algn="ctr" indent="0" marL="0">
+                        <a:buNone/>
+                      </a:pPr>
+                      <a:r>
+                        <a:rPr lang="en-US" sz="700" dirty="0">
+                          <a:solidFill>
+                            <a:srgbClr val="000000"/>
+                          </a:solidFill>
+                        </a:rPr>
+                        <a:t>5.1%</a:t>
+                      </a:r>
+                      <a:endParaRPr lang="en-US" sz="700" dirty="0"/>
+                    </a:p>
+                  </a:txBody>
+                  <a:tcPr marL="91440" marR="91440" marT="45720" marB="45720">
+                    <a:lnL w="6350" cap="flat" cmpd="sng" algn="ctr">
+                      <a:solidFill>
+                        <a:srgbClr val="CCCCCC"/>
+                      </a:solidFill>
+                      <a:prstDash val="solid"/>
+                      <a:round/>
+                      <a:headEnd type="none" w="med" len="med"/>
+                      <a:tailEnd type="none" w="med" len="med"/>
+                    </a:lnL>
+                    <a:lnR w="6350" cap="flat" cmpd="sng" algn="ctr">
+                      <a:solidFill>
+                        <a:srgbClr val="CCCCCC"/>
+                      </a:solidFill>
+                      <a:prstDash val="solid"/>
+                      <a:round/>
+                      <a:headEnd type="none" w="med" len="med"/>
+                      <a:tailEnd type="none" w="med" len="med"/>
+                    </a:lnR>
+                    <a:lnT w="6350" cap="flat" cmpd="sng" algn="ctr">
+                      <a:solidFill>
+                        <a:srgbClr val="CCCCCC"/>
+                      </a:solidFill>
+                      <a:prstDash val="solid"/>
+                      <a:round/>
+                      <a:headEnd type="none" w="med" len="med"/>
+                      <a:tailEnd type="none" w="med" len="med"/>
+                    </a:lnT>
+                    <a:lnB w="6350" cap="flat" cmpd="sng" algn="ctr">
+                      <a:solidFill>
+                        <a:srgbClr val="CCCCCC"/>
+                      </a:solidFill>
+                      <a:prstDash val="solid"/>
+                      <a:round/>
+                      <a:headEnd type="none" w="med" len="med"/>
+                      <a:tailEnd type="none" w="med" len="med"/>
+                    </a:lnB>
+                    <a:solidFill>
+                      <a:srgbClr val="F5F7FA"/>
+                    </a:solidFill>
+                  </a:tcPr>
+                </a:tc>
+                <a:tc>
+                  <a:txBody>
+                    <a:bodyPr/>
+                    <a:lstStyle/>
+                    <a:p>
+                      <a:pPr algn="ctr" indent="0" marL="0">
+                        <a:buNone/>
+                      </a:pPr>
+                      <a:r>
+                        <a:rPr lang="en-US" sz="700" b="1" dirty="0">
+                          <a:solidFill>
+                            <a:srgbClr val="27AE60"/>
+                          </a:solidFill>
+                        </a:rPr>
+                        <a:t>1.5%</a:t>
+                      </a:r>
+                      <a:endParaRPr lang="en-US" sz="700" dirty="0"/>
+                    </a:p>
+                  </a:txBody>
+                  <a:tcPr marL="91440" marR="91440" marT="45720" marB="45720">
+                    <a:lnL w="6350" cap="flat" cmpd="sng" algn="ctr">
+                      <a:solidFill>
+                        <a:srgbClr val="CCCCCC"/>
+                      </a:solidFill>
+                      <a:prstDash val="solid"/>
+                      <a:round/>
+                      <a:headEnd type="none" w="med" len="med"/>
+                      <a:tailEnd type="none" w="med" len="med"/>
+                    </a:lnL>
+                    <a:lnR w="6350" cap="flat" cmpd="sng" algn="ctr">
+                      <a:solidFill>
+                        <a:srgbClr val="CCCCCC"/>
+                      </a:solidFill>
+                      <a:prstDash val="solid"/>
+                      <a:round/>
+                      <a:headEnd type="none" w="med" len="med"/>
+                      <a:tailEnd type="none" w="med" len="med"/>
+                    </a:lnR>
+                    <a:lnT w="6350" cap="flat" cmpd="sng" algn="ctr">
+                      <a:solidFill>
+                        <a:srgbClr val="CCCCCC"/>
+                      </a:solidFill>
+                      <a:prstDash val="solid"/>
+                      <a:round/>
+                      <a:headEnd type="none" w="med" len="med"/>
+                      <a:tailEnd type="none" w="med" len="med"/>
+                    </a:lnT>
+                    <a:lnB w="6350" cap="flat" cmpd="sng" algn="ctr">
+                      <a:solidFill>
+                        <a:srgbClr val="CCCCCC"/>
+                      </a:solidFill>
+                      <a:prstDash val="solid"/>
+                      <a:round/>
+                      <a:headEnd type="none" w="med" len="med"/>
+                      <a:tailEnd type="none" w="med" len="med"/>
+                    </a:lnB>
+                    <a:solidFill>
+                      <a:srgbClr val="F5F7FA"/>
                     </a:solidFill>
                   </a:tcPr>
                 </a:tc>
@@ -14254,7 +15130,7 @@
                             <a:srgbClr val="000000"/>
                           </a:solidFill>
                         </a:rPr>
-                        <a:t>7ホテル</a:t>
+                        <a:t>8ホテル</a:t>
                       </a:r>
                       <a:endParaRPr lang="en-US" sz="800" dirty="0"/>
                     </a:p>
@@ -16693,7 +17569,7 @@
                 <a:ea typeface="Arial" pitchFamily="34" charset="-122"/>
                 <a:cs typeface="Arial" pitchFamily="34" charset="-120"/>
               </a:rPr>
-              <a:t>4.5%</a:t>
+              <a:t>4.4%</a:t>
             </a:r>
             <a:endParaRPr lang="en-US" sz="2800" dirty="0"/>
           </a:p>
@@ -16818,7 +17694,7 @@
                 <a:ea typeface="Arial" pitchFamily="34" charset="-122"/>
                 <a:cs typeface="Arial" pitchFamily="34" charset="-120"/>
               </a:rPr>
-              <a:t>2260件</a:t>
+              <a:t>2323件</a:t>
             </a:r>
             <a:endParaRPr lang="en-US" sz="2800" dirty="0"/>
           </a:p>
@@ -16942,7 +17818,7 @@
                 <a:ea typeface="Arial" pitchFamily="34" charset="-122"/>
                 <a:cs typeface="Arial" pitchFamily="34" charset="-120"/>
               </a:rPr>
-              <a:t>上位5ホテル平均8.7点超。コンフォートスイーツ東京ベイが9.21点で最高評価</a:t>
+              <a:t>上位5ホテル平均8.7点超。コンフォートスイーツ東京ベイが9.24点で最高評価</a:t>
             </a:r>
             <a:endParaRPr lang="en-US" sz="1000" dirty="0"/>
           </a:p>
@@ -16995,7 +17871,7 @@
                 <a:ea typeface="Arial" pitchFamily="34" charset="-122"/>
                 <a:cs typeface="Arial" pitchFamily="34" charset="-120"/>
               </a:rPr>
-              <a:t>5ホテルがURGENT。清掃クレーム率4.5%（業界平均2-3%超過）</a:t>
+              <a:t>5ホテルがURGENT。清掃クレーム率4.4%（業界平均2-3%超過）</a:t>
             </a:r>
             <a:endParaRPr lang="en-US" sz="1000" dirty="0"/>
           </a:p>
@@ -18460,7 +19336,7 @@
                             <a:srgbClr val="000000"/>
                           </a:solidFill>
                         </a:rPr>
-                        <a:t>9.21</a:t>
+                        <a:t>9.24</a:t>
                       </a:r>
                       <a:endParaRPr lang="en-US" sz="700" dirty="0"/>
                     </a:p>
@@ -18521,7 +19397,7 @@
                             <a:srgbClr val="000000"/>
                           </a:solidFill>
                         </a:rPr>
-                        <a:t>94.3%</a:t>
+                        <a:t>95.8%</a:t>
                       </a:r>
                       <a:endParaRPr lang="en-US" sz="700" dirty="0"/>
                     </a:p>
@@ -18828,7 +19704,7 @@
                             <a:srgbClr val="000000"/>
                           </a:solidFill>
                         </a:rPr>
-                        <a:t>9.08</a:t>
+                        <a:t>9.12</a:t>
                       </a:r>
                       <a:endParaRPr lang="en-US" sz="700" dirty="0"/>
                     </a:p>
@@ -18889,7 +19765,7 @@
                             <a:srgbClr val="000000"/>
                           </a:solidFill>
                         </a:rPr>
-                        <a:t>90.4%</a:t>
+                        <a:t>90.8%</a:t>
                       </a:r>
                       <a:endParaRPr lang="en-US" sz="700" dirty="0"/>
                     </a:p>
@@ -19196,7 +20072,7 @@
                             <a:srgbClr val="000000"/>
                           </a:solidFill>
                         </a:rPr>
-                        <a:t>9.05</a:t>
+                        <a:t>9.06</a:t>
                       </a:r>
                       <a:endParaRPr lang="en-US" sz="700" dirty="0"/>
                     </a:p>
@@ -19257,7 +20133,7 @@
                             <a:srgbClr val="000000"/>
                           </a:solidFill>
                         </a:rPr>
-                        <a:t>88.5%</a:t>
+                        <a:t>89.0%</a:t>
                       </a:r>
                       <a:endParaRPr lang="en-US" sz="700" dirty="0"/>
                     </a:p>
@@ -19564,7 +20440,7 @@
                             <a:srgbClr val="000000"/>
                           </a:solidFill>
                         </a:rPr>
-                        <a:t>8.94</a:t>
+                        <a:t>8.95</a:t>
                       </a:r>
                       <a:endParaRPr lang="en-US" sz="700" dirty="0"/>
                     </a:p>
@@ -19625,7 +20501,7 @@
                             <a:srgbClr val="000000"/>
                           </a:solidFill>
                         </a:rPr>
-                        <a:t>85.7%</a:t>
+                        <a:t>86.0%</a:t>
                       </a:r>
                       <a:endParaRPr lang="en-US" sz="700" dirty="0"/>
                     </a:p>
@@ -19871,7 +20747,7 @@
                             <a:srgbClr val="000000"/>
                           </a:solidFill>
                         </a:rPr>
-                        <a:t>ダイワロイネットホテル東京大崎</a:t>
+                        <a:t>ホテルコメント横浜関内</a:t>
                       </a:r>
                       <a:endParaRPr lang="en-US" sz="700" dirty="0"/>
                     </a:p>
@@ -19932,7 +20808,7 @@
                             <a:srgbClr val="000000"/>
                           </a:solidFill>
                         </a:rPr>
-                        <a:t>8.87</a:t>
+                        <a:t>8.88</a:t>
                       </a:r>
                       <a:endParaRPr lang="en-US" sz="700" dirty="0"/>
                     </a:p>
@@ -19993,7 +20869,7 @@
                             <a:srgbClr val="000000"/>
                           </a:solidFill>
                         </a:rPr>
-                        <a:t>83.3%</a:t>
+                        <a:t>84.7%</a:t>
                       </a:r>
                       <a:endParaRPr lang="en-US" sz="700" dirty="0"/>
                     </a:p>
@@ -20051,10 +20927,10 @@
                       <a:r>
                         <a:rPr lang="en-US" sz="700" b="1" dirty="0">
                           <a:solidFill>
-                            <a:srgbClr val="2196F3"/>
+                            <a:srgbClr val="FF9800"/>
                           </a:solidFill>
                         </a:rPr>
-                        <a:t>STANDARD</a:t>
+                        <a:t>HIGH</a:t>
                       </a:r>
                       <a:endParaRPr lang="en-US" sz="700" dirty="0"/>
                     </a:p>
@@ -20097,7 +20973,7 @@
                       <a:tailEnd type="none" w="med" len="med"/>
                     </a:lnB>
                     <a:solidFill>
-                      <a:srgbClr val="E3F2FD"/>
+                      <a:srgbClr val="FFF3E0"/>
                     </a:solidFill>
                   </a:tcPr>
                 </a:tc>
@@ -20239,7 +21115,7 @@
                             <a:srgbClr val="000000"/>
                           </a:solidFill>
                         </a:rPr>
-                        <a:t>ホテルコメント横浜関内</a:t>
+                        <a:t>ダイワロイネットホテル東京大崎</a:t>
                       </a:r>
                       <a:endParaRPr lang="en-US" sz="700" dirty="0"/>
                     </a:p>
@@ -20300,7 +21176,7 @@
                             <a:srgbClr val="000000"/>
                           </a:solidFill>
                         </a:rPr>
-                        <a:t>8.87</a:t>
+                        <a:t>8.84</a:t>
                       </a:r>
                       <a:endParaRPr lang="en-US" sz="700" dirty="0"/>
                     </a:p>
@@ -20361,7 +21237,7 @@
                             <a:srgbClr val="000000"/>
                           </a:solidFill>
                         </a:rPr>
-                        <a:t>84.2%</a:t>
+                        <a:t>82.1%</a:t>
                       </a:r>
                       <a:endParaRPr lang="en-US" sz="700" dirty="0"/>
                     </a:p>
@@ -20668,7 +21544,7 @@
                             <a:srgbClr val="000000"/>
                           </a:solidFill>
                         </a:rPr>
-                        <a:t>8.78</a:t>
+                        <a:t>8.74</a:t>
                       </a:r>
                       <a:endParaRPr lang="en-US" sz="700" dirty="0"/>
                     </a:p>
@@ -20729,7 +21605,7 @@
                             <a:srgbClr val="000000"/>
                           </a:solidFill>
                         </a:rPr>
-                        <a:t>86.4%</a:t>
+                        <a:t>85.7%</a:t>
                       </a:r>
                       <a:endParaRPr lang="en-US" sz="700" dirty="0"/>
                     </a:p>
@@ -21036,7 +21912,7 @@
                             <a:srgbClr val="000000"/>
                           </a:solidFill>
                         </a:rPr>
-                        <a:t>8.73</a:t>
+                        <a:t>8.71</a:t>
                       </a:r>
                       <a:endParaRPr lang="en-US" sz="700" dirty="0"/>
                     </a:p>
@@ -21097,7 +21973,7 @@
                             <a:srgbClr val="000000"/>
                           </a:solidFill>
                         </a:rPr>
-                        <a:t>81.2%</a:t>
+                        <a:t>81.4%</a:t>
                       </a:r>
                       <a:endParaRPr lang="en-US" sz="700" dirty="0"/>
                     </a:p>
@@ -21343,7 +22219,7 @@
                             <a:srgbClr val="000000"/>
                           </a:solidFill>
                         </a:rPr>
-                        <a:t>リッチモンドホテル東京目白</a:t>
+                        <a:t>ハートンホテル東品川</a:t>
                       </a:r>
                       <a:endParaRPr lang="en-US" sz="700" dirty="0"/>
                     </a:p>
@@ -21465,7 +22341,7 @@
                             <a:srgbClr val="000000"/>
                           </a:solidFill>
                         </a:rPr>
-                        <a:t>85.8%</a:t>
+                        <a:t>84.9%</a:t>
                       </a:r>
                       <a:endParaRPr lang="en-US" sz="700" dirty="0"/>
                     </a:p>
@@ -21711,7 +22587,7 @@
                             <a:srgbClr val="000000"/>
                           </a:solidFill>
                         </a:rPr>
-                        <a:t>ハートンホテル東品川</a:t>
+                        <a:t>リッチモンドホテル東京目白</a:t>
                       </a:r>
                       <a:endParaRPr lang="en-US" sz="700" dirty="0"/>
                     </a:p>
@@ -21772,7 +22648,7 @@
                             <a:srgbClr val="000000"/>
                           </a:solidFill>
                         </a:rPr>
-                        <a:t>8.65</a:t>
+                        <a:t>8.68</a:t>
                       </a:r>
                       <a:endParaRPr lang="en-US" sz="700" dirty="0"/>
                     </a:p>
@@ -21833,7 +22709,7 @@
                             <a:srgbClr val="000000"/>
                           </a:solidFill>
                         </a:rPr>
-                        <a:t>85.6%</a:t>
+                        <a:t>86.2%</a:t>
                       </a:r>
                       <a:endParaRPr lang="en-US" sz="700" dirty="0"/>
                     </a:p>
@@ -22140,7 +23016,7 @@
                             <a:srgbClr val="000000"/>
                           </a:solidFill>
                         </a:rPr>
-                        <a:t>8.55</a:t>
+                        <a:t>8.53</a:t>
                       </a:r>
                       <a:endParaRPr lang="en-US" sz="700" dirty="0"/>
                     </a:p>
@@ -22201,7 +23077,7 @@
                             <a:srgbClr val="000000"/>
                           </a:solidFill>
                         </a:rPr>
-                        <a:t>80.3%</a:t>
+                        <a:t>79.9%</a:t>
                       </a:r>
                       <a:endParaRPr lang="en-US" sz="700" dirty="0"/>
                     </a:p>
@@ -22508,7 +23384,7 @@
                             <a:srgbClr val="000000"/>
                           </a:solidFill>
                         </a:rPr>
-                        <a:t>8.27</a:t>
+                        <a:t>8.29</a:t>
                       </a:r>
                       <a:endParaRPr lang="en-US" sz="700" dirty="0"/>
                     </a:p>
@@ -22569,7 +23445,7 @@
                             <a:srgbClr val="000000"/>
                           </a:solidFill>
                         </a:rPr>
-                        <a:t>75.8%</a:t>
+                        <a:t>76.1%</a:t>
                       </a:r>
                       <a:endParaRPr lang="en-US" sz="700" dirty="0"/>
                     </a:p>
@@ -22876,7 +23752,7 @@
                             <a:srgbClr val="000000"/>
                           </a:solidFill>
                         </a:rPr>
-                        <a:t>8.15</a:t>
+                        <a:t>8.16</a:t>
                       </a:r>
                       <a:endParaRPr lang="en-US" sz="700" dirty="0"/>
                     </a:p>
@@ -22937,7 +23813,7 @@
                             <a:srgbClr val="000000"/>
                           </a:solidFill>
                         </a:rPr>
-                        <a:t>78.7%</a:t>
+                        <a:t>79.1%</a:t>
                       </a:r>
                       <a:endParaRPr lang="en-US" sz="700" dirty="0"/>
                     </a:p>
@@ -23244,7 +24120,7 @@
                             <a:srgbClr val="000000"/>
                           </a:solidFill>
                         </a:rPr>
-                        <a:t>8.10</a:t>
+                        <a:t>8.13</a:t>
                       </a:r>
                       <a:endParaRPr lang="en-US" sz="700" dirty="0"/>
                     </a:p>
@@ -23305,7 +24181,7 @@
                             <a:srgbClr val="000000"/>
                           </a:solidFill>
                         </a:rPr>
-                        <a:t>68.3%</a:t>
+                        <a:t>68.9%</a:t>
                       </a:r>
                       <a:endParaRPr lang="en-US" sz="700" dirty="0"/>
                     </a:p>
@@ -23612,7 +24488,7 @@
                             <a:srgbClr val="000000"/>
                           </a:solidFill>
                         </a:rPr>
-                        <a:t>7.79</a:t>
+                        <a:t>7.72</a:t>
                       </a:r>
                       <a:endParaRPr lang="en-US" sz="700" dirty="0"/>
                     </a:p>
@@ -23673,7 +24549,7 @@
                             <a:srgbClr val="000000"/>
                           </a:solidFill>
                         </a:rPr>
-                        <a:t>66.4%</a:t>
+                        <a:t>65.7%</a:t>
                       </a:r>
                       <a:endParaRPr lang="en-US" sz="700" dirty="0"/>
                     </a:p>
@@ -23919,7 +24795,7 @@
                             <a:srgbClr val="000000"/>
                           </a:solidFill>
                         </a:rPr>
-                        <a:t>コンフォートホテル横浜関内</a:t>
+                        <a:t>アパホテル蒲田駅東</a:t>
                       </a:r>
                       <a:endParaRPr lang="en-US" sz="700" dirty="0"/>
                     </a:p>
@@ -23980,7 +24856,7 @@
                             <a:srgbClr val="000000"/>
                           </a:solidFill>
                         </a:rPr>
-                        <a:t>7.46</a:t>
+                        <a:t>7.43</a:t>
                       </a:r>
                       <a:endParaRPr lang="en-US" sz="700" dirty="0"/>
                     </a:p>
@@ -24041,7 +24917,7 @@
                             <a:srgbClr val="000000"/>
                           </a:solidFill>
                         </a:rPr>
-                        <a:t>69.5%</a:t>
+                        <a:t>64.8%</a:t>
                       </a:r>
                       <a:endParaRPr lang="en-US" sz="700" dirty="0"/>
                     </a:p>
@@ -24287,7 +25163,7 @@
                             <a:srgbClr val="000000"/>
                           </a:solidFill>
                         </a:rPr>
-                        <a:t>アパホテル蒲田駅東</a:t>
+                        <a:t>コンフォートホテル横浜関内</a:t>
                       </a:r>
                       <a:endParaRPr lang="en-US" sz="700" dirty="0"/>
                     </a:p>
@@ -24348,7 +25224,7 @@
                             <a:srgbClr val="000000"/>
                           </a:solidFill>
                         </a:rPr>
-                        <a:t>7.45</a:t>
+                        <a:t>7.41</a:t>
                       </a:r>
                       <a:endParaRPr lang="en-US" sz="700" dirty="0"/>
                     </a:p>
@@ -24409,7 +25285,7 @@
                             <a:srgbClr val="000000"/>
                           </a:solidFill>
                         </a:rPr>
-                        <a:t>64.7%</a:t>
+                        <a:t>67.6%</a:t>
                       </a:r>
                       <a:endParaRPr lang="en-US" sz="700" dirty="0"/>
                     </a:p>
@@ -24716,7 +25592,7 @@
                             <a:srgbClr val="000000"/>
                           </a:solidFill>
                         </a:rPr>
-                        <a:t>7.11</a:t>
+                        <a:t>7.08</a:t>
                       </a:r>
                       <a:endParaRPr lang="en-US" sz="700" dirty="0"/>
                     </a:p>
@@ -24777,7 +25653,7 @@
                             <a:srgbClr val="000000"/>
                           </a:solidFill>
                         </a:rPr>
-                        <a:t>58.6%</a:t>
+                        <a:t>57.3%</a:t>
                       </a:r>
                       <a:endParaRPr lang="en-US" sz="700" dirty="0"/>
                     </a:p>
@@ -25659,7 +26535,7 @@
                 <a:ea typeface="Arial" pitchFamily="34" charset="-122"/>
                 <a:cs typeface="Arial" pitchFamily="34" charset="-120"/>
               </a:rPr>
-              <a:t>101件</a:t>
+              <a:t>103件</a:t>
             </a:r>
             <a:endParaRPr lang="en-US" sz="2800" dirty="0"/>
           </a:p>
@@ -25784,7 +26660,7 @@
                 <a:ea typeface="Arial" pitchFamily="34" charset="-122"/>
                 <a:cs typeface="Arial" pitchFamily="34" charset="-120"/>
               </a:rPr>
-              <a:t>4.5%</a:t>
+              <a:t>4.4%</a:t>
             </a:r>
             <a:endParaRPr lang="en-US" sz="2800" dirty="0"/>
           </a:p>
@@ -26265,7 +27141,7 @@
                             <a:srgbClr val="000000"/>
                           </a:solidFill>
                         </a:rPr>
-                        <a:t>66</a:t>
+                        <a:t>68</a:t>
                       </a:r>
                       <a:endParaRPr lang="en-US" sz="800" dirty="0"/>
                     </a:p>
@@ -26511,7 +27387,7 @@
                             <a:srgbClr val="000000"/>
                           </a:solidFill>
                         </a:rPr>
-                        <a:t>24</a:t>
+                        <a:t>23</a:t>
                       </a:r>
                       <a:endParaRPr lang="en-US" sz="800" dirty="0"/>
                     </a:p>
@@ -26572,7 +27448,7 @@
                             <a:srgbClr val="000000"/>
                           </a:solidFill>
                         </a:rPr>
-                        <a:t>11/19</a:t>
+                        <a:t>10/19</a:t>
                       </a:r>
                       <a:endParaRPr lang="en-US" sz="800" dirty="0"/>
                     </a:p>
@@ -26696,6 +27572,252 @@
                             <a:srgbClr val="000000"/>
                           </a:solidFill>
                         </a:rPr>
+                        <a:t>シミ・汚れ跡</a:t>
+                      </a:r>
+                      <a:endParaRPr lang="en-US" sz="800" dirty="0"/>
+                    </a:p>
+                  </a:txBody>
+                  <a:tcPr marL="91440" marR="91440" marT="45720" marB="45720">
+                    <a:lnL w="6350" cap="flat" cmpd="sng" algn="ctr">
+                      <a:solidFill>
+                        <a:srgbClr val="CCCCCC"/>
+                      </a:solidFill>
+                      <a:prstDash val="solid"/>
+                      <a:round/>
+                      <a:headEnd type="none" w="med" len="med"/>
+                      <a:tailEnd type="none" w="med" len="med"/>
+                    </a:lnL>
+                    <a:lnR w="6350" cap="flat" cmpd="sng" algn="ctr">
+                      <a:solidFill>
+                        <a:srgbClr val="CCCCCC"/>
+                      </a:solidFill>
+                      <a:prstDash val="solid"/>
+                      <a:round/>
+                      <a:headEnd type="none" w="med" len="med"/>
+                      <a:tailEnd type="none" w="med" len="med"/>
+                    </a:lnR>
+                    <a:lnT w="6350" cap="flat" cmpd="sng" algn="ctr">
+                      <a:solidFill>
+                        <a:srgbClr val="CCCCCC"/>
+                      </a:solidFill>
+                      <a:prstDash val="solid"/>
+                      <a:round/>
+                      <a:headEnd type="none" w="med" len="med"/>
+                      <a:tailEnd type="none" w="med" len="med"/>
+                    </a:lnT>
+                    <a:lnB w="6350" cap="flat" cmpd="sng" algn="ctr">
+                      <a:solidFill>
+                        <a:srgbClr val="CCCCCC"/>
+                      </a:solidFill>
+                      <a:prstDash val="solid"/>
+                      <a:round/>
+                      <a:headEnd type="none" w="med" len="med"/>
+                      <a:tailEnd type="none" w="med" len="med"/>
+                    </a:lnB>
+                    <a:solidFill>
+                      <a:srgbClr val="FFFFFF"/>
+                    </a:solidFill>
+                  </a:tcPr>
+                </a:tc>
+                <a:tc>
+                  <a:txBody>
+                    <a:bodyPr/>
+                    <a:lstStyle/>
+                    <a:p>
+                      <a:pPr algn="ctr" indent="0" marL="0">
+                        <a:buNone/>
+                      </a:pPr>
+                      <a:r>
+                        <a:rPr lang="en-US" sz="800" b="1" dirty="0">
+                          <a:solidFill>
+                            <a:srgbClr val="000000"/>
+                          </a:solidFill>
+                        </a:rPr>
+                        <a:t>11</a:t>
+                      </a:r>
+                      <a:endParaRPr lang="en-US" sz="800" dirty="0"/>
+                    </a:p>
+                  </a:txBody>
+                  <a:tcPr marL="91440" marR="91440" marT="45720" marB="45720">
+                    <a:lnL w="6350" cap="flat" cmpd="sng" algn="ctr">
+                      <a:solidFill>
+                        <a:srgbClr val="CCCCCC"/>
+                      </a:solidFill>
+                      <a:prstDash val="solid"/>
+                      <a:round/>
+                      <a:headEnd type="none" w="med" len="med"/>
+                      <a:tailEnd type="none" w="med" len="med"/>
+                    </a:lnL>
+                    <a:lnR w="6350" cap="flat" cmpd="sng" algn="ctr">
+                      <a:solidFill>
+                        <a:srgbClr val="CCCCCC"/>
+                      </a:solidFill>
+                      <a:prstDash val="solid"/>
+                      <a:round/>
+                      <a:headEnd type="none" w="med" len="med"/>
+                      <a:tailEnd type="none" w="med" len="med"/>
+                    </a:lnR>
+                    <a:lnT w="6350" cap="flat" cmpd="sng" algn="ctr">
+                      <a:solidFill>
+                        <a:srgbClr val="CCCCCC"/>
+                      </a:solidFill>
+                      <a:prstDash val="solid"/>
+                      <a:round/>
+                      <a:headEnd type="none" w="med" len="med"/>
+                      <a:tailEnd type="none" w="med" len="med"/>
+                    </a:lnT>
+                    <a:lnB w="6350" cap="flat" cmpd="sng" algn="ctr">
+                      <a:solidFill>
+                        <a:srgbClr val="CCCCCC"/>
+                      </a:solidFill>
+                      <a:prstDash val="solid"/>
+                      <a:round/>
+                      <a:headEnd type="none" w="med" len="med"/>
+                      <a:tailEnd type="none" w="med" len="med"/>
+                    </a:lnB>
+                    <a:solidFill>
+                      <a:srgbClr val="FFFFFF"/>
+                    </a:solidFill>
+                  </a:tcPr>
+                </a:tc>
+                <a:tc>
+                  <a:txBody>
+                    <a:bodyPr/>
+                    <a:lstStyle/>
+                    <a:p>
+                      <a:pPr algn="ctr" indent="0" marL="0">
+                        <a:buNone/>
+                      </a:pPr>
+                      <a:r>
+                        <a:rPr lang="en-US" sz="800" dirty="0">
+                          <a:solidFill>
+                            <a:srgbClr val="000000"/>
+                          </a:solidFill>
+                        </a:rPr>
+                        <a:t>4/19</a:t>
+                      </a:r>
+                      <a:endParaRPr lang="en-US" sz="800" dirty="0"/>
+                    </a:p>
+                  </a:txBody>
+                  <a:tcPr marL="91440" marR="91440" marT="45720" marB="45720">
+                    <a:lnL w="6350" cap="flat" cmpd="sng" algn="ctr">
+                      <a:solidFill>
+                        <a:srgbClr val="CCCCCC"/>
+                      </a:solidFill>
+                      <a:prstDash val="solid"/>
+                      <a:round/>
+                      <a:headEnd type="none" w="med" len="med"/>
+                      <a:tailEnd type="none" w="med" len="med"/>
+                    </a:lnL>
+                    <a:lnR w="6350" cap="flat" cmpd="sng" algn="ctr">
+                      <a:solidFill>
+                        <a:srgbClr val="CCCCCC"/>
+                      </a:solidFill>
+                      <a:prstDash val="solid"/>
+                      <a:round/>
+                      <a:headEnd type="none" w="med" len="med"/>
+                      <a:tailEnd type="none" w="med" len="med"/>
+                    </a:lnR>
+                    <a:lnT w="6350" cap="flat" cmpd="sng" algn="ctr">
+                      <a:solidFill>
+                        <a:srgbClr val="CCCCCC"/>
+                      </a:solidFill>
+                      <a:prstDash val="solid"/>
+                      <a:round/>
+                      <a:headEnd type="none" w="med" len="med"/>
+                      <a:tailEnd type="none" w="med" len="med"/>
+                    </a:lnT>
+                    <a:lnB w="6350" cap="flat" cmpd="sng" algn="ctr">
+                      <a:solidFill>
+                        <a:srgbClr val="CCCCCC"/>
+                      </a:solidFill>
+                      <a:prstDash val="solid"/>
+                      <a:round/>
+                      <a:headEnd type="none" w="med" len="med"/>
+                      <a:tailEnd type="none" w="med" len="med"/>
+                    </a:lnB>
+                    <a:solidFill>
+                      <a:srgbClr val="FFFFFF"/>
+                    </a:solidFill>
+                  </a:tcPr>
+                </a:tc>
+                <a:tc>
+                  <a:txBody>
+                    <a:bodyPr/>
+                    <a:lstStyle/>
+                    <a:p>
+                      <a:pPr algn="ctr" indent="0" marL="0">
+                        <a:buNone/>
+                      </a:pPr>
+                      <a:r>
+                        <a:rPr lang="en-US" sz="800" b="1" dirty="0">
+                          <a:solidFill>
+                            <a:srgbClr val="E74C3C"/>
+                          </a:solidFill>
+                        </a:rPr>
+                        <a:t>CRITICAL</a:t>
+                      </a:r>
+                      <a:endParaRPr lang="en-US" sz="800" dirty="0"/>
+                    </a:p>
+                  </a:txBody>
+                  <a:tcPr marL="91440" marR="91440" marT="45720" marB="45720">
+                    <a:lnL w="6350" cap="flat" cmpd="sng" algn="ctr">
+                      <a:solidFill>
+                        <a:srgbClr val="CCCCCC"/>
+                      </a:solidFill>
+                      <a:prstDash val="solid"/>
+                      <a:round/>
+                      <a:headEnd type="none" w="med" len="med"/>
+                      <a:tailEnd type="none" w="med" len="med"/>
+                    </a:lnL>
+                    <a:lnR w="6350" cap="flat" cmpd="sng" algn="ctr">
+                      <a:solidFill>
+                        <a:srgbClr val="CCCCCC"/>
+                      </a:solidFill>
+                      <a:prstDash val="solid"/>
+                      <a:round/>
+                      <a:headEnd type="none" w="med" len="med"/>
+                      <a:tailEnd type="none" w="med" len="med"/>
+                    </a:lnR>
+                    <a:lnT w="6350" cap="flat" cmpd="sng" algn="ctr">
+                      <a:solidFill>
+                        <a:srgbClr val="CCCCCC"/>
+                      </a:solidFill>
+                      <a:prstDash val="solid"/>
+                      <a:round/>
+                      <a:headEnd type="none" w="med" len="med"/>
+                      <a:tailEnd type="none" w="med" len="med"/>
+                    </a:lnT>
+                    <a:lnB w="6350" cap="flat" cmpd="sng" algn="ctr">
+                      <a:solidFill>
+                        <a:srgbClr val="CCCCCC"/>
+                      </a:solidFill>
+                      <a:prstDash val="solid"/>
+                      <a:round/>
+                      <a:headEnd type="none" w="med" len="med"/>
+                      <a:tailEnd type="none" w="med" len="med"/>
+                    </a:lnB>
+                    <a:solidFill>
+                      <a:srgbClr val="FFFFFF"/>
+                    </a:solidFill>
+                  </a:tcPr>
+                </a:tc>
+              </a:tr>
+              <a:tr h="0">
+                <a:tc>
+                  <a:txBody>
+                    <a:bodyPr/>
+                    <a:lstStyle/>
+                    <a:p>
+                      <a:pPr indent="0" marL="0">
+                        <a:buNone/>
+                      </a:pPr>
+                      <a:r>
+                        <a:rPr lang="en-US" sz="800" b="1" dirty="0">
+                          <a:solidFill>
+                            <a:srgbClr val="000000"/>
+                          </a:solidFill>
+                        </a:rPr>
                         <a:t>排水・詰まり</a:t>
                       </a:r>
                       <a:endParaRPr lang="en-US" sz="800" dirty="0"/>
@@ -26739,7 +27861,7 @@
                       <a:tailEnd type="none" w="med" len="med"/>
                     </a:lnB>
                     <a:solidFill>
-                      <a:srgbClr val="FFFFFF"/>
+                      <a:srgbClr val="F5F7FA"/>
                     </a:solidFill>
                   </a:tcPr>
                 </a:tc>
@@ -26800,6 +27922,252 @@
                       <a:tailEnd type="none" w="med" len="med"/>
                     </a:lnB>
                     <a:solidFill>
+                      <a:srgbClr val="F5F7FA"/>
+                    </a:solidFill>
+                  </a:tcPr>
+                </a:tc>
+                <a:tc>
+                  <a:txBody>
+                    <a:bodyPr/>
+                    <a:lstStyle/>
+                    <a:p>
+                      <a:pPr algn="ctr" indent="0" marL="0">
+                        <a:buNone/>
+                      </a:pPr>
+                      <a:r>
+                        <a:rPr lang="en-US" sz="800" dirty="0">
+                          <a:solidFill>
+                            <a:srgbClr val="000000"/>
+                          </a:solidFill>
+                        </a:rPr>
+                        <a:t>8/19</a:t>
+                      </a:r>
+                      <a:endParaRPr lang="en-US" sz="800" dirty="0"/>
+                    </a:p>
+                  </a:txBody>
+                  <a:tcPr marL="91440" marR="91440" marT="45720" marB="45720">
+                    <a:lnL w="6350" cap="flat" cmpd="sng" algn="ctr">
+                      <a:solidFill>
+                        <a:srgbClr val="CCCCCC"/>
+                      </a:solidFill>
+                      <a:prstDash val="solid"/>
+                      <a:round/>
+                      <a:headEnd type="none" w="med" len="med"/>
+                      <a:tailEnd type="none" w="med" len="med"/>
+                    </a:lnL>
+                    <a:lnR w="6350" cap="flat" cmpd="sng" algn="ctr">
+                      <a:solidFill>
+                        <a:srgbClr val="CCCCCC"/>
+                      </a:solidFill>
+                      <a:prstDash val="solid"/>
+                      <a:round/>
+                      <a:headEnd type="none" w="med" len="med"/>
+                      <a:tailEnd type="none" w="med" len="med"/>
+                    </a:lnR>
+                    <a:lnT w="6350" cap="flat" cmpd="sng" algn="ctr">
+                      <a:solidFill>
+                        <a:srgbClr val="CCCCCC"/>
+                      </a:solidFill>
+                      <a:prstDash val="solid"/>
+                      <a:round/>
+                      <a:headEnd type="none" w="med" len="med"/>
+                      <a:tailEnd type="none" w="med" len="med"/>
+                    </a:lnT>
+                    <a:lnB w="6350" cap="flat" cmpd="sng" algn="ctr">
+                      <a:solidFill>
+                        <a:srgbClr val="CCCCCC"/>
+                      </a:solidFill>
+                      <a:prstDash val="solid"/>
+                      <a:round/>
+                      <a:headEnd type="none" w="med" len="med"/>
+                      <a:tailEnd type="none" w="med" len="med"/>
+                    </a:lnB>
+                    <a:solidFill>
+                      <a:srgbClr val="F5F7FA"/>
+                    </a:solidFill>
+                  </a:tcPr>
+                </a:tc>
+                <a:tc>
+                  <a:txBody>
+                    <a:bodyPr/>
+                    <a:lstStyle/>
+                    <a:p>
+                      <a:pPr algn="ctr" indent="0" marL="0">
+                        <a:buNone/>
+                      </a:pPr>
+                      <a:r>
+                        <a:rPr lang="en-US" sz="800" b="1" dirty="0">
+                          <a:solidFill>
+                            <a:srgbClr val="FF9800"/>
+                          </a:solidFill>
+                        </a:rPr>
+                        <a:t>HIGH</a:t>
+                      </a:r>
+                      <a:endParaRPr lang="en-US" sz="800" dirty="0"/>
+                    </a:p>
+                  </a:txBody>
+                  <a:tcPr marL="91440" marR="91440" marT="45720" marB="45720">
+                    <a:lnL w="6350" cap="flat" cmpd="sng" algn="ctr">
+                      <a:solidFill>
+                        <a:srgbClr val="CCCCCC"/>
+                      </a:solidFill>
+                      <a:prstDash val="solid"/>
+                      <a:round/>
+                      <a:headEnd type="none" w="med" len="med"/>
+                      <a:tailEnd type="none" w="med" len="med"/>
+                    </a:lnL>
+                    <a:lnR w="6350" cap="flat" cmpd="sng" algn="ctr">
+                      <a:solidFill>
+                        <a:srgbClr val="CCCCCC"/>
+                      </a:solidFill>
+                      <a:prstDash val="solid"/>
+                      <a:round/>
+                      <a:headEnd type="none" w="med" len="med"/>
+                      <a:tailEnd type="none" w="med" len="med"/>
+                    </a:lnR>
+                    <a:lnT w="6350" cap="flat" cmpd="sng" algn="ctr">
+                      <a:solidFill>
+                        <a:srgbClr val="CCCCCC"/>
+                      </a:solidFill>
+                      <a:prstDash val="solid"/>
+                      <a:round/>
+                      <a:headEnd type="none" w="med" len="med"/>
+                      <a:tailEnd type="none" w="med" len="med"/>
+                    </a:lnT>
+                    <a:lnB w="6350" cap="flat" cmpd="sng" algn="ctr">
+                      <a:solidFill>
+                        <a:srgbClr val="CCCCCC"/>
+                      </a:solidFill>
+                      <a:prstDash val="solid"/>
+                      <a:round/>
+                      <a:headEnd type="none" w="med" len="med"/>
+                      <a:tailEnd type="none" w="med" len="med"/>
+                    </a:lnB>
+                    <a:solidFill>
+                      <a:srgbClr val="F5F7FA"/>
+                    </a:solidFill>
+                  </a:tcPr>
+                </a:tc>
+              </a:tr>
+              <a:tr h="0">
+                <a:tc>
+                  <a:txBody>
+                    <a:bodyPr/>
+                    <a:lstStyle/>
+                    <a:p>
+                      <a:pPr indent="0" marL="0">
+                        <a:buNone/>
+                      </a:pPr>
+                      <a:r>
+                        <a:rPr lang="en-US" sz="800" b="1" dirty="0">
+                          <a:solidFill>
+                            <a:srgbClr val="000000"/>
+                          </a:solidFill>
+                        </a:rPr>
+                        <a:t>タバコ関連</a:t>
+                      </a:r>
+                      <a:endParaRPr lang="en-US" sz="800" dirty="0"/>
+                    </a:p>
+                  </a:txBody>
+                  <a:tcPr marL="91440" marR="91440" marT="45720" marB="45720">
+                    <a:lnL w="6350" cap="flat" cmpd="sng" algn="ctr">
+                      <a:solidFill>
+                        <a:srgbClr val="CCCCCC"/>
+                      </a:solidFill>
+                      <a:prstDash val="solid"/>
+                      <a:round/>
+                      <a:headEnd type="none" w="med" len="med"/>
+                      <a:tailEnd type="none" w="med" len="med"/>
+                    </a:lnL>
+                    <a:lnR w="6350" cap="flat" cmpd="sng" algn="ctr">
+                      <a:solidFill>
+                        <a:srgbClr val="CCCCCC"/>
+                      </a:solidFill>
+                      <a:prstDash val="solid"/>
+                      <a:round/>
+                      <a:headEnd type="none" w="med" len="med"/>
+                      <a:tailEnd type="none" w="med" len="med"/>
+                    </a:lnR>
+                    <a:lnT w="6350" cap="flat" cmpd="sng" algn="ctr">
+                      <a:solidFill>
+                        <a:srgbClr val="CCCCCC"/>
+                      </a:solidFill>
+                      <a:prstDash val="solid"/>
+                      <a:round/>
+                      <a:headEnd type="none" w="med" len="med"/>
+                      <a:tailEnd type="none" w="med" len="med"/>
+                    </a:lnT>
+                    <a:lnB w="6350" cap="flat" cmpd="sng" algn="ctr">
+                      <a:solidFill>
+                        <a:srgbClr val="CCCCCC"/>
+                      </a:solidFill>
+                      <a:prstDash val="solid"/>
+                      <a:round/>
+                      <a:headEnd type="none" w="med" len="med"/>
+                      <a:tailEnd type="none" w="med" len="med"/>
+                    </a:lnB>
+                    <a:solidFill>
+                      <a:srgbClr val="FFFFFF"/>
+                    </a:solidFill>
+                  </a:tcPr>
+                </a:tc>
+                <a:tc>
+                  <a:txBody>
+                    <a:bodyPr/>
+                    <a:lstStyle/>
+                    <a:p>
+                      <a:pPr algn="ctr" indent="0" marL="0">
+                        <a:buNone/>
+                      </a:pPr>
+                      <a:r>
+                        <a:rPr lang="en-US" sz="800" b="1" dirty="0">
+                          <a:solidFill>
+                            <a:srgbClr val="000000"/>
+                          </a:solidFill>
+                        </a:rPr>
+                        <a:t>9</a:t>
+                      </a:r>
+                      <a:endParaRPr lang="en-US" sz="800" dirty="0"/>
+                    </a:p>
+                  </a:txBody>
+                  <a:tcPr marL="91440" marR="91440" marT="45720" marB="45720">
+                    <a:lnL w="6350" cap="flat" cmpd="sng" algn="ctr">
+                      <a:solidFill>
+                        <a:srgbClr val="CCCCCC"/>
+                      </a:solidFill>
+                      <a:prstDash val="solid"/>
+                      <a:round/>
+                      <a:headEnd type="none" w="med" len="med"/>
+                      <a:tailEnd type="none" w="med" len="med"/>
+                    </a:lnL>
+                    <a:lnR w="6350" cap="flat" cmpd="sng" algn="ctr">
+                      <a:solidFill>
+                        <a:srgbClr val="CCCCCC"/>
+                      </a:solidFill>
+                      <a:prstDash val="solid"/>
+                      <a:round/>
+                      <a:headEnd type="none" w="med" len="med"/>
+                      <a:tailEnd type="none" w="med" len="med"/>
+                    </a:lnR>
+                    <a:lnT w="6350" cap="flat" cmpd="sng" algn="ctr">
+                      <a:solidFill>
+                        <a:srgbClr val="CCCCCC"/>
+                      </a:solidFill>
+                      <a:prstDash val="solid"/>
+                      <a:round/>
+                      <a:headEnd type="none" w="med" len="med"/>
+                      <a:tailEnd type="none" w="med" len="med"/>
+                    </a:lnT>
+                    <a:lnB w="6350" cap="flat" cmpd="sng" algn="ctr">
+                      <a:solidFill>
+                        <a:srgbClr val="CCCCCC"/>
+                      </a:solidFill>
+                      <a:prstDash val="solid"/>
+                      <a:round/>
+                      <a:headEnd type="none" w="med" len="med"/>
+                      <a:tailEnd type="none" w="med" len="med"/>
+                    </a:lnB>
+                    <a:solidFill>
                       <a:srgbClr val="FFFFFF"/>
                     </a:solidFill>
                   </a:tcPr>
@@ -26818,7 +28186,7 @@
                             <a:srgbClr val="000000"/>
                           </a:solidFill>
                         </a:rPr>
-                        <a:t>8/19</a:t>
+                        <a:t>9/19</a:t>
                       </a:r>
                       <a:endParaRPr lang="en-US" sz="800" dirty="0"/>
                     </a:p>
@@ -26942,7 +28310,7 @@
                             <a:srgbClr val="000000"/>
                           </a:solidFill>
                         </a:rPr>
-                        <a:t>シミ・汚れ跡</a:t>
+                        <a:t>カビ・モールド</a:t>
                       </a:r>
                       <a:endParaRPr lang="en-US" sz="800" dirty="0"/>
                     </a:p>
@@ -27003,7 +28371,7 @@
                             <a:srgbClr val="000000"/>
                           </a:solidFill>
                         </a:rPr>
-                        <a:t>9</a:t>
+                        <a:t>8</a:t>
                       </a:r>
                       <a:endParaRPr lang="en-US" sz="800" dirty="0"/>
                     </a:p>
@@ -27064,7 +28432,7 @@
                             <a:srgbClr val="000000"/>
                           </a:solidFill>
                         </a:rPr>
-                        <a:t>4/19</a:t>
+                        <a:t>5/19</a:t>
                       </a:r>
                       <a:endParaRPr lang="en-US" sz="800" dirty="0"/>
                     </a:p>
@@ -27188,499 +28556,7 @@
                             <a:srgbClr val="000000"/>
                           </a:solidFill>
                         </a:rPr>
-                        <a:t>カビ・モールド</a:t>
-                      </a:r>
-                      <a:endParaRPr lang="en-US" sz="800" dirty="0"/>
-                    </a:p>
-                  </a:txBody>
-                  <a:tcPr marL="91440" marR="91440" marT="45720" marB="45720">
-                    <a:lnL w="6350" cap="flat" cmpd="sng" algn="ctr">
-                      <a:solidFill>
-                        <a:srgbClr val="CCCCCC"/>
-                      </a:solidFill>
-                      <a:prstDash val="solid"/>
-                      <a:round/>
-                      <a:headEnd type="none" w="med" len="med"/>
-                      <a:tailEnd type="none" w="med" len="med"/>
-                    </a:lnL>
-                    <a:lnR w="6350" cap="flat" cmpd="sng" algn="ctr">
-                      <a:solidFill>
-                        <a:srgbClr val="CCCCCC"/>
-                      </a:solidFill>
-                      <a:prstDash val="solid"/>
-                      <a:round/>
-                      <a:headEnd type="none" w="med" len="med"/>
-                      <a:tailEnd type="none" w="med" len="med"/>
-                    </a:lnR>
-                    <a:lnT w="6350" cap="flat" cmpd="sng" algn="ctr">
-                      <a:solidFill>
-                        <a:srgbClr val="CCCCCC"/>
-                      </a:solidFill>
-                      <a:prstDash val="solid"/>
-                      <a:round/>
-                      <a:headEnd type="none" w="med" len="med"/>
-                      <a:tailEnd type="none" w="med" len="med"/>
-                    </a:lnT>
-                    <a:lnB w="6350" cap="flat" cmpd="sng" algn="ctr">
-                      <a:solidFill>
-                        <a:srgbClr val="CCCCCC"/>
-                      </a:solidFill>
-                      <a:prstDash val="solid"/>
-                      <a:round/>
-                      <a:headEnd type="none" w="med" len="med"/>
-                      <a:tailEnd type="none" w="med" len="med"/>
-                    </a:lnB>
-                    <a:solidFill>
-                      <a:srgbClr val="FFFFFF"/>
-                    </a:solidFill>
-                  </a:tcPr>
-                </a:tc>
-                <a:tc>
-                  <a:txBody>
-                    <a:bodyPr/>
-                    <a:lstStyle/>
-                    <a:p>
-                      <a:pPr algn="ctr" indent="0" marL="0">
-                        <a:buNone/>
-                      </a:pPr>
-                      <a:r>
-                        <a:rPr lang="en-US" sz="800" b="1" dirty="0">
-                          <a:solidFill>
-                            <a:srgbClr val="000000"/>
-                          </a:solidFill>
-                        </a:rPr>
-                        <a:t>8</a:t>
-                      </a:r>
-                      <a:endParaRPr lang="en-US" sz="800" dirty="0"/>
-                    </a:p>
-                  </a:txBody>
-                  <a:tcPr marL="91440" marR="91440" marT="45720" marB="45720">
-                    <a:lnL w="6350" cap="flat" cmpd="sng" algn="ctr">
-                      <a:solidFill>
-                        <a:srgbClr val="CCCCCC"/>
-                      </a:solidFill>
-                      <a:prstDash val="solid"/>
-                      <a:round/>
-                      <a:headEnd type="none" w="med" len="med"/>
-                      <a:tailEnd type="none" w="med" len="med"/>
-                    </a:lnL>
-                    <a:lnR w="6350" cap="flat" cmpd="sng" algn="ctr">
-                      <a:solidFill>
-                        <a:srgbClr val="CCCCCC"/>
-                      </a:solidFill>
-                      <a:prstDash val="solid"/>
-                      <a:round/>
-                      <a:headEnd type="none" w="med" len="med"/>
-                      <a:tailEnd type="none" w="med" len="med"/>
-                    </a:lnR>
-                    <a:lnT w="6350" cap="flat" cmpd="sng" algn="ctr">
-                      <a:solidFill>
-                        <a:srgbClr val="CCCCCC"/>
-                      </a:solidFill>
-                      <a:prstDash val="solid"/>
-                      <a:round/>
-                      <a:headEnd type="none" w="med" len="med"/>
-                      <a:tailEnd type="none" w="med" len="med"/>
-                    </a:lnT>
-                    <a:lnB w="6350" cap="flat" cmpd="sng" algn="ctr">
-                      <a:solidFill>
-                        <a:srgbClr val="CCCCCC"/>
-                      </a:solidFill>
-                      <a:prstDash val="solid"/>
-                      <a:round/>
-                      <a:headEnd type="none" w="med" len="med"/>
-                      <a:tailEnd type="none" w="med" len="med"/>
-                    </a:lnB>
-                    <a:solidFill>
-                      <a:srgbClr val="FFFFFF"/>
-                    </a:solidFill>
-                  </a:tcPr>
-                </a:tc>
-                <a:tc>
-                  <a:txBody>
-                    <a:bodyPr/>
-                    <a:lstStyle/>
-                    <a:p>
-                      <a:pPr algn="ctr" indent="0" marL="0">
-                        <a:buNone/>
-                      </a:pPr>
-                      <a:r>
-                        <a:rPr lang="en-US" sz="800" dirty="0">
-                          <a:solidFill>
-                            <a:srgbClr val="000000"/>
-                          </a:solidFill>
-                        </a:rPr>
-                        <a:t>5/19</a:t>
-                      </a:r>
-                      <a:endParaRPr lang="en-US" sz="800" dirty="0"/>
-                    </a:p>
-                  </a:txBody>
-                  <a:tcPr marL="91440" marR="91440" marT="45720" marB="45720">
-                    <a:lnL w="6350" cap="flat" cmpd="sng" algn="ctr">
-                      <a:solidFill>
-                        <a:srgbClr val="CCCCCC"/>
-                      </a:solidFill>
-                      <a:prstDash val="solid"/>
-                      <a:round/>
-                      <a:headEnd type="none" w="med" len="med"/>
-                      <a:tailEnd type="none" w="med" len="med"/>
-                    </a:lnL>
-                    <a:lnR w="6350" cap="flat" cmpd="sng" algn="ctr">
-                      <a:solidFill>
-                        <a:srgbClr val="CCCCCC"/>
-                      </a:solidFill>
-                      <a:prstDash val="solid"/>
-                      <a:round/>
-                      <a:headEnd type="none" w="med" len="med"/>
-                      <a:tailEnd type="none" w="med" len="med"/>
-                    </a:lnR>
-                    <a:lnT w="6350" cap="flat" cmpd="sng" algn="ctr">
-                      <a:solidFill>
-                        <a:srgbClr val="CCCCCC"/>
-                      </a:solidFill>
-                      <a:prstDash val="solid"/>
-                      <a:round/>
-                      <a:headEnd type="none" w="med" len="med"/>
-                      <a:tailEnd type="none" w="med" len="med"/>
-                    </a:lnT>
-                    <a:lnB w="6350" cap="flat" cmpd="sng" algn="ctr">
-                      <a:solidFill>
-                        <a:srgbClr val="CCCCCC"/>
-                      </a:solidFill>
-                      <a:prstDash val="solid"/>
-                      <a:round/>
-                      <a:headEnd type="none" w="med" len="med"/>
-                      <a:tailEnd type="none" w="med" len="med"/>
-                    </a:lnB>
-                    <a:solidFill>
-                      <a:srgbClr val="FFFFFF"/>
-                    </a:solidFill>
-                  </a:tcPr>
-                </a:tc>
-                <a:tc>
-                  <a:txBody>
-                    <a:bodyPr/>
-                    <a:lstStyle/>
-                    <a:p>
-                      <a:pPr algn="ctr" indent="0" marL="0">
-                        <a:buNone/>
-                      </a:pPr>
-                      <a:r>
-                        <a:rPr lang="en-US" sz="800" b="1" dirty="0">
-                          <a:solidFill>
-                            <a:srgbClr val="FF9800"/>
-                          </a:solidFill>
-                        </a:rPr>
-                        <a:t>HIGH</a:t>
-                      </a:r>
-                      <a:endParaRPr lang="en-US" sz="800" dirty="0"/>
-                    </a:p>
-                  </a:txBody>
-                  <a:tcPr marL="91440" marR="91440" marT="45720" marB="45720">
-                    <a:lnL w="6350" cap="flat" cmpd="sng" algn="ctr">
-                      <a:solidFill>
-                        <a:srgbClr val="CCCCCC"/>
-                      </a:solidFill>
-                      <a:prstDash val="solid"/>
-                      <a:round/>
-                      <a:headEnd type="none" w="med" len="med"/>
-                      <a:tailEnd type="none" w="med" len="med"/>
-                    </a:lnL>
-                    <a:lnR w="6350" cap="flat" cmpd="sng" algn="ctr">
-                      <a:solidFill>
-                        <a:srgbClr val="CCCCCC"/>
-                      </a:solidFill>
-                      <a:prstDash val="solid"/>
-                      <a:round/>
-                      <a:headEnd type="none" w="med" len="med"/>
-                      <a:tailEnd type="none" w="med" len="med"/>
-                    </a:lnR>
-                    <a:lnT w="6350" cap="flat" cmpd="sng" algn="ctr">
-                      <a:solidFill>
-                        <a:srgbClr val="CCCCCC"/>
-                      </a:solidFill>
-                      <a:prstDash val="solid"/>
-                      <a:round/>
-                      <a:headEnd type="none" w="med" len="med"/>
-                      <a:tailEnd type="none" w="med" len="med"/>
-                    </a:lnT>
-                    <a:lnB w="6350" cap="flat" cmpd="sng" algn="ctr">
-                      <a:solidFill>
-                        <a:srgbClr val="CCCCCC"/>
-                      </a:solidFill>
-                      <a:prstDash val="solid"/>
-                      <a:round/>
-                      <a:headEnd type="none" w="med" len="med"/>
-                      <a:tailEnd type="none" w="med" len="med"/>
-                    </a:lnB>
-                    <a:solidFill>
-                      <a:srgbClr val="FFFFFF"/>
-                    </a:solidFill>
-                  </a:tcPr>
-                </a:tc>
-              </a:tr>
-              <a:tr h="0">
-                <a:tc>
-                  <a:txBody>
-                    <a:bodyPr/>
-                    <a:lstStyle/>
-                    <a:p>
-                      <a:pPr indent="0" marL="0">
-                        <a:buNone/>
-                      </a:pPr>
-                      <a:r>
-                        <a:rPr lang="en-US" sz="800" b="1" dirty="0">
-                          <a:solidFill>
-                            <a:srgbClr val="000000"/>
-                          </a:solidFill>
-                        </a:rPr>
                         <a:t>毛髪・髪の毛</a:t>
-                      </a:r>
-                      <a:endParaRPr lang="en-US" sz="800" dirty="0"/>
-                    </a:p>
-                  </a:txBody>
-                  <a:tcPr marL="91440" marR="91440" marT="45720" marB="45720">
-                    <a:lnL w="6350" cap="flat" cmpd="sng" algn="ctr">
-                      <a:solidFill>
-                        <a:srgbClr val="CCCCCC"/>
-                      </a:solidFill>
-                      <a:prstDash val="solid"/>
-                      <a:round/>
-                      <a:headEnd type="none" w="med" len="med"/>
-                      <a:tailEnd type="none" w="med" len="med"/>
-                    </a:lnL>
-                    <a:lnR w="6350" cap="flat" cmpd="sng" algn="ctr">
-                      <a:solidFill>
-                        <a:srgbClr val="CCCCCC"/>
-                      </a:solidFill>
-                      <a:prstDash val="solid"/>
-                      <a:round/>
-                      <a:headEnd type="none" w="med" len="med"/>
-                      <a:tailEnd type="none" w="med" len="med"/>
-                    </a:lnR>
-                    <a:lnT w="6350" cap="flat" cmpd="sng" algn="ctr">
-                      <a:solidFill>
-                        <a:srgbClr val="CCCCCC"/>
-                      </a:solidFill>
-                      <a:prstDash val="solid"/>
-                      <a:round/>
-                      <a:headEnd type="none" w="med" len="med"/>
-                      <a:tailEnd type="none" w="med" len="med"/>
-                    </a:lnT>
-                    <a:lnB w="6350" cap="flat" cmpd="sng" algn="ctr">
-                      <a:solidFill>
-                        <a:srgbClr val="CCCCCC"/>
-                      </a:solidFill>
-                      <a:prstDash val="solid"/>
-                      <a:round/>
-                      <a:headEnd type="none" w="med" len="med"/>
-                      <a:tailEnd type="none" w="med" len="med"/>
-                    </a:lnB>
-                    <a:solidFill>
-                      <a:srgbClr val="F5F7FA"/>
-                    </a:solidFill>
-                  </a:tcPr>
-                </a:tc>
-                <a:tc>
-                  <a:txBody>
-                    <a:bodyPr/>
-                    <a:lstStyle/>
-                    <a:p>
-                      <a:pPr algn="ctr" indent="0" marL="0">
-                        <a:buNone/>
-                      </a:pPr>
-                      <a:r>
-                        <a:rPr lang="en-US" sz="800" b="1" dirty="0">
-                          <a:solidFill>
-                            <a:srgbClr val="000000"/>
-                          </a:solidFill>
-                        </a:rPr>
-                        <a:t>8</a:t>
-                      </a:r>
-                      <a:endParaRPr lang="en-US" sz="800" dirty="0"/>
-                    </a:p>
-                  </a:txBody>
-                  <a:tcPr marL="91440" marR="91440" marT="45720" marB="45720">
-                    <a:lnL w="6350" cap="flat" cmpd="sng" algn="ctr">
-                      <a:solidFill>
-                        <a:srgbClr val="CCCCCC"/>
-                      </a:solidFill>
-                      <a:prstDash val="solid"/>
-                      <a:round/>
-                      <a:headEnd type="none" w="med" len="med"/>
-                      <a:tailEnd type="none" w="med" len="med"/>
-                    </a:lnL>
-                    <a:lnR w="6350" cap="flat" cmpd="sng" algn="ctr">
-                      <a:solidFill>
-                        <a:srgbClr val="CCCCCC"/>
-                      </a:solidFill>
-                      <a:prstDash val="solid"/>
-                      <a:round/>
-                      <a:headEnd type="none" w="med" len="med"/>
-                      <a:tailEnd type="none" w="med" len="med"/>
-                    </a:lnR>
-                    <a:lnT w="6350" cap="flat" cmpd="sng" algn="ctr">
-                      <a:solidFill>
-                        <a:srgbClr val="CCCCCC"/>
-                      </a:solidFill>
-                      <a:prstDash val="solid"/>
-                      <a:round/>
-                      <a:headEnd type="none" w="med" len="med"/>
-                      <a:tailEnd type="none" w="med" len="med"/>
-                    </a:lnT>
-                    <a:lnB w="6350" cap="flat" cmpd="sng" algn="ctr">
-                      <a:solidFill>
-                        <a:srgbClr val="CCCCCC"/>
-                      </a:solidFill>
-                      <a:prstDash val="solid"/>
-                      <a:round/>
-                      <a:headEnd type="none" w="med" len="med"/>
-                      <a:tailEnd type="none" w="med" len="med"/>
-                    </a:lnB>
-                    <a:solidFill>
-                      <a:srgbClr val="F5F7FA"/>
-                    </a:solidFill>
-                  </a:tcPr>
-                </a:tc>
-                <a:tc>
-                  <a:txBody>
-                    <a:bodyPr/>
-                    <a:lstStyle/>
-                    <a:p>
-                      <a:pPr algn="ctr" indent="0" marL="0">
-                        <a:buNone/>
-                      </a:pPr>
-                      <a:r>
-                        <a:rPr lang="en-US" sz="800" dirty="0">
-                          <a:solidFill>
-                            <a:srgbClr val="000000"/>
-                          </a:solidFill>
-                        </a:rPr>
-                        <a:t>8/19</a:t>
-                      </a:r>
-                      <a:endParaRPr lang="en-US" sz="800" dirty="0"/>
-                    </a:p>
-                  </a:txBody>
-                  <a:tcPr marL="91440" marR="91440" marT="45720" marB="45720">
-                    <a:lnL w="6350" cap="flat" cmpd="sng" algn="ctr">
-                      <a:solidFill>
-                        <a:srgbClr val="CCCCCC"/>
-                      </a:solidFill>
-                      <a:prstDash val="solid"/>
-                      <a:round/>
-                      <a:headEnd type="none" w="med" len="med"/>
-                      <a:tailEnd type="none" w="med" len="med"/>
-                    </a:lnL>
-                    <a:lnR w="6350" cap="flat" cmpd="sng" algn="ctr">
-                      <a:solidFill>
-                        <a:srgbClr val="CCCCCC"/>
-                      </a:solidFill>
-                      <a:prstDash val="solid"/>
-                      <a:round/>
-                      <a:headEnd type="none" w="med" len="med"/>
-                      <a:tailEnd type="none" w="med" len="med"/>
-                    </a:lnR>
-                    <a:lnT w="6350" cap="flat" cmpd="sng" algn="ctr">
-                      <a:solidFill>
-                        <a:srgbClr val="CCCCCC"/>
-                      </a:solidFill>
-                      <a:prstDash val="solid"/>
-                      <a:round/>
-                      <a:headEnd type="none" w="med" len="med"/>
-                      <a:tailEnd type="none" w="med" len="med"/>
-                    </a:lnT>
-                    <a:lnB w="6350" cap="flat" cmpd="sng" algn="ctr">
-                      <a:solidFill>
-                        <a:srgbClr val="CCCCCC"/>
-                      </a:solidFill>
-                      <a:prstDash val="solid"/>
-                      <a:round/>
-                      <a:headEnd type="none" w="med" len="med"/>
-                      <a:tailEnd type="none" w="med" len="med"/>
-                    </a:lnB>
-                    <a:solidFill>
-                      <a:srgbClr val="F5F7FA"/>
-                    </a:solidFill>
-                  </a:tcPr>
-                </a:tc>
-                <a:tc>
-                  <a:txBody>
-                    <a:bodyPr/>
-                    <a:lstStyle/>
-                    <a:p>
-                      <a:pPr algn="ctr" indent="0" marL="0">
-                        <a:buNone/>
-                      </a:pPr>
-                      <a:r>
-                        <a:rPr lang="en-US" sz="800" b="1" dirty="0">
-                          <a:solidFill>
-                            <a:srgbClr val="FF9800"/>
-                          </a:solidFill>
-                        </a:rPr>
-                        <a:t>HIGH</a:t>
-                      </a:r>
-                      <a:endParaRPr lang="en-US" sz="800" dirty="0"/>
-                    </a:p>
-                  </a:txBody>
-                  <a:tcPr marL="91440" marR="91440" marT="45720" marB="45720">
-                    <a:lnL w="6350" cap="flat" cmpd="sng" algn="ctr">
-                      <a:solidFill>
-                        <a:srgbClr val="CCCCCC"/>
-                      </a:solidFill>
-                      <a:prstDash val="solid"/>
-                      <a:round/>
-                      <a:headEnd type="none" w="med" len="med"/>
-                      <a:tailEnd type="none" w="med" len="med"/>
-                    </a:lnL>
-                    <a:lnR w="6350" cap="flat" cmpd="sng" algn="ctr">
-                      <a:solidFill>
-                        <a:srgbClr val="CCCCCC"/>
-                      </a:solidFill>
-                      <a:prstDash val="solid"/>
-                      <a:round/>
-                      <a:headEnd type="none" w="med" len="med"/>
-                      <a:tailEnd type="none" w="med" len="med"/>
-                    </a:lnR>
-                    <a:lnT w="6350" cap="flat" cmpd="sng" algn="ctr">
-                      <a:solidFill>
-                        <a:srgbClr val="CCCCCC"/>
-                      </a:solidFill>
-                      <a:prstDash val="solid"/>
-                      <a:round/>
-                      <a:headEnd type="none" w="med" len="med"/>
-                      <a:tailEnd type="none" w="med" len="med"/>
-                    </a:lnT>
-                    <a:lnB w="6350" cap="flat" cmpd="sng" algn="ctr">
-                      <a:solidFill>
-                        <a:srgbClr val="CCCCCC"/>
-                      </a:solidFill>
-                      <a:prstDash val="solid"/>
-                      <a:round/>
-                      <a:headEnd type="none" w="med" len="med"/>
-                      <a:tailEnd type="none" w="med" len="med"/>
-                    </a:lnB>
-                    <a:solidFill>
-                      <a:srgbClr val="F5F7FA"/>
-                    </a:solidFill>
-                  </a:tcPr>
-                </a:tc>
-              </a:tr>
-              <a:tr h="0">
-                <a:tc>
-                  <a:txBody>
-                    <a:bodyPr/>
-                    <a:lstStyle/>
-                    <a:p>
-                      <a:pPr indent="0" marL="0">
-                        <a:buNone/>
-                      </a:pPr>
-                      <a:r>
-                        <a:rPr lang="en-US" sz="800" b="1" dirty="0">
-                          <a:solidFill>
-                            <a:srgbClr val="000000"/>
-                          </a:solidFill>
-                        </a:rPr>
-                        <a:t>タバコ関連</a:t>
                       </a:r>
                       <a:endParaRPr lang="en-US" sz="800" dirty="0"/>
                     </a:p>
@@ -29411,7 +30287,7 @@
                             <a:srgbClr val="FFFFFF"/>
                           </a:solidFill>
                         </a:rPr>
-                        <a:t>排水・詰ま</a:t>
+                        <a:t>シミ・汚れ</a:t>
                       </a:r>
                       <a:endParaRPr lang="en-US" sz="600" dirty="0"/>
                     </a:p>
@@ -29472,7 +30348,68 @@
                             <a:srgbClr val="FFFFFF"/>
                           </a:solidFill>
                         </a:rPr>
-                        <a:t>シミ・汚れ</a:t>
+                        <a:t>排水・詰ま</a:t>
+                      </a:r>
+                      <a:endParaRPr lang="en-US" sz="600" dirty="0"/>
+                    </a:p>
+                  </a:txBody>
+                  <a:tcPr marL="91440" marR="91440" marT="45720" marB="45720">
+                    <a:lnL w="6350" cap="flat" cmpd="sng" algn="ctr">
+                      <a:solidFill>
+                        <a:srgbClr val="CCCCCC"/>
+                      </a:solidFill>
+                      <a:prstDash val="solid"/>
+                      <a:round/>
+                      <a:headEnd type="none" w="med" len="med"/>
+                      <a:tailEnd type="none" w="med" len="med"/>
+                    </a:lnL>
+                    <a:lnR w="6350" cap="flat" cmpd="sng" algn="ctr">
+                      <a:solidFill>
+                        <a:srgbClr val="CCCCCC"/>
+                      </a:solidFill>
+                      <a:prstDash val="solid"/>
+                      <a:round/>
+                      <a:headEnd type="none" w="med" len="med"/>
+                      <a:tailEnd type="none" w="med" len="med"/>
+                    </a:lnR>
+                    <a:lnT w="6350" cap="flat" cmpd="sng" algn="ctr">
+                      <a:solidFill>
+                        <a:srgbClr val="CCCCCC"/>
+                      </a:solidFill>
+                      <a:prstDash val="solid"/>
+                      <a:round/>
+                      <a:headEnd type="none" w="med" len="med"/>
+                      <a:tailEnd type="none" w="med" len="med"/>
+                    </a:lnT>
+                    <a:lnB w="6350" cap="flat" cmpd="sng" algn="ctr">
+                      <a:solidFill>
+                        <a:srgbClr val="CCCCCC"/>
+                      </a:solidFill>
+                      <a:prstDash val="solid"/>
+                      <a:round/>
+                      <a:headEnd type="none" w="med" len="med"/>
+                      <a:tailEnd type="none" w="med" len="med"/>
+                    </a:lnB>
+                    <a:solidFill>
+                      <a:srgbClr val="1B3A5C"/>
+                    </a:solidFill>
+                  </a:tcPr>
+                </a:tc>
+                <a:tc>
+                  <a:txBody>
+                    <a:bodyPr/>
+                    <a:lstStyle/>
+                    <a:p>
+                      <a:pPr algn="ctr" indent="0" marL="0">
+                        <a:buNone/>
+                      </a:pPr>
+                      <a:r>
+                        <a:rPr lang="en-US" sz="600" b="1" dirty="0">
+                          <a:solidFill>
+                            <a:srgbClr val="FFFFFF"/>
+                          </a:solidFill>
+                        </a:rPr>
+                        <a:t>タバコ関連</a:t>
                       </a:r>
                       <a:endParaRPr lang="en-US" sz="600" dirty="0"/>
                     </a:p>
@@ -29534,67 +30471,6 @@
                           </a:solidFill>
                         </a:rPr>
                         <a:t>カビ・モー</a:t>
-                      </a:r>
-                      <a:endParaRPr lang="en-US" sz="600" dirty="0"/>
-                    </a:p>
-                  </a:txBody>
-                  <a:tcPr marL="91440" marR="91440" marT="45720" marB="45720">
-                    <a:lnL w="6350" cap="flat" cmpd="sng" algn="ctr">
-                      <a:solidFill>
-                        <a:srgbClr val="CCCCCC"/>
-                      </a:solidFill>
-                      <a:prstDash val="solid"/>
-                      <a:round/>
-                      <a:headEnd type="none" w="med" len="med"/>
-                      <a:tailEnd type="none" w="med" len="med"/>
-                    </a:lnL>
-                    <a:lnR w="6350" cap="flat" cmpd="sng" algn="ctr">
-                      <a:solidFill>
-                        <a:srgbClr val="CCCCCC"/>
-                      </a:solidFill>
-                      <a:prstDash val="solid"/>
-                      <a:round/>
-                      <a:headEnd type="none" w="med" len="med"/>
-                      <a:tailEnd type="none" w="med" len="med"/>
-                    </a:lnR>
-                    <a:lnT w="6350" cap="flat" cmpd="sng" algn="ctr">
-                      <a:solidFill>
-                        <a:srgbClr val="CCCCCC"/>
-                      </a:solidFill>
-                      <a:prstDash val="solid"/>
-                      <a:round/>
-                      <a:headEnd type="none" w="med" len="med"/>
-                      <a:tailEnd type="none" w="med" len="med"/>
-                    </a:lnT>
-                    <a:lnB w="6350" cap="flat" cmpd="sng" algn="ctr">
-                      <a:solidFill>
-                        <a:srgbClr val="CCCCCC"/>
-                      </a:solidFill>
-                      <a:prstDash val="solid"/>
-                      <a:round/>
-                      <a:headEnd type="none" w="med" len="med"/>
-                      <a:tailEnd type="none" w="med" len="med"/>
-                    </a:lnB>
-                    <a:solidFill>
-                      <a:srgbClr val="1B3A5C"/>
-                    </a:solidFill>
-                  </a:tcPr>
-                </a:tc>
-                <a:tc>
-                  <a:txBody>
-                    <a:bodyPr/>
-                    <a:lstStyle/>
-                    <a:p>
-                      <a:pPr algn="ctr" indent="0" marL="0">
-                        <a:buNone/>
-                      </a:pPr>
-                      <a:r>
-                        <a:rPr lang="en-US" sz="600" b="1" dirty="0">
-                          <a:solidFill>
-                            <a:srgbClr val="FFFFFF"/>
-                          </a:solidFill>
-                        </a:rPr>
-                        <a:t>毛髪・髪の</a:t>
                       </a:r>
                       <a:endParaRPr lang="en-US" sz="600" dirty="0"/>
                     </a:p>
@@ -29895,6 +30771,67 @@
                             <a:srgbClr val="333333"/>
                           </a:solidFill>
                         </a:rPr>
+                        <a:t>1</a:t>
+                      </a:r>
+                      <a:endParaRPr lang="en-US" sz="700" dirty="0"/>
+                    </a:p>
+                  </a:txBody>
+                  <a:tcPr marL="91440" marR="91440" marT="45720" marB="45720">
+                    <a:lnL w="6350" cap="flat" cmpd="sng" algn="ctr">
+                      <a:solidFill>
+                        <a:srgbClr val="CCCCCC"/>
+                      </a:solidFill>
+                      <a:prstDash val="solid"/>
+                      <a:round/>
+                      <a:headEnd type="none" w="med" len="med"/>
+                      <a:tailEnd type="none" w="med" len="med"/>
+                    </a:lnL>
+                    <a:lnR w="6350" cap="flat" cmpd="sng" algn="ctr">
+                      <a:solidFill>
+                        <a:srgbClr val="CCCCCC"/>
+                      </a:solidFill>
+                      <a:prstDash val="solid"/>
+                      <a:round/>
+                      <a:headEnd type="none" w="med" len="med"/>
+                      <a:tailEnd type="none" w="med" len="med"/>
+                    </a:lnR>
+                    <a:lnT w="6350" cap="flat" cmpd="sng" algn="ctr">
+                      <a:solidFill>
+                        <a:srgbClr val="CCCCCC"/>
+                      </a:solidFill>
+                      <a:prstDash val="solid"/>
+                      <a:round/>
+                      <a:headEnd type="none" w="med" len="med"/>
+                      <a:tailEnd type="none" w="med" len="med"/>
+                    </a:lnT>
+                    <a:lnB w="6350" cap="flat" cmpd="sng" algn="ctr">
+                      <a:solidFill>
+                        <a:srgbClr val="CCCCCC"/>
+                      </a:solidFill>
+                      <a:prstDash val="solid"/>
+                      <a:round/>
+                      <a:headEnd type="none" w="med" len="med"/>
+                      <a:tailEnd type="none" w="med" len="med"/>
+                    </a:lnB>
+                    <a:solidFill>
+                      <a:srgbClr val="FFF9C4"/>
+                    </a:solidFill>
+                  </a:tcPr>
+                </a:tc>
+                <a:tc>
+                  <a:txBody>
+                    <a:bodyPr/>
+                    <a:lstStyle/>
+                    <a:p>
+                      <a:pPr algn="ctr" indent="0" marL="0">
+                        <a:buNone/>
+                      </a:pPr>
+                      <a:r>
+                        <a:rPr lang="en-US" sz="700" dirty="0">
+                          <a:solidFill>
+                            <a:srgbClr val="333333"/>
+                          </a:solidFill>
+                        </a:rPr>
                         <a:t>2</a:t>
                       </a:r>
                       <a:endParaRPr lang="en-US" sz="700" dirty="0"/>
@@ -30018,67 +30955,6 @@
                           </a:solidFill>
                         </a:rPr>
                         <a:t>2</a:t>
-                      </a:r>
-                      <a:endParaRPr lang="en-US" sz="700" dirty="0"/>
-                    </a:p>
-                  </a:txBody>
-                  <a:tcPr marL="91440" marR="91440" marT="45720" marB="45720">
-                    <a:lnL w="6350" cap="flat" cmpd="sng" algn="ctr">
-                      <a:solidFill>
-                        <a:srgbClr val="CCCCCC"/>
-                      </a:solidFill>
-                      <a:prstDash val="solid"/>
-                      <a:round/>
-                      <a:headEnd type="none" w="med" len="med"/>
-                      <a:tailEnd type="none" w="med" len="med"/>
-                    </a:lnL>
-                    <a:lnR w="6350" cap="flat" cmpd="sng" algn="ctr">
-                      <a:solidFill>
-                        <a:srgbClr val="CCCCCC"/>
-                      </a:solidFill>
-                      <a:prstDash val="solid"/>
-                      <a:round/>
-                      <a:headEnd type="none" w="med" len="med"/>
-                      <a:tailEnd type="none" w="med" len="med"/>
-                    </a:lnR>
-                    <a:lnT w="6350" cap="flat" cmpd="sng" algn="ctr">
-                      <a:solidFill>
-                        <a:srgbClr val="CCCCCC"/>
-                      </a:solidFill>
-                      <a:prstDash val="solid"/>
-                      <a:round/>
-                      <a:headEnd type="none" w="med" len="med"/>
-                      <a:tailEnd type="none" w="med" len="med"/>
-                    </a:lnT>
-                    <a:lnB w="6350" cap="flat" cmpd="sng" algn="ctr">
-                      <a:solidFill>
-                        <a:srgbClr val="CCCCCC"/>
-                      </a:solidFill>
-                      <a:prstDash val="solid"/>
-                      <a:round/>
-                      <a:headEnd type="none" w="med" len="med"/>
-                      <a:tailEnd type="none" w="med" len="med"/>
-                    </a:lnB>
-                    <a:solidFill>
-                      <a:srgbClr val="FFF9C4"/>
-                    </a:solidFill>
-                  </a:tcPr>
-                </a:tc>
-                <a:tc>
-                  <a:txBody>
-                    <a:bodyPr/>
-                    <a:lstStyle/>
-                    <a:p>
-                      <a:pPr algn="ctr" indent="0" marL="0">
-                        <a:buNone/>
-                      </a:pPr>
-                      <a:r>
-                        <a:rPr lang="en-US" sz="700" dirty="0">
-                          <a:solidFill>
-                            <a:srgbClr val="333333"/>
-                          </a:solidFill>
-                        </a:rPr>
-                        <a:t>1</a:t>
                       </a:r>
                       <a:endParaRPr lang="en-US" sz="700" dirty="0"/>
                     </a:p>
@@ -30379,7 +31255,129 @@
                             <a:srgbClr val="333333"/>
                           </a:solidFill>
                         </a:rPr>
+                        <a:t>-</a:t>
+                      </a:r>
+                      <a:endParaRPr lang="en-US" sz="700" dirty="0"/>
+                    </a:p>
+                  </a:txBody>
+                  <a:tcPr marL="91440" marR="91440" marT="45720" marB="45720">
+                    <a:lnL w="6350" cap="flat" cmpd="sng" algn="ctr">
+                      <a:solidFill>
+                        <a:srgbClr val="CCCCCC"/>
+                      </a:solidFill>
+                      <a:prstDash val="solid"/>
+                      <a:round/>
+                      <a:headEnd type="none" w="med" len="med"/>
+                      <a:tailEnd type="none" w="med" len="med"/>
+                    </a:lnL>
+                    <a:lnR w="6350" cap="flat" cmpd="sng" algn="ctr">
+                      <a:solidFill>
+                        <a:srgbClr val="CCCCCC"/>
+                      </a:solidFill>
+                      <a:prstDash val="solid"/>
+                      <a:round/>
+                      <a:headEnd type="none" w="med" len="med"/>
+                      <a:tailEnd type="none" w="med" len="med"/>
+                    </a:lnR>
+                    <a:lnT w="6350" cap="flat" cmpd="sng" algn="ctr">
+                      <a:solidFill>
+                        <a:srgbClr val="CCCCCC"/>
+                      </a:solidFill>
+                      <a:prstDash val="solid"/>
+                      <a:round/>
+                      <a:headEnd type="none" w="med" len="med"/>
+                      <a:tailEnd type="none" w="med" len="med"/>
+                    </a:lnT>
+                    <a:lnB w="6350" cap="flat" cmpd="sng" algn="ctr">
+                      <a:solidFill>
+                        <a:srgbClr val="CCCCCC"/>
+                      </a:solidFill>
+                      <a:prstDash val="solid"/>
+                      <a:round/>
+                      <a:headEnd type="none" w="med" len="med"/>
+                      <a:tailEnd type="none" w="med" len="med"/>
+                    </a:lnB>
+                    <a:solidFill>
+                      <a:srgbClr val="FFFFFF"/>
+                    </a:solidFill>
+                  </a:tcPr>
+                </a:tc>
+                <a:tc>
+                  <a:txBody>
+                    <a:bodyPr/>
+                    <a:lstStyle/>
+                    <a:p>
+                      <a:pPr algn="ctr" indent="0" marL="0">
+                        <a:buNone/>
+                      </a:pPr>
+                      <a:r>
+                        <a:rPr lang="en-US" sz="700" dirty="0">
+                          <a:solidFill>
+                            <a:srgbClr val="333333"/>
+                          </a:solidFill>
+                        </a:rPr>
                         <a:t>2</a:t>
+                      </a:r>
+                      <a:endParaRPr lang="en-US" sz="700" dirty="0"/>
+                    </a:p>
+                  </a:txBody>
+                  <a:tcPr marL="91440" marR="91440" marT="45720" marB="45720">
+                    <a:lnL w="6350" cap="flat" cmpd="sng" algn="ctr">
+                      <a:solidFill>
+                        <a:srgbClr val="CCCCCC"/>
+                      </a:solidFill>
+                      <a:prstDash val="solid"/>
+                      <a:round/>
+                      <a:headEnd type="none" w="med" len="med"/>
+                      <a:tailEnd type="none" w="med" len="med"/>
+                    </a:lnL>
+                    <a:lnR w="6350" cap="flat" cmpd="sng" algn="ctr">
+                      <a:solidFill>
+                        <a:srgbClr val="CCCCCC"/>
+                      </a:solidFill>
+                      <a:prstDash val="solid"/>
+                      <a:round/>
+                      <a:headEnd type="none" w="med" len="med"/>
+                      <a:tailEnd type="none" w="med" len="med"/>
+                    </a:lnR>
+                    <a:lnT w="6350" cap="flat" cmpd="sng" algn="ctr">
+                      <a:solidFill>
+                        <a:srgbClr val="CCCCCC"/>
+                      </a:solidFill>
+                      <a:prstDash val="solid"/>
+                      <a:round/>
+                      <a:headEnd type="none" w="med" len="med"/>
+                      <a:tailEnd type="none" w="med" len="med"/>
+                    </a:lnT>
+                    <a:lnB w="6350" cap="flat" cmpd="sng" algn="ctr">
+                      <a:solidFill>
+                        <a:srgbClr val="CCCCCC"/>
+                      </a:solidFill>
+                      <a:prstDash val="solid"/>
+                      <a:round/>
+                      <a:headEnd type="none" w="med" len="med"/>
+                      <a:tailEnd type="none" w="med" len="med"/>
+                    </a:lnB>
+                    <a:solidFill>
+                      <a:srgbClr val="FFF9C4"/>
+                    </a:solidFill>
+                  </a:tcPr>
+                </a:tc>
+                <a:tc>
+                  <a:txBody>
+                    <a:bodyPr/>
+                    <a:lstStyle/>
+                    <a:p>
+                      <a:pPr algn="ctr" indent="0" marL="0">
+                        <a:buNone/>
+                      </a:pPr>
+                      <a:r>
+                        <a:rPr lang="en-US" sz="700" dirty="0">
+                          <a:solidFill>
+                            <a:srgbClr val="333333"/>
+                          </a:solidFill>
+                        </a:rPr>
+                        <a:t>1</a:t>
                       </a:r>
                       <a:endParaRPr lang="en-US" sz="700" dirty="0"/>
                     </a:p>
@@ -30487,6 +31485,246 @@
                     </a:solidFill>
                   </a:tcPr>
                 </a:tc>
+              </a:tr>
+              <a:tr h="0">
+                <a:tc>
+                  <a:txBody>
+                    <a:bodyPr/>
+                    <a:lstStyle/>
+                    <a:p>
+                      <a:pPr indent="0" marL="0">
+                        <a:buNone/>
+                      </a:pPr>
+                      <a:r>
+                        <a:rPr lang="en-US" sz="700" b="1" dirty="0">
+                          <a:solidFill>
+                            <a:srgbClr val="000000"/>
+                          </a:solidFill>
+                        </a:rPr>
+                        <a:t>アパホテル蒲田駅東</a:t>
+                      </a:r>
+                      <a:endParaRPr lang="en-US" sz="700" dirty="0"/>
+                    </a:p>
+                  </a:txBody>
+                  <a:tcPr marL="91440" marR="91440" marT="45720" marB="45720">
+                    <a:lnL w="6350" cap="flat" cmpd="sng" algn="ctr">
+                      <a:solidFill>
+                        <a:srgbClr val="CCCCCC"/>
+                      </a:solidFill>
+                      <a:prstDash val="solid"/>
+                      <a:round/>
+                      <a:headEnd type="none" w="med" len="med"/>
+                      <a:tailEnd type="none" w="med" len="med"/>
+                    </a:lnL>
+                    <a:lnR w="6350" cap="flat" cmpd="sng" algn="ctr">
+                      <a:solidFill>
+                        <a:srgbClr val="CCCCCC"/>
+                      </a:solidFill>
+                      <a:prstDash val="solid"/>
+                      <a:round/>
+                      <a:headEnd type="none" w="med" len="med"/>
+                      <a:tailEnd type="none" w="med" len="med"/>
+                    </a:lnR>
+                    <a:lnT w="6350" cap="flat" cmpd="sng" algn="ctr">
+                      <a:solidFill>
+                        <a:srgbClr val="CCCCCC"/>
+                      </a:solidFill>
+                      <a:prstDash val="solid"/>
+                      <a:round/>
+                      <a:headEnd type="none" w="med" len="med"/>
+                      <a:tailEnd type="none" w="med" len="med"/>
+                    </a:lnT>
+                    <a:lnB w="6350" cap="flat" cmpd="sng" algn="ctr">
+                      <a:solidFill>
+                        <a:srgbClr val="CCCCCC"/>
+                      </a:solidFill>
+                      <a:prstDash val="solid"/>
+                      <a:round/>
+                      <a:headEnd type="none" w="med" len="med"/>
+                      <a:tailEnd type="none" w="med" len="med"/>
+                    </a:lnB>
+                  </a:tcPr>
+                </a:tc>
+                <a:tc>
+                  <a:txBody>
+                    <a:bodyPr/>
+                    <a:lstStyle/>
+                    <a:p>
+                      <a:pPr algn="ctr" indent="0" marL="0">
+                        <a:buNone/>
+                      </a:pPr>
+                      <a:r>
+                        <a:rPr lang="en-US" sz="700" b="1" dirty="0">
+                          <a:solidFill>
+                            <a:srgbClr val="000000"/>
+                          </a:solidFill>
+                        </a:rPr>
+                        <a:t>5</a:t>
+                      </a:r>
+                      <a:endParaRPr lang="en-US" sz="700" dirty="0"/>
+                    </a:p>
+                  </a:txBody>
+                  <a:tcPr marL="91440" marR="91440" marT="45720" marB="45720">
+                    <a:lnL w="6350" cap="flat" cmpd="sng" algn="ctr">
+                      <a:solidFill>
+                        <a:srgbClr val="CCCCCC"/>
+                      </a:solidFill>
+                      <a:prstDash val="solid"/>
+                      <a:round/>
+                      <a:headEnd type="none" w="med" len="med"/>
+                      <a:tailEnd type="none" w="med" len="med"/>
+                    </a:lnL>
+                    <a:lnR w="6350" cap="flat" cmpd="sng" algn="ctr">
+                      <a:solidFill>
+                        <a:srgbClr val="CCCCCC"/>
+                      </a:solidFill>
+                      <a:prstDash val="solid"/>
+                      <a:round/>
+                      <a:headEnd type="none" w="med" len="med"/>
+                      <a:tailEnd type="none" w="med" len="med"/>
+                    </a:lnR>
+                    <a:lnT w="6350" cap="flat" cmpd="sng" algn="ctr">
+                      <a:solidFill>
+                        <a:srgbClr val="CCCCCC"/>
+                      </a:solidFill>
+                      <a:prstDash val="solid"/>
+                      <a:round/>
+                      <a:headEnd type="none" w="med" len="med"/>
+                      <a:tailEnd type="none" w="med" len="med"/>
+                    </a:lnT>
+                    <a:lnB w="6350" cap="flat" cmpd="sng" algn="ctr">
+                      <a:solidFill>
+                        <a:srgbClr val="CCCCCC"/>
+                      </a:solidFill>
+                      <a:prstDash val="solid"/>
+                      <a:round/>
+                      <a:headEnd type="none" w="med" len="med"/>
+                      <a:tailEnd type="none" w="med" len="med"/>
+                    </a:lnB>
+                  </a:tcPr>
+                </a:tc>
+                <a:tc>
+                  <a:txBody>
+                    <a:bodyPr/>
+                    <a:lstStyle/>
+                    <a:p>
+                      <a:pPr algn="ctr" indent="0" marL="0">
+                        <a:buNone/>
+                      </a:pPr>
+                      <a:r>
+                        <a:rPr lang="en-US" sz="700" dirty="0">
+                          <a:solidFill>
+                            <a:srgbClr val="E74C3C"/>
+                          </a:solidFill>
+                        </a:rPr>
+                        <a:t>3</a:t>
+                      </a:r>
+                      <a:endParaRPr lang="en-US" sz="700" dirty="0"/>
+                    </a:p>
+                  </a:txBody>
+                  <a:tcPr marL="91440" marR="91440" marT="45720" marB="45720">
+                    <a:lnL w="6350" cap="flat" cmpd="sng" algn="ctr">
+                      <a:solidFill>
+                        <a:srgbClr val="CCCCCC"/>
+                      </a:solidFill>
+                      <a:prstDash val="solid"/>
+                      <a:round/>
+                      <a:headEnd type="none" w="med" len="med"/>
+                      <a:tailEnd type="none" w="med" len="med"/>
+                    </a:lnL>
+                    <a:lnR w="6350" cap="flat" cmpd="sng" algn="ctr">
+                      <a:solidFill>
+                        <a:srgbClr val="CCCCCC"/>
+                      </a:solidFill>
+                      <a:prstDash val="solid"/>
+                      <a:round/>
+                      <a:headEnd type="none" w="med" len="med"/>
+                      <a:tailEnd type="none" w="med" len="med"/>
+                    </a:lnR>
+                    <a:lnT w="6350" cap="flat" cmpd="sng" algn="ctr">
+                      <a:solidFill>
+                        <a:srgbClr val="CCCCCC"/>
+                      </a:solidFill>
+                      <a:prstDash val="solid"/>
+                      <a:round/>
+                      <a:headEnd type="none" w="med" len="med"/>
+                      <a:tailEnd type="none" w="med" len="med"/>
+                    </a:lnT>
+                    <a:lnB w="6350" cap="flat" cmpd="sng" algn="ctr">
+                      <a:solidFill>
+                        <a:srgbClr val="CCCCCC"/>
+                      </a:solidFill>
+                      <a:prstDash val="solid"/>
+                      <a:round/>
+                      <a:headEnd type="none" w="med" len="med"/>
+                      <a:tailEnd type="none" w="med" len="med"/>
+                    </a:lnB>
+                    <a:solidFill>
+                      <a:srgbClr val="FFE0B2"/>
+                    </a:solidFill>
+                  </a:tcPr>
+                </a:tc>
+                <a:tc>
+                  <a:txBody>
+                    <a:bodyPr/>
+                    <a:lstStyle/>
+                    <a:p>
+                      <a:pPr algn="ctr" indent="0" marL="0">
+                        <a:buNone/>
+                      </a:pPr>
+                      <a:r>
+                        <a:rPr lang="en-US" sz="700" dirty="0">
+                          <a:solidFill>
+                            <a:srgbClr val="333333"/>
+                          </a:solidFill>
+                        </a:rPr>
+                        <a:t>1</a:t>
+                      </a:r>
+                      <a:endParaRPr lang="en-US" sz="700" dirty="0"/>
+                    </a:p>
+                  </a:txBody>
+                  <a:tcPr marL="91440" marR="91440" marT="45720" marB="45720">
+                    <a:lnL w="6350" cap="flat" cmpd="sng" algn="ctr">
+                      <a:solidFill>
+                        <a:srgbClr val="CCCCCC"/>
+                      </a:solidFill>
+                      <a:prstDash val="solid"/>
+                      <a:round/>
+                      <a:headEnd type="none" w="med" len="med"/>
+                      <a:tailEnd type="none" w="med" len="med"/>
+                    </a:lnL>
+                    <a:lnR w="6350" cap="flat" cmpd="sng" algn="ctr">
+                      <a:solidFill>
+                        <a:srgbClr val="CCCCCC"/>
+                      </a:solidFill>
+                      <a:prstDash val="solid"/>
+                      <a:round/>
+                      <a:headEnd type="none" w="med" len="med"/>
+                      <a:tailEnd type="none" w="med" len="med"/>
+                    </a:lnR>
+                    <a:lnT w="6350" cap="flat" cmpd="sng" algn="ctr">
+                      <a:solidFill>
+                        <a:srgbClr val="CCCCCC"/>
+                      </a:solidFill>
+                      <a:prstDash val="solid"/>
+                      <a:round/>
+                      <a:headEnd type="none" w="med" len="med"/>
+                      <a:tailEnd type="none" w="med" len="med"/>
+                    </a:lnT>
+                    <a:lnB w="6350" cap="flat" cmpd="sng" algn="ctr">
+                      <a:solidFill>
+                        <a:srgbClr val="CCCCCC"/>
+                      </a:solidFill>
+                      <a:prstDash val="solid"/>
+                      <a:round/>
+                      <a:headEnd type="none" w="med" len="med"/>
+                      <a:tailEnd type="none" w="med" len="med"/>
+                    </a:lnB>
+                    <a:solidFill>
+                      <a:srgbClr val="FFF9C4"/>
+                    </a:solidFill>
+                  </a:tcPr>
+                </a:tc>
                 <a:tc>
                   <a:txBody>
                     <a:bodyPr/>
@@ -30609,246 +31847,6 @@
                     </a:solidFill>
                   </a:tcPr>
                 </a:tc>
-              </a:tr>
-              <a:tr h="0">
-                <a:tc>
-                  <a:txBody>
-                    <a:bodyPr/>
-                    <a:lstStyle/>
-                    <a:p>
-                      <a:pPr indent="0" marL="0">
-                        <a:buNone/>
-                      </a:pPr>
-                      <a:r>
-                        <a:rPr lang="en-US" sz="700" b="1" dirty="0">
-                          <a:solidFill>
-                            <a:srgbClr val="000000"/>
-                          </a:solidFill>
-                        </a:rPr>
-                        <a:t>アパホテル蒲田駅東</a:t>
-                      </a:r>
-                      <a:endParaRPr lang="en-US" sz="700" dirty="0"/>
-                    </a:p>
-                  </a:txBody>
-                  <a:tcPr marL="91440" marR="91440" marT="45720" marB="45720">
-                    <a:lnL w="6350" cap="flat" cmpd="sng" algn="ctr">
-                      <a:solidFill>
-                        <a:srgbClr val="CCCCCC"/>
-                      </a:solidFill>
-                      <a:prstDash val="solid"/>
-                      <a:round/>
-                      <a:headEnd type="none" w="med" len="med"/>
-                      <a:tailEnd type="none" w="med" len="med"/>
-                    </a:lnL>
-                    <a:lnR w="6350" cap="flat" cmpd="sng" algn="ctr">
-                      <a:solidFill>
-                        <a:srgbClr val="CCCCCC"/>
-                      </a:solidFill>
-                      <a:prstDash val="solid"/>
-                      <a:round/>
-                      <a:headEnd type="none" w="med" len="med"/>
-                      <a:tailEnd type="none" w="med" len="med"/>
-                    </a:lnR>
-                    <a:lnT w="6350" cap="flat" cmpd="sng" algn="ctr">
-                      <a:solidFill>
-                        <a:srgbClr val="CCCCCC"/>
-                      </a:solidFill>
-                      <a:prstDash val="solid"/>
-                      <a:round/>
-                      <a:headEnd type="none" w="med" len="med"/>
-                      <a:tailEnd type="none" w="med" len="med"/>
-                    </a:lnT>
-                    <a:lnB w="6350" cap="flat" cmpd="sng" algn="ctr">
-                      <a:solidFill>
-                        <a:srgbClr val="CCCCCC"/>
-                      </a:solidFill>
-                      <a:prstDash val="solid"/>
-                      <a:round/>
-                      <a:headEnd type="none" w="med" len="med"/>
-                      <a:tailEnd type="none" w="med" len="med"/>
-                    </a:lnB>
-                  </a:tcPr>
-                </a:tc>
-                <a:tc>
-                  <a:txBody>
-                    <a:bodyPr/>
-                    <a:lstStyle/>
-                    <a:p>
-                      <a:pPr algn="ctr" indent="0" marL="0">
-                        <a:buNone/>
-                      </a:pPr>
-                      <a:r>
-                        <a:rPr lang="en-US" sz="700" b="1" dirty="0">
-                          <a:solidFill>
-                            <a:srgbClr val="000000"/>
-                          </a:solidFill>
-                        </a:rPr>
-                        <a:t>5</a:t>
-                      </a:r>
-                      <a:endParaRPr lang="en-US" sz="700" dirty="0"/>
-                    </a:p>
-                  </a:txBody>
-                  <a:tcPr marL="91440" marR="91440" marT="45720" marB="45720">
-                    <a:lnL w="6350" cap="flat" cmpd="sng" algn="ctr">
-                      <a:solidFill>
-                        <a:srgbClr val="CCCCCC"/>
-                      </a:solidFill>
-                      <a:prstDash val="solid"/>
-                      <a:round/>
-                      <a:headEnd type="none" w="med" len="med"/>
-                      <a:tailEnd type="none" w="med" len="med"/>
-                    </a:lnL>
-                    <a:lnR w="6350" cap="flat" cmpd="sng" algn="ctr">
-                      <a:solidFill>
-                        <a:srgbClr val="CCCCCC"/>
-                      </a:solidFill>
-                      <a:prstDash val="solid"/>
-                      <a:round/>
-                      <a:headEnd type="none" w="med" len="med"/>
-                      <a:tailEnd type="none" w="med" len="med"/>
-                    </a:lnR>
-                    <a:lnT w="6350" cap="flat" cmpd="sng" algn="ctr">
-                      <a:solidFill>
-                        <a:srgbClr val="CCCCCC"/>
-                      </a:solidFill>
-                      <a:prstDash val="solid"/>
-                      <a:round/>
-                      <a:headEnd type="none" w="med" len="med"/>
-                      <a:tailEnd type="none" w="med" len="med"/>
-                    </a:lnT>
-                    <a:lnB w="6350" cap="flat" cmpd="sng" algn="ctr">
-                      <a:solidFill>
-                        <a:srgbClr val="CCCCCC"/>
-                      </a:solidFill>
-                      <a:prstDash val="solid"/>
-                      <a:round/>
-                      <a:headEnd type="none" w="med" len="med"/>
-                      <a:tailEnd type="none" w="med" len="med"/>
-                    </a:lnB>
-                  </a:tcPr>
-                </a:tc>
-                <a:tc>
-                  <a:txBody>
-                    <a:bodyPr/>
-                    <a:lstStyle/>
-                    <a:p>
-                      <a:pPr algn="ctr" indent="0" marL="0">
-                        <a:buNone/>
-                      </a:pPr>
-                      <a:r>
-                        <a:rPr lang="en-US" sz="700" dirty="0">
-                          <a:solidFill>
-                            <a:srgbClr val="E74C3C"/>
-                          </a:solidFill>
-                        </a:rPr>
-                        <a:t>3</a:t>
-                      </a:r>
-                      <a:endParaRPr lang="en-US" sz="700" dirty="0"/>
-                    </a:p>
-                  </a:txBody>
-                  <a:tcPr marL="91440" marR="91440" marT="45720" marB="45720">
-                    <a:lnL w="6350" cap="flat" cmpd="sng" algn="ctr">
-                      <a:solidFill>
-                        <a:srgbClr val="CCCCCC"/>
-                      </a:solidFill>
-                      <a:prstDash val="solid"/>
-                      <a:round/>
-                      <a:headEnd type="none" w="med" len="med"/>
-                      <a:tailEnd type="none" w="med" len="med"/>
-                    </a:lnL>
-                    <a:lnR w="6350" cap="flat" cmpd="sng" algn="ctr">
-                      <a:solidFill>
-                        <a:srgbClr val="CCCCCC"/>
-                      </a:solidFill>
-                      <a:prstDash val="solid"/>
-                      <a:round/>
-                      <a:headEnd type="none" w="med" len="med"/>
-                      <a:tailEnd type="none" w="med" len="med"/>
-                    </a:lnR>
-                    <a:lnT w="6350" cap="flat" cmpd="sng" algn="ctr">
-                      <a:solidFill>
-                        <a:srgbClr val="CCCCCC"/>
-                      </a:solidFill>
-                      <a:prstDash val="solid"/>
-                      <a:round/>
-                      <a:headEnd type="none" w="med" len="med"/>
-                      <a:tailEnd type="none" w="med" len="med"/>
-                    </a:lnT>
-                    <a:lnB w="6350" cap="flat" cmpd="sng" algn="ctr">
-                      <a:solidFill>
-                        <a:srgbClr val="CCCCCC"/>
-                      </a:solidFill>
-                      <a:prstDash val="solid"/>
-                      <a:round/>
-                      <a:headEnd type="none" w="med" len="med"/>
-                      <a:tailEnd type="none" w="med" len="med"/>
-                    </a:lnB>
-                    <a:solidFill>
-                      <a:srgbClr val="FFE0B2"/>
-                    </a:solidFill>
-                  </a:tcPr>
-                </a:tc>
-                <a:tc>
-                  <a:txBody>
-                    <a:bodyPr/>
-                    <a:lstStyle/>
-                    <a:p>
-                      <a:pPr algn="ctr" indent="0" marL="0">
-                        <a:buNone/>
-                      </a:pPr>
-                      <a:r>
-                        <a:rPr lang="en-US" sz="700" dirty="0">
-                          <a:solidFill>
-                            <a:srgbClr val="333333"/>
-                          </a:solidFill>
-                        </a:rPr>
-                        <a:t>1</a:t>
-                      </a:r>
-                      <a:endParaRPr lang="en-US" sz="700" dirty="0"/>
-                    </a:p>
-                  </a:txBody>
-                  <a:tcPr marL="91440" marR="91440" marT="45720" marB="45720">
-                    <a:lnL w="6350" cap="flat" cmpd="sng" algn="ctr">
-                      <a:solidFill>
-                        <a:srgbClr val="CCCCCC"/>
-                      </a:solidFill>
-                      <a:prstDash val="solid"/>
-                      <a:round/>
-                      <a:headEnd type="none" w="med" len="med"/>
-                      <a:tailEnd type="none" w="med" len="med"/>
-                    </a:lnL>
-                    <a:lnR w="6350" cap="flat" cmpd="sng" algn="ctr">
-                      <a:solidFill>
-                        <a:srgbClr val="CCCCCC"/>
-                      </a:solidFill>
-                      <a:prstDash val="solid"/>
-                      <a:round/>
-                      <a:headEnd type="none" w="med" len="med"/>
-                      <a:tailEnd type="none" w="med" len="med"/>
-                    </a:lnR>
-                    <a:lnT w="6350" cap="flat" cmpd="sng" algn="ctr">
-                      <a:solidFill>
-                        <a:srgbClr val="CCCCCC"/>
-                      </a:solidFill>
-                      <a:prstDash val="solid"/>
-                      <a:round/>
-                      <a:headEnd type="none" w="med" len="med"/>
-                      <a:tailEnd type="none" w="med" len="med"/>
-                    </a:lnT>
-                    <a:lnB w="6350" cap="flat" cmpd="sng" algn="ctr">
-                      <a:solidFill>
-                        <a:srgbClr val="CCCCCC"/>
-                      </a:solidFill>
-                      <a:prstDash val="solid"/>
-                      <a:round/>
-                      <a:headEnd type="none" w="med" len="med"/>
-                      <a:tailEnd type="none" w="med" len="med"/>
-                    </a:lnB>
-                    <a:solidFill>
-                      <a:srgbClr val="FFF9C4"/>
-                    </a:solidFill>
-                  </a:tcPr>
-                </a:tc>
                 <a:tc>
                   <a:txBody>
                     <a:bodyPr/>
@@ -30971,6 +31969,185 @@
                     </a:solidFill>
                   </a:tcPr>
                 </a:tc>
+              </a:tr>
+              <a:tr h="0">
+                <a:tc>
+                  <a:txBody>
+                    <a:bodyPr/>
+                    <a:lstStyle/>
+                    <a:p>
+                      <a:pPr indent="0" marL="0">
+                        <a:buNone/>
+                      </a:pPr>
+                      <a:r>
+                        <a:rPr lang="en-US" sz="700" b="1" dirty="0">
+                          <a:solidFill>
+                            <a:srgbClr val="000000"/>
+                          </a:solidFill>
+                        </a:rPr>
+                        <a:t>コンフォートホテル横浜関内</a:t>
+                      </a:r>
+                      <a:endParaRPr lang="en-US" sz="700" dirty="0"/>
+                    </a:p>
+                  </a:txBody>
+                  <a:tcPr marL="91440" marR="91440" marT="45720" marB="45720">
+                    <a:lnL w="6350" cap="flat" cmpd="sng" algn="ctr">
+                      <a:solidFill>
+                        <a:srgbClr val="CCCCCC"/>
+                      </a:solidFill>
+                      <a:prstDash val="solid"/>
+                      <a:round/>
+                      <a:headEnd type="none" w="med" len="med"/>
+                      <a:tailEnd type="none" w="med" len="med"/>
+                    </a:lnL>
+                    <a:lnR w="6350" cap="flat" cmpd="sng" algn="ctr">
+                      <a:solidFill>
+                        <a:srgbClr val="CCCCCC"/>
+                      </a:solidFill>
+                      <a:prstDash val="solid"/>
+                      <a:round/>
+                      <a:headEnd type="none" w="med" len="med"/>
+                      <a:tailEnd type="none" w="med" len="med"/>
+                    </a:lnR>
+                    <a:lnT w="6350" cap="flat" cmpd="sng" algn="ctr">
+                      <a:solidFill>
+                        <a:srgbClr val="CCCCCC"/>
+                      </a:solidFill>
+                      <a:prstDash val="solid"/>
+                      <a:round/>
+                      <a:headEnd type="none" w="med" len="med"/>
+                      <a:tailEnd type="none" w="med" len="med"/>
+                    </a:lnT>
+                    <a:lnB w="6350" cap="flat" cmpd="sng" algn="ctr">
+                      <a:solidFill>
+                        <a:srgbClr val="CCCCCC"/>
+                      </a:solidFill>
+                      <a:prstDash val="solid"/>
+                      <a:round/>
+                      <a:headEnd type="none" w="med" len="med"/>
+                      <a:tailEnd type="none" w="med" len="med"/>
+                    </a:lnB>
+                  </a:tcPr>
+                </a:tc>
+                <a:tc>
+                  <a:txBody>
+                    <a:bodyPr/>
+                    <a:lstStyle/>
+                    <a:p>
+                      <a:pPr algn="ctr" indent="0" marL="0">
+                        <a:buNone/>
+                      </a:pPr>
+                      <a:r>
+                        <a:rPr lang="en-US" sz="700" b="1" dirty="0">
+                          <a:solidFill>
+                            <a:srgbClr val="000000"/>
+                          </a:solidFill>
+                        </a:rPr>
+                        <a:t>13</a:t>
+                      </a:r>
+                      <a:endParaRPr lang="en-US" sz="700" dirty="0"/>
+                    </a:p>
+                  </a:txBody>
+                  <a:tcPr marL="91440" marR="91440" marT="45720" marB="45720">
+                    <a:lnL w="6350" cap="flat" cmpd="sng" algn="ctr">
+                      <a:solidFill>
+                        <a:srgbClr val="CCCCCC"/>
+                      </a:solidFill>
+                      <a:prstDash val="solid"/>
+                      <a:round/>
+                      <a:headEnd type="none" w="med" len="med"/>
+                      <a:tailEnd type="none" w="med" len="med"/>
+                    </a:lnL>
+                    <a:lnR w="6350" cap="flat" cmpd="sng" algn="ctr">
+                      <a:solidFill>
+                        <a:srgbClr val="CCCCCC"/>
+                      </a:solidFill>
+                      <a:prstDash val="solid"/>
+                      <a:round/>
+                      <a:headEnd type="none" w="med" len="med"/>
+                      <a:tailEnd type="none" w="med" len="med"/>
+                    </a:lnR>
+                    <a:lnT w="6350" cap="flat" cmpd="sng" algn="ctr">
+                      <a:solidFill>
+                        <a:srgbClr val="CCCCCC"/>
+                      </a:solidFill>
+                      <a:prstDash val="solid"/>
+                      <a:round/>
+                      <a:headEnd type="none" w="med" len="med"/>
+                      <a:tailEnd type="none" w="med" len="med"/>
+                    </a:lnT>
+                    <a:lnB w="6350" cap="flat" cmpd="sng" algn="ctr">
+                      <a:solidFill>
+                        <a:srgbClr val="CCCCCC"/>
+                      </a:solidFill>
+                      <a:prstDash val="solid"/>
+                      <a:round/>
+                      <a:headEnd type="none" w="med" len="med"/>
+                      <a:tailEnd type="none" w="med" len="med"/>
+                    </a:lnB>
+                  </a:tcPr>
+                </a:tc>
+                <a:tc>
+                  <a:txBody>
+                    <a:bodyPr/>
+                    <a:lstStyle/>
+                    <a:p>
+                      <a:pPr algn="ctr" indent="0" marL="0">
+                        <a:buNone/>
+                      </a:pPr>
+                      <a:r>
+                        <a:rPr lang="en-US" sz="700" dirty="0">
+                          <a:solidFill>
+                            <a:srgbClr val="E74C3C"/>
+                          </a:solidFill>
+                        </a:rPr>
+                        <a:t>6</a:t>
+                      </a:r>
+                      <a:endParaRPr lang="en-US" sz="700" dirty="0"/>
+                    </a:p>
+                  </a:txBody>
+                  <a:tcPr marL="91440" marR="91440" marT="45720" marB="45720">
+                    <a:lnL w="6350" cap="flat" cmpd="sng" algn="ctr">
+                      <a:solidFill>
+                        <a:srgbClr val="CCCCCC"/>
+                      </a:solidFill>
+                      <a:prstDash val="solid"/>
+                      <a:round/>
+                      <a:headEnd type="none" w="med" len="med"/>
+                      <a:tailEnd type="none" w="med" len="med"/>
+                    </a:lnL>
+                    <a:lnR w="6350" cap="flat" cmpd="sng" algn="ctr">
+                      <a:solidFill>
+                        <a:srgbClr val="CCCCCC"/>
+                      </a:solidFill>
+                      <a:prstDash val="solid"/>
+                      <a:round/>
+                      <a:headEnd type="none" w="med" len="med"/>
+                      <a:tailEnd type="none" w="med" len="med"/>
+                    </a:lnR>
+                    <a:lnT w="6350" cap="flat" cmpd="sng" algn="ctr">
+                      <a:solidFill>
+                        <a:srgbClr val="CCCCCC"/>
+                      </a:solidFill>
+                      <a:prstDash val="solid"/>
+                      <a:round/>
+                      <a:headEnd type="none" w="med" len="med"/>
+                      <a:tailEnd type="none" w="med" len="med"/>
+                    </a:lnT>
+                    <a:lnB w="6350" cap="flat" cmpd="sng" algn="ctr">
+                      <a:solidFill>
+                        <a:srgbClr val="CCCCCC"/>
+                      </a:solidFill>
+                      <a:prstDash val="solid"/>
+                      <a:round/>
+                      <a:headEnd type="none" w="med" len="med"/>
+                      <a:tailEnd type="none" w="med" len="med"/>
+                    </a:lnB>
+                    <a:solidFill>
+                      <a:srgbClr val="FFCDD2"/>
+                    </a:solidFill>
+                  </a:tcPr>
+                </a:tc>
                 <a:tc>
                   <a:txBody>
                     <a:bodyPr/>
@@ -31029,6 +32206,189 @@
                     </a:lnB>
                     <a:solidFill>
                       <a:srgbClr val="FFFFFF"/>
+                    </a:solidFill>
+                  </a:tcPr>
+                </a:tc>
+                <a:tc>
+                  <a:txBody>
+                    <a:bodyPr/>
+                    <a:lstStyle/>
+                    <a:p>
+                      <a:pPr algn="ctr" indent="0" marL="0">
+                        <a:buNone/>
+                      </a:pPr>
+                      <a:r>
+                        <a:rPr lang="en-US" sz="700" dirty="0">
+                          <a:solidFill>
+                            <a:srgbClr val="E74C3C"/>
+                          </a:solidFill>
+                        </a:rPr>
+                        <a:t>7</a:t>
+                      </a:r>
+                      <a:endParaRPr lang="en-US" sz="700" dirty="0"/>
+                    </a:p>
+                  </a:txBody>
+                  <a:tcPr marL="91440" marR="91440" marT="45720" marB="45720">
+                    <a:lnL w="6350" cap="flat" cmpd="sng" algn="ctr">
+                      <a:solidFill>
+                        <a:srgbClr val="CCCCCC"/>
+                      </a:solidFill>
+                      <a:prstDash val="solid"/>
+                      <a:round/>
+                      <a:headEnd type="none" w="med" len="med"/>
+                      <a:tailEnd type="none" w="med" len="med"/>
+                    </a:lnL>
+                    <a:lnR w="6350" cap="flat" cmpd="sng" algn="ctr">
+                      <a:solidFill>
+                        <a:srgbClr val="CCCCCC"/>
+                      </a:solidFill>
+                      <a:prstDash val="solid"/>
+                      <a:round/>
+                      <a:headEnd type="none" w="med" len="med"/>
+                      <a:tailEnd type="none" w="med" len="med"/>
+                    </a:lnR>
+                    <a:lnT w="6350" cap="flat" cmpd="sng" algn="ctr">
+                      <a:solidFill>
+                        <a:srgbClr val="CCCCCC"/>
+                      </a:solidFill>
+                      <a:prstDash val="solid"/>
+                      <a:round/>
+                      <a:headEnd type="none" w="med" len="med"/>
+                      <a:tailEnd type="none" w="med" len="med"/>
+                    </a:lnT>
+                    <a:lnB w="6350" cap="flat" cmpd="sng" algn="ctr">
+                      <a:solidFill>
+                        <a:srgbClr val="CCCCCC"/>
+                      </a:solidFill>
+                      <a:prstDash val="solid"/>
+                      <a:round/>
+                      <a:headEnd type="none" w="med" len="med"/>
+                      <a:tailEnd type="none" w="med" len="med"/>
+                    </a:lnB>
+                    <a:solidFill>
+                      <a:srgbClr val="FFCDD2"/>
+                    </a:solidFill>
+                  </a:tcPr>
+                </a:tc>
+                <a:tc>
+                  <a:txBody>
+                    <a:bodyPr/>
+                    <a:lstStyle/>
+                    <a:p>
+                      <a:pPr algn="ctr" indent="0" marL="0">
+                        <a:buNone/>
+                      </a:pPr>
+                      <a:r>
+                        <a:rPr lang="en-US" sz="700" dirty="0">
+                          <a:solidFill>
+                            <a:srgbClr val="333333"/>
+                          </a:solidFill>
+                        </a:rPr>
+                        <a:t>-</a:t>
+                      </a:r>
+                      <a:endParaRPr lang="en-US" sz="700" dirty="0"/>
+                    </a:p>
+                  </a:txBody>
+                  <a:tcPr marL="91440" marR="91440" marT="45720" marB="45720">
+                    <a:lnL w="6350" cap="flat" cmpd="sng" algn="ctr">
+                      <a:solidFill>
+                        <a:srgbClr val="CCCCCC"/>
+                      </a:solidFill>
+                      <a:prstDash val="solid"/>
+                      <a:round/>
+                      <a:headEnd type="none" w="med" len="med"/>
+                      <a:tailEnd type="none" w="med" len="med"/>
+                    </a:lnL>
+                    <a:lnR w="6350" cap="flat" cmpd="sng" algn="ctr">
+                      <a:solidFill>
+                        <a:srgbClr val="CCCCCC"/>
+                      </a:solidFill>
+                      <a:prstDash val="solid"/>
+                      <a:round/>
+                      <a:headEnd type="none" w="med" len="med"/>
+                      <a:tailEnd type="none" w="med" len="med"/>
+                    </a:lnR>
+                    <a:lnT w="6350" cap="flat" cmpd="sng" algn="ctr">
+                      <a:solidFill>
+                        <a:srgbClr val="CCCCCC"/>
+                      </a:solidFill>
+                      <a:prstDash val="solid"/>
+                      <a:round/>
+                      <a:headEnd type="none" w="med" len="med"/>
+                      <a:tailEnd type="none" w="med" len="med"/>
+                    </a:lnT>
+                    <a:lnB w="6350" cap="flat" cmpd="sng" algn="ctr">
+                      <a:solidFill>
+                        <a:srgbClr val="CCCCCC"/>
+                      </a:solidFill>
+                      <a:prstDash val="solid"/>
+                      <a:round/>
+                      <a:headEnd type="none" w="med" len="med"/>
+                      <a:tailEnd type="none" w="med" len="med"/>
+                    </a:lnB>
+                    <a:solidFill>
+                      <a:srgbClr val="FFFFFF"/>
+                    </a:solidFill>
+                  </a:tcPr>
+                </a:tc>
+                <a:tc>
+                  <a:txBody>
+                    <a:bodyPr/>
+                    <a:lstStyle/>
+                    <a:p>
+                      <a:pPr algn="ctr" indent="0" marL="0">
+                        <a:buNone/>
+                      </a:pPr>
+                      <a:r>
+                        <a:rPr lang="en-US" sz="700" dirty="0">
+                          <a:solidFill>
+                            <a:srgbClr val="333333"/>
+                          </a:solidFill>
+                        </a:rPr>
+                        <a:t>1</a:t>
+                      </a:r>
+                      <a:endParaRPr lang="en-US" sz="700" dirty="0"/>
+                    </a:p>
+                  </a:txBody>
+                  <a:tcPr marL="91440" marR="91440" marT="45720" marB="45720">
+                    <a:lnL w="6350" cap="flat" cmpd="sng" algn="ctr">
+                      <a:solidFill>
+                        <a:srgbClr val="CCCCCC"/>
+                      </a:solidFill>
+                      <a:prstDash val="solid"/>
+                      <a:round/>
+                      <a:headEnd type="none" w="med" len="med"/>
+                      <a:tailEnd type="none" w="med" len="med"/>
+                    </a:lnL>
+                    <a:lnR w="6350" cap="flat" cmpd="sng" algn="ctr">
+                      <a:solidFill>
+                        <a:srgbClr val="CCCCCC"/>
+                      </a:solidFill>
+                      <a:prstDash val="solid"/>
+                      <a:round/>
+                      <a:headEnd type="none" w="med" len="med"/>
+                      <a:tailEnd type="none" w="med" len="med"/>
+                    </a:lnR>
+                    <a:lnT w="6350" cap="flat" cmpd="sng" algn="ctr">
+                      <a:solidFill>
+                        <a:srgbClr val="CCCCCC"/>
+                      </a:solidFill>
+                      <a:prstDash val="solid"/>
+                      <a:round/>
+                      <a:headEnd type="none" w="med" len="med"/>
+                      <a:tailEnd type="none" w="med" len="med"/>
+                    </a:lnT>
+                    <a:lnB w="6350" cap="flat" cmpd="sng" algn="ctr">
+                      <a:solidFill>
+                        <a:srgbClr val="CCCCCC"/>
+                      </a:solidFill>
+                      <a:prstDash val="solid"/>
+                      <a:round/>
+                      <a:headEnd type="none" w="med" len="med"/>
+                      <a:tailEnd type="none" w="med" len="med"/>
+                    </a:lnB>
+                    <a:solidFill>
+                      <a:srgbClr val="FFF9C4"/>
                     </a:solidFill>
                   </a:tcPr>
                 </a:tc>
@@ -31347,67 +32707,6 @@
                             <a:srgbClr val="333333"/>
                           </a:solidFill>
                         </a:rPr>
-                        <a:t>1</a:t>
-                      </a:r>
-                      <a:endParaRPr lang="en-US" sz="700" dirty="0"/>
-                    </a:p>
-                  </a:txBody>
-                  <a:tcPr marL="91440" marR="91440" marT="45720" marB="45720">
-                    <a:lnL w="6350" cap="flat" cmpd="sng" algn="ctr">
-                      <a:solidFill>
-                        <a:srgbClr val="CCCCCC"/>
-                      </a:solidFill>
-                      <a:prstDash val="solid"/>
-                      <a:round/>
-                      <a:headEnd type="none" w="med" len="med"/>
-                      <a:tailEnd type="none" w="med" len="med"/>
-                    </a:lnL>
-                    <a:lnR w="6350" cap="flat" cmpd="sng" algn="ctr">
-                      <a:solidFill>
-                        <a:srgbClr val="CCCCCC"/>
-                      </a:solidFill>
-                      <a:prstDash val="solid"/>
-                      <a:round/>
-                      <a:headEnd type="none" w="med" len="med"/>
-                      <a:tailEnd type="none" w="med" len="med"/>
-                    </a:lnR>
-                    <a:lnT w="6350" cap="flat" cmpd="sng" algn="ctr">
-                      <a:solidFill>
-                        <a:srgbClr val="CCCCCC"/>
-                      </a:solidFill>
-                      <a:prstDash val="solid"/>
-                      <a:round/>
-                      <a:headEnd type="none" w="med" len="med"/>
-                      <a:tailEnd type="none" w="med" len="med"/>
-                    </a:lnT>
-                    <a:lnB w="6350" cap="flat" cmpd="sng" algn="ctr">
-                      <a:solidFill>
-                        <a:srgbClr val="CCCCCC"/>
-                      </a:solidFill>
-                      <a:prstDash val="solid"/>
-                      <a:round/>
-                      <a:headEnd type="none" w="med" len="med"/>
-                      <a:tailEnd type="none" w="med" len="med"/>
-                    </a:lnB>
-                    <a:solidFill>
-                      <a:srgbClr val="FFF9C4"/>
-                    </a:solidFill>
-                  </a:tcPr>
-                </a:tc>
-                <a:tc>
-                  <a:txBody>
-                    <a:bodyPr/>
-                    <a:lstStyle/>
-                    <a:p>
-                      <a:pPr algn="ctr" indent="0" marL="0">
-                        <a:buNone/>
-                      </a:pPr>
-                      <a:r>
-                        <a:rPr lang="en-US" sz="700" dirty="0">
-                          <a:solidFill>
-                            <a:srgbClr val="333333"/>
-                          </a:solidFill>
-                        </a:rPr>
                         <a:t>-</a:t>
                       </a:r>
                       <a:endParaRPr lang="en-US" sz="700" dirty="0"/>
@@ -31574,429 +32873,6 @@
                     </a:lnB>
                     <a:solidFill>
                       <a:srgbClr val="FFF9C4"/>
-                    </a:solidFill>
-                  </a:tcPr>
-                </a:tc>
-              </a:tr>
-              <a:tr h="0">
-                <a:tc>
-                  <a:txBody>
-                    <a:bodyPr/>
-                    <a:lstStyle/>
-                    <a:p>
-                      <a:pPr indent="0" marL="0">
-                        <a:buNone/>
-                      </a:pPr>
-                      <a:r>
-                        <a:rPr lang="en-US" sz="700" b="1" dirty="0">
-                          <a:solidFill>
-                            <a:srgbClr val="000000"/>
-                          </a:solidFill>
-                        </a:rPr>
-                        <a:t>コンフォートホテル横浜関内</a:t>
-                      </a:r>
-                      <a:endParaRPr lang="en-US" sz="700" dirty="0"/>
-                    </a:p>
-                  </a:txBody>
-                  <a:tcPr marL="91440" marR="91440" marT="45720" marB="45720">
-                    <a:lnL w="6350" cap="flat" cmpd="sng" algn="ctr">
-                      <a:solidFill>
-                        <a:srgbClr val="CCCCCC"/>
-                      </a:solidFill>
-                      <a:prstDash val="solid"/>
-                      <a:round/>
-                      <a:headEnd type="none" w="med" len="med"/>
-                      <a:tailEnd type="none" w="med" len="med"/>
-                    </a:lnL>
-                    <a:lnR w="6350" cap="flat" cmpd="sng" algn="ctr">
-                      <a:solidFill>
-                        <a:srgbClr val="CCCCCC"/>
-                      </a:solidFill>
-                      <a:prstDash val="solid"/>
-                      <a:round/>
-                      <a:headEnd type="none" w="med" len="med"/>
-                      <a:tailEnd type="none" w="med" len="med"/>
-                    </a:lnR>
-                    <a:lnT w="6350" cap="flat" cmpd="sng" algn="ctr">
-                      <a:solidFill>
-                        <a:srgbClr val="CCCCCC"/>
-                      </a:solidFill>
-                      <a:prstDash val="solid"/>
-                      <a:round/>
-                      <a:headEnd type="none" w="med" len="med"/>
-                      <a:tailEnd type="none" w="med" len="med"/>
-                    </a:lnT>
-                    <a:lnB w="6350" cap="flat" cmpd="sng" algn="ctr">
-                      <a:solidFill>
-                        <a:srgbClr val="CCCCCC"/>
-                      </a:solidFill>
-                      <a:prstDash val="solid"/>
-                      <a:round/>
-                      <a:headEnd type="none" w="med" len="med"/>
-                      <a:tailEnd type="none" w="med" len="med"/>
-                    </a:lnB>
-                  </a:tcPr>
-                </a:tc>
-                <a:tc>
-                  <a:txBody>
-                    <a:bodyPr/>
-                    <a:lstStyle/>
-                    <a:p>
-                      <a:pPr algn="ctr" indent="0" marL="0">
-                        <a:buNone/>
-                      </a:pPr>
-                      <a:r>
-                        <a:rPr lang="en-US" sz="700" b="1" dirty="0">
-                          <a:solidFill>
-                            <a:srgbClr val="000000"/>
-                          </a:solidFill>
-                        </a:rPr>
-                        <a:t>12</a:t>
-                      </a:r>
-                      <a:endParaRPr lang="en-US" sz="700" dirty="0"/>
-                    </a:p>
-                  </a:txBody>
-                  <a:tcPr marL="91440" marR="91440" marT="45720" marB="45720">
-                    <a:lnL w="6350" cap="flat" cmpd="sng" algn="ctr">
-                      <a:solidFill>
-                        <a:srgbClr val="CCCCCC"/>
-                      </a:solidFill>
-                      <a:prstDash val="solid"/>
-                      <a:round/>
-                      <a:headEnd type="none" w="med" len="med"/>
-                      <a:tailEnd type="none" w="med" len="med"/>
-                    </a:lnL>
-                    <a:lnR w="6350" cap="flat" cmpd="sng" algn="ctr">
-                      <a:solidFill>
-                        <a:srgbClr val="CCCCCC"/>
-                      </a:solidFill>
-                      <a:prstDash val="solid"/>
-                      <a:round/>
-                      <a:headEnd type="none" w="med" len="med"/>
-                      <a:tailEnd type="none" w="med" len="med"/>
-                    </a:lnR>
-                    <a:lnT w="6350" cap="flat" cmpd="sng" algn="ctr">
-                      <a:solidFill>
-                        <a:srgbClr val="CCCCCC"/>
-                      </a:solidFill>
-                      <a:prstDash val="solid"/>
-                      <a:round/>
-                      <a:headEnd type="none" w="med" len="med"/>
-                      <a:tailEnd type="none" w="med" len="med"/>
-                    </a:lnT>
-                    <a:lnB w="6350" cap="flat" cmpd="sng" algn="ctr">
-                      <a:solidFill>
-                        <a:srgbClr val="CCCCCC"/>
-                      </a:solidFill>
-                      <a:prstDash val="solid"/>
-                      <a:round/>
-                      <a:headEnd type="none" w="med" len="med"/>
-                      <a:tailEnd type="none" w="med" len="med"/>
-                    </a:lnB>
-                  </a:tcPr>
-                </a:tc>
-                <a:tc>
-                  <a:txBody>
-                    <a:bodyPr/>
-                    <a:lstStyle/>
-                    <a:p>
-                      <a:pPr algn="ctr" indent="0" marL="0">
-                        <a:buNone/>
-                      </a:pPr>
-                      <a:r>
-                        <a:rPr lang="en-US" sz="700" dirty="0">
-                          <a:solidFill>
-                            <a:srgbClr val="E74C3C"/>
-                          </a:solidFill>
-                        </a:rPr>
-                        <a:t>5</a:t>
-                      </a:r>
-                      <a:endParaRPr lang="en-US" sz="700" dirty="0"/>
-                    </a:p>
-                  </a:txBody>
-                  <a:tcPr marL="91440" marR="91440" marT="45720" marB="45720">
-                    <a:lnL w="6350" cap="flat" cmpd="sng" algn="ctr">
-                      <a:solidFill>
-                        <a:srgbClr val="CCCCCC"/>
-                      </a:solidFill>
-                      <a:prstDash val="solid"/>
-                      <a:round/>
-                      <a:headEnd type="none" w="med" len="med"/>
-                      <a:tailEnd type="none" w="med" len="med"/>
-                    </a:lnL>
-                    <a:lnR w="6350" cap="flat" cmpd="sng" algn="ctr">
-                      <a:solidFill>
-                        <a:srgbClr val="CCCCCC"/>
-                      </a:solidFill>
-                      <a:prstDash val="solid"/>
-                      <a:round/>
-                      <a:headEnd type="none" w="med" len="med"/>
-                      <a:tailEnd type="none" w="med" len="med"/>
-                    </a:lnR>
-                    <a:lnT w="6350" cap="flat" cmpd="sng" algn="ctr">
-                      <a:solidFill>
-                        <a:srgbClr val="CCCCCC"/>
-                      </a:solidFill>
-                      <a:prstDash val="solid"/>
-                      <a:round/>
-                      <a:headEnd type="none" w="med" len="med"/>
-                      <a:tailEnd type="none" w="med" len="med"/>
-                    </a:lnT>
-                    <a:lnB w="6350" cap="flat" cmpd="sng" algn="ctr">
-                      <a:solidFill>
-                        <a:srgbClr val="CCCCCC"/>
-                      </a:solidFill>
-                      <a:prstDash val="solid"/>
-                      <a:round/>
-                      <a:headEnd type="none" w="med" len="med"/>
-                      <a:tailEnd type="none" w="med" len="med"/>
-                    </a:lnB>
-                    <a:solidFill>
-                      <a:srgbClr val="FFE0B2"/>
-                    </a:solidFill>
-                  </a:tcPr>
-                </a:tc>
-                <a:tc>
-                  <a:txBody>
-                    <a:bodyPr/>
-                    <a:lstStyle/>
-                    <a:p>
-                      <a:pPr algn="ctr" indent="0" marL="0">
-                        <a:buNone/>
-                      </a:pPr>
-                      <a:r>
-                        <a:rPr lang="en-US" sz="700" dirty="0">
-                          <a:solidFill>
-                            <a:srgbClr val="333333"/>
-                          </a:solidFill>
-                        </a:rPr>
-                        <a:t>1</a:t>
-                      </a:r>
-                      <a:endParaRPr lang="en-US" sz="700" dirty="0"/>
-                    </a:p>
-                  </a:txBody>
-                  <a:tcPr marL="91440" marR="91440" marT="45720" marB="45720">
-                    <a:lnL w="6350" cap="flat" cmpd="sng" algn="ctr">
-                      <a:solidFill>
-                        <a:srgbClr val="CCCCCC"/>
-                      </a:solidFill>
-                      <a:prstDash val="solid"/>
-                      <a:round/>
-                      <a:headEnd type="none" w="med" len="med"/>
-                      <a:tailEnd type="none" w="med" len="med"/>
-                    </a:lnL>
-                    <a:lnR w="6350" cap="flat" cmpd="sng" algn="ctr">
-                      <a:solidFill>
-                        <a:srgbClr val="CCCCCC"/>
-                      </a:solidFill>
-                      <a:prstDash val="solid"/>
-                      <a:round/>
-                      <a:headEnd type="none" w="med" len="med"/>
-                      <a:tailEnd type="none" w="med" len="med"/>
-                    </a:lnR>
-                    <a:lnT w="6350" cap="flat" cmpd="sng" algn="ctr">
-                      <a:solidFill>
-                        <a:srgbClr val="CCCCCC"/>
-                      </a:solidFill>
-                      <a:prstDash val="solid"/>
-                      <a:round/>
-                      <a:headEnd type="none" w="med" len="med"/>
-                      <a:tailEnd type="none" w="med" len="med"/>
-                    </a:lnT>
-                    <a:lnB w="6350" cap="flat" cmpd="sng" algn="ctr">
-                      <a:solidFill>
-                        <a:srgbClr val="CCCCCC"/>
-                      </a:solidFill>
-                      <a:prstDash val="solid"/>
-                      <a:round/>
-                      <a:headEnd type="none" w="med" len="med"/>
-                      <a:tailEnd type="none" w="med" len="med"/>
-                    </a:lnB>
-                    <a:solidFill>
-                      <a:srgbClr val="FFF9C4"/>
-                    </a:solidFill>
-                  </a:tcPr>
-                </a:tc>
-                <a:tc>
-                  <a:txBody>
-                    <a:bodyPr/>
-                    <a:lstStyle/>
-                    <a:p>
-                      <a:pPr algn="ctr" indent="0" marL="0">
-                        <a:buNone/>
-                      </a:pPr>
-                      <a:r>
-                        <a:rPr lang="en-US" sz="700" dirty="0">
-                          <a:solidFill>
-                            <a:srgbClr val="333333"/>
-                          </a:solidFill>
-                        </a:rPr>
-                        <a:t>-</a:t>
-                      </a:r>
-                      <a:endParaRPr lang="en-US" sz="700" dirty="0"/>
-                    </a:p>
-                  </a:txBody>
-                  <a:tcPr marL="91440" marR="91440" marT="45720" marB="45720">
-                    <a:lnL w="6350" cap="flat" cmpd="sng" algn="ctr">
-                      <a:solidFill>
-                        <a:srgbClr val="CCCCCC"/>
-                      </a:solidFill>
-                      <a:prstDash val="solid"/>
-                      <a:round/>
-                      <a:headEnd type="none" w="med" len="med"/>
-                      <a:tailEnd type="none" w="med" len="med"/>
-                    </a:lnL>
-                    <a:lnR w="6350" cap="flat" cmpd="sng" algn="ctr">
-                      <a:solidFill>
-                        <a:srgbClr val="CCCCCC"/>
-                      </a:solidFill>
-                      <a:prstDash val="solid"/>
-                      <a:round/>
-                      <a:headEnd type="none" w="med" len="med"/>
-                      <a:tailEnd type="none" w="med" len="med"/>
-                    </a:lnR>
-                    <a:lnT w="6350" cap="flat" cmpd="sng" algn="ctr">
-                      <a:solidFill>
-                        <a:srgbClr val="CCCCCC"/>
-                      </a:solidFill>
-                      <a:prstDash val="solid"/>
-                      <a:round/>
-                      <a:headEnd type="none" w="med" len="med"/>
-                      <a:tailEnd type="none" w="med" len="med"/>
-                    </a:lnT>
-                    <a:lnB w="6350" cap="flat" cmpd="sng" algn="ctr">
-                      <a:solidFill>
-                        <a:srgbClr val="CCCCCC"/>
-                      </a:solidFill>
-                      <a:prstDash val="solid"/>
-                      <a:round/>
-                      <a:headEnd type="none" w="med" len="med"/>
-                      <a:tailEnd type="none" w="med" len="med"/>
-                    </a:lnB>
-                    <a:solidFill>
-                      <a:srgbClr val="FFFFFF"/>
-                    </a:solidFill>
-                  </a:tcPr>
-                </a:tc>
-                <a:tc>
-                  <a:txBody>
-                    <a:bodyPr/>
-                    <a:lstStyle/>
-                    <a:p>
-                      <a:pPr algn="ctr" indent="0" marL="0">
-                        <a:buNone/>
-                      </a:pPr>
-                      <a:r>
-                        <a:rPr lang="en-US" sz="700" dirty="0">
-                          <a:solidFill>
-                            <a:srgbClr val="E74C3C"/>
-                          </a:solidFill>
-                        </a:rPr>
-                        <a:t>6</a:t>
-                      </a:r>
-                      <a:endParaRPr lang="en-US" sz="700" dirty="0"/>
-                    </a:p>
-                  </a:txBody>
-                  <a:tcPr marL="91440" marR="91440" marT="45720" marB="45720">
-                    <a:lnL w="6350" cap="flat" cmpd="sng" algn="ctr">
-                      <a:solidFill>
-                        <a:srgbClr val="CCCCCC"/>
-                      </a:solidFill>
-                      <a:prstDash val="solid"/>
-                      <a:round/>
-                      <a:headEnd type="none" w="med" len="med"/>
-                      <a:tailEnd type="none" w="med" len="med"/>
-                    </a:lnL>
-                    <a:lnR w="6350" cap="flat" cmpd="sng" algn="ctr">
-                      <a:solidFill>
-                        <a:srgbClr val="CCCCCC"/>
-                      </a:solidFill>
-                      <a:prstDash val="solid"/>
-                      <a:round/>
-                      <a:headEnd type="none" w="med" len="med"/>
-                      <a:tailEnd type="none" w="med" len="med"/>
-                    </a:lnR>
-                    <a:lnT w="6350" cap="flat" cmpd="sng" algn="ctr">
-                      <a:solidFill>
-                        <a:srgbClr val="CCCCCC"/>
-                      </a:solidFill>
-                      <a:prstDash val="solid"/>
-                      <a:round/>
-                      <a:headEnd type="none" w="med" len="med"/>
-                      <a:tailEnd type="none" w="med" len="med"/>
-                    </a:lnT>
-                    <a:lnB w="6350" cap="flat" cmpd="sng" algn="ctr">
-                      <a:solidFill>
-                        <a:srgbClr val="CCCCCC"/>
-                      </a:solidFill>
-                      <a:prstDash val="solid"/>
-                      <a:round/>
-                      <a:headEnd type="none" w="med" len="med"/>
-                      <a:tailEnd type="none" w="med" len="med"/>
-                    </a:lnB>
-                    <a:solidFill>
-                      <a:srgbClr val="FFCDD2"/>
-                    </a:solidFill>
-                  </a:tcPr>
-                </a:tc>
-                <a:tc>
-                  <a:txBody>
-                    <a:bodyPr/>
-                    <a:lstStyle/>
-                    <a:p>
-                      <a:pPr algn="ctr" indent="0" marL="0">
-                        <a:buNone/>
-                      </a:pPr>
-                      <a:r>
-                        <a:rPr lang="en-US" sz="700" dirty="0">
-                          <a:solidFill>
-                            <a:srgbClr val="333333"/>
-                          </a:solidFill>
-                        </a:rPr>
-                        <a:t>-</a:t>
-                      </a:r>
-                      <a:endParaRPr lang="en-US" sz="700" dirty="0"/>
-                    </a:p>
-                  </a:txBody>
-                  <a:tcPr marL="91440" marR="91440" marT="45720" marB="45720">
-                    <a:lnL w="6350" cap="flat" cmpd="sng" algn="ctr">
-                      <a:solidFill>
-                        <a:srgbClr val="CCCCCC"/>
-                      </a:solidFill>
-                      <a:prstDash val="solid"/>
-                      <a:round/>
-                      <a:headEnd type="none" w="med" len="med"/>
-                      <a:tailEnd type="none" w="med" len="med"/>
-                    </a:lnL>
-                    <a:lnR w="6350" cap="flat" cmpd="sng" algn="ctr">
-                      <a:solidFill>
-                        <a:srgbClr val="CCCCCC"/>
-                      </a:solidFill>
-                      <a:prstDash val="solid"/>
-                      <a:round/>
-                      <a:headEnd type="none" w="med" len="med"/>
-                      <a:tailEnd type="none" w="med" len="med"/>
-                    </a:lnR>
-                    <a:lnT w="6350" cap="flat" cmpd="sng" algn="ctr">
-                      <a:solidFill>
-                        <a:srgbClr val="CCCCCC"/>
-                      </a:solidFill>
-                      <a:prstDash val="solid"/>
-                      <a:round/>
-                      <a:headEnd type="none" w="med" len="med"/>
-                      <a:tailEnd type="none" w="med" len="med"/>
-                    </a:lnT>
-                    <a:lnB w="6350" cap="flat" cmpd="sng" algn="ctr">
-                      <a:solidFill>
-                        <a:srgbClr val="CCCCCC"/>
-                      </a:solidFill>
-                      <a:prstDash val="solid"/>
-                      <a:round/>
-                      <a:headEnd type="none" w="med" len="med"/>
-                      <a:tailEnd type="none" w="med" len="med"/>
-                    </a:lnB>
-                    <a:solidFill>
-                      <a:srgbClr val="FFFFFF"/>
                     </a:solidFill>
                   </a:tcPr>
                 </a:tc>
@@ -32437,6 +33313,67 @@
                             <a:srgbClr val="333333"/>
                           </a:solidFill>
                         </a:rPr>
+                        <a:t>1</a:t>
+                      </a:r>
+                      <a:endParaRPr lang="en-US" sz="700" dirty="0"/>
+                    </a:p>
+                  </a:txBody>
+                  <a:tcPr marL="91440" marR="91440" marT="45720" marB="45720">
+                    <a:lnL w="6350" cap="flat" cmpd="sng" algn="ctr">
+                      <a:solidFill>
+                        <a:srgbClr val="CCCCCC"/>
+                      </a:solidFill>
+                      <a:prstDash val="solid"/>
+                      <a:round/>
+                      <a:headEnd type="none" w="med" len="med"/>
+                      <a:tailEnd type="none" w="med" len="med"/>
+                    </a:lnL>
+                    <a:lnR w="6350" cap="flat" cmpd="sng" algn="ctr">
+                      <a:solidFill>
+                        <a:srgbClr val="CCCCCC"/>
+                      </a:solidFill>
+                      <a:prstDash val="solid"/>
+                      <a:round/>
+                      <a:headEnd type="none" w="med" len="med"/>
+                      <a:tailEnd type="none" w="med" len="med"/>
+                    </a:lnR>
+                    <a:lnT w="6350" cap="flat" cmpd="sng" algn="ctr">
+                      <a:solidFill>
+                        <a:srgbClr val="CCCCCC"/>
+                      </a:solidFill>
+                      <a:prstDash val="solid"/>
+                      <a:round/>
+                      <a:headEnd type="none" w="med" len="med"/>
+                      <a:tailEnd type="none" w="med" len="med"/>
+                    </a:lnT>
+                    <a:lnB w="6350" cap="flat" cmpd="sng" algn="ctr">
+                      <a:solidFill>
+                        <a:srgbClr val="CCCCCC"/>
+                      </a:solidFill>
+                      <a:prstDash val="solid"/>
+                      <a:round/>
+                      <a:headEnd type="none" w="med" len="med"/>
+                      <a:tailEnd type="none" w="med" len="med"/>
+                    </a:lnB>
+                    <a:solidFill>
+                      <a:srgbClr val="FFF9C4"/>
+                    </a:solidFill>
+                  </a:tcPr>
+                </a:tc>
+                <a:tc>
+                  <a:txBody>
+                    <a:bodyPr/>
+                    <a:lstStyle/>
+                    <a:p>
+                      <a:pPr algn="ctr" indent="0" marL="0">
+                        <a:buNone/>
+                      </a:pPr>
+                      <a:r>
+                        <a:rPr lang="en-US" sz="700" dirty="0">
+                          <a:solidFill>
+                            <a:srgbClr val="333333"/>
+                          </a:solidFill>
+                        </a:rPr>
                         <a:t>2</a:t>
                       </a:r>
                       <a:endParaRPr lang="en-US" sz="700" dirty="0"/>
@@ -32481,6 +33418,429 @@
                     </a:lnB>
                     <a:solidFill>
                       <a:srgbClr val="FFF9C4"/>
+                    </a:solidFill>
+                  </a:tcPr>
+                </a:tc>
+              </a:tr>
+              <a:tr h="0">
+                <a:tc>
+                  <a:txBody>
+                    <a:bodyPr/>
+                    <a:lstStyle/>
+                    <a:p>
+                      <a:pPr indent="0" marL="0">
+                        <a:buNone/>
+                      </a:pPr>
+                      <a:r>
+                        <a:rPr lang="en-US" sz="700" b="1" dirty="0">
+                          <a:solidFill>
+                            <a:srgbClr val="000000"/>
+                          </a:solidFill>
+                        </a:rPr>
+                        <a:t>ダイワロイネットホテル東京大崎</a:t>
+                      </a:r>
+                      <a:endParaRPr lang="en-US" sz="700" dirty="0"/>
+                    </a:p>
+                  </a:txBody>
+                  <a:tcPr marL="91440" marR="91440" marT="45720" marB="45720">
+                    <a:lnL w="6350" cap="flat" cmpd="sng" algn="ctr">
+                      <a:solidFill>
+                        <a:srgbClr val="CCCCCC"/>
+                      </a:solidFill>
+                      <a:prstDash val="solid"/>
+                      <a:round/>
+                      <a:headEnd type="none" w="med" len="med"/>
+                      <a:tailEnd type="none" w="med" len="med"/>
+                    </a:lnL>
+                    <a:lnR w="6350" cap="flat" cmpd="sng" algn="ctr">
+                      <a:solidFill>
+                        <a:srgbClr val="CCCCCC"/>
+                      </a:solidFill>
+                      <a:prstDash val="solid"/>
+                      <a:round/>
+                      <a:headEnd type="none" w="med" len="med"/>
+                      <a:tailEnd type="none" w="med" len="med"/>
+                    </a:lnR>
+                    <a:lnT w="6350" cap="flat" cmpd="sng" algn="ctr">
+                      <a:solidFill>
+                        <a:srgbClr val="CCCCCC"/>
+                      </a:solidFill>
+                      <a:prstDash val="solid"/>
+                      <a:round/>
+                      <a:headEnd type="none" w="med" len="med"/>
+                      <a:tailEnd type="none" w="med" len="med"/>
+                    </a:lnT>
+                    <a:lnB w="6350" cap="flat" cmpd="sng" algn="ctr">
+                      <a:solidFill>
+                        <a:srgbClr val="CCCCCC"/>
+                      </a:solidFill>
+                      <a:prstDash val="solid"/>
+                      <a:round/>
+                      <a:headEnd type="none" w="med" len="med"/>
+                      <a:tailEnd type="none" w="med" len="med"/>
+                    </a:lnB>
+                  </a:tcPr>
+                </a:tc>
+                <a:tc>
+                  <a:txBody>
+                    <a:bodyPr/>
+                    <a:lstStyle/>
+                    <a:p>
+                      <a:pPr algn="ctr" indent="0" marL="0">
+                        <a:buNone/>
+                      </a:pPr>
+                      <a:r>
+                        <a:rPr lang="en-US" sz="700" b="1" dirty="0">
+                          <a:solidFill>
+                            <a:srgbClr val="000000"/>
+                          </a:solidFill>
+                        </a:rPr>
+                        <a:t>3</a:t>
+                      </a:r>
+                      <a:endParaRPr lang="en-US" sz="700" dirty="0"/>
+                    </a:p>
+                  </a:txBody>
+                  <a:tcPr marL="91440" marR="91440" marT="45720" marB="45720">
+                    <a:lnL w="6350" cap="flat" cmpd="sng" algn="ctr">
+                      <a:solidFill>
+                        <a:srgbClr val="CCCCCC"/>
+                      </a:solidFill>
+                      <a:prstDash val="solid"/>
+                      <a:round/>
+                      <a:headEnd type="none" w="med" len="med"/>
+                      <a:tailEnd type="none" w="med" len="med"/>
+                    </a:lnL>
+                    <a:lnR w="6350" cap="flat" cmpd="sng" algn="ctr">
+                      <a:solidFill>
+                        <a:srgbClr val="CCCCCC"/>
+                      </a:solidFill>
+                      <a:prstDash val="solid"/>
+                      <a:round/>
+                      <a:headEnd type="none" w="med" len="med"/>
+                      <a:tailEnd type="none" w="med" len="med"/>
+                    </a:lnR>
+                    <a:lnT w="6350" cap="flat" cmpd="sng" algn="ctr">
+                      <a:solidFill>
+                        <a:srgbClr val="CCCCCC"/>
+                      </a:solidFill>
+                      <a:prstDash val="solid"/>
+                      <a:round/>
+                      <a:headEnd type="none" w="med" len="med"/>
+                      <a:tailEnd type="none" w="med" len="med"/>
+                    </a:lnT>
+                    <a:lnB w="6350" cap="flat" cmpd="sng" algn="ctr">
+                      <a:solidFill>
+                        <a:srgbClr val="CCCCCC"/>
+                      </a:solidFill>
+                      <a:prstDash val="solid"/>
+                      <a:round/>
+                      <a:headEnd type="none" w="med" len="med"/>
+                      <a:tailEnd type="none" w="med" len="med"/>
+                    </a:lnB>
+                  </a:tcPr>
+                </a:tc>
+                <a:tc>
+                  <a:txBody>
+                    <a:bodyPr/>
+                    <a:lstStyle/>
+                    <a:p>
+                      <a:pPr algn="ctr" indent="0" marL="0">
+                        <a:buNone/>
+                      </a:pPr>
+                      <a:r>
+                        <a:rPr lang="en-US" sz="700" dirty="0">
+                          <a:solidFill>
+                            <a:srgbClr val="E74C3C"/>
+                          </a:solidFill>
+                        </a:rPr>
+                        <a:t>3</a:t>
+                      </a:r>
+                      <a:endParaRPr lang="en-US" sz="700" dirty="0"/>
+                    </a:p>
+                  </a:txBody>
+                  <a:tcPr marL="91440" marR="91440" marT="45720" marB="45720">
+                    <a:lnL w="6350" cap="flat" cmpd="sng" algn="ctr">
+                      <a:solidFill>
+                        <a:srgbClr val="CCCCCC"/>
+                      </a:solidFill>
+                      <a:prstDash val="solid"/>
+                      <a:round/>
+                      <a:headEnd type="none" w="med" len="med"/>
+                      <a:tailEnd type="none" w="med" len="med"/>
+                    </a:lnL>
+                    <a:lnR w="6350" cap="flat" cmpd="sng" algn="ctr">
+                      <a:solidFill>
+                        <a:srgbClr val="CCCCCC"/>
+                      </a:solidFill>
+                      <a:prstDash val="solid"/>
+                      <a:round/>
+                      <a:headEnd type="none" w="med" len="med"/>
+                      <a:tailEnd type="none" w="med" len="med"/>
+                    </a:lnR>
+                    <a:lnT w="6350" cap="flat" cmpd="sng" algn="ctr">
+                      <a:solidFill>
+                        <a:srgbClr val="CCCCCC"/>
+                      </a:solidFill>
+                      <a:prstDash val="solid"/>
+                      <a:round/>
+                      <a:headEnd type="none" w="med" len="med"/>
+                      <a:tailEnd type="none" w="med" len="med"/>
+                    </a:lnT>
+                    <a:lnB w="6350" cap="flat" cmpd="sng" algn="ctr">
+                      <a:solidFill>
+                        <a:srgbClr val="CCCCCC"/>
+                      </a:solidFill>
+                      <a:prstDash val="solid"/>
+                      <a:round/>
+                      <a:headEnd type="none" w="med" len="med"/>
+                      <a:tailEnd type="none" w="med" len="med"/>
+                    </a:lnB>
+                    <a:solidFill>
+                      <a:srgbClr val="FFE0B2"/>
+                    </a:solidFill>
+                  </a:tcPr>
+                </a:tc>
+                <a:tc>
+                  <a:txBody>
+                    <a:bodyPr/>
+                    <a:lstStyle/>
+                    <a:p>
+                      <a:pPr algn="ctr" indent="0" marL="0">
+                        <a:buNone/>
+                      </a:pPr>
+                      <a:r>
+                        <a:rPr lang="en-US" sz="700" dirty="0">
+                          <a:solidFill>
+                            <a:srgbClr val="333333"/>
+                          </a:solidFill>
+                        </a:rPr>
+                        <a:t>-</a:t>
+                      </a:r>
+                      <a:endParaRPr lang="en-US" sz="700" dirty="0"/>
+                    </a:p>
+                  </a:txBody>
+                  <a:tcPr marL="91440" marR="91440" marT="45720" marB="45720">
+                    <a:lnL w="6350" cap="flat" cmpd="sng" algn="ctr">
+                      <a:solidFill>
+                        <a:srgbClr val="CCCCCC"/>
+                      </a:solidFill>
+                      <a:prstDash val="solid"/>
+                      <a:round/>
+                      <a:headEnd type="none" w="med" len="med"/>
+                      <a:tailEnd type="none" w="med" len="med"/>
+                    </a:lnL>
+                    <a:lnR w="6350" cap="flat" cmpd="sng" algn="ctr">
+                      <a:solidFill>
+                        <a:srgbClr val="CCCCCC"/>
+                      </a:solidFill>
+                      <a:prstDash val="solid"/>
+                      <a:round/>
+                      <a:headEnd type="none" w="med" len="med"/>
+                      <a:tailEnd type="none" w="med" len="med"/>
+                    </a:lnR>
+                    <a:lnT w="6350" cap="flat" cmpd="sng" algn="ctr">
+                      <a:solidFill>
+                        <a:srgbClr val="CCCCCC"/>
+                      </a:solidFill>
+                      <a:prstDash val="solid"/>
+                      <a:round/>
+                      <a:headEnd type="none" w="med" len="med"/>
+                      <a:tailEnd type="none" w="med" len="med"/>
+                    </a:lnT>
+                    <a:lnB w="6350" cap="flat" cmpd="sng" algn="ctr">
+                      <a:solidFill>
+                        <a:srgbClr val="CCCCCC"/>
+                      </a:solidFill>
+                      <a:prstDash val="solid"/>
+                      <a:round/>
+                      <a:headEnd type="none" w="med" len="med"/>
+                      <a:tailEnd type="none" w="med" len="med"/>
+                    </a:lnB>
+                    <a:solidFill>
+                      <a:srgbClr val="FFFFFF"/>
+                    </a:solidFill>
+                  </a:tcPr>
+                </a:tc>
+                <a:tc>
+                  <a:txBody>
+                    <a:bodyPr/>
+                    <a:lstStyle/>
+                    <a:p>
+                      <a:pPr algn="ctr" indent="0" marL="0">
+                        <a:buNone/>
+                      </a:pPr>
+                      <a:r>
+                        <a:rPr lang="en-US" sz="700" dirty="0">
+                          <a:solidFill>
+                            <a:srgbClr val="333333"/>
+                          </a:solidFill>
+                        </a:rPr>
+                        <a:t>2</a:t>
+                      </a:r>
+                      <a:endParaRPr lang="en-US" sz="700" dirty="0"/>
+                    </a:p>
+                  </a:txBody>
+                  <a:tcPr marL="91440" marR="91440" marT="45720" marB="45720">
+                    <a:lnL w="6350" cap="flat" cmpd="sng" algn="ctr">
+                      <a:solidFill>
+                        <a:srgbClr val="CCCCCC"/>
+                      </a:solidFill>
+                      <a:prstDash val="solid"/>
+                      <a:round/>
+                      <a:headEnd type="none" w="med" len="med"/>
+                      <a:tailEnd type="none" w="med" len="med"/>
+                    </a:lnL>
+                    <a:lnR w="6350" cap="flat" cmpd="sng" algn="ctr">
+                      <a:solidFill>
+                        <a:srgbClr val="CCCCCC"/>
+                      </a:solidFill>
+                      <a:prstDash val="solid"/>
+                      <a:round/>
+                      <a:headEnd type="none" w="med" len="med"/>
+                      <a:tailEnd type="none" w="med" len="med"/>
+                    </a:lnR>
+                    <a:lnT w="6350" cap="flat" cmpd="sng" algn="ctr">
+                      <a:solidFill>
+                        <a:srgbClr val="CCCCCC"/>
+                      </a:solidFill>
+                      <a:prstDash val="solid"/>
+                      <a:round/>
+                      <a:headEnd type="none" w="med" len="med"/>
+                      <a:tailEnd type="none" w="med" len="med"/>
+                    </a:lnT>
+                    <a:lnB w="6350" cap="flat" cmpd="sng" algn="ctr">
+                      <a:solidFill>
+                        <a:srgbClr val="CCCCCC"/>
+                      </a:solidFill>
+                      <a:prstDash val="solid"/>
+                      <a:round/>
+                      <a:headEnd type="none" w="med" len="med"/>
+                      <a:tailEnd type="none" w="med" len="med"/>
+                    </a:lnB>
+                    <a:solidFill>
+                      <a:srgbClr val="FFF9C4"/>
+                    </a:solidFill>
+                  </a:tcPr>
+                </a:tc>
+                <a:tc>
+                  <a:txBody>
+                    <a:bodyPr/>
+                    <a:lstStyle/>
+                    <a:p>
+                      <a:pPr algn="ctr" indent="0" marL="0">
+                        <a:buNone/>
+                      </a:pPr>
+                      <a:r>
+                        <a:rPr lang="en-US" sz="700" dirty="0">
+                          <a:solidFill>
+                            <a:srgbClr val="333333"/>
+                          </a:solidFill>
+                        </a:rPr>
+                        <a:t>-</a:t>
+                      </a:r>
+                      <a:endParaRPr lang="en-US" sz="700" dirty="0"/>
+                    </a:p>
+                  </a:txBody>
+                  <a:tcPr marL="91440" marR="91440" marT="45720" marB="45720">
+                    <a:lnL w="6350" cap="flat" cmpd="sng" algn="ctr">
+                      <a:solidFill>
+                        <a:srgbClr val="CCCCCC"/>
+                      </a:solidFill>
+                      <a:prstDash val="solid"/>
+                      <a:round/>
+                      <a:headEnd type="none" w="med" len="med"/>
+                      <a:tailEnd type="none" w="med" len="med"/>
+                    </a:lnL>
+                    <a:lnR w="6350" cap="flat" cmpd="sng" algn="ctr">
+                      <a:solidFill>
+                        <a:srgbClr val="CCCCCC"/>
+                      </a:solidFill>
+                      <a:prstDash val="solid"/>
+                      <a:round/>
+                      <a:headEnd type="none" w="med" len="med"/>
+                      <a:tailEnd type="none" w="med" len="med"/>
+                    </a:lnR>
+                    <a:lnT w="6350" cap="flat" cmpd="sng" algn="ctr">
+                      <a:solidFill>
+                        <a:srgbClr val="CCCCCC"/>
+                      </a:solidFill>
+                      <a:prstDash val="solid"/>
+                      <a:round/>
+                      <a:headEnd type="none" w="med" len="med"/>
+                      <a:tailEnd type="none" w="med" len="med"/>
+                    </a:lnT>
+                    <a:lnB w="6350" cap="flat" cmpd="sng" algn="ctr">
+                      <a:solidFill>
+                        <a:srgbClr val="CCCCCC"/>
+                      </a:solidFill>
+                      <a:prstDash val="solid"/>
+                      <a:round/>
+                      <a:headEnd type="none" w="med" len="med"/>
+                      <a:tailEnd type="none" w="med" len="med"/>
+                    </a:lnB>
+                    <a:solidFill>
+                      <a:srgbClr val="FFFFFF"/>
+                    </a:solidFill>
+                  </a:tcPr>
+                </a:tc>
+                <a:tc>
+                  <a:txBody>
+                    <a:bodyPr/>
+                    <a:lstStyle/>
+                    <a:p>
+                      <a:pPr algn="ctr" indent="0" marL="0">
+                        <a:buNone/>
+                      </a:pPr>
+                      <a:r>
+                        <a:rPr lang="en-US" sz="700" dirty="0">
+                          <a:solidFill>
+                            <a:srgbClr val="333333"/>
+                          </a:solidFill>
+                        </a:rPr>
+                        <a:t>-</a:t>
+                      </a:r>
+                      <a:endParaRPr lang="en-US" sz="700" dirty="0"/>
+                    </a:p>
+                  </a:txBody>
+                  <a:tcPr marL="91440" marR="91440" marT="45720" marB="45720">
+                    <a:lnL w="6350" cap="flat" cmpd="sng" algn="ctr">
+                      <a:solidFill>
+                        <a:srgbClr val="CCCCCC"/>
+                      </a:solidFill>
+                      <a:prstDash val="solid"/>
+                      <a:round/>
+                      <a:headEnd type="none" w="med" len="med"/>
+                      <a:tailEnd type="none" w="med" len="med"/>
+                    </a:lnL>
+                    <a:lnR w="6350" cap="flat" cmpd="sng" algn="ctr">
+                      <a:solidFill>
+                        <a:srgbClr val="CCCCCC"/>
+                      </a:solidFill>
+                      <a:prstDash val="solid"/>
+                      <a:round/>
+                      <a:headEnd type="none" w="med" len="med"/>
+                      <a:tailEnd type="none" w="med" len="med"/>
+                    </a:lnR>
+                    <a:lnT w="6350" cap="flat" cmpd="sng" algn="ctr">
+                      <a:solidFill>
+                        <a:srgbClr val="CCCCCC"/>
+                      </a:solidFill>
+                      <a:prstDash val="solid"/>
+                      <a:round/>
+                      <a:headEnd type="none" w="med" len="med"/>
+                      <a:tailEnd type="none" w="med" len="med"/>
+                    </a:lnT>
+                    <a:lnB w="6350" cap="flat" cmpd="sng" algn="ctr">
+                      <a:solidFill>
+                        <a:srgbClr val="CCCCCC"/>
+                      </a:solidFill>
+                      <a:prstDash val="solid"/>
+                      <a:round/>
+                      <a:headEnd type="none" w="med" len="med"/>
+                      <a:tailEnd type="none" w="med" len="med"/>
+                    </a:lnB>
+                    <a:solidFill>
+                      <a:srgbClr val="FFFFFF"/>
                     </a:solidFill>
                   </a:tcPr>
                 </a:tc>
@@ -32982,7 +34342,7 @@
                             <a:srgbClr val="333333"/>
                           </a:solidFill>
                         </a:rPr>
-                        <a:t>-</a:t>
+                        <a:t>1</a:t>
                       </a:r>
                       <a:endParaRPr lang="en-US" sz="700" dirty="0"/>
                     </a:p>
@@ -33025,7 +34385,7 @@
                       <a:tailEnd type="none" w="med" len="med"/>
                     </a:lnB>
                     <a:solidFill>
-                      <a:srgbClr val="FFFFFF"/>
+                      <a:srgbClr val="FFF9C4"/>
                     </a:solidFill>
                   </a:tcPr>
                 </a:tc>
@@ -33889,7 +35249,7 @@
                             <a:srgbClr val="333333"/>
                           </a:solidFill>
                         </a:rPr>
-                        <a:t>2</a:t>
+                        <a:t>1</a:t>
                       </a:r>
                       <a:endParaRPr lang="en-US" sz="700" dirty="0"/>
                     </a:p>
@@ -33950,7 +35310,7 @@
                             <a:srgbClr val="333333"/>
                           </a:solidFill>
                         </a:rPr>
-                        <a:t>1</a:t>
+                        <a:t>2</a:t>
                       </a:r>
                       <a:endParaRPr lang="en-US" sz="700" dirty="0"/>
                     </a:p>
@@ -34013,7 +35373,7 @@
                             <a:srgbClr val="000000"/>
                           </a:solidFill>
                         </a:rPr>
-                        <a:t>ダイワロイネットホテル東京大崎</a:t>
+                        <a:t>ハートンホテル東品川</a:t>
                       </a:r>
                       <a:endParaRPr lang="en-US" sz="700" dirty="0"/>
                     </a:p>
@@ -34071,7 +35431,7 @@
                             <a:srgbClr val="000000"/>
                           </a:solidFill>
                         </a:rPr>
-                        <a:t>2</a:t>
+                        <a:t>5</a:t>
                       </a:r>
                       <a:endParaRPr lang="en-US" sz="700" dirty="0"/>
                     </a:p>
@@ -34113,6 +35473,67 @@
                       <a:headEnd type="none" w="med" len="med"/>
                       <a:tailEnd type="none" w="med" len="med"/>
                     </a:lnB>
+                  </a:tcPr>
+                </a:tc>
+                <a:tc>
+                  <a:txBody>
+                    <a:bodyPr/>
+                    <a:lstStyle/>
+                    <a:p>
+                      <a:pPr algn="ctr" indent="0" marL="0">
+                        <a:buNone/>
+                      </a:pPr>
+                      <a:r>
+                        <a:rPr lang="en-US" sz="700" dirty="0">
+                          <a:solidFill>
+                            <a:srgbClr val="E74C3C"/>
+                          </a:solidFill>
+                        </a:rPr>
+                        <a:t>3</a:t>
+                      </a:r>
+                      <a:endParaRPr lang="en-US" sz="700" dirty="0"/>
+                    </a:p>
+                  </a:txBody>
+                  <a:tcPr marL="91440" marR="91440" marT="45720" marB="45720">
+                    <a:lnL w="6350" cap="flat" cmpd="sng" algn="ctr">
+                      <a:solidFill>
+                        <a:srgbClr val="CCCCCC"/>
+                      </a:solidFill>
+                      <a:prstDash val="solid"/>
+                      <a:round/>
+                      <a:headEnd type="none" w="med" len="med"/>
+                      <a:tailEnd type="none" w="med" len="med"/>
+                    </a:lnL>
+                    <a:lnR w="6350" cap="flat" cmpd="sng" algn="ctr">
+                      <a:solidFill>
+                        <a:srgbClr val="CCCCCC"/>
+                      </a:solidFill>
+                      <a:prstDash val="solid"/>
+                      <a:round/>
+                      <a:headEnd type="none" w="med" len="med"/>
+                      <a:tailEnd type="none" w="med" len="med"/>
+                    </a:lnR>
+                    <a:lnT w="6350" cap="flat" cmpd="sng" algn="ctr">
+                      <a:solidFill>
+                        <a:srgbClr val="CCCCCC"/>
+                      </a:solidFill>
+                      <a:prstDash val="solid"/>
+                      <a:round/>
+                      <a:headEnd type="none" w="med" len="med"/>
+                      <a:tailEnd type="none" w="med" len="med"/>
+                    </a:lnT>
+                    <a:lnB w="6350" cap="flat" cmpd="sng" algn="ctr">
+                      <a:solidFill>
+                        <a:srgbClr val="CCCCCC"/>
+                      </a:solidFill>
+                      <a:prstDash val="solid"/>
+                      <a:round/>
+                      <a:headEnd type="none" w="med" len="med"/>
+                      <a:tailEnd type="none" w="med" len="med"/>
+                    </a:lnB>
+                    <a:solidFill>
+                      <a:srgbClr val="FFE0B2"/>
+                    </a:solidFill>
                   </a:tcPr>
                 </a:tc>
                 <a:tc>
@@ -34420,67 +35841,6 @@
                     </a:solidFill>
                   </a:tcPr>
                 </a:tc>
-                <a:tc>
-                  <a:txBody>
-                    <a:bodyPr/>
-                    <a:lstStyle/>
-                    <a:p>
-                      <a:pPr algn="ctr" indent="0" marL="0">
-                        <a:buNone/>
-                      </a:pPr>
-                      <a:r>
-                        <a:rPr lang="en-US" sz="700" dirty="0">
-                          <a:solidFill>
-                            <a:srgbClr val="333333"/>
-                          </a:solidFill>
-                        </a:rPr>
-                        <a:t>-</a:t>
-                      </a:r>
-                      <a:endParaRPr lang="en-US" sz="700" dirty="0"/>
-                    </a:p>
-                  </a:txBody>
-                  <a:tcPr marL="91440" marR="91440" marT="45720" marB="45720">
-                    <a:lnL w="6350" cap="flat" cmpd="sng" algn="ctr">
-                      <a:solidFill>
-                        <a:srgbClr val="CCCCCC"/>
-                      </a:solidFill>
-                      <a:prstDash val="solid"/>
-                      <a:round/>
-                      <a:headEnd type="none" w="med" len="med"/>
-                      <a:tailEnd type="none" w="med" len="med"/>
-                    </a:lnL>
-                    <a:lnR w="6350" cap="flat" cmpd="sng" algn="ctr">
-                      <a:solidFill>
-                        <a:srgbClr val="CCCCCC"/>
-                      </a:solidFill>
-                      <a:prstDash val="solid"/>
-                      <a:round/>
-                      <a:headEnd type="none" w="med" len="med"/>
-                      <a:tailEnd type="none" w="med" len="med"/>
-                    </a:lnR>
-                    <a:lnT w="6350" cap="flat" cmpd="sng" algn="ctr">
-                      <a:solidFill>
-                        <a:srgbClr val="CCCCCC"/>
-                      </a:solidFill>
-                      <a:prstDash val="solid"/>
-                      <a:round/>
-                      <a:headEnd type="none" w="med" len="med"/>
-                      <a:tailEnd type="none" w="med" len="med"/>
-                    </a:lnT>
-                    <a:lnB w="6350" cap="flat" cmpd="sng" algn="ctr">
-                      <a:solidFill>
-                        <a:srgbClr val="CCCCCC"/>
-                      </a:solidFill>
-                      <a:prstDash val="solid"/>
-                      <a:round/>
-                      <a:headEnd type="none" w="med" len="med"/>
-                      <a:tailEnd type="none" w="med" len="med"/>
-                    </a:lnB>
-                    <a:solidFill>
-                      <a:srgbClr val="FFFFFF"/>
-                    </a:solidFill>
-                  </a:tcPr>
-                </a:tc>
               </a:tr>
               <a:tr h="0">
                 <a:tc>
@@ -34497,7 +35857,7 @@
                             <a:srgbClr val="000000"/>
                           </a:solidFill>
                         </a:rPr>
-                        <a:t>ハートンホテル東品川</a:t>
+                        <a:t>ホテルケヤキゲート東京府中</a:t>
                       </a:r>
                       <a:endParaRPr lang="en-US" sz="700" dirty="0"/>
                     </a:p>
@@ -34555,64 +35915,6 @@
                             <a:srgbClr val="000000"/>
                           </a:solidFill>
                         </a:rPr>
-                        <a:t>5</a:t>
-                      </a:r>
-                      <a:endParaRPr lang="en-US" sz="700" dirty="0"/>
-                    </a:p>
-                  </a:txBody>
-                  <a:tcPr marL="91440" marR="91440" marT="45720" marB="45720">
-                    <a:lnL w="6350" cap="flat" cmpd="sng" algn="ctr">
-                      <a:solidFill>
-                        <a:srgbClr val="CCCCCC"/>
-                      </a:solidFill>
-                      <a:prstDash val="solid"/>
-                      <a:round/>
-                      <a:headEnd type="none" w="med" len="med"/>
-                      <a:tailEnd type="none" w="med" len="med"/>
-                    </a:lnL>
-                    <a:lnR w="6350" cap="flat" cmpd="sng" algn="ctr">
-                      <a:solidFill>
-                        <a:srgbClr val="CCCCCC"/>
-                      </a:solidFill>
-                      <a:prstDash val="solid"/>
-                      <a:round/>
-                      <a:headEnd type="none" w="med" len="med"/>
-                      <a:tailEnd type="none" w="med" len="med"/>
-                    </a:lnR>
-                    <a:lnT w="6350" cap="flat" cmpd="sng" algn="ctr">
-                      <a:solidFill>
-                        <a:srgbClr val="CCCCCC"/>
-                      </a:solidFill>
-                      <a:prstDash val="solid"/>
-                      <a:round/>
-                      <a:headEnd type="none" w="med" len="med"/>
-                      <a:tailEnd type="none" w="med" len="med"/>
-                    </a:lnT>
-                    <a:lnB w="6350" cap="flat" cmpd="sng" algn="ctr">
-                      <a:solidFill>
-                        <a:srgbClr val="CCCCCC"/>
-                      </a:solidFill>
-                      <a:prstDash val="solid"/>
-                      <a:round/>
-                      <a:headEnd type="none" w="med" len="med"/>
-                      <a:tailEnd type="none" w="med" len="med"/>
-                    </a:lnB>
-                  </a:tcPr>
-                </a:tc>
-                <a:tc>
-                  <a:txBody>
-                    <a:bodyPr/>
-                    <a:lstStyle/>
-                    <a:p>
-                      <a:pPr algn="ctr" indent="0" marL="0">
-                        <a:buNone/>
-                      </a:pPr>
-                      <a:r>
-                        <a:rPr lang="en-US" sz="700" dirty="0">
-                          <a:solidFill>
-                            <a:srgbClr val="E74C3C"/>
-                          </a:solidFill>
-                        </a:rPr>
                         <a:t>3</a:t>
                       </a:r>
                       <a:endParaRPr lang="en-US" sz="700" dirty="0"/>
@@ -34655,9 +35957,6 @@
                       <a:headEnd type="none" w="med" len="med"/>
                       <a:tailEnd type="none" w="med" len="med"/>
                     </a:lnB>
-                    <a:solidFill>
-                      <a:srgbClr val="FFE0B2"/>
-                    </a:solidFill>
                   </a:tcPr>
                 </a:tc>
                 <a:tc>
@@ -34918,246 +36217,6 @@
                             <a:srgbClr val="333333"/>
                           </a:solidFill>
                         </a:rPr>
-                        <a:t>1</a:t>
-                      </a:r>
-                      <a:endParaRPr lang="en-US" sz="700" dirty="0"/>
-                    </a:p>
-                  </a:txBody>
-                  <a:tcPr marL="91440" marR="91440" marT="45720" marB="45720">
-                    <a:lnL w="6350" cap="flat" cmpd="sng" algn="ctr">
-                      <a:solidFill>
-                        <a:srgbClr val="CCCCCC"/>
-                      </a:solidFill>
-                      <a:prstDash val="solid"/>
-                      <a:round/>
-                      <a:headEnd type="none" w="med" len="med"/>
-                      <a:tailEnd type="none" w="med" len="med"/>
-                    </a:lnL>
-                    <a:lnR w="6350" cap="flat" cmpd="sng" algn="ctr">
-                      <a:solidFill>
-                        <a:srgbClr val="CCCCCC"/>
-                      </a:solidFill>
-                      <a:prstDash val="solid"/>
-                      <a:round/>
-                      <a:headEnd type="none" w="med" len="med"/>
-                      <a:tailEnd type="none" w="med" len="med"/>
-                    </a:lnR>
-                    <a:lnT w="6350" cap="flat" cmpd="sng" algn="ctr">
-                      <a:solidFill>
-                        <a:srgbClr val="CCCCCC"/>
-                      </a:solidFill>
-                      <a:prstDash val="solid"/>
-                      <a:round/>
-                      <a:headEnd type="none" w="med" len="med"/>
-                      <a:tailEnd type="none" w="med" len="med"/>
-                    </a:lnT>
-                    <a:lnB w="6350" cap="flat" cmpd="sng" algn="ctr">
-                      <a:solidFill>
-                        <a:srgbClr val="CCCCCC"/>
-                      </a:solidFill>
-                      <a:prstDash val="solid"/>
-                      <a:round/>
-                      <a:headEnd type="none" w="med" len="med"/>
-                      <a:tailEnd type="none" w="med" len="med"/>
-                    </a:lnB>
-                    <a:solidFill>
-                      <a:srgbClr val="FFF9C4"/>
-                    </a:solidFill>
-                  </a:tcPr>
-                </a:tc>
-              </a:tr>
-              <a:tr h="0">
-                <a:tc>
-                  <a:txBody>
-                    <a:bodyPr/>
-                    <a:lstStyle/>
-                    <a:p>
-                      <a:pPr indent="0" marL="0">
-                        <a:buNone/>
-                      </a:pPr>
-                      <a:r>
-                        <a:rPr lang="en-US" sz="700" b="1" dirty="0">
-                          <a:solidFill>
-                            <a:srgbClr val="000000"/>
-                          </a:solidFill>
-                        </a:rPr>
-                        <a:t>ホテルケヤキゲート東京府中</a:t>
-                      </a:r>
-                      <a:endParaRPr lang="en-US" sz="700" dirty="0"/>
-                    </a:p>
-                  </a:txBody>
-                  <a:tcPr marL="91440" marR="91440" marT="45720" marB="45720">
-                    <a:lnL w="6350" cap="flat" cmpd="sng" algn="ctr">
-                      <a:solidFill>
-                        <a:srgbClr val="CCCCCC"/>
-                      </a:solidFill>
-                      <a:prstDash val="solid"/>
-                      <a:round/>
-                      <a:headEnd type="none" w="med" len="med"/>
-                      <a:tailEnd type="none" w="med" len="med"/>
-                    </a:lnL>
-                    <a:lnR w="6350" cap="flat" cmpd="sng" algn="ctr">
-                      <a:solidFill>
-                        <a:srgbClr val="CCCCCC"/>
-                      </a:solidFill>
-                      <a:prstDash val="solid"/>
-                      <a:round/>
-                      <a:headEnd type="none" w="med" len="med"/>
-                      <a:tailEnd type="none" w="med" len="med"/>
-                    </a:lnR>
-                    <a:lnT w="6350" cap="flat" cmpd="sng" algn="ctr">
-                      <a:solidFill>
-                        <a:srgbClr val="CCCCCC"/>
-                      </a:solidFill>
-                      <a:prstDash val="solid"/>
-                      <a:round/>
-                      <a:headEnd type="none" w="med" len="med"/>
-                      <a:tailEnd type="none" w="med" len="med"/>
-                    </a:lnT>
-                    <a:lnB w="6350" cap="flat" cmpd="sng" algn="ctr">
-                      <a:solidFill>
-                        <a:srgbClr val="CCCCCC"/>
-                      </a:solidFill>
-                      <a:prstDash val="solid"/>
-                      <a:round/>
-                      <a:headEnd type="none" w="med" len="med"/>
-                      <a:tailEnd type="none" w="med" len="med"/>
-                    </a:lnB>
-                  </a:tcPr>
-                </a:tc>
-                <a:tc>
-                  <a:txBody>
-                    <a:bodyPr/>
-                    <a:lstStyle/>
-                    <a:p>
-                      <a:pPr algn="ctr" indent="0" marL="0">
-                        <a:buNone/>
-                      </a:pPr>
-                      <a:r>
-                        <a:rPr lang="en-US" sz="700" b="1" dirty="0">
-                          <a:solidFill>
-                            <a:srgbClr val="000000"/>
-                          </a:solidFill>
-                        </a:rPr>
-                        <a:t>3</a:t>
-                      </a:r>
-                      <a:endParaRPr lang="en-US" sz="700" dirty="0"/>
-                    </a:p>
-                  </a:txBody>
-                  <a:tcPr marL="91440" marR="91440" marT="45720" marB="45720">
-                    <a:lnL w="6350" cap="flat" cmpd="sng" algn="ctr">
-                      <a:solidFill>
-                        <a:srgbClr val="CCCCCC"/>
-                      </a:solidFill>
-                      <a:prstDash val="solid"/>
-                      <a:round/>
-                      <a:headEnd type="none" w="med" len="med"/>
-                      <a:tailEnd type="none" w="med" len="med"/>
-                    </a:lnL>
-                    <a:lnR w="6350" cap="flat" cmpd="sng" algn="ctr">
-                      <a:solidFill>
-                        <a:srgbClr val="CCCCCC"/>
-                      </a:solidFill>
-                      <a:prstDash val="solid"/>
-                      <a:round/>
-                      <a:headEnd type="none" w="med" len="med"/>
-                      <a:tailEnd type="none" w="med" len="med"/>
-                    </a:lnR>
-                    <a:lnT w="6350" cap="flat" cmpd="sng" algn="ctr">
-                      <a:solidFill>
-                        <a:srgbClr val="CCCCCC"/>
-                      </a:solidFill>
-                      <a:prstDash val="solid"/>
-                      <a:round/>
-                      <a:headEnd type="none" w="med" len="med"/>
-                      <a:tailEnd type="none" w="med" len="med"/>
-                    </a:lnT>
-                    <a:lnB w="6350" cap="flat" cmpd="sng" algn="ctr">
-                      <a:solidFill>
-                        <a:srgbClr val="CCCCCC"/>
-                      </a:solidFill>
-                      <a:prstDash val="solid"/>
-                      <a:round/>
-                      <a:headEnd type="none" w="med" len="med"/>
-                      <a:tailEnd type="none" w="med" len="med"/>
-                    </a:lnB>
-                  </a:tcPr>
-                </a:tc>
-                <a:tc>
-                  <a:txBody>
-                    <a:bodyPr/>
-                    <a:lstStyle/>
-                    <a:p>
-                      <a:pPr algn="ctr" indent="0" marL="0">
-                        <a:buNone/>
-                      </a:pPr>
-                      <a:r>
-                        <a:rPr lang="en-US" sz="700" dirty="0">
-                          <a:solidFill>
-                            <a:srgbClr val="333333"/>
-                          </a:solidFill>
-                        </a:rPr>
-                        <a:t>2</a:t>
-                      </a:r>
-                      <a:endParaRPr lang="en-US" sz="700" dirty="0"/>
-                    </a:p>
-                  </a:txBody>
-                  <a:tcPr marL="91440" marR="91440" marT="45720" marB="45720">
-                    <a:lnL w="6350" cap="flat" cmpd="sng" algn="ctr">
-                      <a:solidFill>
-                        <a:srgbClr val="CCCCCC"/>
-                      </a:solidFill>
-                      <a:prstDash val="solid"/>
-                      <a:round/>
-                      <a:headEnd type="none" w="med" len="med"/>
-                      <a:tailEnd type="none" w="med" len="med"/>
-                    </a:lnL>
-                    <a:lnR w="6350" cap="flat" cmpd="sng" algn="ctr">
-                      <a:solidFill>
-                        <a:srgbClr val="CCCCCC"/>
-                      </a:solidFill>
-                      <a:prstDash val="solid"/>
-                      <a:round/>
-                      <a:headEnd type="none" w="med" len="med"/>
-                      <a:tailEnd type="none" w="med" len="med"/>
-                    </a:lnR>
-                    <a:lnT w="6350" cap="flat" cmpd="sng" algn="ctr">
-                      <a:solidFill>
-                        <a:srgbClr val="CCCCCC"/>
-                      </a:solidFill>
-                      <a:prstDash val="solid"/>
-                      <a:round/>
-                      <a:headEnd type="none" w="med" len="med"/>
-                      <a:tailEnd type="none" w="med" len="med"/>
-                    </a:lnT>
-                    <a:lnB w="6350" cap="flat" cmpd="sng" algn="ctr">
-                      <a:solidFill>
-                        <a:srgbClr val="CCCCCC"/>
-                      </a:solidFill>
-                      <a:prstDash val="solid"/>
-                      <a:round/>
-                      <a:headEnd type="none" w="med" len="med"/>
-                      <a:tailEnd type="none" w="med" len="med"/>
-                    </a:lnB>
-                    <a:solidFill>
-                      <a:srgbClr val="FFF9C4"/>
-                    </a:solidFill>
-                  </a:tcPr>
-                </a:tc>
-                <a:tc>
-                  <a:txBody>
-                    <a:bodyPr/>
-                    <a:lstStyle/>
-                    <a:p>
-                      <a:pPr algn="ctr" indent="0" marL="0">
-                        <a:buNone/>
-                      </a:pPr>
-                      <a:r>
-                        <a:rPr lang="en-US" sz="700" dirty="0">
-                          <a:solidFill>
-                            <a:srgbClr val="333333"/>
-                          </a:solidFill>
-                        </a:rPr>
                         <a:t>-</a:t>
                       </a:r>
                       <a:endParaRPr lang="en-US" sz="700" dirty="0"/>
@@ -35263,189 +36322,6 @@
                     </a:lnB>
                     <a:solidFill>
                       <a:srgbClr val="FFFFFF"/>
-                    </a:solidFill>
-                  </a:tcPr>
-                </a:tc>
-                <a:tc>
-                  <a:txBody>
-                    <a:bodyPr/>
-                    <a:lstStyle/>
-                    <a:p>
-                      <a:pPr algn="ctr" indent="0" marL="0">
-                        <a:buNone/>
-                      </a:pPr>
-                      <a:r>
-                        <a:rPr lang="en-US" sz="700" dirty="0">
-                          <a:solidFill>
-                            <a:srgbClr val="333333"/>
-                          </a:solidFill>
-                        </a:rPr>
-                        <a:t>-</a:t>
-                      </a:r>
-                      <a:endParaRPr lang="en-US" sz="700" dirty="0"/>
-                    </a:p>
-                  </a:txBody>
-                  <a:tcPr marL="91440" marR="91440" marT="45720" marB="45720">
-                    <a:lnL w="6350" cap="flat" cmpd="sng" algn="ctr">
-                      <a:solidFill>
-                        <a:srgbClr val="CCCCCC"/>
-                      </a:solidFill>
-                      <a:prstDash val="solid"/>
-                      <a:round/>
-                      <a:headEnd type="none" w="med" len="med"/>
-                      <a:tailEnd type="none" w="med" len="med"/>
-                    </a:lnL>
-                    <a:lnR w="6350" cap="flat" cmpd="sng" algn="ctr">
-                      <a:solidFill>
-                        <a:srgbClr val="CCCCCC"/>
-                      </a:solidFill>
-                      <a:prstDash val="solid"/>
-                      <a:round/>
-                      <a:headEnd type="none" w="med" len="med"/>
-                      <a:tailEnd type="none" w="med" len="med"/>
-                    </a:lnR>
-                    <a:lnT w="6350" cap="flat" cmpd="sng" algn="ctr">
-                      <a:solidFill>
-                        <a:srgbClr val="CCCCCC"/>
-                      </a:solidFill>
-                      <a:prstDash val="solid"/>
-                      <a:round/>
-                      <a:headEnd type="none" w="med" len="med"/>
-                      <a:tailEnd type="none" w="med" len="med"/>
-                    </a:lnT>
-                    <a:lnB w="6350" cap="flat" cmpd="sng" algn="ctr">
-                      <a:solidFill>
-                        <a:srgbClr val="CCCCCC"/>
-                      </a:solidFill>
-                      <a:prstDash val="solid"/>
-                      <a:round/>
-                      <a:headEnd type="none" w="med" len="med"/>
-                      <a:tailEnd type="none" w="med" len="med"/>
-                    </a:lnB>
-                    <a:solidFill>
-                      <a:srgbClr val="FFFFFF"/>
-                    </a:solidFill>
-                  </a:tcPr>
-                </a:tc>
-                <a:tc>
-                  <a:txBody>
-                    <a:bodyPr/>
-                    <a:lstStyle/>
-                    <a:p>
-                      <a:pPr algn="ctr" indent="0" marL="0">
-                        <a:buNone/>
-                      </a:pPr>
-                      <a:r>
-                        <a:rPr lang="en-US" sz="700" dirty="0">
-                          <a:solidFill>
-                            <a:srgbClr val="333333"/>
-                          </a:solidFill>
-                        </a:rPr>
-                        <a:t>-</a:t>
-                      </a:r>
-                      <a:endParaRPr lang="en-US" sz="700" dirty="0"/>
-                    </a:p>
-                  </a:txBody>
-                  <a:tcPr marL="91440" marR="91440" marT="45720" marB="45720">
-                    <a:lnL w="6350" cap="flat" cmpd="sng" algn="ctr">
-                      <a:solidFill>
-                        <a:srgbClr val="CCCCCC"/>
-                      </a:solidFill>
-                      <a:prstDash val="solid"/>
-                      <a:round/>
-                      <a:headEnd type="none" w="med" len="med"/>
-                      <a:tailEnd type="none" w="med" len="med"/>
-                    </a:lnL>
-                    <a:lnR w="6350" cap="flat" cmpd="sng" algn="ctr">
-                      <a:solidFill>
-                        <a:srgbClr val="CCCCCC"/>
-                      </a:solidFill>
-                      <a:prstDash val="solid"/>
-                      <a:round/>
-                      <a:headEnd type="none" w="med" len="med"/>
-                      <a:tailEnd type="none" w="med" len="med"/>
-                    </a:lnR>
-                    <a:lnT w="6350" cap="flat" cmpd="sng" algn="ctr">
-                      <a:solidFill>
-                        <a:srgbClr val="CCCCCC"/>
-                      </a:solidFill>
-                      <a:prstDash val="solid"/>
-                      <a:round/>
-                      <a:headEnd type="none" w="med" len="med"/>
-                      <a:tailEnd type="none" w="med" len="med"/>
-                    </a:lnT>
-                    <a:lnB w="6350" cap="flat" cmpd="sng" algn="ctr">
-                      <a:solidFill>
-                        <a:srgbClr val="CCCCCC"/>
-                      </a:solidFill>
-                      <a:prstDash val="solid"/>
-                      <a:round/>
-                      <a:headEnd type="none" w="med" len="med"/>
-                      <a:tailEnd type="none" w="med" len="med"/>
-                    </a:lnB>
-                    <a:solidFill>
-                      <a:srgbClr val="FFFFFF"/>
-                    </a:solidFill>
-                  </a:tcPr>
-                </a:tc>
-                <a:tc>
-                  <a:txBody>
-                    <a:bodyPr/>
-                    <a:lstStyle/>
-                    <a:p>
-                      <a:pPr algn="ctr" indent="0" marL="0">
-                        <a:buNone/>
-                      </a:pPr>
-                      <a:r>
-                        <a:rPr lang="en-US" sz="700" dirty="0">
-                          <a:solidFill>
-                            <a:srgbClr val="333333"/>
-                          </a:solidFill>
-                        </a:rPr>
-                        <a:t>1</a:t>
-                      </a:r>
-                      <a:endParaRPr lang="en-US" sz="700" dirty="0"/>
-                    </a:p>
-                  </a:txBody>
-                  <a:tcPr marL="91440" marR="91440" marT="45720" marB="45720">
-                    <a:lnL w="6350" cap="flat" cmpd="sng" algn="ctr">
-                      <a:solidFill>
-                        <a:srgbClr val="CCCCCC"/>
-                      </a:solidFill>
-                      <a:prstDash val="solid"/>
-                      <a:round/>
-                      <a:headEnd type="none" w="med" len="med"/>
-                      <a:tailEnd type="none" w="med" len="med"/>
-                    </a:lnL>
-                    <a:lnR w="6350" cap="flat" cmpd="sng" algn="ctr">
-                      <a:solidFill>
-                        <a:srgbClr val="CCCCCC"/>
-                      </a:solidFill>
-                      <a:prstDash val="solid"/>
-                      <a:round/>
-                      <a:headEnd type="none" w="med" len="med"/>
-                      <a:tailEnd type="none" w="med" len="med"/>
-                    </a:lnR>
-                    <a:lnT w="6350" cap="flat" cmpd="sng" algn="ctr">
-                      <a:solidFill>
-                        <a:srgbClr val="CCCCCC"/>
-                      </a:solidFill>
-                      <a:prstDash val="solid"/>
-                      <a:round/>
-                      <a:headEnd type="none" w="med" len="med"/>
-                      <a:tailEnd type="none" w="med" len="med"/>
-                    </a:lnT>
-                    <a:lnB w="6350" cap="flat" cmpd="sng" algn="ctr">
-                      <a:solidFill>
-                        <a:srgbClr val="CCCCCC"/>
-                      </a:solidFill>
-                      <a:prstDash val="solid"/>
-                      <a:round/>
-                      <a:headEnd type="none" w="med" len="med"/>
-                      <a:tailEnd type="none" w="med" len="med"/>
-                    </a:lnB>
-                    <a:solidFill>
-                      <a:srgbClr val="FFF9C4"/>
                     </a:solidFill>
                   </a:tcPr>
                 </a:tc>
@@ -36370,7 +37246,7 @@
                             <a:srgbClr val="333333"/>
                           </a:solidFill>
                         </a:rPr>
-                        <a:t>1</a:t>
+                        <a:t>-</a:t>
                       </a:r>
                       <a:endParaRPr lang="en-US" sz="700" dirty="0"/>
                     </a:p>
@@ -36413,7 +37289,7 @@
                       <a:tailEnd type="none" w="med" len="med"/>
                     </a:lnB>
                     <a:solidFill>
-                      <a:srgbClr val="FFF9C4"/>
+                      <a:srgbClr val="FFFFFF"/>
                     </a:solidFill>
                   </a:tcPr>
                 </a:tc>
@@ -36671,7 +37547,7 @@
                             <a:srgbClr val="333333"/>
                           </a:solidFill>
                         </a:rPr>
-                        <a:t>1</a:t>
+                        <a:t>-</a:t>
                       </a:r>
                       <a:endParaRPr lang="en-US" sz="700" dirty="0"/>
                     </a:p>
@@ -36714,7 +37590,7 @@
                       <a:tailEnd type="none" w="med" len="med"/>
                     </a:lnB>
                     <a:solidFill>
-                      <a:srgbClr val="FFF9C4"/>
+                      <a:srgbClr val="FFFFFF"/>
                     </a:solidFill>
                   </a:tcPr>
                 </a:tc>
@@ -36732,7 +37608,7 @@
                             <a:srgbClr val="333333"/>
                           </a:solidFill>
                         </a:rPr>
-                        <a:t>-</a:t>
+                        <a:t>1</a:t>
                       </a:r>
                       <a:endParaRPr lang="en-US" sz="700" dirty="0"/>
                     </a:p>
@@ -36775,7 +37651,7 @@
                       <a:tailEnd type="none" w="med" len="med"/>
                     </a:lnB>
                     <a:solidFill>
-                      <a:srgbClr val="FFFFFF"/>
+                      <a:srgbClr val="FFF9C4"/>
                     </a:solidFill>
                   </a:tcPr>
                 </a:tc>
@@ -37155,7 +38031,7 @@
                             <a:srgbClr val="333333"/>
                           </a:solidFill>
                         </a:rPr>
-                        <a:t>1</a:t>
+                        <a:t>-</a:t>
                       </a:r>
                       <a:endParaRPr lang="en-US" sz="700" dirty="0"/>
                     </a:p>
@@ -37198,7 +38074,7 @@
                       <a:tailEnd type="none" w="med" len="med"/>
                     </a:lnB>
                     <a:solidFill>
-                      <a:srgbClr val="FFF9C4"/>
+                      <a:srgbClr val="FFFFFF"/>
                     </a:solidFill>
                   </a:tcPr>
                 </a:tc>
@@ -37216,7 +38092,7 @@
                             <a:srgbClr val="333333"/>
                           </a:solidFill>
                         </a:rPr>
-                        <a:t>-</a:t>
+                        <a:t>1</a:t>
                       </a:r>
                       <a:endParaRPr lang="en-US" sz="700" dirty="0"/>
                     </a:p>
@@ -37259,7 +38135,7 @@
                       <a:tailEnd type="none" w="med" len="med"/>
                     </a:lnB>
                     <a:solidFill>
-                      <a:srgbClr val="FFFFFF"/>
+                      <a:srgbClr val="FFF9C4"/>
                     </a:solidFill>
                   </a:tcPr>
                 </a:tc>
@@ -37639,7 +38515,7 @@
                             <a:srgbClr val="333333"/>
                           </a:solidFill>
                         </a:rPr>
-                        <a:t>1</a:t>
+                        <a:t>-</a:t>
                       </a:r>
                       <a:endParaRPr lang="en-US" sz="700" dirty="0"/>
                     </a:p>
@@ -37682,7 +38558,7 @@
                       <a:tailEnd type="none" w="med" len="med"/>
                     </a:lnB>
                     <a:solidFill>
-                      <a:srgbClr val="FFF9C4"/>
+                      <a:srgbClr val="FFFFFF"/>
                     </a:solidFill>
                   </a:tcPr>
                 </a:tc>
@@ -37700,7 +38576,7 @@
                             <a:srgbClr val="333333"/>
                           </a:solidFill>
                         </a:rPr>
-                        <a:t>-</a:t>
+                        <a:t>1</a:t>
                       </a:r>
                       <a:endParaRPr lang="en-US" sz="700" dirty="0"/>
                     </a:p>
@@ -37743,7 +38619,7 @@
                       <a:tailEnd type="none" w="med" len="med"/>
                     </a:lnB>
                     <a:solidFill>
-                      <a:srgbClr val="FFFFFF"/>
+                      <a:srgbClr val="FFF9C4"/>
                     </a:solidFill>
                   </a:tcPr>
                 </a:tc>
@@ -38305,7 +39181,7 @@
                 <a:ea typeface="Arial" pitchFamily="34" charset="-122"/>
                 <a:cs typeface="Arial" pitchFamily="34" charset="-120"/>
               </a:rPr>
-              <a:t>コンフォートホテル博多（7.79点）</a:t>
+              <a:t>コンフォートホテル博多（7.72点）</a:t>
             </a:r>
             <a:endParaRPr lang="en-US" sz="800" dirty="0"/>
           </a:p>
@@ -38322,7 +39198,7 @@
                 <a:ea typeface="Arial" pitchFamily="34" charset="-122"/>
                 <a:cs typeface="Arial" pitchFamily="34" charset="-120"/>
               </a:rPr>
-              <a:t>チサンホテル浜松町（7.11点）</a:t>
+              <a:t>チサンホテル浜松町（7.08点）</a:t>
             </a:r>
             <a:endParaRPr lang="en-US" sz="800" dirty="0"/>
           </a:p>
@@ -38339,7 +39215,24 @@
                 <a:ea typeface="Arial" pitchFamily="34" charset="-122"/>
                 <a:cs typeface="Arial" pitchFamily="34" charset="-120"/>
               </a:rPr>
-              <a:t>アパホテル蒲田駅東（7.45点）</a:t>
+              <a:t>アパホテル蒲田駅東（7.43点）</a:t>
+            </a:r>
+            <a:endParaRPr lang="en-US" sz="800" dirty="0"/>
+          </a:p>
+          <a:p>
+            <a:pPr indent="0" marL="0">
+              <a:buNone/>
+            </a:pPr>
+            <a:r>
+              <a:rPr lang="en-US" sz="800" dirty="0">
+                <a:solidFill>
+                  <a:srgbClr val="333333"/>
+                </a:solidFill>
+                <a:latin typeface="Arial" pitchFamily="34" charset="0"/>
+                <a:ea typeface="Arial" pitchFamily="34" charset="-122"/>
+                <a:cs typeface="Arial" pitchFamily="34" charset="-120"/>
+              </a:rPr>
+              <a:t>コンフォートホテル横浜関内（7.41点）</a:t>
             </a:r>
             <a:endParaRPr lang="en-US" sz="800" dirty="0"/>
           </a:p>
@@ -38357,23 +39250,6 @@
                 <a:cs typeface="Arial" pitchFamily="34" charset="-120"/>
               </a:rPr>
               <a:t>コートホテル新横浜（7.03点）</a:t>
-            </a:r>
-            <a:endParaRPr lang="en-US" sz="800" dirty="0"/>
-          </a:p>
-          <a:p>
-            <a:pPr indent="0" marL="0">
-              <a:buNone/>
-            </a:pPr>
-            <a:r>
-              <a:rPr lang="en-US" sz="800" dirty="0">
-                <a:solidFill>
-                  <a:srgbClr val="333333"/>
-                </a:solidFill>
-                <a:latin typeface="Arial" pitchFamily="34" charset="0"/>
-                <a:ea typeface="Arial" pitchFamily="34" charset="-122"/>
-                <a:cs typeface="Arial" pitchFamily="34" charset="-120"/>
-              </a:rPr>
-              <a:t>コンフォートホテル横浜関内（7.46点）</a:t>
             </a:r>
             <a:endParaRPr lang="en-US" sz="800" dirty="0"/>
           </a:p>
@@ -38459,7 +39335,7 @@
                 <a:ea typeface="Arial" pitchFamily="34" charset="-122"/>
                 <a:cs typeface="Arial" pitchFamily="34" charset="-120"/>
               </a:rPr>
-              <a:t>HIGH（高） (2)</a:t>
+              <a:t>HIGH（高） (3)</a:t>
             </a:r>
             <a:endParaRPr lang="en-US" sz="1100" dirty="0"/>
           </a:p>
@@ -38498,7 +39374,7 @@
                 <a:ea typeface="Arial" pitchFamily="34" charset="-122"/>
                 <a:cs typeface="Arial" pitchFamily="34" charset="-120"/>
               </a:rPr>
-              <a:t>コンフォートイン六本木（8.15点）</a:t>
+              <a:t>コンフォートイン六本木（8.16点）</a:t>
             </a:r>
             <a:endParaRPr lang="en-US" sz="800" dirty="0"/>
           </a:p>
@@ -38515,7 +39391,24 @@
                 <a:ea typeface="Arial" pitchFamily="34" charset="-122"/>
                 <a:cs typeface="Arial" pitchFamily="34" charset="-120"/>
               </a:rPr>
-              <a:t>ホテルコメント横浜関内（8.87点）</a:t>
+              <a:t>ダイワロイネットホテル東京大崎（8.84点）</a:t>
+            </a:r>
+            <a:endParaRPr lang="en-US" sz="800" dirty="0"/>
+          </a:p>
+          <a:p>
+            <a:pPr indent="0" marL="0">
+              <a:buNone/>
+            </a:pPr>
+            <a:r>
+              <a:rPr lang="en-US" sz="800" dirty="0">
+                <a:solidFill>
+                  <a:srgbClr val="333333"/>
+                </a:solidFill>
+                <a:latin typeface="Arial" pitchFamily="34" charset="0"/>
+                <a:ea typeface="Arial" pitchFamily="34" charset="-122"/>
+                <a:cs typeface="Arial" pitchFamily="34" charset="-120"/>
+              </a:rPr>
+              <a:t>ホテルコメント横浜関内（8.88点）</a:t>
             </a:r>
             <a:endParaRPr lang="en-US" sz="800" dirty="0"/>
           </a:p>
@@ -38601,7 +39494,7 @@
                 <a:ea typeface="Arial" pitchFamily="34" charset="-122"/>
                 <a:cs typeface="Arial" pitchFamily="34" charset="-120"/>
               </a:rPr>
-              <a:t>STANDARD（標準） (10)</a:t>
+              <a:t>STANDARD（標準） (9)</a:t>
             </a:r>
             <a:endParaRPr lang="en-US" sz="1100" dirty="0"/>
           </a:p>
@@ -38640,7 +39533,7 @@
                 <a:ea typeface="Arial" pitchFamily="34" charset="-122"/>
                 <a:cs typeface="Arial" pitchFamily="34" charset="-120"/>
               </a:rPr>
-              <a:t>川崎日航ホテル（8.73点）</a:t>
+              <a:t>川崎日航ホテル（8.71点）</a:t>
             </a:r>
             <a:endParaRPr lang="en-US" sz="800" dirty="0"/>
           </a:p>
@@ -38657,7 +39550,7 @@
                 <a:ea typeface="Arial" pitchFamily="34" charset="-122"/>
                 <a:cs typeface="Arial" pitchFamily="34" charset="-120"/>
               </a:rPr>
-              <a:t>コンフォートホテル成田（8.55点）</a:t>
+              <a:t>コンフォートホテル成田（8.53点）</a:t>
             </a:r>
             <a:endParaRPr lang="en-US" sz="800" dirty="0"/>
           </a:p>
@@ -38674,7 +39567,7 @@
                 <a:ea typeface="Arial" pitchFamily="34" charset="-122"/>
                 <a:cs typeface="Arial" pitchFamily="34" charset="-120"/>
               </a:rPr>
-              <a:t>ダイワロイネットホテル東京大崎（8.87点）</a:t>
+              <a:t>ハートンホテル東品川（8.69点）</a:t>
             </a:r>
             <a:endParaRPr lang="en-US" sz="800" dirty="0"/>
           </a:p>
@@ -38691,7 +39584,7 @@
                 <a:ea typeface="Arial" pitchFamily="34" charset="-122"/>
                 <a:cs typeface="Arial" pitchFamily="34" charset="-120"/>
               </a:rPr>
-              <a:t>ハートンホテル東品川（8.65点）</a:t>
+              <a:t>ホテルケヤキゲート東京府中（8.74点）</a:t>
             </a:r>
             <a:endParaRPr lang="en-US" sz="800" dirty="0"/>
           </a:p>
@@ -38708,7 +39601,7 @@
                 <a:ea typeface="Arial" pitchFamily="34" charset="-122"/>
                 <a:cs typeface="Arial" pitchFamily="34" charset="-120"/>
               </a:rPr>
-              <a:t>ホテルケヤキゲート東京府中（8.78点）</a:t>
+              <a:t>アパホテル相模原橋本駅東（8.13点）</a:t>
             </a:r>
             <a:endParaRPr lang="en-US" sz="800" dirty="0"/>
           </a:p>
@@ -38725,7 +39618,7 @@
                 <a:ea typeface="Arial" pitchFamily="34" charset="-122"/>
                 <a:cs typeface="Arial" pitchFamily="34" charset="-120"/>
               </a:rPr>
-              <a:t>アパホテル相模原橋本駅東（8.1点）</a:t>
+              <a:t>リッチモンドホテル東京目白（8.68点）</a:t>
             </a:r>
             <a:endParaRPr lang="en-US" sz="800" dirty="0"/>
           </a:p>
@@ -38742,7 +39635,7 @@
                 <a:ea typeface="Arial" pitchFamily="34" charset="-122"/>
                 <a:cs typeface="Arial" pitchFamily="34" charset="-120"/>
               </a:rPr>
-              <a:t>リッチモンドホテル東京目白（8.69点）</a:t>
+              <a:t>変なホテル東京羽田（8.29点）</a:t>
             </a:r>
             <a:endParaRPr lang="en-US" sz="800" dirty="0"/>
           </a:p>
@@ -38759,7 +39652,7 @@
                 <a:ea typeface="Arial" pitchFamily="34" charset="-122"/>
                 <a:cs typeface="Arial" pitchFamily="34" charset="-120"/>
               </a:rPr>
-              <a:t>変なホテル東京羽田（8.27点）</a:t>
+              <a:t>第一イン池袋（9.12点）</a:t>
             </a:r>
             <a:endParaRPr lang="en-US" sz="800" dirty="0"/>
           </a:p>
@@ -38776,24 +39669,7 @@
                 <a:ea typeface="Arial" pitchFamily="34" charset="-122"/>
                 <a:cs typeface="Arial" pitchFamily="34" charset="-120"/>
               </a:rPr>
-              <a:t>第一イン池袋（9.08点）</a:t>
-            </a:r>
-            <a:endParaRPr lang="en-US" sz="800" dirty="0"/>
-          </a:p>
-          <a:p>
-            <a:pPr indent="0" marL="0">
-              <a:buNone/>
-            </a:pPr>
-            <a:r>
-              <a:rPr lang="en-US" sz="800" dirty="0">
-                <a:solidFill>
-                  <a:srgbClr val="333333"/>
-                </a:solidFill>
-                <a:latin typeface="Arial" pitchFamily="34" charset="0"/>
-                <a:ea typeface="Arial" pitchFamily="34" charset="-122"/>
-                <a:cs typeface="Arial" pitchFamily="34" charset="-120"/>
-              </a:rPr>
-              <a:t>コンフォートホテルERA東京東神田（8.94点）</a:t>
+              <a:t>コンフォートホテルERA東京東神田（8.95点）</a:t>
             </a:r>
             <a:endParaRPr lang="en-US" sz="800" dirty="0"/>
           </a:p>
@@ -38918,7 +39794,7 @@
                 <a:ea typeface="Arial" pitchFamily="34" charset="-122"/>
                 <a:cs typeface="Arial" pitchFamily="34" charset="-120"/>
               </a:rPr>
-              <a:t>京成リッチモンドホテル東京錦糸町（9.05点）</a:t>
+              <a:t>京成リッチモンドホテル東京錦糸町（9.06点）</a:t>
             </a:r>
             <a:endParaRPr lang="en-US" sz="800" dirty="0"/>
           </a:p>
@@ -38935,7 +39811,7 @@
                 <a:ea typeface="Arial" pitchFamily="34" charset="-122"/>
                 <a:cs typeface="Arial" pitchFamily="34" charset="-120"/>
               </a:rPr>
-              <a:t>コンフォートスイーツ東京ベイ（9.21点）</a:t>
+              <a:t>コンフォートスイーツ東京ベイ（9.24点）</a:t>
             </a:r>
             <a:endParaRPr lang="en-US" sz="800" dirty="0"/>
           </a:p>
@@ -39156,7 +40032,7 @@
                 <a:ea typeface="Arial" pitchFamily="34" charset="-122"/>
                 <a:cs typeface="Arial" pitchFamily="34" charset="-120"/>
               </a:rPr>
-              <a:t>優先度 #1 | 現状 7.79点 → 目標 8.5点</a:t>
+              <a:t>優先度 #1 | 現状 7.72点 → 目標 8.5点</a:t>
             </a:r>
             <a:endParaRPr lang="en-US" sz="1000" dirty="0"/>
           </a:p>
@@ -39281,7 +40157,7 @@
                 <a:ea typeface="Arial" pitchFamily="34" charset="-122"/>
                 <a:cs typeface="Arial" pitchFamily="34" charset="-120"/>
               </a:rPr>
-              <a:t>7.79</a:t>
+              <a:t>7.72</a:t>
             </a:r>
             <a:endParaRPr lang="en-US" sz="2800" dirty="0"/>
           </a:p>
@@ -40362,7 +41238,7 @@
                 <a:ea typeface="Arial" pitchFamily="34" charset="-122"/>
                 <a:cs typeface="Arial" pitchFamily="34" charset="-120"/>
               </a:rPr>
-              <a:t>優先度 #2 | 現状 7.11点 → 目標 8点</a:t>
+              <a:t>優先度 #2 | 現状 7.08点 → 目標 8点</a:t>
             </a:r>
             <a:endParaRPr lang="en-US" sz="1000" dirty="0"/>
           </a:p>
@@ -40487,7 +41363,7 @@
                 <a:ea typeface="Arial" pitchFamily="34" charset="-122"/>
                 <a:cs typeface="Arial" pitchFamily="34" charset="-120"/>
               </a:rPr>
-              <a:t>7.11</a:t>
+              <a:t>7.08</a:t>
             </a:r>
             <a:endParaRPr lang="en-US" sz="2800" dirty="0"/>
           </a:p>
@@ -41568,7 +42444,7 @@
                 <a:ea typeface="Arial" pitchFamily="34" charset="-122"/>
                 <a:cs typeface="Arial" pitchFamily="34" charset="-120"/>
               </a:rPr>
-              <a:t>優先度 #3 | 現状 7.45点 → 目標 8点</a:t>
+              <a:t>優先度 #3 | 現状 7.43点 → 目標 8点</a:t>
             </a:r>
             <a:endParaRPr lang="en-US" sz="1000" dirty="0"/>
           </a:p>
@@ -41693,7 +42569,7 @@
                 <a:ea typeface="Arial" pitchFamily="34" charset="-122"/>
                 <a:cs typeface="Arial" pitchFamily="34" charset="-120"/>
               </a:rPr>
-              <a:t>7.45</a:t>
+              <a:t>7.43</a:t>
             </a:r>
             <a:endParaRPr lang="en-US" sz="2800" dirty="0"/>
           </a:p>

--- a/納品レポート/PRIMECHANGE戦略レポート/PRIMECHANGE_清掃戦略レポート.pptx
+++ b/納品レポート/PRIMECHANGE戦略レポート/PRIMECHANGE_清掃戦略レポート.pptx
@@ -2749,7 +2749,7 @@
                 <a:ea typeface="Arial" pitchFamily="34" charset="-122"/>
                 <a:cs typeface="Arial" pitchFamily="34" charset="-120"/>
               </a:rPr>
-              <a:t>2026年3月24日</a:t>
+              <a:t>2026年3月25日</a:t>
             </a:r>
             <a:endParaRPr lang="en-US" sz="1200" dirty="0"/>
           </a:p>
@@ -2788,7 +2788,7 @@
                 <a:ea typeface="Arial" pitchFamily="34" charset="-122"/>
                 <a:cs typeface="Arial" pitchFamily="34" charset="-120"/>
               </a:rPr>
-              <a:t>対象：19ホテル | レビュー：2355件</a:t>
+              <a:t>対象：19ホテル | レビュー：2389件</a:t>
             </a:r>
             <a:endParaRPr lang="en-US" sz="1100" dirty="0"/>
           </a:p>
@@ -2950,7 +2950,7 @@
                 <a:ea typeface="Arial" pitchFamily="34" charset="-122"/>
                 <a:cs typeface="Arial" pitchFamily="34" charset="-120"/>
               </a:rPr>
-              <a:t>【URGENT】コートホテル新横浜</a:t>
+              <a:t>【URGENT】チサンホテル浜松町</a:t>
             </a:r>
             <a:endParaRPr lang="en-US" sz="2000" dirty="0"/>
           </a:p>
@@ -2989,7 +2989,7 @@
                 <a:ea typeface="Arial" pitchFamily="34" charset="-122"/>
                 <a:cs typeface="Arial" pitchFamily="34" charset="-120"/>
               </a:rPr>
-              <a:t>優先度 #4 | 現状 7.03点 → 目標 8点</a:t>
+              <a:t>優先度 #4 | 現状 7.09点 → 目標 8点</a:t>
             </a:r>
             <a:endParaRPr lang="en-US" sz="1000" dirty="0"/>
           </a:p>
@@ -3114,1213 +3114,7 @@
                 <a:ea typeface="Arial" pitchFamily="34" charset="-122"/>
                 <a:cs typeface="Arial" pitchFamily="34" charset="-120"/>
               </a:rPr>
-              <a:t>7.03</a:t>
-            </a:r>
-            <a:endParaRPr lang="en-US" sz="2800" dirty="0"/>
-          </a:p>
-        </p:txBody>
-      </p:sp>
-      <p:sp>
-        <p:nvSpPr>
-          <p:cNvPr id="9" name="Shape 7"/>
-          <p:cNvSpPr/>
-          <p:nvPr/>
-        </p:nvSpPr>
-        <p:spPr>
-          <a:xfrm>
-            <a:off x="2286000" y="731520"/>
-            <a:ext cx="1828800" cy="731520"/>
-          </a:xfrm>
-          <a:prstGeom prst="rect">
-            <a:avLst/>
-          </a:prstGeom>
-          <a:solidFill>
-            <a:srgbClr val="E8F5E9"/>
-          </a:solidFill>
-          <a:ln/>
-          <a:effectLst>
-            <a:outerShdw sx="100000" sy="100000" kx="0" ky="0" algn="bl" rotWithShape="0" blurRad="50800" dist="25400" dir="8100000">
-              <a:srgbClr val="000000">
-                <a:alpha val="10000"/>
-              </a:srgbClr>
-            </a:outerShdw>
-          </a:effectLst>
-        </p:spPr>
-      </p:sp>
-      <p:sp>
-        <p:nvSpPr>
-          <p:cNvPr id="10" name="Shape 8"/>
-          <p:cNvSpPr/>
-          <p:nvPr/>
-        </p:nvSpPr>
-        <p:spPr>
-          <a:xfrm>
-            <a:off x="2286000" y="731520"/>
-            <a:ext cx="1828800" cy="36576"/>
-          </a:xfrm>
-          <a:prstGeom prst="rect">
-            <a:avLst/>
-          </a:prstGeom>
-          <a:solidFill>
-            <a:srgbClr val="27AE60"/>
-          </a:solidFill>
-          <a:ln/>
-        </p:spPr>
-      </p:sp>
-      <p:sp>
-        <p:nvSpPr>
-          <p:cNvPr id="11" name="Text 9"/>
-          <p:cNvSpPr/>
-          <p:nvPr/>
-        </p:nvSpPr>
-        <p:spPr>
-          <a:xfrm>
-            <a:off x="2286000" y="841248"/>
-            <a:ext cx="1828800" cy="201168"/>
-          </a:xfrm>
-          <a:prstGeom prst="rect">
-            <a:avLst/>
-          </a:prstGeom>
-          <a:noFill/>
-          <a:ln/>
-        </p:spPr>
-        <p:txBody>
-          <a:bodyPr wrap="square" lIns="0" tIns="0" rIns="0" bIns="0" rtlCol="0" anchor="ctr"/>
-          <a:lstStyle/>
-          <a:p>
-            <a:pPr algn="ctr" indent="0" marL="0">
-              <a:buNone/>
-            </a:pPr>
-            <a:r>
-              <a:rPr lang="en-US" sz="900" dirty="0">
-                <a:solidFill>
-                  <a:srgbClr val="666666"/>
-                </a:solidFill>
-                <a:latin typeface="Arial" pitchFamily="34" charset="0"/>
-                <a:ea typeface="Arial" pitchFamily="34" charset="-122"/>
-                <a:cs typeface="Arial" pitchFamily="34" charset="-120"/>
-              </a:rPr>
-              <a:t>目標スコア</a:t>
-            </a:r>
-            <a:endParaRPr lang="en-US" sz="900" dirty="0"/>
-          </a:p>
-        </p:txBody>
-      </p:sp>
-      <p:sp>
-        <p:nvSpPr>
-          <p:cNvPr id="12" name="Text 10"/>
-          <p:cNvSpPr/>
-          <p:nvPr/>
-        </p:nvSpPr>
-        <p:spPr>
-          <a:xfrm>
-            <a:off x="2286000" y="1024128"/>
-            <a:ext cx="1828800" cy="411480"/>
-          </a:xfrm>
-          <a:prstGeom prst="rect">
-            <a:avLst/>
-          </a:prstGeom>
-          <a:noFill/>
-          <a:ln/>
-        </p:spPr>
-        <p:txBody>
-          <a:bodyPr wrap="square" lIns="0" tIns="0" rIns="0" bIns="0" rtlCol="0" anchor="ctr"/>
-          <a:lstStyle/>
-          <a:p>
-            <a:pPr algn="ctr" indent="0" marL="0">
-              <a:buNone/>
-            </a:pPr>
-            <a:r>
-              <a:rPr lang="en-US" sz="2800" b="1" dirty="0">
-                <a:solidFill>
-                  <a:srgbClr val="27AE60"/>
-                </a:solidFill>
-                <a:latin typeface="Arial" pitchFamily="34" charset="0"/>
-                <a:ea typeface="Arial" pitchFamily="34" charset="-122"/>
-                <a:cs typeface="Arial" pitchFamily="34" charset="-120"/>
-              </a:rPr>
-              <a:t>8</a:t>
-            </a:r>
-            <a:endParaRPr lang="en-US" sz="2800" dirty="0"/>
-          </a:p>
-        </p:txBody>
-      </p:sp>
-      <p:sp>
-        <p:nvSpPr>
-          <p:cNvPr id="13" name="Shape 11"/>
-          <p:cNvSpPr/>
-          <p:nvPr/>
-        </p:nvSpPr>
-        <p:spPr>
-          <a:xfrm>
-            <a:off x="4389120" y="731520"/>
-            <a:ext cx="4389120" cy="731520"/>
-          </a:xfrm>
-          <a:prstGeom prst="rect">
-            <a:avLst/>
-          </a:prstGeom>
-          <a:solidFill>
-            <a:srgbClr val="F5F7FA"/>
-          </a:solidFill>
-          <a:ln/>
-          <a:effectLst>
-            <a:outerShdw sx="100000" sy="100000" kx="0" ky="0" algn="bl" rotWithShape="0" blurRad="50800" dist="25400" dir="8100000">
-              <a:srgbClr val="000000">
-                <a:alpha val="10000"/>
-              </a:srgbClr>
-            </a:outerShdw>
-          </a:effectLst>
-        </p:spPr>
-      </p:sp>
-      <p:sp>
-        <p:nvSpPr>
-          <p:cNvPr id="14" name="Text 12"/>
-          <p:cNvSpPr/>
-          <p:nvPr/>
-        </p:nvSpPr>
-        <p:spPr>
-          <a:xfrm>
-            <a:off x="4480560" y="749808"/>
-            <a:ext cx="1828800" cy="182880"/>
-          </a:xfrm>
-          <a:prstGeom prst="rect">
-            <a:avLst/>
-          </a:prstGeom>
-          <a:noFill/>
-          <a:ln/>
-        </p:spPr>
-        <p:txBody>
-          <a:bodyPr wrap="square" lIns="0" tIns="0" rIns="0" bIns="0" rtlCol="0" anchor="ctr"/>
-          <a:lstStyle/>
-          <a:p>
-            <a:pPr indent="0" marL="0">
-              <a:buNone/>
-            </a:pPr>
-            <a:r>
-              <a:rPr lang="en-US" sz="900" b="1" dirty="0">
-                <a:solidFill>
-                  <a:srgbClr val="666666"/>
-                </a:solidFill>
-                <a:latin typeface="Arial" pitchFamily="34" charset="0"/>
-                <a:ea typeface="Arial" pitchFamily="34" charset="-122"/>
-                <a:cs typeface="Arial" pitchFamily="34" charset="-120"/>
-              </a:rPr>
-              <a:t>主要課題</a:t>
-            </a:r>
-            <a:endParaRPr lang="en-US" sz="900" dirty="0"/>
-          </a:p>
-        </p:txBody>
-      </p:sp>
-      <p:sp>
-        <p:nvSpPr>
-          <p:cNvPr id="15" name="Text 13"/>
-          <p:cNvSpPr/>
-          <p:nvPr/>
-        </p:nvSpPr>
-        <p:spPr>
-          <a:xfrm>
-            <a:off x="4480560" y="914400"/>
-            <a:ext cx="4206240" cy="502920"/>
-          </a:xfrm>
-          <a:prstGeom prst="rect">
-            <a:avLst/>
-          </a:prstGeom>
-          <a:noFill/>
-          <a:ln/>
-        </p:spPr>
-        <p:txBody>
-          <a:bodyPr wrap="square" lIns="0" tIns="0" rIns="0" bIns="0" rtlCol="0" anchor="ctr"/>
-          <a:lstStyle/>
-          <a:p>
-            <a:pPr indent="0" marL="0">
-              <a:buNone/>
-            </a:pPr>
-            <a:r>
-              <a:rPr lang="en-US" sz="800" dirty="0">
-                <a:solidFill>
-                  <a:srgbClr val="333333"/>
-                </a:solidFill>
-                <a:latin typeface="Arial" pitchFamily="34" charset="0"/>
-                <a:ea typeface="Arial" pitchFamily="34" charset="-122"/>
-                <a:cs typeface="Arial" pitchFamily="34" charset="-120"/>
-              </a:rPr>
-              <a:t>清掃品質全般: 8件</a:t>
-            </a:r>
-            <a:endParaRPr lang="en-US" sz="800" dirty="0"/>
-          </a:p>
-          <a:p>
-            <a:pPr indent="0" marL="0">
-              <a:buNone/>
-            </a:pPr>
-            <a:r>
-              <a:rPr lang="en-US" sz="800" dirty="0">
-                <a:solidFill>
-                  <a:srgbClr val="333333"/>
-                </a:solidFill>
-                <a:latin typeface="Arial" pitchFamily="34" charset="0"/>
-                <a:ea typeface="Arial" pitchFamily="34" charset="-122"/>
-                <a:cs typeface="Arial" pitchFamily="34" charset="-120"/>
-              </a:rPr>
-              <a:t>臭気・異臭: 2件</a:t>
-            </a:r>
-            <a:endParaRPr lang="en-US" sz="800" dirty="0"/>
-          </a:p>
-          <a:p>
-            <a:pPr indent="0" marL="0">
-              <a:buNone/>
-            </a:pPr>
-            <a:r>
-              <a:rPr lang="en-US" sz="800" dirty="0">
-                <a:solidFill>
-                  <a:srgbClr val="333333"/>
-                </a:solidFill>
-                <a:latin typeface="Arial" pitchFamily="34" charset="0"/>
-                <a:ea typeface="Arial" pitchFamily="34" charset="-122"/>
-                <a:cs typeface="Arial" pitchFamily="34" charset="-120"/>
-              </a:rPr>
-              <a:t>タバコ関連: 1件</a:t>
-            </a:r>
-            <a:endParaRPr lang="en-US" sz="800" dirty="0"/>
-          </a:p>
-          <a:p>
-            <a:pPr indent="0" marL="0">
-              <a:buNone/>
-            </a:pPr>
-            <a:r>
-              <a:rPr lang="en-US" sz="800" dirty="0">
-                <a:solidFill>
-                  <a:srgbClr val="333333"/>
-                </a:solidFill>
-                <a:latin typeface="Arial" pitchFamily="34" charset="0"/>
-                <a:ea typeface="Arial" pitchFamily="34" charset="-122"/>
-                <a:cs typeface="Arial" pitchFamily="34" charset="-120"/>
-              </a:rPr>
-              <a:t>毛髪・髪の毛: 1件</a:t>
-            </a:r>
-            <a:endParaRPr lang="en-US" sz="800" dirty="0"/>
-          </a:p>
-        </p:txBody>
-      </p:sp>
-      <p:sp>
-        <p:nvSpPr>
-          <p:cNvPr id="16" name="Shape 14"/>
-          <p:cNvSpPr/>
-          <p:nvPr/>
-        </p:nvSpPr>
-        <p:spPr>
-          <a:xfrm>
-            <a:off x="274320" y="1691640"/>
-            <a:ext cx="2743200" cy="2697480"/>
-          </a:xfrm>
-          <a:prstGeom prst="rect">
-            <a:avLst/>
-          </a:prstGeom>
-          <a:solidFill>
-            <a:srgbClr val="FFEBEE"/>
-          </a:solidFill>
-          <a:ln/>
-          <a:effectLst>
-            <a:outerShdw sx="100000" sy="100000" kx="0" ky="0" algn="bl" rotWithShape="0" blurRad="50800" dist="25400" dir="8100000">
-              <a:srgbClr val="000000">
-                <a:alpha val="10000"/>
-              </a:srgbClr>
-            </a:outerShdw>
-          </a:effectLst>
-        </p:spPr>
-      </p:sp>
-      <p:sp>
-        <p:nvSpPr>
-          <p:cNvPr id="17" name="Shape 15"/>
-          <p:cNvSpPr/>
-          <p:nvPr/>
-        </p:nvSpPr>
-        <p:spPr>
-          <a:xfrm>
-            <a:off x="274320" y="1691640"/>
-            <a:ext cx="2743200" cy="36576"/>
-          </a:xfrm>
-          <a:prstGeom prst="rect">
-            <a:avLst/>
-          </a:prstGeom>
-          <a:solidFill>
-            <a:srgbClr val="E74C3C"/>
-          </a:solidFill>
-          <a:ln/>
-        </p:spPr>
-      </p:sp>
-      <p:sp>
-        <p:nvSpPr>
-          <p:cNvPr id="18" name="Text 16"/>
-          <p:cNvSpPr/>
-          <p:nvPr/>
-        </p:nvSpPr>
-        <p:spPr>
-          <a:xfrm>
-            <a:off x="365760" y="1764792"/>
-            <a:ext cx="2560320" cy="228600"/>
-          </a:xfrm>
-          <a:prstGeom prst="rect">
-            <a:avLst/>
-          </a:prstGeom>
-          <a:noFill/>
-          <a:ln/>
-        </p:spPr>
-        <p:txBody>
-          <a:bodyPr wrap="square" lIns="0" tIns="0" rIns="0" bIns="0" rtlCol="0" anchor="ctr"/>
-          <a:lstStyle/>
-          <a:p>
-            <a:pPr indent="0" marL="0">
-              <a:buNone/>
-            </a:pPr>
-            <a:r>
-              <a:rPr lang="en-US" sz="900" b="1" dirty="0">
-                <a:solidFill>
-                  <a:srgbClr val="E74C3C"/>
-                </a:solidFill>
-                <a:latin typeface="Arial" pitchFamily="34" charset="0"/>
-                <a:ea typeface="Arial" pitchFamily="34" charset="-122"/>
-                <a:cs typeface="Arial" pitchFamily="34" charset="-120"/>
-              </a:rPr>
-              <a:t>Phase 1: 即時対応（1-2週間）</a:t>
-            </a:r>
-            <a:endParaRPr lang="en-US" sz="900" dirty="0"/>
-          </a:p>
-        </p:txBody>
-      </p:sp>
-      <p:sp>
-        <p:nvSpPr>
-          <p:cNvPr id="19" name="Text 17"/>
-          <p:cNvSpPr/>
-          <p:nvPr/>
-        </p:nvSpPr>
-        <p:spPr>
-          <a:xfrm>
-            <a:off x="365760" y="2039112"/>
-            <a:ext cx="2560320" cy="2286000"/>
-          </a:xfrm>
-          <a:prstGeom prst="rect">
-            <a:avLst/>
-          </a:prstGeom>
-          <a:noFill/>
-          <a:ln/>
-        </p:spPr>
-        <p:txBody>
-          <a:bodyPr wrap="square" lIns="0" tIns="0" rIns="0" bIns="0" rtlCol="0" anchor="t"/>
-          <a:lstStyle/>
-          <a:p>
-            <a:pPr indent="0" marL="0">
-              <a:buNone/>
-            </a:pPr>
-            <a:r>
-              <a:rPr lang="en-US" sz="700" dirty="0">
-                <a:solidFill>
-                  <a:srgbClr val="333333"/>
-                </a:solidFill>
-                <a:latin typeface="Arial" pitchFamily="34" charset="0"/>
-                <a:ea typeface="Arial" pitchFamily="34" charset="-122"/>
-                <a:cs typeface="Arial" pitchFamily="34" charset="-120"/>
-              </a:rPr>
-              <a:t>- 清掃品質基準の明確化と全スタッフへの共有</a:t>
-            </a:r>
-            <a:endParaRPr lang="en-US" sz="700" dirty="0"/>
-          </a:p>
-          <a:p>
-            <a:pPr indent="0" marL="0">
-              <a:buNone/>
-            </a:pPr>
-            <a:r>
-              <a:rPr lang="en-US" sz="700" dirty="0">
-                <a:solidFill>
-                  <a:srgbClr val="333333"/>
-                </a:solidFill>
-                <a:latin typeface="Arial" pitchFamily="34" charset="0"/>
-                <a:ea typeface="Arial" pitchFamily="34" charset="-122"/>
-                <a:cs typeface="Arial" pitchFamily="34" charset="-120"/>
-              </a:rPr>
-              <a:t>- 重点箇所（水回り・ベッド周り）の清掃手順見直し</a:t>
-            </a:r>
-            <a:endParaRPr lang="en-US" sz="700" dirty="0"/>
-          </a:p>
-          <a:p>
-            <a:pPr indent="0" marL="0">
-              <a:buNone/>
-            </a:pPr>
-            <a:r>
-              <a:rPr lang="en-US" sz="700" dirty="0">
-                <a:solidFill>
-                  <a:srgbClr val="333333"/>
-                </a:solidFill>
-                <a:latin typeface="Arial" pitchFamily="34" charset="0"/>
-                <a:ea typeface="Arial" pitchFamily="34" charset="-122"/>
-                <a:cs typeface="Arial" pitchFamily="34" charset="-120"/>
-              </a:rPr>
-              <a:t>- 臭気発生源の特定と即時対処（排水トラップ、換気扇）</a:t>
-            </a:r>
-            <a:endParaRPr lang="en-US" sz="700" dirty="0"/>
-          </a:p>
-          <a:p>
-            <a:pPr indent="0" marL="0">
-              <a:buNone/>
-            </a:pPr>
-            <a:r>
-              <a:rPr lang="en-US" sz="700" dirty="0">
-                <a:solidFill>
-                  <a:srgbClr val="333333"/>
-                </a:solidFill>
-                <a:latin typeface="Arial" pitchFamily="34" charset="0"/>
-                <a:ea typeface="Arial" pitchFamily="34" charset="-122"/>
-                <a:cs typeface="Arial" pitchFamily="34" charset="-120"/>
-              </a:rPr>
-              <a:t>- 消臭・脱臭処理の実施</a:t>
-            </a:r>
-            <a:endParaRPr lang="en-US" sz="700" dirty="0"/>
-          </a:p>
-          <a:p>
-            <a:pPr indent="0" marL="0">
-              <a:buNone/>
-            </a:pPr>
-            <a:r>
-              <a:rPr lang="en-US" sz="700" dirty="0">
-                <a:solidFill>
-                  <a:srgbClr val="333333"/>
-                </a:solidFill>
-                <a:latin typeface="Arial" pitchFamily="34" charset="0"/>
-                <a:ea typeface="Arial" pitchFamily="34" charset="-122"/>
-                <a:cs typeface="Arial" pitchFamily="34" charset="-120"/>
-              </a:rPr>
-              <a:t>- 禁煙室の残留臭調査と脱臭処理</a:t>
-            </a:r>
-            <a:endParaRPr lang="en-US" sz="700" dirty="0"/>
-          </a:p>
-        </p:txBody>
-      </p:sp>
-      <p:sp>
-        <p:nvSpPr>
-          <p:cNvPr id="20" name="Shape 18"/>
-          <p:cNvSpPr/>
-          <p:nvPr/>
-        </p:nvSpPr>
-        <p:spPr>
-          <a:xfrm>
-            <a:off x="3154680" y="1691640"/>
-            <a:ext cx="2743200" cy="2697480"/>
-          </a:xfrm>
-          <a:prstGeom prst="rect">
-            <a:avLst/>
-          </a:prstGeom>
-          <a:solidFill>
-            <a:srgbClr val="FFF3E0"/>
-          </a:solidFill>
-          <a:ln/>
-          <a:effectLst>
-            <a:outerShdw sx="100000" sy="100000" kx="0" ky="0" algn="bl" rotWithShape="0" blurRad="50800" dist="25400" dir="8100000">
-              <a:srgbClr val="000000">
-                <a:alpha val="10000"/>
-              </a:srgbClr>
-            </a:outerShdw>
-          </a:effectLst>
-        </p:spPr>
-      </p:sp>
-      <p:sp>
-        <p:nvSpPr>
-          <p:cNvPr id="21" name="Shape 19"/>
-          <p:cNvSpPr/>
-          <p:nvPr/>
-        </p:nvSpPr>
-        <p:spPr>
-          <a:xfrm>
-            <a:off x="3154680" y="1691640"/>
-            <a:ext cx="2743200" cy="36576"/>
-          </a:xfrm>
-          <a:prstGeom prst="rect">
-            <a:avLst/>
-          </a:prstGeom>
-          <a:solidFill>
-            <a:srgbClr val="FF9800"/>
-          </a:solidFill>
-          <a:ln/>
-        </p:spPr>
-      </p:sp>
-      <p:sp>
-        <p:nvSpPr>
-          <p:cNvPr id="22" name="Text 20"/>
-          <p:cNvSpPr/>
-          <p:nvPr/>
-        </p:nvSpPr>
-        <p:spPr>
-          <a:xfrm>
-            <a:off x="3246120" y="1764792"/>
-            <a:ext cx="2560320" cy="228600"/>
-          </a:xfrm>
-          <a:prstGeom prst="rect">
-            <a:avLst/>
-          </a:prstGeom>
-          <a:noFill/>
-          <a:ln/>
-        </p:spPr>
-        <p:txBody>
-          <a:bodyPr wrap="square" lIns="0" tIns="0" rIns="0" bIns="0" rtlCol="0" anchor="ctr"/>
-          <a:lstStyle/>
-          <a:p>
-            <a:pPr indent="0" marL="0">
-              <a:buNone/>
-            </a:pPr>
-            <a:r>
-              <a:rPr lang="en-US" sz="900" b="1" dirty="0">
-                <a:solidFill>
-                  <a:srgbClr val="FF9800"/>
-                </a:solidFill>
-                <a:latin typeface="Arial" pitchFamily="34" charset="0"/>
-                <a:ea typeface="Arial" pitchFamily="34" charset="-122"/>
-                <a:cs typeface="Arial" pitchFamily="34" charset="-120"/>
-              </a:rPr>
-              <a:t>Phase 2: 短期施策（1-3ヶ月）</a:t>
-            </a:r>
-            <a:endParaRPr lang="en-US" sz="900" dirty="0"/>
-          </a:p>
-        </p:txBody>
-      </p:sp>
-      <p:sp>
-        <p:nvSpPr>
-          <p:cNvPr id="23" name="Text 21"/>
-          <p:cNvSpPr/>
-          <p:nvPr/>
-        </p:nvSpPr>
-        <p:spPr>
-          <a:xfrm>
-            <a:off x="3246120" y="2039112"/>
-            <a:ext cx="2560320" cy="2286000"/>
-          </a:xfrm>
-          <a:prstGeom prst="rect">
-            <a:avLst/>
-          </a:prstGeom>
-          <a:noFill/>
-          <a:ln/>
-        </p:spPr>
-        <p:txBody>
-          <a:bodyPr wrap="square" lIns="0" tIns="0" rIns="0" bIns="0" rtlCol="0" anchor="t"/>
-          <a:lstStyle/>
-          <a:p>
-            <a:pPr indent="0" marL="0">
-              <a:buNone/>
-            </a:pPr>
-            <a:r>
-              <a:rPr lang="en-US" sz="700" dirty="0">
-                <a:solidFill>
-                  <a:srgbClr val="333333"/>
-                </a:solidFill>
-                <a:latin typeface="Arial" pitchFamily="34" charset="0"/>
-                <a:ea typeface="Arial" pitchFamily="34" charset="-122"/>
-                <a:cs typeface="Arial" pitchFamily="34" charset="-120"/>
-              </a:rPr>
-              <a:t>- 品質管理チェックリストの導入と実施</a:t>
-            </a:r>
-            <a:endParaRPr lang="en-US" sz="700" dirty="0"/>
-          </a:p>
-          <a:p>
-            <a:pPr indent="0" marL="0">
-              <a:buNone/>
-            </a:pPr>
-            <a:r>
-              <a:rPr lang="en-US" sz="700" dirty="0">
-                <a:solidFill>
-                  <a:srgbClr val="333333"/>
-                </a:solidFill>
-                <a:latin typeface="Arial" pitchFamily="34" charset="0"/>
-                <a:ea typeface="Arial" pitchFamily="34" charset="-122"/>
-                <a:cs typeface="Arial" pitchFamily="34" charset="-120"/>
-              </a:rPr>
-              <a:t>- QCインスペクション体制の構築（ランダム抜き打ち検査）</a:t>
-            </a:r>
-            <a:endParaRPr lang="en-US" sz="700" dirty="0"/>
-          </a:p>
-          <a:p>
-            <a:pPr indent="0" marL="0">
-              <a:buNone/>
-            </a:pPr>
-            <a:r>
-              <a:rPr lang="en-US" sz="700" dirty="0">
-                <a:solidFill>
-                  <a:srgbClr val="333333"/>
-                </a:solidFill>
-                <a:latin typeface="Arial" pitchFamily="34" charset="0"/>
-                <a:ea typeface="Arial" pitchFamily="34" charset="-122"/>
-                <a:cs typeface="Arial" pitchFamily="34" charset="-120"/>
-              </a:rPr>
-              <a:t>- 定期的な換気・消臭ルーティンの標準化</a:t>
-            </a:r>
-            <a:endParaRPr lang="en-US" sz="700" dirty="0"/>
-          </a:p>
-          <a:p>
-            <a:pPr indent="0" marL="0">
-              <a:buNone/>
-            </a:pPr>
-            <a:r>
-              <a:rPr lang="en-US" sz="700" dirty="0">
-                <a:solidFill>
-                  <a:srgbClr val="333333"/>
-                </a:solidFill>
-                <a:latin typeface="Arial" pitchFamily="34" charset="0"/>
-                <a:ea typeface="Arial" pitchFamily="34" charset="-122"/>
-                <a:cs typeface="Arial" pitchFamily="34" charset="-120"/>
-              </a:rPr>
-              <a:t>- エアコン・排水系の臭気源の根本対策</a:t>
-            </a:r>
-            <a:endParaRPr lang="en-US" sz="700" dirty="0"/>
-          </a:p>
-          <a:p>
-            <a:pPr indent="0" marL="0">
-              <a:buNone/>
-            </a:pPr>
-            <a:r>
-              <a:rPr lang="en-US" sz="700" dirty="0">
-                <a:solidFill>
-                  <a:srgbClr val="333333"/>
-                </a:solidFill>
-                <a:latin typeface="Arial" pitchFamily="34" charset="0"/>
-                <a:ea typeface="Arial" pitchFamily="34" charset="-122"/>
-                <a:cs typeface="Arial" pitchFamily="34" charset="-120"/>
-              </a:rPr>
-              <a:t>- 廊下・共用部の定期脱臭処理スケジュール導入</a:t>
-            </a:r>
-            <a:endParaRPr lang="en-US" sz="700" dirty="0"/>
-          </a:p>
-        </p:txBody>
-      </p:sp>
-      <p:sp>
-        <p:nvSpPr>
-          <p:cNvPr id="24" name="Shape 22"/>
-          <p:cNvSpPr/>
-          <p:nvPr/>
-        </p:nvSpPr>
-        <p:spPr>
-          <a:xfrm>
-            <a:off x="6035040" y="1691640"/>
-            <a:ext cx="2743200" cy="2697480"/>
-          </a:xfrm>
-          <a:prstGeom prst="rect">
-            <a:avLst/>
-          </a:prstGeom>
-          <a:solidFill>
-            <a:srgbClr val="E3F2FD"/>
-          </a:solidFill>
-          <a:ln/>
-          <a:effectLst>
-            <a:outerShdw sx="100000" sy="100000" kx="0" ky="0" algn="bl" rotWithShape="0" blurRad="50800" dist="25400" dir="8100000">
-              <a:srgbClr val="000000">
-                <a:alpha val="10000"/>
-              </a:srgbClr>
-            </a:outerShdw>
-          </a:effectLst>
-        </p:spPr>
-      </p:sp>
-      <p:sp>
-        <p:nvSpPr>
-          <p:cNvPr id="25" name="Shape 23"/>
-          <p:cNvSpPr/>
-          <p:nvPr/>
-        </p:nvSpPr>
-        <p:spPr>
-          <a:xfrm>
-            <a:off x="6035040" y="1691640"/>
-            <a:ext cx="2743200" cy="36576"/>
-          </a:xfrm>
-          <a:prstGeom prst="rect">
-            <a:avLst/>
-          </a:prstGeom>
-          <a:solidFill>
-            <a:srgbClr val="2196F3"/>
-          </a:solidFill>
-          <a:ln/>
-        </p:spPr>
-      </p:sp>
-      <p:sp>
-        <p:nvSpPr>
-          <p:cNvPr id="26" name="Text 24"/>
-          <p:cNvSpPr/>
-          <p:nvPr/>
-        </p:nvSpPr>
-        <p:spPr>
-          <a:xfrm>
-            <a:off x="6126480" y="1764792"/>
-            <a:ext cx="2560320" cy="228600"/>
-          </a:xfrm>
-          <a:prstGeom prst="rect">
-            <a:avLst/>
-          </a:prstGeom>
-          <a:noFill/>
-          <a:ln/>
-        </p:spPr>
-        <p:txBody>
-          <a:bodyPr wrap="square" lIns="0" tIns="0" rIns="0" bIns="0" rtlCol="0" anchor="ctr"/>
-          <a:lstStyle/>
-          <a:p>
-            <a:pPr indent="0" marL="0">
-              <a:buNone/>
-            </a:pPr>
-            <a:r>
-              <a:rPr lang="en-US" sz="900" b="1" dirty="0">
-                <a:solidFill>
-                  <a:srgbClr val="2196F3"/>
-                </a:solidFill>
-                <a:latin typeface="Arial" pitchFamily="34" charset="0"/>
-                <a:ea typeface="Arial" pitchFamily="34" charset="-122"/>
-                <a:cs typeface="Arial" pitchFamily="34" charset="-120"/>
-              </a:rPr>
-              <a:t>Phase 3: 中期施策（3-6ヶ月）</a:t>
-            </a:r>
-            <a:endParaRPr lang="en-US" sz="900" dirty="0"/>
-          </a:p>
-        </p:txBody>
-      </p:sp>
-      <p:sp>
-        <p:nvSpPr>
-          <p:cNvPr id="27" name="Text 25"/>
-          <p:cNvSpPr/>
-          <p:nvPr/>
-        </p:nvSpPr>
-        <p:spPr>
-          <a:xfrm>
-            <a:off x="6126480" y="2039112"/>
-            <a:ext cx="2560320" cy="2286000"/>
-          </a:xfrm>
-          <a:prstGeom prst="rect">
-            <a:avLst/>
-          </a:prstGeom>
-          <a:noFill/>
-          <a:ln/>
-        </p:spPr>
-        <p:txBody>
-          <a:bodyPr wrap="square" lIns="0" tIns="0" rIns="0" bIns="0" rtlCol="0" anchor="t"/>
-          <a:lstStyle/>
-          <a:p>
-            <a:pPr indent="0" marL="0">
-              <a:buNone/>
-            </a:pPr>
-            <a:r>
-              <a:rPr lang="en-US" sz="700" dirty="0">
-                <a:solidFill>
-                  <a:srgbClr val="333333"/>
-                </a:solidFill>
-                <a:latin typeface="Arial" pitchFamily="34" charset="0"/>
-                <a:ea typeface="Arial" pitchFamily="34" charset="-122"/>
-                <a:cs typeface="Arial" pitchFamily="34" charset="-120"/>
-              </a:rPr>
-              <a:t>- 清掃スタッフの定期研修プログラム導入</a:t>
-            </a:r>
-            <a:endParaRPr lang="en-US" sz="700" dirty="0"/>
-          </a:p>
-          <a:p>
-            <a:pPr indent="0" marL="0">
-              <a:buNone/>
-            </a:pPr>
-            <a:r>
-              <a:rPr lang="en-US" sz="700" dirty="0">
-                <a:solidFill>
-                  <a:srgbClr val="333333"/>
-                </a:solidFill>
-                <a:latin typeface="Arial" pitchFamily="34" charset="0"/>
-                <a:ea typeface="Arial" pitchFamily="34" charset="-122"/>
-                <a:cs typeface="Arial" pitchFamily="34" charset="-120"/>
-              </a:rPr>
-              <a:t>- デジタル清掃記録システムの検討</a:t>
-            </a:r>
-            <a:endParaRPr lang="en-US" sz="700" dirty="0"/>
-          </a:p>
-          <a:p>
-            <a:pPr indent="0" marL="0">
-              <a:buNone/>
-            </a:pPr>
-            <a:r>
-              <a:rPr lang="en-US" sz="700" dirty="0">
-                <a:solidFill>
-                  <a:srgbClr val="333333"/>
-                </a:solidFill>
-                <a:latin typeface="Arial" pitchFamily="34" charset="0"/>
-                <a:ea typeface="Arial" pitchFamily="34" charset="-122"/>
-                <a:cs typeface="Arial" pitchFamily="34" charset="-120"/>
-              </a:rPr>
-              <a:t>- オゾン脱臭機の導入検討</a:t>
-            </a:r>
-            <a:endParaRPr lang="en-US" sz="700" dirty="0"/>
-          </a:p>
-          <a:p>
-            <a:pPr indent="0" marL="0">
-              <a:buNone/>
-            </a:pPr>
-            <a:r>
-              <a:rPr lang="en-US" sz="700" dirty="0">
-                <a:solidFill>
-                  <a:srgbClr val="333333"/>
-                </a:solidFill>
-                <a:latin typeface="Arial" pitchFamily="34" charset="0"/>
-                <a:ea typeface="Arial" pitchFamily="34" charset="-122"/>
-                <a:cs typeface="Arial" pitchFamily="34" charset="-120"/>
-              </a:rPr>
-              <a:t>- 空気品質モニタリングの導入</a:t>
-            </a:r>
-            <a:endParaRPr lang="en-US" sz="700" dirty="0"/>
-          </a:p>
-          <a:p>
-            <a:pPr indent="0" marL="0">
-              <a:buNone/>
-            </a:pPr>
-            <a:r>
-              <a:rPr lang="en-US" sz="700" dirty="0">
-                <a:solidFill>
-                  <a:srgbClr val="333333"/>
-                </a:solidFill>
-                <a:latin typeface="Arial" pitchFamily="34" charset="0"/>
-                <a:ea typeface="Arial" pitchFamily="34" charset="-122"/>
-                <a:cs typeface="Arial" pitchFamily="34" charset="-120"/>
-              </a:rPr>
-              <a:t>- フロア単位での完全禁煙化提案</a:t>
-            </a:r>
-            <a:endParaRPr lang="en-US" sz="700" dirty="0"/>
-          </a:p>
-        </p:txBody>
-      </p:sp>
-      <p:sp>
-        <p:nvSpPr>
-          <p:cNvPr id="28" name="Shape 26"/>
-          <p:cNvSpPr/>
-          <p:nvPr/>
-        </p:nvSpPr>
-        <p:spPr>
-          <a:xfrm>
-            <a:off x="0" y="4800600"/>
-            <a:ext cx="9144000" cy="342900"/>
-          </a:xfrm>
-          <a:prstGeom prst="rect">
-            <a:avLst/>
-          </a:prstGeom>
-          <a:solidFill>
-            <a:srgbClr val="1B3A5C"/>
-          </a:solidFill>
-          <a:ln/>
-        </p:spPr>
-      </p:sp>
-      <p:sp>
-        <p:nvSpPr>
-          <p:cNvPr id="29" name="Text 27"/>
-          <p:cNvSpPr/>
-          <p:nvPr/>
-        </p:nvSpPr>
-        <p:spPr>
-          <a:xfrm>
-            <a:off x="457200" y="4800600"/>
-            <a:ext cx="3657600" cy="342900"/>
-          </a:xfrm>
-          <a:prstGeom prst="rect">
-            <a:avLst/>
-          </a:prstGeom>
-          <a:noFill/>
-          <a:ln/>
-        </p:spPr>
-        <p:txBody>
-          <a:bodyPr wrap="square" rtlCol="0" anchor="ctr"/>
-          <a:lstStyle/>
-          <a:p>
-            <a:pPr indent="0" marL="0">
-              <a:buNone/>
-            </a:pPr>
-            <a:r>
-              <a:rPr lang="en-US" sz="800" dirty="0">
-                <a:solidFill>
-                  <a:srgbClr val="94A3B8"/>
-                </a:solidFill>
-                <a:latin typeface="Arial" pitchFamily="34" charset="0"/>
-                <a:ea typeface="Arial" pitchFamily="34" charset="-122"/>
-                <a:cs typeface="Arial" pitchFamily="34" charset="-120"/>
-              </a:rPr>
-              <a:t>Confidential | PRIMECHANGE</a:t>
-            </a:r>
-            <a:endParaRPr lang="en-US" sz="800" dirty="0"/>
-          </a:p>
-        </p:txBody>
-      </p:sp>
-      <p:sp>
-        <p:nvSpPr>
-          <p:cNvPr id="30" name="Text 28"/>
-          <p:cNvSpPr/>
-          <p:nvPr/>
-        </p:nvSpPr>
-        <p:spPr>
-          <a:xfrm>
-            <a:off x="8229600" y="4800600"/>
-            <a:ext cx="457200" cy="342900"/>
-          </a:xfrm>
-          <a:prstGeom prst="rect">
-            <a:avLst/>
-          </a:prstGeom>
-          <a:noFill/>
-          <a:ln/>
-        </p:spPr>
-        <p:txBody>
-          <a:bodyPr wrap="square" rtlCol="0" anchor="ctr"/>
-          <a:lstStyle/>
-          <a:p>
-            <a:pPr algn="r" indent="0" marL="0">
-              <a:buNone/>
-            </a:pPr>
-            <a:r>
-              <a:rPr lang="en-US" sz="800" dirty="0">
-                <a:solidFill>
-                  <a:srgbClr val="94A3B8"/>
-                </a:solidFill>
-                <a:latin typeface="Arial" pitchFamily="34" charset="0"/>
-                <a:ea typeface="Arial" pitchFamily="34" charset="-122"/>
-                <a:cs typeface="Arial" pitchFamily="34" charset="-120"/>
-              </a:rPr>
-              <a:t>10</a:t>
-            </a:r>
-            <a:endParaRPr lang="en-US" sz="800" dirty="0"/>
-          </a:p>
-        </p:txBody>
-      </p:sp>
-    </p:spTree>
-  </p:cSld>
-  <p:clrMapOvr>
-    <a:masterClrMapping/>
-  </p:clrMapOvr>
-</p:sld>
-</file>
-
-<file path=ppt/slides/slide11.xml><?xml version="1.0" encoding="utf-8"?>
-<p:sld xmlns:a="http://schemas.openxmlformats.org/drawingml/2006/main" xmlns:r="http://schemas.openxmlformats.org/officeDocument/2006/relationships" xmlns:p="http://schemas.openxmlformats.org/presentationml/2006/main">
-  <p:cSld name="Slide 11">
-    <p:spTree>
-      <p:nvGrpSpPr>
-        <p:cNvPr id="1" name=""/>
-        <p:cNvGrpSpPr/>
-        <p:nvPr/>
-      </p:nvGrpSpPr>
-      <p:grpSpPr>
-        <a:xfrm>
-          <a:off x="0" y="0"/>
-          <a:ext cx="0" cy="0"/>
-          <a:chOff x="0" y="0"/>
-          <a:chExt cx="0" cy="0"/>
-        </a:xfrm>
-      </p:grpSpPr>
-      <p:sp>
-        <p:nvSpPr>
-          <p:cNvPr id="2" name="Shape 0"/>
-          <p:cNvSpPr/>
-          <p:nvPr/>
-        </p:nvSpPr>
-        <p:spPr>
-          <a:xfrm>
-            <a:off x="0" y="0"/>
-            <a:ext cx="9144000" cy="548640"/>
-          </a:xfrm>
-          <a:prstGeom prst="rect">
-            <a:avLst/>
-          </a:prstGeom>
-          <a:solidFill>
-            <a:srgbClr val="1B3A5C"/>
-          </a:solidFill>
-          <a:ln/>
-        </p:spPr>
-      </p:sp>
-      <p:sp>
-        <p:nvSpPr>
-          <p:cNvPr id="3" name="Text 1"/>
-          <p:cNvSpPr/>
-          <p:nvPr/>
-        </p:nvSpPr>
-        <p:spPr>
-          <a:xfrm>
-            <a:off x="457200" y="45720"/>
-            <a:ext cx="8229600" cy="320040"/>
-          </a:xfrm>
-          <a:prstGeom prst="rect">
-            <a:avLst/>
-          </a:prstGeom>
-          <a:noFill/>
-          <a:ln/>
-        </p:spPr>
-        <p:txBody>
-          <a:bodyPr wrap="square" lIns="0" tIns="0" rIns="0" bIns="0" rtlCol="0" anchor="ctr"/>
-          <a:lstStyle/>
-          <a:p>
-            <a:pPr indent="0" marL="0">
-              <a:buNone/>
-            </a:pPr>
-            <a:r>
-              <a:rPr lang="en-US" sz="2000" b="1" dirty="0">
-                <a:solidFill>
-                  <a:srgbClr val="FFFFFF"/>
-                </a:solidFill>
-                <a:latin typeface="Arial" pitchFamily="34" charset="0"/>
-                <a:ea typeface="Arial" pitchFamily="34" charset="-122"/>
-                <a:cs typeface="Arial" pitchFamily="34" charset="-120"/>
-              </a:rPr>
-              <a:t>【URGENT】チサンホテル浜松町</a:t>
-            </a:r>
-            <a:endParaRPr lang="en-US" sz="2000" dirty="0"/>
-          </a:p>
-        </p:txBody>
-      </p:sp>
-      <p:sp>
-        <p:nvSpPr>
-          <p:cNvPr id="4" name="Text 2"/>
-          <p:cNvSpPr/>
-          <p:nvPr/>
-        </p:nvSpPr>
-        <p:spPr>
-          <a:xfrm>
-            <a:off x="457200" y="320040"/>
-            <a:ext cx="8229600" cy="201168"/>
-          </a:xfrm>
-          <a:prstGeom prst="rect">
-            <a:avLst/>
-          </a:prstGeom>
-          <a:noFill/>
-          <a:ln/>
-        </p:spPr>
-        <p:txBody>
-          <a:bodyPr wrap="square" lIns="0" tIns="0" rIns="0" bIns="0" rtlCol="0" anchor="ctr"/>
-          <a:lstStyle/>
-          <a:p>
-            <a:pPr indent="0" marL="0">
-              <a:buNone/>
-            </a:pPr>
-            <a:r>
-              <a:rPr lang="en-US" sz="1000" dirty="0">
-                <a:solidFill>
-                  <a:srgbClr val="5A9BE6"/>
-                </a:solidFill>
-                <a:latin typeface="Arial" pitchFamily="34" charset="0"/>
-                <a:ea typeface="Arial" pitchFamily="34" charset="-122"/>
-                <a:cs typeface="Arial" pitchFamily="34" charset="-120"/>
-              </a:rPr>
-              <a:t>優先度 #5 | 現状 7.1点 → 目標 8点</a:t>
-            </a:r>
-            <a:endParaRPr lang="en-US" sz="1000" dirty="0"/>
-          </a:p>
-        </p:txBody>
-      </p:sp>
-      <p:sp>
-        <p:nvSpPr>
-          <p:cNvPr id="5" name="Shape 3"/>
-          <p:cNvSpPr/>
-          <p:nvPr/>
-        </p:nvSpPr>
-        <p:spPr>
-          <a:xfrm>
-            <a:off x="274320" y="731520"/>
-            <a:ext cx="1828800" cy="731520"/>
-          </a:xfrm>
-          <a:prstGeom prst="rect">
-            <a:avLst/>
-          </a:prstGeom>
-          <a:solidFill>
-            <a:srgbClr val="FFEBEE"/>
-          </a:solidFill>
-          <a:ln/>
-          <a:effectLst>
-            <a:outerShdw sx="100000" sy="100000" kx="0" ky="0" algn="bl" rotWithShape="0" blurRad="50800" dist="25400" dir="8100000">
-              <a:srgbClr val="000000">
-                <a:alpha val="10000"/>
-              </a:srgbClr>
-            </a:outerShdw>
-          </a:effectLst>
-        </p:spPr>
-      </p:sp>
-      <p:sp>
-        <p:nvSpPr>
-          <p:cNvPr id="6" name="Shape 4"/>
-          <p:cNvSpPr/>
-          <p:nvPr/>
-        </p:nvSpPr>
-        <p:spPr>
-          <a:xfrm>
-            <a:off x="274320" y="731520"/>
-            <a:ext cx="1828800" cy="36576"/>
-          </a:xfrm>
-          <a:prstGeom prst="rect">
-            <a:avLst/>
-          </a:prstGeom>
-          <a:solidFill>
-            <a:srgbClr val="E74C3C"/>
-          </a:solidFill>
-          <a:ln/>
-        </p:spPr>
-      </p:sp>
-      <p:sp>
-        <p:nvSpPr>
-          <p:cNvPr id="7" name="Text 5"/>
-          <p:cNvSpPr/>
-          <p:nvPr/>
-        </p:nvSpPr>
-        <p:spPr>
-          <a:xfrm>
-            <a:off x="274320" y="841248"/>
-            <a:ext cx="1828800" cy="201168"/>
-          </a:xfrm>
-          <a:prstGeom prst="rect">
-            <a:avLst/>
-          </a:prstGeom>
-          <a:noFill/>
-          <a:ln/>
-        </p:spPr>
-        <p:txBody>
-          <a:bodyPr wrap="square" lIns="0" tIns="0" rIns="0" bIns="0" rtlCol="0" anchor="ctr"/>
-          <a:lstStyle/>
-          <a:p>
-            <a:pPr algn="ctr" indent="0" marL="0">
-              <a:buNone/>
-            </a:pPr>
-            <a:r>
-              <a:rPr lang="en-US" sz="900" dirty="0">
-                <a:solidFill>
-                  <a:srgbClr val="666666"/>
-                </a:solidFill>
-                <a:latin typeface="Arial" pitchFamily="34" charset="0"/>
-                <a:ea typeface="Arial" pitchFamily="34" charset="-122"/>
-                <a:cs typeface="Arial" pitchFamily="34" charset="-120"/>
-              </a:rPr>
-              <a:t>現状スコア</a:t>
-            </a:r>
-            <a:endParaRPr lang="en-US" sz="900" dirty="0"/>
-          </a:p>
-        </p:txBody>
-      </p:sp>
-      <p:sp>
-        <p:nvSpPr>
-          <p:cNvPr id="8" name="Text 6"/>
-          <p:cNvSpPr/>
-          <p:nvPr/>
-        </p:nvSpPr>
-        <p:spPr>
-          <a:xfrm>
-            <a:off x="274320" y="1024128"/>
-            <a:ext cx="1828800" cy="411480"/>
-          </a:xfrm>
-          <a:prstGeom prst="rect">
-            <a:avLst/>
-          </a:prstGeom>
-          <a:noFill/>
-          <a:ln/>
-        </p:spPr>
-        <p:txBody>
-          <a:bodyPr wrap="square" lIns="0" tIns="0" rIns="0" bIns="0" rtlCol="0" anchor="ctr"/>
-          <a:lstStyle/>
-          <a:p>
-            <a:pPr algn="ctr" indent="0" marL="0">
-              <a:buNone/>
-            </a:pPr>
-            <a:r>
-              <a:rPr lang="en-US" sz="2800" b="1" dirty="0">
-                <a:solidFill>
-                  <a:srgbClr val="E74C3C"/>
-                </a:solidFill>
-                <a:latin typeface="Arial" pitchFamily="34" charset="0"/>
-                <a:ea typeface="Arial" pitchFamily="34" charset="-122"/>
-                <a:cs typeface="Arial" pitchFamily="34" charset="-120"/>
-              </a:rPr>
-              <a:t>7.1</a:t>
+              <a:t>7.09</a:t>
             </a:r>
             <a:endParaRPr lang="en-US" sz="2800" dirty="0"/>
           </a:p>
@@ -5278,6 +4072,1212 @@
                 <a:ea typeface="Arial" pitchFamily="34" charset="-122"/>
                 <a:cs typeface="Arial" pitchFamily="34" charset="-120"/>
               </a:rPr>
+              <a:t>10</a:t>
+            </a:r>
+            <a:endParaRPr lang="en-US" sz="800" dirty="0"/>
+          </a:p>
+        </p:txBody>
+      </p:sp>
+    </p:spTree>
+  </p:cSld>
+  <p:clrMapOvr>
+    <a:masterClrMapping/>
+  </p:clrMapOvr>
+</p:sld>
+</file>
+
+<file path=ppt/slides/slide11.xml><?xml version="1.0" encoding="utf-8"?>
+<p:sld xmlns:a="http://schemas.openxmlformats.org/drawingml/2006/main" xmlns:r="http://schemas.openxmlformats.org/officeDocument/2006/relationships" xmlns:p="http://schemas.openxmlformats.org/presentationml/2006/main">
+  <p:cSld name="Slide 11">
+    <p:spTree>
+      <p:nvGrpSpPr>
+        <p:cNvPr id="1" name=""/>
+        <p:cNvGrpSpPr/>
+        <p:nvPr/>
+      </p:nvGrpSpPr>
+      <p:grpSpPr>
+        <a:xfrm>
+          <a:off x="0" y="0"/>
+          <a:ext cx="0" cy="0"/>
+          <a:chOff x="0" y="0"/>
+          <a:chExt cx="0" cy="0"/>
+        </a:xfrm>
+      </p:grpSpPr>
+      <p:sp>
+        <p:nvSpPr>
+          <p:cNvPr id="2" name="Shape 0"/>
+          <p:cNvSpPr/>
+          <p:nvPr/>
+        </p:nvSpPr>
+        <p:spPr>
+          <a:xfrm>
+            <a:off x="0" y="0"/>
+            <a:ext cx="9144000" cy="548640"/>
+          </a:xfrm>
+          <a:prstGeom prst="rect">
+            <a:avLst/>
+          </a:prstGeom>
+          <a:solidFill>
+            <a:srgbClr val="1B3A5C"/>
+          </a:solidFill>
+          <a:ln/>
+        </p:spPr>
+      </p:sp>
+      <p:sp>
+        <p:nvSpPr>
+          <p:cNvPr id="3" name="Text 1"/>
+          <p:cNvSpPr/>
+          <p:nvPr/>
+        </p:nvSpPr>
+        <p:spPr>
+          <a:xfrm>
+            <a:off x="457200" y="45720"/>
+            <a:ext cx="8229600" cy="320040"/>
+          </a:xfrm>
+          <a:prstGeom prst="rect">
+            <a:avLst/>
+          </a:prstGeom>
+          <a:noFill/>
+          <a:ln/>
+        </p:spPr>
+        <p:txBody>
+          <a:bodyPr wrap="square" lIns="0" tIns="0" rIns="0" bIns="0" rtlCol="0" anchor="ctr"/>
+          <a:lstStyle/>
+          <a:p>
+            <a:pPr indent="0" marL="0">
+              <a:buNone/>
+            </a:pPr>
+            <a:r>
+              <a:rPr lang="en-US" sz="2000" b="1" dirty="0">
+                <a:solidFill>
+                  <a:srgbClr val="FFFFFF"/>
+                </a:solidFill>
+                <a:latin typeface="Arial" pitchFamily="34" charset="0"/>
+                <a:ea typeface="Arial" pitchFamily="34" charset="-122"/>
+                <a:cs typeface="Arial" pitchFamily="34" charset="-120"/>
+              </a:rPr>
+              <a:t>【URGENT】コートホテル新横浜</a:t>
+            </a:r>
+            <a:endParaRPr lang="en-US" sz="2000" dirty="0"/>
+          </a:p>
+        </p:txBody>
+      </p:sp>
+      <p:sp>
+        <p:nvSpPr>
+          <p:cNvPr id="4" name="Text 2"/>
+          <p:cNvSpPr/>
+          <p:nvPr/>
+        </p:nvSpPr>
+        <p:spPr>
+          <a:xfrm>
+            <a:off x="457200" y="320040"/>
+            <a:ext cx="8229600" cy="201168"/>
+          </a:xfrm>
+          <a:prstGeom prst="rect">
+            <a:avLst/>
+          </a:prstGeom>
+          <a:noFill/>
+          <a:ln/>
+        </p:spPr>
+        <p:txBody>
+          <a:bodyPr wrap="square" lIns="0" tIns="0" rIns="0" bIns="0" rtlCol="0" anchor="ctr"/>
+          <a:lstStyle/>
+          <a:p>
+            <a:pPr indent="0" marL="0">
+              <a:buNone/>
+            </a:pPr>
+            <a:r>
+              <a:rPr lang="en-US" sz="1000" dirty="0">
+                <a:solidFill>
+                  <a:srgbClr val="5A9BE6"/>
+                </a:solidFill>
+                <a:latin typeface="Arial" pitchFamily="34" charset="0"/>
+                <a:ea typeface="Arial" pitchFamily="34" charset="-122"/>
+                <a:cs typeface="Arial" pitchFamily="34" charset="-120"/>
+              </a:rPr>
+              <a:t>優先度 #5 | 現状 7.12点 → 目標 8点</a:t>
+            </a:r>
+            <a:endParaRPr lang="en-US" sz="1000" dirty="0"/>
+          </a:p>
+        </p:txBody>
+      </p:sp>
+      <p:sp>
+        <p:nvSpPr>
+          <p:cNvPr id="5" name="Shape 3"/>
+          <p:cNvSpPr/>
+          <p:nvPr/>
+        </p:nvSpPr>
+        <p:spPr>
+          <a:xfrm>
+            <a:off x="274320" y="731520"/>
+            <a:ext cx="1828800" cy="731520"/>
+          </a:xfrm>
+          <a:prstGeom prst="rect">
+            <a:avLst/>
+          </a:prstGeom>
+          <a:solidFill>
+            <a:srgbClr val="FFEBEE"/>
+          </a:solidFill>
+          <a:ln/>
+          <a:effectLst>
+            <a:outerShdw sx="100000" sy="100000" kx="0" ky="0" algn="bl" rotWithShape="0" blurRad="50800" dist="25400" dir="8100000">
+              <a:srgbClr val="000000">
+                <a:alpha val="10000"/>
+              </a:srgbClr>
+            </a:outerShdw>
+          </a:effectLst>
+        </p:spPr>
+      </p:sp>
+      <p:sp>
+        <p:nvSpPr>
+          <p:cNvPr id="6" name="Shape 4"/>
+          <p:cNvSpPr/>
+          <p:nvPr/>
+        </p:nvSpPr>
+        <p:spPr>
+          <a:xfrm>
+            <a:off x="274320" y="731520"/>
+            <a:ext cx="1828800" cy="36576"/>
+          </a:xfrm>
+          <a:prstGeom prst="rect">
+            <a:avLst/>
+          </a:prstGeom>
+          <a:solidFill>
+            <a:srgbClr val="E74C3C"/>
+          </a:solidFill>
+          <a:ln/>
+        </p:spPr>
+      </p:sp>
+      <p:sp>
+        <p:nvSpPr>
+          <p:cNvPr id="7" name="Text 5"/>
+          <p:cNvSpPr/>
+          <p:nvPr/>
+        </p:nvSpPr>
+        <p:spPr>
+          <a:xfrm>
+            <a:off x="274320" y="841248"/>
+            <a:ext cx="1828800" cy="201168"/>
+          </a:xfrm>
+          <a:prstGeom prst="rect">
+            <a:avLst/>
+          </a:prstGeom>
+          <a:noFill/>
+          <a:ln/>
+        </p:spPr>
+        <p:txBody>
+          <a:bodyPr wrap="square" lIns="0" tIns="0" rIns="0" bIns="0" rtlCol="0" anchor="ctr"/>
+          <a:lstStyle/>
+          <a:p>
+            <a:pPr algn="ctr" indent="0" marL="0">
+              <a:buNone/>
+            </a:pPr>
+            <a:r>
+              <a:rPr lang="en-US" sz="900" dirty="0">
+                <a:solidFill>
+                  <a:srgbClr val="666666"/>
+                </a:solidFill>
+                <a:latin typeface="Arial" pitchFamily="34" charset="0"/>
+                <a:ea typeface="Arial" pitchFamily="34" charset="-122"/>
+                <a:cs typeface="Arial" pitchFamily="34" charset="-120"/>
+              </a:rPr>
+              <a:t>現状スコア</a:t>
+            </a:r>
+            <a:endParaRPr lang="en-US" sz="900" dirty="0"/>
+          </a:p>
+        </p:txBody>
+      </p:sp>
+      <p:sp>
+        <p:nvSpPr>
+          <p:cNvPr id="8" name="Text 6"/>
+          <p:cNvSpPr/>
+          <p:nvPr/>
+        </p:nvSpPr>
+        <p:spPr>
+          <a:xfrm>
+            <a:off x="274320" y="1024128"/>
+            <a:ext cx="1828800" cy="411480"/>
+          </a:xfrm>
+          <a:prstGeom prst="rect">
+            <a:avLst/>
+          </a:prstGeom>
+          <a:noFill/>
+          <a:ln/>
+        </p:spPr>
+        <p:txBody>
+          <a:bodyPr wrap="square" lIns="0" tIns="0" rIns="0" bIns="0" rtlCol="0" anchor="ctr"/>
+          <a:lstStyle/>
+          <a:p>
+            <a:pPr algn="ctr" indent="0" marL="0">
+              <a:buNone/>
+            </a:pPr>
+            <a:r>
+              <a:rPr lang="en-US" sz="2800" b="1" dirty="0">
+                <a:solidFill>
+                  <a:srgbClr val="E74C3C"/>
+                </a:solidFill>
+                <a:latin typeface="Arial" pitchFamily="34" charset="0"/>
+                <a:ea typeface="Arial" pitchFamily="34" charset="-122"/>
+                <a:cs typeface="Arial" pitchFamily="34" charset="-120"/>
+              </a:rPr>
+              <a:t>7.12</a:t>
+            </a:r>
+            <a:endParaRPr lang="en-US" sz="2800" dirty="0"/>
+          </a:p>
+        </p:txBody>
+      </p:sp>
+      <p:sp>
+        <p:nvSpPr>
+          <p:cNvPr id="9" name="Shape 7"/>
+          <p:cNvSpPr/>
+          <p:nvPr/>
+        </p:nvSpPr>
+        <p:spPr>
+          <a:xfrm>
+            <a:off x="2286000" y="731520"/>
+            <a:ext cx="1828800" cy="731520"/>
+          </a:xfrm>
+          <a:prstGeom prst="rect">
+            <a:avLst/>
+          </a:prstGeom>
+          <a:solidFill>
+            <a:srgbClr val="E8F5E9"/>
+          </a:solidFill>
+          <a:ln/>
+          <a:effectLst>
+            <a:outerShdw sx="100000" sy="100000" kx="0" ky="0" algn="bl" rotWithShape="0" blurRad="50800" dist="25400" dir="8100000">
+              <a:srgbClr val="000000">
+                <a:alpha val="10000"/>
+              </a:srgbClr>
+            </a:outerShdw>
+          </a:effectLst>
+        </p:spPr>
+      </p:sp>
+      <p:sp>
+        <p:nvSpPr>
+          <p:cNvPr id="10" name="Shape 8"/>
+          <p:cNvSpPr/>
+          <p:nvPr/>
+        </p:nvSpPr>
+        <p:spPr>
+          <a:xfrm>
+            <a:off x="2286000" y="731520"/>
+            <a:ext cx="1828800" cy="36576"/>
+          </a:xfrm>
+          <a:prstGeom prst="rect">
+            <a:avLst/>
+          </a:prstGeom>
+          <a:solidFill>
+            <a:srgbClr val="27AE60"/>
+          </a:solidFill>
+          <a:ln/>
+        </p:spPr>
+      </p:sp>
+      <p:sp>
+        <p:nvSpPr>
+          <p:cNvPr id="11" name="Text 9"/>
+          <p:cNvSpPr/>
+          <p:nvPr/>
+        </p:nvSpPr>
+        <p:spPr>
+          <a:xfrm>
+            <a:off x="2286000" y="841248"/>
+            <a:ext cx="1828800" cy="201168"/>
+          </a:xfrm>
+          <a:prstGeom prst="rect">
+            <a:avLst/>
+          </a:prstGeom>
+          <a:noFill/>
+          <a:ln/>
+        </p:spPr>
+        <p:txBody>
+          <a:bodyPr wrap="square" lIns="0" tIns="0" rIns="0" bIns="0" rtlCol="0" anchor="ctr"/>
+          <a:lstStyle/>
+          <a:p>
+            <a:pPr algn="ctr" indent="0" marL="0">
+              <a:buNone/>
+            </a:pPr>
+            <a:r>
+              <a:rPr lang="en-US" sz="900" dirty="0">
+                <a:solidFill>
+                  <a:srgbClr val="666666"/>
+                </a:solidFill>
+                <a:latin typeface="Arial" pitchFamily="34" charset="0"/>
+                <a:ea typeface="Arial" pitchFamily="34" charset="-122"/>
+                <a:cs typeface="Arial" pitchFamily="34" charset="-120"/>
+              </a:rPr>
+              <a:t>目標スコア</a:t>
+            </a:r>
+            <a:endParaRPr lang="en-US" sz="900" dirty="0"/>
+          </a:p>
+        </p:txBody>
+      </p:sp>
+      <p:sp>
+        <p:nvSpPr>
+          <p:cNvPr id="12" name="Text 10"/>
+          <p:cNvSpPr/>
+          <p:nvPr/>
+        </p:nvSpPr>
+        <p:spPr>
+          <a:xfrm>
+            <a:off x="2286000" y="1024128"/>
+            <a:ext cx="1828800" cy="411480"/>
+          </a:xfrm>
+          <a:prstGeom prst="rect">
+            <a:avLst/>
+          </a:prstGeom>
+          <a:noFill/>
+          <a:ln/>
+        </p:spPr>
+        <p:txBody>
+          <a:bodyPr wrap="square" lIns="0" tIns="0" rIns="0" bIns="0" rtlCol="0" anchor="ctr"/>
+          <a:lstStyle/>
+          <a:p>
+            <a:pPr algn="ctr" indent="0" marL="0">
+              <a:buNone/>
+            </a:pPr>
+            <a:r>
+              <a:rPr lang="en-US" sz="2800" b="1" dirty="0">
+                <a:solidFill>
+                  <a:srgbClr val="27AE60"/>
+                </a:solidFill>
+                <a:latin typeface="Arial" pitchFamily="34" charset="0"/>
+                <a:ea typeface="Arial" pitchFamily="34" charset="-122"/>
+                <a:cs typeface="Arial" pitchFamily="34" charset="-120"/>
+              </a:rPr>
+              <a:t>8</a:t>
+            </a:r>
+            <a:endParaRPr lang="en-US" sz="2800" dirty="0"/>
+          </a:p>
+        </p:txBody>
+      </p:sp>
+      <p:sp>
+        <p:nvSpPr>
+          <p:cNvPr id="13" name="Shape 11"/>
+          <p:cNvSpPr/>
+          <p:nvPr/>
+        </p:nvSpPr>
+        <p:spPr>
+          <a:xfrm>
+            <a:off x="4389120" y="731520"/>
+            <a:ext cx="4389120" cy="731520"/>
+          </a:xfrm>
+          <a:prstGeom prst="rect">
+            <a:avLst/>
+          </a:prstGeom>
+          <a:solidFill>
+            <a:srgbClr val="F5F7FA"/>
+          </a:solidFill>
+          <a:ln/>
+          <a:effectLst>
+            <a:outerShdw sx="100000" sy="100000" kx="0" ky="0" algn="bl" rotWithShape="0" blurRad="50800" dist="25400" dir="8100000">
+              <a:srgbClr val="000000">
+                <a:alpha val="10000"/>
+              </a:srgbClr>
+            </a:outerShdw>
+          </a:effectLst>
+        </p:spPr>
+      </p:sp>
+      <p:sp>
+        <p:nvSpPr>
+          <p:cNvPr id="14" name="Text 12"/>
+          <p:cNvSpPr/>
+          <p:nvPr/>
+        </p:nvSpPr>
+        <p:spPr>
+          <a:xfrm>
+            <a:off x="4480560" y="749808"/>
+            <a:ext cx="1828800" cy="182880"/>
+          </a:xfrm>
+          <a:prstGeom prst="rect">
+            <a:avLst/>
+          </a:prstGeom>
+          <a:noFill/>
+          <a:ln/>
+        </p:spPr>
+        <p:txBody>
+          <a:bodyPr wrap="square" lIns="0" tIns="0" rIns="0" bIns="0" rtlCol="0" anchor="ctr"/>
+          <a:lstStyle/>
+          <a:p>
+            <a:pPr indent="0" marL="0">
+              <a:buNone/>
+            </a:pPr>
+            <a:r>
+              <a:rPr lang="en-US" sz="900" b="1" dirty="0">
+                <a:solidFill>
+                  <a:srgbClr val="666666"/>
+                </a:solidFill>
+                <a:latin typeface="Arial" pitchFamily="34" charset="0"/>
+                <a:ea typeface="Arial" pitchFamily="34" charset="-122"/>
+                <a:cs typeface="Arial" pitchFamily="34" charset="-120"/>
+              </a:rPr>
+              <a:t>主要課題</a:t>
+            </a:r>
+            <a:endParaRPr lang="en-US" sz="900" dirty="0"/>
+          </a:p>
+        </p:txBody>
+      </p:sp>
+      <p:sp>
+        <p:nvSpPr>
+          <p:cNvPr id="15" name="Text 13"/>
+          <p:cNvSpPr/>
+          <p:nvPr/>
+        </p:nvSpPr>
+        <p:spPr>
+          <a:xfrm>
+            <a:off x="4480560" y="914400"/>
+            <a:ext cx="4206240" cy="502920"/>
+          </a:xfrm>
+          <a:prstGeom prst="rect">
+            <a:avLst/>
+          </a:prstGeom>
+          <a:noFill/>
+          <a:ln/>
+        </p:spPr>
+        <p:txBody>
+          <a:bodyPr wrap="square" lIns="0" tIns="0" rIns="0" bIns="0" rtlCol="0" anchor="ctr"/>
+          <a:lstStyle/>
+          <a:p>
+            <a:pPr indent="0" marL="0">
+              <a:buNone/>
+            </a:pPr>
+            <a:r>
+              <a:rPr lang="en-US" sz="800" dirty="0">
+                <a:solidFill>
+                  <a:srgbClr val="333333"/>
+                </a:solidFill>
+                <a:latin typeface="Arial" pitchFamily="34" charset="0"/>
+                <a:ea typeface="Arial" pitchFamily="34" charset="-122"/>
+                <a:cs typeface="Arial" pitchFamily="34" charset="-120"/>
+              </a:rPr>
+              <a:t>清掃品質全般: 4件</a:t>
+            </a:r>
+            <a:endParaRPr lang="en-US" sz="800" dirty="0"/>
+          </a:p>
+          <a:p>
+            <a:pPr indent="0" marL="0">
+              <a:buNone/>
+            </a:pPr>
+            <a:r>
+              <a:rPr lang="en-US" sz="800" dirty="0">
+                <a:solidFill>
+                  <a:srgbClr val="333333"/>
+                </a:solidFill>
+                <a:latin typeface="Arial" pitchFamily="34" charset="0"/>
+                <a:ea typeface="Arial" pitchFamily="34" charset="-122"/>
+                <a:cs typeface="Arial" pitchFamily="34" charset="-120"/>
+              </a:rPr>
+              <a:t>臭気・異臭: 3件</a:t>
+            </a:r>
+            <a:endParaRPr lang="en-US" sz="800" dirty="0"/>
+          </a:p>
+          <a:p>
+            <a:pPr indent="0" marL="0">
+              <a:buNone/>
+            </a:pPr>
+            <a:r>
+              <a:rPr lang="en-US" sz="800" dirty="0">
+                <a:solidFill>
+                  <a:srgbClr val="333333"/>
+                </a:solidFill>
+                <a:latin typeface="Arial" pitchFamily="34" charset="0"/>
+                <a:ea typeface="Arial" pitchFamily="34" charset="-122"/>
+                <a:cs typeface="Arial" pitchFamily="34" charset="-120"/>
+              </a:rPr>
+              <a:t>タバコ関連: 2件</a:t>
+            </a:r>
+            <a:endParaRPr lang="en-US" sz="800" dirty="0"/>
+          </a:p>
+          <a:p>
+            <a:pPr indent="0" marL="0">
+              <a:buNone/>
+            </a:pPr>
+            <a:r>
+              <a:rPr lang="en-US" sz="800" dirty="0">
+                <a:solidFill>
+                  <a:srgbClr val="333333"/>
+                </a:solidFill>
+                <a:latin typeface="Arial" pitchFamily="34" charset="0"/>
+                <a:ea typeface="Arial" pitchFamily="34" charset="-122"/>
+                <a:cs typeface="Arial" pitchFamily="34" charset="-120"/>
+              </a:rPr>
+              <a:t>害虫: 1件</a:t>
+            </a:r>
+            <a:endParaRPr lang="en-US" sz="800" dirty="0"/>
+          </a:p>
+        </p:txBody>
+      </p:sp>
+      <p:sp>
+        <p:nvSpPr>
+          <p:cNvPr id="16" name="Shape 14"/>
+          <p:cNvSpPr/>
+          <p:nvPr/>
+        </p:nvSpPr>
+        <p:spPr>
+          <a:xfrm>
+            <a:off x="274320" y="1691640"/>
+            <a:ext cx="2743200" cy="2697480"/>
+          </a:xfrm>
+          <a:prstGeom prst="rect">
+            <a:avLst/>
+          </a:prstGeom>
+          <a:solidFill>
+            <a:srgbClr val="FFEBEE"/>
+          </a:solidFill>
+          <a:ln/>
+          <a:effectLst>
+            <a:outerShdw sx="100000" sy="100000" kx="0" ky="0" algn="bl" rotWithShape="0" blurRad="50800" dist="25400" dir="8100000">
+              <a:srgbClr val="000000">
+                <a:alpha val="10000"/>
+              </a:srgbClr>
+            </a:outerShdw>
+          </a:effectLst>
+        </p:spPr>
+      </p:sp>
+      <p:sp>
+        <p:nvSpPr>
+          <p:cNvPr id="17" name="Shape 15"/>
+          <p:cNvSpPr/>
+          <p:nvPr/>
+        </p:nvSpPr>
+        <p:spPr>
+          <a:xfrm>
+            <a:off x="274320" y="1691640"/>
+            <a:ext cx="2743200" cy="36576"/>
+          </a:xfrm>
+          <a:prstGeom prst="rect">
+            <a:avLst/>
+          </a:prstGeom>
+          <a:solidFill>
+            <a:srgbClr val="E74C3C"/>
+          </a:solidFill>
+          <a:ln/>
+        </p:spPr>
+      </p:sp>
+      <p:sp>
+        <p:nvSpPr>
+          <p:cNvPr id="18" name="Text 16"/>
+          <p:cNvSpPr/>
+          <p:nvPr/>
+        </p:nvSpPr>
+        <p:spPr>
+          <a:xfrm>
+            <a:off x="365760" y="1764792"/>
+            <a:ext cx="2560320" cy="228600"/>
+          </a:xfrm>
+          <a:prstGeom prst="rect">
+            <a:avLst/>
+          </a:prstGeom>
+          <a:noFill/>
+          <a:ln/>
+        </p:spPr>
+        <p:txBody>
+          <a:bodyPr wrap="square" lIns="0" tIns="0" rIns="0" bIns="0" rtlCol="0" anchor="ctr"/>
+          <a:lstStyle/>
+          <a:p>
+            <a:pPr indent="0" marL="0">
+              <a:buNone/>
+            </a:pPr>
+            <a:r>
+              <a:rPr lang="en-US" sz="900" b="1" dirty="0">
+                <a:solidFill>
+                  <a:srgbClr val="E74C3C"/>
+                </a:solidFill>
+                <a:latin typeface="Arial" pitchFamily="34" charset="0"/>
+                <a:ea typeface="Arial" pitchFamily="34" charset="-122"/>
+                <a:cs typeface="Arial" pitchFamily="34" charset="-120"/>
+              </a:rPr>
+              <a:t>Phase 1: 即時対応（1-2週間）</a:t>
+            </a:r>
+            <a:endParaRPr lang="en-US" sz="900" dirty="0"/>
+          </a:p>
+        </p:txBody>
+      </p:sp>
+      <p:sp>
+        <p:nvSpPr>
+          <p:cNvPr id="19" name="Text 17"/>
+          <p:cNvSpPr/>
+          <p:nvPr/>
+        </p:nvSpPr>
+        <p:spPr>
+          <a:xfrm>
+            <a:off x="365760" y="2039112"/>
+            <a:ext cx="2560320" cy="2286000"/>
+          </a:xfrm>
+          <a:prstGeom prst="rect">
+            <a:avLst/>
+          </a:prstGeom>
+          <a:noFill/>
+          <a:ln/>
+        </p:spPr>
+        <p:txBody>
+          <a:bodyPr wrap="square" lIns="0" tIns="0" rIns="0" bIns="0" rtlCol="0" anchor="t"/>
+          <a:lstStyle/>
+          <a:p>
+            <a:pPr indent="0" marL="0">
+              <a:buNone/>
+            </a:pPr>
+            <a:r>
+              <a:rPr lang="en-US" sz="700" dirty="0">
+                <a:solidFill>
+                  <a:srgbClr val="333333"/>
+                </a:solidFill>
+                <a:latin typeface="Arial" pitchFamily="34" charset="0"/>
+                <a:ea typeface="Arial" pitchFamily="34" charset="-122"/>
+                <a:cs typeface="Arial" pitchFamily="34" charset="-120"/>
+              </a:rPr>
+              <a:t>- 清掃品質基準の明確化と全スタッフへの共有</a:t>
+            </a:r>
+            <a:endParaRPr lang="en-US" sz="700" dirty="0"/>
+          </a:p>
+          <a:p>
+            <a:pPr indent="0" marL="0">
+              <a:buNone/>
+            </a:pPr>
+            <a:r>
+              <a:rPr lang="en-US" sz="700" dirty="0">
+                <a:solidFill>
+                  <a:srgbClr val="333333"/>
+                </a:solidFill>
+                <a:latin typeface="Arial" pitchFamily="34" charset="0"/>
+                <a:ea typeface="Arial" pitchFamily="34" charset="-122"/>
+                <a:cs typeface="Arial" pitchFamily="34" charset="-120"/>
+              </a:rPr>
+              <a:t>- 重点箇所（水回り・ベッド周り）の清掃手順見直し</a:t>
+            </a:r>
+            <a:endParaRPr lang="en-US" sz="700" dirty="0"/>
+          </a:p>
+          <a:p>
+            <a:pPr indent="0" marL="0">
+              <a:buNone/>
+            </a:pPr>
+            <a:r>
+              <a:rPr lang="en-US" sz="700" dirty="0">
+                <a:solidFill>
+                  <a:srgbClr val="333333"/>
+                </a:solidFill>
+                <a:latin typeface="Arial" pitchFamily="34" charset="0"/>
+                <a:ea typeface="Arial" pitchFamily="34" charset="-122"/>
+                <a:cs typeface="Arial" pitchFamily="34" charset="-120"/>
+              </a:rPr>
+              <a:t>- 臭気発生源の特定と即時対処（排水トラップ、換気扇）</a:t>
+            </a:r>
+            <a:endParaRPr lang="en-US" sz="700" dirty="0"/>
+          </a:p>
+          <a:p>
+            <a:pPr indent="0" marL="0">
+              <a:buNone/>
+            </a:pPr>
+            <a:r>
+              <a:rPr lang="en-US" sz="700" dirty="0">
+                <a:solidFill>
+                  <a:srgbClr val="333333"/>
+                </a:solidFill>
+                <a:latin typeface="Arial" pitchFamily="34" charset="0"/>
+                <a:ea typeface="Arial" pitchFamily="34" charset="-122"/>
+                <a:cs typeface="Arial" pitchFamily="34" charset="-120"/>
+              </a:rPr>
+              <a:t>- 消臭・脱臭処理の実施</a:t>
+            </a:r>
+            <a:endParaRPr lang="en-US" sz="700" dirty="0"/>
+          </a:p>
+          <a:p>
+            <a:pPr indent="0" marL="0">
+              <a:buNone/>
+            </a:pPr>
+            <a:r>
+              <a:rPr lang="en-US" sz="700" dirty="0">
+                <a:solidFill>
+                  <a:srgbClr val="333333"/>
+                </a:solidFill>
+                <a:latin typeface="Arial" pitchFamily="34" charset="0"/>
+                <a:ea typeface="Arial" pitchFamily="34" charset="-122"/>
+                <a:cs typeface="Arial" pitchFamily="34" charset="-120"/>
+              </a:rPr>
+              <a:t>- 禁煙室の残留臭調査と脱臭処理</a:t>
+            </a:r>
+            <a:endParaRPr lang="en-US" sz="700" dirty="0"/>
+          </a:p>
+        </p:txBody>
+      </p:sp>
+      <p:sp>
+        <p:nvSpPr>
+          <p:cNvPr id="20" name="Shape 18"/>
+          <p:cNvSpPr/>
+          <p:nvPr/>
+        </p:nvSpPr>
+        <p:spPr>
+          <a:xfrm>
+            <a:off x="3154680" y="1691640"/>
+            <a:ext cx="2743200" cy="2697480"/>
+          </a:xfrm>
+          <a:prstGeom prst="rect">
+            <a:avLst/>
+          </a:prstGeom>
+          <a:solidFill>
+            <a:srgbClr val="FFF3E0"/>
+          </a:solidFill>
+          <a:ln/>
+          <a:effectLst>
+            <a:outerShdw sx="100000" sy="100000" kx="0" ky="0" algn="bl" rotWithShape="0" blurRad="50800" dist="25400" dir="8100000">
+              <a:srgbClr val="000000">
+                <a:alpha val="10000"/>
+              </a:srgbClr>
+            </a:outerShdw>
+          </a:effectLst>
+        </p:spPr>
+      </p:sp>
+      <p:sp>
+        <p:nvSpPr>
+          <p:cNvPr id="21" name="Shape 19"/>
+          <p:cNvSpPr/>
+          <p:nvPr/>
+        </p:nvSpPr>
+        <p:spPr>
+          <a:xfrm>
+            <a:off x="3154680" y="1691640"/>
+            <a:ext cx="2743200" cy="36576"/>
+          </a:xfrm>
+          <a:prstGeom prst="rect">
+            <a:avLst/>
+          </a:prstGeom>
+          <a:solidFill>
+            <a:srgbClr val="FF9800"/>
+          </a:solidFill>
+          <a:ln/>
+        </p:spPr>
+      </p:sp>
+      <p:sp>
+        <p:nvSpPr>
+          <p:cNvPr id="22" name="Text 20"/>
+          <p:cNvSpPr/>
+          <p:nvPr/>
+        </p:nvSpPr>
+        <p:spPr>
+          <a:xfrm>
+            <a:off x="3246120" y="1764792"/>
+            <a:ext cx="2560320" cy="228600"/>
+          </a:xfrm>
+          <a:prstGeom prst="rect">
+            <a:avLst/>
+          </a:prstGeom>
+          <a:noFill/>
+          <a:ln/>
+        </p:spPr>
+        <p:txBody>
+          <a:bodyPr wrap="square" lIns="0" tIns="0" rIns="0" bIns="0" rtlCol="0" anchor="ctr"/>
+          <a:lstStyle/>
+          <a:p>
+            <a:pPr indent="0" marL="0">
+              <a:buNone/>
+            </a:pPr>
+            <a:r>
+              <a:rPr lang="en-US" sz="900" b="1" dirty="0">
+                <a:solidFill>
+                  <a:srgbClr val="FF9800"/>
+                </a:solidFill>
+                <a:latin typeface="Arial" pitchFamily="34" charset="0"/>
+                <a:ea typeface="Arial" pitchFamily="34" charset="-122"/>
+                <a:cs typeface="Arial" pitchFamily="34" charset="-120"/>
+              </a:rPr>
+              <a:t>Phase 2: 短期施策（1-3ヶ月）</a:t>
+            </a:r>
+            <a:endParaRPr lang="en-US" sz="900" dirty="0"/>
+          </a:p>
+        </p:txBody>
+      </p:sp>
+      <p:sp>
+        <p:nvSpPr>
+          <p:cNvPr id="23" name="Text 21"/>
+          <p:cNvSpPr/>
+          <p:nvPr/>
+        </p:nvSpPr>
+        <p:spPr>
+          <a:xfrm>
+            <a:off x="3246120" y="2039112"/>
+            <a:ext cx="2560320" cy="2286000"/>
+          </a:xfrm>
+          <a:prstGeom prst="rect">
+            <a:avLst/>
+          </a:prstGeom>
+          <a:noFill/>
+          <a:ln/>
+        </p:spPr>
+        <p:txBody>
+          <a:bodyPr wrap="square" lIns="0" tIns="0" rIns="0" bIns="0" rtlCol="0" anchor="t"/>
+          <a:lstStyle/>
+          <a:p>
+            <a:pPr indent="0" marL="0">
+              <a:buNone/>
+            </a:pPr>
+            <a:r>
+              <a:rPr lang="en-US" sz="700" dirty="0">
+                <a:solidFill>
+                  <a:srgbClr val="333333"/>
+                </a:solidFill>
+                <a:latin typeface="Arial" pitchFamily="34" charset="0"/>
+                <a:ea typeface="Arial" pitchFamily="34" charset="-122"/>
+                <a:cs typeface="Arial" pitchFamily="34" charset="-120"/>
+              </a:rPr>
+              <a:t>- 品質管理チェックリストの導入と実施</a:t>
+            </a:r>
+            <a:endParaRPr lang="en-US" sz="700" dirty="0"/>
+          </a:p>
+          <a:p>
+            <a:pPr indent="0" marL="0">
+              <a:buNone/>
+            </a:pPr>
+            <a:r>
+              <a:rPr lang="en-US" sz="700" dirty="0">
+                <a:solidFill>
+                  <a:srgbClr val="333333"/>
+                </a:solidFill>
+                <a:latin typeface="Arial" pitchFamily="34" charset="0"/>
+                <a:ea typeface="Arial" pitchFamily="34" charset="-122"/>
+                <a:cs typeface="Arial" pitchFamily="34" charset="-120"/>
+              </a:rPr>
+              <a:t>- QCインスペクション体制の構築（ランダム抜き打ち検査）</a:t>
+            </a:r>
+            <a:endParaRPr lang="en-US" sz="700" dirty="0"/>
+          </a:p>
+          <a:p>
+            <a:pPr indent="0" marL="0">
+              <a:buNone/>
+            </a:pPr>
+            <a:r>
+              <a:rPr lang="en-US" sz="700" dirty="0">
+                <a:solidFill>
+                  <a:srgbClr val="333333"/>
+                </a:solidFill>
+                <a:latin typeface="Arial" pitchFamily="34" charset="0"/>
+                <a:ea typeface="Arial" pitchFamily="34" charset="-122"/>
+                <a:cs typeface="Arial" pitchFamily="34" charset="-120"/>
+              </a:rPr>
+              <a:t>- 定期的な換気・消臭ルーティンの標準化</a:t>
+            </a:r>
+            <a:endParaRPr lang="en-US" sz="700" dirty="0"/>
+          </a:p>
+          <a:p>
+            <a:pPr indent="0" marL="0">
+              <a:buNone/>
+            </a:pPr>
+            <a:r>
+              <a:rPr lang="en-US" sz="700" dirty="0">
+                <a:solidFill>
+                  <a:srgbClr val="333333"/>
+                </a:solidFill>
+                <a:latin typeface="Arial" pitchFamily="34" charset="0"/>
+                <a:ea typeface="Arial" pitchFamily="34" charset="-122"/>
+                <a:cs typeface="Arial" pitchFamily="34" charset="-120"/>
+              </a:rPr>
+              <a:t>- エアコン・排水系の臭気源の根本対策</a:t>
+            </a:r>
+            <a:endParaRPr lang="en-US" sz="700" dirty="0"/>
+          </a:p>
+          <a:p>
+            <a:pPr indent="0" marL="0">
+              <a:buNone/>
+            </a:pPr>
+            <a:r>
+              <a:rPr lang="en-US" sz="700" dirty="0">
+                <a:solidFill>
+                  <a:srgbClr val="333333"/>
+                </a:solidFill>
+                <a:latin typeface="Arial" pitchFamily="34" charset="0"/>
+                <a:ea typeface="Arial" pitchFamily="34" charset="-122"/>
+                <a:cs typeface="Arial" pitchFamily="34" charset="-120"/>
+              </a:rPr>
+              <a:t>- 廊下・共用部の定期脱臭処理スケジュール導入</a:t>
+            </a:r>
+            <a:endParaRPr lang="en-US" sz="700" dirty="0"/>
+          </a:p>
+        </p:txBody>
+      </p:sp>
+      <p:sp>
+        <p:nvSpPr>
+          <p:cNvPr id="24" name="Shape 22"/>
+          <p:cNvSpPr/>
+          <p:nvPr/>
+        </p:nvSpPr>
+        <p:spPr>
+          <a:xfrm>
+            <a:off x="6035040" y="1691640"/>
+            <a:ext cx="2743200" cy="2697480"/>
+          </a:xfrm>
+          <a:prstGeom prst="rect">
+            <a:avLst/>
+          </a:prstGeom>
+          <a:solidFill>
+            <a:srgbClr val="E3F2FD"/>
+          </a:solidFill>
+          <a:ln/>
+          <a:effectLst>
+            <a:outerShdw sx="100000" sy="100000" kx="0" ky="0" algn="bl" rotWithShape="0" blurRad="50800" dist="25400" dir="8100000">
+              <a:srgbClr val="000000">
+                <a:alpha val="10000"/>
+              </a:srgbClr>
+            </a:outerShdw>
+          </a:effectLst>
+        </p:spPr>
+      </p:sp>
+      <p:sp>
+        <p:nvSpPr>
+          <p:cNvPr id="25" name="Shape 23"/>
+          <p:cNvSpPr/>
+          <p:nvPr/>
+        </p:nvSpPr>
+        <p:spPr>
+          <a:xfrm>
+            <a:off x="6035040" y="1691640"/>
+            <a:ext cx="2743200" cy="36576"/>
+          </a:xfrm>
+          <a:prstGeom prst="rect">
+            <a:avLst/>
+          </a:prstGeom>
+          <a:solidFill>
+            <a:srgbClr val="2196F3"/>
+          </a:solidFill>
+          <a:ln/>
+        </p:spPr>
+      </p:sp>
+      <p:sp>
+        <p:nvSpPr>
+          <p:cNvPr id="26" name="Text 24"/>
+          <p:cNvSpPr/>
+          <p:nvPr/>
+        </p:nvSpPr>
+        <p:spPr>
+          <a:xfrm>
+            <a:off x="6126480" y="1764792"/>
+            <a:ext cx="2560320" cy="228600"/>
+          </a:xfrm>
+          <a:prstGeom prst="rect">
+            <a:avLst/>
+          </a:prstGeom>
+          <a:noFill/>
+          <a:ln/>
+        </p:spPr>
+        <p:txBody>
+          <a:bodyPr wrap="square" lIns="0" tIns="0" rIns="0" bIns="0" rtlCol="0" anchor="ctr"/>
+          <a:lstStyle/>
+          <a:p>
+            <a:pPr indent="0" marL="0">
+              <a:buNone/>
+            </a:pPr>
+            <a:r>
+              <a:rPr lang="en-US" sz="900" b="1" dirty="0">
+                <a:solidFill>
+                  <a:srgbClr val="2196F3"/>
+                </a:solidFill>
+                <a:latin typeface="Arial" pitchFamily="34" charset="0"/>
+                <a:ea typeface="Arial" pitchFamily="34" charset="-122"/>
+                <a:cs typeface="Arial" pitchFamily="34" charset="-120"/>
+              </a:rPr>
+              <a:t>Phase 3: 中期施策（3-6ヶ月）</a:t>
+            </a:r>
+            <a:endParaRPr lang="en-US" sz="900" dirty="0"/>
+          </a:p>
+        </p:txBody>
+      </p:sp>
+      <p:sp>
+        <p:nvSpPr>
+          <p:cNvPr id="27" name="Text 25"/>
+          <p:cNvSpPr/>
+          <p:nvPr/>
+        </p:nvSpPr>
+        <p:spPr>
+          <a:xfrm>
+            <a:off x="6126480" y="2039112"/>
+            <a:ext cx="2560320" cy="2286000"/>
+          </a:xfrm>
+          <a:prstGeom prst="rect">
+            <a:avLst/>
+          </a:prstGeom>
+          <a:noFill/>
+          <a:ln/>
+        </p:spPr>
+        <p:txBody>
+          <a:bodyPr wrap="square" lIns="0" tIns="0" rIns="0" bIns="0" rtlCol="0" anchor="t"/>
+          <a:lstStyle/>
+          <a:p>
+            <a:pPr indent="0" marL="0">
+              <a:buNone/>
+            </a:pPr>
+            <a:r>
+              <a:rPr lang="en-US" sz="700" dirty="0">
+                <a:solidFill>
+                  <a:srgbClr val="333333"/>
+                </a:solidFill>
+                <a:latin typeface="Arial" pitchFamily="34" charset="0"/>
+                <a:ea typeface="Arial" pitchFamily="34" charset="-122"/>
+                <a:cs typeface="Arial" pitchFamily="34" charset="-120"/>
+              </a:rPr>
+              <a:t>- 清掃スタッフの定期研修プログラム導入</a:t>
+            </a:r>
+            <a:endParaRPr lang="en-US" sz="700" dirty="0"/>
+          </a:p>
+          <a:p>
+            <a:pPr indent="0" marL="0">
+              <a:buNone/>
+            </a:pPr>
+            <a:r>
+              <a:rPr lang="en-US" sz="700" dirty="0">
+                <a:solidFill>
+                  <a:srgbClr val="333333"/>
+                </a:solidFill>
+                <a:latin typeface="Arial" pitchFamily="34" charset="0"/>
+                <a:ea typeface="Arial" pitchFamily="34" charset="-122"/>
+                <a:cs typeface="Arial" pitchFamily="34" charset="-120"/>
+              </a:rPr>
+              <a:t>- デジタル清掃記録システムの検討</a:t>
+            </a:r>
+            <a:endParaRPr lang="en-US" sz="700" dirty="0"/>
+          </a:p>
+          <a:p>
+            <a:pPr indent="0" marL="0">
+              <a:buNone/>
+            </a:pPr>
+            <a:r>
+              <a:rPr lang="en-US" sz="700" dirty="0">
+                <a:solidFill>
+                  <a:srgbClr val="333333"/>
+                </a:solidFill>
+                <a:latin typeface="Arial" pitchFamily="34" charset="0"/>
+                <a:ea typeface="Arial" pitchFamily="34" charset="-122"/>
+                <a:cs typeface="Arial" pitchFamily="34" charset="-120"/>
+              </a:rPr>
+              <a:t>- オゾン脱臭機の導入検討</a:t>
+            </a:r>
+            <a:endParaRPr lang="en-US" sz="700" dirty="0"/>
+          </a:p>
+          <a:p>
+            <a:pPr indent="0" marL="0">
+              <a:buNone/>
+            </a:pPr>
+            <a:r>
+              <a:rPr lang="en-US" sz="700" dirty="0">
+                <a:solidFill>
+                  <a:srgbClr val="333333"/>
+                </a:solidFill>
+                <a:latin typeface="Arial" pitchFamily="34" charset="0"/>
+                <a:ea typeface="Arial" pitchFamily="34" charset="-122"/>
+                <a:cs typeface="Arial" pitchFamily="34" charset="-120"/>
+              </a:rPr>
+              <a:t>- 空気品質モニタリングの導入</a:t>
+            </a:r>
+            <a:endParaRPr lang="en-US" sz="700" dirty="0"/>
+          </a:p>
+          <a:p>
+            <a:pPr indent="0" marL="0">
+              <a:buNone/>
+            </a:pPr>
+            <a:r>
+              <a:rPr lang="en-US" sz="700" dirty="0">
+                <a:solidFill>
+                  <a:srgbClr val="333333"/>
+                </a:solidFill>
+                <a:latin typeface="Arial" pitchFamily="34" charset="0"/>
+                <a:ea typeface="Arial" pitchFamily="34" charset="-122"/>
+                <a:cs typeface="Arial" pitchFamily="34" charset="-120"/>
+              </a:rPr>
+              <a:t>- フロア単位での完全禁煙化提案</a:t>
+            </a:r>
+            <a:endParaRPr lang="en-US" sz="700" dirty="0"/>
+          </a:p>
+        </p:txBody>
+      </p:sp>
+      <p:sp>
+        <p:nvSpPr>
+          <p:cNvPr id="28" name="Shape 26"/>
+          <p:cNvSpPr/>
+          <p:nvPr/>
+        </p:nvSpPr>
+        <p:spPr>
+          <a:xfrm>
+            <a:off x="0" y="4800600"/>
+            <a:ext cx="9144000" cy="342900"/>
+          </a:xfrm>
+          <a:prstGeom prst="rect">
+            <a:avLst/>
+          </a:prstGeom>
+          <a:solidFill>
+            <a:srgbClr val="1B3A5C"/>
+          </a:solidFill>
+          <a:ln/>
+        </p:spPr>
+      </p:sp>
+      <p:sp>
+        <p:nvSpPr>
+          <p:cNvPr id="29" name="Text 27"/>
+          <p:cNvSpPr/>
+          <p:nvPr/>
+        </p:nvSpPr>
+        <p:spPr>
+          <a:xfrm>
+            <a:off x="457200" y="4800600"/>
+            <a:ext cx="3657600" cy="342900"/>
+          </a:xfrm>
+          <a:prstGeom prst="rect">
+            <a:avLst/>
+          </a:prstGeom>
+          <a:noFill/>
+          <a:ln/>
+        </p:spPr>
+        <p:txBody>
+          <a:bodyPr wrap="square" rtlCol="0" anchor="ctr"/>
+          <a:lstStyle/>
+          <a:p>
+            <a:pPr indent="0" marL="0">
+              <a:buNone/>
+            </a:pPr>
+            <a:r>
+              <a:rPr lang="en-US" sz="800" dirty="0">
+                <a:solidFill>
+                  <a:srgbClr val="94A3B8"/>
+                </a:solidFill>
+                <a:latin typeface="Arial" pitchFamily="34" charset="0"/>
+                <a:ea typeface="Arial" pitchFamily="34" charset="-122"/>
+                <a:cs typeface="Arial" pitchFamily="34" charset="-120"/>
+              </a:rPr>
+              <a:t>Confidential | PRIMECHANGE</a:t>
+            </a:r>
+            <a:endParaRPr lang="en-US" sz="800" dirty="0"/>
+          </a:p>
+        </p:txBody>
+      </p:sp>
+      <p:sp>
+        <p:nvSpPr>
+          <p:cNvPr id="30" name="Text 28"/>
+          <p:cNvSpPr/>
+          <p:nvPr/>
+        </p:nvSpPr>
+        <p:spPr>
+          <a:xfrm>
+            <a:off x="8229600" y="4800600"/>
+            <a:ext cx="457200" cy="342900"/>
+          </a:xfrm>
+          <a:prstGeom prst="rect">
+            <a:avLst/>
+          </a:prstGeom>
+          <a:noFill/>
+          <a:ln/>
+        </p:spPr>
+        <p:txBody>
+          <a:bodyPr wrap="square" rtlCol="0" anchor="ctr"/>
+          <a:lstStyle/>
+          <a:p>
+            <a:pPr algn="r" indent="0" marL="0">
+              <a:buNone/>
+            </a:pPr>
+            <a:r>
+              <a:rPr lang="en-US" sz="800" dirty="0">
+                <a:solidFill>
+                  <a:srgbClr val="94A3B8"/>
+                </a:solidFill>
+                <a:latin typeface="Arial" pitchFamily="34" charset="0"/>
+                <a:ea typeface="Arial" pitchFamily="34" charset="-122"/>
+                <a:cs typeface="Arial" pitchFamily="34" charset="-120"/>
+              </a:rPr>
               <a:t>11</a:t>
             </a:r>
             <a:endParaRPr lang="en-US" sz="800" dirty="0"/>
@@ -5401,7 +5401,7 @@
                 <a:ea typeface="Arial" pitchFamily="34" charset="-122"/>
                 <a:cs typeface="Arial" pitchFamily="34" charset="-120"/>
               </a:rPr>
-              <a:t>対象：2ホテル</a:t>
+              <a:t>対象：3ホテル</a:t>
             </a:r>
             <a:endParaRPr lang="en-US" sz="1000" dirty="0"/>
           </a:p>
@@ -5526,7 +5526,7 @@
                 <a:ea typeface="Arial" pitchFamily="34" charset="-122"/>
                 <a:cs typeface="Arial" pitchFamily="34" charset="-120"/>
               </a:rPr>
-              <a:t>8.22点 → 9点</a:t>
+              <a:t>8.23点 → 9点</a:t>
             </a:r>
             <a:endParaRPr lang="en-US" sz="1100" dirty="0"/>
           </a:p>
@@ -5724,7 +5724,7 @@
                 <a:ea typeface="Arial" pitchFamily="34" charset="-122"/>
                 <a:cs typeface="Arial" pitchFamily="34" charset="-120"/>
               </a:rPr>
-              <a:t>ダイワロイネットホテル東京大崎</a:t>
+              <a:t>ホテルコメント横浜関内</a:t>
             </a:r>
             <a:endParaRPr lang="en-US" sz="1200" dirty="0"/>
           </a:p>
@@ -5763,7 +5763,7 @@
                 <a:ea typeface="Arial" pitchFamily="34" charset="-122"/>
                 <a:cs typeface="Arial" pitchFamily="34" charset="-120"/>
               </a:rPr>
-              <a:t>8.86点 → 9.2点</a:t>
+              <a:t>8.87点 → 9.2点</a:t>
             </a:r>
             <a:endParaRPr lang="en-US" sz="1100" dirty="0"/>
           </a:p>
@@ -5802,7 +5802,7 @@
                 <a:ea typeface="Arial" pitchFamily="34" charset="-122"/>
                 <a:cs typeface="Arial" pitchFamily="34" charset="-120"/>
               </a:rPr>
-              <a:t>主要課題：清掃品質全般(3件)、シミ・汚れ跡(2件)、害虫(2件)</a:t>
+              <a:t>主要課題：清掃品質全般(6件)、臭気・異臭(2件)、タバコ関連(1件)</a:t>
             </a:r>
             <a:endParaRPr lang="en-US" sz="900" dirty="0"/>
           </a:p>
@@ -5875,6 +5875,243 @@
                 <a:ea typeface="Arial" pitchFamily="34" charset="-122"/>
                 <a:cs typeface="Arial" pitchFamily="34" charset="-120"/>
               </a:rPr>
+              <a:t>- 臭気発生源の特定と即時対処（排水トラップ、換気扇）</a:t>
+            </a:r>
+            <a:endParaRPr lang="en-US" sz="800" dirty="0"/>
+          </a:p>
+        </p:txBody>
+      </p:sp>
+      <p:sp>
+        <p:nvSpPr>
+          <p:cNvPr id="17" name="Shape 15"/>
+          <p:cNvSpPr/>
+          <p:nvPr/>
+        </p:nvSpPr>
+        <p:spPr>
+          <a:xfrm>
+            <a:off x="274320" y="3383280"/>
+            <a:ext cx="8595360" cy="1188720"/>
+          </a:xfrm>
+          <a:prstGeom prst="rect">
+            <a:avLst/>
+          </a:prstGeom>
+          <a:solidFill>
+            <a:srgbClr val="FFF3E0"/>
+          </a:solidFill>
+          <a:ln/>
+          <a:effectLst>
+            <a:outerShdw sx="100000" sy="100000" kx="0" ky="0" algn="bl" rotWithShape="0" blurRad="50800" dist="25400" dir="8100000">
+              <a:srgbClr val="000000">
+                <a:alpha val="10000"/>
+              </a:srgbClr>
+            </a:outerShdw>
+          </a:effectLst>
+        </p:spPr>
+      </p:sp>
+      <p:sp>
+        <p:nvSpPr>
+          <p:cNvPr id="18" name="Shape 16"/>
+          <p:cNvSpPr/>
+          <p:nvPr/>
+        </p:nvSpPr>
+        <p:spPr>
+          <a:xfrm>
+            <a:off x="274320" y="3383280"/>
+            <a:ext cx="8595360" cy="36576"/>
+          </a:xfrm>
+          <a:prstGeom prst="rect">
+            <a:avLst/>
+          </a:prstGeom>
+          <a:solidFill>
+            <a:srgbClr val="FF9800"/>
+          </a:solidFill>
+          <a:ln/>
+        </p:spPr>
+      </p:sp>
+      <p:sp>
+        <p:nvSpPr>
+          <p:cNvPr id="19" name="Text 17"/>
+          <p:cNvSpPr/>
+          <p:nvPr/>
+        </p:nvSpPr>
+        <p:spPr>
+          <a:xfrm>
+            <a:off x="457200" y="3456432"/>
+            <a:ext cx="3657600" cy="228600"/>
+          </a:xfrm>
+          <a:prstGeom prst="rect">
+            <a:avLst/>
+          </a:prstGeom>
+          <a:noFill/>
+          <a:ln/>
+        </p:spPr>
+        <p:txBody>
+          <a:bodyPr wrap="square" lIns="0" tIns="0" rIns="0" bIns="0" rtlCol="0" anchor="ctr"/>
+          <a:lstStyle/>
+          <a:p>
+            <a:pPr indent="0" marL="0">
+              <a:buNone/>
+            </a:pPr>
+            <a:r>
+              <a:rPr lang="en-US" sz="1200" b="1" dirty="0">
+                <a:solidFill>
+                  <a:srgbClr val="1B3A5C"/>
+                </a:solidFill>
+                <a:latin typeface="Arial" pitchFamily="34" charset="0"/>
+                <a:ea typeface="Arial" pitchFamily="34" charset="-122"/>
+                <a:cs typeface="Arial" pitchFamily="34" charset="-120"/>
+              </a:rPr>
+              <a:t>ダイワロイネットホテル東京大崎</a:t>
+            </a:r>
+            <a:endParaRPr lang="en-US" sz="1200" dirty="0"/>
+          </a:p>
+        </p:txBody>
+      </p:sp>
+      <p:sp>
+        <p:nvSpPr>
+          <p:cNvPr id="20" name="Text 18"/>
+          <p:cNvSpPr/>
+          <p:nvPr/>
+        </p:nvSpPr>
+        <p:spPr>
+          <a:xfrm>
+            <a:off x="4572000" y="3456432"/>
+            <a:ext cx="2743200" cy="228600"/>
+          </a:xfrm>
+          <a:prstGeom prst="rect">
+            <a:avLst/>
+          </a:prstGeom>
+          <a:noFill/>
+          <a:ln/>
+        </p:spPr>
+        <p:txBody>
+          <a:bodyPr wrap="square" lIns="0" tIns="0" rIns="0" bIns="0" rtlCol="0" anchor="ctr"/>
+          <a:lstStyle/>
+          <a:p>
+            <a:pPr indent="0" marL="0">
+              <a:buNone/>
+            </a:pPr>
+            <a:r>
+              <a:rPr lang="en-US" sz="1100" b="1" dirty="0">
+                <a:solidFill>
+                  <a:srgbClr val="27AE60"/>
+                </a:solidFill>
+                <a:latin typeface="Arial" pitchFamily="34" charset="0"/>
+                <a:ea typeface="Arial" pitchFamily="34" charset="-122"/>
+                <a:cs typeface="Arial" pitchFamily="34" charset="-120"/>
+              </a:rPr>
+              <a:t>8.83点 → 9.1点</a:t>
+            </a:r>
+            <a:endParaRPr lang="en-US" sz="1100" dirty="0"/>
+          </a:p>
+        </p:txBody>
+      </p:sp>
+      <p:sp>
+        <p:nvSpPr>
+          <p:cNvPr id="21" name="Text 19"/>
+          <p:cNvSpPr/>
+          <p:nvPr/>
+        </p:nvSpPr>
+        <p:spPr>
+          <a:xfrm>
+            <a:off x="457200" y="3703320"/>
+            <a:ext cx="7315200" cy="182880"/>
+          </a:xfrm>
+          <a:prstGeom prst="rect">
+            <a:avLst/>
+          </a:prstGeom>
+          <a:noFill/>
+          <a:ln/>
+        </p:spPr>
+        <p:txBody>
+          <a:bodyPr wrap="square" lIns="0" tIns="0" rIns="0" bIns="0" rtlCol="0" anchor="ctr"/>
+          <a:lstStyle/>
+          <a:p>
+            <a:pPr indent="0" marL="0">
+              <a:buNone/>
+            </a:pPr>
+            <a:r>
+              <a:rPr lang="en-US" sz="900" dirty="0">
+                <a:solidFill>
+                  <a:srgbClr val="666666"/>
+                </a:solidFill>
+                <a:latin typeface="Arial" pitchFamily="34" charset="0"/>
+                <a:ea typeface="Arial" pitchFamily="34" charset="-122"/>
+                <a:cs typeface="Arial" pitchFamily="34" charset="-120"/>
+              </a:rPr>
+              <a:t>主要課題：清掃品質全般(3件)、シミ・汚れ跡(2件)、害虫(2件)</a:t>
+            </a:r>
+            <a:endParaRPr lang="en-US" sz="900" dirty="0"/>
+          </a:p>
+        </p:txBody>
+      </p:sp>
+      <p:sp>
+        <p:nvSpPr>
+          <p:cNvPr id="22" name="Text 20"/>
+          <p:cNvSpPr/>
+          <p:nvPr/>
+        </p:nvSpPr>
+        <p:spPr>
+          <a:xfrm>
+            <a:off x="457200" y="3931920"/>
+            <a:ext cx="7772400" cy="594360"/>
+          </a:xfrm>
+          <a:prstGeom prst="rect">
+            <a:avLst/>
+          </a:prstGeom>
+          <a:noFill/>
+          <a:ln/>
+        </p:spPr>
+        <p:txBody>
+          <a:bodyPr wrap="square" lIns="0" tIns="0" rIns="0" bIns="0" rtlCol="0" anchor="t"/>
+          <a:lstStyle/>
+          <a:p>
+            <a:pPr indent="0" marL="0">
+              <a:buNone/>
+            </a:pPr>
+            <a:r>
+              <a:rPr lang="en-US" sz="800" dirty="0">
+                <a:solidFill>
+                  <a:srgbClr val="333333"/>
+                </a:solidFill>
+                <a:latin typeface="Arial" pitchFamily="34" charset="0"/>
+                <a:ea typeface="Arial" pitchFamily="34" charset="-122"/>
+                <a:cs typeface="Arial" pitchFamily="34" charset="-120"/>
+              </a:rPr>
+              <a:t>- 清掃品質基準の明確化と全スタッフへの共有</a:t>
+            </a:r>
+            <a:endParaRPr lang="en-US" sz="800" dirty="0"/>
+          </a:p>
+          <a:p>
+            <a:pPr indent="0" marL="0">
+              <a:buNone/>
+            </a:pPr>
+            <a:r>
+              <a:rPr lang="en-US" sz="800" dirty="0">
+                <a:solidFill>
+                  <a:srgbClr val="333333"/>
+                </a:solidFill>
+                <a:latin typeface="Arial" pitchFamily="34" charset="0"/>
+                <a:ea typeface="Arial" pitchFamily="34" charset="-122"/>
+                <a:cs typeface="Arial" pitchFamily="34" charset="-120"/>
+              </a:rPr>
+              <a:t>- 重点箇所（水回り・ベッド周り）の清掃手順見直し</a:t>
+            </a:r>
+            <a:endParaRPr lang="en-US" sz="800" dirty="0"/>
+          </a:p>
+          <a:p>
+            <a:pPr indent="0" marL="0">
+              <a:buNone/>
+            </a:pPr>
+            <a:r>
+              <a:rPr lang="en-US" sz="800" dirty="0">
+                <a:solidFill>
+                  <a:srgbClr val="333333"/>
+                </a:solidFill>
+                <a:latin typeface="Arial" pitchFamily="34" charset="0"/>
+                <a:ea typeface="Arial" pitchFamily="34" charset="-122"/>
+                <a:cs typeface="Arial" pitchFamily="34" charset="-120"/>
+              </a:rPr>
               <a:t>- シミ箇所の特定と専用クリーナーによる除去</a:t>
             </a:r>
             <a:endParaRPr lang="en-US" sz="800" dirty="0"/>
@@ -5883,7 +6120,7 @@
       </p:sp>
       <p:sp>
         <p:nvSpPr>
-          <p:cNvPr id="17" name="Shape 15"/>
+          <p:cNvPr id="23" name="Shape 21"/>
           <p:cNvSpPr/>
           <p:nvPr/>
         </p:nvSpPr>
@@ -5903,7 +6140,7 @@
       </p:sp>
       <p:sp>
         <p:nvSpPr>
-          <p:cNvPr id="18" name="Text 16"/>
+          <p:cNvPr id="24" name="Text 22"/>
           <p:cNvSpPr/>
           <p:nvPr/>
         </p:nvSpPr>
@@ -5942,7 +6179,7 @@
       </p:sp>
       <p:sp>
         <p:nvSpPr>
-          <p:cNvPr id="19" name="Text 17"/>
+          <p:cNvPr id="25" name="Text 23"/>
           <p:cNvSpPr/>
           <p:nvPr/>
         </p:nvSpPr>
@@ -6679,7 +6916,7 @@
                             <a:srgbClr val="000000"/>
                           </a:solidFill>
                         </a:rPr>
-                        <a:t>ダイワロイネットホテル東京大崎</a:t>
+                        <a:t>ホテルコメント横浜関内</a:t>
                       </a:r>
                       <a:endParaRPr lang="en-US" sz="700" dirty="0"/>
                     </a:p>
@@ -6948,6 +7185,294 @@
                     </a:lnB>
                     <a:solidFill>
                       <a:srgbClr val="F5F7FA"/>
+                    </a:solidFill>
+                  </a:tcPr>
+                </a:tc>
+              </a:tr>
+              <a:tr h="0">
+                <a:tc>
+                  <a:txBody>
+                    <a:bodyPr/>
+                    <a:lstStyle/>
+                    <a:p>
+                      <a:pPr indent="0" marL="0">
+                        <a:buNone/>
+                      </a:pPr>
+                      <a:r>
+                        <a:rPr lang="en-US" sz="700" b="1" dirty="0">
+                          <a:solidFill>
+                            <a:srgbClr val="000000"/>
+                          </a:solidFill>
+                        </a:rPr>
+                        <a:t>ダイワロイネットホテル東京大崎</a:t>
+                      </a:r>
+                      <a:endParaRPr lang="en-US" sz="700" dirty="0"/>
+                    </a:p>
+                  </a:txBody>
+                  <a:tcPr marL="91440" marR="91440" marT="45720" marB="45720">
+                    <a:lnL w="6350" cap="flat" cmpd="sng" algn="ctr">
+                      <a:solidFill>
+                        <a:srgbClr val="CCCCCC"/>
+                      </a:solidFill>
+                      <a:prstDash val="solid"/>
+                      <a:round/>
+                      <a:headEnd type="none" w="med" len="med"/>
+                      <a:tailEnd type="none" w="med" len="med"/>
+                    </a:lnL>
+                    <a:lnR w="6350" cap="flat" cmpd="sng" algn="ctr">
+                      <a:solidFill>
+                        <a:srgbClr val="CCCCCC"/>
+                      </a:solidFill>
+                      <a:prstDash val="solid"/>
+                      <a:round/>
+                      <a:headEnd type="none" w="med" len="med"/>
+                      <a:tailEnd type="none" w="med" len="med"/>
+                    </a:lnR>
+                    <a:lnT w="6350" cap="flat" cmpd="sng" algn="ctr">
+                      <a:solidFill>
+                        <a:srgbClr val="CCCCCC"/>
+                      </a:solidFill>
+                      <a:prstDash val="solid"/>
+                      <a:round/>
+                      <a:headEnd type="none" w="med" len="med"/>
+                      <a:tailEnd type="none" w="med" len="med"/>
+                    </a:lnT>
+                    <a:lnB w="6350" cap="flat" cmpd="sng" algn="ctr">
+                      <a:solidFill>
+                        <a:srgbClr val="CCCCCC"/>
+                      </a:solidFill>
+                      <a:prstDash val="solid"/>
+                      <a:round/>
+                      <a:headEnd type="none" w="med" len="med"/>
+                      <a:tailEnd type="none" w="med" len="med"/>
+                    </a:lnB>
+                    <a:solidFill>
+                      <a:srgbClr val="FFFFFF"/>
+                    </a:solidFill>
+                  </a:tcPr>
+                </a:tc>
+                <a:tc>
+                  <a:txBody>
+                    <a:bodyPr/>
+                    <a:lstStyle/>
+                    <a:p>
+                      <a:pPr indent="0" marL="0">
+                        <a:buNone/>
+                      </a:pPr>
+                      <a:r>
+                        <a:rPr lang="en-US" sz="700" dirty="0">
+                          <a:solidFill>
+                            <a:srgbClr val="000000"/>
+                          </a:solidFill>
+                        </a:rPr>
+                        <a:t>清掃品質基準の明確化と全スタッフへの共有</a:t>
+                      </a:r>
+                      <a:endParaRPr lang="en-US" sz="700" dirty="0"/>
+                    </a:p>
+                    <a:p>
+                      <a:pPr indent="0" marL="0">
+                        <a:buNone/>
+                      </a:pPr>
+                      <a:r>
+                        <a:rPr lang="en-US" sz="700" dirty="0">
+                          <a:solidFill>
+                            <a:srgbClr val="000000"/>
+                          </a:solidFill>
+                        </a:rPr>
+                        <a:t>重点箇所（水回り・ベッド周り）の清掃手順見直し</a:t>
+                      </a:r>
+                      <a:endParaRPr lang="en-US" sz="700" dirty="0"/>
+                    </a:p>
+                  </a:txBody>
+                  <a:tcPr marL="91440" marR="91440" marT="45720" marB="45720">
+                    <a:lnL w="6350" cap="flat" cmpd="sng" algn="ctr">
+                      <a:solidFill>
+                        <a:srgbClr val="CCCCCC"/>
+                      </a:solidFill>
+                      <a:prstDash val="solid"/>
+                      <a:round/>
+                      <a:headEnd type="none" w="med" len="med"/>
+                      <a:tailEnd type="none" w="med" len="med"/>
+                    </a:lnL>
+                    <a:lnR w="6350" cap="flat" cmpd="sng" algn="ctr">
+                      <a:solidFill>
+                        <a:srgbClr val="CCCCCC"/>
+                      </a:solidFill>
+                      <a:prstDash val="solid"/>
+                      <a:round/>
+                      <a:headEnd type="none" w="med" len="med"/>
+                      <a:tailEnd type="none" w="med" len="med"/>
+                    </a:lnR>
+                    <a:lnT w="6350" cap="flat" cmpd="sng" algn="ctr">
+                      <a:solidFill>
+                        <a:srgbClr val="CCCCCC"/>
+                      </a:solidFill>
+                      <a:prstDash val="solid"/>
+                      <a:round/>
+                      <a:headEnd type="none" w="med" len="med"/>
+                      <a:tailEnd type="none" w="med" len="med"/>
+                    </a:lnT>
+                    <a:lnB w="6350" cap="flat" cmpd="sng" algn="ctr">
+                      <a:solidFill>
+                        <a:srgbClr val="CCCCCC"/>
+                      </a:solidFill>
+                      <a:prstDash val="solid"/>
+                      <a:round/>
+                      <a:headEnd type="none" w="med" len="med"/>
+                      <a:tailEnd type="none" w="med" len="med"/>
+                    </a:lnB>
+                    <a:solidFill>
+                      <a:srgbClr val="FFFFFF"/>
+                    </a:solidFill>
+                  </a:tcPr>
+                </a:tc>
+                <a:tc>
+                  <a:txBody>
+                    <a:bodyPr/>
+                    <a:lstStyle/>
+                    <a:p>
+                      <a:pPr indent="0" marL="0">
+                        <a:buNone/>
+                      </a:pPr>
+                      <a:r>
+                        <a:rPr lang="en-US" sz="700" dirty="0">
+                          <a:solidFill>
+                            <a:srgbClr val="000000"/>
+                          </a:solidFill>
+                        </a:rPr>
+                        <a:t>品質管理チェックリストの導入と実施</a:t>
+                      </a:r>
+                      <a:endParaRPr lang="en-US" sz="700" dirty="0"/>
+                    </a:p>
+                    <a:p>
+                      <a:pPr indent="0" marL="0">
+                        <a:buNone/>
+                      </a:pPr>
+                      <a:r>
+                        <a:rPr lang="en-US" sz="700" dirty="0">
+                          <a:solidFill>
+                            <a:srgbClr val="000000"/>
+                          </a:solidFill>
+                        </a:rPr>
+                        <a:t>QCインスペクション体制の構築（ランダム抜き打ち検査）</a:t>
+                      </a:r>
+                      <a:endParaRPr lang="en-US" sz="700" dirty="0"/>
+                    </a:p>
+                  </a:txBody>
+                  <a:tcPr marL="91440" marR="91440" marT="45720" marB="45720">
+                    <a:lnL w="6350" cap="flat" cmpd="sng" algn="ctr">
+                      <a:solidFill>
+                        <a:srgbClr val="CCCCCC"/>
+                      </a:solidFill>
+                      <a:prstDash val="solid"/>
+                      <a:round/>
+                      <a:headEnd type="none" w="med" len="med"/>
+                      <a:tailEnd type="none" w="med" len="med"/>
+                    </a:lnL>
+                    <a:lnR w="6350" cap="flat" cmpd="sng" algn="ctr">
+                      <a:solidFill>
+                        <a:srgbClr val="CCCCCC"/>
+                      </a:solidFill>
+                      <a:prstDash val="solid"/>
+                      <a:round/>
+                      <a:headEnd type="none" w="med" len="med"/>
+                      <a:tailEnd type="none" w="med" len="med"/>
+                    </a:lnR>
+                    <a:lnT w="6350" cap="flat" cmpd="sng" algn="ctr">
+                      <a:solidFill>
+                        <a:srgbClr val="CCCCCC"/>
+                      </a:solidFill>
+                      <a:prstDash val="solid"/>
+                      <a:round/>
+                      <a:headEnd type="none" w="med" len="med"/>
+                      <a:tailEnd type="none" w="med" len="med"/>
+                    </a:lnT>
+                    <a:lnB w="6350" cap="flat" cmpd="sng" algn="ctr">
+                      <a:solidFill>
+                        <a:srgbClr val="CCCCCC"/>
+                      </a:solidFill>
+                      <a:prstDash val="solid"/>
+                      <a:round/>
+                      <a:headEnd type="none" w="med" len="med"/>
+                      <a:tailEnd type="none" w="med" len="med"/>
+                    </a:lnB>
+                    <a:solidFill>
+                      <a:srgbClr val="FFFFFF"/>
+                    </a:solidFill>
+                  </a:tcPr>
+                </a:tc>
+                <a:tc>
+                  <a:txBody>
+                    <a:bodyPr/>
+                    <a:lstStyle/>
+                    <a:p>
+                      <a:pPr indent="0" marL="0">
+                        <a:buNone/>
+                      </a:pPr>
+                      <a:r>
+                        <a:rPr lang="en-US" sz="700" dirty="0">
+                          <a:solidFill>
+                            <a:srgbClr val="000000"/>
+                          </a:solidFill>
+                        </a:rPr>
+                        <a:t>清掃スタッフの定期研修プログラム導入</a:t>
+                      </a:r>
+                      <a:endParaRPr lang="en-US" sz="700" dirty="0"/>
+                    </a:p>
+                    <a:p>
+                      <a:pPr indent="0" marL="0">
+                        <a:buNone/>
+                      </a:pPr>
+                      <a:r>
+                        <a:rPr lang="en-US" sz="700" dirty="0">
+                          <a:solidFill>
+                            <a:srgbClr val="000000"/>
+                          </a:solidFill>
+                        </a:rPr>
+                        <a:t>デジタル清掃記録システムの検討</a:t>
+                      </a:r>
+                      <a:endParaRPr lang="en-US" sz="700" dirty="0"/>
+                    </a:p>
+                  </a:txBody>
+                  <a:tcPr marL="91440" marR="91440" marT="45720" marB="45720">
+                    <a:lnL w="6350" cap="flat" cmpd="sng" algn="ctr">
+                      <a:solidFill>
+                        <a:srgbClr val="CCCCCC"/>
+                      </a:solidFill>
+                      <a:prstDash val="solid"/>
+                      <a:round/>
+                      <a:headEnd type="none" w="med" len="med"/>
+                      <a:tailEnd type="none" w="med" len="med"/>
+                    </a:lnL>
+                    <a:lnR w="6350" cap="flat" cmpd="sng" algn="ctr">
+                      <a:solidFill>
+                        <a:srgbClr val="CCCCCC"/>
+                      </a:solidFill>
+                      <a:prstDash val="solid"/>
+                      <a:round/>
+                      <a:headEnd type="none" w="med" len="med"/>
+                      <a:tailEnd type="none" w="med" len="med"/>
+                    </a:lnR>
+                    <a:lnT w="6350" cap="flat" cmpd="sng" algn="ctr">
+                      <a:solidFill>
+                        <a:srgbClr val="CCCCCC"/>
+                      </a:solidFill>
+                      <a:prstDash val="solid"/>
+                      <a:round/>
+                      <a:headEnd type="none" w="med" len="med"/>
+                      <a:tailEnd type="none" w="med" len="med"/>
+                    </a:lnT>
+                    <a:lnB w="6350" cap="flat" cmpd="sng" algn="ctr">
+                      <a:solidFill>
+                        <a:srgbClr val="CCCCCC"/>
+                      </a:solidFill>
+                      <a:prstDash val="solid"/>
+                      <a:round/>
+                      <a:headEnd type="none" w="med" len="med"/>
+                      <a:tailEnd type="none" w="med" len="med"/>
+                    </a:lnB>
+                    <a:solidFill>
+                      <a:srgbClr val="FFFFFF"/>
                     </a:solidFill>
                   </a:tcPr>
                 </a:tc>
@@ -9279,7 +9804,7 @@
                             <a:srgbClr val="000000"/>
                           </a:solidFill>
                         </a:rPr>
-                        <a:t>8.39</a:t>
+                        <a:t>8.41</a:t>
                       </a:r>
                       <a:endParaRPr lang="en-US" sz="800" dirty="0"/>
                     </a:p>
@@ -9340,7 +9865,7 @@
                             <a:srgbClr val="27AE60"/>
                           </a:solidFill>
                         </a:rPr>
-                        <a:t>8.89</a:t>
+                        <a:t>8.91</a:t>
                       </a:r>
                       <a:endParaRPr lang="en-US" sz="800" dirty="0"/>
                     </a:p>
@@ -9525,7 +10050,7 @@
                             <a:srgbClr val="000000"/>
                           </a:solidFill>
                         </a:rPr>
-                        <a:t>4.5%</a:t>
+                        <a:t>4.4%</a:t>
                       </a:r>
                       <a:endParaRPr lang="en-US" sz="800" dirty="0"/>
                     </a:p>
@@ -9771,7 +10296,7 @@
                             <a:srgbClr val="000000"/>
                           </a:solidFill>
                         </a:rPr>
-                        <a:t>78.6%</a:t>
+                        <a:t>78.7%</a:t>
                       </a:r>
                       <a:endParaRPr lang="en-US" sz="800" dirty="0"/>
                     </a:p>
@@ -9832,7 +10357,7 @@
                             <a:srgbClr val="27AE60"/>
                           </a:solidFill>
                         </a:rPr>
-                        <a:t>83.6%以上</a:t>
+                        <a:t>83.7%以上</a:t>
                       </a:r>
                       <a:endParaRPr lang="en-US" sz="800" dirty="0"/>
                     </a:p>
@@ -10017,7 +10542,7 @@
                             <a:srgbClr val="000000"/>
                           </a:solidFill>
                         </a:rPr>
-                        <a:t>5.1%</a:t>
+                        <a:t>4.8%</a:t>
                       </a:r>
                       <a:endParaRPr lang="en-US" sz="800" dirty="0"/>
                     </a:p>
@@ -10078,7 +10603,7 @@
                             <a:srgbClr val="27AE60"/>
                           </a:solidFill>
                         </a:rPr>
-                        <a:t>2.5%以下</a:t>
+                        <a:t>2.4%以下</a:t>
                       </a:r>
                       <a:endParaRPr lang="en-US" sz="800" dirty="0"/>
                     </a:p>
@@ -10765,7 +11290,7 @@
                             <a:srgbClr val="000000"/>
                           </a:solidFill>
                         </a:rPr>
-                        <a:t>7.38</a:t>
+                        <a:t>7.39</a:t>
                       </a:r>
                       <a:endParaRPr lang="en-US" sz="700" dirty="0"/>
                     </a:p>
@@ -10887,7 +11412,7 @@
                             <a:srgbClr val="000000"/>
                           </a:solidFill>
                         </a:rPr>
-                        <a:t>12.5%</a:t>
+                        <a:t>12.3%</a:t>
                       </a:r>
                       <a:endParaRPr lang="en-US" sz="700" dirty="0"/>
                     </a:p>
@@ -10948,7 +11473,7 @@
                             <a:srgbClr val="27AE60"/>
                           </a:solidFill>
                         </a:rPr>
-                        <a:t>3.8%</a:t>
+                        <a:t>3.7%</a:t>
                       </a:r>
                       <a:endParaRPr lang="en-US" sz="700" dirty="0"/>
                     </a:p>
@@ -11133,7 +11658,7 @@
                             <a:srgbClr val="000000"/>
                           </a:solidFill>
                         </a:rPr>
-                        <a:t>7.73</a:t>
+                        <a:t>7.83</a:t>
                       </a:r>
                       <a:endParaRPr lang="en-US" sz="700" dirty="0"/>
                     </a:p>
@@ -11194,7 +11719,7 @@
                             <a:srgbClr val="27AE60"/>
                           </a:solidFill>
                         </a:rPr>
-                        <a:t>8.20</a:t>
+                        <a:t>8.30</a:t>
                       </a:r>
                       <a:endParaRPr lang="en-US" sz="700" dirty="0"/>
                     </a:p>
@@ -11255,7 +11780,7 @@
                             <a:srgbClr val="000000"/>
                           </a:solidFill>
                         </a:rPr>
-                        <a:t>12.2%</a:t>
+                        <a:t>11.5%</a:t>
                       </a:r>
                       <a:endParaRPr lang="en-US" sz="700" dirty="0"/>
                     </a:p>
@@ -11316,7 +11841,7 @@
                             <a:srgbClr val="27AE60"/>
                           </a:solidFill>
                         </a:rPr>
-                        <a:t>3.7%</a:t>
+                        <a:t>3.4%</a:t>
                       </a:r>
                       <a:endParaRPr lang="en-US" sz="700" dirty="0"/>
                     </a:p>
@@ -11623,7 +12148,7 @@
                             <a:srgbClr val="000000"/>
                           </a:solidFill>
                         </a:rPr>
-                        <a:t>9.9%</a:t>
+                        <a:t>9.8%</a:t>
                       </a:r>
                       <a:endParaRPr lang="en-US" sz="700" dirty="0"/>
                     </a:p>
@@ -11684,7 +12209,7 @@
                             <a:srgbClr val="27AE60"/>
                           </a:solidFill>
                         </a:rPr>
-                        <a:t>3.0%</a:t>
+                        <a:t>2.9%</a:t>
                       </a:r>
                       <a:endParaRPr lang="en-US" sz="700" dirty="0"/>
                     </a:p>
@@ -11747,7 +12272,7 @@
                             <a:srgbClr val="000000"/>
                           </a:solidFill>
                         </a:rPr>
-                        <a:t>コートホテル新横浜</a:t>
+                        <a:t>チサンホテル浜松町</a:t>
                       </a:r>
                       <a:endParaRPr lang="en-US" sz="700" dirty="0"/>
                     </a:p>
@@ -11869,7 +12394,7 @@
                             <a:srgbClr val="000000"/>
                           </a:solidFill>
                         </a:rPr>
-                        <a:t>7.03</a:t>
+                        <a:t>7.09</a:t>
                       </a:r>
                       <a:endParaRPr lang="en-US" sz="700" dirty="0"/>
                     </a:p>
@@ -11930,7 +12455,7 @@
                             <a:srgbClr val="27AE60"/>
                           </a:solidFill>
                         </a:rPr>
-                        <a:t>7.50</a:t>
+                        <a:t>7.60</a:t>
                       </a:r>
                       <a:endParaRPr lang="en-US" sz="700" dirty="0"/>
                     </a:p>
@@ -11991,7 +12516,7 @@
                             <a:srgbClr val="000000"/>
                           </a:solidFill>
                         </a:rPr>
-                        <a:t>9.2%</a:t>
+                        <a:t>8.9%</a:t>
                       </a:r>
                       <a:endParaRPr lang="en-US" sz="700" dirty="0"/>
                     </a:p>
@@ -12052,7 +12577,7 @@
                             <a:srgbClr val="27AE60"/>
                           </a:solidFill>
                         </a:rPr>
-                        <a:t>2.8%</a:t>
+                        <a:t>2.7%</a:t>
                       </a:r>
                       <a:endParaRPr lang="en-US" sz="700" dirty="0"/>
                     </a:p>
@@ -12115,7 +12640,7 @@
                             <a:srgbClr val="000000"/>
                           </a:solidFill>
                         </a:rPr>
-                        <a:t>チサンホテル浜松町</a:t>
+                        <a:t>コートホテル新横浜</a:t>
                       </a:r>
                       <a:endParaRPr lang="en-US" sz="700" dirty="0"/>
                     </a:p>
@@ -12237,7 +12762,7 @@
                             <a:srgbClr val="000000"/>
                           </a:solidFill>
                         </a:rPr>
-                        <a:t>7.10</a:t>
+                        <a:t>7.12</a:t>
                       </a:r>
                       <a:endParaRPr lang="en-US" sz="700" dirty="0"/>
                     </a:p>
@@ -12359,7 +12884,7 @@
                             <a:srgbClr val="000000"/>
                           </a:solidFill>
                         </a:rPr>
-                        <a:t>9.1%</a:t>
+                        <a:t>8.5%</a:t>
                       </a:r>
                       <a:endParaRPr lang="en-US" sz="700" dirty="0"/>
                     </a:p>
@@ -12420,7 +12945,7 @@
                             <a:srgbClr val="27AE60"/>
                           </a:solidFill>
                         </a:rPr>
-                        <a:t>2.7%</a:t>
+                        <a:t>2.5%</a:t>
                       </a:r>
                       <a:endParaRPr lang="en-US" sz="700" dirty="0"/>
                     </a:p>
@@ -12605,7 +13130,7 @@
                             <a:srgbClr val="000000"/>
                           </a:solidFill>
                         </a:rPr>
-                        <a:t>8.22</a:t>
+                        <a:t>8.23</a:t>
                       </a:r>
                       <a:endParaRPr lang="en-US" sz="700" dirty="0"/>
                     </a:p>
@@ -12727,7 +13252,7 @@
                             <a:srgbClr val="000000"/>
                           </a:solidFill>
                         </a:rPr>
-                        <a:t>6.7%</a:t>
+                        <a:t>6.6%</a:t>
                       </a:r>
                       <a:endParaRPr lang="en-US" sz="700" dirty="0"/>
                     </a:p>
@@ -12851,7 +13376,7 @@
                             <a:srgbClr val="000000"/>
                           </a:solidFill>
                         </a:rPr>
-                        <a:t>ダイワロイネットホテル東京大崎</a:t>
+                        <a:t>ホテルコメント横浜関内</a:t>
                       </a:r>
                       <a:endParaRPr lang="en-US" sz="700" dirty="0"/>
                     </a:p>
@@ -12973,7 +13498,7 @@
                             <a:srgbClr val="000000"/>
                           </a:solidFill>
                         </a:rPr>
-                        <a:t>8.86</a:t>
+                        <a:t>8.87</a:t>
                       </a:r>
                       <a:endParaRPr lang="en-US" sz="700" dirty="0"/>
                     </a:p>
@@ -13095,7 +13620,7 @@
                             <a:srgbClr val="000000"/>
                           </a:solidFill>
                         </a:rPr>
-                        <a:t>5.3%</a:t>
+                        <a:t>6.3%</a:t>
                       </a:r>
                       <a:endParaRPr lang="en-US" sz="700" dirty="0"/>
                     </a:p>
@@ -13139,6 +13664,374 @@
                     </a:lnB>
                     <a:solidFill>
                       <a:srgbClr val="FFFFFF"/>
+                    </a:solidFill>
+                  </a:tcPr>
+                </a:tc>
+                <a:tc>
+                  <a:txBody>
+                    <a:bodyPr/>
+                    <a:lstStyle/>
+                    <a:p>
+                      <a:pPr algn="ctr" indent="0" marL="0">
+                        <a:buNone/>
+                      </a:pPr>
+                      <a:r>
+                        <a:rPr lang="en-US" sz="700" b="1" dirty="0">
+                          <a:solidFill>
+                            <a:srgbClr val="27AE60"/>
+                          </a:solidFill>
+                        </a:rPr>
+                        <a:t>1.9%</a:t>
+                      </a:r>
+                      <a:endParaRPr lang="en-US" sz="700" dirty="0"/>
+                    </a:p>
+                  </a:txBody>
+                  <a:tcPr marL="91440" marR="91440" marT="45720" marB="45720">
+                    <a:lnL w="6350" cap="flat" cmpd="sng" algn="ctr">
+                      <a:solidFill>
+                        <a:srgbClr val="CCCCCC"/>
+                      </a:solidFill>
+                      <a:prstDash val="solid"/>
+                      <a:round/>
+                      <a:headEnd type="none" w="med" len="med"/>
+                      <a:tailEnd type="none" w="med" len="med"/>
+                    </a:lnL>
+                    <a:lnR w="6350" cap="flat" cmpd="sng" algn="ctr">
+                      <a:solidFill>
+                        <a:srgbClr val="CCCCCC"/>
+                      </a:solidFill>
+                      <a:prstDash val="solid"/>
+                      <a:round/>
+                      <a:headEnd type="none" w="med" len="med"/>
+                      <a:tailEnd type="none" w="med" len="med"/>
+                    </a:lnR>
+                    <a:lnT w="6350" cap="flat" cmpd="sng" algn="ctr">
+                      <a:solidFill>
+                        <a:srgbClr val="CCCCCC"/>
+                      </a:solidFill>
+                      <a:prstDash val="solid"/>
+                      <a:round/>
+                      <a:headEnd type="none" w="med" len="med"/>
+                      <a:tailEnd type="none" w="med" len="med"/>
+                    </a:lnT>
+                    <a:lnB w="6350" cap="flat" cmpd="sng" algn="ctr">
+                      <a:solidFill>
+                        <a:srgbClr val="CCCCCC"/>
+                      </a:solidFill>
+                      <a:prstDash val="solid"/>
+                      <a:round/>
+                      <a:headEnd type="none" w="med" len="med"/>
+                      <a:tailEnd type="none" w="med" len="med"/>
+                    </a:lnB>
+                    <a:solidFill>
+                      <a:srgbClr val="FFFFFF"/>
+                    </a:solidFill>
+                  </a:tcPr>
+                </a:tc>
+              </a:tr>
+              <a:tr h="0">
+                <a:tc>
+                  <a:txBody>
+                    <a:bodyPr/>
+                    <a:lstStyle/>
+                    <a:p>
+                      <a:pPr indent="0" marL="0">
+                        <a:buNone/>
+                      </a:pPr>
+                      <a:r>
+                        <a:rPr lang="en-US" sz="700" b="1" dirty="0">
+                          <a:solidFill>
+                            <a:srgbClr val="000000"/>
+                          </a:solidFill>
+                        </a:rPr>
+                        <a:t>ダイワロイネットホテル東京大崎</a:t>
+                      </a:r>
+                      <a:endParaRPr lang="en-US" sz="700" dirty="0"/>
+                    </a:p>
+                  </a:txBody>
+                  <a:tcPr marL="91440" marR="91440" marT="45720" marB="45720">
+                    <a:lnL w="6350" cap="flat" cmpd="sng" algn="ctr">
+                      <a:solidFill>
+                        <a:srgbClr val="CCCCCC"/>
+                      </a:solidFill>
+                      <a:prstDash val="solid"/>
+                      <a:round/>
+                      <a:headEnd type="none" w="med" len="med"/>
+                      <a:tailEnd type="none" w="med" len="med"/>
+                    </a:lnL>
+                    <a:lnR w="6350" cap="flat" cmpd="sng" algn="ctr">
+                      <a:solidFill>
+                        <a:srgbClr val="CCCCCC"/>
+                      </a:solidFill>
+                      <a:prstDash val="solid"/>
+                      <a:round/>
+                      <a:headEnd type="none" w="med" len="med"/>
+                      <a:tailEnd type="none" w="med" len="med"/>
+                    </a:lnR>
+                    <a:lnT w="6350" cap="flat" cmpd="sng" algn="ctr">
+                      <a:solidFill>
+                        <a:srgbClr val="CCCCCC"/>
+                      </a:solidFill>
+                      <a:prstDash val="solid"/>
+                      <a:round/>
+                      <a:headEnd type="none" w="med" len="med"/>
+                      <a:tailEnd type="none" w="med" len="med"/>
+                    </a:lnT>
+                    <a:lnB w="6350" cap="flat" cmpd="sng" algn="ctr">
+                      <a:solidFill>
+                        <a:srgbClr val="CCCCCC"/>
+                      </a:solidFill>
+                      <a:prstDash val="solid"/>
+                      <a:round/>
+                      <a:headEnd type="none" w="med" len="med"/>
+                      <a:tailEnd type="none" w="med" len="med"/>
+                    </a:lnB>
+                    <a:solidFill>
+                      <a:srgbClr val="F5F7FA"/>
+                    </a:solidFill>
+                  </a:tcPr>
+                </a:tc>
+                <a:tc>
+                  <a:txBody>
+                    <a:bodyPr/>
+                    <a:lstStyle/>
+                    <a:p>
+                      <a:pPr algn="ctr" indent="0" marL="0">
+                        <a:buNone/>
+                      </a:pPr>
+                      <a:r>
+                        <a:rPr lang="en-US" sz="700" b="1" dirty="0">
+                          <a:solidFill>
+                            <a:srgbClr val="FF9800"/>
+                          </a:solidFill>
+                        </a:rPr>
+                        <a:t>HIGH</a:t>
+                      </a:r>
+                      <a:endParaRPr lang="en-US" sz="700" dirty="0"/>
+                    </a:p>
+                  </a:txBody>
+                  <a:tcPr marL="91440" marR="91440" marT="45720" marB="45720">
+                    <a:lnL w="6350" cap="flat" cmpd="sng" algn="ctr">
+                      <a:solidFill>
+                        <a:srgbClr val="CCCCCC"/>
+                      </a:solidFill>
+                      <a:prstDash val="solid"/>
+                      <a:round/>
+                      <a:headEnd type="none" w="med" len="med"/>
+                      <a:tailEnd type="none" w="med" len="med"/>
+                    </a:lnL>
+                    <a:lnR w="6350" cap="flat" cmpd="sng" algn="ctr">
+                      <a:solidFill>
+                        <a:srgbClr val="CCCCCC"/>
+                      </a:solidFill>
+                      <a:prstDash val="solid"/>
+                      <a:round/>
+                      <a:headEnd type="none" w="med" len="med"/>
+                      <a:tailEnd type="none" w="med" len="med"/>
+                    </a:lnR>
+                    <a:lnT w="6350" cap="flat" cmpd="sng" algn="ctr">
+                      <a:solidFill>
+                        <a:srgbClr val="CCCCCC"/>
+                      </a:solidFill>
+                      <a:prstDash val="solid"/>
+                      <a:round/>
+                      <a:headEnd type="none" w="med" len="med"/>
+                      <a:tailEnd type="none" w="med" len="med"/>
+                    </a:lnT>
+                    <a:lnB w="6350" cap="flat" cmpd="sng" algn="ctr">
+                      <a:solidFill>
+                        <a:srgbClr val="CCCCCC"/>
+                      </a:solidFill>
+                      <a:prstDash val="solid"/>
+                      <a:round/>
+                      <a:headEnd type="none" w="med" len="med"/>
+                      <a:tailEnd type="none" w="med" len="med"/>
+                    </a:lnB>
+                    <a:solidFill>
+                      <a:srgbClr val="FFF3E0"/>
+                    </a:solidFill>
+                  </a:tcPr>
+                </a:tc>
+                <a:tc>
+                  <a:txBody>
+                    <a:bodyPr/>
+                    <a:lstStyle/>
+                    <a:p>
+                      <a:pPr algn="ctr" indent="0" marL="0">
+                        <a:buNone/>
+                      </a:pPr>
+                      <a:r>
+                        <a:rPr lang="en-US" sz="700" dirty="0">
+                          <a:solidFill>
+                            <a:srgbClr val="000000"/>
+                          </a:solidFill>
+                        </a:rPr>
+                        <a:t>8.83</a:t>
+                      </a:r>
+                      <a:endParaRPr lang="en-US" sz="700" dirty="0"/>
+                    </a:p>
+                  </a:txBody>
+                  <a:tcPr marL="91440" marR="91440" marT="45720" marB="45720">
+                    <a:lnL w="6350" cap="flat" cmpd="sng" algn="ctr">
+                      <a:solidFill>
+                        <a:srgbClr val="CCCCCC"/>
+                      </a:solidFill>
+                      <a:prstDash val="solid"/>
+                      <a:round/>
+                      <a:headEnd type="none" w="med" len="med"/>
+                      <a:tailEnd type="none" w="med" len="med"/>
+                    </a:lnL>
+                    <a:lnR w="6350" cap="flat" cmpd="sng" algn="ctr">
+                      <a:solidFill>
+                        <a:srgbClr val="CCCCCC"/>
+                      </a:solidFill>
+                      <a:prstDash val="solid"/>
+                      <a:round/>
+                      <a:headEnd type="none" w="med" len="med"/>
+                      <a:tailEnd type="none" w="med" len="med"/>
+                    </a:lnR>
+                    <a:lnT w="6350" cap="flat" cmpd="sng" algn="ctr">
+                      <a:solidFill>
+                        <a:srgbClr val="CCCCCC"/>
+                      </a:solidFill>
+                      <a:prstDash val="solid"/>
+                      <a:round/>
+                      <a:headEnd type="none" w="med" len="med"/>
+                      <a:tailEnd type="none" w="med" len="med"/>
+                    </a:lnT>
+                    <a:lnB w="6350" cap="flat" cmpd="sng" algn="ctr">
+                      <a:solidFill>
+                        <a:srgbClr val="CCCCCC"/>
+                      </a:solidFill>
+                      <a:prstDash val="solid"/>
+                      <a:round/>
+                      <a:headEnd type="none" w="med" len="med"/>
+                      <a:tailEnd type="none" w="med" len="med"/>
+                    </a:lnB>
+                    <a:solidFill>
+                      <a:srgbClr val="F5F7FA"/>
+                    </a:solidFill>
+                  </a:tcPr>
+                </a:tc>
+                <a:tc>
+                  <a:txBody>
+                    <a:bodyPr/>
+                    <a:lstStyle/>
+                    <a:p>
+                      <a:pPr algn="ctr" indent="0" marL="0">
+                        <a:buNone/>
+                      </a:pPr>
+                      <a:r>
+                        <a:rPr lang="en-US" sz="700" b="1" dirty="0">
+                          <a:solidFill>
+                            <a:srgbClr val="27AE60"/>
+                          </a:solidFill>
+                        </a:rPr>
+                        <a:t>9.30</a:t>
+                      </a:r>
+                      <a:endParaRPr lang="en-US" sz="700" dirty="0"/>
+                    </a:p>
+                  </a:txBody>
+                  <a:tcPr marL="91440" marR="91440" marT="45720" marB="45720">
+                    <a:lnL w="6350" cap="flat" cmpd="sng" algn="ctr">
+                      <a:solidFill>
+                        <a:srgbClr val="CCCCCC"/>
+                      </a:solidFill>
+                      <a:prstDash val="solid"/>
+                      <a:round/>
+                      <a:headEnd type="none" w="med" len="med"/>
+                      <a:tailEnd type="none" w="med" len="med"/>
+                    </a:lnL>
+                    <a:lnR w="6350" cap="flat" cmpd="sng" algn="ctr">
+                      <a:solidFill>
+                        <a:srgbClr val="CCCCCC"/>
+                      </a:solidFill>
+                      <a:prstDash val="solid"/>
+                      <a:round/>
+                      <a:headEnd type="none" w="med" len="med"/>
+                      <a:tailEnd type="none" w="med" len="med"/>
+                    </a:lnR>
+                    <a:lnT w="6350" cap="flat" cmpd="sng" algn="ctr">
+                      <a:solidFill>
+                        <a:srgbClr val="CCCCCC"/>
+                      </a:solidFill>
+                      <a:prstDash val="solid"/>
+                      <a:round/>
+                      <a:headEnd type="none" w="med" len="med"/>
+                      <a:tailEnd type="none" w="med" len="med"/>
+                    </a:lnT>
+                    <a:lnB w="6350" cap="flat" cmpd="sng" algn="ctr">
+                      <a:solidFill>
+                        <a:srgbClr val="CCCCCC"/>
+                      </a:solidFill>
+                      <a:prstDash val="solid"/>
+                      <a:round/>
+                      <a:headEnd type="none" w="med" len="med"/>
+                      <a:tailEnd type="none" w="med" len="med"/>
+                    </a:lnB>
+                    <a:solidFill>
+                      <a:srgbClr val="F5F7FA"/>
+                    </a:solidFill>
+                  </a:tcPr>
+                </a:tc>
+                <a:tc>
+                  <a:txBody>
+                    <a:bodyPr/>
+                    <a:lstStyle/>
+                    <a:p>
+                      <a:pPr algn="ctr" indent="0" marL="0">
+                        <a:buNone/>
+                      </a:pPr>
+                      <a:r>
+                        <a:rPr lang="en-US" sz="700" dirty="0">
+                          <a:solidFill>
+                            <a:srgbClr val="000000"/>
+                          </a:solidFill>
+                        </a:rPr>
+                        <a:t>5.2%</a:t>
+                      </a:r>
+                      <a:endParaRPr lang="en-US" sz="700" dirty="0"/>
+                    </a:p>
+                  </a:txBody>
+                  <a:tcPr marL="91440" marR="91440" marT="45720" marB="45720">
+                    <a:lnL w="6350" cap="flat" cmpd="sng" algn="ctr">
+                      <a:solidFill>
+                        <a:srgbClr val="CCCCCC"/>
+                      </a:solidFill>
+                      <a:prstDash val="solid"/>
+                      <a:round/>
+                      <a:headEnd type="none" w="med" len="med"/>
+                      <a:tailEnd type="none" w="med" len="med"/>
+                    </a:lnL>
+                    <a:lnR w="6350" cap="flat" cmpd="sng" algn="ctr">
+                      <a:solidFill>
+                        <a:srgbClr val="CCCCCC"/>
+                      </a:solidFill>
+                      <a:prstDash val="solid"/>
+                      <a:round/>
+                      <a:headEnd type="none" w="med" len="med"/>
+                      <a:tailEnd type="none" w="med" len="med"/>
+                    </a:lnR>
+                    <a:lnT w="6350" cap="flat" cmpd="sng" algn="ctr">
+                      <a:solidFill>
+                        <a:srgbClr val="CCCCCC"/>
+                      </a:solidFill>
+                      <a:prstDash val="solid"/>
+                      <a:round/>
+                      <a:headEnd type="none" w="med" len="med"/>
+                      <a:tailEnd type="none" w="med" len="med"/>
+                    </a:lnT>
+                    <a:lnB w="6350" cap="flat" cmpd="sng" algn="ctr">
+                      <a:solidFill>
+                        <a:srgbClr val="CCCCCC"/>
+                      </a:solidFill>
+                      <a:prstDash val="solid"/>
+                      <a:round/>
+                      <a:headEnd type="none" w="med" len="med"/>
+                      <a:tailEnd type="none" w="med" len="med"/>
+                    </a:lnB>
+                    <a:solidFill>
+                      <a:srgbClr val="F5F7FA"/>
                     </a:solidFill>
                   </a:tcPr>
                 </a:tc>
@@ -13199,7 +14092,7 @@
                       <a:tailEnd type="none" w="med" len="med"/>
                     </a:lnB>
                     <a:solidFill>
-                      <a:srgbClr val="FFFFFF"/>
+                      <a:srgbClr val="F5F7FA"/>
                     </a:solidFill>
                   </a:tcPr>
                 </a:tc>
@@ -14271,7 +15164,7 @@
                             <a:srgbClr val="000000"/>
                           </a:solidFill>
                         </a:rPr>
-                        <a:t>7ホテル</a:t>
+                        <a:t>8ホテル</a:t>
                       </a:r>
                       <a:endParaRPr lang="en-US" sz="800" dirty="0"/>
                     </a:p>
@@ -16460,7 +17353,7 @@
                 <a:ea typeface="Arial" pitchFamily="34" charset="-122"/>
                 <a:cs typeface="Arial" pitchFamily="34" charset="-120"/>
               </a:rPr>
-              <a:t>8.39</a:t>
+              <a:t>8.41</a:t>
             </a:r>
             <a:endParaRPr lang="en-US" sz="2800" dirty="0"/>
           </a:p>
@@ -16585,7 +17478,7 @@
                 <a:ea typeface="Arial" pitchFamily="34" charset="-122"/>
                 <a:cs typeface="Arial" pitchFamily="34" charset="-120"/>
               </a:rPr>
-              <a:t>78.6%</a:t>
+              <a:t>78.7%</a:t>
             </a:r>
             <a:endParaRPr lang="en-US" sz="2800" dirty="0"/>
           </a:p>
@@ -16710,7 +17603,7 @@
                 <a:ea typeface="Arial" pitchFamily="34" charset="-122"/>
                 <a:cs typeface="Arial" pitchFamily="34" charset="-120"/>
               </a:rPr>
-              <a:t>4.5%</a:t>
+              <a:t>4.4%</a:t>
             </a:r>
             <a:endParaRPr lang="en-US" sz="2800" dirty="0"/>
           </a:p>
@@ -16835,7 +17728,7 @@
                 <a:ea typeface="Arial" pitchFamily="34" charset="-122"/>
                 <a:cs typeface="Arial" pitchFamily="34" charset="-120"/>
               </a:rPr>
-              <a:t>2355件</a:t>
+              <a:t>2389件</a:t>
             </a:r>
             <a:endParaRPr lang="en-US" sz="2800" dirty="0"/>
           </a:p>
@@ -16959,7 +17852,7 @@
                 <a:ea typeface="Arial" pitchFamily="34" charset="-122"/>
                 <a:cs typeface="Arial" pitchFamily="34" charset="-120"/>
               </a:rPr>
-              <a:t>上位5ホテル平均8.7点超。コンフォートスイーツ東京ベイが9.22点で最高評価</a:t>
+              <a:t>上位5ホテル平均8.7点超。コンフォートスイーツ東京ベイが9.21点で最高評価</a:t>
             </a:r>
             <a:endParaRPr lang="en-US" sz="1000" dirty="0"/>
           </a:p>
@@ -17012,7 +17905,7 @@
                 <a:ea typeface="Arial" pitchFamily="34" charset="-122"/>
                 <a:cs typeface="Arial" pitchFamily="34" charset="-120"/>
               </a:rPr>
-              <a:t>5ホテルがURGENT。清掃クレーム率4.5%（業界平均2-3%超過）</a:t>
+              <a:t>5ホテルがURGENT。清掃クレーム率4.4%（業界平均2-3%超過）</a:t>
             </a:r>
             <a:endParaRPr lang="en-US" sz="1000" dirty="0"/>
           </a:p>
@@ -18477,7 +19370,7 @@
                             <a:srgbClr val="000000"/>
                           </a:solidFill>
                         </a:rPr>
-                        <a:t>9.22</a:t>
+                        <a:t>9.21</a:t>
                       </a:r>
                       <a:endParaRPr lang="en-US" sz="700" dirty="0"/>
                     </a:p>
@@ -18538,7 +19431,7 @@
                             <a:srgbClr val="000000"/>
                           </a:solidFill>
                         </a:rPr>
-                        <a:t>95.8%</a:t>
+                        <a:t>97.2%</a:t>
                       </a:r>
                       <a:endParaRPr lang="en-US" sz="700" dirty="0"/>
                     </a:p>
@@ -18845,7 +19738,7 @@
                             <a:srgbClr val="000000"/>
                           </a:solidFill>
                         </a:rPr>
-                        <a:t>9.13</a:t>
+                        <a:t>9.16</a:t>
                       </a:r>
                       <a:endParaRPr lang="en-US" sz="700" dirty="0"/>
                     </a:p>
@@ -18906,7 +19799,7 @@
                             <a:srgbClr val="000000"/>
                           </a:solidFill>
                         </a:rPr>
-                        <a:t>90.9%</a:t>
+                        <a:t>91.3%</a:t>
                       </a:r>
                       <a:endParaRPr lang="en-US" sz="700" dirty="0"/>
                     </a:p>
@@ -19213,7 +20106,7 @@
                             <a:srgbClr val="000000"/>
                           </a:solidFill>
                         </a:rPr>
-                        <a:t>9.08</a:t>
+                        <a:t>9.12</a:t>
                       </a:r>
                       <a:endParaRPr lang="en-US" sz="700" dirty="0"/>
                     </a:p>
@@ -19274,7 +20167,7 @@
                             <a:srgbClr val="000000"/>
                           </a:solidFill>
                         </a:rPr>
-                        <a:t>89.7%</a:t>
+                        <a:t>89.8%</a:t>
                       </a:r>
                       <a:endParaRPr lang="en-US" sz="700" dirty="0"/>
                     </a:p>
@@ -19949,7 +20842,7 @@
                             <a:srgbClr val="000000"/>
                           </a:solidFill>
                         </a:rPr>
-                        <a:t>8.90</a:t>
+                        <a:t>8.87</a:t>
                       </a:r>
                       <a:endParaRPr lang="en-US" sz="700" dirty="0"/>
                     </a:p>
@@ -20010,7 +20903,7 @@
                             <a:srgbClr val="000000"/>
                           </a:solidFill>
                         </a:rPr>
-                        <a:t>85.2%</a:t>
+                        <a:t>84.3%</a:t>
                       </a:r>
                       <a:endParaRPr lang="en-US" sz="700" dirty="0"/>
                     </a:p>
@@ -20068,10 +20961,10 @@
                       <a:r>
                         <a:rPr lang="en-US" sz="700" b="1" dirty="0">
                           <a:solidFill>
-                            <a:srgbClr val="2196F3"/>
+                            <a:srgbClr val="FF9800"/>
                           </a:solidFill>
                         </a:rPr>
-                        <a:t>STANDARD</a:t>
+                        <a:t>HIGH</a:t>
                       </a:r>
                       <a:endParaRPr lang="en-US" sz="700" dirty="0"/>
                     </a:p>
@@ -20114,7 +21007,7 @@
                       <a:tailEnd type="none" w="med" len="med"/>
                     </a:lnB>
                     <a:solidFill>
-                      <a:srgbClr val="E3F2FD"/>
+                      <a:srgbClr val="FFF3E0"/>
                     </a:solidFill>
                   </a:tcPr>
                 </a:tc>
@@ -20317,7 +21210,7 @@
                             <a:srgbClr val="000000"/>
                           </a:solidFill>
                         </a:rPr>
-                        <a:t>8.86</a:t>
+                        <a:t>8.83</a:t>
                       </a:r>
                       <a:endParaRPr lang="en-US" sz="700" dirty="0"/>
                     </a:p>
@@ -20378,7 +21271,7 @@
                             <a:srgbClr val="000000"/>
                           </a:solidFill>
                         </a:rPr>
-                        <a:t>82.5%</a:t>
+                        <a:t>81.0%</a:t>
                       </a:r>
                       <a:endParaRPr lang="en-US" sz="700" dirty="0"/>
                     </a:p>
@@ -20624,7 +21517,7 @@
                             <a:srgbClr val="000000"/>
                           </a:solidFill>
                         </a:rPr>
-                        <a:t>ホテルケヤキゲート東京府中</a:t>
+                        <a:t>川崎日航ホテル</a:t>
                       </a:r>
                       <a:endParaRPr lang="en-US" sz="700" dirty="0"/>
                     </a:p>
@@ -20685,7 +21578,7 @@
                             <a:srgbClr val="000000"/>
                           </a:solidFill>
                         </a:rPr>
-                        <a:t>8.74</a:t>
+                        <a:t>8.72</a:t>
                       </a:r>
                       <a:endParaRPr lang="en-US" sz="700" dirty="0"/>
                     </a:p>
@@ -20746,7 +21639,7 @@
                             <a:srgbClr val="000000"/>
                           </a:solidFill>
                         </a:rPr>
-                        <a:t>86.0%</a:t>
+                        <a:t>82.3%</a:t>
                       </a:r>
                       <a:endParaRPr lang="en-US" sz="700" dirty="0"/>
                     </a:p>
@@ -20992,7 +21885,7 @@
                             <a:srgbClr val="000000"/>
                           </a:solidFill>
                         </a:rPr>
-                        <a:t>ハートンホテル東品川</a:t>
+                        <a:t>ホテルケヤキゲート東京府中</a:t>
                       </a:r>
                       <a:endParaRPr lang="en-US" sz="700" dirty="0"/>
                     </a:p>
@@ -21053,7 +21946,7 @@
                             <a:srgbClr val="000000"/>
                           </a:solidFill>
                         </a:rPr>
-                        <a:t>8.72</a:t>
+                        <a:t>8.71</a:t>
                       </a:r>
                       <a:endParaRPr lang="en-US" sz="700" dirty="0"/>
                     </a:p>
@@ -21114,7 +22007,7 @@
                             <a:srgbClr val="000000"/>
                           </a:solidFill>
                         </a:rPr>
-                        <a:t>84.8%</a:t>
+                        <a:t>85.7%</a:t>
                       </a:r>
                       <a:endParaRPr lang="en-US" sz="700" dirty="0"/>
                     </a:p>
@@ -21421,7 +22314,7 @@
                             <a:srgbClr val="000000"/>
                           </a:solidFill>
                         </a:rPr>
-                        <a:t>8.70</a:t>
+                        <a:t>8.71</a:t>
                       </a:r>
                       <a:endParaRPr lang="en-US" sz="700" dirty="0"/>
                     </a:p>
@@ -21482,7 +22375,7 @@
                             <a:srgbClr val="000000"/>
                           </a:solidFill>
                         </a:rPr>
-                        <a:t>86.0%</a:t>
+                        <a:t>86.3%</a:t>
                       </a:r>
                       <a:endParaRPr lang="en-US" sz="700" dirty="0"/>
                     </a:p>
@@ -21728,7 +22621,7 @@
                             <a:srgbClr val="000000"/>
                           </a:solidFill>
                         </a:rPr>
-                        <a:t>川崎日航ホテル</a:t>
+                        <a:t>ハートンホテル東品川</a:t>
                       </a:r>
                       <a:endParaRPr lang="en-US" sz="700" dirty="0"/>
                     </a:p>
@@ -21789,7 +22682,7 @@
                             <a:srgbClr val="000000"/>
                           </a:solidFill>
                         </a:rPr>
-                        <a:t>8.68</a:t>
+                        <a:t>8.67</a:t>
                       </a:r>
                       <a:endParaRPr lang="en-US" sz="700" dirty="0"/>
                     </a:p>
@@ -21850,7 +22743,7 @@
                             <a:srgbClr val="000000"/>
                           </a:solidFill>
                         </a:rPr>
-                        <a:t>81.4%</a:t>
+                        <a:t>83.3%</a:t>
                       </a:r>
                       <a:endParaRPr lang="en-US" sz="700" dirty="0"/>
                     </a:p>
@@ -22157,7 +23050,7 @@
                             <a:srgbClr val="000000"/>
                           </a:solidFill>
                         </a:rPr>
-                        <a:t>8.50</a:t>
+                        <a:t>8.53</a:t>
                       </a:r>
                       <a:endParaRPr lang="en-US" sz="700" dirty="0"/>
                     </a:p>
@@ -22218,7 +23111,7 @@
                             <a:srgbClr val="000000"/>
                           </a:solidFill>
                         </a:rPr>
-                        <a:t>79.1%</a:t>
+                        <a:t>79.9%</a:t>
                       </a:r>
                       <a:endParaRPr lang="en-US" sz="700" dirty="0"/>
                     </a:p>
@@ -22525,7 +23418,7 @@
                             <a:srgbClr val="000000"/>
                           </a:solidFill>
                         </a:rPr>
-                        <a:t>8.30</a:t>
+                        <a:t>8.28</a:t>
                       </a:r>
                       <a:endParaRPr lang="en-US" sz="700" dirty="0"/>
                     </a:p>
@@ -22586,7 +23479,7 @@
                             <a:srgbClr val="000000"/>
                           </a:solidFill>
                         </a:rPr>
-                        <a:t>76.3%</a:t>
+                        <a:t>75.9%</a:t>
                       </a:r>
                       <a:endParaRPr lang="en-US" sz="700" dirty="0"/>
                     </a:p>
@@ -22893,7 +23786,7 @@
                             <a:srgbClr val="000000"/>
                           </a:solidFill>
                         </a:rPr>
-                        <a:t>8.22</a:t>
+                        <a:t>8.23</a:t>
                       </a:r>
                       <a:endParaRPr lang="en-US" sz="700" dirty="0"/>
                     </a:p>
@@ -22954,7 +23847,7 @@
                             <a:srgbClr val="000000"/>
                           </a:solidFill>
                         </a:rPr>
-                        <a:t>80.0%</a:t>
+                        <a:t>80.3%</a:t>
                       </a:r>
                       <a:endParaRPr lang="en-US" sz="700" dirty="0"/>
                     </a:p>
@@ -23261,7 +24154,7 @@
                             <a:srgbClr val="000000"/>
                           </a:solidFill>
                         </a:rPr>
-                        <a:t>8.13</a:t>
+                        <a:t>8.16</a:t>
                       </a:r>
                       <a:endParaRPr lang="en-US" sz="700" dirty="0"/>
                     </a:p>
@@ -23322,7 +24215,7 @@
                             <a:srgbClr val="000000"/>
                           </a:solidFill>
                         </a:rPr>
-                        <a:t>69.4%</a:t>
+                        <a:t>69.8%</a:t>
                       </a:r>
                       <a:endParaRPr lang="en-US" sz="700" dirty="0"/>
                     </a:p>
@@ -23629,7 +24522,7 @@
                             <a:srgbClr val="000000"/>
                           </a:solidFill>
                         </a:rPr>
-                        <a:t>7.73</a:t>
+                        <a:t>7.83</a:t>
                       </a:r>
                       <a:endParaRPr lang="en-US" sz="700" dirty="0"/>
                     </a:p>
@@ -23690,7 +24583,7 @@
                             <a:srgbClr val="000000"/>
                           </a:solidFill>
                         </a:rPr>
-                        <a:t>66.2%</a:t>
+                        <a:t>67.6%</a:t>
                       </a:r>
                       <a:endParaRPr lang="en-US" sz="700" dirty="0"/>
                     </a:p>
@@ -24058,7 +24951,7 @@
                             <a:srgbClr val="000000"/>
                           </a:solidFill>
                         </a:rPr>
-                        <a:t>67.6%</a:t>
+                        <a:t>67.1%</a:t>
                       </a:r>
                       <a:endParaRPr lang="en-US" sz="700" dirty="0"/>
                     </a:p>
@@ -24365,7 +25258,7 @@
                             <a:srgbClr val="000000"/>
                           </a:solidFill>
                         </a:rPr>
-                        <a:t>7.38</a:t>
+                        <a:t>7.39</a:t>
                       </a:r>
                       <a:endParaRPr lang="en-US" sz="700" dirty="0"/>
                     </a:p>
@@ -24426,7 +25319,7 @@
                             <a:srgbClr val="000000"/>
                           </a:solidFill>
                         </a:rPr>
-                        <a:t>62.5%</a:t>
+                        <a:t>63.2%</a:t>
                       </a:r>
                       <a:endParaRPr lang="en-US" sz="700" dirty="0"/>
                     </a:p>
@@ -24672,7 +25565,7 @@
                             <a:srgbClr val="000000"/>
                           </a:solidFill>
                         </a:rPr>
-                        <a:t>チサンホテル浜松町</a:t>
+                        <a:t>コートホテル新横浜</a:t>
                       </a:r>
                       <a:endParaRPr lang="en-US" sz="700" dirty="0"/>
                     </a:p>
@@ -24733,7 +25626,7 @@
                             <a:srgbClr val="000000"/>
                           </a:solidFill>
                         </a:rPr>
-                        <a:t>7.10</a:t>
+                        <a:t>7.12</a:t>
                       </a:r>
                       <a:endParaRPr lang="en-US" sz="700" dirty="0"/>
                     </a:p>
@@ -24794,7 +25687,7 @@
                             <a:srgbClr val="000000"/>
                           </a:solidFill>
                         </a:rPr>
-                        <a:t>58.4%</a:t>
+                        <a:t>50.8%</a:t>
                       </a:r>
                       <a:endParaRPr lang="en-US" sz="700" dirty="0"/>
                     </a:p>
@@ -25040,7 +25933,7 @@
                             <a:srgbClr val="000000"/>
                           </a:solidFill>
                         </a:rPr>
-                        <a:t>コートホテル新横浜</a:t>
+                        <a:t>チサンホテル浜松町</a:t>
                       </a:r>
                       <a:endParaRPr lang="en-US" sz="700" dirty="0"/>
                     </a:p>
@@ -25101,7 +25994,7 @@
                             <a:srgbClr val="000000"/>
                           </a:solidFill>
                         </a:rPr>
-                        <a:t>7.03</a:t>
+                        <a:t>7.09</a:t>
                       </a:r>
                       <a:endParaRPr lang="en-US" sz="700" dirty="0"/>
                     </a:p>
@@ -25162,7 +26055,7 @@
                             <a:srgbClr val="000000"/>
                           </a:solidFill>
                         </a:rPr>
-                        <a:t>50.8%</a:t>
+                        <a:t>57.0%</a:t>
                       </a:r>
                       <a:endParaRPr lang="en-US" sz="700" dirty="0"/>
                     </a:p>
@@ -25676,7 +26569,7 @@
                 <a:ea typeface="Arial" pitchFamily="34" charset="-122"/>
                 <a:cs typeface="Arial" pitchFamily="34" charset="-120"/>
               </a:rPr>
-              <a:t>105件</a:t>
+              <a:t>106件</a:t>
             </a:r>
             <a:endParaRPr lang="en-US" sz="2800" dirty="0"/>
           </a:p>
@@ -25801,7 +26694,7 @@
                 <a:ea typeface="Arial" pitchFamily="34" charset="-122"/>
                 <a:cs typeface="Arial" pitchFamily="34" charset="-120"/>
               </a:rPr>
-              <a:t>4.5%</a:t>
+              <a:t>4.4%</a:t>
             </a:r>
             <a:endParaRPr lang="en-US" sz="2800" dirty="0"/>
           </a:p>
@@ -26282,7 +27175,7 @@
                             <a:srgbClr val="000000"/>
                           </a:solidFill>
                         </a:rPr>
-                        <a:t>68</a:t>
+                        <a:t>66</a:t>
                       </a:r>
                       <a:endParaRPr lang="en-US" sz="800" dirty="0"/>
                     </a:p>
@@ -26528,7 +27421,7 @@
                             <a:srgbClr val="000000"/>
                           </a:solidFill>
                         </a:rPr>
-                        <a:t>23</a:t>
+                        <a:t>24</a:t>
                       </a:r>
                       <a:endParaRPr lang="en-US" sz="800" dirty="0"/>
                     </a:p>
@@ -27266,7 +28159,7 @@
                             <a:srgbClr val="000000"/>
                           </a:solidFill>
                         </a:rPr>
-                        <a:t>9</a:t>
+                        <a:t>10</a:t>
                       </a:r>
                       <a:endParaRPr lang="en-US" sz="800" dirty="0"/>
                     </a:p>
@@ -27512,7 +28405,7 @@
                             <a:srgbClr val="000000"/>
                           </a:solidFill>
                         </a:rPr>
-                        <a:t>8</a:t>
+                        <a:t>7</a:t>
                       </a:r>
                       <a:endParaRPr lang="en-US" sz="800" dirty="0"/>
                     </a:p>
@@ -27573,7 +28466,7 @@
                             <a:srgbClr val="000000"/>
                           </a:solidFill>
                         </a:rPr>
-                        <a:t>5/19</a:t>
+                        <a:t>4/19</a:t>
                       </a:r>
                       <a:endParaRPr lang="en-US" sz="800" dirty="0"/>
                     </a:p>
@@ -27697,7 +28590,7 @@
                             <a:srgbClr val="000000"/>
                           </a:solidFill>
                         </a:rPr>
-                        <a:t>毛髪・髪の毛</a:t>
+                        <a:t>カーペット汚れ</a:t>
                       </a:r>
                       <a:endParaRPr lang="en-US" sz="800" dirty="0"/>
                     </a:p>
@@ -27758,7 +28651,7 @@
                             <a:srgbClr val="000000"/>
                           </a:solidFill>
                         </a:rPr>
-                        <a:t>8</a:t>
+                        <a:t>7</a:t>
                       </a:r>
                       <a:endParaRPr lang="en-US" sz="800" dirty="0"/>
                     </a:p>
@@ -27819,7 +28712,7 @@
                             <a:srgbClr val="000000"/>
                           </a:solidFill>
                         </a:rPr>
-                        <a:t>8/19</a:t>
+                        <a:t>3/19</a:t>
                       </a:r>
                       <a:endParaRPr lang="en-US" sz="800" dirty="0"/>
                     </a:p>
@@ -27943,7 +28836,7 @@
                             <a:srgbClr val="000000"/>
                           </a:solidFill>
                         </a:rPr>
-                        <a:t>カーペット汚れ</a:t>
+                        <a:t>毛髪・髪の毛</a:t>
                       </a:r>
                       <a:endParaRPr lang="en-US" sz="800" dirty="0"/>
                     </a:p>
@@ -28004,7 +28897,7 @@
                             <a:srgbClr val="000000"/>
                           </a:solidFill>
                         </a:rPr>
-                        <a:t>7</a:t>
+                        <a:t>6</a:t>
                       </a:r>
                       <a:endParaRPr lang="en-US" sz="800" dirty="0"/>
                     </a:p>
@@ -28065,7 +28958,7 @@
                             <a:srgbClr val="000000"/>
                           </a:solidFill>
                         </a:rPr>
-                        <a:t>3/19</a:t>
+                        <a:t>6/19</a:t>
                       </a:r>
                       <a:endParaRPr lang="en-US" sz="800" dirty="0"/>
                     </a:p>
@@ -28742,7 +29635,7 @@
                             <a:srgbClr val="000000"/>
                           </a:solidFill>
                         </a:rPr>
-                        <a:t>4</a:t>
+                        <a:t>5</a:t>
                       </a:r>
                       <a:endParaRPr lang="en-US" sz="800" dirty="0"/>
                     </a:p>
@@ -28803,7 +29696,7 @@
                             <a:srgbClr val="000000"/>
                           </a:solidFill>
                         </a:rPr>
-                        <a:t>2/19</a:t>
+                        <a:t>3/19</a:t>
                       </a:r>
                       <a:endParaRPr lang="en-US" sz="800" dirty="0"/>
                     </a:p>
@@ -30216,7 +31109,7 @@
                             <a:srgbClr val="000000"/>
                           </a:solidFill>
                         </a:rPr>
-                        <a:t>17</a:t>
+                        <a:t>16</a:t>
                       </a:r>
                       <a:endParaRPr lang="en-US" sz="700" dirty="0"/>
                     </a:p>
@@ -30274,7 +31167,7 @@
                             <a:srgbClr val="E74C3C"/>
                           </a:solidFill>
                         </a:rPr>
-                        <a:t>12</a:t>
+                        <a:t>11</a:t>
                       </a:r>
                       <a:endParaRPr lang="en-US" sz="700" dirty="0"/>
                     </a:p>
@@ -31126,7 +32019,7 @@
                             <a:srgbClr val="000000"/>
                           </a:solidFill>
                         </a:rPr>
-                        <a:t>コートホテル新横浜</a:t>
+                        <a:t>チサンホテル浜松町</a:t>
                       </a:r>
                       <a:endParaRPr lang="en-US" sz="700" dirty="0"/>
                     </a:p>
@@ -31184,7 +32077,7 @@
                             <a:srgbClr val="000000"/>
                           </a:solidFill>
                         </a:rPr>
-                        <a:t>11</a:t>
+                        <a:t>7</a:t>
                       </a:r>
                       <a:endParaRPr lang="en-US" sz="700" dirty="0"/>
                     </a:p>
@@ -31242,7 +32135,7 @@
                             <a:srgbClr val="E74C3C"/>
                           </a:solidFill>
                         </a:rPr>
-                        <a:t>8</a:t>
+                        <a:t>3</a:t>
                       </a:r>
                       <a:endParaRPr lang="en-US" sz="700" dirty="0"/>
                     </a:p>
@@ -31285,7 +32178,7 @@
                       <a:tailEnd type="none" w="med" len="med"/>
                     </a:lnB>
                     <a:solidFill>
-                      <a:srgbClr val="FFCDD2"/>
+                      <a:srgbClr val="FFE0B2"/>
                     </a:solidFill>
                   </a:tcPr>
                 </a:tc>
@@ -31303,7 +32196,7 @@
                             <a:srgbClr val="333333"/>
                           </a:solidFill>
                         </a:rPr>
-                        <a:t>2</a:t>
+                        <a:t>1</a:t>
                       </a:r>
                       <a:endParaRPr lang="en-US" sz="700" dirty="0"/>
                     </a:p>
@@ -31425,7 +32318,7 @@
                             <a:srgbClr val="333333"/>
                           </a:solidFill>
                         </a:rPr>
-                        <a:t>1</a:t>
+                        <a:t>2</a:t>
                       </a:r>
                       <a:endParaRPr lang="en-US" sz="700" dirty="0"/>
                     </a:p>
@@ -31547,7 +32440,7 @@
                             <a:srgbClr val="333333"/>
                           </a:solidFill>
                         </a:rPr>
-                        <a:t>1</a:t>
+                        <a:t>-</a:t>
                       </a:r>
                       <a:endParaRPr lang="en-US" sz="700" dirty="0"/>
                     </a:p>
@@ -31590,7 +32483,7 @@
                       <a:tailEnd type="none" w="med" len="med"/>
                     </a:lnB>
                     <a:solidFill>
-                      <a:srgbClr val="FFF9C4"/>
+                      <a:srgbClr val="FFFFFF"/>
                     </a:solidFill>
                   </a:tcPr>
                 </a:tc>
@@ -31610,7 +32503,7 @@
                             <a:srgbClr val="000000"/>
                           </a:solidFill>
                         </a:rPr>
-                        <a:t>チサンホテル浜松町</a:t>
+                        <a:t>コートホテル新横浜</a:t>
                       </a:r>
                       <a:endParaRPr lang="en-US" sz="700" dirty="0"/>
                     </a:p>
@@ -31668,7 +32561,7 @@
                             <a:srgbClr val="000000"/>
                           </a:solidFill>
                         </a:rPr>
-                        <a:t>7</a:t>
+                        <a:t>10</a:t>
                       </a:r>
                       <a:endParaRPr lang="en-US" sz="700" dirty="0"/>
                     </a:p>
@@ -31710,6 +32603,67 @@
                       <a:headEnd type="none" w="med" len="med"/>
                       <a:tailEnd type="none" w="med" len="med"/>
                     </a:lnB>
+                  </a:tcPr>
+                </a:tc>
+                <a:tc>
+                  <a:txBody>
+                    <a:bodyPr/>
+                    <a:lstStyle/>
+                    <a:p>
+                      <a:pPr algn="ctr" indent="0" marL="0">
+                        <a:buNone/>
+                      </a:pPr>
+                      <a:r>
+                        <a:rPr lang="en-US" sz="700" dirty="0">
+                          <a:solidFill>
+                            <a:srgbClr val="E74C3C"/>
+                          </a:solidFill>
+                        </a:rPr>
+                        <a:t>4</a:t>
+                      </a:r>
+                      <a:endParaRPr lang="en-US" sz="700" dirty="0"/>
+                    </a:p>
+                  </a:txBody>
+                  <a:tcPr marL="91440" marR="91440" marT="45720" marB="45720">
+                    <a:lnL w="6350" cap="flat" cmpd="sng" algn="ctr">
+                      <a:solidFill>
+                        <a:srgbClr val="CCCCCC"/>
+                      </a:solidFill>
+                      <a:prstDash val="solid"/>
+                      <a:round/>
+                      <a:headEnd type="none" w="med" len="med"/>
+                      <a:tailEnd type="none" w="med" len="med"/>
+                    </a:lnL>
+                    <a:lnR w="6350" cap="flat" cmpd="sng" algn="ctr">
+                      <a:solidFill>
+                        <a:srgbClr val="CCCCCC"/>
+                      </a:solidFill>
+                      <a:prstDash val="solid"/>
+                      <a:round/>
+                      <a:headEnd type="none" w="med" len="med"/>
+                      <a:tailEnd type="none" w="med" len="med"/>
+                    </a:lnR>
+                    <a:lnT w="6350" cap="flat" cmpd="sng" algn="ctr">
+                      <a:solidFill>
+                        <a:srgbClr val="CCCCCC"/>
+                      </a:solidFill>
+                      <a:prstDash val="solid"/>
+                      <a:round/>
+                      <a:headEnd type="none" w="med" len="med"/>
+                      <a:tailEnd type="none" w="med" len="med"/>
+                    </a:lnT>
+                    <a:lnB w="6350" cap="flat" cmpd="sng" algn="ctr">
+                      <a:solidFill>
+                        <a:srgbClr val="CCCCCC"/>
+                      </a:solidFill>
+                      <a:prstDash val="solid"/>
+                      <a:round/>
+                      <a:headEnd type="none" w="med" len="med"/>
+                      <a:tailEnd type="none" w="med" len="med"/>
+                    </a:lnB>
+                    <a:solidFill>
+                      <a:srgbClr val="FFE0B2"/>
+                    </a:solidFill>
                   </a:tcPr>
                 </a:tc>
                 <a:tc>
@@ -31770,6 +32724,67 @@
                     </a:lnB>
                     <a:solidFill>
                       <a:srgbClr val="FFE0B2"/>
+                    </a:solidFill>
+                  </a:tcPr>
+                </a:tc>
+                <a:tc>
+                  <a:txBody>
+                    <a:bodyPr/>
+                    <a:lstStyle/>
+                    <a:p>
+                      <a:pPr algn="ctr" indent="0" marL="0">
+                        <a:buNone/>
+                      </a:pPr>
+                      <a:r>
+                        <a:rPr lang="en-US" sz="700" dirty="0">
+                          <a:solidFill>
+                            <a:srgbClr val="333333"/>
+                          </a:solidFill>
+                        </a:rPr>
+                        <a:t>-</a:t>
+                      </a:r>
+                      <a:endParaRPr lang="en-US" sz="700" dirty="0"/>
+                    </a:p>
+                  </a:txBody>
+                  <a:tcPr marL="91440" marR="91440" marT="45720" marB="45720">
+                    <a:lnL w="6350" cap="flat" cmpd="sng" algn="ctr">
+                      <a:solidFill>
+                        <a:srgbClr val="CCCCCC"/>
+                      </a:solidFill>
+                      <a:prstDash val="solid"/>
+                      <a:round/>
+                      <a:headEnd type="none" w="med" len="med"/>
+                      <a:tailEnd type="none" w="med" len="med"/>
+                    </a:lnL>
+                    <a:lnR w="6350" cap="flat" cmpd="sng" algn="ctr">
+                      <a:solidFill>
+                        <a:srgbClr val="CCCCCC"/>
+                      </a:solidFill>
+                      <a:prstDash val="solid"/>
+                      <a:round/>
+                      <a:headEnd type="none" w="med" len="med"/>
+                      <a:tailEnd type="none" w="med" len="med"/>
+                    </a:lnR>
+                    <a:lnT w="6350" cap="flat" cmpd="sng" algn="ctr">
+                      <a:solidFill>
+                        <a:srgbClr val="CCCCCC"/>
+                      </a:solidFill>
+                      <a:prstDash val="solid"/>
+                      <a:round/>
+                      <a:headEnd type="none" w="med" len="med"/>
+                      <a:tailEnd type="none" w="med" len="med"/>
+                    </a:lnT>
+                    <a:lnB w="6350" cap="flat" cmpd="sng" algn="ctr">
+                      <a:solidFill>
+                        <a:srgbClr val="CCCCCC"/>
+                      </a:solidFill>
+                      <a:prstDash val="solid"/>
+                      <a:round/>
+                      <a:headEnd type="none" w="med" len="med"/>
+                      <a:tailEnd type="none" w="med" len="med"/>
+                    </a:lnB>
+                    <a:solidFill>
+                      <a:srgbClr val="FFFFFF"/>
                     </a:solidFill>
                   </a:tcPr>
                 </a:tc>
@@ -31848,129 +32863,7 @@
                             <a:srgbClr val="333333"/>
                           </a:solidFill>
                         </a:rPr>
-                        <a:t>-</a:t>
-                      </a:r>
-                      <a:endParaRPr lang="en-US" sz="700" dirty="0"/>
-                    </a:p>
-                  </a:txBody>
-                  <a:tcPr marL="91440" marR="91440" marT="45720" marB="45720">
-                    <a:lnL w="6350" cap="flat" cmpd="sng" algn="ctr">
-                      <a:solidFill>
-                        <a:srgbClr val="CCCCCC"/>
-                      </a:solidFill>
-                      <a:prstDash val="solid"/>
-                      <a:round/>
-                      <a:headEnd type="none" w="med" len="med"/>
-                      <a:tailEnd type="none" w="med" len="med"/>
-                    </a:lnL>
-                    <a:lnR w="6350" cap="flat" cmpd="sng" algn="ctr">
-                      <a:solidFill>
-                        <a:srgbClr val="CCCCCC"/>
-                      </a:solidFill>
-                      <a:prstDash val="solid"/>
-                      <a:round/>
-                      <a:headEnd type="none" w="med" len="med"/>
-                      <a:tailEnd type="none" w="med" len="med"/>
-                    </a:lnR>
-                    <a:lnT w="6350" cap="flat" cmpd="sng" algn="ctr">
-                      <a:solidFill>
-                        <a:srgbClr val="CCCCCC"/>
-                      </a:solidFill>
-                      <a:prstDash val="solid"/>
-                      <a:round/>
-                      <a:headEnd type="none" w="med" len="med"/>
-                      <a:tailEnd type="none" w="med" len="med"/>
-                    </a:lnT>
-                    <a:lnB w="6350" cap="flat" cmpd="sng" algn="ctr">
-                      <a:solidFill>
-                        <a:srgbClr val="CCCCCC"/>
-                      </a:solidFill>
-                      <a:prstDash val="solid"/>
-                      <a:round/>
-                      <a:headEnd type="none" w="med" len="med"/>
-                      <a:tailEnd type="none" w="med" len="med"/>
-                    </a:lnB>
-                    <a:solidFill>
-                      <a:srgbClr val="FFFFFF"/>
-                    </a:solidFill>
-                  </a:tcPr>
-                </a:tc>
-                <a:tc>
-                  <a:txBody>
-                    <a:bodyPr/>
-                    <a:lstStyle/>
-                    <a:p>
-                      <a:pPr algn="ctr" indent="0" marL="0">
-                        <a:buNone/>
-                      </a:pPr>
-                      <a:r>
-                        <a:rPr lang="en-US" sz="700" dirty="0">
-                          <a:solidFill>
-                            <a:srgbClr val="333333"/>
-                          </a:solidFill>
-                        </a:rPr>
                         <a:t>2</a:t>
-                      </a:r>
-                      <a:endParaRPr lang="en-US" sz="700" dirty="0"/>
-                    </a:p>
-                  </a:txBody>
-                  <a:tcPr marL="91440" marR="91440" marT="45720" marB="45720">
-                    <a:lnL w="6350" cap="flat" cmpd="sng" algn="ctr">
-                      <a:solidFill>
-                        <a:srgbClr val="CCCCCC"/>
-                      </a:solidFill>
-                      <a:prstDash val="solid"/>
-                      <a:round/>
-                      <a:headEnd type="none" w="med" len="med"/>
-                      <a:tailEnd type="none" w="med" len="med"/>
-                    </a:lnL>
-                    <a:lnR w="6350" cap="flat" cmpd="sng" algn="ctr">
-                      <a:solidFill>
-                        <a:srgbClr val="CCCCCC"/>
-                      </a:solidFill>
-                      <a:prstDash val="solid"/>
-                      <a:round/>
-                      <a:headEnd type="none" w="med" len="med"/>
-                      <a:tailEnd type="none" w="med" len="med"/>
-                    </a:lnR>
-                    <a:lnT w="6350" cap="flat" cmpd="sng" algn="ctr">
-                      <a:solidFill>
-                        <a:srgbClr val="CCCCCC"/>
-                      </a:solidFill>
-                      <a:prstDash val="solid"/>
-                      <a:round/>
-                      <a:headEnd type="none" w="med" len="med"/>
-                      <a:tailEnd type="none" w="med" len="med"/>
-                    </a:lnT>
-                    <a:lnB w="6350" cap="flat" cmpd="sng" algn="ctr">
-                      <a:solidFill>
-                        <a:srgbClr val="CCCCCC"/>
-                      </a:solidFill>
-                      <a:prstDash val="solid"/>
-                      <a:round/>
-                      <a:headEnd type="none" w="med" len="med"/>
-                      <a:tailEnd type="none" w="med" len="med"/>
-                    </a:lnB>
-                    <a:solidFill>
-                      <a:srgbClr val="FFF9C4"/>
-                    </a:solidFill>
-                  </a:tcPr>
-                </a:tc>
-                <a:tc>
-                  <a:txBody>
-                    <a:bodyPr/>
-                    <a:lstStyle/>
-                    <a:p>
-                      <a:pPr algn="ctr" indent="0" marL="0">
-                        <a:buNone/>
-                      </a:pPr>
-                      <a:r>
-                        <a:rPr lang="en-US" sz="700" dirty="0">
-                          <a:solidFill>
-                            <a:srgbClr val="333333"/>
-                          </a:solidFill>
-                        </a:rPr>
-                        <a:t>1</a:t>
                       </a:r>
                       <a:endParaRPr lang="en-US" sz="700" dirty="0"/>
                     </a:p>
@@ -32578,6 +33471,490 @@
                             <a:srgbClr val="000000"/>
                           </a:solidFill>
                         </a:rPr>
+                        <a:t>ホテルコメント横浜関内</a:t>
+                      </a:r>
+                      <a:endParaRPr lang="en-US" sz="700" dirty="0"/>
+                    </a:p>
+                  </a:txBody>
+                  <a:tcPr marL="91440" marR="91440" marT="45720" marB="45720">
+                    <a:lnL w="6350" cap="flat" cmpd="sng" algn="ctr">
+                      <a:solidFill>
+                        <a:srgbClr val="CCCCCC"/>
+                      </a:solidFill>
+                      <a:prstDash val="solid"/>
+                      <a:round/>
+                      <a:headEnd type="none" w="med" len="med"/>
+                      <a:tailEnd type="none" w="med" len="med"/>
+                    </a:lnL>
+                    <a:lnR w="6350" cap="flat" cmpd="sng" algn="ctr">
+                      <a:solidFill>
+                        <a:srgbClr val="CCCCCC"/>
+                      </a:solidFill>
+                      <a:prstDash val="solid"/>
+                      <a:round/>
+                      <a:headEnd type="none" w="med" len="med"/>
+                      <a:tailEnd type="none" w="med" len="med"/>
+                    </a:lnR>
+                    <a:lnT w="6350" cap="flat" cmpd="sng" algn="ctr">
+                      <a:solidFill>
+                        <a:srgbClr val="CCCCCC"/>
+                      </a:solidFill>
+                      <a:prstDash val="solid"/>
+                      <a:round/>
+                      <a:headEnd type="none" w="med" len="med"/>
+                      <a:tailEnd type="none" w="med" len="med"/>
+                    </a:lnT>
+                    <a:lnB w="6350" cap="flat" cmpd="sng" algn="ctr">
+                      <a:solidFill>
+                        <a:srgbClr val="CCCCCC"/>
+                      </a:solidFill>
+                      <a:prstDash val="solid"/>
+                      <a:round/>
+                      <a:headEnd type="none" w="med" len="med"/>
+                      <a:tailEnd type="none" w="med" len="med"/>
+                    </a:lnB>
+                  </a:tcPr>
+                </a:tc>
+                <a:tc>
+                  <a:txBody>
+                    <a:bodyPr/>
+                    <a:lstStyle/>
+                    <a:p>
+                      <a:pPr algn="ctr" indent="0" marL="0">
+                        <a:buNone/>
+                      </a:pPr>
+                      <a:r>
+                        <a:rPr lang="en-US" sz="700" b="1" dirty="0">
+                          <a:solidFill>
+                            <a:srgbClr val="000000"/>
+                          </a:solidFill>
+                        </a:rPr>
+                        <a:t>8</a:t>
+                      </a:r>
+                      <a:endParaRPr lang="en-US" sz="700" dirty="0"/>
+                    </a:p>
+                  </a:txBody>
+                  <a:tcPr marL="91440" marR="91440" marT="45720" marB="45720">
+                    <a:lnL w="6350" cap="flat" cmpd="sng" algn="ctr">
+                      <a:solidFill>
+                        <a:srgbClr val="CCCCCC"/>
+                      </a:solidFill>
+                      <a:prstDash val="solid"/>
+                      <a:round/>
+                      <a:headEnd type="none" w="med" len="med"/>
+                      <a:tailEnd type="none" w="med" len="med"/>
+                    </a:lnL>
+                    <a:lnR w="6350" cap="flat" cmpd="sng" algn="ctr">
+                      <a:solidFill>
+                        <a:srgbClr val="CCCCCC"/>
+                      </a:solidFill>
+                      <a:prstDash val="solid"/>
+                      <a:round/>
+                      <a:headEnd type="none" w="med" len="med"/>
+                      <a:tailEnd type="none" w="med" len="med"/>
+                    </a:lnR>
+                    <a:lnT w="6350" cap="flat" cmpd="sng" algn="ctr">
+                      <a:solidFill>
+                        <a:srgbClr val="CCCCCC"/>
+                      </a:solidFill>
+                      <a:prstDash val="solid"/>
+                      <a:round/>
+                      <a:headEnd type="none" w="med" len="med"/>
+                      <a:tailEnd type="none" w="med" len="med"/>
+                    </a:lnT>
+                    <a:lnB w="6350" cap="flat" cmpd="sng" algn="ctr">
+                      <a:solidFill>
+                        <a:srgbClr val="CCCCCC"/>
+                      </a:solidFill>
+                      <a:prstDash val="solid"/>
+                      <a:round/>
+                      <a:headEnd type="none" w="med" len="med"/>
+                      <a:tailEnd type="none" w="med" len="med"/>
+                    </a:lnB>
+                  </a:tcPr>
+                </a:tc>
+                <a:tc>
+                  <a:txBody>
+                    <a:bodyPr/>
+                    <a:lstStyle/>
+                    <a:p>
+                      <a:pPr algn="ctr" indent="0" marL="0">
+                        <a:buNone/>
+                      </a:pPr>
+                      <a:r>
+                        <a:rPr lang="en-US" sz="700" dirty="0">
+                          <a:solidFill>
+                            <a:srgbClr val="E74C3C"/>
+                          </a:solidFill>
+                        </a:rPr>
+                        <a:t>6</a:t>
+                      </a:r>
+                      <a:endParaRPr lang="en-US" sz="700" dirty="0"/>
+                    </a:p>
+                  </a:txBody>
+                  <a:tcPr marL="91440" marR="91440" marT="45720" marB="45720">
+                    <a:lnL w="6350" cap="flat" cmpd="sng" algn="ctr">
+                      <a:solidFill>
+                        <a:srgbClr val="CCCCCC"/>
+                      </a:solidFill>
+                      <a:prstDash val="solid"/>
+                      <a:round/>
+                      <a:headEnd type="none" w="med" len="med"/>
+                      <a:tailEnd type="none" w="med" len="med"/>
+                    </a:lnL>
+                    <a:lnR w="6350" cap="flat" cmpd="sng" algn="ctr">
+                      <a:solidFill>
+                        <a:srgbClr val="CCCCCC"/>
+                      </a:solidFill>
+                      <a:prstDash val="solid"/>
+                      <a:round/>
+                      <a:headEnd type="none" w="med" len="med"/>
+                      <a:tailEnd type="none" w="med" len="med"/>
+                    </a:lnR>
+                    <a:lnT w="6350" cap="flat" cmpd="sng" algn="ctr">
+                      <a:solidFill>
+                        <a:srgbClr val="CCCCCC"/>
+                      </a:solidFill>
+                      <a:prstDash val="solid"/>
+                      <a:round/>
+                      <a:headEnd type="none" w="med" len="med"/>
+                      <a:tailEnd type="none" w="med" len="med"/>
+                    </a:lnT>
+                    <a:lnB w="6350" cap="flat" cmpd="sng" algn="ctr">
+                      <a:solidFill>
+                        <a:srgbClr val="CCCCCC"/>
+                      </a:solidFill>
+                      <a:prstDash val="solid"/>
+                      <a:round/>
+                      <a:headEnd type="none" w="med" len="med"/>
+                      <a:tailEnd type="none" w="med" len="med"/>
+                    </a:lnB>
+                    <a:solidFill>
+                      <a:srgbClr val="FFCDD2"/>
+                    </a:solidFill>
+                  </a:tcPr>
+                </a:tc>
+                <a:tc>
+                  <a:txBody>
+                    <a:bodyPr/>
+                    <a:lstStyle/>
+                    <a:p>
+                      <a:pPr algn="ctr" indent="0" marL="0">
+                        <a:buNone/>
+                      </a:pPr>
+                      <a:r>
+                        <a:rPr lang="en-US" sz="700" dirty="0">
+                          <a:solidFill>
+                            <a:srgbClr val="333333"/>
+                          </a:solidFill>
+                        </a:rPr>
+                        <a:t>2</a:t>
+                      </a:r>
+                      <a:endParaRPr lang="en-US" sz="700" dirty="0"/>
+                    </a:p>
+                  </a:txBody>
+                  <a:tcPr marL="91440" marR="91440" marT="45720" marB="45720">
+                    <a:lnL w="6350" cap="flat" cmpd="sng" algn="ctr">
+                      <a:solidFill>
+                        <a:srgbClr val="CCCCCC"/>
+                      </a:solidFill>
+                      <a:prstDash val="solid"/>
+                      <a:round/>
+                      <a:headEnd type="none" w="med" len="med"/>
+                      <a:tailEnd type="none" w="med" len="med"/>
+                    </a:lnL>
+                    <a:lnR w="6350" cap="flat" cmpd="sng" algn="ctr">
+                      <a:solidFill>
+                        <a:srgbClr val="CCCCCC"/>
+                      </a:solidFill>
+                      <a:prstDash val="solid"/>
+                      <a:round/>
+                      <a:headEnd type="none" w="med" len="med"/>
+                      <a:tailEnd type="none" w="med" len="med"/>
+                    </a:lnR>
+                    <a:lnT w="6350" cap="flat" cmpd="sng" algn="ctr">
+                      <a:solidFill>
+                        <a:srgbClr val="CCCCCC"/>
+                      </a:solidFill>
+                      <a:prstDash val="solid"/>
+                      <a:round/>
+                      <a:headEnd type="none" w="med" len="med"/>
+                      <a:tailEnd type="none" w="med" len="med"/>
+                    </a:lnT>
+                    <a:lnB w="6350" cap="flat" cmpd="sng" algn="ctr">
+                      <a:solidFill>
+                        <a:srgbClr val="CCCCCC"/>
+                      </a:solidFill>
+                      <a:prstDash val="solid"/>
+                      <a:round/>
+                      <a:headEnd type="none" w="med" len="med"/>
+                      <a:tailEnd type="none" w="med" len="med"/>
+                    </a:lnB>
+                    <a:solidFill>
+                      <a:srgbClr val="FFF9C4"/>
+                    </a:solidFill>
+                  </a:tcPr>
+                </a:tc>
+                <a:tc>
+                  <a:txBody>
+                    <a:bodyPr/>
+                    <a:lstStyle/>
+                    <a:p>
+                      <a:pPr algn="ctr" indent="0" marL="0">
+                        <a:buNone/>
+                      </a:pPr>
+                      <a:r>
+                        <a:rPr lang="en-US" sz="700" dirty="0">
+                          <a:solidFill>
+                            <a:srgbClr val="333333"/>
+                          </a:solidFill>
+                        </a:rPr>
+                        <a:t>-</a:t>
+                      </a:r>
+                      <a:endParaRPr lang="en-US" sz="700" dirty="0"/>
+                    </a:p>
+                  </a:txBody>
+                  <a:tcPr marL="91440" marR="91440" marT="45720" marB="45720">
+                    <a:lnL w="6350" cap="flat" cmpd="sng" algn="ctr">
+                      <a:solidFill>
+                        <a:srgbClr val="CCCCCC"/>
+                      </a:solidFill>
+                      <a:prstDash val="solid"/>
+                      <a:round/>
+                      <a:headEnd type="none" w="med" len="med"/>
+                      <a:tailEnd type="none" w="med" len="med"/>
+                    </a:lnL>
+                    <a:lnR w="6350" cap="flat" cmpd="sng" algn="ctr">
+                      <a:solidFill>
+                        <a:srgbClr val="CCCCCC"/>
+                      </a:solidFill>
+                      <a:prstDash val="solid"/>
+                      <a:round/>
+                      <a:headEnd type="none" w="med" len="med"/>
+                      <a:tailEnd type="none" w="med" len="med"/>
+                    </a:lnR>
+                    <a:lnT w="6350" cap="flat" cmpd="sng" algn="ctr">
+                      <a:solidFill>
+                        <a:srgbClr val="CCCCCC"/>
+                      </a:solidFill>
+                      <a:prstDash val="solid"/>
+                      <a:round/>
+                      <a:headEnd type="none" w="med" len="med"/>
+                      <a:tailEnd type="none" w="med" len="med"/>
+                    </a:lnT>
+                    <a:lnB w="6350" cap="flat" cmpd="sng" algn="ctr">
+                      <a:solidFill>
+                        <a:srgbClr val="CCCCCC"/>
+                      </a:solidFill>
+                      <a:prstDash val="solid"/>
+                      <a:round/>
+                      <a:headEnd type="none" w="med" len="med"/>
+                      <a:tailEnd type="none" w="med" len="med"/>
+                    </a:lnB>
+                    <a:solidFill>
+                      <a:srgbClr val="FFFFFF"/>
+                    </a:solidFill>
+                  </a:tcPr>
+                </a:tc>
+                <a:tc>
+                  <a:txBody>
+                    <a:bodyPr/>
+                    <a:lstStyle/>
+                    <a:p>
+                      <a:pPr algn="ctr" indent="0" marL="0">
+                        <a:buNone/>
+                      </a:pPr>
+                      <a:r>
+                        <a:rPr lang="en-US" sz="700" dirty="0">
+                          <a:solidFill>
+                            <a:srgbClr val="333333"/>
+                          </a:solidFill>
+                        </a:rPr>
+                        <a:t>-</a:t>
+                      </a:r>
+                      <a:endParaRPr lang="en-US" sz="700" dirty="0"/>
+                    </a:p>
+                  </a:txBody>
+                  <a:tcPr marL="91440" marR="91440" marT="45720" marB="45720">
+                    <a:lnL w="6350" cap="flat" cmpd="sng" algn="ctr">
+                      <a:solidFill>
+                        <a:srgbClr val="CCCCCC"/>
+                      </a:solidFill>
+                      <a:prstDash val="solid"/>
+                      <a:round/>
+                      <a:headEnd type="none" w="med" len="med"/>
+                      <a:tailEnd type="none" w="med" len="med"/>
+                    </a:lnL>
+                    <a:lnR w="6350" cap="flat" cmpd="sng" algn="ctr">
+                      <a:solidFill>
+                        <a:srgbClr val="CCCCCC"/>
+                      </a:solidFill>
+                      <a:prstDash val="solid"/>
+                      <a:round/>
+                      <a:headEnd type="none" w="med" len="med"/>
+                      <a:tailEnd type="none" w="med" len="med"/>
+                    </a:lnR>
+                    <a:lnT w="6350" cap="flat" cmpd="sng" algn="ctr">
+                      <a:solidFill>
+                        <a:srgbClr val="CCCCCC"/>
+                      </a:solidFill>
+                      <a:prstDash val="solid"/>
+                      <a:round/>
+                      <a:headEnd type="none" w="med" len="med"/>
+                      <a:tailEnd type="none" w="med" len="med"/>
+                    </a:lnT>
+                    <a:lnB w="6350" cap="flat" cmpd="sng" algn="ctr">
+                      <a:solidFill>
+                        <a:srgbClr val="CCCCCC"/>
+                      </a:solidFill>
+                      <a:prstDash val="solid"/>
+                      <a:round/>
+                      <a:headEnd type="none" w="med" len="med"/>
+                      <a:tailEnd type="none" w="med" len="med"/>
+                    </a:lnB>
+                    <a:solidFill>
+                      <a:srgbClr val="FFFFFF"/>
+                    </a:solidFill>
+                  </a:tcPr>
+                </a:tc>
+                <a:tc>
+                  <a:txBody>
+                    <a:bodyPr/>
+                    <a:lstStyle/>
+                    <a:p>
+                      <a:pPr algn="ctr" indent="0" marL="0">
+                        <a:buNone/>
+                      </a:pPr>
+                      <a:r>
+                        <a:rPr lang="en-US" sz="700" dirty="0">
+                          <a:solidFill>
+                            <a:srgbClr val="333333"/>
+                          </a:solidFill>
+                        </a:rPr>
+                        <a:t>1</a:t>
+                      </a:r>
+                      <a:endParaRPr lang="en-US" sz="700" dirty="0"/>
+                    </a:p>
+                  </a:txBody>
+                  <a:tcPr marL="91440" marR="91440" marT="45720" marB="45720">
+                    <a:lnL w="6350" cap="flat" cmpd="sng" algn="ctr">
+                      <a:solidFill>
+                        <a:srgbClr val="CCCCCC"/>
+                      </a:solidFill>
+                      <a:prstDash val="solid"/>
+                      <a:round/>
+                      <a:headEnd type="none" w="med" len="med"/>
+                      <a:tailEnd type="none" w="med" len="med"/>
+                    </a:lnL>
+                    <a:lnR w="6350" cap="flat" cmpd="sng" algn="ctr">
+                      <a:solidFill>
+                        <a:srgbClr val="CCCCCC"/>
+                      </a:solidFill>
+                      <a:prstDash val="solid"/>
+                      <a:round/>
+                      <a:headEnd type="none" w="med" len="med"/>
+                      <a:tailEnd type="none" w="med" len="med"/>
+                    </a:lnR>
+                    <a:lnT w="6350" cap="flat" cmpd="sng" algn="ctr">
+                      <a:solidFill>
+                        <a:srgbClr val="CCCCCC"/>
+                      </a:solidFill>
+                      <a:prstDash val="solid"/>
+                      <a:round/>
+                      <a:headEnd type="none" w="med" len="med"/>
+                      <a:tailEnd type="none" w="med" len="med"/>
+                    </a:lnT>
+                    <a:lnB w="6350" cap="flat" cmpd="sng" algn="ctr">
+                      <a:solidFill>
+                        <a:srgbClr val="CCCCCC"/>
+                      </a:solidFill>
+                      <a:prstDash val="solid"/>
+                      <a:round/>
+                      <a:headEnd type="none" w="med" len="med"/>
+                      <a:tailEnd type="none" w="med" len="med"/>
+                    </a:lnB>
+                    <a:solidFill>
+                      <a:srgbClr val="FFF9C4"/>
+                    </a:solidFill>
+                  </a:tcPr>
+                </a:tc>
+                <a:tc>
+                  <a:txBody>
+                    <a:bodyPr/>
+                    <a:lstStyle/>
+                    <a:p>
+                      <a:pPr algn="ctr" indent="0" marL="0">
+                        <a:buNone/>
+                      </a:pPr>
+                      <a:r>
+                        <a:rPr lang="en-US" sz="700" dirty="0">
+                          <a:solidFill>
+                            <a:srgbClr val="333333"/>
+                          </a:solidFill>
+                        </a:rPr>
+                        <a:t>1</a:t>
+                      </a:r>
+                      <a:endParaRPr lang="en-US" sz="700" dirty="0"/>
+                    </a:p>
+                  </a:txBody>
+                  <a:tcPr marL="91440" marR="91440" marT="45720" marB="45720">
+                    <a:lnL w="6350" cap="flat" cmpd="sng" algn="ctr">
+                      <a:solidFill>
+                        <a:srgbClr val="CCCCCC"/>
+                      </a:solidFill>
+                      <a:prstDash val="solid"/>
+                      <a:round/>
+                      <a:headEnd type="none" w="med" len="med"/>
+                      <a:tailEnd type="none" w="med" len="med"/>
+                    </a:lnL>
+                    <a:lnR w="6350" cap="flat" cmpd="sng" algn="ctr">
+                      <a:solidFill>
+                        <a:srgbClr val="CCCCCC"/>
+                      </a:solidFill>
+                      <a:prstDash val="solid"/>
+                      <a:round/>
+                      <a:headEnd type="none" w="med" len="med"/>
+                      <a:tailEnd type="none" w="med" len="med"/>
+                    </a:lnR>
+                    <a:lnT w="6350" cap="flat" cmpd="sng" algn="ctr">
+                      <a:solidFill>
+                        <a:srgbClr val="CCCCCC"/>
+                      </a:solidFill>
+                      <a:prstDash val="solid"/>
+                      <a:round/>
+                      <a:headEnd type="none" w="med" len="med"/>
+                      <a:tailEnd type="none" w="med" len="med"/>
+                    </a:lnT>
+                    <a:lnB w="6350" cap="flat" cmpd="sng" algn="ctr">
+                      <a:solidFill>
+                        <a:srgbClr val="CCCCCC"/>
+                      </a:solidFill>
+                      <a:prstDash val="solid"/>
+                      <a:round/>
+                      <a:headEnd type="none" w="med" len="med"/>
+                      <a:tailEnd type="none" w="med" len="med"/>
+                    </a:lnB>
+                    <a:solidFill>
+                      <a:srgbClr val="FFF9C4"/>
+                    </a:solidFill>
+                  </a:tcPr>
+                </a:tc>
+              </a:tr>
+              <a:tr h="0">
+                <a:tc>
+                  <a:txBody>
+                    <a:bodyPr/>
+                    <a:lstStyle/>
+                    <a:p>
+                      <a:pPr indent="0" marL="0">
+                        <a:buNone/>
+                      </a:pPr>
+                      <a:r>
+                        <a:rPr lang="en-US" sz="700" b="1" dirty="0">
+                          <a:solidFill>
+                            <a:srgbClr val="000000"/>
+                          </a:solidFill>
+                        </a:rPr>
                         <a:t>ダイワロイネットホテル東京大崎</a:t>
                       </a:r>
                       <a:endParaRPr lang="en-US" sz="700" dirty="0"/>
@@ -33062,7 +34439,491 @@
                             <a:srgbClr val="000000"/>
                           </a:solidFill>
                         </a:rPr>
-                        <a:t>ホテルコメント横浜関内</a:t>
+                        <a:t>川崎日航ホテル</a:t>
+                      </a:r>
+                      <a:endParaRPr lang="en-US" sz="700" dirty="0"/>
+                    </a:p>
+                  </a:txBody>
+                  <a:tcPr marL="91440" marR="91440" marT="45720" marB="45720">
+                    <a:lnL w="6350" cap="flat" cmpd="sng" algn="ctr">
+                      <a:solidFill>
+                        <a:srgbClr val="CCCCCC"/>
+                      </a:solidFill>
+                      <a:prstDash val="solid"/>
+                      <a:round/>
+                      <a:headEnd type="none" w="med" len="med"/>
+                      <a:tailEnd type="none" w="med" len="med"/>
+                    </a:lnL>
+                    <a:lnR w="6350" cap="flat" cmpd="sng" algn="ctr">
+                      <a:solidFill>
+                        <a:srgbClr val="CCCCCC"/>
+                      </a:solidFill>
+                      <a:prstDash val="solid"/>
+                      <a:round/>
+                      <a:headEnd type="none" w="med" len="med"/>
+                      <a:tailEnd type="none" w="med" len="med"/>
+                    </a:lnR>
+                    <a:lnT w="6350" cap="flat" cmpd="sng" algn="ctr">
+                      <a:solidFill>
+                        <a:srgbClr val="CCCCCC"/>
+                      </a:solidFill>
+                      <a:prstDash val="solid"/>
+                      <a:round/>
+                      <a:headEnd type="none" w="med" len="med"/>
+                      <a:tailEnd type="none" w="med" len="med"/>
+                    </a:lnT>
+                    <a:lnB w="6350" cap="flat" cmpd="sng" algn="ctr">
+                      <a:solidFill>
+                        <a:srgbClr val="CCCCCC"/>
+                      </a:solidFill>
+                      <a:prstDash val="solid"/>
+                      <a:round/>
+                      <a:headEnd type="none" w="med" len="med"/>
+                      <a:tailEnd type="none" w="med" len="med"/>
+                    </a:lnB>
+                  </a:tcPr>
+                </a:tc>
+                <a:tc>
+                  <a:txBody>
+                    <a:bodyPr/>
+                    <a:lstStyle/>
+                    <a:p>
+                      <a:pPr algn="ctr" indent="0" marL="0">
+                        <a:buNone/>
+                      </a:pPr>
+                      <a:r>
+                        <a:rPr lang="en-US" sz="700" b="1" dirty="0">
+                          <a:solidFill>
+                            <a:srgbClr val="000000"/>
+                          </a:solidFill>
+                        </a:rPr>
+                        <a:t>6</a:t>
+                      </a:r>
+                      <a:endParaRPr lang="en-US" sz="700" dirty="0"/>
+                    </a:p>
+                  </a:txBody>
+                  <a:tcPr marL="91440" marR="91440" marT="45720" marB="45720">
+                    <a:lnL w="6350" cap="flat" cmpd="sng" algn="ctr">
+                      <a:solidFill>
+                        <a:srgbClr val="CCCCCC"/>
+                      </a:solidFill>
+                      <a:prstDash val="solid"/>
+                      <a:round/>
+                      <a:headEnd type="none" w="med" len="med"/>
+                      <a:tailEnd type="none" w="med" len="med"/>
+                    </a:lnL>
+                    <a:lnR w="6350" cap="flat" cmpd="sng" algn="ctr">
+                      <a:solidFill>
+                        <a:srgbClr val="CCCCCC"/>
+                      </a:solidFill>
+                      <a:prstDash val="solid"/>
+                      <a:round/>
+                      <a:headEnd type="none" w="med" len="med"/>
+                      <a:tailEnd type="none" w="med" len="med"/>
+                    </a:lnR>
+                    <a:lnT w="6350" cap="flat" cmpd="sng" algn="ctr">
+                      <a:solidFill>
+                        <a:srgbClr val="CCCCCC"/>
+                      </a:solidFill>
+                      <a:prstDash val="solid"/>
+                      <a:round/>
+                      <a:headEnd type="none" w="med" len="med"/>
+                      <a:tailEnd type="none" w="med" len="med"/>
+                    </a:lnT>
+                    <a:lnB w="6350" cap="flat" cmpd="sng" algn="ctr">
+                      <a:solidFill>
+                        <a:srgbClr val="CCCCCC"/>
+                      </a:solidFill>
+                      <a:prstDash val="solid"/>
+                      <a:round/>
+                      <a:headEnd type="none" w="med" len="med"/>
+                      <a:tailEnd type="none" w="med" len="med"/>
+                    </a:lnB>
+                  </a:tcPr>
+                </a:tc>
+                <a:tc>
+                  <a:txBody>
+                    <a:bodyPr/>
+                    <a:lstStyle/>
+                    <a:p>
+                      <a:pPr algn="ctr" indent="0" marL="0">
+                        <a:buNone/>
+                      </a:pPr>
+                      <a:r>
+                        <a:rPr lang="en-US" sz="700" dirty="0">
+                          <a:solidFill>
+                            <a:srgbClr val="E74C3C"/>
+                          </a:solidFill>
+                        </a:rPr>
+                        <a:t>5</a:t>
+                      </a:r>
+                      <a:endParaRPr lang="en-US" sz="700" dirty="0"/>
+                    </a:p>
+                  </a:txBody>
+                  <a:tcPr marL="91440" marR="91440" marT="45720" marB="45720">
+                    <a:lnL w="6350" cap="flat" cmpd="sng" algn="ctr">
+                      <a:solidFill>
+                        <a:srgbClr val="CCCCCC"/>
+                      </a:solidFill>
+                      <a:prstDash val="solid"/>
+                      <a:round/>
+                      <a:headEnd type="none" w="med" len="med"/>
+                      <a:tailEnd type="none" w="med" len="med"/>
+                    </a:lnL>
+                    <a:lnR w="6350" cap="flat" cmpd="sng" algn="ctr">
+                      <a:solidFill>
+                        <a:srgbClr val="CCCCCC"/>
+                      </a:solidFill>
+                      <a:prstDash val="solid"/>
+                      <a:round/>
+                      <a:headEnd type="none" w="med" len="med"/>
+                      <a:tailEnd type="none" w="med" len="med"/>
+                    </a:lnR>
+                    <a:lnT w="6350" cap="flat" cmpd="sng" algn="ctr">
+                      <a:solidFill>
+                        <a:srgbClr val="CCCCCC"/>
+                      </a:solidFill>
+                      <a:prstDash val="solid"/>
+                      <a:round/>
+                      <a:headEnd type="none" w="med" len="med"/>
+                      <a:tailEnd type="none" w="med" len="med"/>
+                    </a:lnT>
+                    <a:lnB w="6350" cap="flat" cmpd="sng" algn="ctr">
+                      <a:solidFill>
+                        <a:srgbClr val="CCCCCC"/>
+                      </a:solidFill>
+                      <a:prstDash val="solid"/>
+                      <a:round/>
+                      <a:headEnd type="none" w="med" len="med"/>
+                      <a:tailEnd type="none" w="med" len="med"/>
+                    </a:lnB>
+                    <a:solidFill>
+                      <a:srgbClr val="FFE0B2"/>
+                    </a:solidFill>
+                  </a:tcPr>
+                </a:tc>
+                <a:tc>
+                  <a:txBody>
+                    <a:bodyPr/>
+                    <a:lstStyle/>
+                    <a:p>
+                      <a:pPr algn="ctr" indent="0" marL="0">
+                        <a:buNone/>
+                      </a:pPr>
+                      <a:r>
+                        <a:rPr lang="en-US" sz="700" dirty="0">
+                          <a:solidFill>
+                            <a:srgbClr val="333333"/>
+                          </a:solidFill>
+                        </a:rPr>
+                        <a:t>1</a:t>
+                      </a:r>
+                      <a:endParaRPr lang="en-US" sz="700" dirty="0"/>
+                    </a:p>
+                  </a:txBody>
+                  <a:tcPr marL="91440" marR="91440" marT="45720" marB="45720">
+                    <a:lnL w="6350" cap="flat" cmpd="sng" algn="ctr">
+                      <a:solidFill>
+                        <a:srgbClr val="CCCCCC"/>
+                      </a:solidFill>
+                      <a:prstDash val="solid"/>
+                      <a:round/>
+                      <a:headEnd type="none" w="med" len="med"/>
+                      <a:tailEnd type="none" w="med" len="med"/>
+                    </a:lnL>
+                    <a:lnR w="6350" cap="flat" cmpd="sng" algn="ctr">
+                      <a:solidFill>
+                        <a:srgbClr val="CCCCCC"/>
+                      </a:solidFill>
+                      <a:prstDash val="solid"/>
+                      <a:round/>
+                      <a:headEnd type="none" w="med" len="med"/>
+                      <a:tailEnd type="none" w="med" len="med"/>
+                    </a:lnR>
+                    <a:lnT w="6350" cap="flat" cmpd="sng" algn="ctr">
+                      <a:solidFill>
+                        <a:srgbClr val="CCCCCC"/>
+                      </a:solidFill>
+                      <a:prstDash val="solid"/>
+                      <a:round/>
+                      <a:headEnd type="none" w="med" len="med"/>
+                      <a:tailEnd type="none" w="med" len="med"/>
+                    </a:lnT>
+                    <a:lnB w="6350" cap="flat" cmpd="sng" algn="ctr">
+                      <a:solidFill>
+                        <a:srgbClr val="CCCCCC"/>
+                      </a:solidFill>
+                      <a:prstDash val="solid"/>
+                      <a:round/>
+                      <a:headEnd type="none" w="med" len="med"/>
+                      <a:tailEnd type="none" w="med" len="med"/>
+                    </a:lnB>
+                    <a:solidFill>
+                      <a:srgbClr val="FFF9C4"/>
+                    </a:solidFill>
+                  </a:tcPr>
+                </a:tc>
+                <a:tc>
+                  <a:txBody>
+                    <a:bodyPr/>
+                    <a:lstStyle/>
+                    <a:p>
+                      <a:pPr algn="ctr" indent="0" marL="0">
+                        <a:buNone/>
+                      </a:pPr>
+                      <a:r>
+                        <a:rPr lang="en-US" sz="700" dirty="0">
+                          <a:solidFill>
+                            <a:srgbClr val="333333"/>
+                          </a:solidFill>
+                        </a:rPr>
+                        <a:t>-</a:t>
+                      </a:r>
+                      <a:endParaRPr lang="en-US" sz="700" dirty="0"/>
+                    </a:p>
+                  </a:txBody>
+                  <a:tcPr marL="91440" marR="91440" marT="45720" marB="45720">
+                    <a:lnL w="6350" cap="flat" cmpd="sng" algn="ctr">
+                      <a:solidFill>
+                        <a:srgbClr val="CCCCCC"/>
+                      </a:solidFill>
+                      <a:prstDash val="solid"/>
+                      <a:round/>
+                      <a:headEnd type="none" w="med" len="med"/>
+                      <a:tailEnd type="none" w="med" len="med"/>
+                    </a:lnL>
+                    <a:lnR w="6350" cap="flat" cmpd="sng" algn="ctr">
+                      <a:solidFill>
+                        <a:srgbClr val="CCCCCC"/>
+                      </a:solidFill>
+                      <a:prstDash val="solid"/>
+                      <a:round/>
+                      <a:headEnd type="none" w="med" len="med"/>
+                      <a:tailEnd type="none" w="med" len="med"/>
+                    </a:lnR>
+                    <a:lnT w="6350" cap="flat" cmpd="sng" algn="ctr">
+                      <a:solidFill>
+                        <a:srgbClr val="CCCCCC"/>
+                      </a:solidFill>
+                      <a:prstDash val="solid"/>
+                      <a:round/>
+                      <a:headEnd type="none" w="med" len="med"/>
+                      <a:tailEnd type="none" w="med" len="med"/>
+                    </a:lnT>
+                    <a:lnB w="6350" cap="flat" cmpd="sng" algn="ctr">
+                      <a:solidFill>
+                        <a:srgbClr val="CCCCCC"/>
+                      </a:solidFill>
+                      <a:prstDash val="solid"/>
+                      <a:round/>
+                      <a:headEnd type="none" w="med" len="med"/>
+                      <a:tailEnd type="none" w="med" len="med"/>
+                    </a:lnB>
+                    <a:solidFill>
+                      <a:srgbClr val="FFFFFF"/>
+                    </a:solidFill>
+                  </a:tcPr>
+                </a:tc>
+                <a:tc>
+                  <a:txBody>
+                    <a:bodyPr/>
+                    <a:lstStyle/>
+                    <a:p>
+                      <a:pPr algn="ctr" indent="0" marL="0">
+                        <a:buNone/>
+                      </a:pPr>
+                      <a:r>
+                        <a:rPr lang="en-US" sz="700" dirty="0">
+                          <a:solidFill>
+                            <a:srgbClr val="333333"/>
+                          </a:solidFill>
+                        </a:rPr>
+                        <a:t>-</a:t>
+                      </a:r>
+                      <a:endParaRPr lang="en-US" sz="700" dirty="0"/>
+                    </a:p>
+                  </a:txBody>
+                  <a:tcPr marL="91440" marR="91440" marT="45720" marB="45720">
+                    <a:lnL w="6350" cap="flat" cmpd="sng" algn="ctr">
+                      <a:solidFill>
+                        <a:srgbClr val="CCCCCC"/>
+                      </a:solidFill>
+                      <a:prstDash val="solid"/>
+                      <a:round/>
+                      <a:headEnd type="none" w="med" len="med"/>
+                      <a:tailEnd type="none" w="med" len="med"/>
+                    </a:lnL>
+                    <a:lnR w="6350" cap="flat" cmpd="sng" algn="ctr">
+                      <a:solidFill>
+                        <a:srgbClr val="CCCCCC"/>
+                      </a:solidFill>
+                      <a:prstDash val="solid"/>
+                      <a:round/>
+                      <a:headEnd type="none" w="med" len="med"/>
+                      <a:tailEnd type="none" w="med" len="med"/>
+                    </a:lnR>
+                    <a:lnT w="6350" cap="flat" cmpd="sng" algn="ctr">
+                      <a:solidFill>
+                        <a:srgbClr val="CCCCCC"/>
+                      </a:solidFill>
+                      <a:prstDash val="solid"/>
+                      <a:round/>
+                      <a:headEnd type="none" w="med" len="med"/>
+                      <a:tailEnd type="none" w="med" len="med"/>
+                    </a:lnT>
+                    <a:lnB w="6350" cap="flat" cmpd="sng" algn="ctr">
+                      <a:solidFill>
+                        <a:srgbClr val="CCCCCC"/>
+                      </a:solidFill>
+                      <a:prstDash val="solid"/>
+                      <a:round/>
+                      <a:headEnd type="none" w="med" len="med"/>
+                      <a:tailEnd type="none" w="med" len="med"/>
+                    </a:lnB>
+                    <a:solidFill>
+                      <a:srgbClr val="FFFFFF"/>
+                    </a:solidFill>
+                  </a:tcPr>
+                </a:tc>
+                <a:tc>
+                  <a:txBody>
+                    <a:bodyPr/>
+                    <a:lstStyle/>
+                    <a:p>
+                      <a:pPr algn="ctr" indent="0" marL="0">
+                        <a:buNone/>
+                      </a:pPr>
+                      <a:r>
+                        <a:rPr lang="en-US" sz="700" dirty="0">
+                          <a:solidFill>
+                            <a:srgbClr val="333333"/>
+                          </a:solidFill>
+                        </a:rPr>
+                        <a:t>-</a:t>
+                      </a:r>
+                      <a:endParaRPr lang="en-US" sz="700" dirty="0"/>
+                    </a:p>
+                  </a:txBody>
+                  <a:tcPr marL="91440" marR="91440" marT="45720" marB="45720">
+                    <a:lnL w="6350" cap="flat" cmpd="sng" algn="ctr">
+                      <a:solidFill>
+                        <a:srgbClr val="CCCCCC"/>
+                      </a:solidFill>
+                      <a:prstDash val="solid"/>
+                      <a:round/>
+                      <a:headEnd type="none" w="med" len="med"/>
+                      <a:tailEnd type="none" w="med" len="med"/>
+                    </a:lnL>
+                    <a:lnR w="6350" cap="flat" cmpd="sng" algn="ctr">
+                      <a:solidFill>
+                        <a:srgbClr val="CCCCCC"/>
+                      </a:solidFill>
+                      <a:prstDash val="solid"/>
+                      <a:round/>
+                      <a:headEnd type="none" w="med" len="med"/>
+                      <a:tailEnd type="none" w="med" len="med"/>
+                    </a:lnR>
+                    <a:lnT w="6350" cap="flat" cmpd="sng" algn="ctr">
+                      <a:solidFill>
+                        <a:srgbClr val="CCCCCC"/>
+                      </a:solidFill>
+                      <a:prstDash val="solid"/>
+                      <a:round/>
+                      <a:headEnd type="none" w="med" len="med"/>
+                      <a:tailEnd type="none" w="med" len="med"/>
+                    </a:lnT>
+                    <a:lnB w="6350" cap="flat" cmpd="sng" algn="ctr">
+                      <a:solidFill>
+                        <a:srgbClr val="CCCCCC"/>
+                      </a:solidFill>
+                      <a:prstDash val="solid"/>
+                      <a:round/>
+                      <a:headEnd type="none" w="med" len="med"/>
+                      <a:tailEnd type="none" w="med" len="med"/>
+                    </a:lnB>
+                    <a:solidFill>
+                      <a:srgbClr val="FFFFFF"/>
+                    </a:solidFill>
+                  </a:tcPr>
+                </a:tc>
+                <a:tc>
+                  <a:txBody>
+                    <a:bodyPr/>
+                    <a:lstStyle/>
+                    <a:p>
+                      <a:pPr algn="ctr" indent="0" marL="0">
+                        <a:buNone/>
+                      </a:pPr>
+                      <a:r>
+                        <a:rPr lang="en-US" sz="700" dirty="0">
+                          <a:solidFill>
+                            <a:srgbClr val="333333"/>
+                          </a:solidFill>
+                        </a:rPr>
+                        <a:t>-</a:t>
+                      </a:r>
+                      <a:endParaRPr lang="en-US" sz="700" dirty="0"/>
+                    </a:p>
+                  </a:txBody>
+                  <a:tcPr marL="91440" marR="91440" marT="45720" marB="45720">
+                    <a:lnL w="6350" cap="flat" cmpd="sng" algn="ctr">
+                      <a:solidFill>
+                        <a:srgbClr val="CCCCCC"/>
+                      </a:solidFill>
+                      <a:prstDash val="solid"/>
+                      <a:round/>
+                      <a:headEnd type="none" w="med" len="med"/>
+                      <a:tailEnd type="none" w="med" len="med"/>
+                    </a:lnL>
+                    <a:lnR w="6350" cap="flat" cmpd="sng" algn="ctr">
+                      <a:solidFill>
+                        <a:srgbClr val="CCCCCC"/>
+                      </a:solidFill>
+                      <a:prstDash val="solid"/>
+                      <a:round/>
+                      <a:headEnd type="none" w="med" len="med"/>
+                      <a:tailEnd type="none" w="med" len="med"/>
+                    </a:lnR>
+                    <a:lnT w="6350" cap="flat" cmpd="sng" algn="ctr">
+                      <a:solidFill>
+                        <a:srgbClr val="CCCCCC"/>
+                      </a:solidFill>
+                      <a:prstDash val="solid"/>
+                      <a:round/>
+                      <a:headEnd type="none" w="med" len="med"/>
+                      <a:tailEnd type="none" w="med" len="med"/>
+                    </a:lnT>
+                    <a:lnB w="6350" cap="flat" cmpd="sng" algn="ctr">
+                      <a:solidFill>
+                        <a:srgbClr val="CCCCCC"/>
+                      </a:solidFill>
+                      <a:prstDash val="solid"/>
+                      <a:round/>
+                      <a:headEnd type="none" w="med" len="med"/>
+                      <a:tailEnd type="none" w="med" len="med"/>
+                    </a:lnB>
+                    <a:solidFill>
+                      <a:srgbClr val="FFFFFF"/>
+                    </a:solidFill>
+                  </a:tcPr>
+                </a:tc>
+              </a:tr>
+              <a:tr h="0">
+                <a:tc>
+                  <a:txBody>
+                    <a:bodyPr/>
+                    <a:lstStyle/>
+                    <a:p>
+                      <a:pPr indent="0" marL="0">
+                        <a:buNone/>
+                      </a:pPr>
+                      <a:r>
+                        <a:rPr lang="en-US" sz="700" b="1" dirty="0">
+                          <a:solidFill>
+                            <a:srgbClr val="000000"/>
+                          </a:solidFill>
+                        </a:rPr>
+                        <a:t>ハートンホテル東品川</a:t>
                       </a:r>
                       <a:endParaRPr lang="en-US" sz="700" dirty="0"/>
                     </a:p>
@@ -33466,490 +35327,6 @@
                     </a:lnB>
                     <a:solidFill>
                       <a:srgbClr val="FFF9C4"/>
-                    </a:solidFill>
-                  </a:tcPr>
-                </a:tc>
-                <a:tc>
-                  <a:txBody>
-                    <a:bodyPr/>
-                    <a:lstStyle/>
-                    <a:p>
-                      <a:pPr algn="ctr" indent="0" marL="0">
-                        <a:buNone/>
-                      </a:pPr>
-                      <a:r>
-                        <a:rPr lang="en-US" sz="700" dirty="0">
-                          <a:solidFill>
-                            <a:srgbClr val="333333"/>
-                          </a:solidFill>
-                        </a:rPr>
-                        <a:t>1</a:t>
-                      </a:r>
-                      <a:endParaRPr lang="en-US" sz="700" dirty="0"/>
-                    </a:p>
-                  </a:txBody>
-                  <a:tcPr marL="91440" marR="91440" marT="45720" marB="45720">
-                    <a:lnL w="6350" cap="flat" cmpd="sng" algn="ctr">
-                      <a:solidFill>
-                        <a:srgbClr val="CCCCCC"/>
-                      </a:solidFill>
-                      <a:prstDash val="solid"/>
-                      <a:round/>
-                      <a:headEnd type="none" w="med" len="med"/>
-                      <a:tailEnd type="none" w="med" len="med"/>
-                    </a:lnL>
-                    <a:lnR w="6350" cap="flat" cmpd="sng" algn="ctr">
-                      <a:solidFill>
-                        <a:srgbClr val="CCCCCC"/>
-                      </a:solidFill>
-                      <a:prstDash val="solid"/>
-                      <a:round/>
-                      <a:headEnd type="none" w="med" len="med"/>
-                      <a:tailEnd type="none" w="med" len="med"/>
-                    </a:lnR>
-                    <a:lnT w="6350" cap="flat" cmpd="sng" algn="ctr">
-                      <a:solidFill>
-                        <a:srgbClr val="CCCCCC"/>
-                      </a:solidFill>
-                      <a:prstDash val="solid"/>
-                      <a:round/>
-                      <a:headEnd type="none" w="med" len="med"/>
-                      <a:tailEnd type="none" w="med" len="med"/>
-                    </a:lnT>
-                    <a:lnB w="6350" cap="flat" cmpd="sng" algn="ctr">
-                      <a:solidFill>
-                        <a:srgbClr val="CCCCCC"/>
-                      </a:solidFill>
-                      <a:prstDash val="solid"/>
-                      <a:round/>
-                      <a:headEnd type="none" w="med" len="med"/>
-                      <a:tailEnd type="none" w="med" len="med"/>
-                    </a:lnB>
-                    <a:solidFill>
-                      <a:srgbClr val="FFF9C4"/>
-                    </a:solidFill>
-                  </a:tcPr>
-                </a:tc>
-              </a:tr>
-              <a:tr h="0">
-                <a:tc>
-                  <a:txBody>
-                    <a:bodyPr/>
-                    <a:lstStyle/>
-                    <a:p>
-                      <a:pPr indent="0" marL="0">
-                        <a:buNone/>
-                      </a:pPr>
-                      <a:r>
-                        <a:rPr lang="en-US" sz="700" b="1" dirty="0">
-                          <a:solidFill>
-                            <a:srgbClr val="000000"/>
-                          </a:solidFill>
-                        </a:rPr>
-                        <a:t>川崎日航ホテル</a:t>
-                      </a:r>
-                      <a:endParaRPr lang="en-US" sz="700" dirty="0"/>
-                    </a:p>
-                  </a:txBody>
-                  <a:tcPr marL="91440" marR="91440" marT="45720" marB="45720">
-                    <a:lnL w="6350" cap="flat" cmpd="sng" algn="ctr">
-                      <a:solidFill>
-                        <a:srgbClr val="CCCCCC"/>
-                      </a:solidFill>
-                      <a:prstDash val="solid"/>
-                      <a:round/>
-                      <a:headEnd type="none" w="med" len="med"/>
-                      <a:tailEnd type="none" w="med" len="med"/>
-                    </a:lnL>
-                    <a:lnR w="6350" cap="flat" cmpd="sng" algn="ctr">
-                      <a:solidFill>
-                        <a:srgbClr val="CCCCCC"/>
-                      </a:solidFill>
-                      <a:prstDash val="solid"/>
-                      <a:round/>
-                      <a:headEnd type="none" w="med" len="med"/>
-                      <a:tailEnd type="none" w="med" len="med"/>
-                    </a:lnR>
-                    <a:lnT w="6350" cap="flat" cmpd="sng" algn="ctr">
-                      <a:solidFill>
-                        <a:srgbClr val="CCCCCC"/>
-                      </a:solidFill>
-                      <a:prstDash val="solid"/>
-                      <a:round/>
-                      <a:headEnd type="none" w="med" len="med"/>
-                      <a:tailEnd type="none" w="med" len="med"/>
-                    </a:lnT>
-                    <a:lnB w="6350" cap="flat" cmpd="sng" algn="ctr">
-                      <a:solidFill>
-                        <a:srgbClr val="CCCCCC"/>
-                      </a:solidFill>
-                      <a:prstDash val="solid"/>
-                      <a:round/>
-                      <a:headEnd type="none" w="med" len="med"/>
-                      <a:tailEnd type="none" w="med" len="med"/>
-                    </a:lnB>
-                  </a:tcPr>
-                </a:tc>
-                <a:tc>
-                  <a:txBody>
-                    <a:bodyPr/>
-                    <a:lstStyle/>
-                    <a:p>
-                      <a:pPr algn="ctr" indent="0" marL="0">
-                        <a:buNone/>
-                      </a:pPr>
-                      <a:r>
-                        <a:rPr lang="en-US" sz="700" b="1" dirty="0">
-                          <a:solidFill>
-                            <a:srgbClr val="000000"/>
-                          </a:solidFill>
-                        </a:rPr>
-                        <a:t>6</a:t>
-                      </a:r>
-                      <a:endParaRPr lang="en-US" sz="700" dirty="0"/>
-                    </a:p>
-                  </a:txBody>
-                  <a:tcPr marL="91440" marR="91440" marT="45720" marB="45720">
-                    <a:lnL w="6350" cap="flat" cmpd="sng" algn="ctr">
-                      <a:solidFill>
-                        <a:srgbClr val="CCCCCC"/>
-                      </a:solidFill>
-                      <a:prstDash val="solid"/>
-                      <a:round/>
-                      <a:headEnd type="none" w="med" len="med"/>
-                      <a:tailEnd type="none" w="med" len="med"/>
-                    </a:lnL>
-                    <a:lnR w="6350" cap="flat" cmpd="sng" algn="ctr">
-                      <a:solidFill>
-                        <a:srgbClr val="CCCCCC"/>
-                      </a:solidFill>
-                      <a:prstDash val="solid"/>
-                      <a:round/>
-                      <a:headEnd type="none" w="med" len="med"/>
-                      <a:tailEnd type="none" w="med" len="med"/>
-                    </a:lnR>
-                    <a:lnT w="6350" cap="flat" cmpd="sng" algn="ctr">
-                      <a:solidFill>
-                        <a:srgbClr val="CCCCCC"/>
-                      </a:solidFill>
-                      <a:prstDash val="solid"/>
-                      <a:round/>
-                      <a:headEnd type="none" w="med" len="med"/>
-                      <a:tailEnd type="none" w="med" len="med"/>
-                    </a:lnT>
-                    <a:lnB w="6350" cap="flat" cmpd="sng" algn="ctr">
-                      <a:solidFill>
-                        <a:srgbClr val="CCCCCC"/>
-                      </a:solidFill>
-                      <a:prstDash val="solid"/>
-                      <a:round/>
-                      <a:headEnd type="none" w="med" len="med"/>
-                      <a:tailEnd type="none" w="med" len="med"/>
-                    </a:lnB>
-                  </a:tcPr>
-                </a:tc>
-                <a:tc>
-                  <a:txBody>
-                    <a:bodyPr/>
-                    <a:lstStyle/>
-                    <a:p>
-                      <a:pPr algn="ctr" indent="0" marL="0">
-                        <a:buNone/>
-                      </a:pPr>
-                      <a:r>
-                        <a:rPr lang="en-US" sz="700" dirty="0">
-                          <a:solidFill>
-                            <a:srgbClr val="E74C3C"/>
-                          </a:solidFill>
-                        </a:rPr>
-                        <a:t>5</a:t>
-                      </a:r>
-                      <a:endParaRPr lang="en-US" sz="700" dirty="0"/>
-                    </a:p>
-                  </a:txBody>
-                  <a:tcPr marL="91440" marR="91440" marT="45720" marB="45720">
-                    <a:lnL w="6350" cap="flat" cmpd="sng" algn="ctr">
-                      <a:solidFill>
-                        <a:srgbClr val="CCCCCC"/>
-                      </a:solidFill>
-                      <a:prstDash val="solid"/>
-                      <a:round/>
-                      <a:headEnd type="none" w="med" len="med"/>
-                      <a:tailEnd type="none" w="med" len="med"/>
-                    </a:lnL>
-                    <a:lnR w="6350" cap="flat" cmpd="sng" algn="ctr">
-                      <a:solidFill>
-                        <a:srgbClr val="CCCCCC"/>
-                      </a:solidFill>
-                      <a:prstDash val="solid"/>
-                      <a:round/>
-                      <a:headEnd type="none" w="med" len="med"/>
-                      <a:tailEnd type="none" w="med" len="med"/>
-                    </a:lnR>
-                    <a:lnT w="6350" cap="flat" cmpd="sng" algn="ctr">
-                      <a:solidFill>
-                        <a:srgbClr val="CCCCCC"/>
-                      </a:solidFill>
-                      <a:prstDash val="solid"/>
-                      <a:round/>
-                      <a:headEnd type="none" w="med" len="med"/>
-                      <a:tailEnd type="none" w="med" len="med"/>
-                    </a:lnT>
-                    <a:lnB w="6350" cap="flat" cmpd="sng" algn="ctr">
-                      <a:solidFill>
-                        <a:srgbClr val="CCCCCC"/>
-                      </a:solidFill>
-                      <a:prstDash val="solid"/>
-                      <a:round/>
-                      <a:headEnd type="none" w="med" len="med"/>
-                      <a:tailEnd type="none" w="med" len="med"/>
-                    </a:lnB>
-                    <a:solidFill>
-                      <a:srgbClr val="FFE0B2"/>
-                    </a:solidFill>
-                  </a:tcPr>
-                </a:tc>
-                <a:tc>
-                  <a:txBody>
-                    <a:bodyPr/>
-                    <a:lstStyle/>
-                    <a:p>
-                      <a:pPr algn="ctr" indent="0" marL="0">
-                        <a:buNone/>
-                      </a:pPr>
-                      <a:r>
-                        <a:rPr lang="en-US" sz="700" dirty="0">
-                          <a:solidFill>
-                            <a:srgbClr val="333333"/>
-                          </a:solidFill>
-                        </a:rPr>
-                        <a:t>1</a:t>
-                      </a:r>
-                      <a:endParaRPr lang="en-US" sz="700" dirty="0"/>
-                    </a:p>
-                  </a:txBody>
-                  <a:tcPr marL="91440" marR="91440" marT="45720" marB="45720">
-                    <a:lnL w="6350" cap="flat" cmpd="sng" algn="ctr">
-                      <a:solidFill>
-                        <a:srgbClr val="CCCCCC"/>
-                      </a:solidFill>
-                      <a:prstDash val="solid"/>
-                      <a:round/>
-                      <a:headEnd type="none" w="med" len="med"/>
-                      <a:tailEnd type="none" w="med" len="med"/>
-                    </a:lnL>
-                    <a:lnR w="6350" cap="flat" cmpd="sng" algn="ctr">
-                      <a:solidFill>
-                        <a:srgbClr val="CCCCCC"/>
-                      </a:solidFill>
-                      <a:prstDash val="solid"/>
-                      <a:round/>
-                      <a:headEnd type="none" w="med" len="med"/>
-                      <a:tailEnd type="none" w="med" len="med"/>
-                    </a:lnR>
-                    <a:lnT w="6350" cap="flat" cmpd="sng" algn="ctr">
-                      <a:solidFill>
-                        <a:srgbClr val="CCCCCC"/>
-                      </a:solidFill>
-                      <a:prstDash val="solid"/>
-                      <a:round/>
-                      <a:headEnd type="none" w="med" len="med"/>
-                      <a:tailEnd type="none" w="med" len="med"/>
-                    </a:lnT>
-                    <a:lnB w="6350" cap="flat" cmpd="sng" algn="ctr">
-                      <a:solidFill>
-                        <a:srgbClr val="CCCCCC"/>
-                      </a:solidFill>
-                      <a:prstDash val="solid"/>
-                      <a:round/>
-                      <a:headEnd type="none" w="med" len="med"/>
-                      <a:tailEnd type="none" w="med" len="med"/>
-                    </a:lnB>
-                    <a:solidFill>
-                      <a:srgbClr val="FFF9C4"/>
-                    </a:solidFill>
-                  </a:tcPr>
-                </a:tc>
-                <a:tc>
-                  <a:txBody>
-                    <a:bodyPr/>
-                    <a:lstStyle/>
-                    <a:p>
-                      <a:pPr algn="ctr" indent="0" marL="0">
-                        <a:buNone/>
-                      </a:pPr>
-                      <a:r>
-                        <a:rPr lang="en-US" sz="700" dirty="0">
-                          <a:solidFill>
-                            <a:srgbClr val="333333"/>
-                          </a:solidFill>
-                        </a:rPr>
-                        <a:t>-</a:t>
-                      </a:r>
-                      <a:endParaRPr lang="en-US" sz="700" dirty="0"/>
-                    </a:p>
-                  </a:txBody>
-                  <a:tcPr marL="91440" marR="91440" marT="45720" marB="45720">
-                    <a:lnL w="6350" cap="flat" cmpd="sng" algn="ctr">
-                      <a:solidFill>
-                        <a:srgbClr val="CCCCCC"/>
-                      </a:solidFill>
-                      <a:prstDash val="solid"/>
-                      <a:round/>
-                      <a:headEnd type="none" w="med" len="med"/>
-                      <a:tailEnd type="none" w="med" len="med"/>
-                    </a:lnL>
-                    <a:lnR w="6350" cap="flat" cmpd="sng" algn="ctr">
-                      <a:solidFill>
-                        <a:srgbClr val="CCCCCC"/>
-                      </a:solidFill>
-                      <a:prstDash val="solid"/>
-                      <a:round/>
-                      <a:headEnd type="none" w="med" len="med"/>
-                      <a:tailEnd type="none" w="med" len="med"/>
-                    </a:lnR>
-                    <a:lnT w="6350" cap="flat" cmpd="sng" algn="ctr">
-                      <a:solidFill>
-                        <a:srgbClr val="CCCCCC"/>
-                      </a:solidFill>
-                      <a:prstDash val="solid"/>
-                      <a:round/>
-                      <a:headEnd type="none" w="med" len="med"/>
-                      <a:tailEnd type="none" w="med" len="med"/>
-                    </a:lnT>
-                    <a:lnB w="6350" cap="flat" cmpd="sng" algn="ctr">
-                      <a:solidFill>
-                        <a:srgbClr val="CCCCCC"/>
-                      </a:solidFill>
-                      <a:prstDash val="solid"/>
-                      <a:round/>
-                      <a:headEnd type="none" w="med" len="med"/>
-                      <a:tailEnd type="none" w="med" len="med"/>
-                    </a:lnB>
-                    <a:solidFill>
-                      <a:srgbClr val="FFFFFF"/>
-                    </a:solidFill>
-                  </a:tcPr>
-                </a:tc>
-                <a:tc>
-                  <a:txBody>
-                    <a:bodyPr/>
-                    <a:lstStyle/>
-                    <a:p>
-                      <a:pPr algn="ctr" indent="0" marL="0">
-                        <a:buNone/>
-                      </a:pPr>
-                      <a:r>
-                        <a:rPr lang="en-US" sz="700" dirty="0">
-                          <a:solidFill>
-                            <a:srgbClr val="333333"/>
-                          </a:solidFill>
-                        </a:rPr>
-                        <a:t>-</a:t>
-                      </a:r>
-                      <a:endParaRPr lang="en-US" sz="700" dirty="0"/>
-                    </a:p>
-                  </a:txBody>
-                  <a:tcPr marL="91440" marR="91440" marT="45720" marB="45720">
-                    <a:lnL w="6350" cap="flat" cmpd="sng" algn="ctr">
-                      <a:solidFill>
-                        <a:srgbClr val="CCCCCC"/>
-                      </a:solidFill>
-                      <a:prstDash val="solid"/>
-                      <a:round/>
-                      <a:headEnd type="none" w="med" len="med"/>
-                      <a:tailEnd type="none" w="med" len="med"/>
-                    </a:lnL>
-                    <a:lnR w="6350" cap="flat" cmpd="sng" algn="ctr">
-                      <a:solidFill>
-                        <a:srgbClr val="CCCCCC"/>
-                      </a:solidFill>
-                      <a:prstDash val="solid"/>
-                      <a:round/>
-                      <a:headEnd type="none" w="med" len="med"/>
-                      <a:tailEnd type="none" w="med" len="med"/>
-                    </a:lnR>
-                    <a:lnT w="6350" cap="flat" cmpd="sng" algn="ctr">
-                      <a:solidFill>
-                        <a:srgbClr val="CCCCCC"/>
-                      </a:solidFill>
-                      <a:prstDash val="solid"/>
-                      <a:round/>
-                      <a:headEnd type="none" w="med" len="med"/>
-                      <a:tailEnd type="none" w="med" len="med"/>
-                    </a:lnT>
-                    <a:lnB w="6350" cap="flat" cmpd="sng" algn="ctr">
-                      <a:solidFill>
-                        <a:srgbClr val="CCCCCC"/>
-                      </a:solidFill>
-                      <a:prstDash val="solid"/>
-                      <a:round/>
-                      <a:headEnd type="none" w="med" len="med"/>
-                      <a:tailEnd type="none" w="med" len="med"/>
-                    </a:lnB>
-                    <a:solidFill>
-                      <a:srgbClr val="FFFFFF"/>
-                    </a:solidFill>
-                  </a:tcPr>
-                </a:tc>
-                <a:tc>
-                  <a:txBody>
-                    <a:bodyPr/>
-                    <a:lstStyle/>
-                    <a:p>
-                      <a:pPr algn="ctr" indent="0" marL="0">
-                        <a:buNone/>
-                      </a:pPr>
-                      <a:r>
-                        <a:rPr lang="en-US" sz="700" dirty="0">
-                          <a:solidFill>
-                            <a:srgbClr val="333333"/>
-                          </a:solidFill>
-                        </a:rPr>
-                        <a:t>-</a:t>
-                      </a:r>
-                      <a:endParaRPr lang="en-US" sz="700" dirty="0"/>
-                    </a:p>
-                  </a:txBody>
-                  <a:tcPr marL="91440" marR="91440" marT="45720" marB="45720">
-                    <a:lnL w="6350" cap="flat" cmpd="sng" algn="ctr">
-                      <a:solidFill>
-                        <a:srgbClr val="CCCCCC"/>
-                      </a:solidFill>
-                      <a:prstDash val="solid"/>
-                      <a:round/>
-                      <a:headEnd type="none" w="med" len="med"/>
-                      <a:tailEnd type="none" w="med" len="med"/>
-                    </a:lnL>
-                    <a:lnR w="6350" cap="flat" cmpd="sng" algn="ctr">
-                      <a:solidFill>
-                        <a:srgbClr val="CCCCCC"/>
-                      </a:solidFill>
-                      <a:prstDash val="solid"/>
-                      <a:round/>
-                      <a:headEnd type="none" w="med" len="med"/>
-                      <a:tailEnd type="none" w="med" len="med"/>
-                    </a:lnR>
-                    <a:lnT w="6350" cap="flat" cmpd="sng" algn="ctr">
-                      <a:solidFill>
-                        <a:srgbClr val="CCCCCC"/>
-                      </a:solidFill>
-                      <a:prstDash val="solid"/>
-                      <a:round/>
-                      <a:headEnd type="none" w="med" len="med"/>
-                      <a:tailEnd type="none" w="med" len="med"/>
-                    </a:lnT>
-                    <a:lnB w="6350" cap="flat" cmpd="sng" algn="ctr">
-                      <a:solidFill>
-                        <a:srgbClr val="CCCCCC"/>
-                      </a:solidFill>
-                      <a:prstDash val="solid"/>
-                      <a:round/>
-                      <a:headEnd type="none" w="med" len="med"/>
-                      <a:tailEnd type="none" w="med" len="med"/>
-                    </a:lnB>
-                    <a:solidFill>
-                      <a:srgbClr val="FFFFFF"/>
                     </a:solidFill>
                   </a:tcPr>
                 </a:tc>
@@ -34514,7 +35891,7 @@
                             <a:srgbClr val="000000"/>
                           </a:solidFill>
                         </a:rPr>
-                        <a:t>ハートンホテル東品川</a:t>
+                        <a:t>アパホテル相模原橋本駅東</a:t>
                       </a:r>
                       <a:endParaRPr lang="en-US" sz="700" dirty="0"/>
                     </a:p>
@@ -34572,7 +35949,7 @@
                             <a:srgbClr val="000000"/>
                           </a:solidFill>
                         </a:rPr>
-                        <a:t>5</a:t>
+                        <a:t>2</a:t>
                       </a:r>
                       <a:endParaRPr lang="en-US" sz="700" dirty="0"/>
                     </a:p>
@@ -34614,67 +35991,6 @@
                       <a:headEnd type="none" w="med" len="med"/>
                       <a:tailEnd type="none" w="med" len="med"/>
                     </a:lnB>
-                  </a:tcPr>
-                </a:tc>
-                <a:tc>
-                  <a:txBody>
-                    <a:bodyPr/>
-                    <a:lstStyle/>
-                    <a:p>
-                      <a:pPr algn="ctr" indent="0" marL="0">
-                        <a:buNone/>
-                      </a:pPr>
-                      <a:r>
-                        <a:rPr lang="en-US" sz="700" dirty="0">
-                          <a:solidFill>
-                            <a:srgbClr val="E74C3C"/>
-                          </a:solidFill>
-                        </a:rPr>
-                        <a:t>3</a:t>
-                      </a:r>
-                      <a:endParaRPr lang="en-US" sz="700" dirty="0"/>
-                    </a:p>
-                  </a:txBody>
-                  <a:tcPr marL="91440" marR="91440" marT="45720" marB="45720">
-                    <a:lnL w="6350" cap="flat" cmpd="sng" algn="ctr">
-                      <a:solidFill>
-                        <a:srgbClr val="CCCCCC"/>
-                      </a:solidFill>
-                      <a:prstDash val="solid"/>
-                      <a:round/>
-                      <a:headEnd type="none" w="med" len="med"/>
-                      <a:tailEnd type="none" w="med" len="med"/>
-                    </a:lnL>
-                    <a:lnR w="6350" cap="flat" cmpd="sng" algn="ctr">
-                      <a:solidFill>
-                        <a:srgbClr val="CCCCCC"/>
-                      </a:solidFill>
-                      <a:prstDash val="solid"/>
-                      <a:round/>
-                      <a:headEnd type="none" w="med" len="med"/>
-                      <a:tailEnd type="none" w="med" len="med"/>
-                    </a:lnR>
-                    <a:lnT w="6350" cap="flat" cmpd="sng" algn="ctr">
-                      <a:solidFill>
-                        <a:srgbClr val="CCCCCC"/>
-                      </a:solidFill>
-                      <a:prstDash val="solid"/>
-                      <a:round/>
-                      <a:headEnd type="none" w="med" len="med"/>
-                      <a:tailEnd type="none" w="med" len="med"/>
-                    </a:lnT>
-                    <a:lnB w="6350" cap="flat" cmpd="sng" algn="ctr">
-                      <a:solidFill>
-                        <a:srgbClr val="CCCCCC"/>
-                      </a:solidFill>
-                      <a:prstDash val="solid"/>
-                      <a:round/>
-                      <a:headEnd type="none" w="med" len="med"/>
-                      <a:tailEnd type="none" w="med" len="med"/>
-                    </a:lnB>
-                    <a:solidFill>
-                      <a:srgbClr val="FFE0B2"/>
-                    </a:solidFill>
                   </a:tcPr>
                 </a:tc>
                 <a:tc>
@@ -34874,7 +36190,7 @@
                             <a:srgbClr val="333333"/>
                           </a:solidFill>
                         </a:rPr>
-                        <a:t>1</a:t>
+                        <a:t>-</a:t>
                       </a:r>
                       <a:endParaRPr lang="en-US" sz="700" dirty="0"/>
                     </a:p>
@@ -34917,7 +36233,68 @@
                       <a:tailEnd type="none" w="med" len="med"/>
                     </a:lnB>
                     <a:solidFill>
-                      <a:srgbClr val="FFF9C4"/>
+                      <a:srgbClr val="FFFFFF"/>
+                    </a:solidFill>
+                  </a:tcPr>
+                </a:tc>
+                <a:tc>
+                  <a:txBody>
+                    <a:bodyPr/>
+                    <a:lstStyle/>
+                    <a:p>
+                      <a:pPr algn="ctr" indent="0" marL="0">
+                        <a:buNone/>
+                      </a:pPr>
+                      <a:r>
+                        <a:rPr lang="en-US" sz="700" dirty="0">
+                          <a:solidFill>
+                            <a:srgbClr val="333333"/>
+                          </a:solidFill>
+                        </a:rPr>
+                        <a:t>-</a:t>
+                      </a:r>
+                      <a:endParaRPr lang="en-US" sz="700" dirty="0"/>
+                    </a:p>
+                  </a:txBody>
+                  <a:tcPr marL="91440" marR="91440" marT="45720" marB="45720">
+                    <a:lnL w="6350" cap="flat" cmpd="sng" algn="ctr">
+                      <a:solidFill>
+                        <a:srgbClr val="CCCCCC"/>
+                      </a:solidFill>
+                      <a:prstDash val="solid"/>
+                      <a:round/>
+                      <a:headEnd type="none" w="med" len="med"/>
+                      <a:tailEnd type="none" w="med" len="med"/>
+                    </a:lnL>
+                    <a:lnR w="6350" cap="flat" cmpd="sng" algn="ctr">
+                      <a:solidFill>
+                        <a:srgbClr val="CCCCCC"/>
+                      </a:solidFill>
+                      <a:prstDash val="solid"/>
+                      <a:round/>
+                      <a:headEnd type="none" w="med" len="med"/>
+                      <a:tailEnd type="none" w="med" len="med"/>
+                    </a:lnR>
+                    <a:lnT w="6350" cap="flat" cmpd="sng" algn="ctr">
+                      <a:solidFill>
+                        <a:srgbClr val="CCCCCC"/>
+                      </a:solidFill>
+                      <a:prstDash val="solid"/>
+                      <a:round/>
+                      <a:headEnd type="none" w="med" len="med"/>
+                      <a:tailEnd type="none" w="med" len="med"/>
+                    </a:lnT>
+                    <a:lnB w="6350" cap="flat" cmpd="sng" algn="ctr">
+                      <a:solidFill>
+                        <a:srgbClr val="CCCCCC"/>
+                      </a:solidFill>
+                      <a:prstDash val="solid"/>
+                      <a:round/>
+                      <a:headEnd type="none" w="med" len="med"/>
+                      <a:tailEnd type="none" w="med" len="med"/>
+                    </a:lnB>
+                    <a:solidFill>
+                      <a:srgbClr val="FFFFFF"/>
                     </a:solidFill>
                   </a:tcPr>
                 </a:tc>
@@ -35057,490 +36434,6 @@
                           </a:solidFill>
                         </a:rPr>
                         <a:t>3</a:t>
-                      </a:r>
-                      <a:endParaRPr lang="en-US" sz="700" dirty="0"/>
-                    </a:p>
-                  </a:txBody>
-                  <a:tcPr marL="91440" marR="91440" marT="45720" marB="45720">
-                    <a:lnL w="6350" cap="flat" cmpd="sng" algn="ctr">
-                      <a:solidFill>
-                        <a:srgbClr val="CCCCCC"/>
-                      </a:solidFill>
-                      <a:prstDash val="solid"/>
-                      <a:round/>
-                      <a:headEnd type="none" w="med" len="med"/>
-                      <a:tailEnd type="none" w="med" len="med"/>
-                    </a:lnL>
-                    <a:lnR w="6350" cap="flat" cmpd="sng" algn="ctr">
-                      <a:solidFill>
-                        <a:srgbClr val="CCCCCC"/>
-                      </a:solidFill>
-                      <a:prstDash val="solid"/>
-                      <a:round/>
-                      <a:headEnd type="none" w="med" len="med"/>
-                      <a:tailEnd type="none" w="med" len="med"/>
-                    </a:lnR>
-                    <a:lnT w="6350" cap="flat" cmpd="sng" algn="ctr">
-                      <a:solidFill>
-                        <a:srgbClr val="CCCCCC"/>
-                      </a:solidFill>
-                      <a:prstDash val="solid"/>
-                      <a:round/>
-                      <a:headEnd type="none" w="med" len="med"/>
-                      <a:tailEnd type="none" w="med" len="med"/>
-                    </a:lnT>
-                    <a:lnB w="6350" cap="flat" cmpd="sng" algn="ctr">
-                      <a:solidFill>
-                        <a:srgbClr val="CCCCCC"/>
-                      </a:solidFill>
-                      <a:prstDash val="solid"/>
-                      <a:round/>
-                      <a:headEnd type="none" w="med" len="med"/>
-                      <a:tailEnd type="none" w="med" len="med"/>
-                    </a:lnB>
-                  </a:tcPr>
-                </a:tc>
-                <a:tc>
-                  <a:txBody>
-                    <a:bodyPr/>
-                    <a:lstStyle/>
-                    <a:p>
-                      <a:pPr algn="ctr" indent="0" marL="0">
-                        <a:buNone/>
-                      </a:pPr>
-                      <a:r>
-                        <a:rPr lang="en-US" sz="700" dirty="0">
-                          <a:solidFill>
-                            <a:srgbClr val="333333"/>
-                          </a:solidFill>
-                        </a:rPr>
-                        <a:t>2</a:t>
-                      </a:r>
-                      <a:endParaRPr lang="en-US" sz="700" dirty="0"/>
-                    </a:p>
-                  </a:txBody>
-                  <a:tcPr marL="91440" marR="91440" marT="45720" marB="45720">
-                    <a:lnL w="6350" cap="flat" cmpd="sng" algn="ctr">
-                      <a:solidFill>
-                        <a:srgbClr val="CCCCCC"/>
-                      </a:solidFill>
-                      <a:prstDash val="solid"/>
-                      <a:round/>
-                      <a:headEnd type="none" w="med" len="med"/>
-                      <a:tailEnd type="none" w="med" len="med"/>
-                    </a:lnL>
-                    <a:lnR w="6350" cap="flat" cmpd="sng" algn="ctr">
-                      <a:solidFill>
-                        <a:srgbClr val="CCCCCC"/>
-                      </a:solidFill>
-                      <a:prstDash val="solid"/>
-                      <a:round/>
-                      <a:headEnd type="none" w="med" len="med"/>
-                      <a:tailEnd type="none" w="med" len="med"/>
-                    </a:lnR>
-                    <a:lnT w="6350" cap="flat" cmpd="sng" algn="ctr">
-                      <a:solidFill>
-                        <a:srgbClr val="CCCCCC"/>
-                      </a:solidFill>
-                      <a:prstDash val="solid"/>
-                      <a:round/>
-                      <a:headEnd type="none" w="med" len="med"/>
-                      <a:tailEnd type="none" w="med" len="med"/>
-                    </a:lnT>
-                    <a:lnB w="6350" cap="flat" cmpd="sng" algn="ctr">
-                      <a:solidFill>
-                        <a:srgbClr val="CCCCCC"/>
-                      </a:solidFill>
-                      <a:prstDash val="solid"/>
-                      <a:round/>
-                      <a:headEnd type="none" w="med" len="med"/>
-                      <a:tailEnd type="none" w="med" len="med"/>
-                    </a:lnB>
-                    <a:solidFill>
-                      <a:srgbClr val="FFF9C4"/>
-                    </a:solidFill>
-                  </a:tcPr>
-                </a:tc>
-                <a:tc>
-                  <a:txBody>
-                    <a:bodyPr/>
-                    <a:lstStyle/>
-                    <a:p>
-                      <a:pPr algn="ctr" indent="0" marL="0">
-                        <a:buNone/>
-                      </a:pPr>
-                      <a:r>
-                        <a:rPr lang="en-US" sz="700" dirty="0">
-                          <a:solidFill>
-                            <a:srgbClr val="333333"/>
-                          </a:solidFill>
-                        </a:rPr>
-                        <a:t>-</a:t>
-                      </a:r>
-                      <a:endParaRPr lang="en-US" sz="700" dirty="0"/>
-                    </a:p>
-                  </a:txBody>
-                  <a:tcPr marL="91440" marR="91440" marT="45720" marB="45720">
-                    <a:lnL w="6350" cap="flat" cmpd="sng" algn="ctr">
-                      <a:solidFill>
-                        <a:srgbClr val="CCCCCC"/>
-                      </a:solidFill>
-                      <a:prstDash val="solid"/>
-                      <a:round/>
-                      <a:headEnd type="none" w="med" len="med"/>
-                      <a:tailEnd type="none" w="med" len="med"/>
-                    </a:lnL>
-                    <a:lnR w="6350" cap="flat" cmpd="sng" algn="ctr">
-                      <a:solidFill>
-                        <a:srgbClr val="CCCCCC"/>
-                      </a:solidFill>
-                      <a:prstDash val="solid"/>
-                      <a:round/>
-                      <a:headEnd type="none" w="med" len="med"/>
-                      <a:tailEnd type="none" w="med" len="med"/>
-                    </a:lnR>
-                    <a:lnT w="6350" cap="flat" cmpd="sng" algn="ctr">
-                      <a:solidFill>
-                        <a:srgbClr val="CCCCCC"/>
-                      </a:solidFill>
-                      <a:prstDash val="solid"/>
-                      <a:round/>
-                      <a:headEnd type="none" w="med" len="med"/>
-                      <a:tailEnd type="none" w="med" len="med"/>
-                    </a:lnT>
-                    <a:lnB w="6350" cap="flat" cmpd="sng" algn="ctr">
-                      <a:solidFill>
-                        <a:srgbClr val="CCCCCC"/>
-                      </a:solidFill>
-                      <a:prstDash val="solid"/>
-                      <a:round/>
-                      <a:headEnd type="none" w="med" len="med"/>
-                      <a:tailEnd type="none" w="med" len="med"/>
-                    </a:lnB>
-                    <a:solidFill>
-                      <a:srgbClr val="FFFFFF"/>
-                    </a:solidFill>
-                  </a:tcPr>
-                </a:tc>
-                <a:tc>
-                  <a:txBody>
-                    <a:bodyPr/>
-                    <a:lstStyle/>
-                    <a:p>
-                      <a:pPr algn="ctr" indent="0" marL="0">
-                        <a:buNone/>
-                      </a:pPr>
-                      <a:r>
-                        <a:rPr lang="en-US" sz="700" dirty="0">
-                          <a:solidFill>
-                            <a:srgbClr val="333333"/>
-                          </a:solidFill>
-                        </a:rPr>
-                        <a:t>-</a:t>
-                      </a:r>
-                      <a:endParaRPr lang="en-US" sz="700" dirty="0"/>
-                    </a:p>
-                  </a:txBody>
-                  <a:tcPr marL="91440" marR="91440" marT="45720" marB="45720">
-                    <a:lnL w="6350" cap="flat" cmpd="sng" algn="ctr">
-                      <a:solidFill>
-                        <a:srgbClr val="CCCCCC"/>
-                      </a:solidFill>
-                      <a:prstDash val="solid"/>
-                      <a:round/>
-                      <a:headEnd type="none" w="med" len="med"/>
-                      <a:tailEnd type="none" w="med" len="med"/>
-                    </a:lnL>
-                    <a:lnR w="6350" cap="flat" cmpd="sng" algn="ctr">
-                      <a:solidFill>
-                        <a:srgbClr val="CCCCCC"/>
-                      </a:solidFill>
-                      <a:prstDash val="solid"/>
-                      <a:round/>
-                      <a:headEnd type="none" w="med" len="med"/>
-                      <a:tailEnd type="none" w="med" len="med"/>
-                    </a:lnR>
-                    <a:lnT w="6350" cap="flat" cmpd="sng" algn="ctr">
-                      <a:solidFill>
-                        <a:srgbClr val="CCCCCC"/>
-                      </a:solidFill>
-                      <a:prstDash val="solid"/>
-                      <a:round/>
-                      <a:headEnd type="none" w="med" len="med"/>
-                      <a:tailEnd type="none" w="med" len="med"/>
-                    </a:lnT>
-                    <a:lnB w="6350" cap="flat" cmpd="sng" algn="ctr">
-                      <a:solidFill>
-                        <a:srgbClr val="CCCCCC"/>
-                      </a:solidFill>
-                      <a:prstDash val="solid"/>
-                      <a:round/>
-                      <a:headEnd type="none" w="med" len="med"/>
-                      <a:tailEnd type="none" w="med" len="med"/>
-                    </a:lnB>
-                    <a:solidFill>
-                      <a:srgbClr val="FFFFFF"/>
-                    </a:solidFill>
-                  </a:tcPr>
-                </a:tc>
-                <a:tc>
-                  <a:txBody>
-                    <a:bodyPr/>
-                    <a:lstStyle/>
-                    <a:p>
-                      <a:pPr algn="ctr" indent="0" marL="0">
-                        <a:buNone/>
-                      </a:pPr>
-                      <a:r>
-                        <a:rPr lang="en-US" sz="700" dirty="0">
-                          <a:solidFill>
-                            <a:srgbClr val="333333"/>
-                          </a:solidFill>
-                        </a:rPr>
-                        <a:t>-</a:t>
-                      </a:r>
-                      <a:endParaRPr lang="en-US" sz="700" dirty="0"/>
-                    </a:p>
-                  </a:txBody>
-                  <a:tcPr marL="91440" marR="91440" marT="45720" marB="45720">
-                    <a:lnL w="6350" cap="flat" cmpd="sng" algn="ctr">
-                      <a:solidFill>
-                        <a:srgbClr val="CCCCCC"/>
-                      </a:solidFill>
-                      <a:prstDash val="solid"/>
-                      <a:round/>
-                      <a:headEnd type="none" w="med" len="med"/>
-                      <a:tailEnd type="none" w="med" len="med"/>
-                    </a:lnL>
-                    <a:lnR w="6350" cap="flat" cmpd="sng" algn="ctr">
-                      <a:solidFill>
-                        <a:srgbClr val="CCCCCC"/>
-                      </a:solidFill>
-                      <a:prstDash val="solid"/>
-                      <a:round/>
-                      <a:headEnd type="none" w="med" len="med"/>
-                      <a:tailEnd type="none" w="med" len="med"/>
-                    </a:lnR>
-                    <a:lnT w="6350" cap="flat" cmpd="sng" algn="ctr">
-                      <a:solidFill>
-                        <a:srgbClr val="CCCCCC"/>
-                      </a:solidFill>
-                      <a:prstDash val="solid"/>
-                      <a:round/>
-                      <a:headEnd type="none" w="med" len="med"/>
-                      <a:tailEnd type="none" w="med" len="med"/>
-                    </a:lnT>
-                    <a:lnB w="6350" cap="flat" cmpd="sng" algn="ctr">
-                      <a:solidFill>
-                        <a:srgbClr val="CCCCCC"/>
-                      </a:solidFill>
-                      <a:prstDash val="solid"/>
-                      <a:round/>
-                      <a:headEnd type="none" w="med" len="med"/>
-                      <a:tailEnd type="none" w="med" len="med"/>
-                    </a:lnB>
-                    <a:solidFill>
-                      <a:srgbClr val="FFFFFF"/>
-                    </a:solidFill>
-                  </a:tcPr>
-                </a:tc>
-                <a:tc>
-                  <a:txBody>
-                    <a:bodyPr/>
-                    <a:lstStyle/>
-                    <a:p>
-                      <a:pPr algn="ctr" indent="0" marL="0">
-                        <a:buNone/>
-                      </a:pPr>
-                      <a:r>
-                        <a:rPr lang="en-US" sz="700" dirty="0">
-                          <a:solidFill>
-                            <a:srgbClr val="333333"/>
-                          </a:solidFill>
-                        </a:rPr>
-                        <a:t>-</a:t>
-                      </a:r>
-                      <a:endParaRPr lang="en-US" sz="700" dirty="0"/>
-                    </a:p>
-                  </a:txBody>
-                  <a:tcPr marL="91440" marR="91440" marT="45720" marB="45720">
-                    <a:lnL w="6350" cap="flat" cmpd="sng" algn="ctr">
-                      <a:solidFill>
-                        <a:srgbClr val="CCCCCC"/>
-                      </a:solidFill>
-                      <a:prstDash val="solid"/>
-                      <a:round/>
-                      <a:headEnd type="none" w="med" len="med"/>
-                      <a:tailEnd type="none" w="med" len="med"/>
-                    </a:lnL>
-                    <a:lnR w="6350" cap="flat" cmpd="sng" algn="ctr">
-                      <a:solidFill>
-                        <a:srgbClr val="CCCCCC"/>
-                      </a:solidFill>
-                      <a:prstDash val="solid"/>
-                      <a:round/>
-                      <a:headEnd type="none" w="med" len="med"/>
-                      <a:tailEnd type="none" w="med" len="med"/>
-                    </a:lnR>
-                    <a:lnT w="6350" cap="flat" cmpd="sng" algn="ctr">
-                      <a:solidFill>
-                        <a:srgbClr val="CCCCCC"/>
-                      </a:solidFill>
-                      <a:prstDash val="solid"/>
-                      <a:round/>
-                      <a:headEnd type="none" w="med" len="med"/>
-                      <a:tailEnd type="none" w="med" len="med"/>
-                    </a:lnT>
-                    <a:lnB w="6350" cap="flat" cmpd="sng" algn="ctr">
-                      <a:solidFill>
-                        <a:srgbClr val="CCCCCC"/>
-                      </a:solidFill>
-                      <a:prstDash val="solid"/>
-                      <a:round/>
-                      <a:headEnd type="none" w="med" len="med"/>
-                      <a:tailEnd type="none" w="med" len="med"/>
-                    </a:lnB>
-                    <a:solidFill>
-                      <a:srgbClr val="FFFFFF"/>
-                    </a:solidFill>
-                  </a:tcPr>
-                </a:tc>
-                <a:tc>
-                  <a:txBody>
-                    <a:bodyPr/>
-                    <a:lstStyle/>
-                    <a:p>
-                      <a:pPr algn="ctr" indent="0" marL="0">
-                        <a:buNone/>
-                      </a:pPr>
-                      <a:r>
-                        <a:rPr lang="en-US" sz="700" dirty="0">
-                          <a:solidFill>
-                            <a:srgbClr val="333333"/>
-                          </a:solidFill>
-                        </a:rPr>
-                        <a:t>-</a:t>
-                      </a:r>
-                      <a:endParaRPr lang="en-US" sz="700" dirty="0"/>
-                    </a:p>
-                  </a:txBody>
-                  <a:tcPr marL="91440" marR="91440" marT="45720" marB="45720">
-                    <a:lnL w="6350" cap="flat" cmpd="sng" algn="ctr">
-                      <a:solidFill>
-                        <a:srgbClr val="CCCCCC"/>
-                      </a:solidFill>
-                      <a:prstDash val="solid"/>
-                      <a:round/>
-                      <a:headEnd type="none" w="med" len="med"/>
-                      <a:tailEnd type="none" w="med" len="med"/>
-                    </a:lnL>
-                    <a:lnR w="6350" cap="flat" cmpd="sng" algn="ctr">
-                      <a:solidFill>
-                        <a:srgbClr val="CCCCCC"/>
-                      </a:solidFill>
-                      <a:prstDash val="solid"/>
-                      <a:round/>
-                      <a:headEnd type="none" w="med" len="med"/>
-                      <a:tailEnd type="none" w="med" len="med"/>
-                    </a:lnR>
-                    <a:lnT w="6350" cap="flat" cmpd="sng" algn="ctr">
-                      <a:solidFill>
-                        <a:srgbClr val="CCCCCC"/>
-                      </a:solidFill>
-                      <a:prstDash val="solid"/>
-                      <a:round/>
-                      <a:headEnd type="none" w="med" len="med"/>
-                      <a:tailEnd type="none" w="med" len="med"/>
-                    </a:lnT>
-                    <a:lnB w="6350" cap="flat" cmpd="sng" algn="ctr">
-                      <a:solidFill>
-                        <a:srgbClr val="CCCCCC"/>
-                      </a:solidFill>
-                      <a:prstDash val="solid"/>
-                      <a:round/>
-                      <a:headEnd type="none" w="med" len="med"/>
-                      <a:tailEnd type="none" w="med" len="med"/>
-                    </a:lnB>
-                    <a:solidFill>
-                      <a:srgbClr val="FFFFFF"/>
-                    </a:solidFill>
-                  </a:tcPr>
-                </a:tc>
-              </a:tr>
-              <a:tr h="0">
-                <a:tc>
-                  <a:txBody>
-                    <a:bodyPr/>
-                    <a:lstStyle/>
-                    <a:p>
-                      <a:pPr indent="0" marL="0">
-                        <a:buNone/>
-                      </a:pPr>
-                      <a:r>
-                        <a:rPr lang="en-US" sz="700" b="1" dirty="0">
-                          <a:solidFill>
-                            <a:srgbClr val="000000"/>
-                          </a:solidFill>
-                        </a:rPr>
-                        <a:t>アパホテル相模原橋本駅東</a:t>
-                      </a:r>
-                      <a:endParaRPr lang="en-US" sz="700" dirty="0"/>
-                    </a:p>
-                  </a:txBody>
-                  <a:tcPr marL="91440" marR="91440" marT="45720" marB="45720">
-                    <a:lnL w="6350" cap="flat" cmpd="sng" algn="ctr">
-                      <a:solidFill>
-                        <a:srgbClr val="CCCCCC"/>
-                      </a:solidFill>
-                      <a:prstDash val="solid"/>
-                      <a:round/>
-                      <a:headEnd type="none" w="med" len="med"/>
-                      <a:tailEnd type="none" w="med" len="med"/>
-                    </a:lnL>
-                    <a:lnR w="6350" cap="flat" cmpd="sng" algn="ctr">
-                      <a:solidFill>
-                        <a:srgbClr val="CCCCCC"/>
-                      </a:solidFill>
-                      <a:prstDash val="solid"/>
-                      <a:round/>
-                      <a:headEnd type="none" w="med" len="med"/>
-                      <a:tailEnd type="none" w="med" len="med"/>
-                    </a:lnR>
-                    <a:lnT w="6350" cap="flat" cmpd="sng" algn="ctr">
-                      <a:solidFill>
-                        <a:srgbClr val="CCCCCC"/>
-                      </a:solidFill>
-                      <a:prstDash val="solid"/>
-                      <a:round/>
-                      <a:headEnd type="none" w="med" len="med"/>
-                      <a:tailEnd type="none" w="med" len="med"/>
-                    </a:lnT>
-                    <a:lnB w="6350" cap="flat" cmpd="sng" algn="ctr">
-                      <a:solidFill>
-                        <a:srgbClr val="CCCCCC"/>
-                      </a:solidFill>
-                      <a:prstDash val="solid"/>
-                      <a:round/>
-                      <a:headEnd type="none" w="med" len="med"/>
-                      <a:tailEnd type="none" w="med" len="med"/>
-                    </a:lnB>
-                  </a:tcPr>
-                </a:tc>
-                <a:tc>
-                  <a:txBody>
-                    <a:bodyPr/>
-                    <a:lstStyle/>
-                    <a:p>
-                      <a:pPr algn="ctr" indent="0" marL="0">
-                        <a:buNone/>
-                      </a:pPr>
-                      <a:r>
-                        <a:rPr lang="en-US" sz="700" b="1" dirty="0">
-                          <a:solidFill>
-                            <a:srgbClr val="000000"/>
-                          </a:solidFill>
-                        </a:rPr>
-                        <a:t>2</a:t>
                       </a:r>
                       <a:endParaRPr lang="en-US" sz="700" dirty="0"/>
                     </a:p>
@@ -38322,7 +39215,7 @@
                 <a:ea typeface="Arial" pitchFamily="34" charset="-122"/>
                 <a:cs typeface="Arial" pitchFamily="34" charset="-120"/>
               </a:rPr>
-              <a:t>アパホテル蒲田駅東（7.38点）</a:t>
+              <a:t>アパホテル蒲田駅東（7.39点）</a:t>
             </a:r>
             <a:endParaRPr lang="en-US" sz="800" dirty="0"/>
           </a:p>
@@ -38339,7 +39232,7 @@
                 <a:ea typeface="Arial" pitchFamily="34" charset="-122"/>
                 <a:cs typeface="Arial" pitchFamily="34" charset="-120"/>
               </a:rPr>
-              <a:t>コンフォートホテル博多（7.73点）</a:t>
+              <a:t>コンフォートホテル博多（7.83点）</a:t>
             </a:r>
             <a:endParaRPr lang="en-US" sz="800" dirty="0"/>
           </a:p>
@@ -38373,7 +39266,7 @@
                 <a:ea typeface="Arial" pitchFamily="34" charset="-122"/>
                 <a:cs typeface="Arial" pitchFamily="34" charset="-120"/>
               </a:rPr>
-              <a:t>コートホテル新横浜（7.03点）</a:t>
+              <a:t>チサンホテル浜松町（7.09点）</a:t>
             </a:r>
             <a:endParaRPr lang="en-US" sz="800" dirty="0"/>
           </a:p>
@@ -38390,7 +39283,7 @@
                 <a:ea typeface="Arial" pitchFamily="34" charset="-122"/>
                 <a:cs typeface="Arial" pitchFamily="34" charset="-120"/>
               </a:rPr>
-              <a:t>チサンホテル浜松町（7.1点）</a:t>
+              <a:t>コートホテル新横浜（7.12点）</a:t>
             </a:r>
             <a:endParaRPr lang="en-US" sz="800" dirty="0"/>
           </a:p>
@@ -38476,7 +39369,7 @@
                 <a:ea typeface="Arial" pitchFamily="34" charset="-122"/>
                 <a:cs typeface="Arial" pitchFamily="34" charset="-120"/>
               </a:rPr>
-              <a:t>HIGH（高） (2)</a:t>
+              <a:t>HIGH（高） (3)</a:t>
             </a:r>
             <a:endParaRPr lang="en-US" sz="1100" dirty="0"/>
           </a:p>
@@ -38515,7 +39408,7 @@
                 <a:ea typeface="Arial" pitchFamily="34" charset="-122"/>
                 <a:cs typeface="Arial" pitchFamily="34" charset="-120"/>
               </a:rPr>
-              <a:t>コンフォートイン六本木（8.22点）</a:t>
+              <a:t>コンフォートイン六本木（8.23点）</a:t>
             </a:r>
             <a:endParaRPr lang="en-US" sz="800" dirty="0"/>
           </a:p>
@@ -38532,7 +39425,24 @@
                 <a:ea typeface="Arial" pitchFamily="34" charset="-122"/>
                 <a:cs typeface="Arial" pitchFamily="34" charset="-120"/>
               </a:rPr>
-              <a:t>ダイワロイネットホテル東京大崎（8.86点）</a:t>
+              <a:t>ホテルコメント横浜関内（8.87点）</a:t>
+            </a:r>
+            <a:endParaRPr lang="en-US" sz="800" dirty="0"/>
+          </a:p>
+          <a:p>
+            <a:pPr indent="0" marL="0">
+              <a:buNone/>
+            </a:pPr>
+            <a:r>
+              <a:rPr lang="en-US" sz="800" dirty="0">
+                <a:solidFill>
+                  <a:srgbClr val="333333"/>
+                </a:solidFill>
+                <a:latin typeface="Arial" pitchFamily="34" charset="0"/>
+                <a:ea typeface="Arial" pitchFamily="34" charset="-122"/>
+                <a:cs typeface="Arial" pitchFamily="34" charset="-120"/>
+              </a:rPr>
+              <a:t>ダイワロイネットホテル東京大崎（8.83点）</a:t>
             </a:r>
             <a:endParaRPr lang="en-US" sz="800" dirty="0"/>
           </a:p>
@@ -38618,7 +39528,7 @@
                 <a:ea typeface="Arial" pitchFamily="34" charset="-122"/>
                 <a:cs typeface="Arial" pitchFamily="34" charset="-120"/>
               </a:rPr>
-              <a:t>STANDARD（標準） (10)</a:t>
+              <a:t>STANDARD（標準） (9)</a:t>
             </a:r>
             <a:endParaRPr lang="en-US" sz="1100" dirty="0"/>
           </a:p>
@@ -38657,7 +39567,7 @@
                 <a:ea typeface="Arial" pitchFamily="34" charset="-122"/>
                 <a:cs typeface="Arial" pitchFamily="34" charset="-120"/>
               </a:rPr>
-              <a:t>ホテルコメント横浜関内（8.9点）</a:t>
+              <a:t>川崎日航ホテル（8.72点）</a:t>
             </a:r>
             <a:endParaRPr lang="en-US" sz="800" dirty="0"/>
           </a:p>
@@ -38674,7 +39584,7 @@
                 <a:ea typeface="Arial" pitchFamily="34" charset="-122"/>
                 <a:cs typeface="Arial" pitchFamily="34" charset="-120"/>
               </a:rPr>
-              <a:t>川崎日航ホテル（8.68点）</a:t>
+              <a:t>ハートンホテル東品川（8.67点）</a:t>
             </a:r>
             <a:endParaRPr lang="en-US" sz="800" dirty="0"/>
           </a:p>
@@ -38691,7 +39601,7 @@
                 <a:ea typeface="Arial" pitchFamily="34" charset="-122"/>
                 <a:cs typeface="Arial" pitchFamily="34" charset="-120"/>
               </a:rPr>
-              <a:t>コンフォートホテル成田（8.5点）</a:t>
+              <a:t>コンフォートホテル成田（8.53点）</a:t>
             </a:r>
             <a:endParaRPr lang="en-US" sz="800" dirty="0"/>
           </a:p>
@@ -38708,7 +39618,7 @@
                 <a:ea typeface="Arial" pitchFamily="34" charset="-122"/>
                 <a:cs typeface="Arial" pitchFamily="34" charset="-120"/>
               </a:rPr>
-              <a:t>ハートンホテル東品川（8.72点）</a:t>
+              <a:t>アパホテル相模原橋本駅東（8.16点）</a:t>
             </a:r>
             <a:endParaRPr lang="en-US" sz="800" dirty="0"/>
           </a:p>
@@ -38725,7 +39635,7 @@
                 <a:ea typeface="Arial" pitchFamily="34" charset="-122"/>
                 <a:cs typeface="Arial" pitchFamily="34" charset="-120"/>
               </a:rPr>
-              <a:t>ホテルケヤキゲート東京府中（8.74点）</a:t>
+              <a:t>ホテルケヤキゲート東京府中（8.71点）</a:t>
             </a:r>
             <a:endParaRPr lang="en-US" sz="800" dirty="0"/>
           </a:p>
@@ -38742,7 +39652,7 @@
                 <a:ea typeface="Arial" pitchFamily="34" charset="-122"/>
                 <a:cs typeface="Arial" pitchFamily="34" charset="-120"/>
               </a:rPr>
-              <a:t>アパホテル相模原橋本駅東（8.13点）</a:t>
+              <a:t>リッチモンドホテル東京目白（8.71点）</a:t>
             </a:r>
             <a:endParaRPr lang="en-US" sz="800" dirty="0"/>
           </a:p>
@@ -38759,7 +39669,7 @@
                 <a:ea typeface="Arial" pitchFamily="34" charset="-122"/>
                 <a:cs typeface="Arial" pitchFamily="34" charset="-120"/>
               </a:rPr>
-              <a:t>リッチモンドホテル東京目白（8.7点）</a:t>
+              <a:t>変なホテル東京羽田（8.28点）</a:t>
             </a:r>
             <a:endParaRPr lang="en-US" sz="800" dirty="0"/>
           </a:p>
@@ -38776,24 +39686,7 @@
                 <a:ea typeface="Arial" pitchFamily="34" charset="-122"/>
                 <a:cs typeface="Arial" pitchFamily="34" charset="-120"/>
               </a:rPr>
-              <a:t>変なホテル東京羽田（8.3点）</a:t>
-            </a:r>
-            <a:endParaRPr lang="en-US" sz="800" dirty="0"/>
-          </a:p>
-          <a:p>
-            <a:pPr indent="0" marL="0">
-              <a:buNone/>
-            </a:pPr>
-            <a:r>
-              <a:rPr lang="en-US" sz="800" dirty="0">
-                <a:solidFill>
-                  <a:srgbClr val="333333"/>
-                </a:solidFill>
-                <a:latin typeface="Arial" pitchFamily="34" charset="0"/>
-                <a:ea typeface="Arial" pitchFamily="34" charset="-122"/>
-                <a:cs typeface="Arial" pitchFamily="34" charset="-120"/>
-              </a:rPr>
-              <a:t>第一イン池袋（9.13点）</a:t>
+              <a:t>第一イン池袋（9.16点）</a:t>
             </a:r>
             <a:endParaRPr lang="en-US" sz="800" dirty="0"/>
           </a:p>
@@ -38935,7 +39828,7 @@
                 <a:ea typeface="Arial" pitchFamily="34" charset="-122"/>
                 <a:cs typeface="Arial" pitchFamily="34" charset="-120"/>
               </a:rPr>
-              <a:t>京成リッチモンドホテル東京錦糸町（9.08点）</a:t>
+              <a:t>京成リッチモンドホテル東京錦糸町（9.12点）</a:t>
             </a:r>
             <a:endParaRPr lang="en-US" sz="800" dirty="0"/>
           </a:p>
@@ -38952,7 +39845,7 @@
                 <a:ea typeface="Arial" pitchFamily="34" charset="-122"/>
                 <a:cs typeface="Arial" pitchFamily="34" charset="-120"/>
               </a:rPr>
-              <a:t>コンフォートスイーツ東京ベイ（9.22点）</a:t>
+              <a:t>コンフォートスイーツ東京ベイ（9.21点）</a:t>
             </a:r>
             <a:endParaRPr lang="en-US" sz="800" dirty="0"/>
           </a:p>
@@ -39173,7 +40066,7 @@
                 <a:ea typeface="Arial" pitchFamily="34" charset="-122"/>
                 <a:cs typeface="Arial" pitchFamily="34" charset="-120"/>
               </a:rPr>
-              <a:t>優先度 #1 | 現状 7.38点 → 目標 8点</a:t>
+              <a:t>優先度 #1 | 現状 7.39点 → 目標 8点</a:t>
             </a:r>
             <a:endParaRPr lang="en-US" sz="1000" dirty="0"/>
           </a:p>
@@ -39298,7 +40191,7 @@
                 <a:ea typeface="Arial" pitchFamily="34" charset="-122"/>
                 <a:cs typeface="Arial" pitchFamily="34" charset="-120"/>
               </a:rPr>
-              <a:t>7.38</a:t>
+              <a:t>7.39</a:t>
             </a:r>
             <a:endParaRPr lang="en-US" sz="2800" dirty="0"/>
           </a:p>
@@ -40379,7 +41272,7 @@
                 <a:ea typeface="Arial" pitchFamily="34" charset="-122"/>
                 <a:cs typeface="Arial" pitchFamily="34" charset="-120"/>
               </a:rPr>
-              <a:t>優先度 #2 | 現状 7.73点 → 目標 8.5点</a:t>
+              <a:t>優先度 #2 | 現状 7.83点 → 目標 8.5点</a:t>
             </a:r>
             <a:endParaRPr lang="en-US" sz="1000" dirty="0"/>
           </a:p>
@@ -40504,7 +41397,7 @@
                 <a:ea typeface="Arial" pitchFamily="34" charset="-122"/>
                 <a:cs typeface="Arial" pitchFamily="34" charset="-120"/>
               </a:rPr>
-              <a:t>7.73</a:t>
+              <a:t>7.83</a:t>
             </a:r>
             <a:endParaRPr lang="en-US" sz="2800" dirty="0"/>
           </a:p>
@@ -40734,7 +41627,7 @@
                 <a:ea typeface="Arial" pitchFamily="34" charset="-122"/>
                 <a:cs typeface="Arial" pitchFamily="34" charset="-120"/>
               </a:rPr>
-              <a:t>清掃品質全般: 12件</a:t>
+              <a:t>清掃品質全般: 11件</a:t>
             </a:r>
             <a:endParaRPr lang="en-US" sz="800" dirty="0"/>
           </a:p>

--- a/納品レポート/PRIMECHANGE戦略レポート/PRIMECHANGE_清掃戦略レポート.pptx
+++ b/納品レポート/PRIMECHANGE戦略レポート/PRIMECHANGE_清掃戦略レポート.pptx
@@ -2749,7 +2749,7 @@
                 <a:ea typeface="Arial" pitchFamily="34" charset="-122"/>
                 <a:cs typeface="Arial" pitchFamily="34" charset="-120"/>
               </a:rPr>
-              <a:t>2026年3月25日</a:t>
+              <a:t>2026年3月26日</a:t>
             </a:r>
             <a:endParaRPr lang="en-US" sz="1200" dirty="0"/>
           </a:p>
@@ -2788,7 +2788,7 @@
                 <a:ea typeface="Arial" pitchFamily="34" charset="-122"/>
                 <a:cs typeface="Arial" pitchFamily="34" charset="-120"/>
               </a:rPr>
-              <a:t>対象：19ホテル | レビュー：2389件</a:t>
+              <a:t>対象：19ホテル | レビュー：2400件</a:t>
             </a:r>
             <a:endParaRPr lang="en-US" sz="1100" dirty="0"/>
           </a:p>
@@ -2989,7 +2989,7 @@
                 <a:ea typeface="Arial" pitchFamily="34" charset="-122"/>
                 <a:cs typeface="Arial" pitchFamily="34" charset="-120"/>
               </a:rPr>
-              <a:t>優先度 #4 | 現状 7.09点 → 目標 8点</a:t>
+              <a:t>優先度 #4 | 現状 7.12点 → 目標 8点</a:t>
             </a:r>
             <a:endParaRPr lang="en-US" sz="1000" dirty="0"/>
           </a:p>
@@ -3114,7 +3114,7 @@
                 <a:ea typeface="Arial" pitchFamily="34" charset="-122"/>
                 <a:cs typeface="Arial" pitchFamily="34" charset="-120"/>
               </a:rPr>
-              <a:t>7.09</a:t>
+              <a:t>7.12</a:t>
             </a:r>
             <a:endParaRPr lang="en-US" sz="2800" dirty="0"/>
           </a:p>
@@ -5763,7 +5763,7 @@
                 <a:ea typeface="Arial" pitchFamily="34" charset="-122"/>
                 <a:cs typeface="Arial" pitchFamily="34" charset="-120"/>
               </a:rPr>
-              <a:t>8.87点 → 9.2点</a:t>
+              <a:t>8.88点 → 9.2点</a:t>
             </a:r>
             <a:endParaRPr lang="en-US" sz="1100" dirty="0"/>
           </a:p>
@@ -6000,7 +6000,7 @@
                 <a:ea typeface="Arial" pitchFamily="34" charset="-122"/>
                 <a:cs typeface="Arial" pitchFamily="34" charset="-120"/>
               </a:rPr>
-              <a:t>8.83点 → 9.1点</a:t>
+              <a:t>8.85点 → 9.2点</a:t>
             </a:r>
             <a:endParaRPr lang="en-US" sz="1100" dirty="0"/>
           </a:p>
@@ -10296,7 +10296,7 @@
                             <a:srgbClr val="000000"/>
                           </a:solidFill>
                         </a:rPr>
-                        <a:t>78.7%</a:t>
+                        <a:t>78.8%</a:t>
                       </a:r>
                       <a:endParaRPr lang="en-US" sz="800" dirty="0"/>
                     </a:p>
@@ -10357,7 +10357,7 @@
                             <a:srgbClr val="27AE60"/>
                           </a:solidFill>
                         </a:rPr>
-                        <a:t>83.7%以上</a:t>
+                        <a:t>83.8%以上</a:t>
                       </a:r>
                       <a:endParaRPr lang="en-US" sz="800" dirty="0"/>
                     </a:p>
@@ -12394,7 +12394,7 @@
                             <a:srgbClr val="000000"/>
                           </a:solidFill>
                         </a:rPr>
-                        <a:t>7.09</a:t>
+                        <a:t>7.12</a:t>
                       </a:r>
                       <a:endParaRPr lang="en-US" sz="700" dirty="0"/>
                     </a:p>
@@ -12516,7 +12516,7 @@
                             <a:srgbClr val="000000"/>
                           </a:solidFill>
                         </a:rPr>
-                        <a:t>8.9%</a:t>
+                        <a:t>8.8%</a:t>
                       </a:r>
                       <a:endParaRPr lang="en-US" sz="700" dirty="0"/>
                     </a:p>
@@ -12577,7 +12577,7 @@
                             <a:srgbClr val="27AE60"/>
                           </a:solidFill>
                         </a:rPr>
-                        <a:t>2.7%</a:t>
+                        <a:t>2.6%</a:t>
                       </a:r>
                       <a:endParaRPr lang="en-US" sz="700" dirty="0"/>
                     </a:p>
@@ -13252,7 +13252,7 @@
                             <a:srgbClr val="000000"/>
                           </a:solidFill>
                         </a:rPr>
-                        <a:t>6.6%</a:t>
+                        <a:t>6.5%</a:t>
                       </a:r>
                       <a:endParaRPr lang="en-US" sz="700" dirty="0"/>
                     </a:p>
@@ -13313,7 +13313,7 @@
                             <a:srgbClr val="27AE60"/>
                           </a:solidFill>
                         </a:rPr>
-                        <a:t>2.0%</a:t>
+                        <a:t>1.9%</a:t>
                       </a:r>
                       <a:endParaRPr lang="en-US" sz="700" dirty="0"/>
                     </a:p>
@@ -13498,7 +13498,7 @@
                             <a:srgbClr val="000000"/>
                           </a:solidFill>
                         </a:rPr>
-                        <a:t>8.87</a:t>
+                        <a:t>8.88</a:t>
                       </a:r>
                       <a:endParaRPr lang="en-US" sz="700" dirty="0"/>
                     </a:p>
@@ -13620,7 +13620,7 @@
                             <a:srgbClr val="000000"/>
                           </a:solidFill>
                         </a:rPr>
-                        <a:t>6.3%</a:t>
+                        <a:t>6.2%</a:t>
                       </a:r>
                       <a:endParaRPr lang="en-US" sz="700" dirty="0"/>
                     </a:p>
@@ -13866,7 +13866,7 @@
                             <a:srgbClr val="000000"/>
                           </a:solidFill>
                         </a:rPr>
-                        <a:t>8.83</a:t>
+                        <a:t>8.85</a:t>
                       </a:r>
                       <a:endParaRPr lang="en-US" sz="700" dirty="0"/>
                     </a:p>
@@ -13988,7 +13988,7 @@
                             <a:srgbClr val="000000"/>
                           </a:solidFill>
                         </a:rPr>
-                        <a:t>5.2%</a:t>
+                        <a:t>5.1%</a:t>
                       </a:r>
                       <a:endParaRPr lang="en-US" sz="700" dirty="0"/>
                     </a:p>
@@ -14049,7 +14049,7 @@
                             <a:srgbClr val="27AE60"/>
                           </a:solidFill>
                         </a:rPr>
-                        <a:t>1.6%</a:t>
+                        <a:t>1.5%</a:t>
                       </a:r>
                       <a:endParaRPr lang="en-US" sz="700" dirty="0"/>
                     </a:p>
@@ -17478,7 +17478,7 @@
                 <a:ea typeface="Arial" pitchFamily="34" charset="-122"/>
                 <a:cs typeface="Arial" pitchFamily="34" charset="-120"/>
               </a:rPr>
-              <a:t>78.7%</a:t>
+              <a:t>78.8%</a:t>
             </a:r>
             <a:endParaRPr lang="en-US" sz="2800" dirty="0"/>
           </a:p>
@@ -17728,7 +17728,7 @@
                 <a:ea typeface="Arial" pitchFamily="34" charset="-122"/>
                 <a:cs typeface="Arial" pitchFamily="34" charset="-120"/>
               </a:rPr>
-              <a:t>2389件</a:t>
+              <a:t>2400件</a:t>
             </a:r>
             <a:endParaRPr lang="en-US" sz="2800" dirty="0"/>
           </a:p>
@@ -19799,7 +19799,7 @@
                             <a:srgbClr val="000000"/>
                           </a:solidFill>
                         </a:rPr>
-                        <a:t>91.3%</a:t>
+                        <a:t>91.4%</a:t>
                       </a:r>
                       <a:endParaRPr lang="en-US" sz="700" dirty="0"/>
                     </a:p>
@@ -20106,7 +20106,7 @@
                             <a:srgbClr val="000000"/>
                           </a:solidFill>
                         </a:rPr>
-                        <a:t>9.12</a:t>
+                        <a:t>9.13</a:t>
                       </a:r>
                       <a:endParaRPr lang="en-US" sz="700" dirty="0"/>
                     </a:p>
@@ -20167,7 +20167,7 @@
                             <a:srgbClr val="000000"/>
                           </a:solidFill>
                         </a:rPr>
-                        <a:t>89.8%</a:t>
+                        <a:t>89.9%</a:t>
                       </a:r>
                       <a:endParaRPr lang="en-US" sz="700" dirty="0"/>
                     </a:p>
@@ -20474,7 +20474,7 @@
                             <a:srgbClr val="000000"/>
                           </a:solidFill>
                         </a:rPr>
-                        <a:t>8.92</a:t>
+                        <a:t>8.89</a:t>
                       </a:r>
                       <a:endParaRPr lang="en-US" sz="700" dirty="0"/>
                     </a:p>
@@ -20535,7 +20535,7 @@
                             <a:srgbClr val="000000"/>
                           </a:solidFill>
                         </a:rPr>
-                        <a:t>86.2%</a:t>
+                        <a:t>85.4%</a:t>
                       </a:r>
                       <a:endParaRPr lang="en-US" sz="700" dirty="0"/>
                     </a:p>
@@ -20842,7 +20842,7 @@
                             <a:srgbClr val="000000"/>
                           </a:solidFill>
                         </a:rPr>
-                        <a:t>8.87</a:t>
+                        <a:t>8.88</a:t>
                       </a:r>
                       <a:endParaRPr lang="en-US" sz="700" dirty="0"/>
                     </a:p>
@@ -20903,7 +20903,7 @@
                             <a:srgbClr val="000000"/>
                           </a:solidFill>
                         </a:rPr>
-                        <a:t>84.3%</a:t>
+                        <a:t>84.5%</a:t>
                       </a:r>
                       <a:endParaRPr lang="en-US" sz="700" dirty="0"/>
                     </a:p>
@@ -21210,7 +21210,7 @@
                             <a:srgbClr val="000000"/>
                           </a:solidFill>
                         </a:rPr>
-                        <a:t>8.83</a:t>
+                        <a:t>8.85</a:t>
                       </a:r>
                       <a:endParaRPr lang="en-US" sz="700" dirty="0"/>
                     </a:p>
@@ -21271,7 +21271,7 @@
                             <a:srgbClr val="000000"/>
                           </a:solidFill>
                         </a:rPr>
-                        <a:t>81.0%</a:t>
+                        <a:t>81.4%</a:t>
                       </a:r>
                       <a:endParaRPr lang="en-US" sz="700" dirty="0"/>
                     </a:p>
@@ -21517,7 +21517,7 @@
                             <a:srgbClr val="000000"/>
                           </a:solidFill>
                         </a:rPr>
-                        <a:t>川崎日航ホテル</a:t>
+                        <a:t>リッチモンドホテル東京目白</a:t>
                       </a:r>
                       <a:endParaRPr lang="en-US" sz="700" dirty="0"/>
                     </a:p>
@@ -21639,7 +21639,7 @@
                             <a:srgbClr val="000000"/>
                           </a:solidFill>
                         </a:rPr>
-                        <a:t>82.3%</a:t>
+                        <a:t>87.1%</a:t>
                       </a:r>
                       <a:endParaRPr lang="en-US" sz="700" dirty="0"/>
                     </a:p>
@@ -21885,7 +21885,7 @@
                             <a:srgbClr val="000000"/>
                           </a:solidFill>
                         </a:rPr>
-                        <a:t>ホテルケヤキゲート東京府中</a:t>
+                        <a:t>川崎日航ホテル</a:t>
                       </a:r>
                       <a:endParaRPr lang="en-US" sz="700" dirty="0"/>
                     </a:p>
@@ -21946,7 +21946,7 @@
                             <a:srgbClr val="000000"/>
                           </a:solidFill>
                         </a:rPr>
-                        <a:t>8.71</a:t>
+                        <a:t>8.72</a:t>
                       </a:r>
                       <a:endParaRPr lang="en-US" sz="700" dirty="0"/>
                     </a:p>
@@ -22007,7 +22007,7 @@
                             <a:srgbClr val="000000"/>
                           </a:solidFill>
                         </a:rPr>
-                        <a:t>85.7%</a:t>
+                        <a:t>82.3%</a:t>
                       </a:r>
                       <a:endParaRPr lang="en-US" sz="700" dirty="0"/>
                     </a:p>
@@ -22253,7 +22253,7 @@
                             <a:srgbClr val="000000"/>
                           </a:solidFill>
                         </a:rPr>
-                        <a:t>リッチモンドホテル東京目白</a:t>
+                        <a:t>ホテルケヤキゲート東京府中</a:t>
                       </a:r>
                       <a:endParaRPr lang="en-US" sz="700" dirty="0"/>
                     </a:p>
@@ -22375,7 +22375,7 @@
                             <a:srgbClr val="000000"/>
                           </a:solidFill>
                         </a:rPr>
-                        <a:t>86.3%</a:t>
+                        <a:t>85.7%</a:t>
                       </a:r>
                       <a:endParaRPr lang="en-US" sz="700" dirty="0"/>
                     </a:p>
@@ -22682,7 +22682,7 @@
                             <a:srgbClr val="000000"/>
                           </a:solidFill>
                         </a:rPr>
-                        <a:t>8.67</a:t>
+                        <a:t>8.65</a:t>
                       </a:r>
                       <a:endParaRPr lang="en-US" sz="700" dirty="0"/>
                     </a:p>
@@ -23418,7 +23418,7 @@
                             <a:srgbClr val="000000"/>
                           </a:solidFill>
                         </a:rPr>
-                        <a:t>8.28</a:t>
+                        <a:t>8.29</a:t>
                       </a:r>
                       <a:endParaRPr lang="en-US" sz="700" dirty="0"/>
                     </a:p>
@@ -23479,7 +23479,7 @@
                             <a:srgbClr val="000000"/>
                           </a:solidFill>
                         </a:rPr>
-                        <a:t>75.9%</a:t>
+                        <a:t>76.0%</a:t>
                       </a:r>
                       <a:endParaRPr lang="en-US" sz="700" dirty="0"/>
                     </a:p>
@@ -23847,7 +23847,7 @@
                             <a:srgbClr val="000000"/>
                           </a:solidFill>
                         </a:rPr>
-                        <a:t>80.3%</a:t>
+                        <a:t>79.8%</a:t>
                       </a:r>
                       <a:endParaRPr lang="en-US" sz="700" dirty="0"/>
                     </a:p>
@@ -24154,7 +24154,7 @@
                             <a:srgbClr val="000000"/>
                           </a:solidFill>
                         </a:rPr>
-                        <a:t>8.16</a:t>
+                        <a:t>8.17</a:t>
                       </a:r>
                       <a:endParaRPr lang="en-US" sz="700" dirty="0"/>
                     </a:p>
@@ -24215,7 +24215,7 @@
                             <a:srgbClr val="000000"/>
                           </a:solidFill>
                         </a:rPr>
-                        <a:t>69.8%</a:t>
+                        <a:t>70.3%</a:t>
                       </a:r>
                       <a:endParaRPr lang="en-US" sz="700" dirty="0"/>
                     </a:p>
@@ -24951,7 +24951,7 @@
                             <a:srgbClr val="000000"/>
                           </a:solidFill>
                         </a:rPr>
-                        <a:t>67.1%</a:t>
+                        <a:t>66.4%</a:t>
                       </a:r>
                       <a:endParaRPr lang="en-US" sz="700" dirty="0"/>
                     </a:p>
@@ -25565,7 +25565,7 @@
                             <a:srgbClr val="000000"/>
                           </a:solidFill>
                         </a:rPr>
-                        <a:t>コートホテル新横浜</a:t>
+                        <a:t>チサンホテル浜松町</a:t>
                       </a:r>
                       <a:endParaRPr lang="en-US" sz="700" dirty="0"/>
                     </a:p>
@@ -25687,7 +25687,7 @@
                             <a:srgbClr val="000000"/>
                           </a:solidFill>
                         </a:rPr>
-                        <a:t>50.8%</a:t>
+                        <a:t>57.5%</a:t>
                       </a:r>
                       <a:endParaRPr lang="en-US" sz="700" dirty="0"/>
                     </a:p>
@@ -25933,7 +25933,7 @@
                             <a:srgbClr val="000000"/>
                           </a:solidFill>
                         </a:rPr>
-                        <a:t>チサンホテル浜松町</a:t>
+                        <a:t>コートホテル新横浜</a:t>
                       </a:r>
                       <a:endParaRPr lang="en-US" sz="700" dirty="0"/>
                     </a:p>
@@ -25994,7 +25994,7 @@
                             <a:srgbClr val="000000"/>
                           </a:solidFill>
                         </a:rPr>
-                        <a:t>7.09</a:t>
+                        <a:t>7.12</a:t>
                       </a:r>
                       <a:endParaRPr lang="en-US" sz="700" dirty="0"/>
                     </a:p>
@@ -26055,7 +26055,7 @@
                             <a:srgbClr val="000000"/>
                           </a:solidFill>
                         </a:rPr>
-                        <a:t>57.0%</a:t>
+                        <a:t>50.8%</a:t>
                       </a:r>
                       <a:endParaRPr lang="en-US" sz="700" dirty="0"/>
                     </a:p>
@@ -35891,7 +35891,7 @@
                             <a:srgbClr val="000000"/>
                           </a:solidFill>
                         </a:rPr>
-                        <a:t>アパホテル相模原橋本駅東</a:t>
+                        <a:t>ホテルケヤキゲート東京府中</a:t>
                       </a:r>
                       <a:endParaRPr lang="en-US" sz="700" dirty="0"/>
                     </a:p>
@@ -35949,7 +35949,7 @@
                             <a:srgbClr val="000000"/>
                           </a:solidFill>
                         </a:rPr>
-                        <a:t>2</a:t>
+                        <a:t>3</a:t>
                       </a:r>
                       <a:endParaRPr lang="en-US" sz="700" dirty="0"/>
                     </a:p>
@@ -36375,7 +36375,7 @@
                             <a:srgbClr val="000000"/>
                           </a:solidFill>
                         </a:rPr>
-                        <a:t>ホテルケヤキゲート東京府中</a:t>
+                        <a:t>アパホテル相模原橋本駅東</a:t>
                       </a:r>
                       <a:endParaRPr lang="en-US" sz="700" dirty="0"/>
                     </a:p>
@@ -36433,7 +36433,7 @@
                             <a:srgbClr val="000000"/>
                           </a:solidFill>
                         </a:rPr>
-                        <a:t>3</a:t>
+                        <a:t>2</a:t>
                       </a:r>
                       <a:endParaRPr lang="en-US" sz="700" dirty="0"/>
                     </a:p>
@@ -39266,7 +39266,7 @@
                 <a:ea typeface="Arial" pitchFamily="34" charset="-122"/>
                 <a:cs typeface="Arial" pitchFamily="34" charset="-120"/>
               </a:rPr>
-              <a:t>チサンホテル浜松町（7.09点）</a:t>
+              <a:t>チサンホテル浜松町（7.12点）</a:t>
             </a:r>
             <a:endParaRPr lang="en-US" sz="800" dirty="0"/>
           </a:p>
@@ -39425,7 +39425,7 @@
                 <a:ea typeface="Arial" pitchFamily="34" charset="-122"/>
                 <a:cs typeface="Arial" pitchFamily="34" charset="-120"/>
               </a:rPr>
-              <a:t>ホテルコメント横浜関内（8.87点）</a:t>
+              <a:t>ホテルコメント横浜関内（8.88点）</a:t>
             </a:r>
             <a:endParaRPr lang="en-US" sz="800" dirty="0"/>
           </a:p>
@@ -39442,7 +39442,7 @@
                 <a:ea typeface="Arial" pitchFamily="34" charset="-122"/>
                 <a:cs typeface="Arial" pitchFamily="34" charset="-120"/>
               </a:rPr>
-              <a:t>ダイワロイネットホテル東京大崎（8.83点）</a:t>
+              <a:t>ダイワロイネットホテル東京大崎（8.85点）</a:t>
             </a:r>
             <a:endParaRPr lang="en-US" sz="800" dirty="0"/>
           </a:p>
@@ -39584,7 +39584,7 @@
                 <a:ea typeface="Arial" pitchFamily="34" charset="-122"/>
                 <a:cs typeface="Arial" pitchFamily="34" charset="-120"/>
               </a:rPr>
-              <a:t>ハートンホテル東品川（8.67点）</a:t>
+              <a:t>ハートンホテル東品川（8.65点）</a:t>
             </a:r>
             <a:endParaRPr lang="en-US" sz="800" dirty="0"/>
           </a:p>
@@ -39618,23 +39618,6 @@
                 <a:ea typeface="Arial" pitchFamily="34" charset="-122"/>
                 <a:cs typeface="Arial" pitchFamily="34" charset="-120"/>
               </a:rPr>
-              <a:t>アパホテル相模原橋本駅東（8.16点）</a:t>
-            </a:r>
-            <a:endParaRPr lang="en-US" sz="800" dirty="0"/>
-          </a:p>
-          <a:p>
-            <a:pPr indent="0" marL="0">
-              <a:buNone/>
-            </a:pPr>
-            <a:r>
-              <a:rPr lang="en-US" sz="800" dirty="0">
-                <a:solidFill>
-                  <a:srgbClr val="333333"/>
-                </a:solidFill>
-                <a:latin typeface="Arial" pitchFamily="34" charset="0"/>
-                <a:ea typeface="Arial" pitchFamily="34" charset="-122"/>
-                <a:cs typeface="Arial" pitchFamily="34" charset="-120"/>
-              </a:rPr>
               <a:t>ホテルケヤキゲート東京府中（8.71点）</a:t>
             </a:r>
             <a:endParaRPr lang="en-US" sz="800" dirty="0"/>
@@ -39652,7 +39635,7 @@
                 <a:ea typeface="Arial" pitchFamily="34" charset="-122"/>
                 <a:cs typeface="Arial" pitchFamily="34" charset="-120"/>
               </a:rPr>
-              <a:t>リッチモンドホテル東京目白（8.71点）</a:t>
+              <a:t>アパホテル相模原橋本駅東（8.17点）</a:t>
             </a:r>
             <a:endParaRPr lang="en-US" sz="800" dirty="0"/>
           </a:p>
@@ -39669,7 +39652,24 @@
                 <a:ea typeface="Arial" pitchFamily="34" charset="-122"/>
                 <a:cs typeface="Arial" pitchFamily="34" charset="-120"/>
               </a:rPr>
-              <a:t>変なホテル東京羽田（8.28点）</a:t>
+              <a:t>リッチモンドホテル東京目白（8.72点）</a:t>
+            </a:r>
+            <a:endParaRPr lang="en-US" sz="800" dirty="0"/>
+          </a:p>
+          <a:p>
+            <a:pPr indent="0" marL="0">
+              <a:buNone/>
+            </a:pPr>
+            <a:r>
+              <a:rPr lang="en-US" sz="800" dirty="0">
+                <a:solidFill>
+                  <a:srgbClr val="333333"/>
+                </a:solidFill>
+                <a:latin typeface="Arial" pitchFamily="34" charset="0"/>
+                <a:ea typeface="Arial" pitchFamily="34" charset="-122"/>
+                <a:cs typeface="Arial" pitchFamily="34" charset="-120"/>
+              </a:rPr>
+              <a:t>変なホテル東京羽田（8.29点）</a:t>
             </a:r>
             <a:endParaRPr lang="en-US" sz="800" dirty="0"/>
           </a:p>
@@ -39703,7 +39703,7 @@
                 <a:ea typeface="Arial" pitchFamily="34" charset="-122"/>
                 <a:cs typeface="Arial" pitchFamily="34" charset="-120"/>
               </a:rPr>
-              <a:t>コンフォートホテルERA東京東神田（8.92点）</a:t>
+              <a:t>コンフォートホテルERA東京東神田（8.89点）</a:t>
             </a:r>
             <a:endParaRPr lang="en-US" sz="800" dirty="0"/>
           </a:p>
@@ -39828,7 +39828,7 @@
                 <a:ea typeface="Arial" pitchFamily="34" charset="-122"/>
                 <a:cs typeface="Arial" pitchFamily="34" charset="-120"/>
               </a:rPr>
-              <a:t>京成リッチモンドホテル東京錦糸町（9.12点）</a:t>
+              <a:t>京成リッチモンドホテル東京錦糸町（9.13点）</a:t>
             </a:r>
             <a:endParaRPr lang="en-US" sz="800" dirty="0"/>
           </a:p>

--- a/納品レポート/PRIMECHANGE戦略レポート/PRIMECHANGE_清掃戦略レポート.pptx
+++ b/納品レポート/PRIMECHANGE戦略レポート/PRIMECHANGE_清掃戦略レポート.pptx
@@ -2749,7 +2749,7 @@
                 <a:ea typeface="Arial" pitchFamily="34" charset="-122"/>
                 <a:cs typeface="Arial" pitchFamily="34" charset="-120"/>
               </a:rPr>
-              <a:t>2026年3月26日</a:t>
+              <a:t>2026年3月27日</a:t>
             </a:r>
             <a:endParaRPr lang="en-US" sz="1200" dirty="0"/>
           </a:p>
@@ -2788,7 +2788,7 @@
                 <a:ea typeface="Arial" pitchFamily="34" charset="-122"/>
                 <a:cs typeface="Arial" pitchFamily="34" charset="-120"/>
               </a:rPr>
-              <a:t>対象：19ホテル | レビュー：2400件</a:t>
+              <a:t>対象：19ホテル | レビュー：2426件</a:t>
             </a:r>
             <a:endParaRPr lang="en-US" sz="1100" dirty="0"/>
           </a:p>
@@ -2950,7 +2950,7 @@
                 <a:ea typeface="Arial" pitchFamily="34" charset="-122"/>
                 <a:cs typeface="Arial" pitchFamily="34" charset="-120"/>
               </a:rPr>
-              <a:t>【URGENT】チサンホテル浜松町</a:t>
+              <a:t>【URGENT】コートホテル新横浜</a:t>
             </a:r>
             <a:endParaRPr lang="en-US" sz="2000" dirty="0"/>
           </a:p>
@@ -2990,1212 +2990,6 @@
                 <a:cs typeface="Arial" pitchFamily="34" charset="-120"/>
               </a:rPr>
               <a:t>優先度 #4 | 現状 7.12点 → 目標 8点</a:t>
-            </a:r>
-            <a:endParaRPr lang="en-US" sz="1000" dirty="0"/>
-          </a:p>
-        </p:txBody>
-      </p:sp>
-      <p:sp>
-        <p:nvSpPr>
-          <p:cNvPr id="5" name="Shape 3"/>
-          <p:cNvSpPr/>
-          <p:nvPr/>
-        </p:nvSpPr>
-        <p:spPr>
-          <a:xfrm>
-            <a:off x="274320" y="731520"/>
-            <a:ext cx="1828800" cy="731520"/>
-          </a:xfrm>
-          <a:prstGeom prst="rect">
-            <a:avLst/>
-          </a:prstGeom>
-          <a:solidFill>
-            <a:srgbClr val="FFEBEE"/>
-          </a:solidFill>
-          <a:ln/>
-          <a:effectLst>
-            <a:outerShdw sx="100000" sy="100000" kx="0" ky="0" algn="bl" rotWithShape="0" blurRad="50800" dist="25400" dir="8100000">
-              <a:srgbClr val="000000">
-                <a:alpha val="10000"/>
-              </a:srgbClr>
-            </a:outerShdw>
-          </a:effectLst>
-        </p:spPr>
-      </p:sp>
-      <p:sp>
-        <p:nvSpPr>
-          <p:cNvPr id="6" name="Shape 4"/>
-          <p:cNvSpPr/>
-          <p:nvPr/>
-        </p:nvSpPr>
-        <p:spPr>
-          <a:xfrm>
-            <a:off x="274320" y="731520"/>
-            <a:ext cx="1828800" cy="36576"/>
-          </a:xfrm>
-          <a:prstGeom prst="rect">
-            <a:avLst/>
-          </a:prstGeom>
-          <a:solidFill>
-            <a:srgbClr val="E74C3C"/>
-          </a:solidFill>
-          <a:ln/>
-        </p:spPr>
-      </p:sp>
-      <p:sp>
-        <p:nvSpPr>
-          <p:cNvPr id="7" name="Text 5"/>
-          <p:cNvSpPr/>
-          <p:nvPr/>
-        </p:nvSpPr>
-        <p:spPr>
-          <a:xfrm>
-            <a:off x="274320" y="841248"/>
-            <a:ext cx="1828800" cy="201168"/>
-          </a:xfrm>
-          <a:prstGeom prst="rect">
-            <a:avLst/>
-          </a:prstGeom>
-          <a:noFill/>
-          <a:ln/>
-        </p:spPr>
-        <p:txBody>
-          <a:bodyPr wrap="square" lIns="0" tIns="0" rIns="0" bIns="0" rtlCol="0" anchor="ctr"/>
-          <a:lstStyle/>
-          <a:p>
-            <a:pPr algn="ctr" indent="0" marL="0">
-              <a:buNone/>
-            </a:pPr>
-            <a:r>
-              <a:rPr lang="en-US" sz="900" dirty="0">
-                <a:solidFill>
-                  <a:srgbClr val="666666"/>
-                </a:solidFill>
-                <a:latin typeface="Arial" pitchFamily="34" charset="0"/>
-                <a:ea typeface="Arial" pitchFamily="34" charset="-122"/>
-                <a:cs typeface="Arial" pitchFamily="34" charset="-120"/>
-              </a:rPr>
-              <a:t>現状スコア</a:t>
-            </a:r>
-            <a:endParaRPr lang="en-US" sz="900" dirty="0"/>
-          </a:p>
-        </p:txBody>
-      </p:sp>
-      <p:sp>
-        <p:nvSpPr>
-          <p:cNvPr id="8" name="Text 6"/>
-          <p:cNvSpPr/>
-          <p:nvPr/>
-        </p:nvSpPr>
-        <p:spPr>
-          <a:xfrm>
-            <a:off x="274320" y="1024128"/>
-            <a:ext cx="1828800" cy="411480"/>
-          </a:xfrm>
-          <a:prstGeom prst="rect">
-            <a:avLst/>
-          </a:prstGeom>
-          <a:noFill/>
-          <a:ln/>
-        </p:spPr>
-        <p:txBody>
-          <a:bodyPr wrap="square" lIns="0" tIns="0" rIns="0" bIns="0" rtlCol="0" anchor="ctr"/>
-          <a:lstStyle/>
-          <a:p>
-            <a:pPr algn="ctr" indent="0" marL="0">
-              <a:buNone/>
-            </a:pPr>
-            <a:r>
-              <a:rPr lang="en-US" sz="2800" b="1" dirty="0">
-                <a:solidFill>
-                  <a:srgbClr val="E74C3C"/>
-                </a:solidFill>
-                <a:latin typeface="Arial" pitchFamily="34" charset="0"/>
-                <a:ea typeface="Arial" pitchFamily="34" charset="-122"/>
-                <a:cs typeface="Arial" pitchFamily="34" charset="-120"/>
-              </a:rPr>
-              <a:t>7.12</a:t>
-            </a:r>
-            <a:endParaRPr lang="en-US" sz="2800" dirty="0"/>
-          </a:p>
-        </p:txBody>
-      </p:sp>
-      <p:sp>
-        <p:nvSpPr>
-          <p:cNvPr id="9" name="Shape 7"/>
-          <p:cNvSpPr/>
-          <p:nvPr/>
-        </p:nvSpPr>
-        <p:spPr>
-          <a:xfrm>
-            <a:off x="2286000" y="731520"/>
-            <a:ext cx="1828800" cy="731520"/>
-          </a:xfrm>
-          <a:prstGeom prst="rect">
-            <a:avLst/>
-          </a:prstGeom>
-          <a:solidFill>
-            <a:srgbClr val="E8F5E9"/>
-          </a:solidFill>
-          <a:ln/>
-          <a:effectLst>
-            <a:outerShdw sx="100000" sy="100000" kx="0" ky="0" algn="bl" rotWithShape="0" blurRad="50800" dist="25400" dir="8100000">
-              <a:srgbClr val="000000">
-                <a:alpha val="10000"/>
-              </a:srgbClr>
-            </a:outerShdw>
-          </a:effectLst>
-        </p:spPr>
-      </p:sp>
-      <p:sp>
-        <p:nvSpPr>
-          <p:cNvPr id="10" name="Shape 8"/>
-          <p:cNvSpPr/>
-          <p:nvPr/>
-        </p:nvSpPr>
-        <p:spPr>
-          <a:xfrm>
-            <a:off x="2286000" y="731520"/>
-            <a:ext cx="1828800" cy="36576"/>
-          </a:xfrm>
-          <a:prstGeom prst="rect">
-            <a:avLst/>
-          </a:prstGeom>
-          <a:solidFill>
-            <a:srgbClr val="27AE60"/>
-          </a:solidFill>
-          <a:ln/>
-        </p:spPr>
-      </p:sp>
-      <p:sp>
-        <p:nvSpPr>
-          <p:cNvPr id="11" name="Text 9"/>
-          <p:cNvSpPr/>
-          <p:nvPr/>
-        </p:nvSpPr>
-        <p:spPr>
-          <a:xfrm>
-            <a:off x="2286000" y="841248"/>
-            <a:ext cx="1828800" cy="201168"/>
-          </a:xfrm>
-          <a:prstGeom prst="rect">
-            <a:avLst/>
-          </a:prstGeom>
-          <a:noFill/>
-          <a:ln/>
-        </p:spPr>
-        <p:txBody>
-          <a:bodyPr wrap="square" lIns="0" tIns="0" rIns="0" bIns="0" rtlCol="0" anchor="ctr"/>
-          <a:lstStyle/>
-          <a:p>
-            <a:pPr algn="ctr" indent="0" marL="0">
-              <a:buNone/>
-            </a:pPr>
-            <a:r>
-              <a:rPr lang="en-US" sz="900" dirty="0">
-                <a:solidFill>
-                  <a:srgbClr val="666666"/>
-                </a:solidFill>
-                <a:latin typeface="Arial" pitchFamily="34" charset="0"/>
-                <a:ea typeface="Arial" pitchFamily="34" charset="-122"/>
-                <a:cs typeface="Arial" pitchFamily="34" charset="-120"/>
-              </a:rPr>
-              <a:t>目標スコア</a:t>
-            </a:r>
-            <a:endParaRPr lang="en-US" sz="900" dirty="0"/>
-          </a:p>
-        </p:txBody>
-      </p:sp>
-      <p:sp>
-        <p:nvSpPr>
-          <p:cNvPr id="12" name="Text 10"/>
-          <p:cNvSpPr/>
-          <p:nvPr/>
-        </p:nvSpPr>
-        <p:spPr>
-          <a:xfrm>
-            <a:off x="2286000" y="1024128"/>
-            <a:ext cx="1828800" cy="411480"/>
-          </a:xfrm>
-          <a:prstGeom prst="rect">
-            <a:avLst/>
-          </a:prstGeom>
-          <a:noFill/>
-          <a:ln/>
-        </p:spPr>
-        <p:txBody>
-          <a:bodyPr wrap="square" lIns="0" tIns="0" rIns="0" bIns="0" rtlCol="0" anchor="ctr"/>
-          <a:lstStyle/>
-          <a:p>
-            <a:pPr algn="ctr" indent="0" marL="0">
-              <a:buNone/>
-            </a:pPr>
-            <a:r>
-              <a:rPr lang="en-US" sz="2800" b="1" dirty="0">
-                <a:solidFill>
-                  <a:srgbClr val="27AE60"/>
-                </a:solidFill>
-                <a:latin typeface="Arial" pitchFamily="34" charset="0"/>
-                <a:ea typeface="Arial" pitchFamily="34" charset="-122"/>
-                <a:cs typeface="Arial" pitchFamily="34" charset="-120"/>
-              </a:rPr>
-              <a:t>8</a:t>
-            </a:r>
-            <a:endParaRPr lang="en-US" sz="2800" dirty="0"/>
-          </a:p>
-        </p:txBody>
-      </p:sp>
-      <p:sp>
-        <p:nvSpPr>
-          <p:cNvPr id="13" name="Shape 11"/>
-          <p:cNvSpPr/>
-          <p:nvPr/>
-        </p:nvSpPr>
-        <p:spPr>
-          <a:xfrm>
-            <a:off x="4389120" y="731520"/>
-            <a:ext cx="4389120" cy="731520"/>
-          </a:xfrm>
-          <a:prstGeom prst="rect">
-            <a:avLst/>
-          </a:prstGeom>
-          <a:solidFill>
-            <a:srgbClr val="F5F7FA"/>
-          </a:solidFill>
-          <a:ln/>
-          <a:effectLst>
-            <a:outerShdw sx="100000" sy="100000" kx="0" ky="0" algn="bl" rotWithShape="0" blurRad="50800" dist="25400" dir="8100000">
-              <a:srgbClr val="000000">
-                <a:alpha val="10000"/>
-              </a:srgbClr>
-            </a:outerShdw>
-          </a:effectLst>
-        </p:spPr>
-      </p:sp>
-      <p:sp>
-        <p:nvSpPr>
-          <p:cNvPr id="14" name="Text 12"/>
-          <p:cNvSpPr/>
-          <p:nvPr/>
-        </p:nvSpPr>
-        <p:spPr>
-          <a:xfrm>
-            <a:off x="4480560" y="749808"/>
-            <a:ext cx="1828800" cy="182880"/>
-          </a:xfrm>
-          <a:prstGeom prst="rect">
-            <a:avLst/>
-          </a:prstGeom>
-          <a:noFill/>
-          <a:ln/>
-        </p:spPr>
-        <p:txBody>
-          <a:bodyPr wrap="square" lIns="0" tIns="0" rIns="0" bIns="0" rtlCol="0" anchor="ctr"/>
-          <a:lstStyle/>
-          <a:p>
-            <a:pPr indent="0" marL="0">
-              <a:buNone/>
-            </a:pPr>
-            <a:r>
-              <a:rPr lang="en-US" sz="900" b="1" dirty="0">
-                <a:solidFill>
-                  <a:srgbClr val="666666"/>
-                </a:solidFill>
-                <a:latin typeface="Arial" pitchFamily="34" charset="0"/>
-                <a:ea typeface="Arial" pitchFamily="34" charset="-122"/>
-                <a:cs typeface="Arial" pitchFamily="34" charset="-120"/>
-              </a:rPr>
-              <a:t>主要課題</a:t>
-            </a:r>
-            <a:endParaRPr lang="en-US" sz="900" dirty="0"/>
-          </a:p>
-        </p:txBody>
-      </p:sp>
-      <p:sp>
-        <p:nvSpPr>
-          <p:cNvPr id="15" name="Text 13"/>
-          <p:cNvSpPr/>
-          <p:nvPr/>
-        </p:nvSpPr>
-        <p:spPr>
-          <a:xfrm>
-            <a:off x="4480560" y="914400"/>
-            <a:ext cx="4206240" cy="502920"/>
-          </a:xfrm>
-          <a:prstGeom prst="rect">
-            <a:avLst/>
-          </a:prstGeom>
-          <a:noFill/>
-          <a:ln/>
-        </p:spPr>
-        <p:txBody>
-          <a:bodyPr wrap="square" lIns="0" tIns="0" rIns="0" bIns="0" rtlCol="0" anchor="ctr"/>
-          <a:lstStyle/>
-          <a:p>
-            <a:pPr indent="0" marL="0">
-              <a:buNone/>
-            </a:pPr>
-            <a:r>
-              <a:rPr lang="en-US" sz="800" dirty="0">
-                <a:solidFill>
-                  <a:srgbClr val="333333"/>
-                </a:solidFill>
-                <a:latin typeface="Arial" pitchFamily="34" charset="0"/>
-                <a:ea typeface="Arial" pitchFamily="34" charset="-122"/>
-                <a:cs typeface="Arial" pitchFamily="34" charset="-120"/>
-              </a:rPr>
-              <a:t>清掃品質全般: 3件</a:t>
-            </a:r>
-            <a:endParaRPr lang="en-US" sz="800" dirty="0"/>
-          </a:p>
-          <a:p>
-            <a:pPr indent="0" marL="0">
-              <a:buNone/>
-            </a:pPr>
-            <a:r>
-              <a:rPr lang="en-US" sz="800" dirty="0">
-                <a:solidFill>
-                  <a:srgbClr val="333333"/>
-                </a:solidFill>
-                <a:latin typeface="Arial" pitchFamily="34" charset="0"/>
-                <a:ea typeface="Arial" pitchFamily="34" charset="-122"/>
-                <a:cs typeface="Arial" pitchFamily="34" charset="-120"/>
-              </a:rPr>
-              <a:t>排水・詰まり: 2件</a:t>
-            </a:r>
-            <a:endParaRPr lang="en-US" sz="800" dirty="0"/>
-          </a:p>
-          <a:p>
-            <a:pPr indent="0" marL="0">
-              <a:buNone/>
-            </a:pPr>
-            <a:r>
-              <a:rPr lang="en-US" sz="800" dirty="0">
-                <a:solidFill>
-                  <a:srgbClr val="333333"/>
-                </a:solidFill>
-                <a:latin typeface="Arial" pitchFamily="34" charset="0"/>
-                <a:ea typeface="Arial" pitchFamily="34" charset="-122"/>
-                <a:cs typeface="Arial" pitchFamily="34" charset="-120"/>
-              </a:rPr>
-              <a:t>ほこり・塵: 1件</a:t>
-            </a:r>
-            <a:endParaRPr lang="en-US" sz="800" dirty="0"/>
-          </a:p>
-          <a:p>
-            <a:pPr indent="0" marL="0">
-              <a:buNone/>
-            </a:pPr>
-            <a:r>
-              <a:rPr lang="en-US" sz="800" dirty="0">
-                <a:solidFill>
-                  <a:srgbClr val="333333"/>
-                </a:solidFill>
-                <a:latin typeface="Arial" pitchFamily="34" charset="0"/>
-                <a:ea typeface="Arial" pitchFamily="34" charset="-122"/>
-                <a:cs typeface="Arial" pitchFamily="34" charset="-120"/>
-              </a:rPr>
-              <a:t>カーペット汚れ: 1件</a:t>
-            </a:r>
-            <a:endParaRPr lang="en-US" sz="800" dirty="0"/>
-          </a:p>
-        </p:txBody>
-      </p:sp>
-      <p:sp>
-        <p:nvSpPr>
-          <p:cNvPr id="16" name="Shape 14"/>
-          <p:cNvSpPr/>
-          <p:nvPr/>
-        </p:nvSpPr>
-        <p:spPr>
-          <a:xfrm>
-            <a:off x="274320" y="1691640"/>
-            <a:ext cx="2743200" cy="2697480"/>
-          </a:xfrm>
-          <a:prstGeom prst="rect">
-            <a:avLst/>
-          </a:prstGeom>
-          <a:solidFill>
-            <a:srgbClr val="FFEBEE"/>
-          </a:solidFill>
-          <a:ln/>
-          <a:effectLst>
-            <a:outerShdw sx="100000" sy="100000" kx="0" ky="0" algn="bl" rotWithShape="0" blurRad="50800" dist="25400" dir="8100000">
-              <a:srgbClr val="000000">
-                <a:alpha val="10000"/>
-              </a:srgbClr>
-            </a:outerShdw>
-          </a:effectLst>
-        </p:spPr>
-      </p:sp>
-      <p:sp>
-        <p:nvSpPr>
-          <p:cNvPr id="17" name="Shape 15"/>
-          <p:cNvSpPr/>
-          <p:nvPr/>
-        </p:nvSpPr>
-        <p:spPr>
-          <a:xfrm>
-            <a:off x="274320" y="1691640"/>
-            <a:ext cx="2743200" cy="36576"/>
-          </a:xfrm>
-          <a:prstGeom prst="rect">
-            <a:avLst/>
-          </a:prstGeom>
-          <a:solidFill>
-            <a:srgbClr val="E74C3C"/>
-          </a:solidFill>
-          <a:ln/>
-        </p:spPr>
-      </p:sp>
-      <p:sp>
-        <p:nvSpPr>
-          <p:cNvPr id="18" name="Text 16"/>
-          <p:cNvSpPr/>
-          <p:nvPr/>
-        </p:nvSpPr>
-        <p:spPr>
-          <a:xfrm>
-            <a:off x="365760" y="1764792"/>
-            <a:ext cx="2560320" cy="228600"/>
-          </a:xfrm>
-          <a:prstGeom prst="rect">
-            <a:avLst/>
-          </a:prstGeom>
-          <a:noFill/>
-          <a:ln/>
-        </p:spPr>
-        <p:txBody>
-          <a:bodyPr wrap="square" lIns="0" tIns="0" rIns="0" bIns="0" rtlCol="0" anchor="ctr"/>
-          <a:lstStyle/>
-          <a:p>
-            <a:pPr indent="0" marL="0">
-              <a:buNone/>
-            </a:pPr>
-            <a:r>
-              <a:rPr lang="en-US" sz="900" b="1" dirty="0">
-                <a:solidFill>
-                  <a:srgbClr val="E74C3C"/>
-                </a:solidFill>
-                <a:latin typeface="Arial" pitchFamily="34" charset="0"/>
-                <a:ea typeface="Arial" pitchFamily="34" charset="-122"/>
-                <a:cs typeface="Arial" pitchFamily="34" charset="-120"/>
-              </a:rPr>
-              <a:t>Phase 1: 即時対応（1-2週間）</a:t>
-            </a:r>
-            <a:endParaRPr lang="en-US" sz="900" dirty="0"/>
-          </a:p>
-        </p:txBody>
-      </p:sp>
-      <p:sp>
-        <p:nvSpPr>
-          <p:cNvPr id="19" name="Text 17"/>
-          <p:cNvSpPr/>
-          <p:nvPr/>
-        </p:nvSpPr>
-        <p:spPr>
-          <a:xfrm>
-            <a:off x="365760" y="2039112"/>
-            <a:ext cx="2560320" cy="2286000"/>
-          </a:xfrm>
-          <a:prstGeom prst="rect">
-            <a:avLst/>
-          </a:prstGeom>
-          <a:noFill/>
-          <a:ln/>
-        </p:spPr>
-        <p:txBody>
-          <a:bodyPr wrap="square" lIns="0" tIns="0" rIns="0" bIns="0" rtlCol="0" anchor="t"/>
-          <a:lstStyle/>
-          <a:p>
-            <a:pPr indent="0" marL="0">
-              <a:buNone/>
-            </a:pPr>
-            <a:r>
-              <a:rPr lang="en-US" sz="700" dirty="0">
-                <a:solidFill>
-                  <a:srgbClr val="333333"/>
-                </a:solidFill>
-                <a:latin typeface="Arial" pitchFamily="34" charset="0"/>
-                <a:ea typeface="Arial" pitchFamily="34" charset="-122"/>
-                <a:cs typeface="Arial" pitchFamily="34" charset="-120"/>
-              </a:rPr>
-              <a:t>- 清掃品質基準の明確化と全スタッフへの共有</a:t>
-            </a:r>
-            <a:endParaRPr lang="en-US" sz="700" dirty="0"/>
-          </a:p>
-          <a:p>
-            <a:pPr indent="0" marL="0">
-              <a:buNone/>
-            </a:pPr>
-            <a:r>
-              <a:rPr lang="en-US" sz="700" dirty="0">
-                <a:solidFill>
-                  <a:srgbClr val="333333"/>
-                </a:solidFill>
-                <a:latin typeface="Arial" pitchFamily="34" charset="0"/>
-                <a:ea typeface="Arial" pitchFamily="34" charset="-122"/>
-                <a:cs typeface="Arial" pitchFamily="34" charset="-120"/>
-              </a:rPr>
-              <a:t>- 重点箇所（水回り・ベッド周り）の清掃手順見直し</a:t>
-            </a:r>
-            <a:endParaRPr lang="en-US" sz="700" dirty="0"/>
-          </a:p>
-          <a:p>
-            <a:pPr indent="0" marL="0">
-              <a:buNone/>
-            </a:pPr>
-            <a:r>
-              <a:rPr lang="en-US" sz="700" dirty="0">
-                <a:solidFill>
-                  <a:srgbClr val="333333"/>
-                </a:solidFill>
-                <a:latin typeface="Arial" pitchFamily="34" charset="0"/>
-                <a:ea typeface="Arial" pitchFamily="34" charset="-122"/>
-                <a:cs typeface="Arial" pitchFamily="34" charset="-120"/>
-              </a:rPr>
-              <a:t>- 排水口の徹底清掃と詰まり除去</a:t>
-            </a:r>
-            <a:endParaRPr lang="en-US" sz="700" dirty="0"/>
-          </a:p>
-          <a:p>
-            <a:pPr indent="0" marL="0">
-              <a:buNone/>
-            </a:pPr>
-            <a:r>
-              <a:rPr lang="en-US" sz="700" dirty="0">
-                <a:solidFill>
-                  <a:srgbClr val="333333"/>
-                </a:solidFill>
-                <a:latin typeface="Arial" pitchFamily="34" charset="0"/>
-                <a:ea typeface="Arial" pitchFamily="34" charset="-122"/>
-                <a:cs typeface="Arial" pitchFamily="34" charset="-120"/>
-              </a:rPr>
-              <a:t>- 排水トラップの点検・洗浄</a:t>
-            </a:r>
-            <a:endParaRPr lang="en-US" sz="700" dirty="0"/>
-          </a:p>
-          <a:p>
-            <a:pPr indent="0" marL="0">
-              <a:buNone/>
-            </a:pPr>
-            <a:r>
-              <a:rPr lang="en-US" sz="700" dirty="0">
-                <a:solidFill>
-                  <a:srgbClr val="333333"/>
-                </a:solidFill>
-                <a:latin typeface="Arial" pitchFamily="34" charset="0"/>
-                <a:ea typeface="Arial" pitchFamily="34" charset="-122"/>
-                <a:cs typeface="Arial" pitchFamily="34" charset="-120"/>
-              </a:rPr>
-              <a:t>- 高所・棚上部・エアコン上部のほこり除去</a:t>
-            </a:r>
-            <a:endParaRPr lang="en-US" sz="700" dirty="0"/>
-          </a:p>
-        </p:txBody>
-      </p:sp>
-      <p:sp>
-        <p:nvSpPr>
-          <p:cNvPr id="20" name="Shape 18"/>
-          <p:cNvSpPr/>
-          <p:nvPr/>
-        </p:nvSpPr>
-        <p:spPr>
-          <a:xfrm>
-            <a:off x="3154680" y="1691640"/>
-            <a:ext cx="2743200" cy="2697480"/>
-          </a:xfrm>
-          <a:prstGeom prst="rect">
-            <a:avLst/>
-          </a:prstGeom>
-          <a:solidFill>
-            <a:srgbClr val="FFF3E0"/>
-          </a:solidFill>
-          <a:ln/>
-          <a:effectLst>
-            <a:outerShdw sx="100000" sy="100000" kx="0" ky="0" algn="bl" rotWithShape="0" blurRad="50800" dist="25400" dir="8100000">
-              <a:srgbClr val="000000">
-                <a:alpha val="10000"/>
-              </a:srgbClr>
-            </a:outerShdw>
-          </a:effectLst>
-        </p:spPr>
-      </p:sp>
-      <p:sp>
-        <p:nvSpPr>
-          <p:cNvPr id="21" name="Shape 19"/>
-          <p:cNvSpPr/>
-          <p:nvPr/>
-        </p:nvSpPr>
-        <p:spPr>
-          <a:xfrm>
-            <a:off x="3154680" y="1691640"/>
-            <a:ext cx="2743200" cy="36576"/>
-          </a:xfrm>
-          <a:prstGeom prst="rect">
-            <a:avLst/>
-          </a:prstGeom>
-          <a:solidFill>
-            <a:srgbClr val="FF9800"/>
-          </a:solidFill>
-          <a:ln/>
-        </p:spPr>
-      </p:sp>
-      <p:sp>
-        <p:nvSpPr>
-          <p:cNvPr id="22" name="Text 20"/>
-          <p:cNvSpPr/>
-          <p:nvPr/>
-        </p:nvSpPr>
-        <p:spPr>
-          <a:xfrm>
-            <a:off x="3246120" y="1764792"/>
-            <a:ext cx="2560320" cy="228600"/>
-          </a:xfrm>
-          <a:prstGeom prst="rect">
-            <a:avLst/>
-          </a:prstGeom>
-          <a:noFill/>
-          <a:ln/>
-        </p:spPr>
-        <p:txBody>
-          <a:bodyPr wrap="square" lIns="0" tIns="0" rIns="0" bIns="0" rtlCol="0" anchor="ctr"/>
-          <a:lstStyle/>
-          <a:p>
-            <a:pPr indent="0" marL="0">
-              <a:buNone/>
-            </a:pPr>
-            <a:r>
-              <a:rPr lang="en-US" sz="900" b="1" dirty="0">
-                <a:solidFill>
-                  <a:srgbClr val="FF9800"/>
-                </a:solidFill>
-                <a:latin typeface="Arial" pitchFamily="34" charset="0"/>
-                <a:ea typeface="Arial" pitchFamily="34" charset="-122"/>
-                <a:cs typeface="Arial" pitchFamily="34" charset="-120"/>
-              </a:rPr>
-              <a:t>Phase 2: 短期施策（1-3ヶ月）</a:t>
-            </a:r>
-            <a:endParaRPr lang="en-US" sz="900" dirty="0"/>
-          </a:p>
-        </p:txBody>
-      </p:sp>
-      <p:sp>
-        <p:nvSpPr>
-          <p:cNvPr id="23" name="Text 21"/>
-          <p:cNvSpPr/>
-          <p:nvPr/>
-        </p:nvSpPr>
-        <p:spPr>
-          <a:xfrm>
-            <a:off x="3246120" y="2039112"/>
-            <a:ext cx="2560320" cy="2286000"/>
-          </a:xfrm>
-          <a:prstGeom prst="rect">
-            <a:avLst/>
-          </a:prstGeom>
-          <a:noFill/>
-          <a:ln/>
-        </p:spPr>
-        <p:txBody>
-          <a:bodyPr wrap="square" lIns="0" tIns="0" rIns="0" bIns="0" rtlCol="0" anchor="t"/>
-          <a:lstStyle/>
-          <a:p>
-            <a:pPr indent="0" marL="0">
-              <a:buNone/>
-            </a:pPr>
-            <a:r>
-              <a:rPr lang="en-US" sz="700" dirty="0">
-                <a:solidFill>
-                  <a:srgbClr val="333333"/>
-                </a:solidFill>
-                <a:latin typeface="Arial" pitchFamily="34" charset="0"/>
-                <a:ea typeface="Arial" pitchFamily="34" charset="-122"/>
-                <a:cs typeface="Arial" pitchFamily="34" charset="-120"/>
-              </a:rPr>
-              <a:t>- 品質管理チェックリストの導入と実施</a:t>
-            </a:r>
-            <a:endParaRPr lang="en-US" sz="700" dirty="0"/>
-          </a:p>
-          <a:p>
-            <a:pPr indent="0" marL="0">
-              <a:buNone/>
-            </a:pPr>
-            <a:r>
-              <a:rPr lang="en-US" sz="700" dirty="0">
-                <a:solidFill>
-                  <a:srgbClr val="333333"/>
-                </a:solidFill>
-                <a:latin typeface="Arial" pitchFamily="34" charset="0"/>
-                <a:ea typeface="Arial" pitchFamily="34" charset="-122"/>
-                <a:cs typeface="Arial" pitchFamily="34" charset="-120"/>
-              </a:rPr>
-              <a:t>- QCインスペクション体制の構築（ランダム抜き打ち検査）</a:t>
-            </a:r>
-            <a:endParaRPr lang="en-US" sz="700" dirty="0"/>
-          </a:p>
-          <a:p>
-            <a:pPr indent="0" marL="0">
-              <a:buNone/>
-            </a:pPr>
-            <a:r>
-              <a:rPr lang="en-US" sz="700" dirty="0">
-                <a:solidFill>
-                  <a:srgbClr val="333333"/>
-                </a:solidFill>
-                <a:latin typeface="Arial" pitchFamily="34" charset="0"/>
-                <a:ea typeface="Arial" pitchFamily="34" charset="-122"/>
-                <a:cs typeface="Arial" pitchFamily="34" charset="-120"/>
-              </a:rPr>
-              <a:t>- 月次排水管高圧洗浄の定期実施</a:t>
-            </a:r>
-            <a:endParaRPr lang="en-US" sz="700" dirty="0"/>
-          </a:p>
-          <a:p>
-            <a:pPr indent="0" marL="0">
-              <a:buNone/>
-            </a:pPr>
-            <a:r>
-              <a:rPr lang="en-US" sz="700" dirty="0">
-                <a:solidFill>
-                  <a:srgbClr val="333333"/>
-                </a:solidFill>
-                <a:latin typeface="Arial" pitchFamily="34" charset="0"/>
-                <a:ea typeface="Arial" pitchFamily="34" charset="-122"/>
-                <a:cs typeface="Arial" pitchFamily="34" charset="-120"/>
-              </a:rPr>
-              <a:t>- 排水口ストレーナーの定期交換サイクル導入</a:t>
-            </a:r>
-            <a:endParaRPr lang="en-US" sz="700" dirty="0"/>
-          </a:p>
-          <a:p>
-            <a:pPr indent="0" marL="0">
-              <a:buNone/>
-            </a:pPr>
-            <a:r>
-              <a:rPr lang="en-US" sz="700" dirty="0">
-                <a:solidFill>
-                  <a:srgbClr val="333333"/>
-                </a:solidFill>
-                <a:latin typeface="Arial" pitchFamily="34" charset="0"/>
-                <a:ea typeface="Arial" pitchFamily="34" charset="-122"/>
-                <a:cs typeface="Arial" pitchFamily="34" charset="-120"/>
-              </a:rPr>
-              <a:t>- 週次の高所清掃スケジュール導入</a:t>
-            </a:r>
-            <a:endParaRPr lang="en-US" sz="700" dirty="0"/>
-          </a:p>
-        </p:txBody>
-      </p:sp>
-      <p:sp>
-        <p:nvSpPr>
-          <p:cNvPr id="24" name="Shape 22"/>
-          <p:cNvSpPr/>
-          <p:nvPr/>
-        </p:nvSpPr>
-        <p:spPr>
-          <a:xfrm>
-            <a:off x="6035040" y="1691640"/>
-            <a:ext cx="2743200" cy="2697480"/>
-          </a:xfrm>
-          <a:prstGeom prst="rect">
-            <a:avLst/>
-          </a:prstGeom>
-          <a:solidFill>
-            <a:srgbClr val="E3F2FD"/>
-          </a:solidFill>
-          <a:ln/>
-          <a:effectLst>
-            <a:outerShdw sx="100000" sy="100000" kx="0" ky="0" algn="bl" rotWithShape="0" blurRad="50800" dist="25400" dir="8100000">
-              <a:srgbClr val="000000">
-                <a:alpha val="10000"/>
-              </a:srgbClr>
-            </a:outerShdw>
-          </a:effectLst>
-        </p:spPr>
-      </p:sp>
-      <p:sp>
-        <p:nvSpPr>
-          <p:cNvPr id="25" name="Shape 23"/>
-          <p:cNvSpPr/>
-          <p:nvPr/>
-        </p:nvSpPr>
-        <p:spPr>
-          <a:xfrm>
-            <a:off x="6035040" y="1691640"/>
-            <a:ext cx="2743200" cy="36576"/>
-          </a:xfrm>
-          <a:prstGeom prst="rect">
-            <a:avLst/>
-          </a:prstGeom>
-          <a:solidFill>
-            <a:srgbClr val="2196F3"/>
-          </a:solidFill>
-          <a:ln/>
-        </p:spPr>
-      </p:sp>
-      <p:sp>
-        <p:nvSpPr>
-          <p:cNvPr id="26" name="Text 24"/>
-          <p:cNvSpPr/>
-          <p:nvPr/>
-        </p:nvSpPr>
-        <p:spPr>
-          <a:xfrm>
-            <a:off x="6126480" y="1764792"/>
-            <a:ext cx="2560320" cy="228600"/>
-          </a:xfrm>
-          <a:prstGeom prst="rect">
-            <a:avLst/>
-          </a:prstGeom>
-          <a:noFill/>
-          <a:ln/>
-        </p:spPr>
-        <p:txBody>
-          <a:bodyPr wrap="square" lIns="0" tIns="0" rIns="0" bIns="0" rtlCol="0" anchor="ctr"/>
-          <a:lstStyle/>
-          <a:p>
-            <a:pPr indent="0" marL="0">
-              <a:buNone/>
-            </a:pPr>
-            <a:r>
-              <a:rPr lang="en-US" sz="900" b="1" dirty="0">
-                <a:solidFill>
-                  <a:srgbClr val="2196F3"/>
-                </a:solidFill>
-                <a:latin typeface="Arial" pitchFamily="34" charset="0"/>
-                <a:ea typeface="Arial" pitchFamily="34" charset="-122"/>
-                <a:cs typeface="Arial" pitchFamily="34" charset="-120"/>
-              </a:rPr>
-              <a:t>Phase 3: 中期施策（3-6ヶ月）</a:t>
-            </a:r>
-            <a:endParaRPr lang="en-US" sz="900" dirty="0"/>
-          </a:p>
-        </p:txBody>
-      </p:sp>
-      <p:sp>
-        <p:nvSpPr>
-          <p:cNvPr id="27" name="Text 25"/>
-          <p:cNvSpPr/>
-          <p:nvPr/>
-        </p:nvSpPr>
-        <p:spPr>
-          <a:xfrm>
-            <a:off x="6126480" y="2039112"/>
-            <a:ext cx="2560320" cy="2286000"/>
-          </a:xfrm>
-          <a:prstGeom prst="rect">
-            <a:avLst/>
-          </a:prstGeom>
-          <a:noFill/>
-          <a:ln/>
-        </p:spPr>
-        <p:txBody>
-          <a:bodyPr wrap="square" lIns="0" tIns="0" rIns="0" bIns="0" rtlCol="0" anchor="t"/>
-          <a:lstStyle/>
-          <a:p>
-            <a:pPr indent="0" marL="0">
-              <a:buNone/>
-            </a:pPr>
-            <a:r>
-              <a:rPr lang="en-US" sz="700" dirty="0">
-                <a:solidFill>
-                  <a:srgbClr val="333333"/>
-                </a:solidFill>
-                <a:latin typeface="Arial" pitchFamily="34" charset="0"/>
-                <a:ea typeface="Arial" pitchFamily="34" charset="-122"/>
-                <a:cs typeface="Arial" pitchFamily="34" charset="-120"/>
-              </a:rPr>
-              <a:t>- 清掃スタッフの定期研修プログラム導入</a:t>
-            </a:r>
-            <a:endParaRPr lang="en-US" sz="700" dirty="0"/>
-          </a:p>
-          <a:p>
-            <a:pPr indent="0" marL="0">
-              <a:buNone/>
-            </a:pPr>
-            <a:r>
-              <a:rPr lang="en-US" sz="700" dirty="0">
-                <a:solidFill>
-                  <a:srgbClr val="333333"/>
-                </a:solidFill>
-                <a:latin typeface="Arial" pitchFamily="34" charset="0"/>
-                <a:ea typeface="Arial" pitchFamily="34" charset="-122"/>
-                <a:cs typeface="Arial" pitchFamily="34" charset="-120"/>
-              </a:rPr>
-              <a:t>- デジタル清掃記録システムの検討</a:t>
-            </a:r>
-            <a:endParaRPr lang="en-US" sz="700" dirty="0"/>
-          </a:p>
-          <a:p>
-            <a:pPr indent="0" marL="0">
-              <a:buNone/>
-            </a:pPr>
-            <a:r>
-              <a:rPr lang="en-US" sz="700" dirty="0">
-                <a:solidFill>
-                  <a:srgbClr val="333333"/>
-                </a:solidFill>
-                <a:latin typeface="Arial" pitchFamily="34" charset="0"/>
-                <a:ea typeface="Arial" pitchFamily="34" charset="-122"/>
-                <a:cs typeface="Arial" pitchFamily="34" charset="-120"/>
-              </a:rPr>
-              <a:t>- 排水管の老朽化調査と更新計画の策定</a:t>
-            </a:r>
-            <a:endParaRPr lang="en-US" sz="700" dirty="0"/>
-          </a:p>
-          <a:p>
-            <a:pPr indent="0" marL="0">
-              <a:buNone/>
-            </a:pPr>
-            <a:r>
-              <a:rPr lang="en-US" sz="700" dirty="0">
-                <a:solidFill>
-                  <a:srgbClr val="333333"/>
-                </a:solidFill>
-                <a:latin typeface="Arial" pitchFamily="34" charset="0"/>
-                <a:ea typeface="Arial" pitchFamily="34" charset="-122"/>
-                <a:cs typeface="Arial" pitchFamily="34" charset="-120"/>
-              </a:rPr>
-              <a:t>- 高耐久・防汚カーペットへの段階的張替え提案</a:t>
-            </a:r>
-            <a:endParaRPr lang="en-US" sz="700" dirty="0"/>
-          </a:p>
-          <a:p>
-            <a:pPr indent="0" marL="0">
-              <a:buNone/>
-            </a:pPr>
-            <a:r>
-              <a:rPr lang="en-US" sz="700" dirty="0">
-                <a:solidFill>
-                  <a:srgbClr val="333333"/>
-                </a:solidFill>
-                <a:latin typeface="Arial" pitchFamily="34" charset="0"/>
-                <a:ea typeface="Arial" pitchFamily="34" charset="-122"/>
-                <a:cs typeface="Arial" pitchFamily="34" charset="-120"/>
-              </a:rPr>
-              <a:t>- オゾン脱臭機の導入検討</a:t>
-            </a:r>
-            <a:endParaRPr lang="en-US" sz="700" dirty="0"/>
-          </a:p>
-        </p:txBody>
-      </p:sp>
-      <p:sp>
-        <p:nvSpPr>
-          <p:cNvPr id="28" name="Shape 26"/>
-          <p:cNvSpPr/>
-          <p:nvPr/>
-        </p:nvSpPr>
-        <p:spPr>
-          <a:xfrm>
-            <a:off x="0" y="4800600"/>
-            <a:ext cx="9144000" cy="342900"/>
-          </a:xfrm>
-          <a:prstGeom prst="rect">
-            <a:avLst/>
-          </a:prstGeom>
-          <a:solidFill>
-            <a:srgbClr val="1B3A5C"/>
-          </a:solidFill>
-          <a:ln/>
-        </p:spPr>
-      </p:sp>
-      <p:sp>
-        <p:nvSpPr>
-          <p:cNvPr id="29" name="Text 27"/>
-          <p:cNvSpPr/>
-          <p:nvPr/>
-        </p:nvSpPr>
-        <p:spPr>
-          <a:xfrm>
-            <a:off x="457200" y="4800600"/>
-            <a:ext cx="3657600" cy="342900"/>
-          </a:xfrm>
-          <a:prstGeom prst="rect">
-            <a:avLst/>
-          </a:prstGeom>
-          <a:noFill/>
-          <a:ln/>
-        </p:spPr>
-        <p:txBody>
-          <a:bodyPr wrap="square" rtlCol="0" anchor="ctr"/>
-          <a:lstStyle/>
-          <a:p>
-            <a:pPr indent="0" marL="0">
-              <a:buNone/>
-            </a:pPr>
-            <a:r>
-              <a:rPr lang="en-US" sz="800" dirty="0">
-                <a:solidFill>
-                  <a:srgbClr val="94A3B8"/>
-                </a:solidFill>
-                <a:latin typeface="Arial" pitchFamily="34" charset="0"/>
-                <a:ea typeface="Arial" pitchFamily="34" charset="-122"/>
-                <a:cs typeface="Arial" pitchFamily="34" charset="-120"/>
-              </a:rPr>
-              <a:t>Confidential | PRIMECHANGE</a:t>
-            </a:r>
-            <a:endParaRPr lang="en-US" sz="800" dirty="0"/>
-          </a:p>
-        </p:txBody>
-      </p:sp>
-      <p:sp>
-        <p:nvSpPr>
-          <p:cNvPr id="30" name="Text 28"/>
-          <p:cNvSpPr/>
-          <p:nvPr/>
-        </p:nvSpPr>
-        <p:spPr>
-          <a:xfrm>
-            <a:off x="8229600" y="4800600"/>
-            <a:ext cx="457200" cy="342900"/>
-          </a:xfrm>
-          <a:prstGeom prst="rect">
-            <a:avLst/>
-          </a:prstGeom>
-          <a:noFill/>
-          <a:ln/>
-        </p:spPr>
-        <p:txBody>
-          <a:bodyPr wrap="square" rtlCol="0" anchor="ctr"/>
-          <a:lstStyle/>
-          <a:p>
-            <a:pPr algn="r" indent="0" marL="0">
-              <a:buNone/>
-            </a:pPr>
-            <a:r>
-              <a:rPr lang="en-US" sz="800" dirty="0">
-                <a:solidFill>
-                  <a:srgbClr val="94A3B8"/>
-                </a:solidFill>
-                <a:latin typeface="Arial" pitchFamily="34" charset="0"/>
-                <a:ea typeface="Arial" pitchFamily="34" charset="-122"/>
-                <a:cs typeface="Arial" pitchFamily="34" charset="-120"/>
-              </a:rPr>
-              <a:t>10</a:t>
-            </a:r>
-            <a:endParaRPr lang="en-US" sz="800" dirty="0"/>
-          </a:p>
-        </p:txBody>
-      </p:sp>
-    </p:spTree>
-  </p:cSld>
-  <p:clrMapOvr>
-    <a:masterClrMapping/>
-  </p:clrMapOvr>
-</p:sld>
-</file>
-
-<file path=ppt/slides/slide11.xml><?xml version="1.0" encoding="utf-8"?>
-<p:sld xmlns:a="http://schemas.openxmlformats.org/drawingml/2006/main" xmlns:r="http://schemas.openxmlformats.org/officeDocument/2006/relationships" xmlns:p="http://schemas.openxmlformats.org/presentationml/2006/main">
-  <p:cSld name="Slide 11">
-    <p:spTree>
-      <p:nvGrpSpPr>
-        <p:cNvPr id="1" name=""/>
-        <p:cNvGrpSpPr/>
-        <p:nvPr/>
-      </p:nvGrpSpPr>
-      <p:grpSpPr>
-        <a:xfrm>
-          <a:off x="0" y="0"/>
-          <a:ext cx="0" cy="0"/>
-          <a:chOff x="0" y="0"/>
-          <a:chExt cx="0" cy="0"/>
-        </a:xfrm>
-      </p:grpSpPr>
-      <p:sp>
-        <p:nvSpPr>
-          <p:cNvPr id="2" name="Shape 0"/>
-          <p:cNvSpPr/>
-          <p:nvPr/>
-        </p:nvSpPr>
-        <p:spPr>
-          <a:xfrm>
-            <a:off x="0" y="0"/>
-            <a:ext cx="9144000" cy="548640"/>
-          </a:xfrm>
-          <a:prstGeom prst="rect">
-            <a:avLst/>
-          </a:prstGeom>
-          <a:solidFill>
-            <a:srgbClr val="1B3A5C"/>
-          </a:solidFill>
-          <a:ln/>
-        </p:spPr>
-      </p:sp>
-      <p:sp>
-        <p:nvSpPr>
-          <p:cNvPr id="3" name="Text 1"/>
-          <p:cNvSpPr/>
-          <p:nvPr/>
-        </p:nvSpPr>
-        <p:spPr>
-          <a:xfrm>
-            <a:off x="457200" y="45720"/>
-            <a:ext cx="8229600" cy="320040"/>
-          </a:xfrm>
-          <a:prstGeom prst="rect">
-            <a:avLst/>
-          </a:prstGeom>
-          <a:noFill/>
-          <a:ln/>
-        </p:spPr>
-        <p:txBody>
-          <a:bodyPr wrap="square" lIns="0" tIns="0" rIns="0" bIns="0" rtlCol="0" anchor="ctr"/>
-          <a:lstStyle/>
-          <a:p>
-            <a:pPr indent="0" marL="0">
-              <a:buNone/>
-            </a:pPr>
-            <a:r>
-              <a:rPr lang="en-US" sz="2000" b="1" dirty="0">
-                <a:solidFill>
-                  <a:srgbClr val="FFFFFF"/>
-                </a:solidFill>
-                <a:latin typeface="Arial" pitchFamily="34" charset="0"/>
-                <a:ea typeface="Arial" pitchFamily="34" charset="-122"/>
-                <a:cs typeface="Arial" pitchFamily="34" charset="-120"/>
-              </a:rPr>
-              <a:t>【URGENT】コートホテル新横浜</a:t>
-            </a:r>
-            <a:endParaRPr lang="en-US" sz="2000" dirty="0"/>
-          </a:p>
-        </p:txBody>
-      </p:sp>
-      <p:sp>
-        <p:nvSpPr>
-          <p:cNvPr id="4" name="Text 2"/>
-          <p:cNvSpPr/>
-          <p:nvPr/>
-        </p:nvSpPr>
-        <p:spPr>
-          <a:xfrm>
-            <a:off x="457200" y="320040"/>
-            <a:ext cx="8229600" cy="201168"/>
-          </a:xfrm>
-          <a:prstGeom prst="rect">
-            <a:avLst/>
-          </a:prstGeom>
-          <a:noFill/>
-          <a:ln/>
-        </p:spPr>
-        <p:txBody>
-          <a:bodyPr wrap="square" lIns="0" tIns="0" rIns="0" bIns="0" rtlCol="0" anchor="ctr"/>
-          <a:lstStyle/>
-          <a:p>
-            <a:pPr indent="0" marL="0">
-              <a:buNone/>
-            </a:pPr>
-            <a:r>
-              <a:rPr lang="en-US" sz="1000" dirty="0">
-                <a:solidFill>
-                  <a:srgbClr val="5A9BE6"/>
-                </a:solidFill>
-                <a:latin typeface="Arial" pitchFamily="34" charset="0"/>
-                <a:ea typeface="Arial" pitchFamily="34" charset="-122"/>
-                <a:cs typeface="Arial" pitchFamily="34" charset="-120"/>
-              </a:rPr>
-              <a:t>優先度 #5 | 現状 7.12点 → 目標 8点</a:t>
             </a:r>
             <a:endParaRPr lang="en-US" sz="1000" dirty="0"/>
           </a:p>
@@ -5278,6 +4072,1212 @@
                 <a:ea typeface="Arial" pitchFamily="34" charset="-122"/>
                 <a:cs typeface="Arial" pitchFamily="34" charset="-120"/>
               </a:rPr>
+              <a:t>10</a:t>
+            </a:r>
+            <a:endParaRPr lang="en-US" sz="800" dirty="0"/>
+          </a:p>
+        </p:txBody>
+      </p:sp>
+    </p:spTree>
+  </p:cSld>
+  <p:clrMapOvr>
+    <a:masterClrMapping/>
+  </p:clrMapOvr>
+</p:sld>
+</file>
+
+<file path=ppt/slides/slide11.xml><?xml version="1.0" encoding="utf-8"?>
+<p:sld xmlns:a="http://schemas.openxmlformats.org/drawingml/2006/main" xmlns:r="http://schemas.openxmlformats.org/officeDocument/2006/relationships" xmlns:p="http://schemas.openxmlformats.org/presentationml/2006/main">
+  <p:cSld name="Slide 11">
+    <p:spTree>
+      <p:nvGrpSpPr>
+        <p:cNvPr id="1" name=""/>
+        <p:cNvGrpSpPr/>
+        <p:nvPr/>
+      </p:nvGrpSpPr>
+      <p:grpSpPr>
+        <a:xfrm>
+          <a:off x="0" y="0"/>
+          <a:ext cx="0" cy="0"/>
+          <a:chOff x="0" y="0"/>
+          <a:chExt cx="0" cy="0"/>
+        </a:xfrm>
+      </p:grpSpPr>
+      <p:sp>
+        <p:nvSpPr>
+          <p:cNvPr id="2" name="Shape 0"/>
+          <p:cNvSpPr/>
+          <p:nvPr/>
+        </p:nvSpPr>
+        <p:spPr>
+          <a:xfrm>
+            <a:off x="0" y="0"/>
+            <a:ext cx="9144000" cy="548640"/>
+          </a:xfrm>
+          <a:prstGeom prst="rect">
+            <a:avLst/>
+          </a:prstGeom>
+          <a:solidFill>
+            <a:srgbClr val="1B3A5C"/>
+          </a:solidFill>
+          <a:ln/>
+        </p:spPr>
+      </p:sp>
+      <p:sp>
+        <p:nvSpPr>
+          <p:cNvPr id="3" name="Text 1"/>
+          <p:cNvSpPr/>
+          <p:nvPr/>
+        </p:nvSpPr>
+        <p:spPr>
+          <a:xfrm>
+            <a:off x="457200" y="45720"/>
+            <a:ext cx="8229600" cy="320040"/>
+          </a:xfrm>
+          <a:prstGeom prst="rect">
+            <a:avLst/>
+          </a:prstGeom>
+          <a:noFill/>
+          <a:ln/>
+        </p:spPr>
+        <p:txBody>
+          <a:bodyPr wrap="square" lIns="0" tIns="0" rIns="0" bIns="0" rtlCol="0" anchor="ctr"/>
+          <a:lstStyle/>
+          <a:p>
+            <a:pPr indent="0" marL="0">
+              <a:buNone/>
+            </a:pPr>
+            <a:r>
+              <a:rPr lang="en-US" sz="2000" b="1" dirty="0">
+                <a:solidFill>
+                  <a:srgbClr val="FFFFFF"/>
+                </a:solidFill>
+                <a:latin typeface="Arial" pitchFamily="34" charset="0"/>
+                <a:ea typeface="Arial" pitchFamily="34" charset="-122"/>
+                <a:cs typeface="Arial" pitchFamily="34" charset="-120"/>
+              </a:rPr>
+              <a:t>【URGENT】チサンホテル浜松町</a:t>
+            </a:r>
+            <a:endParaRPr lang="en-US" sz="2000" dirty="0"/>
+          </a:p>
+        </p:txBody>
+      </p:sp>
+      <p:sp>
+        <p:nvSpPr>
+          <p:cNvPr id="4" name="Text 2"/>
+          <p:cNvSpPr/>
+          <p:nvPr/>
+        </p:nvSpPr>
+        <p:spPr>
+          <a:xfrm>
+            <a:off x="457200" y="320040"/>
+            <a:ext cx="8229600" cy="201168"/>
+          </a:xfrm>
+          <a:prstGeom prst="rect">
+            <a:avLst/>
+          </a:prstGeom>
+          <a:noFill/>
+          <a:ln/>
+        </p:spPr>
+        <p:txBody>
+          <a:bodyPr wrap="square" lIns="0" tIns="0" rIns="0" bIns="0" rtlCol="0" anchor="ctr"/>
+          <a:lstStyle/>
+          <a:p>
+            <a:pPr indent="0" marL="0">
+              <a:buNone/>
+            </a:pPr>
+            <a:r>
+              <a:rPr lang="en-US" sz="1000" dirty="0">
+                <a:solidFill>
+                  <a:srgbClr val="5A9BE6"/>
+                </a:solidFill>
+                <a:latin typeface="Arial" pitchFamily="34" charset="0"/>
+                <a:ea typeface="Arial" pitchFamily="34" charset="-122"/>
+                <a:cs typeface="Arial" pitchFamily="34" charset="-120"/>
+              </a:rPr>
+              <a:t>優先度 #5 | 現状 7.04点 → 目標 8点</a:t>
+            </a:r>
+            <a:endParaRPr lang="en-US" sz="1000" dirty="0"/>
+          </a:p>
+        </p:txBody>
+      </p:sp>
+      <p:sp>
+        <p:nvSpPr>
+          <p:cNvPr id="5" name="Shape 3"/>
+          <p:cNvSpPr/>
+          <p:nvPr/>
+        </p:nvSpPr>
+        <p:spPr>
+          <a:xfrm>
+            <a:off x="274320" y="731520"/>
+            <a:ext cx="1828800" cy="731520"/>
+          </a:xfrm>
+          <a:prstGeom prst="rect">
+            <a:avLst/>
+          </a:prstGeom>
+          <a:solidFill>
+            <a:srgbClr val="FFEBEE"/>
+          </a:solidFill>
+          <a:ln/>
+          <a:effectLst>
+            <a:outerShdw sx="100000" sy="100000" kx="0" ky="0" algn="bl" rotWithShape="0" blurRad="50800" dist="25400" dir="8100000">
+              <a:srgbClr val="000000">
+                <a:alpha val="10000"/>
+              </a:srgbClr>
+            </a:outerShdw>
+          </a:effectLst>
+        </p:spPr>
+      </p:sp>
+      <p:sp>
+        <p:nvSpPr>
+          <p:cNvPr id="6" name="Shape 4"/>
+          <p:cNvSpPr/>
+          <p:nvPr/>
+        </p:nvSpPr>
+        <p:spPr>
+          <a:xfrm>
+            <a:off x="274320" y="731520"/>
+            <a:ext cx="1828800" cy="36576"/>
+          </a:xfrm>
+          <a:prstGeom prst="rect">
+            <a:avLst/>
+          </a:prstGeom>
+          <a:solidFill>
+            <a:srgbClr val="E74C3C"/>
+          </a:solidFill>
+          <a:ln/>
+        </p:spPr>
+      </p:sp>
+      <p:sp>
+        <p:nvSpPr>
+          <p:cNvPr id="7" name="Text 5"/>
+          <p:cNvSpPr/>
+          <p:nvPr/>
+        </p:nvSpPr>
+        <p:spPr>
+          <a:xfrm>
+            <a:off x="274320" y="841248"/>
+            <a:ext cx="1828800" cy="201168"/>
+          </a:xfrm>
+          <a:prstGeom prst="rect">
+            <a:avLst/>
+          </a:prstGeom>
+          <a:noFill/>
+          <a:ln/>
+        </p:spPr>
+        <p:txBody>
+          <a:bodyPr wrap="square" lIns="0" tIns="0" rIns="0" bIns="0" rtlCol="0" anchor="ctr"/>
+          <a:lstStyle/>
+          <a:p>
+            <a:pPr algn="ctr" indent="0" marL="0">
+              <a:buNone/>
+            </a:pPr>
+            <a:r>
+              <a:rPr lang="en-US" sz="900" dirty="0">
+                <a:solidFill>
+                  <a:srgbClr val="666666"/>
+                </a:solidFill>
+                <a:latin typeface="Arial" pitchFamily="34" charset="0"/>
+                <a:ea typeface="Arial" pitchFamily="34" charset="-122"/>
+                <a:cs typeface="Arial" pitchFamily="34" charset="-120"/>
+              </a:rPr>
+              <a:t>現状スコア</a:t>
+            </a:r>
+            <a:endParaRPr lang="en-US" sz="900" dirty="0"/>
+          </a:p>
+        </p:txBody>
+      </p:sp>
+      <p:sp>
+        <p:nvSpPr>
+          <p:cNvPr id="8" name="Text 6"/>
+          <p:cNvSpPr/>
+          <p:nvPr/>
+        </p:nvSpPr>
+        <p:spPr>
+          <a:xfrm>
+            <a:off x="274320" y="1024128"/>
+            <a:ext cx="1828800" cy="411480"/>
+          </a:xfrm>
+          <a:prstGeom prst="rect">
+            <a:avLst/>
+          </a:prstGeom>
+          <a:noFill/>
+          <a:ln/>
+        </p:spPr>
+        <p:txBody>
+          <a:bodyPr wrap="square" lIns="0" tIns="0" rIns="0" bIns="0" rtlCol="0" anchor="ctr"/>
+          <a:lstStyle/>
+          <a:p>
+            <a:pPr algn="ctr" indent="0" marL="0">
+              <a:buNone/>
+            </a:pPr>
+            <a:r>
+              <a:rPr lang="en-US" sz="2800" b="1" dirty="0">
+                <a:solidFill>
+                  <a:srgbClr val="E74C3C"/>
+                </a:solidFill>
+                <a:latin typeface="Arial" pitchFamily="34" charset="0"/>
+                <a:ea typeface="Arial" pitchFamily="34" charset="-122"/>
+                <a:cs typeface="Arial" pitchFamily="34" charset="-120"/>
+              </a:rPr>
+              <a:t>7.04</a:t>
+            </a:r>
+            <a:endParaRPr lang="en-US" sz="2800" dirty="0"/>
+          </a:p>
+        </p:txBody>
+      </p:sp>
+      <p:sp>
+        <p:nvSpPr>
+          <p:cNvPr id="9" name="Shape 7"/>
+          <p:cNvSpPr/>
+          <p:nvPr/>
+        </p:nvSpPr>
+        <p:spPr>
+          <a:xfrm>
+            <a:off x="2286000" y="731520"/>
+            <a:ext cx="1828800" cy="731520"/>
+          </a:xfrm>
+          <a:prstGeom prst="rect">
+            <a:avLst/>
+          </a:prstGeom>
+          <a:solidFill>
+            <a:srgbClr val="E8F5E9"/>
+          </a:solidFill>
+          <a:ln/>
+          <a:effectLst>
+            <a:outerShdw sx="100000" sy="100000" kx="0" ky="0" algn="bl" rotWithShape="0" blurRad="50800" dist="25400" dir="8100000">
+              <a:srgbClr val="000000">
+                <a:alpha val="10000"/>
+              </a:srgbClr>
+            </a:outerShdw>
+          </a:effectLst>
+        </p:spPr>
+      </p:sp>
+      <p:sp>
+        <p:nvSpPr>
+          <p:cNvPr id="10" name="Shape 8"/>
+          <p:cNvSpPr/>
+          <p:nvPr/>
+        </p:nvSpPr>
+        <p:spPr>
+          <a:xfrm>
+            <a:off x="2286000" y="731520"/>
+            <a:ext cx="1828800" cy="36576"/>
+          </a:xfrm>
+          <a:prstGeom prst="rect">
+            <a:avLst/>
+          </a:prstGeom>
+          <a:solidFill>
+            <a:srgbClr val="27AE60"/>
+          </a:solidFill>
+          <a:ln/>
+        </p:spPr>
+      </p:sp>
+      <p:sp>
+        <p:nvSpPr>
+          <p:cNvPr id="11" name="Text 9"/>
+          <p:cNvSpPr/>
+          <p:nvPr/>
+        </p:nvSpPr>
+        <p:spPr>
+          <a:xfrm>
+            <a:off x="2286000" y="841248"/>
+            <a:ext cx="1828800" cy="201168"/>
+          </a:xfrm>
+          <a:prstGeom prst="rect">
+            <a:avLst/>
+          </a:prstGeom>
+          <a:noFill/>
+          <a:ln/>
+        </p:spPr>
+        <p:txBody>
+          <a:bodyPr wrap="square" lIns="0" tIns="0" rIns="0" bIns="0" rtlCol="0" anchor="ctr"/>
+          <a:lstStyle/>
+          <a:p>
+            <a:pPr algn="ctr" indent="0" marL="0">
+              <a:buNone/>
+            </a:pPr>
+            <a:r>
+              <a:rPr lang="en-US" sz="900" dirty="0">
+                <a:solidFill>
+                  <a:srgbClr val="666666"/>
+                </a:solidFill>
+                <a:latin typeface="Arial" pitchFamily="34" charset="0"/>
+                <a:ea typeface="Arial" pitchFamily="34" charset="-122"/>
+                <a:cs typeface="Arial" pitchFamily="34" charset="-120"/>
+              </a:rPr>
+              <a:t>目標スコア</a:t>
+            </a:r>
+            <a:endParaRPr lang="en-US" sz="900" dirty="0"/>
+          </a:p>
+        </p:txBody>
+      </p:sp>
+      <p:sp>
+        <p:nvSpPr>
+          <p:cNvPr id="12" name="Text 10"/>
+          <p:cNvSpPr/>
+          <p:nvPr/>
+        </p:nvSpPr>
+        <p:spPr>
+          <a:xfrm>
+            <a:off x="2286000" y="1024128"/>
+            <a:ext cx="1828800" cy="411480"/>
+          </a:xfrm>
+          <a:prstGeom prst="rect">
+            <a:avLst/>
+          </a:prstGeom>
+          <a:noFill/>
+          <a:ln/>
+        </p:spPr>
+        <p:txBody>
+          <a:bodyPr wrap="square" lIns="0" tIns="0" rIns="0" bIns="0" rtlCol="0" anchor="ctr"/>
+          <a:lstStyle/>
+          <a:p>
+            <a:pPr algn="ctr" indent="0" marL="0">
+              <a:buNone/>
+            </a:pPr>
+            <a:r>
+              <a:rPr lang="en-US" sz="2800" b="1" dirty="0">
+                <a:solidFill>
+                  <a:srgbClr val="27AE60"/>
+                </a:solidFill>
+                <a:latin typeface="Arial" pitchFamily="34" charset="0"/>
+                <a:ea typeface="Arial" pitchFamily="34" charset="-122"/>
+                <a:cs typeface="Arial" pitchFamily="34" charset="-120"/>
+              </a:rPr>
+              <a:t>8</a:t>
+            </a:r>
+            <a:endParaRPr lang="en-US" sz="2800" dirty="0"/>
+          </a:p>
+        </p:txBody>
+      </p:sp>
+      <p:sp>
+        <p:nvSpPr>
+          <p:cNvPr id="13" name="Shape 11"/>
+          <p:cNvSpPr/>
+          <p:nvPr/>
+        </p:nvSpPr>
+        <p:spPr>
+          <a:xfrm>
+            <a:off x="4389120" y="731520"/>
+            <a:ext cx="4389120" cy="731520"/>
+          </a:xfrm>
+          <a:prstGeom prst="rect">
+            <a:avLst/>
+          </a:prstGeom>
+          <a:solidFill>
+            <a:srgbClr val="F5F7FA"/>
+          </a:solidFill>
+          <a:ln/>
+          <a:effectLst>
+            <a:outerShdw sx="100000" sy="100000" kx="0" ky="0" algn="bl" rotWithShape="0" blurRad="50800" dist="25400" dir="8100000">
+              <a:srgbClr val="000000">
+                <a:alpha val="10000"/>
+              </a:srgbClr>
+            </a:outerShdw>
+          </a:effectLst>
+        </p:spPr>
+      </p:sp>
+      <p:sp>
+        <p:nvSpPr>
+          <p:cNvPr id="14" name="Text 12"/>
+          <p:cNvSpPr/>
+          <p:nvPr/>
+        </p:nvSpPr>
+        <p:spPr>
+          <a:xfrm>
+            <a:off x="4480560" y="749808"/>
+            <a:ext cx="1828800" cy="182880"/>
+          </a:xfrm>
+          <a:prstGeom prst="rect">
+            <a:avLst/>
+          </a:prstGeom>
+          <a:noFill/>
+          <a:ln/>
+        </p:spPr>
+        <p:txBody>
+          <a:bodyPr wrap="square" lIns="0" tIns="0" rIns="0" bIns="0" rtlCol="0" anchor="ctr"/>
+          <a:lstStyle/>
+          <a:p>
+            <a:pPr indent="0" marL="0">
+              <a:buNone/>
+            </a:pPr>
+            <a:r>
+              <a:rPr lang="en-US" sz="900" b="1" dirty="0">
+                <a:solidFill>
+                  <a:srgbClr val="666666"/>
+                </a:solidFill>
+                <a:latin typeface="Arial" pitchFamily="34" charset="0"/>
+                <a:ea typeface="Arial" pitchFamily="34" charset="-122"/>
+                <a:cs typeface="Arial" pitchFamily="34" charset="-120"/>
+              </a:rPr>
+              <a:t>主要課題</a:t>
+            </a:r>
+            <a:endParaRPr lang="en-US" sz="900" dirty="0"/>
+          </a:p>
+        </p:txBody>
+      </p:sp>
+      <p:sp>
+        <p:nvSpPr>
+          <p:cNvPr id="15" name="Text 13"/>
+          <p:cNvSpPr/>
+          <p:nvPr/>
+        </p:nvSpPr>
+        <p:spPr>
+          <a:xfrm>
+            <a:off x="4480560" y="914400"/>
+            <a:ext cx="4206240" cy="502920"/>
+          </a:xfrm>
+          <a:prstGeom prst="rect">
+            <a:avLst/>
+          </a:prstGeom>
+          <a:noFill/>
+          <a:ln/>
+        </p:spPr>
+        <p:txBody>
+          <a:bodyPr wrap="square" lIns="0" tIns="0" rIns="0" bIns="0" rtlCol="0" anchor="ctr"/>
+          <a:lstStyle/>
+          <a:p>
+            <a:pPr indent="0" marL="0">
+              <a:buNone/>
+            </a:pPr>
+            <a:r>
+              <a:rPr lang="en-US" sz="800" dirty="0">
+                <a:solidFill>
+                  <a:srgbClr val="333333"/>
+                </a:solidFill>
+                <a:latin typeface="Arial" pitchFamily="34" charset="0"/>
+                <a:ea typeface="Arial" pitchFamily="34" charset="-122"/>
+                <a:cs typeface="Arial" pitchFamily="34" charset="-120"/>
+              </a:rPr>
+              <a:t>清掃品質全般: 3件</a:t>
+            </a:r>
+            <a:endParaRPr lang="en-US" sz="800" dirty="0"/>
+          </a:p>
+          <a:p>
+            <a:pPr indent="0" marL="0">
+              <a:buNone/>
+            </a:pPr>
+            <a:r>
+              <a:rPr lang="en-US" sz="800" dirty="0">
+                <a:solidFill>
+                  <a:srgbClr val="333333"/>
+                </a:solidFill>
+                <a:latin typeface="Arial" pitchFamily="34" charset="0"/>
+                <a:ea typeface="Arial" pitchFamily="34" charset="-122"/>
+                <a:cs typeface="Arial" pitchFamily="34" charset="-120"/>
+              </a:rPr>
+              <a:t>排水・詰まり: 2件</a:t>
+            </a:r>
+            <a:endParaRPr lang="en-US" sz="800" dirty="0"/>
+          </a:p>
+          <a:p>
+            <a:pPr indent="0" marL="0">
+              <a:buNone/>
+            </a:pPr>
+            <a:r>
+              <a:rPr lang="en-US" sz="800" dirty="0">
+                <a:solidFill>
+                  <a:srgbClr val="333333"/>
+                </a:solidFill>
+                <a:latin typeface="Arial" pitchFamily="34" charset="0"/>
+                <a:ea typeface="Arial" pitchFamily="34" charset="-122"/>
+                <a:cs typeface="Arial" pitchFamily="34" charset="-120"/>
+              </a:rPr>
+              <a:t>ほこり・塵: 1件</a:t>
+            </a:r>
+            <a:endParaRPr lang="en-US" sz="800" dirty="0"/>
+          </a:p>
+          <a:p>
+            <a:pPr indent="0" marL="0">
+              <a:buNone/>
+            </a:pPr>
+            <a:r>
+              <a:rPr lang="en-US" sz="800" dirty="0">
+                <a:solidFill>
+                  <a:srgbClr val="333333"/>
+                </a:solidFill>
+                <a:latin typeface="Arial" pitchFamily="34" charset="0"/>
+                <a:ea typeface="Arial" pitchFamily="34" charset="-122"/>
+                <a:cs typeface="Arial" pitchFamily="34" charset="-120"/>
+              </a:rPr>
+              <a:t>カーペット汚れ: 1件</a:t>
+            </a:r>
+            <a:endParaRPr lang="en-US" sz="800" dirty="0"/>
+          </a:p>
+        </p:txBody>
+      </p:sp>
+      <p:sp>
+        <p:nvSpPr>
+          <p:cNvPr id="16" name="Shape 14"/>
+          <p:cNvSpPr/>
+          <p:nvPr/>
+        </p:nvSpPr>
+        <p:spPr>
+          <a:xfrm>
+            <a:off x="274320" y="1691640"/>
+            <a:ext cx="2743200" cy="2697480"/>
+          </a:xfrm>
+          <a:prstGeom prst="rect">
+            <a:avLst/>
+          </a:prstGeom>
+          <a:solidFill>
+            <a:srgbClr val="FFEBEE"/>
+          </a:solidFill>
+          <a:ln/>
+          <a:effectLst>
+            <a:outerShdw sx="100000" sy="100000" kx="0" ky="0" algn="bl" rotWithShape="0" blurRad="50800" dist="25400" dir="8100000">
+              <a:srgbClr val="000000">
+                <a:alpha val="10000"/>
+              </a:srgbClr>
+            </a:outerShdw>
+          </a:effectLst>
+        </p:spPr>
+      </p:sp>
+      <p:sp>
+        <p:nvSpPr>
+          <p:cNvPr id="17" name="Shape 15"/>
+          <p:cNvSpPr/>
+          <p:nvPr/>
+        </p:nvSpPr>
+        <p:spPr>
+          <a:xfrm>
+            <a:off x="274320" y="1691640"/>
+            <a:ext cx="2743200" cy="36576"/>
+          </a:xfrm>
+          <a:prstGeom prst="rect">
+            <a:avLst/>
+          </a:prstGeom>
+          <a:solidFill>
+            <a:srgbClr val="E74C3C"/>
+          </a:solidFill>
+          <a:ln/>
+        </p:spPr>
+      </p:sp>
+      <p:sp>
+        <p:nvSpPr>
+          <p:cNvPr id="18" name="Text 16"/>
+          <p:cNvSpPr/>
+          <p:nvPr/>
+        </p:nvSpPr>
+        <p:spPr>
+          <a:xfrm>
+            <a:off x="365760" y="1764792"/>
+            <a:ext cx="2560320" cy="228600"/>
+          </a:xfrm>
+          <a:prstGeom prst="rect">
+            <a:avLst/>
+          </a:prstGeom>
+          <a:noFill/>
+          <a:ln/>
+        </p:spPr>
+        <p:txBody>
+          <a:bodyPr wrap="square" lIns="0" tIns="0" rIns="0" bIns="0" rtlCol="0" anchor="ctr"/>
+          <a:lstStyle/>
+          <a:p>
+            <a:pPr indent="0" marL="0">
+              <a:buNone/>
+            </a:pPr>
+            <a:r>
+              <a:rPr lang="en-US" sz="900" b="1" dirty="0">
+                <a:solidFill>
+                  <a:srgbClr val="E74C3C"/>
+                </a:solidFill>
+                <a:latin typeface="Arial" pitchFamily="34" charset="0"/>
+                <a:ea typeface="Arial" pitchFamily="34" charset="-122"/>
+                <a:cs typeface="Arial" pitchFamily="34" charset="-120"/>
+              </a:rPr>
+              <a:t>Phase 1: 即時対応（1-2週間）</a:t>
+            </a:r>
+            <a:endParaRPr lang="en-US" sz="900" dirty="0"/>
+          </a:p>
+        </p:txBody>
+      </p:sp>
+      <p:sp>
+        <p:nvSpPr>
+          <p:cNvPr id="19" name="Text 17"/>
+          <p:cNvSpPr/>
+          <p:nvPr/>
+        </p:nvSpPr>
+        <p:spPr>
+          <a:xfrm>
+            <a:off x="365760" y="2039112"/>
+            <a:ext cx="2560320" cy="2286000"/>
+          </a:xfrm>
+          <a:prstGeom prst="rect">
+            <a:avLst/>
+          </a:prstGeom>
+          <a:noFill/>
+          <a:ln/>
+        </p:spPr>
+        <p:txBody>
+          <a:bodyPr wrap="square" lIns="0" tIns="0" rIns="0" bIns="0" rtlCol="0" anchor="t"/>
+          <a:lstStyle/>
+          <a:p>
+            <a:pPr indent="0" marL="0">
+              <a:buNone/>
+            </a:pPr>
+            <a:r>
+              <a:rPr lang="en-US" sz="700" dirty="0">
+                <a:solidFill>
+                  <a:srgbClr val="333333"/>
+                </a:solidFill>
+                <a:latin typeface="Arial" pitchFamily="34" charset="0"/>
+                <a:ea typeface="Arial" pitchFamily="34" charset="-122"/>
+                <a:cs typeface="Arial" pitchFamily="34" charset="-120"/>
+              </a:rPr>
+              <a:t>- 清掃品質基準の明確化と全スタッフへの共有</a:t>
+            </a:r>
+            <a:endParaRPr lang="en-US" sz="700" dirty="0"/>
+          </a:p>
+          <a:p>
+            <a:pPr indent="0" marL="0">
+              <a:buNone/>
+            </a:pPr>
+            <a:r>
+              <a:rPr lang="en-US" sz="700" dirty="0">
+                <a:solidFill>
+                  <a:srgbClr val="333333"/>
+                </a:solidFill>
+                <a:latin typeface="Arial" pitchFamily="34" charset="0"/>
+                <a:ea typeface="Arial" pitchFamily="34" charset="-122"/>
+                <a:cs typeface="Arial" pitchFamily="34" charset="-120"/>
+              </a:rPr>
+              <a:t>- 重点箇所（水回り・ベッド周り）の清掃手順見直し</a:t>
+            </a:r>
+            <a:endParaRPr lang="en-US" sz="700" dirty="0"/>
+          </a:p>
+          <a:p>
+            <a:pPr indent="0" marL="0">
+              <a:buNone/>
+            </a:pPr>
+            <a:r>
+              <a:rPr lang="en-US" sz="700" dirty="0">
+                <a:solidFill>
+                  <a:srgbClr val="333333"/>
+                </a:solidFill>
+                <a:latin typeface="Arial" pitchFamily="34" charset="0"/>
+                <a:ea typeface="Arial" pitchFamily="34" charset="-122"/>
+                <a:cs typeface="Arial" pitchFamily="34" charset="-120"/>
+              </a:rPr>
+              <a:t>- 排水口の徹底清掃と詰まり除去</a:t>
+            </a:r>
+            <a:endParaRPr lang="en-US" sz="700" dirty="0"/>
+          </a:p>
+          <a:p>
+            <a:pPr indent="0" marL="0">
+              <a:buNone/>
+            </a:pPr>
+            <a:r>
+              <a:rPr lang="en-US" sz="700" dirty="0">
+                <a:solidFill>
+                  <a:srgbClr val="333333"/>
+                </a:solidFill>
+                <a:latin typeface="Arial" pitchFamily="34" charset="0"/>
+                <a:ea typeface="Arial" pitchFamily="34" charset="-122"/>
+                <a:cs typeface="Arial" pitchFamily="34" charset="-120"/>
+              </a:rPr>
+              <a:t>- 排水トラップの点検・洗浄</a:t>
+            </a:r>
+            <a:endParaRPr lang="en-US" sz="700" dirty="0"/>
+          </a:p>
+          <a:p>
+            <a:pPr indent="0" marL="0">
+              <a:buNone/>
+            </a:pPr>
+            <a:r>
+              <a:rPr lang="en-US" sz="700" dirty="0">
+                <a:solidFill>
+                  <a:srgbClr val="333333"/>
+                </a:solidFill>
+                <a:latin typeface="Arial" pitchFamily="34" charset="0"/>
+                <a:ea typeface="Arial" pitchFamily="34" charset="-122"/>
+                <a:cs typeface="Arial" pitchFamily="34" charset="-120"/>
+              </a:rPr>
+              <a:t>- 高所・棚上部・エアコン上部のほこり除去</a:t>
+            </a:r>
+            <a:endParaRPr lang="en-US" sz="700" dirty="0"/>
+          </a:p>
+        </p:txBody>
+      </p:sp>
+      <p:sp>
+        <p:nvSpPr>
+          <p:cNvPr id="20" name="Shape 18"/>
+          <p:cNvSpPr/>
+          <p:nvPr/>
+        </p:nvSpPr>
+        <p:spPr>
+          <a:xfrm>
+            <a:off x="3154680" y="1691640"/>
+            <a:ext cx="2743200" cy="2697480"/>
+          </a:xfrm>
+          <a:prstGeom prst="rect">
+            <a:avLst/>
+          </a:prstGeom>
+          <a:solidFill>
+            <a:srgbClr val="FFF3E0"/>
+          </a:solidFill>
+          <a:ln/>
+          <a:effectLst>
+            <a:outerShdw sx="100000" sy="100000" kx="0" ky="0" algn="bl" rotWithShape="0" blurRad="50800" dist="25400" dir="8100000">
+              <a:srgbClr val="000000">
+                <a:alpha val="10000"/>
+              </a:srgbClr>
+            </a:outerShdw>
+          </a:effectLst>
+        </p:spPr>
+      </p:sp>
+      <p:sp>
+        <p:nvSpPr>
+          <p:cNvPr id="21" name="Shape 19"/>
+          <p:cNvSpPr/>
+          <p:nvPr/>
+        </p:nvSpPr>
+        <p:spPr>
+          <a:xfrm>
+            <a:off x="3154680" y="1691640"/>
+            <a:ext cx="2743200" cy="36576"/>
+          </a:xfrm>
+          <a:prstGeom prst="rect">
+            <a:avLst/>
+          </a:prstGeom>
+          <a:solidFill>
+            <a:srgbClr val="FF9800"/>
+          </a:solidFill>
+          <a:ln/>
+        </p:spPr>
+      </p:sp>
+      <p:sp>
+        <p:nvSpPr>
+          <p:cNvPr id="22" name="Text 20"/>
+          <p:cNvSpPr/>
+          <p:nvPr/>
+        </p:nvSpPr>
+        <p:spPr>
+          <a:xfrm>
+            <a:off x="3246120" y="1764792"/>
+            <a:ext cx="2560320" cy="228600"/>
+          </a:xfrm>
+          <a:prstGeom prst="rect">
+            <a:avLst/>
+          </a:prstGeom>
+          <a:noFill/>
+          <a:ln/>
+        </p:spPr>
+        <p:txBody>
+          <a:bodyPr wrap="square" lIns="0" tIns="0" rIns="0" bIns="0" rtlCol="0" anchor="ctr"/>
+          <a:lstStyle/>
+          <a:p>
+            <a:pPr indent="0" marL="0">
+              <a:buNone/>
+            </a:pPr>
+            <a:r>
+              <a:rPr lang="en-US" sz="900" b="1" dirty="0">
+                <a:solidFill>
+                  <a:srgbClr val="FF9800"/>
+                </a:solidFill>
+                <a:latin typeface="Arial" pitchFamily="34" charset="0"/>
+                <a:ea typeface="Arial" pitchFamily="34" charset="-122"/>
+                <a:cs typeface="Arial" pitchFamily="34" charset="-120"/>
+              </a:rPr>
+              <a:t>Phase 2: 短期施策（1-3ヶ月）</a:t>
+            </a:r>
+            <a:endParaRPr lang="en-US" sz="900" dirty="0"/>
+          </a:p>
+        </p:txBody>
+      </p:sp>
+      <p:sp>
+        <p:nvSpPr>
+          <p:cNvPr id="23" name="Text 21"/>
+          <p:cNvSpPr/>
+          <p:nvPr/>
+        </p:nvSpPr>
+        <p:spPr>
+          <a:xfrm>
+            <a:off x="3246120" y="2039112"/>
+            <a:ext cx="2560320" cy="2286000"/>
+          </a:xfrm>
+          <a:prstGeom prst="rect">
+            <a:avLst/>
+          </a:prstGeom>
+          <a:noFill/>
+          <a:ln/>
+        </p:spPr>
+        <p:txBody>
+          <a:bodyPr wrap="square" lIns="0" tIns="0" rIns="0" bIns="0" rtlCol="0" anchor="t"/>
+          <a:lstStyle/>
+          <a:p>
+            <a:pPr indent="0" marL="0">
+              <a:buNone/>
+            </a:pPr>
+            <a:r>
+              <a:rPr lang="en-US" sz="700" dirty="0">
+                <a:solidFill>
+                  <a:srgbClr val="333333"/>
+                </a:solidFill>
+                <a:latin typeface="Arial" pitchFamily="34" charset="0"/>
+                <a:ea typeface="Arial" pitchFamily="34" charset="-122"/>
+                <a:cs typeface="Arial" pitchFamily="34" charset="-120"/>
+              </a:rPr>
+              <a:t>- 品質管理チェックリストの導入と実施</a:t>
+            </a:r>
+            <a:endParaRPr lang="en-US" sz="700" dirty="0"/>
+          </a:p>
+          <a:p>
+            <a:pPr indent="0" marL="0">
+              <a:buNone/>
+            </a:pPr>
+            <a:r>
+              <a:rPr lang="en-US" sz="700" dirty="0">
+                <a:solidFill>
+                  <a:srgbClr val="333333"/>
+                </a:solidFill>
+                <a:latin typeface="Arial" pitchFamily="34" charset="0"/>
+                <a:ea typeface="Arial" pitchFamily="34" charset="-122"/>
+                <a:cs typeface="Arial" pitchFamily="34" charset="-120"/>
+              </a:rPr>
+              <a:t>- QCインスペクション体制の構築（ランダム抜き打ち検査）</a:t>
+            </a:r>
+            <a:endParaRPr lang="en-US" sz="700" dirty="0"/>
+          </a:p>
+          <a:p>
+            <a:pPr indent="0" marL="0">
+              <a:buNone/>
+            </a:pPr>
+            <a:r>
+              <a:rPr lang="en-US" sz="700" dirty="0">
+                <a:solidFill>
+                  <a:srgbClr val="333333"/>
+                </a:solidFill>
+                <a:latin typeface="Arial" pitchFamily="34" charset="0"/>
+                <a:ea typeface="Arial" pitchFamily="34" charset="-122"/>
+                <a:cs typeface="Arial" pitchFamily="34" charset="-120"/>
+              </a:rPr>
+              <a:t>- 月次排水管高圧洗浄の定期実施</a:t>
+            </a:r>
+            <a:endParaRPr lang="en-US" sz="700" dirty="0"/>
+          </a:p>
+          <a:p>
+            <a:pPr indent="0" marL="0">
+              <a:buNone/>
+            </a:pPr>
+            <a:r>
+              <a:rPr lang="en-US" sz="700" dirty="0">
+                <a:solidFill>
+                  <a:srgbClr val="333333"/>
+                </a:solidFill>
+                <a:latin typeface="Arial" pitchFamily="34" charset="0"/>
+                <a:ea typeface="Arial" pitchFamily="34" charset="-122"/>
+                <a:cs typeface="Arial" pitchFamily="34" charset="-120"/>
+              </a:rPr>
+              <a:t>- 排水口ストレーナーの定期交換サイクル導入</a:t>
+            </a:r>
+            <a:endParaRPr lang="en-US" sz="700" dirty="0"/>
+          </a:p>
+          <a:p>
+            <a:pPr indent="0" marL="0">
+              <a:buNone/>
+            </a:pPr>
+            <a:r>
+              <a:rPr lang="en-US" sz="700" dirty="0">
+                <a:solidFill>
+                  <a:srgbClr val="333333"/>
+                </a:solidFill>
+                <a:latin typeface="Arial" pitchFamily="34" charset="0"/>
+                <a:ea typeface="Arial" pitchFamily="34" charset="-122"/>
+                <a:cs typeface="Arial" pitchFamily="34" charset="-120"/>
+              </a:rPr>
+              <a:t>- 週次の高所清掃スケジュール導入</a:t>
+            </a:r>
+            <a:endParaRPr lang="en-US" sz="700" dirty="0"/>
+          </a:p>
+        </p:txBody>
+      </p:sp>
+      <p:sp>
+        <p:nvSpPr>
+          <p:cNvPr id="24" name="Shape 22"/>
+          <p:cNvSpPr/>
+          <p:nvPr/>
+        </p:nvSpPr>
+        <p:spPr>
+          <a:xfrm>
+            <a:off x="6035040" y="1691640"/>
+            <a:ext cx="2743200" cy="2697480"/>
+          </a:xfrm>
+          <a:prstGeom prst="rect">
+            <a:avLst/>
+          </a:prstGeom>
+          <a:solidFill>
+            <a:srgbClr val="E3F2FD"/>
+          </a:solidFill>
+          <a:ln/>
+          <a:effectLst>
+            <a:outerShdw sx="100000" sy="100000" kx="0" ky="0" algn="bl" rotWithShape="0" blurRad="50800" dist="25400" dir="8100000">
+              <a:srgbClr val="000000">
+                <a:alpha val="10000"/>
+              </a:srgbClr>
+            </a:outerShdw>
+          </a:effectLst>
+        </p:spPr>
+      </p:sp>
+      <p:sp>
+        <p:nvSpPr>
+          <p:cNvPr id="25" name="Shape 23"/>
+          <p:cNvSpPr/>
+          <p:nvPr/>
+        </p:nvSpPr>
+        <p:spPr>
+          <a:xfrm>
+            <a:off x="6035040" y="1691640"/>
+            <a:ext cx="2743200" cy="36576"/>
+          </a:xfrm>
+          <a:prstGeom prst="rect">
+            <a:avLst/>
+          </a:prstGeom>
+          <a:solidFill>
+            <a:srgbClr val="2196F3"/>
+          </a:solidFill>
+          <a:ln/>
+        </p:spPr>
+      </p:sp>
+      <p:sp>
+        <p:nvSpPr>
+          <p:cNvPr id="26" name="Text 24"/>
+          <p:cNvSpPr/>
+          <p:nvPr/>
+        </p:nvSpPr>
+        <p:spPr>
+          <a:xfrm>
+            <a:off x="6126480" y="1764792"/>
+            <a:ext cx="2560320" cy="228600"/>
+          </a:xfrm>
+          <a:prstGeom prst="rect">
+            <a:avLst/>
+          </a:prstGeom>
+          <a:noFill/>
+          <a:ln/>
+        </p:spPr>
+        <p:txBody>
+          <a:bodyPr wrap="square" lIns="0" tIns="0" rIns="0" bIns="0" rtlCol="0" anchor="ctr"/>
+          <a:lstStyle/>
+          <a:p>
+            <a:pPr indent="0" marL="0">
+              <a:buNone/>
+            </a:pPr>
+            <a:r>
+              <a:rPr lang="en-US" sz="900" b="1" dirty="0">
+                <a:solidFill>
+                  <a:srgbClr val="2196F3"/>
+                </a:solidFill>
+                <a:latin typeface="Arial" pitchFamily="34" charset="0"/>
+                <a:ea typeface="Arial" pitchFamily="34" charset="-122"/>
+                <a:cs typeface="Arial" pitchFamily="34" charset="-120"/>
+              </a:rPr>
+              <a:t>Phase 3: 中期施策（3-6ヶ月）</a:t>
+            </a:r>
+            <a:endParaRPr lang="en-US" sz="900" dirty="0"/>
+          </a:p>
+        </p:txBody>
+      </p:sp>
+      <p:sp>
+        <p:nvSpPr>
+          <p:cNvPr id="27" name="Text 25"/>
+          <p:cNvSpPr/>
+          <p:nvPr/>
+        </p:nvSpPr>
+        <p:spPr>
+          <a:xfrm>
+            <a:off x="6126480" y="2039112"/>
+            <a:ext cx="2560320" cy="2286000"/>
+          </a:xfrm>
+          <a:prstGeom prst="rect">
+            <a:avLst/>
+          </a:prstGeom>
+          <a:noFill/>
+          <a:ln/>
+        </p:spPr>
+        <p:txBody>
+          <a:bodyPr wrap="square" lIns="0" tIns="0" rIns="0" bIns="0" rtlCol="0" anchor="t"/>
+          <a:lstStyle/>
+          <a:p>
+            <a:pPr indent="0" marL="0">
+              <a:buNone/>
+            </a:pPr>
+            <a:r>
+              <a:rPr lang="en-US" sz="700" dirty="0">
+                <a:solidFill>
+                  <a:srgbClr val="333333"/>
+                </a:solidFill>
+                <a:latin typeface="Arial" pitchFamily="34" charset="0"/>
+                <a:ea typeface="Arial" pitchFamily="34" charset="-122"/>
+                <a:cs typeface="Arial" pitchFamily="34" charset="-120"/>
+              </a:rPr>
+              <a:t>- 清掃スタッフの定期研修プログラム導入</a:t>
+            </a:r>
+            <a:endParaRPr lang="en-US" sz="700" dirty="0"/>
+          </a:p>
+          <a:p>
+            <a:pPr indent="0" marL="0">
+              <a:buNone/>
+            </a:pPr>
+            <a:r>
+              <a:rPr lang="en-US" sz="700" dirty="0">
+                <a:solidFill>
+                  <a:srgbClr val="333333"/>
+                </a:solidFill>
+                <a:latin typeface="Arial" pitchFamily="34" charset="0"/>
+                <a:ea typeface="Arial" pitchFamily="34" charset="-122"/>
+                <a:cs typeface="Arial" pitchFamily="34" charset="-120"/>
+              </a:rPr>
+              <a:t>- デジタル清掃記録システムの検討</a:t>
+            </a:r>
+            <a:endParaRPr lang="en-US" sz="700" dirty="0"/>
+          </a:p>
+          <a:p>
+            <a:pPr indent="0" marL="0">
+              <a:buNone/>
+            </a:pPr>
+            <a:r>
+              <a:rPr lang="en-US" sz="700" dirty="0">
+                <a:solidFill>
+                  <a:srgbClr val="333333"/>
+                </a:solidFill>
+                <a:latin typeface="Arial" pitchFamily="34" charset="0"/>
+                <a:ea typeface="Arial" pitchFamily="34" charset="-122"/>
+                <a:cs typeface="Arial" pitchFamily="34" charset="-120"/>
+              </a:rPr>
+              <a:t>- 排水管の老朽化調査と更新計画の策定</a:t>
+            </a:r>
+            <a:endParaRPr lang="en-US" sz="700" dirty="0"/>
+          </a:p>
+          <a:p>
+            <a:pPr indent="0" marL="0">
+              <a:buNone/>
+            </a:pPr>
+            <a:r>
+              <a:rPr lang="en-US" sz="700" dirty="0">
+                <a:solidFill>
+                  <a:srgbClr val="333333"/>
+                </a:solidFill>
+                <a:latin typeface="Arial" pitchFamily="34" charset="0"/>
+                <a:ea typeface="Arial" pitchFamily="34" charset="-122"/>
+                <a:cs typeface="Arial" pitchFamily="34" charset="-120"/>
+              </a:rPr>
+              <a:t>- 高耐久・防汚カーペットへの段階的張替え提案</a:t>
+            </a:r>
+            <a:endParaRPr lang="en-US" sz="700" dirty="0"/>
+          </a:p>
+          <a:p>
+            <a:pPr indent="0" marL="0">
+              <a:buNone/>
+            </a:pPr>
+            <a:r>
+              <a:rPr lang="en-US" sz="700" dirty="0">
+                <a:solidFill>
+                  <a:srgbClr val="333333"/>
+                </a:solidFill>
+                <a:latin typeface="Arial" pitchFamily="34" charset="0"/>
+                <a:ea typeface="Arial" pitchFamily="34" charset="-122"/>
+                <a:cs typeface="Arial" pitchFamily="34" charset="-120"/>
+              </a:rPr>
+              <a:t>- オゾン脱臭機の導入検討</a:t>
+            </a:r>
+            <a:endParaRPr lang="en-US" sz="700" dirty="0"/>
+          </a:p>
+        </p:txBody>
+      </p:sp>
+      <p:sp>
+        <p:nvSpPr>
+          <p:cNvPr id="28" name="Shape 26"/>
+          <p:cNvSpPr/>
+          <p:nvPr/>
+        </p:nvSpPr>
+        <p:spPr>
+          <a:xfrm>
+            <a:off x="0" y="4800600"/>
+            <a:ext cx="9144000" cy="342900"/>
+          </a:xfrm>
+          <a:prstGeom prst="rect">
+            <a:avLst/>
+          </a:prstGeom>
+          <a:solidFill>
+            <a:srgbClr val="1B3A5C"/>
+          </a:solidFill>
+          <a:ln/>
+        </p:spPr>
+      </p:sp>
+      <p:sp>
+        <p:nvSpPr>
+          <p:cNvPr id="29" name="Text 27"/>
+          <p:cNvSpPr/>
+          <p:nvPr/>
+        </p:nvSpPr>
+        <p:spPr>
+          <a:xfrm>
+            <a:off x="457200" y="4800600"/>
+            <a:ext cx="3657600" cy="342900"/>
+          </a:xfrm>
+          <a:prstGeom prst="rect">
+            <a:avLst/>
+          </a:prstGeom>
+          <a:noFill/>
+          <a:ln/>
+        </p:spPr>
+        <p:txBody>
+          <a:bodyPr wrap="square" rtlCol="0" anchor="ctr"/>
+          <a:lstStyle/>
+          <a:p>
+            <a:pPr indent="0" marL="0">
+              <a:buNone/>
+            </a:pPr>
+            <a:r>
+              <a:rPr lang="en-US" sz="800" dirty="0">
+                <a:solidFill>
+                  <a:srgbClr val="94A3B8"/>
+                </a:solidFill>
+                <a:latin typeface="Arial" pitchFamily="34" charset="0"/>
+                <a:ea typeface="Arial" pitchFamily="34" charset="-122"/>
+                <a:cs typeface="Arial" pitchFamily="34" charset="-120"/>
+              </a:rPr>
+              <a:t>Confidential | PRIMECHANGE</a:t>
+            </a:r>
+            <a:endParaRPr lang="en-US" sz="800" dirty="0"/>
+          </a:p>
+        </p:txBody>
+      </p:sp>
+      <p:sp>
+        <p:nvSpPr>
+          <p:cNvPr id="30" name="Text 28"/>
+          <p:cNvSpPr/>
+          <p:nvPr/>
+        </p:nvSpPr>
+        <p:spPr>
+          <a:xfrm>
+            <a:off x="8229600" y="4800600"/>
+            <a:ext cx="457200" cy="342900"/>
+          </a:xfrm>
+          <a:prstGeom prst="rect">
+            <a:avLst/>
+          </a:prstGeom>
+          <a:noFill/>
+          <a:ln/>
+        </p:spPr>
+        <p:txBody>
+          <a:bodyPr wrap="square" rtlCol="0" anchor="ctr"/>
+          <a:lstStyle/>
+          <a:p>
+            <a:pPr algn="r" indent="0" marL="0">
+              <a:buNone/>
+            </a:pPr>
+            <a:r>
+              <a:rPr lang="en-US" sz="800" dirty="0">
+                <a:solidFill>
+                  <a:srgbClr val="94A3B8"/>
+                </a:solidFill>
+                <a:latin typeface="Arial" pitchFamily="34" charset="0"/>
+                <a:ea typeface="Arial" pitchFamily="34" charset="-122"/>
+                <a:cs typeface="Arial" pitchFamily="34" charset="-120"/>
+              </a:rPr>
               <a:t>11</a:t>
             </a:r>
             <a:endParaRPr lang="en-US" sz="800" dirty="0"/>
@@ -5401,7 +5401,7 @@
                 <a:ea typeface="Arial" pitchFamily="34" charset="-122"/>
                 <a:cs typeface="Arial" pitchFamily="34" charset="-120"/>
               </a:rPr>
-              <a:t>対象：3ホテル</a:t>
+              <a:t>対象：2ホテル</a:t>
             </a:r>
             <a:endParaRPr lang="en-US" sz="1000" dirty="0"/>
           </a:p>
@@ -5889,243 +5889,6 @@
         </p:nvSpPr>
         <p:spPr>
           <a:xfrm>
-            <a:off x="274320" y="3383280"/>
-            <a:ext cx="8595360" cy="1188720"/>
-          </a:xfrm>
-          <a:prstGeom prst="rect">
-            <a:avLst/>
-          </a:prstGeom>
-          <a:solidFill>
-            <a:srgbClr val="FFF3E0"/>
-          </a:solidFill>
-          <a:ln/>
-          <a:effectLst>
-            <a:outerShdw sx="100000" sy="100000" kx="0" ky="0" algn="bl" rotWithShape="0" blurRad="50800" dist="25400" dir="8100000">
-              <a:srgbClr val="000000">
-                <a:alpha val="10000"/>
-              </a:srgbClr>
-            </a:outerShdw>
-          </a:effectLst>
-        </p:spPr>
-      </p:sp>
-      <p:sp>
-        <p:nvSpPr>
-          <p:cNvPr id="18" name="Shape 16"/>
-          <p:cNvSpPr/>
-          <p:nvPr/>
-        </p:nvSpPr>
-        <p:spPr>
-          <a:xfrm>
-            <a:off x="274320" y="3383280"/>
-            <a:ext cx="8595360" cy="36576"/>
-          </a:xfrm>
-          <a:prstGeom prst="rect">
-            <a:avLst/>
-          </a:prstGeom>
-          <a:solidFill>
-            <a:srgbClr val="FF9800"/>
-          </a:solidFill>
-          <a:ln/>
-        </p:spPr>
-      </p:sp>
-      <p:sp>
-        <p:nvSpPr>
-          <p:cNvPr id="19" name="Text 17"/>
-          <p:cNvSpPr/>
-          <p:nvPr/>
-        </p:nvSpPr>
-        <p:spPr>
-          <a:xfrm>
-            <a:off x="457200" y="3456432"/>
-            <a:ext cx="3657600" cy="228600"/>
-          </a:xfrm>
-          <a:prstGeom prst="rect">
-            <a:avLst/>
-          </a:prstGeom>
-          <a:noFill/>
-          <a:ln/>
-        </p:spPr>
-        <p:txBody>
-          <a:bodyPr wrap="square" lIns="0" tIns="0" rIns="0" bIns="0" rtlCol="0" anchor="ctr"/>
-          <a:lstStyle/>
-          <a:p>
-            <a:pPr indent="0" marL="0">
-              <a:buNone/>
-            </a:pPr>
-            <a:r>
-              <a:rPr lang="en-US" sz="1200" b="1" dirty="0">
-                <a:solidFill>
-                  <a:srgbClr val="1B3A5C"/>
-                </a:solidFill>
-                <a:latin typeface="Arial" pitchFamily="34" charset="0"/>
-                <a:ea typeface="Arial" pitchFamily="34" charset="-122"/>
-                <a:cs typeface="Arial" pitchFamily="34" charset="-120"/>
-              </a:rPr>
-              <a:t>ダイワロイネットホテル東京大崎</a:t>
-            </a:r>
-            <a:endParaRPr lang="en-US" sz="1200" dirty="0"/>
-          </a:p>
-        </p:txBody>
-      </p:sp>
-      <p:sp>
-        <p:nvSpPr>
-          <p:cNvPr id="20" name="Text 18"/>
-          <p:cNvSpPr/>
-          <p:nvPr/>
-        </p:nvSpPr>
-        <p:spPr>
-          <a:xfrm>
-            <a:off x="4572000" y="3456432"/>
-            <a:ext cx="2743200" cy="228600"/>
-          </a:xfrm>
-          <a:prstGeom prst="rect">
-            <a:avLst/>
-          </a:prstGeom>
-          <a:noFill/>
-          <a:ln/>
-        </p:spPr>
-        <p:txBody>
-          <a:bodyPr wrap="square" lIns="0" tIns="0" rIns="0" bIns="0" rtlCol="0" anchor="ctr"/>
-          <a:lstStyle/>
-          <a:p>
-            <a:pPr indent="0" marL="0">
-              <a:buNone/>
-            </a:pPr>
-            <a:r>
-              <a:rPr lang="en-US" sz="1100" b="1" dirty="0">
-                <a:solidFill>
-                  <a:srgbClr val="27AE60"/>
-                </a:solidFill>
-                <a:latin typeface="Arial" pitchFamily="34" charset="0"/>
-                <a:ea typeface="Arial" pitchFamily="34" charset="-122"/>
-                <a:cs typeface="Arial" pitchFamily="34" charset="-120"/>
-              </a:rPr>
-              <a:t>8.85点 → 9.2点</a:t>
-            </a:r>
-            <a:endParaRPr lang="en-US" sz="1100" dirty="0"/>
-          </a:p>
-        </p:txBody>
-      </p:sp>
-      <p:sp>
-        <p:nvSpPr>
-          <p:cNvPr id="21" name="Text 19"/>
-          <p:cNvSpPr/>
-          <p:nvPr/>
-        </p:nvSpPr>
-        <p:spPr>
-          <a:xfrm>
-            <a:off x="457200" y="3703320"/>
-            <a:ext cx="7315200" cy="182880"/>
-          </a:xfrm>
-          <a:prstGeom prst="rect">
-            <a:avLst/>
-          </a:prstGeom>
-          <a:noFill/>
-          <a:ln/>
-        </p:spPr>
-        <p:txBody>
-          <a:bodyPr wrap="square" lIns="0" tIns="0" rIns="0" bIns="0" rtlCol="0" anchor="ctr"/>
-          <a:lstStyle/>
-          <a:p>
-            <a:pPr indent="0" marL="0">
-              <a:buNone/>
-            </a:pPr>
-            <a:r>
-              <a:rPr lang="en-US" sz="900" dirty="0">
-                <a:solidFill>
-                  <a:srgbClr val="666666"/>
-                </a:solidFill>
-                <a:latin typeface="Arial" pitchFamily="34" charset="0"/>
-                <a:ea typeface="Arial" pitchFamily="34" charset="-122"/>
-                <a:cs typeface="Arial" pitchFamily="34" charset="-120"/>
-              </a:rPr>
-              <a:t>主要課題：清掃品質全般(3件)、シミ・汚れ跡(2件)、害虫(2件)</a:t>
-            </a:r>
-            <a:endParaRPr lang="en-US" sz="900" dirty="0"/>
-          </a:p>
-        </p:txBody>
-      </p:sp>
-      <p:sp>
-        <p:nvSpPr>
-          <p:cNvPr id="22" name="Text 20"/>
-          <p:cNvSpPr/>
-          <p:nvPr/>
-        </p:nvSpPr>
-        <p:spPr>
-          <a:xfrm>
-            <a:off x="457200" y="3931920"/>
-            <a:ext cx="7772400" cy="594360"/>
-          </a:xfrm>
-          <a:prstGeom prst="rect">
-            <a:avLst/>
-          </a:prstGeom>
-          <a:noFill/>
-          <a:ln/>
-        </p:spPr>
-        <p:txBody>
-          <a:bodyPr wrap="square" lIns="0" tIns="0" rIns="0" bIns="0" rtlCol="0" anchor="t"/>
-          <a:lstStyle/>
-          <a:p>
-            <a:pPr indent="0" marL="0">
-              <a:buNone/>
-            </a:pPr>
-            <a:r>
-              <a:rPr lang="en-US" sz="800" dirty="0">
-                <a:solidFill>
-                  <a:srgbClr val="333333"/>
-                </a:solidFill>
-                <a:latin typeface="Arial" pitchFamily="34" charset="0"/>
-                <a:ea typeface="Arial" pitchFamily="34" charset="-122"/>
-                <a:cs typeface="Arial" pitchFamily="34" charset="-120"/>
-              </a:rPr>
-              <a:t>- 清掃品質基準の明確化と全スタッフへの共有</a:t>
-            </a:r>
-            <a:endParaRPr lang="en-US" sz="800" dirty="0"/>
-          </a:p>
-          <a:p>
-            <a:pPr indent="0" marL="0">
-              <a:buNone/>
-            </a:pPr>
-            <a:r>
-              <a:rPr lang="en-US" sz="800" dirty="0">
-                <a:solidFill>
-                  <a:srgbClr val="333333"/>
-                </a:solidFill>
-                <a:latin typeface="Arial" pitchFamily="34" charset="0"/>
-                <a:ea typeface="Arial" pitchFamily="34" charset="-122"/>
-                <a:cs typeface="Arial" pitchFamily="34" charset="-120"/>
-              </a:rPr>
-              <a:t>- 重点箇所（水回り・ベッド周り）の清掃手順見直し</a:t>
-            </a:r>
-            <a:endParaRPr lang="en-US" sz="800" dirty="0"/>
-          </a:p>
-          <a:p>
-            <a:pPr indent="0" marL="0">
-              <a:buNone/>
-            </a:pPr>
-            <a:r>
-              <a:rPr lang="en-US" sz="800" dirty="0">
-                <a:solidFill>
-                  <a:srgbClr val="333333"/>
-                </a:solidFill>
-                <a:latin typeface="Arial" pitchFamily="34" charset="0"/>
-                <a:ea typeface="Arial" pitchFamily="34" charset="-122"/>
-                <a:cs typeface="Arial" pitchFamily="34" charset="-120"/>
-              </a:rPr>
-              <a:t>- シミ箇所の特定と専用クリーナーによる除去</a:t>
-            </a:r>
-            <a:endParaRPr lang="en-US" sz="800" dirty="0"/>
-          </a:p>
-        </p:txBody>
-      </p:sp>
-      <p:sp>
-        <p:nvSpPr>
-          <p:cNvPr id="23" name="Shape 21"/>
-          <p:cNvSpPr/>
-          <p:nvPr/>
-        </p:nvSpPr>
-        <p:spPr>
-          <a:xfrm>
             <a:off x="0" y="4800600"/>
             <a:ext cx="9144000" cy="342900"/>
           </a:xfrm>
@@ -6140,7 +5903,7 @@
       </p:sp>
       <p:sp>
         <p:nvSpPr>
-          <p:cNvPr id="24" name="Text 22"/>
+          <p:cNvPr id="18" name="Text 16"/>
           <p:cNvSpPr/>
           <p:nvPr/>
         </p:nvSpPr>
@@ -6179,7 +5942,7 @@
       </p:sp>
       <p:sp>
         <p:nvSpPr>
-          <p:cNvPr id="25" name="Text 23"/>
+          <p:cNvPr id="19" name="Text 17"/>
           <p:cNvSpPr/>
           <p:nvPr/>
         </p:nvSpPr>
@@ -7185,294 +6948,6 @@
                     </a:lnB>
                     <a:solidFill>
                       <a:srgbClr val="F5F7FA"/>
-                    </a:solidFill>
-                  </a:tcPr>
-                </a:tc>
-              </a:tr>
-              <a:tr h="0">
-                <a:tc>
-                  <a:txBody>
-                    <a:bodyPr/>
-                    <a:lstStyle/>
-                    <a:p>
-                      <a:pPr indent="0" marL="0">
-                        <a:buNone/>
-                      </a:pPr>
-                      <a:r>
-                        <a:rPr lang="en-US" sz="700" b="1" dirty="0">
-                          <a:solidFill>
-                            <a:srgbClr val="000000"/>
-                          </a:solidFill>
-                        </a:rPr>
-                        <a:t>ダイワロイネットホテル東京大崎</a:t>
-                      </a:r>
-                      <a:endParaRPr lang="en-US" sz="700" dirty="0"/>
-                    </a:p>
-                  </a:txBody>
-                  <a:tcPr marL="91440" marR="91440" marT="45720" marB="45720">
-                    <a:lnL w="6350" cap="flat" cmpd="sng" algn="ctr">
-                      <a:solidFill>
-                        <a:srgbClr val="CCCCCC"/>
-                      </a:solidFill>
-                      <a:prstDash val="solid"/>
-                      <a:round/>
-                      <a:headEnd type="none" w="med" len="med"/>
-                      <a:tailEnd type="none" w="med" len="med"/>
-                    </a:lnL>
-                    <a:lnR w="6350" cap="flat" cmpd="sng" algn="ctr">
-                      <a:solidFill>
-                        <a:srgbClr val="CCCCCC"/>
-                      </a:solidFill>
-                      <a:prstDash val="solid"/>
-                      <a:round/>
-                      <a:headEnd type="none" w="med" len="med"/>
-                      <a:tailEnd type="none" w="med" len="med"/>
-                    </a:lnR>
-                    <a:lnT w="6350" cap="flat" cmpd="sng" algn="ctr">
-                      <a:solidFill>
-                        <a:srgbClr val="CCCCCC"/>
-                      </a:solidFill>
-                      <a:prstDash val="solid"/>
-                      <a:round/>
-                      <a:headEnd type="none" w="med" len="med"/>
-                      <a:tailEnd type="none" w="med" len="med"/>
-                    </a:lnT>
-                    <a:lnB w="6350" cap="flat" cmpd="sng" algn="ctr">
-                      <a:solidFill>
-                        <a:srgbClr val="CCCCCC"/>
-                      </a:solidFill>
-                      <a:prstDash val="solid"/>
-                      <a:round/>
-                      <a:headEnd type="none" w="med" len="med"/>
-                      <a:tailEnd type="none" w="med" len="med"/>
-                    </a:lnB>
-                    <a:solidFill>
-                      <a:srgbClr val="FFFFFF"/>
-                    </a:solidFill>
-                  </a:tcPr>
-                </a:tc>
-                <a:tc>
-                  <a:txBody>
-                    <a:bodyPr/>
-                    <a:lstStyle/>
-                    <a:p>
-                      <a:pPr indent="0" marL="0">
-                        <a:buNone/>
-                      </a:pPr>
-                      <a:r>
-                        <a:rPr lang="en-US" sz="700" dirty="0">
-                          <a:solidFill>
-                            <a:srgbClr val="000000"/>
-                          </a:solidFill>
-                        </a:rPr>
-                        <a:t>清掃品質基準の明確化と全スタッフへの共有</a:t>
-                      </a:r>
-                      <a:endParaRPr lang="en-US" sz="700" dirty="0"/>
-                    </a:p>
-                    <a:p>
-                      <a:pPr indent="0" marL="0">
-                        <a:buNone/>
-                      </a:pPr>
-                      <a:r>
-                        <a:rPr lang="en-US" sz="700" dirty="0">
-                          <a:solidFill>
-                            <a:srgbClr val="000000"/>
-                          </a:solidFill>
-                        </a:rPr>
-                        <a:t>重点箇所（水回り・ベッド周り）の清掃手順見直し</a:t>
-                      </a:r>
-                      <a:endParaRPr lang="en-US" sz="700" dirty="0"/>
-                    </a:p>
-                  </a:txBody>
-                  <a:tcPr marL="91440" marR="91440" marT="45720" marB="45720">
-                    <a:lnL w="6350" cap="flat" cmpd="sng" algn="ctr">
-                      <a:solidFill>
-                        <a:srgbClr val="CCCCCC"/>
-                      </a:solidFill>
-                      <a:prstDash val="solid"/>
-                      <a:round/>
-                      <a:headEnd type="none" w="med" len="med"/>
-                      <a:tailEnd type="none" w="med" len="med"/>
-                    </a:lnL>
-                    <a:lnR w="6350" cap="flat" cmpd="sng" algn="ctr">
-                      <a:solidFill>
-                        <a:srgbClr val="CCCCCC"/>
-                      </a:solidFill>
-                      <a:prstDash val="solid"/>
-                      <a:round/>
-                      <a:headEnd type="none" w="med" len="med"/>
-                      <a:tailEnd type="none" w="med" len="med"/>
-                    </a:lnR>
-                    <a:lnT w="6350" cap="flat" cmpd="sng" algn="ctr">
-                      <a:solidFill>
-                        <a:srgbClr val="CCCCCC"/>
-                      </a:solidFill>
-                      <a:prstDash val="solid"/>
-                      <a:round/>
-                      <a:headEnd type="none" w="med" len="med"/>
-                      <a:tailEnd type="none" w="med" len="med"/>
-                    </a:lnT>
-                    <a:lnB w="6350" cap="flat" cmpd="sng" algn="ctr">
-                      <a:solidFill>
-                        <a:srgbClr val="CCCCCC"/>
-                      </a:solidFill>
-                      <a:prstDash val="solid"/>
-                      <a:round/>
-                      <a:headEnd type="none" w="med" len="med"/>
-                      <a:tailEnd type="none" w="med" len="med"/>
-                    </a:lnB>
-                    <a:solidFill>
-                      <a:srgbClr val="FFFFFF"/>
-                    </a:solidFill>
-                  </a:tcPr>
-                </a:tc>
-                <a:tc>
-                  <a:txBody>
-                    <a:bodyPr/>
-                    <a:lstStyle/>
-                    <a:p>
-                      <a:pPr indent="0" marL="0">
-                        <a:buNone/>
-                      </a:pPr>
-                      <a:r>
-                        <a:rPr lang="en-US" sz="700" dirty="0">
-                          <a:solidFill>
-                            <a:srgbClr val="000000"/>
-                          </a:solidFill>
-                        </a:rPr>
-                        <a:t>品質管理チェックリストの導入と実施</a:t>
-                      </a:r>
-                      <a:endParaRPr lang="en-US" sz="700" dirty="0"/>
-                    </a:p>
-                    <a:p>
-                      <a:pPr indent="0" marL="0">
-                        <a:buNone/>
-                      </a:pPr>
-                      <a:r>
-                        <a:rPr lang="en-US" sz="700" dirty="0">
-                          <a:solidFill>
-                            <a:srgbClr val="000000"/>
-                          </a:solidFill>
-                        </a:rPr>
-                        <a:t>QCインスペクション体制の構築（ランダム抜き打ち検査）</a:t>
-                      </a:r>
-                      <a:endParaRPr lang="en-US" sz="700" dirty="0"/>
-                    </a:p>
-                  </a:txBody>
-                  <a:tcPr marL="91440" marR="91440" marT="45720" marB="45720">
-                    <a:lnL w="6350" cap="flat" cmpd="sng" algn="ctr">
-                      <a:solidFill>
-                        <a:srgbClr val="CCCCCC"/>
-                      </a:solidFill>
-                      <a:prstDash val="solid"/>
-                      <a:round/>
-                      <a:headEnd type="none" w="med" len="med"/>
-                      <a:tailEnd type="none" w="med" len="med"/>
-                    </a:lnL>
-                    <a:lnR w="6350" cap="flat" cmpd="sng" algn="ctr">
-                      <a:solidFill>
-                        <a:srgbClr val="CCCCCC"/>
-                      </a:solidFill>
-                      <a:prstDash val="solid"/>
-                      <a:round/>
-                      <a:headEnd type="none" w="med" len="med"/>
-                      <a:tailEnd type="none" w="med" len="med"/>
-                    </a:lnR>
-                    <a:lnT w="6350" cap="flat" cmpd="sng" algn="ctr">
-                      <a:solidFill>
-                        <a:srgbClr val="CCCCCC"/>
-                      </a:solidFill>
-                      <a:prstDash val="solid"/>
-                      <a:round/>
-                      <a:headEnd type="none" w="med" len="med"/>
-                      <a:tailEnd type="none" w="med" len="med"/>
-                    </a:lnT>
-                    <a:lnB w="6350" cap="flat" cmpd="sng" algn="ctr">
-                      <a:solidFill>
-                        <a:srgbClr val="CCCCCC"/>
-                      </a:solidFill>
-                      <a:prstDash val="solid"/>
-                      <a:round/>
-                      <a:headEnd type="none" w="med" len="med"/>
-                      <a:tailEnd type="none" w="med" len="med"/>
-                    </a:lnB>
-                    <a:solidFill>
-                      <a:srgbClr val="FFFFFF"/>
-                    </a:solidFill>
-                  </a:tcPr>
-                </a:tc>
-                <a:tc>
-                  <a:txBody>
-                    <a:bodyPr/>
-                    <a:lstStyle/>
-                    <a:p>
-                      <a:pPr indent="0" marL="0">
-                        <a:buNone/>
-                      </a:pPr>
-                      <a:r>
-                        <a:rPr lang="en-US" sz="700" dirty="0">
-                          <a:solidFill>
-                            <a:srgbClr val="000000"/>
-                          </a:solidFill>
-                        </a:rPr>
-                        <a:t>清掃スタッフの定期研修プログラム導入</a:t>
-                      </a:r>
-                      <a:endParaRPr lang="en-US" sz="700" dirty="0"/>
-                    </a:p>
-                    <a:p>
-                      <a:pPr indent="0" marL="0">
-                        <a:buNone/>
-                      </a:pPr>
-                      <a:r>
-                        <a:rPr lang="en-US" sz="700" dirty="0">
-                          <a:solidFill>
-                            <a:srgbClr val="000000"/>
-                          </a:solidFill>
-                        </a:rPr>
-                        <a:t>デジタル清掃記録システムの検討</a:t>
-                      </a:r>
-                      <a:endParaRPr lang="en-US" sz="700" dirty="0"/>
-                    </a:p>
-                  </a:txBody>
-                  <a:tcPr marL="91440" marR="91440" marT="45720" marB="45720">
-                    <a:lnL w="6350" cap="flat" cmpd="sng" algn="ctr">
-                      <a:solidFill>
-                        <a:srgbClr val="CCCCCC"/>
-                      </a:solidFill>
-                      <a:prstDash val="solid"/>
-                      <a:round/>
-                      <a:headEnd type="none" w="med" len="med"/>
-                      <a:tailEnd type="none" w="med" len="med"/>
-                    </a:lnL>
-                    <a:lnR w="6350" cap="flat" cmpd="sng" algn="ctr">
-                      <a:solidFill>
-                        <a:srgbClr val="CCCCCC"/>
-                      </a:solidFill>
-                      <a:prstDash val="solid"/>
-                      <a:round/>
-                      <a:headEnd type="none" w="med" len="med"/>
-                      <a:tailEnd type="none" w="med" len="med"/>
-                    </a:lnR>
-                    <a:lnT w="6350" cap="flat" cmpd="sng" algn="ctr">
-                      <a:solidFill>
-                        <a:srgbClr val="CCCCCC"/>
-                      </a:solidFill>
-                      <a:prstDash val="solid"/>
-                      <a:round/>
-                      <a:headEnd type="none" w="med" len="med"/>
-                      <a:tailEnd type="none" w="med" len="med"/>
-                    </a:lnT>
-                    <a:lnB w="6350" cap="flat" cmpd="sng" algn="ctr">
-                      <a:solidFill>
-                        <a:srgbClr val="CCCCCC"/>
-                      </a:solidFill>
-                      <a:prstDash val="solid"/>
-                      <a:round/>
-                      <a:headEnd type="none" w="med" len="med"/>
-                      <a:tailEnd type="none" w="med" len="med"/>
-                    </a:lnB>
-                    <a:solidFill>
-                      <a:srgbClr val="FFFFFF"/>
                     </a:solidFill>
                   </a:tcPr>
                 </a:tc>
@@ -10050,7 +9525,7 @@
                             <a:srgbClr val="000000"/>
                           </a:solidFill>
                         </a:rPr>
-                        <a:t>4.4%</a:t>
+                        <a:t>4.3%</a:t>
                       </a:r>
                       <a:endParaRPr lang="en-US" sz="800" dirty="0"/>
                     </a:p>
@@ -10111,7 +9586,7 @@
                             <a:srgbClr val="27AE60"/>
                           </a:solidFill>
                         </a:rPr>
-                        <a:t>1.8%以下</a:t>
+                        <a:t>1.7%以下</a:t>
                       </a:r>
                       <a:endParaRPr lang="en-US" sz="800" dirty="0"/>
                     </a:p>
@@ -10296,7 +9771,7 @@
                             <a:srgbClr val="000000"/>
                           </a:solidFill>
                         </a:rPr>
-                        <a:t>78.8%</a:t>
+                        <a:t>78.7%</a:t>
                       </a:r>
                       <a:endParaRPr lang="en-US" sz="800" dirty="0"/>
                     </a:p>
@@ -10357,7 +9832,7 @@
                             <a:srgbClr val="27AE60"/>
                           </a:solidFill>
                         </a:rPr>
-                        <a:t>83.8%以上</a:t>
+                        <a:t>83.7%以上</a:t>
                       </a:r>
                       <a:endParaRPr lang="en-US" sz="800" dirty="0"/>
                     </a:p>
@@ -11658,7 +11133,7 @@
                             <a:srgbClr val="000000"/>
                           </a:solidFill>
                         </a:rPr>
-                        <a:t>7.83</a:t>
+                        <a:t>7.88</a:t>
                       </a:r>
                       <a:endParaRPr lang="en-US" sz="700" dirty="0"/>
                     </a:p>
@@ -11719,7 +11194,7 @@
                             <a:srgbClr val="27AE60"/>
                           </a:solidFill>
                         </a:rPr>
-                        <a:t>8.30</a:t>
+                        <a:t>8.40</a:t>
                       </a:r>
                       <a:endParaRPr lang="en-US" sz="700" dirty="0"/>
                     </a:p>
@@ -12026,7 +11501,7 @@
                             <a:srgbClr val="000000"/>
                           </a:solidFill>
                         </a:rPr>
-                        <a:t>7.43</a:t>
+                        <a:t>7.46</a:t>
                       </a:r>
                       <a:endParaRPr lang="en-US" sz="700" dirty="0"/>
                     </a:p>
@@ -12087,7 +11562,7 @@
                             <a:srgbClr val="27AE60"/>
                           </a:solidFill>
                         </a:rPr>
-                        <a:t>7.90</a:t>
+                        <a:t>8.00</a:t>
                       </a:r>
                       <a:endParaRPr lang="en-US" sz="700" dirty="0"/>
                     </a:p>
@@ -12148,7 +11623,7 @@
                             <a:srgbClr val="000000"/>
                           </a:solidFill>
                         </a:rPr>
-                        <a:t>9.8%</a:t>
+                        <a:t>9.1%</a:t>
                       </a:r>
                       <a:endParaRPr lang="en-US" sz="700" dirty="0"/>
                     </a:p>
@@ -12209,7 +11684,7 @@
                             <a:srgbClr val="27AE60"/>
                           </a:solidFill>
                         </a:rPr>
-                        <a:t>2.9%</a:t>
+                        <a:t>2.7%</a:t>
                       </a:r>
                       <a:endParaRPr lang="en-US" sz="700" dirty="0"/>
                     </a:p>
@@ -12272,7 +11747,7 @@
                             <a:srgbClr val="000000"/>
                           </a:solidFill>
                         </a:rPr>
-                        <a:t>チサンホテル浜松町</a:t>
+                        <a:t>コートホテル新横浜</a:t>
                       </a:r>
                       <a:endParaRPr lang="en-US" sz="700" dirty="0"/>
                     </a:p>
@@ -12516,7 +11991,7 @@
                             <a:srgbClr val="000000"/>
                           </a:solidFill>
                         </a:rPr>
-                        <a:t>8.8%</a:t>
+                        <a:t>8.5%</a:t>
                       </a:r>
                       <a:endParaRPr lang="en-US" sz="700" dirty="0"/>
                     </a:p>
@@ -12577,7 +12052,7 @@
                             <a:srgbClr val="27AE60"/>
                           </a:solidFill>
                         </a:rPr>
-                        <a:t>2.6%</a:t>
+                        <a:t>2.5%</a:t>
                       </a:r>
                       <a:endParaRPr lang="en-US" sz="700" dirty="0"/>
                     </a:p>
@@ -12640,7 +12115,7 @@
                             <a:srgbClr val="000000"/>
                           </a:solidFill>
                         </a:rPr>
-                        <a:t>コートホテル新横浜</a:t>
+                        <a:t>チサンホテル浜松町</a:t>
                       </a:r>
                       <a:endParaRPr lang="en-US" sz="700" dirty="0"/>
                     </a:p>
@@ -12762,7 +12237,7 @@
                             <a:srgbClr val="000000"/>
                           </a:solidFill>
                         </a:rPr>
-                        <a:t>7.12</a:t>
+                        <a:t>7.04</a:t>
                       </a:r>
                       <a:endParaRPr lang="en-US" sz="700" dirty="0"/>
                     </a:p>
@@ -12823,7 +12298,7 @@
                             <a:srgbClr val="27AE60"/>
                           </a:solidFill>
                         </a:rPr>
-                        <a:t>7.60</a:t>
+                        <a:t>7.50</a:t>
                       </a:r>
                       <a:endParaRPr lang="en-US" sz="700" dirty="0"/>
                     </a:p>
@@ -12884,7 +12359,7 @@
                             <a:srgbClr val="000000"/>
                           </a:solidFill>
                         </a:rPr>
-                        <a:t>8.5%</a:t>
+                        <a:t>8.4%</a:t>
                       </a:r>
                       <a:endParaRPr lang="en-US" sz="700" dirty="0"/>
                     </a:p>
@@ -13252,7 +12727,7 @@
                             <a:srgbClr val="000000"/>
                           </a:solidFill>
                         </a:rPr>
-                        <a:t>6.5%</a:t>
+                        <a:t>6.2%</a:t>
                       </a:r>
                       <a:endParaRPr lang="en-US" sz="700" dirty="0"/>
                     </a:p>
@@ -13725,374 +13200,6 @@
                     </a:lnB>
                     <a:solidFill>
                       <a:srgbClr val="FFFFFF"/>
-                    </a:solidFill>
-                  </a:tcPr>
-                </a:tc>
-              </a:tr>
-              <a:tr h="0">
-                <a:tc>
-                  <a:txBody>
-                    <a:bodyPr/>
-                    <a:lstStyle/>
-                    <a:p>
-                      <a:pPr indent="0" marL="0">
-                        <a:buNone/>
-                      </a:pPr>
-                      <a:r>
-                        <a:rPr lang="en-US" sz="700" b="1" dirty="0">
-                          <a:solidFill>
-                            <a:srgbClr val="000000"/>
-                          </a:solidFill>
-                        </a:rPr>
-                        <a:t>ダイワロイネットホテル東京大崎</a:t>
-                      </a:r>
-                      <a:endParaRPr lang="en-US" sz="700" dirty="0"/>
-                    </a:p>
-                  </a:txBody>
-                  <a:tcPr marL="91440" marR="91440" marT="45720" marB="45720">
-                    <a:lnL w="6350" cap="flat" cmpd="sng" algn="ctr">
-                      <a:solidFill>
-                        <a:srgbClr val="CCCCCC"/>
-                      </a:solidFill>
-                      <a:prstDash val="solid"/>
-                      <a:round/>
-                      <a:headEnd type="none" w="med" len="med"/>
-                      <a:tailEnd type="none" w="med" len="med"/>
-                    </a:lnL>
-                    <a:lnR w="6350" cap="flat" cmpd="sng" algn="ctr">
-                      <a:solidFill>
-                        <a:srgbClr val="CCCCCC"/>
-                      </a:solidFill>
-                      <a:prstDash val="solid"/>
-                      <a:round/>
-                      <a:headEnd type="none" w="med" len="med"/>
-                      <a:tailEnd type="none" w="med" len="med"/>
-                    </a:lnR>
-                    <a:lnT w="6350" cap="flat" cmpd="sng" algn="ctr">
-                      <a:solidFill>
-                        <a:srgbClr val="CCCCCC"/>
-                      </a:solidFill>
-                      <a:prstDash val="solid"/>
-                      <a:round/>
-                      <a:headEnd type="none" w="med" len="med"/>
-                      <a:tailEnd type="none" w="med" len="med"/>
-                    </a:lnT>
-                    <a:lnB w="6350" cap="flat" cmpd="sng" algn="ctr">
-                      <a:solidFill>
-                        <a:srgbClr val="CCCCCC"/>
-                      </a:solidFill>
-                      <a:prstDash val="solid"/>
-                      <a:round/>
-                      <a:headEnd type="none" w="med" len="med"/>
-                      <a:tailEnd type="none" w="med" len="med"/>
-                    </a:lnB>
-                    <a:solidFill>
-                      <a:srgbClr val="F5F7FA"/>
-                    </a:solidFill>
-                  </a:tcPr>
-                </a:tc>
-                <a:tc>
-                  <a:txBody>
-                    <a:bodyPr/>
-                    <a:lstStyle/>
-                    <a:p>
-                      <a:pPr algn="ctr" indent="0" marL="0">
-                        <a:buNone/>
-                      </a:pPr>
-                      <a:r>
-                        <a:rPr lang="en-US" sz="700" b="1" dirty="0">
-                          <a:solidFill>
-                            <a:srgbClr val="FF9800"/>
-                          </a:solidFill>
-                        </a:rPr>
-                        <a:t>HIGH</a:t>
-                      </a:r>
-                      <a:endParaRPr lang="en-US" sz="700" dirty="0"/>
-                    </a:p>
-                  </a:txBody>
-                  <a:tcPr marL="91440" marR="91440" marT="45720" marB="45720">
-                    <a:lnL w="6350" cap="flat" cmpd="sng" algn="ctr">
-                      <a:solidFill>
-                        <a:srgbClr val="CCCCCC"/>
-                      </a:solidFill>
-                      <a:prstDash val="solid"/>
-                      <a:round/>
-                      <a:headEnd type="none" w="med" len="med"/>
-                      <a:tailEnd type="none" w="med" len="med"/>
-                    </a:lnL>
-                    <a:lnR w="6350" cap="flat" cmpd="sng" algn="ctr">
-                      <a:solidFill>
-                        <a:srgbClr val="CCCCCC"/>
-                      </a:solidFill>
-                      <a:prstDash val="solid"/>
-                      <a:round/>
-                      <a:headEnd type="none" w="med" len="med"/>
-                      <a:tailEnd type="none" w="med" len="med"/>
-                    </a:lnR>
-                    <a:lnT w="6350" cap="flat" cmpd="sng" algn="ctr">
-                      <a:solidFill>
-                        <a:srgbClr val="CCCCCC"/>
-                      </a:solidFill>
-                      <a:prstDash val="solid"/>
-                      <a:round/>
-                      <a:headEnd type="none" w="med" len="med"/>
-                      <a:tailEnd type="none" w="med" len="med"/>
-                    </a:lnT>
-                    <a:lnB w="6350" cap="flat" cmpd="sng" algn="ctr">
-                      <a:solidFill>
-                        <a:srgbClr val="CCCCCC"/>
-                      </a:solidFill>
-                      <a:prstDash val="solid"/>
-                      <a:round/>
-                      <a:headEnd type="none" w="med" len="med"/>
-                      <a:tailEnd type="none" w="med" len="med"/>
-                    </a:lnB>
-                    <a:solidFill>
-                      <a:srgbClr val="FFF3E0"/>
-                    </a:solidFill>
-                  </a:tcPr>
-                </a:tc>
-                <a:tc>
-                  <a:txBody>
-                    <a:bodyPr/>
-                    <a:lstStyle/>
-                    <a:p>
-                      <a:pPr algn="ctr" indent="0" marL="0">
-                        <a:buNone/>
-                      </a:pPr>
-                      <a:r>
-                        <a:rPr lang="en-US" sz="700" dirty="0">
-                          <a:solidFill>
-                            <a:srgbClr val="000000"/>
-                          </a:solidFill>
-                        </a:rPr>
-                        <a:t>8.85</a:t>
-                      </a:r>
-                      <a:endParaRPr lang="en-US" sz="700" dirty="0"/>
-                    </a:p>
-                  </a:txBody>
-                  <a:tcPr marL="91440" marR="91440" marT="45720" marB="45720">
-                    <a:lnL w="6350" cap="flat" cmpd="sng" algn="ctr">
-                      <a:solidFill>
-                        <a:srgbClr val="CCCCCC"/>
-                      </a:solidFill>
-                      <a:prstDash val="solid"/>
-                      <a:round/>
-                      <a:headEnd type="none" w="med" len="med"/>
-                      <a:tailEnd type="none" w="med" len="med"/>
-                    </a:lnL>
-                    <a:lnR w="6350" cap="flat" cmpd="sng" algn="ctr">
-                      <a:solidFill>
-                        <a:srgbClr val="CCCCCC"/>
-                      </a:solidFill>
-                      <a:prstDash val="solid"/>
-                      <a:round/>
-                      <a:headEnd type="none" w="med" len="med"/>
-                      <a:tailEnd type="none" w="med" len="med"/>
-                    </a:lnR>
-                    <a:lnT w="6350" cap="flat" cmpd="sng" algn="ctr">
-                      <a:solidFill>
-                        <a:srgbClr val="CCCCCC"/>
-                      </a:solidFill>
-                      <a:prstDash val="solid"/>
-                      <a:round/>
-                      <a:headEnd type="none" w="med" len="med"/>
-                      <a:tailEnd type="none" w="med" len="med"/>
-                    </a:lnT>
-                    <a:lnB w="6350" cap="flat" cmpd="sng" algn="ctr">
-                      <a:solidFill>
-                        <a:srgbClr val="CCCCCC"/>
-                      </a:solidFill>
-                      <a:prstDash val="solid"/>
-                      <a:round/>
-                      <a:headEnd type="none" w="med" len="med"/>
-                      <a:tailEnd type="none" w="med" len="med"/>
-                    </a:lnB>
-                    <a:solidFill>
-                      <a:srgbClr val="F5F7FA"/>
-                    </a:solidFill>
-                  </a:tcPr>
-                </a:tc>
-                <a:tc>
-                  <a:txBody>
-                    <a:bodyPr/>
-                    <a:lstStyle/>
-                    <a:p>
-                      <a:pPr algn="ctr" indent="0" marL="0">
-                        <a:buNone/>
-                      </a:pPr>
-                      <a:r>
-                        <a:rPr lang="en-US" sz="700" b="1" dirty="0">
-                          <a:solidFill>
-                            <a:srgbClr val="27AE60"/>
-                          </a:solidFill>
-                        </a:rPr>
-                        <a:t>9.30</a:t>
-                      </a:r>
-                      <a:endParaRPr lang="en-US" sz="700" dirty="0"/>
-                    </a:p>
-                  </a:txBody>
-                  <a:tcPr marL="91440" marR="91440" marT="45720" marB="45720">
-                    <a:lnL w="6350" cap="flat" cmpd="sng" algn="ctr">
-                      <a:solidFill>
-                        <a:srgbClr val="CCCCCC"/>
-                      </a:solidFill>
-                      <a:prstDash val="solid"/>
-                      <a:round/>
-                      <a:headEnd type="none" w="med" len="med"/>
-                      <a:tailEnd type="none" w="med" len="med"/>
-                    </a:lnL>
-                    <a:lnR w="6350" cap="flat" cmpd="sng" algn="ctr">
-                      <a:solidFill>
-                        <a:srgbClr val="CCCCCC"/>
-                      </a:solidFill>
-                      <a:prstDash val="solid"/>
-                      <a:round/>
-                      <a:headEnd type="none" w="med" len="med"/>
-                      <a:tailEnd type="none" w="med" len="med"/>
-                    </a:lnR>
-                    <a:lnT w="6350" cap="flat" cmpd="sng" algn="ctr">
-                      <a:solidFill>
-                        <a:srgbClr val="CCCCCC"/>
-                      </a:solidFill>
-                      <a:prstDash val="solid"/>
-                      <a:round/>
-                      <a:headEnd type="none" w="med" len="med"/>
-                      <a:tailEnd type="none" w="med" len="med"/>
-                    </a:lnT>
-                    <a:lnB w="6350" cap="flat" cmpd="sng" algn="ctr">
-                      <a:solidFill>
-                        <a:srgbClr val="CCCCCC"/>
-                      </a:solidFill>
-                      <a:prstDash val="solid"/>
-                      <a:round/>
-                      <a:headEnd type="none" w="med" len="med"/>
-                      <a:tailEnd type="none" w="med" len="med"/>
-                    </a:lnB>
-                    <a:solidFill>
-                      <a:srgbClr val="F5F7FA"/>
-                    </a:solidFill>
-                  </a:tcPr>
-                </a:tc>
-                <a:tc>
-                  <a:txBody>
-                    <a:bodyPr/>
-                    <a:lstStyle/>
-                    <a:p>
-                      <a:pPr algn="ctr" indent="0" marL="0">
-                        <a:buNone/>
-                      </a:pPr>
-                      <a:r>
-                        <a:rPr lang="en-US" sz="700" dirty="0">
-                          <a:solidFill>
-                            <a:srgbClr val="000000"/>
-                          </a:solidFill>
-                        </a:rPr>
-                        <a:t>5.1%</a:t>
-                      </a:r>
-                      <a:endParaRPr lang="en-US" sz="700" dirty="0"/>
-                    </a:p>
-                  </a:txBody>
-                  <a:tcPr marL="91440" marR="91440" marT="45720" marB="45720">
-                    <a:lnL w="6350" cap="flat" cmpd="sng" algn="ctr">
-                      <a:solidFill>
-                        <a:srgbClr val="CCCCCC"/>
-                      </a:solidFill>
-                      <a:prstDash val="solid"/>
-                      <a:round/>
-                      <a:headEnd type="none" w="med" len="med"/>
-                      <a:tailEnd type="none" w="med" len="med"/>
-                    </a:lnL>
-                    <a:lnR w="6350" cap="flat" cmpd="sng" algn="ctr">
-                      <a:solidFill>
-                        <a:srgbClr val="CCCCCC"/>
-                      </a:solidFill>
-                      <a:prstDash val="solid"/>
-                      <a:round/>
-                      <a:headEnd type="none" w="med" len="med"/>
-                      <a:tailEnd type="none" w="med" len="med"/>
-                    </a:lnR>
-                    <a:lnT w="6350" cap="flat" cmpd="sng" algn="ctr">
-                      <a:solidFill>
-                        <a:srgbClr val="CCCCCC"/>
-                      </a:solidFill>
-                      <a:prstDash val="solid"/>
-                      <a:round/>
-                      <a:headEnd type="none" w="med" len="med"/>
-                      <a:tailEnd type="none" w="med" len="med"/>
-                    </a:lnT>
-                    <a:lnB w="6350" cap="flat" cmpd="sng" algn="ctr">
-                      <a:solidFill>
-                        <a:srgbClr val="CCCCCC"/>
-                      </a:solidFill>
-                      <a:prstDash val="solid"/>
-                      <a:round/>
-                      <a:headEnd type="none" w="med" len="med"/>
-                      <a:tailEnd type="none" w="med" len="med"/>
-                    </a:lnB>
-                    <a:solidFill>
-                      <a:srgbClr val="F5F7FA"/>
-                    </a:solidFill>
-                  </a:tcPr>
-                </a:tc>
-                <a:tc>
-                  <a:txBody>
-                    <a:bodyPr/>
-                    <a:lstStyle/>
-                    <a:p>
-                      <a:pPr algn="ctr" indent="0" marL="0">
-                        <a:buNone/>
-                      </a:pPr>
-                      <a:r>
-                        <a:rPr lang="en-US" sz="700" b="1" dirty="0">
-                          <a:solidFill>
-                            <a:srgbClr val="27AE60"/>
-                          </a:solidFill>
-                        </a:rPr>
-                        <a:t>1.5%</a:t>
-                      </a:r>
-                      <a:endParaRPr lang="en-US" sz="700" dirty="0"/>
-                    </a:p>
-                  </a:txBody>
-                  <a:tcPr marL="91440" marR="91440" marT="45720" marB="45720">
-                    <a:lnL w="6350" cap="flat" cmpd="sng" algn="ctr">
-                      <a:solidFill>
-                        <a:srgbClr val="CCCCCC"/>
-                      </a:solidFill>
-                      <a:prstDash val="solid"/>
-                      <a:round/>
-                      <a:headEnd type="none" w="med" len="med"/>
-                      <a:tailEnd type="none" w="med" len="med"/>
-                    </a:lnL>
-                    <a:lnR w="6350" cap="flat" cmpd="sng" algn="ctr">
-                      <a:solidFill>
-                        <a:srgbClr val="CCCCCC"/>
-                      </a:solidFill>
-                      <a:prstDash val="solid"/>
-                      <a:round/>
-                      <a:headEnd type="none" w="med" len="med"/>
-                      <a:tailEnd type="none" w="med" len="med"/>
-                    </a:lnR>
-                    <a:lnT w="6350" cap="flat" cmpd="sng" algn="ctr">
-                      <a:solidFill>
-                        <a:srgbClr val="CCCCCC"/>
-                      </a:solidFill>
-                      <a:prstDash val="solid"/>
-                      <a:round/>
-                      <a:headEnd type="none" w="med" len="med"/>
-                      <a:tailEnd type="none" w="med" len="med"/>
-                    </a:lnT>
-                    <a:lnB w="6350" cap="flat" cmpd="sng" algn="ctr">
-                      <a:solidFill>
-                        <a:srgbClr val="CCCCCC"/>
-                      </a:solidFill>
-                      <a:prstDash val="solid"/>
-                      <a:round/>
-                      <a:headEnd type="none" w="med" len="med"/>
-                      <a:tailEnd type="none" w="med" len="med"/>
-                    </a:lnB>
-                    <a:solidFill>
-                      <a:srgbClr val="F5F7FA"/>
                     </a:solidFill>
                   </a:tcPr>
                 </a:tc>
@@ -15164,7 +14271,7 @@
                             <a:srgbClr val="000000"/>
                           </a:solidFill>
                         </a:rPr>
-                        <a:t>8ホテル</a:t>
+                        <a:t>7ホテル</a:t>
                       </a:r>
                       <a:endParaRPr lang="en-US" sz="800" dirty="0"/>
                     </a:p>
@@ -17478,7 +16585,7 @@
                 <a:ea typeface="Arial" pitchFamily="34" charset="-122"/>
                 <a:cs typeface="Arial" pitchFamily="34" charset="-120"/>
               </a:rPr>
-              <a:t>78.8%</a:t>
+              <a:t>78.7%</a:t>
             </a:r>
             <a:endParaRPr lang="en-US" sz="2800" dirty="0"/>
           </a:p>
@@ -17603,7 +16710,7 @@
                 <a:ea typeface="Arial" pitchFamily="34" charset="-122"/>
                 <a:cs typeface="Arial" pitchFamily="34" charset="-120"/>
               </a:rPr>
-              <a:t>4.4%</a:t>
+              <a:t>4.3%</a:t>
             </a:r>
             <a:endParaRPr lang="en-US" sz="2800" dirty="0"/>
           </a:p>
@@ -17728,7 +16835,7 @@
                 <a:ea typeface="Arial" pitchFamily="34" charset="-122"/>
                 <a:cs typeface="Arial" pitchFamily="34" charset="-120"/>
               </a:rPr>
-              <a:t>2400件</a:t>
+              <a:t>2426件</a:t>
             </a:r>
             <a:endParaRPr lang="en-US" sz="2800" dirty="0"/>
           </a:p>
@@ -17852,7 +16959,7 @@
                 <a:ea typeface="Arial" pitchFamily="34" charset="-122"/>
                 <a:cs typeface="Arial" pitchFamily="34" charset="-120"/>
               </a:rPr>
-              <a:t>上位5ホテル平均8.7点超。コンフォートスイーツ東京ベイが9.21点で最高評価</a:t>
+              <a:t>上位5ホテル平均8.7点超。コンフォートスイーツ東京ベイが9.2点で最高評価</a:t>
             </a:r>
             <a:endParaRPr lang="en-US" sz="1000" dirty="0"/>
           </a:p>
@@ -17905,7 +17012,7 @@
                 <a:ea typeface="Arial" pitchFamily="34" charset="-122"/>
                 <a:cs typeface="Arial" pitchFamily="34" charset="-120"/>
               </a:rPr>
-              <a:t>5ホテルがURGENT。清掃クレーム率4.4%（業界平均2-3%超過）</a:t>
+              <a:t>5ホテルがURGENT。清掃クレーム率4.3%（業界平均2-3%超過）</a:t>
             </a:r>
             <a:endParaRPr lang="en-US" sz="1000" dirty="0"/>
           </a:p>
@@ -19370,7 +18477,7 @@
                             <a:srgbClr val="000000"/>
                           </a:solidFill>
                         </a:rPr>
-                        <a:t>9.21</a:t>
+                        <a:t>9.20</a:t>
                       </a:r>
                       <a:endParaRPr lang="en-US" sz="700" dirty="0"/>
                     </a:p>
@@ -19738,7 +18845,7 @@
                             <a:srgbClr val="000000"/>
                           </a:solidFill>
                         </a:rPr>
-                        <a:t>9.16</a:t>
+                        <a:t>9.18</a:t>
                       </a:r>
                       <a:endParaRPr lang="en-US" sz="700" dirty="0"/>
                     </a:p>
@@ -19799,7 +18906,7 @@
                             <a:srgbClr val="000000"/>
                           </a:solidFill>
                         </a:rPr>
-                        <a:t>91.4%</a:t>
+                        <a:t>91.5%</a:t>
                       </a:r>
                       <a:endParaRPr lang="en-US" sz="700" dirty="0"/>
                     </a:p>
@@ -20106,7 +19213,7 @@
                             <a:srgbClr val="000000"/>
                           </a:solidFill>
                         </a:rPr>
-                        <a:t>9.13</a:t>
+                        <a:t>9.15</a:t>
                       </a:r>
                       <a:endParaRPr lang="en-US" sz="700" dirty="0"/>
                     </a:p>
@@ -20167,7 +19274,7 @@
                             <a:srgbClr val="000000"/>
                           </a:solidFill>
                         </a:rPr>
-                        <a:t>89.9%</a:t>
+                        <a:t>90.1%</a:t>
                       </a:r>
                       <a:endParaRPr lang="en-US" sz="700" dirty="0"/>
                     </a:p>
@@ -20474,7 +19581,7 @@
                             <a:srgbClr val="000000"/>
                           </a:solidFill>
                         </a:rPr>
-                        <a:t>8.89</a:t>
+                        <a:t>8.90</a:t>
                       </a:r>
                       <a:endParaRPr lang="en-US" sz="700" dirty="0"/>
                     </a:p>
@@ -20535,7 +19642,7 @@
                             <a:srgbClr val="000000"/>
                           </a:solidFill>
                         </a:rPr>
-                        <a:t>85.4%</a:t>
+                        <a:t>86.2%</a:t>
                       </a:r>
                       <a:endParaRPr lang="en-US" sz="700" dirty="0"/>
                     </a:p>
@@ -20903,7 +20010,7 @@
                             <a:srgbClr val="000000"/>
                           </a:solidFill>
                         </a:rPr>
-                        <a:t>84.5%</a:t>
+                        <a:t>84.4%</a:t>
                       </a:r>
                       <a:endParaRPr lang="en-US" sz="700" dirty="0"/>
                     </a:p>
@@ -21210,7 +20317,7 @@
                             <a:srgbClr val="000000"/>
                           </a:solidFill>
                         </a:rPr>
-                        <a:t>8.85</a:t>
+                        <a:t>8.87</a:t>
                       </a:r>
                       <a:endParaRPr lang="en-US" sz="700" dirty="0"/>
                     </a:p>
@@ -21271,7 +20378,7 @@
                             <a:srgbClr val="000000"/>
                           </a:solidFill>
                         </a:rPr>
-                        <a:t>81.4%</a:t>
+                        <a:t>81.7%</a:t>
                       </a:r>
                       <a:endParaRPr lang="en-US" sz="700" dirty="0"/>
                     </a:p>
@@ -21329,10 +20436,10 @@
                       <a:r>
                         <a:rPr lang="en-US" sz="700" b="1" dirty="0">
                           <a:solidFill>
-                            <a:srgbClr val="FF9800"/>
+                            <a:srgbClr val="2196F3"/>
                           </a:solidFill>
                         </a:rPr>
-                        <a:t>HIGH</a:t>
+                        <a:t>STANDARD</a:t>
                       </a:r>
                       <a:endParaRPr lang="en-US" sz="700" dirty="0"/>
                     </a:p>
@@ -21375,7 +20482,7 @@
                       <a:tailEnd type="none" w="med" len="med"/>
                     </a:lnB>
                     <a:solidFill>
-                      <a:srgbClr val="FFF3E0"/>
+                      <a:srgbClr val="E3F2FD"/>
                     </a:solidFill>
                   </a:tcPr>
                 </a:tc>
@@ -21517,7 +20624,7 @@
                             <a:srgbClr val="000000"/>
                           </a:solidFill>
                         </a:rPr>
-                        <a:t>リッチモンドホテル東京目白</a:t>
+                        <a:t>ホテルケヤキゲート東京府中</a:t>
                       </a:r>
                       <a:endParaRPr lang="en-US" sz="700" dirty="0"/>
                     </a:p>
@@ -21578,7 +20685,7 @@
                             <a:srgbClr val="000000"/>
                           </a:solidFill>
                         </a:rPr>
-                        <a:t>8.72</a:t>
+                        <a:t>8.74</a:t>
                       </a:r>
                       <a:endParaRPr lang="en-US" sz="700" dirty="0"/>
                     </a:p>
@@ -21639,7 +20746,7 @@
                             <a:srgbClr val="000000"/>
                           </a:solidFill>
                         </a:rPr>
-                        <a:t>87.1%</a:t>
+                        <a:t>86.0%</a:t>
                       </a:r>
                       <a:endParaRPr lang="en-US" sz="700" dirty="0"/>
                     </a:p>
@@ -21885,7 +20992,7 @@
                             <a:srgbClr val="000000"/>
                           </a:solidFill>
                         </a:rPr>
-                        <a:t>川崎日航ホテル</a:t>
+                        <a:t>リッチモンドホテル東京目白</a:t>
                       </a:r>
                       <a:endParaRPr lang="en-US" sz="700" dirty="0"/>
                     </a:p>
@@ -22007,7 +21114,7 @@
                             <a:srgbClr val="000000"/>
                           </a:solidFill>
                         </a:rPr>
-                        <a:t>82.3%</a:t>
+                        <a:t>86.4%</a:t>
                       </a:r>
                       <a:endParaRPr lang="en-US" sz="700" dirty="0"/>
                     </a:p>
@@ -22253,7 +21360,7 @@
                             <a:srgbClr val="000000"/>
                           </a:solidFill>
                         </a:rPr>
-                        <a:t>ホテルケヤキゲート東京府中</a:t>
+                        <a:t>川崎日航ホテル</a:t>
                       </a:r>
                       <a:endParaRPr lang="en-US" sz="700" dirty="0"/>
                     </a:p>
@@ -22314,7 +21421,7 @@
                             <a:srgbClr val="000000"/>
                           </a:solidFill>
                         </a:rPr>
-                        <a:t>8.71</a:t>
+                        <a:t>8.72</a:t>
                       </a:r>
                       <a:endParaRPr lang="en-US" sz="700" dirty="0"/>
                     </a:p>
@@ -22375,7 +21482,7 @@
                             <a:srgbClr val="000000"/>
                           </a:solidFill>
                         </a:rPr>
-                        <a:t>85.7%</a:t>
+                        <a:t>82.3%</a:t>
                       </a:r>
                       <a:endParaRPr lang="en-US" sz="700" dirty="0"/>
                     </a:p>
@@ -22682,7 +21789,7 @@
                             <a:srgbClr val="000000"/>
                           </a:solidFill>
                         </a:rPr>
-                        <a:t>8.65</a:t>
+                        <a:t>8.59</a:t>
                       </a:r>
                       <a:endParaRPr lang="en-US" sz="700" dirty="0"/>
                     </a:p>
@@ -22743,7 +21850,7 @@
                             <a:srgbClr val="000000"/>
                           </a:solidFill>
                         </a:rPr>
-                        <a:t>83.3%</a:t>
+                        <a:t>82.7%</a:t>
                       </a:r>
                       <a:endParaRPr lang="en-US" sz="700" dirty="0"/>
                     </a:p>
@@ -23050,7 +22157,7 @@
                             <a:srgbClr val="000000"/>
                           </a:solidFill>
                         </a:rPr>
-                        <a:t>8.53</a:t>
+                        <a:t>8.50</a:t>
                       </a:r>
                       <a:endParaRPr lang="en-US" sz="700" dirty="0"/>
                     </a:p>
@@ -23111,7 +22218,7 @@
                             <a:srgbClr val="000000"/>
                           </a:solidFill>
                         </a:rPr>
-                        <a:t>79.9%</a:t>
+                        <a:t>79.4%</a:t>
                       </a:r>
                       <a:endParaRPr lang="en-US" sz="700" dirty="0"/>
                     </a:p>
@@ -23418,7 +22525,7 @@
                             <a:srgbClr val="000000"/>
                           </a:solidFill>
                         </a:rPr>
-                        <a:t>8.29</a:t>
+                        <a:t>8.28</a:t>
                       </a:r>
                       <a:endParaRPr lang="en-US" sz="700" dirty="0"/>
                     </a:p>
@@ -23847,7 +22954,7 @@
                             <a:srgbClr val="000000"/>
                           </a:solidFill>
                         </a:rPr>
-                        <a:t>79.8%</a:t>
+                        <a:t>79.7%</a:t>
                       </a:r>
                       <a:endParaRPr lang="en-US" sz="700" dirty="0"/>
                     </a:p>
@@ -24522,7 +23629,7 @@
                             <a:srgbClr val="000000"/>
                           </a:solidFill>
                         </a:rPr>
-                        <a:t>7.83</a:t>
+                        <a:t>7.88</a:t>
                       </a:r>
                       <a:endParaRPr lang="en-US" sz="700" dirty="0"/>
                     </a:p>
@@ -24583,7 +23690,7 @@
                             <a:srgbClr val="000000"/>
                           </a:solidFill>
                         </a:rPr>
-                        <a:t>67.6%</a:t>
+                        <a:t>68.3%</a:t>
                       </a:r>
                       <a:endParaRPr lang="en-US" sz="700" dirty="0"/>
                     </a:p>
@@ -24890,7 +23997,7 @@
                             <a:srgbClr val="000000"/>
                           </a:solidFill>
                         </a:rPr>
-                        <a:t>7.43</a:t>
+                        <a:t>7.46</a:t>
                       </a:r>
                       <a:endParaRPr lang="en-US" sz="700" dirty="0"/>
                     </a:p>
@@ -25565,7 +24672,7 @@
                             <a:srgbClr val="000000"/>
                           </a:solidFill>
                         </a:rPr>
-                        <a:t>チサンホテル浜松町</a:t>
+                        <a:t>コートホテル新横浜</a:t>
                       </a:r>
                       <a:endParaRPr lang="en-US" sz="700" dirty="0"/>
                     </a:p>
@@ -25687,7 +24794,7 @@
                             <a:srgbClr val="000000"/>
                           </a:solidFill>
                         </a:rPr>
-                        <a:t>57.5%</a:t>
+                        <a:t>50.8%</a:t>
                       </a:r>
                       <a:endParaRPr lang="en-US" sz="700" dirty="0"/>
                     </a:p>
@@ -25933,7 +25040,7 @@
                             <a:srgbClr val="000000"/>
                           </a:solidFill>
                         </a:rPr>
-                        <a:t>コートホテル新横浜</a:t>
+                        <a:t>チサンホテル浜松町</a:t>
                       </a:r>
                       <a:endParaRPr lang="en-US" sz="700" dirty="0"/>
                     </a:p>
@@ -25994,7 +25101,7 @@
                             <a:srgbClr val="000000"/>
                           </a:solidFill>
                         </a:rPr>
-                        <a:t>7.12</a:t>
+                        <a:t>7.04</a:t>
                       </a:r>
                       <a:endParaRPr lang="en-US" sz="700" dirty="0"/>
                     </a:p>
@@ -26055,7 +25162,7 @@
                             <a:srgbClr val="000000"/>
                           </a:solidFill>
                         </a:rPr>
-                        <a:t>50.8%</a:t>
+                        <a:t>56.6%</a:t>
                       </a:r>
                       <a:endParaRPr lang="en-US" sz="700" dirty="0"/>
                     </a:p>
@@ -26569,7 +25676,7 @@
                 <a:ea typeface="Arial" pitchFamily="34" charset="-122"/>
                 <a:cs typeface="Arial" pitchFamily="34" charset="-120"/>
               </a:rPr>
-              <a:t>106件</a:t>
+              <a:t>105件</a:t>
             </a:r>
             <a:endParaRPr lang="en-US" sz="2800" dirty="0"/>
           </a:p>
@@ -26694,7 +25801,7 @@
                 <a:ea typeface="Arial" pitchFamily="34" charset="-122"/>
                 <a:cs typeface="Arial" pitchFamily="34" charset="-120"/>
               </a:rPr>
-              <a:t>4.4%</a:t>
+              <a:t>4.3%</a:t>
             </a:r>
             <a:endParaRPr lang="en-US" sz="2800" dirty="0"/>
           </a:p>
@@ -27175,7 +26282,7 @@
                             <a:srgbClr val="000000"/>
                           </a:solidFill>
                         </a:rPr>
-                        <a:t>66</a:t>
+                        <a:t>65</a:t>
                       </a:r>
                       <a:endParaRPr lang="en-US" sz="800" dirty="0"/>
                     </a:p>
@@ -29328,7 +28435,7 @@
                             <a:srgbClr val="000000"/>
                           </a:solidFill>
                         </a:rPr>
-                        <a:t>ほこり・塵</a:t>
+                        <a:t>害虫</a:t>
                       </a:r>
                       <a:endParaRPr lang="en-US" sz="800" dirty="0"/>
                     </a:p>
@@ -29574,7 +28681,7 @@
                             <a:srgbClr val="000000"/>
                           </a:solidFill>
                         </a:rPr>
-                        <a:t>害虫</a:t>
+                        <a:t>ほこり・塵</a:t>
                       </a:r>
                       <a:endParaRPr lang="en-US" sz="800" dirty="0"/>
                     </a:p>
@@ -29635,7 +28742,7 @@
                             <a:srgbClr val="000000"/>
                           </a:solidFill>
                         </a:rPr>
-                        <a:t>5</a:t>
+                        <a:t>4</a:t>
                       </a:r>
                       <a:endParaRPr lang="en-US" sz="800" dirty="0"/>
                     </a:p>
@@ -31593,7 +30700,7 @@
                             <a:srgbClr val="000000"/>
                           </a:solidFill>
                         </a:rPr>
-                        <a:t>14</a:t>
+                        <a:t>13</a:t>
                       </a:r>
                       <a:endParaRPr lang="en-US" sz="700" dirty="0"/>
                     </a:p>
@@ -31651,7 +30758,129 @@
                             <a:srgbClr val="E74C3C"/>
                           </a:solidFill>
                         </a:rPr>
-                        <a:t>6</a:t>
+                        <a:t>5</a:t>
+                      </a:r>
+                      <a:endParaRPr lang="en-US" sz="700" dirty="0"/>
+                    </a:p>
+                  </a:txBody>
+                  <a:tcPr marL="91440" marR="91440" marT="45720" marB="45720">
+                    <a:lnL w="6350" cap="flat" cmpd="sng" algn="ctr">
+                      <a:solidFill>
+                        <a:srgbClr val="CCCCCC"/>
+                      </a:solidFill>
+                      <a:prstDash val="solid"/>
+                      <a:round/>
+                      <a:headEnd type="none" w="med" len="med"/>
+                      <a:tailEnd type="none" w="med" len="med"/>
+                    </a:lnL>
+                    <a:lnR w="6350" cap="flat" cmpd="sng" algn="ctr">
+                      <a:solidFill>
+                        <a:srgbClr val="CCCCCC"/>
+                      </a:solidFill>
+                      <a:prstDash val="solid"/>
+                      <a:round/>
+                      <a:headEnd type="none" w="med" len="med"/>
+                      <a:tailEnd type="none" w="med" len="med"/>
+                    </a:lnR>
+                    <a:lnT w="6350" cap="flat" cmpd="sng" algn="ctr">
+                      <a:solidFill>
+                        <a:srgbClr val="CCCCCC"/>
+                      </a:solidFill>
+                      <a:prstDash val="solid"/>
+                      <a:round/>
+                      <a:headEnd type="none" w="med" len="med"/>
+                      <a:tailEnd type="none" w="med" len="med"/>
+                    </a:lnT>
+                    <a:lnB w="6350" cap="flat" cmpd="sng" algn="ctr">
+                      <a:solidFill>
+                        <a:srgbClr val="CCCCCC"/>
+                      </a:solidFill>
+                      <a:prstDash val="solid"/>
+                      <a:round/>
+                      <a:headEnd type="none" w="med" len="med"/>
+                      <a:tailEnd type="none" w="med" len="med"/>
+                    </a:lnB>
+                    <a:solidFill>
+                      <a:srgbClr val="FFE0B2"/>
+                    </a:solidFill>
+                  </a:tcPr>
+                </a:tc>
+                <a:tc>
+                  <a:txBody>
+                    <a:bodyPr/>
+                    <a:lstStyle/>
+                    <a:p>
+                      <a:pPr algn="ctr" indent="0" marL="0">
+                        <a:buNone/>
+                      </a:pPr>
+                      <a:r>
+                        <a:rPr lang="en-US" sz="700" dirty="0">
+                          <a:solidFill>
+                            <a:srgbClr val="333333"/>
+                          </a:solidFill>
+                        </a:rPr>
+                        <a:t>-</a:t>
+                      </a:r>
+                      <a:endParaRPr lang="en-US" sz="700" dirty="0"/>
+                    </a:p>
+                  </a:txBody>
+                  <a:tcPr marL="91440" marR="91440" marT="45720" marB="45720">
+                    <a:lnL w="6350" cap="flat" cmpd="sng" algn="ctr">
+                      <a:solidFill>
+                        <a:srgbClr val="CCCCCC"/>
+                      </a:solidFill>
+                      <a:prstDash val="solid"/>
+                      <a:round/>
+                      <a:headEnd type="none" w="med" len="med"/>
+                      <a:tailEnd type="none" w="med" len="med"/>
+                    </a:lnL>
+                    <a:lnR w="6350" cap="flat" cmpd="sng" algn="ctr">
+                      <a:solidFill>
+                        <a:srgbClr val="CCCCCC"/>
+                      </a:solidFill>
+                      <a:prstDash val="solid"/>
+                      <a:round/>
+                      <a:headEnd type="none" w="med" len="med"/>
+                      <a:tailEnd type="none" w="med" len="med"/>
+                    </a:lnR>
+                    <a:lnT w="6350" cap="flat" cmpd="sng" algn="ctr">
+                      <a:solidFill>
+                        <a:srgbClr val="CCCCCC"/>
+                      </a:solidFill>
+                      <a:prstDash val="solid"/>
+                      <a:round/>
+                      <a:headEnd type="none" w="med" len="med"/>
+                      <a:tailEnd type="none" w="med" len="med"/>
+                    </a:lnT>
+                    <a:lnB w="6350" cap="flat" cmpd="sng" algn="ctr">
+                      <a:solidFill>
+                        <a:srgbClr val="CCCCCC"/>
+                      </a:solidFill>
+                      <a:prstDash val="solid"/>
+                      <a:round/>
+                      <a:headEnd type="none" w="med" len="med"/>
+                      <a:tailEnd type="none" w="med" len="med"/>
+                    </a:lnB>
+                    <a:solidFill>
+                      <a:srgbClr val="FFFFFF"/>
+                    </a:solidFill>
+                  </a:tcPr>
+                </a:tc>
+                <a:tc>
+                  <a:txBody>
+                    <a:bodyPr/>
+                    <a:lstStyle/>
+                    <a:p>
+                      <a:pPr algn="ctr" indent="0" marL="0">
+                        <a:buNone/>
+                      </a:pPr>
+                      <a:r>
+                        <a:rPr lang="en-US" sz="700" dirty="0">
+                          <a:solidFill>
+                            <a:srgbClr val="E74C3C"/>
+                          </a:solidFill>
+                        </a:rPr>
+                        <a:t>8</a:t>
                       </a:r>
                       <a:endParaRPr lang="en-US" sz="700" dirty="0"/>
                     </a:p>
@@ -31770,10 +30999,10 @@
                       <a:r>
                         <a:rPr lang="en-US" sz="700" dirty="0">
                           <a:solidFill>
-                            <a:srgbClr val="E74C3C"/>
+                            <a:srgbClr val="333333"/>
                           </a:solidFill>
                         </a:rPr>
-                        <a:t>8</a:t>
+                        <a:t>1</a:t>
                       </a:r>
                       <a:endParaRPr lang="en-US" sz="700" dirty="0"/>
                     </a:p>
@@ -31816,7 +31045,7 @@
                       <a:tailEnd type="none" w="med" len="med"/>
                     </a:lnB>
                     <a:solidFill>
-                      <a:srgbClr val="FFCDD2"/>
+                      <a:srgbClr val="FFF9C4"/>
                     </a:solidFill>
                   </a:tcPr>
                 </a:tc>
@@ -31881,6 +31110,307 @@
                     </a:solidFill>
                   </a:tcPr>
                 </a:tc>
+              </a:tr>
+              <a:tr h="0">
+                <a:tc>
+                  <a:txBody>
+                    <a:bodyPr/>
+                    <a:lstStyle/>
+                    <a:p>
+                      <a:pPr indent="0" marL="0">
+                        <a:buNone/>
+                      </a:pPr>
+                      <a:r>
+                        <a:rPr lang="en-US" sz="700" b="1" dirty="0">
+                          <a:solidFill>
+                            <a:srgbClr val="000000"/>
+                          </a:solidFill>
+                        </a:rPr>
+                        <a:t>コートホテル新横浜</a:t>
+                      </a:r>
+                      <a:endParaRPr lang="en-US" sz="700" dirty="0"/>
+                    </a:p>
+                  </a:txBody>
+                  <a:tcPr marL="91440" marR="91440" marT="45720" marB="45720">
+                    <a:lnL w="6350" cap="flat" cmpd="sng" algn="ctr">
+                      <a:solidFill>
+                        <a:srgbClr val="CCCCCC"/>
+                      </a:solidFill>
+                      <a:prstDash val="solid"/>
+                      <a:round/>
+                      <a:headEnd type="none" w="med" len="med"/>
+                      <a:tailEnd type="none" w="med" len="med"/>
+                    </a:lnL>
+                    <a:lnR w="6350" cap="flat" cmpd="sng" algn="ctr">
+                      <a:solidFill>
+                        <a:srgbClr val="CCCCCC"/>
+                      </a:solidFill>
+                      <a:prstDash val="solid"/>
+                      <a:round/>
+                      <a:headEnd type="none" w="med" len="med"/>
+                      <a:tailEnd type="none" w="med" len="med"/>
+                    </a:lnR>
+                    <a:lnT w="6350" cap="flat" cmpd="sng" algn="ctr">
+                      <a:solidFill>
+                        <a:srgbClr val="CCCCCC"/>
+                      </a:solidFill>
+                      <a:prstDash val="solid"/>
+                      <a:round/>
+                      <a:headEnd type="none" w="med" len="med"/>
+                      <a:tailEnd type="none" w="med" len="med"/>
+                    </a:lnT>
+                    <a:lnB w="6350" cap="flat" cmpd="sng" algn="ctr">
+                      <a:solidFill>
+                        <a:srgbClr val="CCCCCC"/>
+                      </a:solidFill>
+                      <a:prstDash val="solid"/>
+                      <a:round/>
+                      <a:headEnd type="none" w="med" len="med"/>
+                      <a:tailEnd type="none" w="med" len="med"/>
+                    </a:lnB>
+                  </a:tcPr>
+                </a:tc>
+                <a:tc>
+                  <a:txBody>
+                    <a:bodyPr/>
+                    <a:lstStyle/>
+                    <a:p>
+                      <a:pPr algn="ctr" indent="0" marL="0">
+                        <a:buNone/>
+                      </a:pPr>
+                      <a:r>
+                        <a:rPr lang="en-US" sz="700" b="1" dirty="0">
+                          <a:solidFill>
+                            <a:srgbClr val="000000"/>
+                          </a:solidFill>
+                        </a:rPr>
+                        <a:t>10</a:t>
+                      </a:r>
+                      <a:endParaRPr lang="en-US" sz="700" dirty="0"/>
+                    </a:p>
+                  </a:txBody>
+                  <a:tcPr marL="91440" marR="91440" marT="45720" marB="45720">
+                    <a:lnL w="6350" cap="flat" cmpd="sng" algn="ctr">
+                      <a:solidFill>
+                        <a:srgbClr val="CCCCCC"/>
+                      </a:solidFill>
+                      <a:prstDash val="solid"/>
+                      <a:round/>
+                      <a:headEnd type="none" w="med" len="med"/>
+                      <a:tailEnd type="none" w="med" len="med"/>
+                    </a:lnL>
+                    <a:lnR w="6350" cap="flat" cmpd="sng" algn="ctr">
+                      <a:solidFill>
+                        <a:srgbClr val="CCCCCC"/>
+                      </a:solidFill>
+                      <a:prstDash val="solid"/>
+                      <a:round/>
+                      <a:headEnd type="none" w="med" len="med"/>
+                      <a:tailEnd type="none" w="med" len="med"/>
+                    </a:lnR>
+                    <a:lnT w="6350" cap="flat" cmpd="sng" algn="ctr">
+                      <a:solidFill>
+                        <a:srgbClr val="CCCCCC"/>
+                      </a:solidFill>
+                      <a:prstDash val="solid"/>
+                      <a:round/>
+                      <a:headEnd type="none" w="med" len="med"/>
+                      <a:tailEnd type="none" w="med" len="med"/>
+                    </a:lnT>
+                    <a:lnB w="6350" cap="flat" cmpd="sng" algn="ctr">
+                      <a:solidFill>
+                        <a:srgbClr val="CCCCCC"/>
+                      </a:solidFill>
+                      <a:prstDash val="solid"/>
+                      <a:round/>
+                      <a:headEnd type="none" w="med" len="med"/>
+                      <a:tailEnd type="none" w="med" len="med"/>
+                    </a:lnB>
+                  </a:tcPr>
+                </a:tc>
+                <a:tc>
+                  <a:txBody>
+                    <a:bodyPr/>
+                    <a:lstStyle/>
+                    <a:p>
+                      <a:pPr algn="ctr" indent="0" marL="0">
+                        <a:buNone/>
+                      </a:pPr>
+                      <a:r>
+                        <a:rPr lang="en-US" sz="700" dirty="0">
+                          <a:solidFill>
+                            <a:srgbClr val="E74C3C"/>
+                          </a:solidFill>
+                        </a:rPr>
+                        <a:t>4</a:t>
+                      </a:r>
+                      <a:endParaRPr lang="en-US" sz="700" dirty="0"/>
+                    </a:p>
+                  </a:txBody>
+                  <a:tcPr marL="91440" marR="91440" marT="45720" marB="45720">
+                    <a:lnL w="6350" cap="flat" cmpd="sng" algn="ctr">
+                      <a:solidFill>
+                        <a:srgbClr val="CCCCCC"/>
+                      </a:solidFill>
+                      <a:prstDash val="solid"/>
+                      <a:round/>
+                      <a:headEnd type="none" w="med" len="med"/>
+                      <a:tailEnd type="none" w="med" len="med"/>
+                    </a:lnL>
+                    <a:lnR w="6350" cap="flat" cmpd="sng" algn="ctr">
+                      <a:solidFill>
+                        <a:srgbClr val="CCCCCC"/>
+                      </a:solidFill>
+                      <a:prstDash val="solid"/>
+                      <a:round/>
+                      <a:headEnd type="none" w="med" len="med"/>
+                      <a:tailEnd type="none" w="med" len="med"/>
+                    </a:lnR>
+                    <a:lnT w="6350" cap="flat" cmpd="sng" algn="ctr">
+                      <a:solidFill>
+                        <a:srgbClr val="CCCCCC"/>
+                      </a:solidFill>
+                      <a:prstDash val="solid"/>
+                      <a:round/>
+                      <a:headEnd type="none" w="med" len="med"/>
+                      <a:tailEnd type="none" w="med" len="med"/>
+                    </a:lnT>
+                    <a:lnB w="6350" cap="flat" cmpd="sng" algn="ctr">
+                      <a:solidFill>
+                        <a:srgbClr val="CCCCCC"/>
+                      </a:solidFill>
+                      <a:prstDash val="solid"/>
+                      <a:round/>
+                      <a:headEnd type="none" w="med" len="med"/>
+                      <a:tailEnd type="none" w="med" len="med"/>
+                    </a:lnB>
+                    <a:solidFill>
+                      <a:srgbClr val="FFE0B2"/>
+                    </a:solidFill>
+                  </a:tcPr>
+                </a:tc>
+                <a:tc>
+                  <a:txBody>
+                    <a:bodyPr/>
+                    <a:lstStyle/>
+                    <a:p>
+                      <a:pPr algn="ctr" indent="0" marL="0">
+                        <a:buNone/>
+                      </a:pPr>
+                      <a:r>
+                        <a:rPr lang="en-US" sz="700" dirty="0">
+                          <a:solidFill>
+                            <a:srgbClr val="E74C3C"/>
+                          </a:solidFill>
+                        </a:rPr>
+                        <a:t>3</a:t>
+                      </a:r>
+                      <a:endParaRPr lang="en-US" sz="700" dirty="0"/>
+                    </a:p>
+                  </a:txBody>
+                  <a:tcPr marL="91440" marR="91440" marT="45720" marB="45720">
+                    <a:lnL w="6350" cap="flat" cmpd="sng" algn="ctr">
+                      <a:solidFill>
+                        <a:srgbClr val="CCCCCC"/>
+                      </a:solidFill>
+                      <a:prstDash val="solid"/>
+                      <a:round/>
+                      <a:headEnd type="none" w="med" len="med"/>
+                      <a:tailEnd type="none" w="med" len="med"/>
+                    </a:lnL>
+                    <a:lnR w="6350" cap="flat" cmpd="sng" algn="ctr">
+                      <a:solidFill>
+                        <a:srgbClr val="CCCCCC"/>
+                      </a:solidFill>
+                      <a:prstDash val="solid"/>
+                      <a:round/>
+                      <a:headEnd type="none" w="med" len="med"/>
+                      <a:tailEnd type="none" w="med" len="med"/>
+                    </a:lnR>
+                    <a:lnT w="6350" cap="flat" cmpd="sng" algn="ctr">
+                      <a:solidFill>
+                        <a:srgbClr val="CCCCCC"/>
+                      </a:solidFill>
+                      <a:prstDash val="solid"/>
+                      <a:round/>
+                      <a:headEnd type="none" w="med" len="med"/>
+                      <a:tailEnd type="none" w="med" len="med"/>
+                    </a:lnT>
+                    <a:lnB w="6350" cap="flat" cmpd="sng" algn="ctr">
+                      <a:solidFill>
+                        <a:srgbClr val="CCCCCC"/>
+                      </a:solidFill>
+                      <a:prstDash val="solid"/>
+                      <a:round/>
+                      <a:headEnd type="none" w="med" len="med"/>
+                      <a:tailEnd type="none" w="med" len="med"/>
+                    </a:lnB>
+                    <a:solidFill>
+                      <a:srgbClr val="FFE0B2"/>
+                    </a:solidFill>
+                  </a:tcPr>
+                </a:tc>
+                <a:tc>
+                  <a:txBody>
+                    <a:bodyPr/>
+                    <a:lstStyle/>
+                    <a:p>
+                      <a:pPr algn="ctr" indent="0" marL="0">
+                        <a:buNone/>
+                      </a:pPr>
+                      <a:r>
+                        <a:rPr lang="en-US" sz="700" dirty="0">
+                          <a:solidFill>
+                            <a:srgbClr val="333333"/>
+                          </a:solidFill>
+                        </a:rPr>
+                        <a:t>-</a:t>
+                      </a:r>
+                      <a:endParaRPr lang="en-US" sz="700" dirty="0"/>
+                    </a:p>
+                  </a:txBody>
+                  <a:tcPr marL="91440" marR="91440" marT="45720" marB="45720">
+                    <a:lnL w="6350" cap="flat" cmpd="sng" algn="ctr">
+                      <a:solidFill>
+                        <a:srgbClr val="CCCCCC"/>
+                      </a:solidFill>
+                      <a:prstDash val="solid"/>
+                      <a:round/>
+                      <a:headEnd type="none" w="med" len="med"/>
+                      <a:tailEnd type="none" w="med" len="med"/>
+                    </a:lnL>
+                    <a:lnR w="6350" cap="flat" cmpd="sng" algn="ctr">
+                      <a:solidFill>
+                        <a:srgbClr val="CCCCCC"/>
+                      </a:solidFill>
+                      <a:prstDash val="solid"/>
+                      <a:round/>
+                      <a:headEnd type="none" w="med" len="med"/>
+                      <a:tailEnd type="none" w="med" len="med"/>
+                    </a:lnR>
+                    <a:lnT w="6350" cap="flat" cmpd="sng" algn="ctr">
+                      <a:solidFill>
+                        <a:srgbClr val="CCCCCC"/>
+                      </a:solidFill>
+                      <a:prstDash val="solid"/>
+                      <a:round/>
+                      <a:headEnd type="none" w="med" len="med"/>
+                      <a:tailEnd type="none" w="med" len="med"/>
+                    </a:lnT>
+                    <a:lnB w="6350" cap="flat" cmpd="sng" algn="ctr">
+                      <a:solidFill>
+                        <a:srgbClr val="CCCCCC"/>
+                      </a:solidFill>
+                      <a:prstDash val="solid"/>
+                      <a:round/>
+                      <a:headEnd type="none" w="med" len="med"/>
+                      <a:tailEnd type="none" w="med" len="med"/>
+                    </a:lnB>
+                    <a:solidFill>
+                      <a:srgbClr val="FFFFFF"/>
+                    </a:solidFill>
+                  </a:tcPr>
+                </a:tc>
                 <a:tc>
                   <a:txBody>
                     <a:bodyPr/>
@@ -31896,6 +31426,67 @@
                           </a:solidFill>
                         </a:rPr>
                         <a:t>1</a:t>
+                      </a:r>
+                      <a:endParaRPr lang="en-US" sz="700" dirty="0"/>
+                    </a:p>
+                  </a:txBody>
+                  <a:tcPr marL="91440" marR="91440" marT="45720" marB="45720">
+                    <a:lnL w="6350" cap="flat" cmpd="sng" algn="ctr">
+                      <a:solidFill>
+                        <a:srgbClr val="CCCCCC"/>
+                      </a:solidFill>
+                      <a:prstDash val="solid"/>
+                      <a:round/>
+                      <a:headEnd type="none" w="med" len="med"/>
+                      <a:tailEnd type="none" w="med" len="med"/>
+                    </a:lnL>
+                    <a:lnR w="6350" cap="flat" cmpd="sng" algn="ctr">
+                      <a:solidFill>
+                        <a:srgbClr val="CCCCCC"/>
+                      </a:solidFill>
+                      <a:prstDash val="solid"/>
+                      <a:round/>
+                      <a:headEnd type="none" w="med" len="med"/>
+                      <a:tailEnd type="none" w="med" len="med"/>
+                    </a:lnR>
+                    <a:lnT w="6350" cap="flat" cmpd="sng" algn="ctr">
+                      <a:solidFill>
+                        <a:srgbClr val="CCCCCC"/>
+                      </a:solidFill>
+                      <a:prstDash val="solid"/>
+                      <a:round/>
+                      <a:headEnd type="none" w="med" len="med"/>
+                      <a:tailEnd type="none" w="med" len="med"/>
+                    </a:lnT>
+                    <a:lnB w="6350" cap="flat" cmpd="sng" algn="ctr">
+                      <a:solidFill>
+                        <a:srgbClr val="CCCCCC"/>
+                      </a:solidFill>
+                      <a:prstDash val="solid"/>
+                      <a:round/>
+                      <a:headEnd type="none" w="med" len="med"/>
+                      <a:tailEnd type="none" w="med" len="med"/>
+                    </a:lnB>
+                    <a:solidFill>
+                      <a:srgbClr val="FFF9C4"/>
+                    </a:solidFill>
+                  </a:tcPr>
+                </a:tc>
+                <a:tc>
+                  <a:txBody>
+                    <a:bodyPr/>
+                    <a:lstStyle/>
+                    <a:p>
+                      <a:pPr algn="ctr" indent="0" marL="0">
+                        <a:buNone/>
+                      </a:pPr>
+                      <a:r>
+                        <a:rPr lang="en-US" sz="700" dirty="0">
+                          <a:solidFill>
+                            <a:srgbClr val="333333"/>
+                          </a:solidFill>
+                        </a:rPr>
+                        <a:t>2</a:t>
                       </a:r>
                       <a:endParaRPr lang="en-US" sz="700" dirty="0"/>
                     </a:p>
@@ -32503,490 +32094,6 @@
                             <a:srgbClr val="000000"/>
                           </a:solidFill>
                         </a:rPr>
-                        <a:t>コートホテル新横浜</a:t>
-                      </a:r>
-                      <a:endParaRPr lang="en-US" sz="700" dirty="0"/>
-                    </a:p>
-                  </a:txBody>
-                  <a:tcPr marL="91440" marR="91440" marT="45720" marB="45720">
-                    <a:lnL w="6350" cap="flat" cmpd="sng" algn="ctr">
-                      <a:solidFill>
-                        <a:srgbClr val="CCCCCC"/>
-                      </a:solidFill>
-                      <a:prstDash val="solid"/>
-                      <a:round/>
-                      <a:headEnd type="none" w="med" len="med"/>
-                      <a:tailEnd type="none" w="med" len="med"/>
-                    </a:lnL>
-                    <a:lnR w="6350" cap="flat" cmpd="sng" algn="ctr">
-                      <a:solidFill>
-                        <a:srgbClr val="CCCCCC"/>
-                      </a:solidFill>
-                      <a:prstDash val="solid"/>
-                      <a:round/>
-                      <a:headEnd type="none" w="med" len="med"/>
-                      <a:tailEnd type="none" w="med" len="med"/>
-                    </a:lnR>
-                    <a:lnT w="6350" cap="flat" cmpd="sng" algn="ctr">
-                      <a:solidFill>
-                        <a:srgbClr val="CCCCCC"/>
-                      </a:solidFill>
-                      <a:prstDash val="solid"/>
-                      <a:round/>
-                      <a:headEnd type="none" w="med" len="med"/>
-                      <a:tailEnd type="none" w="med" len="med"/>
-                    </a:lnT>
-                    <a:lnB w="6350" cap="flat" cmpd="sng" algn="ctr">
-                      <a:solidFill>
-                        <a:srgbClr val="CCCCCC"/>
-                      </a:solidFill>
-                      <a:prstDash val="solid"/>
-                      <a:round/>
-                      <a:headEnd type="none" w="med" len="med"/>
-                      <a:tailEnd type="none" w="med" len="med"/>
-                    </a:lnB>
-                  </a:tcPr>
-                </a:tc>
-                <a:tc>
-                  <a:txBody>
-                    <a:bodyPr/>
-                    <a:lstStyle/>
-                    <a:p>
-                      <a:pPr algn="ctr" indent="0" marL="0">
-                        <a:buNone/>
-                      </a:pPr>
-                      <a:r>
-                        <a:rPr lang="en-US" sz="700" b="1" dirty="0">
-                          <a:solidFill>
-                            <a:srgbClr val="000000"/>
-                          </a:solidFill>
-                        </a:rPr>
-                        <a:t>10</a:t>
-                      </a:r>
-                      <a:endParaRPr lang="en-US" sz="700" dirty="0"/>
-                    </a:p>
-                  </a:txBody>
-                  <a:tcPr marL="91440" marR="91440" marT="45720" marB="45720">
-                    <a:lnL w="6350" cap="flat" cmpd="sng" algn="ctr">
-                      <a:solidFill>
-                        <a:srgbClr val="CCCCCC"/>
-                      </a:solidFill>
-                      <a:prstDash val="solid"/>
-                      <a:round/>
-                      <a:headEnd type="none" w="med" len="med"/>
-                      <a:tailEnd type="none" w="med" len="med"/>
-                    </a:lnL>
-                    <a:lnR w="6350" cap="flat" cmpd="sng" algn="ctr">
-                      <a:solidFill>
-                        <a:srgbClr val="CCCCCC"/>
-                      </a:solidFill>
-                      <a:prstDash val="solid"/>
-                      <a:round/>
-                      <a:headEnd type="none" w="med" len="med"/>
-                      <a:tailEnd type="none" w="med" len="med"/>
-                    </a:lnR>
-                    <a:lnT w="6350" cap="flat" cmpd="sng" algn="ctr">
-                      <a:solidFill>
-                        <a:srgbClr val="CCCCCC"/>
-                      </a:solidFill>
-                      <a:prstDash val="solid"/>
-                      <a:round/>
-                      <a:headEnd type="none" w="med" len="med"/>
-                      <a:tailEnd type="none" w="med" len="med"/>
-                    </a:lnT>
-                    <a:lnB w="6350" cap="flat" cmpd="sng" algn="ctr">
-                      <a:solidFill>
-                        <a:srgbClr val="CCCCCC"/>
-                      </a:solidFill>
-                      <a:prstDash val="solid"/>
-                      <a:round/>
-                      <a:headEnd type="none" w="med" len="med"/>
-                      <a:tailEnd type="none" w="med" len="med"/>
-                    </a:lnB>
-                  </a:tcPr>
-                </a:tc>
-                <a:tc>
-                  <a:txBody>
-                    <a:bodyPr/>
-                    <a:lstStyle/>
-                    <a:p>
-                      <a:pPr algn="ctr" indent="0" marL="0">
-                        <a:buNone/>
-                      </a:pPr>
-                      <a:r>
-                        <a:rPr lang="en-US" sz="700" dirty="0">
-                          <a:solidFill>
-                            <a:srgbClr val="E74C3C"/>
-                          </a:solidFill>
-                        </a:rPr>
-                        <a:t>4</a:t>
-                      </a:r>
-                      <a:endParaRPr lang="en-US" sz="700" dirty="0"/>
-                    </a:p>
-                  </a:txBody>
-                  <a:tcPr marL="91440" marR="91440" marT="45720" marB="45720">
-                    <a:lnL w="6350" cap="flat" cmpd="sng" algn="ctr">
-                      <a:solidFill>
-                        <a:srgbClr val="CCCCCC"/>
-                      </a:solidFill>
-                      <a:prstDash val="solid"/>
-                      <a:round/>
-                      <a:headEnd type="none" w="med" len="med"/>
-                      <a:tailEnd type="none" w="med" len="med"/>
-                    </a:lnL>
-                    <a:lnR w="6350" cap="flat" cmpd="sng" algn="ctr">
-                      <a:solidFill>
-                        <a:srgbClr val="CCCCCC"/>
-                      </a:solidFill>
-                      <a:prstDash val="solid"/>
-                      <a:round/>
-                      <a:headEnd type="none" w="med" len="med"/>
-                      <a:tailEnd type="none" w="med" len="med"/>
-                    </a:lnR>
-                    <a:lnT w="6350" cap="flat" cmpd="sng" algn="ctr">
-                      <a:solidFill>
-                        <a:srgbClr val="CCCCCC"/>
-                      </a:solidFill>
-                      <a:prstDash val="solid"/>
-                      <a:round/>
-                      <a:headEnd type="none" w="med" len="med"/>
-                      <a:tailEnd type="none" w="med" len="med"/>
-                    </a:lnT>
-                    <a:lnB w="6350" cap="flat" cmpd="sng" algn="ctr">
-                      <a:solidFill>
-                        <a:srgbClr val="CCCCCC"/>
-                      </a:solidFill>
-                      <a:prstDash val="solid"/>
-                      <a:round/>
-                      <a:headEnd type="none" w="med" len="med"/>
-                      <a:tailEnd type="none" w="med" len="med"/>
-                    </a:lnB>
-                    <a:solidFill>
-                      <a:srgbClr val="FFE0B2"/>
-                    </a:solidFill>
-                  </a:tcPr>
-                </a:tc>
-                <a:tc>
-                  <a:txBody>
-                    <a:bodyPr/>
-                    <a:lstStyle/>
-                    <a:p>
-                      <a:pPr algn="ctr" indent="0" marL="0">
-                        <a:buNone/>
-                      </a:pPr>
-                      <a:r>
-                        <a:rPr lang="en-US" sz="700" dirty="0">
-                          <a:solidFill>
-                            <a:srgbClr val="E74C3C"/>
-                          </a:solidFill>
-                        </a:rPr>
-                        <a:t>3</a:t>
-                      </a:r>
-                      <a:endParaRPr lang="en-US" sz="700" dirty="0"/>
-                    </a:p>
-                  </a:txBody>
-                  <a:tcPr marL="91440" marR="91440" marT="45720" marB="45720">
-                    <a:lnL w="6350" cap="flat" cmpd="sng" algn="ctr">
-                      <a:solidFill>
-                        <a:srgbClr val="CCCCCC"/>
-                      </a:solidFill>
-                      <a:prstDash val="solid"/>
-                      <a:round/>
-                      <a:headEnd type="none" w="med" len="med"/>
-                      <a:tailEnd type="none" w="med" len="med"/>
-                    </a:lnL>
-                    <a:lnR w="6350" cap="flat" cmpd="sng" algn="ctr">
-                      <a:solidFill>
-                        <a:srgbClr val="CCCCCC"/>
-                      </a:solidFill>
-                      <a:prstDash val="solid"/>
-                      <a:round/>
-                      <a:headEnd type="none" w="med" len="med"/>
-                      <a:tailEnd type="none" w="med" len="med"/>
-                    </a:lnR>
-                    <a:lnT w="6350" cap="flat" cmpd="sng" algn="ctr">
-                      <a:solidFill>
-                        <a:srgbClr val="CCCCCC"/>
-                      </a:solidFill>
-                      <a:prstDash val="solid"/>
-                      <a:round/>
-                      <a:headEnd type="none" w="med" len="med"/>
-                      <a:tailEnd type="none" w="med" len="med"/>
-                    </a:lnT>
-                    <a:lnB w="6350" cap="flat" cmpd="sng" algn="ctr">
-                      <a:solidFill>
-                        <a:srgbClr val="CCCCCC"/>
-                      </a:solidFill>
-                      <a:prstDash val="solid"/>
-                      <a:round/>
-                      <a:headEnd type="none" w="med" len="med"/>
-                      <a:tailEnd type="none" w="med" len="med"/>
-                    </a:lnB>
-                    <a:solidFill>
-                      <a:srgbClr val="FFE0B2"/>
-                    </a:solidFill>
-                  </a:tcPr>
-                </a:tc>
-                <a:tc>
-                  <a:txBody>
-                    <a:bodyPr/>
-                    <a:lstStyle/>
-                    <a:p>
-                      <a:pPr algn="ctr" indent="0" marL="0">
-                        <a:buNone/>
-                      </a:pPr>
-                      <a:r>
-                        <a:rPr lang="en-US" sz="700" dirty="0">
-                          <a:solidFill>
-                            <a:srgbClr val="333333"/>
-                          </a:solidFill>
-                        </a:rPr>
-                        <a:t>-</a:t>
-                      </a:r>
-                      <a:endParaRPr lang="en-US" sz="700" dirty="0"/>
-                    </a:p>
-                  </a:txBody>
-                  <a:tcPr marL="91440" marR="91440" marT="45720" marB="45720">
-                    <a:lnL w="6350" cap="flat" cmpd="sng" algn="ctr">
-                      <a:solidFill>
-                        <a:srgbClr val="CCCCCC"/>
-                      </a:solidFill>
-                      <a:prstDash val="solid"/>
-                      <a:round/>
-                      <a:headEnd type="none" w="med" len="med"/>
-                      <a:tailEnd type="none" w="med" len="med"/>
-                    </a:lnL>
-                    <a:lnR w="6350" cap="flat" cmpd="sng" algn="ctr">
-                      <a:solidFill>
-                        <a:srgbClr val="CCCCCC"/>
-                      </a:solidFill>
-                      <a:prstDash val="solid"/>
-                      <a:round/>
-                      <a:headEnd type="none" w="med" len="med"/>
-                      <a:tailEnd type="none" w="med" len="med"/>
-                    </a:lnR>
-                    <a:lnT w="6350" cap="flat" cmpd="sng" algn="ctr">
-                      <a:solidFill>
-                        <a:srgbClr val="CCCCCC"/>
-                      </a:solidFill>
-                      <a:prstDash val="solid"/>
-                      <a:round/>
-                      <a:headEnd type="none" w="med" len="med"/>
-                      <a:tailEnd type="none" w="med" len="med"/>
-                    </a:lnT>
-                    <a:lnB w="6350" cap="flat" cmpd="sng" algn="ctr">
-                      <a:solidFill>
-                        <a:srgbClr val="CCCCCC"/>
-                      </a:solidFill>
-                      <a:prstDash val="solid"/>
-                      <a:round/>
-                      <a:headEnd type="none" w="med" len="med"/>
-                      <a:tailEnd type="none" w="med" len="med"/>
-                    </a:lnB>
-                    <a:solidFill>
-                      <a:srgbClr val="FFFFFF"/>
-                    </a:solidFill>
-                  </a:tcPr>
-                </a:tc>
-                <a:tc>
-                  <a:txBody>
-                    <a:bodyPr/>
-                    <a:lstStyle/>
-                    <a:p>
-                      <a:pPr algn="ctr" indent="0" marL="0">
-                        <a:buNone/>
-                      </a:pPr>
-                      <a:r>
-                        <a:rPr lang="en-US" sz="700" dirty="0">
-                          <a:solidFill>
-                            <a:srgbClr val="333333"/>
-                          </a:solidFill>
-                        </a:rPr>
-                        <a:t>1</a:t>
-                      </a:r>
-                      <a:endParaRPr lang="en-US" sz="700" dirty="0"/>
-                    </a:p>
-                  </a:txBody>
-                  <a:tcPr marL="91440" marR="91440" marT="45720" marB="45720">
-                    <a:lnL w="6350" cap="flat" cmpd="sng" algn="ctr">
-                      <a:solidFill>
-                        <a:srgbClr val="CCCCCC"/>
-                      </a:solidFill>
-                      <a:prstDash val="solid"/>
-                      <a:round/>
-                      <a:headEnd type="none" w="med" len="med"/>
-                      <a:tailEnd type="none" w="med" len="med"/>
-                    </a:lnL>
-                    <a:lnR w="6350" cap="flat" cmpd="sng" algn="ctr">
-                      <a:solidFill>
-                        <a:srgbClr val="CCCCCC"/>
-                      </a:solidFill>
-                      <a:prstDash val="solid"/>
-                      <a:round/>
-                      <a:headEnd type="none" w="med" len="med"/>
-                      <a:tailEnd type="none" w="med" len="med"/>
-                    </a:lnR>
-                    <a:lnT w="6350" cap="flat" cmpd="sng" algn="ctr">
-                      <a:solidFill>
-                        <a:srgbClr val="CCCCCC"/>
-                      </a:solidFill>
-                      <a:prstDash val="solid"/>
-                      <a:round/>
-                      <a:headEnd type="none" w="med" len="med"/>
-                      <a:tailEnd type="none" w="med" len="med"/>
-                    </a:lnT>
-                    <a:lnB w="6350" cap="flat" cmpd="sng" algn="ctr">
-                      <a:solidFill>
-                        <a:srgbClr val="CCCCCC"/>
-                      </a:solidFill>
-                      <a:prstDash val="solid"/>
-                      <a:round/>
-                      <a:headEnd type="none" w="med" len="med"/>
-                      <a:tailEnd type="none" w="med" len="med"/>
-                    </a:lnB>
-                    <a:solidFill>
-                      <a:srgbClr val="FFF9C4"/>
-                    </a:solidFill>
-                  </a:tcPr>
-                </a:tc>
-                <a:tc>
-                  <a:txBody>
-                    <a:bodyPr/>
-                    <a:lstStyle/>
-                    <a:p>
-                      <a:pPr algn="ctr" indent="0" marL="0">
-                        <a:buNone/>
-                      </a:pPr>
-                      <a:r>
-                        <a:rPr lang="en-US" sz="700" dirty="0">
-                          <a:solidFill>
-                            <a:srgbClr val="333333"/>
-                          </a:solidFill>
-                        </a:rPr>
-                        <a:t>2</a:t>
-                      </a:r>
-                      <a:endParaRPr lang="en-US" sz="700" dirty="0"/>
-                    </a:p>
-                  </a:txBody>
-                  <a:tcPr marL="91440" marR="91440" marT="45720" marB="45720">
-                    <a:lnL w="6350" cap="flat" cmpd="sng" algn="ctr">
-                      <a:solidFill>
-                        <a:srgbClr val="CCCCCC"/>
-                      </a:solidFill>
-                      <a:prstDash val="solid"/>
-                      <a:round/>
-                      <a:headEnd type="none" w="med" len="med"/>
-                      <a:tailEnd type="none" w="med" len="med"/>
-                    </a:lnL>
-                    <a:lnR w="6350" cap="flat" cmpd="sng" algn="ctr">
-                      <a:solidFill>
-                        <a:srgbClr val="CCCCCC"/>
-                      </a:solidFill>
-                      <a:prstDash val="solid"/>
-                      <a:round/>
-                      <a:headEnd type="none" w="med" len="med"/>
-                      <a:tailEnd type="none" w="med" len="med"/>
-                    </a:lnR>
-                    <a:lnT w="6350" cap="flat" cmpd="sng" algn="ctr">
-                      <a:solidFill>
-                        <a:srgbClr val="CCCCCC"/>
-                      </a:solidFill>
-                      <a:prstDash val="solid"/>
-                      <a:round/>
-                      <a:headEnd type="none" w="med" len="med"/>
-                      <a:tailEnd type="none" w="med" len="med"/>
-                    </a:lnT>
-                    <a:lnB w="6350" cap="flat" cmpd="sng" algn="ctr">
-                      <a:solidFill>
-                        <a:srgbClr val="CCCCCC"/>
-                      </a:solidFill>
-                      <a:prstDash val="solid"/>
-                      <a:round/>
-                      <a:headEnd type="none" w="med" len="med"/>
-                      <a:tailEnd type="none" w="med" len="med"/>
-                    </a:lnB>
-                    <a:solidFill>
-                      <a:srgbClr val="FFF9C4"/>
-                    </a:solidFill>
-                  </a:tcPr>
-                </a:tc>
-                <a:tc>
-                  <a:txBody>
-                    <a:bodyPr/>
-                    <a:lstStyle/>
-                    <a:p>
-                      <a:pPr algn="ctr" indent="0" marL="0">
-                        <a:buNone/>
-                      </a:pPr>
-                      <a:r>
-                        <a:rPr lang="en-US" sz="700" dirty="0">
-                          <a:solidFill>
-                            <a:srgbClr val="333333"/>
-                          </a:solidFill>
-                        </a:rPr>
-                        <a:t>-</a:t>
-                      </a:r>
-                      <a:endParaRPr lang="en-US" sz="700" dirty="0"/>
-                    </a:p>
-                  </a:txBody>
-                  <a:tcPr marL="91440" marR="91440" marT="45720" marB="45720">
-                    <a:lnL w="6350" cap="flat" cmpd="sng" algn="ctr">
-                      <a:solidFill>
-                        <a:srgbClr val="CCCCCC"/>
-                      </a:solidFill>
-                      <a:prstDash val="solid"/>
-                      <a:round/>
-                      <a:headEnd type="none" w="med" len="med"/>
-                      <a:tailEnd type="none" w="med" len="med"/>
-                    </a:lnL>
-                    <a:lnR w="6350" cap="flat" cmpd="sng" algn="ctr">
-                      <a:solidFill>
-                        <a:srgbClr val="CCCCCC"/>
-                      </a:solidFill>
-                      <a:prstDash val="solid"/>
-                      <a:round/>
-                      <a:headEnd type="none" w="med" len="med"/>
-                      <a:tailEnd type="none" w="med" len="med"/>
-                    </a:lnR>
-                    <a:lnT w="6350" cap="flat" cmpd="sng" algn="ctr">
-                      <a:solidFill>
-                        <a:srgbClr val="CCCCCC"/>
-                      </a:solidFill>
-                      <a:prstDash val="solid"/>
-                      <a:round/>
-                      <a:headEnd type="none" w="med" len="med"/>
-                      <a:tailEnd type="none" w="med" len="med"/>
-                    </a:lnT>
-                    <a:lnB w="6350" cap="flat" cmpd="sng" algn="ctr">
-                      <a:solidFill>
-                        <a:srgbClr val="CCCCCC"/>
-                      </a:solidFill>
-                      <a:prstDash val="solid"/>
-                      <a:round/>
-                      <a:headEnd type="none" w="med" len="med"/>
-                      <a:tailEnd type="none" w="med" len="med"/>
-                    </a:lnB>
-                    <a:solidFill>
-                      <a:srgbClr val="FFFFFF"/>
-                    </a:solidFill>
-                  </a:tcPr>
-                </a:tc>
-              </a:tr>
-              <a:tr h="0">
-                <a:tc>
-                  <a:txBody>
-                    <a:bodyPr/>
-                    <a:lstStyle/>
-                    <a:p>
-                      <a:pPr indent="0" marL="0">
-                        <a:buNone/>
-                      </a:pPr>
-                      <a:r>
-                        <a:rPr lang="en-US" sz="700" b="1" dirty="0">
-                          <a:solidFill>
-                            <a:srgbClr val="000000"/>
-                          </a:solidFill>
-                        </a:rPr>
                         <a:t>コンフォートイン六本木</a:t>
                       </a:r>
                       <a:endParaRPr lang="en-US" sz="700" dirty="0"/>
@@ -35891,7 +34998,7 @@
                             <a:srgbClr val="000000"/>
                           </a:solidFill>
                         </a:rPr>
-                        <a:t>ホテルケヤキゲート東京府中</a:t>
+                        <a:t>アパホテル相模原橋本駅東</a:t>
                       </a:r>
                       <a:endParaRPr lang="en-US" sz="700" dirty="0"/>
                     </a:p>
@@ -35949,7 +35056,7 @@
                             <a:srgbClr val="000000"/>
                           </a:solidFill>
                         </a:rPr>
-                        <a:t>3</a:t>
+                        <a:t>2</a:t>
                       </a:r>
                       <a:endParaRPr lang="en-US" sz="700" dirty="0"/>
                     </a:p>
@@ -36375,7 +35482,7 @@
                             <a:srgbClr val="000000"/>
                           </a:solidFill>
                         </a:rPr>
-                        <a:t>アパホテル相模原橋本駅東</a:t>
+                        <a:t>ホテルケヤキゲート東京府中</a:t>
                       </a:r>
                       <a:endParaRPr lang="en-US" sz="700" dirty="0"/>
                     </a:p>
@@ -36433,7 +35540,7 @@
                             <a:srgbClr val="000000"/>
                           </a:solidFill>
                         </a:rPr>
-                        <a:t>2</a:t>
+                        <a:t>3</a:t>
                       </a:r>
                       <a:endParaRPr lang="en-US" sz="700" dirty="0"/>
                     </a:p>
@@ -39232,7 +38339,7 @@
                 <a:ea typeface="Arial" pitchFamily="34" charset="-122"/>
                 <a:cs typeface="Arial" pitchFamily="34" charset="-120"/>
               </a:rPr>
-              <a:t>コンフォートホテル博多（7.83点）</a:t>
+              <a:t>コンフォートホテル博多（7.88点）</a:t>
             </a:r>
             <a:endParaRPr lang="en-US" sz="800" dirty="0"/>
           </a:p>
@@ -39249,24 +38356,7 @@
                 <a:ea typeface="Arial" pitchFamily="34" charset="-122"/>
                 <a:cs typeface="Arial" pitchFamily="34" charset="-120"/>
               </a:rPr>
-              <a:t>コンフォートホテル横浜関内（7.43点）</a:t>
-            </a:r>
-            <a:endParaRPr lang="en-US" sz="800" dirty="0"/>
-          </a:p>
-          <a:p>
-            <a:pPr indent="0" marL="0">
-              <a:buNone/>
-            </a:pPr>
-            <a:r>
-              <a:rPr lang="en-US" sz="800" dirty="0">
-                <a:solidFill>
-                  <a:srgbClr val="333333"/>
-                </a:solidFill>
-                <a:latin typeface="Arial" pitchFamily="34" charset="0"/>
-                <a:ea typeface="Arial" pitchFamily="34" charset="-122"/>
-                <a:cs typeface="Arial" pitchFamily="34" charset="-120"/>
-              </a:rPr>
-              <a:t>チサンホテル浜松町（7.12点）</a:t>
+              <a:t>コンフォートホテル横浜関内（7.46点）</a:t>
             </a:r>
             <a:endParaRPr lang="en-US" sz="800" dirty="0"/>
           </a:p>
@@ -39284,6 +38374,23 @@
                 <a:cs typeface="Arial" pitchFamily="34" charset="-120"/>
               </a:rPr>
               <a:t>コートホテル新横浜（7.12点）</a:t>
+            </a:r>
+            <a:endParaRPr lang="en-US" sz="800" dirty="0"/>
+          </a:p>
+          <a:p>
+            <a:pPr indent="0" marL="0">
+              <a:buNone/>
+            </a:pPr>
+            <a:r>
+              <a:rPr lang="en-US" sz="800" dirty="0">
+                <a:solidFill>
+                  <a:srgbClr val="333333"/>
+                </a:solidFill>
+                <a:latin typeface="Arial" pitchFamily="34" charset="0"/>
+                <a:ea typeface="Arial" pitchFamily="34" charset="-122"/>
+                <a:cs typeface="Arial" pitchFamily="34" charset="-120"/>
+              </a:rPr>
+              <a:t>チサンホテル浜松町（7.04点）</a:t>
             </a:r>
             <a:endParaRPr lang="en-US" sz="800" dirty="0"/>
           </a:p>
@@ -39369,7 +38476,7 @@
                 <a:ea typeface="Arial" pitchFamily="34" charset="-122"/>
                 <a:cs typeface="Arial" pitchFamily="34" charset="-120"/>
               </a:rPr>
-              <a:t>HIGH（高） (3)</a:t>
+              <a:t>HIGH（高） (2)</a:t>
             </a:r>
             <a:endParaRPr lang="en-US" sz="1100" dirty="0"/>
           </a:p>
@@ -39426,23 +38533,6 @@
                 <a:cs typeface="Arial" pitchFamily="34" charset="-120"/>
               </a:rPr>
               <a:t>ホテルコメント横浜関内（8.88点）</a:t>
-            </a:r>
-            <a:endParaRPr lang="en-US" sz="800" dirty="0"/>
-          </a:p>
-          <a:p>
-            <a:pPr indent="0" marL="0">
-              <a:buNone/>
-            </a:pPr>
-            <a:r>
-              <a:rPr lang="en-US" sz="800" dirty="0">
-                <a:solidFill>
-                  <a:srgbClr val="333333"/>
-                </a:solidFill>
-                <a:latin typeface="Arial" pitchFamily="34" charset="0"/>
-                <a:ea typeface="Arial" pitchFamily="34" charset="-122"/>
-                <a:cs typeface="Arial" pitchFamily="34" charset="-120"/>
-              </a:rPr>
-              <a:t>ダイワロイネットホテル東京大崎（8.85点）</a:t>
             </a:r>
             <a:endParaRPr lang="en-US" sz="800" dirty="0"/>
           </a:p>
@@ -39528,7 +38618,7 @@
                 <a:ea typeface="Arial" pitchFamily="34" charset="-122"/>
                 <a:cs typeface="Arial" pitchFamily="34" charset="-120"/>
               </a:rPr>
-              <a:t>STANDARD（標準） (9)</a:t>
+              <a:t>STANDARD（標準） (10)</a:t>
             </a:r>
             <a:endParaRPr lang="en-US" sz="1100" dirty="0"/>
           </a:p>
@@ -39567,6 +38657,23 @@
                 <a:ea typeface="Arial" pitchFamily="34" charset="-122"/>
                 <a:cs typeface="Arial" pitchFamily="34" charset="-120"/>
               </a:rPr>
+              <a:t>ダイワロイネットホテル東京大崎（8.87点）</a:t>
+            </a:r>
+            <a:endParaRPr lang="en-US" sz="800" dirty="0"/>
+          </a:p>
+          <a:p>
+            <a:pPr indent="0" marL="0">
+              <a:buNone/>
+            </a:pPr>
+            <a:r>
+              <a:rPr lang="en-US" sz="800" dirty="0">
+                <a:solidFill>
+                  <a:srgbClr val="333333"/>
+                </a:solidFill>
+                <a:latin typeface="Arial" pitchFamily="34" charset="0"/>
+                <a:ea typeface="Arial" pitchFamily="34" charset="-122"/>
+                <a:cs typeface="Arial" pitchFamily="34" charset="-120"/>
+              </a:rPr>
               <a:t>川崎日航ホテル（8.72点）</a:t>
             </a:r>
             <a:endParaRPr lang="en-US" sz="800" dirty="0"/>
@@ -39584,7 +38691,7 @@
                 <a:ea typeface="Arial" pitchFamily="34" charset="-122"/>
                 <a:cs typeface="Arial" pitchFamily="34" charset="-120"/>
               </a:rPr>
-              <a:t>ハートンホテル東品川（8.65点）</a:t>
+              <a:t>ハートンホテル東品川（8.59点）</a:t>
             </a:r>
             <a:endParaRPr lang="en-US" sz="800" dirty="0"/>
           </a:p>
@@ -39601,24 +38708,7 @@
                 <a:ea typeface="Arial" pitchFamily="34" charset="-122"/>
                 <a:cs typeface="Arial" pitchFamily="34" charset="-120"/>
               </a:rPr>
-              <a:t>コンフォートホテル成田（8.53点）</a:t>
-            </a:r>
-            <a:endParaRPr lang="en-US" sz="800" dirty="0"/>
-          </a:p>
-          <a:p>
-            <a:pPr indent="0" marL="0">
-              <a:buNone/>
-            </a:pPr>
-            <a:r>
-              <a:rPr lang="en-US" sz="800" dirty="0">
-                <a:solidFill>
-                  <a:srgbClr val="333333"/>
-                </a:solidFill>
-                <a:latin typeface="Arial" pitchFamily="34" charset="0"/>
-                <a:ea typeface="Arial" pitchFamily="34" charset="-122"/>
-                <a:cs typeface="Arial" pitchFamily="34" charset="-120"/>
-              </a:rPr>
-              <a:t>ホテルケヤキゲート東京府中（8.71点）</a:t>
+              <a:t>コンフォートホテル成田（8.5点）</a:t>
             </a:r>
             <a:endParaRPr lang="en-US" sz="800" dirty="0"/>
           </a:p>
@@ -39652,6 +38742,23 @@
                 <a:ea typeface="Arial" pitchFamily="34" charset="-122"/>
                 <a:cs typeface="Arial" pitchFamily="34" charset="-120"/>
               </a:rPr>
+              <a:t>ホテルケヤキゲート東京府中（8.74点）</a:t>
+            </a:r>
+            <a:endParaRPr lang="en-US" sz="800" dirty="0"/>
+          </a:p>
+          <a:p>
+            <a:pPr indent="0" marL="0">
+              <a:buNone/>
+            </a:pPr>
+            <a:r>
+              <a:rPr lang="en-US" sz="800" dirty="0">
+                <a:solidFill>
+                  <a:srgbClr val="333333"/>
+                </a:solidFill>
+                <a:latin typeface="Arial" pitchFamily="34" charset="0"/>
+                <a:ea typeface="Arial" pitchFamily="34" charset="-122"/>
+                <a:cs typeface="Arial" pitchFamily="34" charset="-120"/>
+              </a:rPr>
               <a:t>リッチモンドホテル東京目白（8.72点）</a:t>
             </a:r>
             <a:endParaRPr lang="en-US" sz="800" dirty="0"/>
@@ -39669,7 +38776,7 @@
                 <a:ea typeface="Arial" pitchFamily="34" charset="-122"/>
                 <a:cs typeface="Arial" pitchFamily="34" charset="-120"/>
               </a:rPr>
-              <a:t>変なホテル東京羽田（8.29点）</a:t>
+              <a:t>変なホテル東京羽田（8.28点）</a:t>
             </a:r>
             <a:endParaRPr lang="en-US" sz="800" dirty="0"/>
           </a:p>
@@ -39686,7 +38793,7 @@
                 <a:ea typeface="Arial" pitchFamily="34" charset="-122"/>
                 <a:cs typeface="Arial" pitchFamily="34" charset="-120"/>
               </a:rPr>
-              <a:t>第一イン池袋（9.16点）</a:t>
+              <a:t>第一イン池袋（9.18点）</a:t>
             </a:r>
             <a:endParaRPr lang="en-US" sz="800" dirty="0"/>
           </a:p>
@@ -39703,7 +38810,7 @@
                 <a:ea typeface="Arial" pitchFamily="34" charset="-122"/>
                 <a:cs typeface="Arial" pitchFamily="34" charset="-120"/>
               </a:rPr>
-              <a:t>コンフォートホテルERA東京東神田（8.89点）</a:t>
+              <a:t>コンフォートホテルERA東京東神田（8.9点）</a:t>
             </a:r>
             <a:endParaRPr lang="en-US" sz="800" dirty="0"/>
           </a:p>
@@ -39828,7 +38935,7 @@
                 <a:ea typeface="Arial" pitchFamily="34" charset="-122"/>
                 <a:cs typeface="Arial" pitchFamily="34" charset="-120"/>
               </a:rPr>
-              <a:t>京成リッチモンドホテル東京錦糸町（9.13点）</a:t>
+              <a:t>京成リッチモンドホテル東京錦糸町（9.15点）</a:t>
             </a:r>
             <a:endParaRPr lang="en-US" sz="800" dirty="0"/>
           </a:p>
@@ -39845,7 +38952,7 @@
                 <a:ea typeface="Arial" pitchFamily="34" charset="-122"/>
                 <a:cs typeface="Arial" pitchFamily="34" charset="-120"/>
               </a:rPr>
-              <a:t>コンフォートスイーツ東京ベイ（9.21点）</a:t>
+              <a:t>コンフォートスイーツ東京ベイ（9.2点）</a:t>
             </a:r>
             <a:endParaRPr lang="en-US" sz="800" dirty="0"/>
           </a:p>
@@ -41272,7 +40379,7 @@
                 <a:ea typeface="Arial" pitchFamily="34" charset="-122"/>
                 <a:cs typeface="Arial" pitchFamily="34" charset="-120"/>
               </a:rPr>
-              <a:t>優先度 #2 | 現状 7.83点 → 目標 8.5点</a:t>
+              <a:t>優先度 #2 | 現状 7.88点 → 目標 8.5点</a:t>
             </a:r>
             <a:endParaRPr lang="en-US" sz="1000" dirty="0"/>
           </a:p>
@@ -41397,7 +40504,7 @@
                 <a:ea typeface="Arial" pitchFamily="34" charset="-122"/>
                 <a:cs typeface="Arial" pitchFamily="34" charset="-120"/>
               </a:rPr>
-              <a:t>7.83</a:t>
+              <a:t>7.88</a:t>
             </a:r>
             <a:endParaRPr lang="en-US" sz="2800" dirty="0"/>
           </a:p>
@@ -42478,7 +41585,7 @@
                 <a:ea typeface="Arial" pitchFamily="34" charset="-122"/>
                 <a:cs typeface="Arial" pitchFamily="34" charset="-120"/>
               </a:rPr>
-              <a:t>優先度 #3 | 現状 7.43点 → 目標 8点</a:t>
+              <a:t>優先度 #3 | 現状 7.46点 → 目標 8点</a:t>
             </a:r>
             <a:endParaRPr lang="en-US" sz="1000" dirty="0"/>
           </a:p>
@@ -42603,7 +41710,7 @@
                 <a:ea typeface="Arial" pitchFamily="34" charset="-122"/>
                 <a:cs typeface="Arial" pitchFamily="34" charset="-120"/>
               </a:rPr>
-              <a:t>7.43</a:t>
+              <a:t>7.46</a:t>
             </a:r>
             <a:endParaRPr lang="en-US" sz="2800" dirty="0"/>
           </a:p>
@@ -42850,7 +41957,7 @@
                 <a:ea typeface="Arial" pitchFamily="34" charset="-122"/>
                 <a:cs typeface="Arial" pitchFamily="34" charset="-120"/>
               </a:rPr>
-              <a:t>清掃品質全般: 6件</a:t>
+              <a:t>清掃品質全般: 5件</a:t>
             </a:r>
             <a:endParaRPr lang="en-US" sz="800" dirty="0"/>
           </a:p>
